--- a/img-source/images.pptx
+++ b/img-source/images.pptx
@@ -255,7 +255,7 @@
           <a:p>
             <a:fld id="{D997B5FA-0921-464F-AAE1-844C04324D75}" type="datetimeFigureOut">
               <a:rPr lang="zh-CN" altLang="en-US" smtClean="0"/>
-              <a:t>2026/1/11</a:t>
+              <a:t>2026/1/14</a:t>
             </a:fld>
             <a:endParaRPr lang="zh-CN" altLang="en-US"/>
           </a:p>
@@ -418,7 +418,7 @@
           <a:p>
             <a:fld id="{D997B5FA-0921-464F-AAE1-844C04324D75}" type="datetimeFigureOut">
               <a:rPr lang="zh-CN" altLang="en-US" smtClean="0"/>
-              <a:t>2026/1/11</a:t>
+              <a:t>2026/1/14</a:t>
             </a:fld>
             <a:endParaRPr lang="zh-CN" altLang="en-US"/>
           </a:p>
@@ -591,7 +591,7 @@
           <a:p>
             <a:fld id="{D997B5FA-0921-464F-AAE1-844C04324D75}" type="datetimeFigureOut">
               <a:rPr lang="zh-CN" altLang="en-US" smtClean="0"/>
-              <a:t>2026/1/11</a:t>
+              <a:t>2026/1/14</a:t>
             </a:fld>
             <a:endParaRPr lang="zh-CN" altLang="en-US"/>
           </a:p>
@@ -754,7 +754,7 @@
           <a:p>
             <a:fld id="{D997B5FA-0921-464F-AAE1-844C04324D75}" type="datetimeFigureOut">
               <a:rPr lang="zh-CN" altLang="en-US" smtClean="0"/>
-              <a:t>2026/1/11</a:t>
+              <a:t>2026/1/14</a:t>
             </a:fld>
             <a:endParaRPr lang="zh-CN" altLang="en-US"/>
           </a:p>
@@ -994,7 +994,7 @@
           <a:p>
             <a:fld id="{D997B5FA-0921-464F-AAE1-844C04324D75}" type="datetimeFigureOut">
               <a:rPr lang="zh-CN" altLang="en-US" smtClean="0"/>
-              <a:t>2026/1/11</a:t>
+              <a:t>2026/1/14</a:t>
             </a:fld>
             <a:endParaRPr lang="zh-CN" altLang="en-US"/>
           </a:p>
@@ -1218,7 +1218,7 @@
           <a:p>
             <a:fld id="{D997B5FA-0921-464F-AAE1-844C04324D75}" type="datetimeFigureOut">
               <a:rPr lang="zh-CN" altLang="en-US" smtClean="0"/>
-              <a:t>2026/1/11</a:t>
+              <a:t>2026/1/14</a:t>
             </a:fld>
             <a:endParaRPr lang="zh-CN" altLang="en-US"/>
           </a:p>
@@ -1577,7 +1577,7 @@
           <a:p>
             <a:fld id="{D997B5FA-0921-464F-AAE1-844C04324D75}" type="datetimeFigureOut">
               <a:rPr lang="zh-CN" altLang="en-US" smtClean="0"/>
-              <a:t>2026/1/11</a:t>
+              <a:t>2026/1/14</a:t>
             </a:fld>
             <a:endParaRPr lang="zh-CN" altLang="en-US"/>
           </a:p>
@@ -1689,7 +1689,7 @@
           <a:p>
             <a:fld id="{D997B5FA-0921-464F-AAE1-844C04324D75}" type="datetimeFigureOut">
               <a:rPr lang="zh-CN" altLang="en-US" smtClean="0"/>
-              <a:t>2026/1/11</a:t>
+              <a:t>2026/1/14</a:t>
             </a:fld>
             <a:endParaRPr lang="zh-CN" altLang="en-US"/>
           </a:p>
@@ -1779,7 +1779,7 @@
           <a:p>
             <a:fld id="{D997B5FA-0921-464F-AAE1-844C04324D75}" type="datetimeFigureOut">
               <a:rPr lang="zh-CN" altLang="en-US" smtClean="0"/>
-              <a:t>2026/1/11</a:t>
+              <a:t>2026/1/14</a:t>
             </a:fld>
             <a:endParaRPr lang="zh-CN" altLang="en-US"/>
           </a:p>
@@ -2049,7 +2049,7 @@
           <a:p>
             <a:fld id="{D997B5FA-0921-464F-AAE1-844C04324D75}" type="datetimeFigureOut">
               <a:rPr lang="zh-CN" altLang="en-US" smtClean="0"/>
-              <a:t>2026/1/11</a:t>
+              <a:t>2026/1/14</a:t>
             </a:fld>
             <a:endParaRPr lang="zh-CN" altLang="en-US"/>
           </a:p>
@@ -2296,7 +2296,7 @@
           <a:p>
             <a:fld id="{D997B5FA-0921-464F-AAE1-844C04324D75}" type="datetimeFigureOut">
               <a:rPr lang="zh-CN" altLang="en-US" smtClean="0"/>
-              <a:t>2026/1/11</a:t>
+              <a:t>2026/1/14</a:t>
             </a:fld>
             <a:endParaRPr lang="zh-CN" altLang="en-US"/>
           </a:p>
@@ -2502,7 +2502,7 @@
           <a:p>
             <a:fld id="{D997B5FA-0921-464F-AAE1-844C04324D75}" type="datetimeFigureOut">
               <a:rPr lang="zh-CN" altLang="en-US" smtClean="0"/>
-              <a:t>2026/1/11</a:t>
+              <a:t>2026/1/14</a:t>
             </a:fld>
             <a:endParaRPr lang="zh-CN" altLang="en-US"/>
           </a:p>
@@ -7109,6 +7109,45 @@
           </a:fontRef>
         </p:style>
       </p:cxnSp>
+      <p:pic>
+        <p:nvPicPr>
+          <p:cNvPr id="25" name="图形 24">
+            <a:extLst>
+              <a:ext uri="{FF2B5EF4-FFF2-40B4-BE49-F238E27FC236}">
+                <a16:creationId xmlns:a16="http://schemas.microsoft.com/office/drawing/2014/main" id="{9F2A3866-F5BA-4558-860C-73D0D1C96BC9}"/>
+              </a:ext>
+            </a:extLst>
+          </p:cNvPr>
+          <p:cNvPicPr>
+            <a:picLocks noChangeAspect="1"/>
+          </p:cNvPicPr>
+          <p:nvPr/>
+        </p:nvPicPr>
+        <p:blipFill>
+          <a:blip r:embed="rId20" cstate="print">
+            <a:extLst>
+              <a:ext uri="{28A0092B-C50C-407E-A947-70E740481C1C}">
+                <a14:useLocalDpi xmlns:a14="http://schemas.microsoft.com/office/drawing/2010/main" val="0"/>
+              </a:ext>
+              <a:ext uri="{96DAC541-7B7A-43D3-8B79-37D633B846F1}">
+                <asvg:svgBlip xmlns:asvg="http://schemas.microsoft.com/office/drawing/2016/SVG/main" r:embed="rId21"/>
+              </a:ext>
+            </a:extLst>
+          </a:blip>
+          <a:stretch>
+            <a:fillRect/>
+          </a:stretch>
+        </p:blipFill>
+        <p:spPr>
+          <a:xfrm>
+            <a:off x="5182312" y="2988529"/>
+            <a:ext cx="507027" cy="507027"/>
+          </a:xfrm>
+          <a:prstGeom prst="rect">
+            <a:avLst/>
+          </a:prstGeom>
+        </p:spPr>
+      </p:pic>
     </p:spTree>
     <p:extLst>
       <p:ext uri="{BB962C8B-B14F-4D97-AF65-F5344CB8AC3E}">

--- a/img-source/images.pptx
+++ b/img-source/images.pptx
@@ -5,10 +5,11 @@
     <p:sldMasterId id="2147483648" r:id="rId1"/>
   </p:sldMasterIdLst>
   <p:sldIdLst>
-    <p:sldId id="256" r:id="rId2"/>
-    <p:sldId id="257" r:id="rId3"/>
-    <p:sldId id="258" r:id="rId4"/>
-    <p:sldId id="259" r:id="rId5"/>
+    <p:sldId id="256" r:id="rId3"/>
+    <p:sldId id="257" r:id="rId4"/>
+    <p:sldId id="260" r:id="rId5"/>
+    <p:sldId id="258" r:id="rId6"/>
+    <p:sldId id="259" r:id="rId7"/>
   </p:sldIdLst>
   <p:sldSz cx="12192000" cy="6858000"/>
   <p:notesSz cx="6858000" cy="9144000"/>
@@ -110,12 +111,12 @@
   <p:extLst>
     <p:ext uri="{EFAFB233-063F-42B5-8137-9DF3F51BA10A}">
       <p15:sldGuideLst xmlns:p15="http://schemas.microsoft.com/office/powerpoint/2012/main">
-        <p15:guide id="1" orient="horz" pos="2160" userDrawn="1">
+        <p15:guide id="1" orient="horz" pos="1802" userDrawn="1">
           <p15:clr>
             <a:srgbClr val="A4A3A4"/>
           </p15:clr>
         </p15:guide>
-        <p15:guide id="2" pos="3840" userDrawn="1">
+        <p15:guide id="2" pos="2762" userDrawn="1">
           <p15:clr>
             <a:srgbClr val="A4A3A4"/>
           </p15:clr>
@@ -171,6 +172,7 @@
               <a:rPr lang="zh-CN" altLang="en-US"/>
               <a:t>单击此处编辑母版标题样式</a:t>
             </a:r>
+            <a:endParaRPr lang="zh-CN" altLang="en-US"/>
           </a:p>
         </p:txBody>
       </p:sp>
@@ -235,6 +237,7 @@
               <a:rPr lang="zh-CN" altLang="en-US"/>
               <a:t>单击此处编辑母版副标题样式</a:t>
             </a:r>
+            <a:endParaRPr lang="zh-CN" altLang="en-US"/>
           </a:p>
         </p:txBody>
       </p:sp>
@@ -255,7 +258,6 @@
           <a:p>
             <a:fld id="{D997B5FA-0921-464F-AAE1-844C04324D75}" type="datetimeFigureOut">
               <a:rPr lang="zh-CN" altLang="en-US" smtClean="0"/>
-              <a:t>2026/1/14</a:t>
             </a:fld>
             <a:endParaRPr lang="zh-CN" altLang="en-US"/>
           </a:p>
@@ -297,7 +299,6 @@
           <a:p>
             <a:fld id="{565CE74E-AB26-4998-AD42-012C4C1AD076}" type="slidenum">
               <a:rPr lang="zh-CN" altLang="en-US" smtClean="0"/>
-              <a:t>‹#›</a:t>
             </a:fld>
             <a:endParaRPr lang="zh-CN" altLang="en-US"/>
           </a:p>
@@ -347,6 +348,7 @@
               <a:rPr lang="zh-CN" altLang="en-US"/>
               <a:t>单击此处编辑母版标题样式</a:t>
             </a:r>
+            <a:endParaRPr lang="zh-CN" altLang="en-US"/>
           </a:p>
         </p:txBody>
       </p:sp>
@@ -370,6 +372,7 @@
               <a:rPr lang="zh-CN" altLang="en-US"/>
               <a:t>单击此处编辑母版文本样式</a:t>
             </a:r>
+            <a:endParaRPr lang="zh-CN" altLang="en-US"/>
           </a:p>
           <a:p>
             <a:pPr lvl="1"/>
@@ -377,6 +380,7 @@
               <a:rPr lang="zh-CN" altLang="en-US"/>
               <a:t>第二级</a:t>
             </a:r>
+            <a:endParaRPr lang="zh-CN" altLang="en-US"/>
           </a:p>
           <a:p>
             <a:pPr lvl="2"/>
@@ -384,6 +388,7 @@
               <a:rPr lang="zh-CN" altLang="en-US"/>
               <a:t>第三级</a:t>
             </a:r>
+            <a:endParaRPr lang="zh-CN" altLang="en-US"/>
           </a:p>
           <a:p>
             <a:pPr lvl="3"/>
@@ -391,6 +396,7 @@
               <a:rPr lang="zh-CN" altLang="en-US"/>
               <a:t>第四级</a:t>
             </a:r>
+            <a:endParaRPr lang="zh-CN" altLang="en-US"/>
           </a:p>
           <a:p>
             <a:pPr lvl="4"/>
@@ -398,6 +404,7 @@
               <a:rPr lang="zh-CN" altLang="en-US"/>
               <a:t>第五级</a:t>
             </a:r>
+            <a:endParaRPr lang="zh-CN" altLang="en-US"/>
           </a:p>
         </p:txBody>
       </p:sp>
@@ -418,7 +425,6 @@
           <a:p>
             <a:fld id="{D997B5FA-0921-464F-AAE1-844C04324D75}" type="datetimeFigureOut">
               <a:rPr lang="zh-CN" altLang="en-US" smtClean="0"/>
-              <a:t>2026/1/14</a:t>
             </a:fld>
             <a:endParaRPr lang="zh-CN" altLang="en-US"/>
           </a:p>
@@ -460,7 +466,6 @@
           <a:p>
             <a:fld id="{565CE74E-AB26-4998-AD42-012C4C1AD076}" type="slidenum">
               <a:rPr lang="zh-CN" altLang="en-US" smtClean="0"/>
-              <a:t>‹#›</a:t>
             </a:fld>
             <a:endParaRPr lang="zh-CN" altLang="en-US"/>
           </a:p>
@@ -515,6 +520,7 @@
               <a:rPr lang="zh-CN" altLang="en-US"/>
               <a:t>单击此处编辑母版标题样式</a:t>
             </a:r>
+            <a:endParaRPr lang="zh-CN" altLang="en-US"/>
           </a:p>
         </p:txBody>
       </p:sp>
@@ -543,6 +549,7 @@
               <a:rPr lang="zh-CN" altLang="en-US"/>
               <a:t>单击此处编辑母版文本样式</a:t>
             </a:r>
+            <a:endParaRPr lang="zh-CN" altLang="en-US"/>
           </a:p>
           <a:p>
             <a:pPr lvl="1"/>
@@ -550,6 +557,7 @@
               <a:rPr lang="zh-CN" altLang="en-US"/>
               <a:t>第二级</a:t>
             </a:r>
+            <a:endParaRPr lang="zh-CN" altLang="en-US"/>
           </a:p>
           <a:p>
             <a:pPr lvl="2"/>
@@ -557,6 +565,7 @@
               <a:rPr lang="zh-CN" altLang="en-US"/>
               <a:t>第三级</a:t>
             </a:r>
+            <a:endParaRPr lang="zh-CN" altLang="en-US"/>
           </a:p>
           <a:p>
             <a:pPr lvl="3"/>
@@ -564,6 +573,7 @@
               <a:rPr lang="zh-CN" altLang="en-US"/>
               <a:t>第四级</a:t>
             </a:r>
+            <a:endParaRPr lang="zh-CN" altLang="en-US"/>
           </a:p>
           <a:p>
             <a:pPr lvl="4"/>
@@ -571,6 +581,7 @@
               <a:rPr lang="zh-CN" altLang="en-US"/>
               <a:t>第五级</a:t>
             </a:r>
+            <a:endParaRPr lang="zh-CN" altLang="en-US"/>
           </a:p>
         </p:txBody>
       </p:sp>
@@ -591,7 +602,6 @@
           <a:p>
             <a:fld id="{D997B5FA-0921-464F-AAE1-844C04324D75}" type="datetimeFigureOut">
               <a:rPr lang="zh-CN" altLang="en-US" smtClean="0"/>
-              <a:t>2026/1/14</a:t>
             </a:fld>
             <a:endParaRPr lang="zh-CN" altLang="en-US"/>
           </a:p>
@@ -633,7 +643,6 @@
           <a:p>
             <a:fld id="{565CE74E-AB26-4998-AD42-012C4C1AD076}" type="slidenum">
               <a:rPr lang="zh-CN" altLang="en-US" smtClean="0"/>
-              <a:t>‹#›</a:t>
             </a:fld>
             <a:endParaRPr lang="zh-CN" altLang="en-US"/>
           </a:p>
@@ -683,6 +692,7 @@
               <a:rPr lang="zh-CN" altLang="en-US"/>
               <a:t>单击此处编辑母版标题样式</a:t>
             </a:r>
+            <a:endParaRPr lang="zh-CN" altLang="en-US"/>
           </a:p>
         </p:txBody>
       </p:sp>
@@ -706,6 +716,7 @@
               <a:rPr lang="zh-CN" altLang="en-US"/>
               <a:t>单击此处编辑母版文本样式</a:t>
             </a:r>
+            <a:endParaRPr lang="zh-CN" altLang="en-US"/>
           </a:p>
           <a:p>
             <a:pPr lvl="1"/>
@@ -713,6 +724,7 @@
               <a:rPr lang="zh-CN" altLang="en-US"/>
               <a:t>第二级</a:t>
             </a:r>
+            <a:endParaRPr lang="zh-CN" altLang="en-US"/>
           </a:p>
           <a:p>
             <a:pPr lvl="2"/>
@@ -720,6 +732,7 @@
               <a:rPr lang="zh-CN" altLang="en-US"/>
               <a:t>第三级</a:t>
             </a:r>
+            <a:endParaRPr lang="zh-CN" altLang="en-US"/>
           </a:p>
           <a:p>
             <a:pPr lvl="3"/>
@@ -727,6 +740,7 @@
               <a:rPr lang="zh-CN" altLang="en-US"/>
               <a:t>第四级</a:t>
             </a:r>
+            <a:endParaRPr lang="zh-CN" altLang="en-US"/>
           </a:p>
           <a:p>
             <a:pPr lvl="4"/>
@@ -734,6 +748,7 @@
               <a:rPr lang="zh-CN" altLang="en-US"/>
               <a:t>第五级</a:t>
             </a:r>
+            <a:endParaRPr lang="zh-CN" altLang="en-US"/>
           </a:p>
         </p:txBody>
       </p:sp>
@@ -754,7 +769,6 @@
           <a:p>
             <a:fld id="{D997B5FA-0921-464F-AAE1-844C04324D75}" type="datetimeFigureOut">
               <a:rPr lang="zh-CN" altLang="en-US" smtClean="0"/>
-              <a:t>2026/1/14</a:t>
             </a:fld>
             <a:endParaRPr lang="zh-CN" altLang="en-US"/>
           </a:p>
@@ -796,7 +810,6 @@
           <a:p>
             <a:fld id="{565CE74E-AB26-4998-AD42-012C4C1AD076}" type="slidenum">
               <a:rPr lang="zh-CN" altLang="en-US" smtClean="0"/>
-              <a:t>‹#›</a:t>
             </a:fld>
             <a:endParaRPr lang="zh-CN" altLang="en-US"/>
           </a:p>
@@ -855,6 +868,7 @@
               <a:rPr lang="zh-CN" altLang="en-US"/>
               <a:t>单击此处编辑母版标题样式</a:t>
             </a:r>
+            <a:endParaRPr lang="zh-CN" altLang="en-US"/>
           </a:p>
         </p:txBody>
       </p:sp>
@@ -974,6 +988,7 @@
               <a:rPr lang="zh-CN" altLang="en-US"/>
               <a:t>单击此处编辑母版文本样式</a:t>
             </a:r>
+            <a:endParaRPr lang="zh-CN" altLang="en-US"/>
           </a:p>
         </p:txBody>
       </p:sp>
@@ -994,7 +1009,6 @@
           <a:p>
             <a:fld id="{D997B5FA-0921-464F-AAE1-844C04324D75}" type="datetimeFigureOut">
               <a:rPr lang="zh-CN" altLang="en-US" smtClean="0"/>
-              <a:t>2026/1/14</a:t>
             </a:fld>
             <a:endParaRPr lang="zh-CN" altLang="en-US"/>
           </a:p>
@@ -1036,7 +1050,6 @@
           <a:p>
             <a:fld id="{565CE74E-AB26-4998-AD42-012C4C1AD076}" type="slidenum">
               <a:rPr lang="zh-CN" altLang="en-US" smtClean="0"/>
-              <a:t>‹#›</a:t>
             </a:fld>
             <a:endParaRPr lang="zh-CN" altLang="en-US"/>
           </a:p>
@@ -1086,6 +1099,7 @@
               <a:rPr lang="zh-CN" altLang="en-US"/>
               <a:t>单击此处编辑母版标题样式</a:t>
             </a:r>
+            <a:endParaRPr lang="zh-CN" altLang="en-US"/>
           </a:p>
         </p:txBody>
       </p:sp>
@@ -1114,6 +1128,7 @@
               <a:rPr lang="zh-CN" altLang="en-US"/>
               <a:t>单击此处编辑母版文本样式</a:t>
             </a:r>
+            <a:endParaRPr lang="zh-CN" altLang="en-US"/>
           </a:p>
           <a:p>
             <a:pPr lvl="1"/>
@@ -1121,6 +1136,7 @@
               <a:rPr lang="zh-CN" altLang="en-US"/>
               <a:t>第二级</a:t>
             </a:r>
+            <a:endParaRPr lang="zh-CN" altLang="en-US"/>
           </a:p>
           <a:p>
             <a:pPr lvl="2"/>
@@ -1128,6 +1144,7 @@
               <a:rPr lang="zh-CN" altLang="en-US"/>
               <a:t>第三级</a:t>
             </a:r>
+            <a:endParaRPr lang="zh-CN" altLang="en-US"/>
           </a:p>
           <a:p>
             <a:pPr lvl="3"/>
@@ -1135,6 +1152,7 @@
               <a:rPr lang="zh-CN" altLang="en-US"/>
               <a:t>第四级</a:t>
             </a:r>
+            <a:endParaRPr lang="zh-CN" altLang="en-US"/>
           </a:p>
           <a:p>
             <a:pPr lvl="4"/>
@@ -1142,6 +1160,7 @@
               <a:rPr lang="zh-CN" altLang="en-US"/>
               <a:t>第五级</a:t>
             </a:r>
+            <a:endParaRPr lang="zh-CN" altLang="en-US"/>
           </a:p>
         </p:txBody>
       </p:sp>
@@ -1170,6 +1189,7 @@
               <a:rPr lang="zh-CN" altLang="en-US"/>
               <a:t>单击此处编辑母版文本样式</a:t>
             </a:r>
+            <a:endParaRPr lang="zh-CN" altLang="en-US"/>
           </a:p>
           <a:p>
             <a:pPr lvl="1"/>
@@ -1177,6 +1197,7 @@
               <a:rPr lang="zh-CN" altLang="en-US"/>
               <a:t>第二级</a:t>
             </a:r>
+            <a:endParaRPr lang="zh-CN" altLang="en-US"/>
           </a:p>
           <a:p>
             <a:pPr lvl="2"/>
@@ -1184,6 +1205,7 @@
               <a:rPr lang="zh-CN" altLang="en-US"/>
               <a:t>第三级</a:t>
             </a:r>
+            <a:endParaRPr lang="zh-CN" altLang="en-US"/>
           </a:p>
           <a:p>
             <a:pPr lvl="3"/>
@@ -1191,6 +1213,7 @@
               <a:rPr lang="zh-CN" altLang="en-US"/>
               <a:t>第四级</a:t>
             </a:r>
+            <a:endParaRPr lang="zh-CN" altLang="en-US"/>
           </a:p>
           <a:p>
             <a:pPr lvl="4"/>
@@ -1198,6 +1221,7 @@
               <a:rPr lang="zh-CN" altLang="en-US"/>
               <a:t>第五级</a:t>
             </a:r>
+            <a:endParaRPr lang="zh-CN" altLang="en-US"/>
           </a:p>
         </p:txBody>
       </p:sp>
@@ -1218,7 +1242,6 @@
           <a:p>
             <a:fld id="{D997B5FA-0921-464F-AAE1-844C04324D75}" type="datetimeFigureOut">
               <a:rPr lang="zh-CN" altLang="en-US" smtClean="0"/>
-              <a:t>2026/1/14</a:t>
             </a:fld>
             <a:endParaRPr lang="zh-CN" altLang="en-US"/>
           </a:p>
@@ -1260,7 +1283,6 @@
           <a:p>
             <a:fld id="{565CE74E-AB26-4998-AD42-012C4C1AD076}" type="slidenum">
               <a:rPr lang="zh-CN" altLang="en-US" smtClean="0"/>
-              <a:t>‹#›</a:t>
             </a:fld>
             <a:endParaRPr lang="zh-CN" altLang="en-US"/>
           </a:p>
@@ -1315,6 +1337,7 @@
               <a:rPr lang="zh-CN" altLang="en-US"/>
               <a:t>单击此处编辑母版标题样式</a:t>
             </a:r>
+            <a:endParaRPr lang="zh-CN" altLang="en-US"/>
           </a:p>
         </p:txBody>
       </p:sp>
@@ -1380,6 +1403,7 @@
               <a:rPr lang="zh-CN" altLang="en-US"/>
               <a:t>单击此处编辑母版文本样式</a:t>
             </a:r>
+            <a:endParaRPr lang="zh-CN" altLang="en-US"/>
           </a:p>
         </p:txBody>
       </p:sp>
@@ -1408,6 +1432,7 @@
               <a:rPr lang="zh-CN" altLang="en-US"/>
               <a:t>单击此处编辑母版文本样式</a:t>
             </a:r>
+            <a:endParaRPr lang="zh-CN" altLang="en-US"/>
           </a:p>
           <a:p>
             <a:pPr lvl="1"/>
@@ -1415,6 +1440,7 @@
               <a:rPr lang="zh-CN" altLang="en-US"/>
               <a:t>第二级</a:t>
             </a:r>
+            <a:endParaRPr lang="zh-CN" altLang="en-US"/>
           </a:p>
           <a:p>
             <a:pPr lvl="2"/>
@@ -1422,6 +1448,7 @@
               <a:rPr lang="zh-CN" altLang="en-US"/>
               <a:t>第三级</a:t>
             </a:r>
+            <a:endParaRPr lang="zh-CN" altLang="en-US"/>
           </a:p>
           <a:p>
             <a:pPr lvl="3"/>
@@ -1429,6 +1456,7 @@
               <a:rPr lang="zh-CN" altLang="en-US"/>
               <a:t>第四级</a:t>
             </a:r>
+            <a:endParaRPr lang="zh-CN" altLang="en-US"/>
           </a:p>
           <a:p>
             <a:pPr lvl="4"/>
@@ -1436,6 +1464,7 @@
               <a:rPr lang="zh-CN" altLang="en-US"/>
               <a:t>第五级</a:t>
             </a:r>
+            <a:endParaRPr lang="zh-CN" altLang="en-US"/>
           </a:p>
         </p:txBody>
       </p:sp>
@@ -1501,6 +1530,7 @@
               <a:rPr lang="zh-CN" altLang="en-US"/>
               <a:t>单击此处编辑母版文本样式</a:t>
             </a:r>
+            <a:endParaRPr lang="zh-CN" altLang="en-US"/>
           </a:p>
         </p:txBody>
       </p:sp>
@@ -1529,6 +1559,7 @@
               <a:rPr lang="zh-CN" altLang="en-US"/>
               <a:t>单击此处编辑母版文本样式</a:t>
             </a:r>
+            <a:endParaRPr lang="zh-CN" altLang="en-US"/>
           </a:p>
           <a:p>
             <a:pPr lvl="1"/>
@@ -1536,6 +1567,7 @@
               <a:rPr lang="zh-CN" altLang="en-US"/>
               <a:t>第二级</a:t>
             </a:r>
+            <a:endParaRPr lang="zh-CN" altLang="en-US"/>
           </a:p>
           <a:p>
             <a:pPr lvl="2"/>
@@ -1543,6 +1575,7 @@
               <a:rPr lang="zh-CN" altLang="en-US"/>
               <a:t>第三级</a:t>
             </a:r>
+            <a:endParaRPr lang="zh-CN" altLang="en-US"/>
           </a:p>
           <a:p>
             <a:pPr lvl="3"/>
@@ -1550,6 +1583,7 @@
               <a:rPr lang="zh-CN" altLang="en-US"/>
               <a:t>第四级</a:t>
             </a:r>
+            <a:endParaRPr lang="zh-CN" altLang="en-US"/>
           </a:p>
           <a:p>
             <a:pPr lvl="4"/>
@@ -1557,6 +1591,7 @@
               <a:rPr lang="zh-CN" altLang="en-US"/>
               <a:t>第五级</a:t>
             </a:r>
+            <a:endParaRPr lang="zh-CN" altLang="en-US"/>
           </a:p>
         </p:txBody>
       </p:sp>
@@ -1577,7 +1612,6 @@
           <a:p>
             <a:fld id="{D997B5FA-0921-464F-AAE1-844C04324D75}" type="datetimeFigureOut">
               <a:rPr lang="zh-CN" altLang="en-US" smtClean="0"/>
-              <a:t>2026/1/14</a:t>
             </a:fld>
             <a:endParaRPr lang="zh-CN" altLang="en-US"/>
           </a:p>
@@ -1619,7 +1653,6 @@
           <a:p>
             <a:fld id="{565CE74E-AB26-4998-AD42-012C4C1AD076}" type="slidenum">
               <a:rPr lang="zh-CN" altLang="en-US" smtClean="0"/>
-              <a:t>‹#›</a:t>
             </a:fld>
             <a:endParaRPr lang="zh-CN" altLang="en-US"/>
           </a:p>
@@ -1669,6 +1702,7 @@
               <a:rPr lang="zh-CN" altLang="en-US"/>
               <a:t>单击此处编辑母版标题样式</a:t>
             </a:r>
+            <a:endParaRPr lang="zh-CN" altLang="en-US"/>
           </a:p>
         </p:txBody>
       </p:sp>
@@ -1689,7 +1723,6 @@
           <a:p>
             <a:fld id="{D997B5FA-0921-464F-AAE1-844C04324D75}" type="datetimeFigureOut">
               <a:rPr lang="zh-CN" altLang="en-US" smtClean="0"/>
-              <a:t>2026/1/14</a:t>
             </a:fld>
             <a:endParaRPr lang="zh-CN" altLang="en-US"/>
           </a:p>
@@ -1731,7 +1764,6 @@
           <a:p>
             <a:fld id="{565CE74E-AB26-4998-AD42-012C4C1AD076}" type="slidenum">
               <a:rPr lang="zh-CN" altLang="en-US" smtClean="0"/>
-              <a:t>‹#›</a:t>
             </a:fld>
             <a:endParaRPr lang="zh-CN" altLang="en-US"/>
           </a:p>
@@ -1779,7 +1811,6 @@
           <a:p>
             <a:fld id="{D997B5FA-0921-464F-AAE1-844C04324D75}" type="datetimeFigureOut">
               <a:rPr lang="zh-CN" altLang="en-US" smtClean="0"/>
-              <a:t>2026/1/14</a:t>
             </a:fld>
             <a:endParaRPr lang="zh-CN" altLang="en-US"/>
           </a:p>
@@ -1821,7 +1852,6 @@
           <a:p>
             <a:fld id="{565CE74E-AB26-4998-AD42-012C4C1AD076}" type="slidenum">
               <a:rPr lang="zh-CN" altLang="en-US" smtClean="0"/>
-              <a:t>‹#›</a:t>
             </a:fld>
             <a:endParaRPr lang="zh-CN" altLang="en-US"/>
           </a:p>
@@ -1880,6 +1910,7 @@
               <a:rPr lang="zh-CN" altLang="en-US"/>
               <a:t>单击此处编辑母版标题样式</a:t>
             </a:r>
+            <a:endParaRPr lang="zh-CN" altLang="en-US"/>
           </a:p>
         </p:txBody>
       </p:sp>
@@ -1936,6 +1967,7 @@
               <a:rPr lang="zh-CN" altLang="en-US"/>
               <a:t>单击此处编辑母版文本样式</a:t>
             </a:r>
+            <a:endParaRPr lang="zh-CN" altLang="en-US"/>
           </a:p>
           <a:p>
             <a:pPr lvl="1"/>
@@ -1943,6 +1975,7 @@
               <a:rPr lang="zh-CN" altLang="en-US"/>
               <a:t>第二级</a:t>
             </a:r>
+            <a:endParaRPr lang="zh-CN" altLang="en-US"/>
           </a:p>
           <a:p>
             <a:pPr lvl="2"/>
@@ -1950,6 +1983,7 @@
               <a:rPr lang="zh-CN" altLang="en-US"/>
               <a:t>第三级</a:t>
             </a:r>
+            <a:endParaRPr lang="zh-CN" altLang="en-US"/>
           </a:p>
           <a:p>
             <a:pPr lvl="3"/>
@@ -1957,6 +1991,7 @@
               <a:rPr lang="zh-CN" altLang="en-US"/>
               <a:t>第四级</a:t>
             </a:r>
+            <a:endParaRPr lang="zh-CN" altLang="en-US"/>
           </a:p>
           <a:p>
             <a:pPr lvl="4"/>
@@ -1964,6 +1999,7 @@
               <a:rPr lang="zh-CN" altLang="en-US"/>
               <a:t>第五级</a:t>
             </a:r>
+            <a:endParaRPr lang="zh-CN" altLang="en-US"/>
           </a:p>
         </p:txBody>
       </p:sp>
@@ -2029,6 +2065,7 @@
               <a:rPr lang="zh-CN" altLang="en-US"/>
               <a:t>单击此处编辑母版文本样式</a:t>
             </a:r>
+            <a:endParaRPr lang="zh-CN" altLang="en-US"/>
           </a:p>
         </p:txBody>
       </p:sp>
@@ -2049,7 +2086,6 @@
           <a:p>
             <a:fld id="{D997B5FA-0921-464F-AAE1-844C04324D75}" type="datetimeFigureOut">
               <a:rPr lang="zh-CN" altLang="en-US" smtClean="0"/>
-              <a:t>2026/1/14</a:t>
             </a:fld>
             <a:endParaRPr lang="zh-CN" altLang="en-US"/>
           </a:p>
@@ -2091,7 +2127,6 @@
           <a:p>
             <a:fld id="{565CE74E-AB26-4998-AD42-012C4C1AD076}" type="slidenum">
               <a:rPr lang="zh-CN" altLang="en-US" smtClean="0"/>
-              <a:t>‹#›</a:t>
             </a:fld>
             <a:endParaRPr lang="zh-CN" altLang="en-US"/>
           </a:p>
@@ -2150,6 +2185,7 @@
               <a:rPr lang="zh-CN" altLang="en-US"/>
               <a:t>单击此处编辑母版标题样式</a:t>
             </a:r>
+            <a:endParaRPr lang="zh-CN" altLang="en-US"/>
           </a:p>
         </p:txBody>
       </p:sp>
@@ -2276,6 +2312,7 @@
               <a:rPr lang="zh-CN" altLang="en-US"/>
               <a:t>单击此处编辑母版文本样式</a:t>
             </a:r>
+            <a:endParaRPr lang="zh-CN" altLang="en-US"/>
           </a:p>
         </p:txBody>
       </p:sp>
@@ -2296,7 +2333,6 @@
           <a:p>
             <a:fld id="{D997B5FA-0921-464F-AAE1-844C04324D75}" type="datetimeFigureOut">
               <a:rPr lang="zh-CN" altLang="en-US" smtClean="0"/>
-              <a:t>2026/1/14</a:t>
             </a:fld>
             <a:endParaRPr lang="zh-CN" altLang="en-US"/>
           </a:p>
@@ -2338,7 +2374,6 @@
           <a:p>
             <a:fld id="{565CE74E-AB26-4998-AD42-012C4C1AD076}" type="slidenum">
               <a:rPr lang="zh-CN" altLang="en-US" smtClean="0"/>
-              <a:t>‹#›</a:t>
             </a:fld>
             <a:endParaRPr lang="zh-CN" altLang="en-US"/>
           </a:p>
@@ -2403,6 +2438,7 @@
               <a:rPr lang="zh-CN" altLang="en-US"/>
               <a:t>单击此处编辑母版标题样式</a:t>
             </a:r>
+            <a:endParaRPr lang="zh-CN" altLang="en-US"/>
           </a:p>
         </p:txBody>
       </p:sp>
@@ -2436,6 +2472,7 @@
               <a:rPr lang="zh-CN" altLang="en-US"/>
               <a:t>单击此处编辑母版文本样式</a:t>
             </a:r>
+            <a:endParaRPr lang="zh-CN" altLang="en-US"/>
           </a:p>
           <a:p>
             <a:pPr lvl="1"/>
@@ -2443,6 +2480,7 @@
               <a:rPr lang="zh-CN" altLang="en-US"/>
               <a:t>第二级</a:t>
             </a:r>
+            <a:endParaRPr lang="zh-CN" altLang="en-US"/>
           </a:p>
           <a:p>
             <a:pPr lvl="2"/>
@@ -2450,6 +2488,7 @@
               <a:rPr lang="zh-CN" altLang="en-US"/>
               <a:t>第三级</a:t>
             </a:r>
+            <a:endParaRPr lang="zh-CN" altLang="en-US"/>
           </a:p>
           <a:p>
             <a:pPr lvl="3"/>
@@ -2457,6 +2496,7 @@
               <a:rPr lang="zh-CN" altLang="en-US"/>
               <a:t>第四级</a:t>
             </a:r>
+            <a:endParaRPr lang="zh-CN" altLang="en-US"/>
           </a:p>
           <a:p>
             <a:pPr lvl="4"/>
@@ -2464,6 +2504,7 @@
               <a:rPr lang="zh-CN" altLang="en-US"/>
               <a:t>第五级</a:t>
             </a:r>
+            <a:endParaRPr lang="zh-CN" altLang="en-US"/>
           </a:p>
         </p:txBody>
       </p:sp>
@@ -2502,7 +2543,6 @@
           <a:p>
             <a:fld id="{D997B5FA-0921-464F-AAE1-844C04324D75}" type="datetimeFigureOut">
               <a:rPr lang="zh-CN" altLang="en-US" smtClean="0"/>
-              <a:t>2026/1/14</a:t>
             </a:fld>
             <a:endParaRPr lang="zh-CN" altLang="en-US"/>
           </a:p>
@@ -2580,7 +2620,6 @@
           <a:p>
             <a:fld id="{565CE74E-AB26-4998-AD42-012C4C1AD076}" type="slidenum">
               <a:rPr lang="zh-CN" altLang="en-US" smtClean="0"/>
-              <a:t>‹#›</a:t>
             </a:fld>
             <a:endParaRPr lang="zh-CN" altLang="en-US"/>
           </a:p>
@@ -2904,13 +2943,7 @@
       </p:grpSpPr>
       <p:sp>
         <p:nvSpPr>
-          <p:cNvPr id="43" name="矩形 42">
-            <a:extLst>
-              <a:ext uri="{FF2B5EF4-FFF2-40B4-BE49-F238E27FC236}">
-                <a16:creationId xmlns:a16="http://schemas.microsoft.com/office/drawing/2014/main" id="{78127E82-514E-45A8-87F7-C9F151976A65}"/>
-              </a:ext>
-            </a:extLst>
-          </p:cNvPr>
+          <p:cNvPr id="43" name="矩形 42"/>
           <p:cNvSpPr/>
           <p:nvPr/>
         </p:nvSpPr>
@@ -2956,13 +2989,7 @@
       </p:sp>
       <p:sp>
         <p:nvSpPr>
-          <p:cNvPr id="44" name="矩形: 圆角 43">
-            <a:extLst>
-              <a:ext uri="{FF2B5EF4-FFF2-40B4-BE49-F238E27FC236}">
-                <a16:creationId xmlns:a16="http://schemas.microsoft.com/office/drawing/2014/main" id="{7F058D0B-CC37-47F7-B708-BA1314AA367F}"/>
-              </a:ext>
-            </a:extLst>
-          </p:cNvPr>
+          <p:cNvPr id="44" name="矩形: 圆角 43"/>
           <p:cNvSpPr/>
           <p:nvPr/>
         </p:nvSpPr>
@@ -3008,13 +3035,7 @@
       </p:sp>
       <p:sp>
         <p:nvSpPr>
-          <p:cNvPr id="46" name="矩形 45">
-            <a:extLst>
-              <a:ext uri="{FF2B5EF4-FFF2-40B4-BE49-F238E27FC236}">
-                <a16:creationId xmlns:a16="http://schemas.microsoft.com/office/drawing/2014/main" id="{51640B0E-E954-4D1F-8A60-4CAF391D1578}"/>
-              </a:ext>
-            </a:extLst>
-          </p:cNvPr>
+          <p:cNvPr id="46" name="矩形 45"/>
           <p:cNvSpPr/>
           <p:nvPr/>
         </p:nvSpPr>
@@ -3061,26 +3082,20 @@
       </p:sp>
       <p:pic>
         <p:nvPicPr>
-          <p:cNvPr id="48" name="图形 47">
-            <a:extLst>
-              <a:ext uri="{FF2B5EF4-FFF2-40B4-BE49-F238E27FC236}">
-                <a16:creationId xmlns:a16="http://schemas.microsoft.com/office/drawing/2014/main" id="{F709A72C-46F3-48EF-806F-85EF54184D76}"/>
-              </a:ext>
-            </a:extLst>
-          </p:cNvPr>
+          <p:cNvPr id="48" name="图形 47"/>
           <p:cNvPicPr>
             <a:picLocks noChangeAspect="1"/>
           </p:cNvPicPr>
           <p:nvPr/>
         </p:nvPicPr>
         <p:blipFill>
-          <a:blip r:embed="rId2" cstate="print">
+          <a:blip r:embed="rId1" cstate="print">
             <a:extLst>
               <a:ext uri="{28A0092B-C50C-407E-A947-70E740481C1C}">
                 <a14:useLocalDpi xmlns:a14="http://schemas.microsoft.com/office/drawing/2010/main" val="0"/>
               </a:ext>
               <a:ext uri="{96DAC541-7B7A-43D3-8B79-37D633B846F1}">
-                <asvg:svgBlip xmlns:asvg="http://schemas.microsoft.com/office/drawing/2016/SVG/main" r:embed="rId3"/>
+                <asvg:svgBlip xmlns:asvg="http://schemas.microsoft.com/office/drawing/2016/SVG/main" r:embed="rId2"/>
               </a:ext>
             </a:extLst>
           </a:blip>
@@ -3100,26 +3115,20 @@
       </p:pic>
       <p:pic>
         <p:nvPicPr>
-          <p:cNvPr id="50" name="图形 49">
-            <a:extLst>
-              <a:ext uri="{FF2B5EF4-FFF2-40B4-BE49-F238E27FC236}">
-                <a16:creationId xmlns:a16="http://schemas.microsoft.com/office/drawing/2014/main" id="{0E13A7F8-5FCA-4D79-AA2B-75093CA1BFA3}"/>
-              </a:ext>
-            </a:extLst>
-          </p:cNvPr>
+          <p:cNvPr id="50" name="图形 49"/>
           <p:cNvPicPr>
             <a:picLocks noChangeAspect="1"/>
           </p:cNvPicPr>
           <p:nvPr/>
         </p:nvPicPr>
         <p:blipFill>
-          <a:blip r:embed="rId4" cstate="print">
+          <a:blip r:embed="rId3" cstate="print">
             <a:extLst>
               <a:ext uri="{28A0092B-C50C-407E-A947-70E740481C1C}">
                 <a14:useLocalDpi xmlns:a14="http://schemas.microsoft.com/office/drawing/2010/main" val="0"/>
               </a:ext>
               <a:ext uri="{96DAC541-7B7A-43D3-8B79-37D633B846F1}">
-                <asvg:svgBlip xmlns:asvg="http://schemas.microsoft.com/office/drawing/2016/SVG/main" r:embed="rId5"/>
+                <asvg:svgBlip xmlns:asvg="http://schemas.microsoft.com/office/drawing/2016/SVG/main" r:embed="rId4"/>
               </a:ext>
             </a:extLst>
           </a:blip>
@@ -3139,26 +3148,20 @@
       </p:pic>
       <p:pic>
         <p:nvPicPr>
-          <p:cNvPr id="52" name="图形 51">
-            <a:extLst>
-              <a:ext uri="{FF2B5EF4-FFF2-40B4-BE49-F238E27FC236}">
-                <a16:creationId xmlns:a16="http://schemas.microsoft.com/office/drawing/2014/main" id="{903E4567-98FB-4436-968B-209CCB897362}"/>
-              </a:ext>
-            </a:extLst>
-          </p:cNvPr>
+          <p:cNvPr id="52" name="图形 51"/>
           <p:cNvPicPr>
             <a:picLocks noChangeAspect="1"/>
           </p:cNvPicPr>
           <p:nvPr/>
         </p:nvPicPr>
         <p:blipFill>
-          <a:blip r:embed="rId6" cstate="print">
+          <a:blip r:embed="rId5" cstate="print">
             <a:extLst>
               <a:ext uri="{28A0092B-C50C-407E-A947-70E740481C1C}">
                 <a14:useLocalDpi xmlns:a14="http://schemas.microsoft.com/office/drawing/2010/main" val="0"/>
               </a:ext>
               <a:ext uri="{96DAC541-7B7A-43D3-8B79-37D633B846F1}">
-                <asvg:svgBlip xmlns:asvg="http://schemas.microsoft.com/office/drawing/2016/SVG/main" r:embed="rId7"/>
+                <asvg:svgBlip xmlns:asvg="http://schemas.microsoft.com/office/drawing/2016/SVG/main" r:embed="rId6"/>
               </a:ext>
             </a:extLst>
           </a:blip>
@@ -3178,26 +3181,20 @@
       </p:pic>
       <p:pic>
         <p:nvPicPr>
-          <p:cNvPr id="54" name="图形 53">
-            <a:extLst>
-              <a:ext uri="{FF2B5EF4-FFF2-40B4-BE49-F238E27FC236}">
-                <a16:creationId xmlns:a16="http://schemas.microsoft.com/office/drawing/2014/main" id="{972A4141-7370-4B6F-BE63-F326393C3C21}"/>
-              </a:ext>
-            </a:extLst>
-          </p:cNvPr>
+          <p:cNvPr id="54" name="图形 53"/>
           <p:cNvPicPr>
             <a:picLocks noChangeAspect="1"/>
           </p:cNvPicPr>
           <p:nvPr/>
         </p:nvPicPr>
         <p:blipFill>
-          <a:blip r:embed="rId8" cstate="print">
+          <a:blip r:embed="rId7" cstate="print">
             <a:extLst>
               <a:ext uri="{28A0092B-C50C-407E-A947-70E740481C1C}">
                 <a14:useLocalDpi xmlns:a14="http://schemas.microsoft.com/office/drawing/2010/main" val="0"/>
               </a:ext>
               <a:ext uri="{96DAC541-7B7A-43D3-8B79-37D633B846F1}">
-                <asvg:svgBlip xmlns:asvg="http://schemas.microsoft.com/office/drawing/2016/SVG/main" r:embed="rId9"/>
+                <asvg:svgBlip xmlns:asvg="http://schemas.microsoft.com/office/drawing/2016/SVG/main" r:embed="rId8"/>
               </a:ext>
             </a:extLst>
           </a:blip>
@@ -3217,26 +3214,20 @@
       </p:pic>
       <p:pic>
         <p:nvPicPr>
-          <p:cNvPr id="56" name="图形 55">
-            <a:extLst>
-              <a:ext uri="{FF2B5EF4-FFF2-40B4-BE49-F238E27FC236}">
-                <a16:creationId xmlns:a16="http://schemas.microsoft.com/office/drawing/2014/main" id="{B4CEEAB4-1F2A-41FE-8874-A5FC7E1B5CA2}"/>
-              </a:ext>
-            </a:extLst>
-          </p:cNvPr>
+          <p:cNvPr id="56" name="图形 55"/>
           <p:cNvPicPr>
             <a:picLocks noChangeAspect="1"/>
           </p:cNvPicPr>
           <p:nvPr/>
         </p:nvPicPr>
         <p:blipFill>
-          <a:blip r:embed="rId10" cstate="print">
+          <a:blip r:embed="rId9" cstate="print">
             <a:extLst>
               <a:ext uri="{28A0092B-C50C-407E-A947-70E740481C1C}">
                 <a14:useLocalDpi xmlns:a14="http://schemas.microsoft.com/office/drawing/2010/main" val="0"/>
               </a:ext>
               <a:ext uri="{96DAC541-7B7A-43D3-8B79-37D633B846F1}">
-                <asvg:svgBlip xmlns:asvg="http://schemas.microsoft.com/office/drawing/2016/SVG/main" r:embed="rId11"/>
+                <asvg:svgBlip xmlns:asvg="http://schemas.microsoft.com/office/drawing/2016/SVG/main" r:embed="rId10"/>
               </a:ext>
             </a:extLst>
           </a:blip>
@@ -3256,26 +3247,20 @@
       </p:pic>
       <p:pic>
         <p:nvPicPr>
-          <p:cNvPr id="58" name="图形 57">
-            <a:extLst>
-              <a:ext uri="{FF2B5EF4-FFF2-40B4-BE49-F238E27FC236}">
-                <a16:creationId xmlns:a16="http://schemas.microsoft.com/office/drawing/2014/main" id="{E7D1E321-67B7-4F9E-88C5-8DD0EEFDB141}"/>
-              </a:ext>
-            </a:extLst>
-          </p:cNvPr>
+          <p:cNvPr id="58" name="图形 57"/>
           <p:cNvPicPr>
             <a:picLocks noChangeAspect="1"/>
           </p:cNvPicPr>
           <p:nvPr/>
         </p:nvPicPr>
         <p:blipFill>
-          <a:blip r:embed="rId12" cstate="print">
+          <a:blip r:embed="rId11" cstate="print">
             <a:extLst>
               <a:ext uri="{28A0092B-C50C-407E-A947-70E740481C1C}">
                 <a14:useLocalDpi xmlns:a14="http://schemas.microsoft.com/office/drawing/2010/main" val="0"/>
               </a:ext>
               <a:ext uri="{96DAC541-7B7A-43D3-8B79-37D633B846F1}">
-                <asvg:svgBlip xmlns:asvg="http://schemas.microsoft.com/office/drawing/2016/SVG/main" r:embed="rId13"/>
+                <asvg:svgBlip xmlns:asvg="http://schemas.microsoft.com/office/drawing/2016/SVG/main" r:embed="rId12"/>
               </a:ext>
             </a:extLst>
           </a:blip>
@@ -3295,26 +3280,20 @@
       </p:pic>
       <p:pic>
         <p:nvPicPr>
-          <p:cNvPr id="60" name="图形 59">
-            <a:extLst>
-              <a:ext uri="{FF2B5EF4-FFF2-40B4-BE49-F238E27FC236}">
-                <a16:creationId xmlns:a16="http://schemas.microsoft.com/office/drawing/2014/main" id="{99189C37-471A-485F-8C3C-9876ED266831}"/>
-              </a:ext>
-            </a:extLst>
-          </p:cNvPr>
+          <p:cNvPr id="60" name="图形 59"/>
           <p:cNvPicPr>
             <a:picLocks noChangeAspect="1"/>
           </p:cNvPicPr>
           <p:nvPr/>
         </p:nvPicPr>
         <p:blipFill>
-          <a:blip r:embed="rId14" cstate="print">
+          <a:blip r:embed="rId13" cstate="print">
             <a:extLst>
               <a:ext uri="{28A0092B-C50C-407E-A947-70E740481C1C}">
                 <a14:useLocalDpi xmlns:a14="http://schemas.microsoft.com/office/drawing/2010/main" val="0"/>
               </a:ext>
               <a:ext uri="{96DAC541-7B7A-43D3-8B79-37D633B846F1}">
-                <asvg:svgBlip xmlns:asvg="http://schemas.microsoft.com/office/drawing/2016/SVG/main" r:embed="rId15"/>
+                <asvg:svgBlip xmlns:asvg="http://schemas.microsoft.com/office/drawing/2016/SVG/main" r:embed="rId14"/>
               </a:ext>
             </a:extLst>
           </a:blip>
@@ -3334,26 +3313,20 @@
       </p:pic>
       <p:pic>
         <p:nvPicPr>
-          <p:cNvPr id="62" name="图形 61">
-            <a:extLst>
-              <a:ext uri="{FF2B5EF4-FFF2-40B4-BE49-F238E27FC236}">
-                <a16:creationId xmlns:a16="http://schemas.microsoft.com/office/drawing/2014/main" id="{6011EAF7-D0B2-4347-A0D0-726CDFA8C2B8}"/>
-              </a:ext>
-            </a:extLst>
-          </p:cNvPr>
+          <p:cNvPr id="62" name="图形 61"/>
           <p:cNvPicPr>
             <a:picLocks noChangeAspect="1"/>
           </p:cNvPicPr>
           <p:nvPr/>
         </p:nvPicPr>
         <p:blipFill>
-          <a:blip r:embed="rId16" cstate="print">
+          <a:blip r:embed="rId15" cstate="print">
             <a:extLst>
               <a:ext uri="{28A0092B-C50C-407E-A947-70E740481C1C}">
                 <a14:useLocalDpi xmlns:a14="http://schemas.microsoft.com/office/drawing/2010/main" val="0"/>
               </a:ext>
               <a:ext uri="{96DAC541-7B7A-43D3-8B79-37D633B846F1}">
-                <asvg:svgBlip xmlns:asvg="http://schemas.microsoft.com/office/drawing/2016/SVG/main" r:embed="rId17"/>
+                <asvg:svgBlip xmlns:asvg="http://schemas.microsoft.com/office/drawing/2016/SVG/main" r:embed="rId16"/>
               </a:ext>
             </a:extLst>
           </a:blip>
@@ -3373,26 +3346,20 @@
       </p:pic>
       <p:pic>
         <p:nvPicPr>
-          <p:cNvPr id="64" name="图形 63">
-            <a:extLst>
-              <a:ext uri="{FF2B5EF4-FFF2-40B4-BE49-F238E27FC236}">
-                <a16:creationId xmlns:a16="http://schemas.microsoft.com/office/drawing/2014/main" id="{1E67C488-00A4-49F1-8DB5-6952233487B4}"/>
-              </a:ext>
-            </a:extLst>
-          </p:cNvPr>
+          <p:cNvPr id="64" name="图形 63"/>
           <p:cNvPicPr>
             <a:picLocks noChangeAspect="1"/>
           </p:cNvPicPr>
           <p:nvPr/>
         </p:nvPicPr>
         <p:blipFill>
-          <a:blip r:embed="rId18" cstate="print">
+          <a:blip r:embed="rId17" cstate="print">
             <a:extLst>
               <a:ext uri="{28A0092B-C50C-407E-A947-70E740481C1C}">
                 <a14:useLocalDpi xmlns:a14="http://schemas.microsoft.com/office/drawing/2010/main" val="0"/>
               </a:ext>
               <a:ext uri="{96DAC541-7B7A-43D3-8B79-37D633B846F1}">
-                <asvg:svgBlip xmlns:asvg="http://schemas.microsoft.com/office/drawing/2016/SVG/main" r:embed="rId19"/>
+                <asvg:svgBlip xmlns:asvg="http://schemas.microsoft.com/office/drawing/2016/SVG/main" r:embed="rId18"/>
               </a:ext>
             </a:extLst>
           </a:blip>
@@ -3412,26 +3379,20 @@
       </p:pic>
       <p:pic>
         <p:nvPicPr>
-          <p:cNvPr id="66" name="图形 65">
-            <a:extLst>
-              <a:ext uri="{FF2B5EF4-FFF2-40B4-BE49-F238E27FC236}">
-                <a16:creationId xmlns:a16="http://schemas.microsoft.com/office/drawing/2014/main" id="{2CB17BE4-65F4-4DDC-AB38-AF6E8F1E378E}"/>
-              </a:ext>
-            </a:extLst>
-          </p:cNvPr>
+          <p:cNvPr id="66" name="图形 65"/>
           <p:cNvPicPr>
             <a:picLocks noChangeAspect="1"/>
           </p:cNvPicPr>
           <p:nvPr/>
         </p:nvPicPr>
         <p:blipFill>
-          <a:blip r:embed="rId20" cstate="print">
+          <a:blip r:embed="rId19" cstate="print">
             <a:extLst>
               <a:ext uri="{28A0092B-C50C-407E-A947-70E740481C1C}">
                 <a14:useLocalDpi xmlns:a14="http://schemas.microsoft.com/office/drawing/2010/main" val="0"/>
               </a:ext>
               <a:ext uri="{96DAC541-7B7A-43D3-8B79-37D633B846F1}">
-                <asvg:svgBlip xmlns:asvg="http://schemas.microsoft.com/office/drawing/2016/SVG/main" r:embed="rId21"/>
+                <asvg:svgBlip xmlns:asvg="http://schemas.microsoft.com/office/drawing/2016/SVG/main" r:embed="rId20"/>
               </a:ext>
             </a:extLst>
           </a:blip>
@@ -3451,26 +3412,20 @@
       </p:pic>
       <p:pic>
         <p:nvPicPr>
-          <p:cNvPr id="68" name="图形 67">
-            <a:extLst>
-              <a:ext uri="{FF2B5EF4-FFF2-40B4-BE49-F238E27FC236}">
-                <a16:creationId xmlns:a16="http://schemas.microsoft.com/office/drawing/2014/main" id="{75B7FBF3-5E40-43C4-B42A-BD6B14F32D8A}"/>
-              </a:ext>
-            </a:extLst>
-          </p:cNvPr>
+          <p:cNvPr id="68" name="图形 67"/>
           <p:cNvPicPr>
             <a:picLocks noChangeAspect="1"/>
           </p:cNvPicPr>
           <p:nvPr/>
         </p:nvPicPr>
         <p:blipFill>
-          <a:blip r:embed="rId22" cstate="print">
+          <a:blip r:embed="rId21" cstate="print">
             <a:extLst>
               <a:ext uri="{28A0092B-C50C-407E-A947-70E740481C1C}">
                 <a14:useLocalDpi xmlns:a14="http://schemas.microsoft.com/office/drawing/2010/main" val="0"/>
               </a:ext>
               <a:ext uri="{96DAC541-7B7A-43D3-8B79-37D633B846F1}">
-                <asvg:svgBlip xmlns:asvg="http://schemas.microsoft.com/office/drawing/2016/SVG/main" r:embed="rId23"/>
+                <asvg:svgBlip xmlns:asvg="http://schemas.microsoft.com/office/drawing/2016/SVG/main" r:embed="rId22"/>
               </a:ext>
             </a:extLst>
           </a:blip>
@@ -3490,26 +3445,20 @@
       </p:pic>
       <p:pic>
         <p:nvPicPr>
-          <p:cNvPr id="70" name="图形 69">
-            <a:extLst>
-              <a:ext uri="{FF2B5EF4-FFF2-40B4-BE49-F238E27FC236}">
-                <a16:creationId xmlns:a16="http://schemas.microsoft.com/office/drawing/2014/main" id="{B38A511F-93C9-45F3-9C2F-86277DF1DBA3}"/>
-              </a:ext>
-            </a:extLst>
-          </p:cNvPr>
+          <p:cNvPr id="70" name="图形 69"/>
           <p:cNvPicPr>
             <a:picLocks noChangeAspect="1"/>
           </p:cNvPicPr>
           <p:nvPr/>
         </p:nvPicPr>
         <p:blipFill>
-          <a:blip r:embed="rId24" cstate="print">
+          <a:blip r:embed="rId23" cstate="print">
             <a:extLst>
               <a:ext uri="{28A0092B-C50C-407E-A947-70E740481C1C}">
                 <a14:useLocalDpi xmlns:a14="http://schemas.microsoft.com/office/drawing/2010/main" val="0"/>
               </a:ext>
               <a:ext uri="{96DAC541-7B7A-43D3-8B79-37D633B846F1}">
-                <asvg:svgBlip xmlns:asvg="http://schemas.microsoft.com/office/drawing/2016/SVG/main" r:embed="rId25"/>
+                <asvg:svgBlip xmlns:asvg="http://schemas.microsoft.com/office/drawing/2016/SVG/main" r:embed="rId24"/>
               </a:ext>
             </a:extLst>
           </a:blip>
@@ -3529,26 +3478,20 @@
       </p:pic>
       <p:pic>
         <p:nvPicPr>
-          <p:cNvPr id="72" name="图形 71">
-            <a:extLst>
-              <a:ext uri="{FF2B5EF4-FFF2-40B4-BE49-F238E27FC236}">
-                <a16:creationId xmlns:a16="http://schemas.microsoft.com/office/drawing/2014/main" id="{83214B05-CE6D-40B9-9607-EE22E3FB21A4}"/>
-              </a:ext>
-            </a:extLst>
-          </p:cNvPr>
+          <p:cNvPr id="72" name="图形 71"/>
           <p:cNvPicPr>
             <a:picLocks noChangeAspect="1"/>
           </p:cNvPicPr>
           <p:nvPr/>
         </p:nvPicPr>
         <p:blipFill>
-          <a:blip r:embed="rId26" cstate="print">
+          <a:blip r:embed="rId25" cstate="print">
             <a:extLst>
               <a:ext uri="{28A0092B-C50C-407E-A947-70E740481C1C}">
                 <a14:useLocalDpi xmlns:a14="http://schemas.microsoft.com/office/drawing/2010/main" val="0"/>
               </a:ext>
               <a:ext uri="{96DAC541-7B7A-43D3-8B79-37D633B846F1}">
-                <asvg:svgBlip xmlns:asvg="http://schemas.microsoft.com/office/drawing/2016/SVG/main" r:embed="rId27"/>
+                <asvg:svgBlip xmlns:asvg="http://schemas.microsoft.com/office/drawing/2016/SVG/main" r:embed="rId26"/>
               </a:ext>
             </a:extLst>
           </a:blip>
@@ -3568,26 +3511,20 @@
       </p:pic>
       <p:pic>
         <p:nvPicPr>
-          <p:cNvPr id="74" name="图形 73">
-            <a:extLst>
-              <a:ext uri="{FF2B5EF4-FFF2-40B4-BE49-F238E27FC236}">
-                <a16:creationId xmlns:a16="http://schemas.microsoft.com/office/drawing/2014/main" id="{65E3B1CB-2B52-4E61-B0EB-47453F91C360}"/>
-              </a:ext>
-            </a:extLst>
-          </p:cNvPr>
+          <p:cNvPr id="74" name="图形 73"/>
           <p:cNvPicPr>
             <a:picLocks noChangeAspect="1"/>
           </p:cNvPicPr>
           <p:nvPr/>
         </p:nvPicPr>
         <p:blipFill>
-          <a:blip r:embed="rId28" cstate="print">
+          <a:blip r:embed="rId27" cstate="print">
             <a:extLst>
               <a:ext uri="{28A0092B-C50C-407E-A947-70E740481C1C}">
                 <a14:useLocalDpi xmlns:a14="http://schemas.microsoft.com/office/drawing/2010/main" val="0"/>
               </a:ext>
               <a:ext uri="{96DAC541-7B7A-43D3-8B79-37D633B846F1}">
-                <asvg:svgBlip xmlns:asvg="http://schemas.microsoft.com/office/drawing/2016/SVG/main" r:embed="rId29"/>
+                <asvg:svgBlip xmlns:asvg="http://schemas.microsoft.com/office/drawing/2016/SVG/main" r:embed="rId28"/>
               </a:ext>
             </a:extLst>
           </a:blip>
@@ -3607,26 +3544,20 @@
       </p:pic>
       <p:pic>
         <p:nvPicPr>
-          <p:cNvPr id="76" name="图形 75">
-            <a:extLst>
-              <a:ext uri="{FF2B5EF4-FFF2-40B4-BE49-F238E27FC236}">
-                <a16:creationId xmlns:a16="http://schemas.microsoft.com/office/drawing/2014/main" id="{10F235AD-DDF0-413D-A163-1200AA5AD044}"/>
-              </a:ext>
-            </a:extLst>
-          </p:cNvPr>
+          <p:cNvPr id="76" name="图形 75"/>
           <p:cNvPicPr>
             <a:picLocks noChangeAspect="1"/>
           </p:cNvPicPr>
           <p:nvPr/>
         </p:nvPicPr>
         <p:blipFill>
-          <a:blip r:embed="rId30" cstate="print">
+          <a:blip r:embed="rId29" cstate="print">
             <a:extLst>
               <a:ext uri="{28A0092B-C50C-407E-A947-70E740481C1C}">
                 <a14:useLocalDpi xmlns:a14="http://schemas.microsoft.com/office/drawing/2010/main" val="0"/>
               </a:ext>
               <a:ext uri="{96DAC541-7B7A-43D3-8B79-37D633B846F1}">
-                <asvg:svgBlip xmlns:asvg="http://schemas.microsoft.com/office/drawing/2016/SVG/main" r:embed="rId31"/>
+                <asvg:svgBlip xmlns:asvg="http://schemas.microsoft.com/office/drawing/2016/SVG/main" r:embed="rId30"/>
               </a:ext>
             </a:extLst>
           </a:blip>
@@ -3646,16 +3577,8 @@
       </p:pic>
       <p:cxnSp>
         <p:nvCxnSpPr>
-          <p:cNvPr id="77" name="直接连接符 76">
-            <a:extLst>
-              <a:ext uri="{FF2B5EF4-FFF2-40B4-BE49-F238E27FC236}">
-                <a16:creationId xmlns:a16="http://schemas.microsoft.com/office/drawing/2014/main" id="{91AE917B-3FAD-476F-8961-019BF79C5DE9}"/>
-              </a:ext>
-            </a:extLst>
-          </p:cNvPr>
-          <p:cNvCxnSpPr>
-            <a:cxnSpLocks/>
-          </p:cNvCxnSpPr>
+          <p:cNvPr id="77" name="直接连接符 76"/>
+          <p:cNvCxnSpPr/>
           <p:nvPr/>
         </p:nvCxnSpPr>
         <p:spPr>
@@ -3690,16 +3613,8 @@
       </p:cxnSp>
       <p:cxnSp>
         <p:nvCxnSpPr>
-          <p:cNvPr id="78" name="直接连接符 77">
-            <a:extLst>
-              <a:ext uri="{FF2B5EF4-FFF2-40B4-BE49-F238E27FC236}">
-                <a16:creationId xmlns:a16="http://schemas.microsoft.com/office/drawing/2014/main" id="{0ED997FD-F973-4CAD-99C5-D84883D99F37}"/>
-              </a:ext>
-            </a:extLst>
-          </p:cNvPr>
-          <p:cNvCxnSpPr>
-            <a:cxnSpLocks/>
-          </p:cNvCxnSpPr>
+          <p:cNvPr id="78" name="直接连接符 77"/>
+          <p:cNvCxnSpPr/>
           <p:nvPr/>
         </p:nvCxnSpPr>
         <p:spPr>
@@ -3734,13 +3649,7 @@
       </p:cxnSp>
       <p:grpSp>
         <p:nvGrpSpPr>
-          <p:cNvPr id="81" name="组合 80">
-            <a:extLst>
-              <a:ext uri="{FF2B5EF4-FFF2-40B4-BE49-F238E27FC236}">
-                <a16:creationId xmlns:a16="http://schemas.microsoft.com/office/drawing/2014/main" id="{345F753E-86DB-46BD-996E-5F55BC765A6C}"/>
-              </a:ext>
-            </a:extLst>
-          </p:cNvPr>
+          <p:cNvPr id="81" name="组合 80"/>
           <p:cNvGrpSpPr>
             <a:grpSpLocks noChangeAspect="1"/>
           </p:cNvGrpSpPr>
@@ -3756,13 +3665,7 @@
         </p:grpSpPr>
         <p:sp>
           <p:nvSpPr>
-            <p:cNvPr id="82" name="矩形: 圆角 81">
-              <a:extLst>
-                <a:ext uri="{FF2B5EF4-FFF2-40B4-BE49-F238E27FC236}">
-                  <a16:creationId xmlns:a16="http://schemas.microsoft.com/office/drawing/2014/main" id="{4431B7EF-222B-4EBC-9952-2526C7A46FD9}"/>
-                </a:ext>
-              </a:extLst>
-            </p:cNvPr>
+            <p:cNvPr id="82" name="矩形: 圆角 81"/>
             <p:cNvSpPr/>
             <p:nvPr/>
           </p:nvSpPr>
@@ -3810,13 +3713,7 @@
         </p:sp>
         <p:sp>
           <p:nvSpPr>
-            <p:cNvPr id="83" name="矩形: 圆角 82">
-              <a:extLst>
-                <a:ext uri="{FF2B5EF4-FFF2-40B4-BE49-F238E27FC236}">
-                  <a16:creationId xmlns:a16="http://schemas.microsoft.com/office/drawing/2014/main" id="{9381083B-47A1-448E-B3B1-8F33D7BF399E}"/>
-                </a:ext>
-              </a:extLst>
-            </p:cNvPr>
+            <p:cNvPr id="83" name="矩形: 圆角 82"/>
             <p:cNvSpPr/>
             <p:nvPr/>
           </p:nvSpPr>
@@ -3864,13 +3761,7 @@
         </p:sp>
         <p:sp>
           <p:nvSpPr>
-            <p:cNvPr id="84" name="矩形: 圆角 83">
-              <a:extLst>
-                <a:ext uri="{FF2B5EF4-FFF2-40B4-BE49-F238E27FC236}">
-                  <a16:creationId xmlns:a16="http://schemas.microsoft.com/office/drawing/2014/main" id="{79FE7576-14E9-48BD-94D3-742DBA44FDD5}"/>
-                </a:ext>
-              </a:extLst>
-            </p:cNvPr>
+            <p:cNvPr id="84" name="矩形: 圆角 83"/>
             <p:cNvSpPr/>
             <p:nvPr/>
           </p:nvSpPr>
@@ -3918,13 +3809,7 @@
         </p:sp>
         <p:sp>
           <p:nvSpPr>
-            <p:cNvPr id="85" name="矩形: 圆角 84">
-              <a:extLst>
-                <a:ext uri="{FF2B5EF4-FFF2-40B4-BE49-F238E27FC236}">
-                  <a16:creationId xmlns:a16="http://schemas.microsoft.com/office/drawing/2014/main" id="{C3ACBF8A-771D-47A5-8370-D248465BB4C9}"/>
-                </a:ext>
-              </a:extLst>
-            </p:cNvPr>
+            <p:cNvPr id="85" name="矩形: 圆角 84"/>
             <p:cNvSpPr/>
             <p:nvPr/>
           </p:nvSpPr>
@@ -3973,26 +3858,20 @@
       </p:grpSp>
       <p:pic>
         <p:nvPicPr>
-          <p:cNvPr id="87" name="图形 86">
-            <a:extLst>
-              <a:ext uri="{FF2B5EF4-FFF2-40B4-BE49-F238E27FC236}">
-                <a16:creationId xmlns:a16="http://schemas.microsoft.com/office/drawing/2014/main" id="{08D8EFF5-30EC-4177-AECA-192E23612231}"/>
-              </a:ext>
-            </a:extLst>
-          </p:cNvPr>
+          <p:cNvPr id="87" name="图形 86"/>
           <p:cNvPicPr>
             <a:picLocks noChangeAspect="1"/>
           </p:cNvPicPr>
           <p:nvPr/>
         </p:nvPicPr>
         <p:blipFill>
-          <a:blip r:embed="rId32" cstate="print">
+          <a:blip r:embed="rId31" cstate="print">
             <a:extLst>
               <a:ext uri="{28A0092B-C50C-407E-A947-70E740481C1C}">
                 <a14:useLocalDpi xmlns:a14="http://schemas.microsoft.com/office/drawing/2010/main" val="0"/>
               </a:ext>
               <a:ext uri="{96DAC541-7B7A-43D3-8B79-37D633B846F1}">
-                <asvg:svgBlip xmlns:asvg="http://schemas.microsoft.com/office/drawing/2016/SVG/main" r:embed="rId33"/>
+                <asvg:svgBlip xmlns:asvg="http://schemas.microsoft.com/office/drawing/2016/SVG/main" r:embed="rId32"/>
               </a:ext>
             </a:extLst>
           </a:blip>
@@ -4012,26 +3891,20 @@
       </p:pic>
       <p:pic>
         <p:nvPicPr>
-          <p:cNvPr id="89" name="图形 88">
-            <a:extLst>
-              <a:ext uri="{FF2B5EF4-FFF2-40B4-BE49-F238E27FC236}">
-                <a16:creationId xmlns:a16="http://schemas.microsoft.com/office/drawing/2014/main" id="{55D532EC-2887-4A8D-9D24-348A1910FA65}"/>
-              </a:ext>
-            </a:extLst>
-          </p:cNvPr>
+          <p:cNvPr id="89" name="图形 88"/>
           <p:cNvPicPr>
             <a:picLocks noChangeAspect="1"/>
           </p:cNvPicPr>
           <p:nvPr/>
         </p:nvPicPr>
         <p:blipFill>
-          <a:blip r:embed="rId34" cstate="print">
+          <a:blip r:embed="rId33" cstate="print">
             <a:extLst>
               <a:ext uri="{28A0092B-C50C-407E-A947-70E740481C1C}">
                 <a14:useLocalDpi xmlns:a14="http://schemas.microsoft.com/office/drawing/2010/main" val="0"/>
               </a:ext>
               <a:ext uri="{96DAC541-7B7A-43D3-8B79-37D633B846F1}">
-                <asvg:svgBlip xmlns:asvg="http://schemas.microsoft.com/office/drawing/2016/SVG/main" r:embed="rId35"/>
+                <asvg:svgBlip xmlns:asvg="http://schemas.microsoft.com/office/drawing/2016/SVG/main" r:embed="rId34"/>
               </a:ext>
             </a:extLst>
           </a:blip>
@@ -4051,23 +3924,17 @@
       </p:pic>
       <p:pic>
         <p:nvPicPr>
-          <p:cNvPr id="90" name="图片 27" descr="浏览器">
-            <a:extLst>
-              <a:ext uri="{FF2B5EF4-FFF2-40B4-BE49-F238E27FC236}">
-                <a16:creationId xmlns:a16="http://schemas.microsoft.com/office/drawing/2014/main" id="{09197C0F-A9DB-4A32-BF85-27194108DC33}"/>
-              </a:ext>
-            </a:extLst>
-          </p:cNvPr>
+          <p:cNvPr id="90" name="图片 27" descr="浏览器"/>
           <p:cNvPicPr>
             <a:picLocks noChangeAspect="1"/>
           </p:cNvPicPr>
           <p:nvPr/>
         </p:nvPicPr>
         <p:blipFill>
-          <a:blip r:embed="rId36">
+          <a:blip r:embed="rId35">
             <a:extLst>
               <a:ext uri="{96DAC541-7B7A-43D3-8B79-37D633B846F1}">
-                <asvg:svgBlip xmlns:asvg="http://schemas.microsoft.com/office/drawing/2016/SVG/main" r:embed="rId37"/>
+                <asvg:svgBlip xmlns:asvg="http://schemas.microsoft.com/office/drawing/2016/SVG/main" r:embed="rId36"/>
               </a:ext>
             </a:extLst>
           </a:blip>
@@ -4087,26 +3954,20 @@
       </p:pic>
       <p:pic>
         <p:nvPicPr>
-          <p:cNvPr id="95" name="图形 94">
-            <a:extLst>
-              <a:ext uri="{FF2B5EF4-FFF2-40B4-BE49-F238E27FC236}">
-                <a16:creationId xmlns:a16="http://schemas.microsoft.com/office/drawing/2014/main" id="{D1C7CCB9-B439-47DB-B470-91D8FF54DBD8}"/>
-              </a:ext>
-            </a:extLst>
-          </p:cNvPr>
+          <p:cNvPr id="95" name="图形 94"/>
           <p:cNvPicPr>
             <a:picLocks noChangeAspect="1"/>
           </p:cNvPicPr>
           <p:nvPr/>
         </p:nvPicPr>
         <p:blipFill>
-          <a:blip r:embed="rId38">
+          <a:blip r:embed="rId37">
             <a:extLst>
               <a:ext uri="{28A0092B-C50C-407E-A947-70E740481C1C}">
                 <a14:useLocalDpi xmlns:a14="http://schemas.microsoft.com/office/drawing/2010/main" val="0"/>
               </a:ext>
               <a:ext uri="{96DAC541-7B7A-43D3-8B79-37D633B846F1}">
-                <asvg:svgBlip xmlns:asvg="http://schemas.microsoft.com/office/drawing/2016/SVG/main" r:embed="rId39"/>
+                <asvg:svgBlip xmlns:asvg="http://schemas.microsoft.com/office/drawing/2016/SVG/main" r:embed="rId38"/>
               </a:ext>
             </a:extLst>
           </a:blip>
@@ -4125,11 +3986,6 @@
         </p:spPr>
       </p:pic>
     </p:spTree>
-    <p:extLst>
-      <p:ext uri="{BB962C8B-B14F-4D97-AF65-F5344CB8AC3E}">
-        <p14:creationId xmlns:p14="http://schemas.microsoft.com/office/powerpoint/2010/main" val="3429436817"/>
-      </p:ext>
-    </p:extLst>
   </p:cSld>
   <p:clrMapOvr>
     <a:masterClrMapping/>
@@ -4156,26 +4012,20 @@
       </p:grpSpPr>
       <p:pic>
         <p:nvPicPr>
-          <p:cNvPr id="5" name="图形 4">
-            <a:extLst>
-              <a:ext uri="{FF2B5EF4-FFF2-40B4-BE49-F238E27FC236}">
-                <a16:creationId xmlns:a16="http://schemas.microsoft.com/office/drawing/2014/main" id="{BB9D3B68-A8D6-44CD-8B81-6ED116E58AA1}"/>
-              </a:ext>
-            </a:extLst>
-          </p:cNvPr>
+          <p:cNvPr id="5" name="图形 4"/>
           <p:cNvPicPr>
             <a:picLocks noChangeAspect="1"/>
           </p:cNvPicPr>
           <p:nvPr/>
         </p:nvPicPr>
         <p:blipFill>
-          <a:blip r:embed="rId2" cstate="print">
+          <a:blip r:embed="rId1" cstate="print">
             <a:extLst>
               <a:ext uri="{28A0092B-C50C-407E-A947-70E740481C1C}">
                 <a14:useLocalDpi xmlns:a14="http://schemas.microsoft.com/office/drawing/2010/main" val="0"/>
               </a:ext>
               <a:ext uri="{96DAC541-7B7A-43D3-8B79-37D633B846F1}">
-                <asvg:svgBlip xmlns:asvg="http://schemas.microsoft.com/office/drawing/2016/SVG/main" r:embed="rId3"/>
+                <asvg:svgBlip xmlns:asvg="http://schemas.microsoft.com/office/drawing/2016/SVG/main" r:embed="rId2"/>
               </a:ext>
             </a:extLst>
           </a:blip>
@@ -4195,26 +4045,20 @@
       </p:pic>
       <p:pic>
         <p:nvPicPr>
-          <p:cNvPr id="7" name="图形 6">
-            <a:extLst>
-              <a:ext uri="{FF2B5EF4-FFF2-40B4-BE49-F238E27FC236}">
-                <a16:creationId xmlns:a16="http://schemas.microsoft.com/office/drawing/2014/main" id="{75385AB8-939E-44DA-ACDB-7031E32663CD}"/>
-              </a:ext>
-            </a:extLst>
-          </p:cNvPr>
+          <p:cNvPr id="7" name="图形 6"/>
           <p:cNvPicPr>
             <a:picLocks noChangeAspect="1"/>
           </p:cNvPicPr>
           <p:nvPr/>
         </p:nvPicPr>
         <p:blipFill>
-          <a:blip r:embed="rId4" cstate="print">
+          <a:blip r:embed="rId3" cstate="print">
             <a:extLst>
               <a:ext uri="{28A0092B-C50C-407E-A947-70E740481C1C}">
                 <a14:useLocalDpi xmlns:a14="http://schemas.microsoft.com/office/drawing/2010/main" val="0"/>
               </a:ext>
               <a:ext uri="{96DAC541-7B7A-43D3-8B79-37D633B846F1}">
-                <asvg:svgBlip xmlns:asvg="http://schemas.microsoft.com/office/drawing/2016/SVG/main" r:embed="rId5"/>
+                <asvg:svgBlip xmlns:asvg="http://schemas.microsoft.com/office/drawing/2016/SVG/main" r:embed="rId4"/>
               </a:ext>
             </a:extLst>
           </a:blip>
@@ -4234,13 +4078,7 @@
       </p:pic>
       <p:sp>
         <p:nvSpPr>
-          <p:cNvPr id="10" name="矩形 9">
-            <a:extLst>
-              <a:ext uri="{FF2B5EF4-FFF2-40B4-BE49-F238E27FC236}">
-                <a16:creationId xmlns:a16="http://schemas.microsoft.com/office/drawing/2014/main" id="{F44B072C-BABD-4291-96B5-5770CF184958}"/>
-              </a:ext>
-            </a:extLst>
-          </p:cNvPr>
+          <p:cNvPr id="10" name="矩形 9"/>
           <p:cNvSpPr/>
           <p:nvPr/>
         </p:nvSpPr>
@@ -4287,26 +4125,20 @@
       </p:sp>
       <p:pic>
         <p:nvPicPr>
-          <p:cNvPr id="11" name="图形 10">
-            <a:extLst>
-              <a:ext uri="{FF2B5EF4-FFF2-40B4-BE49-F238E27FC236}">
-                <a16:creationId xmlns:a16="http://schemas.microsoft.com/office/drawing/2014/main" id="{B92E4E53-D55A-4799-A765-82D43E0C8FD6}"/>
-              </a:ext>
-            </a:extLst>
-          </p:cNvPr>
+          <p:cNvPr id="11" name="图形 10"/>
           <p:cNvPicPr>
             <a:picLocks noChangeAspect="1"/>
           </p:cNvPicPr>
           <p:nvPr/>
         </p:nvPicPr>
         <p:blipFill>
-          <a:blip r:embed="rId6" cstate="print">
+          <a:blip r:embed="rId5" cstate="print">
             <a:extLst>
               <a:ext uri="{28A0092B-C50C-407E-A947-70E740481C1C}">
                 <a14:useLocalDpi xmlns:a14="http://schemas.microsoft.com/office/drawing/2010/main" val="0"/>
               </a:ext>
               <a:ext uri="{96DAC541-7B7A-43D3-8B79-37D633B846F1}">
-                <asvg:svgBlip xmlns:asvg="http://schemas.microsoft.com/office/drawing/2016/SVG/main" r:embed="rId7"/>
+                <asvg:svgBlip xmlns:asvg="http://schemas.microsoft.com/office/drawing/2016/SVG/main" r:embed="rId6"/>
               </a:ext>
             </a:extLst>
           </a:blip>
@@ -4326,26 +4158,20 @@
       </p:pic>
       <p:pic>
         <p:nvPicPr>
-          <p:cNvPr id="12" name="图形 11">
-            <a:extLst>
-              <a:ext uri="{FF2B5EF4-FFF2-40B4-BE49-F238E27FC236}">
-                <a16:creationId xmlns:a16="http://schemas.microsoft.com/office/drawing/2014/main" id="{C06C01B9-3380-4991-8630-4C02F80A7B96}"/>
-              </a:ext>
-            </a:extLst>
-          </p:cNvPr>
+          <p:cNvPr id="12" name="图形 11"/>
           <p:cNvPicPr>
             <a:picLocks noChangeAspect="1"/>
           </p:cNvPicPr>
           <p:nvPr/>
         </p:nvPicPr>
         <p:blipFill>
-          <a:blip r:embed="rId8" cstate="print">
+          <a:blip r:embed="rId7" cstate="print">
             <a:extLst>
               <a:ext uri="{28A0092B-C50C-407E-A947-70E740481C1C}">
                 <a14:useLocalDpi xmlns:a14="http://schemas.microsoft.com/office/drawing/2010/main" val="0"/>
               </a:ext>
               <a:ext uri="{96DAC541-7B7A-43D3-8B79-37D633B846F1}">
-                <asvg:svgBlip xmlns:asvg="http://schemas.microsoft.com/office/drawing/2016/SVG/main" r:embed="rId9"/>
+                <asvg:svgBlip xmlns:asvg="http://schemas.microsoft.com/office/drawing/2016/SVG/main" r:embed="rId8"/>
               </a:ext>
             </a:extLst>
           </a:blip>
@@ -4365,26 +4191,20 @@
       </p:pic>
       <p:pic>
         <p:nvPicPr>
-          <p:cNvPr id="13" name="图形 12">
-            <a:extLst>
-              <a:ext uri="{FF2B5EF4-FFF2-40B4-BE49-F238E27FC236}">
-                <a16:creationId xmlns:a16="http://schemas.microsoft.com/office/drawing/2014/main" id="{D52C92ED-B761-45CD-B8C6-CEE6CA25D9BE}"/>
-              </a:ext>
-            </a:extLst>
-          </p:cNvPr>
+          <p:cNvPr id="13" name="图形 12"/>
           <p:cNvPicPr>
             <a:picLocks noChangeAspect="1"/>
           </p:cNvPicPr>
           <p:nvPr/>
         </p:nvPicPr>
         <p:blipFill>
-          <a:blip r:embed="rId10" cstate="print">
+          <a:blip r:embed="rId9" cstate="print">
             <a:extLst>
               <a:ext uri="{28A0092B-C50C-407E-A947-70E740481C1C}">
                 <a14:useLocalDpi xmlns:a14="http://schemas.microsoft.com/office/drawing/2010/main" val="0"/>
               </a:ext>
               <a:ext uri="{96DAC541-7B7A-43D3-8B79-37D633B846F1}">
-                <asvg:svgBlip xmlns:asvg="http://schemas.microsoft.com/office/drawing/2016/SVG/main" r:embed="rId11"/>
+                <asvg:svgBlip xmlns:asvg="http://schemas.microsoft.com/office/drawing/2016/SVG/main" r:embed="rId10"/>
               </a:ext>
             </a:extLst>
           </a:blip>
@@ -4404,26 +4224,20 @@
       </p:pic>
       <p:pic>
         <p:nvPicPr>
-          <p:cNvPr id="14" name="图形 13">
-            <a:extLst>
-              <a:ext uri="{FF2B5EF4-FFF2-40B4-BE49-F238E27FC236}">
-                <a16:creationId xmlns:a16="http://schemas.microsoft.com/office/drawing/2014/main" id="{95F0369A-BC2F-49E8-A2CB-8394A2E4E8B3}"/>
-              </a:ext>
-            </a:extLst>
-          </p:cNvPr>
+          <p:cNvPr id="14" name="图形 13"/>
           <p:cNvPicPr>
             <a:picLocks noChangeAspect="1"/>
           </p:cNvPicPr>
           <p:nvPr/>
         </p:nvPicPr>
         <p:blipFill>
-          <a:blip r:embed="rId12" cstate="print">
+          <a:blip r:embed="rId11" cstate="print">
             <a:extLst>
               <a:ext uri="{28A0092B-C50C-407E-A947-70E740481C1C}">
                 <a14:useLocalDpi xmlns:a14="http://schemas.microsoft.com/office/drawing/2010/main" val="0"/>
               </a:ext>
               <a:ext uri="{96DAC541-7B7A-43D3-8B79-37D633B846F1}">
-                <asvg:svgBlip xmlns:asvg="http://schemas.microsoft.com/office/drawing/2016/SVG/main" r:embed="rId13"/>
+                <asvg:svgBlip xmlns:asvg="http://schemas.microsoft.com/office/drawing/2016/SVG/main" r:embed="rId12"/>
               </a:ext>
             </a:extLst>
           </a:blip>
@@ -4443,26 +4257,20 @@
       </p:pic>
       <p:pic>
         <p:nvPicPr>
-          <p:cNvPr id="15" name="图形 14">
-            <a:extLst>
-              <a:ext uri="{FF2B5EF4-FFF2-40B4-BE49-F238E27FC236}">
-                <a16:creationId xmlns:a16="http://schemas.microsoft.com/office/drawing/2014/main" id="{082CE4FA-6FD3-499E-84AE-BD5771E3E031}"/>
-              </a:ext>
-            </a:extLst>
-          </p:cNvPr>
+          <p:cNvPr id="15" name="图形 14"/>
           <p:cNvPicPr>
             <a:picLocks noChangeAspect="1"/>
           </p:cNvPicPr>
           <p:nvPr/>
         </p:nvPicPr>
         <p:blipFill>
-          <a:blip r:embed="rId10" cstate="print">
+          <a:blip r:embed="rId9" cstate="print">
             <a:extLst>
               <a:ext uri="{28A0092B-C50C-407E-A947-70E740481C1C}">
                 <a14:useLocalDpi xmlns:a14="http://schemas.microsoft.com/office/drawing/2010/main" val="0"/>
               </a:ext>
               <a:ext uri="{96DAC541-7B7A-43D3-8B79-37D633B846F1}">
-                <asvg:svgBlip xmlns:asvg="http://schemas.microsoft.com/office/drawing/2016/SVG/main" r:embed="rId11"/>
+                <asvg:svgBlip xmlns:asvg="http://schemas.microsoft.com/office/drawing/2016/SVG/main" r:embed="rId10"/>
               </a:ext>
             </a:extLst>
           </a:blip>
@@ -4482,26 +4290,20 @@
       </p:pic>
       <p:pic>
         <p:nvPicPr>
-          <p:cNvPr id="16" name="图形 15">
-            <a:extLst>
-              <a:ext uri="{FF2B5EF4-FFF2-40B4-BE49-F238E27FC236}">
-                <a16:creationId xmlns:a16="http://schemas.microsoft.com/office/drawing/2014/main" id="{BCD11C9B-3887-455E-A57E-5568D31DD587}"/>
-              </a:ext>
-            </a:extLst>
-          </p:cNvPr>
+          <p:cNvPr id="16" name="图形 15"/>
           <p:cNvPicPr>
             <a:picLocks noChangeAspect="1"/>
           </p:cNvPicPr>
           <p:nvPr/>
         </p:nvPicPr>
         <p:blipFill>
-          <a:blip r:embed="rId14" cstate="print">
+          <a:blip r:embed="rId13" cstate="print">
             <a:extLst>
               <a:ext uri="{28A0092B-C50C-407E-A947-70E740481C1C}">
                 <a14:useLocalDpi xmlns:a14="http://schemas.microsoft.com/office/drawing/2010/main" val="0"/>
               </a:ext>
               <a:ext uri="{96DAC541-7B7A-43D3-8B79-37D633B846F1}">
-                <asvg:svgBlip xmlns:asvg="http://schemas.microsoft.com/office/drawing/2016/SVG/main" r:embed="rId15"/>
+                <asvg:svgBlip xmlns:asvg="http://schemas.microsoft.com/office/drawing/2016/SVG/main" r:embed="rId14"/>
               </a:ext>
             </a:extLst>
           </a:blip>
@@ -4521,16 +4323,8 @@
       </p:pic>
       <p:cxnSp>
         <p:nvCxnSpPr>
-          <p:cNvPr id="18" name="直接连接符 17">
-            <a:extLst>
-              <a:ext uri="{FF2B5EF4-FFF2-40B4-BE49-F238E27FC236}">
-                <a16:creationId xmlns:a16="http://schemas.microsoft.com/office/drawing/2014/main" id="{A9DC3881-56D7-47A3-AD49-C64C1EA78E23}"/>
-              </a:ext>
-            </a:extLst>
-          </p:cNvPr>
-          <p:cNvCxnSpPr>
-            <a:cxnSpLocks/>
-          </p:cNvCxnSpPr>
+          <p:cNvPr id="18" name="直接连接符 17"/>
+          <p:cNvCxnSpPr/>
           <p:nvPr/>
         </p:nvCxnSpPr>
         <p:spPr>
@@ -4565,16 +4359,8 @@
       </p:cxnSp>
       <p:cxnSp>
         <p:nvCxnSpPr>
-          <p:cNvPr id="21" name="直接连接符 20">
-            <a:extLst>
-              <a:ext uri="{FF2B5EF4-FFF2-40B4-BE49-F238E27FC236}">
-                <a16:creationId xmlns:a16="http://schemas.microsoft.com/office/drawing/2014/main" id="{D9254353-8002-4DA4-A0C0-ED85CDB2BA21}"/>
-              </a:ext>
-            </a:extLst>
-          </p:cNvPr>
-          <p:cNvCxnSpPr>
-            <a:cxnSpLocks/>
-          </p:cNvCxnSpPr>
+          <p:cNvPr id="21" name="直接连接符 20"/>
+          <p:cNvCxnSpPr/>
           <p:nvPr/>
         </p:nvCxnSpPr>
         <p:spPr>
@@ -4609,13 +4395,7 @@
       </p:cxnSp>
       <p:sp>
         <p:nvSpPr>
-          <p:cNvPr id="26" name="矩形 25">
-            <a:extLst>
-              <a:ext uri="{FF2B5EF4-FFF2-40B4-BE49-F238E27FC236}">
-                <a16:creationId xmlns:a16="http://schemas.microsoft.com/office/drawing/2014/main" id="{BA514BE7-572E-4D2A-B6D5-618C638F2146}"/>
-              </a:ext>
-            </a:extLst>
-          </p:cNvPr>
+          <p:cNvPr id="26" name="矩形 25"/>
           <p:cNvSpPr/>
           <p:nvPr/>
         </p:nvSpPr>
@@ -4662,16 +4442,8 @@
       </p:sp>
       <p:cxnSp>
         <p:nvCxnSpPr>
-          <p:cNvPr id="27" name="直接连接符 26">
-            <a:extLst>
-              <a:ext uri="{FF2B5EF4-FFF2-40B4-BE49-F238E27FC236}">
-                <a16:creationId xmlns:a16="http://schemas.microsoft.com/office/drawing/2014/main" id="{3D094091-227D-4C59-AF51-27B2E7456E6C}"/>
-              </a:ext>
-            </a:extLst>
-          </p:cNvPr>
-          <p:cNvCxnSpPr>
-            <a:cxnSpLocks/>
-          </p:cNvCxnSpPr>
+          <p:cNvPr id="27" name="直接连接符 26"/>
+          <p:cNvCxnSpPr/>
           <p:nvPr/>
         </p:nvCxnSpPr>
         <p:spPr>
@@ -4706,16 +4478,8 @@
       </p:cxnSp>
       <p:cxnSp>
         <p:nvCxnSpPr>
-          <p:cNvPr id="28" name="直接连接符 27">
-            <a:extLst>
-              <a:ext uri="{FF2B5EF4-FFF2-40B4-BE49-F238E27FC236}">
-                <a16:creationId xmlns:a16="http://schemas.microsoft.com/office/drawing/2014/main" id="{85E8AD09-7435-4480-9BAE-FE550F16F1D5}"/>
-              </a:ext>
-            </a:extLst>
-          </p:cNvPr>
-          <p:cNvCxnSpPr>
-            <a:cxnSpLocks/>
-          </p:cNvCxnSpPr>
+          <p:cNvPr id="28" name="直接连接符 27"/>
+          <p:cNvCxnSpPr/>
           <p:nvPr/>
         </p:nvCxnSpPr>
         <p:spPr>
@@ -4750,16 +4514,8 @@
       </p:cxnSp>
       <p:cxnSp>
         <p:nvCxnSpPr>
-          <p:cNvPr id="30" name="直接连接符 29">
-            <a:extLst>
-              <a:ext uri="{FF2B5EF4-FFF2-40B4-BE49-F238E27FC236}">
-                <a16:creationId xmlns:a16="http://schemas.microsoft.com/office/drawing/2014/main" id="{98C627FC-47EF-4127-9325-1B948DB3509D}"/>
-              </a:ext>
-            </a:extLst>
-          </p:cNvPr>
-          <p:cNvCxnSpPr>
-            <a:cxnSpLocks/>
-          </p:cNvCxnSpPr>
+          <p:cNvPr id="30" name="直接连接符 29"/>
+          <p:cNvCxnSpPr/>
           <p:nvPr/>
         </p:nvCxnSpPr>
         <p:spPr>
@@ -4795,16 +4551,8 @@
       </p:cxnSp>
       <p:cxnSp>
         <p:nvCxnSpPr>
-          <p:cNvPr id="32" name="直接连接符 31">
-            <a:extLst>
-              <a:ext uri="{FF2B5EF4-FFF2-40B4-BE49-F238E27FC236}">
-                <a16:creationId xmlns:a16="http://schemas.microsoft.com/office/drawing/2014/main" id="{558B4BD1-DCD3-43E6-A0E4-BA87D7E22145}"/>
-              </a:ext>
-            </a:extLst>
-          </p:cNvPr>
-          <p:cNvCxnSpPr>
-            <a:cxnSpLocks/>
-          </p:cNvCxnSpPr>
+          <p:cNvPr id="32" name="直接连接符 31"/>
+          <p:cNvCxnSpPr/>
           <p:nvPr/>
         </p:nvCxnSpPr>
         <p:spPr>
@@ -4839,16 +4587,8 @@
       </p:cxnSp>
       <p:cxnSp>
         <p:nvCxnSpPr>
-          <p:cNvPr id="35" name="直接连接符 34">
-            <a:extLst>
-              <a:ext uri="{FF2B5EF4-FFF2-40B4-BE49-F238E27FC236}">
-                <a16:creationId xmlns:a16="http://schemas.microsoft.com/office/drawing/2014/main" id="{671A1DE4-9387-4BF5-B7F3-FB59587699DE}"/>
-              </a:ext>
-            </a:extLst>
-          </p:cNvPr>
-          <p:cNvCxnSpPr>
-            <a:cxnSpLocks/>
-          </p:cNvCxnSpPr>
+          <p:cNvPr id="35" name="直接连接符 34"/>
+          <p:cNvCxnSpPr/>
           <p:nvPr/>
         </p:nvCxnSpPr>
         <p:spPr>
@@ -4883,16 +4623,8 @@
       </p:cxnSp>
       <p:cxnSp>
         <p:nvCxnSpPr>
-          <p:cNvPr id="43" name="直接连接符 42">
-            <a:extLst>
-              <a:ext uri="{FF2B5EF4-FFF2-40B4-BE49-F238E27FC236}">
-                <a16:creationId xmlns:a16="http://schemas.microsoft.com/office/drawing/2014/main" id="{05931D8D-670D-49FE-BAC8-89A875901535}"/>
-              </a:ext>
-            </a:extLst>
-          </p:cNvPr>
-          <p:cNvCxnSpPr>
-            <a:cxnSpLocks/>
-          </p:cNvCxnSpPr>
+          <p:cNvPr id="43" name="直接连接符 42"/>
+          <p:cNvCxnSpPr/>
           <p:nvPr/>
         </p:nvCxnSpPr>
         <p:spPr>
@@ -4927,13 +4659,7 @@
       </p:cxnSp>
       <p:grpSp>
         <p:nvGrpSpPr>
-          <p:cNvPr id="63" name="组合 62">
-            <a:extLst>
-              <a:ext uri="{FF2B5EF4-FFF2-40B4-BE49-F238E27FC236}">
-                <a16:creationId xmlns:a16="http://schemas.microsoft.com/office/drawing/2014/main" id="{03FF5246-B4E8-4459-A3ED-794EF7208ABF}"/>
-              </a:ext>
-            </a:extLst>
-          </p:cNvPr>
+          <p:cNvPr id="63" name="组合 62"/>
           <p:cNvGrpSpPr>
             <a:grpSpLocks noChangeAspect="1"/>
           </p:cNvGrpSpPr>
@@ -4949,13 +4675,7 @@
         </p:grpSpPr>
         <p:sp>
           <p:nvSpPr>
-            <p:cNvPr id="64" name="矩形: 圆角 63">
-              <a:extLst>
-                <a:ext uri="{FF2B5EF4-FFF2-40B4-BE49-F238E27FC236}">
-                  <a16:creationId xmlns:a16="http://schemas.microsoft.com/office/drawing/2014/main" id="{D021A613-0F8E-4627-8ED8-AD0A2E73F219}"/>
-                </a:ext>
-              </a:extLst>
-            </p:cNvPr>
+            <p:cNvPr id="64" name="矩形: 圆角 63"/>
             <p:cNvSpPr/>
             <p:nvPr/>
           </p:nvSpPr>
@@ -5003,13 +4723,7 @@
         </p:sp>
         <p:sp>
           <p:nvSpPr>
-            <p:cNvPr id="65" name="矩形: 圆角 64">
-              <a:extLst>
-                <a:ext uri="{FF2B5EF4-FFF2-40B4-BE49-F238E27FC236}">
-                  <a16:creationId xmlns:a16="http://schemas.microsoft.com/office/drawing/2014/main" id="{AB0A2877-324A-4873-B26C-DF9457CC4923}"/>
-                </a:ext>
-              </a:extLst>
-            </p:cNvPr>
+            <p:cNvPr id="65" name="矩形: 圆角 64"/>
             <p:cNvSpPr/>
             <p:nvPr/>
           </p:nvSpPr>
@@ -5057,13 +4771,7 @@
         </p:sp>
         <p:sp>
           <p:nvSpPr>
-            <p:cNvPr id="66" name="矩形: 圆角 65">
-              <a:extLst>
-                <a:ext uri="{FF2B5EF4-FFF2-40B4-BE49-F238E27FC236}">
-                  <a16:creationId xmlns:a16="http://schemas.microsoft.com/office/drawing/2014/main" id="{EBAB0F6F-B431-4563-BA08-962BD7918554}"/>
-                </a:ext>
-              </a:extLst>
-            </p:cNvPr>
+            <p:cNvPr id="66" name="矩形: 圆角 65"/>
             <p:cNvSpPr/>
             <p:nvPr/>
           </p:nvSpPr>
@@ -5111,13 +4819,7 @@
         </p:sp>
         <p:sp>
           <p:nvSpPr>
-            <p:cNvPr id="67" name="矩形: 圆角 66">
-              <a:extLst>
-                <a:ext uri="{FF2B5EF4-FFF2-40B4-BE49-F238E27FC236}">
-                  <a16:creationId xmlns:a16="http://schemas.microsoft.com/office/drawing/2014/main" id="{A3A94F5A-FB8A-4996-BE09-370A6B3988E3}"/>
-                </a:ext>
-              </a:extLst>
-            </p:cNvPr>
+            <p:cNvPr id="67" name="矩形: 圆角 66"/>
             <p:cNvSpPr/>
             <p:nvPr/>
           </p:nvSpPr>
@@ -5166,16 +4868,8 @@
       </p:grpSp>
       <p:cxnSp>
         <p:nvCxnSpPr>
-          <p:cNvPr id="73" name="直接连接符 72">
-            <a:extLst>
-              <a:ext uri="{FF2B5EF4-FFF2-40B4-BE49-F238E27FC236}">
-                <a16:creationId xmlns:a16="http://schemas.microsoft.com/office/drawing/2014/main" id="{5FD128A6-C55E-4E2F-B947-EC3C21E4E9F5}"/>
-              </a:ext>
-            </a:extLst>
-          </p:cNvPr>
-          <p:cNvCxnSpPr>
-            <a:cxnSpLocks/>
-          </p:cNvCxnSpPr>
+          <p:cNvPr id="73" name="直接连接符 72"/>
+          <p:cNvCxnSpPr/>
           <p:nvPr/>
         </p:nvCxnSpPr>
         <p:spPr>
@@ -5209,11 +4903,6 @@
         </p:style>
       </p:cxnSp>
     </p:spTree>
-    <p:extLst>
-      <p:ext uri="{BB962C8B-B14F-4D97-AF65-F5344CB8AC3E}">
-        <p14:creationId xmlns:p14="http://schemas.microsoft.com/office/powerpoint/2010/main" val="150832409"/>
-      </p:ext>
-    </p:extLst>
   </p:cSld>
   <p:clrMapOvr>
     <a:masterClrMapping/>
@@ -5240,26 +4929,17 @@
       </p:grpSpPr>
       <p:pic>
         <p:nvPicPr>
-          <p:cNvPr id="5" name="图形 4">
-            <a:extLst>
-              <a:ext uri="{FF2B5EF4-FFF2-40B4-BE49-F238E27FC236}">
-                <a16:creationId xmlns:a16="http://schemas.microsoft.com/office/drawing/2014/main" id="{BB9D3B68-A8D6-44CD-8B81-6ED116E58AA1}"/>
-              </a:ext>
-            </a:extLst>
-          </p:cNvPr>
+          <p:cNvPr id="3" name="图片 2" descr="用户"/>
           <p:cNvPicPr>
             <a:picLocks noChangeAspect="1"/>
           </p:cNvPicPr>
           <p:nvPr/>
         </p:nvPicPr>
         <p:blipFill>
-          <a:blip r:embed="rId2" cstate="print">
+          <a:blip r:embed="rId1">
             <a:extLst>
-              <a:ext uri="{28A0092B-C50C-407E-A947-70E740481C1C}">
-                <a14:useLocalDpi xmlns:a14="http://schemas.microsoft.com/office/drawing/2010/main" val="0"/>
-              </a:ext>
               <a:ext uri="{96DAC541-7B7A-43D3-8B79-37D633B846F1}">
-                <asvg:svgBlip xmlns:asvg="http://schemas.microsoft.com/office/drawing/2016/SVG/main" r:embed="rId3"/>
+                <asvg:svgBlip xmlns:asvg="http://schemas.microsoft.com/office/drawing/2016/SVG/main" r:embed="rId2"/>
               </a:ext>
             </a:extLst>
           </a:blip>
@@ -5269,8 +4949,8 @@
         </p:blipFill>
         <p:spPr>
           <a:xfrm>
-            <a:off x="871642" y="3209373"/>
-            <a:ext cx="720000" cy="720000"/>
+            <a:off x="1116330" y="3602355"/>
+            <a:ext cx="1080000" cy="1080000"/>
           </a:xfrm>
           <a:prstGeom prst="rect">
             <a:avLst/>
@@ -5279,26 +4959,17 @@
       </p:pic>
       <p:pic>
         <p:nvPicPr>
-          <p:cNvPr id="7" name="图形 6">
-            <a:extLst>
-              <a:ext uri="{FF2B5EF4-FFF2-40B4-BE49-F238E27FC236}">
-                <a16:creationId xmlns:a16="http://schemas.microsoft.com/office/drawing/2014/main" id="{75385AB8-939E-44DA-ACDB-7031E32663CD}"/>
-              </a:ext>
-            </a:extLst>
-          </p:cNvPr>
+          <p:cNvPr id="4" name="图片 3" descr="手机"/>
           <p:cNvPicPr>
             <a:picLocks noChangeAspect="1"/>
           </p:cNvPicPr>
           <p:nvPr/>
         </p:nvPicPr>
         <p:blipFill>
-          <a:blip r:embed="rId4" cstate="print">
+          <a:blip r:embed="rId3">
             <a:extLst>
-              <a:ext uri="{28A0092B-C50C-407E-A947-70E740481C1C}">
-                <a14:useLocalDpi xmlns:a14="http://schemas.microsoft.com/office/drawing/2010/main" val="0"/>
-              </a:ext>
               <a:ext uri="{96DAC541-7B7A-43D3-8B79-37D633B846F1}">
-                <asvg:svgBlip xmlns:asvg="http://schemas.microsoft.com/office/drawing/2016/SVG/main" r:embed="rId5"/>
+                <asvg:svgBlip xmlns:asvg="http://schemas.microsoft.com/office/drawing/2016/SVG/main" r:embed="rId4"/>
               </a:ext>
             </a:extLst>
           </a:blip>
@@ -5308,30 +4979,84 @@
         </p:blipFill>
         <p:spPr>
           <a:xfrm>
-            <a:off x="1016215" y="1907232"/>
-            <a:ext cx="720000" cy="720000"/>
+            <a:off x="976630" y="1543050"/>
+            <a:ext cx="1358900" cy="1358900"/>
           </a:xfrm>
           <a:prstGeom prst="rect">
             <a:avLst/>
           </a:prstGeom>
         </p:spPr>
       </p:pic>
-      <p:sp>
-        <p:nvSpPr>
-          <p:cNvPr id="10" name="矩形 9">
+      <p:pic>
+        <p:nvPicPr>
+          <p:cNvPr id="6" name="图片 5" descr="应用软件"/>
+          <p:cNvPicPr>
+            <a:picLocks noChangeAspect="1"/>
+          </p:cNvPicPr>
+          <p:nvPr/>
+        </p:nvPicPr>
+        <p:blipFill>
+          <a:blip r:embed="rId5">
             <a:extLst>
-              <a:ext uri="{FF2B5EF4-FFF2-40B4-BE49-F238E27FC236}">
-                <a16:creationId xmlns:a16="http://schemas.microsoft.com/office/drawing/2014/main" id="{F44B072C-BABD-4291-96B5-5770CF184958}"/>
+              <a:ext uri="{96DAC541-7B7A-43D3-8B79-37D633B846F1}">
+                <asvg:svgBlip xmlns:asvg="http://schemas.microsoft.com/office/drawing/2016/SVG/main" r:embed="rId6"/>
               </a:ext>
             </a:extLst>
-          </p:cNvPr>
+          </a:blip>
+          <a:stretch>
+            <a:fillRect/>
+          </a:stretch>
+        </p:blipFill>
+        <p:spPr>
+          <a:xfrm>
+            <a:off x="3844290" y="1499235"/>
+            <a:ext cx="1080000" cy="1080000"/>
+          </a:xfrm>
+          <a:prstGeom prst="rect">
+            <a:avLst/>
+          </a:prstGeom>
+        </p:spPr>
+      </p:pic>
+      <p:pic>
+        <p:nvPicPr>
+          <p:cNvPr id="8" name="图片 7" descr="支付"/>
+          <p:cNvPicPr>
+            <a:picLocks noChangeAspect="1"/>
+          </p:cNvPicPr>
+          <p:nvPr/>
+        </p:nvPicPr>
+        <p:blipFill>
+          <a:blip r:embed="rId7">
+            <a:extLst>
+              <a:ext uri="{96DAC541-7B7A-43D3-8B79-37D633B846F1}">
+                <asvg:svgBlip xmlns:asvg="http://schemas.microsoft.com/office/drawing/2016/SVG/main" r:embed="rId8"/>
+              </a:ext>
+            </a:extLst>
+          </a:blip>
+          <a:stretch>
+            <a:fillRect/>
+          </a:stretch>
+        </p:blipFill>
+        <p:spPr>
+          <a:xfrm>
+            <a:off x="3844290" y="3973195"/>
+            <a:ext cx="1080000" cy="1080000"/>
+          </a:xfrm>
+          <a:prstGeom prst="rect">
+            <a:avLst/>
+          </a:prstGeom>
+        </p:spPr>
+      </p:pic>
+      <p:sp>
+        <p:nvSpPr>
+          <p:cNvPr id="9" name="矩形 8"/>
           <p:cNvSpPr/>
           <p:nvPr/>
         </p:nvSpPr>
         <p:spPr>
           <a:xfrm>
-            <a:off x="2743600" y="2056451"/>
-            <a:ext cx="1236110" cy="2325262"/>
+            <a:off x="3496945" y="1451610"/>
+            <a:ext cx="1774190" cy="3970020"/>
           </a:xfrm>
           <a:prstGeom prst="rect">
             <a:avLst/>
@@ -5339,7 +5064,7 @@
           <a:noFill/>
           <a:ln w="19050">
             <a:solidFill>
-              <a:schemeClr val="tx1"/>
+              <a:srgbClr val="0B5FD1"/>
             </a:solidFill>
             <a:prstDash val="dash"/>
           </a:ln>
@@ -5365,269 +5090,188 @@
           <a:lstStyle/>
           <a:p>
             <a:pPr algn="ctr"/>
-            <a:endParaRPr lang="zh-CN" altLang="en-US"/>
-          </a:p>
-        </p:txBody>
-      </p:sp>
-      <p:pic>
-        <p:nvPicPr>
-          <p:cNvPr id="11" name="图形 10">
-            <a:extLst>
-              <a:ext uri="{FF2B5EF4-FFF2-40B4-BE49-F238E27FC236}">
-                <a16:creationId xmlns:a16="http://schemas.microsoft.com/office/drawing/2014/main" id="{B92E4E53-D55A-4799-A765-82D43E0C8FD6}"/>
-              </a:ext>
-            </a:extLst>
-          </p:cNvPr>
-          <p:cNvPicPr>
-            <a:picLocks noChangeAspect="1"/>
-          </p:cNvPicPr>
-          <p:nvPr/>
-        </p:nvPicPr>
-        <p:blipFill>
-          <a:blip r:embed="rId6" cstate="print">
-            <a:extLst>
-              <a:ext uri="{28A0092B-C50C-407E-A947-70E740481C1C}">
-                <a14:useLocalDpi xmlns:a14="http://schemas.microsoft.com/office/drawing/2010/main" val="0"/>
-              </a:ext>
-              <a:ext uri="{96DAC541-7B7A-43D3-8B79-37D633B846F1}">
-                <asvg:svgBlip xmlns:asvg="http://schemas.microsoft.com/office/drawing/2016/SVG/main" r:embed="rId7"/>
-              </a:ext>
-            </a:extLst>
-          </a:blip>
-          <a:stretch>
-            <a:fillRect/>
-          </a:stretch>
-        </p:blipFill>
-        <p:spPr>
-          <a:xfrm>
-            <a:off x="5055097" y="3495076"/>
-            <a:ext cx="720000" cy="720000"/>
-          </a:xfrm>
-          <a:prstGeom prst="rect">
-            <a:avLst/>
-          </a:prstGeom>
-        </p:spPr>
-      </p:pic>
-      <p:pic>
-        <p:nvPicPr>
-          <p:cNvPr id="12" name="图形 11">
-            <a:extLst>
-              <a:ext uri="{FF2B5EF4-FFF2-40B4-BE49-F238E27FC236}">
-                <a16:creationId xmlns:a16="http://schemas.microsoft.com/office/drawing/2014/main" id="{C06C01B9-3380-4991-8630-4C02F80A7B96}"/>
-              </a:ext>
-            </a:extLst>
-          </p:cNvPr>
-          <p:cNvPicPr>
-            <a:picLocks noChangeAspect="1"/>
-          </p:cNvPicPr>
-          <p:nvPr/>
-        </p:nvPicPr>
-        <p:blipFill>
-          <a:blip r:embed="rId8" cstate="print">
-            <a:extLst>
-              <a:ext uri="{28A0092B-C50C-407E-A947-70E740481C1C}">
-                <a14:useLocalDpi xmlns:a14="http://schemas.microsoft.com/office/drawing/2010/main" val="0"/>
-              </a:ext>
-              <a:ext uri="{96DAC541-7B7A-43D3-8B79-37D633B846F1}">
-                <asvg:svgBlip xmlns:asvg="http://schemas.microsoft.com/office/drawing/2016/SVG/main" r:embed="rId9"/>
-              </a:ext>
-            </a:extLst>
-          </a:blip>
-          <a:stretch>
-            <a:fillRect/>
-          </a:stretch>
-        </p:blipFill>
-        <p:spPr>
-          <a:xfrm>
-            <a:off x="3041465" y="3495076"/>
-            <a:ext cx="720000" cy="720000"/>
-          </a:xfrm>
-          <a:prstGeom prst="rect">
-            <a:avLst/>
-          </a:prstGeom>
-        </p:spPr>
-      </p:pic>
-      <p:pic>
-        <p:nvPicPr>
-          <p:cNvPr id="13" name="图形 12">
-            <a:extLst>
-              <a:ext uri="{FF2B5EF4-FFF2-40B4-BE49-F238E27FC236}">
-                <a16:creationId xmlns:a16="http://schemas.microsoft.com/office/drawing/2014/main" id="{D52C92ED-B761-45CD-B8C6-CEE6CA25D9BE}"/>
-              </a:ext>
-            </a:extLst>
-          </p:cNvPr>
-          <p:cNvPicPr>
-            <a:picLocks noChangeAspect="1"/>
-          </p:cNvPicPr>
-          <p:nvPr/>
-        </p:nvPicPr>
-        <p:blipFill>
-          <a:blip r:embed="rId10" cstate="print">
-            <a:extLst>
-              <a:ext uri="{28A0092B-C50C-407E-A947-70E740481C1C}">
-                <a14:useLocalDpi xmlns:a14="http://schemas.microsoft.com/office/drawing/2010/main" val="0"/>
-              </a:ext>
-              <a:ext uri="{96DAC541-7B7A-43D3-8B79-37D633B846F1}">
-                <asvg:svgBlip xmlns:asvg="http://schemas.microsoft.com/office/drawing/2016/SVG/main" r:embed="rId11"/>
-              </a:ext>
-            </a:extLst>
-          </a:blip>
-          <a:stretch>
-            <a:fillRect/>
-          </a:stretch>
-        </p:blipFill>
-        <p:spPr>
-          <a:xfrm>
-            <a:off x="6373891" y="2955389"/>
-            <a:ext cx="720000" cy="720000"/>
-          </a:xfrm>
-          <a:prstGeom prst="rect">
-            <a:avLst/>
-          </a:prstGeom>
-        </p:spPr>
-      </p:pic>
-      <p:pic>
-        <p:nvPicPr>
-          <p:cNvPr id="14" name="图形 13">
-            <a:extLst>
-              <a:ext uri="{FF2B5EF4-FFF2-40B4-BE49-F238E27FC236}">
-                <a16:creationId xmlns:a16="http://schemas.microsoft.com/office/drawing/2014/main" id="{95F0369A-BC2F-49E8-A2CB-8394A2E4E8B3}"/>
-              </a:ext>
-            </a:extLst>
-          </p:cNvPr>
-          <p:cNvPicPr>
-            <a:picLocks noChangeAspect="1"/>
-          </p:cNvPicPr>
-          <p:nvPr/>
-        </p:nvPicPr>
-        <p:blipFill>
-          <a:blip r:embed="rId12" cstate="print">
-            <a:extLst>
-              <a:ext uri="{28A0092B-C50C-407E-A947-70E740481C1C}">
-                <a14:useLocalDpi xmlns:a14="http://schemas.microsoft.com/office/drawing/2010/main" val="0"/>
-              </a:ext>
-              <a:ext uri="{96DAC541-7B7A-43D3-8B79-37D633B846F1}">
-                <asvg:svgBlip xmlns:asvg="http://schemas.microsoft.com/office/drawing/2016/SVG/main" r:embed="rId13"/>
-              </a:ext>
-            </a:extLst>
-          </a:blip>
-          <a:stretch>
-            <a:fillRect/>
-          </a:stretch>
-        </p:blipFill>
-        <p:spPr>
-          <a:xfrm>
-            <a:off x="7321575" y="2857773"/>
-            <a:ext cx="495891" cy="495891"/>
-          </a:xfrm>
-          <a:prstGeom prst="rect">
-            <a:avLst/>
-          </a:prstGeom>
-        </p:spPr>
-      </p:pic>
-      <p:pic>
-        <p:nvPicPr>
-          <p:cNvPr id="15" name="图形 14">
-            <a:extLst>
-              <a:ext uri="{FF2B5EF4-FFF2-40B4-BE49-F238E27FC236}">
-                <a16:creationId xmlns:a16="http://schemas.microsoft.com/office/drawing/2014/main" id="{082CE4FA-6FD3-499E-84AE-BD5771E3E031}"/>
-              </a:ext>
-            </a:extLst>
-          </p:cNvPr>
-          <p:cNvPicPr>
-            <a:picLocks noChangeAspect="1"/>
-          </p:cNvPicPr>
-          <p:nvPr/>
-        </p:nvPicPr>
-        <p:blipFill>
-          <a:blip r:embed="rId10" cstate="print">
-            <a:extLst>
-              <a:ext uri="{28A0092B-C50C-407E-A947-70E740481C1C}">
-                <a14:useLocalDpi xmlns:a14="http://schemas.microsoft.com/office/drawing/2010/main" val="0"/>
-              </a:ext>
-              <a:ext uri="{96DAC541-7B7A-43D3-8B79-37D633B846F1}">
-                <asvg:svgBlip xmlns:asvg="http://schemas.microsoft.com/office/drawing/2016/SVG/main" r:embed="rId11"/>
-              </a:ext>
-            </a:extLst>
-          </a:blip>
-          <a:stretch>
-            <a:fillRect/>
-          </a:stretch>
-        </p:blipFill>
-        <p:spPr>
-          <a:xfrm>
-            <a:off x="8095026" y="2918419"/>
-            <a:ext cx="720000" cy="720000"/>
-          </a:xfrm>
-          <a:prstGeom prst="rect">
-            <a:avLst/>
-          </a:prstGeom>
-        </p:spPr>
-      </p:pic>
-      <p:pic>
-        <p:nvPicPr>
-          <p:cNvPr id="16" name="图形 15">
-            <a:extLst>
-              <a:ext uri="{FF2B5EF4-FFF2-40B4-BE49-F238E27FC236}">
-                <a16:creationId xmlns:a16="http://schemas.microsoft.com/office/drawing/2014/main" id="{BCD11C9B-3887-455E-A57E-5568D31DD587}"/>
-              </a:ext>
-            </a:extLst>
-          </p:cNvPr>
-          <p:cNvPicPr>
-            <a:picLocks noChangeAspect="1"/>
-          </p:cNvPicPr>
-          <p:nvPr/>
-        </p:nvPicPr>
-        <p:blipFill>
-          <a:blip r:embed="rId14" cstate="print">
-            <a:extLst>
-              <a:ext uri="{28A0092B-C50C-407E-A947-70E740481C1C}">
-                <a14:useLocalDpi xmlns:a14="http://schemas.microsoft.com/office/drawing/2010/main" val="0"/>
-              </a:ext>
-              <a:ext uri="{96DAC541-7B7A-43D3-8B79-37D633B846F1}">
-                <asvg:svgBlip xmlns:asvg="http://schemas.microsoft.com/office/drawing/2016/SVG/main" r:embed="rId15"/>
-              </a:ext>
-            </a:extLst>
-          </a:blip>
-          <a:stretch>
-            <a:fillRect/>
-          </a:stretch>
-        </p:blipFill>
-        <p:spPr>
-          <a:xfrm>
-            <a:off x="5055097" y="2128784"/>
-            <a:ext cx="720000" cy="720000"/>
-          </a:xfrm>
-          <a:prstGeom prst="rect">
-            <a:avLst/>
-          </a:prstGeom>
-        </p:spPr>
-      </p:pic>
+            <a:endParaRPr lang="zh-CN" altLang="en-US">
+              <a:latin typeface="Times New Roman" panose="02020603050405020304" charset="0"/>
+              <a:cs typeface="Times New Roman" panose="02020603050405020304" charset="0"/>
+            </a:endParaRPr>
+          </a:p>
+        </p:txBody>
+      </p:sp>
+      <p:sp>
+        <p:nvSpPr>
+          <p:cNvPr id="17" name="文本框 16"/>
+          <p:cNvSpPr txBox="1"/>
+          <p:nvPr/>
+        </p:nvSpPr>
+        <p:spPr>
+          <a:xfrm>
+            <a:off x="3618230" y="2538095"/>
+            <a:ext cx="1532890" cy="638175"/>
+          </a:xfrm>
+          <a:prstGeom prst="rect">
+            <a:avLst/>
+          </a:prstGeom>
+          <a:noFill/>
+        </p:spPr>
+        <p:txBody>
+          <a:bodyPr wrap="square" rtlCol="0">
+            <a:noAutofit/>
+          </a:bodyPr>
+          <a:p>
+            <a:pPr algn="ctr"/>
+            <a:r>
+              <a:rPr lang="en-US" altLang="zh-CN">
+                <a:latin typeface="Times New Roman" panose="02020603050405020304" charset="0"/>
+                <a:cs typeface="Times New Roman" panose="02020603050405020304" charset="0"/>
+              </a:rPr>
+              <a:t>Merchant </a:t>
+            </a:r>
+            <a:endParaRPr lang="en-US" altLang="zh-CN">
+              <a:latin typeface="Times New Roman" panose="02020603050405020304" charset="0"/>
+              <a:cs typeface="Times New Roman" panose="02020603050405020304" charset="0"/>
+            </a:endParaRPr>
+          </a:p>
+          <a:p>
+            <a:pPr algn="ctr"/>
+            <a:r>
+              <a:rPr lang="en-US" altLang="zh-CN">
+                <a:latin typeface="Times New Roman" panose="02020603050405020304" charset="0"/>
+                <a:cs typeface="Times New Roman" panose="02020603050405020304" charset="0"/>
+              </a:rPr>
+              <a:t>Frontend</a:t>
+            </a:r>
+            <a:endParaRPr lang="en-US" altLang="zh-CN">
+              <a:latin typeface="Times New Roman" panose="02020603050405020304" charset="0"/>
+              <a:cs typeface="Times New Roman" panose="02020603050405020304" charset="0"/>
+            </a:endParaRPr>
+          </a:p>
+        </p:txBody>
+      </p:sp>
+      <p:sp>
+        <p:nvSpPr>
+          <p:cNvPr id="19" name="文本框 18"/>
+          <p:cNvSpPr txBox="1"/>
+          <p:nvPr/>
+        </p:nvSpPr>
+        <p:spPr>
+          <a:xfrm>
+            <a:off x="3618230" y="5053330"/>
+            <a:ext cx="1532890" cy="368300"/>
+          </a:xfrm>
+          <a:prstGeom prst="rect">
+            <a:avLst/>
+          </a:prstGeom>
+          <a:noFill/>
+        </p:spPr>
+        <p:txBody>
+          <a:bodyPr wrap="square" rtlCol="0">
+            <a:spAutoFit/>
+          </a:bodyPr>
+          <a:p>
+            <a:pPr algn="ctr"/>
+            <a:r>
+              <a:rPr lang="en-US" altLang="zh-CN">
+                <a:latin typeface="Times New Roman" panose="02020603050405020304" charset="0"/>
+                <a:cs typeface="Times New Roman" panose="02020603050405020304" charset="0"/>
+              </a:rPr>
+              <a:t>PS-App</a:t>
+            </a:r>
+            <a:endParaRPr lang="en-US" altLang="zh-CN">
+              <a:latin typeface="Times New Roman" panose="02020603050405020304" charset="0"/>
+              <a:cs typeface="Times New Roman" panose="02020603050405020304" charset="0"/>
+            </a:endParaRPr>
+          </a:p>
+        </p:txBody>
+      </p:sp>
+      <p:sp>
+        <p:nvSpPr>
+          <p:cNvPr id="20" name="文本框 19"/>
+          <p:cNvSpPr txBox="1"/>
+          <p:nvPr/>
+        </p:nvSpPr>
+        <p:spPr>
+          <a:xfrm>
+            <a:off x="890270" y="4793615"/>
+            <a:ext cx="1532890" cy="368300"/>
+          </a:xfrm>
+          <a:prstGeom prst="rect">
+            <a:avLst/>
+          </a:prstGeom>
+          <a:noFill/>
+        </p:spPr>
+        <p:txBody>
+          <a:bodyPr wrap="square" rtlCol="0">
+            <a:spAutoFit/>
+          </a:bodyPr>
+          <a:p>
+            <a:pPr algn="ctr"/>
+            <a:r>
+              <a:rPr lang="en-US" altLang="zh-CN">
+                <a:latin typeface="Times New Roman" panose="02020603050405020304" charset="0"/>
+                <a:cs typeface="Times New Roman" panose="02020603050405020304" charset="0"/>
+              </a:rPr>
+              <a:t>User</a:t>
+            </a:r>
+            <a:endParaRPr lang="en-US" altLang="zh-CN">
+              <a:latin typeface="Times New Roman" panose="02020603050405020304" charset="0"/>
+              <a:cs typeface="Times New Roman" panose="02020603050405020304" charset="0"/>
+            </a:endParaRPr>
+          </a:p>
+        </p:txBody>
+      </p:sp>
+      <p:sp>
+        <p:nvSpPr>
+          <p:cNvPr id="22" name="文本框 21"/>
+          <p:cNvSpPr txBox="1"/>
+          <p:nvPr/>
+        </p:nvSpPr>
+        <p:spPr>
+          <a:xfrm>
+            <a:off x="1032510" y="2842260"/>
+            <a:ext cx="1219200" cy="586740"/>
+          </a:xfrm>
+          <a:prstGeom prst="rect">
+            <a:avLst/>
+          </a:prstGeom>
+          <a:noFill/>
+        </p:spPr>
+        <p:txBody>
+          <a:bodyPr wrap="square" rtlCol="0">
+            <a:noAutofit/>
+          </a:bodyPr>
+          <a:p>
+            <a:pPr algn="ctr"/>
+            <a:r>
+              <a:rPr lang="en-US" altLang="zh-CN">
+                <a:latin typeface="Times New Roman" panose="02020603050405020304" charset="0"/>
+                <a:cs typeface="Times New Roman" panose="02020603050405020304" charset="0"/>
+              </a:rPr>
+              <a:t>Mobile Device</a:t>
+            </a:r>
+            <a:endParaRPr lang="en-US" altLang="zh-CN">
+              <a:latin typeface="Times New Roman" panose="02020603050405020304" charset="0"/>
+              <a:cs typeface="Times New Roman" panose="02020603050405020304" charset="0"/>
+            </a:endParaRPr>
+          </a:p>
+        </p:txBody>
+      </p:sp>
       <p:cxnSp>
         <p:nvCxnSpPr>
-          <p:cNvPr id="18" name="直接连接符 17">
-            <a:extLst>
-              <a:ext uri="{FF2B5EF4-FFF2-40B4-BE49-F238E27FC236}">
-                <a16:creationId xmlns:a16="http://schemas.microsoft.com/office/drawing/2014/main" id="{A9DC3881-56D7-47A3-AD49-C64C1EA78E23}"/>
-              </a:ext>
-            </a:extLst>
-          </p:cNvPr>
-          <p:cNvCxnSpPr>
-            <a:cxnSpLocks/>
-          </p:cNvCxnSpPr>
+          <p:cNvPr id="23" name="直接连接符 22"/>
+          <p:cNvCxnSpPr/>
           <p:nvPr/>
         </p:nvCxnSpPr>
         <p:spPr>
           <a:xfrm>
-            <a:off x="1794895" y="2291226"/>
-            <a:ext cx="936438" cy="0"/>
+            <a:off x="2280670" y="2039766"/>
+            <a:ext cx="1260000" cy="0"/>
           </a:xfrm>
           <a:prstGeom prst="line">
             <a:avLst/>
           </a:prstGeom>
           <a:ln w="19050">
             <a:solidFill>
-              <a:schemeClr val="tx1"/>
+              <a:srgbClr val="0B5FD1"/>
             </a:solidFill>
             <a:prstDash val="dash"/>
           </a:ln>
@@ -5649,22 +5293,160 @@
       </p:cxnSp>
       <p:cxnSp>
         <p:nvCxnSpPr>
-          <p:cNvPr id="21" name="直接连接符 20">
-            <a:extLst>
-              <a:ext uri="{FF2B5EF4-FFF2-40B4-BE49-F238E27FC236}">
-                <a16:creationId xmlns:a16="http://schemas.microsoft.com/office/drawing/2014/main" id="{D9254353-8002-4DA4-A0C0-ED85CDB2BA21}"/>
-              </a:ext>
-            </a:extLst>
-          </p:cNvPr>
-          <p:cNvCxnSpPr>
-            <a:cxnSpLocks/>
-          </p:cNvCxnSpPr>
+          <p:cNvPr id="24" name="直接连接符 23"/>
+          <p:cNvCxnSpPr/>
           <p:nvPr/>
         </p:nvCxnSpPr>
         <p:spPr>
-          <a:xfrm>
-            <a:off x="4041644" y="2454030"/>
-            <a:ext cx="868026" cy="0"/>
+          <a:xfrm flipV="1">
+            <a:off x="2292735" y="2264556"/>
+            <a:ext cx="1511300" cy="1572260"/>
+          </a:xfrm>
+          <a:prstGeom prst="line">
+            <a:avLst/>
+          </a:prstGeom>
+          <a:ln w="19050">
+            <a:solidFill>
+              <a:srgbClr val="E1B884"/>
+            </a:solidFill>
+            <a:prstDash val="solid"/>
+            <a:tailEnd type="triangle"/>
+          </a:ln>
+        </p:spPr>
+        <p:style>
+          <a:lnRef idx="1">
+            <a:schemeClr val="accent1"/>
+          </a:lnRef>
+          <a:fillRef idx="0">
+            <a:schemeClr val="accent1"/>
+          </a:fillRef>
+          <a:effectRef idx="0">
+            <a:schemeClr val="accent1"/>
+          </a:effectRef>
+          <a:fontRef idx="minor">
+            <a:schemeClr val="tx1"/>
+          </a:fontRef>
+        </p:style>
+      </p:cxnSp>
+      <p:sp>
+        <p:nvSpPr>
+          <p:cNvPr id="5" name="文本框 4"/>
+          <p:cNvSpPr txBox="1"/>
+          <p:nvPr/>
+        </p:nvSpPr>
+        <p:spPr>
+          <a:xfrm rot="18840000">
+            <a:off x="2114550" y="2737485"/>
+            <a:ext cx="1532890" cy="353695"/>
+          </a:xfrm>
+          <a:prstGeom prst="rect">
+            <a:avLst/>
+          </a:prstGeom>
+          <a:noFill/>
+        </p:spPr>
+        <p:txBody>
+          <a:bodyPr wrap="square" rtlCol="0">
+            <a:noAutofit/>
+          </a:bodyPr>
+          <a:p>
+            <a:pPr algn="ctr"/>
+            <a:r>
+              <a:rPr lang="en-US" altLang="zh-CN">
+                <a:latin typeface="Times New Roman" panose="02020603050405020304" charset="0"/>
+                <a:cs typeface="Times New Roman" panose="02020603050405020304" charset="0"/>
+              </a:rPr>
+              <a:t>Shop</a:t>
+            </a:r>
+            <a:endParaRPr lang="en-US" altLang="zh-CN">
+              <a:latin typeface="Times New Roman" panose="02020603050405020304" charset="0"/>
+              <a:cs typeface="Times New Roman" panose="02020603050405020304" charset="0"/>
+            </a:endParaRPr>
+          </a:p>
+        </p:txBody>
+      </p:sp>
+      <p:cxnSp>
+        <p:nvCxnSpPr>
+          <p:cNvPr id="7" name="直接连接符 6"/>
+          <p:cNvCxnSpPr/>
+          <p:nvPr/>
+        </p:nvCxnSpPr>
+        <p:spPr>
+          <a:xfrm>
+            <a:off x="2292735" y="4290206"/>
+            <a:ext cx="1512000" cy="322580"/>
+          </a:xfrm>
+          <a:prstGeom prst="line">
+            <a:avLst/>
+          </a:prstGeom>
+          <a:ln w="19050">
+            <a:solidFill>
+              <a:srgbClr val="8CC288"/>
+            </a:solidFill>
+            <a:prstDash val="solid"/>
+            <a:tailEnd type="triangle"/>
+          </a:ln>
+        </p:spPr>
+        <p:style>
+          <a:lnRef idx="1">
+            <a:schemeClr val="accent1"/>
+          </a:lnRef>
+          <a:fillRef idx="0">
+            <a:schemeClr val="accent1"/>
+          </a:fillRef>
+          <a:effectRef idx="0">
+            <a:schemeClr val="accent1"/>
+          </a:effectRef>
+          <a:fontRef idx="minor">
+            <a:schemeClr val="tx1"/>
+          </a:fontRef>
+        </p:style>
+      </p:cxnSp>
+      <p:sp>
+        <p:nvSpPr>
+          <p:cNvPr id="10" name="文本框 9"/>
+          <p:cNvSpPr txBox="1"/>
+          <p:nvPr/>
+        </p:nvSpPr>
+        <p:spPr>
+          <a:xfrm rot="780000">
+            <a:off x="2308860" y="4079240"/>
+            <a:ext cx="1363980" cy="298450"/>
+          </a:xfrm>
+          <a:prstGeom prst="rect">
+            <a:avLst/>
+          </a:prstGeom>
+          <a:noFill/>
+        </p:spPr>
+        <p:txBody>
+          <a:bodyPr wrap="square" rtlCol="0">
+            <a:noAutofit/>
+          </a:bodyPr>
+          <a:p>
+            <a:pPr algn="ctr"/>
+            <a:r>
+              <a:rPr lang="en-US" altLang="zh-CN">
+                <a:latin typeface="Times New Roman" panose="02020603050405020304" charset="0"/>
+                <a:cs typeface="Times New Roman" panose="02020603050405020304" charset="0"/>
+              </a:rPr>
+              <a:t>Password</a:t>
+            </a:r>
+            <a:endParaRPr lang="en-US" altLang="zh-CN">
+              <a:latin typeface="Times New Roman" panose="02020603050405020304" charset="0"/>
+              <a:cs typeface="Times New Roman" panose="02020603050405020304" charset="0"/>
+            </a:endParaRPr>
+          </a:p>
+        </p:txBody>
+      </p:sp>
+      <p:cxnSp>
+        <p:nvCxnSpPr>
+          <p:cNvPr id="35" name="直接连接符 34"/>
+          <p:cNvCxnSpPr/>
+          <p:nvPr/>
+        </p:nvCxnSpPr>
+        <p:spPr>
+          <a:xfrm>
+            <a:off x="4384005" y="3249137"/>
+            <a:ext cx="0" cy="720000"/>
           </a:xfrm>
           <a:prstGeom prst="line">
             <a:avLst/>
@@ -5691,77 +5473,103 @@
           </a:fontRef>
         </p:style>
       </p:cxnSp>
-      <p:sp>
-        <p:nvSpPr>
-          <p:cNvPr id="26" name="矩形 25">
+      <p:pic>
+        <p:nvPicPr>
+          <p:cNvPr id="11" name="图片 10" descr="服务器"/>
+          <p:cNvPicPr>
+            <a:picLocks noChangeAspect="1"/>
+          </p:cNvPicPr>
+          <p:nvPr/>
+        </p:nvPicPr>
+        <p:blipFill>
+          <a:blip r:embed="rId9">
             <a:extLst>
-              <a:ext uri="{FF2B5EF4-FFF2-40B4-BE49-F238E27FC236}">
-                <a16:creationId xmlns:a16="http://schemas.microsoft.com/office/drawing/2014/main" id="{BA514BE7-572E-4D2A-B6D5-618C638F2146}"/>
+              <a:ext uri="{96DAC541-7B7A-43D3-8B79-37D633B846F1}">
+                <asvg:svgBlip xmlns:asvg="http://schemas.microsoft.com/office/drawing/2016/SVG/main" r:embed="rId10"/>
               </a:ext>
             </a:extLst>
-          </p:cNvPr>
-          <p:cNvSpPr/>
-          <p:nvPr/>
-        </p:nvSpPr>
-        <p:spPr>
-          <a:xfrm>
-            <a:off x="6330217" y="2772833"/>
-            <a:ext cx="2678316" cy="943831"/>
+          </a:blip>
+          <a:stretch>
+            <a:fillRect/>
+          </a:stretch>
+        </p:blipFill>
+        <p:spPr>
+          <a:xfrm>
+            <a:off x="6432550" y="1451610"/>
+            <a:ext cx="1080000" cy="1080000"/>
+          </a:xfrm>
+          <a:prstGeom prst="rect">
+            <a:avLst/>
+          </a:prstGeom>
+        </p:spPr>
+      </p:pic>
+      <p:sp>
+        <p:nvSpPr>
+          <p:cNvPr id="12" name="文本框 11"/>
+          <p:cNvSpPr txBox="1"/>
+          <p:nvPr/>
+        </p:nvSpPr>
+        <p:spPr>
+          <a:xfrm>
+            <a:off x="6206490" y="2541270"/>
+            <a:ext cx="1532890" cy="638175"/>
           </a:xfrm>
           <a:prstGeom prst="rect">
             <a:avLst/>
           </a:prstGeom>
           <a:noFill/>
-          <a:ln w="19050">
-            <a:solidFill>
-              <a:schemeClr val="tx1"/>
-            </a:solidFill>
-            <a:prstDash val="dash"/>
-          </a:ln>
-        </p:spPr>
-        <p:style>
-          <a:lnRef idx="2">
-            <a:schemeClr val="accent1">
-              <a:shade val="50000"/>
-            </a:schemeClr>
-          </a:lnRef>
-          <a:fillRef idx="1">
-            <a:schemeClr val="accent1"/>
-          </a:fillRef>
-          <a:effectRef idx="0">
-            <a:schemeClr val="accent1"/>
-          </a:effectRef>
-          <a:fontRef idx="minor">
-            <a:schemeClr val="lt1"/>
-          </a:fontRef>
-        </p:style>
-        <p:txBody>
-          <a:bodyPr rtlCol="0" anchor="ctr"/>
-          <a:lstStyle/>
+        </p:spPr>
+        <p:txBody>
+          <a:bodyPr wrap="square" rtlCol="0">
+            <a:noAutofit/>
+          </a:bodyPr>
           <a:p>
             <a:pPr algn="ctr"/>
-            <a:endParaRPr lang="zh-CN" altLang="en-US"/>
+            <a:r>
+              <a:rPr lang="en-US" altLang="zh-CN">
+                <a:latin typeface="Times New Roman" panose="02020603050405020304" charset="0"/>
+                <a:cs typeface="Times New Roman" panose="02020603050405020304" charset="0"/>
+              </a:rPr>
+              <a:t>Merchant </a:t>
+            </a:r>
+            <a:endParaRPr lang="en-US" altLang="zh-CN">
+              <a:latin typeface="Times New Roman" panose="02020603050405020304" charset="0"/>
+              <a:cs typeface="Times New Roman" panose="02020603050405020304" charset="0"/>
+            </a:endParaRPr>
+          </a:p>
+          <a:p>
+            <a:pPr algn="ctr"/>
+            <a:r>
+              <a:rPr lang="en-US" altLang="zh-CN">
+                <a:latin typeface="Times New Roman" panose="02020603050405020304" charset="0"/>
+                <a:cs typeface="Times New Roman" panose="02020603050405020304" charset="0"/>
+              </a:rPr>
+              <a:t>S</a:t>
+            </a:r>
+            <a:r>
+              <a:rPr lang="en-US" altLang="zh-CN">
+                <a:latin typeface="Times New Roman" panose="02020603050405020304" charset="0"/>
+                <a:cs typeface="Times New Roman" panose="02020603050405020304" charset="0"/>
+              </a:rPr>
+              <a:t>erver</a:t>
+            </a:r>
+            <a:endParaRPr lang="en-US" altLang="zh-CN">
+              <a:latin typeface="Times New Roman" panose="02020603050405020304" charset="0"/>
+              <a:cs typeface="Times New Roman" panose="02020603050405020304" charset="0"/>
+            </a:endParaRPr>
           </a:p>
         </p:txBody>
       </p:sp>
       <p:cxnSp>
         <p:nvCxnSpPr>
-          <p:cNvPr id="27" name="直接连接符 26">
-            <a:extLst>
-              <a:ext uri="{FF2B5EF4-FFF2-40B4-BE49-F238E27FC236}">
-                <a16:creationId xmlns:a16="http://schemas.microsoft.com/office/drawing/2014/main" id="{3D094091-227D-4C59-AF51-27B2E7456E6C}"/>
-              </a:ext>
-            </a:extLst>
-          </p:cNvPr>
-          <p:cNvCxnSpPr>
-            <a:cxnSpLocks/>
-          </p:cNvCxnSpPr>
+          <p:cNvPr id="21" name="直接连接符 20"/>
+          <p:cNvCxnSpPr/>
           <p:nvPr/>
         </p:nvCxnSpPr>
         <p:spPr>
           <a:xfrm>
-            <a:off x="4108382" y="3945051"/>
-            <a:ext cx="801288" cy="0"/>
+            <a:off x="5465314" y="2039375"/>
+            <a:ext cx="868026" cy="0"/>
           </a:xfrm>
           <a:prstGeom prst="line">
             <a:avLst/>
@@ -5790,199 +5598,14 @@
       </p:cxnSp>
       <p:cxnSp>
         <p:nvCxnSpPr>
-          <p:cNvPr id="28" name="直接连接符 27">
-            <a:extLst>
-              <a:ext uri="{FF2B5EF4-FFF2-40B4-BE49-F238E27FC236}">
-                <a16:creationId xmlns:a16="http://schemas.microsoft.com/office/drawing/2014/main" id="{85E8AD09-7435-4480-9BAE-FE550F16F1D5}"/>
-              </a:ext>
-            </a:extLst>
-          </p:cNvPr>
-          <p:cNvCxnSpPr>
-            <a:cxnSpLocks/>
-          </p:cNvCxnSpPr>
+          <p:cNvPr id="14" name="直接连接符 13"/>
+          <p:cNvCxnSpPr/>
           <p:nvPr/>
         </p:nvCxnSpPr>
         <p:spPr>
-          <a:xfrm flipV="1">
-            <a:off x="5758195" y="3429000"/>
-            <a:ext cx="599354" cy="287664"/>
-          </a:xfrm>
-          <a:prstGeom prst="line">
-            <a:avLst/>
-          </a:prstGeom>
-          <a:ln w="19050">
-            <a:solidFill>
-              <a:schemeClr val="tx1"/>
-            </a:solidFill>
-            <a:prstDash val="dash"/>
-          </a:ln>
-        </p:spPr>
-        <p:style>
-          <a:lnRef idx="1">
-            <a:schemeClr val="accent1"/>
-          </a:lnRef>
-          <a:fillRef idx="0">
-            <a:schemeClr val="accent1"/>
-          </a:fillRef>
-          <a:effectRef idx="0">
-            <a:schemeClr val="accent1"/>
-          </a:effectRef>
-          <a:fontRef idx="minor">
-            <a:schemeClr val="tx1"/>
-          </a:fontRef>
-        </p:style>
-      </p:cxnSp>
-      <p:cxnSp>
-        <p:nvCxnSpPr>
-          <p:cNvPr id="30" name="直接连接符 29">
-            <a:extLst>
-              <a:ext uri="{FF2B5EF4-FFF2-40B4-BE49-F238E27FC236}">
-                <a16:creationId xmlns:a16="http://schemas.microsoft.com/office/drawing/2014/main" id="{98C627FC-47EF-4127-9325-1B948DB3509D}"/>
-              </a:ext>
-            </a:extLst>
-          </p:cNvPr>
-          <p:cNvCxnSpPr>
-            <a:cxnSpLocks/>
-          </p:cNvCxnSpPr>
-          <p:nvPr/>
-        </p:nvCxnSpPr>
-        <p:spPr>
-          <a:xfrm flipV="1">
-            <a:off x="1553633" y="2646250"/>
-            <a:ext cx="1407110" cy="782750"/>
-          </a:xfrm>
-          <a:prstGeom prst="line">
-            <a:avLst/>
-          </a:prstGeom>
-          <a:ln w="19050">
-            <a:solidFill>
-              <a:schemeClr val="tx1"/>
-            </a:solidFill>
-            <a:prstDash val="solid"/>
-            <a:tailEnd type="triangle"/>
-          </a:ln>
-        </p:spPr>
-        <p:style>
-          <a:lnRef idx="1">
-            <a:schemeClr val="accent1"/>
-          </a:lnRef>
-          <a:fillRef idx="0">
-            <a:schemeClr val="accent1"/>
-          </a:fillRef>
-          <a:effectRef idx="0">
-            <a:schemeClr val="accent1"/>
-          </a:effectRef>
-          <a:fontRef idx="minor">
-            <a:schemeClr val="tx1"/>
-          </a:fontRef>
-        </p:style>
-      </p:cxnSp>
-      <p:cxnSp>
-        <p:nvCxnSpPr>
-          <p:cNvPr id="32" name="直接连接符 31">
-            <a:extLst>
-              <a:ext uri="{FF2B5EF4-FFF2-40B4-BE49-F238E27FC236}">
-                <a16:creationId xmlns:a16="http://schemas.microsoft.com/office/drawing/2014/main" id="{558B4BD1-DCD3-43E6-A0E4-BA87D7E22145}"/>
-              </a:ext>
-            </a:extLst>
-          </p:cNvPr>
-          <p:cNvCxnSpPr>
-            <a:cxnSpLocks/>
-          </p:cNvCxnSpPr>
-          <p:nvPr/>
-        </p:nvCxnSpPr>
-        <p:spPr>
-          <a:xfrm>
-            <a:off x="1583967" y="3695821"/>
-            <a:ext cx="1296992" cy="159255"/>
-          </a:xfrm>
-          <a:prstGeom prst="line">
-            <a:avLst/>
-          </a:prstGeom>
-          <a:ln w="19050">
-            <a:solidFill>
-              <a:schemeClr val="tx1"/>
-            </a:solidFill>
-            <a:prstDash val="solid"/>
-          </a:ln>
-        </p:spPr>
-        <p:style>
-          <a:lnRef idx="1">
-            <a:schemeClr val="accent1"/>
-          </a:lnRef>
-          <a:fillRef idx="0">
-            <a:schemeClr val="accent1"/>
-          </a:fillRef>
-          <a:effectRef idx="0">
-            <a:schemeClr val="accent1"/>
-          </a:effectRef>
-          <a:fontRef idx="minor">
-            <a:schemeClr val="tx1"/>
-          </a:fontRef>
-        </p:style>
-      </p:cxnSp>
-      <p:cxnSp>
-        <p:nvCxnSpPr>
-          <p:cNvPr id="35" name="直接连接符 34">
-            <a:extLst>
-              <a:ext uri="{FF2B5EF4-FFF2-40B4-BE49-F238E27FC236}">
-                <a16:creationId xmlns:a16="http://schemas.microsoft.com/office/drawing/2014/main" id="{671A1DE4-9387-4BF5-B7F3-FB59587699DE}"/>
-              </a:ext>
-            </a:extLst>
-          </p:cNvPr>
-          <p:cNvCxnSpPr>
-            <a:cxnSpLocks/>
-          </p:cNvCxnSpPr>
-          <p:nvPr/>
-        </p:nvCxnSpPr>
-        <p:spPr>
-          <a:xfrm>
-            <a:off x="3361655" y="2937352"/>
-            <a:ext cx="0" cy="491648"/>
-          </a:xfrm>
-          <a:prstGeom prst="line">
-            <a:avLst/>
-          </a:prstGeom>
-          <a:ln w="19050">
-            <a:solidFill>
-              <a:schemeClr val="tx1"/>
-            </a:solidFill>
-            <a:prstDash val="solid"/>
-          </a:ln>
-        </p:spPr>
-        <p:style>
-          <a:lnRef idx="1">
-            <a:schemeClr val="accent1"/>
-          </a:lnRef>
-          <a:fillRef idx="0">
-            <a:schemeClr val="accent1"/>
-          </a:fillRef>
-          <a:effectRef idx="0">
-            <a:schemeClr val="accent1"/>
-          </a:effectRef>
-          <a:fontRef idx="minor">
-            <a:schemeClr val="tx1"/>
-          </a:fontRef>
-        </p:style>
-      </p:cxnSp>
-      <p:cxnSp>
-        <p:nvCxnSpPr>
-          <p:cNvPr id="43" name="直接连接符 42">
-            <a:extLst>
-              <a:ext uri="{FF2B5EF4-FFF2-40B4-BE49-F238E27FC236}">
-                <a16:creationId xmlns:a16="http://schemas.microsoft.com/office/drawing/2014/main" id="{05931D8D-670D-49FE-BAC8-89A875901535}"/>
-              </a:ext>
-            </a:extLst>
-          </p:cNvPr>
-          <p:cNvCxnSpPr>
-            <a:cxnSpLocks/>
-          </p:cNvCxnSpPr>
-          <p:nvPr/>
-        </p:nvCxnSpPr>
-        <p:spPr>
-          <a:xfrm>
-            <a:off x="7078542" y="3435367"/>
-            <a:ext cx="990191" cy="0"/>
+          <a:xfrm>
+            <a:off x="5465314" y="4682245"/>
+            <a:ext cx="868026" cy="0"/>
           </a:xfrm>
           <a:prstGeom prst="line">
             <a:avLst/>
@@ -6011,23 +5634,17 @@
       </p:cxnSp>
       <p:pic>
         <p:nvPicPr>
-          <p:cNvPr id="25" name="图片 27" descr="浏览器">
-            <a:extLst>
-              <a:ext uri="{FF2B5EF4-FFF2-40B4-BE49-F238E27FC236}">
-                <a16:creationId xmlns:a16="http://schemas.microsoft.com/office/drawing/2014/main" id="{ACC1E1F4-3BDF-448C-B2F9-85039A4C73DD}"/>
-              </a:ext>
-            </a:extLst>
-          </p:cNvPr>
+          <p:cNvPr id="15" name="图片 14" descr="收银台"/>
           <p:cNvPicPr>
             <a:picLocks noChangeAspect="1"/>
           </p:cNvPicPr>
           <p:nvPr/>
         </p:nvPicPr>
         <p:blipFill>
-          <a:blip r:embed="rId16">
+          <a:blip r:embed="rId11">
             <a:extLst>
               <a:ext uri="{96DAC541-7B7A-43D3-8B79-37D633B846F1}">
-                <asvg:svgBlip xmlns:asvg="http://schemas.microsoft.com/office/drawing/2016/SVG/main" r:embed="rId17"/>
+                <asvg:svgBlip xmlns:asvg="http://schemas.microsoft.com/office/drawing/2016/SVG/main" r:embed="rId12"/>
               </a:ext>
             </a:extLst>
           </a:blip>
@@ -6037,8 +5654,117 @@
         </p:blipFill>
         <p:spPr>
           <a:xfrm>
-            <a:off x="2920086" y="2044223"/>
-            <a:ext cx="860091" cy="860091"/>
+            <a:off x="6432550" y="4142740"/>
+            <a:ext cx="1080000" cy="1080000"/>
+          </a:xfrm>
+          <a:prstGeom prst="rect">
+            <a:avLst/>
+          </a:prstGeom>
+        </p:spPr>
+      </p:pic>
+      <p:sp>
+        <p:nvSpPr>
+          <p:cNvPr id="16" name="文本框 15"/>
+          <p:cNvSpPr txBox="1"/>
+          <p:nvPr/>
+        </p:nvSpPr>
+        <p:spPr>
+          <a:xfrm>
+            <a:off x="6206490" y="5053330"/>
+            <a:ext cx="1532890" cy="368300"/>
+          </a:xfrm>
+          <a:prstGeom prst="rect">
+            <a:avLst/>
+          </a:prstGeom>
+          <a:noFill/>
+        </p:spPr>
+        <p:txBody>
+          <a:bodyPr wrap="square" rtlCol="0">
+            <a:spAutoFit/>
+          </a:bodyPr>
+          <a:p>
+            <a:pPr algn="ctr"/>
+            <a:r>
+              <a:rPr lang="en-US" altLang="zh-CN">
+                <a:latin typeface="Times New Roman" panose="02020603050405020304" charset="0"/>
+                <a:cs typeface="Times New Roman" panose="02020603050405020304" charset="0"/>
+              </a:rPr>
+              <a:t>PS-S</a:t>
+            </a:r>
+            <a:r>
+              <a:rPr lang="en-US" altLang="zh-CN">
+                <a:latin typeface="Times New Roman" panose="02020603050405020304" charset="0"/>
+                <a:cs typeface="Times New Roman" panose="02020603050405020304" charset="0"/>
+              </a:rPr>
+              <a:t>erver</a:t>
+            </a:r>
+            <a:endParaRPr lang="en-US" altLang="zh-CN">
+              <a:latin typeface="Times New Roman" panose="02020603050405020304" charset="0"/>
+              <a:cs typeface="Times New Roman" panose="02020603050405020304" charset="0"/>
+            </a:endParaRPr>
+          </a:p>
+        </p:txBody>
+      </p:sp>
+      <p:cxnSp>
+        <p:nvCxnSpPr>
+          <p:cNvPr id="2" name="直接连接符 1"/>
+          <p:cNvCxnSpPr/>
+          <p:nvPr/>
+        </p:nvCxnSpPr>
+        <p:spPr>
+          <a:xfrm flipV="1">
+            <a:off x="7512554" y="3890400"/>
+            <a:ext cx="778510" cy="791845"/>
+          </a:xfrm>
+          <a:prstGeom prst="line">
+            <a:avLst/>
+          </a:prstGeom>
+          <a:ln w="19050">
+            <a:solidFill>
+              <a:srgbClr val="018A67"/>
+            </a:solidFill>
+            <a:prstDash val="dash"/>
+          </a:ln>
+        </p:spPr>
+        <p:style>
+          <a:lnRef idx="1">
+            <a:schemeClr val="accent1"/>
+          </a:lnRef>
+          <a:fillRef idx="0">
+            <a:schemeClr val="accent1"/>
+          </a:fillRef>
+          <a:effectRef idx="0">
+            <a:schemeClr val="accent1"/>
+          </a:effectRef>
+          <a:fontRef idx="minor">
+            <a:schemeClr val="tx1"/>
+          </a:fontRef>
+        </p:style>
+      </p:cxnSp>
+      <p:pic>
+        <p:nvPicPr>
+          <p:cNvPr id="13" name="图片 12" descr="钱币"/>
+          <p:cNvPicPr>
+            <a:picLocks noChangeAspect="1"/>
+          </p:cNvPicPr>
+          <p:nvPr/>
+        </p:nvPicPr>
+        <p:blipFill>
+          <a:blip r:embed="rId13">
+            <a:extLst>
+              <a:ext uri="{96DAC541-7B7A-43D3-8B79-37D633B846F1}">
+                <asvg:svgBlip xmlns:asvg="http://schemas.microsoft.com/office/drawing/2016/SVG/main" r:embed="rId14"/>
+              </a:ext>
+            </a:extLst>
+          </a:blip>
+          <a:stretch>
+            <a:fillRect/>
+          </a:stretch>
+        </p:blipFill>
+        <p:spPr>
+          <a:xfrm>
+            <a:off x="8376920" y="3068955"/>
+            <a:ext cx="720000" cy="720000"/>
           </a:xfrm>
           <a:prstGeom prst="rect">
             <a:avLst/>
@@ -6047,22 +5773,239 @@
       </p:pic>
       <p:cxnSp>
         <p:nvCxnSpPr>
-          <p:cNvPr id="31" name="直接连接符 30">
+          <p:cNvPr id="18" name="直接连接符 17"/>
+          <p:cNvCxnSpPr/>
+          <p:nvPr/>
+        </p:nvCxnSpPr>
+        <p:spPr>
+          <a:xfrm>
+            <a:off x="9168634" y="3428755"/>
+            <a:ext cx="1080000" cy="0"/>
+          </a:xfrm>
+          <a:prstGeom prst="line">
+            <a:avLst/>
+          </a:prstGeom>
+          <a:ln w="19050">
+            <a:solidFill>
+              <a:schemeClr val="tx1"/>
+            </a:solidFill>
+            <a:prstDash val="solid"/>
+          </a:ln>
+        </p:spPr>
+        <p:style>
+          <a:lnRef idx="1">
+            <a:schemeClr val="accent1"/>
+          </a:lnRef>
+          <a:fillRef idx="0">
+            <a:schemeClr val="accent1"/>
+          </a:fillRef>
+          <a:effectRef idx="0">
+            <a:schemeClr val="accent1"/>
+          </a:effectRef>
+          <a:fontRef idx="minor">
+            <a:schemeClr val="tx1"/>
+          </a:fontRef>
+        </p:style>
+      </p:cxnSp>
+      <p:pic>
+        <p:nvPicPr>
+          <p:cNvPr id="25" name="图片 24" descr="钱币"/>
+          <p:cNvPicPr>
+            <a:picLocks noChangeAspect="1"/>
+          </p:cNvPicPr>
+          <p:nvPr/>
+        </p:nvPicPr>
+        <p:blipFill>
+          <a:blip r:embed="rId13">
             <a:extLst>
-              <a:ext uri="{FF2B5EF4-FFF2-40B4-BE49-F238E27FC236}">
-                <a16:creationId xmlns:a16="http://schemas.microsoft.com/office/drawing/2014/main" id="{0981F5AB-AF89-4639-A248-749F459D1D8C}"/>
+              <a:ext uri="{96DAC541-7B7A-43D3-8B79-37D633B846F1}">
+                <asvg:svgBlip xmlns:asvg="http://schemas.microsoft.com/office/drawing/2016/SVG/main" r:embed="rId14"/>
               </a:ext>
             </a:extLst>
-          </p:cNvPr>
-          <p:cNvCxnSpPr>
-            <a:cxnSpLocks/>
-          </p:cNvCxnSpPr>
+          </a:blip>
+          <a:stretch>
+            <a:fillRect/>
+          </a:stretch>
+        </p:blipFill>
+        <p:spPr>
+          <a:xfrm>
+            <a:off x="10319385" y="3068955"/>
+            <a:ext cx="720000" cy="720000"/>
+          </a:xfrm>
+          <a:prstGeom prst="rect">
+            <a:avLst/>
+          </a:prstGeom>
+        </p:spPr>
+      </p:pic>
+      <p:pic>
+        <p:nvPicPr>
+          <p:cNvPr id="26" name="图片 25" descr="对"/>
+          <p:cNvPicPr>
+            <a:picLocks noChangeAspect="1"/>
+          </p:cNvPicPr>
+          <p:nvPr/>
+        </p:nvPicPr>
+        <p:blipFill>
+          <a:blip r:embed="rId15">
+            <a:extLst>
+              <a:ext uri="{96DAC541-7B7A-43D3-8B79-37D633B846F1}">
+                <asvg:svgBlip xmlns:asvg="http://schemas.microsoft.com/office/drawing/2016/SVG/main" r:embed="rId16"/>
+              </a:ext>
+            </a:extLst>
+          </a:blip>
+          <a:stretch>
+            <a:fillRect/>
+          </a:stretch>
+        </p:blipFill>
+        <p:spPr>
+          <a:xfrm>
+            <a:off x="9508490" y="2943225"/>
+            <a:ext cx="400685" cy="400685"/>
+          </a:xfrm>
+          <a:prstGeom prst="rect">
+            <a:avLst/>
+          </a:prstGeom>
+        </p:spPr>
+      </p:pic>
+      <p:sp>
+        <p:nvSpPr>
+          <p:cNvPr id="27" name="文本框 26"/>
+          <p:cNvSpPr txBox="1"/>
+          <p:nvPr/>
+        </p:nvSpPr>
+        <p:spPr>
+          <a:xfrm>
+            <a:off x="8942070" y="3514090"/>
+            <a:ext cx="1532890" cy="645160"/>
+          </a:xfrm>
+          <a:prstGeom prst="rect">
+            <a:avLst/>
+          </a:prstGeom>
+          <a:noFill/>
+        </p:spPr>
+        <p:txBody>
+          <a:bodyPr wrap="square" rtlCol="0">
+            <a:spAutoFit/>
+          </a:bodyPr>
+          <a:p>
+            <a:pPr algn="ctr"/>
+            <a:r>
+              <a:rPr lang="en-US" altLang="zh-CN">
+                <a:latin typeface="Times New Roman" panose="02020603050405020304" charset="0"/>
+                <a:cs typeface="Times New Roman" panose="02020603050405020304" charset="0"/>
+              </a:rPr>
+              <a:t>P</a:t>
+            </a:r>
+            <a:r>
+              <a:rPr lang="en-US" altLang="zh-CN">
+                <a:latin typeface="Times New Roman" panose="02020603050405020304" charset="0"/>
+                <a:cs typeface="Times New Roman" panose="02020603050405020304" charset="0"/>
+              </a:rPr>
+              <a:t>ayment Success</a:t>
+            </a:r>
+            <a:endParaRPr lang="en-US" altLang="zh-CN">
+              <a:latin typeface="Times New Roman" panose="02020603050405020304" charset="0"/>
+              <a:cs typeface="Times New Roman" panose="02020603050405020304" charset="0"/>
+            </a:endParaRPr>
+          </a:p>
+        </p:txBody>
+      </p:sp>
+      <p:sp>
+        <p:nvSpPr>
+          <p:cNvPr id="28" name="矩形 27"/>
+          <p:cNvSpPr/>
+          <p:nvPr/>
+        </p:nvSpPr>
+        <p:spPr>
+          <a:xfrm>
+            <a:off x="8295005" y="2736215"/>
+            <a:ext cx="2907030" cy="1487170"/>
+          </a:xfrm>
+          <a:prstGeom prst="rect">
+            <a:avLst/>
+          </a:prstGeom>
+          <a:noFill/>
+          <a:ln w="19050">
+            <a:solidFill>
+              <a:srgbClr val="018A67"/>
+            </a:solidFill>
+            <a:prstDash val="dash"/>
+          </a:ln>
+        </p:spPr>
+        <p:style>
+          <a:lnRef idx="2">
+            <a:schemeClr val="accent1">
+              <a:shade val="50000"/>
+            </a:schemeClr>
+          </a:lnRef>
+          <a:fillRef idx="1">
+            <a:schemeClr val="accent1"/>
+          </a:fillRef>
+          <a:effectRef idx="0">
+            <a:schemeClr val="accent1"/>
+          </a:effectRef>
+          <a:fontRef idx="minor">
+            <a:schemeClr val="lt1"/>
+          </a:fontRef>
+        </p:style>
+        <p:txBody>
+          <a:bodyPr rtlCol="0" anchor="ctr"/>
+          <a:lstStyle/>
+          <a:p>
+            <a:pPr algn="ctr"/>
+            <a:endParaRPr lang="zh-CN" altLang="en-US">
+              <a:latin typeface="Times New Roman" panose="02020603050405020304" charset="0"/>
+              <a:cs typeface="Times New Roman" panose="02020603050405020304" charset="0"/>
+            </a:endParaRPr>
+          </a:p>
+        </p:txBody>
+      </p:sp>
+      <p:sp>
+        <p:nvSpPr>
+          <p:cNvPr id="30" name="文本框 29"/>
+          <p:cNvSpPr txBox="1"/>
+          <p:nvPr/>
+        </p:nvSpPr>
+        <p:spPr>
+          <a:xfrm>
+            <a:off x="4385945" y="3380740"/>
+            <a:ext cx="709930" cy="346710"/>
+          </a:xfrm>
+          <a:prstGeom prst="rect">
+            <a:avLst/>
+          </a:prstGeom>
+          <a:noFill/>
+        </p:spPr>
+        <p:txBody>
+          <a:bodyPr wrap="square" rtlCol="0">
+            <a:noAutofit/>
+          </a:bodyPr>
+          <a:p>
+            <a:pPr algn="ctr"/>
+            <a:r>
+              <a:rPr lang="en-US" altLang="zh-CN">
+                <a:latin typeface="Times New Roman" panose="02020603050405020304" charset="0"/>
+                <a:cs typeface="Times New Roman" panose="02020603050405020304" charset="0"/>
+              </a:rPr>
+              <a:t>SDK</a:t>
+            </a:r>
+            <a:endParaRPr lang="en-US" altLang="zh-CN">
+              <a:latin typeface="Times New Roman" panose="02020603050405020304" charset="0"/>
+              <a:cs typeface="Times New Roman" panose="02020603050405020304" charset="0"/>
+            </a:endParaRPr>
+          </a:p>
+        </p:txBody>
+      </p:sp>
+      <p:cxnSp>
+        <p:nvCxnSpPr>
+          <p:cNvPr id="31" name="直接连接符 30"/>
+          <p:cNvCxnSpPr/>
           <p:nvPr/>
         </p:nvCxnSpPr>
         <p:spPr>
           <a:xfrm>
-            <a:off x="5393655" y="2937352"/>
-            <a:ext cx="0" cy="491648"/>
+            <a:off x="6972900" y="3252947"/>
+            <a:ext cx="0" cy="720000"/>
           </a:xfrm>
           <a:prstGeom prst="line">
             <a:avLst/>
@@ -6090,11 +6033,6 @@
         </p:style>
       </p:cxnSp>
     </p:spTree>
-    <p:extLst>
-      <p:ext uri="{BB962C8B-B14F-4D97-AF65-F5344CB8AC3E}">
-        <p14:creationId xmlns:p14="http://schemas.microsoft.com/office/powerpoint/2010/main" val="3677987061"/>
-      </p:ext>
-    </p:extLst>
   </p:cSld>
   <p:clrMapOvr>
     <a:masterClrMapping/>
@@ -6121,26 +6059,20 @@
       </p:grpSpPr>
       <p:pic>
         <p:nvPicPr>
-          <p:cNvPr id="5" name="图形 4">
-            <a:extLst>
-              <a:ext uri="{FF2B5EF4-FFF2-40B4-BE49-F238E27FC236}">
-                <a16:creationId xmlns:a16="http://schemas.microsoft.com/office/drawing/2014/main" id="{BB9D3B68-A8D6-44CD-8B81-6ED116E58AA1}"/>
-              </a:ext>
-            </a:extLst>
-          </p:cNvPr>
+          <p:cNvPr id="5" name="图形 4"/>
           <p:cNvPicPr>
             <a:picLocks noChangeAspect="1"/>
           </p:cNvPicPr>
           <p:nvPr/>
         </p:nvPicPr>
         <p:blipFill>
-          <a:blip r:embed="rId2" cstate="print">
+          <a:blip r:embed="rId1" cstate="print">
             <a:extLst>
               <a:ext uri="{28A0092B-C50C-407E-A947-70E740481C1C}">
                 <a14:useLocalDpi xmlns:a14="http://schemas.microsoft.com/office/drawing/2010/main" val="0"/>
               </a:ext>
               <a:ext uri="{96DAC541-7B7A-43D3-8B79-37D633B846F1}">
-                <asvg:svgBlip xmlns:asvg="http://schemas.microsoft.com/office/drawing/2016/SVG/main" r:embed="rId3"/>
+                <asvg:svgBlip xmlns:asvg="http://schemas.microsoft.com/office/drawing/2016/SVG/main" r:embed="rId2"/>
               </a:ext>
             </a:extLst>
           </a:blip>
@@ -6150,7 +6082,7 @@
         </p:blipFill>
         <p:spPr>
           <a:xfrm>
-            <a:off x="2822362" y="2921709"/>
+            <a:off x="871642" y="3209373"/>
             <a:ext cx="720000" cy="720000"/>
           </a:xfrm>
           <a:prstGeom prst="rect">
@@ -6160,26 +6092,20 @@
       </p:pic>
       <p:pic>
         <p:nvPicPr>
-          <p:cNvPr id="7" name="图形 6">
-            <a:extLst>
-              <a:ext uri="{FF2B5EF4-FFF2-40B4-BE49-F238E27FC236}">
-                <a16:creationId xmlns:a16="http://schemas.microsoft.com/office/drawing/2014/main" id="{75385AB8-939E-44DA-ACDB-7031E32663CD}"/>
-              </a:ext>
-            </a:extLst>
-          </p:cNvPr>
+          <p:cNvPr id="7" name="图形 6"/>
           <p:cNvPicPr>
             <a:picLocks noChangeAspect="1"/>
           </p:cNvPicPr>
           <p:nvPr/>
         </p:nvPicPr>
         <p:blipFill>
-          <a:blip r:embed="rId4" cstate="print">
+          <a:blip r:embed="rId3" cstate="print">
             <a:extLst>
               <a:ext uri="{28A0092B-C50C-407E-A947-70E740481C1C}">
                 <a14:useLocalDpi xmlns:a14="http://schemas.microsoft.com/office/drawing/2010/main" val="0"/>
               </a:ext>
               <a:ext uri="{96DAC541-7B7A-43D3-8B79-37D633B846F1}">
-                <asvg:svgBlip xmlns:asvg="http://schemas.microsoft.com/office/drawing/2016/SVG/main" r:embed="rId5"/>
+                <asvg:svgBlip xmlns:asvg="http://schemas.microsoft.com/office/drawing/2016/SVG/main" r:embed="rId4"/>
               </a:ext>
             </a:extLst>
           </a:blip>
@@ -6189,7 +6115,7 @@
         </p:blipFill>
         <p:spPr>
           <a:xfrm>
-            <a:off x="3560303" y="4177618"/>
+            <a:off x="1016215" y="1907232"/>
             <a:ext cx="720000" cy="720000"/>
           </a:xfrm>
           <a:prstGeom prst="rect">
@@ -6199,20 +6125,14 @@
       </p:pic>
       <p:sp>
         <p:nvSpPr>
-          <p:cNvPr id="10" name="矩形 9">
-            <a:extLst>
-              <a:ext uri="{FF2B5EF4-FFF2-40B4-BE49-F238E27FC236}">
-                <a16:creationId xmlns:a16="http://schemas.microsoft.com/office/drawing/2014/main" id="{F44B072C-BABD-4291-96B5-5770CF184958}"/>
-              </a:ext>
-            </a:extLst>
-          </p:cNvPr>
+          <p:cNvPr id="10" name="矩形 9"/>
           <p:cNvSpPr/>
           <p:nvPr/>
         </p:nvSpPr>
         <p:spPr>
           <a:xfrm>
-            <a:off x="4737642" y="3834233"/>
-            <a:ext cx="1149465" cy="1031082"/>
+            <a:off x="2743600" y="2056451"/>
+            <a:ext cx="1236110" cy="2325262"/>
           </a:xfrm>
           <a:prstGeom prst="rect">
             <a:avLst/>
@@ -6252,26 +6172,20 @@
       </p:sp>
       <p:pic>
         <p:nvPicPr>
-          <p:cNvPr id="11" name="图形 10">
-            <a:extLst>
-              <a:ext uri="{FF2B5EF4-FFF2-40B4-BE49-F238E27FC236}">
-                <a16:creationId xmlns:a16="http://schemas.microsoft.com/office/drawing/2014/main" id="{B92E4E53-D55A-4799-A765-82D43E0C8FD6}"/>
-              </a:ext>
-            </a:extLst>
-          </p:cNvPr>
+          <p:cNvPr id="11" name="图形 10"/>
           <p:cNvPicPr>
             <a:picLocks noChangeAspect="1"/>
           </p:cNvPicPr>
           <p:nvPr/>
         </p:nvPicPr>
         <p:blipFill>
-          <a:blip r:embed="rId6" cstate="print">
+          <a:blip r:embed="rId5" cstate="print">
             <a:extLst>
               <a:ext uri="{28A0092B-C50C-407E-A947-70E740481C1C}">
                 <a14:useLocalDpi xmlns:a14="http://schemas.microsoft.com/office/drawing/2010/main" val="0"/>
               </a:ext>
               <a:ext uri="{96DAC541-7B7A-43D3-8B79-37D633B846F1}">
-                <asvg:svgBlip xmlns:asvg="http://schemas.microsoft.com/office/drawing/2016/SVG/main" r:embed="rId7"/>
+                <asvg:svgBlip xmlns:asvg="http://schemas.microsoft.com/office/drawing/2016/SVG/main" r:embed="rId6"/>
               </a:ext>
             </a:extLst>
           </a:blip>
@@ -6281,7 +6195,7 @@
         </p:blipFill>
         <p:spPr>
           <a:xfrm>
-            <a:off x="6586853" y="4004457"/>
+            <a:off x="5055097" y="3495076"/>
             <a:ext cx="720000" cy="720000"/>
           </a:xfrm>
           <a:prstGeom prst="rect">
@@ -6291,26 +6205,20 @@
       </p:pic>
       <p:pic>
         <p:nvPicPr>
-          <p:cNvPr id="12" name="图形 11">
-            <a:extLst>
-              <a:ext uri="{FF2B5EF4-FFF2-40B4-BE49-F238E27FC236}">
-                <a16:creationId xmlns:a16="http://schemas.microsoft.com/office/drawing/2014/main" id="{C06C01B9-3380-4991-8630-4C02F80A7B96}"/>
-              </a:ext>
-            </a:extLst>
-          </p:cNvPr>
+          <p:cNvPr id="12" name="图形 11"/>
           <p:cNvPicPr>
             <a:picLocks noChangeAspect="1"/>
           </p:cNvPicPr>
           <p:nvPr/>
         </p:nvPicPr>
         <p:blipFill>
-          <a:blip r:embed="rId8" cstate="print">
+          <a:blip r:embed="rId7" cstate="print">
             <a:extLst>
               <a:ext uri="{28A0092B-C50C-407E-A947-70E740481C1C}">
                 <a14:useLocalDpi xmlns:a14="http://schemas.microsoft.com/office/drawing/2010/main" val="0"/>
               </a:ext>
               <a:ext uri="{96DAC541-7B7A-43D3-8B79-37D633B846F1}">
-                <asvg:svgBlip xmlns:asvg="http://schemas.microsoft.com/office/drawing/2016/SVG/main" r:embed="rId9"/>
+                <asvg:svgBlip xmlns:asvg="http://schemas.microsoft.com/office/drawing/2016/SVG/main" r:embed="rId8"/>
               </a:ext>
             </a:extLst>
           </a:blip>
@@ -6320,7 +6228,7 @@
         </p:blipFill>
         <p:spPr>
           <a:xfrm>
-            <a:off x="4976873" y="3945870"/>
+            <a:off x="3041465" y="3495076"/>
             <a:ext cx="720000" cy="720000"/>
           </a:xfrm>
           <a:prstGeom prst="rect">
@@ -6330,26 +6238,20 @@
       </p:pic>
       <p:pic>
         <p:nvPicPr>
-          <p:cNvPr id="13" name="图形 12">
-            <a:extLst>
-              <a:ext uri="{FF2B5EF4-FFF2-40B4-BE49-F238E27FC236}">
-                <a16:creationId xmlns:a16="http://schemas.microsoft.com/office/drawing/2014/main" id="{D52C92ED-B761-45CD-B8C6-CEE6CA25D9BE}"/>
-              </a:ext>
-            </a:extLst>
-          </p:cNvPr>
+          <p:cNvPr id="13" name="图形 12"/>
           <p:cNvPicPr>
             <a:picLocks noChangeAspect="1"/>
           </p:cNvPicPr>
           <p:nvPr/>
         </p:nvPicPr>
         <p:blipFill>
-          <a:blip r:embed="rId10" cstate="print">
+          <a:blip r:embed="rId9" cstate="print">
             <a:extLst>
               <a:ext uri="{28A0092B-C50C-407E-A947-70E740481C1C}">
                 <a14:useLocalDpi xmlns:a14="http://schemas.microsoft.com/office/drawing/2010/main" val="0"/>
               </a:ext>
               <a:ext uri="{96DAC541-7B7A-43D3-8B79-37D633B846F1}">
-                <asvg:svgBlip xmlns:asvg="http://schemas.microsoft.com/office/drawing/2016/SVG/main" r:embed="rId11"/>
+                <asvg:svgBlip xmlns:asvg="http://schemas.microsoft.com/office/drawing/2016/SVG/main" r:embed="rId10"/>
               </a:ext>
             </a:extLst>
           </a:blip>
@@ -6359,7 +6261,7 @@
         </p:blipFill>
         <p:spPr>
           <a:xfrm>
-            <a:off x="7537211" y="2805976"/>
+            <a:off x="6373891" y="2955389"/>
             <a:ext cx="720000" cy="720000"/>
           </a:xfrm>
           <a:prstGeom prst="rect">
@@ -6369,26 +6271,20 @@
       </p:pic>
       <p:pic>
         <p:nvPicPr>
-          <p:cNvPr id="14" name="图形 13">
-            <a:extLst>
-              <a:ext uri="{FF2B5EF4-FFF2-40B4-BE49-F238E27FC236}">
-                <a16:creationId xmlns:a16="http://schemas.microsoft.com/office/drawing/2014/main" id="{95F0369A-BC2F-49E8-A2CB-8394A2E4E8B3}"/>
-              </a:ext>
-            </a:extLst>
-          </p:cNvPr>
+          <p:cNvPr id="14" name="图形 13"/>
           <p:cNvPicPr>
             <a:picLocks noChangeAspect="1"/>
           </p:cNvPicPr>
           <p:nvPr/>
         </p:nvPicPr>
         <p:blipFill>
-          <a:blip r:embed="rId12" cstate="print">
+          <a:blip r:embed="rId11" cstate="print">
             <a:extLst>
               <a:ext uri="{28A0092B-C50C-407E-A947-70E740481C1C}">
                 <a14:useLocalDpi xmlns:a14="http://schemas.microsoft.com/office/drawing/2010/main" val="0"/>
               </a:ext>
               <a:ext uri="{96DAC541-7B7A-43D3-8B79-37D633B846F1}">
-                <asvg:svgBlip xmlns:asvg="http://schemas.microsoft.com/office/drawing/2016/SVG/main" r:embed="rId13"/>
+                <asvg:svgBlip xmlns:asvg="http://schemas.microsoft.com/office/drawing/2016/SVG/main" r:embed="rId12"/>
               </a:ext>
             </a:extLst>
           </a:blip>
@@ -6398,7 +6294,7 @@
         </p:blipFill>
         <p:spPr>
           <a:xfrm>
-            <a:off x="8484895" y="2708360"/>
+            <a:off x="7321575" y="2857773"/>
             <a:ext cx="495891" cy="495891"/>
           </a:xfrm>
           <a:prstGeom prst="rect">
@@ -6408,26 +6304,20 @@
       </p:pic>
       <p:pic>
         <p:nvPicPr>
-          <p:cNvPr id="15" name="图形 14">
-            <a:extLst>
-              <a:ext uri="{FF2B5EF4-FFF2-40B4-BE49-F238E27FC236}">
-                <a16:creationId xmlns:a16="http://schemas.microsoft.com/office/drawing/2014/main" id="{082CE4FA-6FD3-499E-84AE-BD5771E3E031}"/>
-              </a:ext>
-            </a:extLst>
-          </p:cNvPr>
+          <p:cNvPr id="15" name="图形 14"/>
           <p:cNvPicPr>
             <a:picLocks noChangeAspect="1"/>
           </p:cNvPicPr>
           <p:nvPr/>
         </p:nvPicPr>
         <p:blipFill>
-          <a:blip r:embed="rId10" cstate="print">
+          <a:blip r:embed="rId9" cstate="print">
             <a:extLst>
               <a:ext uri="{28A0092B-C50C-407E-A947-70E740481C1C}">
                 <a14:useLocalDpi xmlns:a14="http://schemas.microsoft.com/office/drawing/2010/main" val="0"/>
               </a:ext>
               <a:ext uri="{96DAC541-7B7A-43D3-8B79-37D633B846F1}">
-                <asvg:svgBlip xmlns:asvg="http://schemas.microsoft.com/office/drawing/2016/SVG/main" r:embed="rId11"/>
+                <asvg:svgBlip xmlns:asvg="http://schemas.microsoft.com/office/drawing/2016/SVG/main" r:embed="rId10"/>
               </a:ext>
             </a:extLst>
           </a:blip>
@@ -6437,7 +6327,7 @@
         </p:blipFill>
         <p:spPr>
           <a:xfrm>
-            <a:off x="9258346" y="2769006"/>
+            <a:off x="8095026" y="2918419"/>
             <a:ext cx="720000" cy="720000"/>
           </a:xfrm>
           <a:prstGeom prst="rect">
@@ -6447,26 +6337,20 @@
       </p:pic>
       <p:pic>
         <p:nvPicPr>
-          <p:cNvPr id="16" name="图形 15">
-            <a:extLst>
-              <a:ext uri="{FF2B5EF4-FFF2-40B4-BE49-F238E27FC236}">
-                <a16:creationId xmlns:a16="http://schemas.microsoft.com/office/drawing/2014/main" id="{BCD11C9B-3887-455E-A57E-5568D31DD587}"/>
-              </a:ext>
-            </a:extLst>
-          </p:cNvPr>
+          <p:cNvPr id="16" name="图形 15"/>
           <p:cNvPicPr>
             <a:picLocks noChangeAspect="1"/>
           </p:cNvPicPr>
           <p:nvPr/>
         </p:nvPicPr>
         <p:blipFill>
-          <a:blip r:embed="rId14" cstate="print">
+          <a:blip r:embed="rId13" cstate="print">
             <a:extLst>
               <a:ext uri="{28A0092B-C50C-407E-A947-70E740481C1C}">
                 <a14:useLocalDpi xmlns:a14="http://schemas.microsoft.com/office/drawing/2010/main" val="0"/>
               </a:ext>
               <a:ext uri="{96DAC541-7B7A-43D3-8B79-37D633B846F1}">
-                <asvg:svgBlip xmlns:asvg="http://schemas.microsoft.com/office/drawing/2016/SVG/main" r:embed="rId15"/>
+                <asvg:svgBlip xmlns:asvg="http://schemas.microsoft.com/office/drawing/2016/SVG/main" r:embed="rId14"/>
               </a:ext>
             </a:extLst>
           </a:blip>
@@ -6476,7 +6360,7 @@
         </p:blipFill>
         <p:spPr>
           <a:xfrm>
-            <a:off x="6636830" y="1773544"/>
+            <a:off x="5055097" y="2128784"/>
             <a:ext cx="720000" cy="720000"/>
           </a:xfrm>
           <a:prstGeom prst="rect">
@@ -6486,22 +6370,14 @@
       </p:pic>
       <p:cxnSp>
         <p:nvCxnSpPr>
-          <p:cNvPr id="18" name="直接连接符 17">
-            <a:extLst>
-              <a:ext uri="{FF2B5EF4-FFF2-40B4-BE49-F238E27FC236}">
-                <a16:creationId xmlns:a16="http://schemas.microsoft.com/office/drawing/2014/main" id="{A9DC3881-56D7-47A3-AD49-C64C1EA78E23}"/>
-              </a:ext>
-            </a:extLst>
-          </p:cNvPr>
-          <p:cNvCxnSpPr>
-            <a:cxnSpLocks/>
-          </p:cNvCxnSpPr>
+          <p:cNvPr id="18" name="直接连接符 17"/>
+          <p:cNvCxnSpPr/>
           <p:nvPr/>
         </p:nvCxnSpPr>
         <p:spPr>
           <a:xfrm>
-            <a:off x="4265623" y="4414892"/>
-            <a:ext cx="516571" cy="0"/>
+            <a:off x="1794895" y="2291226"/>
+            <a:ext cx="936438" cy="0"/>
           </a:xfrm>
           <a:prstGeom prst="line">
             <a:avLst/>
@@ -6530,21 +6406,13 @@
       </p:cxnSp>
       <p:cxnSp>
         <p:nvCxnSpPr>
-          <p:cNvPr id="21" name="直接连接符 20">
-            <a:extLst>
-              <a:ext uri="{FF2B5EF4-FFF2-40B4-BE49-F238E27FC236}">
-                <a16:creationId xmlns:a16="http://schemas.microsoft.com/office/drawing/2014/main" id="{D9254353-8002-4DA4-A0C0-ED85CDB2BA21}"/>
-              </a:ext>
-            </a:extLst>
-          </p:cNvPr>
-          <p:cNvCxnSpPr>
-            <a:cxnSpLocks/>
-          </p:cNvCxnSpPr>
+          <p:cNvPr id="21" name="直接连接符 20"/>
+          <p:cNvCxnSpPr/>
           <p:nvPr/>
         </p:nvCxnSpPr>
         <p:spPr>
           <a:xfrm>
-            <a:off x="5763907" y="2144911"/>
+            <a:off x="4041644" y="2454030"/>
             <a:ext cx="868026" cy="0"/>
           </a:xfrm>
           <a:prstGeom prst="line">
@@ -6574,19 +6442,13 @@
       </p:cxnSp>
       <p:sp>
         <p:nvSpPr>
-          <p:cNvPr id="26" name="矩形 25">
-            <a:extLst>
-              <a:ext uri="{FF2B5EF4-FFF2-40B4-BE49-F238E27FC236}">
-                <a16:creationId xmlns:a16="http://schemas.microsoft.com/office/drawing/2014/main" id="{BA514BE7-572E-4D2A-B6D5-618C638F2146}"/>
-              </a:ext>
-            </a:extLst>
-          </p:cNvPr>
+          <p:cNvPr id="26" name="矩形 25"/>
           <p:cNvSpPr/>
           <p:nvPr/>
         </p:nvSpPr>
         <p:spPr>
           <a:xfrm>
-            <a:off x="7493537" y="2623420"/>
+            <a:off x="6330217" y="2772833"/>
             <a:ext cx="2678316" cy="943831"/>
           </a:xfrm>
           <a:prstGeom prst="rect">
@@ -6627,21 +6489,13 @@
       </p:sp>
       <p:cxnSp>
         <p:nvCxnSpPr>
-          <p:cNvPr id="27" name="直接连接符 26">
-            <a:extLst>
-              <a:ext uri="{FF2B5EF4-FFF2-40B4-BE49-F238E27FC236}">
-                <a16:creationId xmlns:a16="http://schemas.microsoft.com/office/drawing/2014/main" id="{3D094091-227D-4C59-AF51-27B2E7456E6C}"/>
-              </a:ext>
-            </a:extLst>
-          </p:cNvPr>
-          <p:cNvCxnSpPr>
-            <a:cxnSpLocks/>
-          </p:cNvCxnSpPr>
+          <p:cNvPr id="27" name="直接连接符 26"/>
+          <p:cNvCxnSpPr/>
           <p:nvPr/>
         </p:nvCxnSpPr>
         <p:spPr>
           <a:xfrm>
-            <a:off x="5741219" y="4381899"/>
+            <a:off x="4108382" y="3945051"/>
             <a:ext cx="801288" cy="0"/>
           </a:xfrm>
           <a:prstGeom prst="line">
@@ -6671,22 +6525,14 @@
       </p:cxnSp>
       <p:cxnSp>
         <p:nvCxnSpPr>
-          <p:cNvPr id="28" name="直接连接符 27">
-            <a:extLst>
-              <a:ext uri="{FF2B5EF4-FFF2-40B4-BE49-F238E27FC236}">
-                <a16:creationId xmlns:a16="http://schemas.microsoft.com/office/drawing/2014/main" id="{85E8AD09-7435-4480-9BAE-FE550F16F1D5}"/>
-              </a:ext>
-            </a:extLst>
-          </p:cNvPr>
-          <p:cNvCxnSpPr>
-            <a:cxnSpLocks/>
-          </p:cNvCxnSpPr>
+          <p:cNvPr id="28" name="直接连接符 27"/>
+          <p:cNvCxnSpPr/>
           <p:nvPr/>
         </p:nvCxnSpPr>
         <p:spPr>
           <a:xfrm flipV="1">
-            <a:off x="7180520" y="3758687"/>
-            <a:ext cx="490150" cy="342916"/>
+            <a:off x="5758195" y="3429000"/>
+            <a:ext cx="599354" cy="287664"/>
           </a:xfrm>
           <a:prstGeom prst="line">
             <a:avLst/>
@@ -6715,21 +6561,13 @@
       </p:cxnSp>
       <p:cxnSp>
         <p:nvCxnSpPr>
-          <p:cNvPr id="30" name="直接连接符 29">
-            <a:extLst>
-              <a:ext uri="{FF2B5EF4-FFF2-40B4-BE49-F238E27FC236}">
-                <a16:creationId xmlns:a16="http://schemas.microsoft.com/office/drawing/2014/main" id="{98C627FC-47EF-4127-9325-1B948DB3509D}"/>
-              </a:ext>
-            </a:extLst>
-          </p:cNvPr>
-          <p:cNvCxnSpPr>
-            <a:cxnSpLocks/>
-          </p:cNvCxnSpPr>
+          <p:cNvPr id="30" name="直接连接符 29"/>
+          <p:cNvCxnSpPr/>
           <p:nvPr/>
         </p:nvCxnSpPr>
         <p:spPr>
           <a:xfrm flipV="1">
-            <a:off x="3504353" y="2358586"/>
+            <a:off x="1553633" y="2646250"/>
             <a:ext cx="1407110" cy="782750"/>
           </a:xfrm>
           <a:prstGeom prst="line">
@@ -6760,22 +6598,14 @@
       </p:cxnSp>
       <p:cxnSp>
         <p:nvCxnSpPr>
-          <p:cNvPr id="32" name="直接连接符 31">
-            <a:extLst>
-              <a:ext uri="{FF2B5EF4-FFF2-40B4-BE49-F238E27FC236}">
-                <a16:creationId xmlns:a16="http://schemas.microsoft.com/office/drawing/2014/main" id="{558B4BD1-DCD3-43E6-A0E4-BA87D7E22145}"/>
-              </a:ext>
-            </a:extLst>
-          </p:cNvPr>
-          <p:cNvCxnSpPr>
-            <a:cxnSpLocks/>
-          </p:cNvCxnSpPr>
+          <p:cNvPr id="32" name="直接连接符 31"/>
+          <p:cNvCxnSpPr/>
           <p:nvPr/>
         </p:nvCxnSpPr>
         <p:spPr>
           <a:xfrm>
-            <a:off x="3534687" y="3408157"/>
-            <a:ext cx="1345556" cy="741955"/>
+            <a:off x="1583967" y="3695821"/>
+            <a:ext cx="1296992" cy="159255"/>
           </a:xfrm>
           <a:prstGeom prst="line">
             <a:avLst/>
@@ -6804,22 +6634,14 @@
       </p:cxnSp>
       <p:cxnSp>
         <p:nvCxnSpPr>
-          <p:cNvPr id="35" name="直接连接符 34">
-            <a:extLst>
-              <a:ext uri="{FF2B5EF4-FFF2-40B4-BE49-F238E27FC236}">
-                <a16:creationId xmlns:a16="http://schemas.microsoft.com/office/drawing/2014/main" id="{671A1DE4-9387-4BF5-B7F3-FB59587699DE}"/>
-              </a:ext>
-            </a:extLst>
-          </p:cNvPr>
-          <p:cNvCxnSpPr>
-            <a:cxnSpLocks/>
-          </p:cNvCxnSpPr>
+          <p:cNvPr id="35" name="直接连接符 34"/>
+          <p:cNvCxnSpPr/>
           <p:nvPr/>
         </p:nvCxnSpPr>
         <p:spPr>
           <a:xfrm>
-            <a:off x="5189023" y="2530833"/>
-            <a:ext cx="0" cy="1399312"/>
+            <a:off x="3361655" y="2937352"/>
+            <a:ext cx="0" cy="491648"/>
           </a:xfrm>
           <a:prstGeom prst="line">
             <a:avLst/>
@@ -6848,21 +6670,13 @@
       </p:cxnSp>
       <p:cxnSp>
         <p:nvCxnSpPr>
-          <p:cNvPr id="43" name="直接连接符 42">
-            <a:extLst>
-              <a:ext uri="{FF2B5EF4-FFF2-40B4-BE49-F238E27FC236}">
-                <a16:creationId xmlns:a16="http://schemas.microsoft.com/office/drawing/2014/main" id="{05931D8D-670D-49FE-BAC8-89A875901535}"/>
-              </a:ext>
-            </a:extLst>
-          </p:cNvPr>
-          <p:cNvCxnSpPr>
-            <a:cxnSpLocks/>
-          </p:cNvCxnSpPr>
+          <p:cNvPr id="43" name="直接连接符 42"/>
+          <p:cNvCxnSpPr/>
           <p:nvPr/>
         </p:nvCxnSpPr>
         <p:spPr>
           <a:xfrm>
-            <a:off x="8241862" y="3285954"/>
+            <a:off x="7078542" y="3435367"/>
             <a:ext cx="990191" cy="0"/>
           </a:xfrm>
           <a:prstGeom prst="line">
@@ -6892,26 +6706,17 @@
       </p:cxnSp>
       <p:pic>
         <p:nvPicPr>
-          <p:cNvPr id="22" name="图形 21">
-            <a:extLst>
-              <a:ext uri="{FF2B5EF4-FFF2-40B4-BE49-F238E27FC236}">
-                <a16:creationId xmlns:a16="http://schemas.microsoft.com/office/drawing/2014/main" id="{D6EFB7A6-8DE0-4EF1-B913-DAAA31556BED}"/>
-              </a:ext>
-            </a:extLst>
-          </p:cNvPr>
+          <p:cNvPr id="25" name="图片 27" descr="浏览器"/>
           <p:cNvPicPr>
             <a:picLocks noChangeAspect="1"/>
           </p:cNvPicPr>
           <p:nvPr/>
         </p:nvPicPr>
         <p:blipFill>
-          <a:blip r:embed="rId16" cstate="print">
+          <a:blip r:embed="rId15">
             <a:extLst>
-              <a:ext uri="{28A0092B-C50C-407E-A947-70E740481C1C}">
-                <a14:useLocalDpi xmlns:a14="http://schemas.microsoft.com/office/drawing/2010/main" val="0"/>
-              </a:ext>
               <a:ext uri="{96DAC541-7B7A-43D3-8B79-37D633B846F1}">
-                <asvg:svgBlip xmlns:asvg="http://schemas.microsoft.com/office/drawing/2016/SVG/main" r:embed="rId17"/>
+                <asvg:svgBlip xmlns:asvg="http://schemas.microsoft.com/office/drawing/2016/SVG/main" r:embed="rId16"/>
               </a:ext>
             </a:extLst>
           </a:blip>
@@ -6921,36 +6726,91 @@
         </p:blipFill>
         <p:spPr>
           <a:xfrm>
-            <a:off x="3560303" y="1505176"/>
-            <a:ext cx="720000" cy="720000"/>
+            <a:off x="2920086" y="2044223"/>
+            <a:ext cx="860091" cy="860091"/>
           </a:xfrm>
           <a:prstGeom prst="rect">
             <a:avLst/>
           </a:prstGeom>
         </p:spPr>
       </p:pic>
+      <p:cxnSp>
+        <p:nvCxnSpPr>
+          <p:cNvPr id="31" name="直接连接符 30"/>
+          <p:cNvCxnSpPr/>
+          <p:nvPr/>
+        </p:nvCxnSpPr>
+        <p:spPr>
+          <a:xfrm>
+            <a:off x="5393655" y="2937352"/>
+            <a:ext cx="0" cy="491648"/>
+          </a:xfrm>
+          <a:prstGeom prst="line">
+            <a:avLst/>
+          </a:prstGeom>
+          <a:ln w="19050">
+            <a:solidFill>
+              <a:schemeClr val="tx1"/>
+            </a:solidFill>
+            <a:prstDash val="solid"/>
+          </a:ln>
+        </p:spPr>
+        <p:style>
+          <a:lnRef idx="1">
+            <a:schemeClr val="accent1"/>
+          </a:lnRef>
+          <a:fillRef idx="0">
+            <a:schemeClr val="accent1"/>
+          </a:fillRef>
+          <a:effectRef idx="0">
+            <a:schemeClr val="accent1"/>
+          </a:effectRef>
+          <a:fontRef idx="minor">
+            <a:schemeClr val="tx1"/>
+          </a:fontRef>
+        </p:style>
+      </p:cxnSp>
+    </p:spTree>
+  </p:cSld>
+  <p:clrMapOvr>
+    <a:masterClrMapping/>
+  </p:clrMapOvr>
+</p:sld>
+</file>
+
+<file path=ppt/slides/slide5.xml><?xml version="1.0" encoding="utf-8"?>
+<p:sld xmlns:a="http://schemas.openxmlformats.org/drawingml/2006/main" xmlns:r="http://schemas.openxmlformats.org/officeDocument/2006/relationships" xmlns:p="http://schemas.openxmlformats.org/presentationml/2006/main">
+  <p:cSld>
+    <p:spTree>
+      <p:nvGrpSpPr>
+        <p:cNvPr id="1" name=""/>
+        <p:cNvGrpSpPr/>
+        <p:nvPr/>
+      </p:nvGrpSpPr>
+      <p:grpSpPr>
+        <a:xfrm>
+          <a:off x="0" y="0"/>
+          <a:ext cx="0" cy="0"/>
+          <a:chOff x="0" y="0"/>
+          <a:chExt cx="0" cy="0"/>
+        </a:xfrm>
+      </p:grpSpPr>
       <p:pic>
         <p:nvPicPr>
-          <p:cNvPr id="24" name="图形 23">
-            <a:extLst>
-              <a:ext uri="{FF2B5EF4-FFF2-40B4-BE49-F238E27FC236}">
-                <a16:creationId xmlns:a16="http://schemas.microsoft.com/office/drawing/2014/main" id="{08AB2EBB-1C77-4251-B7A7-D6B1E4D2496B}"/>
-              </a:ext>
-            </a:extLst>
-          </p:cNvPr>
+          <p:cNvPr id="5" name="图形 4"/>
           <p:cNvPicPr>
             <a:picLocks noChangeAspect="1"/>
           </p:cNvPicPr>
           <p:nvPr/>
         </p:nvPicPr>
         <p:blipFill>
-          <a:blip r:embed="rId18">
+          <a:blip r:embed="rId1" cstate="print">
             <a:extLst>
               <a:ext uri="{28A0092B-C50C-407E-A947-70E740481C1C}">
                 <a14:useLocalDpi xmlns:a14="http://schemas.microsoft.com/office/drawing/2010/main" val="0"/>
               </a:ext>
               <a:ext uri="{96DAC541-7B7A-43D3-8B79-37D633B846F1}">
-                <asvg:svgBlip xmlns:asvg="http://schemas.microsoft.com/office/drawing/2016/SVG/main" r:embed="rId19"/>
+                <asvg:svgBlip xmlns:asvg="http://schemas.microsoft.com/office/drawing/2016/SVG/main" r:embed="rId2"/>
               </a:ext>
             </a:extLst>
           </a:blip>
@@ -6960,29 +6820,56 @@
         </p:blipFill>
         <p:spPr>
           <a:xfrm>
-            <a:off x="4946605" y="1741459"/>
-            <a:ext cx="742734" cy="742734"/>
+            <a:off x="2822362" y="2921709"/>
+            <a:ext cx="720000" cy="720000"/>
           </a:xfrm>
           <a:prstGeom prst="rect">
             <a:avLst/>
           </a:prstGeom>
         </p:spPr>
       </p:pic>
-      <p:sp>
-        <p:nvSpPr>
-          <p:cNvPr id="29" name="矩形 28">
+      <p:pic>
+        <p:nvPicPr>
+          <p:cNvPr id="7" name="图形 6"/>
+          <p:cNvPicPr>
+            <a:picLocks noChangeAspect="1"/>
+          </p:cNvPicPr>
+          <p:nvPr/>
+        </p:nvPicPr>
+        <p:blipFill>
+          <a:blip r:embed="rId3" cstate="print">
             <a:extLst>
-              <a:ext uri="{FF2B5EF4-FFF2-40B4-BE49-F238E27FC236}">
-                <a16:creationId xmlns:a16="http://schemas.microsoft.com/office/drawing/2014/main" id="{C9F7479C-11EB-49E8-886F-53618BFFDFF6}"/>
+              <a:ext uri="{28A0092B-C50C-407E-A947-70E740481C1C}">
+                <a14:useLocalDpi xmlns:a14="http://schemas.microsoft.com/office/drawing/2010/main" val="0"/>
+              </a:ext>
+              <a:ext uri="{96DAC541-7B7A-43D3-8B79-37D633B846F1}">
+                <asvg:svgBlip xmlns:asvg="http://schemas.microsoft.com/office/drawing/2016/SVG/main" r:embed="rId4"/>
               </a:ext>
             </a:extLst>
-          </p:cNvPr>
+          </a:blip>
+          <a:stretch>
+            <a:fillRect/>
+          </a:stretch>
+        </p:blipFill>
+        <p:spPr>
+          <a:xfrm>
+            <a:off x="3560303" y="4177618"/>
+            <a:ext cx="720000" cy="720000"/>
+          </a:xfrm>
+          <a:prstGeom prst="rect">
+            <a:avLst/>
+          </a:prstGeom>
+        </p:spPr>
+      </p:pic>
+      <p:sp>
+        <p:nvSpPr>
+          <p:cNvPr id="10" name="矩形 9"/>
           <p:cNvSpPr/>
           <p:nvPr/>
         </p:nvSpPr>
         <p:spPr>
           <a:xfrm>
-            <a:off x="4773518" y="1578133"/>
+            <a:off x="4737642" y="3834233"/>
             <a:ext cx="1149465" cy="1031082"/>
           </a:xfrm>
           <a:prstGeom prst="rect">
@@ -7021,24 +6908,214 @@
           </a:p>
         </p:txBody>
       </p:sp>
+      <p:pic>
+        <p:nvPicPr>
+          <p:cNvPr id="11" name="图形 10"/>
+          <p:cNvPicPr>
+            <a:picLocks noChangeAspect="1"/>
+          </p:cNvPicPr>
+          <p:nvPr/>
+        </p:nvPicPr>
+        <p:blipFill>
+          <a:blip r:embed="rId5" cstate="print">
+            <a:extLst>
+              <a:ext uri="{28A0092B-C50C-407E-A947-70E740481C1C}">
+                <a14:useLocalDpi xmlns:a14="http://schemas.microsoft.com/office/drawing/2010/main" val="0"/>
+              </a:ext>
+              <a:ext uri="{96DAC541-7B7A-43D3-8B79-37D633B846F1}">
+                <asvg:svgBlip xmlns:asvg="http://schemas.microsoft.com/office/drawing/2016/SVG/main" r:embed="rId6"/>
+              </a:ext>
+            </a:extLst>
+          </a:blip>
+          <a:stretch>
+            <a:fillRect/>
+          </a:stretch>
+        </p:blipFill>
+        <p:spPr>
+          <a:xfrm>
+            <a:off x="6586853" y="4004457"/>
+            <a:ext cx="720000" cy="720000"/>
+          </a:xfrm>
+          <a:prstGeom prst="rect">
+            <a:avLst/>
+          </a:prstGeom>
+        </p:spPr>
+      </p:pic>
+      <p:pic>
+        <p:nvPicPr>
+          <p:cNvPr id="12" name="图形 11"/>
+          <p:cNvPicPr>
+            <a:picLocks noChangeAspect="1"/>
+          </p:cNvPicPr>
+          <p:nvPr/>
+        </p:nvPicPr>
+        <p:blipFill>
+          <a:blip r:embed="rId7" cstate="print">
+            <a:extLst>
+              <a:ext uri="{28A0092B-C50C-407E-A947-70E740481C1C}">
+                <a14:useLocalDpi xmlns:a14="http://schemas.microsoft.com/office/drawing/2010/main" val="0"/>
+              </a:ext>
+              <a:ext uri="{96DAC541-7B7A-43D3-8B79-37D633B846F1}">
+                <asvg:svgBlip xmlns:asvg="http://schemas.microsoft.com/office/drawing/2016/SVG/main" r:embed="rId8"/>
+              </a:ext>
+            </a:extLst>
+          </a:blip>
+          <a:stretch>
+            <a:fillRect/>
+          </a:stretch>
+        </p:blipFill>
+        <p:spPr>
+          <a:xfrm>
+            <a:off x="4976873" y="3945870"/>
+            <a:ext cx="720000" cy="720000"/>
+          </a:xfrm>
+          <a:prstGeom prst="rect">
+            <a:avLst/>
+          </a:prstGeom>
+        </p:spPr>
+      </p:pic>
+      <p:pic>
+        <p:nvPicPr>
+          <p:cNvPr id="13" name="图形 12"/>
+          <p:cNvPicPr>
+            <a:picLocks noChangeAspect="1"/>
+          </p:cNvPicPr>
+          <p:nvPr/>
+        </p:nvPicPr>
+        <p:blipFill>
+          <a:blip r:embed="rId9" cstate="print">
+            <a:extLst>
+              <a:ext uri="{28A0092B-C50C-407E-A947-70E740481C1C}">
+                <a14:useLocalDpi xmlns:a14="http://schemas.microsoft.com/office/drawing/2010/main" val="0"/>
+              </a:ext>
+              <a:ext uri="{96DAC541-7B7A-43D3-8B79-37D633B846F1}">
+                <asvg:svgBlip xmlns:asvg="http://schemas.microsoft.com/office/drawing/2016/SVG/main" r:embed="rId10"/>
+              </a:ext>
+            </a:extLst>
+          </a:blip>
+          <a:stretch>
+            <a:fillRect/>
+          </a:stretch>
+        </p:blipFill>
+        <p:spPr>
+          <a:xfrm>
+            <a:off x="7537211" y="2805976"/>
+            <a:ext cx="720000" cy="720000"/>
+          </a:xfrm>
+          <a:prstGeom prst="rect">
+            <a:avLst/>
+          </a:prstGeom>
+        </p:spPr>
+      </p:pic>
+      <p:pic>
+        <p:nvPicPr>
+          <p:cNvPr id="14" name="图形 13"/>
+          <p:cNvPicPr>
+            <a:picLocks noChangeAspect="1"/>
+          </p:cNvPicPr>
+          <p:nvPr/>
+        </p:nvPicPr>
+        <p:blipFill>
+          <a:blip r:embed="rId11" cstate="print">
+            <a:extLst>
+              <a:ext uri="{28A0092B-C50C-407E-A947-70E740481C1C}">
+                <a14:useLocalDpi xmlns:a14="http://schemas.microsoft.com/office/drawing/2010/main" val="0"/>
+              </a:ext>
+              <a:ext uri="{96DAC541-7B7A-43D3-8B79-37D633B846F1}">
+                <asvg:svgBlip xmlns:asvg="http://schemas.microsoft.com/office/drawing/2016/SVG/main" r:embed="rId12"/>
+              </a:ext>
+            </a:extLst>
+          </a:blip>
+          <a:stretch>
+            <a:fillRect/>
+          </a:stretch>
+        </p:blipFill>
+        <p:spPr>
+          <a:xfrm>
+            <a:off x="8484895" y="2708360"/>
+            <a:ext cx="495891" cy="495891"/>
+          </a:xfrm>
+          <a:prstGeom prst="rect">
+            <a:avLst/>
+          </a:prstGeom>
+        </p:spPr>
+      </p:pic>
+      <p:pic>
+        <p:nvPicPr>
+          <p:cNvPr id="15" name="图形 14"/>
+          <p:cNvPicPr>
+            <a:picLocks noChangeAspect="1"/>
+          </p:cNvPicPr>
+          <p:nvPr/>
+        </p:nvPicPr>
+        <p:blipFill>
+          <a:blip r:embed="rId9" cstate="print">
+            <a:extLst>
+              <a:ext uri="{28A0092B-C50C-407E-A947-70E740481C1C}">
+                <a14:useLocalDpi xmlns:a14="http://schemas.microsoft.com/office/drawing/2010/main" val="0"/>
+              </a:ext>
+              <a:ext uri="{96DAC541-7B7A-43D3-8B79-37D633B846F1}">
+                <asvg:svgBlip xmlns:asvg="http://schemas.microsoft.com/office/drawing/2016/SVG/main" r:embed="rId10"/>
+              </a:ext>
+            </a:extLst>
+          </a:blip>
+          <a:stretch>
+            <a:fillRect/>
+          </a:stretch>
+        </p:blipFill>
+        <p:spPr>
+          <a:xfrm>
+            <a:off x="9258346" y="2769006"/>
+            <a:ext cx="720000" cy="720000"/>
+          </a:xfrm>
+          <a:prstGeom prst="rect">
+            <a:avLst/>
+          </a:prstGeom>
+        </p:spPr>
+      </p:pic>
+      <p:pic>
+        <p:nvPicPr>
+          <p:cNvPr id="16" name="图形 15"/>
+          <p:cNvPicPr>
+            <a:picLocks noChangeAspect="1"/>
+          </p:cNvPicPr>
+          <p:nvPr/>
+        </p:nvPicPr>
+        <p:blipFill>
+          <a:blip r:embed="rId13" cstate="print">
+            <a:extLst>
+              <a:ext uri="{28A0092B-C50C-407E-A947-70E740481C1C}">
+                <a14:useLocalDpi xmlns:a14="http://schemas.microsoft.com/office/drawing/2010/main" val="0"/>
+              </a:ext>
+              <a:ext uri="{96DAC541-7B7A-43D3-8B79-37D633B846F1}">
+                <asvg:svgBlip xmlns:asvg="http://schemas.microsoft.com/office/drawing/2016/SVG/main" r:embed="rId14"/>
+              </a:ext>
+            </a:extLst>
+          </a:blip>
+          <a:stretch>
+            <a:fillRect/>
+          </a:stretch>
+        </p:blipFill>
+        <p:spPr>
+          <a:xfrm>
+            <a:off x="6636830" y="1773544"/>
+            <a:ext cx="720000" cy="720000"/>
+          </a:xfrm>
+          <a:prstGeom prst="rect">
+            <a:avLst/>
+          </a:prstGeom>
+        </p:spPr>
+      </p:pic>
       <p:cxnSp>
         <p:nvCxnSpPr>
-          <p:cNvPr id="31" name="直接连接符 30">
-            <a:extLst>
-              <a:ext uri="{FF2B5EF4-FFF2-40B4-BE49-F238E27FC236}">
-                <a16:creationId xmlns:a16="http://schemas.microsoft.com/office/drawing/2014/main" id="{F60DA36C-6BD7-44E9-A5EC-8B95A7E28BD2}"/>
-              </a:ext>
-            </a:extLst>
-          </p:cNvPr>
-          <p:cNvCxnSpPr>
-            <a:cxnSpLocks/>
-          </p:cNvCxnSpPr>
+          <p:cNvPr id="18" name="直接连接符 17"/>
+          <p:cNvCxnSpPr/>
           <p:nvPr/>
         </p:nvCxnSpPr>
         <p:spPr>
           <a:xfrm>
-            <a:off x="4347411" y="1810501"/>
-            <a:ext cx="433641" cy="0"/>
+            <a:off x="4265623" y="4414892"/>
+            <a:ext cx="516571" cy="0"/>
           </a:xfrm>
           <a:prstGeom prst="line">
             <a:avLst/>
@@ -7067,22 +7144,278 @@
       </p:cxnSp>
       <p:cxnSp>
         <p:nvCxnSpPr>
-          <p:cNvPr id="36" name="直接连接符 35">
-            <a:extLst>
-              <a:ext uri="{FF2B5EF4-FFF2-40B4-BE49-F238E27FC236}">
-                <a16:creationId xmlns:a16="http://schemas.microsoft.com/office/drawing/2014/main" id="{D91E4791-2F13-478A-9A4B-5DC217A8BB6C}"/>
-              </a:ext>
-            </a:extLst>
-          </p:cNvPr>
-          <p:cNvCxnSpPr>
-            <a:cxnSpLocks/>
-          </p:cNvCxnSpPr>
+          <p:cNvPr id="21" name="直接连接符 20"/>
+          <p:cNvCxnSpPr/>
           <p:nvPr/>
         </p:nvCxnSpPr>
         <p:spPr>
           <a:xfrm>
-            <a:off x="6941120" y="2516278"/>
-            <a:ext cx="11466" cy="1317955"/>
+            <a:off x="5763907" y="2144911"/>
+            <a:ext cx="868026" cy="0"/>
+          </a:xfrm>
+          <a:prstGeom prst="line">
+            <a:avLst/>
+          </a:prstGeom>
+          <a:ln w="19050">
+            <a:solidFill>
+              <a:schemeClr val="tx1"/>
+            </a:solidFill>
+            <a:prstDash val="solid"/>
+          </a:ln>
+        </p:spPr>
+        <p:style>
+          <a:lnRef idx="1">
+            <a:schemeClr val="accent1"/>
+          </a:lnRef>
+          <a:fillRef idx="0">
+            <a:schemeClr val="accent1"/>
+          </a:fillRef>
+          <a:effectRef idx="0">
+            <a:schemeClr val="accent1"/>
+          </a:effectRef>
+          <a:fontRef idx="minor">
+            <a:schemeClr val="tx1"/>
+          </a:fontRef>
+        </p:style>
+      </p:cxnSp>
+      <p:sp>
+        <p:nvSpPr>
+          <p:cNvPr id="26" name="矩形 25"/>
+          <p:cNvSpPr/>
+          <p:nvPr/>
+        </p:nvSpPr>
+        <p:spPr>
+          <a:xfrm>
+            <a:off x="7493537" y="2623420"/>
+            <a:ext cx="2678316" cy="943831"/>
+          </a:xfrm>
+          <a:prstGeom prst="rect">
+            <a:avLst/>
+          </a:prstGeom>
+          <a:noFill/>
+          <a:ln w="19050">
+            <a:solidFill>
+              <a:schemeClr val="tx1"/>
+            </a:solidFill>
+            <a:prstDash val="dash"/>
+          </a:ln>
+        </p:spPr>
+        <p:style>
+          <a:lnRef idx="2">
+            <a:schemeClr val="accent1">
+              <a:shade val="50000"/>
+            </a:schemeClr>
+          </a:lnRef>
+          <a:fillRef idx="1">
+            <a:schemeClr val="accent1"/>
+          </a:fillRef>
+          <a:effectRef idx="0">
+            <a:schemeClr val="accent1"/>
+          </a:effectRef>
+          <a:fontRef idx="minor">
+            <a:schemeClr val="lt1"/>
+          </a:fontRef>
+        </p:style>
+        <p:txBody>
+          <a:bodyPr rtlCol="0" anchor="ctr"/>
+          <a:lstStyle/>
+          <a:p>
+            <a:pPr algn="ctr"/>
+            <a:endParaRPr lang="zh-CN" altLang="en-US"/>
+          </a:p>
+        </p:txBody>
+      </p:sp>
+      <p:cxnSp>
+        <p:nvCxnSpPr>
+          <p:cNvPr id="27" name="直接连接符 26"/>
+          <p:cNvCxnSpPr/>
+          <p:nvPr/>
+        </p:nvCxnSpPr>
+        <p:spPr>
+          <a:xfrm>
+            <a:off x="5741219" y="4381899"/>
+            <a:ext cx="801288" cy="0"/>
+          </a:xfrm>
+          <a:prstGeom prst="line">
+            <a:avLst/>
+          </a:prstGeom>
+          <a:ln w="19050">
+            <a:solidFill>
+              <a:schemeClr val="tx1"/>
+            </a:solidFill>
+            <a:prstDash val="solid"/>
+          </a:ln>
+        </p:spPr>
+        <p:style>
+          <a:lnRef idx="1">
+            <a:schemeClr val="accent1"/>
+          </a:lnRef>
+          <a:fillRef idx="0">
+            <a:schemeClr val="accent1"/>
+          </a:fillRef>
+          <a:effectRef idx="0">
+            <a:schemeClr val="accent1"/>
+          </a:effectRef>
+          <a:fontRef idx="minor">
+            <a:schemeClr val="tx1"/>
+          </a:fontRef>
+        </p:style>
+      </p:cxnSp>
+      <p:cxnSp>
+        <p:nvCxnSpPr>
+          <p:cNvPr id="28" name="直接连接符 27"/>
+          <p:cNvCxnSpPr/>
+          <p:nvPr/>
+        </p:nvCxnSpPr>
+        <p:spPr>
+          <a:xfrm flipV="1">
+            <a:off x="7180520" y="3758687"/>
+            <a:ext cx="490150" cy="342916"/>
+          </a:xfrm>
+          <a:prstGeom prst="line">
+            <a:avLst/>
+          </a:prstGeom>
+          <a:ln w="19050">
+            <a:solidFill>
+              <a:schemeClr val="tx1"/>
+            </a:solidFill>
+            <a:prstDash val="dash"/>
+          </a:ln>
+        </p:spPr>
+        <p:style>
+          <a:lnRef idx="1">
+            <a:schemeClr val="accent1"/>
+          </a:lnRef>
+          <a:fillRef idx="0">
+            <a:schemeClr val="accent1"/>
+          </a:fillRef>
+          <a:effectRef idx="0">
+            <a:schemeClr val="accent1"/>
+          </a:effectRef>
+          <a:fontRef idx="minor">
+            <a:schemeClr val="tx1"/>
+          </a:fontRef>
+        </p:style>
+      </p:cxnSp>
+      <p:cxnSp>
+        <p:nvCxnSpPr>
+          <p:cNvPr id="30" name="直接连接符 29"/>
+          <p:cNvCxnSpPr/>
+          <p:nvPr/>
+        </p:nvCxnSpPr>
+        <p:spPr>
+          <a:xfrm flipV="1">
+            <a:off x="3504353" y="2358586"/>
+            <a:ext cx="1407110" cy="782750"/>
+          </a:xfrm>
+          <a:prstGeom prst="line">
+            <a:avLst/>
+          </a:prstGeom>
+          <a:ln w="19050">
+            <a:solidFill>
+              <a:schemeClr val="tx1"/>
+            </a:solidFill>
+            <a:prstDash val="solid"/>
+            <a:tailEnd type="triangle"/>
+          </a:ln>
+        </p:spPr>
+        <p:style>
+          <a:lnRef idx="1">
+            <a:schemeClr val="accent1"/>
+          </a:lnRef>
+          <a:fillRef idx="0">
+            <a:schemeClr val="accent1"/>
+          </a:fillRef>
+          <a:effectRef idx="0">
+            <a:schemeClr val="accent1"/>
+          </a:effectRef>
+          <a:fontRef idx="minor">
+            <a:schemeClr val="tx1"/>
+          </a:fontRef>
+        </p:style>
+      </p:cxnSp>
+      <p:cxnSp>
+        <p:nvCxnSpPr>
+          <p:cNvPr id="32" name="直接连接符 31"/>
+          <p:cNvCxnSpPr/>
+          <p:nvPr/>
+        </p:nvCxnSpPr>
+        <p:spPr>
+          <a:xfrm>
+            <a:off x="3534687" y="3408157"/>
+            <a:ext cx="1345556" cy="741955"/>
+          </a:xfrm>
+          <a:prstGeom prst="line">
+            <a:avLst/>
+          </a:prstGeom>
+          <a:ln w="19050">
+            <a:solidFill>
+              <a:schemeClr val="tx1"/>
+            </a:solidFill>
+            <a:prstDash val="solid"/>
+          </a:ln>
+        </p:spPr>
+        <p:style>
+          <a:lnRef idx="1">
+            <a:schemeClr val="accent1"/>
+          </a:lnRef>
+          <a:fillRef idx="0">
+            <a:schemeClr val="accent1"/>
+          </a:fillRef>
+          <a:effectRef idx="0">
+            <a:schemeClr val="accent1"/>
+          </a:effectRef>
+          <a:fontRef idx="minor">
+            <a:schemeClr val="tx1"/>
+          </a:fontRef>
+        </p:style>
+      </p:cxnSp>
+      <p:cxnSp>
+        <p:nvCxnSpPr>
+          <p:cNvPr id="35" name="直接连接符 34"/>
+          <p:cNvCxnSpPr/>
+          <p:nvPr/>
+        </p:nvCxnSpPr>
+        <p:spPr>
+          <a:xfrm>
+            <a:off x="5189023" y="2530833"/>
+            <a:ext cx="0" cy="1399312"/>
+          </a:xfrm>
+          <a:prstGeom prst="line">
+            <a:avLst/>
+          </a:prstGeom>
+          <a:ln w="19050">
+            <a:solidFill>
+              <a:schemeClr val="tx1"/>
+            </a:solidFill>
+            <a:prstDash val="solid"/>
+          </a:ln>
+        </p:spPr>
+        <p:style>
+          <a:lnRef idx="1">
+            <a:schemeClr val="accent1"/>
+          </a:lnRef>
+          <a:fillRef idx="0">
+            <a:schemeClr val="accent1"/>
+          </a:fillRef>
+          <a:effectRef idx="0">
+            <a:schemeClr val="accent1"/>
+          </a:effectRef>
+          <a:fontRef idx="minor">
+            <a:schemeClr val="tx1"/>
+          </a:fontRef>
+        </p:style>
+      </p:cxnSp>
+      <p:cxnSp>
+        <p:nvCxnSpPr>
+          <p:cNvPr id="43" name="直接连接符 42"/>
+          <p:cNvCxnSpPr/>
+          <p:nvPr/>
+        </p:nvCxnSpPr>
+        <p:spPr>
+          <a:xfrm>
+            <a:off x="8241862" y="3285954"/>
+            <a:ext cx="990191" cy="0"/>
           </a:xfrm>
           <a:prstGeom prst="line">
             <a:avLst/>
@@ -7111,26 +7444,20 @@
       </p:cxnSp>
       <p:pic>
         <p:nvPicPr>
-          <p:cNvPr id="25" name="图形 24">
-            <a:extLst>
-              <a:ext uri="{FF2B5EF4-FFF2-40B4-BE49-F238E27FC236}">
-                <a16:creationId xmlns:a16="http://schemas.microsoft.com/office/drawing/2014/main" id="{9F2A3866-F5BA-4558-860C-73D0D1C96BC9}"/>
-              </a:ext>
-            </a:extLst>
-          </p:cNvPr>
+          <p:cNvPr id="22" name="图形 21"/>
           <p:cNvPicPr>
             <a:picLocks noChangeAspect="1"/>
           </p:cNvPicPr>
           <p:nvPr/>
         </p:nvPicPr>
         <p:blipFill>
-          <a:blip r:embed="rId20" cstate="print">
+          <a:blip r:embed="rId15" cstate="print">
             <a:extLst>
               <a:ext uri="{28A0092B-C50C-407E-A947-70E740481C1C}">
                 <a14:useLocalDpi xmlns:a14="http://schemas.microsoft.com/office/drawing/2010/main" val="0"/>
               </a:ext>
               <a:ext uri="{96DAC541-7B7A-43D3-8B79-37D633B846F1}">
-                <asvg:svgBlip xmlns:asvg="http://schemas.microsoft.com/office/drawing/2016/SVG/main" r:embed="rId21"/>
+                <asvg:svgBlip xmlns:asvg="http://schemas.microsoft.com/office/drawing/2016/SVG/main" r:embed="rId16"/>
               </a:ext>
             </a:extLst>
           </a:blip>
@@ -7140,6 +7467,191 @@
         </p:blipFill>
         <p:spPr>
           <a:xfrm>
+            <a:off x="3560303" y="1505176"/>
+            <a:ext cx="720000" cy="720000"/>
+          </a:xfrm>
+          <a:prstGeom prst="rect">
+            <a:avLst/>
+          </a:prstGeom>
+        </p:spPr>
+      </p:pic>
+      <p:pic>
+        <p:nvPicPr>
+          <p:cNvPr id="24" name="图形 23"/>
+          <p:cNvPicPr>
+            <a:picLocks noChangeAspect="1"/>
+          </p:cNvPicPr>
+          <p:nvPr/>
+        </p:nvPicPr>
+        <p:blipFill>
+          <a:blip r:embed="rId17">
+            <a:extLst>
+              <a:ext uri="{28A0092B-C50C-407E-A947-70E740481C1C}">
+                <a14:useLocalDpi xmlns:a14="http://schemas.microsoft.com/office/drawing/2010/main" val="0"/>
+              </a:ext>
+              <a:ext uri="{96DAC541-7B7A-43D3-8B79-37D633B846F1}">
+                <asvg:svgBlip xmlns:asvg="http://schemas.microsoft.com/office/drawing/2016/SVG/main" r:embed="rId18"/>
+              </a:ext>
+            </a:extLst>
+          </a:blip>
+          <a:stretch>
+            <a:fillRect/>
+          </a:stretch>
+        </p:blipFill>
+        <p:spPr>
+          <a:xfrm>
+            <a:off x="4946605" y="1741459"/>
+            <a:ext cx="742734" cy="742734"/>
+          </a:xfrm>
+          <a:prstGeom prst="rect">
+            <a:avLst/>
+          </a:prstGeom>
+        </p:spPr>
+      </p:pic>
+      <p:sp>
+        <p:nvSpPr>
+          <p:cNvPr id="29" name="矩形 28"/>
+          <p:cNvSpPr/>
+          <p:nvPr/>
+        </p:nvSpPr>
+        <p:spPr>
+          <a:xfrm>
+            <a:off x="4773518" y="1578133"/>
+            <a:ext cx="1149465" cy="1031082"/>
+          </a:xfrm>
+          <a:prstGeom prst="rect">
+            <a:avLst/>
+          </a:prstGeom>
+          <a:noFill/>
+          <a:ln w="19050">
+            <a:solidFill>
+              <a:schemeClr val="tx1"/>
+            </a:solidFill>
+            <a:prstDash val="dash"/>
+          </a:ln>
+        </p:spPr>
+        <p:style>
+          <a:lnRef idx="2">
+            <a:schemeClr val="accent1">
+              <a:shade val="50000"/>
+            </a:schemeClr>
+          </a:lnRef>
+          <a:fillRef idx="1">
+            <a:schemeClr val="accent1"/>
+          </a:fillRef>
+          <a:effectRef idx="0">
+            <a:schemeClr val="accent1"/>
+          </a:effectRef>
+          <a:fontRef idx="minor">
+            <a:schemeClr val="lt1"/>
+          </a:fontRef>
+        </p:style>
+        <p:txBody>
+          <a:bodyPr rtlCol="0" anchor="ctr"/>
+          <a:lstStyle/>
+          <a:p>
+            <a:pPr algn="ctr"/>
+            <a:endParaRPr lang="zh-CN" altLang="en-US"/>
+          </a:p>
+        </p:txBody>
+      </p:sp>
+      <p:cxnSp>
+        <p:nvCxnSpPr>
+          <p:cNvPr id="31" name="直接连接符 30"/>
+          <p:cNvCxnSpPr/>
+          <p:nvPr/>
+        </p:nvCxnSpPr>
+        <p:spPr>
+          <a:xfrm>
+            <a:off x="4347411" y="1810501"/>
+            <a:ext cx="433641" cy="0"/>
+          </a:xfrm>
+          <a:prstGeom prst="line">
+            <a:avLst/>
+          </a:prstGeom>
+          <a:ln w="19050">
+            <a:solidFill>
+              <a:schemeClr val="tx1"/>
+            </a:solidFill>
+            <a:prstDash val="dash"/>
+          </a:ln>
+        </p:spPr>
+        <p:style>
+          <a:lnRef idx="1">
+            <a:schemeClr val="accent1"/>
+          </a:lnRef>
+          <a:fillRef idx="0">
+            <a:schemeClr val="accent1"/>
+          </a:fillRef>
+          <a:effectRef idx="0">
+            <a:schemeClr val="accent1"/>
+          </a:effectRef>
+          <a:fontRef idx="minor">
+            <a:schemeClr val="tx1"/>
+          </a:fontRef>
+        </p:style>
+      </p:cxnSp>
+      <p:cxnSp>
+        <p:nvCxnSpPr>
+          <p:cNvPr id="36" name="直接连接符 35"/>
+          <p:cNvCxnSpPr/>
+          <p:nvPr/>
+        </p:nvCxnSpPr>
+        <p:spPr>
+          <a:xfrm>
+            <a:off x="6941120" y="2516278"/>
+            <a:ext cx="11466" cy="1317955"/>
+          </a:xfrm>
+          <a:prstGeom prst="line">
+            <a:avLst/>
+          </a:prstGeom>
+          <a:ln w="19050">
+            <a:solidFill>
+              <a:schemeClr val="tx1"/>
+            </a:solidFill>
+            <a:prstDash val="solid"/>
+          </a:ln>
+        </p:spPr>
+        <p:style>
+          <a:lnRef idx="1">
+            <a:schemeClr val="accent1"/>
+          </a:lnRef>
+          <a:fillRef idx="0">
+            <a:schemeClr val="accent1"/>
+          </a:fillRef>
+          <a:effectRef idx="0">
+            <a:schemeClr val="accent1"/>
+          </a:effectRef>
+          <a:fontRef idx="minor">
+            <a:schemeClr val="tx1"/>
+          </a:fontRef>
+        </p:style>
+      </p:cxnSp>
+      <p:pic>
+        <p:nvPicPr>
+          <p:cNvPr id="25" name="图形 24"/>
+          <p:cNvPicPr>
+            <a:picLocks noChangeAspect="1"/>
+          </p:cNvPicPr>
+          <p:nvPr/>
+        </p:nvPicPr>
+        <p:blipFill>
+          <a:blip r:embed="rId19" cstate="print">
+            <a:extLst>
+              <a:ext uri="{28A0092B-C50C-407E-A947-70E740481C1C}">
+                <a14:useLocalDpi xmlns:a14="http://schemas.microsoft.com/office/drawing/2010/main" val="0"/>
+              </a:ext>
+              <a:ext uri="{96DAC541-7B7A-43D3-8B79-37D633B846F1}">
+                <asvg:svgBlip xmlns:asvg="http://schemas.microsoft.com/office/drawing/2016/SVG/main" r:embed="rId20"/>
+              </a:ext>
+            </a:extLst>
+          </a:blip>
+          <a:stretch>
+            <a:fillRect/>
+          </a:stretch>
+        </p:blipFill>
+        <p:spPr>
+          <a:xfrm>
             <a:off x="5182312" y="2988529"/>
             <a:ext cx="507027" cy="507027"/>
           </a:xfrm>
@@ -7149,11 +7661,6 @@
         </p:spPr>
       </p:pic>
     </p:spTree>
-    <p:extLst>
-      <p:ext uri="{BB962C8B-B14F-4D97-AF65-F5344CB8AC3E}">
-        <p14:creationId xmlns:p14="http://schemas.microsoft.com/office/powerpoint/2010/main" val="526230587"/>
-      </p:ext>
-    </p:extLst>
   </p:cSld>
   <p:clrMapOvr>
     <a:masterClrMapping/>
@@ -7404,8 +7911,6 @@
       </a:bgFillStyleLst>
     </a:fmtScheme>
   </a:themeElements>
-  <a:objectDefaults/>
-  <a:extraClrSchemeLst/>
   <a:extLst>
     <a:ext uri="{05A4C25C-085E-4340-85A3-A5531E510DB2}">
       <thm15:themeFamily xmlns:thm15="http://schemas.microsoft.com/office/thememl/2012/main" name="Office Theme" id="{62F939B6-93AF-4DB8-9C6B-D6C7DFDC589F}" vid="{4A3C46E8-61CC-4603-A589-7422A47A8E4A}"/>

--- a/img-source/images.pptx
+++ b/img-source/images.pptx
@@ -8,8 +8,10 @@
     <p:sldId id="256" r:id="rId3"/>
     <p:sldId id="257" r:id="rId4"/>
     <p:sldId id="260" r:id="rId5"/>
-    <p:sldId id="258" r:id="rId6"/>
-    <p:sldId id="259" r:id="rId7"/>
+    <p:sldId id="261" r:id="rId6"/>
+    <p:sldId id="262" r:id="rId7"/>
+    <p:sldId id="258" r:id="rId8"/>
+    <p:sldId id="259" r:id="rId9"/>
   </p:sldIdLst>
   <p:sldSz cx="12192000" cy="6858000"/>
   <p:notesSz cx="6858000" cy="9144000"/>
@@ -111,12 +113,22 @@
   <p:extLst>
     <p:ext uri="{EFAFB233-063F-42B5-8137-9DF3F51BA10A}">
       <p15:sldGuideLst xmlns:p15="http://schemas.microsoft.com/office/powerpoint/2012/main">
-        <p15:guide id="1" orient="horz" pos="1802" userDrawn="1">
+        <p15:guide id="1" orient="horz" pos="3180" userDrawn="1">
           <p15:clr>
             <a:srgbClr val="A4A3A4"/>
           </p15:clr>
         </p15:guide>
-        <p15:guide id="2" pos="2762" userDrawn="1">
+        <p15:guide id="2" pos="1315" userDrawn="1">
+          <p15:clr>
+            <a:srgbClr val="A4A3A4"/>
+          </p15:clr>
+        </p15:guide>
+        <p15:guide id="3" orient="horz" pos="451" userDrawn="1">
+          <p15:clr>
+            <a:srgbClr val="A4A3A4"/>
+          </p15:clr>
+        </p15:guide>
+        <p15:guide id="4" pos="4690" userDrawn="1">
           <p15:clr>
             <a:srgbClr val="A4A3A4"/>
           </p15:clr>
@@ -4927,126 +4939,6 @@
           <a:chExt cx="0" cy="0"/>
         </a:xfrm>
       </p:grpSpPr>
-      <p:pic>
-        <p:nvPicPr>
-          <p:cNvPr id="3" name="图片 2" descr="用户"/>
-          <p:cNvPicPr>
-            <a:picLocks noChangeAspect="1"/>
-          </p:cNvPicPr>
-          <p:nvPr/>
-        </p:nvPicPr>
-        <p:blipFill>
-          <a:blip r:embed="rId1">
-            <a:extLst>
-              <a:ext uri="{96DAC541-7B7A-43D3-8B79-37D633B846F1}">
-                <asvg:svgBlip xmlns:asvg="http://schemas.microsoft.com/office/drawing/2016/SVG/main" r:embed="rId2"/>
-              </a:ext>
-            </a:extLst>
-          </a:blip>
-          <a:stretch>
-            <a:fillRect/>
-          </a:stretch>
-        </p:blipFill>
-        <p:spPr>
-          <a:xfrm>
-            <a:off x="1116330" y="3602355"/>
-            <a:ext cx="1080000" cy="1080000"/>
-          </a:xfrm>
-          <a:prstGeom prst="rect">
-            <a:avLst/>
-          </a:prstGeom>
-        </p:spPr>
-      </p:pic>
-      <p:pic>
-        <p:nvPicPr>
-          <p:cNvPr id="4" name="图片 3" descr="手机"/>
-          <p:cNvPicPr>
-            <a:picLocks noChangeAspect="1"/>
-          </p:cNvPicPr>
-          <p:nvPr/>
-        </p:nvPicPr>
-        <p:blipFill>
-          <a:blip r:embed="rId3">
-            <a:extLst>
-              <a:ext uri="{96DAC541-7B7A-43D3-8B79-37D633B846F1}">
-                <asvg:svgBlip xmlns:asvg="http://schemas.microsoft.com/office/drawing/2016/SVG/main" r:embed="rId4"/>
-              </a:ext>
-            </a:extLst>
-          </a:blip>
-          <a:stretch>
-            <a:fillRect/>
-          </a:stretch>
-        </p:blipFill>
-        <p:spPr>
-          <a:xfrm>
-            <a:off x="976630" y="1543050"/>
-            <a:ext cx="1358900" cy="1358900"/>
-          </a:xfrm>
-          <a:prstGeom prst="rect">
-            <a:avLst/>
-          </a:prstGeom>
-        </p:spPr>
-      </p:pic>
-      <p:pic>
-        <p:nvPicPr>
-          <p:cNvPr id="6" name="图片 5" descr="应用软件"/>
-          <p:cNvPicPr>
-            <a:picLocks noChangeAspect="1"/>
-          </p:cNvPicPr>
-          <p:nvPr/>
-        </p:nvPicPr>
-        <p:blipFill>
-          <a:blip r:embed="rId5">
-            <a:extLst>
-              <a:ext uri="{96DAC541-7B7A-43D3-8B79-37D633B846F1}">
-                <asvg:svgBlip xmlns:asvg="http://schemas.microsoft.com/office/drawing/2016/SVG/main" r:embed="rId6"/>
-              </a:ext>
-            </a:extLst>
-          </a:blip>
-          <a:stretch>
-            <a:fillRect/>
-          </a:stretch>
-        </p:blipFill>
-        <p:spPr>
-          <a:xfrm>
-            <a:off x="3844290" y="1499235"/>
-            <a:ext cx="1080000" cy="1080000"/>
-          </a:xfrm>
-          <a:prstGeom prst="rect">
-            <a:avLst/>
-          </a:prstGeom>
-        </p:spPr>
-      </p:pic>
-      <p:pic>
-        <p:nvPicPr>
-          <p:cNvPr id="8" name="图片 7" descr="支付"/>
-          <p:cNvPicPr>
-            <a:picLocks noChangeAspect="1"/>
-          </p:cNvPicPr>
-          <p:nvPr/>
-        </p:nvPicPr>
-        <p:blipFill>
-          <a:blip r:embed="rId7">
-            <a:extLst>
-              <a:ext uri="{96DAC541-7B7A-43D3-8B79-37D633B846F1}">
-                <asvg:svgBlip xmlns:asvg="http://schemas.microsoft.com/office/drawing/2016/SVG/main" r:embed="rId8"/>
-              </a:ext>
-            </a:extLst>
-          </a:blip>
-          <a:stretch>
-            <a:fillRect/>
-          </a:stretch>
-        </p:blipFill>
-        <p:spPr>
-          <a:xfrm>
-            <a:off x="3844290" y="3973195"/>
-            <a:ext cx="1080000" cy="1080000"/>
-          </a:xfrm>
-          <a:prstGeom prst="rect">
-            <a:avLst/>
-          </a:prstGeom>
-        </p:spPr>
-      </p:pic>
       <p:sp>
         <p:nvSpPr>
           <p:cNvPr id="9" name="矩形 8"/>
@@ -5055,8 +4947,8 @@
         </p:nvSpPr>
         <p:spPr>
           <a:xfrm>
-            <a:off x="3496945" y="1451610"/>
-            <a:ext cx="1774190" cy="3970020"/>
+            <a:off x="3496945" y="1630045"/>
+            <a:ext cx="1927225" cy="3115310"/>
           </a:xfrm>
           <a:prstGeom prst="rect">
             <a:avLst/>
@@ -5064,7 +4956,7 @@
           <a:noFill/>
           <a:ln w="19050">
             <a:solidFill>
-              <a:srgbClr val="0B5FD1"/>
+              <a:srgbClr val="719AAC"/>
             </a:solidFill>
             <a:prstDash val="dash"/>
           </a:ln>
@@ -5090,7 +4982,7 @@
           <a:lstStyle/>
           <a:p>
             <a:pPr algn="ctr"/>
-            <a:endParaRPr lang="zh-CN" altLang="en-US">
+            <a:endParaRPr lang="zh-CN" altLang="en-US" sz="1600">
               <a:latin typeface="Times New Roman" panose="02020603050405020304" charset="0"/>
               <a:cs typeface="Times New Roman" panose="02020603050405020304" charset="0"/>
             </a:endParaRPr>
@@ -5105,8 +4997,8 @@
         </p:nvSpPr>
         <p:spPr>
           <a:xfrm>
-            <a:off x="3618230" y="2538095"/>
-            <a:ext cx="1532890" cy="638175"/>
+            <a:off x="3244215" y="2607310"/>
+            <a:ext cx="2471420" cy="380365"/>
           </a:xfrm>
           <a:prstGeom prst="rect">
             <a:avLst/>
@@ -5120,31 +5012,17 @@
           <a:p>
             <a:pPr algn="ctr"/>
             <a:r>
-              <a:rPr lang="en-US" altLang="zh-CN">
+              <a:rPr lang="en-US" altLang="zh-CN" sz="1600">
                 <a:latin typeface="Times New Roman" panose="02020603050405020304" charset="0"/>
                 <a:cs typeface="Times New Roman" panose="02020603050405020304" charset="0"/>
               </a:rPr>
-              <a:t>Merchant </a:t>
-            </a:r>
-            <a:endParaRPr lang="en-US" altLang="zh-CN">
+              <a:t>Merchant Frontend</a:t>
+            </a:r>
+            <a:endParaRPr lang="en-US" altLang="zh-CN" sz="1600">
               <a:latin typeface="Times New Roman" panose="02020603050405020304" charset="0"/>
               <a:cs typeface="Times New Roman" panose="02020603050405020304" charset="0"/>
             </a:endParaRPr>
           </a:p>
-          <a:p>
-            <a:pPr algn="ctr"/>
-            <a:r>
-              <a:rPr lang="en-US" altLang="zh-CN">
-                <a:latin typeface="Times New Roman" panose="02020603050405020304" charset="0"/>
-                <a:cs typeface="Times New Roman" panose="02020603050405020304" charset="0"/>
-              </a:rPr>
-              <a:t>Frontend</a:t>
-            </a:r>
-            <a:endParaRPr lang="en-US" altLang="zh-CN">
-              <a:latin typeface="Times New Roman" panose="02020603050405020304" charset="0"/>
-              <a:cs typeface="Times New Roman" panose="02020603050405020304" charset="0"/>
-            </a:endParaRPr>
-          </a:p>
         </p:txBody>
       </p:sp>
       <p:sp>
@@ -5155,8 +5033,8 @@
         </p:nvSpPr>
         <p:spPr>
           <a:xfrm>
-            <a:off x="3618230" y="5053330"/>
-            <a:ext cx="1532890" cy="368300"/>
+            <a:off x="3719830" y="4304030"/>
+            <a:ext cx="1532890" cy="337185"/>
           </a:xfrm>
           <a:prstGeom prst="rect">
             <a:avLst/>
@@ -5170,13 +5048,13 @@
           <a:p>
             <a:pPr algn="ctr"/>
             <a:r>
-              <a:rPr lang="en-US" altLang="zh-CN">
+              <a:rPr lang="en-US" altLang="zh-CN" sz="1600">
                 <a:latin typeface="Times New Roman" panose="02020603050405020304" charset="0"/>
                 <a:cs typeface="Times New Roman" panose="02020603050405020304" charset="0"/>
               </a:rPr>
               <a:t>PS-App</a:t>
             </a:r>
-            <a:endParaRPr lang="en-US" altLang="zh-CN">
+            <a:endParaRPr lang="en-US" altLang="zh-CN" sz="1600">
               <a:latin typeface="Times New Roman" panose="02020603050405020304" charset="0"/>
               <a:cs typeface="Times New Roman" panose="02020603050405020304" charset="0"/>
             </a:endParaRPr>
@@ -5191,8 +5069,8 @@
         </p:nvSpPr>
         <p:spPr>
           <a:xfrm>
-            <a:off x="890270" y="4793615"/>
-            <a:ext cx="1532890" cy="368300"/>
+            <a:off x="1284605" y="3621405"/>
+            <a:ext cx="1047115" cy="337185"/>
           </a:xfrm>
           <a:prstGeom prst="rect">
             <a:avLst/>
@@ -5206,13 +5084,13 @@
           <a:p>
             <a:pPr algn="ctr"/>
             <a:r>
-              <a:rPr lang="en-US" altLang="zh-CN">
+              <a:rPr lang="en-US" altLang="zh-CN" sz="1600">
                 <a:latin typeface="Times New Roman" panose="02020603050405020304" charset="0"/>
                 <a:cs typeface="Times New Roman" panose="02020603050405020304" charset="0"/>
               </a:rPr>
               <a:t>User</a:t>
             </a:r>
-            <a:endParaRPr lang="en-US" altLang="zh-CN">
+            <a:endParaRPr lang="en-US" altLang="zh-CN" sz="1600">
               <a:latin typeface="Times New Roman" panose="02020603050405020304" charset="0"/>
               <a:cs typeface="Times New Roman" panose="02020603050405020304" charset="0"/>
             </a:endParaRPr>
@@ -5227,8 +5105,8 @@
         </p:nvSpPr>
         <p:spPr>
           <a:xfrm>
-            <a:off x="1032510" y="2842260"/>
-            <a:ext cx="1219200" cy="586740"/>
+            <a:off x="972820" y="2562225"/>
+            <a:ext cx="1699260" cy="412115"/>
           </a:xfrm>
           <a:prstGeom prst="rect">
             <a:avLst/>
@@ -5242,13 +5120,13 @@
           <a:p>
             <a:pPr algn="ctr"/>
             <a:r>
-              <a:rPr lang="en-US" altLang="zh-CN">
+              <a:rPr lang="en-US" altLang="zh-CN" sz="1600">
                 <a:latin typeface="Times New Roman" panose="02020603050405020304" charset="0"/>
                 <a:cs typeface="Times New Roman" panose="02020603050405020304" charset="0"/>
               </a:rPr>
-              <a:t>Mobile Device</a:t>
-            </a:r>
-            <a:endParaRPr lang="en-US" altLang="zh-CN">
+              <a:t> Device</a:t>
+            </a:r>
+            <a:endParaRPr lang="en-US" altLang="zh-CN" sz="1600">
               <a:latin typeface="Times New Roman" panose="02020603050405020304" charset="0"/>
               <a:cs typeface="Times New Roman" panose="02020603050405020304" charset="0"/>
             </a:endParaRPr>
@@ -5263,7 +5141,7 @@
         </p:nvCxnSpPr>
         <p:spPr>
           <a:xfrm>
-            <a:off x="2280670" y="2039766"/>
+            <a:off x="2292735" y="2159781"/>
             <a:ext cx="1260000" cy="0"/>
           </a:xfrm>
           <a:prstGeom prst="line">
@@ -5271,7 +5149,7 @@
           </a:prstGeom>
           <a:ln w="19050">
             <a:solidFill>
-              <a:srgbClr val="0B5FD1"/>
+              <a:srgbClr val="719AAC"/>
             </a:solidFill>
             <a:prstDash val="dash"/>
           </a:ln>
@@ -5299,15 +5177,15 @@
         </p:nvCxnSpPr>
         <p:spPr>
           <a:xfrm flipV="1">
-            <a:off x="2292735" y="2264556"/>
-            <a:ext cx="1511300" cy="1572260"/>
+            <a:off x="2212090" y="2448706"/>
+            <a:ext cx="1416050" cy="828040"/>
           </a:xfrm>
           <a:prstGeom prst="line">
             <a:avLst/>
           </a:prstGeom>
           <a:ln w="19050">
             <a:solidFill>
-              <a:srgbClr val="E1B884"/>
+              <a:srgbClr val="010101"/>
             </a:solidFill>
             <a:prstDash val="solid"/>
             <a:tailEnd type="triangle"/>
@@ -5335,9 +5213,9 @@
           <p:nvPr/>
         </p:nvSpPr>
         <p:spPr>
-          <a:xfrm rot="18840000">
-            <a:off x="2114550" y="2737485"/>
-            <a:ext cx="1532890" cy="353695"/>
+          <a:xfrm rot="19860000">
+            <a:off x="2557145" y="2499995"/>
+            <a:ext cx="669290" cy="353695"/>
           </a:xfrm>
           <a:prstGeom prst="rect">
             <a:avLst/>
@@ -5351,13 +5229,13 @@
           <a:p>
             <a:pPr algn="ctr"/>
             <a:r>
-              <a:rPr lang="en-US" altLang="zh-CN">
+              <a:rPr lang="en-US" altLang="zh-CN" sz="1600">
                 <a:latin typeface="Times New Roman" panose="02020603050405020304" charset="0"/>
                 <a:cs typeface="Times New Roman" panose="02020603050405020304" charset="0"/>
               </a:rPr>
               <a:t>Shop</a:t>
             </a:r>
-            <a:endParaRPr lang="en-US" altLang="zh-CN">
+            <a:endParaRPr lang="en-US" altLang="zh-CN" sz="1600">
               <a:latin typeface="Times New Roman" panose="02020603050405020304" charset="0"/>
               <a:cs typeface="Times New Roman" panose="02020603050405020304" charset="0"/>
             </a:endParaRPr>
@@ -5372,15 +5250,15 @@
         </p:nvCxnSpPr>
         <p:spPr>
           <a:xfrm>
-            <a:off x="2292735" y="4290206"/>
-            <a:ext cx="1512000" cy="322580"/>
+            <a:off x="2207645" y="3725056"/>
+            <a:ext cx="1414145" cy="307340"/>
           </a:xfrm>
           <a:prstGeom prst="line">
             <a:avLst/>
           </a:prstGeom>
           <a:ln w="19050">
             <a:solidFill>
-              <a:srgbClr val="8CC288"/>
+              <a:schemeClr val="tx1"/>
             </a:solidFill>
             <a:prstDash val="solid"/>
             <a:tailEnd type="triangle"/>
@@ -5401,42 +5279,6 @@
           </a:fontRef>
         </p:style>
       </p:cxnSp>
-      <p:sp>
-        <p:nvSpPr>
-          <p:cNvPr id="10" name="文本框 9"/>
-          <p:cNvSpPr txBox="1"/>
-          <p:nvPr/>
-        </p:nvSpPr>
-        <p:spPr>
-          <a:xfrm rot="780000">
-            <a:off x="2308860" y="4079240"/>
-            <a:ext cx="1363980" cy="298450"/>
-          </a:xfrm>
-          <a:prstGeom prst="rect">
-            <a:avLst/>
-          </a:prstGeom>
-          <a:noFill/>
-        </p:spPr>
-        <p:txBody>
-          <a:bodyPr wrap="square" rtlCol="0">
-            <a:noAutofit/>
-          </a:bodyPr>
-          <a:p>
-            <a:pPr algn="ctr"/>
-            <a:r>
-              <a:rPr lang="en-US" altLang="zh-CN">
-                <a:latin typeface="Times New Roman" panose="02020603050405020304" charset="0"/>
-                <a:cs typeface="Times New Roman" panose="02020603050405020304" charset="0"/>
-              </a:rPr>
-              <a:t>Password</a:t>
-            </a:r>
-            <a:endParaRPr lang="en-US" altLang="zh-CN">
-              <a:latin typeface="Times New Roman" panose="02020603050405020304" charset="0"/>
-              <a:cs typeface="Times New Roman" panose="02020603050405020304" charset="0"/>
-            </a:endParaRPr>
-          </a:p>
-        </p:txBody>
-      </p:sp>
       <p:cxnSp>
         <p:nvCxnSpPr>
           <p:cNvPr id="35" name="直接连接符 34"/>
@@ -5445,7 +5287,7 @@
         </p:nvCxnSpPr>
         <p:spPr>
           <a:xfrm>
-            <a:off x="4384005" y="3249137"/>
+            <a:off x="4479255" y="2976087"/>
             <a:ext cx="0" cy="720000"/>
           </a:xfrm>
           <a:prstGeom prst="line">
@@ -5456,6 +5298,7 @@
               <a:schemeClr val="tx1"/>
             </a:solidFill>
             <a:prstDash val="solid"/>
+            <a:tailEnd type="triangle"/>
           </a:ln>
         </p:spPr>
         <p:style>
@@ -5473,36 +5316,6 @@
           </a:fontRef>
         </p:style>
       </p:cxnSp>
-      <p:pic>
-        <p:nvPicPr>
-          <p:cNvPr id="11" name="图片 10" descr="服务器"/>
-          <p:cNvPicPr>
-            <a:picLocks noChangeAspect="1"/>
-          </p:cNvPicPr>
-          <p:nvPr/>
-        </p:nvPicPr>
-        <p:blipFill>
-          <a:blip r:embed="rId9">
-            <a:extLst>
-              <a:ext uri="{96DAC541-7B7A-43D3-8B79-37D633B846F1}">
-                <asvg:svgBlip xmlns:asvg="http://schemas.microsoft.com/office/drawing/2016/SVG/main" r:embed="rId10"/>
-              </a:ext>
-            </a:extLst>
-          </a:blip>
-          <a:stretch>
-            <a:fillRect/>
-          </a:stretch>
-        </p:blipFill>
-        <p:spPr>
-          <a:xfrm>
-            <a:off x="6432550" y="1451610"/>
-            <a:ext cx="1080000" cy="1080000"/>
-          </a:xfrm>
-          <a:prstGeom prst="rect">
-            <a:avLst/>
-          </a:prstGeom>
-        </p:spPr>
-      </p:pic>
       <p:sp>
         <p:nvSpPr>
           <p:cNvPr id="12" name="文本框 11"/>
@@ -5511,8 +5324,8 @@
         </p:nvSpPr>
         <p:spPr>
           <a:xfrm>
-            <a:off x="6206490" y="2541270"/>
-            <a:ext cx="1532890" cy="638175"/>
+            <a:off x="5888355" y="2443480"/>
+            <a:ext cx="1985010" cy="377825"/>
           </a:xfrm>
           <a:prstGeom prst="rect">
             <a:avLst/>
@@ -5526,34 +5339,20 @@
           <a:p>
             <a:pPr algn="ctr"/>
             <a:r>
-              <a:rPr lang="en-US" altLang="zh-CN">
+              <a:rPr lang="en-US" altLang="zh-CN" sz="1600">
                 <a:latin typeface="Times New Roman" panose="02020603050405020304" charset="0"/>
                 <a:cs typeface="Times New Roman" panose="02020603050405020304" charset="0"/>
               </a:rPr>
-              <a:t>Merchant </a:t>
-            </a:r>
-            <a:endParaRPr lang="en-US" altLang="zh-CN">
-              <a:latin typeface="Times New Roman" panose="02020603050405020304" charset="0"/>
-              <a:cs typeface="Times New Roman" panose="02020603050405020304" charset="0"/>
-            </a:endParaRPr>
-          </a:p>
-          <a:p>
-            <a:pPr algn="ctr"/>
-            <a:r>
-              <a:rPr lang="en-US" altLang="zh-CN">
-                <a:latin typeface="Times New Roman" panose="02020603050405020304" charset="0"/>
-                <a:cs typeface="Times New Roman" panose="02020603050405020304" charset="0"/>
-              </a:rPr>
-              <a:t>S</a:t>
-            </a:r>
-            <a:r>
-              <a:rPr lang="en-US" altLang="zh-CN">
+              <a:t>Merchant S</a:t>
+            </a:r>
+            <a:r>
+              <a:rPr lang="en-US" altLang="zh-CN" sz="1600">
                 <a:latin typeface="Times New Roman" panose="02020603050405020304" charset="0"/>
                 <a:cs typeface="Times New Roman" panose="02020603050405020304" charset="0"/>
               </a:rPr>
               <a:t>erver</a:t>
             </a:r>
-            <a:endParaRPr lang="en-US" altLang="zh-CN">
+            <a:endParaRPr lang="en-US" altLang="zh-CN" sz="1600">
               <a:latin typeface="Times New Roman" panose="02020603050405020304" charset="0"/>
               <a:cs typeface="Times New Roman" panose="02020603050405020304" charset="0"/>
             </a:endParaRPr>
@@ -5568,7 +5367,7 @@
         </p:nvCxnSpPr>
         <p:spPr>
           <a:xfrm>
-            <a:off x="5465314" y="2039375"/>
+            <a:off x="5528814" y="2188600"/>
             <a:ext cx="868026" cy="0"/>
           </a:xfrm>
           <a:prstGeom prst="line">
@@ -5579,6 +5378,8 @@
               <a:schemeClr val="tx1"/>
             </a:solidFill>
             <a:prstDash val="solid"/>
+            <a:headEnd type="triangle"/>
+            <a:tailEnd type="triangle"/>
           </a:ln>
         </p:spPr>
         <p:style>
@@ -5604,7 +5405,7 @@
         </p:nvCxnSpPr>
         <p:spPr>
           <a:xfrm>
-            <a:off x="5465314" y="4682245"/>
+            <a:off x="5522464" y="4110745"/>
             <a:ext cx="868026" cy="0"/>
           </a:xfrm>
           <a:prstGeom prst="line">
@@ -5615,6 +5416,284 @@
               <a:schemeClr val="tx1"/>
             </a:solidFill>
             <a:prstDash val="solid"/>
+            <a:headEnd type="triangle"/>
+            <a:tailEnd type="triangle"/>
+          </a:ln>
+        </p:spPr>
+        <p:style>
+          <a:lnRef idx="1">
+            <a:schemeClr val="accent1"/>
+          </a:lnRef>
+          <a:fillRef idx="0">
+            <a:schemeClr val="accent1"/>
+          </a:fillRef>
+          <a:effectRef idx="0">
+            <a:schemeClr val="accent1"/>
+          </a:effectRef>
+          <a:fontRef idx="minor">
+            <a:schemeClr val="tx1"/>
+          </a:fontRef>
+        </p:style>
+      </p:cxnSp>
+      <p:sp>
+        <p:nvSpPr>
+          <p:cNvPr id="16" name="文本框 15"/>
+          <p:cNvSpPr txBox="1"/>
+          <p:nvPr/>
+        </p:nvSpPr>
+        <p:spPr>
+          <a:xfrm>
+            <a:off x="6027420" y="4406800"/>
+            <a:ext cx="1532890" cy="337185"/>
+          </a:xfrm>
+          <a:prstGeom prst="rect">
+            <a:avLst/>
+          </a:prstGeom>
+          <a:noFill/>
+        </p:spPr>
+        <p:txBody>
+          <a:bodyPr wrap="square" rtlCol="0">
+            <a:spAutoFit/>
+          </a:bodyPr>
+          <a:p>
+            <a:pPr algn="ctr"/>
+            <a:r>
+              <a:rPr lang="en-US" altLang="zh-CN" sz="1600">
+                <a:latin typeface="Times New Roman" panose="02020603050405020304" charset="0"/>
+                <a:cs typeface="Times New Roman" panose="02020603050405020304" charset="0"/>
+              </a:rPr>
+              <a:t>PS-S</a:t>
+            </a:r>
+            <a:r>
+              <a:rPr lang="en-US" altLang="zh-CN" sz="1600">
+                <a:latin typeface="Times New Roman" panose="02020603050405020304" charset="0"/>
+                <a:cs typeface="Times New Roman" panose="02020603050405020304" charset="0"/>
+              </a:rPr>
+              <a:t>erver</a:t>
+            </a:r>
+            <a:endParaRPr lang="en-US" altLang="zh-CN" sz="1600">
+              <a:latin typeface="Times New Roman" panose="02020603050405020304" charset="0"/>
+              <a:cs typeface="Times New Roman" panose="02020603050405020304" charset="0"/>
+            </a:endParaRPr>
+          </a:p>
+        </p:txBody>
+      </p:sp>
+      <p:cxnSp>
+        <p:nvCxnSpPr>
+          <p:cNvPr id="2" name="直接连接符 1"/>
+          <p:cNvCxnSpPr/>
+          <p:nvPr/>
+        </p:nvCxnSpPr>
+        <p:spPr>
+          <a:xfrm flipV="1">
+            <a:off x="7195689" y="3318900"/>
+            <a:ext cx="778510" cy="791845"/>
+          </a:xfrm>
+          <a:prstGeom prst="line">
+            <a:avLst/>
+          </a:prstGeom>
+          <a:ln w="19050">
+            <a:solidFill>
+              <a:srgbClr val="72B063"/>
+            </a:solidFill>
+            <a:prstDash val="dash"/>
+          </a:ln>
+        </p:spPr>
+        <p:style>
+          <a:lnRef idx="1">
+            <a:schemeClr val="accent1"/>
+          </a:lnRef>
+          <a:fillRef idx="0">
+            <a:schemeClr val="accent1"/>
+          </a:fillRef>
+          <a:effectRef idx="0">
+            <a:schemeClr val="accent1"/>
+          </a:effectRef>
+          <a:fontRef idx="minor">
+            <a:schemeClr val="tx1"/>
+          </a:fontRef>
+        </p:style>
+      </p:cxnSp>
+      <p:cxnSp>
+        <p:nvCxnSpPr>
+          <p:cNvPr id="18" name="直接连接符 17"/>
+          <p:cNvCxnSpPr/>
+          <p:nvPr/>
+        </p:nvCxnSpPr>
+        <p:spPr>
+          <a:xfrm>
+            <a:off x="8733659" y="3254765"/>
+            <a:ext cx="1368000" cy="0"/>
+          </a:xfrm>
+          <a:prstGeom prst="line">
+            <a:avLst/>
+          </a:prstGeom>
+          <a:ln w="19050">
+            <a:solidFill>
+              <a:schemeClr val="tx1"/>
+            </a:solidFill>
+            <a:prstDash val="solid"/>
+            <a:tailEnd type="triangle"/>
+          </a:ln>
+        </p:spPr>
+        <p:style>
+          <a:lnRef idx="1">
+            <a:schemeClr val="accent1"/>
+          </a:lnRef>
+          <a:fillRef idx="0">
+            <a:schemeClr val="accent1"/>
+          </a:fillRef>
+          <a:effectRef idx="0">
+            <a:schemeClr val="accent1"/>
+          </a:effectRef>
+          <a:fontRef idx="minor">
+            <a:schemeClr val="tx1"/>
+          </a:fontRef>
+        </p:style>
+      </p:cxnSp>
+      <p:sp>
+        <p:nvSpPr>
+          <p:cNvPr id="27" name="文本框 26"/>
+          <p:cNvSpPr txBox="1"/>
+          <p:nvPr/>
+        </p:nvSpPr>
+        <p:spPr>
+          <a:xfrm>
+            <a:off x="8646795" y="3255010"/>
+            <a:ext cx="1532890" cy="337185"/>
+          </a:xfrm>
+          <a:prstGeom prst="rect">
+            <a:avLst/>
+          </a:prstGeom>
+          <a:noFill/>
+        </p:spPr>
+        <p:txBody>
+          <a:bodyPr wrap="square" rtlCol="0">
+            <a:spAutoFit/>
+          </a:bodyPr>
+          <a:p>
+            <a:pPr algn="ctr"/>
+            <a:r>
+              <a:rPr lang="en-US" altLang="zh-CN" sz="1600">
+                <a:latin typeface="Times New Roman" panose="02020603050405020304" charset="0"/>
+                <a:cs typeface="Times New Roman" panose="02020603050405020304" charset="0"/>
+              </a:rPr>
+              <a:t>Funds transfer</a:t>
+            </a:r>
+            <a:endParaRPr lang="en-US" altLang="zh-CN" sz="1600">
+              <a:latin typeface="Times New Roman" panose="02020603050405020304" charset="0"/>
+              <a:cs typeface="Times New Roman" panose="02020603050405020304" charset="0"/>
+            </a:endParaRPr>
+          </a:p>
+        </p:txBody>
+      </p:sp>
+      <p:sp>
+        <p:nvSpPr>
+          <p:cNvPr id="28" name="矩形 27"/>
+          <p:cNvSpPr/>
+          <p:nvPr/>
+        </p:nvSpPr>
+        <p:spPr>
+          <a:xfrm>
+            <a:off x="7974330" y="2764790"/>
+            <a:ext cx="2907030" cy="1089660"/>
+          </a:xfrm>
+          <a:prstGeom prst="rect">
+            <a:avLst/>
+          </a:prstGeom>
+          <a:noFill/>
+          <a:ln w="19050">
+            <a:solidFill>
+              <a:srgbClr val="72B063"/>
+            </a:solidFill>
+            <a:prstDash val="dash"/>
+          </a:ln>
+        </p:spPr>
+        <p:style>
+          <a:lnRef idx="2">
+            <a:schemeClr val="accent1">
+              <a:shade val="50000"/>
+            </a:schemeClr>
+          </a:lnRef>
+          <a:fillRef idx="1">
+            <a:schemeClr val="accent1"/>
+          </a:fillRef>
+          <a:effectRef idx="0">
+            <a:schemeClr val="accent1"/>
+          </a:effectRef>
+          <a:fontRef idx="minor">
+            <a:schemeClr val="lt1"/>
+          </a:fontRef>
+        </p:style>
+        <p:txBody>
+          <a:bodyPr rtlCol="0" anchor="ctr"/>
+          <a:lstStyle/>
+          <a:p>
+            <a:pPr algn="ctr"/>
+            <a:endParaRPr lang="zh-CN" altLang="en-US" sz="1600">
+              <a:latin typeface="Times New Roman" panose="02020603050405020304" charset="0"/>
+              <a:cs typeface="Times New Roman" panose="02020603050405020304" charset="0"/>
+            </a:endParaRPr>
+          </a:p>
+        </p:txBody>
+      </p:sp>
+      <p:sp>
+        <p:nvSpPr>
+          <p:cNvPr id="30" name="文本框 29"/>
+          <p:cNvSpPr txBox="1"/>
+          <p:nvPr/>
+        </p:nvSpPr>
+        <p:spPr>
+          <a:xfrm>
+            <a:off x="4481195" y="3107690"/>
+            <a:ext cx="709930" cy="346710"/>
+          </a:xfrm>
+          <a:prstGeom prst="rect">
+            <a:avLst/>
+          </a:prstGeom>
+          <a:noFill/>
+        </p:spPr>
+        <p:txBody>
+          <a:bodyPr wrap="square" rtlCol="0">
+            <a:noAutofit/>
+          </a:bodyPr>
+          <a:p>
+            <a:pPr algn="ctr"/>
+            <a:r>
+              <a:rPr lang="en-US" altLang="zh-CN" sz="1600">
+                <a:latin typeface="Times New Roman" panose="02020603050405020304" charset="0"/>
+                <a:cs typeface="Times New Roman" panose="02020603050405020304" charset="0"/>
+              </a:rPr>
+              <a:t>SDK</a:t>
+            </a:r>
+            <a:endParaRPr lang="en-US" altLang="zh-CN" sz="1600">
+              <a:latin typeface="Times New Roman" panose="02020603050405020304" charset="0"/>
+              <a:cs typeface="Times New Roman" panose="02020603050405020304" charset="0"/>
+            </a:endParaRPr>
+          </a:p>
+        </p:txBody>
+      </p:sp>
+      <p:cxnSp>
+        <p:nvCxnSpPr>
+          <p:cNvPr id="31" name="直接连接符 30"/>
+          <p:cNvCxnSpPr/>
+          <p:nvPr/>
+        </p:nvCxnSpPr>
+        <p:spPr>
+          <a:xfrm>
+            <a:off x="6791925" y="2970450"/>
+            <a:ext cx="0" cy="720000"/>
+          </a:xfrm>
+          <a:prstGeom prst="line">
+            <a:avLst/>
+          </a:prstGeom>
+          <a:ln w="19050">
+            <a:solidFill>
+              <a:schemeClr val="tx1"/>
+            </a:solidFill>
+            <a:prstDash val="solid"/>
+            <a:headEnd type="triangle"/>
+            <a:tailEnd type="none"/>
           </a:ln>
         </p:spPr>
         <p:style>
@@ -5634,17 +5713,20 @@
       </p:cxnSp>
       <p:pic>
         <p:nvPicPr>
-          <p:cNvPr id="15" name="图片 14" descr="收银台"/>
+          <p:cNvPr id="29" name="图形 6"/>
           <p:cNvPicPr>
             <a:picLocks noChangeAspect="1"/>
           </p:cNvPicPr>
           <p:nvPr/>
         </p:nvPicPr>
         <p:blipFill>
-          <a:blip r:embed="rId11">
+          <a:blip r:embed="rId1" cstate="print">
             <a:extLst>
+              <a:ext uri="{28A0092B-C50C-407E-A947-70E740481C1C}">
+                <a14:useLocalDpi xmlns:a14="http://schemas.microsoft.com/office/drawing/2010/main" val="0"/>
+              </a:ext>
               <a:ext uri="{96DAC541-7B7A-43D3-8B79-37D633B846F1}">
-                <asvg:svgBlip xmlns:asvg="http://schemas.microsoft.com/office/drawing/2016/SVG/main" r:embed="rId12"/>
+                <asvg:svgBlip xmlns:asvg="http://schemas.microsoft.com/office/drawing/2016/SVG/main" r:embed="rId2"/>
               </a:ext>
             </a:extLst>
           </a:blip>
@@ -5654,106 +5736,30 @@
         </p:blipFill>
         <p:spPr>
           <a:xfrm>
-            <a:off x="6432550" y="4142740"/>
-            <a:ext cx="1080000" cy="1080000"/>
+            <a:off x="1366100" y="1749117"/>
+            <a:ext cx="900000" cy="900000"/>
           </a:xfrm>
           <a:prstGeom prst="rect">
             <a:avLst/>
           </a:prstGeom>
         </p:spPr>
       </p:pic>
-      <p:sp>
-        <p:nvSpPr>
-          <p:cNvPr id="16" name="文本框 15"/>
-          <p:cNvSpPr txBox="1"/>
-          <p:nvPr/>
-        </p:nvSpPr>
-        <p:spPr>
-          <a:xfrm>
-            <a:off x="6206490" y="5053330"/>
-            <a:ext cx="1532890" cy="368300"/>
-          </a:xfrm>
-          <a:prstGeom prst="rect">
-            <a:avLst/>
-          </a:prstGeom>
-          <a:noFill/>
-        </p:spPr>
-        <p:txBody>
-          <a:bodyPr wrap="square" rtlCol="0">
-            <a:spAutoFit/>
-          </a:bodyPr>
-          <a:p>
-            <a:pPr algn="ctr"/>
-            <a:r>
-              <a:rPr lang="en-US" altLang="zh-CN">
-                <a:latin typeface="Times New Roman" panose="02020603050405020304" charset="0"/>
-                <a:cs typeface="Times New Roman" panose="02020603050405020304" charset="0"/>
-              </a:rPr>
-              <a:t>PS-S</a:t>
-            </a:r>
-            <a:r>
-              <a:rPr lang="en-US" altLang="zh-CN">
-                <a:latin typeface="Times New Roman" panose="02020603050405020304" charset="0"/>
-                <a:cs typeface="Times New Roman" panose="02020603050405020304" charset="0"/>
-              </a:rPr>
-              <a:t>erver</a:t>
-            </a:r>
-            <a:endParaRPr lang="en-US" altLang="zh-CN">
-              <a:latin typeface="Times New Roman" panose="02020603050405020304" charset="0"/>
-              <a:cs typeface="Times New Roman" panose="02020603050405020304" charset="0"/>
-            </a:endParaRPr>
-          </a:p>
-        </p:txBody>
-      </p:sp>
-      <p:cxnSp>
-        <p:nvCxnSpPr>
-          <p:cNvPr id="2" name="直接连接符 1"/>
-          <p:cNvCxnSpPr/>
-          <p:nvPr/>
-        </p:nvCxnSpPr>
-        <p:spPr>
-          <a:xfrm flipV="1">
-            <a:off x="7512554" y="3890400"/>
-            <a:ext cx="778510" cy="791845"/>
-          </a:xfrm>
-          <a:prstGeom prst="line">
-            <a:avLst/>
-          </a:prstGeom>
-          <a:ln w="19050">
-            <a:solidFill>
-              <a:srgbClr val="018A67"/>
-            </a:solidFill>
-            <a:prstDash val="dash"/>
-          </a:ln>
-        </p:spPr>
-        <p:style>
-          <a:lnRef idx="1">
-            <a:schemeClr val="accent1"/>
-          </a:lnRef>
-          <a:fillRef idx="0">
-            <a:schemeClr val="accent1"/>
-          </a:fillRef>
-          <a:effectRef idx="0">
-            <a:schemeClr val="accent1"/>
-          </a:effectRef>
-          <a:fontRef idx="minor">
-            <a:schemeClr val="tx1"/>
-          </a:fontRef>
-        </p:style>
-      </p:cxnSp>
       <p:pic>
         <p:nvPicPr>
-          <p:cNvPr id="13" name="图片 12" descr="钱币"/>
+          <p:cNvPr id="32" name="图形 4"/>
           <p:cNvPicPr>
             <a:picLocks noChangeAspect="1"/>
           </p:cNvPicPr>
           <p:nvPr/>
         </p:nvPicPr>
         <p:blipFill>
-          <a:blip r:embed="rId13">
+          <a:blip r:embed="rId3" cstate="print">
             <a:extLst>
+              <a:ext uri="{28A0092B-C50C-407E-A947-70E740481C1C}">
+                <a14:useLocalDpi xmlns:a14="http://schemas.microsoft.com/office/drawing/2010/main" val="0"/>
+              </a:ext>
               <a:ext uri="{96DAC541-7B7A-43D3-8B79-37D633B846F1}">
-                <asvg:svgBlip xmlns:asvg="http://schemas.microsoft.com/office/drawing/2016/SVG/main" r:embed="rId14"/>
+                <asvg:svgBlip xmlns:asvg="http://schemas.microsoft.com/office/drawing/2016/SVG/main" r:embed="rId4"/>
               </a:ext>
             </a:extLst>
           </a:blip>
@@ -5763,7 +5769,7 @@
         </p:blipFill>
         <p:spPr>
           <a:xfrm>
-            <a:off x="8376920" y="3068955"/>
+            <a:off x="1455842" y="2970613"/>
             <a:ext cx="720000" cy="720000"/>
           </a:xfrm>
           <a:prstGeom prst="rect">
@@ -5771,55 +5777,226 @@
           </a:prstGeom>
         </p:spPr>
       </p:pic>
-      <p:cxnSp>
-        <p:nvCxnSpPr>
-          <p:cNvPr id="18" name="直接连接符 17"/>
-          <p:cNvCxnSpPr/>
-          <p:nvPr/>
-        </p:nvCxnSpPr>
-        <p:spPr>
-          <a:xfrm>
-            <a:off x="9168634" y="3428755"/>
-            <a:ext cx="1080000" cy="0"/>
-          </a:xfrm>
-          <a:prstGeom prst="line">
-            <a:avLst/>
-          </a:prstGeom>
-          <a:ln w="19050">
-            <a:solidFill>
-              <a:schemeClr val="tx1"/>
-            </a:solidFill>
-            <a:prstDash val="solid"/>
-          </a:ln>
-        </p:spPr>
-        <p:style>
-          <a:lnRef idx="1">
-            <a:schemeClr val="accent1"/>
-          </a:lnRef>
-          <a:fillRef idx="0">
-            <a:schemeClr val="accent1"/>
-          </a:fillRef>
-          <a:effectRef idx="0">
-            <a:schemeClr val="accent1"/>
-          </a:effectRef>
-          <a:fontRef idx="minor">
-            <a:schemeClr val="tx1"/>
-          </a:fontRef>
-        </p:style>
-      </p:cxnSp>
+      <p:grpSp>
+        <p:nvGrpSpPr>
+          <p:cNvPr id="63" name="组合 62"/>
+          <p:cNvGrpSpPr>
+            <a:grpSpLocks noChangeAspect="1"/>
+          </p:cNvGrpSpPr>
+          <p:nvPr/>
+        </p:nvGrpSpPr>
+        <p:grpSpPr>
+          <a:xfrm>
+            <a:off x="3796030" y="1948815"/>
+            <a:ext cx="475615" cy="470535"/>
+            <a:chOff x="4445000" y="739632"/>
+            <a:chExt cx="375710" cy="371203"/>
+          </a:xfrm>
+          <a:solidFill>
+            <a:srgbClr val="4A5F7E"/>
+          </a:solidFill>
+        </p:grpSpPr>
+        <p:sp>
+          <p:nvSpPr>
+            <p:cNvPr id="64" name="矩形: 圆角 63"/>
+            <p:cNvSpPr/>
+            <p:nvPr/>
+          </p:nvSpPr>
+          <p:spPr>
+            <a:xfrm>
+              <a:off x="4445000" y="740833"/>
+              <a:ext cx="156634" cy="156634"/>
+            </a:xfrm>
+            <a:prstGeom prst="roundRect">
+              <a:avLst/>
+            </a:prstGeom>
+            <a:grpFill/>
+            <a:ln w="38100">
+              <a:solidFill>
+                <a:srgbClr val="4A5F7E"/>
+              </a:solidFill>
+            </a:ln>
+          </p:spPr>
+          <p:style>
+            <a:lnRef idx="2">
+              <a:schemeClr val="accent1">
+                <a:shade val="50000"/>
+              </a:schemeClr>
+            </a:lnRef>
+            <a:fillRef idx="1">
+              <a:schemeClr val="accent1"/>
+            </a:fillRef>
+            <a:effectRef idx="0">
+              <a:schemeClr val="accent1"/>
+            </a:effectRef>
+            <a:fontRef idx="minor">
+              <a:schemeClr val="lt1"/>
+            </a:fontRef>
+          </p:style>
+          <p:txBody>
+            <a:bodyPr rtlCol="0" anchor="ctr"/>
+            <a:lstStyle/>
+            <a:p>
+              <a:pPr algn="ctr"/>
+              <a:endParaRPr lang="zh-CN" altLang="en-US" sz="1600"/>
+            </a:p>
+          </p:txBody>
+        </p:sp>
+        <p:sp>
+          <p:nvSpPr>
+            <p:cNvPr id="65" name="矩形: 圆角 64"/>
+            <p:cNvSpPr/>
+            <p:nvPr/>
+          </p:nvSpPr>
+          <p:spPr>
+            <a:xfrm>
+              <a:off x="4445000" y="954201"/>
+              <a:ext cx="156634" cy="156634"/>
+            </a:xfrm>
+            <a:prstGeom prst="roundRect">
+              <a:avLst/>
+            </a:prstGeom>
+            <a:grpFill/>
+            <a:ln w="38100">
+              <a:solidFill>
+                <a:srgbClr val="4A5F7E"/>
+              </a:solidFill>
+            </a:ln>
+          </p:spPr>
+          <p:style>
+            <a:lnRef idx="2">
+              <a:schemeClr val="accent1">
+                <a:shade val="50000"/>
+              </a:schemeClr>
+            </a:lnRef>
+            <a:fillRef idx="1">
+              <a:schemeClr val="accent1"/>
+            </a:fillRef>
+            <a:effectRef idx="0">
+              <a:schemeClr val="accent1"/>
+            </a:effectRef>
+            <a:fontRef idx="minor">
+              <a:schemeClr val="lt1"/>
+            </a:fontRef>
+          </p:style>
+          <p:txBody>
+            <a:bodyPr rtlCol="0" anchor="ctr"/>
+            <a:lstStyle/>
+            <a:p>
+              <a:pPr algn="ctr"/>
+              <a:endParaRPr lang="zh-CN" altLang="en-US" sz="1600"/>
+            </a:p>
+          </p:txBody>
+        </p:sp>
+        <p:sp>
+          <p:nvSpPr>
+            <p:cNvPr id="66" name="矩形: 圆角 65"/>
+            <p:cNvSpPr/>
+            <p:nvPr/>
+          </p:nvSpPr>
+          <p:spPr>
+            <a:xfrm rot="1800000">
+              <a:off x="4672028" y="739632"/>
+              <a:ext cx="145198" cy="138592"/>
+            </a:xfrm>
+            <a:prstGeom prst="roundRect">
+              <a:avLst/>
+            </a:prstGeom>
+            <a:grpFill/>
+            <a:ln w="57150">
+              <a:solidFill>
+                <a:srgbClr val="4A5F7E"/>
+              </a:solidFill>
+            </a:ln>
+          </p:spPr>
+          <p:style>
+            <a:lnRef idx="2">
+              <a:schemeClr val="accent1">
+                <a:shade val="50000"/>
+              </a:schemeClr>
+            </a:lnRef>
+            <a:fillRef idx="1">
+              <a:schemeClr val="accent1"/>
+            </a:fillRef>
+            <a:effectRef idx="0">
+              <a:schemeClr val="accent1"/>
+            </a:effectRef>
+            <a:fontRef idx="minor">
+              <a:schemeClr val="lt1"/>
+            </a:fontRef>
+          </p:style>
+          <p:txBody>
+            <a:bodyPr rtlCol="0" anchor="ctr"/>
+            <a:lstStyle/>
+            <a:p>
+              <a:pPr algn="ctr"/>
+              <a:endParaRPr lang="zh-CN" altLang="en-US" sz="1600"/>
+            </a:p>
+          </p:txBody>
+        </p:sp>
+        <p:sp>
+          <p:nvSpPr>
+            <p:cNvPr id="67" name="矩形: 圆角 66"/>
+            <p:cNvSpPr/>
+            <p:nvPr/>
+          </p:nvSpPr>
+          <p:spPr>
+            <a:xfrm>
+              <a:off x="4664075" y="954201"/>
+              <a:ext cx="156635" cy="156634"/>
+            </a:xfrm>
+            <a:prstGeom prst="roundRect">
+              <a:avLst/>
+            </a:prstGeom>
+            <a:grpFill/>
+            <a:ln w="38100">
+              <a:solidFill>
+                <a:srgbClr val="4A5F7E"/>
+              </a:solidFill>
+            </a:ln>
+          </p:spPr>
+          <p:style>
+            <a:lnRef idx="2">
+              <a:schemeClr val="accent1">
+                <a:shade val="50000"/>
+              </a:schemeClr>
+            </a:lnRef>
+            <a:fillRef idx="1">
+              <a:schemeClr val="accent1"/>
+            </a:fillRef>
+            <a:effectRef idx="0">
+              <a:schemeClr val="accent1"/>
+            </a:effectRef>
+            <a:fontRef idx="minor">
+              <a:schemeClr val="lt1"/>
+            </a:fontRef>
+          </p:style>
+          <p:txBody>
+            <a:bodyPr rtlCol="0" anchor="ctr"/>
+            <a:lstStyle/>
+            <a:p>
+              <a:pPr algn="ctr"/>
+              <a:endParaRPr lang="zh-CN" altLang="en-US" sz="1600"/>
+            </a:p>
+          </p:txBody>
+        </p:sp>
+      </p:grpSp>
       <p:pic>
         <p:nvPicPr>
-          <p:cNvPr id="25" name="图片 24" descr="钱币"/>
+          <p:cNvPr id="33" name="图形 11"/>
           <p:cNvPicPr>
             <a:picLocks noChangeAspect="1"/>
           </p:cNvPicPr>
           <p:nvPr/>
         </p:nvPicPr>
         <p:blipFill>
-          <a:blip r:embed="rId13">
+          <a:blip r:embed="rId5" cstate="print">
             <a:extLst>
+              <a:ext uri="{28A0092B-C50C-407E-A947-70E740481C1C}">
+                <a14:useLocalDpi xmlns:a14="http://schemas.microsoft.com/office/drawing/2010/main" val="0"/>
+              </a:ext>
               <a:ext uri="{96DAC541-7B7A-43D3-8B79-37D633B846F1}">
-                <asvg:svgBlip xmlns:asvg="http://schemas.microsoft.com/office/drawing/2016/SVG/main" r:embed="rId14"/>
+                <asvg:svgBlip xmlns:asvg="http://schemas.microsoft.com/office/drawing/2016/SVG/main" r:embed="rId6"/>
               </a:ext>
             </a:extLst>
           </a:blip>
@@ -5829,7 +6006,7 @@
         </p:blipFill>
         <p:spPr>
           <a:xfrm>
-            <a:off x="10319385" y="3068955"/>
+            <a:off x="4115250" y="3724946"/>
             <a:ext cx="720000" cy="720000"/>
           </a:xfrm>
           <a:prstGeom prst="rect">
@@ -5839,17 +6016,20 @@
       </p:pic>
       <p:pic>
         <p:nvPicPr>
-          <p:cNvPr id="26" name="图片 25" descr="对"/>
+          <p:cNvPr id="34" name="图形 10"/>
           <p:cNvPicPr>
             <a:picLocks noChangeAspect="1"/>
           </p:cNvPicPr>
           <p:nvPr/>
         </p:nvPicPr>
         <p:blipFill>
-          <a:blip r:embed="rId15">
+          <a:blip r:embed="rId7" cstate="print">
             <a:extLst>
+              <a:ext uri="{28A0092B-C50C-407E-A947-70E740481C1C}">
+                <a14:useLocalDpi xmlns:a14="http://schemas.microsoft.com/office/drawing/2010/main" val="0"/>
+              </a:ext>
               <a:ext uri="{96DAC541-7B7A-43D3-8B79-37D633B846F1}">
-                <asvg:svgBlip xmlns:asvg="http://schemas.microsoft.com/office/drawing/2016/SVG/main" r:embed="rId16"/>
+                <asvg:svgBlip xmlns:asvg="http://schemas.microsoft.com/office/drawing/2016/SVG/main" r:embed="rId8"/>
               </a:ext>
             </a:extLst>
           </a:blip>
@@ -5859,152 +6039,407 @@
         </p:blipFill>
         <p:spPr>
           <a:xfrm>
-            <a:off x="9508490" y="2943225"/>
-            <a:ext cx="400685" cy="400685"/>
+            <a:off x="6433682" y="3763681"/>
+            <a:ext cx="720000" cy="720000"/>
           </a:xfrm>
           <a:prstGeom prst="rect">
             <a:avLst/>
           </a:prstGeom>
         </p:spPr>
       </p:pic>
-      <p:sp>
-        <p:nvSpPr>
-          <p:cNvPr id="27" name="文本框 26"/>
+      <p:pic>
+        <p:nvPicPr>
+          <p:cNvPr id="36" name="图形 15"/>
+          <p:cNvPicPr>
+            <a:picLocks noChangeAspect="1"/>
+          </p:cNvPicPr>
+          <p:nvPr/>
+        </p:nvPicPr>
+        <p:blipFill>
+          <a:blip r:embed="rId9" cstate="print">
+            <a:extLst>
+              <a:ext uri="{28A0092B-C50C-407E-A947-70E740481C1C}">
+                <a14:useLocalDpi xmlns:a14="http://schemas.microsoft.com/office/drawing/2010/main" val="0"/>
+              </a:ext>
+              <a:ext uri="{96DAC541-7B7A-43D3-8B79-37D633B846F1}">
+                <asvg:svgBlip xmlns:asvg="http://schemas.microsoft.com/office/drawing/2016/SVG/main" r:embed="rId10"/>
+              </a:ext>
+            </a:extLst>
+          </a:blip>
+          <a:stretch>
+            <a:fillRect/>
+          </a:stretch>
+        </p:blipFill>
+        <p:spPr>
+          <a:xfrm>
+            <a:off x="6431777" y="1830334"/>
+            <a:ext cx="720000" cy="720000"/>
+          </a:xfrm>
+          <a:prstGeom prst="rect">
+            <a:avLst/>
+          </a:prstGeom>
+        </p:spPr>
+      </p:pic>
+      <p:pic>
+        <p:nvPicPr>
+          <p:cNvPr id="37" name="图形 12"/>
+          <p:cNvPicPr>
+            <a:picLocks noChangeAspect="1"/>
+          </p:cNvPicPr>
+          <p:nvPr/>
+        </p:nvPicPr>
+        <p:blipFill>
+          <a:blip r:embed="rId11" cstate="print">
+            <a:extLst>
+              <a:ext uri="{28A0092B-C50C-407E-A947-70E740481C1C}">
+                <a14:useLocalDpi xmlns:a14="http://schemas.microsoft.com/office/drawing/2010/main" val="0"/>
+              </a:ext>
+              <a:ext uri="{96DAC541-7B7A-43D3-8B79-37D633B846F1}">
+                <asvg:svgBlip xmlns:asvg="http://schemas.microsoft.com/office/drawing/2016/SVG/main" r:embed="rId12"/>
+              </a:ext>
+            </a:extLst>
+          </a:blip>
+          <a:stretch>
+            <a:fillRect/>
+          </a:stretch>
+        </p:blipFill>
+        <p:spPr>
+          <a:xfrm>
+            <a:off x="8096011" y="2901414"/>
+            <a:ext cx="720000" cy="720000"/>
+          </a:xfrm>
+          <a:prstGeom prst="rect">
+            <a:avLst/>
+          </a:prstGeom>
+        </p:spPr>
+      </p:pic>
+      <p:pic>
+        <p:nvPicPr>
+          <p:cNvPr id="38" name="图形 12"/>
+          <p:cNvPicPr>
+            <a:picLocks noChangeAspect="1"/>
+          </p:cNvPicPr>
+          <p:nvPr/>
+        </p:nvPicPr>
+        <p:blipFill>
+          <a:blip r:embed="rId11" cstate="print">
+            <a:extLst>
+              <a:ext uri="{28A0092B-C50C-407E-A947-70E740481C1C}">
+                <a14:useLocalDpi xmlns:a14="http://schemas.microsoft.com/office/drawing/2010/main" val="0"/>
+              </a:ext>
+              <a:ext uri="{96DAC541-7B7A-43D3-8B79-37D633B846F1}">
+                <asvg:svgBlip xmlns:asvg="http://schemas.microsoft.com/office/drawing/2016/SVG/main" r:embed="rId13"/>
+              </a:ext>
+            </a:extLst>
+          </a:blip>
+          <a:stretch>
+            <a:fillRect/>
+          </a:stretch>
+        </p:blipFill>
+        <p:spPr>
+          <a:xfrm>
+            <a:off x="10016886" y="2901414"/>
+            <a:ext cx="720000" cy="720000"/>
+          </a:xfrm>
+          <a:prstGeom prst="rect">
+            <a:avLst/>
+          </a:prstGeom>
+        </p:spPr>
+      </p:pic>
+      <p:pic>
+        <p:nvPicPr>
+          <p:cNvPr id="39" name="图片 38" descr="序号1"/>
+          <p:cNvPicPr>
+            <a:picLocks noChangeAspect="1"/>
+          </p:cNvPicPr>
+          <p:nvPr/>
+        </p:nvPicPr>
+        <p:blipFill>
+          <a:blip r:embed="rId14">
+            <a:extLst>
+              <a:ext uri="{96DAC541-7B7A-43D3-8B79-37D633B846F1}">
+                <asvg:svgBlip xmlns:asvg="http://schemas.microsoft.com/office/drawing/2016/SVG/main" r:embed="rId15"/>
+              </a:ext>
+            </a:extLst>
+          </a:blip>
+          <a:stretch>
+            <a:fillRect/>
+          </a:stretch>
+        </p:blipFill>
+        <p:spPr>
+          <a:xfrm rot="19860000">
+            <a:off x="2434590" y="2704465"/>
+            <a:ext cx="260985" cy="260985"/>
+          </a:xfrm>
+          <a:prstGeom prst="rect">
+            <a:avLst/>
+          </a:prstGeom>
+        </p:spPr>
+      </p:pic>
+      <p:pic>
+        <p:nvPicPr>
+          <p:cNvPr id="40" name="图片 39" descr="序号2"/>
+          <p:cNvPicPr>
+            <a:picLocks noChangeAspect="1"/>
+          </p:cNvPicPr>
+          <p:nvPr/>
+        </p:nvPicPr>
+        <p:blipFill>
+          <a:blip r:embed="rId16">
+            <a:extLst>
+              <a:ext uri="{96DAC541-7B7A-43D3-8B79-37D633B846F1}">
+                <asvg:svgBlip xmlns:asvg="http://schemas.microsoft.com/office/drawing/2016/SVG/main" r:embed="rId17"/>
+              </a:ext>
+            </a:extLst>
+          </a:blip>
+          <a:stretch>
+            <a:fillRect/>
+          </a:stretch>
+        </p:blipFill>
+        <p:spPr>
+          <a:xfrm>
+            <a:off x="5841365" y="1884680"/>
+            <a:ext cx="259200" cy="259200"/>
+          </a:xfrm>
+          <a:prstGeom prst="rect">
+            <a:avLst/>
+          </a:prstGeom>
+        </p:spPr>
+      </p:pic>
+      <p:pic>
+        <p:nvPicPr>
+          <p:cNvPr id="41" name="图片 40" descr="序号3"/>
+          <p:cNvPicPr>
+            <a:picLocks noChangeAspect="1"/>
+          </p:cNvPicPr>
+          <p:nvPr/>
+        </p:nvPicPr>
+        <p:blipFill>
+          <a:blip r:embed="rId18">
+            <a:extLst>
+              <a:ext uri="{96DAC541-7B7A-43D3-8B79-37D633B846F1}">
+                <asvg:svgBlip xmlns:asvg="http://schemas.microsoft.com/office/drawing/2016/SVG/main" r:embed="rId19"/>
+              </a:ext>
+            </a:extLst>
+          </a:blip>
+          <a:stretch>
+            <a:fillRect/>
+          </a:stretch>
+        </p:blipFill>
+        <p:spPr>
+          <a:xfrm>
+            <a:off x="4149725" y="3162300"/>
+            <a:ext cx="259200" cy="259200"/>
+          </a:xfrm>
+          <a:prstGeom prst="rect">
+            <a:avLst/>
+          </a:prstGeom>
+        </p:spPr>
+      </p:pic>
+      <p:sp>
+        <p:nvSpPr>
+          <p:cNvPr id="10" name="文本框 9"/>
           <p:cNvSpPr txBox="1"/>
           <p:nvPr/>
         </p:nvSpPr>
         <p:spPr>
-          <a:xfrm>
-            <a:off x="8942070" y="3514090"/>
-            <a:ext cx="1532890" cy="645160"/>
+          <a:xfrm rot="780000">
+            <a:off x="2460227" y="3538159"/>
+            <a:ext cx="1010285" cy="352800"/>
           </a:xfrm>
           <a:prstGeom prst="rect">
             <a:avLst/>
           </a:prstGeom>
           <a:noFill/>
+          <a:extLst>
+            <a:ext uri="{909E8E84-426E-40DD-AFC4-6F175D3DCCD1}">
+              <a14:hiddenFill xmlns:a14="http://schemas.microsoft.com/office/drawing/2010/main">
+                <a:solidFill>
+                  <a:schemeClr val="bg1"/>
+                </a:solidFill>
+              </a14:hiddenFill>
+            </a:ext>
+          </a:extLst>
         </p:spPr>
         <p:txBody>
           <a:bodyPr wrap="square" rtlCol="0">
-            <a:spAutoFit/>
+            <a:noAutofit/>
           </a:bodyPr>
           <a:p>
             <a:pPr algn="ctr"/>
             <a:r>
-              <a:rPr lang="en-US" altLang="zh-CN">
+              <a:rPr lang="en-US" altLang="zh-CN" sz="1600">
                 <a:latin typeface="Times New Roman" panose="02020603050405020304" charset="0"/>
                 <a:cs typeface="Times New Roman" panose="02020603050405020304" charset="0"/>
               </a:rPr>
-              <a:t>P</a:t>
-            </a:r>
-            <a:r>
-              <a:rPr lang="en-US" altLang="zh-CN">
-                <a:latin typeface="Times New Roman" panose="02020603050405020304" charset="0"/>
-                <a:cs typeface="Times New Roman" panose="02020603050405020304" charset="0"/>
-              </a:rPr>
-              <a:t>ayment Success</a:t>
-            </a:r>
-            <a:endParaRPr lang="en-US" altLang="zh-CN">
+              <a:t>Password</a:t>
+            </a:r>
+            <a:endParaRPr lang="en-US" altLang="zh-CN" sz="1600">
               <a:latin typeface="Times New Roman" panose="02020603050405020304" charset="0"/>
               <a:cs typeface="Times New Roman" panose="02020603050405020304" charset="0"/>
             </a:endParaRPr>
           </a:p>
         </p:txBody>
       </p:sp>
-      <p:sp>
-        <p:nvSpPr>
-          <p:cNvPr id="28" name="矩形 27"/>
-          <p:cNvSpPr/>
-          <p:nvPr/>
-        </p:nvSpPr>
-        <p:spPr>
-          <a:xfrm>
-            <a:off x="8295005" y="2736215"/>
-            <a:ext cx="2907030" cy="1487170"/>
-          </a:xfrm>
-          <a:prstGeom prst="rect">
-            <a:avLst/>
-          </a:prstGeom>
-          <a:noFill/>
-          <a:ln w="19050">
-            <a:solidFill>
-              <a:srgbClr val="018A67"/>
-            </a:solidFill>
-            <a:prstDash val="dash"/>
-          </a:ln>
-        </p:spPr>
-        <p:style>
-          <a:lnRef idx="2">
-            <a:schemeClr val="accent1">
-              <a:shade val="50000"/>
-            </a:schemeClr>
-          </a:lnRef>
-          <a:fillRef idx="1">
-            <a:schemeClr val="accent1"/>
-          </a:fillRef>
-          <a:effectRef idx="0">
-            <a:schemeClr val="accent1"/>
-          </a:effectRef>
-          <a:fontRef idx="minor">
-            <a:schemeClr val="lt1"/>
-          </a:fontRef>
-        </p:style>
-        <p:txBody>
-          <a:bodyPr rtlCol="0" anchor="ctr"/>
-          <a:lstStyle/>
-          <a:p>
-            <a:pPr algn="ctr"/>
-            <a:endParaRPr lang="zh-CN" altLang="en-US">
-              <a:latin typeface="Times New Roman" panose="02020603050405020304" charset="0"/>
-              <a:cs typeface="Times New Roman" panose="02020603050405020304" charset="0"/>
-            </a:endParaRPr>
-          </a:p>
-        </p:txBody>
-      </p:sp>
-      <p:sp>
-        <p:nvSpPr>
-          <p:cNvPr id="30" name="文本框 29"/>
-          <p:cNvSpPr txBox="1"/>
-          <p:nvPr/>
-        </p:nvSpPr>
-        <p:spPr>
-          <a:xfrm>
-            <a:off x="4385945" y="3380740"/>
-            <a:ext cx="709930" cy="346710"/>
-          </a:xfrm>
-          <a:prstGeom prst="rect">
-            <a:avLst/>
-          </a:prstGeom>
-          <a:noFill/>
-        </p:spPr>
-        <p:txBody>
-          <a:bodyPr wrap="square" rtlCol="0">
-            <a:noAutofit/>
-          </a:bodyPr>
-          <a:p>
-            <a:pPr algn="ctr"/>
-            <a:r>
-              <a:rPr lang="en-US" altLang="zh-CN">
-                <a:latin typeface="Times New Roman" panose="02020603050405020304" charset="0"/>
-                <a:cs typeface="Times New Roman" panose="02020603050405020304" charset="0"/>
-              </a:rPr>
-              <a:t>SDK</a:t>
-            </a:r>
-            <a:endParaRPr lang="en-US" altLang="zh-CN">
-              <a:latin typeface="Times New Roman" panose="02020603050405020304" charset="0"/>
-              <a:cs typeface="Times New Roman" panose="02020603050405020304" charset="0"/>
-            </a:endParaRPr>
-          </a:p>
-        </p:txBody>
-      </p:sp>
+      <p:pic>
+        <p:nvPicPr>
+          <p:cNvPr id="42" name="图片 41" descr="序号4"/>
+          <p:cNvPicPr>
+            <a:picLocks noChangeAspect="1"/>
+          </p:cNvPicPr>
+          <p:nvPr/>
+        </p:nvPicPr>
+        <p:blipFill>
+          <a:blip r:embed="rId20">
+            <a:extLst>
+              <a:ext uri="{96DAC541-7B7A-43D3-8B79-37D633B846F1}">
+                <asvg:svgBlip xmlns:asvg="http://schemas.microsoft.com/office/drawing/2016/SVG/main" r:embed="rId21"/>
+              </a:ext>
+            </a:extLst>
+          </a:blip>
+          <a:stretch>
+            <a:fillRect/>
+          </a:stretch>
+        </p:blipFill>
+        <p:spPr>
+          <a:xfrm rot="780000">
+            <a:off x="2292350" y="3455035"/>
+            <a:ext cx="259200" cy="259200"/>
+          </a:xfrm>
+          <a:prstGeom prst="rect">
+            <a:avLst/>
+          </a:prstGeom>
+        </p:spPr>
+      </p:pic>
+      <p:pic>
+        <p:nvPicPr>
+          <p:cNvPr id="43" name="图片 42" descr="序号5"/>
+          <p:cNvPicPr>
+            <a:picLocks noChangeAspect="1"/>
+          </p:cNvPicPr>
+          <p:nvPr/>
+        </p:nvPicPr>
+        <p:blipFill>
+          <a:blip r:embed="rId22">
+            <a:extLst>
+              <a:ext uri="{96DAC541-7B7A-43D3-8B79-37D633B846F1}">
+                <asvg:svgBlip xmlns:asvg="http://schemas.microsoft.com/office/drawing/2016/SVG/main" r:embed="rId23"/>
+              </a:ext>
+            </a:extLst>
+          </a:blip>
+          <a:stretch>
+            <a:fillRect/>
+          </a:stretch>
+        </p:blipFill>
+        <p:spPr>
+          <a:xfrm>
+            <a:off x="5835015" y="3788410"/>
+            <a:ext cx="259200" cy="259200"/>
+          </a:xfrm>
+          <a:prstGeom prst="rect">
+            <a:avLst/>
+          </a:prstGeom>
+        </p:spPr>
+      </p:pic>
+      <p:pic>
+        <p:nvPicPr>
+          <p:cNvPr id="44" name="图片 43" descr="序号6"/>
+          <p:cNvPicPr>
+            <a:picLocks noChangeAspect="1"/>
+          </p:cNvPicPr>
+          <p:nvPr/>
+        </p:nvPicPr>
+        <p:blipFill>
+          <a:blip r:embed="rId24">
+            <a:extLst>
+              <a:ext uri="{96DAC541-7B7A-43D3-8B79-37D633B846F1}">
+                <asvg:svgBlip xmlns:asvg="http://schemas.microsoft.com/office/drawing/2016/SVG/main" r:embed="rId25"/>
+              </a:ext>
+            </a:extLst>
+          </a:blip>
+          <a:stretch>
+            <a:fillRect/>
+          </a:stretch>
+        </p:blipFill>
+        <p:spPr>
+          <a:xfrm>
+            <a:off x="9274175" y="2944495"/>
+            <a:ext cx="259200" cy="259200"/>
+          </a:xfrm>
+          <a:prstGeom prst="rect">
+            <a:avLst/>
+          </a:prstGeom>
+        </p:spPr>
+      </p:pic>
+      <p:pic>
+        <p:nvPicPr>
+          <p:cNvPr id="45" name="图片 44" descr="序号7"/>
+          <p:cNvPicPr>
+            <a:picLocks noChangeAspect="1"/>
+          </p:cNvPicPr>
+          <p:nvPr/>
+        </p:nvPicPr>
+        <p:blipFill>
+          <a:blip r:embed="rId26">
+            <a:extLst>
+              <a:ext uri="{96DAC541-7B7A-43D3-8B79-37D633B846F1}">
+                <asvg:svgBlip xmlns:asvg="http://schemas.microsoft.com/office/drawing/2016/SVG/main" r:embed="rId27"/>
+              </a:ext>
+            </a:extLst>
+          </a:blip>
+          <a:stretch>
+            <a:fillRect/>
+          </a:stretch>
+        </p:blipFill>
+        <p:spPr>
+          <a:xfrm>
+            <a:off x="6428105" y="3152775"/>
+            <a:ext cx="259200" cy="259200"/>
+          </a:xfrm>
+          <a:prstGeom prst="rect">
+            <a:avLst/>
+          </a:prstGeom>
+        </p:spPr>
+      </p:pic>
+      <p:pic>
+        <p:nvPicPr>
+          <p:cNvPr id="46" name="图片 27" descr="浏览器"/>
+          <p:cNvPicPr>
+            <a:picLocks noChangeAspect="1"/>
+          </p:cNvPicPr>
+          <p:nvPr/>
+        </p:nvPicPr>
+        <p:blipFill>
+          <a:blip r:embed="rId28">
+            <a:extLst>
+              <a:ext uri="{96DAC541-7B7A-43D3-8B79-37D633B846F1}">
+                <asvg:svgBlip xmlns:asvg="http://schemas.microsoft.com/office/drawing/2016/SVG/main" r:embed="rId29"/>
+              </a:ext>
+            </a:extLst>
+          </a:blip>
+          <a:stretch>
+            <a:fillRect/>
+          </a:stretch>
+        </p:blipFill>
+        <p:spPr>
+          <a:xfrm>
+            <a:off x="4468851" y="1759743"/>
+            <a:ext cx="860091" cy="860091"/>
+          </a:xfrm>
+          <a:prstGeom prst="rect">
+            <a:avLst/>
+          </a:prstGeom>
+        </p:spPr>
+      </p:pic>
       <p:cxnSp>
         <p:nvCxnSpPr>
-          <p:cNvPr id="31" name="直接连接符 30"/>
+          <p:cNvPr id="47" name="直接连接符 46"/>
           <p:cNvCxnSpPr/>
           <p:nvPr/>
         </p:nvCxnSpPr>
         <p:spPr>
           <a:xfrm>
-            <a:off x="6972900" y="3252947"/>
+            <a:off x="4476080" y="1829912"/>
             <a:ext cx="0" cy="720000"/>
           </a:xfrm>
           <a:prstGeom prst="line">
@@ -6015,6 +6450,7 @@
               <a:schemeClr val="tx1"/>
             </a:solidFill>
             <a:prstDash val="solid"/>
+            <a:tailEnd type="none"/>
           </a:ln>
         </p:spPr>
         <p:style>
@@ -6049,6 +6485,1503 @@
         <p:cNvGrpSpPr/>
         <p:nvPr/>
       </p:nvGrpSpPr>
+      <p:grpSpPr/>
+      <p:sp>
+        <p:nvSpPr>
+          <p:cNvPr id="20" name="任意多边形 19"/>
+          <p:cNvSpPr/>
+          <p:nvPr/>
+        </p:nvSpPr>
+        <p:spPr>
+          <a:xfrm>
+            <a:off x="5297170" y="2616835"/>
+            <a:ext cx="171967" cy="866775"/>
+          </a:xfrm>
+          <a:custGeom>
+            <a:avLst/>
+            <a:gdLst>
+              <a:gd name="connsiteX0" fmla="*/ 0 w 270"/>
+              <a:gd name="connsiteY0" fmla="*/ 0 h 1365"/>
+              <a:gd name="connsiteX1" fmla="*/ 258 w 270"/>
+              <a:gd name="connsiteY1" fmla="*/ 566 h 1365"/>
+              <a:gd name="connsiteX2" fmla="*/ 67 w 270"/>
+              <a:gd name="connsiteY2" fmla="*/ 1365 h 1365"/>
+            </a:gdLst>
+            <a:ahLst/>
+            <a:cxnLst>
+              <a:cxn ang="0">
+                <a:pos x="connsiteX0" y="connsiteY0"/>
+              </a:cxn>
+              <a:cxn ang="0">
+                <a:pos x="connsiteX1" y="connsiteY1"/>
+              </a:cxn>
+              <a:cxn ang="0">
+                <a:pos x="connsiteX2" y="connsiteY2"/>
+              </a:cxn>
+            </a:cxnLst>
+            <a:rect l="l" t="t" r="r" b="b"/>
+            <a:pathLst>
+              <a:path w="271" h="1365">
+                <a:moveTo>
+                  <a:pt x="0" y="0"/>
+                </a:moveTo>
+                <a:cubicBezTo>
+                  <a:pt x="108" y="95"/>
+                  <a:pt x="193" y="296"/>
+                  <a:pt x="258" y="566"/>
+                </a:cubicBezTo>
+                <a:cubicBezTo>
+                  <a:pt x="324" y="837"/>
+                  <a:pt x="116" y="1216"/>
+                  <a:pt x="67" y="1365"/>
+                </a:cubicBezTo>
+              </a:path>
+            </a:pathLst>
+          </a:custGeom>
+          <a:noFill/>
+          <a:ln w="38100">
+            <a:solidFill>
+              <a:srgbClr val="C00000"/>
+            </a:solidFill>
+            <a:prstDash val="dash"/>
+            <a:tailEnd type="triangle"/>
+          </a:ln>
+        </p:spPr>
+        <p:style>
+          <a:lnRef idx="2">
+            <a:schemeClr val="accent1">
+              <a:lumMod val="75000"/>
+            </a:schemeClr>
+          </a:lnRef>
+          <a:fillRef idx="1">
+            <a:schemeClr val="accent1"/>
+          </a:fillRef>
+          <a:effectRef idx="0">
+            <a:srgbClr val="FFFFFF"/>
+          </a:effectRef>
+          <a:fontRef idx="minor">
+            <a:schemeClr val="lt1"/>
+          </a:fontRef>
+        </p:style>
+        <p:txBody>
+          <a:bodyPr rtlCol="0" anchor="ctr"/>
+          <a:p>
+            <a:pPr algn="ctr"/>
+            <a:endParaRPr lang="zh-CN" altLang="en-US">
+              <a:latin typeface="Times New Roman" panose="02020603050405020304" charset="0"/>
+              <a:cs typeface="Times New Roman" panose="02020603050405020304" charset="0"/>
+            </a:endParaRPr>
+          </a:p>
+        </p:txBody>
+      </p:sp>
+      <p:grpSp>
+        <p:nvGrpSpPr>
+          <p:cNvPr id="63" name="组合 62"/>
+          <p:cNvGrpSpPr>
+            <a:grpSpLocks noChangeAspect="1"/>
+          </p:cNvGrpSpPr>
+          <p:nvPr/>
+        </p:nvGrpSpPr>
+        <p:grpSpPr>
+          <a:xfrm>
+            <a:off x="2790190" y="1517015"/>
+            <a:ext cx="475615" cy="470535"/>
+            <a:chOff x="4445000" y="739632"/>
+            <a:chExt cx="375710" cy="371203"/>
+          </a:xfrm>
+          <a:solidFill>
+            <a:srgbClr val="4A5F7E"/>
+          </a:solidFill>
+        </p:grpSpPr>
+        <p:sp>
+          <p:nvSpPr>
+            <p:cNvPr id="64" name="矩形: 圆角 63"/>
+            <p:cNvSpPr/>
+            <p:nvPr/>
+          </p:nvSpPr>
+          <p:spPr>
+            <a:xfrm>
+              <a:off x="4445000" y="740833"/>
+              <a:ext cx="156634" cy="156634"/>
+            </a:xfrm>
+            <a:prstGeom prst="roundRect">
+              <a:avLst/>
+            </a:prstGeom>
+            <a:grpFill/>
+            <a:ln w="38100">
+              <a:solidFill>
+                <a:srgbClr val="4A5F7E"/>
+              </a:solidFill>
+            </a:ln>
+          </p:spPr>
+          <p:style>
+            <a:lnRef idx="2">
+              <a:schemeClr val="accent1">
+                <a:shade val="50000"/>
+              </a:schemeClr>
+            </a:lnRef>
+            <a:fillRef idx="1">
+              <a:schemeClr val="accent1"/>
+            </a:fillRef>
+            <a:effectRef idx="0">
+              <a:schemeClr val="accent1"/>
+            </a:effectRef>
+            <a:fontRef idx="minor">
+              <a:schemeClr val="lt1"/>
+            </a:fontRef>
+          </p:style>
+          <p:txBody>
+            <a:bodyPr rtlCol="0" anchor="ctr"/>
+            <a:lstStyle/>
+            <a:p>
+              <a:pPr algn="ctr"/>
+              <a:endParaRPr lang="zh-CN" altLang="en-US" sz="1600">
+                <a:latin typeface="Times New Roman" panose="02020603050405020304" charset="0"/>
+                <a:cs typeface="Times New Roman" panose="02020603050405020304" charset="0"/>
+              </a:endParaRPr>
+            </a:p>
+          </p:txBody>
+        </p:sp>
+        <p:sp>
+          <p:nvSpPr>
+            <p:cNvPr id="65" name="矩形: 圆角 64"/>
+            <p:cNvSpPr/>
+            <p:nvPr/>
+          </p:nvSpPr>
+          <p:spPr>
+            <a:xfrm>
+              <a:off x="4445000" y="954201"/>
+              <a:ext cx="156634" cy="156634"/>
+            </a:xfrm>
+            <a:prstGeom prst="roundRect">
+              <a:avLst/>
+            </a:prstGeom>
+            <a:grpFill/>
+            <a:ln w="38100">
+              <a:solidFill>
+                <a:srgbClr val="4A5F7E"/>
+              </a:solidFill>
+            </a:ln>
+          </p:spPr>
+          <p:style>
+            <a:lnRef idx="2">
+              <a:schemeClr val="accent1">
+                <a:shade val="50000"/>
+              </a:schemeClr>
+            </a:lnRef>
+            <a:fillRef idx="1">
+              <a:schemeClr val="accent1"/>
+            </a:fillRef>
+            <a:effectRef idx="0">
+              <a:schemeClr val="accent1"/>
+            </a:effectRef>
+            <a:fontRef idx="minor">
+              <a:schemeClr val="lt1"/>
+            </a:fontRef>
+          </p:style>
+          <p:txBody>
+            <a:bodyPr rtlCol="0" anchor="ctr"/>
+            <a:lstStyle/>
+            <a:p>
+              <a:pPr algn="ctr"/>
+              <a:endParaRPr lang="zh-CN" altLang="en-US" sz="1600">
+                <a:latin typeface="Times New Roman" panose="02020603050405020304" charset="0"/>
+                <a:cs typeface="Times New Roman" panose="02020603050405020304" charset="0"/>
+              </a:endParaRPr>
+            </a:p>
+          </p:txBody>
+        </p:sp>
+        <p:sp>
+          <p:nvSpPr>
+            <p:cNvPr id="66" name="矩形: 圆角 65"/>
+            <p:cNvSpPr/>
+            <p:nvPr/>
+          </p:nvSpPr>
+          <p:spPr>
+            <a:xfrm rot="1800000">
+              <a:off x="4672028" y="739632"/>
+              <a:ext cx="145198" cy="138592"/>
+            </a:xfrm>
+            <a:prstGeom prst="roundRect">
+              <a:avLst/>
+            </a:prstGeom>
+            <a:grpFill/>
+            <a:ln w="57150">
+              <a:solidFill>
+                <a:srgbClr val="4A5F7E"/>
+              </a:solidFill>
+            </a:ln>
+          </p:spPr>
+          <p:style>
+            <a:lnRef idx="2">
+              <a:schemeClr val="accent1">
+                <a:shade val="50000"/>
+              </a:schemeClr>
+            </a:lnRef>
+            <a:fillRef idx="1">
+              <a:schemeClr val="accent1"/>
+            </a:fillRef>
+            <a:effectRef idx="0">
+              <a:schemeClr val="accent1"/>
+            </a:effectRef>
+            <a:fontRef idx="minor">
+              <a:schemeClr val="lt1"/>
+            </a:fontRef>
+          </p:style>
+          <p:txBody>
+            <a:bodyPr rtlCol="0" anchor="ctr"/>
+            <a:lstStyle/>
+            <a:p>
+              <a:pPr algn="ctr"/>
+              <a:endParaRPr lang="zh-CN" altLang="en-US" sz="1600">
+                <a:latin typeface="Times New Roman" panose="02020603050405020304" charset="0"/>
+                <a:cs typeface="Times New Roman" panose="02020603050405020304" charset="0"/>
+              </a:endParaRPr>
+            </a:p>
+          </p:txBody>
+        </p:sp>
+        <p:sp>
+          <p:nvSpPr>
+            <p:cNvPr id="67" name="矩形: 圆角 66"/>
+            <p:cNvSpPr/>
+            <p:nvPr/>
+          </p:nvSpPr>
+          <p:spPr>
+            <a:xfrm>
+              <a:off x="4664075" y="954201"/>
+              <a:ext cx="156635" cy="156634"/>
+            </a:xfrm>
+            <a:prstGeom prst="roundRect">
+              <a:avLst/>
+            </a:prstGeom>
+            <a:grpFill/>
+            <a:ln w="38100">
+              <a:solidFill>
+                <a:srgbClr val="4A5F7E"/>
+              </a:solidFill>
+            </a:ln>
+          </p:spPr>
+          <p:style>
+            <a:lnRef idx="2">
+              <a:schemeClr val="accent1">
+                <a:shade val="50000"/>
+              </a:schemeClr>
+            </a:lnRef>
+            <a:fillRef idx="1">
+              <a:schemeClr val="accent1"/>
+            </a:fillRef>
+            <a:effectRef idx="0">
+              <a:schemeClr val="accent1"/>
+            </a:effectRef>
+            <a:fontRef idx="minor">
+              <a:schemeClr val="lt1"/>
+            </a:fontRef>
+          </p:style>
+          <p:txBody>
+            <a:bodyPr rtlCol="0" anchor="ctr"/>
+            <a:lstStyle/>
+            <a:p>
+              <a:pPr algn="ctr"/>
+              <a:endParaRPr lang="zh-CN" altLang="en-US" sz="1600">
+                <a:latin typeface="Times New Roman" panose="02020603050405020304" charset="0"/>
+                <a:cs typeface="Times New Roman" panose="02020603050405020304" charset="0"/>
+              </a:endParaRPr>
+            </a:p>
+          </p:txBody>
+        </p:sp>
+      </p:grpSp>
+      <p:sp>
+        <p:nvSpPr>
+          <p:cNvPr id="17" name="文本框 16"/>
+          <p:cNvSpPr txBox="1"/>
+          <p:nvPr/>
+        </p:nvSpPr>
+        <p:spPr>
+          <a:xfrm>
+            <a:off x="1797685" y="1998980"/>
+            <a:ext cx="2471420" cy="380365"/>
+          </a:xfrm>
+          <a:prstGeom prst="rect">
+            <a:avLst/>
+          </a:prstGeom>
+          <a:noFill/>
+        </p:spPr>
+        <p:txBody>
+          <a:bodyPr wrap="square" rtlCol="0">
+            <a:noAutofit/>
+          </a:bodyPr>
+          <a:p>
+            <a:pPr algn="ctr"/>
+            <a:r>
+              <a:rPr lang="en-US" altLang="zh-CN" sz="1200">
+                <a:latin typeface="Times New Roman" panose="02020603050405020304" charset="0"/>
+                <a:cs typeface="Times New Roman" panose="02020603050405020304" charset="0"/>
+              </a:rPr>
+              <a:t>Merchant Application</a:t>
+            </a:r>
+            <a:endParaRPr lang="en-US" altLang="zh-CN" sz="1200">
+              <a:latin typeface="Times New Roman" panose="02020603050405020304" charset="0"/>
+              <a:cs typeface="Times New Roman" panose="02020603050405020304" charset="0"/>
+            </a:endParaRPr>
+          </a:p>
+        </p:txBody>
+      </p:sp>
+      <p:pic>
+        <p:nvPicPr>
+          <p:cNvPr id="33" name="图形 11"/>
+          <p:cNvPicPr>
+            <a:picLocks noChangeAspect="1"/>
+          </p:cNvPicPr>
+          <p:nvPr/>
+        </p:nvPicPr>
+        <p:blipFill>
+          <a:blip r:embed="rId1" cstate="print">
+            <a:extLst>
+              <a:ext uri="{28A0092B-C50C-407E-A947-70E740481C1C}">
+                <a14:useLocalDpi xmlns:a14="http://schemas.microsoft.com/office/drawing/2010/main" val="0"/>
+              </a:ext>
+              <a:ext uri="{96DAC541-7B7A-43D3-8B79-37D633B846F1}">
+                <asvg:svgBlip xmlns:asvg="http://schemas.microsoft.com/office/drawing/2016/SVG/main" r:embed="rId2"/>
+              </a:ext>
+            </a:extLst>
+          </a:blip>
+          <a:stretch>
+            <a:fillRect/>
+          </a:stretch>
+        </p:blipFill>
+        <p:spPr>
+          <a:xfrm>
+            <a:off x="8027485" y="1413546"/>
+            <a:ext cx="720000" cy="720000"/>
+          </a:xfrm>
+          <a:prstGeom prst="rect">
+            <a:avLst/>
+          </a:prstGeom>
+        </p:spPr>
+      </p:pic>
+      <p:sp>
+        <p:nvSpPr>
+          <p:cNvPr id="4" name="文本框 3"/>
+          <p:cNvSpPr txBox="1"/>
+          <p:nvPr/>
+        </p:nvSpPr>
+        <p:spPr>
+          <a:xfrm>
+            <a:off x="7147560" y="1993265"/>
+            <a:ext cx="2471420" cy="380365"/>
+          </a:xfrm>
+          <a:prstGeom prst="rect">
+            <a:avLst/>
+          </a:prstGeom>
+          <a:noFill/>
+        </p:spPr>
+        <p:txBody>
+          <a:bodyPr wrap="square" rtlCol="0">
+            <a:noAutofit/>
+          </a:bodyPr>
+          <a:p>
+            <a:pPr algn="ctr"/>
+            <a:r>
+              <a:rPr lang="en-US" altLang="zh-CN" sz="1200">
+                <a:latin typeface="Times New Roman" panose="02020603050405020304" charset="0"/>
+                <a:cs typeface="Times New Roman" panose="02020603050405020304" charset="0"/>
+              </a:rPr>
+              <a:t>Payment Application</a:t>
+            </a:r>
+            <a:endParaRPr lang="en-US" altLang="zh-CN" sz="1200">
+              <a:latin typeface="Times New Roman" panose="02020603050405020304" charset="0"/>
+              <a:cs typeface="Times New Roman" panose="02020603050405020304" charset="0"/>
+            </a:endParaRPr>
+          </a:p>
+        </p:txBody>
+      </p:sp>
+      <p:sp>
+        <p:nvSpPr>
+          <p:cNvPr id="5" name="矩形 4"/>
+          <p:cNvSpPr/>
+          <p:nvPr/>
+        </p:nvSpPr>
+        <p:spPr>
+          <a:xfrm>
+            <a:off x="2879725" y="2286000"/>
+            <a:ext cx="291465" cy="2761615"/>
+          </a:xfrm>
+          <a:prstGeom prst="rect">
+            <a:avLst/>
+          </a:prstGeom>
+          <a:solidFill>
+            <a:srgbClr val="4A5F7E"/>
+          </a:solidFill>
+          <a:ln>
+            <a:solidFill>
+              <a:srgbClr val="4A5F7E"/>
+            </a:solidFill>
+          </a:ln>
+        </p:spPr>
+        <p:style>
+          <a:lnRef idx="2">
+            <a:schemeClr val="accent1">
+              <a:lumMod val="75000"/>
+            </a:schemeClr>
+          </a:lnRef>
+          <a:fillRef idx="1">
+            <a:schemeClr val="accent1"/>
+          </a:fillRef>
+          <a:effectRef idx="0">
+            <a:srgbClr val="FFFFFF"/>
+          </a:effectRef>
+          <a:fontRef idx="minor">
+            <a:schemeClr val="lt1"/>
+          </a:fontRef>
+        </p:style>
+        <p:txBody>
+          <a:bodyPr rtlCol="0" anchor="ctr"/>
+          <a:p>
+            <a:pPr algn="ctr"/>
+            <a:endParaRPr lang="zh-CN" altLang="en-US">
+              <a:latin typeface="Times New Roman" panose="02020603050405020304" charset="0"/>
+              <a:cs typeface="Times New Roman" panose="02020603050405020304" charset="0"/>
+            </a:endParaRPr>
+          </a:p>
+        </p:txBody>
+      </p:sp>
+      <p:sp>
+        <p:nvSpPr>
+          <p:cNvPr id="6" name="矩形 5"/>
+          <p:cNvSpPr/>
+          <p:nvPr/>
+        </p:nvSpPr>
+        <p:spPr>
+          <a:xfrm>
+            <a:off x="8241665" y="2286000"/>
+            <a:ext cx="291465" cy="2761200"/>
+          </a:xfrm>
+          <a:prstGeom prst="rect">
+            <a:avLst/>
+          </a:prstGeom>
+          <a:solidFill>
+            <a:schemeClr val="accent1">
+              <a:lumMod val="75000"/>
+            </a:schemeClr>
+          </a:solidFill>
+          <a:ln>
+            <a:solidFill>
+              <a:schemeClr val="accent1">
+                <a:lumMod val="75000"/>
+              </a:schemeClr>
+            </a:solidFill>
+          </a:ln>
+        </p:spPr>
+        <p:style>
+          <a:lnRef idx="2">
+            <a:schemeClr val="accent1">
+              <a:lumMod val="75000"/>
+            </a:schemeClr>
+          </a:lnRef>
+          <a:fillRef idx="1">
+            <a:schemeClr val="accent1"/>
+          </a:fillRef>
+          <a:effectRef idx="0">
+            <a:srgbClr val="FFFFFF"/>
+          </a:effectRef>
+          <a:fontRef idx="minor">
+            <a:schemeClr val="lt1"/>
+          </a:fontRef>
+        </p:style>
+        <p:txBody>
+          <a:bodyPr rtlCol="0" anchor="ctr"/>
+          <a:p>
+            <a:pPr algn="ctr"/>
+            <a:endParaRPr lang="zh-CN" altLang="en-US">
+              <a:latin typeface="Times New Roman" panose="02020603050405020304" charset="0"/>
+              <a:cs typeface="Times New Roman" panose="02020603050405020304" charset="0"/>
+            </a:endParaRPr>
+          </a:p>
+        </p:txBody>
+      </p:sp>
+      <p:pic>
+        <p:nvPicPr>
+          <p:cNvPr id="9" name="图形 63"/>
+          <p:cNvPicPr>
+            <a:picLocks noChangeAspect="1"/>
+          </p:cNvPicPr>
+          <p:nvPr/>
+        </p:nvPicPr>
+        <p:blipFill>
+          <a:blip r:embed="rId3" cstate="print">
+            <a:extLst>
+              <a:ext uri="{28A0092B-C50C-407E-A947-70E740481C1C}">
+                <a14:useLocalDpi xmlns:a14="http://schemas.microsoft.com/office/drawing/2010/main" val="0"/>
+              </a:ext>
+              <a:ext uri="{96DAC541-7B7A-43D3-8B79-37D633B846F1}">
+                <asvg:svgBlip xmlns:asvg="http://schemas.microsoft.com/office/drawing/2016/SVG/main" r:embed="rId4"/>
+              </a:ext>
+            </a:extLst>
+          </a:blip>
+          <a:stretch>
+            <a:fillRect/>
+          </a:stretch>
+        </p:blipFill>
+        <p:spPr>
+          <a:xfrm>
+            <a:off x="5346332" y="1413378"/>
+            <a:ext cx="720000" cy="720000"/>
+          </a:xfrm>
+          <a:prstGeom prst="rect">
+            <a:avLst/>
+          </a:prstGeom>
+        </p:spPr>
+      </p:pic>
+      <p:sp>
+        <p:nvSpPr>
+          <p:cNvPr id="10" name="矩形 9"/>
+          <p:cNvSpPr/>
+          <p:nvPr/>
+        </p:nvSpPr>
+        <p:spPr>
+          <a:xfrm>
+            <a:off x="5573395" y="3149600"/>
+            <a:ext cx="291465" cy="1889760"/>
+          </a:xfrm>
+          <a:prstGeom prst="rect">
+            <a:avLst/>
+          </a:prstGeom>
+          <a:solidFill>
+            <a:schemeClr val="accent6">
+              <a:lumMod val="40000"/>
+              <a:lumOff val="60000"/>
+            </a:schemeClr>
+          </a:solidFill>
+          <a:ln>
+            <a:solidFill>
+              <a:schemeClr val="accent6">
+                <a:lumMod val="40000"/>
+                <a:lumOff val="60000"/>
+              </a:schemeClr>
+            </a:solidFill>
+          </a:ln>
+        </p:spPr>
+        <p:style>
+          <a:lnRef idx="2">
+            <a:schemeClr val="accent1">
+              <a:lumMod val="75000"/>
+            </a:schemeClr>
+          </a:lnRef>
+          <a:fillRef idx="1">
+            <a:schemeClr val="accent1"/>
+          </a:fillRef>
+          <a:effectRef idx="0">
+            <a:srgbClr val="FFFFFF"/>
+          </a:effectRef>
+          <a:fontRef idx="minor">
+            <a:schemeClr val="lt1"/>
+          </a:fontRef>
+        </p:style>
+        <p:txBody>
+          <a:bodyPr rtlCol="0" anchor="ctr"/>
+          <a:p>
+            <a:pPr algn="ctr"/>
+            <a:endParaRPr lang="zh-CN" altLang="en-US">
+              <a:latin typeface="Times New Roman" panose="02020603050405020304" charset="0"/>
+              <a:cs typeface="Times New Roman" panose="02020603050405020304" charset="0"/>
+            </a:endParaRPr>
+          </a:p>
+        </p:txBody>
+      </p:sp>
+      <p:sp>
+        <p:nvSpPr>
+          <p:cNvPr id="11" name="文本框 10"/>
+          <p:cNvSpPr txBox="1"/>
+          <p:nvPr/>
+        </p:nvSpPr>
+        <p:spPr>
+          <a:xfrm>
+            <a:off x="4470400" y="2016125"/>
+            <a:ext cx="2471420" cy="250825"/>
+          </a:xfrm>
+          <a:prstGeom prst="rect">
+            <a:avLst/>
+          </a:prstGeom>
+          <a:noFill/>
+        </p:spPr>
+        <p:txBody>
+          <a:bodyPr wrap="square" rtlCol="0">
+            <a:noAutofit/>
+          </a:bodyPr>
+          <a:p>
+            <a:pPr algn="ctr"/>
+            <a:r>
+              <a:rPr lang="en-US" altLang="zh-CN" sz="1200">
+                <a:latin typeface="Times New Roman" panose="02020603050405020304" charset="0"/>
+                <a:cs typeface="Times New Roman" panose="02020603050405020304" charset="0"/>
+              </a:rPr>
+              <a:t>Malicious Application </a:t>
+            </a:r>
+            <a:endParaRPr lang="en-US" altLang="zh-CN" sz="1200">
+              <a:latin typeface="Times New Roman" panose="02020603050405020304" charset="0"/>
+              <a:cs typeface="Times New Roman" panose="02020603050405020304" charset="0"/>
+            </a:endParaRPr>
+          </a:p>
+        </p:txBody>
+      </p:sp>
+      <p:cxnSp>
+        <p:nvCxnSpPr>
+          <p:cNvPr id="12" name="直接箭头连接符 11"/>
+          <p:cNvCxnSpPr/>
+          <p:nvPr/>
+        </p:nvCxnSpPr>
+        <p:spPr>
+          <a:xfrm>
+            <a:off x="3207385" y="2589530"/>
+            <a:ext cx="4991100" cy="0"/>
+          </a:xfrm>
+          <a:prstGeom prst="straightConnector1">
+            <a:avLst/>
+          </a:prstGeom>
+          <a:ln w="38100">
+            <a:solidFill>
+              <a:schemeClr val="tx1"/>
+            </a:solidFill>
+            <a:tailEnd type="triangle"/>
+          </a:ln>
+        </p:spPr>
+        <p:style>
+          <a:lnRef idx="2">
+            <a:schemeClr val="accent1"/>
+          </a:lnRef>
+          <a:fillRef idx="0">
+            <a:srgbClr val="FFFFFF"/>
+          </a:fillRef>
+          <a:effectRef idx="0">
+            <a:srgbClr val="FFFFFF"/>
+          </a:effectRef>
+          <a:fontRef idx="minor">
+            <a:schemeClr val="tx1"/>
+          </a:fontRef>
+        </p:style>
+      </p:cxnSp>
+      <p:sp>
+        <p:nvSpPr>
+          <p:cNvPr id="13" name="文本框 12"/>
+          <p:cNvSpPr txBox="1"/>
+          <p:nvPr/>
+        </p:nvSpPr>
+        <p:spPr>
+          <a:xfrm>
+            <a:off x="3172225" y="2547620"/>
+            <a:ext cx="476250" cy="323850"/>
+          </a:xfrm>
+          <a:prstGeom prst="rect">
+            <a:avLst/>
+          </a:prstGeom>
+          <a:noFill/>
+        </p:spPr>
+        <p:txBody>
+          <a:bodyPr wrap="square" rtlCol="0">
+            <a:noAutofit/>
+          </a:bodyPr>
+          <a:p>
+            <a:r>
+              <a:rPr lang="en-US" altLang="zh-CN">
+                <a:latin typeface="Times New Roman" panose="02020603050405020304" charset="0"/>
+                <a:cs typeface="Times New Roman" panose="02020603050405020304" charset="0"/>
+              </a:rPr>
+              <a:t>S1</a:t>
+            </a:r>
+            <a:endParaRPr lang="en-US" altLang="zh-CN">
+              <a:latin typeface="Times New Roman" panose="02020603050405020304" charset="0"/>
+              <a:cs typeface="Times New Roman" panose="02020603050405020304" charset="0"/>
+            </a:endParaRPr>
+          </a:p>
+        </p:txBody>
+      </p:sp>
+      <p:sp>
+        <p:nvSpPr>
+          <p:cNvPr id="14" name="文本框 13"/>
+          <p:cNvSpPr txBox="1"/>
+          <p:nvPr/>
+        </p:nvSpPr>
+        <p:spPr>
+          <a:xfrm>
+            <a:off x="3801745" y="2293620"/>
+            <a:ext cx="3841750" cy="272415"/>
+          </a:xfrm>
+          <a:prstGeom prst="rect">
+            <a:avLst/>
+          </a:prstGeom>
+          <a:noFill/>
+        </p:spPr>
+        <p:txBody>
+          <a:bodyPr wrap="square" rtlCol="0">
+            <a:noAutofit/>
+          </a:bodyPr>
+          <a:p>
+            <a:pPr algn="ctr"/>
+            <a:r>
+              <a:rPr lang="en-US" altLang="zh-CN" sz="1400" b="1">
+                <a:solidFill>
+                  <a:srgbClr val="0070C0"/>
+                </a:solidFill>
+                <a:latin typeface="Times New Roman" panose="02020603050405020304" charset="0"/>
+                <a:cs typeface="Times New Roman" panose="02020603050405020304" charset="0"/>
+              </a:rPr>
+              <a:t>……</a:t>
+            </a:r>
+            <a:r>
+              <a:rPr lang="en-US" altLang="zh-CN" sz="1200">
+                <a:latin typeface="Times New Roman" panose="02020603050405020304" charset="0"/>
+                <a:cs typeface="Times New Roman" panose="02020603050405020304" charset="0"/>
+              </a:rPr>
+              <a:t>amount=</a:t>
+            </a:r>
+            <a:r>
+              <a:rPr lang="en-US" altLang="zh-CN" sz="1200">
+                <a:solidFill>
+                  <a:srgbClr val="0070C0"/>
+                </a:solidFill>
+                <a:latin typeface="Times New Roman" panose="02020603050405020304" charset="0"/>
+                <a:cs typeface="Times New Roman" panose="02020603050405020304" charset="0"/>
+              </a:rPr>
+              <a:t>xxxx</a:t>
+            </a:r>
+            <a:r>
+              <a:rPr lang="en-US" altLang="zh-CN" sz="1200">
+                <a:latin typeface="Times New Roman" panose="02020603050405020304" charset="0"/>
+                <a:cs typeface="Times New Roman" panose="02020603050405020304" charset="0"/>
+              </a:rPr>
+              <a:t>&amp;description=</a:t>
+            </a:r>
+            <a:r>
+              <a:rPr lang="en-US" altLang="zh-CN" sz="1200">
+                <a:solidFill>
+                  <a:srgbClr val="0070C0"/>
+                </a:solidFill>
+                <a:latin typeface="Times New Roman" panose="02020603050405020304" charset="0"/>
+                <a:cs typeface="Times New Roman" panose="02020603050405020304" charset="0"/>
+              </a:rPr>
+              <a:t>xxxx</a:t>
+            </a:r>
+            <a:r>
+              <a:rPr lang="en-US" altLang="zh-CN" sz="1200">
+                <a:latin typeface="Times New Roman" panose="02020603050405020304" charset="0"/>
+                <a:cs typeface="Times New Roman" panose="02020603050405020304" charset="0"/>
+              </a:rPr>
+              <a:t>&amp;subject=</a:t>
+            </a:r>
+            <a:r>
+              <a:rPr lang="en-US" altLang="zh-CN" sz="1200">
+                <a:solidFill>
+                  <a:srgbClr val="0070C0"/>
+                </a:solidFill>
+                <a:latin typeface="Times New Roman" panose="02020603050405020304" charset="0"/>
+                <a:cs typeface="Times New Roman" panose="02020603050405020304" charset="0"/>
+              </a:rPr>
+              <a:t>xxxx</a:t>
+            </a:r>
+            <a:endParaRPr lang="en-US" altLang="zh-CN" sz="1200">
+              <a:latin typeface="Times New Roman" panose="02020603050405020304" charset="0"/>
+              <a:cs typeface="Times New Roman" panose="02020603050405020304" charset="0"/>
+            </a:endParaRPr>
+          </a:p>
+        </p:txBody>
+      </p:sp>
+      <p:cxnSp>
+        <p:nvCxnSpPr>
+          <p:cNvPr id="15" name="直接箭头连接符 14"/>
+          <p:cNvCxnSpPr/>
+          <p:nvPr/>
+        </p:nvCxnSpPr>
+        <p:spPr>
+          <a:xfrm>
+            <a:off x="3194050" y="3528060"/>
+            <a:ext cx="2306955" cy="0"/>
+          </a:xfrm>
+          <a:prstGeom prst="straightConnector1">
+            <a:avLst/>
+          </a:prstGeom>
+          <a:ln w="38100">
+            <a:solidFill>
+              <a:schemeClr val="tx1"/>
+            </a:solidFill>
+            <a:headEnd type="triangle"/>
+            <a:tailEnd type="none"/>
+          </a:ln>
+        </p:spPr>
+        <p:style>
+          <a:lnRef idx="2">
+            <a:schemeClr val="accent1"/>
+          </a:lnRef>
+          <a:fillRef idx="0">
+            <a:srgbClr val="FFFFFF"/>
+          </a:fillRef>
+          <a:effectRef idx="0">
+            <a:srgbClr val="FFFFFF"/>
+          </a:effectRef>
+          <a:fontRef idx="minor">
+            <a:schemeClr val="tx1"/>
+          </a:fontRef>
+        </p:style>
+      </p:cxnSp>
+      <p:sp>
+        <p:nvSpPr>
+          <p:cNvPr id="21" name="文本框 20"/>
+          <p:cNvSpPr txBox="1"/>
+          <p:nvPr/>
+        </p:nvSpPr>
+        <p:spPr>
+          <a:xfrm>
+            <a:off x="3297555" y="3211830"/>
+            <a:ext cx="2203450" cy="269240"/>
+          </a:xfrm>
+          <a:prstGeom prst="rect">
+            <a:avLst/>
+          </a:prstGeom>
+          <a:noFill/>
+        </p:spPr>
+        <p:txBody>
+          <a:bodyPr wrap="square" rtlCol="0">
+            <a:noAutofit/>
+          </a:bodyPr>
+          <a:p>
+            <a:pPr algn="ctr"/>
+            <a:r>
+              <a:rPr lang="en-US" altLang="zh-CN" sz="1400" b="1">
+                <a:latin typeface="Times New Roman" panose="02020603050405020304" charset="0"/>
+                <a:cs typeface="Times New Roman" panose="02020603050405020304" charset="0"/>
+              </a:rPr>
+              <a:t>Create order</a:t>
+            </a:r>
+            <a:endParaRPr lang="en-US" altLang="zh-CN" sz="1400" b="1">
+              <a:latin typeface="Times New Roman" panose="02020603050405020304" charset="0"/>
+              <a:cs typeface="Times New Roman" panose="02020603050405020304" charset="0"/>
+            </a:endParaRPr>
+          </a:p>
+        </p:txBody>
+      </p:sp>
+      <p:sp>
+        <p:nvSpPr>
+          <p:cNvPr id="25" name="文本框 24"/>
+          <p:cNvSpPr txBox="1"/>
+          <p:nvPr/>
+        </p:nvSpPr>
+        <p:spPr>
+          <a:xfrm>
+            <a:off x="3202940" y="4121785"/>
+            <a:ext cx="2298065" cy="272415"/>
+          </a:xfrm>
+          <a:prstGeom prst="rect">
+            <a:avLst/>
+          </a:prstGeom>
+          <a:noFill/>
+        </p:spPr>
+        <p:txBody>
+          <a:bodyPr wrap="square" rtlCol="0">
+            <a:noAutofit/>
+          </a:bodyPr>
+          <a:p>
+            <a:pPr algn="ctr"/>
+            <a:r>
+              <a:rPr lang="en-US" altLang="zh-CN" sz="1400" b="1">
+                <a:solidFill>
+                  <a:srgbClr val="B5655E"/>
+                </a:solidFill>
+                <a:latin typeface="Times New Roman" panose="02020603050405020304" charset="0"/>
+                <a:cs typeface="Times New Roman" panose="02020603050405020304" charset="0"/>
+              </a:rPr>
+              <a:t>……</a:t>
+            </a:r>
+            <a:r>
+              <a:rPr lang="en-US" altLang="zh-CN" sz="1200">
+                <a:latin typeface="Times New Roman" panose="02020603050405020304" charset="0"/>
+                <a:cs typeface="Times New Roman" panose="02020603050405020304" charset="0"/>
+              </a:rPr>
+              <a:t>amount=</a:t>
+            </a:r>
+            <a:r>
+              <a:rPr lang="en-US" altLang="zh-CN" sz="1200">
+                <a:solidFill>
+                  <a:srgbClr val="0070C0"/>
+                </a:solidFill>
+                <a:latin typeface="Times New Roman" panose="02020603050405020304" charset="0"/>
+                <a:cs typeface="Times New Roman" panose="02020603050405020304" charset="0"/>
+              </a:rPr>
+              <a:t>xxxx</a:t>
+            </a:r>
+            <a:r>
+              <a:rPr lang="en-US" altLang="zh-CN" sz="1200">
+                <a:latin typeface="Times New Roman" panose="02020603050405020304" charset="0"/>
+                <a:cs typeface="Times New Roman" panose="02020603050405020304" charset="0"/>
+              </a:rPr>
+              <a:t>&amp;description=</a:t>
+            </a:r>
+            <a:r>
+              <a:rPr lang="en-US" altLang="zh-CN" sz="1200">
+                <a:solidFill>
+                  <a:srgbClr val="0070C0"/>
+                </a:solidFill>
+                <a:latin typeface="Times New Roman" panose="02020603050405020304" charset="0"/>
+                <a:cs typeface="Times New Roman" panose="02020603050405020304" charset="0"/>
+              </a:rPr>
+              <a:t>xxxx</a:t>
+            </a:r>
+            <a:r>
+              <a:rPr lang="en-US" altLang="zh-CN" sz="1200">
+                <a:latin typeface="Times New Roman" panose="02020603050405020304" charset="0"/>
+                <a:cs typeface="Times New Roman" panose="02020603050405020304" charset="0"/>
+              </a:rPr>
+              <a:t>&amp;subject=</a:t>
+            </a:r>
+            <a:r>
+              <a:rPr lang="en-US" altLang="zh-CN" sz="1200">
+                <a:solidFill>
+                  <a:srgbClr val="0070C0"/>
+                </a:solidFill>
+                <a:latin typeface="Times New Roman" panose="02020603050405020304" charset="0"/>
+                <a:cs typeface="Times New Roman" panose="02020603050405020304" charset="0"/>
+              </a:rPr>
+              <a:t>xxxx</a:t>
+            </a:r>
+            <a:endParaRPr lang="en-US" altLang="zh-CN" sz="1200">
+              <a:latin typeface="Times New Roman" panose="02020603050405020304" charset="0"/>
+              <a:cs typeface="Times New Roman" panose="02020603050405020304" charset="0"/>
+            </a:endParaRPr>
+          </a:p>
+        </p:txBody>
+      </p:sp>
+      <p:cxnSp>
+        <p:nvCxnSpPr>
+          <p:cNvPr id="26" name="直接箭头连接符 25"/>
+          <p:cNvCxnSpPr/>
+          <p:nvPr/>
+        </p:nvCxnSpPr>
+        <p:spPr>
+          <a:xfrm flipV="1">
+            <a:off x="3202940" y="4072890"/>
+            <a:ext cx="2307600" cy="0"/>
+          </a:xfrm>
+          <a:prstGeom prst="straightConnector1">
+            <a:avLst/>
+          </a:prstGeom>
+          <a:ln w="38100">
+            <a:solidFill>
+              <a:schemeClr val="tx1"/>
+            </a:solidFill>
+            <a:tailEnd type="triangle"/>
+          </a:ln>
+        </p:spPr>
+        <p:style>
+          <a:lnRef idx="2">
+            <a:schemeClr val="accent1"/>
+          </a:lnRef>
+          <a:fillRef idx="0">
+            <a:srgbClr val="FFFFFF"/>
+          </a:fillRef>
+          <a:effectRef idx="0">
+            <a:srgbClr val="FFFFFF"/>
+          </a:effectRef>
+          <a:fontRef idx="minor">
+            <a:schemeClr val="tx1"/>
+          </a:fontRef>
+        </p:style>
+      </p:cxnSp>
+      <p:sp>
+        <p:nvSpPr>
+          <p:cNvPr id="28" name="文本框 27"/>
+          <p:cNvSpPr txBox="1"/>
+          <p:nvPr/>
+        </p:nvSpPr>
+        <p:spPr>
+          <a:xfrm>
+            <a:off x="5466080" y="2726055"/>
+            <a:ext cx="480695" cy="368300"/>
+          </a:xfrm>
+          <a:prstGeom prst="rect">
+            <a:avLst/>
+          </a:prstGeom>
+          <a:noFill/>
+        </p:spPr>
+        <p:txBody>
+          <a:bodyPr wrap="square" rtlCol="0">
+            <a:spAutoFit/>
+          </a:bodyPr>
+          <a:p>
+            <a:r>
+              <a:rPr lang="en-US" altLang="zh-CN">
+                <a:latin typeface="Times New Roman" panose="02020603050405020304" charset="0"/>
+                <a:cs typeface="Times New Roman" panose="02020603050405020304" charset="0"/>
+              </a:rPr>
+              <a:t>S2</a:t>
+            </a:r>
+            <a:endParaRPr lang="en-US" altLang="zh-CN">
+              <a:latin typeface="Times New Roman" panose="02020603050405020304" charset="0"/>
+              <a:cs typeface="Times New Roman" panose="02020603050405020304" charset="0"/>
+            </a:endParaRPr>
+          </a:p>
+        </p:txBody>
+      </p:sp>
+      <p:sp>
+        <p:nvSpPr>
+          <p:cNvPr id="29" name="文本框 28"/>
+          <p:cNvSpPr txBox="1"/>
+          <p:nvPr/>
+        </p:nvSpPr>
+        <p:spPr>
+          <a:xfrm>
+            <a:off x="3171190" y="3184525"/>
+            <a:ext cx="475200" cy="324000"/>
+          </a:xfrm>
+          <a:prstGeom prst="rect">
+            <a:avLst/>
+          </a:prstGeom>
+          <a:noFill/>
+        </p:spPr>
+        <p:txBody>
+          <a:bodyPr wrap="square" rtlCol="0">
+            <a:noAutofit/>
+          </a:bodyPr>
+          <a:p>
+            <a:r>
+              <a:rPr lang="en-US" altLang="zh-CN">
+                <a:latin typeface="Times New Roman" panose="02020603050405020304" charset="0"/>
+                <a:cs typeface="Times New Roman" panose="02020603050405020304" charset="0"/>
+              </a:rPr>
+              <a:t>S3</a:t>
+            </a:r>
+            <a:endParaRPr lang="en-US" altLang="zh-CN">
+              <a:latin typeface="Times New Roman" panose="02020603050405020304" charset="0"/>
+              <a:cs typeface="Times New Roman" panose="02020603050405020304" charset="0"/>
+            </a:endParaRPr>
+          </a:p>
+        </p:txBody>
+      </p:sp>
+      <p:sp>
+        <p:nvSpPr>
+          <p:cNvPr id="30" name="文本框 29"/>
+          <p:cNvSpPr txBox="1"/>
+          <p:nvPr/>
+        </p:nvSpPr>
+        <p:spPr>
+          <a:xfrm>
+            <a:off x="3171190" y="3744595"/>
+            <a:ext cx="475200" cy="324000"/>
+          </a:xfrm>
+          <a:prstGeom prst="rect">
+            <a:avLst/>
+          </a:prstGeom>
+          <a:noFill/>
+        </p:spPr>
+        <p:txBody>
+          <a:bodyPr wrap="square" rtlCol="0">
+            <a:noAutofit/>
+          </a:bodyPr>
+          <a:p>
+            <a:r>
+              <a:rPr lang="en-US" altLang="zh-CN">
+                <a:latin typeface="Times New Roman" panose="02020603050405020304" charset="0"/>
+                <a:cs typeface="Times New Roman" panose="02020603050405020304" charset="0"/>
+              </a:rPr>
+              <a:t>S4</a:t>
+            </a:r>
+            <a:endParaRPr lang="en-US" altLang="zh-CN">
+              <a:latin typeface="Times New Roman" panose="02020603050405020304" charset="0"/>
+              <a:cs typeface="Times New Roman" panose="02020603050405020304" charset="0"/>
+            </a:endParaRPr>
+          </a:p>
+        </p:txBody>
+      </p:sp>
+      <p:sp>
+        <p:nvSpPr>
+          <p:cNvPr id="2" name="文本框 1"/>
+          <p:cNvSpPr txBox="1"/>
+          <p:nvPr/>
+        </p:nvSpPr>
+        <p:spPr>
+          <a:xfrm>
+            <a:off x="3190240" y="2592705"/>
+            <a:ext cx="2383155" cy="272415"/>
+          </a:xfrm>
+          <a:prstGeom prst="rect">
+            <a:avLst/>
+          </a:prstGeom>
+          <a:noFill/>
+        </p:spPr>
+        <p:txBody>
+          <a:bodyPr wrap="square" rtlCol="0">
+            <a:noAutofit/>
+          </a:bodyPr>
+          <a:p>
+            <a:pPr algn="ctr"/>
+            <a:r>
+              <a:rPr lang="en-US" altLang="zh-CN" sz="1400" b="1">
+                <a:solidFill>
+                  <a:schemeClr val="tx1"/>
+                </a:solidFill>
+                <a:latin typeface="Times New Roman" panose="02020603050405020304" charset="0"/>
+                <a:cs typeface="Times New Roman" panose="02020603050405020304" charset="0"/>
+              </a:rPr>
+              <a:t>Send payment request</a:t>
+            </a:r>
+            <a:endParaRPr lang="en-US" altLang="zh-CN" sz="1400" b="1">
+              <a:solidFill>
+                <a:schemeClr val="tx1"/>
+              </a:solidFill>
+              <a:latin typeface="Times New Roman" panose="02020603050405020304" charset="0"/>
+              <a:cs typeface="Times New Roman" panose="02020603050405020304" charset="0"/>
+            </a:endParaRPr>
+          </a:p>
+        </p:txBody>
+      </p:sp>
+      <p:sp>
+        <p:nvSpPr>
+          <p:cNvPr id="7" name="文本框 6"/>
+          <p:cNvSpPr txBox="1"/>
+          <p:nvPr/>
+        </p:nvSpPr>
+        <p:spPr>
+          <a:xfrm>
+            <a:off x="3270885" y="3790950"/>
+            <a:ext cx="2203450" cy="269240"/>
+          </a:xfrm>
+          <a:prstGeom prst="rect">
+            <a:avLst/>
+          </a:prstGeom>
+          <a:noFill/>
+        </p:spPr>
+        <p:txBody>
+          <a:bodyPr wrap="square" rtlCol="0">
+            <a:noAutofit/>
+          </a:bodyPr>
+          <a:p>
+            <a:pPr algn="ctr"/>
+            <a:r>
+              <a:rPr lang="en-US" altLang="zh-CN" sz="1400" b="1">
+                <a:latin typeface="Times New Roman" panose="02020603050405020304" charset="0"/>
+                <a:cs typeface="Times New Roman" panose="02020603050405020304" charset="0"/>
+              </a:rPr>
+              <a:t>Order parameters</a:t>
+            </a:r>
+            <a:endParaRPr lang="en-US" altLang="zh-CN" sz="1400" b="1">
+              <a:latin typeface="Times New Roman" panose="02020603050405020304" charset="0"/>
+              <a:cs typeface="Times New Roman" panose="02020603050405020304" charset="0"/>
+            </a:endParaRPr>
+          </a:p>
+        </p:txBody>
+      </p:sp>
+      <p:cxnSp>
+        <p:nvCxnSpPr>
+          <p:cNvPr id="16" name="直接箭头连接符 15"/>
+          <p:cNvCxnSpPr/>
+          <p:nvPr/>
+        </p:nvCxnSpPr>
+        <p:spPr>
+          <a:xfrm flipV="1">
+            <a:off x="5895975" y="4469130"/>
+            <a:ext cx="2307600" cy="0"/>
+          </a:xfrm>
+          <a:prstGeom prst="straightConnector1">
+            <a:avLst/>
+          </a:prstGeom>
+          <a:ln w="38100">
+            <a:solidFill>
+              <a:schemeClr val="tx1"/>
+            </a:solidFill>
+            <a:tailEnd type="triangle"/>
+          </a:ln>
+        </p:spPr>
+        <p:style>
+          <a:lnRef idx="2">
+            <a:schemeClr val="accent1"/>
+          </a:lnRef>
+          <a:fillRef idx="0">
+            <a:srgbClr val="FFFFFF"/>
+          </a:fillRef>
+          <a:effectRef idx="0">
+            <a:srgbClr val="FFFFFF"/>
+          </a:effectRef>
+          <a:fontRef idx="minor">
+            <a:schemeClr val="tx1"/>
+          </a:fontRef>
+        </p:style>
+      </p:cxnSp>
+      <p:sp>
+        <p:nvSpPr>
+          <p:cNvPr id="18" name="文本框 17"/>
+          <p:cNvSpPr txBox="1"/>
+          <p:nvPr/>
+        </p:nvSpPr>
+        <p:spPr>
+          <a:xfrm>
+            <a:off x="5927725" y="4145280"/>
+            <a:ext cx="475200" cy="324000"/>
+          </a:xfrm>
+          <a:prstGeom prst="rect">
+            <a:avLst/>
+          </a:prstGeom>
+          <a:noFill/>
+        </p:spPr>
+        <p:txBody>
+          <a:bodyPr wrap="square" rtlCol="0">
+            <a:noAutofit/>
+          </a:bodyPr>
+          <a:p>
+            <a:r>
+              <a:rPr lang="en-US" altLang="zh-CN">
+                <a:latin typeface="Times New Roman" panose="02020603050405020304" charset="0"/>
+                <a:cs typeface="Times New Roman" panose="02020603050405020304" charset="0"/>
+              </a:rPr>
+              <a:t>S5</a:t>
+            </a:r>
+            <a:endParaRPr lang="en-US" altLang="zh-CN">
+              <a:latin typeface="Times New Roman" panose="02020603050405020304" charset="0"/>
+              <a:cs typeface="Times New Roman" panose="02020603050405020304" charset="0"/>
+            </a:endParaRPr>
+          </a:p>
+        </p:txBody>
+      </p:sp>
+      <p:sp>
+        <p:nvSpPr>
+          <p:cNvPr id="19" name="文本框 18"/>
+          <p:cNvSpPr txBox="1"/>
+          <p:nvPr/>
+        </p:nvSpPr>
+        <p:spPr>
+          <a:xfrm>
+            <a:off x="5963920" y="4187190"/>
+            <a:ext cx="2203450" cy="269240"/>
+          </a:xfrm>
+          <a:prstGeom prst="rect">
+            <a:avLst/>
+          </a:prstGeom>
+          <a:noFill/>
+        </p:spPr>
+        <p:txBody>
+          <a:bodyPr wrap="square" rtlCol="0">
+            <a:noAutofit/>
+          </a:bodyPr>
+          <a:p>
+            <a:pPr algn="ctr"/>
+            <a:r>
+              <a:rPr lang="en-US" altLang="zh-CN" sz="1400" b="1">
+                <a:latin typeface="Times New Roman" panose="02020603050405020304" charset="0"/>
+                <a:cs typeface="Times New Roman" panose="02020603050405020304" charset="0"/>
+              </a:rPr>
+              <a:t>Tampered request</a:t>
+            </a:r>
+            <a:endParaRPr lang="en-US" altLang="zh-CN" sz="1400" b="1">
+              <a:latin typeface="Times New Roman" panose="02020603050405020304" charset="0"/>
+              <a:cs typeface="Times New Roman" panose="02020603050405020304" charset="0"/>
+            </a:endParaRPr>
+          </a:p>
+        </p:txBody>
+      </p:sp>
+    </p:spTree>
+  </p:cSld>
+  <p:clrMapOvr>
+    <a:masterClrMapping/>
+  </p:clrMapOvr>
+</p:sld>
+</file>
+
+<file path=ppt/slides/slide5.xml><?xml version="1.0" encoding="utf-8"?>
+<p:sld xmlns:a="http://schemas.openxmlformats.org/drawingml/2006/main" xmlns:r="http://schemas.openxmlformats.org/officeDocument/2006/relationships" xmlns:p="http://schemas.openxmlformats.org/presentationml/2006/main">
+  <p:cSld>
+    <p:spTree>
+      <p:nvGrpSpPr>
+        <p:cNvPr id="1" name=""/>
+        <p:cNvGrpSpPr/>
+        <p:nvPr/>
+      </p:nvGrpSpPr>
+      <p:grpSpPr/>
+      <p:grpSp>
+        <p:nvGrpSpPr>
+          <p:cNvPr id="14" name="组合 13"/>
+          <p:cNvGrpSpPr/>
+          <p:nvPr/>
+        </p:nvGrpSpPr>
+        <p:grpSpPr>
+          <a:xfrm>
+            <a:off x="4953000" y="196850"/>
+            <a:ext cx="5035550" cy="5035550"/>
+            <a:chOff x="920" y="310"/>
+            <a:chExt cx="7930" cy="7930"/>
+          </a:xfrm>
+        </p:grpSpPr>
+        <p:pic>
+          <p:nvPicPr>
+            <p:cNvPr id="15" name="图片 14" descr="ef56901b-e67b-48c3-91cc-2ffb6efbef1e"/>
+            <p:cNvPicPr>
+              <a:picLocks noChangeAspect="1"/>
+            </p:cNvPicPr>
+            <p:nvPr/>
+          </p:nvPicPr>
+          <p:blipFill>
+            <a:blip r:embed="rId1"/>
+            <a:stretch>
+              <a:fillRect/>
+            </a:stretch>
+          </p:blipFill>
+          <p:spPr>
+            <a:xfrm>
+              <a:off x="920" y="310"/>
+              <a:ext cx="7930" cy="7930"/>
+            </a:xfrm>
+            <a:prstGeom prst="rect">
+              <a:avLst/>
+            </a:prstGeom>
+          </p:spPr>
+        </p:pic>
+        <p:pic>
+          <p:nvPicPr>
+            <p:cNvPr id="16" name="图片 15"/>
+            <p:cNvPicPr>
+              <a:picLocks noChangeAspect="1"/>
+            </p:cNvPicPr>
+            <p:nvPr/>
+          </p:nvPicPr>
+          <p:blipFill>
+            <a:blip r:embed="rId2"/>
+            <a:srcRect l="-3754" t="-1049" r="-3228" b="-1375"/>
+            <a:stretch>
+              <a:fillRect/>
+            </a:stretch>
+          </p:blipFill>
+          <p:spPr>
+            <a:xfrm>
+              <a:off x="3440" y="1324"/>
+              <a:ext cx="2850" cy="5811"/>
+            </a:xfrm>
+            <a:prstGeom prst="roundRect">
+              <a:avLst/>
+            </a:prstGeom>
+          </p:spPr>
+        </p:pic>
+      </p:grpSp>
+      <p:pic>
+        <p:nvPicPr>
+          <p:cNvPr id="9" name="图片 8" descr="ef56901b-e67b-48c3-91cc-2ffb6efbef1e"/>
+          <p:cNvPicPr>
+            <a:picLocks noChangeAspect="1"/>
+          </p:cNvPicPr>
+          <p:nvPr/>
+        </p:nvPicPr>
+        <p:blipFill>
+          <a:blip r:embed="rId1"/>
+          <a:stretch>
+            <a:fillRect/>
+          </a:stretch>
+        </p:blipFill>
+        <p:spPr>
+          <a:xfrm>
+            <a:off x="1701800" y="196850"/>
+            <a:ext cx="5035550" cy="5035550"/>
+          </a:xfrm>
+          <a:prstGeom prst="rect">
+            <a:avLst/>
+          </a:prstGeom>
+        </p:spPr>
+      </p:pic>
+      <p:pic>
+        <p:nvPicPr>
+          <p:cNvPr id="10" name="图片 9" descr="D:/实验研究/论文研究/支付协议/支付协议/支付模型ppt/2.jpg2"/>
+          <p:cNvPicPr>
+            <a:picLocks noChangeAspect="1"/>
+          </p:cNvPicPr>
+          <p:nvPr/>
+        </p:nvPicPr>
+        <p:blipFill>
+          <a:blip r:embed="rId3"/>
+          <a:srcRect l="-2593" t="-2073" r="-2963" b="-1388"/>
+          <a:stretch>
+            <a:fillRect/>
+          </a:stretch>
+        </p:blipFill>
+        <p:spPr>
+          <a:xfrm>
+            <a:off x="3308350" y="790575"/>
+            <a:ext cx="1809750" cy="3740150"/>
+          </a:xfrm>
+          <a:prstGeom prst="roundRect">
+            <a:avLst/>
+          </a:prstGeom>
+        </p:spPr>
+      </p:pic>
+      <p:pic>
+        <p:nvPicPr>
+          <p:cNvPr id="39" name="图片 38" descr="序号1"/>
+          <p:cNvPicPr>
+            <a:picLocks noChangeAspect="1"/>
+          </p:cNvPicPr>
+          <p:nvPr/>
+        </p:nvPicPr>
+        <p:blipFill>
+          <a:blip r:embed="rId4">
+            <a:extLst>
+              <a:ext uri="{96DAC541-7B7A-43D3-8B79-37D633B846F1}">
+                <asvg:svgBlip xmlns:asvg="http://schemas.microsoft.com/office/drawing/2016/SVG/main" r:embed="rId5"/>
+              </a:ext>
+            </a:extLst>
+          </a:blip>
+          <a:stretch>
+            <a:fillRect/>
+          </a:stretch>
+        </p:blipFill>
+        <p:spPr>
+          <a:xfrm>
+            <a:off x="5327650" y="1313815"/>
+            <a:ext cx="540000" cy="540000"/>
+          </a:xfrm>
+          <a:prstGeom prst="rect">
+            <a:avLst/>
+          </a:prstGeom>
+        </p:spPr>
+      </p:pic>
+      <p:pic>
+        <p:nvPicPr>
+          <p:cNvPr id="40" name="图片 39" descr="序号2"/>
+          <p:cNvPicPr>
+            <a:picLocks noChangeAspect="1"/>
+          </p:cNvPicPr>
+          <p:nvPr/>
+        </p:nvPicPr>
+        <p:blipFill>
+          <a:blip r:embed="rId6">
+            <a:extLst>
+              <a:ext uri="{96DAC541-7B7A-43D3-8B79-37D633B846F1}">
+                <asvg:svgBlip xmlns:asvg="http://schemas.microsoft.com/office/drawing/2016/SVG/main" r:embed="rId7"/>
+              </a:ext>
+            </a:extLst>
+          </a:blip>
+          <a:stretch>
+            <a:fillRect/>
+          </a:stretch>
+        </p:blipFill>
+        <p:spPr>
+          <a:xfrm>
+            <a:off x="8724265" y="1313815"/>
+            <a:ext cx="540000" cy="540000"/>
+          </a:xfrm>
+          <a:prstGeom prst="rect">
+            <a:avLst/>
+          </a:prstGeom>
+        </p:spPr>
+      </p:pic>
+    </p:spTree>
+  </p:cSld>
+  <p:clrMapOvr>
+    <a:masterClrMapping/>
+  </p:clrMapOvr>
+</p:sld>
+</file>
+
+<file path=ppt/slides/slide6.xml><?xml version="1.0" encoding="utf-8"?>
+<p:sld xmlns:a="http://schemas.openxmlformats.org/drawingml/2006/main" xmlns:r="http://schemas.openxmlformats.org/officeDocument/2006/relationships" xmlns:p="http://schemas.openxmlformats.org/presentationml/2006/main">
+  <p:cSld>
+    <p:spTree>
+      <p:nvGrpSpPr>
+        <p:cNvPr id="1" name=""/>
+        <p:cNvGrpSpPr/>
+        <p:nvPr/>
+      </p:nvGrpSpPr>
       <p:grpSpPr>
         <a:xfrm>
           <a:off x="0" y="0"/>
@@ -6778,7 +8711,7 @@
 </p:sld>
 </file>
 
-<file path=ppt/slides/slide5.xml><?xml version="1.0" encoding="utf-8"?>
+<file path=ppt/slides/slide7.xml><?xml version="1.0" encoding="utf-8"?>
 <p:sld xmlns:a="http://schemas.openxmlformats.org/drawingml/2006/main" xmlns:r="http://schemas.openxmlformats.org/officeDocument/2006/relationships" xmlns:p="http://schemas.openxmlformats.org/presentationml/2006/main">
   <p:cSld>
     <p:spTree>

--- a/img-source/images.pptx
+++ b/img-source/images.pptx
@@ -5,13 +5,13 @@
     <p:sldMasterId id="2147483648" r:id="rId1"/>
   </p:sldMasterIdLst>
   <p:sldIdLst>
-    <p:sldId id="256" r:id="rId3"/>
-    <p:sldId id="257" r:id="rId4"/>
-    <p:sldId id="260" r:id="rId5"/>
-    <p:sldId id="261" r:id="rId6"/>
-    <p:sldId id="262" r:id="rId7"/>
-    <p:sldId id="258" r:id="rId8"/>
-    <p:sldId id="259" r:id="rId9"/>
+    <p:sldId id="256" r:id="rId2"/>
+    <p:sldId id="257" r:id="rId3"/>
+    <p:sldId id="260" r:id="rId4"/>
+    <p:sldId id="261" r:id="rId5"/>
+    <p:sldId id="262" r:id="rId6"/>
+    <p:sldId id="258" r:id="rId7"/>
+    <p:sldId id="259" r:id="rId8"/>
   </p:sldIdLst>
   <p:sldSz cx="12192000" cy="6858000"/>
   <p:notesSz cx="6858000" cy="9144000"/>
@@ -184,7 +184,6 @@
               <a:rPr lang="zh-CN" altLang="en-US"/>
               <a:t>单击此处编辑母版标题样式</a:t>
             </a:r>
-            <a:endParaRPr lang="zh-CN" altLang="en-US"/>
           </a:p>
         </p:txBody>
       </p:sp>
@@ -249,7 +248,6 @@
               <a:rPr lang="zh-CN" altLang="en-US"/>
               <a:t>单击此处编辑母版副标题样式</a:t>
             </a:r>
-            <a:endParaRPr lang="zh-CN" altLang="en-US"/>
           </a:p>
         </p:txBody>
       </p:sp>
@@ -270,6 +268,7 @@
           <a:p>
             <a:fld id="{D997B5FA-0921-464F-AAE1-844C04324D75}" type="datetimeFigureOut">
               <a:rPr lang="zh-CN" altLang="en-US" smtClean="0"/>
+              <a:t>2026/1/20</a:t>
             </a:fld>
             <a:endParaRPr lang="zh-CN" altLang="en-US"/>
           </a:p>
@@ -311,6 +310,7 @@
           <a:p>
             <a:fld id="{565CE74E-AB26-4998-AD42-012C4C1AD076}" type="slidenum">
               <a:rPr lang="zh-CN" altLang="en-US" smtClean="0"/>
+              <a:t>‹#›</a:t>
             </a:fld>
             <a:endParaRPr lang="zh-CN" altLang="en-US"/>
           </a:p>
@@ -360,7 +360,6 @@
               <a:rPr lang="zh-CN" altLang="en-US"/>
               <a:t>单击此处编辑母版标题样式</a:t>
             </a:r>
-            <a:endParaRPr lang="zh-CN" altLang="en-US"/>
           </a:p>
         </p:txBody>
       </p:sp>
@@ -384,7 +383,6 @@
               <a:rPr lang="zh-CN" altLang="en-US"/>
               <a:t>单击此处编辑母版文本样式</a:t>
             </a:r>
-            <a:endParaRPr lang="zh-CN" altLang="en-US"/>
           </a:p>
           <a:p>
             <a:pPr lvl="1"/>
@@ -392,7 +390,6 @@
               <a:rPr lang="zh-CN" altLang="en-US"/>
               <a:t>第二级</a:t>
             </a:r>
-            <a:endParaRPr lang="zh-CN" altLang="en-US"/>
           </a:p>
           <a:p>
             <a:pPr lvl="2"/>
@@ -400,7 +397,6 @@
               <a:rPr lang="zh-CN" altLang="en-US"/>
               <a:t>第三级</a:t>
             </a:r>
-            <a:endParaRPr lang="zh-CN" altLang="en-US"/>
           </a:p>
           <a:p>
             <a:pPr lvl="3"/>
@@ -408,7 +404,6 @@
               <a:rPr lang="zh-CN" altLang="en-US"/>
               <a:t>第四级</a:t>
             </a:r>
-            <a:endParaRPr lang="zh-CN" altLang="en-US"/>
           </a:p>
           <a:p>
             <a:pPr lvl="4"/>
@@ -416,7 +411,6 @@
               <a:rPr lang="zh-CN" altLang="en-US"/>
               <a:t>第五级</a:t>
             </a:r>
-            <a:endParaRPr lang="zh-CN" altLang="en-US"/>
           </a:p>
         </p:txBody>
       </p:sp>
@@ -437,6 +431,7 @@
           <a:p>
             <a:fld id="{D997B5FA-0921-464F-AAE1-844C04324D75}" type="datetimeFigureOut">
               <a:rPr lang="zh-CN" altLang="en-US" smtClean="0"/>
+              <a:t>2026/1/20</a:t>
             </a:fld>
             <a:endParaRPr lang="zh-CN" altLang="en-US"/>
           </a:p>
@@ -478,6 +473,7 @@
           <a:p>
             <a:fld id="{565CE74E-AB26-4998-AD42-012C4C1AD076}" type="slidenum">
               <a:rPr lang="zh-CN" altLang="en-US" smtClean="0"/>
+              <a:t>‹#›</a:t>
             </a:fld>
             <a:endParaRPr lang="zh-CN" altLang="en-US"/>
           </a:p>
@@ -532,7 +528,6 @@
               <a:rPr lang="zh-CN" altLang="en-US"/>
               <a:t>单击此处编辑母版标题样式</a:t>
             </a:r>
-            <a:endParaRPr lang="zh-CN" altLang="en-US"/>
           </a:p>
         </p:txBody>
       </p:sp>
@@ -561,7 +556,6 @@
               <a:rPr lang="zh-CN" altLang="en-US"/>
               <a:t>单击此处编辑母版文本样式</a:t>
             </a:r>
-            <a:endParaRPr lang="zh-CN" altLang="en-US"/>
           </a:p>
           <a:p>
             <a:pPr lvl="1"/>
@@ -569,7 +563,6 @@
               <a:rPr lang="zh-CN" altLang="en-US"/>
               <a:t>第二级</a:t>
             </a:r>
-            <a:endParaRPr lang="zh-CN" altLang="en-US"/>
           </a:p>
           <a:p>
             <a:pPr lvl="2"/>
@@ -577,7 +570,6 @@
               <a:rPr lang="zh-CN" altLang="en-US"/>
               <a:t>第三级</a:t>
             </a:r>
-            <a:endParaRPr lang="zh-CN" altLang="en-US"/>
           </a:p>
           <a:p>
             <a:pPr lvl="3"/>
@@ -585,7 +577,6 @@
               <a:rPr lang="zh-CN" altLang="en-US"/>
               <a:t>第四级</a:t>
             </a:r>
-            <a:endParaRPr lang="zh-CN" altLang="en-US"/>
           </a:p>
           <a:p>
             <a:pPr lvl="4"/>
@@ -593,7 +584,6 @@
               <a:rPr lang="zh-CN" altLang="en-US"/>
               <a:t>第五级</a:t>
             </a:r>
-            <a:endParaRPr lang="zh-CN" altLang="en-US"/>
           </a:p>
         </p:txBody>
       </p:sp>
@@ -614,6 +604,7 @@
           <a:p>
             <a:fld id="{D997B5FA-0921-464F-AAE1-844C04324D75}" type="datetimeFigureOut">
               <a:rPr lang="zh-CN" altLang="en-US" smtClean="0"/>
+              <a:t>2026/1/20</a:t>
             </a:fld>
             <a:endParaRPr lang="zh-CN" altLang="en-US"/>
           </a:p>
@@ -655,6 +646,7 @@
           <a:p>
             <a:fld id="{565CE74E-AB26-4998-AD42-012C4C1AD076}" type="slidenum">
               <a:rPr lang="zh-CN" altLang="en-US" smtClean="0"/>
+              <a:t>‹#›</a:t>
             </a:fld>
             <a:endParaRPr lang="zh-CN" altLang="en-US"/>
           </a:p>
@@ -704,7 +696,6 @@
               <a:rPr lang="zh-CN" altLang="en-US"/>
               <a:t>单击此处编辑母版标题样式</a:t>
             </a:r>
-            <a:endParaRPr lang="zh-CN" altLang="en-US"/>
           </a:p>
         </p:txBody>
       </p:sp>
@@ -728,7 +719,6 @@
               <a:rPr lang="zh-CN" altLang="en-US"/>
               <a:t>单击此处编辑母版文本样式</a:t>
             </a:r>
-            <a:endParaRPr lang="zh-CN" altLang="en-US"/>
           </a:p>
           <a:p>
             <a:pPr lvl="1"/>
@@ -736,7 +726,6 @@
               <a:rPr lang="zh-CN" altLang="en-US"/>
               <a:t>第二级</a:t>
             </a:r>
-            <a:endParaRPr lang="zh-CN" altLang="en-US"/>
           </a:p>
           <a:p>
             <a:pPr lvl="2"/>
@@ -744,7 +733,6 @@
               <a:rPr lang="zh-CN" altLang="en-US"/>
               <a:t>第三级</a:t>
             </a:r>
-            <a:endParaRPr lang="zh-CN" altLang="en-US"/>
           </a:p>
           <a:p>
             <a:pPr lvl="3"/>
@@ -752,7 +740,6 @@
               <a:rPr lang="zh-CN" altLang="en-US"/>
               <a:t>第四级</a:t>
             </a:r>
-            <a:endParaRPr lang="zh-CN" altLang="en-US"/>
           </a:p>
           <a:p>
             <a:pPr lvl="4"/>
@@ -760,7 +747,6 @@
               <a:rPr lang="zh-CN" altLang="en-US"/>
               <a:t>第五级</a:t>
             </a:r>
-            <a:endParaRPr lang="zh-CN" altLang="en-US"/>
           </a:p>
         </p:txBody>
       </p:sp>
@@ -781,6 +767,7 @@
           <a:p>
             <a:fld id="{D997B5FA-0921-464F-AAE1-844C04324D75}" type="datetimeFigureOut">
               <a:rPr lang="zh-CN" altLang="en-US" smtClean="0"/>
+              <a:t>2026/1/20</a:t>
             </a:fld>
             <a:endParaRPr lang="zh-CN" altLang="en-US"/>
           </a:p>
@@ -822,6 +809,7 @@
           <a:p>
             <a:fld id="{565CE74E-AB26-4998-AD42-012C4C1AD076}" type="slidenum">
               <a:rPr lang="zh-CN" altLang="en-US" smtClean="0"/>
+              <a:t>‹#›</a:t>
             </a:fld>
             <a:endParaRPr lang="zh-CN" altLang="en-US"/>
           </a:p>
@@ -880,7 +868,6 @@
               <a:rPr lang="zh-CN" altLang="en-US"/>
               <a:t>单击此处编辑母版标题样式</a:t>
             </a:r>
-            <a:endParaRPr lang="zh-CN" altLang="en-US"/>
           </a:p>
         </p:txBody>
       </p:sp>
@@ -1000,7 +987,6 @@
               <a:rPr lang="zh-CN" altLang="en-US"/>
               <a:t>单击此处编辑母版文本样式</a:t>
             </a:r>
-            <a:endParaRPr lang="zh-CN" altLang="en-US"/>
           </a:p>
         </p:txBody>
       </p:sp>
@@ -1021,6 +1007,7 @@
           <a:p>
             <a:fld id="{D997B5FA-0921-464F-AAE1-844C04324D75}" type="datetimeFigureOut">
               <a:rPr lang="zh-CN" altLang="en-US" smtClean="0"/>
+              <a:t>2026/1/20</a:t>
             </a:fld>
             <a:endParaRPr lang="zh-CN" altLang="en-US"/>
           </a:p>
@@ -1062,6 +1049,7 @@
           <a:p>
             <a:fld id="{565CE74E-AB26-4998-AD42-012C4C1AD076}" type="slidenum">
               <a:rPr lang="zh-CN" altLang="en-US" smtClean="0"/>
+              <a:t>‹#›</a:t>
             </a:fld>
             <a:endParaRPr lang="zh-CN" altLang="en-US"/>
           </a:p>
@@ -1111,7 +1099,6 @@
               <a:rPr lang="zh-CN" altLang="en-US"/>
               <a:t>单击此处编辑母版标题样式</a:t>
             </a:r>
-            <a:endParaRPr lang="zh-CN" altLang="en-US"/>
           </a:p>
         </p:txBody>
       </p:sp>
@@ -1140,7 +1127,6 @@
               <a:rPr lang="zh-CN" altLang="en-US"/>
               <a:t>单击此处编辑母版文本样式</a:t>
             </a:r>
-            <a:endParaRPr lang="zh-CN" altLang="en-US"/>
           </a:p>
           <a:p>
             <a:pPr lvl="1"/>
@@ -1148,7 +1134,6 @@
               <a:rPr lang="zh-CN" altLang="en-US"/>
               <a:t>第二级</a:t>
             </a:r>
-            <a:endParaRPr lang="zh-CN" altLang="en-US"/>
           </a:p>
           <a:p>
             <a:pPr lvl="2"/>
@@ -1156,7 +1141,6 @@
               <a:rPr lang="zh-CN" altLang="en-US"/>
               <a:t>第三级</a:t>
             </a:r>
-            <a:endParaRPr lang="zh-CN" altLang="en-US"/>
           </a:p>
           <a:p>
             <a:pPr lvl="3"/>
@@ -1164,7 +1148,6 @@
               <a:rPr lang="zh-CN" altLang="en-US"/>
               <a:t>第四级</a:t>
             </a:r>
-            <a:endParaRPr lang="zh-CN" altLang="en-US"/>
           </a:p>
           <a:p>
             <a:pPr lvl="4"/>
@@ -1172,7 +1155,6 @@
               <a:rPr lang="zh-CN" altLang="en-US"/>
               <a:t>第五级</a:t>
             </a:r>
-            <a:endParaRPr lang="zh-CN" altLang="en-US"/>
           </a:p>
         </p:txBody>
       </p:sp>
@@ -1201,7 +1183,6 @@
               <a:rPr lang="zh-CN" altLang="en-US"/>
               <a:t>单击此处编辑母版文本样式</a:t>
             </a:r>
-            <a:endParaRPr lang="zh-CN" altLang="en-US"/>
           </a:p>
           <a:p>
             <a:pPr lvl="1"/>
@@ -1209,7 +1190,6 @@
               <a:rPr lang="zh-CN" altLang="en-US"/>
               <a:t>第二级</a:t>
             </a:r>
-            <a:endParaRPr lang="zh-CN" altLang="en-US"/>
           </a:p>
           <a:p>
             <a:pPr lvl="2"/>
@@ -1217,7 +1197,6 @@
               <a:rPr lang="zh-CN" altLang="en-US"/>
               <a:t>第三级</a:t>
             </a:r>
-            <a:endParaRPr lang="zh-CN" altLang="en-US"/>
           </a:p>
           <a:p>
             <a:pPr lvl="3"/>
@@ -1225,7 +1204,6 @@
               <a:rPr lang="zh-CN" altLang="en-US"/>
               <a:t>第四级</a:t>
             </a:r>
-            <a:endParaRPr lang="zh-CN" altLang="en-US"/>
           </a:p>
           <a:p>
             <a:pPr lvl="4"/>
@@ -1233,7 +1211,6 @@
               <a:rPr lang="zh-CN" altLang="en-US"/>
               <a:t>第五级</a:t>
             </a:r>
-            <a:endParaRPr lang="zh-CN" altLang="en-US"/>
           </a:p>
         </p:txBody>
       </p:sp>
@@ -1254,6 +1231,7 @@
           <a:p>
             <a:fld id="{D997B5FA-0921-464F-AAE1-844C04324D75}" type="datetimeFigureOut">
               <a:rPr lang="zh-CN" altLang="en-US" smtClean="0"/>
+              <a:t>2026/1/20</a:t>
             </a:fld>
             <a:endParaRPr lang="zh-CN" altLang="en-US"/>
           </a:p>
@@ -1295,6 +1273,7 @@
           <a:p>
             <a:fld id="{565CE74E-AB26-4998-AD42-012C4C1AD076}" type="slidenum">
               <a:rPr lang="zh-CN" altLang="en-US" smtClean="0"/>
+              <a:t>‹#›</a:t>
             </a:fld>
             <a:endParaRPr lang="zh-CN" altLang="en-US"/>
           </a:p>
@@ -1349,7 +1328,6 @@
               <a:rPr lang="zh-CN" altLang="en-US"/>
               <a:t>单击此处编辑母版标题样式</a:t>
             </a:r>
-            <a:endParaRPr lang="zh-CN" altLang="en-US"/>
           </a:p>
         </p:txBody>
       </p:sp>
@@ -1415,7 +1393,6 @@
               <a:rPr lang="zh-CN" altLang="en-US"/>
               <a:t>单击此处编辑母版文本样式</a:t>
             </a:r>
-            <a:endParaRPr lang="zh-CN" altLang="en-US"/>
           </a:p>
         </p:txBody>
       </p:sp>
@@ -1444,7 +1421,6 @@
               <a:rPr lang="zh-CN" altLang="en-US"/>
               <a:t>单击此处编辑母版文本样式</a:t>
             </a:r>
-            <a:endParaRPr lang="zh-CN" altLang="en-US"/>
           </a:p>
           <a:p>
             <a:pPr lvl="1"/>
@@ -1452,7 +1428,6 @@
               <a:rPr lang="zh-CN" altLang="en-US"/>
               <a:t>第二级</a:t>
             </a:r>
-            <a:endParaRPr lang="zh-CN" altLang="en-US"/>
           </a:p>
           <a:p>
             <a:pPr lvl="2"/>
@@ -1460,7 +1435,6 @@
               <a:rPr lang="zh-CN" altLang="en-US"/>
               <a:t>第三级</a:t>
             </a:r>
-            <a:endParaRPr lang="zh-CN" altLang="en-US"/>
           </a:p>
           <a:p>
             <a:pPr lvl="3"/>
@@ -1468,7 +1442,6 @@
               <a:rPr lang="zh-CN" altLang="en-US"/>
               <a:t>第四级</a:t>
             </a:r>
-            <a:endParaRPr lang="zh-CN" altLang="en-US"/>
           </a:p>
           <a:p>
             <a:pPr lvl="4"/>
@@ -1476,7 +1449,6 @@
               <a:rPr lang="zh-CN" altLang="en-US"/>
               <a:t>第五级</a:t>
             </a:r>
-            <a:endParaRPr lang="zh-CN" altLang="en-US"/>
           </a:p>
         </p:txBody>
       </p:sp>
@@ -1542,7 +1514,6 @@
               <a:rPr lang="zh-CN" altLang="en-US"/>
               <a:t>单击此处编辑母版文本样式</a:t>
             </a:r>
-            <a:endParaRPr lang="zh-CN" altLang="en-US"/>
           </a:p>
         </p:txBody>
       </p:sp>
@@ -1571,7 +1542,6 @@
               <a:rPr lang="zh-CN" altLang="en-US"/>
               <a:t>单击此处编辑母版文本样式</a:t>
             </a:r>
-            <a:endParaRPr lang="zh-CN" altLang="en-US"/>
           </a:p>
           <a:p>
             <a:pPr lvl="1"/>
@@ -1579,7 +1549,6 @@
               <a:rPr lang="zh-CN" altLang="en-US"/>
               <a:t>第二级</a:t>
             </a:r>
-            <a:endParaRPr lang="zh-CN" altLang="en-US"/>
           </a:p>
           <a:p>
             <a:pPr lvl="2"/>
@@ -1587,7 +1556,6 @@
               <a:rPr lang="zh-CN" altLang="en-US"/>
               <a:t>第三级</a:t>
             </a:r>
-            <a:endParaRPr lang="zh-CN" altLang="en-US"/>
           </a:p>
           <a:p>
             <a:pPr lvl="3"/>
@@ -1595,7 +1563,6 @@
               <a:rPr lang="zh-CN" altLang="en-US"/>
               <a:t>第四级</a:t>
             </a:r>
-            <a:endParaRPr lang="zh-CN" altLang="en-US"/>
           </a:p>
           <a:p>
             <a:pPr lvl="4"/>
@@ -1603,7 +1570,6 @@
               <a:rPr lang="zh-CN" altLang="en-US"/>
               <a:t>第五级</a:t>
             </a:r>
-            <a:endParaRPr lang="zh-CN" altLang="en-US"/>
           </a:p>
         </p:txBody>
       </p:sp>
@@ -1624,6 +1590,7 @@
           <a:p>
             <a:fld id="{D997B5FA-0921-464F-AAE1-844C04324D75}" type="datetimeFigureOut">
               <a:rPr lang="zh-CN" altLang="en-US" smtClean="0"/>
+              <a:t>2026/1/20</a:t>
             </a:fld>
             <a:endParaRPr lang="zh-CN" altLang="en-US"/>
           </a:p>
@@ -1665,6 +1632,7 @@
           <a:p>
             <a:fld id="{565CE74E-AB26-4998-AD42-012C4C1AD076}" type="slidenum">
               <a:rPr lang="zh-CN" altLang="en-US" smtClean="0"/>
+              <a:t>‹#›</a:t>
             </a:fld>
             <a:endParaRPr lang="zh-CN" altLang="en-US"/>
           </a:p>
@@ -1714,7 +1682,6 @@
               <a:rPr lang="zh-CN" altLang="en-US"/>
               <a:t>单击此处编辑母版标题样式</a:t>
             </a:r>
-            <a:endParaRPr lang="zh-CN" altLang="en-US"/>
           </a:p>
         </p:txBody>
       </p:sp>
@@ -1735,6 +1702,7 @@
           <a:p>
             <a:fld id="{D997B5FA-0921-464F-AAE1-844C04324D75}" type="datetimeFigureOut">
               <a:rPr lang="zh-CN" altLang="en-US" smtClean="0"/>
+              <a:t>2026/1/20</a:t>
             </a:fld>
             <a:endParaRPr lang="zh-CN" altLang="en-US"/>
           </a:p>
@@ -1776,6 +1744,7 @@
           <a:p>
             <a:fld id="{565CE74E-AB26-4998-AD42-012C4C1AD076}" type="slidenum">
               <a:rPr lang="zh-CN" altLang="en-US" smtClean="0"/>
+              <a:t>‹#›</a:t>
             </a:fld>
             <a:endParaRPr lang="zh-CN" altLang="en-US"/>
           </a:p>
@@ -1823,6 +1792,7 @@
           <a:p>
             <a:fld id="{D997B5FA-0921-464F-AAE1-844C04324D75}" type="datetimeFigureOut">
               <a:rPr lang="zh-CN" altLang="en-US" smtClean="0"/>
+              <a:t>2026/1/20</a:t>
             </a:fld>
             <a:endParaRPr lang="zh-CN" altLang="en-US"/>
           </a:p>
@@ -1864,6 +1834,7 @@
           <a:p>
             <a:fld id="{565CE74E-AB26-4998-AD42-012C4C1AD076}" type="slidenum">
               <a:rPr lang="zh-CN" altLang="en-US" smtClean="0"/>
+              <a:t>‹#›</a:t>
             </a:fld>
             <a:endParaRPr lang="zh-CN" altLang="en-US"/>
           </a:p>
@@ -1922,7 +1893,6 @@
               <a:rPr lang="zh-CN" altLang="en-US"/>
               <a:t>单击此处编辑母版标题样式</a:t>
             </a:r>
-            <a:endParaRPr lang="zh-CN" altLang="en-US"/>
           </a:p>
         </p:txBody>
       </p:sp>
@@ -1979,7 +1949,6 @@
               <a:rPr lang="zh-CN" altLang="en-US"/>
               <a:t>单击此处编辑母版文本样式</a:t>
             </a:r>
-            <a:endParaRPr lang="zh-CN" altLang="en-US"/>
           </a:p>
           <a:p>
             <a:pPr lvl="1"/>
@@ -1987,7 +1956,6 @@
               <a:rPr lang="zh-CN" altLang="en-US"/>
               <a:t>第二级</a:t>
             </a:r>
-            <a:endParaRPr lang="zh-CN" altLang="en-US"/>
           </a:p>
           <a:p>
             <a:pPr lvl="2"/>
@@ -1995,7 +1963,6 @@
               <a:rPr lang="zh-CN" altLang="en-US"/>
               <a:t>第三级</a:t>
             </a:r>
-            <a:endParaRPr lang="zh-CN" altLang="en-US"/>
           </a:p>
           <a:p>
             <a:pPr lvl="3"/>
@@ -2003,7 +1970,6 @@
               <a:rPr lang="zh-CN" altLang="en-US"/>
               <a:t>第四级</a:t>
             </a:r>
-            <a:endParaRPr lang="zh-CN" altLang="en-US"/>
           </a:p>
           <a:p>
             <a:pPr lvl="4"/>
@@ -2011,7 +1977,6 @@
               <a:rPr lang="zh-CN" altLang="en-US"/>
               <a:t>第五级</a:t>
             </a:r>
-            <a:endParaRPr lang="zh-CN" altLang="en-US"/>
           </a:p>
         </p:txBody>
       </p:sp>
@@ -2077,7 +2042,6 @@
               <a:rPr lang="zh-CN" altLang="en-US"/>
               <a:t>单击此处编辑母版文本样式</a:t>
             </a:r>
-            <a:endParaRPr lang="zh-CN" altLang="en-US"/>
           </a:p>
         </p:txBody>
       </p:sp>
@@ -2098,6 +2062,7 @@
           <a:p>
             <a:fld id="{D997B5FA-0921-464F-AAE1-844C04324D75}" type="datetimeFigureOut">
               <a:rPr lang="zh-CN" altLang="en-US" smtClean="0"/>
+              <a:t>2026/1/20</a:t>
             </a:fld>
             <a:endParaRPr lang="zh-CN" altLang="en-US"/>
           </a:p>
@@ -2139,6 +2104,7 @@
           <a:p>
             <a:fld id="{565CE74E-AB26-4998-AD42-012C4C1AD076}" type="slidenum">
               <a:rPr lang="zh-CN" altLang="en-US" smtClean="0"/>
+              <a:t>‹#›</a:t>
             </a:fld>
             <a:endParaRPr lang="zh-CN" altLang="en-US"/>
           </a:p>
@@ -2197,7 +2163,6 @@
               <a:rPr lang="zh-CN" altLang="en-US"/>
               <a:t>单击此处编辑母版标题样式</a:t>
             </a:r>
-            <a:endParaRPr lang="zh-CN" altLang="en-US"/>
           </a:p>
         </p:txBody>
       </p:sp>
@@ -2324,7 +2289,6 @@
               <a:rPr lang="zh-CN" altLang="en-US"/>
               <a:t>单击此处编辑母版文本样式</a:t>
             </a:r>
-            <a:endParaRPr lang="zh-CN" altLang="en-US"/>
           </a:p>
         </p:txBody>
       </p:sp>
@@ -2345,6 +2309,7 @@
           <a:p>
             <a:fld id="{D997B5FA-0921-464F-AAE1-844C04324D75}" type="datetimeFigureOut">
               <a:rPr lang="zh-CN" altLang="en-US" smtClean="0"/>
+              <a:t>2026/1/20</a:t>
             </a:fld>
             <a:endParaRPr lang="zh-CN" altLang="en-US"/>
           </a:p>
@@ -2386,6 +2351,7 @@
           <a:p>
             <a:fld id="{565CE74E-AB26-4998-AD42-012C4C1AD076}" type="slidenum">
               <a:rPr lang="zh-CN" altLang="en-US" smtClean="0"/>
+              <a:t>‹#›</a:t>
             </a:fld>
             <a:endParaRPr lang="zh-CN" altLang="en-US"/>
           </a:p>
@@ -2450,7 +2416,6 @@
               <a:rPr lang="zh-CN" altLang="en-US"/>
               <a:t>单击此处编辑母版标题样式</a:t>
             </a:r>
-            <a:endParaRPr lang="zh-CN" altLang="en-US"/>
           </a:p>
         </p:txBody>
       </p:sp>
@@ -2484,7 +2449,6 @@
               <a:rPr lang="zh-CN" altLang="en-US"/>
               <a:t>单击此处编辑母版文本样式</a:t>
             </a:r>
-            <a:endParaRPr lang="zh-CN" altLang="en-US"/>
           </a:p>
           <a:p>
             <a:pPr lvl="1"/>
@@ -2492,7 +2456,6 @@
               <a:rPr lang="zh-CN" altLang="en-US"/>
               <a:t>第二级</a:t>
             </a:r>
-            <a:endParaRPr lang="zh-CN" altLang="en-US"/>
           </a:p>
           <a:p>
             <a:pPr lvl="2"/>
@@ -2500,7 +2463,6 @@
               <a:rPr lang="zh-CN" altLang="en-US"/>
               <a:t>第三级</a:t>
             </a:r>
-            <a:endParaRPr lang="zh-CN" altLang="en-US"/>
           </a:p>
           <a:p>
             <a:pPr lvl="3"/>
@@ -2508,7 +2470,6 @@
               <a:rPr lang="zh-CN" altLang="en-US"/>
               <a:t>第四级</a:t>
             </a:r>
-            <a:endParaRPr lang="zh-CN" altLang="en-US"/>
           </a:p>
           <a:p>
             <a:pPr lvl="4"/>
@@ -2516,7 +2477,6 @@
               <a:rPr lang="zh-CN" altLang="en-US"/>
               <a:t>第五级</a:t>
             </a:r>
-            <a:endParaRPr lang="zh-CN" altLang="en-US"/>
           </a:p>
         </p:txBody>
       </p:sp>
@@ -2555,6 +2515,7 @@
           <a:p>
             <a:fld id="{D997B5FA-0921-464F-AAE1-844C04324D75}" type="datetimeFigureOut">
               <a:rPr lang="zh-CN" altLang="en-US" smtClean="0"/>
+              <a:t>2026/1/20</a:t>
             </a:fld>
             <a:endParaRPr lang="zh-CN" altLang="en-US"/>
           </a:p>
@@ -2632,6 +2593,7 @@
           <a:p>
             <a:fld id="{565CE74E-AB26-4998-AD42-012C4C1AD076}" type="slidenum">
               <a:rPr lang="zh-CN" altLang="en-US" smtClean="0"/>
+              <a:t>‹#›</a:t>
             </a:fld>
             <a:endParaRPr lang="zh-CN" altLang="en-US"/>
           </a:p>
@@ -3101,13 +3063,13 @@
           <p:nvPr/>
         </p:nvPicPr>
         <p:blipFill>
-          <a:blip r:embed="rId1" cstate="print">
+          <a:blip r:embed="rId2" cstate="print">
             <a:extLst>
               <a:ext uri="{28A0092B-C50C-407E-A947-70E740481C1C}">
                 <a14:useLocalDpi xmlns:a14="http://schemas.microsoft.com/office/drawing/2010/main" val="0"/>
               </a:ext>
               <a:ext uri="{96DAC541-7B7A-43D3-8B79-37D633B846F1}">
-                <asvg:svgBlip xmlns:asvg="http://schemas.microsoft.com/office/drawing/2016/SVG/main" r:embed="rId2"/>
+                <asvg:svgBlip xmlns:asvg="http://schemas.microsoft.com/office/drawing/2016/SVG/main" r:embed="rId3"/>
               </a:ext>
             </a:extLst>
           </a:blip>
@@ -3134,13 +3096,13 @@
           <p:nvPr/>
         </p:nvPicPr>
         <p:blipFill>
-          <a:blip r:embed="rId3" cstate="print">
+          <a:blip r:embed="rId4" cstate="print">
             <a:extLst>
               <a:ext uri="{28A0092B-C50C-407E-A947-70E740481C1C}">
                 <a14:useLocalDpi xmlns:a14="http://schemas.microsoft.com/office/drawing/2010/main" val="0"/>
               </a:ext>
               <a:ext uri="{96DAC541-7B7A-43D3-8B79-37D633B846F1}">
-                <asvg:svgBlip xmlns:asvg="http://schemas.microsoft.com/office/drawing/2016/SVG/main" r:embed="rId4"/>
+                <asvg:svgBlip xmlns:asvg="http://schemas.microsoft.com/office/drawing/2016/SVG/main" r:embed="rId5"/>
               </a:ext>
             </a:extLst>
           </a:blip>
@@ -3167,13 +3129,13 @@
           <p:nvPr/>
         </p:nvPicPr>
         <p:blipFill>
-          <a:blip r:embed="rId5" cstate="print">
+          <a:blip r:embed="rId6" cstate="print">
             <a:extLst>
               <a:ext uri="{28A0092B-C50C-407E-A947-70E740481C1C}">
                 <a14:useLocalDpi xmlns:a14="http://schemas.microsoft.com/office/drawing/2010/main" val="0"/>
               </a:ext>
               <a:ext uri="{96DAC541-7B7A-43D3-8B79-37D633B846F1}">
-                <asvg:svgBlip xmlns:asvg="http://schemas.microsoft.com/office/drawing/2016/SVG/main" r:embed="rId6"/>
+                <asvg:svgBlip xmlns:asvg="http://schemas.microsoft.com/office/drawing/2016/SVG/main" r:embed="rId7"/>
               </a:ext>
             </a:extLst>
           </a:blip>
@@ -3200,13 +3162,13 @@
           <p:nvPr/>
         </p:nvPicPr>
         <p:blipFill>
-          <a:blip r:embed="rId7" cstate="print">
+          <a:blip r:embed="rId8" cstate="print">
             <a:extLst>
               <a:ext uri="{28A0092B-C50C-407E-A947-70E740481C1C}">
                 <a14:useLocalDpi xmlns:a14="http://schemas.microsoft.com/office/drawing/2010/main" val="0"/>
               </a:ext>
               <a:ext uri="{96DAC541-7B7A-43D3-8B79-37D633B846F1}">
-                <asvg:svgBlip xmlns:asvg="http://schemas.microsoft.com/office/drawing/2016/SVG/main" r:embed="rId8"/>
+                <asvg:svgBlip xmlns:asvg="http://schemas.microsoft.com/office/drawing/2016/SVG/main" r:embed="rId9"/>
               </a:ext>
             </a:extLst>
           </a:blip>
@@ -3233,13 +3195,13 @@
           <p:nvPr/>
         </p:nvPicPr>
         <p:blipFill>
-          <a:blip r:embed="rId9" cstate="print">
+          <a:blip r:embed="rId10" cstate="print">
             <a:extLst>
               <a:ext uri="{28A0092B-C50C-407E-A947-70E740481C1C}">
                 <a14:useLocalDpi xmlns:a14="http://schemas.microsoft.com/office/drawing/2010/main" val="0"/>
               </a:ext>
               <a:ext uri="{96DAC541-7B7A-43D3-8B79-37D633B846F1}">
-                <asvg:svgBlip xmlns:asvg="http://schemas.microsoft.com/office/drawing/2016/SVG/main" r:embed="rId10"/>
+                <asvg:svgBlip xmlns:asvg="http://schemas.microsoft.com/office/drawing/2016/SVG/main" r:embed="rId11"/>
               </a:ext>
             </a:extLst>
           </a:blip>
@@ -3266,13 +3228,13 @@
           <p:nvPr/>
         </p:nvPicPr>
         <p:blipFill>
-          <a:blip r:embed="rId11" cstate="print">
+          <a:blip r:embed="rId12" cstate="print">
             <a:extLst>
               <a:ext uri="{28A0092B-C50C-407E-A947-70E740481C1C}">
                 <a14:useLocalDpi xmlns:a14="http://schemas.microsoft.com/office/drawing/2010/main" val="0"/>
               </a:ext>
               <a:ext uri="{96DAC541-7B7A-43D3-8B79-37D633B846F1}">
-                <asvg:svgBlip xmlns:asvg="http://schemas.microsoft.com/office/drawing/2016/SVG/main" r:embed="rId12"/>
+                <asvg:svgBlip xmlns:asvg="http://schemas.microsoft.com/office/drawing/2016/SVG/main" r:embed="rId13"/>
               </a:ext>
             </a:extLst>
           </a:blip>
@@ -3299,13 +3261,13 @@
           <p:nvPr/>
         </p:nvPicPr>
         <p:blipFill>
-          <a:blip r:embed="rId13" cstate="print">
+          <a:blip r:embed="rId14" cstate="print">
             <a:extLst>
               <a:ext uri="{28A0092B-C50C-407E-A947-70E740481C1C}">
                 <a14:useLocalDpi xmlns:a14="http://schemas.microsoft.com/office/drawing/2010/main" val="0"/>
               </a:ext>
               <a:ext uri="{96DAC541-7B7A-43D3-8B79-37D633B846F1}">
-                <asvg:svgBlip xmlns:asvg="http://schemas.microsoft.com/office/drawing/2016/SVG/main" r:embed="rId14"/>
+                <asvg:svgBlip xmlns:asvg="http://schemas.microsoft.com/office/drawing/2016/SVG/main" r:embed="rId15"/>
               </a:ext>
             </a:extLst>
           </a:blip>
@@ -3332,13 +3294,13 @@
           <p:nvPr/>
         </p:nvPicPr>
         <p:blipFill>
-          <a:blip r:embed="rId15" cstate="print">
+          <a:blip r:embed="rId16" cstate="print">
             <a:extLst>
               <a:ext uri="{28A0092B-C50C-407E-A947-70E740481C1C}">
                 <a14:useLocalDpi xmlns:a14="http://schemas.microsoft.com/office/drawing/2010/main" val="0"/>
               </a:ext>
               <a:ext uri="{96DAC541-7B7A-43D3-8B79-37D633B846F1}">
-                <asvg:svgBlip xmlns:asvg="http://schemas.microsoft.com/office/drawing/2016/SVG/main" r:embed="rId16"/>
+                <asvg:svgBlip xmlns:asvg="http://schemas.microsoft.com/office/drawing/2016/SVG/main" r:embed="rId17"/>
               </a:ext>
             </a:extLst>
           </a:blip>
@@ -3365,13 +3327,13 @@
           <p:nvPr/>
         </p:nvPicPr>
         <p:blipFill>
-          <a:blip r:embed="rId17" cstate="print">
+          <a:blip r:embed="rId18" cstate="print">
             <a:extLst>
               <a:ext uri="{28A0092B-C50C-407E-A947-70E740481C1C}">
                 <a14:useLocalDpi xmlns:a14="http://schemas.microsoft.com/office/drawing/2010/main" val="0"/>
               </a:ext>
               <a:ext uri="{96DAC541-7B7A-43D3-8B79-37D633B846F1}">
-                <asvg:svgBlip xmlns:asvg="http://schemas.microsoft.com/office/drawing/2016/SVG/main" r:embed="rId18"/>
+                <asvg:svgBlip xmlns:asvg="http://schemas.microsoft.com/office/drawing/2016/SVG/main" r:embed="rId19"/>
               </a:ext>
             </a:extLst>
           </a:blip>
@@ -3398,13 +3360,13 @@
           <p:nvPr/>
         </p:nvPicPr>
         <p:blipFill>
-          <a:blip r:embed="rId19" cstate="print">
+          <a:blip r:embed="rId20" cstate="print">
             <a:extLst>
               <a:ext uri="{28A0092B-C50C-407E-A947-70E740481C1C}">
                 <a14:useLocalDpi xmlns:a14="http://schemas.microsoft.com/office/drawing/2010/main" val="0"/>
               </a:ext>
               <a:ext uri="{96DAC541-7B7A-43D3-8B79-37D633B846F1}">
-                <asvg:svgBlip xmlns:asvg="http://schemas.microsoft.com/office/drawing/2016/SVG/main" r:embed="rId20"/>
+                <asvg:svgBlip xmlns:asvg="http://schemas.microsoft.com/office/drawing/2016/SVG/main" r:embed="rId21"/>
               </a:ext>
             </a:extLst>
           </a:blip>
@@ -3431,13 +3393,13 @@
           <p:nvPr/>
         </p:nvPicPr>
         <p:blipFill>
-          <a:blip r:embed="rId21" cstate="print">
+          <a:blip r:embed="rId22" cstate="print">
             <a:extLst>
               <a:ext uri="{28A0092B-C50C-407E-A947-70E740481C1C}">
                 <a14:useLocalDpi xmlns:a14="http://schemas.microsoft.com/office/drawing/2010/main" val="0"/>
               </a:ext>
               <a:ext uri="{96DAC541-7B7A-43D3-8B79-37D633B846F1}">
-                <asvg:svgBlip xmlns:asvg="http://schemas.microsoft.com/office/drawing/2016/SVG/main" r:embed="rId22"/>
+                <asvg:svgBlip xmlns:asvg="http://schemas.microsoft.com/office/drawing/2016/SVG/main" r:embed="rId23"/>
               </a:ext>
             </a:extLst>
           </a:blip>
@@ -3464,13 +3426,13 @@
           <p:nvPr/>
         </p:nvPicPr>
         <p:blipFill>
-          <a:blip r:embed="rId23" cstate="print">
+          <a:blip r:embed="rId24" cstate="print">
             <a:extLst>
               <a:ext uri="{28A0092B-C50C-407E-A947-70E740481C1C}">
                 <a14:useLocalDpi xmlns:a14="http://schemas.microsoft.com/office/drawing/2010/main" val="0"/>
               </a:ext>
               <a:ext uri="{96DAC541-7B7A-43D3-8B79-37D633B846F1}">
-                <asvg:svgBlip xmlns:asvg="http://schemas.microsoft.com/office/drawing/2016/SVG/main" r:embed="rId24"/>
+                <asvg:svgBlip xmlns:asvg="http://schemas.microsoft.com/office/drawing/2016/SVG/main" r:embed="rId25"/>
               </a:ext>
             </a:extLst>
           </a:blip>
@@ -3497,13 +3459,13 @@
           <p:nvPr/>
         </p:nvPicPr>
         <p:blipFill>
-          <a:blip r:embed="rId25" cstate="print">
+          <a:blip r:embed="rId26" cstate="print">
             <a:extLst>
               <a:ext uri="{28A0092B-C50C-407E-A947-70E740481C1C}">
                 <a14:useLocalDpi xmlns:a14="http://schemas.microsoft.com/office/drawing/2010/main" val="0"/>
               </a:ext>
               <a:ext uri="{96DAC541-7B7A-43D3-8B79-37D633B846F1}">
-                <asvg:svgBlip xmlns:asvg="http://schemas.microsoft.com/office/drawing/2016/SVG/main" r:embed="rId26"/>
+                <asvg:svgBlip xmlns:asvg="http://schemas.microsoft.com/office/drawing/2016/SVG/main" r:embed="rId27"/>
               </a:ext>
             </a:extLst>
           </a:blip>
@@ -3530,13 +3492,13 @@
           <p:nvPr/>
         </p:nvPicPr>
         <p:blipFill>
-          <a:blip r:embed="rId27" cstate="print">
+          <a:blip r:embed="rId28" cstate="print">
             <a:extLst>
               <a:ext uri="{28A0092B-C50C-407E-A947-70E740481C1C}">
                 <a14:useLocalDpi xmlns:a14="http://schemas.microsoft.com/office/drawing/2010/main" val="0"/>
               </a:ext>
               <a:ext uri="{96DAC541-7B7A-43D3-8B79-37D633B846F1}">
-                <asvg:svgBlip xmlns:asvg="http://schemas.microsoft.com/office/drawing/2016/SVG/main" r:embed="rId28"/>
+                <asvg:svgBlip xmlns:asvg="http://schemas.microsoft.com/office/drawing/2016/SVG/main" r:embed="rId29"/>
               </a:ext>
             </a:extLst>
           </a:blip>
@@ -3563,13 +3525,13 @@
           <p:nvPr/>
         </p:nvPicPr>
         <p:blipFill>
-          <a:blip r:embed="rId29" cstate="print">
+          <a:blip r:embed="rId30" cstate="print">
             <a:extLst>
               <a:ext uri="{28A0092B-C50C-407E-A947-70E740481C1C}">
                 <a14:useLocalDpi xmlns:a14="http://schemas.microsoft.com/office/drawing/2010/main" val="0"/>
               </a:ext>
               <a:ext uri="{96DAC541-7B7A-43D3-8B79-37D633B846F1}">
-                <asvg:svgBlip xmlns:asvg="http://schemas.microsoft.com/office/drawing/2016/SVG/main" r:embed="rId30"/>
+                <asvg:svgBlip xmlns:asvg="http://schemas.microsoft.com/office/drawing/2016/SVG/main" r:embed="rId31"/>
               </a:ext>
             </a:extLst>
           </a:blip>
@@ -3877,13 +3839,13 @@
           <p:nvPr/>
         </p:nvPicPr>
         <p:blipFill>
-          <a:blip r:embed="rId31" cstate="print">
+          <a:blip r:embed="rId32" cstate="print">
             <a:extLst>
               <a:ext uri="{28A0092B-C50C-407E-A947-70E740481C1C}">
                 <a14:useLocalDpi xmlns:a14="http://schemas.microsoft.com/office/drawing/2010/main" val="0"/>
               </a:ext>
               <a:ext uri="{96DAC541-7B7A-43D3-8B79-37D633B846F1}">
-                <asvg:svgBlip xmlns:asvg="http://schemas.microsoft.com/office/drawing/2016/SVG/main" r:embed="rId32"/>
+                <asvg:svgBlip xmlns:asvg="http://schemas.microsoft.com/office/drawing/2016/SVG/main" r:embed="rId33"/>
               </a:ext>
             </a:extLst>
           </a:blip>
@@ -3910,13 +3872,13 @@
           <p:nvPr/>
         </p:nvPicPr>
         <p:blipFill>
-          <a:blip r:embed="rId33" cstate="print">
+          <a:blip r:embed="rId34" cstate="print">
             <a:extLst>
               <a:ext uri="{28A0092B-C50C-407E-A947-70E740481C1C}">
                 <a14:useLocalDpi xmlns:a14="http://schemas.microsoft.com/office/drawing/2010/main" val="0"/>
               </a:ext>
               <a:ext uri="{96DAC541-7B7A-43D3-8B79-37D633B846F1}">
-                <asvg:svgBlip xmlns:asvg="http://schemas.microsoft.com/office/drawing/2016/SVG/main" r:embed="rId34"/>
+                <asvg:svgBlip xmlns:asvg="http://schemas.microsoft.com/office/drawing/2016/SVG/main" r:embed="rId35"/>
               </a:ext>
             </a:extLst>
           </a:blip>
@@ -3943,10 +3905,10 @@
           <p:nvPr/>
         </p:nvPicPr>
         <p:blipFill>
-          <a:blip r:embed="rId35">
+          <a:blip r:embed="rId36">
             <a:extLst>
               <a:ext uri="{96DAC541-7B7A-43D3-8B79-37D633B846F1}">
-                <asvg:svgBlip xmlns:asvg="http://schemas.microsoft.com/office/drawing/2016/SVG/main" r:embed="rId36"/>
+                <asvg:svgBlip xmlns:asvg="http://schemas.microsoft.com/office/drawing/2016/SVG/main" r:embed="rId37"/>
               </a:ext>
             </a:extLst>
           </a:blip>
@@ -3973,13 +3935,13 @@
           <p:nvPr/>
         </p:nvPicPr>
         <p:blipFill>
-          <a:blip r:embed="rId37">
+          <a:blip r:embed="rId38">
             <a:extLst>
               <a:ext uri="{28A0092B-C50C-407E-A947-70E740481C1C}">
                 <a14:useLocalDpi xmlns:a14="http://schemas.microsoft.com/office/drawing/2010/main" val="0"/>
               </a:ext>
               <a:ext uri="{96DAC541-7B7A-43D3-8B79-37D633B846F1}">
-                <asvg:svgBlip xmlns:asvg="http://schemas.microsoft.com/office/drawing/2016/SVG/main" r:embed="rId38"/>
+                <asvg:svgBlip xmlns:asvg="http://schemas.microsoft.com/office/drawing/2016/SVG/main" r:embed="rId39"/>
               </a:ext>
             </a:extLst>
           </a:blip>
@@ -4031,13 +3993,13 @@
           <p:nvPr/>
         </p:nvPicPr>
         <p:blipFill>
-          <a:blip r:embed="rId1" cstate="print">
+          <a:blip r:embed="rId2" cstate="print">
             <a:extLst>
               <a:ext uri="{28A0092B-C50C-407E-A947-70E740481C1C}">
                 <a14:useLocalDpi xmlns:a14="http://schemas.microsoft.com/office/drawing/2010/main" val="0"/>
               </a:ext>
               <a:ext uri="{96DAC541-7B7A-43D3-8B79-37D633B846F1}">
-                <asvg:svgBlip xmlns:asvg="http://schemas.microsoft.com/office/drawing/2016/SVG/main" r:embed="rId2"/>
+                <asvg:svgBlip xmlns:asvg="http://schemas.microsoft.com/office/drawing/2016/SVG/main" r:embed="rId3"/>
               </a:ext>
             </a:extLst>
           </a:blip>
@@ -4064,13 +4026,13 @@
           <p:nvPr/>
         </p:nvPicPr>
         <p:blipFill>
-          <a:blip r:embed="rId3" cstate="print">
+          <a:blip r:embed="rId4" cstate="print">
             <a:extLst>
               <a:ext uri="{28A0092B-C50C-407E-A947-70E740481C1C}">
                 <a14:useLocalDpi xmlns:a14="http://schemas.microsoft.com/office/drawing/2010/main" val="0"/>
               </a:ext>
               <a:ext uri="{96DAC541-7B7A-43D3-8B79-37D633B846F1}">
-                <asvg:svgBlip xmlns:asvg="http://schemas.microsoft.com/office/drawing/2016/SVG/main" r:embed="rId4"/>
+                <asvg:svgBlip xmlns:asvg="http://schemas.microsoft.com/office/drawing/2016/SVG/main" r:embed="rId5"/>
               </a:ext>
             </a:extLst>
           </a:blip>
@@ -4144,13 +4106,13 @@
           <p:nvPr/>
         </p:nvPicPr>
         <p:blipFill>
-          <a:blip r:embed="rId5" cstate="print">
+          <a:blip r:embed="rId6" cstate="print">
             <a:extLst>
               <a:ext uri="{28A0092B-C50C-407E-A947-70E740481C1C}">
                 <a14:useLocalDpi xmlns:a14="http://schemas.microsoft.com/office/drawing/2010/main" val="0"/>
               </a:ext>
               <a:ext uri="{96DAC541-7B7A-43D3-8B79-37D633B846F1}">
-                <asvg:svgBlip xmlns:asvg="http://schemas.microsoft.com/office/drawing/2016/SVG/main" r:embed="rId6"/>
+                <asvg:svgBlip xmlns:asvg="http://schemas.microsoft.com/office/drawing/2016/SVG/main" r:embed="rId7"/>
               </a:ext>
             </a:extLst>
           </a:blip>
@@ -4177,13 +4139,13 @@
           <p:nvPr/>
         </p:nvPicPr>
         <p:blipFill>
-          <a:blip r:embed="rId7" cstate="print">
+          <a:blip r:embed="rId8" cstate="print">
             <a:extLst>
               <a:ext uri="{28A0092B-C50C-407E-A947-70E740481C1C}">
                 <a14:useLocalDpi xmlns:a14="http://schemas.microsoft.com/office/drawing/2010/main" val="0"/>
               </a:ext>
               <a:ext uri="{96DAC541-7B7A-43D3-8B79-37D633B846F1}">
-                <asvg:svgBlip xmlns:asvg="http://schemas.microsoft.com/office/drawing/2016/SVG/main" r:embed="rId8"/>
+                <asvg:svgBlip xmlns:asvg="http://schemas.microsoft.com/office/drawing/2016/SVG/main" r:embed="rId9"/>
               </a:ext>
             </a:extLst>
           </a:blip>
@@ -4210,13 +4172,13 @@
           <p:nvPr/>
         </p:nvPicPr>
         <p:blipFill>
-          <a:blip r:embed="rId9" cstate="print">
+          <a:blip r:embed="rId10" cstate="print">
             <a:extLst>
               <a:ext uri="{28A0092B-C50C-407E-A947-70E740481C1C}">
                 <a14:useLocalDpi xmlns:a14="http://schemas.microsoft.com/office/drawing/2010/main" val="0"/>
               </a:ext>
               <a:ext uri="{96DAC541-7B7A-43D3-8B79-37D633B846F1}">
-                <asvg:svgBlip xmlns:asvg="http://schemas.microsoft.com/office/drawing/2016/SVG/main" r:embed="rId10"/>
+                <asvg:svgBlip xmlns:asvg="http://schemas.microsoft.com/office/drawing/2016/SVG/main" r:embed="rId11"/>
               </a:ext>
             </a:extLst>
           </a:blip>
@@ -4243,13 +4205,13 @@
           <p:nvPr/>
         </p:nvPicPr>
         <p:blipFill>
-          <a:blip r:embed="rId11" cstate="print">
+          <a:blip r:embed="rId12" cstate="print">
             <a:extLst>
               <a:ext uri="{28A0092B-C50C-407E-A947-70E740481C1C}">
                 <a14:useLocalDpi xmlns:a14="http://schemas.microsoft.com/office/drawing/2010/main" val="0"/>
               </a:ext>
               <a:ext uri="{96DAC541-7B7A-43D3-8B79-37D633B846F1}">
-                <asvg:svgBlip xmlns:asvg="http://schemas.microsoft.com/office/drawing/2016/SVG/main" r:embed="rId12"/>
+                <asvg:svgBlip xmlns:asvg="http://schemas.microsoft.com/office/drawing/2016/SVG/main" r:embed="rId13"/>
               </a:ext>
             </a:extLst>
           </a:blip>
@@ -4276,13 +4238,13 @@
           <p:nvPr/>
         </p:nvPicPr>
         <p:blipFill>
-          <a:blip r:embed="rId9" cstate="print">
+          <a:blip r:embed="rId10" cstate="print">
             <a:extLst>
               <a:ext uri="{28A0092B-C50C-407E-A947-70E740481C1C}">
                 <a14:useLocalDpi xmlns:a14="http://schemas.microsoft.com/office/drawing/2010/main" val="0"/>
               </a:ext>
               <a:ext uri="{96DAC541-7B7A-43D3-8B79-37D633B846F1}">
-                <asvg:svgBlip xmlns:asvg="http://schemas.microsoft.com/office/drawing/2016/SVG/main" r:embed="rId10"/>
+                <asvg:svgBlip xmlns:asvg="http://schemas.microsoft.com/office/drawing/2016/SVG/main" r:embed="rId11"/>
               </a:ext>
             </a:extLst>
           </a:blip>
@@ -4309,13 +4271,13 @@
           <p:nvPr/>
         </p:nvPicPr>
         <p:blipFill>
-          <a:blip r:embed="rId13" cstate="print">
+          <a:blip r:embed="rId14" cstate="print">
             <a:extLst>
               <a:ext uri="{28A0092B-C50C-407E-A947-70E740481C1C}">
                 <a14:useLocalDpi xmlns:a14="http://schemas.microsoft.com/office/drawing/2010/main" val="0"/>
               </a:ext>
               <a:ext uri="{96DAC541-7B7A-43D3-8B79-37D633B846F1}">
-                <asvg:svgBlip xmlns:asvg="http://schemas.microsoft.com/office/drawing/2016/SVG/main" r:embed="rId14"/>
+                <asvg:svgBlip xmlns:asvg="http://schemas.microsoft.com/office/drawing/2016/SVG/main" r:embed="rId15"/>
               </a:ext>
             </a:extLst>
           </a:blip>
@@ -5009,6 +4971,7 @@
           <a:bodyPr wrap="square" rtlCol="0">
             <a:noAutofit/>
           </a:bodyPr>
+          <a:lstStyle/>
           <a:p>
             <a:pPr algn="ctr"/>
             <a:r>
@@ -5018,10 +4981,6 @@
               </a:rPr>
               <a:t>Merchant Frontend</a:t>
             </a:r>
-            <a:endParaRPr lang="en-US" altLang="zh-CN" sz="1600">
-              <a:latin typeface="Times New Roman" panose="02020603050405020304" charset="0"/>
-              <a:cs typeface="Times New Roman" panose="02020603050405020304" charset="0"/>
-            </a:endParaRPr>
           </a:p>
         </p:txBody>
       </p:sp>
@@ -5045,6 +5004,7 @@
           <a:bodyPr wrap="square" rtlCol="0">
             <a:spAutoFit/>
           </a:bodyPr>
+          <a:lstStyle/>
           <a:p>
             <a:pPr algn="ctr"/>
             <a:r>
@@ -5054,10 +5014,6 @@
               </a:rPr>
               <a:t>PS-App</a:t>
             </a:r>
-            <a:endParaRPr lang="en-US" altLang="zh-CN" sz="1600">
-              <a:latin typeface="Times New Roman" panose="02020603050405020304" charset="0"/>
-              <a:cs typeface="Times New Roman" panose="02020603050405020304" charset="0"/>
-            </a:endParaRPr>
           </a:p>
         </p:txBody>
       </p:sp>
@@ -5081,6 +5037,7 @@
           <a:bodyPr wrap="square" rtlCol="0">
             <a:spAutoFit/>
           </a:bodyPr>
+          <a:lstStyle/>
           <a:p>
             <a:pPr algn="ctr"/>
             <a:r>
@@ -5090,10 +5047,6 @@
               </a:rPr>
               <a:t>User</a:t>
             </a:r>
-            <a:endParaRPr lang="en-US" altLang="zh-CN" sz="1600">
-              <a:latin typeface="Times New Roman" panose="02020603050405020304" charset="0"/>
-              <a:cs typeface="Times New Roman" panose="02020603050405020304" charset="0"/>
-            </a:endParaRPr>
           </a:p>
         </p:txBody>
       </p:sp>
@@ -5117,6 +5070,7 @@
           <a:bodyPr wrap="square" rtlCol="0">
             <a:noAutofit/>
           </a:bodyPr>
+          <a:lstStyle/>
           <a:p>
             <a:pPr algn="ctr"/>
             <a:r>
@@ -5126,10 +5080,6 @@
               </a:rPr>
               <a:t> Device</a:t>
             </a:r>
-            <a:endParaRPr lang="en-US" altLang="zh-CN" sz="1600">
-              <a:latin typeface="Times New Roman" panose="02020603050405020304" charset="0"/>
-              <a:cs typeface="Times New Roman" panose="02020603050405020304" charset="0"/>
-            </a:endParaRPr>
           </a:p>
         </p:txBody>
       </p:sp>
@@ -5226,6 +5176,7 @@
           <a:bodyPr wrap="square" rtlCol="0">
             <a:noAutofit/>
           </a:bodyPr>
+          <a:lstStyle/>
           <a:p>
             <a:pPr algn="ctr"/>
             <a:r>
@@ -5235,10 +5186,6 @@
               </a:rPr>
               <a:t>Shop</a:t>
             </a:r>
-            <a:endParaRPr lang="en-US" altLang="zh-CN" sz="1600">
-              <a:latin typeface="Times New Roman" panose="02020603050405020304" charset="0"/>
-              <a:cs typeface="Times New Roman" panose="02020603050405020304" charset="0"/>
-            </a:endParaRPr>
           </a:p>
         </p:txBody>
       </p:sp>
@@ -5336,6 +5283,7 @@
           <a:bodyPr wrap="square" rtlCol="0">
             <a:noAutofit/>
           </a:bodyPr>
+          <a:lstStyle/>
           <a:p>
             <a:pPr algn="ctr"/>
             <a:r>
@@ -5343,19 +5291,8 @@
                 <a:latin typeface="Times New Roman" panose="02020603050405020304" charset="0"/>
                 <a:cs typeface="Times New Roman" panose="02020603050405020304" charset="0"/>
               </a:rPr>
-              <a:t>Merchant S</a:t>
+              <a:t>Merchant Server</a:t>
             </a:r>
-            <a:r>
-              <a:rPr lang="en-US" altLang="zh-CN" sz="1600">
-                <a:latin typeface="Times New Roman" panose="02020603050405020304" charset="0"/>
-                <a:cs typeface="Times New Roman" panose="02020603050405020304" charset="0"/>
-              </a:rPr>
-              <a:t>erver</a:t>
-            </a:r>
-            <a:endParaRPr lang="en-US" altLang="zh-CN" sz="1600">
-              <a:latin typeface="Times New Roman" panose="02020603050405020304" charset="0"/>
-              <a:cs typeface="Times New Roman" panose="02020603050405020304" charset="0"/>
-            </a:endParaRPr>
           </a:p>
         </p:txBody>
       </p:sp>
@@ -5455,6 +5392,7 @@
           <a:bodyPr wrap="square" rtlCol="0">
             <a:spAutoFit/>
           </a:bodyPr>
+          <a:lstStyle/>
           <a:p>
             <a:pPr algn="ctr"/>
             <a:r>
@@ -5462,19 +5400,8 @@
                 <a:latin typeface="Times New Roman" panose="02020603050405020304" charset="0"/>
                 <a:cs typeface="Times New Roman" panose="02020603050405020304" charset="0"/>
               </a:rPr>
-              <a:t>PS-S</a:t>
+              <a:t>PS-Server</a:t>
             </a:r>
-            <a:r>
-              <a:rPr lang="en-US" altLang="zh-CN" sz="1600">
-                <a:latin typeface="Times New Roman" panose="02020603050405020304" charset="0"/>
-                <a:cs typeface="Times New Roman" panose="02020603050405020304" charset="0"/>
-              </a:rPr>
-              <a:t>erver</a:t>
-            </a:r>
-            <a:endParaRPr lang="en-US" altLang="zh-CN" sz="1600">
-              <a:latin typeface="Times New Roman" panose="02020603050405020304" charset="0"/>
-              <a:cs typeface="Times New Roman" panose="02020603050405020304" charset="0"/>
-            </a:endParaRPr>
           </a:p>
         </p:txBody>
       </p:sp>
@@ -5571,6 +5498,7 @@
           <a:bodyPr wrap="square" rtlCol="0">
             <a:spAutoFit/>
           </a:bodyPr>
+          <a:lstStyle/>
           <a:p>
             <a:pPr algn="ctr"/>
             <a:r>
@@ -5580,10 +5508,6 @@
               </a:rPr>
               <a:t>Funds transfer</a:t>
             </a:r>
-            <a:endParaRPr lang="en-US" altLang="zh-CN" sz="1600">
-              <a:latin typeface="Times New Roman" panose="02020603050405020304" charset="0"/>
-              <a:cs typeface="Times New Roman" panose="02020603050405020304" charset="0"/>
-            </a:endParaRPr>
           </a:p>
         </p:txBody>
       </p:sp>
@@ -5657,6 +5581,7 @@
           <a:bodyPr wrap="square" rtlCol="0">
             <a:noAutofit/>
           </a:bodyPr>
+          <a:lstStyle/>
           <a:p>
             <a:pPr algn="ctr"/>
             <a:r>
@@ -5666,10 +5591,6 @@
               </a:rPr>
               <a:t>SDK</a:t>
             </a:r>
-            <a:endParaRPr lang="en-US" altLang="zh-CN" sz="1600">
-              <a:latin typeface="Times New Roman" panose="02020603050405020304" charset="0"/>
-              <a:cs typeface="Times New Roman" panose="02020603050405020304" charset="0"/>
-            </a:endParaRPr>
           </a:p>
         </p:txBody>
       </p:sp>
@@ -5720,13 +5641,13 @@
           <p:nvPr/>
         </p:nvPicPr>
         <p:blipFill>
-          <a:blip r:embed="rId1" cstate="print">
+          <a:blip r:embed="rId2" cstate="print">
             <a:extLst>
               <a:ext uri="{28A0092B-C50C-407E-A947-70E740481C1C}">
                 <a14:useLocalDpi xmlns:a14="http://schemas.microsoft.com/office/drawing/2010/main" val="0"/>
               </a:ext>
               <a:ext uri="{96DAC541-7B7A-43D3-8B79-37D633B846F1}">
-                <asvg:svgBlip xmlns:asvg="http://schemas.microsoft.com/office/drawing/2016/SVG/main" r:embed="rId2"/>
+                <asvg:svgBlip xmlns:asvg="http://schemas.microsoft.com/office/drawing/2016/SVG/main" r:embed="rId3"/>
               </a:ext>
             </a:extLst>
           </a:blip>
@@ -5753,13 +5674,13 @@
           <p:nvPr/>
         </p:nvPicPr>
         <p:blipFill>
-          <a:blip r:embed="rId3" cstate="print">
+          <a:blip r:embed="rId4" cstate="print">
             <a:extLst>
               <a:ext uri="{28A0092B-C50C-407E-A947-70E740481C1C}">
                 <a14:useLocalDpi xmlns:a14="http://schemas.microsoft.com/office/drawing/2010/main" val="0"/>
               </a:ext>
               <a:ext uri="{96DAC541-7B7A-43D3-8B79-37D633B846F1}">
-                <asvg:svgBlip xmlns:asvg="http://schemas.microsoft.com/office/drawing/2016/SVG/main" r:embed="rId4"/>
+                <asvg:svgBlip xmlns:asvg="http://schemas.microsoft.com/office/drawing/2016/SVG/main" r:embed="rId5"/>
               </a:ext>
             </a:extLst>
           </a:blip>
@@ -5990,13 +5911,13 @@
           <p:nvPr/>
         </p:nvPicPr>
         <p:blipFill>
-          <a:blip r:embed="rId5" cstate="print">
+          <a:blip r:embed="rId6" cstate="print">
             <a:extLst>
               <a:ext uri="{28A0092B-C50C-407E-A947-70E740481C1C}">
                 <a14:useLocalDpi xmlns:a14="http://schemas.microsoft.com/office/drawing/2010/main" val="0"/>
               </a:ext>
               <a:ext uri="{96DAC541-7B7A-43D3-8B79-37D633B846F1}">
-                <asvg:svgBlip xmlns:asvg="http://schemas.microsoft.com/office/drawing/2016/SVG/main" r:embed="rId6"/>
+                <asvg:svgBlip xmlns:asvg="http://schemas.microsoft.com/office/drawing/2016/SVG/main" r:embed="rId7"/>
               </a:ext>
             </a:extLst>
           </a:blip>
@@ -6023,13 +5944,13 @@
           <p:nvPr/>
         </p:nvPicPr>
         <p:blipFill>
-          <a:blip r:embed="rId7" cstate="print">
+          <a:blip r:embed="rId8" cstate="print">
             <a:extLst>
               <a:ext uri="{28A0092B-C50C-407E-A947-70E740481C1C}">
                 <a14:useLocalDpi xmlns:a14="http://schemas.microsoft.com/office/drawing/2010/main" val="0"/>
               </a:ext>
               <a:ext uri="{96DAC541-7B7A-43D3-8B79-37D633B846F1}">
-                <asvg:svgBlip xmlns:asvg="http://schemas.microsoft.com/office/drawing/2016/SVG/main" r:embed="rId8"/>
+                <asvg:svgBlip xmlns:asvg="http://schemas.microsoft.com/office/drawing/2016/SVG/main" r:embed="rId9"/>
               </a:ext>
             </a:extLst>
           </a:blip>
@@ -6056,13 +5977,13 @@
           <p:nvPr/>
         </p:nvPicPr>
         <p:blipFill>
-          <a:blip r:embed="rId9" cstate="print">
+          <a:blip r:embed="rId10" cstate="print">
             <a:extLst>
               <a:ext uri="{28A0092B-C50C-407E-A947-70E740481C1C}">
                 <a14:useLocalDpi xmlns:a14="http://schemas.microsoft.com/office/drawing/2010/main" val="0"/>
               </a:ext>
               <a:ext uri="{96DAC541-7B7A-43D3-8B79-37D633B846F1}">
-                <asvg:svgBlip xmlns:asvg="http://schemas.microsoft.com/office/drawing/2016/SVG/main" r:embed="rId10"/>
+                <asvg:svgBlip xmlns:asvg="http://schemas.microsoft.com/office/drawing/2016/SVG/main" r:embed="rId11"/>
               </a:ext>
             </a:extLst>
           </a:blip>
@@ -6089,13 +6010,13 @@
           <p:nvPr/>
         </p:nvPicPr>
         <p:blipFill>
-          <a:blip r:embed="rId11" cstate="print">
+          <a:blip r:embed="rId12" cstate="print">
             <a:extLst>
               <a:ext uri="{28A0092B-C50C-407E-A947-70E740481C1C}">
                 <a14:useLocalDpi xmlns:a14="http://schemas.microsoft.com/office/drawing/2010/main" val="0"/>
               </a:ext>
               <a:ext uri="{96DAC541-7B7A-43D3-8B79-37D633B846F1}">
-                <asvg:svgBlip xmlns:asvg="http://schemas.microsoft.com/office/drawing/2016/SVG/main" r:embed="rId12"/>
+                <asvg:svgBlip xmlns:asvg="http://schemas.microsoft.com/office/drawing/2016/SVG/main" r:embed="rId13"/>
               </a:ext>
             </a:extLst>
           </a:blip>
@@ -6122,13 +6043,13 @@
           <p:nvPr/>
         </p:nvPicPr>
         <p:blipFill>
-          <a:blip r:embed="rId11" cstate="print">
+          <a:blip r:embed="rId12" cstate="print">
             <a:extLst>
               <a:ext uri="{28A0092B-C50C-407E-A947-70E740481C1C}">
                 <a14:useLocalDpi xmlns:a14="http://schemas.microsoft.com/office/drawing/2010/main" val="0"/>
               </a:ext>
               <a:ext uri="{96DAC541-7B7A-43D3-8B79-37D633B846F1}">
-                <asvg:svgBlip xmlns:asvg="http://schemas.microsoft.com/office/drawing/2016/SVG/main" r:embed="rId13"/>
+                <asvg:svgBlip xmlns:asvg="http://schemas.microsoft.com/office/drawing/2016/SVG/main" r:embed="rId14"/>
               </a:ext>
             </a:extLst>
           </a:blip>
@@ -6155,10 +6076,10 @@
           <p:nvPr/>
         </p:nvPicPr>
         <p:blipFill>
-          <a:blip r:embed="rId14">
+          <a:blip r:embed="rId15">
             <a:extLst>
               <a:ext uri="{96DAC541-7B7A-43D3-8B79-37D633B846F1}">
-                <asvg:svgBlip xmlns:asvg="http://schemas.microsoft.com/office/drawing/2016/SVG/main" r:embed="rId15"/>
+                <asvg:svgBlip xmlns:asvg="http://schemas.microsoft.com/office/drawing/2016/SVG/main" r:embed="rId16"/>
               </a:ext>
             </a:extLst>
           </a:blip>
@@ -6185,10 +6106,10 @@
           <p:nvPr/>
         </p:nvPicPr>
         <p:blipFill>
-          <a:blip r:embed="rId16">
+          <a:blip r:embed="rId17">
             <a:extLst>
               <a:ext uri="{96DAC541-7B7A-43D3-8B79-37D633B846F1}">
-                <asvg:svgBlip xmlns:asvg="http://schemas.microsoft.com/office/drawing/2016/SVG/main" r:embed="rId17"/>
+                <asvg:svgBlip xmlns:asvg="http://schemas.microsoft.com/office/drawing/2016/SVG/main" r:embed="rId18"/>
               </a:ext>
             </a:extLst>
           </a:blip>
@@ -6215,10 +6136,10 @@
           <p:nvPr/>
         </p:nvPicPr>
         <p:blipFill>
-          <a:blip r:embed="rId18">
+          <a:blip r:embed="rId19">
             <a:extLst>
               <a:ext uri="{96DAC541-7B7A-43D3-8B79-37D633B846F1}">
-                <asvg:svgBlip xmlns:asvg="http://schemas.microsoft.com/office/drawing/2016/SVG/main" r:embed="rId19"/>
+                <asvg:svgBlip xmlns:asvg="http://schemas.microsoft.com/office/drawing/2016/SVG/main" r:embed="rId20"/>
               </a:ext>
             </a:extLst>
           </a:blip>
@@ -6265,6 +6186,7 @@
           <a:bodyPr wrap="square" rtlCol="0">
             <a:noAutofit/>
           </a:bodyPr>
+          <a:lstStyle/>
           <a:p>
             <a:pPr algn="ctr"/>
             <a:r>
@@ -6274,10 +6196,6 @@
               </a:rPr>
               <a:t>Password</a:t>
             </a:r>
-            <a:endParaRPr lang="en-US" altLang="zh-CN" sz="1600">
-              <a:latin typeface="Times New Roman" panose="02020603050405020304" charset="0"/>
-              <a:cs typeface="Times New Roman" panose="02020603050405020304" charset="0"/>
-            </a:endParaRPr>
           </a:p>
         </p:txBody>
       </p:sp>
@@ -6290,10 +6208,10 @@
           <p:nvPr/>
         </p:nvPicPr>
         <p:blipFill>
-          <a:blip r:embed="rId20">
+          <a:blip r:embed="rId21">
             <a:extLst>
               <a:ext uri="{96DAC541-7B7A-43D3-8B79-37D633B846F1}">
-                <asvg:svgBlip xmlns:asvg="http://schemas.microsoft.com/office/drawing/2016/SVG/main" r:embed="rId21"/>
+                <asvg:svgBlip xmlns:asvg="http://schemas.microsoft.com/office/drawing/2016/SVG/main" r:embed="rId22"/>
               </a:ext>
             </a:extLst>
           </a:blip>
@@ -6320,10 +6238,10 @@
           <p:nvPr/>
         </p:nvPicPr>
         <p:blipFill>
-          <a:blip r:embed="rId22">
+          <a:blip r:embed="rId23">
             <a:extLst>
               <a:ext uri="{96DAC541-7B7A-43D3-8B79-37D633B846F1}">
-                <asvg:svgBlip xmlns:asvg="http://schemas.microsoft.com/office/drawing/2016/SVG/main" r:embed="rId23"/>
+                <asvg:svgBlip xmlns:asvg="http://schemas.microsoft.com/office/drawing/2016/SVG/main" r:embed="rId24"/>
               </a:ext>
             </a:extLst>
           </a:blip>
@@ -6350,10 +6268,10 @@
           <p:nvPr/>
         </p:nvPicPr>
         <p:blipFill>
-          <a:blip r:embed="rId24">
+          <a:blip r:embed="rId25">
             <a:extLst>
               <a:ext uri="{96DAC541-7B7A-43D3-8B79-37D633B846F1}">
-                <asvg:svgBlip xmlns:asvg="http://schemas.microsoft.com/office/drawing/2016/SVG/main" r:embed="rId25"/>
+                <asvg:svgBlip xmlns:asvg="http://schemas.microsoft.com/office/drawing/2016/SVG/main" r:embed="rId26"/>
               </a:ext>
             </a:extLst>
           </a:blip>
@@ -6380,10 +6298,10 @@
           <p:nvPr/>
         </p:nvPicPr>
         <p:blipFill>
-          <a:blip r:embed="rId26">
+          <a:blip r:embed="rId27">
             <a:extLst>
               <a:ext uri="{96DAC541-7B7A-43D3-8B79-37D633B846F1}">
-                <asvg:svgBlip xmlns:asvg="http://schemas.microsoft.com/office/drawing/2016/SVG/main" r:embed="rId27"/>
+                <asvg:svgBlip xmlns:asvg="http://schemas.microsoft.com/office/drawing/2016/SVG/main" r:embed="rId28"/>
               </a:ext>
             </a:extLst>
           </a:blip>
@@ -6410,10 +6328,10 @@
           <p:nvPr/>
         </p:nvPicPr>
         <p:blipFill>
-          <a:blip r:embed="rId28">
+          <a:blip r:embed="rId29">
             <a:extLst>
               <a:ext uri="{96DAC541-7B7A-43D3-8B79-37D633B846F1}">
-                <asvg:svgBlip xmlns:asvg="http://schemas.microsoft.com/office/drawing/2016/SVG/main" r:embed="rId29"/>
+                <asvg:svgBlip xmlns:asvg="http://schemas.microsoft.com/office/drawing/2016/SVG/main" r:embed="rId30"/>
               </a:ext>
             </a:extLst>
           </a:blip>
@@ -6485,7 +6403,14 @@
         <p:cNvGrpSpPr/>
         <p:nvPr/>
       </p:nvGrpSpPr>
-      <p:grpSpPr/>
+      <p:grpSpPr>
+        <a:xfrm>
+          <a:off x="0" y="0"/>
+          <a:ext cx="0" cy="0"/>
+          <a:chOff x="0" y="0"/>
+          <a:chExt cx="0" cy="0"/>
+        </a:xfrm>
+      </p:grpSpPr>
       <p:sp>
         <p:nvSpPr>
           <p:cNvPr id="20" name="任意多边形 19"/>
@@ -6565,6 +6490,7 @@
         </p:style>
         <p:txBody>
           <a:bodyPr rtlCol="0" anchor="ctr"/>
+          <a:lstStyle/>
           <a:p>
             <a:pPr algn="ctr"/>
             <a:endParaRPr lang="zh-CN" altLang="en-US">
@@ -6574,222 +6500,6 @@
           </a:p>
         </p:txBody>
       </p:sp>
-      <p:grpSp>
-        <p:nvGrpSpPr>
-          <p:cNvPr id="63" name="组合 62"/>
-          <p:cNvGrpSpPr>
-            <a:grpSpLocks noChangeAspect="1"/>
-          </p:cNvGrpSpPr>
-          <p:nvPr/>
-        </p:nvGrpSpPr>
-        <p:grpSpPr>
-          <a:xfrm>
-            <a:off x="2790190" y="1517015"/>
-            <a:ext cx="475615" cy="470535"/>
-            <a:chOff x="4445000" y="739632"/>
-            <a:chExt cx="375710" cy="371203"/>
-          </a:xfrm>
-          <a:solidFill>
-            <a:srgbClr val="4A5F7E"/>
-          </a:solidFill>
-        </p:grpSpPr>
-        <p:sp>
-          <p:nvSpPr>
-            <p:cNvPr id="64" name="矩形: 圆角 63"/>
-            <p:cNvSpPr/>
-            <p:nvPr/>
-          </p:nvSpPr>
-          <p:spPr>
-            <a:xfrm>
-              <a:off x="4445000" y="740833"/>
-              <a:ext cx="156634" cy="156634"/>
-            </a:xfrm>
-            <a:prstGeom prst="roundRect">
-              <a:avLst/>
-            </a:prstGeom>
-            <a:grpFill/>
-            <a:ln w="38100">
-              <a:solidFill>
-                <a:srgbClr val="4A5F7E"/>
-              </a:solidFill>
-            </a:ln>
-          </p:spPr>
-          <p:style>
-            <a:lnRef idx="2">
-              <a:schemeClr val="accent1">
-                <a:shade val="50000"/>
-              </a:schemeClr>
-            </a:lnRef>
-            <a:fillRef idx="1">
-              <a:schemeClr val="accent1"/>
-            </a:fillRef>
-            <a:effectRef idx="0">
-              <a:schemeClr val="accent1"/>
-            </a:effectRef>
-            <a:fontRef idx="minor">
-              <a:schemeClr val="lt1"/>
-            </a:fontRef>
-          </p:style>
-          <p:txBody>
-            <a:bodyPr rtlCol="0" anchor="ctr"/>
-            <a:lstStyle/>
-            <a:p>
-              <a:pPr algn="ctr"/>
-              <a:endParaRPr lang="zh-CN" altLang="en-US" sz="1600">
-                <a:latin typeface="Times New Roman" panose="02020603050405020304" charset="0"/>
-                <a:cs typeface="Times New Roman" panose="02020603050405020304" charset="0"/>
-              </a:endParaRPr>
-            </a:p>
-          </p:txBody>
-        </p:sp>
-        <p:sp>
-          <p:nvSpPr>
-            <p:cNvPr id="65" name="矩形: 圆角 64"/>
-            <p:cNvSpPr/>
-            <p:nvPr/>
-          </p:nvSpPr>
-          <p:spPr>
-            <a:xfrm>
-              <a:off x="4445000" y="954201"/>
-              <a:ext cx="156634" cy="156634"/>
-            </a:xfrm>
-            <a:prstGeom prst="roundRect">
-              <a:avLst/>
-            </a:prstGeom>
-            <a:grpFill/>
-            <a:ln w="38100">
-              <a:solidFill>
-                <a:srgbClr val="4A5F7E"/>
-              </a:solidFill>
-            </a:ln>
-          </p:spPr>
-          <p:style>
-            <a:lnRef idx="2">
-              <a:schemeClr val="accent1">
-                <a:shade val="50000"/>
-              </a:schemeClr>
-            </a:lnRef>
-            <a:fillRef idx="1">
-              <a:schemeClr val="accent1"/>
-            </a:fillRef>
-            <a:effectRef idx="0">
-              <a:schemeClr val="accent1"/>
-            </a:effectRef>
-            <a:fontRef idx="minor">
-              <a:schemeClr val="lt1"/>
-            </a:fontRef>
-          </p:style>
-          <p:txBody>
-            <a:bodyPr rtlCol="0" anchor="ctr"/>
-            <a:lstStyle/>
-            <a:p>
-              <a:pPr algn="ctr"/>
-              <a:endParaRPr lang="zh-CN" altLang="en-US" sz="1600">
-                <a:latin typeface="Times New Roman" panose="02020603050405020304" charset="0"/>
-                <a:cs typeface="Times New Roman" panose="02020603050405020304" charset="0"/>
-              </a:endParaRPr>
-            </a:p>
-          </p:txBody>
-        </p:sp>
-        <p:sp>
-          <p:nvSpPr>
-            <p:cNvPr id="66" name="矩形: 圆角 65"/>
-            <p:cNvSpPr/>
-            <p:nvPr/>
-          </p:nvSpPr>
-          <p:spPr>
-            <a:xfrm rot="1800000">
-              <a:off x="4672028" y="739632"/>
-              <a:ext cx="145198" cy="138592"/>
-            </a:xfrm>
-            <a:prstGeom prst="roundRect">
-              <a:avLst/>
-            </a:prstGeom>
-            <a:grpFill/>
-            <a:ln w="57150">
-              <a:solidFill>
-                <a:srgbClr val="4A5F7E"/>
-              </a:solidFill>
-            </a:ln>
-          </p:spPr>
-          <p:style>
-            <a:lnRef idx="2">
-              <a:schemeClr val="accent1">
-                <a:shade val="50000"/>
-              </a:schemeClr>
-            </a:lnRef>
-            <a:fillRef idx="1">
-              <a:schemeClr val="accent1"/>
-            </a:fillRef>
-            <a:effectRef idx="0">
-              <a:schemeClr val="accent1"/>
-            </a:effectRef>
-            <a:fontRef idx="minor">
-              <a:schemeClr val="lt1"/>
-            </a:fontRef>
-          </p:style>
-          <p:txBody>
-            <a:bodyPr rtlCol="0" anchor="ctr"/>
-            <a:lstStyle/>
-            <a:p>
-              <a:pPr algn="ctr"/>
-              <a:endParaRPr lang="zh-CN" altLang="en-US" sz="1600">
-                <a:latin typeface="Times New Roman" panose="02020603050405020304" charset="0"/>
-                <a:cs typeface="Times New Roman" panose="02020603050405020304" charset="0"/>
-              </a:endParaRPr>
-            </a:p>
-          </p:txBody>
-        </p:sp>
-        <p:sp>
-          <p:nvSpPr>
-            <p:cNvPr id="67" name="矩形: 圆角 66"/>
-            <p:cNvSpPr/>
-            <p:nvPr/>
-          </p:nvSpPr>
-          <p:spPr>
-            <a:xfrm>
-              <a:off x="4664075" y="954201"/>
-              <a:ext cx="156635" cy="156634"/>
-            </a:xfrm>
-            <a:prstGeom prst="roundRect">
-              <a:avLst/>
-            </a:prstGeom>
-            <a:grpFill/>
-            <a:ln w="38100">
-              <a:solidFill>
-                <a:srgbClr val="4A5F7E"/>
-              </a:solidFill>
-            </a:ln>
-          </p:spPr>
-          <p:style>
-            <a:lnRef idx="2">
-              <a:schemeClr val="accent1">
-                <a:shade val="50000"/>
-              </a:schemeClr>
-            </a:lnRef>
-            <a:fillRef idx="1">
-              <a:schemeClr val="accent1"/>
-            </a:fillRef>
-            <a:effectRef idx="0">
-              <a:schemeClr val="accent1"/>
-            </a:effectRef>
-            <a:fontRef idx="minor">
-              <a:schemeClr val="lt1"/>
-            </a:fontRef>
-          </p:style>
-          <p:txBody>
-            <a:bodyPr rtlCol="0" anchor="ctr"/>
-            <a:lstStyle/>
-            <a:p>
-              <a:pPr algn="ctr"/>
-              <a:endParaRPr lang="zh-CN" altLang="en-US" sz="1600">
-                <a:latin typeface="Times New Roman" panose="02020603050405020304" charset="0"/>
-                <a:cs typeface="Times New Roman" panose="02020603050405020304" charset="0"/>
-              </a:endParaRPr>
-            </a:p>
-          </p:txBody>
-        </p:sp>
-      </p:grpSp>
       <p:sp>
         <p:nvSpPr>
           <p:cNvPr id="17" name="文本框 16"/>
@@ -6810,6 +6520,7 @@
           <a:bodyPr wrap="square" rtlCol="0">
             <a:noAutofit/>
           </a:bodyPr>
+          <a:lstStyle/>
           <a:p>
             <a:pPr algn="ctr"/>
             <a:r>
@@ -6819,10 +6530,6 @@
               </a:rPr>
               <a:t>Merchant Application</a:t>
             </a:r>
-            <a:endParaRPr lang="en-US" altLang="zh-CN" sz="1200">
-              <a:latin typeface="Times New Roman" panose="02020603050405020304" charset="0"/>
-              <a:cs typeface="Times New Roman" panose="02020603050405020304" charset="0"/>
-            </a:endParaRPr>
           </a:p>
         </p:txBody>
       </p:sp>
@@ -6835,13 +6542,13 @@
           <p:nvPr/>
         </p:nvPicPr>
         <p:blipFill>
-          <a:blip r:embed="rId1" cstate="print">
+          <a:blip r:embed="rId2" cstate="print">
             <a:extLst>
               <a:ext uri="{28A0092B-C50C-407E-A947-70E740481C1C}">
                 <a14:useLocalDpi xmlns:a14="http://schemas.microsoft.com/office/drawing/2010/main" val="0"/>
               </a:ext>
               <a:ext uri="{96DAC541-7B7A-43D3-8B79-37D633B846F1}">
-                <asvg:svgBlip xmlns:asvg="http://schemas.microsoft.com/office/drawing/2016/SVG/main" r:embed="rId2"/>
+                <asvg:svgBlip xmlns:asvg="http://schemas.microsoft.com/office/drawing/2016/SVG/main" r:embed="rId3"/>
               </a:ext>
             </a:extLst>
           </a:blip>
@@ -6879,6 +6586,7 @@
           <a:bodyPr wrap="square" rtlCol="0">
             <a:noAutofit/>
           </a:bodyPr>
+          <a:lstStyle/>
           <a:p>
             <a:pPr algn="ctr"/>
             <a:r>
@@ -6888,10 +6596,6 @@
               </a:rPr>
               <a:t>Payment Application</a:t>
             </a:r>
-            <a:endParaRPr lang="en-US" altLang="zh-CN" sz="1200">
-              <a:latin typeface="Times New Roman" panose="02020603050405020304" charset="0"/>
-              <a:cs typeface="Times New Roman" panose="02020603050405020304" charset="0"/>
-            </a:endParaRPr>
           </a:p>
         </p:txBody>
       </p:sp>
@@ -6936,6 +6640,7 @@
         </p:style>
         <p:txBody>
           <a:bodyPr rtlCol="0" anchor="ctr"/>
+          <a:lstStyle/>
           <a:p>
             <a:pPr algn="ctr"/>
             <a:endParaRPr lang="zh-CN" altLang="en-US">
@@ -6990,6 +6695,7 @@
         </p:style>
         <p:txBody>
           <a:bodyPr rtlCol="0" anchor="ctr"/>
+          <a:lstStyle/>
           <a:p>
             <a:pPr algn="ctr"/>
             <a:endParaRPr lang="zh-CN" altLang="en-US">
@@ -6999,39 +6705,6 @@
           </a:p>
         </p:txBody>
       </p:sp>
-      <p:pic>
-        <p:nvPicPr>
-          <p:cNvPr id="9" name="图形 63"/>
-          <p:cNvPicPr>
-            <a:picLocks noChangeAspect="1"/>
-          </p:cNvPicPr>
-          <p:nvPr/>
-        </p:nvPicPr>
-        <p:blipFill>
-          <a:blip r:embed="rId3" cstate="print">
-            <a:extLst>
-              <a:ext uri="{28A0092B-C50C-407E-A947-70E740481C1C}">
-                <a14:useLocalDpi xmlns:a14="http://schemas.microsoft.com/office/drawing/2010/main" val="0"/>
-              </a:ext>
-              <a:ext uri="{96DAC541-7B7A-43D3-8B79-37D633B846F1}">
-                <asvg:svgBlip xmlns:asvg="http://schemas.microsoft.com/office/drawing/2016/SVG/main" r:embed="rId4"/>
-              </a:ext>
-            </a:extLst>
-          </a:blip>
-          <a:stretch>
-            <a:fillRect/>
-          </a:stretch>
-        </p:blipFill>
-        <p:spPr>
-          <a:xfrm>
-            <a:off x="5346332" y="1413378"/>
-            <a:ext cx="720000" cy="720000"/>
-          </a:xfrm>
-          <a:prstGeom prst="rect">
-            <a:avLst/>
-          </a:prstGeom>
-        </p:spPr>
-      </p:pic>
       <p:sp>
         <p:nvSpPr>
           <p:cNvPr id="10" name="矩形 9"/>
@@ -7047,17 +6720,11 @@
             <a:avLst/>
           </a:prstGeom>
           <a:solidFill>
-            <a:schemeClr val="accent6">
-              <a:lumMod val="40000"/>
-              <a:lumOff val="60000"/>
-            </a:schemeClr>
+            <a:srgbClr val="804646"/>
           </a:solidFill>
           <a:ln>
             <a:solidFill>
-              <a:schemeClr val="accent6">
-                <a:lumMod val="40000"/>
-                <a:lumOff val="60000"/>
-              </a:schemeClr>
+              <a:srgbClr val="804646"/>
             </a:solidFill>
           </a:ln>
         </p:spPr>
@@ -7079,6 +6746,7 @@
         </p:style>
         <p:txBody>
           <a:bodyPr rtlCol="0" anchor="ctr"/>
+          <a:lstStyle/>
           <a:p>
             <a:pPr algn="ctr"/>
             <a:endParaRPr lang="zh-CN" altLang="en-US">
@@ -7108,6 +6776,7 @@
           <a:bodyPr wrap="square" rtlCol="0">
             <a:noAutofit/>
           </a:bodyPr>
+          <a:lstStyle/>
           <a:p>
             <a:pPr algn="ctr"/>
             <a:r>
@@ -7117,10 +6786,6 @@
               </a:rPr>
               <a:t>Malicious Application </a:t>
             </a:r>
-            <a:endParaRPr lang="en-US" altLang="zh-CN" sz="1200">
-              <a:latin typeface="Times New Roman" panose="02020603050405020304" charset="0"/>
-              <a:cs typeface="Times New Roman" panose="02020603050405020304" charset="0"/>
-            </a:endParaRPr>
           </a:p>
         </p:txBody>
       </p:sp>
@@ -7180,6 +6845,7 @@
           <a:bodyPr wrap="square" rtlCol="0">
             <a:noAutofit/>
           </a:bodyPr>
+          <a:lstStyle/>
           <a:p>
             <a:r>
               <a:rPr lang="en-US" altLang="zh-CN">
@@ -7188,10 +6854,6 @@
               </a:rPr>
               <a:t>S1</a:t>
             </a:r>
-            <a:endParaRPr lang="en-US" altLang="zh-CN">
-              <a:latin typeface="Times New Roman" panose="02020603050405020304" charset="0"/>
-              <a:cs typeface="Times New Roman" panose="02020603050405020304" charset="0"/>
-            </a:endParaRPr>
           </a:p>
         </p:txBody>
       </p:sp>
@@ -7215,6 +6877,7 @@
           <a:bodyPr wrap="square" rtlCol="0">
             <a:noAutofit/>
           </a:bodyPr>
+          <a:lstStyle/>
           <a:p>
             <a:pPr algn="ctr"/>
             <a:r>
@@ -7342,6 +7005,7 @@
           <a:bodyPr wrap="square" rtlCol="0">
             <a:noAutofit/>
           </a:bodyPr>
+          <a:lstStyle/>
           <a:p>
             <a:pPr algn="ctr"/>
             <a:r>
@@ -7351,10 +7015,6 @@
               </a:rPr>
               <a:t>Create order</a:t>
             </a:r>
-            <a:endParaRPr lang="en-US" altLang="zh-CN" sz="1400" b="1">
-              <a:latin typeface="Times New Roman" panose="02020603050405020304" charset="0"/>
-              <a:cs typeface="Times New Roman" panose="02020603050405020304" charset="0"/>
-            </a:endParaRPr>
           </a:p>
         </p:txBody>
       </p:sp>
@@ -7378,6 +7038,7 @@
           <a:bodyPr wrap="square" rtlCol="0">
             <a:noAutofit/>
           </a:bodyPr>
+          <a:lstStyle/>
           <a:p>
             <a:pPr algn="ctr"/>
             <a:r>
@@ -7504,6 +7165,7 @@
           <a:bodyPr wrap="square" rtlCol="0">
             <a:spAutoFit/>
           </a:bodyPr>
+          <a:lstStyle/>
           <a:p>
             <a:r>
               <a:rPr lang="en-US" altLang="zh-CN">
@@ -7512,10 +7174,6 @@
               </a:rPr>
               <a:t>S2</a:t>
             </a:r>
-            <a:endParaRPr lang="en-US" altLang="zh-CN">
-              <a:latin typeface="Times New Roman" panose="02020603050405020304" charset="0"/>
-              <a:cs typeface="Times New Roman" panose="02020603050405020304" charset="0"/>
-            </a:endParaRPr>
           </a:p>
         </p:txBody>
       </p:sp>
@@ -7539,6 +7197,7 @@
           <a:bodyPr wrap="square" rtlCol="0">
             <a:noAutofit/>
           </a:bodyPr>
+          <a:lstStyle/>
           <a:p>
             <a:r>
               <a:rPr lang="en-US" altLang="zh-CN">
@@ -7547,10 +7206,6 @@
               </a:rPr>
               <a:t>S3</a:t>
             </a:r>
-            <a:endParaRPr lang="en-US" altLang="zh-CN">
-              <a:latin typeface="Times New Roman" panose="02020603050405020304" charset="0"/>
-              <a:cs typeface="Times New Roman" panose="02020603050405020304" charset="0"/>
-            </a:endParaRPr>
           </a:p>
         </p:txBody>
       </p:sp>
@@ -7574,6 +7229,7 @@
           <a:bodyPr wrap="square" rtlCol="0">
             <a:noAutofit/>
           </a:bodyPr>
+          <a:lstStyle/>
           <a:p>
             <a:r>
               <a:rPr lang="en-US" altLang="zh-CN">
@@ -7582,10 +7238,6 @@
               </a:rPr>
               <a:t>S4</a:t>
             </a:r>
-            <a:endParaRPr lang="en-US" altLang="zh-CN">
-              <a:latin typeface="Times New Roman" panose="02020603050405020304" charset="0"/>
-              <a:cs typeface="Times New Roman" panose="02020603050405020304" charset="0"/>
-            </a:endParaRPr>
           </a:p>
         </p:txBody>
       </p:sp>
@@ -7609,6 +7261,7 @@
           <a:bodyPr wrap="square" rtlCol="0">
             <a:noAutofit/>
           </a:bodyPr>
+          <a:lstStyle/>
           <a:p>
             <a:pPr algn="ctr"/>
             <a:r>
@@ -7621,13 +7274,6 @@
               </a:rPr>
               <a:t>Send payment request</a:t>
             </a:r>
-            <a:endParaRPr lang="en-US" altLang="zh-CN" sz="1400" b="1">
-              <a:solidFill>
-                <a:schemeClr val="tx1"/>
-              </a:solidFill>
-              <a:latin typeface="Times New Roman" panose="02020603050405020304" charset="0"/>
-              <a:cs typeface="Times New Roman" panose="02020603050405020304" charset="0"/>
-            </a:endParaRPr>
           </a:p>
         </p:txBody>
       </p:sp>
@@ -7651,6 +7297,7 @@
           <a:bodyPr wrap="square" rtlCol="0">
             <a:noAutofit/>
           </a:bodyPr>
+          <a:lstStyle/>
           <a:p>
             <a:pPr algn="ctr"/>
             <a:r>
@@ -7660,10 +7307,6 @@
               </a:rPr>
               <a:t>Order parameters</a:t>
             </a:r>
-            <a:endParaRPr lang="en-US" altLang="zh-CN" sz="1400" b="1">
-              <a:latin typeface="Times New Roman" panose="02020603050405020304" charset="0"/>
-              <a:cs typeface="Times New Roman" panose="02020603050405020304" charset="0"/>
-            </a:endParaRPr>
           </a:p>
         </p:txBody>
       </p:sp>
@@ -7723,6 +7366,7 @@
           <a:bodyPr wrap="square" rtlCol="0">
             <a:noAutofit/>
           </a:bodyPr>
+          <a:lstStyle/>
           <a:p>
             <a:r>
               <a:rPr lang="en-US" altLang="zh-CN">
@@ -7731,10 +7375,6 @@
               </a:rPr>
               <a:t>S5</a:t>
             </a:r>
-            <a:endParaRPr lang="en-US" altLang="zh-CN">
-              <a:latin typeface="Times New Roman" panose="02020603050405020304" charset="0"/>
-              <a:cs typeface="Times New Roman" panose="02020603050405020304" charset="0"/>
-            </a:endParaRPr>
           </a:p>
         </p:txBody>
       </p:sp>
@@ -7758,6 +7398,7 @@
           <a:bodyPr wrap="square" rtlCol="0">
             <a:noAutofit/>
           </a:bodyPr>
+          <a:lstStyle/>
           <a:p>
             <a:pPr algn="ctr"/>
             <a:r>
@@ -7767,13 +7408,487 @@
               </a:rPr>
               <a:t>Tampered request</a:t>
             </a:r>
-            <a:endParaRPr lang="en-US" altLang="zh-CN" sz="1400" b="1">
-              <a:latin typeface="Times New Roman" panose="02020603050405020304" charset="0"/>
-              <a:cs typeface="Times New Roman" panose="02020603050405020304" charset="0"/>
-            </a:endParaRPr>
-          </a:p>
-        </p:txBody>
-      </p:sp>
+          </a:p>
+        </p:txBody>
+      </p:sp>
+      <p:grpSp>
+        <p:nvGrpSpPr>
+          <p:cNvPr id="37" name="组合 36">
+            <a:extLst>
+              <a:ext uri="{FF2B5EF4-FFF2-40B4-BE49-F238E27FC236}">
+                <a16:creationId xmlns:a16="http://schemas.microsoft.com/office/drawing/2014/main" id="{883FBC25-2E90-458E-88F4-CAB678AB4E4C}"/>
+              </a:ext>
+            </a:extLst>
+          </p:cNvPr>
+          <p:cNvGrpSpPr>
+            <a:grpSpLocks noChangeAspect="1"/>
+          </p:cNvGrpSpPr>
+          <p:nvPr/>
+        </p:nvGrpSpPr>
+        <p:grpSpPr>
+          <a:xfrm>
+            <a:off x="2812710" y="1449423"/>
+            <a:ext cx="484845" cy="479028"/>
+            <a:chOff x="4445000" y="739632"/>
+            <a:chExt cx="375710" cy="371203"/>
+          </a:xfrm>
+        </p:grpSpPr>
+        <p:sp>
+          <p:nvSpPr>
+            <p:cNvPr id="38" name="矩形: 圆角 37">
+              <a:extLst>
+                <a:ext uri="{FF2B5EF4-FFF2-40B4-BE49-F238E27FC236}">
+                  <a16:creationId xmlns:a16="http://schemas.microsoft.com/office/drawing/2014/main" id="{339545D7-1D0E-4F8F-BB15-7A9F7E1D9573}"/>
+                </a:ext>
+              </a:extLst>
+            </p:cNvPr>
+            <p:cNvSpPr/>
+            <p:nvPr/>
+          </p:nvSpPr>
+          <p:spPr>
+            <a:xfrm>
+              <a:off x="4445000" y="740833"/>
+              <a:ext cx="156634" cy="156634"/>
+            </a:xfrm>
+            <a:prstGeom prst="roundRect">
+              <a:avLst/>
+            </a:prstGeom>
+            <a:solidFill>
+              <a:srgbClr val="4A5F7E"/>
+            </a:solidFill>
+            <a:ln w="38100">
+              <a:solidFill>
+                <a:srgbClr val="4A5F7E"/>
+              </a:solidFill>
+            </a:ln>
+          </p:spPr>
+          <p:style>
+            <a:lnRef idx="2">
+              <a:schemeClr val="accent1">
+                <a:shade val="50000"/>
+              </a:schemeClr>
+            </a:lnRef>
+            <a:fillRef idx="1">
+              <a:schemeClr val="accent1"/>
+            </a:fillRef>
+            <a:effectRef idx="0">
+              <a:schemeClr val="accent1"/>
+            </a:effectRef>
+            <a:fontRef idx="minor">
+              <a:schemeClr val="lt1"/>
+            </a:fontRef>
+          </p:style>
+          <p:txBody>
+            <a:bodyPr rtlCol="0" anchor="ctr"/>
+            <a:lstStyle/>
+            <a:p>
+              <a:pPr algn="ctr"/>
+              <a:endParaRPr lang="zh-CN" altLang="en-US"/>
+            </a:p>
+          </p:txBody>
+        </p:sp>
+        <p:sp>
+          <p:nvSpPr>
+            <p:cNvPr id="39" name="矩形: 圆角 38">
+              <a:extLst>
+                <a:ext uri="{FF2B5EF4-FFF2-40B4-BE49-F238E27FC236}">
+                  <a16:creationId xmlns:a16="http://schemas.microsoft.com/office/drawing/2014/main" id="{2BF68FAC-A40A-42FC-A6F2-FF70F01E666B}"/>
+                </a:ext>
+              </a:extLst>
+            </p:cNvPr>
+            <p:cNvSpPr/>
+            <p:nvPr/>
+          </p:nvSpPr>
+          <p:spPr>
+            <a:xfrm>
+              <a:off x="4445000" y="954201"/>
+              <a:ext cx="156634" cy="156634"/>
+            </a:xfrm>
+            <a:prstGeom prst="roundRect">
+              <a:avLst/>
+            </a:prstGeom>
+            <a:solidFill>
+              <a:srgbClr val="4A5F7E"/>
+            </a:solidFill>
+            <a:ln w="38100">
+              <a:solidFill>
+                <a:srgbClr val="4A5F7E"/>
+              </a:solidFill>
+            </a:ln>
+          </p:spPr>
+          <p:style>
+            <a:lnRef idx="2">
+              <a:schemeClr val="accent1">
+                <a:shade val="50000"/>
+              </a:schemeClr>
+            </a:lnRef>
+            <a:fillRef idx="1">
+              <a:schemeClr val="accent1"/>
+            </a:fillRef>
+            <a:effectRef idx="0">
+              <a:schemeClr val="accent1"/>
+            </a:effectRef>
+            <a:fontRef idx="minor">
+              <a:schemeClr val="lt1"/>
+            </a:fontRef>
+          </p:style>
+          <p:txBody>
+            <a:bodyPr rtlCol="0" anchor="ctr"/>
+            <a:lstStyle/>
+            <a:p>
+              <a:pPr algn="ctr"/>
+              <a:endParaRPr lang="zh-CN" altLang="en-US"/>
+            </a:p>
+          </p:txBody>
+        </p:sp>
+        <p:sp>
+          <p:nvSpPr>
+            <p:cNvPr id="40" name="矩形: 圆角 39">
+              <a:extLst>
+                <a:ext uri="{FF2B5EF4-FFF2-40B4-BE49-F238E27FC236}">
+                  <a16:creationId xmlns:a16="http://schemas.microsoft.com/office/drawing/2014/main" id="{CA6829C0-C73F-49F8-8FBC-17357EB0F639}"/>
+                </a:ext>
+              </a:extLst>
+            </p:cNvPr>
+            <p:cNvSpPr/>
+            <p:nvPr/>
+          </p:nvSpPr>
+          <p:spPr>
+            <a:xfrm rot="1800000">
+              <a:off x="4672028" y="739632"/>
+              <a:ext cx="145198" cy="138592"/>
+            </a:xfrm>
+            <a:prstGeom prst="roundRect">
+              <a:avLst/>
+            </a:prstGeom>
+            <a:solidFill>
+              <a:schemeClr val="bg1"/>
+            </a:solidFill>
+            <a:ln w="57150">
+              <a:solidFill>
+                <a:srgbClr val="4A5F7E"/>
+              </a:solidFill>
+            </a:ln>
+          </p:spPr>
+          <p:style>
+            <a:lnRef idx="2">
+              <a:schemeClr val="accent1">
+                <a:shade val="50000"/>
+              </a:schemeClr>
+            </a:lnRef>
+            <a:fillRef idx="1">
+              <a:schemeClr val="accent1"/>
+            </a:fillRef>
+            <a:effectRef idx="0">
+              <a:schemeClr val="accent1"/>
+            </a:effectRef>
+            <a:fontRef idx="minor">
+              <a:schemeClr val="lt1"/>
+            </a:fontRef>
+          </p:style>
+          <p:txBody>
+            <a:bodyPr rtlCol="0" anchor="ctr"/>
+            <a:lstStyle/>
+            <a:p>
+              <a:pPr algn="ctr"/>
+              <a:endParaRPr lang="zh-CN" altLang="en-US"/>
+            </a:p>
+          </p:txBody>
+        </p:sp>
+        <p:sp>
+          <p:nvSpPr>
+            <p:cNvPr id="41" name="矩形: 圆角 40">
+              <a:extLst>
+                <a:ext uri="{FF2B5EF4-FFF2-40B4-BE49-F238E27FC236}">
+                  <a16:creationId xmlns:a16="http://schemas.microsoft.com/office/drawing/2014/main" id="{A77DC7D7-4E6B-4E53-A670-5D06690318C5}"/>
+                </a:ext>
+              </a:extLst>
+            </p:cNvPr>
+            <p:cNvSpPr/>
+            <p:nvPr/>
+          </p:nvSpPr>
+          <p:spPr>
+            <a:xfrm>
+              <a:off x="4664075" y="954201"/>
+              <a:ext cx="156635" cy="156634"/>
+            </a:xfrm>
+            <a:prstGeom prst="roundRect">
+              <a:avLst/>
+            </a:prstGeom>
+            <a:solidFill>
+              <a:srgbClr val="4A5F7E"/>
+            </a:solidFill>
+            <a:ln w="38100">
+              <a:solidFill>
+                <a:srgbClr val="4A5F7E"/>
+              </a:solidFill>
+            </a:ln>
+          </p:spPr>
+          <p:style>
+            <a:lnRef idx="2">
+              <a:schemeClr val="accent1">
+                <a:shade val="50000"/>
+              </a:schemeClr>
+            </a:lnRef>
+            <a:fillRef idx="1">
+              <a:schemeClr val="accent1"/>
+            </a:fillRef>
+            <a:effectRef idx="0">
+              <a:schemeClr val="accent1"/>
+            </a:effectRef>
+            <a:fontRef idx="minor">
+              <a:schemeClr val="lt1"/>
+            </a:fontRef>
+          </p:style>
+          <p:txBody>
+            <a:bodyPr rtlCol="0" anchor="ctr"/>
+            <a:lstStyle/>
+            <a:p>
+              <a:pPr algn="ctr"/>
+              <a:endParaRPr lang="zh-CN" altLang="en-US"/>
+            </a:p>
+          </p:txBody>
+        </p:sp>
+      </p:grpSp>
+      <p:grpSp>
+        <p:nvGrpSpPr>
+          <p:cNvPr id="42" name="组合 41">
+            <a:extLst>
+              <a:ext uri="{FF2B5EF4-FFF2-40B4-BE49-F238E27FC236}">
+                <a16:creationId xmlns:a16="http://schemas.microsoft.com/office/drawing/2014/main" id="{CE8EA022-777B-4034-BA67-7BB05C97F24A}"/>
+              </a:ext>
+            </a:extLst>
+          </p:cNvPr>
+          <p:cNvGrpSpPr>
+            <a:grpSpLocks noChangeAspect="1"/>
+          </p:cNvGrpSpPr>
+          <p:nvPr/>
+        </p:nvGrpSpPr>
+        <p:grpSpPr>
+          <a:xfrm>
+            <a:off x="5420097" y="1452243"/>
+            <a:ext cx="484845" cy="479028"/>
+            <a:chOff x="4445000" y="739632"/>
+            <a:chExt cx="375710" cy="371203"/>
+          </a:xfrm>
+        </p:grpSpPr>
+        <p:sp>
+          <p:nvSpPr>
+            <p:cNvPr id="43" name="矩形: 圆角 42">
+              <a:extLst>
+                <a:ext uri="{FF2B5EF4-FFF2-40B4-BE49-F238E27FC236}">
+                  <a16:creationId xmlns:a16="http://schemas.microsoft.com/office/drawing/2014/main" id="{4C5E1CAB-1B88-4886-865C-4E2BED220057}"/>
+                </a:ext>
+              </a:extLst>
+            </p:cNvPr>
+            <p:cNvSpPr/>
+            <p:nvPr/>
+          </p:nvSpPr>
+          <p:spPr>
+            <a:xfrm>
+              <a:off x="4445000" y="740833"/>
+              <a:ext cx="156634" cy="156634"/>
+            </a:xfrm>
+            <a:prstGeom prst="roundRect">
+              <a:avLst/>
+            </a:prstGeom>
+            <a:solidFill>
+              <a:srgbClr val="804646"/>
+            </a:solidFill>
+            <a:ln w="38100">
+              <a:solidFill>
+                <a:srgbClr val="804646"/>
+              </a:solidFill>
+            </a:ln>
+          </p:spPr>
+          <p:style>
+            <a:lnRef idx="2">
+              <a:schemeClr val="accent1">
+                <a:shade val="50000"/>
+              </a:schemeClr>
+            </a:lnRef>
+            <a:fillRef idx="1">
+              <a:schemeClr val="accent1"/>
+            </a:fillRef>
+            <a:effectRef idx="0">
+              <a:schemeClr val="accent1"/>
+            </a:effectRef>
+            <a:fontRef idx="minor">
+              <a:schemeClr val="lt1"/>
+            </a:fontRef>
+          </p:style>
+          <p:txBody>
+            <a:bodyPr rtlCol="0" anchor="ctr"/>
+            <a:lstStyle/>
+            <a:p>
+              <a:pPr algn="ctr"/>
+              <a:endParaRPr lang="zh-CN" altLang="en-US"/>
+            </a:p>
+          </p:txBody>
+        </p:sp>
+        <p:sp>
+          <p:nvSpPr>
+            <p:cNvPr id="44" name="矩形: 圆角 43">
+              <a:extLst>
+                <a:ext uri="{FF2B5EF4-FFF2-40B4-BE49-F238E27FC236}">
+                  <a16:creationId xmlns:a16="http://schemas.microsoft.com/office/drawing/2014/main" id="{40DCC314-A0F6-4E17-89FA-6ABC0EFB2F7B}"/>
+                </a:ext>
+              </a:extLst>
+            </p:cNvPr>
+            <p:cNvSpPr/>
+            <p:nvPr/>
+          </p:nvSpPr>
+          <p:spPr>
+            <a:xfrm>
+              <a:off x="4445000" y="954201"/>
+              <a:ext cx="156634" cy="156634"/>
+            </a:xfrm>
+            <a:prstGeom prst="roundRect">
+              <a:avLst/>
+            </a:prstGeom>
+            <a:solidFill>
+              <a:srgbClr val="804646"/>
+            </a:solidFill>
+            <a:ln w="38100">
+              <a:solidFill>
+                <a:srgbClr val="804646"/>
+              </a:solidFill>
+            </a:ln>
+          </p:spPr>
+          <p:style>
+            <a:lnRef idx="2">
+              <a:schemeClr val="accent1">
+                <a:shade val="50000"/>
+              </a:schemeClr>
+            </a:lnRef>
+            <a:fillRef idx="1">
+              <a:schemeClr val="accent1"/>
+            </a:fillRef>
+            <a:effectRef idx="0">
+              <a:schemeClr val="accent1"/>
+            </a:effectRef>
+            <a:fontRef idx="minor">
+              <a:schemeClr val="lt1"/>
+            </a:fontRef>
+          </p:style>
+          <p:txBody>
+            <a:bodyPr rtlCol="0" anchor="ctr"/>
+            <a:lstStyle/>
+            <a:p>
+              <a:pPr algn="ctr"/>
+              <a:endParaRPr lang="zh-CN" altLang="en-US"/>
+            </a:p>
+          </p:txBody>
+        </p:sp>
+        <p:sp>
+          <p:nvSpPr>
+            <p:cNvPr id="45" name="矩形: 圆角 44">
+              <a:extLst>
+                <a:ext uri="{FF2B5EF4-FFF2-40B4-BE49-F238E27FC236}">
+                  <a16:creationId xmlns:a16="http://schemas.microsoft.com/office/drawing/2014/main" id="{C37FF9C2-EE1D-4EAF-B69A-983B67E228AB}"/>
+                </a:ext>
+              </a:extLst>
+            </p:cNvPr>
+            <p:cNvSpPr/>
+            <p:nvPr/>
+          </p:nvSpPr>
+          <p:spPr>
+            <a:xfrm rot="1800000">
+              <a:off x="4672028" y="739632"/>
+              <a:ext cx="145198" cy="138592"/>
+            </a:xfrm>
+            <a:prstGeom prst="roundRect">
+              <a:avLst/>
+            </a:prstGeom>
+            <a:solidFill>
+              <a:schemeClr val="bg1"/>
+            </a:solidFill>
+            <a:ln w="57150">
+              <a:solidFill>
+                <a:srgbClr val="804646"/>
+              </a:solidFill>
+            </a:ln>
+          </p:spPr>
+          <p:style>
+            <a:lnRef idx="2">
+              <a:schemeClr val="accent1">
+                <a:shade val="50000"/>
+              </a:schemeClr>
+            </a:lnRef>
+            <a:fillRef idx="1">
+              <a:schemeClr val="accent1"/>
+            </a:fillRef>
+            <a:effectRef idx="0">
+              <a:schemeClr val="accent1"/>
+            </a:effectRef>
+            <a:fontRef idx="minor">
+              <a:schemeClr val="lt1"/>
+            </a:fontRef>
+          </p:style>
+          <p:txBody>
+            <a:bodyPr rtlCol="0" anchor="ctr"/>
+            <a:lstStyle/>
+            <a:p>
+              <a:pPr algn="ctr"/>
+              <a:endParaRPr lang="zh-CN" altLang="en-US"/>
+            </a:p>
+          </p:txBody>
+        </p:sp>
+        <p:sp>
+          <p:nvSpPr>
+            <p:cNvPr id="46" name="矩形: 圆角 45">
+              <a:extLst>
+                <a:ext uri="{FF2B5EF4-FFF2-40B4-BE49-F238E27FC236}">
+                  <a16:creationId xmlns:a16="http://schemas.microsoft.com/office/drawing/2014/main" id="{385E2C26-9FA0-4643-884E-84812BB6EB3D}"/>
+                </a:ext>
+              </a:extLst>
+            </p:cNvPr>
+            <p:cNvSpPr/>
+            <p:nvPr/>
+          </p:nvSpPr>
+          <p:spPr>
+            <a:xfrm>
+              <a:off x="4664075" y="954201"/>
+              <a:ext cx="156635" cy="156634"/>
+            </a:xfrm>
+            <a:prstGeom prst="roundRect">
+              <a:avLst/>
+            </a:prstGeom>
+            <a:solidFill>
+              <a:srgbClr val="804646"/>
+            </a:solidFill>
+            <a:ln w="38100">
+              <a:solidFill>
+                <a:srgbClr val="804646"/>
+              </a:solidFill>
+            </a:ln>
+          </p:spPr>
+          <p:style>
+            <a:lnRef idx="2">
+              <a:schemeClr val="accent1">
+                <a:shade val="50000"/>
+              </a:schemeClr>
+            </a:lnRef>
+            <a:fillRef idx="1">
+              <a:schemeClr val="accent1"/>
+            </a:fillRef>
+            <a:effectRef idx="0">
+              <a:schemeClr val="accent1"/>
+            </a:effectRef>
+            <a:fontRef idx="minor">
+              <a:schemeClr val="lt1"/>
+            </a:fontRef>
+          </p:style>
+          <p:txBody>
+            <a:bodyPr rtlCol="0" anchor="ctr"/>
+            <a:lstStyle/>
+            <a:p>
+              <a:pPr algn="ctr"/>
+              <a:endParaRPr lang="zh-CN" altLang="en-US"/>
+            </a:p>
+          </p:txBody>
+        </p:sp>
+      </p:grpSp>
     </p:spTree>
   </p:cSld>
   <p:clrMapOvr>
@@ -7791,7 +7906,14 @@
         <p:cNvGrpSpPr/>
         <p:nvPr/>
       </p:nvGrpSpPr>
-      <p:grpSpPr/>
+      <p:grpSpPr>
+        <a:xfrm>
+          <a:off x="0" y="0"/>
+          <a:ext cx="0" cy="0"/>
+          <a:chOff x="0" y="0"/>
+          <a:chExt cx="0" cy="0"/>
+        </a:xfrm>
+      </p:grpSpPr>
       <p:grpSp>
         <p:nvGrpSpPr>
           <p:cNvPr id="14" name="组合 13"/>
@@ -7815,7 +7937,7 @@
             <p:nvPr/>
           </p:nvPicPr>
           <p:blipFill>
-            <a:blip r:embed="rId1"/>
+            <a:blip r:embed="rId2"/>
             <a:stretch>
               <a:fillRect/>
             </a:stretch>
@@ -7839,7 +7961,7 @@
             <p:nvPr/>
           </p:nvPicPr>
           <p:blipFill>
-            <a:blip r:embed="rId2"/>
+            <a:blip r:embed="rId3"/>
             <a:srcRect l="-3754" t="-1049" r="-3228" b="-1375"/>
             <a:stretch>
               <a:fillRect/>
@@ -7865,7 +7987,7 @@
           <p:nvPr/>
         </p:nvPicPr>
         <p:blipFill>
-          <a:blip r:embed="rId1"/>
+          <a:blip r:embed="rId2"/>
           <a:stretch>
             <a:fillRect/>
           </a:stretch>
@@ -7889,7 +8011,7 @@
           <p:nvPr/>
         </p:nvPicPr>
         <p:blipFill>
-          <a:blip r:embed="rId3"/>
+          <a:blip r:embed="rId4"/>
           <a:srcRect l="-2593" t="-2073" r="-2963" b="-1388"/>
           <a:stretch>
             <a:fillRect/>
@@ -7914,10 +8036,10 @@
           <p:nvPr/>
         </p:nvPicPr>
         <p:blipFill>
-          <a:blip r:embed="rId4">
+          <a:blip r:embed="rId5">
             <a:extLst>
               <a:ext uri="{96DAC541-7B7A-43D3-8B79-37D633B846F1}">
-                <asvg:svgBlip xmlns:asvg="http://schemas.microsoft.com/office/drawing/2016/SVG/main" r:embed="rId5"/>
+                <asvg:svgBlip xmlns:asvg="http://schemas.microsoft.com/office/drawing/2016/SVG/main" r:embed="rId6"/>
               </a:ext>
             </a:extLst>
           </a:blip>
@@ -7944,10 +8066,10 @@
           <p:nvPr/>
         </p:nvPicPr>
         <p:blipFill>
-          <a:blip r:embed="rId6">
+          <a:blip r:embed="rId7">
             <a:extLst>
               <a:ext uri="{96DAC541-7B7A-43D3-8B79-37D633B846F1}">
-                <asvg:svgBlip xmlns:asvg="http://schemas.microsoft.com/office/drawing/2016/SVG/main" r:embed="rId7"/>
+                <asvg:svgBlip xmlns:asvg="http://schemas.microsoft.com/office/drawing/2016/SVG/main" r:embed="rId8"/>
               </a:ext>
             </a:extLst>
           </a:blip>
@@ -7999,13 +8121,13 @@
           <p:nvPr/>
         </p:nvPicPr>
         <p:blipFill>
-          <a:blip r:embed="rId1" cstate="print">
+          <a:blip r:embed="rId2" cstate="print">
             <a:extLst>
               <a:ext uri="{28A0092B-C50C-407E-A947-70E740481C1C}">
                 <a14:useLocalDpi xmlns:a14="http://schemas.microsoft.com/office/drawing/2010/main" val="0"/>
               </a:ext>
               <a:ext uri="{96DAC541-7B7A-43D3-8B79-37D633B846F1}">
-                <asvg:svgBlip xmlns:asvg="http://schemas.microsoft.com/office/drawing/2016/SVG/main" r:embed="rId2"/>
+                <asvg:svgBlip xmlns:asvg="http://schemas.microsoft.com/office/drawing/2016/SVG/main" r:embed="rId3"/>
               </a:ext>
             </a:extLst>
           </a:blip>
@@ -8032,13 +8154,13 @@
           <p:nvPr/>
         </p:nvPicPr>
         <p:blipFill>
-          <a:blip r:embed="rId3" cstate="print">
+          <a:blip r:embed="rId4" cstate="print">
             <a:extLst>
               <a:ext uri="{28A0092B-C50C-407E-A947-70E740481C1C}">
                 <a14:useLocalDpi xmlns:a14="http://schemas.microsoft.com/office/drawing/2010/main" val="0"/>
               </a:ext>
               <a:ext uri="{96DAC541-7B7A-43D3-8B79-37D633B846F1}">
-                <asvg:svgBlip xmlns:asvg="http://schemas.microsoft.com/office/drawing/2016/SVG/main" r:embed="rId4"/>
+                <asvg:svgBlip xmlns:asvg="http://schemas.microsoft.com/office/drawing/2016/SVG/main" r:embed="rId5"/>
               </a:ext>
             </a:extLst>
           </a:blip>
@@ -8112,13 +8234,13 @@
           <p:nvPr/>
         </p:nvPicPr>
         <p:blipFill>
-          <a:blip r:embed="rId5" cstate="print">
+          <a:blip r:embed="rId6" cstate="print">
             <a:extLst>
               <a:ext uri="{28A0092B-C50C-407E-A947-70E740481C1C}">
                 <a14:useLocalDpi xmlns:a14="http://schemas.microsoft.com/office/drawing/2010/main" val="0"/>
               </a:ext>
               <a:ext uri="{96DAC541-7B7A-43D3-8B79-37D633B846F1}">
-                <asvg:svgBlip xmlns:asvg="http://schemas.microsoft.com/office/drawing/2016/SVG/main" r:embed="rId6"/>
+                <asvg:svgBlip xmlns:asvg="http://schemas.microsoft.com/office/drawing/2016/SVG/main" r:embed="rId7"/>
               </a:ext>
             </a:extLst>
           </a:blip>
@@ -8145,13 +8267,13 @@
           <p:nvPr/>
         </p:nvPicPr>
         <p:blipFill>
-          <a:blip r:embed="rId7" cstate="print">
+          <a:blip r:embed="rId8" cstate="print">
             <a:extLst>
               <a:ext uri="{28A0092B-C50C-407E-A947-70E740481C1C}">
                 <a14:useLocalDpi xmlns:a14="http://schemas.microsoft.com/office/drawing/2010/main" val="0"/>
               </a:ext>
               <a:ext uri="{96DAC541-7B7A-43D3-8B79-37D633B846F1}">
-                <asvg:svgBlip xmlns:asvg="http://schemas.microsoft.com/office/drawing/2016/SVG/main" r:embed="rId8"/>
+                <asvg:svgBlip xmlns:asvg="http://schemas.microsoft.com/office/drawing/2016/SVG/main" r:embed="rId9"/>
               </a:ext>
             </a:extLst>
           </a:blip>
@@ -8178,13 +8300,13 @@
           <p:nvPr/>
         </p:nvPicPr>
         <p:blipFill>
-          <a:blip r:embed="rId9" cstate="print">
+          <a:blip r:embed="rId10" cstate="print">
             <a:extLst>
               <a:ext uri="{28A0092B-C50C-407E-A947-70E740481C1C}">
                 <a14:useLocalDpi xmlns:a14="http://schemas.microsoft.com/office/drawing/2010/main" val="0"/>
               </a:ext>
               <a:ext uri="{96DAC541-7B7A-43D3-8B79-37D633B846F1}">
-                <asvg:svgBlip xmlns:asvg="http://schemas.microsoft.com/office/drawing/2016/SVG/main" r:embed="rId10"/>
+                <asvg:svgBlip xmlns:asvg="http://schemas.microsoft.com/office/drawing/2016/SVG/main" r:embed="rId11"/>
               </a:ext>
             </a:extLst>
           </a:blip>
@@ -8211,13 +8333,13 @@
           <p:nvPr/>
         </p:nvPicPr>
         <p:blipFill>
-          <a:blip r:embed="rId11" cstate="print">
+          <a:blip r:embed="rId12" cstate="print">
             <a:extLst>
               <a:ext uri="{28A0092B-C50C-407E-A947-70E740481C1C}">
                 <a14:useLocalDpi xmlns:a14="http://schemas.microsoft.com/office/drawing/2010/main" val="0"/>
               </a:ext>
               <a:ext uri="{96DAC541-7B7A-43D3-8B79-37D633B846F1}">
-                <asvg:svgBlip xmlns:asvg="http://schemas.microsoft.com/office/drawing/2016/SVG/main" r:embed="rId12"/>
+                <asvg:svgBlip xmlns:asvg="http://schemas.microsoft.com/office/drawing/2016/SVG/main" r:embed="rId13"/>
               </a:ext>
             </a:extLst>
           </a:blip>
@@ -8244,13 +8366,13 @@
           <p:nvPr/>
         </p:nvPicPr>
         <p:blipFill>
-          <a:blip r:embed="rId9" cstate="print">
+          <a:blip r:embed="rId10" cstate="print">
             <a:extLst>
               <a:ext uri="{28A0092B-C50C-407E-A947-70E740481C1C}">
                 <a14:useLocalDpi xmlns:a14="http://schemas.microsoft.com/office/drawing/2010/main" val="0"/>
               </a:ext>
               <a:ext uri="{96DAC541-7B7A-43D3-8B79-37D633B846F1}">
-                <asvg:svgBlip xmlns:asvg="http://schemas.microsoft.com/office/drawing/2016/SVG/main" r:embed="rId10"/>
+                <asvg:svgBlip xmlns:asvg="http://schemas.microsoft.com/office/drawing/2016/SVG/main" r:embed="rId11"/>
               </a:ext>
             </a:extLst>
           </a:blip>
@@ -8277,13 +8399,13 @@
           <p:nvPr/>
         </p:nvPicPr>
         <p:blipFill>
-          <a:blip r:embed="rId13" cstate="print">
+          <a:blip r:embed="rId14" cstate="print">
             <a:extLst>
               <a:ext uri="{28A0092B-C50C-407E-A947-70E740481C1C}">
                 <a14:useLocalDpi xmlns:a14="http://schemas.microsoft.com/office/drawing/2010/main" val="0"/>
               </a:ext>
               <a:ext uri="{96DAC541-7B7A-43D3-8B79-37D633B846F1}">
-                <asvg:svgBlip xmlns:asvg="http://schemas.microsoft.com/office/drawing/2016/SVG/main" r:embed="rId14"/>
+                <asvg:svgBlip xmlns:asvg="http://schemas.microsoft.com/office/drawing/2016/SVG/main" r:embed="rId15"/>
               </a:ext>
             </a:extLst>
           </a:blip>
@@ -8646,10 +8768,10 @@
           <p:nvPr/>
         </p:nvPicPr>
         <p:blipFill>
-          <a:blip r:embed="rId15">
+          <a:blip r:embed="rId16">
             <a:extLst>
               <a:ext uri="{96DAC541-7B7A-43D3-8B79-37D633B846F1}">
-                <asvg:svgBlip xmlns:asvg="http://schemas.microsoft.com/office/drawing/2016/SVG/main" r:embed="rId16"/>
+                <asvg:svgBlip xmlns:asvg="http://schemas.microsoft.com/office/drawing/2016/SVG/main" r:embed="rId17"/>
               </a:ext>
             </a:extLst>
           </a:blip>
@@ -8737,13 +8859,13 @@
           <p:nvPr/>
         </p:nvPicPr>
         <p:blipFill>
-          <a:blip r:embed="rId1" cstate="print">
+          <a:blip r:embed="rId2" cstate="print">
             <a:extLst>
               <a:ext uri="{28A0092B-C50C-407E-A947-70E740481C1C}">
                 <a14:useLocalDpi xmlns:a14="http://schemas.microsoft.com/office/drawing/2010/main" val="0"/>
               </a:ext>
               <a:ext uri="{96DAC541-7B7A-43D3-8B79-37D633B846F1}">
-                <asvg:svgBlip xmlns:asvg="http://schemas.microsoft.com/office/drawing/2016/SVG/main" r:embed="rId2"/>
+                <asvg:svgBlip xmlns:asvg="http://schemas.microsoft.com/office/drawing/2016/SVG/main" r:embed="rId3"/>
               </a:ext>
             </a:extLst>
           </a:blip>
@@ -8770,13 +8892,13 @@
           <p:nvPr/>
         </p:nvPicPr>
         <p:blipFill>
-          <a:blip r:embed="rId3" cstate="print">
+          <a:blip r:embed="rId4" cstate="print">
             <a:extLst>
               <a:ext uri="{28A0092B-C50C-407E-A947-70E740481C1C}">
                 <a14:useLocalDpi xmlns:a14="http://schemas.microsoft.com/office/drawing/2010/main" val="0"/>
               </a:ext>
               <a:ext uri="{96DAC541-7B7A-43D3-8B79-37D633B846F1}">
-                <asvg:svgBlip xmlns:asvg="http://schemas.microsoft.com/office/drawing/2016/SVG/main" r:embed="rId4"/>
+                <asvg:svgBlip xmlns:asvg="http://schemas.microsoft.com/office/drawing/2016/SVG/main" r:embed="rId5"/>
               </a:ext>
             </a:extLst>
           </a:blip>
@@ -8850,13 +8972,13 @@
           <p:nvPr/>
         </p:nvPicPr>
         <p:blipFill>
-          <a:blip r:embed="rId5" cstate="print">
+          <a:blip r:embed="rId6" cstate="print">
             <a:extLst>
               <a:ext uri="{28A0092B-C50C-407E-A947-70E740481C1C}">
                 <a14:useLocalDpi xmlns:a14="http://schemas.microsoft.com/office/drawing/2010/main" val="0"/>
               </a:ext>
               <a:ext uri="{96DAC541-7B7A-43D3-8B79-37D633B846F1}">
-                <asvg:svgBlip xmlns:asvg="http://schemas.microsoft.com/office/drawing/2016/SVG/main" r:embed="rId6"/>
+                <asvg:svgBlip xmlns:asvg="http://schemas.microsoft.com/office/drawing/2016/SVG/main" r:embed="rId7"/>
               </a:ext>
             </a:extLst>
           </a:blip>
@@ -8883,13 +9005,13 @@
           <p:nvPr/>
         </p:nvPicPr>
         <p:blipFill>
-          <a:blip r:embed="rId7" cstate="print">
+          <a:blip r:embed="rId8" cstate="print">
             <a:extLst>
               <a:ext uri="{28A0092B-C50C-407E-A947-70E740481C1C}">
                 <a14:useLocalDpi xmlns:a14="http://schemas.microsoft.com/office/drawing/2010/main" val="0"/>
               </a:ext>
               <a:ext uri="{96DAC541-7B7A-43D3-8B79-37D633B846F1}">
-                <asvg:svgBlip xmlns:asvg="http://schemas.microsoft.com/office/drawing/2016/SVG/main" r:embed="rId8"/>
+                <asvg:svgBlip xmlns:asvg="http://schemas.microsoft.com/office/drawing/2016/SVG/main" r:embed="rId9"/>
               </a:ext>
             </a:extLst>
           </a:blip>
@@ -8916,13 +9038,13 @@
           <p:nvPr/>
         </p:nvPicPr>
         <p:blipFill>
-          <a:blip r:embed="rId9" cstate="print">
+          <a:blip r:embed="rId10" cstate="print">
             <a:extLst>
               <a:ext uri="{28A0092B-C50C-407E-A947-70E740481C1C}">
                 <a14:useLocalDpi xmlns:a14="http://schemas.microsoft.com/office/drawing/2010/main" val="0"/>
               </a:ext>
               <a:ext uri="{96DAC541-7B7A-43D3-8B79-37D633B846F1}">
-                <asvg:svgBlip xmlns:asvg="http://schemas.microsoft.com/office/drawing/2016/SVG/main" r:embed="rId10"/>
+                <asvg:svgBlip xmlns:asvg="http://schemas.microsoft.com/office/drawing/2016/SVG/main" r:embed="rId11"/>
               </a:ext>
             </a:extLst>
           </a:blip>
@@ -8949,13 +9071,13 @@
           <p:nvPr/>
         </p:nvPicPr>
         <p:blipFill>
-          <a:blip r:embed="rId11" cstate="print">
+          <a:blip r:embed="rId12" cstate="print">
             <a:extLst>
               <a:ext uri="{28A0092B-C50C-407E-A947-70E740481C1C}">
                 <a14:useLocalDpi xmlns:a14="http://schemas.microsoft.com/office/drawing/2010/main" val="0"/>
               </a:ext>
               <a:ext uri="{96DAC541-7B7A-43D3-8B79-37D633B846F1}">
-                <asvg:svgBlip xmlns:asvg="http://schemas.microsoft.com/office/drawing/2016/SVG/main" r:embed="rId12"/>
+                <asvg:svgBlip xmlns:asvg="http://schemas.microsoft.com/office/drawing/2016/SVG/main" r:embed="rId13"/>
               </a:ext>
             </a:extLst>
           </a:blip>
@@ -8982,13 +9104,13 @@
           <p:nvPr/>
         </p:nvPicPr>
         <p:blipFill>
-          <a:blip r:embed="rId9" cstate="print">
+          <a:blip r:embed="rId10" cstate="print">
             <a:extLst>
               <a:ext uri="{28A0092B-C50C-407E-A947-70E740481C1C}">
                 <a14:useLocalDpi xmlns:a14="http://schemas.microsoft.com/office/drawing/2010/main" val="0"/>
               </a:ext>
               <a:ext uri="{96DAC541-7B7A-43D3-8B79-37D633B846F1}">
-                <asvg:svgBlip xmlns:asvg="http://schemas.microsoft.com/office/drawing/2016/SVG/main" r:embed="rId10"/>
+                <asvg:svgBlip xmlns:asvg="http://schemas.microsoft.com/office/drawing/2016/SVG/main" r:embed="rId11"/>
               </a:ext>
             </a:extLst>
           </a:blip>
@@ -9015,13 +9137,13 @@
           <p:nvPr/>
         </p:nvPicPr>
         <p:blipFill>
-          <a:blip r:embed="rId13" cstate="print">
+          <a:blip r:embed="rId14" cstate="print">
             <a:extLst>
               <a:ext uri="{28A0092B-C50C-407E-A947-70E740481C1C}">
                 <a14:useLocalDpi xmlns:a14="http://schemas.microsoft.com/office/drawing/2010/main" val="0"/>
               </a:ext>
               <a:ext uri="{96DAC541-7B7A-43D3-8B79-37D633B846F1}">
-                <asvg:svgBlip xmlns:asvg="http://schemas.microsoft.com/office/drawing/2016/SVG/main" r:embed="rId14"/>
+                <asvg:svgBlip xmlns:asvg="http://schemas.microsoft.com/office/drawing/2016/SVG/main" r:embed="rId15"/>
               </a:ext>
             </a:extLst>
           </a:blip>
@@ -9384,13 +9506,13 @@
           <p:nvPr/>
         </p:nvPicPr>
         <p:blipFill>
-          <a:blip r:embed="rId15" cstate="print">
+          <a:blip r:embed="rId16" cstate="print">
             <a:extLst>
               <a:ext uri="{28A0092B-C50C-407E-A947-70E740481C1C}">
                 <a14:useLocalDpi xmlns:a14="http://schemas.microsoft.com/office/drawing/2010/main" val="0"/>
               </a:ext>
               <a:ext uri="{96DAC541-7B7A-43D3-8B79-37D633B846F1}">
-                <asvg:svgBlip xmlns:asvg="http://schemas.microsoft.com/office/drawing/2016/SVG/main" r:embed="rId16"/>
+                <asvg:svgBlip xmlns:asvg="http://schemas.microsoft.com/office/drawing/2016/SVG/main" r:embed="rId17"/>
               </a:ext>
             </a:extLst>
           </a:blip>
@@ -9417,13 +9539,13 @@
           <p:nvPr/>
         </p:nvPicPr>
         <p:blipFill>
-          <a:blip r:embed="rId17">
+          <a:blip r:embed="rId18">
             <a:extLst>
               <a:ext uri="{28A0092B-C50C-407E-A947-70E740481C1C}">
                 <a14:useLocalDpi xmlns:a14="http://schemas.microsoft.com/office/drawing/2010/main" val="0"/>
               </a:ext>
               <a:ext uri="{96DAC541-7B7A-43D3-8B79-37D633B846F1}">
-                <asvg:svgBlip xmlns:asvg="http://schemas.microsoft.com/office/drawing/2016/SVG/main" r:embed="rId18"/>
+                <asvg:svgBlip xmlns:asvg="http://schemas.microsoft.com/office/drawing/2016/SVG/main" r:embed="rId19"/>
               </a:ext>
             </a:extLst>
           </a:blip>
@@ -9569,13 +9691,13 @@
           <p:nvPr/>
         </p:nvPicPr>
         <p:blipFill>
-          <a:blip r:embed="rId19" cstate="print">
+          <a:blip r:embed="rId20" cstate="print">
             <a:extLst>
               <a:ext uri="{28A0092B-C50C-407E-A947-70E740481C1C}">
                 <a14:useLocalDpi xmlns:a14="http://schemas.microsoft.com/office/drawing/2010/main" val="0"/>
               </a:ext>
               <a:ext uri="{96DAC541-7B7A-43D3-8B79-37D633B846F1}">
-                <asvg:svgBlip xmlns:asvg="http://schemas.microsoft.com/office/drawing/2016/SVG/main" r:embed="rId20"/>
+                <asvg:svgBlip xmlns:asvg="http://schemas.microsoft.com/office/drawing/2016/SVG/main" r:embed="rId21"/>
               </a:ext>
             </a:extLst>
           </a:blip>
@@ -9844,6 +9966,8 @@
       </a:bgFillStyleLst>
     </a:fmtScheme>
   </a:themeElements>
+  <a:objectDefaults/>
+  <a:extraClrSchemeLst/>
   <a:extLst>
     <a:ext uri="{05A4C25C-085E-4340-85A3-A5531E510DB2}">
       <thm15:themeFamily xmlns:thm15="http://schemas.microsoft.com/office/thememl/2012/main" name="Office Theme" id="{62F939B6-93AF-4DB8-9C6B-D6C7DFDC589F}" vid="{4A3C46E8-61CC-4603-A589-7422A47A8E4A}"/>

--- a/img-source/images.pptx
+++ b/img-source/images.pptx
@@ -5,14 +5,14 @@
     <p:sldMasterId id="2147483648" r:id="rId1"/>
   </p:sldMasterIdLst>
   <p:sldIdLst>
-    <p:sldId id="256" r:id="rId3"/>
-    <p:sldId id="260" r:id="rId4"/>
-    <p:sldId id="259" r:id="rId5"/>
-    <p:sldId id="261" r:id="rId6"/>
-    <p:sldId id="262" r:id="rId7"/>
-    <p:sldId id="257" r:id="rId8"/>
-    <p:sldId id="258" r:id="rId9"/>
-    <p:sldId id="263" r:id="rId10"/>
+    <p:sldId id="256" r:id="rId2"/>
+    <p:sldId id="260" r:id="rId3"/>
+    <p:sldId id="259" r:id="rId4"/>
+    <p:sldId id="261" r:id="rId5"/>
+    <p:sldId id="262" r:id="rId6"/>
+    <p:sldId id="257" r:id="rId7"/>
+    <p:sldId id="258" r:id="rId8"/>
+    <p:sldId id="263" r:id="rId9"/>
   </p:sldIdLst>
   <p:sldSz cx="12192000" cy="6858000"/>
   <p:notesSz cx="6858000" cy="9144000"/>
@@ -185,7 +185,6 @@
               <a:rPr lang="zh-CN" altLang="en-US"/>
               <a:t>单击此处编辑母版标题样式</a:t>
             </a:r>
-            <a:endParaRPr lang="zh-CN" altLang="en-US"/>
           </a:p>
         </p:txBody>
       </p:sp>
@@ -250,7 +249,6 @@
               <a:rPr lang="zh-CN" altLang="en-US"/>
               <a:t>单击此处编辑母版副标题样式</a:t>
             </a:r>
-            <a:endParaRPr lang="zh-CN" altLang="en-US"/>
           </a:p>
         </p:txBody>
       </p:sp>
@@ -271,6 +269,7 @@
           <a:p>
             <a:fld id="{D997B5FA-0921-464F-AAE1-844C04324D75}" type="datetimeFigureOut">
               <a:rPr lang="zh-CN" altLang="en-US" smtClean="0"/>
+              <a:t>2026/1/20</a:t>
             </a:fld>
             <a:endParaRPr lang="zh-CN" altLang="en-US"/>
           </a:p>
@@ -312,6 +311,7 @@
           <a:p>
             <a:fld id="{565CE74E-AB26-4998-AD42-012C4C1AD076}" type="slidenum">
               <a:rPr lang="zh-CN" altLang="en-US" smtClean="0"/>
+              <a:t>‹#›</a:t>
             </a:fld>
             <a:endParaRPr lang="zh-CN" altLang="en-US"/>
           </a:p>
@@ -361,7 +361,6 @@
               <a:rPr lang="zh-CN" altLang="en-US"/>
               <a:t>单击此处编辑母版标题样式</a:t>
             </a:r>
-            <a:endParaRPr lang="zh-CN" altLang="en-US"/>
           </a:p>
         </p:txBody>
       </p:sp>
@@ -385,7 +384,6 @@
               <a:rPr lang="zh-CN" altLang="en-US"/>
               <a:t>单击此处编辑母版文本样式</a:t>
             </a:r>
-            <a:endParaRPr lang="zh-CN" altLang="en-US"/>
           </a:p>
           <a:p>
             <a:pPr lvl="1"/>
@@ -393,7 +391,6 @@
               <a:rPr lang="zh-CN" altLang="en-US"/>
               <a:t>第二级</a:t>
             </a:r>
-            <a:endParaRPr lang="zh-CN" altLang="en-US"/>
           </a:p>
           <a:p>
             <a:pPr lvl="2"/>
@@ -401,7 +398,6 @@
               <a:rPr lang="zh-CN" altLang="en-US"/>
               <a:t>第三级</a:t>
             </a:r>
-            <a:endParaRPr lang="zh-CN" altLang="en-US"/>
           </a:p>
           <a:p>
             <a:pPr lvl="3"/>
@@ -409,7 +405,6 @@
               <a:rPr lang="zh-CN" altLang="en-US"/>
               <a:t>第四级</a:t>
             </a:r>
-            <a:endParaRPr lang="zh-CN" altLang="en-US"/>
           </a:p>
           <a:p>
             <a:pPr lvl="4"/>
@@ -417,7 +412,6 @@
               <a:rPr lang="zh-CN" altLang="en-US"/>
               <a:t>第五级</a:t>
             </a:r>
-            <a:endParaRPr lang="zh-CN" altLang="en-US"/>
           </a:p>
         </p:txBody>
       </p:sp>
@@ -438,6 +432,7 @@
           <a:p>
             <a:fld id="{D997B5FA-0921-464F-AAE1-844C04324D75}" type="datetimeFigureOut">
               <a:rPr lang="zh-CN" altLang="en-US" smtClean="0"/>
+              <a:t>2026/1/20</a:t>
             </a:fld>
             <a:endParaRPr lang="zh-CN" altLang="en-US"/>
           </a:p>
@@ -479,6 +474,7 @@
           <a:p>
             <a:fld id="{565CE74E-AB26-4998-AD42-012C4C1AD076}" type="slidenum">
               <a:rPr lang="zh-CN" altLang="en-US" smtClean="0"/>
+              <a:t>‹#›</a:t>
             </a:fld>
             <a:endParaRPr lang="zh-CN" altLang="en-US"/>
           </a:p>
@@ -533,7 +529,6 @@
               <a:rPr lang="zh-CN" altLang="en-US"/>
               <a:t>单击此处编辑母版标题样式</a:t>
             </a:r>
-            <a:endParaRPr lang="zh-CN" altLang="en-US"/>
           </a:p>
         </p:txBody>
       </p:sp>
@@ -562,7 +557,6 @@
               <a:rPr lang="zh-CN" altLang="en-US"/>
               <a:t>单击此处编辑母版文本样式</a:t>
             </a:r>
-            <a:endParaRPr lang="zh-CN" altLang="en-US"/>
           </a:p>
           <a:p>
             <a:pPr lvl="1"/>
@@ -570,7 +564,6 @@
               <a:rPr lang="zh-CN" altLang="en-US"/>
               <a:t>第二级</a:t>
             </a:r>
-            <a:endParaRPr lang="zh-CN" altLang="en-US"/>
           </a:p>
           <a:p>
             <a:pPr lvl="2"/>
@@ -578,7 +571,6 @@
               <a:rPr lang="zh-CN" altLang="en-US"/>
               <a:t>第三级</a:t>
             </a:r>
-            <a:endParaRPr lang="zh-CN" altLang="en-US"/>
           </a:p>
           <a:p>
             <a:pPr lvl="3"/>
@@ -586,7 +578,6 @@
               <a:rPr lang="zh-CN" altLang="en-US"/>
               <a:t>第四级</a:t>
             </a:r>
-            <a:endParaRPr lang="zh-CN" altLang="en-US"/>
           </a:p>
           <a:p>
             <a:pPr lvl="4"/>
@@ -594,7 +585,6 @@
               <a:rPr lang="zh-CN" altLang="en-US"/>
               <a:t>第五级</a:t>
             </a:r>
-            <a:endParaRPr lang="zh-CN" altLang="en-US"/>
           </a:p>
         </p:txBody>
       </p:sp>
@@ -615,6 +605,7 @@
           <a:p>
             <a:fld id="{D997B5FA-0921-464F-AAE1-844C04324D75}" type="datetimeFigureOut">
               <a:rPr lang="zh-CN" altLang="en-US" smtClean="0"/>
+              <a:t>2026/1/20</a:t>
             </a:fld>
             <a:endParaRPr lang="zh-CN" altLang="en-US"/>
           </a:p>
@@ -656,6 +647,7 @@
           <a:p>
             <a:fld id="{565CE74E-AB26-4998-AD42-012C4C1AD076}" type="slidenum">
               <a:rPr lang="zh-CN" altLang="en-US" smtClean="0"/>
+              <a:t>‹#›</a:t>
             </a:fld>
             <a:endParaRPr lang="zh-CN" altLang="en-US"/>
           </a:p>
@@ -705,7 +697,6 @@
               <a:rPr lang="zh-CN" altLang="en-US"/>
               <a:t>单击此处编辑母版标题样式</a:t>
             </a:r>
-            <a:endParaRPr lang="zh-CN" altLang="en-US"/>
           </a:p>
         </p:txBody>
       </p:sp>
@@ -729,7 +720,6 @@
               <a:rPr lang="zh-CN" altLang="en-US"/>
               <a:t>单击此处编辑母版文本样式</a:t>
             </a:r>
-            <a:endParaRPr lang="zh-CN" altLang="en-US"/>
           </a:p>
           <a:p>
             <a:pPr lvl="1"/>
@@ -737,7 +727,6 @@
               <a:rPr lang="zh-CN" altLang="en-US"/>
               <a:t>第二级</a:t>
             </a:r>
-            <a:endParaRPr lang="zh-CN" altLang="en-US"/>
           </a:p>
           <a:p>
             <a:pPr lvl="2"/>
@@ -745,7 +734,6 @@
               <a:rPr lang="zh-CN" altLang="en-US"/>
               <a:t>第三级</a:t>
             </a:r>
-            <a:endParaRPr lang="zh-CN" altLang="en-US"/>
           </a:p>
           <a:p>
             <a:pPr lvl="3"/>
@@ -753,7 +741,6 @@
               <a:rPr lang="zh-CN" altLang="en-US"/>
               <a:t>第四级</a:t>
             </a:r>
-            <a:endParaRPr lang="zh-CN" altLang="en-US"/>
           </a:p>
           <a:p>
             <a:pPr lvl="4"/>
@@ -761,7 +748,6 @@
               <a:rPr lang="zh-CN" altLang="en-US"/>
               <a:t>第五级</a:t>
             </a:r>
-            <a:endParaRPr lang="zh-CN" altLang="en-US"/>
           </a:p>
         </p:txBody>
       </p:sp>
@@ -782,6 +768,7 @@
           <a:p>
             <a:fld id="{D997B5FA-0921-464F-AAE1-844C04324D75}" type="datetimeFigureOut">
               <a:rPr lang="zh-CN" altLang="en-US" smtClean="0"/>
+              <a:t>2026/1/20</a:t>
             </a:fld>
             <a:endParaRPr lang="zh-CN" altLang="en-US"/>
           </a:p>
@@ -823,6 +810,7 @@
           <a:p>
             <a:fld id="{565CE74E-AB26-4998-AD42-012C4C1AD076}" type="slidenum">
               <a:rPr lang="zh-CN" altLang="en-US" smtClean="0"/>
+              <a:t>‹#›</a:t>
             </a:fld>
             <a:endParaRPr lang="zh-CN" altLang="en-US"/>
           </a:p>
@@ -881,7 +869,6 @@
               <a:rPr lang="zh-CN" altLang="en-US"/>
               <a:t>单击此处编辑母版标题样式</a:t>
             </a:r>
-            <a:endParaRPr lang="zh-CN" altLang="en-US"/>
           </a:p>
         </p:txBody>
       </p:sp>
@@ -1001,7 +988,6 @@
               <a:rPr lang="zh-CN" altLang="en-US"/>
               <a:t>单击此处编辑母版文本样式</a:t>
             </a:r>
-            <a:endParaRPr lang="zh-CN" altLang="en-US"/>
           </a:p>
         </p:txBody>
       </p:sp>
@@ -1022,6 +1008,7 @@
           <a:p>
             <a:fld id="{D997B5FA-0921-464F-AAE1-844C04324D75}" type="datetimeFigureOut">
               <a:rPr lang="zh-CN" altLang="en-US" smtClean="0"/>
+              <a:t>2026/1/20</a:t>
             </a:fld>
             <a:endParaRPr lang="zh-CN" altLang="en-US"/>
           </a:p>
@@ -1063,6 +1050,7 @@
           <a:p>
             <a:fld id="{565CE74E-AB26-4998-AD42-012C4C1AD076}" type="slidenum">
               <a:rPr lang="zh-CN" altLang="en-US" smtClean="0"/>
+              <a:t>‹#›</a:t>
             </a:fld>
             <a:endParaRPr lang="zh-CN" altLang="en-US"/>
           </a:p>
@@ -1112,7 +1100,6 @@
               <a:rPr lang="zh-CN" altLang="en-US"/>
               <a:t>单击此处编辑母版标题样式</a:t>
             </a:r>
-            <a:endParaRPr lang="zh-CN" altLang="en-US"/>
           </a:p>
         </p:txBody>
       </p:sp>
@@ -1141,7 +1128,6 @@
               <a:rPr lang="zh-CN" altLang="en-US"/>
               <a:t>单击此处编辑母版文本样式</a:t>
             </a:r>
-            <a:endParaRPr lang="zh-CN" altLang="en-US"/>
           </a:p>
           <a:p>
             <a:pPr lvl="1"/>
@@ -1149,7 +1135,6 @@
               <a:rPr lang="zh-CN" altLang="en-US"/>
               <a:t>第二级</a:t>
             </a:r>
-            <a:endParaRPr lang="zh-CN" altLang="en-US"/>
           </a:p>
           <a:p>
             <a:pPr lvl="2"/>
@@ -1157,7 +1142,6 @@
               <a:rPr lang="zh-CN" altLang="en-US"/>
               <a:t>第三级</a:t>
             </a:r>
-            <a:endParaRPr lang="zh-CN" altLang="en-US"/>
           </a:p>
           <a:p>
             <a:pPr lvl="3"/>
@@ -1165,7 +1149,6 @@
               <a:rPr lang="zh-CN" altLang="en-US"/>
               <a:t>第四级</a:t>
             </a:r>
-            <a:endParaRPr lang="zh-CN" altLang="en-US"/>
           </a:p>
           <a:p>
             <a:pPr lvl="4"/>
@@ -1173,7 +1156,6 @@
               <a:rPr lang="zh-CN" altLang="en-US"/>
               <a:t>第五级</a:t>
             </a:r>
-            <a:endParaRPr lang="zh-CN" altLang="en-US"/>
           </a:p>
         </p:txBody>
       </p:sp>
@@ -1202,7 +1184,6 @@
               <a:rPr lang="zh-CN" altLang="en-US"/>
               <a:t>单击此处编辑母版文本样式</a:t>
             </a:r>
-            <a:endParaRPr lang="zh-CN" altLang="en-US"/>
           </a:p>
           <a:p>
             <a:pPr lvl="1"/>
@@ -1210,7 +1191,6 @@
               <a:rPr lang="zh-CN" altLang="en-US"/>
               <a:t>第二级</a:t>
             </a:r>
-            <a:endParaRPr lang="zh-CN" altLang="en-US"/>
           </a:p>
           <a:p>
             <a:pPr lvl="2"/>
@@ -1218,7 +1198,6 @@
               <a:rPr lang="zh-CN" altLang="en-US"/>
               <a:t>第三级</a:t>
             </a:r>
-            <a:endParaRPr lang="zh-CN" altLang="en-US"/>
           </a:p>
           <a:p>
             <a:pPr lvl="3"/>
@@ -1226,7 +1205,6 @@
               <a:rPr lang="zh-CN" altLang="en-US"/>
               <a:t>第四级</a:t>
             </a:r>
-            <a:endParaRPr lang="zh-CN" altLang="en-US"/>
           </a:p>
           <a:p>
             <a:pPr lvl="4"/>
@@ -1234,7 +1212,6 @@
               <a:rPr lang="zh-CN" altLang="en-US"/>
               <a:t>第五级</a:t>
             </a:r>
-            <a:endParaRPr lang="zh-CN" altLang="en-US"/>
           </a:p>
         </p:txBody>
       </p:sp>
@@ -1255,6 +1232,7 @@
           <a:p>
             <a:fld id="{D997B5FA-0921-464F-AAE1-844C04324D75}" type="datetimeFigureOut">
               <a:rPr lang="zh-CN" altLang="en-US" smtClean="0"/>
+              <a:t>2026/1/20</a:t>
             </a:fld>
             <a:endParaRPr lang="zh-CN" altLang="en-US"/>
           </a:p>
@@ -1296,6 +1274,7 @@
           <a:p>
             <a:fld id="{565CE74E-AB26-4998-AD42-012C4C1AD076}" type="slidenum">
               <a:rPr lang="zh-CN" altLang="en-US" smtClean="0"/>
+              <a:t>‹#›</a:t>
             </a:fld>
             <a:endParaRPr lang="zh-CN" altLang="en-US"/>
           </a:p>
@@ -1350,7 +1329,6 @@
               <a:rPr lang="zh-CN" altLang="en-US"/>
               <a:t>单击此处编辑母版标题样式</a:t>
             </a:r>
-            <a:endParaRPr lang="zh-CN" altLang="en-US"/>
           </a:p>
         </p:txBody>
       </p:sp>
@@ -1416,7 +1394,6 @@
               <a:rPr lang="zh-CN" altLang="en-US"/>
               <a:t>单击此处编辑母版文本样式</a:t>
             </a:r>
-            <a:endParaRPr lang="zh-CN" altLang="en-US"/>
           </a:p>
         </p:txBody>
       </p:sp>
@@ -1445,7 +1422,6 @@
               <a:rPr lang="zh-CN" altLang="en-US"/>
               <a:t>单击此处编辑母版文本样式</a:t>
             </a:r>
-            <a:endParaRPr lang="zh-CN" altLang="en-US"/>
           </a:p>
           <a:p>
             <a:pPr lvl="1"/>
@@ -1453,7 +1429,6 @@
               <a:rPr lang="zh-CN" altLang="en-US"/>
               <a:t>第二级</a:t>
             </a:r>
-            <a:endParaRPr lang="zh-CN" altLang="en-US"/>
           </a:p>
           <a:p>
             <a:pPr lvl="2"/>
@@ -1461,7 +1436,6 @@
               <a:rPr lang="zh-CN" altLang="en-US"/>
               <a:t>第三级</a:t>
             </a:r>
-            <a:endParaRPr lang="zh-CN" altLang="en-US"/>
           </a:p>
           <a:p>
             <a:pPr lvl="3"/>
@@ -1469,7 +1443,6 @@
               <a:rPr lang="zh-CN" altLang="en-US"/>
               <a:t>第四级</a:t>
             </a:r>
-            <a:endParaRPr lang="zh-CN" altLang="en-US"/>
           </a:p>
           <a:p>
             <a:pPr lvl="4"/>
@@ -1477,7 +1450,6 @@
               <a:rPr lang="zh-CN" altLang="en-US"/>
               <a:t>第五级</a:t>
             </a:r>
-            <a:endParaRPr lang="zh-CN" altLang="en-US"/>
           </a:p>
         </p:txBody>
       </p:sp>
@@ -1543,7 +1515,6 @@
               <a:rPr lang="zh-CN" altLang="en-US"/>
               <a:t>单击此处编辑母版文本样式</a:t>
             </a:r>
-            <a:endParaRPr lang="zh-CN" altLang="en-US"/>
           </a:p>
         </p:txBody>
       </p:sp>
@@ -1572,7 +1543,6 @@
               <a:rPr lang="zh-CN" altLang="en-US"/>
               <a:t>单击此处编辑母版文本样式</a:t>
             </a:r>
-            <a:endParaRPr lang="zh-CN" altLang="en-US"/>
           </a:p>
           <a:p>
             <a:pPr lvl="1"/>
@@ -1580,7 +1550,6 @@
               <a:rPr lang="zh-CN" altLang="en-US"/>
               <a:t>第二级</a:t>
             </a:r>
-            <a:endParaRPr lang="zh-CN" altLang="en-US"/>
           </a:p>
           <a:p>
             <a:pPr lvl="2"/>
@@ -1588,7 +1557,6 @@
               <a:rPr lang="zh-CN" altLang="en-US"/>
               <a:t>第三级</a:t>
             </a:r>
-            <a:endParaRPr lang="zh-CN" altLang="en-US"/>
           </a:p>
           <a:p>
             <a:pPr lvl="3"/>
@@ -1596,7 +1564,6 @@
               <a:rPr lang="zh-CN" altLang="en-US"/>
               <a:t>第四级</a:t>
             </a:r>
-            <a:endParaRPr lang="zh-CN" altLang="en-US"/>
           </a:p>
           <a:p>
             <a:pPr lvl="4"/>
@@ -1604,7 +1571,6 @@
               <a:rPr lang="zh-CN" altLang="en-US"/>
               <a:t>第五级</a:t>
             </a:r>
-            <a:endParaRPr lang="zh-CN" altLang="en-US"/>
           </a:p>
         </p:txBody>
       </p:sp>
@@ -1625,6 +1591,7 @@
           <a:p>
             <a:fld id="{D997B5FA-0921-464F-AAE1-844C04324D75}" type="datetimeFigureOut">
               <a:rPr lang="zh-CN" altLang="en-US" smtClean="0"/>
+              <a:t>2026/1/20</a:t>
             </a:fld>
             <a:endParaRPr lang="zh-CN" altLang="en-US"/>
           </a:p>
@@ -1666,6 +1633,7 @@
           <a:p>
             <a:fld id="{565CE74E-AB26-4998-AD42-012C4C1AD076}" type="slidenum">
               <a:rPr lang="zh-CN" altLang="en-US" smtClean="0"/>
+              <a:t>‹#›</a:t>
             </a:fld>
             <a:endParaRPr lang="zh-CN" altLang="en-US"/>
           </a:p>
@@ -1715,7 +1683,6 @@
               <a:rPr lang="zh-CN" altLang="en-US"/>
               <a:t>单击此处编辑母版标题样式</a:t>
             </a:r>
-            <a:endParaRPr lang="zh-CN" altLang="en-US"/>
           </a:p>
         </p:txBody>
       </p:sp>
@@ -1736,6 +1703,7 @@
           <a:p>
             <a:fld id="{D997B5FA-0921-464F-AAE1-844C04324D75}" type="datetimeFigureOut">
               <a:rPr lang="zh-CN" altLang="en-US" smtClean="0"/>
+              <a:t>2026/1/20</a:t>
             </a:fld>
             <a:endParaRPr lang="zh-CN" altLang="en-US"/>
           </a:p>
@@ -1777,6 +1745,7 @@
           <a:p>
             <a:fld id="{565CE74E-AB26-4998-AD42-012C4C1AD076}" type="slidenum">
               <a:rPr lang="zh-CN" altLang="en-US" smtClean="0"/>
+              <a:t>‹#›</a:t>
             </a:fld>
             <a:endParaRPr lang="zh-CN" altLang="en-US"/>
           </a:p>
@@ -1824,6 +1793,7 @@
           <a:p>
             <a:fld id="{D997B5FA-0921-464F-AAE1-844C04324D75}" type="datetimeFigureOut">
               <a:rPr lang="zh-CN" altLang="en-US" smtClean="0"/>
+              <a:t>2026/1/20</a:t>
             </a:fld>
             <a:endParaRPr lang="zh-CN" altLang="en-US"/>
           </a:p>
@@ -1865,6 +1835,7 @@
           <a:p>
             <a:fld id="{565CE74E-AB26-4998-AD42-012C4C1AD076}" type="slidenum">
               <a:rPr lang="zh-CN" altLang="en-US" smtClean="0"/>
+              <a:t>‹#›</a:t>
             </a:fld>
             <a:endParaRPr lang="zh-CN" altLang="en-US"/>
           </a:p>
@@ -1923,7 +1894,6 @@
               <a:rPr lang="zh-CN" altLang="en-US"/>
               <a:t>单击此处编辑母版标题样式</a:t>
             </a:r>
-            <a:endParaRPr lang="zh-CN" altLang="en-US"/>
           </a:p>
         </p:txBody>
       </p:sp>
@@ -1980,7 +1950,6 @@
               <a:rPr lang="zh-CN" altLang="en-US"/>
               <a:t>单击此处编辑母版文本样式</a:t>
             </a:r>
-            <a:endParaRPr lang="zh-CN" altLang="en-US"/>
           </a:p>
           <a:p>
             <a:pPr lvl="1"/>
@@ -1988,7 +1957,6 @@
               <a:rPr lang="zh-CN" altLang="en-US"/>
               <a:t>第二级</a:t>
             </a:r>
-            <a:endParaRPr lang="zh-CN" altLang="en-US"/>
           </a:p>
           <a:p>
             <a:pPr lvl="2"/>
@@ -1996,7 +1964,6 @@
               <a:rPr lang="zh-CN" altLang="en-US"/>
               <a:t>第三级</a:t>
             </a:r>
-            <a:endParaRPr lang="zh-CN" altLang="en-US"/>
           </a:p>
           <a:p>
             <a:pPr lvl="3"/>
@@ -2004,7 +1971,6 @@
               <a:rPr lang="zh-CN" altLang="en-US"/>
               <a:t>第四级</a:t>
             </a:r>
-            <a:endParaRPr lang="zh-CN" altLang="en-US"/>
           </a:p>
           <a:p>
             <a:pPr lvl="4"/>
@@ -2012,7 +1978,6 @@
               <a:rPr lang="zh-CN" altLang="en-US"/>
               <a:t>第五级</a:t>
             </a:r>
-            <a:endParaRPr lang="zh-CN" altLang="en-US"/>
           </a:p>
         </p:txBody>
       </p:sp>
@@ -2078,7 +2043,6 @@
               <a:rPr lang="zh-CN" altLang="en-US"/>
               <a:t>单击此处编辑母版文本样式</a:t>
             </a:r>
-            <a:endParaRPr lang="zh-CN" altLang="en-US"/>
           </a:p>
         </p:txBody>
       </p:sp>
@@ -2099,6 +2063,7 @@
           <a:p>
             <a:fld id="{D997B5FA-0921-464F-AAE1-844C04324D75}" type="datetimeFigureOut">
               <a:rPr lang="zh-CN" altLang="en-US" smtClean="0"/>
+              <a:t>2026/1/20</a:t>
             </a:fld>
             <a:endParaRPr lang="zh-CN" altLang="en-US"/>
           </a:p>
@@ -2140,6 +2105,7 @@
           <a:p>
             <a:fld id="{565CE74E-AB26-4998-AD42-012C4C1AD076}" type="slidenum">
               <a:rPr lang="zh-CN" altLang="en-US" smtClean="0"/>
+              <a:t>‹#›</a:t>
             </a:fld>
             <a:endParaRPr lang="zh-CN" altLang="en-US"/>
           </a:p>
@@ -2198,7 +2164,6 @@
               <a:rPr lang="zh-CN" altLang="en-US"/>
               <a:t>单击此处编辑母版标题样式</a:t>
             </a:r>
-            <a:endParaRPr lang="zh-CN" altLang="en-US"/>
           </a:p>
         </p:txBody>
       </p:sp>
@@ -2325,7 +2290,6 @@
               <a:rPr lang="zh-CN" altLang="en-US"/>
               <a:t>单击此处编辑母版文本样式</a:t>
             </a:r>
-            <a:endParaRPr lang="zh-CN" altLang="en-US"/>
           </a:p>
         </p:txBody>
       </p:sp>
@@ -2346,6 +2310,7 @@
           <a:p>
             <a:fld id="{D997B5FA-0921-464F-AAE1-844C04324D75}" type="datetimeFigureOut">
               <a:rPr lang="zh-CN" altLang="en-US" smtClean="0"/>
+              <a:t>2026/1/20</a:t>
             </a:fld>
             <a:endParaRPr lang="zh-CN" altLang="en-US"/>
           </a:p>
@@ -2387,6 +2352,7 @@
           <a:p>
             <a:fld id="{565CE74E-AB26-4998-AD42-012C4C1AD076}" type="slidenum">
               <a:rPr lang="zh-CN" altLang="en-US" smtClean="0"/>
+              <a:t>‹#›</a:t>
             </a:fld>
             <a:endParaRPr lang="zh-CN" altLang="en-US"/>
           </a:p>
@@ -2451,7 +2417,6 @@
               <a:rPr lang="zh-CN" altLang="en-US"/>
               <a:t>单击此处编辑母版标题样式</a:t>
             </a:r>
-            <a:endParaRPr lang="zh-CN" altLang="en-US"/>
           </a:p>
         </p:txBody>
       </p:sp>
@@ -2485,7 +2450,6 @@
               <a:rPr lang="zh-CN" altLang="en-US"/>
               <a:t>单击此处编辑母版文本样式</a:t>
             </a:r>
-            <a:endParaRPr lang="zh-CN" altLang="en-US"/>
           </a:p>
           <a:p>
             <a:pPr lvl="1"/>
@@ -2493,7 +2457,6 @@
               <a:rPr lang="zh-CN" altLang="en-US"/>
               <a:t>第二级</a:t>
             </a:r>
-            <a:endParaRPr lang="zh-CN" altLang="en-US"/>
           </a:p>
           <a:p>
             <a:pPr lvl="2"/>
@@ -2501,7 +2464,6 @@
               <a:rPr lang="zh-CN" altLang="en-US"/>
               <a:t>第三级</a:t>
             </a:r>
-            <a:endParaRPr lang="zh-CN" altLang="en-US"/>
           </a:p>
           <a:p>
             <a:pPr lvl="3"/>
@@ -2509,7 +2471,6 @@
               <a:rPr lang="zh-CN" altLang="en-US"/>
               <a:t>第四级</a:t>
             </a:r>
-            <a:endParaRPr lang="zh-CN" altLang="en-US"/>
           </a:p>
           <a:p>
             <a:pPr lvl="4"/>
@@ -2517,7 +2478,6 @@
               <a:rPr lang="zh-CN" altLang="en-US"/>
               <a:t>第五级</a:t>
             </a:r>
-            <a:endParaRPr lang="zh-CN" altLang="en-US"/>
           </a:p>
         </p:txBody>
       </p:sp>
@@ -2556,6 +2516,7 @@
           <a:p>
             <a:fld id="{D997B5FA-0921-464F-AAE1-844C04324D75}" type="datetimeFigureOut">
               <a:rPr lang="zh-CN" altLang="en-US" smtClean="0"/>
+              <a:t>2026/1/20</a:t>
             </a:fld>
             <a:endParaRPr lang="zh-CN" altLang="en-US"/>
           </a:p>
@@ -2633,6 +2594,7 @@
           <a:p>
             <a:fld id="{565CE74E-AB26-4998-AD42-012C4C1AD076}" type="slidenum">
               <a:rPr lang="zh-CN" altLang="en-US" smtClean="0"/>
+              <a:t>‹#›</a:t>
             </a:fld>
             <a:endParaRPr lang="zh-CN" altLang="en-US"/>
           </a:p>
@@ -3102,13 +3064,13 @@
           <p:nvPr/>
         </p:nvPicPr>
         <p:blipFill>
-          <a:blip r:embed="rId1" cstate="print">
+          <a:blip r:embed="rId2" cstate="print">
             <a:extLst>
               <a:ext uri="{28A0092B-C50C-407E-A947-70E740481C1C}">
                 <a14:useLocalDpi xmlns:a14="http://schemas.microsoft.com/office/drawing/2010/main" val="0"/>
               </a:ext>
               <a:ext uri="{96DAC541-7B7A-43D3-8B79-37D633B846F1}">
-                <asvg:svgBlip xmlns:asvg="http://schemas.microsoft.com/office/drawing/2016/SVG/main" r:embed="rId2"/>
+                <asvg:svgBlip xmlns:asvg="http://schemas.microsoft.com/office/drawing/2016/SVG/main" r:embed="rId3"/>
               </a:ext>
             </a:extLst>
           </a:blip>
@@ -3135,13 +3097,13 @@
           <p:nvPr/>
         </p:nvPicPr>
         <p:blipFill>
-          <a:blip r:embed="rId3" cstate="print">
+          <a:blip r:embed="rId4" cstate="print">
             <a:extLst>
               <a:ext uri="{28A0092B-C50C-407E-A947-70E740481C1C}">
                 <a14:useLocalDpi xmlns:a14="http://schemas.microsoft.com/office/drawing/2010/main" val="0"/>
               </a:ext>
               <a:ext uri="{96DAC541-7B7A-43D3-8B79-37D633B846F1}">
-                <asvg:svgBlip xmlns:asvg="http://schemas.microsoft.com/office/drawing/2016/SVG/main" r:embed="rId4"/>
+                <asvg:svgBlip xmlns:asvg="http://schemas.microsoft.com/office/drawing/2016/SVG/main" r:embed="rId5"/>
               </a:ext>
             </a:extLst>
           </a:blip>
@@ -3168,13 +3130,13 @@
           <p:nvPr/>
         </p:nvPicPr>
         <p:blipFill>
-          <a:blip r:embed="rId5" cstate="print">
+          <a:blip r:embed="rId6" cstate="print">
             <a:extLst>
               <a:ext uri="{28A0092B-C50C-407E-A947-70E740481C1C}">
                 <a14:useLocalDpi xmlns:a14="http://schemas.microsoft.com/office/drawing/2010/main" val="0"/>
               </a:ext>
               <a:ext uri="{96DAC541-7B7A-43D3-8B79-37D633B846F1}">
-                <asvg:svgBlip xmlns:asvg="http://schemas.microsoft.com/office/drawing/2016/SVG/main" r:embed="rId6"/>
+                <asvg:svgBlip xmlns:asvg="http://schemas.microsoft.com/office/drawing/2016/SVG/main" r:embed="rId7"/>
               </a:ext>
             </a:extLst>
           </a:blip>
@@ -3201,13 +3163,13 @@
           <p:nvPr/>
         </p:nvPicPr>
         <p:blipFill>
-          <a:blip r:embed="rId7" cstate="print">
+          <a:blip r:embed="rId8" cstate="print">
             <a:extLst>
               <a:ext uri="{28A0092B-C50C-407E-A947-70E740481C1C}">
                 <a14:useLocalDpi xmlns:a14="http://schemas.microsoft.com/office/drawing/2010/main" val="0"/>
               </a:ext>
               <a:ext uri="{96DAC541-7B7A-43D3-8B79-37D633B846F1}">
-                <asvg:svgBlip xmlns:asvg="http://schemas.microsoft.com/office/drawing/2016/SVG/main" r:embed="rId8"/>
+                <asvg:svgBlip xmlns:asvg="http://schemas.microsoft.com/office/drawing/2016/SVG/main" r:embed="rId9"/>
               </a:ext>
             </a:extLst>
           </a:blip>
@@ -3234,13 +3196,13 @@
           <p:nvPr/>
         </p:nvPicPr>
         <p:blipFill>
-          <a:blip r:embed="rId9" cstate="print">
+          <a:blip r:embed="rId10" cstate="print">
             <a:extLst>
               <a:ext uri="{28A0092B-C50C-407E-A947-70E740481C1C}">
                 <a14:useLocalDpi xmlns:a14="http://schemas.microsoft.com/office/drawing/2010/main" val="0"/>
               </a:ext>
               <a:ext uri="{96DAC541-7B7A-43D3-8B79-37D633B846F1}">
-                <asvg:svgBlip xmlns:asvg="http://schemas.microsoft.com/office/drawing/2016/SVG/main" r:embed="rId10"/>
+                <asvg:svgBlip xmlns:asvg="http://schemas.microsoft.com/office/drawing/2016/SVG/main" r:embed="rId11"/>
               </a:ext>
             </a:extLst>
           </a:blip>
@@ -3267,13 +3229,13 @@
           <p:nvPr/>
         </p:nvPicPr>
         <p:blipFill>
-          <a:blip r:embed="rId11" cstate="print">
+          <a:blip r:embed="rId12" cstate="print">
             <a:extLst>
               <a:ext uri="{28A0092B-C50C-407E-A947-70E740481C1C}">
                 <a14:useLocalDpi xmlns:a14="http://schemas.microsoft.com/office/drawing/2010/main" val="0"/>
               </a:ext>
               <a:ext uri="{96DAC541-7B7A-43D3-8B79-37D633B846F1}">
-                <asvg:svgBlip xmlns:asvg="http://schemas.microsoft.com/office/drawing/2016/SVG/main" r:embed="rId12"/>
+                <asvg:svgBlip xmlns:asvg="http://schemas.microsoft.com/office/drawing/2016/SVG/main" r:embed="rId13"/>
               </a:ext>
             </a:extLst>
           </a:blip>
@@ -3300,13 +3262,13 @@
           <p:nvPr/>
         </p:nvPicPr>
         <p:blipFill>
-          <a:blip r:embed="rId13" cstate="print">
+          <a:blip r:embed="rId14" cstate="print">
             <a:extLst>
               <a:ext uri="{28A0092B-C50C-407E-A947-70E740481C1C}">
                 <a14:useLocalDpi xmlns:a14="http://schemas.microsoft.com/office/drawing/2010/main" val="0"/>
               </a:ext>
               <a:ext uri="{96DAC541-7B7A-43D3-8B79-37D633B846F1}">
-                <asvg:svgBlip xmlns:asvg="http://schemas.microsoft.com/office/drawing/2016/SVG/main" r:embed="rId14"/>
+                <asvg:svgBlip xmlns:asvg="http://schemas.microsoft.com/office/drawing/2016/SVG/main" r:embed="rId15"/>
               </a:ext>
             </a:extLst>
           </a:blip>
@@ -3333,13 +3295,13 @@
           <p:nvPr/>
         </p:nvPicPr>
         <p:blipFill>
-          <a:blip r:embed="rId15" cstate="print">
+          <a:blip r:embed="rId16" cstate="print">
             <a:extLst>
               <a:ext uri="{28A0092B-C50C-407E-A947-70E740481C1C}">
                 <a14:useLocalDpi xmlns:a14="http://schemas.microsoft.com/office/drawing/2010/main" val="0"/>
               </a:ext>
               <a:ext uri="{96DAC541-7B7A-43D3-8B79-37D633B846F1}">
-                <asvg:svgBlip xmlns:asvg="http://schemas.microsoft.com/office/drawing/2016/SVG/main" r:embed="rId16"/>
+                <asvg:svgBlip xmlns:asvg="http://schemas.microsoft.com/office/drawing/2016/SVG/main" r:embed="rId17"/>
               </a:ext>
             </a:extLst>
           </a:blip>
@@ -3366,13 +3328,13 @@
           <p:nvPr/>
         </p:nvPicPr>
         <p:blipFill>
-          <a:blip r:embed="rId17" cstate="print">
+          <a:blip r:embed="rId18" cstate="print">
             <a:extLst>
               <a:ext uri="{28A0092B-C50C-407E-A947-70E740481C1C}">
                 <a14:useLocalDpi xmlns:a14="http://schemas.microsoft.com/office/drawing/2010/main" val="0"/>
               </a:ext>
               <a:ext uri="{96DAC541-7B7A-43D3-8B79-37D633B846F1}">
-                <asvg:svgBlip xmlns:asvg="http://schemas.microsoft.com/office/drawing/2016/SVG/main" r:embed="rId18"/>
+                <asvg:svgBlip xmlns:asvg="http://schemas.microsoft.com/office/drawing/2016/SVG/main" r:embed="rId19"/>
               </a:ext>
             </a:extLst>
           </a:blip>
@@ -3399,13 +3361,13 @@
           <p:nvPr/>
         </p:nvPicPr>
         <p:blipFill>
-          <a:blip r:embed="rId19" cstate="print">
+          <a:blip r:embed="rId20" cstate="print">
             <a:extLst>
               <a:ext uri="{28A0092B-C50C-407E-A947-70E740481C1C}">
                 <a14:useLocalDpi xmlns:a14="http://schemas.microsoft.com/office/drawing/2010/main" val="0"/>
               </a:ext>
               <a:ext uri="{96DAC541-7B7A-43D3-8B79-37D633B846F1}">
-                <asvg:svgBlip xmlns:asvg="http://schemas.microsoft.com/office/drawing/2016/SVG/main" r:embed="rId20"/>
+                <asvg:svgBlip xmlns:asvg="http://schemas.microsoft.com/office/drawing/2016/SVG/main" r:embed="rId21"/>
               </a:ext>
             </a:extLst>
           </a:blip>
@@ -3432,13 +3394,13 @@
           <p:nvPr/>
         </p:nvPicPr>
         <p:blipFill>
-          <a:blip r:embed="rId21" cstate="print">
+          <a:blip r:embed="rId22" cstate="print">
             <a:extLst>
               <a:ext uri="{28A0092B-C50C-407E-A947-70E740481C1C}">
                 <a14:useLocalDpi xmlns:a14="http://schemas.microsoft.com/office/drawing/2010/main" val="0"/>
               </a:ext>
               <a:ext uri="{96DAC541-7B7A-43D3-8B79-37D633B846F1}">
-                <asvg:svgBlip xmlns:asvg="http://schemas.microsoft.com/office/drawing/2016/SVG/main" r:embed="rId22"/>
+                <asvg:svgBlip xmlns:asvg="http://schemas.microsoft.com/office/drawing/2016/SVG/main" r:embed="rId23"/>
               </a:ext>
             </a:extLst>
           </a:blip>
@@ -3465,13 +3427,13 @@
           <p:nvPr/>
         </p:nvPicPr>
         <p:blipFill>
-          <a:blip r:embed="rId23" cstate="print">
+          <a:blip r:embed="rId24" cstate="print">
             <a:extLst>
               <a:ext uri="{28A0092B-C50C-407E-A947-70E740481C1C}">
                 <a14:useLocalDpi xmlns:a14="http://schemas.microsoft.com/office/drawing/2010/main" val="0"/>
               </a:ext>
               <a:ext uri="{96DAC541-7B7A-43D3-8B79-37D633B846F1}">
-                <asvg:svgBlip xmlns:asvg="http://schemas.microsoft.com/office/drawing/2016/SVG/main" r:embed="rId24"/>
+                <asvg:svgBlip xmlns:asvg="http://schemas.microsoft.com/office/drawing/2016/SVG/main" r:embed="rId25"/>
               </a:ext>
             </a:extLst>
           </a:blip>
@@ -3498,13 +3460,13 @@
           <p:nvPr/>
         </p:nvPicPr>
         <p:blipFill>
-          <a:blip r:embed="rId25" cstate="print">
+          <a:blip r:embed="rId26" cstate="print">
             <a:extLst>
               <a:ext uri="{28A0092B-C50C-407E-A947-70E740481C1C}">
                 <a14:useLocalDpi xmlns:a14="http://schemas.microsoft.com/office/drawing/2010/main" val="0"/>
               </a:ext>
               <a:ext uri="{96DAC541-7B7A-43D3-8B79-37D633B846F1}">
-                <asvg:svgBlip xmlns:asvg="http://schemas.microsoft.com/office/drawing/2016/SVG/main" r:embed="rId26"/>
+                <asvg:svgBlip xmlns:asvg="http://schemas.microsoft.com/office/drawing/2016/SVG/main" r:embed="rId27"/>
               </a:ext>
             </a:extLst>
           </a:blip>
@@ -3531,13 +3493,13 @@
           <p:nvPr/>
         </p:nvPicPr>
         <p:blipFill>
-          <a:blip r:embed="rId27" cstate="print">
+          <a:blip r:embed="rId28" cstate="print">
             <a:extLst>
               <a:ext uri="{28A0092B-C50C-407E-A947-70E740481C1C}">
                 <a14:useLocalDpi xmlns:a14="http://schemas.microsoft.com/office/drawing/2010/main" val="0"/>
               </a:ext>
               <a:ext uri="{96DAC541-7B7A-43D3-8B79-37D633B846F1}">
-                <asvg:svgBlip xmlns:asvg="http://schemas.microsoft.com/office/drawing/2016/SVG/main" r:embed="rId28"/>
+                <asvg:svgBlip xmlns:asvg="http://schemas.microsoft.com/office/drawing/2016/SVG/main" r:embed="rId29"/>
               </a:ext>
             </a:extLst>
           </a:blip>
@@ -3564,13 +3526,13 @@
           <p:nvPr/>
         </p:nvPicPr>
         <p:blipFill>
-          <a:blip r:embed="rId29" cstate="print">
+          <a:blip r:embed="rId30" cstate="print">
             <a:extLst>
               <a:ext uri="{28A0092B-C50C-407E-A947-70E740481C1C}">
                 <a14:useLocalDpi xmlns:a14="http://schemas.microsoft.com/office/drawing/2010/main" val="0"/>
               </a:ext>
               <a:ext uri="{96DAC541-7B7A-43D3-8B79-37D633B846F1}">
-                <asvg:svgBlip xmlns:asvg="http://schemas.microsoft.com/office/drawing/2016/SVG/main" r:embed="rId30"/>
+                <asvg:svgBlip xmlns:asvg="http://schemas.microsoft.com/office/drawing/2016/SVG/main" r:embed="rId31"/>
               </a:ext>
             </a:extLst>
           </a:blip>
@@ -3878,13 +3840,13 @@
           <p:nvPr/>
         </p:nvPicPr>
         <p:blipFill>
-          <a:blip r:embed="rId31" cstate="print">
+          <a:blip r:embed="rId32" cstate="print">
             <a:extLst>
               <a:ext uri="{28A0092B-C50C-407E-A947-70E740481C1C}">
                 <a14:useLocalDpi xmlns:a14="http://schemas.microsoft.com/office/drawing/2010/main" val="0"/>
               </a:ext>
               <a:ext uri="{96DAC541-7B7A-43D3-8B79-37D633B846F1}">
-                <asvg:svgBlip xmlns:asvg="http://schemas.microsoft.com/office/drawing/2016/SVG/main" r:embed="rId32"/>
+                <asvg:svgBlip xmlns:asvg="http://schemas.microsoft.com/office/drawing/2016/SVG/main" r:embed="rId33"/>
               </a:ext>
             </a:extLst>
           </a:blip>
@@ -3911,13 +3873,13 @@
           <p:nvPr/>
         </p:nvPicPr>
         <p:blipFill>
-          <a:blip r:embed="rId33" cstate="print">
+          <a:blip r:embed="rId34" cstate="print">
             <a:extLst>
               <a:ext uri="{28A0092B-C50C-407E-A947-70E740481C1C}">
                 <a14:useLocalDpi xmlns:a14="http://schemas.microsoft.com/office/drawing/2010/main" val="0"/>
               </a:ext>
               <a:ext uri="{96DAC541-7B7A-43D3-8B79-37D633B846F1}">
-                <asvg:svgBlip xmlns:asvg="http://schemas.microsoft.com/office/drawing/2016/SVG/main" r:embed="rId34"/>
+                <asvg:svgBlip xmlns:asvg="http://schemas.microsoft.com/office/drawing/2016/SVG/main" r:embed="rId35"/>
               </a:ext>
             </a:extLst>
           </a:blip>
@@ -3944,10 +3906,10 @@
           <p:nvPr/>
         </p:nvPicPr>
         <p:blipFill>
-          <a:blip r:embed="rId35">
+          <a:blip r:embed="rId36">
             <a:extLst>
               <a:ext uri="{96DAC541-7B7A-43D3-8B79-37D633B846F1}">
-                <asvg:svgBlip xmlns:asvg="http://schemas.microsoft.com/office/drawing/2016/SVG/main" r:embed="rId36"/>
+                <asvg:svgBlip xmlns:asvg="http://schemas.microsoft.com/office/drawing/2016/SVG/main" r:embed="rId37"/>
               </a:ext>
             </a:extLst>
           </a:blip>
@@ -3974,13 +3936,13 @@
           <p:nvPr/>
         </p:nvPicPr>
         <p:blipFill>
-          <a:blip r:embed="rId37">
+          <a:blip r:embed="rId38">
             <a:extLst>
               <a:ext uri="{28A0092B-C50C-407E-A947-70E740481C1C}">
                 <a14:useLocalDpi xmlns:a14="http://schemas.microsoft.com/office/drawing/2010/main" val="0"/>
               </a:ext>
               <a:ext uri="{96DAC541-7B7A-43D3-8B79-37D633B846F1}">
-                <asvg:svgBlip xmlns:asvg="http://schemas.microsoft.com/office/drawing/2016/SVG/main" r:embed="rId38"/>
+                <asvg:svgBlip xmlns:asvg="http://schemas.microsoft.com/office/drawing/2016/SVG/main" r:embed="rId39"/>
               </a:ext>
             </a:extLst>
           </a:blip>
@@ -4093,6 +4055,7 @@
           <a:bodyPr wrap="square" rtlCol="0">
             <a:noAutofit/>
           </a:bodyPr>
+          <a:lstStyle/>
           <a:p>
             <a:pPr algn="ctr"/>
             <a:r>
@@ -4102,10 +4065,6 @@
               </a:rPr>
               <a:t>Merchant Frontend</a:t>
             </a:r>
-            <a:endParaRPr lang="en-US" altLang="zh-CN" sz="1600">
-              <a:latin typeface="Times New Roman" panose="02020603050405020304" charset="0"/>
-              <a:cs typeface="Times New Roman" panose="02020603050405020304" charset="0"/>
-            </a:endParaRPr>
           </a:p>
         </p:txBody>
       </p:sp>
@@ -4129,6 +4088,7 @@
           <a:bodyPr wrap="square" rtlCol="0">
             <a:spAutoFit/>
           </a:bodyPr>
+          <a:lstStyle/>
           <a:p>
             <a:pPr algn="ctr"/>
             <a:r>
@@ -4138,10 +4098,6 @@
               </a:rPr>
               <a:t>PS-App</a:t>
             </a:r>
-            <a:endParaRPr lang="en-US" altLang="zh-CN" sz="1600">
-              <a:latin typeface="Times New Roman" panose="02020603050405020304" charset="0"/>
-              <a:cs typeface="Times New Roman" panose="02020603050405020304" charset="0"/>
-            </a:endParaRPr>
           </a:p>
         </p:txBody>
       </p:sp>
@@ -4165,6 +4121,7 @@
           <a:bodyPr wrap="square" rtlCol="0">
             <a:spAutoFit/>
           </a:bodyPr>
+          <a:lstStyle/>
           <a:p>
             <a:pPr algn="ctr"/>
             <a:r>
@@ -4174,10 +4131,6 @@
               </a:rPr>
               <a:t>User</a:t>
             </a:r>
-            <a:endParaRPr lang="en-US" altLang="zh-CN" sz="1600">
-              <a:latin typeface="Times New Roman" panose="02020603050405020304" charset="0"/>
-              <a:cs typeface="Times New Roman" panose="02020603050405020304" charset="0"/>
-            </a:endParaRPr>
           </a:p>
         </p:txBody>
       </p:sp>
@@ -4201,6 +4154,7 @@
           <a:bodyPr wrap="square" rtlCol="0">
             <a:noAutofit/>
           </a:bodyPr>
+          <a:lstStyle/>
           <a:p>
             <a:pPr algn="ctr"/>
             <a:r>
@@ -4210,10 +4164,6 @@
               </a:rPr>
               <a:t> Device</a:t>
             </a:r>
-            <a:endParaRPr lang="en-US" altLang="zh-CN" sz="1600">
-              <a:latin typeface="Times New Roman" panose="02020603050405020304" charset="0"/>
-              <a:cs typeface="Times New Roman" panose="02020603050405020304" charset="0"/>
-            </a:endParaRPr>
           </a:p>
         </p:txBody>
       </p:sp>
@@ -4310,6 +4260,7 @@
           <a:bodyPr wrap="square" rtlCol="0">
             <a:noAutofit/>
           </a:bodyPr>
+          <a:lstStyle/>
           <a:p>
             <a:pPr algn="ctr"/>
             <a:r>
@@ -4319,10 +4270,6 @@
               </a:rPr>
               <a:t>Shop</a:t>
             </a:r>
-            <a:endParaRPr lang="en-US" altLang="zh-CN" sz="1600">
-              <a:latin typeface="Times New Roman" panose="02020603050405020304" charset="0"/>
-              <a:cs typeface="Times New Roman" panose="02020603050405020304" charset="0"/>
-            </a:endParaRPr>
           </a:p>
         </p:txBody>
       </p:sp>
@@ -4420,6 +4367,7 @@
           <a:bodyPr wrap="square" rtlCol="0">
             <a:noAutofit/>
           </a:bodyPr>
+          <a:lstStyle/>
           <a:p>
             <a:pPr algn="ctr"/>
             <a:r>
@@ -4427,19 +4375,8 @@
                 <a:latin typeface="Times New Roman" panose="02020603050405020304" charset="0"/>
                 <a:cs typeface="Times New Roman" panose="02020603050405020304" charset="0"/>
               </a:rPr>
-              <a:t>Merchant S</a:t>
+              <a:t>Merchant Server</a:t>
             </a:r>
-            <a:r>
-              <a:rPr lang="en-US" altLang="zh-CN" sz="1600">
-                <a:latin typeface="Times New Roman" panose="02020603050405020304" charset="0"/>
-                <a:cs typeface="Times New Roman" panose="02020603050405020304" charset="0"/>
-              </a:rPr>
-              <a:t>erver</a:t>
-            </a:r>
-            <a:endParaRPr lang="en-US" altLang="zh-CN" sz="1600">
-              <a:latin typeface="Times New Roman" panose="02020603050405020304" charset="0"/>
-              <a:cs typeface="Times New Roman" panose="02020603050405020304" charset="0"/>
-            </a:endParaRPr>
           </a:p>
         </p:txBody>
       </p:sp>
@@ -4539,6 +4476,7 @@
           <a:bodyPr wrap="square" rtlCol="0">
             <a:spAutoFit/>
           </a:bodyPr>
+          <a:lstStyle/>
           <a:p>
             <a:pPr algn="ctr"/>
             <a:r>
@@ -4546,19 +4484,8 @@
                 <a:latin typeface="Times New Roman" panose="02020603050405020304" charset="0"/>
                 <a:cs typeface="Times New Roman" panose="02020603050405020304" charset="0"/>
               </a:rPr>
-              <a:t>PS-S</a:t>
+              <a:t>PS-Server</a:t>
             </a:r>
-            <a:r>
-              <a:rPr lang="en-US" altLang="zh-CN" sz="1600">
-                <a:latin typeface="Times New Roman" panose="02020603050405020304" charset="0"/>
-                <a:cs typeface="Times New Roman" panose="02020603050405020304" charset="0"/>
-              </a:rPr>
-              <a:t>erver</a:t>
-            </a:r>
-            <a:endParaRPr lang="en-US" altLang="zh-CN" sz="1600">
-              <a:latin typeface="Times New Roman" panose="02020603050405020304" charset="0"/>
-              <a:cs typeface="Times New Roman" panose="02020603050405020304" charset="0"/>
-            </a:endParaRPr>
           </a:p>
         </p:txBody>
       </p:sp>
@@ -4655,6 +4582,7 @@
           <a:bodyPr wrap="square" rtlCol="0">
             <a:spAutoFit/>
           </a:bodyPr>
+          <a:lstStyle/>
           <a:p>
             <a:pPr algn="ctr"/>
             <a:r>
@@ -4664,10 +4592,6 @@
               </a:rPr>
               <a:t>Funds transfer</a:t>
             </a:r>
-            <a:endParaRPr lang="en-US" altLang="zh-CN" sz="1600">
-              <a:latin typeface="Times New Roman" panose="02020603050405020304" charset="0"/>
-              <a:cs typeface="Times New Roman" panose="02020603050405020304" charset="0"/>
-            </a:endParaRPr>
           </a:p>
         </p:txBody>
       </p:sp>
@@ -4741,6 +4665,7 @@
           <a:bodyPr wrap="square" rtlCol="0">
             <a:noAutofit/>
           </a:bodyPr>
+          <a:lstStyle/>
           <a:p>
             <a:pPr algn="ctr"/>
             <a:r>
@@ -4750,10 +4675,6 @@
               </a:rPr>
               <a:t>SDK</a:t>
             </a:r>
-            <a:endParaRPr lang="en-US" altLang="zh-CN" sz="1600">
-              <a:latin typeface="Times New Roman" panose="02020603050405020304" charset="0"/>
-              <a:cs typeface="Times New Roman" panose="02020603050405020304" charset="0"/>
-            </a:endParaRPr>
           </a:p>
         </p:txBody>
       </p:sp>
@@ -4804,13 +4725,13 @@
           <p:nvPr/>
         </p:nvPicPr>
         <p:blipFill>
-          <a:blip r:embed="rId1" cstate="print">
+          <a:blip r:embed="rId2" cstate="print">
             <a:extLst>
               <a:ext uri="{28A0092B-C50C-407E-A947-70E740481C1C}">
                 <a14:useLocalDpi xmlns:a14="http://schemas.microsoft.com/office/drawing/2010/main" val="0"/>
               </a:ext>
               <a:ext uri="{96DAC541-7B7A-43D3-8B79-37D633B846F1}">
-                <asvg:svgBlip xmlns:asvg="http://schemas.microsoft.com/office/drawing/2016/SVG/main" r:embed="rId2"/>
+                <asvg:svgBlip xmlns:asvg="http://schemas.microsoft.com/office/drawing/2016/SVG/main" r:embed="rId3"/>
               </a:ext>
             </a:extLst>
           </a:blip>
@@ -4837,13 +4758,13 @@
           <p:nvPr/>
         </p:nvPicPr>
         <p:blipFill>
-          <a:blip r:embed="rId3" cstate="print">
+          <a:blip r:embed="rId4" cstate="print">
             <a:extLst>
               <a:ext uri="{28A0092B-C50C-407E-A947-70E740481C1C}">
                 <a14:useLocalDpi xmlns:a14="http://schemas.microsoft.com/office/drawing/2010/main" val="0"/>
               </a:ext>
               <a:ext uri="{96DAC541-7B7A-43D3-8B79-37D633B846F1}">
-                <asvg:svgBlip xmlns:asvg="http://schemas.microsoft.com/office/drawing/2016/SVG/main" r:embed="rId4"/>
+                <asvg:svgBlip xmlns:asvg="http://schemas.microsoft.com/office/drawing/2016/SVG/main" r:embed="rId5"/>
               </a:ext>
             </a:extLst>
           </a:blip>
@@ -5074,13 +4995,13 @@
           <p:nvPr/>
         </p:nvPicPr>
         <p:blipFill>
-          <a:blip r:embed="rId5" cstate="print">
+          <a:blip r:embed="rId6" cstate="print">
             <a:extLst>
               <a:ext uri="{28A0092B-C50C-407E-A947-70E740481C1C}">
                 <a14:useLocalDpi xmlns:a14="http://schemas.microsoft.com/office/drawing/2010/main" val="0"/>
               </a:ext>
               <a:ext uri="{96DAC541-7B7A-43D3-8B79-37D633B846F1}">
-                <asvg:svgBlip xmlns:asvg="http://schemas.microsoft.com/office/drawing/2016/SVG/main" r:embed="rId6"/>
+                <asvg:svgBlip xmlns:asvg="http://schemas.microsoft.com/office/drawing/2016/SVG/main" r:embed="rId7"/>
               </a:ext>
             </a:extLst>
           </a:blip>
@@ -5107,13 +5028,13 @@
           <p:nvPr/>
         </p:nvPicPr>
         <p:blipFill>
-          <a:blip r:embed="rId7" cstate="print">
+          <a:blip r:embed="rId8" cstate="print">
             <a:extLst>
               <a:ext uri="{28A0092B-C50C-407E-A947-70E740481C1C}">
                 <a14:useLocalDpi xmlns:a14="http://schemas.microsoft.com/office/drawing/2010/main" val="0"/>
               </a:ext>
               <a:ext uri="{96DAC541-7B7A-43D3-8B79-37D633B846F1}">
-                <asvg:svgBlip xmlns:asvg="http://schemas.microsoft.com/office/drawing/2016/SVG/main" r:embed="rId8"/>
+                <asvg:svgBlip xmlns:asvg="http://schemas.microsoft.com/office/drawing/2016/SVG/main" r:embed="rId9"/>
               </a:ext>
             </a:extLst>
           </a:blip>
@@ -5140,13 +5061,13 @@
           <p:nvPr/>
         </p:nvPicPr>
         <p:blipFill>
-          <a:blip r:embed="rId9" cstate="print">
+          <a:blip r:embed="rId10" cstate="print">
             <a:extLst>
               <a:ext uri="{28A0092B-C50C-407E-A947-70E740481C1C}">
                 <a14:useLocalDpi xmlns:a14="http://schemas.microsoft.com/office/drawing/2010/main" val="0"/>
               </a:ext>
               <a:ext uri="{96DAC541-7B7A-43D3-8B79-37D633B846F1}">
-                <asvg:svgBlip xmlns:asvg="http://schemas.microsoft.com/office/drawing/2016/SVG/main" r:embed="rId10"/>
+                <asvg:svgBlip xmlns:asvg="http://schemas.microsoft.com/office/drawing/2016/SVG/main" r:embed="rId11"/>
               </a:ext>
             </a:extLst>
           </a:blip>
@@ -5173,13 +5094,13 @@
           <p:nvPr/>
         </p:nvPicPr>
         <p:blipFill>
-          <a:blip r:embed="rId11" cstate="print">
+          <a:blip r:embed="rId12" cstate="print">
             <a:extLst>
               <a:ext uri="{28A0092B-C50C-407E-A947-70E740481C1C}">
                 <a14:useLocalDpi xmlns:a14="http://schemas.microsoft.com/office/drawing/2010/main" val="0"/>
               </a:ext>
               <a:ext uri="{96DAC541-7B7A-43D3-8B79-37D633B846F1}">
-                <asvg:svgBlip xmlns:asvg="http://schemas.microsoft.com/office/drawing/2016/SVG/main" r:embed="rId12"/>
+                <asvg:svgBlip xmlns:asvg="http://schemas.microsoft.com/office/drawing/2016/SVG/main" r:embed="rId13"/>
               </a:ext>
             </a:extLst>
           </a:blip>
@@ -5206,13 +5127,13 @@
           <p:nvPr/>
         </p:nvPicPr>
         <p:blipFill>
-          <a:blip r:embed="rId11" cstate="print">
+          <a:blip r:embed="rId12" cstate="print">
             <a:extLst>
               <a:ext uri="{28A0092B-C50C-407E-A947-70E740481C1C}">
                 <a14:useLocalDpi xmlns:a14="http://schemas.microsoft.com/office/drawing/2010/main" val="0"/>
               </a:ext>
               <a:ext uri="{96DAC541-7B7A-43D3-8B79-37D633B846F1}">
-                <asvg:svgBlip xmlns:asvg="http://schemas.microsoft.com/office/drawing/2016/SVG/main" r:embed="rId13"/>
+                <asvg:svgBlip xmlns:asvg="http://schemas.microsoft.com/office/drawing/2016/SVG/main" r:embed="rId14"/>
               </a:ext>
             </a:extLst>
           </a:blip>
@@ -5239,10 +5160,10 @@
           <p:nvPr/>
         </p:nvPicPr>
         <p:blipFill>
-          <a:blip r:embed="rId14">
+          <a:blip r:embed="rId15">
             <a:extLst>
               <a:ext uri="{96DAC541-7B7A-43D3-8B79-37D633B846F1}">
-                <asvg:svgBlip xmlns:asvg="http://schemas.microsoft.com/office/drawing/2016/SVG/main" r:embed="rId15"/>
+                <asvg:svgBlip xmlns:asvg="http://schemas.microsoft.com/office/drawing/2016/SVG/main" r:embed="rId16"/>
               </a:ext>
             </a:extLst>
           </a:blip>
@@ -5269,10 +5190,10 @@
           <p:nvPr/>
         </p:nvPicPr>
         <p:blipFill>
-          <a:blip r:embed="rId16">
+          <a:blip r:embed="rId17">
             <a:extLst>
               <a:ext uri="{96DAC541-7B7A-43D3-8B79-37D633B846F1}">
-                <asvg:svgBlip xmlns:asvg="http://schemas.microsoft.com/office/drawing/2016/SVG/main" r:embed="rId17"/>
+                <asvg:svgBlip xmlns:asvg="http://schemas.microsoft.com/office/drawing/2016/SVG/main" r:embed="rId18"/>
               </a:ext>
             </a:extLst>
           </a:blip>
@@ -5299,10 +5220,10 @@
           <p:nvPr/>
         </p:nvPicPr>
         <p:blipFill>
-          <a:blip r:embed="rId18">
+          <a:blip r:embed="rId19">
             <a:extLst>
               <a:ext uri="{96DAC541-7B7A-43D3-8B79-37D633B846F1}">
-                <asvg:svgBlip xmlns:asvg="http://schemas.microsoft.com/office/drawing/2016/SVG/main" r:embed="rId19"/>
+                <asvg:svgBlip xmlns:asvg="http://schemas.microsoft.com/office/drawing/2016/SVG/main" r:embed="rId20"/>
               </a:ext>
             </a:extLst>
           </a:blip>
@@ -5349,6 +5270,7 @@
           <a:bodyPr wrap="square" rtlCol="0">
             <a:noAutofit/>
           </a:bodyPr>
+          <a:lstStyle/>
           <a:p>
             <a:pPr algn="ctr"/>
             <a:r>
@@ -5358,10 +5280,6 @@
               </a:rPr>
               <a:t>Password</a:t>
             </a:r>
-            <a:endParaRPr lang="en-US" altLang="zh-CN" sz="1600">
-              <a:latin typeface="Times New Roman" panose="02020603050405020304" charset="0"/>
-              <a:cs typeface="Times New Roman" panose="02020603050405020304" charset="0"/>
-            </a:endParaRPr>
           </a:p>
         </p:txBody>
       </p:sp>
@@ -5374,10 +5292,10 @@
           <p:nvPr/>
         </p:nvPicPr>
         <p:blipFill>
-          <a:blip r:embed="rId20">
+          <a:blip r:embed="rId21">
             <a:extLst>
               <a:ext uri="{96DAC541-7B7A-43D3-8B79-37D633B846F1}">
-                <asvg:svgBlip xmlns:asvg="http://schemas.microsoft.com/office/drawing/2016/SVG/main" r:embed="rId21"/>
+                <asvg:svgBlip xmlns:asvg="http://schemas.microsoft.com/office/drawing/2016/SVG/main" r:embed="rId22"/>
               </a:ext>
             </a:extLst>
           </a:blip>
@@ -5404,10 +5322,10 @@
           <p:nvPr/>
         </p:nvPicPr>
         <p:blipFill>
-          <a:blip r:embed="rId22">
+          <a:blip r:embed="rId23">
             <a:extLst>
               <a:ext uri="{96DAC541-7B7A-43D3-8B79-37D633B846F1}">
-                <asvg:svgBlip xmlns:asvg="http://schemas.microsoft.com/office/drawing/2016/SVG/main" r:embed="rId23"/>
+                <asvg:svgBlip xmlns:asvg="http://schemas.microsoft.com/office/drawing/2016/SVG/main" r:embed="rId24"/>
               </a:ext>
             </a:extLst>
           </a:blip>
@@ -5434,10 +5352,10 @@
           <p:nvPr/>
         </p:nvPicPr>
         <p:blipFill>
-          <a:blip r:embed="rId24">
+          <a:blip r:embed="rId25">
             <a:extLst>
               <a:ext uri="{96DAC541-7B7A-43D3-8B79-37D633B846F1}">
-                <asvg:svgBlip xmlns:asvg="http://schemas.microsoft.com/office/drawing/2016/SVG/main" r:embed="rId25"/>
+                <asvg:svgBlip xmlns:asvg="http://schemas.microsoft.com/office/drawing/2016/SVG/main" r:embed="rId26"/>
               </a:ext>
             </a:extLst>
           </a:blip>
@@ -5464,10 +5382,10 @@
           <p:nvPr/>
         </p:nvPicPr>
         <p:blipFill>
-          <a:blip r:embed="rId26">
+          <a:blip r:embed="rId27">
             <a:extLst>
               <a:ext uri="{96DAC541-7B7A-43D3-8B79-37D633B846F1}">
-                <asvg:svgBlip xmlns:asvg="http://schemas.microsoft.com/office/drawing/2016/SVG/main" r:embed="rId27"/>
+                <asvg:svgBlip xmlns:asvg="http://schemas.microsoft.com/office/drawing/2016/SVG/main" r:embed="rId28"/>
               </a:ext>
             </a:extLst>
           </a:blip>
@@ -5494,10 +5412,10 @@
           <p:nvPr/>
         </p:nvPicPr>
         <p:blipFill>
-          <a:blip r:embed="rId28">
+          <a:blip r:embed="rId29">
             <a:extLst>
               <a:ext uri="{96DAC541-7B7A-43D3-8B79-37D633B846F1}">
-                <asvg:svgBlip xmlns:asvg="http://schemas.microsoft.com/office/drawing/2016/SVG/main" r:embed="rId29"/>
+                <asvg:svgBlip xmlns:asvg="http://schemas.microsoft.com/office/drawing/2016/SVG/main" r:embed="rId30"/>
               </a:ext>
             </a:extLst>
           </a:blip>
@@ -5586,13 +5504,13 @@
           <p:nvPr/>
         </p:nvPicPr>
         <p:blipFill>
-          <a:blip r:embed="rId1" cstate="print">
+          <a:blip r:embed="rId2" cstate="print">
             <a:extLst>
               <a:ext uri="{28A0092B-C50C-407E-A947-70E740481C1C}">
                 <a14:useLocalDpi xmlns:a14="http://schemas.microsoft.com/office/drawing/2010/main" val="0"/>
               </a:ext>
               <a:ext uri="{96DAC541-7B7A-43D3-8B79-37D633B846F1}">
-                <asvg:svgBlip xmlns:asvg="http://schemas.microsoft.com/office/drawing/2016/SVG/main" r:embed="rId2"/>
+                <asvg:svgBlip xmlns:asvg="http://schemas.microsoft.com/office/drawing/2016/SVG/main" r:embed="rId3"/>
               </a:ext>
             </a:extLst>
           </a:blip>
@@ -5619,13 +5537,13 @@
           <p:nvPr/>
         </p:nvPicPr>
         <p:blipFill>
-          <a:blip r:embed="rId3" cstate="print">
+          <a:blip r:embed="rId4" cstate="print">
             <a:extLst>
               <a:ext uri="{28A0092B-C50C-407E-A947-70E740481C1C}">
                 <a14:useLocalDpi xmlns:a14="http://schemas.microsoft.com/office/drawing/2010/main" val="0"/>
               </a:ext>
               <a:ext uri="{96DAC541-7B7A-43D3-8B79-37D633B846F1}">
-                <asvg:svgBlip xmlns:asvg="http://schemas.microsoft.com/office/drawing/2016/SVG/main" r:embed="rId4"/>
+                <asvg:svgBlip xmlns:asvg="http://schemas.microsoft.com/office/drawing/2016/SVG/main" r:embed="rId5"/>
               </a:ext>
             </a:extLst>
           </a:blip>
@@ -5699,13 +5617,13 @@
           <p:nvPr/>
         </p:nvPicPr>
         <p:blipFill>
-          <a:blip r:embed="rId5" cstate="print">
+          <a:blip r:embed="rId6" cstate="print">
             <a:extLst>
               <a:ext uri="{28A0092B-C50C-407E-A947-70E740481C1C}">
                 <a14:useLocalDpi xmlns:a14="http://schemas.microsoft.com/office/drawing/2010/main" val="0"/>
               </a:ext>
               <a:ext uri="{96DAC541-7B7A-43D3-8B79-37D633B846F1}">
-                <asvg:svgBlip xmlns:asvg="http://schemas.microsoft.com/office/drawing/2016/SVG/main" r:embed="rId6"/>
+                <asvg:svgBlip xmlns:asvg="http://schemas.microsoft.com/office/drawing/2016/SVG/main" r:embed="rId7"/>
               </a:ext>
             </a:extLst>
           </a:blip>
@@ -5732,13 +5650,13 @@
           <p:nvPr/>
         </p:nvPicPr>
         <p:blipFill>
-          <a:blip r:embed="rId7" cstate="print">
+          <a:blip r:embed="rId8" cstate="print">
             <a:extLst>
               <a:ext uri="{28A0092B-C50C-407E-A947-70E740481C1C}">
                 <a14:useLocalDpi xmlns:a14="http://schemas.microsoft.com/office/drawing/2010/main" val="0"/>
               </a:ext>
               <a:ext uri="{96DAC541-7B7A-43D3-8B79-37D633B846F1}">
-                <asvg:svgBlip xmlns:asvg="http://schemas.microsoft.com/office/drawing/2016/SVG/main" r:embed="rId8"/>
+                <asvg:svgBlip xmlns:asvg="http://schemas.microsoft.com/office/drawing/2016/SVG/main" r:embed="rId9"/>
               </a:ext>
             </a:extLst>
           </a:blip>
@@ -5765,13 +5683,13 @@
           <p:nvPr/>
         </p:nvPicPr>
         <p:blipFill>
-          <a:blip r:embed="rId9" cstate="print">
+          <a:blip r:embed="rId10" cstate="print">
             <a:extLst>
               <a:ext uri="{28A0092B-C50C-407E-A947-70E740481C1C}">
                 <a14:useLocalDpi xmlns:a14="http://schemas.microsoft.com/office/drawing/2010/main" val="0"/>
               </a:ext>
               <a:ext uri="{96DAC541-7B7A-43D3-8B79-37D633B846F1}">
-                <asvg:svgBlip xmlns:asvg="http://schemas.microsoft.com/office/drawing/2016/SVG/main" r:embed="rId10"/>
+                <asvg:svgBlip xmlns:asvg="http://schemas.microsoft.com/office/drawing/2016/SVG/main" r:embed="rId11"/>
               </a:ext>
             </a:extLst>
           </a:blip>
@@ -5798,13 +5716,13 @@
           <p:nvPr/>
         </p:nvPicPr>
         <p:blipFill>
-          <a:blip r:embed="rId11" cstate="print">
+          <a:blip r:embed="rId12" cstate="print">
             <a:extLst>
               <a:ext uri="{28A0092B-C50C-407E-A947-70E740481C1C}">
                 <a14:useLocalDpi xmlns:a14="http://schemas.microsoft.com/office/drawing/2010/main" val="0"/>
               </a:ext>
               <a:ext uri="{96DAC541-7B7A-43D3-8B79-37D633B846F1}">
-                <asvg:svgBlip xmlns:asvg="http://schemas.microsoft.com/office/drawing/2016/SVG/main" r:embed="rId12"/>
+                <asvg:svgBlip xmlns:asvg="http://schemas.microsoft.com/office/drawing/2016/SVG/main" r:embed="rId13"/>
               </a:ext>
             </a:extLst>
           </a:blip>
@@ -5831,13 +5749,13 @@
           <p:nvPr/>
         </p:nvPicPr>
         <p:blipFill>
-          <a:blip r:embed="rId9" cstate="print">
+          <a:blip r:embed="rId10" cstate="print">
             <a:extLst>
               <a:ext uri="{28A0092B-C50C-407E-A947-70E740481C1C}">
                 <a14:useLocalDpi xmlns:a14="http://schemas.microsoft.com/office/drawing/2010/main" val="0"/>
               </a:ext>
               <a:ext uri="{96DAC541-7B7A-43D3-8B79-37D633B846F1}">
-                <asvg:svgBlip xmlns:asvg="http://schemas.microsoft.com/office/drawing/2016/SVG/main" r:embed="rId10"/>
+                <asvg:svgBlip xmlns:asvg="http://schemas.microsoft.com/office/drawing/2016/SVG/main" r:embed="rId11"/>
               </a:ext>
             </a:extLst>
           </a:blip>
@@ -5864,13 +5782,13 @@
           <p:nvPr/>
         </p:nvPicPr>
         <p:blipFill>
-          <a:blip r:embed="rId13" cstate="print">
+          <a:blip r:embed="rId14" cstate="print">
             <a:extLst>
               <a:ext uri="{28A0092B-C50C-407E-A947-70E740481C1C}">
                 <a14:useLocalDpi xmlns:a14="http://schemas.microsoft.com/office/drawing/2010/main" val="0"/>
               </a:ext>
               <a:ext uri="{96DAC541-7B7A-43D3-8B79-37D633B846F1}">
-                <asvg:svgBlip xmlns:asvg="http://schemas.microsoft.com/office/drawing/2016/SVG/main" r:embed="rId14"/>
+                <asvg:svgBlip xmlns:asvg="http://schemas.microsoft.com/office/drawing/2016/SVG/main" r:embed="rId15"/>
               </a:ext>
             </a:extLst>
           </a:blip>
@@ -6233,13 +6151,13 @@
           <p:nvPr/>
         </p:nvPicPr>
         <p:blipFill>
-          <a:blip r:embed="rId15" cstate="print">
+          <a:blip r:embed="rId16" cstate="print">
             <a:extLst>
               <a:ext uri="{28A0092B-C50C-407E-A947-70E740481C1C}">
                 <a14:useLocalDpi xmlns:a14="http://schemas.microsoft.com/office/drawing/2010/main" val="0"/>
               </a:ext>
               <a:ext uri="{96DAC541-7B7A-43D3-8B79-37D633B846F1}">
-                <asvg:svgBlip xmlns:asvg="http://schemas.microsoft.com/office/drawing/2016/SVG/main" r:embed="rId16"/>
+                <asvg:svgBlip xmlns:asvg="http://schemas.microsoft.com/office/drawing/2016/SVG/main" r:embed="rId17"/>
               </a:ext>
             </a:extLst>
           </a:blip>
@@ -6266,13 +6184,13 @@
           <p:nvPr/>
         </p:nvPicPr>
         <p:blipFill>
-          <a:blip r:embed="rId17">
+          <a:blip r:embed="rId18">
             <a:extLst>
               <a:ext uri="{28A0092B-C50C-407E-A947-70E740481C1C}">
                 <a14:useLocalDpi xmlns:a14="http://schemas.microsoft.com/office/drawing/2010/main" val="0"/>
               </a:ext>
               <a:ext uri="{96DAC541-7B7A-43D3-8B79-37D633B846F1}">
-                <asvg:svgBlip xmlns:asvg="http://schemas.microsoft.com/office/drawing/2016/SVG/main" r:embed="rId18"/>
+                <asvg:svgBlip xmlns:asvg="http://schemas.microsoft.com/office/drawing/2016/SVG/main" r:embed="rId19"/>
               </a:ext>
             </a:extLst>
           </a:blip>
@@ -6418,13 +6336,13 @@
           <p:nvPr/>
         </p:nvPicPr>
         <p:blipFill>
-          <a:blip r:embed="rId19" cstate="print">
+          <a:blip r:embed="rId20" cstate="print">
             <a:extLst>
               <a:ext uri="{28A0092B-C50C-407E-A947-70E740481C1C}">
                 <a14:useLocalDpi xmlns:a14="http://schemas.microsoft.com/office/drawing/2010/main" val="0"/>
               </a:ext>
               <a:ext uri="{96DAC541-7B7A-43D3-8B79-37D633B846F1}">
-                <asvg:svgBlip xmlns:asvg="http://schemas.microsoft.com/office/drawing/2016/SVG/main" r:embed="rId20"/>
+                <asvg:svgBlip xmlns:asvg="http://schemas.microsoft.com/office/drawing/2016/SVG/main" r:embed="rId21"/>
               </a:ext>
             </a:extLst>
           </a:blip>
@@ -6459,7 +6377,14 @@
         <p:cNvGrpSpPr/>
         <p:nvPr/>
       </p:nvGrpSpPr>
-      <p:grpSpPr/>
+      <p:grpSpPr>
+        <a:xfrm>
+          <a:off x="0" y="0"/>
+          <a:ext cx="0" cy="0"/>
+          <a:chOff x="0" y="0"/>
+          <a:chExt cx="0" cy="0"/>
+        </a:xfrm>
+      </p:grpSpPr>
       <p:sp>
         <p:nvSpPr>
           <p:cNvPr id="20" name="任意多边形 19"/>
@@ -6539,6 +6464,7 @@
         </p:style>
         <p:txBody>
           <a:bodyPr rtlCol="0" anchor="ctr"/>
+          <a:lstStyle/>
           <a:p>
             <a:pPr algn="ctr"/>
             <a:endParaRPr lang="zh-CN" altLang="en-US">
@@ -6791,6 +6717,7 @@
           <a:bodyPr wrap="square" rtlCol="0">
             <a:noAutofit/>
           </a:bodyPr>
+          <a:lstStyle/>
           <a:p>
             <a:pPr algn="ctr"/>
             <a:r>
@@ -6800,10 +6727,6 @@
               </a:rPr>
               <a:t>Merchant Application</a:t>
             </a:r>
-            <a:endParaRPr lang="en-US" altLang="zh-CN" sz="1200">
-              <a:latin typeface="Times New Roman" panose="02020603050405020304" charset="0"/>
-              <a:cs typeface="Times New Roman" panose="02020603050405020304" charset="0"/>
-            </a:endParaRPr>
           </a:p>
         </p:txBody>
       </p:sp>
@@ -6816,13 +6739,13 @@
           <p:nvPr/>
         </p:nvPicPr>
         <p:blipFill>
-          <a:blip r:embed="rId1" cstate="print">
+          <a:blip r:embed="rId2" cstate="print">
             <a:extLst>
               <a:ext uri="{28A0092B-C50C-407E-A947-70E740481C1C}">
                 <a14:useLocalDpi xmlns:a14="http://schemas.microsoft.com/office/drawing/2010/main" val="0"/>
               </a:ext>
               <a:ext uri="{96DAC541-7B7A-43D3-8B79-37D633B846F1}">
-                <asvg:svgBlip xmlns:asvg="http://schemas.microsoft.com/office/drawing/2016/SVG/main" r:embed="rId2"/>
+                <asvg:svgBlip xmlns:asvg="http://schemas.microsoft.com/office/drawing/2016/SVG/main" r:embed="rId3"/>
               </a:ext>
             </a:extLst>
           </a:blip>
@@ -6860,6 +6783,7 @@
           <a:bodyPr wrap="square" rtlCol="0">
             <a:noAutofit/>
           </a:bodyPr>
+          <a:lstStyle/>
           <a:p>
             <a:pPr algn="ctr"/>
             <a:r>
@@ -6869,10 +6793,6 @@
               </a:rPr>
               <a:t>Payment Application</a:t>
             </a:r>
-            <a:endParaRPr lang="en-US" altLang="zh-CN" sz="1200">
-              <a:latin typeface="Times New Roman" panose="02020603050405020304" charset="0"/>
-              <a:cs typeface="Times New Roman" panose="02020603050405020304" charset="0"/>
-            </a:endParaRPr>
           </a:p>
         </p:txBody>
       </p:sp>
@@ -6917,6 +6837,7 @@
         </p:style>
         <p:txBody>
           <a:bodyPr rtlCol="0" anchor="ctr"/>
+          <a:lstStyle/>
           <a:p>
             <a:pPr algn="ctr"/>
             <a:endParaRPr lang="zh-CN" altLang="en-US">
@@ -6971,6 +6892,7 @@
         </p:style>
         <p:txBody>
           <a:bodyPr rtlCol="0" anchor="ctr"/>
+          <a:lstStyle/>
           <a:p>
             <a:pPr algn="ctr"/>
             <a:endParaRPr lang="zh-CN" altLang="en-US">
@@ -7024,6 +6946,7 @@
         </p:style>
         <p:txBody>
           <a:bodyPr rtlCol="0" anchor="ctr"/>
+          <a:lstStyle/>
           <a:p>
             <a:pPr algn="ctr"/>
             <a:endParaRPr lang="zh-CN" altLang="en-US">
@@ -7053,6 +6976,7 @@
           <a:bodyPr wrap="square" rtlCol="0">
             <a:noAutofit/>
           </a:bodyPr>
+          <a:lstStyle/>
           <a:p>
             <a:pPr algn="ctr"/>
             <a:r>
@@ -7062,10 +6986,6 @@
               </a:rPr>
               <a:t>Malicious Application </a:t>
             </a:r>
-            <a:endParaRPr lang="en-US" altLang="zh-CN" sz="1200">
-              <a:latin typeface="Times New Roman" panose="02020603050405020304" charset="0"/>
-              <a:cs typeface="Times New Roman" panose="02020603050405020304" charset="0"/>
-            </a:endParaRPr>
           </a:p>
         </p:txBody>
       </p:sp>
@@ -7125,6 +7045,7 @@
           <a:bodyPr wrap="square" rtlCol="0">
             <a:noAutofit/>
           </a:bodyPr>
+          <a:lstStyle/>
           <a:p>
             <a:r>
               <a:rPr lang="en-US" altLang="zh-CN">
@@ -7133,10 +7054,6 @@
               </a:rPr>
               <a:t>S1</a:t>
             </a:r>
-            <a:endParaRPr lang="en-US" altLang="zh-CN">
-              <a:latin typeface="Times New Roman" panose="02020603050405020304" charset="0"/>
-              <a:cs typeface="Times New Roman" panose="02020603050405020304" charset="0"/>
-            </a:endParaRPr>
           </a:p>
         </p:txBody>
       </p:sp>
@@ -7160,6 +7077,7 @@
           <a:bodyPr wrap="square" rtlCol="0">
             <a:noAutofit/>
           </a:bodyPr>
+          <a:lstStyle/>
           <a:p>
             <a:pPr algn="ctr"/>
             <a:r>
@@ -7287,6 +7205,7 @@
           <a:bodyPr wrap="square" rtlCol="0">
             <a:noAutofit/>
           </a:bodyPr>
+          <a:lstStyle/>
           <a:p>
             <a:pPr algn="ctr"/>
             <a:r>
@@ -7403,6 +7322,7 @@
           <a:bodyPr wrap="square" rtlCol="0">
             <a:spAutoFit/>
           </a:bodyPr>
+          <a:lstStyle/>
           <a:p>
             <a:r>
               <a:rPr lang="en-US" altLang="zh-CN">
@@ -7411,10 +7331,6 @@
               </a:rPr>
               <a:t>S2</a:t>
             </a:r>
-            <a:endParaRPr lang="en-US" altLang="zh-CN">
-              <a:latin typeface="Times New Roman" panose="02020603050405020304" charset="0"/>
-              <a:cs typeface="Times New Roman" panose="02020603050405020304" charset="0"/>
-            </a:endParaRPr>
           </a:p>
         </p:txBody>
       </p:sp>
@@ -7438,6 +7354,7 @@
           <a:bodyPr wrap="square" rtlCol="0">
             <a:noAutofit/>
           </a:bodyPr>
+          <a:lstStyle/>
           <a:p>
             <a:r>
               <a:rPr lang="en-US" altLang="zh-CN">
@@ -7446,10 +7363,6 @@
               </a:rPr>
               <a:t>S3</a:t>
             </a:r>
-            <a:endParaRPr lang="en-US" altLang="zh-CN">
-              <a:latin typeface="Times New Roman" panose="02020603050405020304" charset="0"/>
-              <a:cs typeface="Times New Roman" panose="02020603050405020304" charset="0"/>
-            </a:endParaRPr>
           </a:p>
         </p:txBody>
       </p:sp>
@@ -7473,6 +7386,7 @@
           <a:bodyPr wrap="square" rtlCol="0">
             <a:noAutofit/>
           </a:bodyPr>
+          <a:lstStyle/>
           <a:p>
             <a:r>
               <a:rPr lang="en-US" altLang="zh-CN">
@@ -7481,10 +7395,6 @@
               </a:rPr>
               <a:t>S4</a:t>
             </a:r>
-            <a:endParaRPr lang="en-US" altLang="zh-CN">
-              <a:latin typeface="Times New Roman" panose="02020603050405020304" charset="0"/>
-              <a:cs typeface="Times New Roman" panose="02020603050405020304" charset="0"/>
-            </a:endParaRPr>
           </a:p>
         </p:txBody>
       </p:sp>
@@ -7508,6 +7418,7 @@
           <a:bodyPr wrap="square" rtlCol="0">
             <a:noAutofit/>
           </a:bodyPr>
+          <a:lstStyle/>
           <a:p>
             <a:pPr algn="ctr"/>
             <a:r>
@@ -7520,13 +7431,6 @@
               </a:rPr>
               <a:t>Send payment request</a:t>
             </a:r>
-            <a:endParaRPr lang="en-US" altLang="zh-CN" sz="1400" b="1">
-              <a:solidFill>
-                <a:schemeClr val="tx1"/>
-              </a:solidFill>
-              <a:latin typeface="Times New Roman" panose="02020603050405020304" charset="0"/>
-              <a:cs typeface="Times New Roman" panose="02020603050405020304" charset="0"/>
-            </a:endParaRPr>
           </a:p>
         </p:txBody>
       </p:sp>
@@ -7550,6 +7454,7 @@
           <a:bodyPr wrap="square" rtlCol="0">
             <a:noAutofit/>
           </a:bodyPr>
+          <a:lstStyle/>
           <a:p>
             <a:pPr algn="ctr"/>
             <a:r>
@@ -7559,10 +7464,6 @@
               </a:rPr>
               <a:t>Order parameters</a:t>
             </a:r>
-            <a:endParaRPr lang="en-US" altLang="zh-CN" sz="1400" b="1">
-              <a:latin typeface="Times New Roman" panose="02020603050405020304" charset="0"/>
-              <a:cs typeface="Times New Roman" panose="02020603050405020304" charset="0"/>
-            </a:endParaRPr>
           </a:p>
         </p:txBody>
       </p:sp>
@@ -7622,6 +7523,7 @@
           <a:bodyPr wrap="square" rtlCol="0">
             <a:noAutofit/>
           </a:bodyPr>
+          <a:lstStyle/>
           <a:p>
             <a:r>
               <a:rPr lang="en-US" altLang="zh-CN">
@@ -7630,10 +7532,6 @@
               </a:rPr>
               <a:t>S5</a:t>
             </a:r>
-            <a:endParaRPr lang="en-US" altLang="zh-CN">
-              <a:latin typeface="Times New Roman" panose="02020603050405020304" charset="0"/>
-              <a:cs typeface="Times New Roman" panose="02020603050405020304" charset="0"/>
-            </a:endParaRPr>
           </a:p>
         </p:txBody>
       </p:sp>
@@ -7657,6 +7555,7 @@
           <a:bodyPr wrap="square" rtlCol="0">
             <a:noAutofit/>
           </a:bodyPr>
+          <a:lstStyle/>
           <a:p>
             <a:pPr algn="ctr"/>
             <a:r>
@@ -7666,10 +7565,6 @@
               </a:rPr>
               <a:t>Tampered request</a:t>
             </a:r>
-            <a:endParaRPr lang="en-US" altLang="zh-CN" sz="1400" b="1">
-              <a:latin typeface="Times New Roman" panose="02020603050405020304" charset="0"/>
-              <a:cs typeface="Times New Roman" panose="02020603050405020304" charset="0"/>
-            </a:endParaRPr>
           </a:p>
         </p:txBody>
       </p:sp>
@@ -7905,10 +7800,10 @@
           <p:nvPr/>
         </p:nvPicPr>
         <p:blipFill>
-          <a:blip r:embed="rId3">
+          <a:blip r:embed="rId4">
             <a:extLst>
               <a:ext uri="{96DAC541-7B7A-43D3-8B79-37D633B846F1}">
-                <asvg:svgBlip xmlns:asvg="http://schemas.microsoft.com/office/drawing/2016/SVG/main" r:embed="rId4"/>
+                <asvg:svgBlip xmlns:asvg="http://schemas.microsoft.com/office/drawing/2016/SVG/main" r:embed="rId5"/>
               </a:ext>
             </a:extLst>
           </a:blip>
@@ -7946,6 +7841,7 @@
           <a:bodyPr wrap="square" rtlCol="0">
             <a:noAutofit/>
           </a:bodyPr>
+          <a:lstStyle/>
           <a:p>
             <a:pPr algn="ctr"/>
             <a:r>
@@ -7958,13 +7854,6 @@
               </a:rPr>
               <a:t>Hijack Request</a:t>
             </a:r>
-            <a:endParaRPr lang="en-US" altLang="zh-CN" sz="1400" b="1">
-              <a:solidFill>
-                <a:schemeClr val="tx1"/>
-              </a:solidFill>
-              <a:latin typeface="Times New Roman" panose="02020603050405020304" charset="0"/>
-              <a:cs typeface="Times New Roman" panose="02020603050405020304" charset="0"/>
-            </a:endParaRPr>
           </a:p>
         </p:txBody>
       </p:sp>
@@ -7988,6 +7877,7 @@
           <a:bodyPr wrap="square" rtlCol="0">
             <a:noAutofit/>
           </a:bodyPr>
+          <a:lstStyle/>
           <a:p>
             <a:pPr algn="ctr"/>
             <a:r>
@@ -7997,10 +7887,6 @@
               </a:rPr>
               <a:t>A new order</a:t>
             </a:r>
-            <a:endParaRPr lang="en-US" altLang="zh-CN" sz="1400" b="1">
-              <a:latin typeface="Times New Roman" panose="02020603050405020304" charset="0"/>
-              <a:cs typeface="Times New Roman" panose="02020603050405020304" charset="0"/>
-            </a:endParaRPr>
           </a:p>
         </p:txBody>
       </p:sp>
@@ -8024,6 +7910,7 @@
           <a:bodyPr wrap="square" rtlCol="0">
             <a:noAutofit/>
           </a:bodyPr>
+          <a:lstStyle/>
           <a:p>
             <a:pPr algn="ctr"/>
             <a:r>
@@ -8149,182 +8036,273 @@
         <p:cNvGrpSpPr/>
         <p:nvPr/>
       </p:nvGrpSpPr>
-      <p:grpSpPr/>
+      <p:grpSpPr>
+        <a:xfrm>
+          <a:off x="0" y="0"/>
+          <a:ext cx="0" cy="0"/>
+          <a:chOff x="0" y="0"/>
+          <a:chExt cx="0" cy="0"/>
+        </a:xfrm>
+      </p:grpSpPr>
       <p:grpSp>
         <p:nvGrpSpPr>
-          <p:cNvPr id="14" name="组合 13"/>
+          <p:cNvPr id="5" name="组合 4">
+            <a:extLst>
+              <a:ext uri="{FF2B5EF4-FFF2-40B4-BE49-F238E27FC236}">
+                <a16:creationId xmlns:a16="http://schemas.microsoft.com/office/drawing/2014/main" id="{9E0B5AEB-E8BD-451A-8FDB-74DDED1A7D30}"/>
+              </a:ext>
+            </a:extLst>
+          </p:cNvPr>
           <p:cNvGrpSpPr/>
           <p:nvPr/>
         </p:nvGrpSpPr>
         <p:grpSpPr>
           <a:xfrm>
-            <a:off x="4953000" y="196850"/>
-            <a:ext cx="5035550" cy="5035550"/>
-            <a:chOff x="920" y="310"/>
-            <a:chExt cx="7930" cy="7930"/>
+            <a:off x="1701800" y="196850"/>
+            <a:ext cx="8286750" cy="5035550"/>
+            <a:chOff x="1701800" y="196850"/>
+            <a:chExt cx="8286750" cy="5035550"/>
           </a:xfrm>
         </p:grpSpPr>
-        <p:pic>
-          <p:nvPicPr>
-            <p:cNvPr id="15" name="图片 14" descr="ef56901b-e67b-48c3-91cc-2ffb6efbef1e"/>
-            <p:cNvPicPr>
-              <a:picLocks noChangeAspect="1"/>
-            </p:cNvPicPr>
+        <p:grpSp>
+          <p:nvGrpSpPr>
+            <p:cNvPr id="4" name="组合 3">
+              <a:extLst>
+                <a:ext uri="{FF2B5EF4-FFF2-40B4-BE49-F238E27FC236}">
+                  <a16:creationId xmlns:a16="http://schemas.microsoft.com/office/drawing/2014/main" id="{0D7F48B1-6DC2-45A5-98B6-22422F391860}"/>
+                </a:ext>
+              </a:extLst>
+            </p:cNvPr>
+            <p:cNvGrpSpPr/>
             <p:nvPr/>
-          </p:nvPicPr>
-          <p:blipFill>
-            <a:blip r:embed="rId1"/>
-            <a:stretch>
-              <a:fillRect/>
-            </a:stretch>
-          </p:blipFill>
-          <p:spPr>
+          </p:nvGrpSpPr>
+          <p:grpSpPr>
             <a:xfrm>
-              <a:off x="920" y="310"/>
-              <a:ext cx="7930" cy="7930"/>
+              <a:off x="1701800" y="196850"/>
+              <a:ext cx="5035550" cy="5035550"/>
+              <a:chOff x="1701800" y="196850"/>
+              <a:chExt cx="5035550" cy="5035550"/>
             </a:xfrm>
-            <a:prstGeom prst="rect">
-              <a:avLst/>
-            </a:prstGeom>
-          </p:spPr>
-        </p:pic>
-        <p:pic>
-          <p:nvPicPr>
-            <p:cNvPr id="16" name="图片 15"/>
-            <p:cNvPicPr>
-              <a:picLocks noChangeAspect="1"/>
-            </p:cNvPicPr>
+          </p:grpSpPr>
+          <p:grpSp>
+            <p:nvGrpSpPr>
+              <p:cNvPr id="2" name="组合 1">
+                <a:extLst>
+                  <a:ext uri="{FF2B5EF4-FFF2-40B4-BE49-F238E27FC236}">
+                    <a16:creationId xmlns:a16="http://schemas.microsoft.com/office/drawing/2014/main" id="{0890D905-445C-4881-A01B-8C7D34DE6123}"/>
+                  </a:ext>
+                </a:extLst>
+              </p:cNvPr>
+              <p:cNvGrpSpPr/>
+              <p:nvPr/>
+            </p:nvGrpSpPr>
+            <p:grpSpPr>
+              <a:xfrm>
+                <a:off x="1701800" y="196850"/>
+                <a:ext cx="5035550" cy="5035550"/>
+                <a:chOff x="1701800" y="196850"/>
+                <a:chExt cx="5035550" cy="5035550"/>
+              </a:xfrm>
+            </p:grpSpPr>
+            <p:pic>
+              <p:nvPicPr>
+                <p:cNvPr id="9" name="图片 8" descr="ef56901b-e67b-48c3-91cc-2ffb6efbef1e"/>
+                <p:cNvPicPr>
+                  <a:picLocks noChangeAspect="1"/>
+                </p:cNvPicPr>
+                <p:nvPr/>
+              </p:nvPicPr>
+              <p:blipFill>
+                <a:blip r:embed="rId2"/>
+                <a:stretch>
+                  <a:fillRect/>
+                </a:stretch>
+              </p:blipFill>
+              <p:spPr>
+                <a:xfrm>
+                  <a:off x="1701800" y="196850"/>
+                  <a:ext cx="5035550" cy="5035550"/>
+                </a:xfrm>
+                <a:prstGeom prst="rect">
+                  <a:avLst/>
+                </a:prstGeom>
+              </p:spPr>
+            </p:pic>
+            <p:pic>
+              <p:nvPicPr>
+                <p:cNvPr id="10" name="图片 9" descr="D:/实验研究/论文研究/支付协议/支付协议/支付模型ppt/2.jpg2"/>
+                <p:cNvPicPr>
+                  <a:picLocks noChangeAspect="1"/>
+                </p:cNvPicPr>
+                <p:nvPr/>
+              </p:nvPicPr>
+              <p:blipFill>
+                <a:blip r:embed="rId3"/>
+                <a:srcRect l="-2593" t="-2073" r="-2963" b="-1388"/>
+                <a:stretch>
+                  <a:fillRect/>
+                </a:stretch>
+              </p:blipFill>
+              <p:spPr>
+                <a:xfrm>
+                  <a:off x="3308350" y="790575"/>
+                  <a:ext cx="1809750" cy="3740150"/>
+                </a:xfrm>
+                <a:prstGeom prst="roundRect">
+                  <a:avLst/>
+                </a:prstGeom>
+              </p:spPr>
+            </p:pic>
+          </p:grpSp>
+          <p:pic>
+            <p:nvPicPr>
+              <p:cNvPr id="39" name="图片 38" descr="D:/实验研究/论文研究/支付协议/支付协议/支付模型ppt/序号1-01.svg序号1-01"/>
+              <p:cNvPicPr>
+                <a:picLocks noChangeAspect="1"/>
+              </p:cNvPicPr>
+              <p:nvPr/>
+            </p:nvPicPr>
+            <p:blipFill>
+              <a:blip r:embed="rId4">
+                <a:extLst>
+                  <a:ext uri="{96DAC541-7B7A-43D3-8B79-37D633B846F1}">
+                    <asvg:svgBlip xmlns:asvg="http://schemas.microsoft.com/office/drawing/2016/SVG/main" r:embed="rId5"/>
+                  </a:ext>
+                </a:extLst>
+              </a:blip>
+              <a:srcRect t="23" b="23"/>
+              <a:stretch>
+                <a:fillRect/>
+              </a:stretch>
+            </p:blipFill>
+            <p:spPr>
+              <a:xfrm>
+                <a:off x="4065588" y="4652599"/>
+                <a:ext cx="307975" cy="307975"/>
+              </a:xfrm>
+              <a:prstGeom prst="rect">
+                <a:avLst/>
+              </a:prstGeom>
+            </p:spPr>
+          </p:pic>
+        </p:grpSp>
+        <p:grpSp>
+          <p:nvGrpSpPr>
+            <p:cNvPr id="3" name="组合 2">
+              <a:extLst>
+                <a:ext uri="{FF2B5EF4-FFF2-40B4-BE49-F238E27FC236}">
+                  <a16:creationId xmlns:a16="http://schemas.microsoft.com/office/drawing/2014/main" id="{40B2E880-06F0-4000-9890-CDA6ADA026FC}"/>
+                </a:ext>
+              </a:extLst>
+            </p:cNvPr>
+            <p:cNvGrpSpPr/>
             <p:nvPr/>
-          </p:nvPicPr>
-          <p:blipFill>
-            <a:blip r:embed="rId2"/>
-            <a:srcRect l="-3754" t="-1049" r="-3228" b="-1375"/>
-            <a:stretch>
-              <a:fillRect/>
-            </a:stretch>
-          </p:blipFill>
-          <p:spPr>
+          </p:nvGrpSpPr>
+          <p:grpSpPr>
             <a:xfrm>
-              <a:off x="3440" y="1324"/>
-              <a:ext cx="2850" cy="5811"/>
+              <a:off x="4953000" y="196850"/>
+              <a:ext cx="5035550" cy="5035550"/>
+              <a:chOff x="4953000" y="196850"/>
+              <a:chExt cx="5035550" cy="5035550"/>
             </a:xfrm>
-            <a:prstGeom prst="roundRect">
-              <a:avLst/>
-            </a:prstGeom>
-          </p:spPr>
-        </p:pic>
+          </p:grpSpPr>
+          <p:grpSp>
+            <p:nvGrpSpPr>
+              <p:cNvPr id="14" name="组合 13"/>
+              <p:cNvGrpSpPr/>
+              <p:nvPr/>
+            </p:nvGrpSpPr>
+            <p:grpSpPr>
+              <a:xfrm>
+                <a:off x="4953000" y="196850"/>
+                <a:ext cx="5035550" cy="5035550"/>
+                <a:chOff x="920" y="310"/>
+                <a:chExt cx="7930" cy="7930"/>
+              </a:xfrm>
+            </p:grpSpPr>
+            <p:pic>
+              <p:nvPicPr>
+                <p:cNvPr id="15" name="图片 14" descr="ef56901b-e67b-48c3-91cc-2ffb6efbef1e"/>
+                <p:cNvPicPr>
+                  <a:picLocks noChangeAspect="1"/>
+                </p:cNvPicPr>
+                <p:nvPr/>
+              </p:nvPicPr>
+              <p:blipFill>
+                <a:blip r:embed="rId2"/>
+                <a:stretch>
+                  <a:fillRect/>
+                </a:stretch>
+              </p:blipFill>
+              <p:spPr>
+                <a:xfrm>
+                  <a:off x="920" y="310"/>
+                  <a:ext cx="7930" cy="7930"/>
+                </a:xfrm>
+                <a:prstGeom prst="rect">
+                  <a:avLst/>
+                </a:prstGeom>
+              </p:spPr>
+            </p:pic>
+            <p:pic>
+              <p:nvPicPr>
+                <p:cNvPr id="16" name="图片 15"/>
+                <p:cNvPicPr>
+                  <a:picLocks noChangeAspect="1"/>
+                </p:cNvPicPr>
+                <p:nvPr/>
+              </p:nvPicPr>
+              <p:blipFill>
+                <a:blip r:embed="rId6"/>
+                <a:srcRect l="-3754" t="-1049" r="-3228" b="-1375"/>
+                <a:stretch>
+                  <a:fillRect/>
+                </a:stretch>
+              </p:blipFill>
+              <p:spPr>
+                <a:xfrm>
+                  <a:off x="3440" y="1324"/>
+                  <a:ext cx="2850" cy="5811"/>
+                </a:xfrm>
+                <a:prstGeom prst="roundRect">
+                  <a:avLst/>
+                </a:prstGeom>
+              </p:spPr>
+            </p:pic>
+          </p:grpSp>
+          <p:pic>
+            <p:nvPicPr>
+              <p:cNvPr id="40" name="图片 39" descr="D:/实验研究/论文研究/支付协议/支付协议/支付模型ppt/序号2-01.svg序号2-01"/>
+              <p:cNvPicPr>
+                <a:picLocks noChangeAspect="1"/>
+              </p:cNvPicPr>
+              <p:nvPr/>
+            </p:nvPicPr>
+            <p:blipFill>
+              <a:blip r:embed="rId7">
+                <a:extLst>
+                  <a:ext uri="{96DAC541-7B7A-43D3-8B79-37D633B846F1}">
+                    <asvg:svgBlip xmlns:asvg="http://schemas.microsoft.com/office/drawing/2016/SVG/main" r:embed="rId8"/>
+                  </a:ext>
+                </a:extLst>
+              </a:blip>
+              <a:srcRect t="23" b="23"/>
+              <a:stretch>
+                <a:fillRect/>
+              </a:stretch>
+            </p:blipFill>
+            <p:spPr>
+              <a:xfrm>
+                <a:off x="7316788" y="4652599"/>
+                <a:ext cx="307975" cy="307975"/>
+              </a:xfrm>
+              <a:prstGeom prst="rect">
+                <a:avLst/>
+              </a:prstGeom>
+            </p:spPr>
+          </p:pic>
+        </p:grpSp>
       </p:grpSp>
-      <p:pic>
-        <p:nvPicPr>
-          <p:cNvPr id="9" name="图片 8" descr="ef56901b-e67b-48c3-91cc-2ffb6efbef1e"/>
-          <p:cNvPicPr>
-            <a:picLocks noChangeAspect="1"/>
-          </p:cNvPicPr>
-          <p:nvPr/>
-        </p:nvPicPr>
-        <p:blipFill>
-          <a:blip r:embed="rId1"/>
-          <a:stretch>
-            <a:fillRect/>
-          </a:stretch>
-        </p:blipFill>
-        <p:spPr>
-          <a:xfrm>
-            <a:off x="1701800" y="196850"/>
-            <a:ext cx="5035550" cy="5035550"/>
-          </a:xfrm>
-          <a:prstGeom prst="rect">
-            <a:avLst/>
-          </a:prstGeom>
-        </p:spPr>
-      </p:pic>
-      <p:pic>
-        <p:nvPicPr>
-          <p:cNvPr id="10" name="图片 9" descr="D:/实验研究/论文研究/支付协议/支付协议/支付模型ppt/2.jpg2"/>
-          <p:cNvPicPr>
-            <a:picLocks noChangeAspect="1"/>
-          </p:cNvPicPr>
-          <p:nvPr/>
-        </p:nvPicPr>
-        <p:blipFill>
-          <a:blip r:embed="rId3"/>
-          <a:srcRect l="-2593" t="-2073" r="-2963" b="-1388"/>
-          <a:stretch>
-            <a:fillRect/>
-          </a:stretch>
-        </p:blipFill>
-        <p:spPr>
-          <a:xfrm>
-            <a:off x="3308350" y="790575"/>
-            <a:ext cx="1809750" cy="3740150"/>
-          </a:xfrm>
-          <a:prstGeom prst="roundRect">
-            <a:avLst/>
-          </a:prstGeom>
-        </p:spPr>
-      </p:pic>
-      <p:pic>
-        <p:nvPicPr>
-          <p:cNvPr id="39" name="图片 38" descr="D:/实验研究/论文研究/支付协议/支付协议/支付模型ppt/序号1-01.svg序号1-01"/>
-          <p:cNvPicPr>
-            <a:picLocks noChangeAspect="1"/>
-          </p:cNvPicPr>
-          <p:nvPr/>
-        </p:nvPicPr>
-        <p:blipFill>
-          <a:blip r:embed="rId4">
-            <a:extLst>
-              <a:ext uri="{96DAC541-7B7A-43D3-8B79-37D633B846F1}">
-                <asvg:svgBlip xmlns:asvg="http://schemas.microsoft.com/office/drawing/2016/SVG/main" r:embed="rId5"/>
-              </a:ext>
-            </a:extLst>
-          </a:blip>
-          <a:srcRect t="23" b="23"/>
-          <a:stretch>
-            <a:fillRect/>
-          </a:stretch>
-        </p:blipFill>
-        <p:spPr>
-          <a:xfrm>
-            <a:off x="5327650" y="1313815"/>
-            <a:ext cx="360000" cy="360000"/>
-          </a:xfrm>
-          <a:prstGeom prst="rect">
-            <a:avLst/>
-          </a:prstGeom>
-        </p:spPr>
-      </p:pic>
-      <p:pic>
-        <p:nvPicPr>
-          <p:cNvPr id="40" name="图片 39" descr="D:/实验研究/论文研究/支付协议/支付协议/支付模型ppt/序号2-01.svg序号2-01"/>
-          <p:cNvPicPr>
-            <a:picLocks noChangeAspect="1"/>
-          </p:cNvPicPr>
-          <p:nvPr/>
-        </p:nvPicPr>
-        <p:blipFill>
-          <a:blip r:embed="rId6">
-            <a:extLst>
-              <a:ext uri="{96DAC541-7B7A-43D3-8B79-37D633B846F1}">
-                <asvg:svgBlip xmlns:asvg="http://schemas.microsoft.com/office/drawing/2016/SVG/main" r:embed="rId7"/>
-              </a:ext>
-            </a:extLst>
-          </a:blip>
-          <a:srcRect t="23" b="23"/>
-          <a:stretch>
-            <a:fillRect/>
-          </a:stretch>
-        </p:blipFill>
-        <p:spPr>
-          <a:xfrm>
-            <a:off x="8724265" y="1313815"/>
-            <a:ext cx="360000" cy="360000"/>
-          </a:xfrm>
-          <a:prstGeom prst="rect">
-            <a:avLst/>
-          </a:prstGeom>
-        </p:spPr>
-      </p:pic>
     </p:spTree>
   </p:cSld>
   <p:clrMapOvr>
@@ -8359,13 +8337,13 @@
           <p:nvPr/>
         </p:nvPicPr>
         <p:blipFill>
-          <a:blip r:embed="rId1" cstate="print">
+          <a:blip r:embed="rId2" cstate="print">
             <a:extLst>
               <a:ext uri="{28A0092B-C50C-407E-A947-70E740481C1C}">
                 <a14:useLocalDpi xmlns:a14="http://schemas.microsoft.com/office/drawing/2010/main" val="0"/>
               </a:ext>
               <a:ext uri="{96DAC541-7B7A-43D3-8B79-37D633B846F1}">
-                <asvg:svgBlip xmlns:asvg="http://schemas.microsoft.com/office/drawing/2016/SVG/main" r:embed="rId2"/>
+                <asvg:svgBlip xmlns:asvg="http://schemas.microsoft.com/office/drawing/2016/SVG/main" r:embed="rId3"/>
               </a:ext>
             </a:extLst>
           </a:blip>
@@ -8392,13 +8370,13 @@
           <p:nvPr/>
         </p:nvPicPr>
         <p:blipFill>
-          <a:blip r:embed="rId3" cstate="print">
+          <a:blip r:embed="rId4" cstate="print">
             <a:extLst>
               <a:ext uri="{28A0092B-C50C-407E-A947-70E740481C1C}">
                 <a14:useLocalDpi xmlns:a14="http://schemas.microsoft.com/office/drawing/2010/main" val="0"/>
               </a:ext>
               <a:ext uri="{96DAC541-7B7A-43D3-8B79-37D633B846F1}">
-                <asvg:svgBlip xmlns:asvg="http://schemas.microsoft.com/office/drawing/2016/SVG/main" r:embed="rId4"/>
+                <asvg:svgBlip xmlns:asvg="http://schemas.microsoft.com/office/drawing/2016/SVG/main" r:embed="rId5"/>
               </a:ext>
             </a:extLst>
           </a:blip>
@@ -8472,13 +8450,13 @@
           <p:nvPr/>
         </p:nvPicPr>
         <p:blipFill>
-          <a:blip r:embed="rId5" cstate="print">
+          <a:blip r:embed="rId6" cstate="print">
             <a:extLst>
               <a:ext uri="{28A0092B-C50C-407E-A947-70E740481C1C}">
                 <a14:useLocalDpi xmlns:a14="http://schemas.microsoft.com/office/drawing/2010/main" val="0"/>
               </a:ext>
               <a:ext uri="{96DAC541-7B7A-43D3-8B79-37D633B846F1}">
-                <asvg:svgBlip xmlns:asvg="http://schemas.microsoft.com/office/drawing/2016/SVG/main" r:embed="rId6"/>
+                <asvg:svgBlip xmlns:asvg="http://schemas.microsoft.com/office/drawing/2016/SVG/main" r:embed="rId7"/>
               </a:ext>
             </a:extLst>
           </a:blip>
@@ -8505,13 +8483,13 @@
           <p:nvPr/>
         </p:nvPicPr>
         <p:blipFill>
-          <a:blip r:embed="rId7" cstate="print">
+          <a:blip r:embed="rId8" cstate="print">
             <a:extLst>
               <a:ext uri="{28A0092B-C50C-407E-A947-70E740481C1C}">
                 <a14:useLocalDpi xmlns:a14="http://schemas.microsoft.com/office/drawing/2010/main" val="0"/>
               </a:ext>
               <a:ext uri="{96DAC541-7B7A-43D3-8B79-37D633B846F1}">
-                <asvg:svgBlip xmlns:asvg="http://schemas.microsoft.com/office/drawing/2016/SVG/main" r:embed="rId8"/>
+                <asvg:svgBlip xmlns:asvg="http://schemas.microsoft.com/office/drawing/2016/SVG/main" r:embed="rId9"/>
               </a:ext>
             </a:extLst>
           </a:blip>
@@ -8538,13 +8516,13 @@
           <p:nvPr/>
         </p:nvPicPr>
         <p:blipFill>
-          <a:blip r:embed="rId9" cstate="print">
+          <a:blip r:embed="rId10" cstate="print">
             <a:extLst>
               <a:ext uri="{28A0092B-C50C-407E-A947-70E740481C1C}">
                 <a14:useLocalDpi xmlns:a14="http://schemas.microsoft.com/office/drawing/2010/main" val="0"/>
               </a:ext>
               <a:ext uri="{96DAC541-7B7A-43D3-8B79-37D633B846F1}">
-                <asvg:svgBlip xmlns:asvg="http://schemas.microsoft.com/office/drawing/2016/SVG/main" r:embed="rId10"/>
+                <asvg:svgBlip xmlns:asvg="http://schemas.microsoft.com/office/drawing/2016/SVG/main" r:embed="rId11"/>
               </a:ext>
             </a:extLst>
           </a:blip>
@@ -8571,13 +8549,13 @@
           <p:nvPr/>
         </p:nvPicPr>
         <p:blipFill>
-          <a:blip r:embed="rId11" cstate="print">
+          <a:blip r:embed="rId12" cstate="print">
             <a:extLst>
               <a:ext uri="{28A0092B-C50C-407E-A947-70E740481C1C}">
                 <a14:useLocalDpi xmlns:a14="http://schemas.microsoft.com/office/drawing/2010/main" val="0"/>
               </a:ext>
               <a:ext uri="{96DAC541-7B7A-43D3-8B79-37D633B846F1}">
-                <asvg:svgBlip xmlns:asvg="http://schemas.microsoft.com/office/drawing/2016/SVG/main" r:embed="rId12"/>
+                <asvg:svgBlip xmlns:asvg="http://schemas.microsoft.com/office/drawing/2016/SVG/main" r:embed="rId13"/>
               </a:ext>
             </a:extLst>
           </a:blip>
@@ -8604,13 +8582,13 @@
           <p:nvPr/>
         </p:nvPicPr>
         <p:blipFill>
-          <a:blip r:embed="rId9" cstate="print">
+          <a:blip r:embed="rId10" cstate="print">
             <a:extLst>
               <a:ext uri="{28A0092B-C50C-407E-A947-70E740481C1C}">
                 <a14:useLocalDpi xmlns:a14="http://schemas.microsoft.com/office/drawing/2010/main" val="0"/>
               </a:ext>
               <a:ext uri="{96DAC541-7B7A-43D3-8B79-37D633B846F1}">
-                <asvg:svgBlip xmlns:asvg="http://schemas.microsoft.com/office/drawing/2016/SVG/main" r:embed="rId10"/>
+                <asvg:svgBlip xmlns:asvg="http://schemas.microsoft.com/office/drawing/2016/SVG/main" r:embed="rId11"/>
               </a:ext>
             </a:extLst>
           </a:blip>
@@ -8637,13 +8615,13 @@
           <p:nvPr/>
         </p:nvPicPr>
         <p:blipFill>
-          <a:blip r:embed="rId13" cstate="print">
+          <a:blip r:embed="rId14" cstate="print">
             <a:extLst>
               <a:ext uri="{28A0092B-C50C-407E-A947-70E740481C1C}">
                 <a14:useLocalDpi xmlns:a14="http://schemas.microsoft.com/office/drawing/2010/main" val="0"/>
               </a:ext>
               <a:ext uri="{96DAC541-7B7A-43D3-8B79-37D633B846F1}">
-                <asvg:svgBlip xmlns:asvg="http://schemas.microsoft.com/office/drawing/2016/SVG/main" r:embed="rId14"/>
+                <asvg:svgBlip xmlns:asvg="http://schemas.microsoft.com/office/drawing/2016/SVG/main" r:embed="rId15"/>
               </a:ext>
             </a:extLst>
           </a:blip>
@@ -9276,13 +9254,13 @@
           <p:nvPr/>
         </p:nvPicPr>
         <p:blipFill>
-          <a:blip r:embed="rId1" cstate="print">
+          <a:blip r:embed="rId2" cstate="print">
             <a:extLst>
               <a:ext uri="{28A0092B-C50C-407E-A947-70E740481C1C}">
                 <a14:useLocalDpi xmlns:a14="http://schemas.microsoft.com/office/drawing/2010/main" val="0"/>
               </a:ext>
               <a:ext uri="{96DAC541-7B7A-43D3-8B79-37D633B846F1}">
-                <asvg:svgBlip xmlns:asvg="http://schemas.microsoft.com/office/drawing/2016/SVG/main" r:embed="rId2"/>
+                <asvg:svgBlip xmlns:asvg="http://schemas.microsoft.com/office/drawing/2016/SVG/main" r:embed="rId3"/>
               </a:ext>
             </a:extLst>
           </a:blip>
@@ -9309,13 +9287,13 @@
           <p:nvPr/>
         </p:nvPicPr>
         <p:blipFill>
-          <a:blip r:embed="rId3" cstate="print">
+          <a:blip r:embed="rId4" cstate="print">
             <a:extLst>
               <a:ext uri="{28A0092B-C50C-407E-A947-70E740481C1C}">
                 <a14:useLocalDpi xmlns:a14="http://schemas.microsoft.com/office/drawing/2010/main" val="0"/>
               </a:ext>
               <a:ext uri="{96DAC541-7B7A-43D3-8B79-37D633B846F1}">
-                <asvg:svgBlip xmlns:asvg="http://schemas.microsoft.com/office/drawing/2016/SVG/main" r:embed="rId4"/>
+                <asvg:svgBlip xmlns:asvg="http://schemas.microsoft.com/office/drawing/2016/SVG/main" r:embed="rId5"/>
               </a:ext>
             </a:extLst>
           </a:blip>
@@ -9389,13 +9367,13 @@
           <p:nvPr/>
         </p:nvPicPr>
         <p:blipFill>
-          <a:blip r:embed="rId5" cstate="print">
+          <a:blip r:embed="rId6" cstate="print">
             <a:extLst>
               <a:ext uri="{28A0092B-C50C-407E-A947-70E740481C1C}">
                 <a14:useLocalDpi xmlns:a14="http://schemas.microsoft.com/office/drawing/2010/main" val="0"/>
               </a:ext>
               <a:ext uri="{96DAC541-7B7A-43D3-8B79-37D633B846F1}">
-                <asvg:svgBlip xmlns:asvg="http://schemas.microsoft.com/office/drawing/2016/SVG/main" r:embed="rId6"/>
+                <asvg:svgBlip xmlns:asvg="http://schemas.microsoft.com/office/drawing/2016/SVG/main" r:embed="rId7"/>
               </a:ext>
             </a:extLst>
           </a:blip>
@@ -9422,13 +9400,13 @@
           <p:nvPr/>
         </p:nvPicPr>
         <p:blipFill>
-          <a:blip r:embed="rId7" cstate="print">
+          <a:blip r:embed="rId8" cstate="print">
             <a:extLst>
               <a:ext uri="{28A0092B-C50C-407E-A947-70E740481C1C}">
                 <a14:useLocalDpi xmlns:a14="http://schemas.microsoft.com/office/drawing/2010/main" val="0"/>
               </a:ext>
               <a:ext uri="{96DAC541-7B7A-43D3-8B79-37D633B846F1}">
-                <asvg:svgBlip xmlns:asvg="http://schemas.microsoft.com/office/drawing/2016/SVG/main" r:embed="rId8"/>
+                <asvg:svgBlip xmlns:asvg="http://schemas.microsoft.com/office/drawing/2016/SVG/main" r:embed="rId9"/>
               </a:ext>
             </a:extLst>
           </a:blip>
@@ -9455,13 +9433,13 @@
           <p:nvPr/>
         </p:nvPicPr>
         <p:blipFill>
-          <a:blip r:embed="rId9" cstate="print">
+          <a:blip r:embed="rId10" cstate="print">
             <a:extLst>
               <a:ext uri="{28A0092B-C50C-407E-A947-70E740481C1C}">
                 <a14:useLocalDpi xmlns:a14="http://schemas.microsoft.com/office/drawing/2010/main" val="0"/>
               </a:ext>
               <a:ext uri="{96DAC541-7B7A-43D3-8B79-37D633B846F1}">
-                <asvg:svgBlip xmlns:asvg="http://schemas.microsoft.com/office/drawing/2016/SVG/main" r:embed="rId10"/>
+                <asvg:svgBlip xmlns:asvg="http://schemas.microsoft.com/office/drawing/2016/SVG/main" r:embed="rId11"/>
               </a:ext>
             </a:extLst>
           </a:blip>
@@ -9488,13 +9466,13 @@
           <p:nvPr/>
         </p:nvPicPr>
         <p:blipFill>
-          <a:blip r:embed="rId11" cstate="print">
+          <a:blip r:embed="rId12" cstate="print">
             <a:extLst>
               <a:ext uri="{28A0092B-C50C-407E-A947-70E740481C1C}">
                 <a14:useLocalDpi xmlns:a14="http://schemas.microsoft.com/office/drawing/2010/main" val="0"/>
               </a:ext>
               <a:ext uri="{96DAC541-7B7A-43D3-8B79-37D633B846F1}">
-                <asvg:svgBlip xmlns:asvg="http://schemas.microsoft.com/office/drawing/2016/SVG/main" r:embed="rId12"/>
+                <asvg:svgBlip xmlns:asvg="http://schemas.microsoft.com/office/drawing/2016/SVG/main" r:embed="rId13"/>
               </a:ext>
             </a:extLst>
           </a:blip>
@@ -9521,13 +9499,13 @@
           <p:nvPr/>
         </p:nvPicPr>
         <p:blipFill>
-          <a:blip r:embed="rId9" cstate="print">
+          <a:blip r:embed="rId10" cstate="print">
             <a:extLst>
               <a:ext uri="{28A0092B-C50C-407E-A947-70E740481C1C}">
                 <a14:useLocalDpi xmlns:a14="http://schemas.microsoft.com/office/drawing/2010/main" val="0"/>
               </a:ext>
               <a:ext uri="{96DAC541-7B7A-43D3-8B79-37D633B846F1}">
-                <asvg:svgBlip xmlns:asvg="http://schemas.microsoft.com/office/drawing/2016/SVG/main" r:embed="rId10"/>
+                <asvg:svgBlip xmlns:asvg="http://schemas.microsoft.com/office/drawing/2016/SVG/main" r:embed="rId11"/>
               </a:ext>
             </a:extLst>
           </a:blip>
@@ -9554,13 +9532,13 @@
           <p:nvPr/>
         </p:nvPicPr>
         <p:blipFill>
-          <a:blip r:embed="rId13" cstate="print">
+          <a:blip r:embed="rId14" cstate="print">
             <a:extLst>
               <a:ext uri="{28A0092B-C50C-407E-A947-70E740481C1C}">
                 <a14:useLocalDpi xmlns:a14="http://schemas.microsoft.com/office/drawing/2010/main" val="0"/>
               </a:ext>
               <a:ext uri="{96DAC541-7B7A-43D3-8B79-37D633B846F1}">
-                <asvg:svgBlip xmlns:asvg="http://schemas.microsoft.com/office/drawing/2016/SVG/main" r:embed="rId14"/>
+                <asvg:svgBlip xmlns:asvg="http://schemas.microsoft.com/office/drawing/2016/SVG/main" r:embed="rId15"/>
               </a:ext>
             </a:extLst>
           </a:blip>
@@ -9923,10 +9901,10 @@
           <p:nvPr/>
         </p:nvPicPr>
         <p:blipFill>
-          <a:blip r:embed="rId15">
+          <a:blip r:embed="rId16">
             <a:extLst>
               <a:ext uri="{96DAC541-7B7A-43D3-8B79-37D633B846F1}">
-                <asvg:svgBlip xmlns:asvg="http://schemas.microsoft.com/office/drawing/2016/SVG/main" r:embed="rId16"/>
+                <asvg:svgBlip xmlns:asvg="http://schemas.microsoft.com/office/drawing/2016/SVG/main" r:embed="rId17"/>
               </a:ext>
             </a:extLst>
           </a:blip>
@@ -10014,13 +9992,13 @@
           <p:nvPr/>
         </p:nvPicPr>
         <p:blipFill>
-          <a:blip r:embed="rId1" cstate="print">
+          <a:blip r:embed="rId2" cstate="print">
             <a:extLst>
               <a:ext uri="{28A0092B-C50C-407E-A947-70E740481C1C}">
                 <a14:useLocalDpi xmlns:a14="http://schemas.microsoft.com/office/drawing/2010/main" val="0"/>
               </a:ext>
               <a:ext uri="{96DAC541-7B7A-43D3-8B79-37D633B846F1}">
-                <asvg:svgBlip xmlns:asvg="http://schemas.microsoft.com/office/drawing/2016/SVG/main" r:embed="rId2"/>
+                <asvg:svgBlip xmlns:asvg="http://schemas.microsoft.com/office/drawing/2016/SVG/main" r:embed="rId3"/>
               </a:ext>
             </a:extLst>
           </a:blip>
@@ -10047,13 +10025,13 @@
           <p:nvPr/>
         </p:nvPicPr>
         <p:blipFill>
-          <a:blip r:embed="rId3" cstate="print">
+          <a:blip r:embed="rId4" cstate="print">
             <a:extLst>
               <a:ext uri="{28A0092B-C50C-407E-A947-70E740481C1C}">
                 <a14:useLocalDpi xmlns:a14="http://schemas.microsoft.com/office/drawing/2010/main" val="0"/>
               </a:ext>
               <a:ext uri="{96DAC541-7B7A-43D3-8B79-37D633B846F1}">
-                <asvg:svgBlip xmlns:asvg="http://schemas.microsoft.com/office/drawing/2016/SVG/main" r:embed="rId4"/>
+                <asvg:svgBlip xmlns:asvg="http://schemas.microsoft.com/office/drawing/2016/SVG/main" r:embed="rId5"/>
               </a:ext>
             </a:extLst>
           </a:blip>
@@ -10127,13 +10105,13 @@
           <p:nvPr/>
         </p:nvPicPr>
         <p:blipFill>
-          <a:blip r:embed="rId5" cstate="print">
+          <a:blip r:embed="rId6" cstate="print">
             <a:extLst>
               <a:ext uri="{28A0092B-C50C-407E-A947-70E740481C1C}">
                 <a14:useLocalDpi xmlns:a14="http://schemas.microsoft.com/office/drawing/2010/main" val="0"/>
               </a:ext>
               <a:ext uri="{96DAC541-7B7A-43D3-8B79-37D633B846F1}">
-                <asvg:svgBlip xmlns:asvg="http://schemas.microsoft.com/office/drawing/2016/SVG/main" r:embed="rId6"/>
+                <asvg:svgBlip xmlns:asvg="http://schemas.microsoft.com/office/drawing/2016/SVG/main" r:embed="rId7"/>
               </a:ext>
             </a:extLst>
           </a:blip>
@@ -10160,13 +10138,13 @@
           <p:nvPr/>
         </p:nvPicPr>
         <p:blipFill>
-          <a:blip r:embed="rId7" cstate="print">
+          <a:blip r:embed="rId8" cstate="print">
             <a:extLst>
               <a:ext uri="{28A0092B-C50C-407E-A947-70E740481C1C}">
                 <a14:useLocalDpi xmlns:a14="http://schemas.microsoft.com/office/drawing/2010/main" val="0"/>
               </a:ext>
               <a:ext uri="{96DAC541-7B7A-43D3-8B79-37D633B846F1}">
-                <asvg:svgBlip xmlns:asvg="http://schemas.microsoft.com/office/drawing/2016/SVG/main" r:embed="rId8"/>
+                <asvg:svgBlip xmlns:asvg="http://schemas.microsoft.com/office/drawing/2016/SVG/main" r:embed="rId9"/>
               </a:ext>
             </a:extLst>
           </a:blip>
@@ -10193,13 +10171,13 @@
           <p:nvPr/>
         </p:nvPicPr>
         <p:blipFill>
-          <a:blip r:embed="rId9" cstate="print">
+          <a:blip r:embed="rId10" cstate="print">
             <a:extLst>
               <a:ext uri="{28A0092B-C50C-407E-A947-70E740481C1C}">
                 <a14:useLocalDpi xmlns:a14="http://schemas.microsoft.com/office/drawing/2010/main" val="0"/>
               </a:ext>
               <a:ext uri="{96DAC541-7B7A-43D3-8B79-37D633B846F1}">
-                <asvg:svgBlip xmlns:asvg="http://schemas.microsoft.com/office/drawing/2016/SVG/main" r:embed="rId10"/>
+                <asvg:svgBlip xmlns:asvg="http://schemas.microsoft.com/office/drawing/2016/SVG/main" r:embed="rId11"/>
               </a:ext>
             </a:extLst>
           </a:blip>
@@ -10226,13 +10204,13 @@
           <p:nvPr/>
         </p:nvPicPr>
         <p:blipFill>
-          <a:blip r:embed="rId11" cstate="print">
+          <a:blip r:embed="rId12" cstate="print">
             <a:extLst>
               <a:ext uri="{28A0092B-C50C-407E-A947-70E740481C1C}">
                 <a14:useLocalDpi xmlns:a14="http://schemas.microsoft.com/office/drawing/2010/main" val="0"/>
               </a:ext>
               <a:ext uri="{96DAC541-7B7A-43D3-8B79-37D633B846F1}">
-                <asvg:svgBlip xmlns:asvg="http://schemas.microsoft.com/office/drawing/2016/SVG/main" r:embed="rId12"/>
+                <asvg:svgBlip xmlns:asvg="http://schemas.microsoft.com/office/drawing/2016/SVG/main" r:embed="rId13"/>
               </a:ext>
             </a:extLst>
           </a:blip>
@@ -10259,13 +10237,13 @@
           <p:nvPr/>
         </p:nvPicPr>
         <p:blipFill>
-          <a:blip r:embed="rId9" cstate="print">
+          <a:blip r:embed="rId10" cstate="print">
             <a:extLst>
               <a:ext uri="{28A0092B-C50C-407E-A947-70E740481C1C}">
                 <a14:useLocalDpi xmlns:a14="http://schemas.microsoft.com/office/drawing/2010/main" val="0"/>
               </a:ext>
               <a:ext uri="{96DAC541-7B7A-43D3-8B79-37D633B846F1}">
-                <asvg:svgBlip xmlns:asvg="http://schemas.microsoft.com/office/drawing/2016/SVG/main" r:embed="rId10"/>
+                <asvg:svgBlip xmlns:asvg="http://schemas.microsoft.com/office/drawing/2016/SVG/main" r:embed="rId11"/>
               </a:ext>
             </a:extLst>
           </a:blip>
@@ -10292,13 +10270,13 @@
           <p:nvPr/>
         </p:nvPicPr>
         <p:blipFill>
-          <a:blip r:embed="rId13" cstate="print">
+          <a:blip r:embed="rId14" cstate="print">
             <a:extLst>
               <a:ext uri="{28A0092B-C50C-407E-A947-70E740481C1C}">
                 <a14:useLocalDpi xmlns:a14="http://schemas.microsoft.com/office/drawing/2010/main" val="0"/>
               </a:ext>
               <a:ext uri="{96DAC541-7B7A-43D3-8B79-37D633B846F1}">
-                <asvg:svgBlip xmlns:asvg="http://schemas.microsoft.com/office/drawing/2016/SVG/main" r:embed="rId14"/>
+                <asvg:svgBlip xmlns:asvg="http://schemas.microsoft.com/office/drawing/2016/SVG/main" r:embed="rId15"/>
               </a:ext>
             </a:extLst>
           </a:blip>
@@ -10661,13 +10639,13 @@
           <p:nvPr/>
         </p:nvPicPr>
         <p:blipFill>
-          <a:blip r:embed="rId15" cstate="print">
+          <a:blip r:embed="rId16" cstate="print">
             <a:extLst>
               <a:ext uri="{28A0092B-C50C-407E-A947-70E740481C1C}">
                 <a14:useLocalDpi xmlns:a14="http://schemas.microsoft.com/office/drawing/2010/main" val="0"/>
               </a:ext>
               <a:ext uri="{96DAC541-7B7A-43D3-8B79-37D633B846F1}">
-                <asvg:svgBlip xmlns:asvg="http://schemas.microsoft.com/office/drawing/2016/SVG/main" r:embed="rId16"/>
+                <asvg:svgBlip xmlns:asvg="http://schemas.microsoft.com/office/drawing/2016/SVG/main" r:embed="rId17"/>
               </a:ext>
             </a:extLst>
           </a:blip>
@@ -10694,13 +10672,13 @@
           <p:nvPr/>
         </p:nvPicPr>
         <p:blipFill>
-          <a:blip r:embed="rId17">
+          <a:blip r:embed="rId18">
             <a:extLst>
               <a:ext uri="{28A0092B-C50C-407E-A947-70E740481C1C}">
                 <a14:useLocalDpi xmlns:a14="http://schemas.microsoft.com/office/drawing/2010/main" val="0"/>
               </a:ext>
               <a:ext uri="{96DAC541-7B7A-43D3-8B79-37D633B846F1}">
-                <asvg:svgBlip xmlns:asvg="http://schemas.microsoft.com/office/drawing/2016/SVG/main" r:embed="rId18"/>
+                <asvg:svgBlip xmlns:asvg="http://schemas.microsoft.com/office/drawing/2016/SVG/main" r:embed="rId19"/>
               </a:ext>
             </a:extLst>
           </a:blip>
@@ -10846,13 +10824,13 @@
           <p:nvPr/>
         </p:nvPicPr>
         <p:blipFill>
-          <a:blip r:embed="rId19" cstate="print">
+          <a:blip r:embed="rId20" cstate="print">
             <a:extLst>
               <a:ext uri="{28A0092B-C50C-407E-A947-70E740481C1C}">
                 <a14:useLocalDpi xmlns:a14="http://schemas.microsoft.com/office/drawing/2010/main" val="0"/>
               </a:ext>
               <a:ext uri="{96DAC541-7B7A-43D3-8B79-37D633B846F1}">
-                <asvg:svgBlip xmlns:asvg="http://schemas.microsoft.com/office/drawing/2016/SVG/main" r:embed="rId20"/>
+                <asvg:svgBlip xmlns:asvg="http://schemas.microsoft.com/office/drawing/2016/SVG/main" r:embed="rId21"/>
               </a:ext>
             </a:extLst>
           </a:blip>
@@ -11121,6 +11099,8 @@
       </a:bgFillStyleLst>
     </a:fmtScheme>
   </a:themeElements>
+  <a:objectDefaults/>
+  <a:extraClrSchemeLst/>
   <a:extLst>
     <a:ext uri="{05A4C25C-085E-4340-85A3-A5531E510DB2}">
       <thm15:themeFamily xmlns:thm15="http://schemas.microsoft.com/office/thememl/2012/main" name="Office Theme" id="{62F939B6-93AF-4DB8-9C6B-D6C7DFDC589F}" vid="{4A3C46E8-61CC-4603-A589-7422A47A8E4A}"/>

--- a/img-source/images.pptx
+++ b/img-source/images.pptx
@@ -8058,10 +8058,10 @@
         </p:nvGrpSpPr>
         <p:grpSpPr>
           <a:xfrm>
-            <a:off x="1701800" y="196850"/>
-            <a:ext cx="8286750" cy="5035550"/>
-            <a:chOff x="1701800" y="196850"/>
-            <a:chExt cx="8286750" cy="5035550"/>
+            <a:off x="3242310" y="196850"/>
+            <a:ext cx="5601653" cy="5035550"/>
+            <a:chOff x="3242310" y="196850"/>
+            <a:chExt cx="5601653" cy="5035550"/>
           </a:xfrm>
         </p:grpSpPr>
         <p:grpSp>
@@ -8078,10 +8078,10 @@
           </p:nvGrpSpPr>
           <p:grpSpPr>
             <a:xfrm>
-              <a:off x="1701800" y="196850"/>
-              <a:ext cx="5035550" cy="5035550"/>
-              <a:chOff x="1701800" y="196850"/>
-              <a:chExt cx="5035550" cy="5035550"/>
+              <a:off x="3242310" y="196850"/>
+              <a:ext cx="3495040" cy="5035550"/>
+              <a:chOff x="3242310" y="196850"/>
+              <a:chExt cx="3495040" cy="5035550"/>
             </a:xfrm>
           </p:grpSpPr>
           <p:grpSp>
@@ -8098,10 +8098,10 @@
             </p:nvGrpSpPr>
             <p:grpSpPr>
               <a:xfrm>
-                <a:off x="1701800" y="196850"/>
-                <a:ext cx="5035550" cy="5035550"/>
-                <a:chOff x="1701800" y="196850"/>
-                <a:chExt cx="5035550" cy="5035550"/>
+                <a:off x="3242310" y="196850"/>
+                <a:ext cx="3495040" cy="5035550"/>
+                <a:chOff x="3242310" y="196850"/>
+                <a:chExt cx="3495040" cy="5035550"/>
               </a:xfrm>
             </p:grpSpPr>
             <p:pic>
@@ -8112,16 +8112,15 @@
                 </p:cNvPicPr>
                 <p:nvPr/>
               </p:nvPicPr>
-              <p:blipFill>
+              <p:blipFill rotWithShape="1">
                 <a:blip r:embed="rId2"/>
-                <a:stretch>
-                  <a:fillRect/>
-                </a:stretch>
+                <a:srcRect l="30593"/>
+                <a:stretch/>
               </p:blipFill>
               <p:spPr>
                 <a:xfrm>
-                  <a:off x="1701800" y="196850"/>
-                  <a:ext cx="5035550" cy="5035550"/>
+                  <a:off x="3242310" y="196850"/>
+                  <a:ext cx="3495040" cy="5035550"/>
                 </a:xfrm>
                 <a:prstGeom prst="rect">
                   <a:avLst/>
@@ -8177,7 +8176,7 @@
             </p:blipFill>
             <p:spPr>
               <a:xfrm>
-                <a:off x="4065588" y="4652599"/>
+                <a:off x="5284788" y="908639"/>
                 <a:ext cx="307975" cy="307975"/>
               </a:xfrm>
               <a:prstGeom prst="rect">
@@ -8201,9 +8200,9 @@
           <p:grpSpPr>
             <a:xfrm>
               <a:off x="4953000" y="196850"/>
-              <a:ext cx="5035550" cy="5035550"/>
+              <a:ext cx="3890963" cy="5035550"/>
               <a:chOff x="4953000" y="196850"/>
-              <a:chExt cx="5035550" cy="5035550"/>
+              <a:chExt cx="3890963" cy="5035550"/>
             </a:xfrm>
           </p:grpSpPr>
           <p:grpSp>
@@ -8215,9 +8214,9 @@
             <p:grpSpPr>
               <a:xfrm>
                 <a:off x="4953000" y="196850"/>
-                <a:ext cx="5035550" cy="5035550"/>
+                <a:ext cx="3495040" cy="5035550"/>
                 <a:chOff x="920" y="310"/>
-                <a:chExt cx="7930" cy="7930"/>
+                <a:chExt cx="5504" cy="7930"/>
               </a:xfrm>
             </p:grpSpPr>
             <p:pic>
@@ -8228,16 +8227,15 @@
                 </p:cNvPicPr>
                 <p:nvPr/>
               </p:nvPicPr>
-              <p:blipFill>
+              <p:blipFill rotWithShape="1">
                 <a:blip r:embed="rId2"/>
-                <a:stretch>
-                  <a:fillRect/>
-                </a:stretch>
+                <a:srcRect r="30593"/>
+                <a:stretch/>
               </p:blipFill>
               <p:spPr>
                 <a:xfrm>
                   <a:off x="920" y="310"/>
-                  <a:ext cx="7930" cy="7930"/>
+                  <a:ext cx="5504" cy="7930"/>
                 </a:xfrm>
                 <a:prstGeom prst="rect">
                   <a:avLst/>
@@ -8293,7 +8291,7 @@
             </p:blipFill>
             <p:spPr>
               <a:xfrm>
-                <a:off x="7316788" y="4652599"/>
+                <a:off x="8535988" y="908639"/>
                 <a:ext cx="307975" cy="307975"/>
               </a:xfrm>
               <a:prstGeom prst="rect">

--- a/img-source/images.pptx
+++ b/img-source/images.pptx
@@ -5,14 +5,14 @@
     <p:sldMasterId id="2147483648" r:id="rId1"/>
   </p:sldMasterIdLst>
   <p:sldIdLst>
-    <p:sldId id="256" r:id="rId2"/>
-    <p:sldId id="260" r:id="rId3"/>
-    <p:sldId id="259" r:id="rId4"/>
-    <p:sldId id="261" r:id="rId5"/>
-    <p:sldId id="262" r:id="rId6"/>
-    <p:sldId id="257" r:id="rId7"/>
-    <p:sldId id="258" r:id="rId8"/>
-    <p:sldId id="263" r:id="rId9"/>
+    <p:sldId id="256" r:id="rId3"/>
+    <p:sldId id="260" r:id="rId4"/>
+    <p:sldId id="259" r:id="rId5"/>
+    <p:sldId id="261" r:id="rId6"/>
+    <p:sldId id="262" r:id="rId7"/>
+    <p:sldId id="257" r:id="rId8"/>
+    <p:sldId id="258" r:id="rId9"/>
+    <p:sldId id="263" r:id="rId10"/>
   </p:sldIdLst>
   <p:sldSz cx="12192000" cy="6858000"/>
   <p:notesSz cx="6858000" cy="9144000"/>
@@ -114,12 +114,12 @@
   <p:extLst>
     <p:ext uri="{EFAFB233-063F-42B5-8137-9DF3F51BA10A}">
       <p15:sldGuideLst xmlns:p15="http://schemas.microsoft.com/office/powerpoint/2012/main">
-        <p15:guide id="1" orient="horz" pos="3180" userDrawn="1">
+        <p15:guide id="1" orient="horz" pos="3152" userDrawn="1">
           <p15:clr>
             <a:srgbClr val="A4A3A4"/>
           </p15:clr>
         </p15:guide>
-        <p15:guide id="2" pos="5160" userDrawn="1">
+        <p15:guide id="2" pos="4974" userDrawn="1">
           <p15:clr>
             <a:srgbClr val="A4A3A4"/>
           </p15:clr>
@@ -129,7 +129,7 @@
             <a:srgbClr val="A4A3A4"/>
           </p15:clr>
         </p15:guide>
-        <p15:guide id="4" pos="3596" userDrawn="1">
+        <p15:guide id="4" pos="3599" userDrawn="1">
           <p15:clr>
             <a:srgbClr val="A4A3A4"/>
           </p15:clr>
@@ -185,6 +185,7 @@
               <a:rPr lang="zh-CN" altLang="en-US"/>
               <a:t>单击此处编辑母版标题样式</a:t>
             </a:r>
+            <a:endParaRPr lang="zh-CN" altLang="en-US"/>
           </a:p>
         </p:txBody>
       </p:sp>
@@ -249,6 +250,7 @@
               <a:rPr lang="zh-CN" altLang="en-US"/>
               <a:t>单击此处编辑母版副标题样式</a:t>
             </a:r>
+            <a:endParaRPr lang="zh-CN" altLang="en-US"/>
           </a:p>
         </p:txBody>
       </p:sp>
@@ -269,7 +271,6 @@
           <a:p>
             <a:fld id="{D997B5FA-0921-464F-AAE1-844C04324D75}" type="datetimeFigureOut">
               <a:rPr lang="zh-CN" altLang="en-US" smtClean="0"/>
-              <a:t>2026/1/20</a:t>
             </a:fld>
             <a:endParaRPr lang="zh-CN" altLang="en-US"/>
           </a:p>
@@ -311,7 +312,6 @@
           <a:p>
             <a:fld id="{565CE74E-AB26-4998-AD42-012C4C1AD076}" type="slidenum">
               <a:rPr lang="zh-CN" altLang="en-US" smtClean="0"/>
-              <a:t>‹#›</a:t>
             </a:fld>
             <a:endParaRPr lang="zh-CN" altLang="en-US"/>
           </a:p>
@@ -361,6 +361,7 @@
               <a:rPr lang="zh-CN" altLang="en-US"/>
               <a:t>单击此处编辑母版标题样式</a:t>
             </a:r>
+            <a:endParaRPr lang="zh-CN" altLang="en-US"/>
           </a:p>
         </p:txBody>
       </p:sp>
@@ -384,6 +385,7 @@
               <a:rPr lang="zh-CN" altLang="en-US"/>
               <a:t>单击此处编辑母版文本样式</a:t>
             </a:r>
+            <a:endParaRPr lang="zh-CN" altLang="en-US"/>
           </a:p>
           <a:p>
             <a:pPr lvl="1"/>
@@ -391,6 +393,7 @@
               <a:rPr lang="zh-CN" altLang="en-US"/>
               <a:t>第二级</a:t>
             </a:r>
+            <a:endParaRPr lang="zh-CN" altLang="en-US"/>
           </a:p>
           <a:p>
             <a:pPr lvl="2"/>
@@ -398,6 +401,7 @@
               <a:rPr lang="zh-CN" altLang="en-US"/>
               <a:t>第三级</a:t>
             </a:r>
+            <a:endParaRPr lang="zh-CN" altLang="en-US"/>
           </a:p>
           <a:p>
             <a:pPr lvl="3"/>
@@ -405,6 +409,7 @@
               <a:rPr lang="zh-CN" altLang="en-US"/>
               <a:t>第四级</a:t>
             </a:r>
+            <a:endParaRPr lang="zh-CN" altLang="en-US"/>
           </a:p>
           <a:p>
             <a:pPr lvl="4"/>
@@ -412,6 +417,7 @@
               <a:rPr lang="zh-CN" altLang="en-US"/>
               <a:t>第五级</a:t>
             </a:r>
+            <a:endParaRPr lang="zh-CN" altLang="en-US"/>
           </a:p>
         </p:txBody>
       </p:sp>
@@ -432,7 +438,6 @@
           <a:p>
             <a:fld id="{D997B5FA-0921-464F-AAE1-844C04324D75}" type="datetimeFigureOut">
               <a:rPr lang="zh-CN" altLang="en-US" smtClean="0"/>
-              <a:t>2026/1/20</a:t>
             </a:fld>
             <a:endParaRPr lang="zh-CN" altLang="en-US"/>
           </a:p>
@@ -474,7 +479,6 @@
           <a:p>
             <a:fld id="{565CE74E-AB26-4998-AD42-012C4C1AD076}" type="slidenum">
               <a:rPr lang="zh-CN" altLang="en-US" smtClean="0"/>
-              <a:t>‹#›</a:t>
             </a:fld>
             <a:endParaRPr lang="zh-CN" altLang="en-US"/>
           </a:p>
@@ -529,6 +533,7 @@
               <a:rPr lang="zh-CN" altLang="en-US"/>
               <a:t>单击此处编辑母版标题样式</a:t>
             </a:r>
+            <a:endParaRPr lang="zh-CN" altLang="en-US"/>
           </a:p>
         </p:txBody>
       </p:sp>
@@ -557,6 +562,7 @@
               <a:rPr lang="zh-CN" altLang="en-US"/>
               <a:t>单击此处编辑母版文本样式</a:t>
             </a:r>
+            <a:endParaRPr lang="zh-CN" altLang="en-US"/>
           </a:p>
           <a:p>
             <a:pPr lvl="1"/>
@@ -564,6 +570,7 @@
               <a:rPr lang="zh-CN" altLang="en-US"/>
               <a:t>第二级</a:t>
             </a:r>
+            <a:endParaRPr lang="zh-CN" altLang="en-US"/>
           </a:p>
           <a:p>
             <a:pPr lvl="2"/>
@@ -571,6 +578,7 @@
               <a:rPr lang="zh-CN" altLang="en-US"/>
               <a:t>第三级</a:t>
             </a:r>
+            <a:endParaRPr lang="zh-CN" altLang="en-US"/>
           </a:p>
           <a:p>
             <a:pPr lvl="3"/>
@@ -578,6 +586,7 @@
               <a:rPr lang="zh-CN" altLang="en-US"/>
               <a:t>第四级</a:t>
             </a:r>
+            <a:endParaRPr lang="zh-CN" altLang="en-US"/>
           </a:p>
           <a:p>
             <a:pPr lvl="4"/>
@@ -585,6 +594,7 @@
               <a:rPr lang="zh-CN" altLang="en-US"/>
               <a:t>第五级</a:t>
             </a:r>
+            <a:endParaRPr lang="zh-CN" altLang="en-US"/>
           </a:p>
         </p:txBody>
       </p:sp>
@@ -605,7 +615,6 @@
           <a:p>
             <a:fld id="{D997B5FA-0921-464F-AAE1-844C04324D75}" type="datetimeFigureOut">
               <a:rPr lang="zh-CN" altLang="en-US" smtClean="0"/>
-              <a:t>2026/1/20</a:t>
             </a:fld>
             <a:endParaRPr lang="zh-CN" altLang="en-US"/>
           </a:p>
@@ -647,7 +656,6 @@
           <a:p>
             <a:fld id="{565CE74E-AB26-4998-AD42-012C4C1AD076}" type="slidenum">
               <a:rPr lang="zh-CN" altLang="en-US" smtClean="0"/>
-              <a:t>‹#›</a:t>
             </a:fld>
             <a:endParaRPr lang="zh-CN" altLang="en-US"/>
           </a:p>
@@ -697,6 +705,7 @@
               <a:rPr lang="zh-CN" altLang="en-US"/>
               <a:t>单击此处编辑母版标题样式</a:t>
             </a:r>
+            <a:endParaRPr lang="zh-CN" altLang="en-US"/>
           </a:p>
         </p:txBody>
       </p:sp>
@@ -720,6 +729,7 @@
               <a:rPr lang="zh-CN" altLang="en-US"/>
               <a:t>单击此处编辑母版文本样式</a:t>
             </a:r>
+            <a:endParaRPr lang="zh-CN" altLang="en-US"/>
           </a:p>
           <a:p>
             <a:pPr lvl="1"/>
@@ -727,6 +737,7 @@
               <a:rPr lang="zh-CN" altLang="en-US"/>
               <a:t>第二级</a:t>
             </a:r>
+            <a:endParaRPr lang="zh-CN" altLang="en-US"/>
           </a:p>
           <a:p>
             <a:pPr lvl="2"/>
@@ -734,6 +745,7 @@
               <a:rPr lang="zh-CN" altLang="en-US"/>
               <a:t>第三级</a:t>
             </a:r>
+            <a:endParaRPr lang="zh-CN" altLang="en-US"/>
           </a:p>
           <a:p>
             <a:pPr lvl="3"/>
@@ -741,6 +753,7 @@
               <a:rPr lang="zh-CN" altLang="en-US"/>
               <a:t>第四级</a:t>
             </a:r>
+            <a:endParaRPr lang="zh-CN" altLang="en-US"/>
           </a:p>
           <a:p>
             <a:pPr lvl="4"/>
@@ -748,6 +761,7 @@
               <a:rPr lang="zh-CN" altLang="en-US"/>
               <a:t>第五级</a:t>
             </a:r>
+            <a:endParaRPr lang="zh-CN" altLang="en-US"/>
           </a:p>
         </p:txBody>
       </p:sp>
@@ -768,7 +782,6 @@
           <a:p>
             <a:fld id="{D997B5FA-0921-464F-AAE1-844C04324D75}" type="datetimeFigureOut">
               <a:rPr lang="zh-CN" altLang="en-US" smtClean="0"/>
-              <a:t>2026/1/20</a:t>
             </a:fld>
             <a:endParaRPr lang="zh-CN" altLang="en-US"/>
           </a:p>
@@ -810,7 +823,6 @@
           <a:p>
             <a:fld id="{565CE74E-AB26-4998-AD42-012C4C1AD076}" type="slidenum">
               <a:rPr lang="zh-CN" altLang="en-US" smtClean="0"/>
-              <a:t>‹#›</a:t>
             </a:fld>
             <a:endParaRPr lang="zh-CN" altLang="en-US"/>
           </a:p>
@@ -869,6 +881,7 @@
               <a:rPr lang="zh-CN" altLang="en-US"/>
               <a:t>单击此处编辑母版标题样式</a:t>
             </a:r>
+            <a:endParaRPr lang="zh-CN" altLang="en-US"/>
           </a:p>
         </p:txBody>
       </p:sp>
@@ -988,6 +1001,7 @@
               <a:rPr lang="zh-CN" altLang="en-US"/>
               <a:t>单击此处编辑母版文本样式</a:t>
             </a:r>
+            <a:endParaRPr lang="zh-CN" altLang="en-US"/>
           </a:p>
         </p:txBody>
       </p:sp>
@@ -1008,7 +1022,6 @@
           <a:p>
             <a:fld id="{D997B5FA-0921-464F-AAE1-844C04324D75}" type="datetimeFigureOut">
               <a:rPr lang="zh-CN" altLang="en-US" smtClean="0"/>
-              <a:t>2026/1/20</a:t>
             </a:fld>
             <a:endParaRPr lang="zh-CN" altLang="en-US"/>
           </a:p>
@@ -1050,7 +1063,6 @@
           <a:p>
             <a:fld id="{565CE74E-AB26-4998-AD42-012C4C1AD076}" type="slidenum">
               <a:rPr lang="zh-CN" altLang="en-US" smtClean="0"/>
-              <a:t>‹#›</a:t>
             </a:fld>
             <a:endParaRPr lang="zh-CN" altLang="en-US"/>
           </a:p>
@@ -1100,6 +1112,7 @@
               <a:rPr lang="zh-CN" altLang="en-US"/>
               <a:t>单击此处编辑母版标题样式</a:t>
             </a:r>
+            <a:endParaRPr lang="zh-CN" altLang="en-US"/>
           </a:p>
         </p:txBody>
       </p:sp>
@@ -1128,6 +1141,7 @@
               <a:rPr lang="zh-CN" altLang="en-US"/>
               <a:t>单击此处编辑母版文本样式</a:t>
             </a:r>
+            <a:endParaRPr lang="zh-CN" altLang="en-US"/>
           </a:p>
           <a:p>
             <a:pPr lvl="1"/>
@@ -1135,6 +1149,7 @@
               <a:rPr lang="zh-CN" altLang="en-US"/>
               <a:t>第二级</a:t>
             </a:r>
+            <a:endParaRPr lang="zh-CN" altLang="en-US"/>
           </a:p>
           <a:p>
             <a:pPr lvl="2"/>
@@ -1142,6 +1157,7 @@
               <a:rPr lang="zh-CN" altLang="en-US"/>
               <a:t>第三级</a:t>
             </a:r>
+            <a:endParaRPr lang="zh-CN" altLang="en-US"/>
           </a:p>
           <a:p>
             <a:pPr lvl="3"/>
@@ -1149,6 +1165,7 @@
               <a:rPr lang="zh-CN" altLang="en-US"/>
               <a:t>第四级</a:t>
             </a:r>
+            <a:endParaRPr lang="zh-CN" altLang="en-US"/>
           </a:p>
           <a:p>
             <a:pPr lvl="4"/>
@@ -1156,6 +1173,7 @@
               <a:rPr lang="zh-CN" altLang="en-US"/>
               <a:t>第五级</a:t>
             </a:r>
+            <a:endParaRPr lang="zh-CN" altLang="en-US"/>
           </a:p>
         </p:txBody>
       </p:sp>
@@ -1184,6 +1202,7 @@
               <a:rPr lang="zh-CN" altLang="en-US"/>
               <a:t>单击此处编辑母版文本样式</a:t>
             </a:r>
+            <a:endParaRPr lang="zh-CN" altLang="en-US"/>
           </a:p>
           <a:p>
             <a:pPr lvl="1"/>
@@ -1191,6 +1210,7 @@
               <a:rPr lang="zh-CN" altLang="en-US"/>
               <a:t>第二级</a:t>
             </a:r>
+            <a:endParaRPr lang="zh-CN" altLang="en-US"/>
           </a:p>
           <a:p>
             <a:pPr lvl="2"/>
@@ -1198,6 +1218,7 @@
               <a:rPr lang="zh-CN" altLang="en-US"/>
               <a:t>第三级</a:t>
             </a:r>
+            <a:endParaRPr lang="zh-CN" altLang="en-US"/>
           </a:p>
           <a:p>
             <a:pPr lvl="3"/>
@@ -1205,6 +1226,7 @@
               <a:rPr lang="zh-CN" altLang="en-US"/>
               <a:t>第四级</a:t>
             </a:r>
+            <a:endParaRPr lang="zh-CN" altLang="en-US"/>
           </a:p>
           <a:p>
             <a:pPr lvl="4"/>
@@ -1212,6 +1234,7 @@
               <a:rPr lang="zh-CN" altLang="en-US"/>
               <a:t>第五级</a:t>
             </a:r>
+            <a:endParaRPr lang="zh-CN" altLang="en-US"/>
           </a:p>
         </p:txBody>
       </p:sp>
@@ -1232,7 +1255,6 @@
           <a:p>
             <a:fld id="{D997B5FA-0921-464F-AAE1-844C04324D75}" type="datetimeFigureOut">
               <a:rPr lang="zh-CN" altLang="en-US" smtClean="0"/>
-              <a:t>2026/1/20</a:t>
             </a:fld>
             <a:endParaRPr lang="zh-CN" altLang="en-US"/>
           </a:p>
@@ -1274,7 +1296,6 @@
           <a:p>
             <a:fld id="{565CE74E-AB26-4998-AD42-012C4C1AD076}" type="slidenum">
               <a:rPr lang="zh-CN" altLang="en-US" smtClean="0"/>
-              <a:t>‹#›</a:t>
             </a:fld>
             <a:endParaRPr lang="zh-CN" altLang="en-US"/>
           </a:p>
@@ -1329,6 +1350,7 @@
               <a:rPr lang="zh-CN" altLang="en-US"/>
               <a:t>单击此处编辑母版标题样式</a:t>
             </a:r>
+            <a:endParaRPr lang="zh-CN" altLang="en-US"/>
           </a:p>
         </p:txBody>
       </p:sp>
@@ -1394,6 +1416,7 @@
               <a:rPr lang="zh-CN" altLang="en-US"/>
               <a:t>单击此处编辑母版文本样式</a:t>
             </a:r>
+            <a:endParaRPr lang="zh-CN" altLang="en-US"/>
           </a:p>
         </p:txBody>
       </p:sp>
@@ -1422,6 +1445,7 @@
               <a:rPr lang="zh-CN" altLang="en-US"/>
               <a:t>单击此处编辑母版文本样式</a:t>
             </a:r>
+            <a:endParaRPr lang="zh-CN" altLang="en-US"/>
           </a:p>
           <a:p>
             <a:pPr lvl="1"/>
@@ -1429,6 +1453,7 @@
               <a:rPr lang="zh-CN" altLang="en-US"/>
               <a:t>第二级</a:t>
             </a:r>
+            <a:endParaRPr lang="zh-CN" altLang="en-US"/>
           </a:p>
           <a:p>
             <a:pPr lvl="2"/>
@@ -1436,6 +1461,7 @@
               <a:rPr lang="zh-CN" altLang="en-US"/>
               <a:t>第三级</a:t>
             </a:r>
+            <a:endParaRPr lang="zh-CN" altLang="en-US"/>
           </a:p>
           <a:p>
             <a:pPr lvl="3"/>
@@ -1443,6 +1469,7 @@
               <a:rPr lang="zh-CN" altLang="en-US"/>
               <a:t>第四级</a:t>
             </a:r>
+            <a:endParaRPr lang="zh-CN" altLang="en-US"/>
           </a:p>
           <a:p>
             <a:pPr lvl="4"/>
@@ -1450,6 +1477,7 @@
               <a:rPr lang="zh-CN" altLang="en-US"/>
               <a:t>第五级</a:t>
             </a:r>
+            <a:endParaRPr lang="zh-CN" altLang="en-US"/>
           </a:p>
         </p:txBody>
       </p:sp>
@@ -1515,6 +1543,7 @@
               <a:rPr lang="zh-CN" altLang="en-US"/>
               <a:t>单击此处编辑母版文本样式</a:t>
             </a:r>
+            <a:endParaRPr lang="zh-CN" altLang="en-US"/>
           </a:p>
         </p:txBody>
       </p:sp>
@@ -1543,6 +1572,7 @@
               <a:rPr lang="zh-CN" altLang="en-US"/>
               <a:t>单击此处编辑母版文本样式</a:t>
             </a:r>
+            <a:endParaRPr lang="zh-CN" altLang="en-US"/>
           </a:p>
           <a:p>
             <a:pPr lvl="1"/>
@@ -1550,6 +1580,7 @@
               <a:rPr lang="zh-CN" altLang="en-US"/>
               <a:t>第二级</a:t>
             </a:r>
+            <a:endParaRPr lang="zh-CN" altLang="en-US"/>
           </a:p>
           <a:p>
             <a:pPr lvl="2"/>
@@ -1557,6 +1588,7 @@
               <a:rPr lang="zh-CN" altLang="en-US"/>
               <a:t>第三级</a:t>
             </a:r>
+            <a:endParaRPr lang="zh-CN" altLang="en-US"/>
           </a:p>
           <a:p>
             <a:pPr lvl="3"/>
@@ -1564,6 +1596,7 @@
               <a:rPr lang="zh-CN" altLang="en-US"/>
               <a:t>第四级</a:t>
             </a:r>
+            <a:endParaRPr lang="zh-CN" altLang="en-US"/>
           </a:p>
           <a:p>
             <a:pPr lvl="4"/>
@@ -1571,6 +1604,7 @@
               <a:rPr lang="zh-CN" altLang="en-US"/>
               <a:t>第五级</a:t>
             </a:r>
+            <a:endParaRPr lang="zh-CN" altLang="en-US"/>
           </a:p>
         </p:txBody>
       </p:sp>
@@ -1591,7 +1625,6 @@
           <a:p>
             <a:fld id="{D997B5FA-0921-464F-AAE1-844C04324D75}" type="datetimeFigureOut">
               <a:rPr lang="zh-CN" altLang="en-US" smtClean="0"/>
-              <a:t>2026/1/20</a:t>
             </a:fld>
             <a:endParaRPr lang="zh-CN" altLang="en-US"/>
           </a:p>
@@ -1633,7 +1666,6 @@
           <a:p>
             <a:fld id="{565CE74E-AB26-4998-AD42-012C4C1AD076}" type="slidenum">
               <a:rPr lang="zh-CN" altLang="en-US" smtClean="0"/>
-              <a:t>‹#›</a:t>
             </a:fld>
             <a:endParaRPr lang="zh-CN" altLang="en-US"/>
           </a:p>
@@ -1683,6 +1715,7 @@
               <a:rPr lang="zh-CN" altLang="en-US"/>
               <a:t>单击此处编辑母版标题样式</a:t>
             </a:r>
+            <a:endParaRPr lang="zh-CN" altLang="en-US"/>
           </a:p>
         </p:txBody>
       </p:sp>
@@ -1703,7 +1736,6 @@
           <a:p>
             <a:fld id="{D997B5FA-0921-464F-AAE1-844C04324D75}" type="datetimeFigureOut">
               <a:rPr lang="zh-CN" altLang="en-US" smtClean="0"/>
-              <a:t>2026/1/20</a:t>
             </a:fld>
             <a:endParaRPr lang="zh-CN" altLang="en-US"/>
           </a:p>
@@ -1745,7 +1777,6 @@
           <a:p>
             <a:fld id="{565CE74E-AB26-4998-AD42-012C4C1AD076}" type="slidenum">
               <a:rPr lang="zh-CN" altLang="en-US" smtClean="0"/>
-              <a:t>‹#›</a:t>
             </a:fld>
             <a:endParaRPr lang="zh-CN" altLang="en-US"/>
           </a:p>
@@ -1793,7 +1824,6 @@
           <a:p>
             <a:fld id="{D997B5FA-0921-464F-AAE1-844C04324D75}" type="datetimeFigureOut">
               <a:rPr lang="zh-CN" altLang="en-US" smtClean="0"/>
-              <a:t>2026/1/20</a:t>
             </a:fld>
             <a:endParaRPr lang="zh-CN" altLang="en-US"/>
           </a:p>
@@ -1835,7 +1865,6 @@
           <a:p>
             <a:fld id="{565CE74E-AB26-4998-AD42-012C4C1AD076}" type="slidenum">
               <a:rPr lang="zh-CN" altLang="en-US" smtClean="0"/>
-              <a:t>‹#›</a:t>
             </a:fld>
             <a:endParaRPr lang="zh-CN" altLang="en-US"/>
           </a:p>
@@ -1894,6 +1923,7 @@
               <a:rPr lang="zh-CN" altLang="en-US"/>
               <a:t>单击此处编辑母版标题样式</a:t>
             </a:r>
+            <a:endParaRPr lang="zh-CN" altLang="en-US"/>
           </a:p>
         </p:txBody>
       </p:sp>
@@ -1950,6 +1980,7 @@
               <a:rPr lang="zh-CN" altLang="en-US"/>
               <a:t>单击此处编辑母版文本样式</a:t>
             </a:r>
+            <a:endParaRPr lang="zh-CN" altLang="en-US"/>
           </a:p>
           <a:p>
             <a:pPr lvl="1"/>
@@ -1957,6 +1988,7 @@
               <a:rPr lang="zh-CN" altLang="en-US"/>
               <a:t>第二级</a:t>
             </a:r>
+            <a:endParaRPr lang="zh-CN" altLang="en-US"/>
           </a:p>
           <a:p>
             <a:pPr lvl="2"/>
@@ -1964,6 +1996,7 @@
               <a:rPr lang="zh-CN" altLang="en-US"/>
               <a:t>第三级</a:t>
             </a:r>
+            <a:endParaRPr lang="zh-CN" altLang="en-US"/>
           </a:p>
           <a:p>
             <a:pPr lvl="3"/>
@@ -1971,6 +2004,7 @@
               <a:rPr lang="zh-CN" altLang="en-US"/>
               <a:t>第四级</a:t>
             </a:r>
+            <a:endParaRPr lang="zh-CN" altLang="en-US"/>
           </a:p>
           <a:p>
             <a:pPr lvl="4"/>
@@ -1978,6 +2012,7 @@
               <a:rPr lang="zh-CN" altLang="en-US"/>
               <a:t>第五级</a:t>
             </a:r>
+            <a:endParaRPr lang="zh-CN" altLang="en-US"/>
           </a:p>
         </p:txBody>
       </p:sp>
@@ -2043,6 +2078,7 @@
               <a:rPr lang="zh-CN" altLang="en-US"/>
               <a:t>单击此处编辑母版文本样式</a:t>
             </a:r>
+            <a:endParaRPr lang="zh-CN" altLang="en-US"/>
           </a:p>
         </p:txBody>
       </p:sp>
@@ -2063,7 +2099,6 @@
           <a:p>
             <a:fld id="{D997B5FA-0921-464F-AAE1-844C04324D75}" type="datetimeFigureOut">
               <a:rPr lang="zh-CN" altLang="en-US" smtClean="0"/>
-              <a:t>2026/1/20</a:t>
             </a:fld>
             <a:endParaRPr lang="zh-CN" altLang="en-US"/>
           </a:p>
@@ -2105,7 +2140,6 @@
           <a:p>
             <a:fld id="{565CE74E-AB26-4998-AD42-012C4C1AD076}" type="slidenum">
               <a:rPr lang="zh-CN" altLang="en-US" smtClean="0"/>
-              <a:t>‹#›</a:t>
             </a:fld>
             <a:endParaRPr lang="zh-CN" altLang="en-US"/>
           </a:p>
@@ -2164,6 +2198,7 @@
               <a:rPr lang="zh-CN" altLang="en-US"/>
               <a:t>单击此处编辑母版标题样式</a:t>
             </a:r>
+            <a:endParaRPr lang="zh-CN" altLang="en-US"/>
           </a:p>
         </p:txBody>
       </p:sp>
@@ -2290,6 +2325,7 @@
               <a:rPr lang="zh-CN" altLang="en-US"/>
               <a:t>单击此处编辑母版文本样式</a:t>
             </a:r>
+            <a:endParaRPr lang="zh-CN" altLang="en-US"/>
           </a:p>
         </p:txBody>
       </p:sp>
@@ -2310,7 +2346,6 @@
           <a:p>
             <a:fld id="{D997B5FA-0921-464F-AAE1-844C04324D75}" type="datetimeFigureOut">
               <a:rPr lang="zh-CN" altLang="en-US" smtClean="0"/>
-              <a:t>2026/1/20</a:t>
             </a:fld>
             <a:endParaRPr lang="zh-CN" altLang="en-US"/>
           </a:p>
@@ -2352,7 +2387,6 @@
           <a:p>
             <a:fld id="{565CE74E-AB26-4998-AD42-012C4C1AD076}" type="slidenum">
               <a:rPr lang="zh-CN" altLang="en-US" smtClean="0"/>
-              <a:t>‹#›</a:t>
             </a:fld>
             <a:endParaRPr lang="zh-CN" altLang="en-US"/>
           </a:p>
@@ -2417,6 +2451,7 @@
               <a:rPr lang="zh-CN" altLang="en-US"/>
               <a:t>单击此处编辑母版标题样式</a:t>
             </a:r>
+            <a:endParaRPr lang="zh-CN" altLang="en-US"/>
           </a:p>
         </p:txBody>
       </p:sp>
@@ -2450,6 +2485,7 @@
               <a:rPr lang="zh-CN" altLang="en-US"/>
               <a:t>单击此处编辑母版文本样式</a:t>
             </a:r>
+            <a:endParaRPr lang="zh-CN" altLang="en-US"/>
           </a:p>
           <a:p>
             <a:pPr lvl="1"/>
@@ -2457,6 +2493,7 @@
               <a:rPr lang="zh-CN" altLang="en-US"/>
               <a:t>第二级</a:t>
             </a:r>
+            <a:endParaRPr lang="zh-CN" altLang="en-US"/>
           </a:p>
           <a:p>
             <a:pPr lvl="2"/>
@@ -2464,6 +2501,7 @@
               <a:rPr lang="zh-CN" altLang="en-US"/>
               <a:t>第三级</a:t>
             </a:r>
+            <a:endParaRPr lang="zh-CN" altLang="en-US"/>
           </a:p>
           <a:p>
             <a:pPr lvl="3"/>
@@ -2471,6 +2509,7 @@
               <a:rPr lang="zh-CN" altLang="en-US"/>
               <a:t>第四级</a:t>
             </a:r>
+            <a:endParaRPr lang="zh-CN" altLang="en-US"/>
           </a:p>
           <a:p>
             <a:pPr lvl="4"/>
@@ -2478,6 +2517,7 @@
               <a:rPr lang="zh-CN" altLang="en-US"/>
               <a:t>第五级</a:t>
             </a:r>
+            <a:endParaRPr lang="zh-CN" altLang="en-US"/>
           </a:p>
         </p:txBody>
       </p:sp>
@@ -2516,7 +2556,6 @@
           <a:p>
             <a:fld id="{D997B5FA-0921-464F-AAE1-844C04324D75}" type="datetimeFigureOut">
               <a:rPr lang="zh-CN" altLang="en-US" smtClean="0"/>
-              <a:t>2026/1/20</a:t>
             </a:fld>
             <a:endParaRPr lang="zh-CN" altLang="en-US"/>
           </a:p>
@@ -2594,7 +2633,6 @@
           <a:p>
             <a:fld id="{565CE74E-AB26-4998-AD42-012C4C1AD076}" type="slidenum">
               <a:rPr lang="zh-CN" altLang="en-US" smtClean="0"/>
-              <a:t>‹#›</a:t>
             </a:fld>
             <a:endParaRPr lang="zh-CN" altLang="en-US"/>
           </a:p>
@@ -3064,13 +3102,13 @@
           <p:nvPr/>
         </p:nvPicPr>
         <p:blipFill>
-          <a:blip r:embed="rId2" cstate="print">
+          <a:blip r:embed="rId1" cstate="print">
             <a:extLst>
               <a:ext uri="{28A0092B-C50C-407E-A947-70E740481C1C}">
                 <a14:useLocalDpi xmlns:a14="http://schemas.microsoft.com/office/drawing/2010/main" val="0"/>
               </a:ext>
               <a:ext uri="{96DAC541-7B7A-43D3-8B79-37D633B846F1}">
-                <asvg:svgBlip xmlns:asvg="http://schemas.microsoft.com/office/drawing/2016/SVG/main" r:embed="rId3"/>
+                <asvg:svgBlip xmlns:asvg="http://schemas.microsoft.com/office/drawing/2016/SVG/main" r:embed="rId2"/>
               </a:ext>
             </a:extLst>
           </a:blip>
@@ -3097,13 +3135,13 @@
           <p:nvPr/>
         </p:nvPicPr>
         <p:blipFill>
-          <a:blip r:embed="rId4" cstate="print">
+          <a:blip r:embed="rId3" cstate="print">
             <a:extLst>
               <a:ext uri="{28A0092B-C50C-407E-A947-70E740481C1C}">
                 <a14:useLocalDpi xmlns:a14="http://schemas.microsoft.com/office/drawing/2010/main" val="0"/>
               </a:ext>
               <a:ext uri="{96DAC541-7B7A-43D3-8B79-37D633B846F1}">
-                <asvg:svgBlip xmlns:asvg="http://schemas.microsoft.com/office/drawing/2016/SVG/main" r:embed="rId5"/>
+                <asvg:svgBlip xmlns:asvg="http://schemas.microsoft.com/office/drawing/2016/SVG/main" r:embed="rId4"/>
               </a:ext>
             </a:extLst>
           </a:blip>
@@ -3130,13 +3168,13 @@
           <p:nvPr/>
         </p:nvPicPr>
         <p:blipFill>
-          <a:blip r:embed="rId6" cstate="print">
+          <a:blip r:embed="rId5" cstate="print">
             <a:extLst>
               <a:ext uri="{28A0092B-C50C-407E-A947-70E740481C1C}">
                 <a14:useLocalDpi xmlns:a14="http://schemas.microsoft.com/office/drawing/2010/main" val="0"/>
               </a:ext>
               <a:ext uri="{96DAC541-7B7A-43D3-8B79-37D633B846F1}">
-                <asvg:svgBlip xmlns:asvg="http://schemas.microsoft.com/office/drawing/2016/SVG/main" r:embed="rId7"/>
+                <asvg:svgBlip xmlns:asvg="http://schemas.microsoft.com/office/drawing/2016/SVG/main" r:embed="rId6"/>
               </a:ext>
             </a:extLst>
           </a:blip>
@@ -3163,13 +3201,13 @@
           <p:nvPr/>
         </p:nvPicPr>
         <p:blipFill>
-          <a:blip r:embed="rId8" cstate="print">
+          <a:blip r:embed="rId7" cstate="print">
             <a:extLst>
               <a:ext uri="{28A0092B-C50C-407E-A947-70E740481C1C}">
                 <a14:useLocalDpi xmlns:a14="http://schemas.microsoft.com/office/drawing/2010/main" val="0"/>
               </a:ext>
               <a:ext uri="{96DAC541-7B7A-43D3-8B79-37D633B846F1}">
-                <asvg:svgBlip xmlns:asvg="http://schemas.microsoft.com/office/drawing/2016/SVG/main" r:embed="rId9"/>
+                <asvg:svgBlip xmlns:asvg="http://schemas.microsoft.com/office/drawing/2016/SVG/main" r:embed="rId8"/>
               </a:ext>
             </a:extLst>
           </a:blip>
@@ -3196,13 +3234,13 @@
           <p:nvPr/>
         </p:nvPicPr>
         <p:blipFill>
-          <a:blip r:embed="rId10" cstate="print">
+          <a:blip r:embed="rId9" cstate="print">
             <a:extLst>
               <a:ext uri="{28A0092B-C50C-407E-A947-70E740481C1C}">
                 <a14:useLocalDpi xmlns:a14="http://schemas.microsoft.com/office/drawing/2010/main" val="0"/>
               </a:ext>
               <a:ext uri="{96DAC541-7B7A-43D3-8B79-37D633B846F1}">
-                <asvg:svgBlip xmlns:asvg="http://schemas.microsoft.com/office/drawing/2016/SVG/main" r:embed="rId11"/>
+                <asvg:svgBlip xmlns:asvg="http://schemas.microsoft.com/office/drawing/2016/SVG/main" r:embed="rId10"/>
               </a:ext>
             </a:extLst>
           </a:blip>
@@ -3229,13 +3267,13 @@
           <p:nvPr/>
         </p:nvPicPr>
         <p:blipFill>
-          <a:blip r:embed="rId12" cstate="print">
+          <a:blip r:embed="rId11" cstate="print">
             <a:extLst>
               <a:ext uri="{28A0092B-C50C-407E-A947-70E740481C1C}">
                 <a14:useLocalDpi xmlns:a14="http://schemas.microsoft.com/office/drawing/2010/main" val="0"/>
               </a:ext>
               <a:ext uri="{96DAC541-7B7A-43D3-8B79-37D633B846F1}">
-                <asvg:svgBlip xmlns:asvg="http://schemas.microsoft.com/office/drawing/2016/SVG/main" r:embed="rId13"/>
+                <asvg:svgBlip xmlns:asvg="http://schemas.microsoft.com/office/drawing/2016/SVG/main" r:embed="rId12"/>
               </a:ext>
             </a:extLst>
           </a:blip>
@@ -3262,13 +3300,13 @@
           <p:nvPr/>
         </p:nvPicPr>
         <p:blipFill>
-          <a:blip r:embed="rId14" cstate="print">
+          <a:blip r:embed="rId13" cstate="print">
             <a:extLst>
               <a:ext uri="{28A0092B-C50C-407E-A947-70E740481C1C}">
                 <a14:useLocalDpi xmlns:a14="http://schemas.microsoft.com/office/drawing/2010/main" val="0"/>
               </a:ext>
               <a:ext uri="{96DAC541-7B7A-43D3-8B79-37D633B846F1}">
-                <asvg:svgBlip xmlns:asvg="http://schemas.microsoft.com/office/drawing/2016/SVG/main" r:embed="rId15"/>
+                <asvg:svgBlip xmlns:asvg="http://schemas.microsoft.com/office/drawing/2016/SVG/main" r:embed="rId14"/>
               </a:ext>
             </a:extLst>
           </a:blip>
@@ -3295,13 +3333,13 @@
           <p:nvPr/>
         </p:nvPicPr>
         <p:blipFill>
-          <a:blip r:embed="rId16" cstate="print">
+          <a:blip r:embed="rId15" cstate="print">
             <a:extLst>
               <a:ext uri="{28A0092B-C50C-407E-A947-70E740481C1C}">
                 <a14:useLocalDpi xmlns:a14="http://schemas.microsoft.com/office/drawing/2010/main" val="0"/>
               </a:ext>
               <a:ext uri="{96DAC541-7B7A-43D3-8B79-37D633B846F1}">
-                <asvg:svgBlip xmlns:asvg="http://schemas.microsoft.com/office/drawing/2016/SVG/main" r:embed="rId17"/>
+                <asvg:svgBlip xmlns:asvg="http://schemas.microsoft.com/office/drawing/2016/SVG/main" r:embed="rId16"/>
               </a:ext>
             </a:extLst>
           </a:blip>
@@ -3328,13 +3366,13 @@
           <p:nvPr/>
         </p:nvPicPr>
         <p:blipFill>
-          <a:blip r:embed="rId18" cstate="print">
+          <a:blip r:embed="rId17" cstate="print">
             <a:extLst>
               <a:ext uri="{28A0092B-C50C-407E-A947-70E740481C1C}">
                 <a14:useLocalDpi xmlns:a14="http://schemas.microsoft.com/office/drawing/2010/main" val="0"/>
               </a:ext>
               <a:ext uri="{96DAC541-7B7A-43D3-8B79-37D633B846F1}">
-                <asvg:svgBlip xmlns:asvg="http://schemas.microsoft.com/office/drawing/2016/SVG/main" r:embed="rId19"/>
+                <asvg:svgBlip xmlns:asvg="http://schemas.microsoft.com/office/drawing/2016/SVG/main" r:embed="rId18"/>
               </a:ext>
             </a:extLst>
           </a:blip>
@@ -3361,13 +3399,13 @@
           <p:nvPr/>
         </p:nvPicPr>
         <p:blipFill>
-          <a:blip r:embed="rId20" cstate="print">
+          <a:blip r:embed="rId19" cstate="print">
             <a:extLst>
               <a:ext uri="{28A0092B-C50C-407E-A947-70E740481C1C}">
                 <a14:useLocalDpi xmlns:a14="http://schemas.microsoft.com/office/drawing/2010/main" val="0"/>
               </a:ext>
               <a:ext uri="{96DAC541-7B7A-43D3-8B79-37D633B846F1}">
-                <asvg:svgBlip xmlns:asvg="http://schemas.microsoft.com/office/drawing/2016/SVG/main" r:embed="rId21"/>
+                <asvg:svgBlip xmlns:asvg="http://schemas.microsoft.com/office/drawing/2016/SVG/main" r:embed="rId20"/>
               </a:ext>
             </a:extLst>
           </a:blip>
@@ -3394,13 +3432,13 @@
           <p:nvPr/>
         </p:nvPicPr>
         <p:blipFill>
-          <a:blip r:embed="rId22" cstate="print">
+          <a:blip r:embed="rId21" cstate="print">
             <a:extLst>
               <a:ext uri="{28A0092B-C50C-407E-A947-70E740481C1C}">
                 <a14:useLocalDpi xmlns:a14="http://schemas.microsoft.com/office/drawing/2010/main" val="0"/>
               </a:ext>
               <a:ext uri="{96DAC541-7B7A-43D3-8B79-37D633B846F1}">
-                <asvg:svgBlip xmlns:asvg="http://schemas.microsoft.com/office/drawing/2016/SVG/main" r:embed="rId23"/>
+                <asvg:svgBlip xmlns:asvg="http://schemas.microsoft.com/office/drawing/2016/SVG/main" r:embed="rId22"/>
               </a:ext>
             </a:extLst>
           </a:blip>
@@ -3427,13 +3465,13 @@
           <p:nvPr/>
         </p:nvPicPr>
         <p:blipFill>
-          <a:blip r:embed="rId24" cstate="print">
+          <a:blip r:embed="rId23" cstate="print">
             <a:extLst>
               <a:ext uri="{28A0092B-C50C-407E-A947-70E740481C1C}">
                 <a14:useLocalDpi xmlns:a14="http://schemas.microsoft.com/office/drawing/2010/main" val="0"/>
               </a:ext>
               <a:ext uri="{96DAC541-7B7A-43D3-8B79-37D633B846F1}">
-                <asvg:svgBlip xmlns:asvg="http://schemas.microsoft.com/office/drawing/2016/SVG/main" r:embed="rId25"/>
+                <asvg:svgBlip xmlns:asvg="http://schemas.microsoft.com/office/drawing/2016/SVG/main" r:embed="rId24"/>
               </a:ext>
             </a:extLst>
           </a:blip>
@@ -3460,13 +3498,13 @@
           <p:nvPr/>
         </p:nvPicPr>
         <p:blipFill>
-          <a:blip r:embed="rId26" cstate="print">
+          <a:blip r:embed="rId25" cstate="print">
             <a:extLst>
               <a:ext uri="{28A0092B-C50C-407E-A947-70E740481C1C}">
                 <a14:useLocalDpi xmlns:a14="http://schemas.microsoft.com/office/drawing/2010/main" val="0"/>
               </a:ext>
               <a:ext uri="{96DAC541-7B7A-43D3-8B79-37D633B846F1}">
-                <asvg:svgBlip xmlns:asvg="http://schemas.microsoft.com/office/drawing/2016/SVG/main" r:embed="rId27"/>
+                <asvg:svgBlip xmlns:asvg="http://schemas.microsoft.com/office/drawing/2016/SVG/main" r:embed="rId26"/>
               </a:ext>
             </a:extLst>
           </a:blip>
@@ -3493,13 +3531,13 @@
           <p:nvPr/>
         </p:nvPicPr>
         <p:blipFill>
-          <a:blip r:embed="rId28" cstate="print">
+          <a:blip r:embed="rId27" cstate="print">
             <a:extLst>
               <a:ext uri="{28A0092B-C50C-407E-A947-70E740481C1C}">
                 <a14:useLocalDpi xmlns:a14="http://schemas.microsoft.com/office/drawing/2010/main" val="0"/>
               </a:ext>
               <a:ext uri="{96DAC541-7B7A-43D3-8B79-37D633B846F1}">
-                <asvg:svgBlip xmlns:asvg="http://schemas.microsoft.com/office/drawing/2016/SVG/main" r:embed="rId29"/>
+                <asvg:svgBlip xmlns:asvg="http://schemas.microsoft.com/office/drawing/2016/SVG/main" r:embed="rId28"/>
               </a:ext>
             </a:extLst>
           </a:blip>
@@ -3526,13 +3564,13 @@
           <p:nvPr/>
         </p:nvPicPr>
         <p:blipFill>
-          <a:blip r:embed="rId30" cstate="print">
+          <a:blip r:embed="rId29" cstate="print">
             <a:extLst>
               <a:ext uri="{28A0092B-C50C-407E-A947-70E740481C1C}">
                 <a14:useLocalDpi xmlns:a14="http://schemas.microsoft.com/office/drawing/2010/main" val="0"/>
               </a:ext>
               <a:ext uri="{96DAC541-7B7A-43D3-8B79-37D633B846F1}">
-                <asvg:svgBlip xmlns:asvg="http://schemas.microsoft.com/office/drawing/2016/SVG/main" r:embed="rId31"/>
+                <asvg:svgBlip xmlns:asvg="http://schemas.microsoft.com/office/drawing/2016/SVG/main" r:embed="rId30"/>
               </a:ext>
             </a:extLst>
           </a:blip>
@@ -3840,13 +3878,13 @@
           <p:nvPr/>
         </p:nvPicPr>
         <p:blipFill>
-          <a:blip r:embed="rId32" cstate="print">
+          <a:blip r:embed="rId31" cstate="print">
             <a:extLst>
               <a:ext uri="{28A0092B-C50C-407E-A947-70E740481C1C}">
                 <a14:useLocalDpi xmlns:a14="http://schemas.microsoft.com/office/drawing/2010/main" val="0"/>
               </a:ext>
               <a:ext uri="{96DAC541-7B7A-43D3-8B79-37D633B846F1}">
-                <asvg:svgBlip xmlns:asvg="http://schemas.microsoft.com/office/drawing/2016/SVG/main" r:embed="rId33"/>
+                <asvg:svgBlip xmlns:asvg="http://schemas.microsoft.com/office/drawing/2016/SVG/main" r:embed="rId32"/>
               </a:ext>
             </a:extLst>
           </a:blip>
@@ -3873,13 +3911,13 @@
           <p:nvPr/>
         </p:nvPicPr>
         <p:blipFill>
-          <a:blip r:embed="rId34" cstate="print">
+          <a:blip r:embed="rId33" cstate="print">
             <a:extLst>
               <a:ext uri="{28A0092B-C50C-407E-A947-70E740481C1C}">
                 <a14:useLocalDpi xmlns:a14="http://schemas.microsoft.com/office/drawing/2010/main" val="0"/>
               </a:ext>
               <a:ext uri="{96DAC541-7B7A-43D3-8B79-37D633B846F1}">
-                <asvg:svgBlip xmlns:asvg="http://schemas.microsoft.com/office/drawing/2016/SVG/main" r:embed="rId35"/>
+                <asvg:svgBlip xmlns:asvg="http://schemas.microsoft.com/office/drawing/2016/SVG/main" r:embed="rId34"/>
               </a:ext>
             </a:extLst>
           </a:blip>
@@ -3906,10 +3944,10 @@
           <p:nvPr/>
         </p:nvPicPr>
         <p:blipFill>
-          <a:blip r:embed="rId36">
+          <a:blip r:embed="rId35">
             <a:extLst>
               <a:ext uri="{96DAC541-7B7A-43D3-8B79-37D633B846F1}">
-                <asvg:svgBlip xmlns:asvg="http://schemas.microsoft.com/office/drawing/2016/SVG/main" r:embed="rId37"/>
+                <asvg:svgBlip xmlns:asvg="http://schemas.microsoft.com/office/drawing/2016/SVG/main" r:embed="rId36"/>
               </a:ext>
             </a:extLst>
           </a:blip>
@@ -3936,13 +3974,13 @@
           <p:nvPr/>
         </p:nvPicPr>
         <p:blipFill>
-          <a:blip r:embed="rId38">
+          <a:blip r:embed="rId37">
             <a:extLst>
               <a:ext uri="{28A0092B-C50C-407E-A947-70E740481C1C}">
                 <a14:useLocalDpi xmlns:a14="http://schemas.microsoft.com/office/drawing/2010/main" val="0"/>
               </a:ext>
               <a:ext uri="{96DAC541-7B7A-43D3-8B79-37D633B846F1}">
-                <asvg:svgBlip xmlns:asvg="http://schemas.microsoft.com/office/drawing/2016/SVG/main" r:embed="rId39"/>
+                <asvg:svgBlip xmlns:asvg="http://schemas.microsoft.com/office/drawing/2016/SVG/main" r:embed="rId38"/>
               </a:ext>
             </a:extLst>
           </a:blip>
@@ -4055,7 +4093,6 @@
           <a:bodyPr wrap="square" rtlCol="0">
             <a:noAutofit/>
           </a:bodyPr>
-          <a:lstStyle/>
           <a:p>
             <a:pPr algn="ctr"/>
             <a:r>
@@ -4065,6 +4102,10 @@
               </a:rPr>
               <a:t>Merchant Frontend</a:t>
             </a:r>
+            <a:endParaRPr lang="en-US" altLang="zh-CN" sz="1600">
+              <a:latin typeface="Times New Roman" panose="02020603050405020304" charset="0"/>
+              <a:cs typeface="Times New Roman" panose="02020603050405020304" charset="0"/>
+            </a:endParaRPr>
           </a:p>
         </p:txBody>
       </p:sp>
@@ -4088,7 +4129,6 @@
           <a:bodyPr wrap="square" rtlCol="0">
             <a:spAutoFit/>
           </a:bodyPr>
-          <a:lstStyle/>
           <a:p>
             <a:pPr algn="ctr"/>
             <a:r>
@@ -4098,6 +4138,10 @@
               </a:rPr>
               <a:t>PS-App</a:t>
             </a:r>
+            <a:endParaRPr lang="en-US" altLang="zh-CN" sz="1600">
+              <a:latin typeface="Times New Roman" panose="02020603050405020304" charset="0"/>
+              <a:cs typeface="Times New Roman" panose="02020603050405020304" charset="0"/>
+            </a:endParaRPr>
           </a:p>
         </p:txBody>
       </p:sp>
@@ -4121,7 +4165,6 @@
           <a:bodyPr wrap="square" rtlCol="0">
             <a:spAutoFit/>
           </a:bodyPr>
-          <a:lstStyle/>
           <a:p>
             <a:pPr algn="ctr"/>
             <a:r>
@@ -4131,6 +4174,10 @@
               </a:rPr>
               <a:t>User</a:t>
             </a:r>
+            <a:endParaRPr lang="en-US" altLang="zh-CN" sz="1600">
+              <a:latin typeface="Times New Roman" panose="02020603050405020304" charset="0"/>
+              <a:cs typeface="Times New Roman" panose="02020603050405020304" charset="0"/>
+            </a:endParaRPr>
           </a:p>
         </p:txBody>
       </p:sp>
@@ -4154,7 +4201,6 @@
           <a:bodyPr wrap="square" rtlCol="0">
             <a:noAutofit/>
           </a:bodyPr>
-          <a:lstStyle/>
           <a:p>
             <a:pPr algn="ctr"/>
             <a:r>
@@ -4164,6 +4210,10 @@
               </a:rPr>
               <a:t> Device</a:t>
             </a:r>
+            <a:endParaRPr lang="en-US" altLang="zh-CN" sz="1600">
+              <a:latin typeface="Times New Roman" panose="02020603050405020304" charset="0"/>
+              <a:cs typeface="Times New Roman" panose="02020603050405020304" charset="0"/>
+            </a:endParaRPr>
           </a:p>
         </p:txBody>
       </p:sp>
@@ -4260,7 +4310,6 @@
           <a:bodyPr wrap="square" rtlCol="0">
             <a:noAutofit/>
           </a:bodyPr>
-          <a:lstStyle/>
           <a:p>
             <a:pPr algn="ctr"/>
             <a:r>
@@ -4270,6 +4319,10 @@
               </a:rPr>
               <a:t>Shop</a:t>
             </a:r>
+            <a:endParaRPr lang="en-US" altLang="zh-CN" sz="1600">
+              <a:latin typeface="Times New Roman" panose="02020603050405020304" charset="0"/>
+              <a:cs typeface="Times New Roman" panose="02020603050405020304" charset="0"/>
+            </a:endParaRPr>
           </a:p>
         </p:txBody>
       </p:sp>
@@ -4367,7 +4420,6 @@
           <a:bodyPr wrap="square" rtlCol="0">
             <a:noAutofit/>
           </a:bodyPr>
-          <a:lstStyle/>
           <a:p>
             <a:pPr algn="ctr"/>
             <a:r>
@@ -4375,8 +4427,19 @@
                 <a:latin typeface="Times New Roman" panose="02020603050405020304" charset="0"/>
                 <a:cs typeface="Times New Roman" panose="02020603050405020304" charset="0"/>
               </a:rPr>
-              <a:t>Merchant Server</a:t>
+              <a:t>Merchant S</a:t>
             </a:r>
+            <a:r>
+              <a:rPr lang="en-US" altLang="zh-CN" sz="1600">
+                <a:latin typeface="Times New Roman" panose="02020603050405020304" charset="0"/>
+                <a:cs typeface="Times New Roman" panose="02020603050405020304" charset="0"/>
+              </a:rPr>
+              <a:t>erver</a:t>
+            </a:r>
+            <a:endParaRPr lang="en-US" altLang="zh-CN" sz="1600">
+              <a:latin typeface="Times New Roman" panose="02020603050405020304" charset="0"/>
+              <a:cs typeface="Times New Roman" panose="02020603050405020304" charset="0"/>
+            </a:endParaRPr>
           </a:p>
         </p:txBody>
       </p:sp>
@@ -4476,7 +4539,6 @@
           <a:bodyPr wrap="square" rtlCol="0">
             <a:spAutoFit/>
           </a:bodyPr>
-          <a:lstStyle/>
           <a:p>
             <a:pPr algn="ctr"/>
             <a:r>
@@ -4484,8 +4546,19 @@
                 <a:latin typeface="Times New Roman" panose="02020603050405020304" charset="0"/>
                 <a:cs typeface="Times New Roman" panose="02020603050405020304" charset="0"/>
               </a:rPr>
-              <a:t>PS-Server</a:t>
+              <a:t>PS-S</a:t>
             </a:r>
+            <a:r>
+              <a:rPr lang="en-US" altLang="zh-CN" sz="1600">
+                <a:latin typeface="Times New Roman" panose="02020603050405020304" charset="0"/>
+                <a:cs typeface="Times New Roman" panose="02020603050405020304" charset="0"/>
+              </a:rPr>
+              <a:t>erver</a:t>
+            </a:r>
+            <a:endParaRPr lang="en-US" altLang="zh-CN" sz="1600">
+              <a:latin typeface="Times New Roman" panose="02020603050405020304" charset="0"/>
+              <a:cs typeface="Times New Roman" panose="02020603050405020304" charset="0"/>
+            </a:endParaRPr>
           </a:p>
         </p:txBody>
       </p:sp>
@@ -4582,7 +4655,6 @@
           <a:bodyPr wrap="square" rtlCol="0">
             <a:spAutoFit/>
           </a:bodyPr>
-          <a:lstStyle/>
           <a:p>
             <a:pPr algn="ctr"/>
             <a:r>
@@ -4592,6 +4664,10 @@
               </a:rPr>
               <a:t>Funds transfer</a:t>
             </a:r>
+            <a:endParaRPr lang="en-US" altLang="zh-CN" sz="1600">
+              <a:latin typeface="Times New Roman" panose="02020603050405020304" charset="0"/>
+              <a:cs typeface="Times New Roman" panose="02020603050405020304" charset="0"/>
+            </a:endParaRPr>
           </a:p>
         </p:txBody>
       </p:sp>
@@ -4665,7 +4741,6 @@
           <a:bodyPr wrap="square" rtlCol="0">
             <a:noAutofit/>
           </a:bodyPr>
-          <a:lstStyle/>
           <a:p>
             <a:pPr algn="ctr"/>
             <a:r>
@@ -4675,6 +4750,10 @@
               </a:rPr>
               <a:t>SDK</a:t>
             </a:r>
+            <a:endParaRPr lang="en-US" altLang="zh-CN" sz="1600">
+              <a:latin typeface="Times New Roman" panose="02020603050405020304" charset="0"/>
+              <a:cs typeface="Times New Roman" panose="02020603050405020304" charset="0"/>
+            </a:endParaRPr>
           </a:p>
         </p:txBody>
       </p:sp>
@@ -4725,13 +4804,13 @@
           <p:nvPr/>
         </p:nvPicPr>
         <p:blipFill>
-          <a:blip r:embed="rId2" cstate="print">
+          <a:blip r:embed="rId1" cstate="print">
             <a:extLst>
               <a:ext uri="{28A0092B-C50C-407E-A947-70E740481C1C}">
                 <a14:useLocalDpi xmlns:a14="http://schemas.microsoft.com/office/drawing/2010/main" val="0"/>
               </a:ext>
               <a:ext uri="{96DAC541-7B7A-43D3-8B79-37D633B846F1}">
-                <asvg:svgBlip xmlns:asvg="http://schemas.microsoft.com/office/drawing/2016/SVG/main" r:embed="rId3"/>
+                <asvg:svgBlip xmlns:asvg="http://schemas.microsoft.com/office/drawing/2016/SVG/main" r:embed="rId2"/>
               </a:ext>
             </a:extLst>
           </a:blip>
@@ -4758,13 +4837,13 @@
           <p:nvPr/>
         </p:nvPicPr>
         <p:blipFill>
-          <a:blip r:embed="rId4" cstate="print">
+          <a:blip r:embed="rId3" cstate="print">
             <a:extLst>
               <a:ext uri="{28A0092B-C50C-407E-A947-70E740481C1C}">
                 <a14:useLocalDpi xmlns:a14="http://schemas.microsoft.com/office/drawing/2010/main" val="0"/>
               </a:ext>
               <a:ext uri="{96DAC541-7B7A-43D3-8B79-37D633B846F1}">
-                <asvg:svgBlip xmlns:asvg="http://schemas.microsoft.com/office/drawing/2016/SVG/main" r:embed="rId5"/>
+                <asvg:svgBlip xmlns:asvg="http://schemas.microsoft.com/office/drawing/2016/SVG/main" r:embed="rId4"/>
               </a:ext>
             </a:extLst>
           </a:blip>
@@ -4995,13 +5074,13 @@
           <p:nvPr/>
         </p:nvPicPr>
         <p:blipFill>
-          <a:blip r:embed="rId6" cstate="print">
+          <a:blip r:embed="rId5" cstate="print">
             <a:extLst>
               <a:ext uri="{28A0092B-C50C-407E-A947-70E740481C1C}">
                 <a14:useLocalDpi xmlns:a14="http://schemas.microsoft.com/office/drawing/2010/main" val="0"/>
               </a:ext>
               <a:ext uri="{96DAC541-7B7A-43D3-8B79-37D633B846F1}">
-                <asvg:svgBlip xmlns:asvg="http://schemas.microsoft.com/office/drawing/2016/SVG/main" r:embed="rId7"/>
+                <asvg:svgBlip xmlns:asvg="http://schemas.microsoft.com/office/drawing/2016/SVG/main" r:embed="rId6"/>
               </a:ext>
             </a:extLst>
           </a:blip>
@@ -5028,13 +5107,13 @@
           <p:nvPr/>
         </p:nvPicPr>
         <p:blipFill>
-          <a:blip r:embed="rId8" cstate="print">
+          <a:blip r:embed="rId7" cstate="print">
             <a:extLst>
               <a:ext uri="{28A0092B-C50C-407E-A947-70E740481C1C}">
                 <a14:useLocalDpi xmlns:a14="http://schemas.microsoft.com/office/drawing/2010/main" val="0"/>
               </a:ext>
               <a:ext uri="{96DAC541-7B7A-43D3-8B79-37D633B846F1}">
-                <asvg:svgBlip xmlns:asvg="http://schemas.microsoft.com/office/drawing/2016/SVG/main" r:embed="rId9"/>
+                <asvg:svgBlip xmlns:asvg="http://schemas.microsoft.com/office/drawing/2016/SVG/main" r:embed="rId8"/>
               </a:ext>
             </a:extLst>
           </a:blip>
@@ -5061,13 +5140,13 @@
           <p:nvPr/>
         </p:nvPicPr>
         <p:blipFill>
-          <a:blip r:embed="rId10" cstate="print">
+          <a:blip r:embed="rId9" cstate="print">
             <a:extLst>
               <a:ext uri="{28A0092B-C50C-407E-A947-70E740481C1C}">
                 <a14:useLocalDpi xmlns:a14="http://schemas.microsoft.com/office/drawing/2010/main" val="0"/>
               </a:ext>
               <a:ext uri="{96DAC541-7B7A-43D3-8B79-37D633B846F1}">
-                <asvg:svgBlip xmlns:asvg="http://schemas.microsoft.com/office/drawing/2016/SVG/main" r:embed="rId11"/>
+                <asvg:svgBlip xmlns:asvg="http://schemas.microsoft.com/office/drawing/2016/SVG/main" r:embed="rId10"/>
               </a:ext>
             </a:extLst>
           </a:blip>
@@ -5094,13 +5173,13 @@
           <p:nvPr/>
         </p:nvPicPr>
         <p:blipFill>
-          <a:blip r:embed="rId12" cstate="print">
+          <a:blip r:embed="rId11" cstate="print">
             <a:extLst>
               <a:ext uri="{28A0092B-C50C-407E-A947-70E740481C1C}">
                 <a14:useLocalDpi xmlns:a14="http://schemas.microsoft.com/office/drawing/2010/main" val="0"/>
               </a:ext>
               <a:ext uri="{96DAC541-7B7A-43D3-8B79-37D633B846F1}">
-                <asvg:svgBlip xmlns:asvg="http://schemas.microsoft.com/office/drawing/2016/SVG/main" r:embed="rId13"/>
+                <asvg:svgBlip xmlns:asvg="http://schemas.microsoft.com/office/drawing/2016/SVG/main" r:embed="rId12"/>
               </a:ext>
             </a:extLst>
           </a:blip>
@@ -5127,13 +5206,13 @@
           <p:nvPr/>
         </p:nvPicPr>
         <p:blipFill>
-          <a:blip r:embed="rId12" cstate="print">
+          <a:blip r:embed="rId11" cstate="print">
             <a:extLst>
               <a:ext uri="{28A0092B-C50C-407E-A947-70E740481C1C}">
                 <a14:useLocalDpi xmlns:a14="http://schemas.microsoft.com/office/drawing/2010/main" val="0"/>
               </a:ext>
               <a:ext uri="{96DAC541-7B7A-43D3-8B79-37D633B846F1}">
-                <asvg:svgBlip xmlns:asvg="http://schemas.microsoft.com/office/drawing/2016/SVG/main" r:embed="rId14"/>
+                <asvg:svgBlip xmlns:asvg="http://schemas.microsoft.com/office/drawing/2016/SVG/main" r:embed="rId13"/>
               </a:ext>
             </a:extLst>
           </a:blip>
@@ -5160,10 +5239,10 @@
           <p:nvPr/>
         </p:nvPicPr>
         <p:blipFill>
-          <a:blip r:embed="rId15">
+          <a:blip r:embed="rId14">
             <a:extLst>
               <a:ext uri="{96DAC541-7B7A-43D3-8B79-37D633B846F1}">
-                <asvg:svgBlip xmlns:asvg="http://schemas.microsoft.com/office/drawing/2016/SVG/main" r:embed="rId16"/>
+                <asvg:svgBlip xmlns:asvg="http://schemas.microsoft.com/office/drawing/2016/SVG/main" r:embed="rId15"/>
               </a:ext>
             </a:extLst>
           </a:blip>
@@ -5190,10 +5269,10 @@
           <p:nvPr/>
         </p:nvPicPr>
         <p:blipFill>
-          <a:blip r:embed="rId17">
+          <a:blip r:embed="rId16">
             <a:extLst>
               <a:ext uri="{96DAC541-7B7A-43D3-8B79-37D633B846F1}">
-                <asvg:svgBlip xmlns:asvg="http://schemas.microsoft.com/office/drawing/2016/SVG/main" r:embed="rId18"/>
+                <asvg:svgBlip xmlns:asvg="http://schemas.microsoft.com/office/drawing/2016/SVG/main" r:embed="rId17"/>
               </a:ext>
             </a:extLst>
           </a:blip>
@@ -5220,10 +5299,10 @@
           <p:nvPr/>
         </p:nvPicPr>
         <p:blipFill>
-          <a:blip r:embed="rId19">
+          <a:blip r:embed="rId18">
             <a:extLst>
               <a:ext uri="{96DAC541-7B7A-43D3-8B79-37D633B846F1}">
-                <asvg:svgBlip xmlns:asvg="http://schemas.microsoft.com/office/drawing/2016/SVG/main" r:embed="rId20"/>
+                <asvg:svgBlip xmlns:asvg="http://schemas.microsoft.com/office/drawing/2016/SVG/main" r:embed="rId19"/>
               </a:ext>
             </a:extLst>
           </a:blip>
@@ -5270,7 +5349,6 @@
           <a:bodyPr wrap="square" rtlCol="0">
             <a:noAutofit/>
           </a:bodyPr>
-          <a:lstStyle/>
           <a:p>
             <a:pPr algn="ctr"/>
             <a:r>
@@ -5280,6 +5358,10 @@
               </a:rPr>
               <a:t>Password</a:t>
             </a:r>
+            <a:endParaRPr lang="en-US" altLang="zh-CN" sz="1600">
+              <a:latin typeface="Times New Roman" panose="02020603050405020304" charset="0"/>
+              <a:cs typeface="Times New Roman" panose="02020603050405020304" charset="0"/>
+            </a:endParaRPr>
           </a:p>
         </p:txBody>
       </p:sp>
@@ -5292,10 +5374,10 @@
           <p:nvPr/>
         </p:nvPicPr>
         <p:blipFill>
-          <a:blip r:embed="rId21">
+          <a:blip r:embed="rId20">
             <a:extLst>
               <a:ext uri="{96DAC541-7B7A-43D3-8B79-37D633B846F1}">
-                <asvg:svgBlip xmlns:asvg="http://schemas.microsoft.com/office/drawing/2016/SVG/main" r:embed="rId22"/>
+                <asvg:svgBlip xmlns:asvg="http://schemas.microsoft.com/office/drawing/2016/SVG/main" r:embed="rId21"/>
               </a:ext>
             </a:extLst>
           </a:blip>
@@ -5322,10 +5404,10 @@
           <p:nvPr/>
         </p:nvPicPr>
         <p:blipFill>
-          <a:blip r:embed="rId23">
+          <a:blip r:embed="rId22">
             <a:extLst>
               <a:ext uri="{96DAC541-7B7A-43D3-8B79-37D633B846F1}">
-                <asvg:svgBlip xmlns:asvg="http://schemas.microsoft.com/office/drawing/2016/SVG/main" r:embed="rId24"/>
+                <asvg:svgBlip xmlns:asvg="http://schemas.microsoft.com/office/drawing/2016/SVG/main" r:embed="rId23"/>
               </a:ext>
             </a:extLst>
           </a:blip>
@@ -5352,10 +5434,10 @@
           <p:nvPr/>
         </p:nvPicPr>
         <p:blipFill>
-          <a:blip r:embed="rId25">
+          <a:blip r:embed="rId24">
             <a:extLst>
               <a:ext uri="{96DAC541-7B7A-43D3-8B79-37D633B846F1}">
-                <asvg:svgBlip xmlns:asvg="http://schemas.microsoft.com/office/drawing/2016/SVG/main" r:embed="rId26"/>
+                <asvg:svgBlip xmlns:asvg="http://schemas.microsoft.com/office/drawing/2016/SVG/main" r:embed="rId25"/>
               </a:ext>
             </a:extLst>
           </a:blip>
@@ -5382,10 +5464,10 @@
           <p:nvPr/>
         </p:nvPicPr>
         <p:blipFill>
-          <a:blip r:embed="rId27">
+          <a:blip r:embed="rId26">
             <a:extLst>
               <a:ext uri="{96DAC541-7B7A-43D3-8B79-37D633B846F1}">
-                <asvg:svgBlip xmlns:asvg="http://schemas.microsoft.com/office/drawing/2016/SVG/main" r:embed="rId28"/>
+                <asvg:svgBlip xmlns:asvg="http://schemas.microsoft.com/office/drawing/2016/SVG/main" r:embed="rId27"/>
               </a:ext>
             </a:extLst>
           </a:blip>
@@ -5412,10 +5494,10 @@
           <p:nvPr/>
         </p:nvPicPr>
         <p:blipFill>
-          <a:blip r:embed="rId29">
+          <a:blip r:embed="rId28">
             <a:extLst>
               <a:ext uri="{96DAC541-7B7A-43D3-8B79-37D633B846F1}">
-                <asvg:svgBlip xmlns:asvg="http://schemas.microsoft.com/office/drawing/2016/SVG/main" r:embed="rId30"/>
+                <asvg:svgBlip xmlns:asvg="http://schemas.microsoft.com/office/drawing/2016/SVG/main" r:embed="rId29"/>
               </a:ext>
             </a:extLst>
           </a:blip>
@@ -5504,13 +5586,13 @@
           <p:nvPr/>
         </p:nvPicPr>
         <p:blipFill>
-          <a:blip r:embed="rId2" cstate="print">
+          <a:blip r:embed="rId1" cstate="print">
             <a:extLst>
               <a:ext uri="{28A0092B-C50C-407E-A947-70E740481C1C}">
                 <a14:useLocalDpi xmlns:a14="http://schemas.microsoft.com/office/drawing/2010/main" val="0"/>
               </a:ext>
               <a:ext uri="{96DAC541-7B7A-43D3-8B79-37D633B846F1}">
-                <asvg:svgBlip xmlns:asvg="http://schemas.microsoft.com/office/drawing/2016/SVG/main" r:embed="rId3"/>
+                <asvg:svgBlip xmlns:asvg="http://schemas.microsoft.com/office/drawing/2016/SVG/main" r:embed="rId2"/>
               </a:ext>
             </a:extLst>
           </a:blip>
@@ -5537,13 +5619,13 @@
           <p:nvPr/>
         </p:nvPicPr>
         <p:blipFill>
-          <a:blip r:embed="rId4" cstate="print">
+          <a:blip r:embed="rId3" cstate="print">
             <a:extLst>
               <a:ext uri="{28A0092B-C50C-407E-A947-70E740481C1C}">
                 <a14:useLocalDpi xmlns:a14="http://schemas.microsoft.com/office/drawing/2010/main" val="0"/>
               </a:ext>
               <a:ext uri="{96DAC541-7B7A-43D3-8B79-37D633B846F1}">
-                <asvg:svgBlip xmlns:asvg="http://schemas.microsoft.com/office/drawing/2016/SVG/main" r:embed="rId5"/>
+                <asvg:svgBlip xmlns:asvg="http://schemas.microsoft.com/office/drawing/2016/SVG/main" r:embed="rId4"/>
               </a:ext>
             </a:extLst>
           </a:blip>
@@ -5617,13 +5699,13 @@
           <p:nvPr/>
         </p:nvPicPr>
         <p:blipFill>
-          <a:blip r:embed="rId6" cstate="print">
+          <a:blip r:embed="rId5" cstate="print">
             <a:extLst>
               <a:ext uri="{28A0092B-C50C-407E-A947-70E740481C1C}">
                 <a14:useLocalDpi xmlns:a14="http://schemas.microsoft.com/office/drawing/2010/main" val="0"/>
               </a:ext>
               <a:ext uri="{96DAC541-7B7A-43D3-8B79-37D633B846F1}">
-                <asvg:svgBlip xmlns:asvg="http://schemas.microsoft.com/office/drawing/2016/SVG/main" r:embed="rId7"/>
+                <asvg:svgBlip xmlns:asvg="http://schemas.microsoft.com/office/drawing/2016/SVG/main" r:embed="rId6"/>
               </a:ext>
             </a:extLst>
           </a:blip>
@@ -5650,13 +5732,13 @@
           <p:nvPr/>
         </p:nvPicPr>
         <p:blipFill>
-          <a:blip r:embed="rId8" cstate="print">
+          <a:blip r:embed="rId7" cstate="print">
             <a:extLst>
               <a:ext uri="{28A0092B-C50C-407E-A947-70E740481C1C}">
                 <a14:useLocalDpi xmlns:a14="http://schemas.microsoft.com/office/drawing/2010/main" val="0"/>
               </a:ext>
               <a:ext uri="{96DAC541-7B7A-43D3-8B79-37D633B846F1}">
-                <asvg:svgBlip xmlns:asvg="http://schemas.microsoft.com/office/drawing/2016/SVG/main" r:embed="rId9"/>
+                <asvg:svgBlip xmlns:asvg="http://schemas.microsoft.com/office/drawing/2016/SVG/main" r:embed="rId8"/>
               </a:ext>
             </a:extLst>
           </a:blip>
@@ -5683,13 +5765,13 @@
           <p:nvPr/>
         </p:nvPicPr>
         <p:blipFill>
-          <a:blip r:embed="rId10" cstate="print">
+          <a:blip r:embed="rId9" cstate="print">
             <a:extLst>
               <a:ext uri="{28A0092B-C50C-407E-A947-70E740481C1C}">
                 <a14:useLocalDpi xmlns:a14="http://schemas.microsoft.com/office/drawing/2010/main" val="0"/>
               </a:ext>
               <a:ext uri="{96DAC541-7B7A-43D3-8B79-37D633B846F1}">
-                <asvg:svgBlip xmlns:asvg="http://schemas.microsoft.com/office/drawing/2016/SVG/main" r:embed="rId11"/>
+                <asvg:svgBlip xmlns:asvg="http://schemas.microsoft.com/office/drawing/2016/SVG/main" r:embed="rId10"/>
               </a:ext>
             </a:extLst>
           </a:blip>
@@ -5716,13 +5798,13 @@
           <p:nvPr/>
         </p:nvPicPr>
         <p:blipFill>
-          <a:blip r:embed="rId12" cstate="print">
+          <a:blip r:embed="rId11" cstate="print">
             <a:extLst>
               <a:ext uri="{28A0092B-C50C-407E-A947-70E740481C1C}">
                 <a14:useLocalDpi xmlns:a14="http://schemas.microsoft.com/office/drawing/2010/main" val="0"/>
               </a:ext>
               <a:ext uri="{96DAC541-7B7A-43D3-8B79-37D633B846F1}">
-                <asvg:svgBlip xmlns:asvg="http://schemas.microsoft.com/office/drawing/2016/SVG/main" r:embed="rId13"/>
+                <asvg:svgBlip xmlns:asvg="http://schemas.microsoft.com/office/drawing/2016/SVG/main" r:embed="rId12"/>
               </a:ext>
             </a:extLst>
           </a:blip>
@@ -5749,13 +5831,13 @@
           <p:nvPr/>
         </p:nvPicPr>
         <p:blipFill>
-          <a:blip r:embed="rId10" cstate="print">
+          <a:blip r:embed="rId9" cstate="print">
             <a:extLst>
               <a:ext uri="{28A0092B-C50C-407E-A947-70E740481C1C}">
                 <a14:useLocalDpi xmlns:a14="http://schemas.microsoft.com/office/drawing/2010/main" val="0"/>
               </a:ext>
               <a:ext uri="{96DAC541-7B7A-43D3-8B79-37D633B846F1}">
-                <asvg:svgBlip xmlns:asvg="http://schemas.microsoft.com/office/drawing/2016/SVG/main" r:embed="rId11"/>
+                <asvg:svgBlip xmlns:asvg="http://schemas.microsoft.com/office/drawing/2016/SVG/main" r:embed="rId10"/>
               </a:ext>
             </a:extLst>
           </a:blip>
@@ -5782,13 +5864,13 @@
           <p:nvPr/>
         </p:nvPicPr>
         <p:blipFill>
-          <a:blip r:embed="rId14" cstate="print">
+          <a:blip r:embed="rId13" cstate="print">
             <a:extLst>
               <a:ext uri="{28A0092B-C50C-407E-A947-70E740481C1C}">
                 <a14:useLocalDpi xmlns:a14="http://schemas.microsoft.com/office/drawing/2010/main" val="0"/>
               </a:ext>
               <a:ext uri="{96DAC541-7B7A-43D3-8B79-37D633B846F1}">
-                <asvg:svgBlip xmlns:asvg="http://schemas.microsoft.com/office/drawing/2016/SVG/main" r:embed="rId15"/>
+                <asvg:svgBlip xmlns:asvg="http://schemas.microsoft.com/office/drawing/2016/SVG/main" r:embed="rId14"/>
               </a:ext>
             </a:extLst>
           </a:blip>
@@ -6151,13 +6233,13 @@
           <p:nvPr/>
         </p:nvPicPr>
         <p:blipFill>
-          <a:blip r:embed="rId16" cstate="print">
+          <a:blip r:embed="rId15" cstate="print">
             <a:extLst>
               <a:ext uri="{28A0092B-C50C-407E-A947-70E740481C1C}">
                 <a14:useLocalDpi xmlns:a14="http://schemas.microsoft.com/office/drawing/2010/main" val="0"/>
               </a:ext>
               <a:ext uri="{96DAC541-7B7A-43D3-8B79-37D633B846F1}">
-                <asvg:svgBlip xmlns:asvg="http://schemas.microsoft.com/office/drawing/2016/SVG/main" r:embed="rId17"/>
+                <asvg:svgBlip xmlns:asvg="http://schemas.microsoft.com/office/drawing/2016/SVG/main" r:embed="rId16"/>
               </a:ext>
             </a:extLst>
           </a:blip>
@@ -6184,13 +6266,13 @@
           <p:nvPr/>
         </p:nvPicPr>
         <p:blipFill>
-          <a:blip r:embed="rId18">
+          <a:blip r:embed="rId17">
             <a:extLst>
               <a:ext uri="{28A0092B-C50C-407E-A947-70E740481C1C}">
                 <a14:useLocalDpi xmlns:a14="http://schemas.microsoft.com/office/drawing/2010/main" val="0"/>
               </a:ext>
               <a:ext uri="{96DAC541-7B7A-43D3-8B79-37D633B846F1}">
-                <asvg:svgBlip xmlns:asvg="http://schemas.microsoft.com/office/drawing/2016/SVG/main" r:embed="rId19"/>
+                <asvg:svgBlip xmlns:asvg="http://schemas.microsoft.com/office/drawing/2016/SVG/main" r:embed="rId18"/>
               </a:ext>
             </a:extLst>
           </a:blip>
@@ -6336,13 +6418,13 @@
           <p:nvPr/>
         </p:nvPicPr>
         <p:blipFill>
-          <a:blip r:embed="rId20" cstate="print">
+          <a:blip r:embed="rId19" cstate="print">
             <a:extLst>
               <a:ext uri="{28A0092B-C50C-407E-A947-70E740481C1C}">
                 <a14:useLocalDpi xmlns:a14="http://schemas.microsoft.com/office/drawing/2010/main" val="0"/>
               </a:ext>
               <a:ext uri="{96DAC541-7B7A-43D3-8B79-37D633B846F1}">
-                <asvg:svgBlip xmlns:asvg="http://schemas.microsoft.com/office/drawing/2016/SVG/main" r:embed="rId21"/>
+                <asvg:svgBlip xmlns:asvg="http://schemas.microsoft.com/office/drawing/2016/SVG/main" r:embed="rId20"/>
               </a:ext>
             </a:extLst>
           </a:blip>
@@ -6377,14 +6459,105 @@
         <p:cNvGrpSpPr/>
         <p:nvPr/>
       </p:nvGrpSpPr>
-      <p:grpSpPr>
-        <a:xfrm>
-          <a:off x="0" y="0"/>
-          <a:ext cx="0" cy="0"/>
-          <a:chOff x="0" y="0"/>
-          <a:chExt cx="0" cy="0"/>
-        </a:xfrm>
-      </p:grpSpPr>
+      <p:grpSpPr/>
+      <p:sp>
+        <p:nvSpPr>
+          <p:cNvPr id="38" name="矩形 37"/>
+          <p:cNvSpPr/>
+          <p:nvPr/>
+        </p:nvSpPr>
+        <p:spPr>
+          <a:xfrm>
+            <a:off x="1624965" y="3774440"/>
+            <a:ext cx="7439025" cy="1589405"/>
+          </a:xfrm>
+          <a:prstGeom prst="rect">
+            <a:avLst/>
+          </a:prstGeom>
+          <a:solidFill>
+            <a:srgbClr val="EAEAEA"/>
+          </a:solidFill>
+          <a:ln>
+            <a:noFill/>
+          </a:ln>
+        </p:spPr>
+        <p:style>
+          <a:lnRef idx="2">
+            <a:schemeClr val="accent1">
+              <a:lumMod val="75000"/>
+            </a:schemeClr>
+          </a:lnRef>
+          <a:fillRef idx="1">
+            <a:schemeClr val="accent1"/>
+          </a:fillRef>
+          <a:effectRef idx="0">
+            <a:srgbClr val="FFFFFF"/>
+          </a:effectRef>
+          <a:fontRef idx="minor">
+            <a:schemeClr val="lt1"/>
+          </a:fontRef>
+        </p:style>
+        <p:txBody>
+          <a:bodyPr rtlCol="0" anchor="ctr"/>
+          <a:p>
+            <a:pPr algn="ctr"/>
+            <a:endParaRPr lang="zh-CN" altLang="en-US">
+              <a:latin typeface="Times New Roman" panose="02020603050405020304" charset="0"/>
+              <a:cs typeface="Times New Roman" panose="02020603050405020304" charset="0"/>
+            </a:endParaRPr>
+          </a:p>
+        </p:txBody>
+      </p:sp>
+      <p:sp>
+        <p:nvSpPr>
+          <p:cNvPr id="21" name="矩形 20"/>
+          <p:cNvSpPr/>
+          <p:nvPr/>
+        </p:nvSpPr>
+        <p:spPr>
+          <a:xfrm>
+            <a:off x="1617980" y="2262505"/>
+            <a:ext cx="7439025" cy="1235710"/>
+          </a:xfrm>
+          <a:prstGeom prst="rect">
+            <a:avLst/>
+          </a:prstGeom>
+          <a:solidFill>
+            <a:schemeClr val="bg1">
+              <a:lumMod val="95000"/>
+            </a:schemeClr>
+          </a:solidFill>
+          <a:ln>
+            <a:noFill/>
+          </a:ln>
+        </p:spPr>
+        <p:style>
+          <a:lnRef idx="2">
+            <a:schemeClr val="accent1">
+              <a:lumMod val="75000"/>
+            </a:schemeClr>
+          </a:lnRef>
+          <a:fillRef idx="1">
+            <a:schemeClr val="accent1"/>
+          </a:fillRef>
+          <a:effectRef idx="0">
+            <a:srgbClr val="FFFFFF"/>
+          </a:effectRef>
+          <a:fontRef idx="minor">
+            <a:schemeClr val="lt1"/>
+          </a:fontRef>
+        </p:style>
+        <p:txBody>
+          <a:bodyPr rtlCol="0" anchor="ctr"/>
+          <a:p>
+            <a:pPr algn="ctr"/>
+            <a:endParaRPr lang="zh-CN" altLang="en-US">
+              <a:latin typeface="Times New Roman" panose="02020603050405020304" charset="0"/>
+              <a:cs typeface="Times New Roman" panose="02020603050405020304" charset="0"/>
+            </a:endParaRPr>
+          </a:p>
+        </p:txBody>
+      </p:sp>
       <p:sp>
         <p:nvSpPr>
           <p:cNvPr id="20" name="任意多边形 19"/>
@@ -6393,18 +6566,18 @@
         </p:nvSpPr>
         <p:spPr>
           <a:xfrm>
-            <a:off x="5297170" y="2616835"/>
-            <a:ext cx="171967" cy="866775"/>
+            <a:off x="5167630" y="2712085"/>
+            <a:ext cx="297327" cy="1379220"/>
           </a:xfrm>
           <a:custGeom>
             <a:avLst/>
             <a:gdLst>
-              <a:gd name="connsiteX0" fmla="*/ 0 w 270"/>
-              <a:gd name="connsiteY0" fmla="*/ 0 h 1365"/>
-              <a:gd name="connsiteX1" fmla="*/ 258 w 270"/>
-              <a:gd name="connsiteY1" fmla="*/ 566 h 1365"/>
-              <a:gd name="connsiteX2" fmla="*/ 67 w 270"/>
-              <a:gd name="connsiteY2" fmla="*/ 1365 h 1365"/>
+              <a:gd name="connsiteX0" fmla="*/ 204 w 468"/>
+              <a:gd name="connsiteY0" fmla="*/ 0 h 2172"/>
+              <a:gd name="connsiteX1" fmla="*/ 462 w 468"/>
+              <a:gd name="connsiteY1" fmla="*/ 566 h 2172"/>
+              <a:gd name="connsiteX2" fmla="*/ 0 w 468"/>
+              <a:gd name="connsiteY2" fmla="*/ 2172 h 2172"/>
             </a:gdLst>
             <a:ahLst/>
             <a:cxnLst>
@@ -6420,19 +6593,19 @@
             </a:cxnLst>
             <a:rect l="l" t="t" r="r" b="b"/>
             <a:pathLst>
-              <a:path w="271" h="1365">
+              <a:path w="468" h="2172">
                 <a:moveTo>
-                  <a:pt x="0" y="0"/>
+                  <a:pt x="204" y="0"/>
                 </a:moveTo>
                 <a:cubicBezTo>
-                  <a:pt x="108" y="95"/>
-                  <a:pt x="193" y="296"/>
-                  <a:pt x="258" y="566"/>
+                  <a:pt x="312" y="95"/>
+                  <a:pt x="397" y="296"/>
+                  <a:pt x="462" y="566"/>
                 </a:cubicBezTo>
                 <a:cubicBezTo>
-                  <a:pt x="324" y="837"/>
-                  <a:pt x="116" y="1216"/>
-                  <a:pt x="67" y="1365"/>
+                  <a:pt x="528" y="837"/>
+                  <a:pt x="49" y="2023"/>
+                  <a:pt x="0" y="2172"/>
                 </a:cubicBezTo>
               </a:path>
             </a:pathLst>
@@ -6464,7 +6637,6 @@
         </p:style>
         <p:txBody>
           <a:bodyPr rtlCol="0" anchor="ctr"/>
-          <a:lstStyle/>
           <a:p>
             <a:pPr algn="ctr"/>
             <a:endParaRPr lang="zh-CN" altLang="en-US">
@@ -6717,7 +6889,6 @@
           <a:bodyPr wrap="square" rtlCol="0">
             <a:noAutofit/>
           </a:bodyPr>
-          <a:lstStyle/>
           <a:p>
             <a:pPr algn="ctr"/>
             <a:r>
@@ -6727,6 +6898,10 @@
               </a:rPr>
               <a:t>Merchant Application</a:t>
             </a:r>
+            <a:endParaRPr lang="en-US" altLang="zh-CN" sz="1200">
+              <a:latin typeface="Times New Roman" panose="02020603050405020304" charset="0"/>
+              <a:cs typeface="Times New Roman" panose="02020603050405020304" charset="0"/>
+            </a:endParaRPr>
           </a:p>
         </p:txBody>
       </p:sp>
@@ -6739,13 +6914,13 @@
           <p:nvPr/>
         </p:nvPicPr>
         <p:blipFill>
-          <a:blip r:embed="rId2" cstate="print">
+          <a:blip r:embed="rId1" cstate="print">
             <a:extLst>
               <a:ext uri="{28A0092B-C50C-407E-A947-70E740481C1C}">
                 <a14:useLocalDpi xmlns:a14="http://schemas.microsoft.com/office/drawing/2010/main" val="0"/>
               </a:ext>
               <a:ext uri="{96DAC541-7B7A-43D3-8B79-37D633B846F1}">
-                <asvg:svgBlip xmlns:asvg="http://schemas.microsoft.com/office/drawing/2016/SVG/main" r:embed="rId3"/>
+                <asvg:svgBlip xmlns:asvg="http://schemas.microsoft.com/office/drawing/2016/SVG/main" r:embed="rId2"/>
               </a:ext>
             </a:extLst>
           </a:blip>
@@ -6783,7 +6958,6 @@
           <a:bodyPr wrap="square" rtlCol="0">
             <a:noAutofit/>
           </a:bodyPr>
-          <a:lstStyle/>
           <a:p>
             <a:pPr algn="ctr"/>
             <a:r>
@@ -6793,6 +6967,10 @@
               </a:rPr>
               <a:t>Payment Application</a:t>
             </a:r>
+            <a:endParaRPr lang="en-US" altLang="zh-CN" sz="1200">
+              <a:latin typeface="Times New Roman" panose="02020603050405020304" charset="0"/>
+              <a:cs typeface="Times New Roman" panose="02020603050405020304" charset="0"/>
+            </a:endParaRPr>
           </a:p>
         </p:txBody>
       </p:sp>
@@ -6804,8 +6982,8 @@
         </p:nvSpPr>
         <p:spPr>
           <a:xfrm>
-            <a:off x="2943225" y="2286000"/>
-            <a:ext cx="180000" cy="2761615"/>
+            <a:off x="2943225" y="2381250"/>
+            <a:ext cx="179705" cy="862330"/>
           </a:xfrm>
           <a:prstGeom prst="rect">
             <a:avLst/>
@@ -6837,7 +7015,6 @@
         </p:style>
         <p:txBody>
           <a:bodyPr rtlCol="0" anchor="ctr"/>
-          <a:lstStyle/>
           <a:p>
             <a:pPr algn="ctr"/>
             <a:endParaRPr lang="zh-CN" altLang="en-US">
@@ -6855,8 +7032,8 @@
         </p:nvSpPr>
         <p:spPr>
           <a:xfrm>
-            <a:off x="8298815" y="2286000"/>
-            <a:ext cx="180000" cy="2761200"/>
+            <a:off x="8298815" y="2381250"/>
+            <a:ext cx="180000" cy="864000"/>
           </a:xfrm>
           <a:prstGeom prst="rect">
             <a:avLst/>
@@ -6892,7 +7069,6 @@
         </p:style>
         <p:txBody>
           <a:bodyPr rtlCol="0" anchor="ctr"/>
-          <a:lstStyle/>
           <a:p>
             <a:pPr algn="ctr"/>
             <a:endParaRPr lang="zh-CN" altLang="en-US">
@@ -6910,21 +7086,18 @@
         </p:nvSpPr>
         <p:spPr>
           <a:xfrm>
-            <a:off x="5624195" y="3149600"/>
-            <a:ext cx="180000" cy="1889760"/>
+            <a:off x="5624195" y="3891600"/>
+            <a:ext cx="179705" cy="1210310"/>
           </a:xfrm>
           <a:prstGeom prst="rect">
             <a:avLst/>
           </a:prstGeom>
           <a:solidFill>
-            <a:srgbClr val="FAA09C"/>
+            <a:srgbClr val="AC1F18"/>
           </a:solidFill>
           <a:ln>
             <a:solidFill>
-              <a:schemeClr val="accent6">
-                <a:lumMod val="40000"/>
-                <a:lumOff val="60000"/>
-              </a:schemeClr>
+              <a:srgbClr val="AC1F18"/>
             </a:solidFill>
           </a:ln>
         </p:spPr>
@@ -6946,7 +7119,6 @@
         </p:style>
         <p:txBody>
           <a:bodyPr rtlCol="0" anchor="ctr"/>
-          <a:lstStyle/>
           <a:p>
             <a:pPr algn="ctr"/>
             <a:endParaRPr lang="zh-CN" altLang="en-US">
@@ -6976,7 +7148,6 @@
           <a:bodyPr wrap="square" rtlCol="0">
             <a:noAutofit/>
           </a:bodyPr>
-          <a:lstStyle/>
           <a:p>
             <a:pPr algn="ctr"/>
             <a:r>
@@ -6986,6 +7157,10 @@
               </a:rPr>
               <a:t>Malicious Application </a:t>
             </a:r>
+            <a:endParaRPr lang="en-US" altLang="zh-CN" sz="1200">
+              <a:latin typeface="Times New Roman" panose="02020603050405020304" charset="0"/>
+              <a:cs typeface="Times New Roman" panose="02020603050405020304" charset="0"/>
+            </a:endParaRPr>
           </a:p>
         </p:txBody>
       </p:sp>
@@ -6997,7 +7172,7 @@
         </p:nvCxnSpPr>
         <p:spPr>
           <a:xfrm>
-            <a:off x="3207385" y="2589530"/>
+            <a:off x="3207385" y="2684780"/>
             <a:ext cx="2494800" cy="0"/>
           </a:xfrm>
           <a:prstGeom prst="straightConnector1">
@@ -7033,7 +7208,7 @@
         </p:nvSpPr>
         <p:spPr>
           <a:xfrm>
-            <a:off x="3172225" y="2547620"/>
+            <a:off x="3172225" y="2642870"/>
             <a:ext cx="476250" cy="323850"/>
           </a:xfrm>
           <a:prstGeom prst="rect">
@@ -7045,7 +7220,6 @@
           <a:bodyPr wrap="square" rtlCol="0">
             <a:noAutofit/>
           </a:bodyPr>
-          <a:lstStyle/>
           <a:p>
             <a:r>
               <a:rPr lang="en-US" altLang="zh-CN">
@@ -7054,6 +7228,10 @@
               </a:rPr>
               <a:t>S1</a:t>
             </a:r>
+            <a:endParaRPr lang="en-US" altLang="zh-CN">
+              <a:latin typeface="Times New Roman" panose="02020603050405020304" charset="0"/>
+              <a:cs typeface="Times New Roman" panose="02020603050405020304" charset="0"/>
+            </a:endParaRPr>
           </a:p>
         </p:txBody>
       </p:sp>
@@ -7065,7 +7243,7 @@
         </p:nvSpPr>
         <p:spPr>
           <a:xfrm>
-            <a:off x="3801745" y="2293620"/>
+            <a:off x="3801745" y="2388870"/>
             <a:ext cx="3841750" cy="272415"/>
           </a:xfrm>
           <a:prstGeom prst="rect">
@@ -7077,7 +7255,6 @@
           <a:bodyPr wrap="square" rtlCol="0">
             <a:noAutofit/>
           </a:bodyPr>
-          <a:lstStyle/>
           <a:p>
             <a:pPr algn="ctr"/>
             <a:r>
@@ -7156,7 +7333,7 @@
         </p:nvCxnSpPr>
         <p:spPr>
           <a:xfrm>
-            <a:off x="3194050" y="3528060"/>
+            <a:off x="3194050" y="4118610"/>
             <a:ext cx="2306955" cy="0"/>
           </a:xfrm>
           <a:prstGeom prst="straightConnector1">
@@ -7185,87 +7362,6 @@
           </a:fontRef>
         </p:style>
       </p:cxnSp>
-      <p:sp>
-        <p:nvSpPr>
-          <p:cNvPr id="25" name="文本框 24"/>
-          <p:cNvSpPr txBox="1"/>
-          <p:nvPr/>
-        </p:nvSpPr>
-        <p:spPr>
-          <a:xfrm>
-            <a:off x="3202940" y="3550285"/>
-            <a:ext cx="2298065" cy="272415"/>
-          </a:xfrm>
-          <a:prstGeom prst="rect">
-            <a:avLst/>
-          </a:prstGeom>
-          <a:noFill/>
-        </p:spPr>
-        <p:txBody>
-          <a:bodyPr wrap="square" rtlCol="0">
-            <a:noAutofit/>
-          </a:bodyPr>
-          <a:lstStyle/>
-          <a:p>
-            <a:pPr algn="ctr"/>
-            <a:r>
-              <a:rPr lang="en-US" altLang="zh-CN" sz="1200">
-                <a:latin typeface="Times New Roman" panose="02020603050405020304" charset="0"/>
-                <a:cs typeface="Times New Roman" panose="02020603050405020304" charset="0"/>
-              </a:rPr>
-              <a:t>amount=</a:t>
-            </a:r>
-            <a:r>
-              <a:rPr lang="en-US" altLang="zh-CN" sz="1200">
-                <a:solidFill>
-                  <a:srgbClr val="0070C0"/>
-                </a:solidFill>
-                <a:latin typeface="Times New Roman" panose="02020603050405020304" charset="0"/>
-                <a:cs typeface="Times New Roman" panose="02020603050405020304" charset="0"/>
-              </a:rPr>
-              <a:t>xxxx</a:t>
-            </a:r>
-            <a:r>
-              <a:rPr lang="en-US" altLang="zh-CN" sz="1200">
-                <a:latin typeface="Times New Roman" panose="02020603050405020304" charset="0"/>
-                <a:cs typeface="Times New Roman" panose="02020603050405020304" charset="0"/>
-              </a:rPr>
-              <a:t>&amp;description=</a:t>
-            </a:r>
-            <a:r>
-              <a:rPr lang="en-US" altLang="zh-CN" sz="1200">
-                <a:solidFill>
-                  <a:srgbClr val="0070C0"/>
-                </a:solidFill>
-                <a:latin typeface="Times New Roman" panose="02020603050405020304" charset="0"/>
-                <a:cs typeface="Times New Roman" panose="02020603050405020304" charset="0"/>
-              </a:rPr>
-              <a:t>xxxx</a:t>
-            </a:r>
-            <a:r>
-              <a:rPr lang="en-US" altLang="zh-CN" sz="1200">
-                <a:latin typeface="Times New Roman" panose="02020603050405020304" charset="0"/>
-                <a:cs typeface="Times New Roman" panose="02020603050405020304" charset="0"/>
-              </a:rPr>
-              <a:t>&amp;subject=</a:t>
-            </a:r>
-            <a:r>
-              <a:rPr lang="en-US" altLang="zh-CN" sz="1200">
-                <a:solidFill>
-                  <a:srgbClr val="0070C0"/>
-                </a:solidFill>
-                <a:latin typeface="Times New Roman" panose="02020603050405020304" charset="0"/>
-                <a:cs typeface="Times New Roman" panose="02020603050405020304" charset="0"/>
-              </a:rPr>
-              <a:t>xxxx</a:t>
-            </a:r>
-            <a:endParaRPr lang="en-US" altLang="zh-CN" sz="1200">
-              <a:latin typeface="Times New Roman" panose="02020603050405020304" charset="0"/>
-              <a:cs typeface="Times New Roman" panose="02020603050405020304" charset="0"/>
-            </a:endParaRPr>
-          </a:p>
-        </p:txBody>
-      </p:sp>
       <p:cxnSp>
         <p:nvCxnSpPr>
           <p:cNvPr id="26" name="直接箭头连接符 25"/>
@@ -7274,7 +7370,7 @@
         </p:nvCxnSpPr>
         <p:spPr>
           <a:xfrm flipV="1">
-            <a:off x="3202940" y="4288790"/>
+            <a:off x="3202940" y="4447540"/>
             <a:ext cx="2307600" cy="0"/>
           </a:xfrm>
           <a:prstGeom prst="straightConnector1">
@@ -7310,7 +7406,7 @@
         </p:nvSpPr>
         <p:spPr>
           <a:xfrm>
-            <a:off x="5466080" y="2726055"/>
+            <a:off x="5500370" y="3141345"/>
             <a:ext cx="480695" cy="368300"/>
           </a:xfrm>
           <a:prstGeom prst="rect">
@@ -7322,7 +7418,6 @@
           <a:bodyPr wrap="square" rtlCol="0">
             <a:spAutoFit/>
           </a:bodyPr>
-          <a:lstStyle/>
           <a:p>
             <a:r>
               <a:rPr lang="en-US" altLang="zh-CN">
@@ -7331,6 +7426,10 @@
               </a:rPr>
               <a:t>S2</a:t>
             </a:r>
+            <a:endParaRPr lang="en-US" altLang="zh-CN">
+              <a:latin typeface="Times New Roman" panose="02020603050405020304" charset="0"/>
+              <a:cs typeface="Times New Roman" panose="02020603050405020304" charset="0"/>
+            </a:endParaRPr>
           </a:p>
         </p:txBody>
       </p:sp>
@@ -7342,7 +7441,7 @@
         </p:nvSpPr>
         <p:spPr>
           <a:xfrm>
-            <a:off x="3171190" y="3184525"/>
+            <a:off x="3171190" y="3775075"/>
             <a:ext cx="475200" cy="324000"/>
           </a:xfrm>
           <a:prstGeom prst="rect">
@@ -7354,7 +7453,6 @@
           <a:bodyPr wrap="square" rtlCol="0">
             <a:noAutofit/>
           </a:bodyPr>
-          <a:lstStyle/>
           <a:p>
             <a:r>
               <a:rPr lang="en-US" altLang="zh-CN">
@@ -7363,38 +7461,10 @@
               </a:rPr>
               <a:t>S3</a:t>
             </a:r>
-          </a:p>
-        </p:txBody>
-      </p:sp>
-      <p:sp>
-        <p:nvSpPr>
-          <p:cNvPr id="30" name="文本框 29"/>
-          <p:cNvSpPr txBox="1"/>
-          <p:nvPr/>
-        </p:nvSpPr>
-        <p:spPr>
-          <a:xfrm>
-            <a:off x="3171190" y="3960495"/>
-            <a:ext cx="475200" cy="324000"/>
-          </a:xfrm>
-          <a:prstGeom prst="rect">
-            <a:avLst/>
-          </a:prstGeom>
-          <a:noFill/>
-        </p:spPr>
-        <p:txBody>
-          <a:bodyPr wrap="square" rtlCol="0">
-            <a:noAutofit/>
-          </a:bodyPr>
-          <a:lstStyle/>
-          <a:p>
-            <a:r>
-              <a:rPr lang="en-US" altLang="zh-CN">
-                <a:latin typeface="Times New Roman" panose="02020603050405020304" charset="0"/>
-                <a:cs typeface="Times New Roman" panose="02020603050405020304" charset="0"/>
-              </a:rPr>
-              <a:t>S4</a:t>
-            </a:r>
+            <a:endParaRPr lang="en-US" altLang="zh-CN">
+              <a:latin typeface="Times New Roman" panose="02020603050405020304" charset="0"/>
+              <a:cs typeface="Times New Roman" panose="02020603050405020304" charset="0"/>
+            </a:endParaRPr>
           </a:p>
         </p:txBody>
       </p:sp>
@@ -7406,7 +7476,7 @@
         </p:nvSpPr>
         <p:spPr>
           <a:xfrm>
-            <a:off x="3190240" y="2592705"/>
+            <a:off x="3190240" y="2687955"/>
             <a:ext cx="2383155" cy="272415"/>
           </a:xfrm>
           <a:prstGeom prst="rect">
@@ -7418,7 +7488,6 @@
           <a:bodyPr wrap="square" rtlCol="0">
             <a:noAutofit/>
           </a:bodyPr>
-          <a:lstStyle/>
           <a:p>
             <a:pPr algn="ctr"/>
             <a:r>
@@ -7431,6 +7500,13 @@
               </a:rPr>
               <a:t>Send payment request</a:t>
             </a:r>
+            <a:endParaRPr lang="en-US" altLang="zh-CN" sz="1400" b="1">
+              <a:solidFill>
+                <a:schemeClr val="tx1"/>
+              </a:solidFill>
+              <a:latin typeface="Times New Roman" panose="02020603050405020304" charset="0"/>
+              <a:cs typeface="Times New Roman" panose="02020603050405020304" charset="0"/>
+            </a:endParaRPr>
           </a:p>
         </p:txBody>
       </p:sp>
@@ -7442,7 +7518,7 @@
         </p:nvSpPr>
         <p:spPr>
           <a:xfrm>
-            <a:off x="3328035" y="3244850"/>
+            <a:off x="3328035" y="3835400"/>
             <a:ext cx="1804035" cy="269240"/>
           </a:xfrm>
           <a:prstGeom prst="rect">
@@ -7454,7 +7530,6 @@
           <a:bodyPr wrap="square" rtlCol="0">
             <a:noAutofit/>
           </a:bodyPr>
-          <a:lstStyle/>
           <a:p>
             <a:pPr algn="ctr"/>
             <a:r>
@@ -7464,6 +7539,10 @@
               </a:rPr>
               <a:t>Order parameters</a:t>
             </a:r>
+            <a:endParaRPr lang="en-US" altLang="zh-CN" sz="1400" b="1">
+              <a:latin typeface="Times New Roman" panose="02020603050405020304" charset="0"/>
+              <a:cs typeface="Times New Roman" panose="02020603050405020304" charset="0"/>
+            </a:endParaRPr>
           </a:p>
         </p:txBody>
       </p:sp>
@@ -7475,7 +7554,7 @@
         </p:nvCxnSpPr>
         <p:spPr>
           <a:xfrm flipV="1">
-            <a:off x="5895975" y="4469130"/>
+            <a:off x="5895975" y="4704080"/>
             <a:ext cx="2307600" cy="0"/>
           </a:xfrm>
           <a:prstGeom prst="straightConnector1">
@@ -7511,7 +7590,7 @@
         </p:nvSpPr>
         <p:spPr>
           <a:xfrm>
-            <a:off x="5927725" y="4145280"/>
+            <a:off x="5927725" y="4380230"/>
             <a:ext cx="475200" cy="324000"/>
           </a:xfrm>
           <a:prstGeom prst="rect">
@@ -7523,15 +7602,18 @@
           <a:bodyPr wrap="square" rtlCol="0">
             <a:noAutofit/>
           </a:bodyPr>
-          <a:lstStyle/>
           <a:p>
             <a:r>
               <a:rPr lang="en-US" altLang="zh-CN">
                 <a:latin typeface="Times New Roman" panose="02020603050405020304" charset="0"/>
                 <a:cs typeface="Times New Roman" panose="02020603050405020304" charset="0"/>
               </a:rPr>
-              <a:t>S5</a:t>
+              <a:t>S4</a:t>
             </a:r>
+            <a:endParaRPr lang="en-US" altLang="zh-CN">
+              <a:latin typeface="Times New Roman" panose="02020603050405020304" charset="0"/>
+              <a:cs typeface="Times New Roman" panose="02020603050405020304" charset="0"/>
+            </a:endParaRPr>
           </a:p>
         </p:txBody>
       </p:sp>
@@ -7543,7 +7625,7 @@
         </p:nvSpPr>
         <p:spPr>
           <a:xfrm>
-            <a:off x="5963920" y="4187190"/>
+            <a:off x="5893435" y="4415790"/>
             <a:ext cx="2203450" cy="269240"/>
           </a:xfrm>
           <a:prstGeom prst="rect">
@@ -7555,7 +7637,6 @@
           <a:bodyPr wrap="square" rtlCol="0">
             <a:noAutofit/>
           </a:bodyPr>
-          <a:lstStyle/>
           <a:p>
             <a:pPr algn="ctr"/>
             <a:r>
@@ -7565,6 +7646,10 @@
               </a:rPr>
               <a:t>Tampered request</a:t>
             </a:r>
+            <a:endParaRPr lang="en-US" altLang="zh-CN" sz="1400" b="1">
+              <a:latin typeface="Times New Roman" panose="02020603050405020304" charset="0"/>
+              <a:cs typeface="Times New Roman" panose="02020603050405020304" charset="0"/>
+            </a:endParaRPr>
           </a:p>
         </p:txBody>
       </p:sp>
@@ -7584,7 +7669,7 @@
             <a:chExt cx="375710" cy="371203"/>
           </a:xfrm>
           <a:solidFill>
-            <a:srgbClr val="FAA09C"/>
+            <a:srgbClr val="AC1F18"/>
           </a:solidFill>
         </p:grpSpPr>
         <p:sp>
@@ -7604,9 +7689,18 @@
             <a:grpFill/>
             <a:ln w="38100">
               <a:solidFill>
-                <a:srgbClr val="FAA09C"/>
+                <a:srgbClr val="AC1F18"/>
               </a:solidFill>
             </a:ln>
+            <a:extLst>
+              <a:ext uri="{909E8E84-426E-40DD-AFC4-6F175D3DCCD1}">
+                <a14:hiddenFill xmlns:a14="http://schemas.microsoft.com/office/drawing/2010/main">
+                  <a:solidFill>
+                    <a:srgbClr val="AC1F18"/>
+                  </a:solidFill>
+                </a14:hiddenFill>
+              </a:ext>
+            </a:extLst>
           </p:spPr>
           <p:style>
             <a:lnRef idx="2">
@@ -7653,7 +7747,7 @@
             <a:grpFill/>
             <a:ln w="38100">
               <a:solidFill>
-                <a:srgbClr val="FAA09C"/>
+                <a:srgbClr val="AC1F18"/>
               </a:solidFill>
             </a:ln>
           </p:spPr>
@@ -7702,7 +7796,7 @@
             <a:noFill/>
             <a:ln w="57150">
               <a:solidFill>
-                <a:srgbClr val="FAA09C"/>
+                <a:srgbClr val="AC1F18"/>
               </a:solidFill>
             </a:ln>
             <a:extLst>
@@ -7758,7 +7852,7 @@
             <a:grpFill/>
             <a:ln w="38100">
               <a:solidFill>
-                <a:srgbClr val="FAA09C"/>
+                <a:srgbClr val="AC1F18"/>
               </a:solidFill>
             </a:ln>
           </p:spPr>
@@ -7800,10 +7894,10 @@
           <p:nvPr/>
         </p:nvPicPr>
         <p:blipFill>
-          <a:blip r:embed="rId4">
+          <a:blip r:embed="rId3">
             <a:extLst>
               <a:ext uri="{96DAC541-7B7A-43D3-8B79-37D633B846F1}">
-                <asvg:svgBlip xmlns:asvg="http://schemas.microsoft.com/office/drawing/2016/SVG/main" r:embed="rId5"/>
+                <asvg:svgBlip xmlns:asvg="http://schemas.microsoft.com/office/drawing/2016/SVG/main" r:embed="rId4"/>
               </a:ext>
             </a:extLst>
           </a:blip>
@@ -7813,7 +7907,7 @@
         </p:blipFill>
         <p:spPr>
           <a:xfrm>
-            <a:off x="5753100" y="1752600"/>
+            <a:off x="5946775" y="1723390"/>
             <a:ext cx="318135" cy="318135"/>
           </a:xfrm>
           <a:prstGeom prst="rect">
@@ -7829,7 +7923,7 @@
         </p:nvSpPr>
         <p:spPr>
           <a:xfrm>
-            <a:off x="5736590" y="2757805"/>
+            <a:off x="5784850" y="3181985"/>
             <a:ext cx="1430655" cy="272415"/>
           </a:xfrm>
           <a:prstGeom prst="rect">
@@ -7841,7 +7935,6 @@
           <a:bodyPr wrap="square" rtlCol="0">
             <a:noAutofit/>
           </a:bodyPr>
-          <a:lstStyle/>
           <a:p>
             <a:pPr algn="ctr"/>
             <a:r>
@@ -7854,39 +7947,13 @@
               </a:rPr>
               <a:t>Hijack Request</a:t>
             </a:r>
-          </a:p>
-        </p:txBody>
-      </p:sp>
-      <p:sp>
-        <p:nvSpPr>
-          <p:cNvPr id="32" name="文本框 31"/>
-          <p:cNvSpPr txBox="1"/>
-          <p:nvPr/>
-        </p:nvSpPr>
-        <p:spPr>
-          <a:xfrm>
-            <a:off x="3105150" y="4006850"/>
-            <a:ext cx="1804035" cy="269240"/>
-          </a:xfrm>
-          <a:prstGeom prst="rect">
-            <a:avLst/>
-          </a:prstGeom>
-          <a:noFill/>
-        </p:spPr>
-        <p:txBody>
-          <a:bodyPr wrap="square" rtlCol="0">
-            <a:noAutofit/>
-          </a:bodyPr>
-          <a:lstStyle/>
-          <a:p>
-            <a:pPr algn="ctr"/>
-            <a:r>
-              <a:rPr lang="en-US" altLang="zh-CN" sz="1400" b="1">
-                <a:latin typeface="Times New Roman" panose="02020603050405020304" charset="0"/>
-                <a:cs typeface="Times New Roman" panose="02020603050405020304" charset="0"/>
-              </a:rPr>
-              <a:t>A new order</a:t>
-            </a:r>
+            <a:endParaRPr lang="en-US" altLang="zh-CN" sz="1400" b="1">
+              <a:solidFill>
+                <a:schemeClr val="tx1"/>
+              </a:solidFill>
+              <a:latin typeface="Times New Roman" panose="02020603050405020304" charset="0"/>
+              <a:cs typeface="Times New Roman" panose="02020603050405020304" charset="0"/>
+            </a:endParaRPr>
           </a:p>
         </p:txBody>
       </p:sp>
@@ -7898,7 +7965,7 @@
         </p:nvSpPr>
         <p:spPr>
           <a:xfrm>
-            <a:off x="3202940" y="4299585"/>
+            <a:off x="3202940" y="4458335"/>
             <a:ext cx="2298065" cy="272415"/>
           </a:xfrm>
           <a:prstGeom prst="rect">
@@ -7910,7 +7977,6 @@
           <a:bodyPr wrap="square" rtlCol="0">
             <a:noAutofit/>
           </a:bodyPr>
-          <a:lstStyle/>
           <a:p>
             <a:pPr algn="ctr"/>
             <a:r>
@@ -7990,7 +8056,7 @@
         </p:nvCxnSpPr>
         <p:spPr>
           <a:xfrm>
-            <a:off x="5563235" y="2589530"/>
+            <a:off x="5563235" y="2684780"/>
             <a:ext cx="2646000" cy="0"/>
           </a:xfrm>
           <a:prstGeom prst="straightConnector1">
@@ -8019,6 +8085,310 @@
           </a:fontRef>
         </p:style>
       </p:cxnSp>
+      <p:pic>
+        <p:nvPicPr>
+          <p:cNvPr id="9" name="图片 8" descr="错误"/>
+          <p:cNvPicPr>
+            <a:picLocks noChangeAspect="1"/>
+          </p:cNvPicPr>
+          <p:nvPr/>
+        </p:nvPicPr>
+        <p:blipFill>
+          <a:blip r:embed="rId5">
+            <a:extLst>
+              <a:ext uri="{96DAC541-7B7A-43D3-8B79-37D633B846F1}">
+                <asvg:svgBlip xmlns:asvg="http://schemas.microsoft.com/office/drawing/2016/SVG/main" r:embed="rId6"/>
+              </a:ext>
+            </a:extLst>
+          </a:blip>
+          <a:stretch>
+            <a:fillRect/>
+          </a:stretch>
+        </p:blipFill>
+        <p:spPr>
+          <a:xfrm>
+            <a:off x="7771130" y="2555240"/>
+            <a:ext cx="259715" cy="259715"/>
+          </a:xfrm>
+          <a:prstGeom prst="rect">
+            <a:avLst/>
+          </a:prstGeom>
+        </p:spPr>
+      </p:pic>
+      <p:sp>
+        <p:nvSpPr>
+          <p:cNvPr id="36" name="矩形 35"/>
+          <p:cNvSpPr/>
+          <p:nvPr/>
+        </p:nvSpPr>
+        <p:spPr>
+          <a:xfrm>
+            <a:off x="1624965" y="2275840"/>
+            <a:ext cx="1211580" cy="539115"/>
+          </a:xfrm>
+          <a:prstGeom prst="rect">
+            <a:avLst/>
+          </a:prstGeom>
+          <a:noFill/>
+          <a:ln>
+            <a:solidFill>
+              <a:schemeClr val="tx1"/>
+            </a:solidFill>
+          </a:ln>
+          <a:extLst>
+            <a:ext uri="{909E8E84-426E-40DD-AFC4-6F175D3DCCD1}">
+              <a14:hiddenFill xmlns:a14="http://schemas.microsoft.com/office/drawing/2010/main">
+                <a:solidFill>
+                  <a:schemeClr val="accent1"/>
+                </a:solidFill>
+              </a14:hiddenFill>
+            </a:ext>
+          </a:extLst>
+        </p:spPr>
+        <p:style>
+          <a:lnRef idx="2">
+            <a:schemeClr val="accent1">
+              <a:lumMod val="75000"/>
+            </a:schemeClr>
+          </a:lnRef>
+          <a:fillRef idx="1">
+            <a:schemeClr val="accent1"/>
+          </a:fillRef>
+          <a:effectRef idx="0">
+            <a:srgbClr val="FFFFFF"/>
+          </a:effectRef>
+          <a:fontRef idx="minor">
+            <a:schemeClr val="lt1"/>
+          </a:fontRef>
+        </p:style>
+        <p:txBody>
+          <a:bodyPr rtlCol="0" anchor="ctr"/>
+          <a:p>
+            <a:pPr algn="ctr"/>
+            <a:r>
+              <a:rPr lang="en-US" altLang="zh-CN" b="1">
+                <a:solidFill>
+                  <a:schemeClr val="tx1"/>
+                </a:solidFill>
+                <a:latin typeface="Times New Roman" panose="02020603050405020304" charset="0"/>
+                <a:cs typeface="Times New Roman" panose="02020603050405020304" charset="0"/>
+              </a:rPr>
+              <a:t>Victim’s device</a:t>
+            </a:r>
+            <a:endParaRPr lang="en-US" altLang="zh-CN" b="1">
+              <a:solidFill>
+                <a:schemeClr val="tx1"/>
+              </a:solidFill>
+              <a:latin typeface="Times New Roman" panose="02020603050405020304" charset="0"/>
+              <a:cs typeface="Times New Roman" panose="02020603050405020304" charset="0"/>
+            </a:endParaRPr>
+          </a:p>
+        </p:txBody>
+      </p:sp>
+      <p:sp>
+        <p:nvSpPr>
+          <p:cNvPr id="37" name="矩形 36"/>
+          <p:cNvSpPr/>
+          <p:nvPr/>
+        </p:nvSpPr>
+        <p:spPr>
+          <a:xfrm>
+            <a:off x="2943225" y="3891915"/>
+            <a:ext cx="179705" cy="1209600"/>
+          </a:xfrm>
+          <a:prstGeom prst="rect">
+            <a:avLst/>
+          </a:prstGeom>
+          <a:solidFill>
+            <a:srgbClr val="4A5F7E"/>
+          </a:solidFill>
+          <a:ln>
+            <a:solidFill>
+              <a:srgbClr val="4A5F7E"/>
+            </a:solidFill>
+          </a:ln>
+        </p:spPr>
+        <p:style>
+          <a:lnRef idx="2">
+            <a:schemeClr val="accent1">
+              <a:lumMod val="75000"/>
+            </a:schemeClr>
+          </a:lnRef>
+          <a:fillRef idx="1">
+            <a:schemeClr val="accent1"/>
+          </a:fillRef>
+          <a:effectRef idx="0">
+            <a:srgbClr val="FFFFFF"/>
+          </a:effectRef>
+          <a:fontRef idx="minor">
+            <a:schemeClr val="lt1"/>
+          </a:fontRef>
+        </p:style>
+        <p:txBody>
+          <a:bodyPr rtlCol="0" anchor="ctr"/>
+          <a:p>
+            <a:pPr algn="ctr"/>
+            <a:endParaRPr lang="zh-CN" altLang="en-US">
+              <a:latin typeface="Times New Roman" panose="02020603050405020304" charset="0"/>
+              <a:cs typeface="Times New Roman" panose="02020603050405020304" charset="0"/>
+            </a:endParaRPr>
+          </a:p>
+        </p:txBody>
+      </p:sp>
+      <p:sp>
+        <p:nvSpPr>
+          <p:cNvPr id="39" name="矩形 38"/>
+          <p:cNvSpPr/>
+          <p:nvPr/>
+        </p:nvSpPr>
+        <p:spPr>
+          <a:xfrm>
+            <a:off x="1624965" y="3774440"/>
+            <a:ext cx="1211580" cy="539115"/>
+          </a:xfrm>
+          <a:prstGeom prst="rect">
+            <a:avLst/>
+          </a:prstGeom>
+          <a:noFill/>
+          <a:ln>
+            <a:solidFill>
+              <a:schemeClr val="tx1"/>
+            </a:solidFill>
+          </a:ln>
+          <a:extLst>
+            <a:ext uri="{909E8E84-426E-40DD-AFC4-6F175D3DCCD1}">
+              <a14:hiddenFill xmlns:a14="http://schemas.microsoft.com/office/drawing/2010/main">
+                <a:solidFill>
+                  <a:schemeClr val="accent1"/>
+                </a:solidFill>
+              </a14:hiddenFill>
+            </a:ext>
+          </a:extLst>
+        </p:spPr>
+        <p:style>
+          <a:lnRef idx="2">
+            <a:schemeClr val="accent1">
+              <a:lumMod val="75000"/>
+            </a:schemeClr>
+          </a:lnRef>
+          <a:fillRef idx="1">
+            <a:schemeClr val="accent1"/>
+          </a:fillRef>
+          <a:effectRef idx="0">
+            <a:srgbClr val="FFFFFF"/>
+          </a:effectRef>
+          <a:fontRef idx="minor">
+            <a:schemeClr val="lt1"/>
+          </a:fontRef>
+        </p:style>
+        <p:txBody>
+          <a:bodyPr rtlCol="0" anchor="ctr"/>
+          <a:p>
+            <a:pPr algn="ctr"/>
+            <a:r>
+              <a:rPr lang="en-US" altLang="zh-CN" b="1">
+                <a:solidFill>
+                  <a:schemeClr val="tx1"/>
+                </a:solidFill>
+                <a:latin typeface="Times New Roman" panose="02020603050405020304" charset="0"/>
+                <a:cs typeface="Times New Roman" panose="02020603050405020304" charset="0"/>
+              </a:rPr>
+              <a:t>Attacker’s device</a:t>
+            </a:r>
+            <a:endParaRPr lang="en-US" altLang="zh-CN" b="1">
+              <a:solidFill>
+                <a:schemeClr val="tx1"/>
+              </a:solidFill>
+              <a:latin typeface="Times New Roman" panose="02020603050405020304" charset="0"/>
+              <a:cs typeface="Times New Roman" panose="02020603050405020304" charset="0"/>
+            </a:endParaRPr>
+          </a:p>
+        </p:txBody>
+      </p:sp>
+      <p:sp>
+        <p:nvSpPr>
+          <p:cNvPr id="40" name="矩形 39"/>
+          <p:cNvSpPr/>
+          <p:nvPr/>
+        </p:nvSpPr>
+        <p:spPr>
+          <a:xfrm>
+            <a:off x="8298000" y="3891915"/>
+            <a:ext cx="180000" cy="1209600"/>
+          </a:xfrm>
+          <a:prstGeom prst="rect">
+            <a:avLst/>
+          </a:prstGeom>
+          <a:solidFill>
+            <a:schemeClr val="accent1">
+              <a:lumMod val="75000"/>
+            </a:schemeClr>
+          </a:solidFill>
+          <a:ln>
+            <a:solidFill>
+              <a:schemeClr val="accent1">
+                <a:lumMod val="75000"/>
+              </a:schemeClr>
+            </a:solidFill>
+          </a:ln>
+        </p:spPr>
+        <p:style>
+          <a:lnRef idx="2">
+            <a:schemeClr val="accent1">
+              <a:lumMod val="75000"/>
+            </a:schemeClr>
+          </a:lnRef>
+          <a:fillRef idx="1">
+            <a:schemeClr val="accent1"/>
+          </a:fillRef>
+          <a:effectRef idx="0">
+            <a:srgbClr val="FFFFFF"/>
+          </a:effectRef>
+          <a:fontRef idx="minor">
+            <a:schemeClr val="lt1"/>
+          </a:fontRef>
+        </p:style>
+        <p:txBody>
+          <a:bodyPr rtlCol="0" anchor="ctr"/>
+          <a:p>
+            <a:pPr algn="ctr"/>
+            <a:endParaRPr lang="zh-CN" altLang="en-US">
+              <a:latin typeface="Times New Roman" panose="02020603050405020304" charset="0"/>
+              <a:cs typeface="Times New Roman" panose="02020603050405020304" charset="0"/>
+            </a:endParaRPr>
+          </a:p>
+        </p:txBody>
+      </p:sp>
+      <p:pic>
+        <p:nvPicPr>
+          <p:cNvPr id="42" name="图片 41" descr="对"/>
+          <p:cNvPicPr>
+            <a:picLocks noChangeAspect="1"/>
+          </p:cNvPicPr>
+          <p:nvPr/>
+        </p:nvPicPr>
+        <p:blipFill>
+          <a:blip r:embed="rId7">
+            <a:extLst>
+              <a:ext uri="{96DAC541-7B7A-43D3-8B79-37D633B846F1}">
+                <asvg:svgBlip xmlns:asvg="http://schemas.microsoft.com/office/drawing/2016/SVG/main" r:embed="rId8"/>
+              </a:ext>
+            </a:extLst>
+          </a:blip>
+          <a:stretch>
+            <a:fillRect/>
+          </a:stretch>
+        </p:blipFill>
+        <p:spPr>
+          <a:xfrm>
+            <a:off x="7756525" y="4458335"/>
+            <a:ext cx="353060" cy="353060"/>
+          </a:xfrm>
+          <a:prstGeom prst="rect">
+            <a:avLst/>
+          </a:prstGeom>
+        </p:spPr>
+      </p:pic>
     </p:spTree>
   </p:cSld>
   <p:clrMapOvr>
@@ -8036,271 +8406,182 @@
         <p:cNvGrpSpPr/>
         <p:nvPr/>
       </p:nvGrpSpPr>
-      <p:grpSpPr>
-        <a:xfrm>
-          <a:off x="0" y="0"/>
-          <a:ext cx="0" cy="0"/>
-          <a:chOff x="0" y="0"/>
-          <a:chExt cx="0" cy="0"/>
-        </a:xfrm>
-      </p:grpSpPr>
+      <p:grpSpPr/>
       <p:grpSp>
         <p:nvGrpSpPr>
-          <p:cNvPr id="5" name="组合 4">
-            <a:extLst>
-              <a:ext uri="{FF2B5EF4-FFF2-40B4-BE49-F238E27FC236}">
-                <a16:creationId xmlns:a16="http://schemas.microsoft.com/office/drawing/2014/main" id="{9E0B5AEB-E8BD-451A-8FDB-74DDED1A7D30}"/>
-              </a:ext>
-            </a:extLst>
-          </p:cNvPr>
+          <p:cNvPr id="14" name="组合 13"/>
           <p:cNvGrpSpPr/>
           <p:nvPr/>
         </p:nvGrpSpPr>
         <p:grpSpPr>
           <a:xfrm>
-            <a:off x="3242310" y="196850"/>
-            <a:ext cx="5601653" cy="5035550"/>
-            <a:chOff x="3242310" y="196850"/>
-            <a:chExt cx="5601653" cy="5035550"/>
+            <a:off x="4953000" y="196850"/>
+            <a:ext cx="5035550" cy="5035550"/>
+            <a:chOff x="920" y="310"/>
+            <a:chExt cx="7930" cy="7930"/>
           </a:xfrm>
         </p:grpSpPr>
-        <p:grpSp>
-          <p:nvGrpSpPr>
-            <p:cNvPr id="4" name="组合 3">
-              <a:extLst>
-                <a:ext uri="{FF2B5EF4-FFF2-40B4-BE49-F238E27FC236}">
-                  <a16:creationId xmlns:a16="http://schemas.microsoft.com/office/drawing/2014/main" id="{0D7F48B1-6DC2-45A5-98B6-22422F391860}"/>
-                </a:ext>
-              </a:extLst>
-            </p:cNvPr>
-            <p:cNvGrpSpPr/>
+        <p:pic>
+          <p:nvPicPr>
+            <p:cNvPr id="15" name="图片 14" descr="ef56901b-e67b-48c3-91cc-2ffb6efbef1e"/>
+            <p:cNvPicPr>
+              <a:picLocks noChangeAspect="1"/>
+            </p:cNvPicPr>
             <p:nvPr/>
-          </p:nvGrpSpPr>
-          <p:grpSpPr>
+          </p:nvPicPr>
+          <p:blipFill>
+            <a:blip r:embed="rId1"/>
+            <a:stretch>
+              <a:fillRect/>
+            </a:stretch>
+          </p:blipFill>
+          <p:spPr>
             <a:xfrm>
-              <a:off x="3242310" y="196850"/>
-              <a:ext cx="3495040" cy="5035550"/>
-              <a:chOff x="3242310" y="196850"/>
-              <a:chExt cx="3495040" cy="5035550"/>
+              <a:off x="920" y="310"/>
+              <a:ext cx="7930" cy="7930"/>
             </a:xfrm>
-          </p:grpSpPr>
-          <p:grpSp>
-            <p:nvGrpSpPr>
-              <p:cNvPr id="2" name="组合 1">
-                <a:extLst>
-                  <a:ext uri="{FF2B5EF4-FFF2-40B4-BE49-F238E27FC236}">
-                    <a16:creationId xmlns:a16="http://schemas.microsoft.com/office/drawing/2014/main" id="{0890D905-445C-4881-A01B-8C7D34DE6123}"/>
-                  </a:ext>
-                </a:extLst>
-              </p:cNvPr>
-              <p:cNvGrpSpPr/>
-              <p:nvPr/>
-            </p:nvGrpSpPr>
-            <p:grpSpPr>
-              <a:xfrm>
-                <a:off x="3242310" y="196850"/>
-                <a:ext cx="3495040" cy="5035550"/>
-                <a:chOff x="3242310" y="196850"/>
-                <a:chExt cx="3495040" cy="5035550"/>
-              </a:xfrm>
-            </p:grpSpPr>
-            <p:pic>
-              <p:nvPicPr>
-                <p:cNvPr id="9" name="图片 8" descr="ef56901b-e67b-48c3-91cc-2ffb6efbef1e"/>
-                <p:cNvPicPr>
-                  <a:picLocks noChangeAspect="1"/>
-                </p:cNvPicPr>
-                <p:nvPr/>
-              </p:nvPicPr>
-              <p:blipFill rotWithShape="1">
-                <a:blip r:embed="rId2"/>
-                <a:srcRect l="30593"/>
-                <a:stretch/>
-              </p:blipFill>
-              <p:spPr>
-                <a:xfrm>
-                  <a:off x="3242310" y="196850"/>
-                  <a:ext cx="3495040" cy="5035550"/>
-                </a:xfrm>
-                <a:prstGeom prst="rect">
-                  <a:avLst/>
-                </a:prstGeom>
-              </p:spPr>
-            </p:pic>
-            <p:pic>
-              <p:nvPicPr>
-                <p:cNvPr id="10" name="图片 9" descr="D:/实验研究/论文研究/支付协议/支付协议/支付模型ppt/2.jpg2"/>
-                <p:cNvPicPr>
-                  <a:picLocks noChangeAspect="1"/>
-                </p:cNvPicPr>
-                <p:nvPr/>
-              </p:nvPicPr>
-              <p:blipFill>
-                <a:blip r:embed="rId3"/>
-                <a:srcRect l="-2593" t="-2073" r="-2963" b="-1388"/>
-                <a:stretch>
-                  <a:fillRect/>
-                </a:stretch>
-              </p:blipFill>
-              <p:spPr>
-                <a:xfrm>
-                  <a:off x="3308350" y="790575"/>
-                  <a:ext cx="1809750" cy="3740150"/>
-                </a:xfrm>
-                <a:prstGeom prst="roundRect">
-                  <a:avLst/>
-                </a:prstGeom>
-              </p:spPr>
-            </p:pic>
-          </p:grpSp>
-          <p:pic>
-            <p:nvPicPr>
-              <p:cNvPr id="39" name="图片 38" descr="D:/实验研究/论文研究/支付协议/支付协议/支付模型ppt/序号1-01.svg序号1-01"/>
-              <p:cNvPicPr>
-                <a:picLocks noChangeAspect="1"/>
-              </p:cNvPicPr>
-              <p:nvPr/>
-            </p:nvPicPr>
-            <p:blipFill>
-              <a:blip r:embed="rId4">
-                <a:extLst>
-                  <a:ext uri="{96DAC541-7B7A-43D3-8B79-37D633B846F1}">
-                    <asvg:svgBlip xmlns:asvg="http://schemas.microsoft.com/office/drawing/2016/SVG/main" r:embed="rId5"/>
-                  </a:ext>
-                </a:extLst>
-              </a:blip>
-              <a:srcRect t="23" b="23"/>
-              <a:stretch>
-                <a:fillRect/>
-              </a:stretch>
-            </p:blipFill>
-            <p:spPr>
-              <a:xfrm>
-                <a:off x="5284788" y="908639"/>
-                <a:ext cx="307975" cy="307975"/>
-              </a:xfrm>
-              <a:prstGeom prst="rect">
-                <a:avLst/>
-              </a:prstGeom>
-            </p:spPr>
-          </p:pic>
-        </p:grpSp>
-        <p:grpSp>
-          <p:nvGrpSpPr>
-            <p:cNvPr id="3" name="组合 2">
-              <a:extLst>
-                <a:ext uri="{FF2B5EF4-FFF2-40B4-BE49-F238E27FC236}">
-                  <a16:creationId xmlns:a16="http://schemas.microsoft.com/office/drawing/2014/main" id="{40B2E880-06F0-4000-9890-CDA6ADA026FC}"/>
-                </a:ext>
-              </a:extLst>
-            </p:cNvPr>
-            <p:cNvGrpSpPr/>
+            <a:prstGeom prst="rect">
+              <a:avLst/>
+            </a:prstGeom>
+          </p:spPr>
+        </p:pic>
+        <p:pic>
+          <p:nvPicPr>
+            <p:cNvPr id="16" name="图片 15"/>
+            <p:cNvPicPr>
+              <a:picLocks noChangeAspect="1"/>
+            </p:cNvPicPr>
             <p:nvPr/>
-          </p:nvGrpSpPr>
-          <p:grpSpPr>
+          </p:nvPicPr>
+          <p:blipFill>
+            <a:blip r:embed="rId2"/>
+            <a:srcRect l="-3754" t="-1049" r="-3228" b="-1375"/>
+            <a:stretch>
+              <a:fillRect/>
+            </a:stretch>
+          </p:blipFill>
+          <p:spPr>
             <a:xfrm>
-              <a:off x="4953000" y="196850"/>
-              <a:ext cx="3890963" cy="5035550"/>
-              <a:chOff x="4953000" y="196850"/>
-              <a:chExt cx="3890963" cy="5035550"/>
+              <a:off x="3440" y="1324"/>
+              <a:ext cx="2850" cy="5811"/>
             </a:xfrm>
-          </p:grpSpPr>
-          <p:grpSp>
-            <p:nvGrpSpPr>
-              <p:cNvPr id="14" name="组合 13"/>
-              <p:cNvGrpSpPr/>
-              <p:nvPr/>
-            </p:nvGrpSpPr>
-            <p:grpSpPr>
-              <a:xfrm>
-                <a:off x="4953000" y="196850"/>
-                <a:ext cx="3495040" cy="5035550"/>
-                <a:chOff x="920" y="310"/>
-                <a:chExt cx="5504" cy="7930"/>
-              </a:xfrm>
-            </p:grpSpPr>
-            <p:pic>
-              <p:nvPicPr>
-                <p:cNvPr id="15" name="图片 14" descr="ef56901b-e67b-48c3-91cc-2ffb6efbef1e"/>
-                <p:cNvPicPr>
-                  <a:picLocks noChangeAspect="1"/>
-                </p:cNvPicPr>
-                <p:nvPr/>
-              </p:nvPicPr>
-              <p:blipFill rotWithShape="1">
-                <a:blip r:embed="rId2"/>
-                <a:srcRect r="30593"/>
-                <a:stretch/>
-              </p:blipFill>
-              <p:spPr>
-                <a:xfrm>
-                  <a:off x="920" y="310"/>
-                  <a:ext cx="5504" cy="7930"/>
-                </a:xfrm>
-                <a:prstGeom prst="rect">
-                  <a:avLst/>
-                </a:prstGeom>
-              </p:spPr>
-            </p:pic>
-            <p:pic>
-              <p:nvPicPr>
-                <p:cNvPr id="16" name="图片 15"/>
-                <p:cNvPicPr>
-                  <a:picLocks noChangeAspect="1"/>
-                </p:cNvPicPr>
-                <p:nvPr/>
-              </p:nvPicPr>
-              <p:blipFill>
-                <a:blip r:embed="rId6"/>
-                <a:srcRect l="-3754" t="-1049" r="-3228" b="-1375"/>
-                <a:stretch>
-                  <a:fillRect/>
-                </a:stretch>
-              </p:blipFill>
-              <p:spPr>
-                <a:xfrm>
-                  <a:off x="3440" y="1324"/>
-                  <a:ext cx="2850" cy="5811"/>
-                </a:xfrm>
-                <a:prstGeom prst="roundRect">
-                  <a:avLst/>
-                </a:prstGeom>
-              </p:spPr>
-            </p:pic>
-          </p:grpSp>
-          <p:pic>
-            <p:nvPicPr>
-              <p:cNvPr id="40" name="图片 39" descr="D:/实验研究/论文研究/支付协议/支付协议/支付模型ppt/序号2-01.svg序号2-01"/>
-              <p:cNvPicPr>
-                <a:picLocks noChangeAspect="1"/>
-              </p:cNvPicPr>
-              <p:nvPr/>
-            </p:nvPicPr>
-            <p:blipFill>
-              <a:blip r:embed="rId7">
-                <a:extLst>
-                  <a:ext uri="{96DAC541-7B7A-43D3-8B79-37D633B846F1}">
-                    <asvg:svgBlip xmlns:asvg="http://schemas.microsoft.com/office/drawing/2016/SVG/main" r:embed="rId8"/>
-                  </a:ext>
-                </a:extLst>
-              </a:blip>
-              <a:srcRect t="23" b="23"/>
-              <a:stretch>
-                <a:fillRect/>
-              </a:stretch>
-            </p:blipFill>
-            <p:spPr>
-              <a:xfrm>
-                <a:off x="8535988" y="908639"/>
-                <a:ext cx="307975" cy="307975"/>
-              </a:xfrm>
-              <a:prstGeom prst="rect">
-                <a:avLst/>
-              </a:prstGeom>
-            </p:spPr>
-          </p:pic>
-        </p:grpSp>
+            <a:prstGeom prst="roundRect">
+              <a:avLst/>
+            </a:prstGeom>
+          </p:spPr>
+        </p:pic>
       </p:grpSp>
+      <p:pic>
+        <p:nvPicPr>
+          <p:cNvPr id="9" name="图片 8" descr="ef56901b-e67b-48c3-91cc-2ffb6efbef1e"/>
+          <p:cNvPicPr>
+            <a:picLocks noChangeAspect="1"/>
+          </p:cNvPicPr>
+          <p:nvPr/>
+        </p:nvPicPr>
+        <p:blipFill>
+          <a:blip r:embed="rId1"/>
+          <a:stretch>
+            <a:fillRect/>
+          </a:stretch>
+        </p:blipFill>
+        <p:spPr>
+          <a:xfrm>
+            <a:off x="1701800" y="196850"/>
+            <a:ext cx="5035550" cy="5035550"/>
+          </a:xfrm>
+          <a:prstGeom prst="rect">
+            <a:avLst/>
+          </a:prstGeom>
+        </p:spPr>
+      </p:pic>
+      <p:pic>
+        <p:nvPicPr>
+          <p:cNvPr id="10" name="图片 9" descr="D:/实验研究/论文研究/支付协议/支付协议/支付模型ppt/2.jpg2"/>
+          <p:cNvPicPr>
+            <a:picLocks noChangeAspect="1"/>
+          </p:cNvPicPr>
+          <p:nvPr/>
+        </p:nvPicPr>
+        <p:blipFill>
+          <a:blip r:embed="rId3"/>
+          <a:srcRect l="-2593" t="-2073" r="-2963" b="-1388"/>
+          <a:stretch>
+            <a:fillRect/>
+          </a:stretch>
+        </p:blipFill>
+        <p:spPr>
+          <a:xfrm>
+            <a:off x="3308350" y="790575"/>
+            <a:ext cx="1809750" cy="3740150"/>
+          </a:xfrm>
+          <a:prstGeom prst="roundRect">
+            <a:avLst/>
+          </a:prstGeom>
+        </p:spPr>
+      </p:pic>
+      <p:pic>
+        <p:nvPicPr>
+          <p:cNvPr id="39" name="图片 38" descr="D:/实验研究/论文研究/支付协议/支付协议/支付模型ppt/序号1-01.svg序号1-01"/>
+          <p:cNvPicPr>
+            <a:picLocks noChangeAspect="1"/>
+          </p:cNvPicPr>
+          <p:nvPr/>
+        </p:nvPicPr>
+        <p:blipFill>
+          <a:blip r:embed="rId4">
+            <a:extLst>
+              <a:ext uri="{96DAC541-7B7A-43D3-8B79-37D633B846F1}">
+                <asvg:svgBlip xmlns:asvg="http://schemas.microsoft.com/office/drawing/2016/SVG/main" r:embed="rId5"/>
+              </a:ext>
+            </a:extLst>
+          </a:blip>
+          <a:srcRect t="23" b="23"/>
+          <a:stretch>
+            <a:fillRect/>
+          </a:stretch>
+        </p:blipFill>
+        <p:spPr>
+          <a:xfrm>
+            <a:off x="5327650" y="1313815"/>
+            <a:ext cx="360000" cy="360000"/>
+          </a:xfrm>
+          <a:prstGeom prst="rect">
+            <a:avLst/>
+          </a:prstGeom>
+        </p:spPr>
+      </p:pic>
+      <p:pic>
+        <p:nvPicPr>
+          <p:cNvPr id="40" name="图片 39" descr="D:/实验研究/论文研究/支付协议/支付协议/支付模型ppt/序号2-01.svg序号2-01"/>
+          <p:cNvPicPr>
+            <a:picLocks noChangeAspect="1"/>
+          </p:cNvPicPr>
+          <p:nvPr/>
+        </p:nvPicPr>
+        <p:blipFill>
+          <a:blip r:embed="rId6">
+            <a:extLst>
+              <a:ext uri="{96DAC541-7B7A-43D3-8B79-37D633B846F1}">
+                <asvg:svgBlip xmlns:asvg="http://schemas.microsoft.com/office/drawing/2016/SVG/main" r:embed="rId7"/>
+              </a:ext>
+            </a:extLst>
+          </a:blip>
+          <a:srcRect t="23" b="23"/>
+          <a:stretch>
+            <a:fillRect/>
+          </a:stretch>
+        </p:blipFill>
+        <p:spPr>
+          <a:xfrm>
+            <a:off x="8724265" y="1313815"/>
+            <a:ext cx="360000" cy="360000"/>
+          </a:xfrm>
+          <a:prstGeom prst="rect">
+            <a:avLst/>
+          </a:prstGeom>
+        </p:spPr>
+      </p:pic>
     </p:spTree>
   </p:cSld>
   <p:clrMapOvr>
@@ -8335,13 +8616,13 @@
           <p:nvPr/>
         </p:nvPicPr>
         <p:blipFill>
-          <a:blip r:embed="rId2" cstate="print">
+          <a:blip r:embed="rId1" cstate="print">
             <a:extLst>
               <a:ext uri="{28A0092B-C50C-407E-A947-70E740481C1C}">
                 <a14:useLocalDpi xmlns:a14="http://schemas.microsoft.com/office/drawing/2010/main" val="0"/>
               </a:ext>
               <a:ext uri="{96DAC541-7B7A-43D3-8B79-37D633B846F1}">
-                <asvg:svgBlip xmlns:asvg="http://schemas.microsoft.com/office/drawing/2016/SVG/main" r:embed="rId3"/>
+                <asvg:svgBlip xmlns:asvg="http://schemas.microsoft.com/office/drawing/2016/SVG/main" r:embed="rId2"/>
               </a:ext>
             </a:extLst>
           </a:blip>
@@ -8368,13 +8649,13 @@
           <p:nvPr/>
         </p:nvPicPr>
         <p:blipFill>
-          <a:blip r:embed="rId4" cstate="print">
+          <a:blip r:embed="rId3" cstate="print">
             <a:extLst>
               <a:ext uri="{28A0092B-C50C-407E-A947-70E740481C1C}">
                 <a14:useLocalDpi xmlns:a14="http://schemas.microsoft.com/office/drawing/2010/main" val="0"/>
               </a:ext>
               <a:ext uri="{96DAC541-7B7A-43D3-8B79-37D633B846F1}">
-                <asvg:svgBlip xmlns:asvg="http://schemas.microsoft.com/office/drawing/2016/SVG/main" r:embed="rId5"/>
+                <asvg:svgBlip xmlns:asvg="http://schemas.microsoft.com/office/drawing/2016/SVG/main" r:embed="rId4"/>
               </a:ext>
             </a:extLst>
           </a:blip>
@@ -8448,13 +8729,13 @@
           <p:nvPr/>
         </p:nvPicPr>
         <p:blipFill>
-          <a:blip r:embed="rId6" cstate="print">
+          <a:blip r:embed="rId5" cstate="print">
             <a:extLst>
               <a:ext uri="{28A0092B-C50C-407E-A947-70E740481C1C}">
                 <a14:useLocalDpi xmlns:a14="http://schemas.microsoft.com/office/drawing/2010/main" val="0"/>
               </a:ext>
               <a:ext uri="{96DAC541-7B7A-43D3-8B79-37D633B846F1}">
-                <asvg:svgBlip xmlns:asvg="http://schemas.microsoft.com/office/drawing/2016/SVG/main" r:embed="rId7"/>
+                <asvg:svgBlip xmlns:asvg="http://schemas.microsoft.com/office/drawing/2016/SVG/main" r:embed="rId6"/>
               </a:ext>
             </a:extLst>
           </a:blip>
@@ -8481,13 +8762,13 @@
           <p:nvPr/>
         </p:nvPicPr>
         <p:blipFill>
-          <a:blip r:embed="rId8" cstate="print">
+          <a:blip r:embed="rId7" cstate="print">
             <a:extLst>
               <a:ext uri="{28A0092B-C50C-407E-A947-70E740481C1C}">
                 <a14:useLocalDpi xmlns:a14="http://schemas.microsoft.com/office/drawing/2010/main" val="0"/>
               </a:ext>
               <a:ext uri="{96DAC541-7B7A-43D3-8B79-37D633B846F1}">
-                <asvg:svgBlip xmlns:asvg="http://schemas.microsoft.com/office/drawing/2016/SVG/main" r:embed="rId9"/>
+                <asvg:svgBlip xmlns:asvg="http://schemas.microsoft.com/office/drawing/2016/SVG/main" r:embed="rId8"/>
               </a:ext>
             </a:extLst>
           </a:blip>
@@ -8514,13 +8795,13 @@
           <p:nvPr/>
         </p:nvPicPr>
         <p:blipFill>
-          <a:blip r:embed="rId10" cstate="print">
+          <a:blip r:embed="rId9" cstate="print">
             <a:extLst>
               <a:ext uri="{28A0092B-C50C-407E-A947-70E740481C1C}">
                 <a14:useLocalDpi xmlns:a14="http://schemas.microsoft.com/office/drawing/2010/main" val="0"/>
               </a:ext>
               <a:ext uri="{96DAC541-7B7A-43D3-8B79-37D633B846F1}">
-                <asvg:svgBlip xmlns:asvg="http://schemas.microsoft.com/office/drawing/2016/SVG/main" r:embed="rId11"/>
+                <asvg:svgBlip xmlns:asvg="http://schemas.microsoft.com/office/drawing/2016/SVG/main" r:embed="rId10"/>
               </a:ext>
             </a:extLst>
           </a:blip>
@@ -8547,13 +8828,13 @@
           <p:nvPr/>
         </p:nvPicPr>
         <p:blipFill>
-          <a:blip r:embed="rId12" cstate="print">
+          <a:blip r:embed="rId11" cstate="print">
             <a:extLst>
               <a:ext uri="{28A0092B-C50C-407E-A947-70E740481C1C}">
                 <a14:useLocalDpi xmlns:a14="http://schemas.microsoft.com/office/drawing/2010/main" val="0"/>
               </a:ext>
               <a:ext uri="{96DAC541-7B7A-43D3-8B79-37D633B846F1}">
-                <asvg:svgBlip xmlns:asvg="http://schemas.microsoft.com/office/drawing/2016/SVG/main" r:embed="rId13"/>
+                <asvg:svgBlip xmlns:asvg="http://schemas.microsoft.com/office/drawing/2016/SVG/main" r:embed="rId12"/>
               </a:ext>
             </a:extLst>
           </a:blip>
@@ -8580,13 +8861,13 @@
           <p:nvPr/>
         </p:nvPicPr>
         <p:blipFill>
-          <a:blip r:embed="rId10" cstate="print">
+          <a:blip r:embed="rId9" cstate="print">
             <a:extLst>
               <a:ext uri="{28A0092B-C50C-407E-A947-70E740481C1C}">
                 <a14:useLocalDpi xmlns:a14="http://schemas.microsoft.com/office/drawing/2010/main" val="0"/>
               </a:ext>
               <a:ext uri="{96DAC541-7B7A-43D3-8B79-37D633B846F1}">
-                <asvg:svgBlip xmlns:asvg="http://schemas.microsoft.com/office/drawing/2016/SVG/main" r:embed="rId11"/>
+                <asvg:svgBlip xmlns:asvg="http://schemas.microsoft.com/office/drawing/2016/SVG/main" r:embed="rId10"/>
               </a:ext>
             </a:extLst>
           </a:blip>
@@ -8613,13 +8894,13 @@
           <p:nvPr/>
         </p:nvPicPr>
         <p:blipFill>
-          <a:blip r:embed="rId14" cstate="print">
+          <a:blip r:embed="rId13" cstate="print">
             <a:extLst>
               <a:ext uri="{28A0092B-C50C-407E-A947-70E740481C1C}">
                 <a14:useLocalDpi xmlns:a14="http://schemas.microsoft.com/office/drawing/2010/main" val="0"/>
               </a:ext>
               <a:ext uri="{96DAC541-7B7A-43D3-8B79-37D633B846F1}">
-                <asvg:svgBlip xmlns:asvg="http://schemas.microsoft.com/office/drawing/2016/SVG/main" r:embed="rId15"/>
+                <asvg:svgBlip xmlns:asvg="http://schemas.microsoft.com/office/drawing/2016/SVG/main" r:embed="rId14"/>
               </a:ext>
             </a:extLst>
           </a:blip>
@@ -9252,13 +9533,13 @@
           <p:nvPr/>
         </p:nvPicPr>
         <p:blipFill>
-          <a:blip r:embed="rId2" cstate="print">
+          <a:blip r:embed="rId1" cstate="print">
             <a:extLst>
               <a:ext uri="{28A0092B-C50C-407E-A947-70E740481C1C}">
                 <a14:useLocalDpi xmlns:a14="http://schemas.microsoft.com/office/drawing/2010/main" val="0"/>
               </a:ext>
               <a:ext uri="{96DAC541-7B7A-43D3-8B79-37D633B846F1}">
-                <asvg:svgBlip xmlns:asvg="http://schemas.microsoft.com/office/drawing/2016/SVG/main" r:embed="rId3"/>
+                <asvg:svgBlip xmlns:asvg="http://schemas.microsoft.com/office/drawing/2016/SVG/main" r:embed="rId2"/>
               </a:ext>
             </a:extLst>
           </a:blip>
@@ -9285,13 +9566,13 @@
           <p:nvPr/>
         </p:nvPicPr>
         <p:blipFill>
-          <a:blip r:embed="rId4" cstate="print">
+          <a:blip r:embed="rId3" cstate="print">
             <a:extLst>
               <a:ext uri="{28A0092B-C50C-407E-A947-70E740481C1C}">
                 <a14:useLocalDpi xmlns:a14="http://schemas.microsoft.com/office/drawing/2010/main" val="0"/>
               </a:ext>
               <a:ext uri="{96DAC541-7B7A-43D3-8B79-37D633B846F1}">
-                <asvg:svgBlip xmlns:asvg="http://schemas.microsoft.com/office/drawing/2016/SVG/main" r:embed="rId5"/>
+                <asvg:svgBlip xmlns:asvg="http://schemas.microsoft.com/office/drawing/2016/SVG/main" r:embed="rId4"/>
               </a:ext>
             </a:extLst>
           </a:blip>
@@ -9365,13 +9646,13 @@
           <p:nvPr/>
         </p:nvPicPr>
         <p:blipFill>
-          <a:blip r:embed="rId6" cstate="print">
+          <a:blip r:embed="rId5" cstate="print">
             <a:extLst>
               <a:ext uri="{28A0092B-C50C-407E-A947-70E740481C1C}">
                 <a14:useLocalDpi xmlns:a14="http://schemas.microsoft.com/office/drawing/2010/main" val="0"/>
               </a:ext>
               <a:ext uri="{96DAC541-7B7A-43D3-8B79-37D633B846F1}">
-                <asvg:svgBlip xmlns:asvg="http://schemas.microsoft.com/office/drawing/2016/SVG/main" r:embed="rId7"/>
+                <asvg:svgBlip xmlns:asvg="http://schemas.microsoft.com/office/drawing/2016/SVG/main" r:embed="rId6"/>
               </a:ext>
             </a:extLst>
           </a:blip>
@@ -9398,13 +9679,13 @@
           <p:nvPr/>
         </p:nvPicPr>
         <p:blipFill>
-          <a:blip r:embed="rId8" cstate="print">
+          <a:blip r:embed="rId7" cstate="print">
             <a:extLst>
               <a:ext uri="{28A0092B-C50C-407E-A947-70E740481C1C}">
                 <a14:useLocalDpi xmlns:a14="http://schemas.microsoft.com/office/drawing/2010/main" val="0"/>
               </a:ext>
               <a:ext uri="{96DAC541-7B7A-43D3-8B79-37D633B846F1}">
-                <asvg:svgBlip xmlns:asvg="http://schemas.microsoft.com/office/drawing/2016/SVG/main" r:embed="rId9"/>
+                <asvg:svgBlip xmlns:asvg="http://schemas.microsoft.com/office/drawing/2016/SVG/main" r:embed="rId8"/>
               </a:ext>
             </a:extLst>
           </a:blip>
@@ -9431,13 +9712,13 @@
           <p:nvPr/>
         </p:nvPicPr>
         <p:blipFill>
-          <a:blip r:embed="rId10" cstate="print">
+          <a:blip r:embed="rId9" cstate="print">
             <a:extLst>
               <a:ext uri="{28A0092B-C50C-407E-A947-70E740481C1C}">
                 <a14:useLocalDpi xmlns:a14="http://schemas.microsoft.com/office/drawing/2010/main" val="0"/>
               </a:ext>
               <a:ext uri="{96DAC541-7B7A-43D3-8B79-37D633B846F1}">
-                <asvg:svgBlip xmlns:asvg="http://schemas.microsoft.com/office/drawing/2016/SVG/main" r:embed="rId11"/>
+                <asvg:svgBlip xmlns:asvg="http://schemas.microsoft.com/office/drawing/2016/SVG/main" r:embed="rId10"/>
               </a:ext>
             </a:extLst>
           </a:blip>
@@ -9464,13 +9745,13 @@
           <p:nvPr/>
         </p:nvPicPr>
         <p:blipFill>
-          <a:blip r:embed="rId12" cstate="print">
+          <a:blip r:embed="rId11" cstate="print">
             <a:extLst>
               <a:ext uri="{28A0092B-C50C-407E-A947-70E740481C1C}">
                 <a14:useLocalDpi xmlns:a14="http://schemas.microsoft.com/office/drawing/2010/main" val="0"/>
               </a:ext>
               <a:ext uri="{96DAC541-7B7A-43D3-8B79-37D633B846F1}">
-                <asvg:svgBlip xmlns:asvg="http://schemas.microsoft.com/office/drawing/2016/SVG/main" r:embed="rId13"/>
+                <asvg:svgBlip xmlns:asvg="http://schemas.microsoft.com/office/drawing/2016/SVG/main" r:embed="rId12"/>
               </a:ext>
             </a:extLst>
           </a:blip>
@@ -9497,13 +9778,13 @@
           <p:nvPr/>
         </p:nvPicPr>
         <p:blipFill>
-          <a:blip r:embed="rId10" cstate="print">
+          <a:blip r:embed="rId9" cstate="print">
             <a:extLst>
               <a:ext uri="{28A0092B-C50C-407E-A947-70E740481C1C}">
                 <a14:useLocalDpi xmlns:a14="http://schemas.microsoft.com/office/drawing/2010/main" val="0"/>
               </a:ext>
               <a:ext uri="{96DAC541-7B7A-43D3-8B79-37D633B846F1}">
-                <asvg:svgBlip xmlns:asvg="http://schemas.microsoft.com/office/drawing/2016/SVG/main" r:embed="rId11"/>
+                <asvg:svgBlip xmlns:asvg="http://schemas.microsoft.com/office/drawing/2016/SVG/main" r:embed="rId10"/>
               </a:ext>
             </a:extLst>
           </a:blip>
@@ -9530,13 +9811,13 @@
           <p:nvPr/>
         </p:nvPicPr>
         <p:blipFill>
-          <a:blip r:embed="rId14" cstate="print">
+          <a:blip r:embed="rId13" cstate="print">
             <a:extLst>
               <a:ext uri="{28A0092B-C50C-407E-A947-70E740481C1C}">
                 <a14:useLocalDpi xmlns:a14="http://schemas.microsoft.com/office/drawing/2010/main" val="0"/>
               </a:ext>
               <a:ext uri="{96DAC541-7B7A-43D3-8B79-37D633B846F1}">
-                <asvg:svgBlip xmlns:asvg="http://schemas.microsoft.com/office/drawing/2016/SVG/main" r:embed="rId15"/>
+                <asvg:svgBlip xmlns:asvg="http://schemas.microsoft.com/office/drawing/2016/SVG/main" r:embed="rId14"/>
               </a:ext>
             </a:extLst>
           </a:blip>
@@ -9899,10 +10180,10 @@
           <p:nvPr/>
         </p:nvPicPr>
         <p:blipFill>
-          <a:blip r:embed="rId16">
+          <a:blip r:embed="rId15">
             <a:extLst>
               <a:ext uri="{96DAC541-7B7A-43D3-8B79-37D633B846F1}">
-                <asvg:svgBlip xmlns:asvg="http://schemas.microsoft.com/office/drawing/2016/SVG/main" r:embed="rId17"/>
+                <asvg:svgBlip xmlns:asvg="http://schemas.microsoft.com/office/drawing/2016/SVG/main" r:embed="rId16"/>
               </a:ext>
             </a:extLst>
           </a:blip>
@@ -9990,13 +10271,13 @@
           <p:nvPr/>
         </p:nvPicPr>
         <p:blipFill>
-          <a:blip r:embed="rId2" cstate="print">
+          <a:blip r:embed="rId1" cstate="print">
             <a:extLst>
               <a:ext uri="{28A0092B-C50C-407E-A947-70E740481C1C}">
                 <a14:useLocalDpi xmlns:a14="http://schemas.microsoft.com/office/drawing/2010/main" val="0"/>
               </a:ext>
               <a:ext uri="{96DAC541-7B7A-43D3-8B79-37D633B846F1}">
-                <asvg:svgBlip xmlns:asvg="http://schemas.microsoft.com/office/drawing/2016/SVG/main" r:embed="rId3"/>
+                <asvg:svgBlip xmlns:asvg="http://schemas.microsoft.com/office/drawing/2016/SVG/main" r:embed="rId2"/>
               </a:ext>
             </a:extLst>
           </a:blip>
@@ -10023,13 +10304,13 @@
           <p:nvPr/>
         </p:nvPicPr>
         <p:blipFill>
-          <a:blip r:embed="rId4" cstate="print">
+          <a:blip r:embed="rId3" cstate="print">
             <a:extLst>
               <a:ext uri="{28A0092B-C50C-407E-A947-70E740481C1C}">
                 <a14:useLocalDpi xmlns:a14="http://schemas.microsoft.com/office/drawing/2010/main" val="0"/>
               </a:ext>
               <a:ext uri="{96DAC541-7B7A-43D3-8B79-37D633B846F1}">
-                <asvg:svgBlip xmlns:asvg="http://schemas.microsoft.com/office/drawing/2016/SVG/main" r:embed="rId5"/>
+                <asvg:svgBlip xmlns:asvg="http://schemas.microsoft.com/office/drawing/2016/SVG/main" r:embed="rId4"/>
               </a:ext>
             </a:extLst>
           </a:blip>
@@ -10103,13 +10384,13 @@
           <p:nvPr/>
         </p:nvPicPr>
         <p:blipFill>
-          <a:blip r:embed="rId6" cstate="print">
+          <a:blip r:embed="rId5" cstate="print">
             <a:extLst>
               <a:ext uri="{28A0092B-C50C-407E-A947-70E740481C1C}">
                 <a14:useLocalDpi xmlns:a14="http://schemas.microsoft.com/office/drawing/2010/main" val="0"/>
               </a:ext>
               <a:ext uri="{96DAC541-7B7A-43D3-8B79-37D633B846F1}">
-                <asvg:svgBlip xmlns:asvg="http://schemas.microsoft.com/office/drawing/2016/SVG/main" r:embed="rId7"/>
+                <asvg:svgBlip xmlns:asvg="http://schemas.microsoft.com/office/drawing/2016/SVG/main" r:embed="rId6"/>
               </a:ext>
             </a:extLst>
           </a:blip>
@@ -10136,13 +10417,13 @@
           <p:nvPr/>
         </p:nvPicPr>
         <p:blipFill>
-          <a:blip r:embed="rId8" cstate="print">
+          <a:blip r:embed="rId7" cstate="print">
             <a:extLst>
               <a:ext uri="{28A0092B-C50C-407E-A947-70E740481C1C}">
                 <a14:useLocalDpi xmlns:a14="http://schemas.microsoft.com/office/drawing/2010/main" val="0"/>
               </a:ext>
               <a:ext uri="{96DAC541-7B7A-43D3-8B79-37D633B846F1}">
-                <asvg:svgBlip xmlns:asvg="http://schemas.microsoft.com/office/drawing/2016/SVG/main" r:embed="rId9"/>
+                <asvg:svgBlip xmlns:asvg="http://schemas.microsoft.com/office/drawing/2016/SVG/main" r:embed="rId8"/>
               </a:ext>
             </a:extLst>
           </a:blip>
@@ -10169,13 +10450,13 @@
           <p:nvPr/>
         </p:nvPicPr>
         <p:blipFill>
-          <a:blip r:embed="rId10" cstate="print">
+          <a:blip r:embed="rId9" cstate="print">
             <a:extLst>
               <a:ext uri="{28A0092B-C50C-407E-A947-70E740481C1C}">
                 <a14:useLocalDpi xmlns:a14="http://schemas.microsoft.com/office/drawing/2010/main" val="0"/>
               </a:ext>
               <a:ext uri="{96DAC541-7B7A-43D3-8B79-37D633B846F1}">
-                <asvg:svgBlip xmlns:asvg="http://schemas.microsoft.com/office/drawing/2016/SVG/main" r:embed="rId11"/>
+                <asvg:svgBlip xmlns:asvg="http://schemas.microsoft.com/office/drawing/2016/SVG/main" r:embed="rId10"/>
               </a:ext>
             </a:extLst>
           </a:blip>
@@ -10202,13 +10483,13 @@
           <p:nvPr/>
         </p:nvPicPr>
         <p:blipFill>
-          <a:blip r:embed="rId12" cstate="print">
+          <a:blip r:embed="rId11" cstate="print">
             <a:extLst>
               <a:ext uri="{28A0092B-C50C-407E-A947-70E740481C1C}">
                 <a14:useLocalDpi xmlns:a14="http://schemas.microsoft.com/office/drawing/2010/main" val="0"/>
               </a:ext>
               <a:ext uri="{96DAC541-7B7A-43D3-8B79-37D633B846F1}">
-                <asvg:svgBlip xmlns:asvg="http://schemas.microsoft.com/office/drawing/2016/SVG/main" r:embed="rId13"/>
+                <asvg:svgBlip xmlns:asvg="http://schemas.microsoft.com/office/drawing/2016/SVG/main" r:embed="rId12"/>
               </a:ext>
             </a:extLst>
           </a:blip>
@@ -10235,13 +10516,13 @@
           <p:nvPr/>
         </p:nvPicPr>
         <p:blipFill>
-          <a:blip r:embed="rId10" cstate="print">
+          <a:blip r:embed="rId9" cstate="print">
             <a:extLst>
               <a:ext uri="{28A0092B-C50C-407E-A947-70E740481C1C}">
                 <a14:useLocalDpi xmlns:a14="http://schemas.microsoft.com/office/drawing/2010/main" val="0"/>
               </a:ext>
               <a:ext uri="{96DAC541-7B7A-43D3-8B79-37D633B846F1}">
-                <asvg:svgBlip xmlns:asvg="http://schemas.microsoft.com/office/drawing/2016/SVG/main" r:embed="rId11"/>
+                <asvg:svgBlip xmlns:asvg="http://schemas.microsoft.com/office/drawing/2016/SVG/main" r:embed="rId10"/>
               </a:ext>
             </a:extLst>
           </a:blip>
@@ -10268,13 +10549,13 @@
           <p:nvPr/>
         </p:nvPicPr>
         <p:blipFill>
-          <a:blip r:embed="rId14" cstate="print">
+          <a:blip r:embed="rId13" cstate="print">
             <a:extLst>
               <a:ext uri="{28A0092B-C50C-407E-A947-70E740481C1C}">
                 <a14:useLocalDpi xmlns:a14="http://schemas.microsoft.com/office/drawing/2010/main" val="0"/>
               </a:ext>
               <a:ext uri="{96DAC541-7B7A-43D3-8B79-37D633B846F1}">
-                <asvg:svgBlip xmlns:asvg="http://schemas.microsoft.com/office/drawing/2016/SVG/main" r:embed="rId15"/>
+                <asvg:svgBlip xmlns:asvg="http://schemas.microsoft.com/office/drawing/2016/SVG/main" r:embed="rId14"/>
               </a:ext>
             </a:extLst>
           </a:blip>
@@ -10637,13 +10918,13 @@
           <p:nvPr/>
         </p:nvPicPr>
         <p:blipFill>
-          <a:blip r:embed="rId16" cstate="print">
+          <a:blip r:embed="rId15" cstate="print">
             <a:extLst>
               <a:ext uri="{28A0092B-C50C-407E-A947-70E740481C1C}">
                 <a14:useLocalDpi xmlns:a14="http://schemas.microsoft.com/office/drawing/2010/main" val="0"/>
               </a:ext>
               <a:ext uri="{96DAC541-7B7A-43D3-8B79-37D633B846F1}">
-                <asvg:svgBlip xmlns:asvg="http://schemas.microsoft.com/office/drawing/2016/SVG/main" r:embed="rId17"/>
+                <asvg:svgBlip xmlns:asvg="http://schemas.microsoft.com/office/drawing/2016/SVG/main" r:embed="rId16"/>
               </a:ext>
             </a:extLst>
           </a:blip>
@@ -10670,13 +10951,13 @@
           <p:nvPr/>
         </p:nvPicPr>
         <p:blipFill>
-          <a:blip r:embed="rId18">
+          <a:blip r:embed="rId17">
             <a:extLst>
               <a:ext uri="{28A0092B-C50C-407E-A947-70E740481C1C}">
                 <a14:useLocalDpi xmlns:a14="http://schemas.microsoft.com/office/drawing/2010/main" val="0"/>
               </a:ext>
               <a:ext uri="{96DAC541-7B7A-43D3-8B79-37D633B846F1}">
-                <asvg:svgBlip xmlns:asvg="http://schemas.microsoft.com/office/drawing/2016/SVG/main" r:embed="rId19"/>
+                <asvg:svgBlip xmlns:asvg="http://schemas.microsoft.com/office/drawing/2016/SVG/main" r:embed="rId18"/>
               </a:ext>
             </a:extLst>
           </a:blip>
@@ -10822,13 +11103,13 @@
           <p:nvPr/>
         </p:nvPicPr>
         <p:blipFill>
-          <a:blip r:embed="rId20" cstate="print">
+          <a:blip r:embed="rId19" cstate="print">
             <a:extLst>
               <a:ext uri="{28A0092B-C50C-407E-A947-70E740481C1C}">
                 <a14:useLocalDpi xmlns:a14="http://schemas.microsoft.com/office/drawing/2010/main" val="0"/>
               </a:ext>
               <a:ext uri="{96DAC541-7B7A-43D3-8B79-37D633B846F1}">
-                <asvg:svgBlip xmlns:asvg="http://schemas.microsoft.com/office/drawing/2016/SVG/main" r:embed="rId21"/>
+                <asvg:svgBlip xmlns:asvg="http://schemas.microsoft.com/office/drawing/2016/SVG/main" r:embed="rId20"/>
               </a:ext>
             </a:extLst>
           </a:blip>
@@ -11097,8 +11378,6 @@
       </a:bgFillStyleLst>
     </a:fmtScheme>
   </a:themeElements>
-  <a:objectDefaults/>
-  <a:extraClrSchemeLst/>
   <a:extLst>
     <a:ext uri="{05A4C25C-085E-4340-85A3-A5531E510DB2}">
       <thm15:themeFamily xmlns:thm15="http://schemas.microsoft.com/office/thememl/2012/main" name="Office Theme" id="{62F939B6-93AF-4DB8-9C6B-D6C7DFDC589F}" vid="{4A3C46E8-61CC-4603-A589-7422A47A8E4A}"/>

--- a/img-source/images.pptx
+++ b/img-source/images.pptx
@@ -4,15 +4,19 @@
   <p:sldMasterIdLst>
     <p:sldMasterId id="2147483648" r:id="rId1"/>
   </p:sldMasterIdLst>
+  <p:notesMasterIdLst>
+    <p:notesMasterId r:id="rId7"/>
+  </p:notesMasterIdLst>
   <p:sldIdLst>
     <p:sldId id="256" r:id="rId3"/>
     <p:sldId id="260" r:id="rId4"/>
     <p:sldId id="259" r:id="rId5"/>
-    <p:sldId id="261" r:id="rId6"/>
-    <p:sldId id="262" r:id="rId7"/>
-    <p:sldId id="257" r:id="rId8"/>
-    <p:sldId id="258" r:id="rId9"/>
-    <p:sldId id="263" r:id="rId10"/>
+    <p:sldId id="264" r:id="rId6"/>
+    <p:sldId id="261" r:id="rId8"/>
+    <p:sldId id="262" r:id="rId9"/>
+    <p:sldId id="257" r:id="rId10"/>
+    <p:sldId id="258" r:id="rId11"/>
+    <p:sldId id="263" r:id="rId12"/>
   </p:sldIdLst>
   <p:sldSz cx="12192000" cy="6858000"/>
   <p:notesSz cx="6858000" cy="9144000"/>
@@ -138,6 +142,449 @@
     </p:ext>
   </p:extLst>
 </p:presentation>
+</file>
+
+<file path=ppt/notesMasters/notesMaster1.xml><?xml version="1.0" encoding="utf-8"?>
+<p:notesMaster xmlns:a="http://schemas.openxmlformats.org/drawingml/2006/main" xmlns:r="http://schemas.openxmlformats.org/officeDocument/2006/relationships" xmlns:p="http://schemas.openxmlformats.org/presentationml/2006/main">
+  <p:cSld>
+    <p:bg>
+      <p:bgRef idx="1001">
+        <a:schemeClr val="bg1"/>
+      </p:bgRef>
+    </p:bg>
+    <p:spTree>
+      <p:nvGrpSpPr>
+        <p:cNvPr id="1" name=""/>
+        <p:cNvGrpSpPr/>
+        <p:nvPr/>
+      </p:nvGrpSpPr>
+      <p:grpSpPr>
+        <a:xfrm>
+          <a:off x="0" y="0"/>
+          <a:ext cx="0" cy="0"/>
+          <a:chOff x="0" y="0"/>
+          <a:chExt cx="0" cy="0"/>
+        </a:xfrm>
+      </p:grpSpPr>
+      <p:sp>
+        <p:nvSpPr>
+          <p:cNvPr id="2" name="页眉占位符 1"/>
+          <p:cNvSpPr>
+            <a:spLocks noGrp="1"/>
+          </p:cNvSpPr>
+          <p:nvPr>
+            <p:ph type="hdr" sz="quarter"/>
+          </p:nvPr>
+        </p:nvSpPr>
+        <p:spPr>
+          <a:xfrm>
+            <a:off x="0" y="0"/>
+            <a:ext cx="2971800" cy="458788"/>
+          </a:xfrm>
+          <a:prstGeom prst="rect">
+            <a:avLst/>
+          </a:prstGeom>
+        </p:spPr>
+        <p:txBody>
+          <a:bodyPr vert="horz" lIns="91440" tIns="45720" rIns="91440" bIns="45720" rtlCol="0"/>
+          <a:lstStyle>
+            <a:lvl1pPr algn="l">
+              <a:defRPr sz="1200"/>
+            </a:lvl1pPr>
+          </a:lstStyle>
+          <a:p>
+            <a:endParaRPr lang="zh-CN" altLang="en-US"/>
+          </a:p>
+        </p:txBody>
+      </p:sp>
+      <p:sp>
+        <p:nvSpPr>
+          <p:cNvPr id="3" name="日期占位符 2"/>
+          <p:cNvSpPr>
+            <a:spLocks noGrp="1"/>
+          </p:cNvSpPr>
+          <p:nvPr>
+            <p:ph type="dt" idx="1"/>
+          </p:nvPr>
+        </p:nvSpPr>
+        <p:spPr>
+          <a:xfrm>
+            <a:off x="3884613" y="0"/>
+            <a:ext cx="2971800" cy="458788"/>
+          </a:xfrm>
+          <a:prstGeom prst="rect">
+            <a:avLst/>
+          </a:prstGeom>
+        </p:spPr>
+        <p:txBody>
+          <a:bodyPr vert="horz" lIns="91440" tIns="45720" rIns="91440" bIns="45720" rtlCol="0"/>
+          <a:lstStyle>
+            <a:lvl1pPr algn="r">
+              <a:defRPr sz="1200"/>
+            </a:lvl1pPr>
+          </a:lstStyle>
+          <a:p>
+            <a:fld id="{D2A48B96-639E-45A3-A0BA-2464DFDB1FAA}" type="datetimeFigureOut">
+              <a:rPr lang="zh-CN" altLang="en-US" smtClean="0"/>
+            </a:fld>
+            <a:endParaRPr lang="zh-CN" altLang="en-US"/>
+          </a:p>
+        </p:txBody>
+      </p:sp>
+      <p:sp>
+        <p:nvSpPr>
+          <p:cNvPr id="4" name="幻灯片图像占位符 3"/>
+          <p:cNvSpPr>
+            <a:spLocks noGrp="1" noRot="1" noChangeAspect="1"/>
+          </p:cNvSpPr>
+          <p:nvPr>
+            <p:ph type="sldImg" idx="2"/>
+          </p:nvPr>
+        </p:nvSpPr>
+        <p:spPr>
+          <a:xfrm>
+            <a:off x="685800" y="1143000"/>
+            <a:ext cx="5486400" cy="3086100"/>
+          </a:xfrm>
+          <a:prstGeom prst="rect">
+            <a:avLst/>
+          </a:prstGeom>
+          <a:noFill/>
+          <a:ln w="12700">
+            <a:solidFill>
+              <a:prstClr val="black"/>
+            </a:solidFill>
+          </a:ln>
+        </p:spPr>
+        <p:txBody>
+          <a:bodyPr vert="horz" lIns="91440" tIns="45720" rIns="91440" bIns="45720" rtlCol="0" anchor="ctr"/>
+          <a:lstStyle/>
+          <a:p>
+            <a:endParaRPr lang="zh-CN" altLang="en-US"/>
+          </a:p>
+        </p:txBody>
+      </p:sp>
+      <p:sp>
+        <p:nvSpPr>
+          <p:cNvPr id="5" name="备注占位符 4"/>
+          <p:cNvSpPr>
+            <a:spLocks noGrp="1"/>
+          </p:cNvSpPr>
+          <p:nvPr>
+            <p:ph type="body" sz="quarter" idx="3"/>
+          </p:nvPr>
+        </p:nvSpPr>
+        <p:spPr>
+          <a:xfrm>
+            <a:off x="685800" y="4400550"/>
+            <a:ext cx="5486400" cy="3600450"/>
+          </a:xfrm>
+          <a:prstGeom prst="rect">
+            <a:avLst/>
+          </a:prstGeom>
+        </p:spPr>
+        <p:txBody>
+          <a:bodyPr vert="horz" lIns="91440" tIns="45720" rIns="91440" bIns="45720" rtlCol="0"/>
+          <a:lstStyle/>
+          <a:p>
+            <a:pPr lvl="0"/>
+            <a:r>
+              <a:rPr lang="zh-CN" altLang="en-US" smtClean="0"/>
+              <a:t>单击此处编辑母版文本样式</a:t>
+            </a:r>
+            <a:endParaRPr lang="zh-CN" altLang="en-US" smtClean="0"/>
+          </a:p>
+          <a:p>
+            <a:pPr lvl="1"/>
+            <a:r>
+              <a:rPr lang="zh-CN" altLang="en-US" smtClean="0"/>
+              <a:t>第二级</a:t>
+            </a:r>
+            <a:endParaRPr lang="zh-CN" altLang="en-US" smtClean="0"/>
+          </a:p>
+          <a:p>
+            <a:pPr lvl="2"/>
+            <a:r>
+              <a:rPr lang="zh-CN" altLang="en-US" smtClean="0"/>
+              <a:t>第三级</a:t>
+            </a:r>
+            <a:endParaRPr lang="zh-CN" altLang="en-US" smtClean="0"/>
+          </a:p>
+          <a:p>
+            <a:pPr lvl="3"/>
+            <a:r>
+              <a:rPr lang="zh-CN" altLang="en-US" smtClean="0"/>
+              <a:t>第四级</a:t>
+            </a:r>
+            <a:endParaRPr lang="zh-CN" altLang="en-US" smtClean="0"/>
+          </a:p>
+          <a:p>
+            <a:pPr lvl="4"/>
+            <a:r>
+              <a:rPr lang="zh-CN" altLang="en-US" smtClean="0"/>
+              <a:t>第五级</a:t>
+            </a:r>
+            <a:endParaRPr lang="zh-CN" altLang="en-US"/>
+          </a:p>
+        </p:txBody>
+      </p:sp>
+      <p:sp>
+        <p:nvSpPr>
+          <p:cNvPr id="6" name="页脚占位符 5"/>
+          <p:cNvSpPr>
+            <a:spLocks noGrp="1"/>
+          </p:cNvSpPr>
+          <p:nvPr>
+            <p:ph type="ftr" sz="quarter" idx="4"/>
+          </p:nvPr>
+        </p:nvSpPr>
+        <p:spPr>
+          <a:xfrm>
+            <a:off x="0" y="8685213"/>
+            <a:ext cx="2971800" cy="458787"/>
+          </a:xfrm>
+          <a:prstGeom prst="rect">
+            <a:avLst/>
+          </a:prstGeom>
+        </p:spPr>
+        <p:txBody>
+          <a:bodyPr vert="horz" lIns="91440" tIns="45720" rIns="91440" bIns="45720" rtlCol="0" anchor="b"/>
+          <a:lstStyle>
+            <a:lvl1pPr algn="l">
+              <a:defRPr sz="1200"/>
+            </a:lvl1pPr>
+          </a:lstStyle>
+          <a:p>
+            <a:endParaRPr lang="zh-CN" altLang="en-US"/>
+          </a:p>
+        </p:txBody>
+      </p:sp>
+      <p:sp>
+        <p:nvSpPr>
+          <p:cNvPr id="7" name="灯片编号占位符 6"/>
+          <p:cNvSpPr>
+            <a:spLocks noGrp="1"/>
+          </p:cNvSpPr>
+          <p:nvPr>
+            <p:ph type="sldNum" sz="quarter" idx="5"/>
+          </p:nvPr>
+        </p:nvSpPr>
+        <p:spPr>
+          <a:xfrm>
+            <a:off x="3884613" y="8685213"/>
+            <a:ext cx="2971800" cy="458787"/>
+          </a:xfrm>
+          <a:prstGeom prst="rect">
+            <a:avLst/>
+          </a:prstGeom>
+        </p:spPr>
+        <p:txBody>
+          <a:bodyPr vert="horz" lIns="91440" tIns="45720" rIns="91440" bIns="45720" rtlCol="0" anchor="b"/>
+          <a:lstStyle>
+            <a:lvl1pPr algn="r">
+              <a:defRPr sz="1200"/>
+            </a:lvl1pPr>
+          </a:lstStyle>
+          <a:p>
+            <a:fld id="{A6837353-30EB-4A48-80EB-173D804AEFBD}" type="slidenum">
+              <a:rPr lang="zh-CN" altLang="en-US" smtClean="0"/>
+            </a:fld>
+            <a:endParaRPr lang="zh-CN" altLang="en-US"/>
+          </a:p>
+        </p:txBody>
+      </p:sp>
+    </p:spTree>
+  </p:cSld>
+  <p:clrMap bg1="lt1" tx1="dk1" bg2="lt2" tx2="dk2" accent1="accent1" accent2="accent2" accent3="accent3" accent4="accent4" accent5="accent5" accent6="accent6" hlink="hlink" folHlink="folHlink"/>
+  <p:notesStyle>
+    <a:lvl1pPr marL="0" algn="l" defTabSz="914400" rtl="0" eaLnBrk="1" latinLnBrk="0" hangingPunct="1">
+      <a:defRPr sz="1200" kern="1200">
+        <a:solidFill>
+          <a:schemeClr val="tx1"/>
+        </a:solidFill>
+        <a:latin typeface="+mn-lt"/>
+        <a:ea typeface="+mn-ea"/>
+        <a:cs typeface="+mn-cs"/>
+      </a:defRPr>
+    </a:lvl1pPr>
+    <a:lvl2pPr marL="457200" algn="l" defTabSz="914400" rtl="0" eaLnBrk="1" latinLnBrk="0" hangingPunct="1">
+      <a:defRPr sz="1200" kern="1200">
+        <a:solidFill>
+          <a:schemeClr val="tx1"/>
+        </a:solidFill>
+        <a:latin typeface="+mn-lt"/>
+        <a:ea typeface="+mn-ea"/>
+        <a:cs typeface="+mn-cs"/>
+      </a:defRPr>
+    </a:lvl2pPr>
+    <a:lvl3pPr marL="914400" algn="l" defTabSz="914400" rtl="0" eaLnBrk="1" latinLnBrk="0" hangingPunct="1">
+      <a:defRPr sz="1200" kern="1200">
+        <a:solidFill>
+          <a:schemeClr val="tx1"/>
+        </a:solidFill>
+        <a:latin typeface="+mn-lt"/>
+        <a:ea typeface="+mn-ea"/>
+        <a:cs typeface="+mn-cs"/>
+      </a:defRPr>
+    </a:lvl3pPr>
+    <a:lvl4pPr marL="1371600" algn="l" defTabSz="914400" rtl="0" eaLnBrk="1" latinLnBrk="0" hangingPunct="1">
+      <a:defRPr sz="1200" kern="1200">
+        <a:solidFill>
+          <a:schemeClr val="tx1"/>
+        </a:solidFill>
+        <a:latin typeface="+mn-lt"/>
+        <a:ea typeface="+mn-ea"/>
+        <a:cs typeface="+mn-cs"/>
+      </a:defRPr>
+    </a:lvl4pPr>
+    <a:lvl5pPr marL="1828800" algn="l" defTabSz="914400" rtl="0" eaLnBrk="1" latinLnBrk="0" hangingPunct="1">
+      <a:defRPr sz="1200" kern="1200">
+        <a:solidFill>
+          <a:schemeClr val="tx1"/>
+        </a:solidFill>
+        <a:latin typeface="+mn-lt"/>
+        <a:ea typeface="+mn-ea"/>
+        <a:cs typeface="+mn-cs"/>
+      </a:defRPr>
+    </a:lvl5pPr>
+    <a:lvl6pPr marL="2286000" algn="l" defTabSz="914400" rtl="0" eaLnBrk="1" latinLnBrk="0" hangingPunct="1">
+      <a:defRPr sz="1200" kern="1200">
+        <a:solidFill>
+          <a:schemeClr val="tx1"/>
+        </a:solidFill>
+        <a:latin typeface="+mn-lt"/>
+        <a:ea typeface="+mn-ea"/>
+        <a:cs typeface="+mn-cs"/>
+      </a:defRPr>
+    </a:lvl6pPr>
+    <a:lvl7pPr marL="2743200" algn="l" defTabSz="914400" rtl="0" eaLnBrk="1" latinLnBrk="0" hangingPunct="1">
+      <a:defRPr sz="1200" kern="1200">
+        <a:solidFill>
+          <a:schemeClr val="tx1"/>
+        </a:solidFill>
+        <a:latin typeface="+mn-lt"/>
+        <a:ea typeface="+mn-ea"/>
+        <a:cs typeface="+mn-cs"/>
+      </a:defRPr>
+    </a:lvl7pPr>
+    <a:lvl8pPr marL="3200400" algn="l" defTabSz="914400" rtl="0" eaLnBrk="1" latinLnBrk="0" hangingPunct="1">
+      <a:defRPr sz="1200" kern="1200">
+        <a:solidFill>
+          <a:schemeClr val="tx1"/>
+        </a:solidFill>
+        <a:latin typeface="+mn-lt"/>
+        <a:ea typeface="+mn-ea"/>
+        <a:cs typeface="+mn-cs"/>
+      </a:defRPr>
+    </a:lvl8pPr>
+    <a:lvl9pPr marL="3657600" algn="l" defTabSz="914400" rtl="0" eaLnBrk="1" latinLnBrk="0" hangingPunct="1">
+      <a:defRPr sz="1200" kern="1200">
+        <a:solidFill>
+          <a:schemeClr val="tx1"/>
+        </a:solidFill>
+        <a:latin typeface="+mn-lt"/>
+        <a:ea typeface="+mn-ea"/>
+        <a:cs typeface="+mn-cs"/>
+      </a:defRPr>
+    </a:lvl9pPr>
+  </p:notesStyle>
+</p:notesMaster>
+</file>
+
+<file path=ppt/notesSlides/notesSlide1.xml><?xml version="1.0" encoding="utf-8"?>
+<p:notes xmlns:a="http://schemas.openxmlformats.org/drawingml/2006/main" xmlns:r="http://schemas.openxmlformats.org/officeDocument/2006/relationships" xmlns:p="http://schemas.openxmlformats.org/presentationml/2006/main">
+  <p:cSld>
+    <p:spTree>
+      <p:nvGrpSpPr>
+        <p:cNvPr id="1" name=""/>
+        <p:cNvGrpSpPr/>
+        <p:nvPr/>
+      </p:nvGrpSpPr>
+      <p:grpSpPr/>
+      <p:sp>
+        <p:nvSpPr>
+          <p:cNvPr id="2" name="幻灯片图像占位符 1"/>
+          <p:cNvSpPr>
+            <a:spLocks noGrp="1"/>
+          </p:cNvSpPr>
+          <p:nvPr>
+            <p:ph type="sldImg" idx="2"/>
+          </p:nvPr>
+        </p:nvSpPr>
+        <p:spPr/>
+      </p:sp>
+      <p:sp>
+        <p:nvSpPr>
+          <p:cNvPr id="3" name="文本占位符 2"/>
+          <p:cNvSpPr>
+            <a:spLocks noGrp="1"/>
+          </p:cNvSpPr>
+          <p:nvPr>
+            <p:ph type="body" idx="3"/>
+          </p:nvPr>
+        </p:nvSpPr>
+        <p:spPr/>
+        <p:txBody>
+          <a:bodyPr/>
+          <a:p>
+            <a:endParaRPr lang="zh-CN" altLang="en-US"/>
+          </a:p>
+        </p:txBody>
+      </p:sp>
+    </p:spTree>
+  </p:cSld>
+  <p:clrMapOvr>
+    <a:masterClrMapping/>
+  </p:clrMapOvr>
+</p:notes>
+</file>
+
+<file path=ppt/notesSlides/notesSlide2.xml><?xml version="1.0" encoding="utf-8"?>
+<p:notes xmlns:a="http://schemas.openxmlformats.org/drawingml/2006/main" xmlns:r="http://schemas.openxmlformats.org/officeDocument/2006/relationships" xmlns:p="http://schemas.openxmlformats.org/presentationml/2006/main">
+  <p:cSld>
+    <p:spTree>
+      <p:nvGrpSpPr>
+        <p:cNvPr id="1" name=""/>
+        <p:cNvGrpSpPr/>
+        <p:nvPr/>
+      </p:nvGrpSpPr>
+      <p:grpSpPr/>
+      <p:sp>
+        <p:nvSpPr>
+          <p:cNvPr id="2" name="幻灯片图像占位符 1"/>
+          <p:cNvSpPr>
+            <a:spLocks noGrp="1"/>
+          </p:cNvSpPr>
+          <p:nvPr>
+            <p:ph type="sldImg" idx="2"/>
+          </p:nvPr>
+        </p:nvSpPr>
+        <p:spPr/>
+      </p:sp>
+      <p:sp>
+        <p:nvSpPr>
+          <p:cNvPr id="3" name="文本占位符 2"/>
+          <p:cNvSpPr>
+            <a:spLocks noGrp="1"/>
+          </p:cNvSpPr>
+          <p:nvPr>
+            <p:ph type="body" idx="3"/>
+          </p:nvPr>
+        </p:nvSpPr>
+        <p:spPr/>
+        <p:txBody>
+          <a:bodyPr/>
+          <a:p>
+            <a:endParaRPr lang="zh-CN" altLang="en-US"/>
+          </a:p>
+        </p:txBody>
+      </p:sp>
+    </p:spTree>
+  </p:cSld>
+  <p:clrMapOvr>
+    <a:masterClrMapping/>
+  </p:clrMapOvr>
+</p:notes>
 </file>
 
 <file path=ppt/slideLayouts/slideLayout1.xml><?xml version="1.0" encoding="utf-8"?>
@@ -6460,25 +6907,355 @@
         <p:nvPr/>
       </p:nvGrpSpPr>
       <p:grpSpPr/>
+      <p:grpSp>
+        <p:nvGrpSpPr>
+          <p:cNvPr id="63" name="组合 62"/>
+          <p:cNvGrpSpPr>
+            <a:grpSpLocks noChangeAspect="1"/>
+          </p:cNvGrpSpPr>
+          <p:nvPr/>
+        </p:nvGrpSpPr>
+        <p:grpSpPr>
+          <a:xfrm>
+            <a:off x="2790190" y="1517015"/>
+            <a:ext cx="475615" cy="470535"/>
+            <a:chOff x="4445000" y="739632"/>
+            <a:chExt cx="375710" cy="371203"/>
+          </a:xfrm>
+          <a:solidFill>
+            <a:srgbClr val="4A5F7E"/>
+          </a:solidFill>
+        </p:grpSpPr>
+        <p:sp>
+          <p:nvSpPr>
+            <p:cNvPr id="64" name="矩形: 圆角 63"/>
+            <p:cNvSpPr/>
+            <p:nvPr/>
+          </p:nvSpPr>
+          <p:spPr>
+            <a:xfrm>
+              <a:off x="4445000" y="740833"/>
+              <a:ext cx="156634" cy="156634"/>
+            </a:xfrm>
+            <a:prstGeom prst="roundRect">
+              <a:avLst/>
+            </a:prstGeom>
+            <a:grpFill/>
+            <a:ln w="38100">
+              <a:solidFill>
+                <a:srgbClr val="4A5F7E"/>
+              </a:solidFill>
+            </a:ln>
+          </p:spPr>
+          <p:style>
+            <a:lnRef idx="2">
+              <a:schemeClr val="accent1">
+                <a:shade val="50000"/>
+              </a:schemeClr>
+            </a:lnRef>
+            <a:fillRef idx="1">
+              <a:schemeClr val="accent1"/>
+            </a:fillRef>
+            <a:effectRef idx="0">
+              <a:schemeClr val="accent1"/>
+            </a:effectRef>
+            <a:fontRef idx="minor">
+              <a:schemeClr val="lt1"/>
+            </a:fontRef>
+          </p:style>
+          <p:txBody>
+            <a:bodyPr rtlCol="0" anchor="ctr"/>
+            <a:lstStyle/>
+            <a:p>
+              <a:pPr algn="ctr"/>
+              <a:endParaRPr lang="zh-CN" altLang="en-US" sz="1200">
+                <a:latin typeface="Times New Roman" panose="02020603050405020304" charset="0"/>
+                <a:cs typeface="Times New Roman" panose="02020603050405020304" charset="0"/>
+              </a:endParaRPr>
+            </a:p>
+          </p:txBody>
+        </p:sp>
+        <p:sp>
+          <p:nvSpPr>
+            <p:cNvPr id="65" name="矩形: 圆角 64"/>
+            <p:cNvSpPr/>
+            <p:nvPr/>
+          </p:nvSpPr>
+          <p:spPr>
+            <a:xfrm>
+              <a:off x="4445000" y="954201"/>
+              <a:ext cx="156634" cy="156634"/>
+            </a:xfrm>
+            <a:prstGeom prst="roundRect">
+              <a:avLst/>
+            </a:prstGeom>
+            <a:grpFill/>
+            <a:ln w="38100">
+              <a:solidFill>
+                <a:srgbClr val="4A5F7E"/>
+              </a:solidFill>
+            </a:ln>
+          </p:spPr>
+          <p:style>
+            <a:lnRef idx="2">
+              <a:schemeClr val="accent1">
+                <a:shade val="50000"/>
+              </a:schemeClr>
+            </a:lnRef>
+            <a:fillRef idx="1">
+              <a:schemeClr val="accent1"/>
+            </a:fillRef>
+            <a:effectRef idx="0">
+              <a:schemeClr val="accent1"/>
+            </a:effectRef>
+            <a:fontRef idx="minor">
+              <a:schemeClr val="lt1"/>
+            </a:fontRef>
+          </p:style>
+          <p:txBody>
+            <a:bodyPr rtlCol="0" anchor="ctr"/>
+            <a:lstStyle/>
+            <a:p>
+              <a:pPr algn="ctr"/>
+              <a:endParaRPr lang="zh-CN" altLang="en-US" sz="1200">
+                <a:latin typeface="Times New Roman" panose="02020603050405020304" charset="0"/>
+                <a:cs typeface="Times New Roman" panose="02020603050405020304" charset="0"/>
+              </a:endParaRPr>
+            </a:p>
+          </p:txBody>
+        </p:sp>
+        <p:sp>
+          <p:nvSpPr>
+            <p:cNvPr id="66" name="矩形: 圆角 65"/>
+            <p:cNvSpPr/>
+            <p:nvPr/>
+          </p:nvSpPr>
+          <p:spPr>
+            <a:xfrm rot="1800000">
+              <a:off x="4672028" y="739632"/>
+              <a:ext cx="145198" cy="138592"/>
+            </a:xfrm>
+            <a:prstGeom prst="roundRect">
+              <a:avLst/>
+            </a:prstGeom>
+            <a:noFill/>
+            <a:ln w="57150">
+              <a:solidFill>
+                <a:srgbClr val="4A5F7E"/>
+              </a:solidFill>
+            </a:ln>
+            <a:extLst>
+              <a:ext uri="{909E8E84-426E-40DD-AFC4-6F175D3DCCD1}">
+                <a14:hiddenFill xmlns:a14="http://schemas.microsoft.com/office/drawing/2010/main">
+                  <a:grpFill/>
+                </a14:hiddenFill>
+              </a:ext>
+            </a:extLst>
+          </p:spPr>
+          <p:style>
+            <a:lnRef idx="2">
+              <a:schemeClr val="accent1">
+                <a:shade val="50000"/>
+              </a:schemeClr>
+            </a:lnRef>
+            <a:fillRef idx="1">
+              <a:schemeClr val="accent1"/>
+            </a:fillRef>
+            <a:effectRef idx="0">
+              <a:schemeClr val="accent1"/>
+            </a:effectRef>
+            <a:fontRef idx="minor">
+              <a:schemeClr val="lt1"/>
+            </a:fontRef>
+          </p:style>
+          <p:txBody>
+            <a:bodyPr rtlCol="0" anchor="ctr"/>
+            <a:lstStyle/>
+            <a:p>
+              <a:pPr algn="ctr"/>
+              <a:endParaRPr lang="zh-CN" altLang="en-US" sz="1200">
+                <a:latin typeface="Times New Roman" panose="02020603050405020304" charset="0"/>
+                <a:cs typeface="Times New Roman" panose="02020603050405020304" charset="0"/>
+              </a:endParaRPr>
+            </a:p>
+          </p:txBody>
+        </p:sp>
+        <p:sp>
+          <p:nvSpPr>
+            <p:cNvPr id="67" name="矩形: 圆角 66"/>
+            <p:cNvSpPr/>
+            <p:nvPr/>
+          </p:nvSpPr>
+          <p:spPr>
+            <a:xfrm>
+              <a:off x="4664075" y="954201"/>
+              <a:ext cx="156635" cy="156634"/>
+            </a:xfrm>
+            <a:prstGeom prst="roundRect">
+              <a:avLst/>
+            </a:prstGeom>
+            <a:grpFill/>
+            <a:ln w="38100">
+              <a:solidFill>
+                <a:srgbClr val="4A5F7E"/>
+              </a:solidFill>
+            </a:ln>
+          </p:spPr>
+          <p:style>
+            <a:lnRef idx="2">
+              <a:schemeClr val="accent1">
+                <a:shade val="50000"/>
+              </a:schemeClr>
+            </a:lnRef>
+            <a:fillRef idx="1">
+              <a:schemeClr val="accent1"/>
+            </a:fillRef>
+            <a:effectRef idx="0">
+              <a:schemeClr val="accent1"/>
+            </a:effectRef>
+            <a:fontRef idx="minor">
+              <a:schemeClr val="lt1"/>
+            </a:fontRef>
+          </p:style>
+          <p:txBody>
+            <a:bodyPr rtlCol="0" anchor="ctr"/>
+            <a:lstStyle/>
+            <a:p>
+              <a:pPr algn="ctr"/>
+              <a:endParaRPr lang="zh-CN" altLang="en-US" sz="1200">
+                <a:latin typeface="Times New Roman" panose="02020603050405020304" charset="0"/>
+                <a:cs typeface="Times New Roman" panose="02020603050405020304" charset="0"/>
+              </a:endParaRPr>
+            </a:p>
+          </p:txBody>
+        </p:sp>
+      </p:grpSp>
       <p:sp>
         <p:nvSpPr>
-          <p:cNvPr id="38" name="矩形 37"/>
+          <p:cNvPr id="17" name="文本框 16"/>
+          <p:cNvSpPr txBox="1"/>
+          <p:nvPr/>
+        </p:nvSpPr>
+        <p:spPr>
+          <a:xfrm>
+            <a:off x="1797685" y="1998980"/>
+            <a:ext cx="2471420" cy="372745"/>
+          </a:xfrm>
+          <a:prstGeom prst="rect">
+            <a:avLst/>
+          </a:prstGeom>
+          <a:noFill/>
+        </p:spPr>
+        <p:txBody>
+          <a:bodyPr wrap="square" rtlCol="0">
+            <a:noAutofit/>
+          </a:bodyPr>
+          <a:p>
+            <a:pPr algn="ctr"/>
+            <a:r>
+              <a:rPr lang="en-US" altLang="zh-CN" sz="1200">
+                <a:latin typeface="Times New Roman" panose="02020603050405020304" charset="0"/>
+                <a:cs typeface="Times New Roman" panose="02020603050405020304" charset="0"/>
+              </a:rPr>
+              <a:t>Merchant Application</a:t>
+            </a:r>
+            <a:endParaRPr lang="en-US" altLang="zh-CN" sz="1200">
+              <a:latin typeface="Times New Roman" panose="02020603050405020304" charset="0"/>
+              <a:cs typeface="Times New Roman" panose="02020603050405020304" charset="0"/>
+            </a:endParaRPr>
+          </a:p>
+        </p:txBody>
+      </p:sp>
+      <p:pic>
+        <p:nvPicPr>
+          <p:cNvPr id="33" name="图形 11"/>
+          <p:cNvPicPr>
+            <a:picLocks noChangeAspect="1"/>
+          </p:cNvPicPr>
+          <p:nvPr/>
+        </p:nvPicPr>
+        <p:blipFill>
+          <a:blip r:embed="rId1" cstate="print">
+            <a:extLst>
+              <a:ext uri="{28A0092B-C50C-407E-A947-70E740481C1C}">
+                <a14:useLocalDpi xmlns:a14="http://schemas.microsoft.com/office/drawing/2010/main" val="0"/>
+              </a:ext>
+              <a:ext uri="{96DAC541-7B7A-43D3-8B79-37D633B846F1}">
+                <asvg:svgBlip xmlns:asvg="http://schemas.microsoft.com/office/drawing/2016/SVG/main" r:embed="rId2"/>
+              </a:ext>
+            </a:extLst>
+          </a:blip>
+          <a:stretch>
+            <a:fillRect/>
+          </a:stretch>
+        </p:blipFill>
+        <p:spPr>
+          <a:xfrm>
+            <a:off x="8262435" y="1413546"/>
+            <a:ext cx="720000" cy="720000"/>
+          </a:xfrm>
+          <a:prstGeom prst="rect">
+            <a:avLst/>
+          </a:prstGeom>
+        </p:spPr>
+      </p:pic>
+      <p:sp>
+        <p:nvSpPr>
+          <p:cNvPr id="4" name="文本框 3"/>
+          <p:cNvSpPr txBox="1"/>
+          <p:nvPr/>
+        </p:nvSpPr>
+        <p:spPr>
+          <a:xfrm>
+            <a:off x="7382510" y="1993265"/>
+            <a:ext cx="2471420" cy="380365"/>
+          </a:xfrm>
+          <a:prstGeom prst="rect">
+            <a:avLst/>
+          </a:prstGeom>
+          <a:noFill/>
+        </p:spPr>
+        <p:txBody>
+          <a:bodyPr wrap="square" rtlCol="0">
+            <a:noAutofit/>
+          </a:bodyPr>
+          <a:p>
+            <a:pPr algn="ctr"/>
+            <a:r>
+              <a:rPr lang="en-US" altLang="zh-CN" sz="1200">
+                <a:latin typeface="Times New Roman" panose="02020603050405020304" charset="0"/>
+                <a:cs typeface="Times New Roman" panose="02020603050405020304" charset="0"/>
+              </a:rPr>
+              <a:t>Payment Application</a:t>
+            </a:r>
+            <a:endParaRPr lang="en-US" altLang="zh-CN" sz="1200">
+              <a:latin typeface="Times New Roman" panose="02020603050405020304" charset="0"/>
+              <a:cs typeface="Times New Roman" panose="02020603050405020304" charset="0"/>
+            </a:endParaRPr>
+          </a:p>
+        </p:txBody>
+      </p:sp>
+      <p:sp>
+        <p:nvSpPr>
+          <p:cNvPr id="5" name="矩形 4"/>
           <p:cNvSpPr/>
           <p:nvPr/>
         </p:nvSpPr>
         <p:spPr>
           <a:xfrm>
-            <a:off x="1624965" y="3774440"/>
-            <a:ext cx="7439025" cy="1589405"/>
+            <a:off x="2943225" y="2381250"/>
+            <a:ext cx="179705" cy="961200"/>
           </a:xfrm>
           <a:prstGeom prst="rect">
             <a:avLst/>
           </a:prstGeom>
           <a:solidFill>
-            <a:srgbClr val="EAEAEA"/>
+            <a:srgbClr val="4A5F7E"/>
           </a:solidFill>
           <a:ln>
-            <a:noFill/>
+            <a:solidFill>
+              <a:srgbClr val="4A5F7E"/>
+            </a:solidFill>
           </a:ln>
         </p:spPr>
         <p:style>
@@ -6501,6 +7278,1493 @@
           <a:bodyPr rtlCol="0" anchor="ctr"/>
           <a:p>
             <a:pPr algn="ctr"/>
+            <a:endParaRPr lang="zh-CN" altLang="en-US" sz="1200">
+              <a:latin typeface="Times New Roman" panose="02020603050405020304" charset="0"/>
+              <a:cs typeface="Times New Roman" panose="02020603050405020304" charset="0"/>
+            </a:endParaRPr>
+          </a:p>
+        </p:txBody>
+      </p:sp>
+      <p:sp>
+        <p:nvSpPr>
+          <p:cNvPr id="11" name="文本框 10"/>
+          <p:cNvSpPr txBox="1"/>
+          <p:nvPr/>
+        </p:nvSpPr>
+        <p:spPr>
+          <a:xfrm>
+            <a:off x="4470400" y="2016125"/>
+            <a:ext cx="2471420" cy="250825"/>
+          </a:xfrm>
+          <a:prstGeom prst="rect">
+            <a:avLst/>
+          </a:prstGeom>
+          <a:noFill/>
+        </p:spPr>
+        <p:txBody>
+          <a:bodyPr wrap="square" rtlCol="0">
+            <a:noAutofit/>
+          </a:bodyPr>
+          <a:p>
+            <a:pPr algn="ctr"/>
+            <a:r>
+              <a:rPr lang="en-US" altLang="zh-CN" sz="1200">
+                <a:latin typeface="Times New Roman" panose="02020603050405020304" charset="0"/>
+                <a:cs typeface="Times New Roman" panose="02020603050405020304" charset="0"/>
+              </a:rPr>
+              <a:t>Malicious Application </a:t>
+            </a:r>
+            <a:endParaRPr lang="en-US" altLang="zh-CN" sz="1200">
+              <a:latin typeface="Times New Roman" panose="02020603050405020304" charset="0"/>
+              <a:cs typeface="Times New Roman" panose="02020603050405020304" charset="0"/>
+            </a:endParaRPr>
+          </a:p>
+        </p:txBody>
+      </p:sp>
+      <p:cxnSp>
+        <p:nvCxnSpPr>
+          <p:cNvPr id="12" name="直接箭头连接符 11"/>
+          <p:cNvCxnSpPr/>
+          <p:nvPr/>
+        </p:nvCxnSpPr>
+        <p:spPr>
+          <a:xfrm>
+            <a:off x="3124835" y="2684780"/>
+            <a:ext cx="2494800" cy="0"/>
+          </a:xfrm>
+          <a:prstGeom prst="straightConnector1">
+            <a:avLst/>
+          </a:prstGeom>
+          <a:ln w="38100">
+            <a:solidFill>
+              <a:schemeClr val="tx1"/>
+            </a:solidFill>
+            <a:tailEnd type="none"/>
+          </a:ln>
+        </p:spPr>
+        <p:style>
+          <a:lnRef idx="2">
+            <a:schemeClr val="accent1"/>
+          </a:lnRef>
+          <a:fillRef idx="0">
+            <a:srgbClr val="FFFFFF"/>
+          </a:fillRef>
+          <a:effectRef idx="0">
+            <a:srgbClr val="FFFFFF"/>
+          </a:effectRef>
+          <a:fontRef idx="minor">
+            <a:schemeClr val="tx1"/>
+          </a:fontRef>
+        </p:style>
+      </p:cxnSp>
+      <p:cxnSp>
+        <p:nvCxnSpPr>
+          <p:cNvPr id="15" name="直接箭头连接符 14"/>
+          <p:cNvCxnSpPr/>
+          <p:nvPr/>
+        </p:nvCxnSpPr>
+        <p:spPr>
+          <a:xfrm flipV="1">
+            <a:off x="3124835" y="4549775"/>
+            <a:ext cx="2358390" cy="0"/>
+          </a:xfrm>
+          <a:prstGeom prst="straightConnector1">
+            <a:avLst/>
+          </a:prstGeom>
+          <a:ln w="38100">
+            <a:solidFill>
+              <a:schemeClr val="tx1"/>
+            </a:solidFill>
+            <a:headEnd type="triangle"/>
+            <a:tailEnd type="none"/>
+          </a:ln>
+        </p:spPr>
+        <p:style>
+          <a:lnRef idx="2">
+            <a:schemeClr val="accent1"/>
+          </a:lnRef>
+          <a:fillRef idx="0">
+            <a:srgbClr val="FFFFFF"/>
+          </a:fillRef>
+          <a:effectRef idx="0">
+            <a:srgbClr val="FFFFFF"/>
+          </a:effectRef>
+          <a:fontRef idx="minor">
+            <a:schemeClr val="tx1"/>
+          </a:fontRef>
+        </p:style>
+      </p:cxnSp>
+      <p:cxnSp>
+        <p:nvCxnSpPr>
+          <p:cNvPr id="26" name="直接箭头连接符 25"/>
+          <p:cNvCxnSpPr/>
+          <p:nvPr/>
+        </p:nvCxnSpPr>
+        <p:spPr>
+          <a:xfrm>
+            <a:off x="3133725" y="4777105"/>
+            <a:ext cx="2358000" cy="0"/>
+          </a:xfrm>
+          <a:prstGeom prst="straightConnector1">
+            <a:avLst/>
+          </a:prstGeom>
+          <a:ln w="38100">
+            <a:solidFill>
+              <a:schemeClr val="tx1"/>
+            </a:solidFill>
+            <a:tailEnd type="triangle"/>
+          </a:ln>
+        </p:spPr>
+        <p:style>
+          <a:lnRef idx="2">
+            <a:schemeClr val="accent1"/>
+          </a:lnRef>
+          <a:fillRef idx="0">
+            <a:srgbClr val="FFFFFF"/>
+          </a:fillRef>
+          <a:effectRef idx="0">
+            <a:srgbClr val="FFFFFF"/>
+          </a:effectRef>
+          <a:fontRef idx="minor">
+            <a:schemeClr val="tx1"/>
+          </a:fontRef>
+        </p:style>
+      </p:cxnSp>
+      <p:sp>
+        <p:nvSpPr>
+          <p:cNvPr id="2" name="文本框 1"/>
+          <p:cNvSpPr txBox="1"/>
+          <p:nvPr/>
+        </p:nvSpPr>
+        <p:spPr>
+          <a:xfrm>
+            <a:off x="2827655" y="2395855"/>
+            <a:ext cx="2459990" cy="272415"/>
+          </a:xfrm>
+          <a:prstGeom prst="rect">
+            <a:avLst/>
+          </a:prstGeom>
+          <a:noFill/>
+        </p:spPr>
+        <p:txBody>
+          <a:bodyPr wrap="square" rtlCol="0">
+            <a:noAutofit/>
+          </a:bodyPr>
+          <a:p>
+            <a:pPr algn="ctr"/>
+            <a:r>
+              <a:rPr lang="en-US" altLang="zh-CN" sz="1200" b="1">
+                <a:solidFill>
+                  <a:schemeClr val="tx1"/>
+                </a:solidFill>
+                <a:latin typeface="Times New Roman" panose="02020603050405020304" charset="0"/>
+                <a:cs typeface="Times New Roman" panose="02020603050405020304" charset="0"/>
+              </a:rPr>
+              <a:t>Step1. </a:t>
+            </a:r>
+            <a:r>
+              <a:rPr lang="en-US" altLang="zh-CN" sz="1200">
+                <a:solidFill>
+                  <a:schemeClr val="tx1"/>
+                </a:solidFill>
+                <a:latin typeface="Times New Roman" panose="02020603050405020304" charset="0"/>
+                <a:cs typeface="Times New Roman" panose="02020603050405020304" charset="0"/>
+              </a:rPr>
+              <a:t>Send payment intent</a:t>
+            </a:r>
+            <a:endParaRPr lang="en-US" altLang="zh-CN" sz="1200">
+              <a:solidFill>
+                <a:schemeClr val="tx1"/>
+              </a:solidFill>
+              <a:latin typeface="Times New Roman" panose="02020603050405020304" charset="0"/>
+              <a:cs typeface="Times New Roman" panose="02020603050405020304" charset="0"/>
+            </a:endParaRPr>
+          </a:p>
+        </p:txBody>
+      </p:sp>
+      <p:sp>
+        <p:nvSpPr>
+          <p:cNvPr id="7" name="文本框 6"/>
+          <p:cNvSpPr txBox="1"/>
+          <p:nvPr/>
+        </p:nvSpPr>
+        <p:spPr>
+          <a:xfrm>
+            <a:off x="3053080" y="4262755"/>
+            <a:ext cx="2170430" cy="269240"/>
+          </a:xfrm>
+          <a:prstGeom prst="rect">
+            <a:avLst/>
+          </a:prstGeom>
+          <a:noFill/>
+        </p:spPr>
+        <p:txBody>
+          <a:bodyPr wrap="square" rtlCol="0">
+            <a:noAutofit/>
+          </a:bodyPr>
+          <a:p>
+            <a:pPr algn="ctr"/>
+            <a:r>
+              <a:rPr lang="en-US" altLang="zh-CN" sz="1200" b="1">
+                <a:latin typeface="Times New Roman" panose="02020603050405020304" charset="0"/>
+                <a:cs typeface="Times New Roman" panose="02020603050405020304" charset="0"/>
+              </a:rPr>
+              <a:t>Step3. </a:t>
+            </a:r>
+            <a:r>
+              <a:rPr lang="en-US" altLang="zh-CN" sz="1200">
+                <a:latin typeface="Times New Roman" panose="02020603050405020304" charset="0"/>
+                <a:cs typeface="Times New Roman" panose="02020603050405020304" charset="0"/>
+              </a:rPr>
+              <a:t>Construct order request</a:t>
+            </a:r>
+            <a:endParaRPr lang="en-US" altLang="zh-CN" sz="1200">
+              <a:latin typeface="Times New Roman" panose="02020603050405020304" charset="0"/>
+              <a:cs typeface="Times New Roman" panose="02020603050405020304" charset="0"/>
+            </a:endParaRPr>
+          </a:p>
+        </p:txBody>
+      </p:sp>
+      <p:cxnSp>
+        <p:nvCxnSpPr>
+          <p:cNvPr id="16" name="直接箭头连接符 15"/>
+          <p:cNvCxnSpPr/>
+          <p:nvPr/>
+        </p:nvCxnSpPr>
+        <p:spPr>
+          <a:xfrm flipV="1">
+            <a:off x="5919470" y="5005070"/>
+            <a:ext cx="2476800" cy="0"/>
+          </a:xfrm>
+          <a:prstGeom prst="straightConnector1">
+            <a:avLst/>
+          </a:prstGeom>
+          <a:ln w="38100">
+            <a:solidFill>
+              <a:schemeClr val="tx1"/>
+            </a:solidFill>
+            <a:tailEnd type="triangle"/>
+          </a:ln>
+        </p:spPr>
+        <p:style>
+          <a:lnRef idx="2">
+            <a:schemeClr val="accent1"/>
+          </a:lnRef>
+          <a:fillRef idx="0">
+            <a:srgbClr val="FFFFFF"/>
+          </a:fillRef>
+          <a:effectRef idx="0">
+            <a:srgbClr val="FFFFFF"/>
+          </a:effectRef>
+          <a:fontRef idx="minor">
+            <a:schemeClr val="tx1"/>
+          </a:fontRef>
+        </p:style>
+      </p:cxnSp>
+      <p:sp>
+        <p:nvSpPr>
+          <p:cNvPr id="19" name="文本框 18"/>
+          <p:cNvSpPr txBox="1"/>
+          <p:nvPr/>
+        </p:nvSpPr>
+        <p:spPr>
+          <a:xfrm>
+            <a:off x="6167755" y="4714875"/>
+            <a:ext cx="2203450" cy="270000"/>
+          </a:xfrm>
+          <a:prstGeom prst="rect">
+            <a:avLst/>
+          </a:prstGeom>
+          <a:noFill/>
+        </p:spPr>
+        <p:txBody>
+          <a:bodyPr wrap="square" rtlCol="0">
+            <a:noAutofit/>
+          </a:bodyPr>
+          <a:p>
+            <a:pPr algn="ctr"/>
+            <a:r>
+              <a:rPr lang="en-US" altLang="zh-CN" sz="1200" b="1">
+                <a:latin typeface="Times New Roman" panose="02020603050405020304" charset="0"/>
+                <a:cs typeface="Times New Roman" panose="02020603050405020304" charset="0"/>
+              </a:rPr>
+              <a:t>Step4. </a:t>
+            </a:r>
+            <a:r>
+              <a:rPr lang="en-US" altLang="zh-CN" sz="1200">
+                <a:latin typeface="Times New Roman" panose="02020603050405020304" charset="0"/>
+                <a:cs typeface="Times New Roman" panose="02020603050405020304" charset="0"/>
+              </a:rPr>
+              <a:t>Relay tampered request</a:t>
+            </a:r>
+            <a:endParaRPr lang="en-US" altLang="zh-CN" sz="1200">
+              <a:latin typeface="Times New Roman" panose="02020603050405020304" charset="0"/>
+              <a:cs typeface="Times New Roman" panose="02020603050405020304" charset="0"/>
+            </a:endParaRPr>
+          </a:p>
+        </p:txBody>
+      </p:sp>
+      <p:grpSp>
+        <p:nvGrpSpPr>
+          <p:cNvPr id="3" name="组合 2"/>
+          <p:cNvGrpSpPr>
+            <a:grpSpLocks noChangeAspect="1"/>
+          </p:cNvGrpSpPr>
+          <p:nvPr/>
+        </p:nvGrpSpPr>
+        <p:grpSpPr>
+          <a:xfrm>
+            <a:off x="5476240" y="1515600"/>
+            <a:ext cx="475615" cy="470535"/>
+            <a:chOff x="4445000" y="739632"/>
+            <a:chExt cx="375710" cy="371203"/>
+          </a:xfrm>
+          <a:solidFill>
+            <a:srgbClr val="AC1F18"/>
+          </a:solidFill>
+        </p:grpSpPr>
+        <p:sp>
+          <p:nvSpPr>
+            <p:cNvPr id="8" name="矩形: 圆角 63"/>
+            <p:cNvSpPr/>
+            <p:nvPr/>
+          </p:nvSpPr>
+          <p:spPr>
+            <a:xfrm>
+              <a:off x="4445000" y="740833"/>
+              <a:ext cx="156634" cy="156634"/>
+            </a:xfrm>
+            <a:prstGeom prst="roundRect">
+              <a:avLst/>
+            </a:prstGeom>
+            <a:grpFill/>
+            <a:ln w="38100">
+              <a:solidFill>
+                <a:srgbClr val="AC1F18"/>
+              </a:solidFill>
+            </a:ln>
+            <a:extLst>
+              <a:ext uri="{909E8E84-426E-40DD-AFC4-6F175D3DCCD1}">
+                <a14:hiddenFill xmlns:a14="http://schemas.microsoft.com/office/drawing/2010/main">
+                  <a:solidFill>
+                    <a:srgbClr val="AC1F18"/>
+                  </a:solidFill>
+                </a14:hiddenFill>
+              </a:ext>
+            </a:extLst>
+          </p:spPr>
+          <p:style>
+            <a:lnRef idx="2">
+              <a:schemeClr val="accent1">
+                <a:shade val="50000"/>
+              </a:schemeClr>
+            </a:lnRef>
+            <a:fillRef idx="1">
+              <a:schemeClr val="accent1"/>
+            </a:fillRef>
+            <a:effectRef idx="0">
+              <a:schemeClr val="accent1"/>
+            </a:effectRef>
+            <a:fontRef idx="minor">
+              <a:schemeClr val="lt1"/>
+            </a:fontRef>
+          </p:style>
+          <p:txBody>
+            <a:bodyPr rtlCol="0" anchor="ctr"/>
+            <a:lstStyle/>
+            <a:p>
+              <a:pPr algn="ctr"/>
+              <a:endParaRPr lang="zh-CN" altLang="en-US" sz="1200">
+                <a:latin typeface="Times New Roman" panose="02020603050405020304" charset="0"/>
+                <a:cs typeface="Times New Roman" panose="02020603050405020304" charset="0"/>
+              </a:endParaRPr>
+            </a:p>
+          </p:txBody>
+        </p:sp>
+        <p:sp>
+          <p:nvSpPr>
+            <p:cNvPr id="22" name="矩形: 圆角 64"/>
+            <p:cNvSpPr/>
+            <p:nvPr/>
+          </p:nvSpPr>
+          <p:spPr>
+            <a:xfrm>
+              <a:off x="4445000" y="954201"/>
+              <a:ext cx="156634" cy="156634"/>
+            </a:xfrm>
+            <a:prstGeom prst="roundRect">
+              <a:avLst/>
+            </a:prstGeom>
+            <a:grpFill/>
+            <a:ln w="38100">
+              <a:solidFill>
+                <a:srgbClr val="AC1F18"/>
+              </a:solidFill>
+            </a:ln>
+          </p:spPr>
+          <p:style>
+            <a:lnRef idx="2">
+              <a:schemeClr val="accent1">
+                <a:shade val="50000"/>
+              </a:schemeClr>
+            </a:lnRef>
+            <a:fillRef idx="1">
+              <a:schemeClr val="accent1"/>
+            </a:fillRef>
+            <a:effectRef idx="0">
+              <a:schemeClr val="accent1"/>
+            </a:effectRef>
+            <a:fontRef idx="minor">
+              <a:schemeClr val="lt1"/>
+            </a:fontRef>
+          </p:style>
+          <p:txBody>
+            <a:bodyPr rtlCol="0" anchor="ctr"/>
+            <a:lstStyle/>
+            <a:p>
+              <a:pPr algn="ctr"/>
+              <a:endParaRPr lang="zh-CN" altLang="en-US" sz="1200">
+                <a:latin typeface="Times New Roman" panose="02020603050405020304" charset="0"/>
+                <a:cs typeface="Times New Roman" panose="02020603050405020304" charset="0"/>
+              </a:endParaRPr>
+            </a:p>
+          </p:txBody>
+        </p:sp>
+        <p:sp>
+          <p:nvSpPr>
+            <p:cNvPr id="23" name="矩形: 圆角 65"/>
+            <p:cNvSpPr/>
+            <p:nvPr/>
+          </p:nvSpPr>
+          <p:spPr>
+            <a:xfrm rot="1800000">
+              <a:off x="4672028" y="739632"/>
+              <a:ext cx="145198" cy="138592"/>
+            </a:xfrm>
+            <a:prstGeom prst="roundRect">
+              <a:avLst/>
+            </a:prstGeom>
+            <a:noFill/>
+            <a:ln w="57150">
+              <a:solidFill>
+                <a:srgbClr val="AC1F18"/>
+              </a:solidFill>
+            </a:ln>
+            <a:extLst>
+              <a:ext uri="{909E8E84-426E-40DD-AFC4-6F175D3DCCD1}">
+                <a14:hiddenFill xmlns:a14="http://schemas.microsoft.com/office/drawing/2010/main">
+                  <a:grpFill/>
+                </a14:hiddenFill>
+              </a:ext>
+            </a:extLst>
+          </p:spPr>
+          <p:style>
+            <a:lnRef idx="2">
+              <a:schemeClr val="accent1">
+                <a:shade val="50000"/>
+              </a:schemeClr>
+            </a:lnRef>
+            <a:fillRef idx="1">
+              <a:schemeClr val="accent1"/>
+            </a:fillRef>
+            <a:effectRef idx="0">
+              <a:schemeClr val="accent1"/>
+            </a:effectRef>
+            <a:fontRef idx="minor">
+              <a:schemeClr val="lt1"/>
+            </a:fontRef>
+          </p:style>
+          <p:txBody>
+            <a:bodyPr rtlCol="0" anchor="ctr"/>
+            <a:lstStyle/>
+            <a:p>
+              <a:pPr algn="ctr"/>
+              <a:endParaRPr lang="zh-CN" altLang="en-US" sz="1200">
+                <a:latin typeface="Times New Roman" panose="02020603050405020304" charset="0"/>
+                <a:cs typeface="Times New Roman" panose="02020603050405020304" charset="0"/>
+              </a:endParaRPr>
+            </a:p>
+          </p:txBody>
+        </p:sp>
+        <p:sp>
+          <p:nvSpPr>
+            <p:cNvPr id="24" name="矩形: 圆角 66"/>
+            <p:cNvSpPr/>
+            <p:nvPr/>
+          </p:nvSpPr>
+          <p:spPr>
+            <a:xfrm>
+              <a:off x="4664075" y="954201"/>
+              <a:ext cx="156635" cy="156634"/>
+            </a:xfrm>
+            <a:prstGeom prst="roundRect">
+              <a:avLst/>
+            </a:prstGeom>
+            <a:grpFill/>
+            <a:ln w="38100">
+              <a:solidFill>
+                <a:srgbClr val="AC1F18"/>
+              </a:solidFill>
+            </a:ln>
+          </p:spPr>
+          <p:style>
+            <a:lnRef idx="2">
+              <a:schemeClr val="accent1">
+                <a:shade val="50000"/>
+              </a:schemeClr>
+            </a:lnRef>
+            <a:fillRef idx="1">
+              <a:schemeClr val="accent1"/>
+            </a:fillRef>
+            <a:effectRef idx="0">
+              <a:schemeClr val="accent1"/>
+            </a:effectRef>
+            <a:fontRef idx="minor">
+              <a:schemeClr val="lt1"/>
+            </a:fontRef>
+          </p:style>
+          <p:txBody>
+            <a:bodyPr rtlCol="0" anchor="ctr"/>
+            <a:lstStyle/>
+            <a:p>
+              <a:pPr algn="ctr"/>
+              <a:endParaRPr lang="zh-CN" altLang="en-US" sz="1200">
+                <a:latin typeface="Times New Roman" panose="02020603050405020304" charset="0"/>
+                <a:cs typeface="Times New Roman" panose="02020603050405020304" charset="0"/>
+              </a:endParaRPr>
+            </a:p>
+          </p:txBody>
+        </p:sp>
+      </p:grpSp>
+      <p:pic>
+        <p:nvPicPr>
+          <p:cNvPr id="27" name="图片 26" descr="恶魔"/>
+          <p:cNvPicPr>
+            <a:picLocks noChangeAspect="1"/>
+          </p:cNvPicPr>
+          <p:nvPr/>
+        </p:nvPicPr>
+        <p:blipFill>
+          <a:blip r:embed="rId3">
+            <a:extLst>
+              <a:ext uri="{96DAC541-7B7A-43D3-8B79-37D633B846F1}">
+                <asvg:svgBlip xmlns:asvg="http://schemas.microsoft.com/office/drawing/2016/SVG/main" r:embed="rId4"/>
+              </a:ext>
+            </a:extLst>
+          </a:blip>
+          <a:stretch>
+            <a:fillRect/>
+          </a:stretch>
+        </p:blipFill>
+        <p:spPr>
+          <a:xfrm>
+            <a:off x="5189855" y="4029075"/>
+            <a:ext cx="337820" cy="337820"/>
+          </a:xfrm>
+          <a:prstGeom prst="rect">
+            <a:avLst/>
+          </a:prstGeom>
+        </p:spPr>
+      </p:pic>
+      <p:sp>
+        <p:nvSpPr>
+          <p:cNvPr id="31" name="文本框 30"/>
+          <p:cNvSpPr txBox="1"/>
+          <p:nvPr/>
+        </p:nvSpPr>
+        <p:spPr>
+          <a:xfrm>
+            <a:off x="6272530" y="3552825"/>
+            <a:ext cx="2223770" cy="272415"/>
+          </a:xfrm>
+          <a:prstGeom prst="rect">
+            <a:avLst/>
+          </a:prstGeom>
+          <a:noFill/>
+        </p:spPr>
+        <p:txBody>
+          <a:bodyPr wrap="square" rtlCol="0">
+            <a:noAutofit/>
+          </a:bodyPr>
+          <a:p>
+            <a:pPr algn="ctr"/>
+            <a:r>
+              <a:rPr lang="en-US" altLang="zh-CN" sz="1200" b="1">
+                <a:solidFill>
+                  <a:schemeClr val="tx1"/>
+                </a:solidFill>
+                <a:latin typeface="Times New Roman" panose="02020603050405020304" charset="0"/>
+                <a:cs typeface="Times New Roman" panose="02020603050405020304" charset="0"/>
+              </a:rPr>
+              <a:t>Step2.</a:t>
+            </a:r>
+            <a:r>
+              <a:rPr lang="en-US" altLang="zh-CN" sz="1200">
+                <a:solidFill>
+                  <a:schemeClr val="tx1"/>
+                </a:solidFill>
+                <a:latin typeface="Times New Roman" panose="02020603050405020304" charset="0"/>
+                <a:cs typeface="Times New Roman" panose="02020603050405020304" charset="0"/>
+              </a:rPr>
+              <a:t> Hijack intent Resolution</a:t>
+            </a:r>
+            <a:endParaRPr lang="en-US" altLang="zh-CN" sz="1200">
+              <a:solidFill>
+                <a:schemeClr val="tx1"/>
+              </a:solidFill>
+              <a:latin typeface="Times New Roman" panose="02020603050405020304" charset="0"/>
+              <a:cs typeface="Times New Roman" panose="02020603050405020304" charset="0"/>
+            </a:endParaRPr>
+          </a:p>
+        </p:txBody>
+      </p:sp>
+      <p:pic>
+        <p:nvPicPr>
+          <p:cNvPr id="9" name="图片 8" descr="错误"/>
+          <p:cNvPicPr>
+            <a:picLocks noChangeAspect="1"/>
+          </p:cNvPicPr>
+          <p:nvPr/>
+        </p:nvPicPr>
+        <p:blipFill>
+          <a:blip r:embed="rId5">
+            <a:extLst>
+              <a:ext uri="{96DAC541-7B7A-43D3-8B79-37D633B846F1}">
+                <asvg:svgBlip xmlns:asvg="http://schemas.microsoft.com/office/drawing/2016/SVG/main" r:embed="rId6"/>
+              </a:ext>
+            </a:extLst>
+          </a:blip>
+          <a:stretch>
+            <a:fillRect/>
+          </a:stretch>
+        </p:blipFill>
+        <p:spPr>
+          <a:xfrm>
+            <a:off x="5978525" y="2562225"/>
+            <a:ext cx="259715" cy="259715"/>
+          </a:xfrm>
+          <a:prstGeom prst="rect">
+            <a:avLst/>
+          </a:prstGeom>
+        </p:spPr>
+      </p:pic>
+      <p:sp>
+        <p:nvSpPr>
+          <p:cNvPr id="37" name="矩形 36"/>
+          <p:cNvSpPr/>
+          <p:nvPr/>
+        </p:nvSpPr>
+        <p:spPr>
+          <a:xfrm>
+            <a:off x="2950210" y="4335780"/>
+            <a:ext cx="179705" cy="1010920"/>
+          </a:xfrm>
+          <a:prstGeom prst="rect">
+            <a:avLst/>
+          </a:prstGeom>
+          <a:solidFill>
+            <a:srgbClr val="668BAB"/>
+          </a:solidFill>
+          <a:ln>
+            <a:solidFill>
+              <a:srgbClr val="4A5F7E"/>
+            </a:solidFill>
+          </a:ln>
+        </p:spPr>
+        <p:style>
+          <a:lnRef idx="2">
+            <a:schemeClr val="accent1">
+              <a:lumMod val="75000"/>
+            </a:schemeClr>
+          </a:lnRef>
+          <a:fillRef idx="1">
+            <a:schemeClr val="accent1"/>
+          </a:fillRef>
+          <a:effectRef idx="0">
+            <a:srgbClr val="FFFFFF"/>
+          </a:effectRef>
+          <a:fontRef idx="minor">
+            <a:schemeClr val="lt1"/>
+          </a:fontRef>
+        </p:style>
+        <p:txBody>
+          <a:bodyPr rtlCol="0" anchor="ctr"/>
+          <a:p>
+            <a:pPr algn="ctr"/>
+            <a:endParaRPr lang="zh-CN" altLang="en-US" sz="1200">
+              <a:latin typeface="Times New Roman" panose="02020603050405020304" charset="0"/>
+              <a:cs typeface="Times New Roman" panose="02020603050405020304" charset="0"/>
+            </a:endParaRPr>
+          </a:p>
+        </p:txBody>
+      </p:sp>
+      <p:pic>
+        <p:nvPicPr>
+          <p:cNvPr id="42" name="图片 41" descr="对"/>
+          <p:cNvPicPr>
+            <a:picLocks noChangeAspect="1"/>
+          </p:cNvPicPr>
+          <p:nvPr/>
+        </p:nvPicPr>
+        <p:blipFill>
+          <a:blip r:embed="rId7">
+            <a:extLst>
+              <a:ext uri="{96DAC541-7B7A-43D3-8B79-37D633B846F1}">
+                <asvg:svgBlip xmlns:asvg="http://schemas.microsoft.com/office/drawing/2016/SVG/main" r:embed="rId8"/>
+              </a:ext>
+            </a:extLst>
+          </a:blip>
+          <a:stretch>
+            <a:fillRect/>
+          </a:stretch>
+        </p:blipFill>
+        <p:spPr>
+          <a:xfrm>
+            <a:off x="5954395" y="4717415"/>
+            <a:ext cx="353060" cy="353060"/>
+          </a:xfrm>
+          <a:prstGeom prst="rect">
+            <a:avLst/>
+          </a:prstGeom>
+        </p:spPr>
+      </p:pic>
+      <p:cxnSp>
+        <p:nvCxnSpPr>
+          <p:cNvPr id="35" name="直接箭头连接符 34"/>
+          <p:cNvCxnSpPr/>
+          <p:nvPr/>
+        </p:nvCxnSpPr>
+        <p:spPr>
+          <a:xfrm>
+            <a:off x="5645785" y="2685600"/>
+            <a:ext cx="2754000" cy="0"/>
+          </a:xfrm>
+          <a:prstGeom prst="straightConnector1">
+            <a:avLst/>
+          </a:prstGeom>
+          <a:ln w="38100">
+            <a:solidFill>
+              <a:schemeClr val="tx1"/>
+            </a:solidFill>
+            <a:prstDash val="dash"/>
+            <a:tailEnd type="triangle"/>
+          </a:ln>
+        </p:spPr>
+        <p:style>
+          <a:lnRef idx="2">
+            <a:schemeClr val="accent1"/>
+          </a:lnRef>
+          <a:fillRef idx="0">
+            <a:srgbClr val="FFFFFF"/>
+          </a:fillRef>
+          <a:effectRef idx="0">
+            <a:srgbClr val="FFFFFF"/>
+          </a:effectRef>
+          <a:fontRef idx="minor">
+            <a:schemeClr val="tx1"/>
+          </a:fontRef>
+        </p:style>
+      </p:cxnSp>
+      <p:pic>
+        <p:nvPicPr>
+          <p:cNvPr id="68" name="图形 67"/>
+          <p:cNvPicPr>
+            <a:picLocks noChangeAspect="1"/>
+          </p:cNvPicPr>
+          <p:nvPr/>
+        </p:nvPicPr>
+        <p:blipFill>
+          <a:blip r:embed="rId9" cstate="print">
+            <a:extLst>
+              <a:ext uri="{28A0092B-C50C-407E-A947-70E740481C1C}">
+                <a14:useLocalDpi xmlns:a14="http://schemas.microsoft.com/office/drawing/2010/main" val="0"/>
+              </a:ext>
+              <a:ext uri="{96DAC541-7B7A-43D3-8B79-37D633B846F1}">
+                <asvg:svgBlip xmlns:asvg="http://schemas.microsoft.com/office/drawing/2016/SVG/main" r:embed="rId10"/>
+              </a:ext>
+            </a:extLst>
+          </a:blip>
+          <a:stretch>
+            <a:fillRect/>
+          </a:stretch>
+        </p:blipFill>
+        <p:spPr>
+          <a:xfrm>
+            <a:off x="2670549" y="3411088"/>
+            <a:ext cx="720000" cy="720000"/>
+          </a:xfrm>
+          <a:prstGeom prst="rect">
+            <a:avLst/>
+          </a:prstGeom>
+        </p:spPr>
+      </p:pic>
+      <p:sp>
+        <p:nvSpPr>
+          <p:cNvPr id="13" name="文本框 12"/>
+          <p:cNvSpPr txBox="1"/>
+          <p:nvPr/>
+        </p:nvSpPr>
+        <p:spPr>
+          <a:xfrm>
+            <a:off x="1801495" y="4013200"/>
+            <a:ext cx="2471420" cy="372745"/>
+          </a:xfrm>
+          <a:prstGeom prst="rect">
+            <a:avLst/>
+          </a:prstGeom>
+          <a:noFill/>
+        </p:spPr>
+        <p:txBody>
+          <a:bodyPr wrap="square" rtlCol="0">
+            <a:noAutofit/>
+          </a:bodyPr>
+          <a:p>
+            <a:pPr algn="ctr"/>
+            <a:r>
+              <a:rPr lang="en-US" altLang="zh-CN" sz="1200">
+                <a:latin typeface="Times New Roman" panose="02020603050405020304" charset="0"/>
+                <a:cs typeface="Times New Roman" panose="02020603050405020304" charset="0"/>
+              </a:rPr>
+              <a:t>Merchant Platform</a:t>
+            </a:r>
+            <a:endParaRPr lang="en-US" altLang="zh-CN" sz="1200">
+              <a:latin typeface="Times New Roman" panose="02020603050405020304" charset="0"/>
+              <a:cs typeface="Times New Roman" panose="02020603050405020304" charset="0"/>
+            </a:endParaRPr>
+          </a:p>
+        </p:txBody>
+      </p:sp>
+      <p:grpSp>
+        <p:nvGrpSpPr>
+          <p:cNvPr id="60" name="组合 59"/>
+          <p:cNvGrpSpPr/>
+          <p:nvPr/>
+        </p:nvGrpSpPr>
+        <p:grpSpPr>
+          <a:xfrm>
+            <a:off x="5053965" y="2298065"/>
+            <a:ext cx="1339200" cy="1123200"/>
+            <a:chOff x="920" y="310"/>
+            <a:chExt cx="7930" cy="7930"/>
+          </a:xfrm>
+        </p:grpSpPr>
+        <p:pic>
+          <p:nvPicPr>
+            <p:cNvPr id="61" name="图片 60" descr="ef56901b-e67b-48c3-91cc-2ffb6efbef1e"/>
+            <p:cNvPicPr>
+              <a:picLocks noChangeAspect="1"/>
+            </p:cNvPicPr>
+            <p:nvPr/>
+          </p:nvPicPr>
+          <p:blipFill>
+            <a:blip r:embed="rId11"/>
+            <a:stretch>
+              <a:fillRect/>
+            </a:stretch>
+          </p:blipFill>
+          <p:spPr>
+            <a:xfrm>
+              <a:off x="920" y="310"/>
+              <a:ext cx="7930" cy="7930"/>
+            </a:xfrm>
+            <a:prstGeom prst="rect">
+              <a:avLst/>
+            </a:prstGeom>
+          </p:spPr>
+        </p:pic>
+        <p:pic>
+          <p:nvPicPr>
+            <p:cNvPr id="62" name="图片 61"/>
+            <p:cNvPicPr>
+              <a:picLocks noChangeAspect="1"/>
+            </p:cNvPicPr>
+            <p:nvPr/>
+          </p:nvPicPr>
+          <p:blipFill>
+            <a:blip r:embed="rId12"/>
+            <a:srcRect l="-3754" t="-1049" r="-3228" b="-1375"/>
+            <a:stretch>
+              <a:fillRect/>
+            </a:stretch>
+          </p:blipFill>
+          <p:spPr>
+            <a:xfrm>
+              <a:off x="3440" y="1324"/>
+              <a:ext cx="2850" cy="5811"/>
+            </a:xfrm>
+            <a:prstGeom prst="roundRect">
+              <a:avLst/>
+            </a:prstGeom>
+          </p:spPr>
+        </p:pic>
+      </p:grpSp>
+      <p:sp>
+        <p:nvSpPr>
+          <p:cNvPr id="77" name="矩形 76"/>
+          <p:cNvSpPr/>
+          <p:nvPr/>
+        </p:nvSpPr>
+        <p:spPr>
+          <a:xfrm>
+            <a:off x="8515350" y="2379345"/>
+            <a:ext cx="179705" cy="1831975"/>
+          </a:xfrm>
+          <a:prstGeom prst="rect">
+            <a:avLst/>
+          </a:prstGeom>
+          <a:solidFill>
+            <a:schemeClr val="accent1">
+              <a:lumMod val="75000"/>
+            </a:schemeClr>
+          </a:solidFill>
+          <a:ln>
+            <a:solidFill>
+              <a:schemeClr val="accent1">
+                <a:lumMod val="75000"/>
+              </a:schemeClr>
+            </a:solidFill>
+          </a:ln>
+        </p:spPr>
+        <p:style>
+          <a:lnRef idx="2">
+            <a:schemeClr val="accent1">
+              <a:lumMod val="75000"/>
+            </a:schemeClr>
+          </a:lnRef>
+          <a:fillRef idx="1">
+            <a:schemeClr val="accent1"/>
+          </a:fillRef>
+          <a:effectRef idx="0">
+            <a:srgbClr val="FFFFFF"/>
+          </a:effectRef>
+          <a:fontRef idx="minor">
+            <a:schemeClr val="lt1"/>
+          </a:fontRef>
+        </p:style>
+        <p:txBody>
+          <a:bodyPr rtlCol="0" anchor="ctr"/>
+          <a:p>
+            <a:pPr algn="ctr"/>
+            <a:endParaRPr lang="zh-CN" altLang="en-US" sz="1200">
+              <a:latin typeface="Times New Roman" panose="02020603050405020304" charset="0"/>
+              <a:cs typeface="Times New Roman" panose="02020603050405020304" charset="0"/>
+            </a:endParaRPr>
+          </a:p>
+        </p:txBody>
+      </p:sp>
+      <p:grpSp>
+        <p:nvGrpSpPr>
+          <p:cNvPr id="79" name="组合 78"/>
+          <p:cNvGrpSpPr/>
+          <p:nvPr/>
+        </p:nvGrpSpPr>
+        <p:grpSpPr>
+          <a:xfrm>
+            <a:off x="5050155" y="4237355"/>
+            <a:ext cx="1339200" cy="1123200"/>
+            <a:chOff x="2680" y="310"/>
+            <a:chExt cx="7930" cy="7930"/>
+          </a:xfrm>
+        </p:grpSpPr>
+        <p:pic>
+          <p:nvPicPr>
+            <p:cNvPr id="80" name="图片 79" descr="ef56901b-e67b-48c3-91cc-2ffb6efbef1e"/>
+            <p:cNvPicPr>
+              <a:picLocks noChangeAspect="1"/>
+            </p:cNvPicPr>
+            <p:nvPr/>
+          </p:nvPicPr>
+          <p:blipFill>
+            <a:blip r:embed="rId11"/>
+            <a:stretch>
+              <a:fillRect/>
+            </a:stretch>
+          </p:blipFill>
+          <p:spPr>
+            <a:xfrm>
+              <a:off x="2680" y="310"/>
+              <a:ext cx="7930" cy="7930"/>
+            </a:xfrm>
+            <a:prstGeom prst="rect">
+              <a:avLst/>
+            </a:prstGeom>
+          </p:spPr>
+        </p:pic>
+        <p:pic>
+          <p:nvPicPr>
+            <p:cNvPr id="81" name="图片 80"/>
+            <p:cNvPicPr/>
+            <p:nvPr/>
+          </p:nvPicPr>
+          <p:blipFill>
+            <a:blip r:embed="rId13"/>
+            <a:srcRect l="-2695" t="-3168" r="-2879" b="-945"/>
+            <a:stretch>
+              <a:fillRect/>
+            </a:stretch>
+          </p:blipFill>
+          <p:spPr>
+            <a:xfrm>
+              <a:off x="5205" y="1185"/>
+              <a:ext cx="2860" cy="5950"/>
+            </a:xfrm>
+            <a:prstGeom prst="roundRect">
+              <a:avLst/>
+            </a:prstGeom>
+          </p:spPr>
+        </p:pic>
+      </p:grpSp>
+      <p:sp>
+        <p:nvSpPr>
+          <p:cNvPr id="82" name="文本框 81"/>
+          <p:cNvSpPr txBox="1"/>
+          <p:nvPr/>
+        </p:nvSpPr>
+        <p:spPr>
+          <a:xfrm>
+            <a:off x="3202940" y="4794885"/>
+            <a:ext cx="2298065" cy="272415"/>
+          </a:xfrm>
+          <a:prstGeom prst="rect">
+            <a:avLst/>
+          </a:prstGeom>
+          <a:noFill/>
+        </p:spPr>
+        <p:txBody>
+          <a:bodyPr wrap="square" rtlCol="0">
+            <a:noAutofit/>
+          </a:bodyPr>
+          <a:p>
+            <a:pPr algn="ctr"/>
+            <a:r>
+              <a:rPr lang="en-US" altLang="zh-CN" sz="1200">
+                <a:latin typeface="Times New Roman" panose="02020603050405020304" charset="0"/>
+                <a:cs typeface="Times New Roman" panose="02020603050405020304" charset="0"/>
+                <a:sym typeface="+mn-ea"/>
+              </a:rPr>
+              <a:t>amount=</a:t>
+            </a:r>
+            <a:r>
+              <a:rPr lang="en-US" altLang="zh-CN" sz="1200">
+                <a:solidFill>
+                  <a:srgbClr val="0070C0"/>
+                </a:solidFill>
+                <a:latin typeface="Times New Roman" panose="02020603050405020304" charset="0"/>
+                <a:cs typeface="Times New Roman" panose="02020603050405020304" charset="0"/>
+                <a:sym typeface="+mn-ea"/>
+              </a:rPr>
+              <a:t>aaaa</a:t>
+            </a:r>
+            <a:r>
+              <a:rPr lang="en-US" altLang="zh-CN" sz="1200">
+                <a:latin typeface="Times New Roman" panose="02020603050405020304" charset="0"/>
+                <a:cs typeface="Times New Roman" panose="02020603050405020304" charset="0"/>
+                <a:sym typeface="+mn-ea"/>
+              </a:rPr>
+              <a:t>&amp;description=</a:t>
+            </a:r>
+            <a:r>
+              <a:rPr lang="en-US" altLang="zh-CN" sz="1200">
+                <a:solidFill>
+                  <a:srgbClr val="0070C0"/>
+                </a:solidFill>
+                <a:latin typeface="Times New Roman" panose="02020603050405020304" charset="0"/>
+                <a:cs typeface="Times New Roman" panose="02020603050405020304" charset="0"/>
+                <a:sym typeface="+mn-ea"/>
+              </a:rPr>
+              <a:t>bbbb</a:t>
+            </a:r>
+            <a:r>
+              <a:rPr lang="en-US" altLang="zh-CN" sz="1200">
+                <a:latin typeface="Times New Roman" panose="02020603050405020304" charset="0"/>
+                <a:cs typeface="Times New Roman" panose="02020603050405020304" charset="0"/>
+                <a:sym typeface="+mn-ea"/>
+              </a:rPr>
+              <a:t>&amp;order_id=</a:t>
+            </a:r>
+            <a:r>
+              <a:rPr lang="en-US" altLang="zh-CN" sz="1200">
+                <a:solidFill>
+                  <a:srgbClr val="C00000"/>
+                </a:solidFill>
+                <a:latin typeface="Times New Roman" panose="02020603050405020304" charset="0"/>
+                <a:cs typeface="Times New Roman" panose="02020603050405020304" charset="0"/>
+                <a:sym typeface="+mn-ea"/>
+              </a:rPr>
+              <a:t>xxxx</a:t>
+            </a:r>
+            <a:r>
+              <a:rPr lang="en-US" altLang="zh-CN" sz="1200">
+                <a:latin typeface="Times New Roman" panose="02020603050405020304" charset="0"/>
+                <a:cs typeface="Times New Roman" panose="02020603050405020304" charset="0"/>
+                <a:sym typeface="+mn-ea"/>
+              </a:rPr>
+              <a:t>&amp;sign=</a:t>
+            </a:r>
+            <a:r>
+              <a:rPr lang="en-US" altLang="zh-CN" sz="1200">
+                <a:solidFill>
+                  <a:srgbClr val="C00000"/>
+                </a:solidFill>
+                <a:latin typeface="Times New Roman" panose="02020603050405020304" charset="0"/>
+                <a:cs typeface="Times New Roman" panose="02020603050405020304" charset="0"/>
+                <a:sym typeface="+mn-ea"/>
+              </a:rPr>
+              <a:t>……</a:t>
+            </a:r>
+            <a:endParaRPr lang="en-US" altLang="zh-CN" sz="1200">
+              <a:solidFill>
+                <a:srgbClr val="C00000"/>
+              </a:solidFill>
+              <a:latin typeface="Times New Roman" panose="02020603050405020304" charset="0"/>
+              <a:cs typeface="Times New Roman" panose="02020603050405020304" charset="0"/>
+              <a:sym typeface="+mn-ea"/>
+            </a:endParaRPr>
+          </a:p>
+        </p:txBody>
+      </p:sp>
+      <p:sp>
+        <p:nvSpPr>
+          <p:cNvPr id="83" name="文本框 82"/>
+          <p:cNvSpPr txBox="1"/>
+          <p:nvPr/>
+        </p:nvSpPr>
+        <p:spPr>
+          <a:xfrm>
+            <a:off x="3171190" y="2698750"/>
+            <a:ext cx="2298065" cy="272415"/>
+          </a:xfrm>
+          <a:prstGeom prst="rect">
+            <a:avLst/>
+          </a:prstGeom>
+          <a:noFill/>
+        </p:spPr>
+        <p:txBody>
+          <a:bodyPr wrap="square" rtlCol="0">
+            <a:noAutofit/>
+          </a:bodyPr>
+          <a:p>
+            <a:pPr algn="ctr"/>
+            <a:r>
+              <a:rPr lang="en-US" altLang="zh-CN" sz="1200">
+                <a:latin typeface="Times New Roman" panose="02020603050405020304" charset="0"/>
+                <a:cs typeface="Times New Roman" panose="02020603050405020304" charset="0"/>
+              </a:rPr>
+              <a:t>amount=</a:t>
+            </a:r>
+            <a:r>
+              <a:rPr lang="en-US" altLang="zh-CN" sz="1200">
+                <a:solidFill>
+                  <a:srgbClr val="0070C0"/>
+                </a:solidFill>
+                <a:latin typeface="Times New Roman" panose="02020603050405020304" charset="0"/>
+                <a:cs typeface="Times New Roman" panose="02020603050405020304" charset="0"/>
+              </a:rPr>
+              <a:t>aaaa</a:t>
+            </a:r>
+            <a:r>
+              <a:rPr lang="en-US" altLang="zh-CN" sz="1200">
+                <a:latin typeface="Times New Roman" panose="02020603050405020304" charset="0"/>
+                <a:cs typeface="Times New Roman" panose="02020603050405020304" charset="0"/>
+              </a:rPr>
+              <a:t>&amp;description=</a:t>
+            </a:r>
+            <a:r>
+              <a:rPr lang="en-US" altLang="zh-CN" sz="1200">
+                <a:solidFill>
+                  <a:srgbClr val="0070C0"/>
+                </a:solidFill>
+                <a:latin typeface="Times New Roman" panose="02020603050405020304" charset="0"/>
+                <a:cs typeface="Times New Roman" panose="02020603050405020304" charset="0"/>
+              </a:rPr>
+              <a:t>bbbb</a:t>
+            </a:r>
+            <a:r>
+              <a:rPr lang="en-US" altLang="zh-CN" sz="1200">
+                <a:latin typeface="Times New Roman" panose="02020603050405020304" charset="0"/>
+                <a:cs typeface="Times New Roman" panose="02020603050405020304" charset="0"/>
+              </a:rPr>
+              <a:t>&amp;order_id=</a:t>
+            </a:r>
+            <a:r>
+              <a:rPr lang="en-US" altLang="zh-CN" sz="1200">
+                <a:solidFill>
+                  <a:srgbClr val="0070C0"/>
+                </a:solidFill>
+                <a:latin typeface="Times New Roman" panose="02020603050405020304" charset="0"/>
+                <a:cs typeface="Times New Roman" panose="02020603050405020304" charset="0"/>
+              </a:rPr>
+              <a:t>cccc</a:t>
+            </a:r>
+            <a:r>
+              <a:rPr lang="en-US" altLang="zh-CN" sz="1200">
+                <a:solidFill>
+                  <a:schemeClr val="tx1"/>
+                </a:solidFill>
+                <a:latin typeface="Times New Roman" panose="02020603050405020304" charset="0"/>
+                <a:cs typeface="Times New Roman" panose="02020603050405020304" charset="0"/>
+              </a:rPr>
+              <a:t>&amp;sign=</a:t>
+            </a:r>
+            <a:r>
+              <a:rPr lang="en-US" altLang="zh-CN" sz="1200">
+                <a:solidFill>
+                  <a:srgbClr val="0070C0"/>
+                </a:solidFill>
+                <a:latin typeface="Times New Roman" panose="02020603050405020304" charset="0"/>
+                <a:cs typeface="Times New Roman" panose="02020603050405020304" charset="0"/>
+                <a:sym typeface="+mn-ea"/>
+              </a:rPr>
+              <a:t>……</a:t>
+            </a:r>
+            <a:endParaRPr lang="en-US" altLang="zh-CN" sz="1200">
+              <a:solidFill>
+                <a:srgbClr val="0070C0"/>
+              </a:solidFill>
+              <a:latin typeface="Times New Roman" panose="02020603050405020304" charset="0"/>
+              <a:cs typeface="Times New Roman" panose="02020603050405020304" charset="0"/>
+              <a:sym typeface="+mn-ea"/>
+            </a:endParaRPr>
+          </a:p>
+        </p:txBody>
+      </p:sp>
+      <p:grpSp>
+        <p:nvGrpSpPr>
+          <p:cNvPr id="88" name="组合 87"/>
+          <p:cNvGrpSpPr/>
+          <p:nvPr/>
+        </p:nvGrpSpPr>
+        <p:grpSpPr>
+          <a:xfrm>
+            <a:off x="7968615" y="4237200"/>
+            <a:ext cx="1339200" cy="1123200"/>
+            <a:chOff x="12523" y="1705"/>
+            <a:chExt cx="7930" cy="7930"/>
+          </a:xfrm>
+        </p:grpSpPr>
+        <p:pic>
+          <p:nvPicPr>
+            <p:cNvPr id="85" name="图片 84" descr="ef56901b-e67b-48c3-91cc-2ffb6efbef1e"/>
+            <p:cNvPicPr>
+              <a:picLocks noChangeAspect="1"/>
+            </p:cNvPicPr>
+            <p:nvPr/>
+          </p:nvPicPr>
+          <p:blipFill>
+            <a:blip r:embed="rId11"/>
+            <a:stretch>
+              <a:fillRect/>
+            </a:stretch>
+          </p:blipFill>
+          <p:spPr>
+            <a:xfrm>
+              <a:off x="12523" y="1705"/>
+              <a:ext cx="7930" cy="7930"/>
+            </a:xfrm>
+            <a:prstGeom prst="rect">
+              <a:avLst/>
+            </a:prstGeom>
+          </p:spPr>
+        </p:pic>
+        <p:pic>
+          <p:nvPicPr>
+            <p:cNvPr id="86" name="图片 85"/>
+            <p:cNvPicPr>
+              <a:picLocks noChangeAspect="1"/>
+            </p:cNvPicPr>
+            <p:nvPr/>
+          </p:nvPicPr>
+          <p:blipFill>
+            <a:blip r:embed="rId14"/>
+            <a:srcRect l="-3720" t="-1175" r="-2518" b="-684"/>
+            <a:stretch>
+              <a:fillRect/>
+            </a:stretch>
+          </p:blipFill>
+          <p:spPr>
+            <a:xfrm>
+              <a:off x="15054" y="2702"/>
+              <a:ext cx="2827" cy="5807"/>
+            </a:xfrm>
+            <a:prstGeom prst="roundRect">
+              <a:avLst/>
+            </a:prstGeom>
+          </p:spPr>
+        </p:pic>
+      </p:grpSp>
+      <p:pic>
+        <p:nvPicPr>
+          <p:cNvPr id="89" name="图片 88" descr="恶魔"/>
+          <p:cNvPicPr>
+            <a:picLocks noChangeAspect="1"/>
+          </p:cNvPicPr>
+          <p:nvPr/>
+        </p:nvPicPr>
+        <p:blipFill>
+          <a:blip r:embed="rId3">
+            <a:extLst>
+              <a:ext uri="{96DAC541-7B7A-43D3-8B79-37D633B846F1}">
+                <asvg:svgBlip xmlns:asvg="http://schemas.microsoft.com/office/drawing/2016/SVG/main" r:embed="rId4"/>
+              </a:ext>
+            </a:extLst>
+          </a:blip>
+          <a:stretch>
+            <a:fillRect/>
+          </a:stretch>
+        </p:blipFill>
+        <p:spPr>
+          <a:xfrm>
+            <a:off x="5979160" y="1665605"/>
+            <a:ext cx="337820" cy="337820"/>
+          </a:xfrm>
+          <a:prstGeom prst="rect">
+            <a:avLst/>
+          </a:prstGeom>
+        </p:spPr>
+      </p:pic>
+      <p:sp>
+        <p:nvSpPr>
+          <p:cNvPr id="90" name="任意多边形 89"/>
+          <p:cNvSpPr/>
+          <p:nvPr/>
+        </p:nvSpPr>
+        <p:spPr>
+          <a:xfrm>
+            <a:off x="5986780" y="3003550"/>
+            <a:ext cx="361950" cy="1435100"/>
+          </a:xfrm>
+          <a:custGeom>
+            <a:avLst/>
+            <a:gdLst>
+              <a:gd name="connisteX0" fmla="*/ 0 w 362087"/>
+              <a:gd name="connsiteY0" fmla="*/ 0 h 1435100"/>
+              <a:gd name="connisteX1" fmla="*/ 361950 w 362087"/>
+              <a:gd name="connsiteY1" fmla="*/ 705485 h 1435100"/>
+              <a:gd name="connisteX2" fmla="*/ 36195 w 362087"/>
+              <a:gd name="connsiteY2" fmla="*/ 1435100 h 1435100"/>
+            </a:gdLst>
+            <a:ahLst/>
+            <a:cxnLst>
+              <a:cxn ang="0">
+                <a:pos x="connisteX0" y="connsiteY0"/>
+              </a:cxn>
+              <a:cxn ang="0">
+                <a:pos x="connisteX1" y="connsiteY1"/>
+              </a:cxn>
+              <a:cxn ang="0">
+                <a:pos x="connisteX2" y="connsiteY2"/>
+              </a:cxn>
+            </a:cxnLst>
+            <a:rect l="l" t="t" r="r" b="b"/>
+            <a:pathLst>
+              <a:path w="362088" h="1435100">
+                <a:moveTo>
+                  <a:pt x="0" y="0"/>
+                </a:moveTo>
+                <a:cubicBezTo>
+                  <a:pt x="78740" y="126365"/>
+                  <a:pt x="354965" y="418465"/>
+                  <a:pt x="361950" y="705485"/>
+                </a:cubicBezTo>
+                <a:cubicBezTo>
+                  <a:pt x="368935" y="992505"/>
+                  <a:pt x="108585" y="1303020"/>
+                  <a:pt x="36195" y="1435100"/>
+                </a:cubicBezTo>
+              </a:path>
+            </a:pathLst>
+          </a:custGeom>
+          <a:noFill/>
+          <a:ln w="38100">
+            <a:solidFill>
+              <a:srgbClr val="C00000"/>
+            </a:solidFill>
+            <a:tailEnd type="triangle"/>
+          </a:ln>
+        </p:spPr>
+        <p:style>
+          <a:lnRef idx="2">
+            <a:schemeClr val="accent1">
+              <a:lumMod val="75000"/>
+            </a:schemeClr>
+          </a:lnRef>
+          <a:fillRef idx="1">
+            <a:schemeClr val="accent1"/>
+          </a:fillRef>
+          <a:effectRef idx="0">
+            <a:srgbClr val="FFFFFF"/>
+          </a:effectRef>
+          <a:fontRef idx="minor">
+            <a:schemeClr val="lt1"/>
+          </a:fontRef>
+        </p:style>
+        <p:txBody>
+          <a:bodyPr rtlCol="0" anchor="ctr"/>
+          <a:p>
+            <a:pPr algn="ctr"/>
+            <a:endParaRPr lang="zh-CN" altLang="en-US"/>
+          </a:p>
+        </p:txBody>
+      </p:sp>
+    </p:spTree>
+  </p:cSld>
+  <p:clrMapOvr>
+    <a:masterClrMapping/>
+  </p:clrMapOvr>
+</p:sld>
+</file>
+
+<file path=ppt/slides/slide5.xml><?xml version="1.0" encoding="utf-8"?>
+<p:sld xmlns:a="http://schemas.openxmlformats.org/drawingml/2006/main" xmlns:r="http://schemas.openxmlformats.org/officeDocument/2006/relationships" xmlns:p="http://schemas.openxmlformats.org/presentationml/2006/main">
+  <p:cSld>
+    <p:spTree>
+      <p:nvGrpSpPr>
+        <p:cNvPr id="1" name=""/>
+        <p:cNvGrpSpPr/>
+        <p:nvPr/>
+      </p:nvGrpSpPr>
+      <p:grpSpPr/>
+      <p:sp>
+        <p:nvSpPr>
+          <p:cNvPr id="38" name="矩形 37"/>
+          <p:cNvSpPr/>
+          <p:nvPr/>
+        </p:nvSpPr>
+        <p:spPr>
+          <a:xfrm>
+            <a:off x="1624965" y="3774440"/>
+            <a:ext cx="7439025" cy="1589405"/>
+          </a:xfrm>
+          <a:prstGeom prst="rect">
+            <a:avLst/>
+          </a:prstGeom>
+          <a:solidFill>
+            <a:srgbClr val="EAEAEA"/>
+          </a:solidFill>
+          <a:ln>
+            <a:noFill/>
+          </a:ln>
+        </p:spPr>
+        <p:style>
+          <a:lnRef idx="2">
+            <a:schemeClr val="accent1">
+              <a:lumMod val="75000"/>
+            </a:schemeClr>
+          </a:lnRef>
+          <a:fillRef idx="1">
+            <a:schemeClr val="accent1"/>
+          </a:fillRef>
+          <a:effectRef idx="0">
+            <a:srgbClr val="FFFFFF"/>
+          </a:effectRef>
+          <a:fontRef idx="minor">
+            <a:schemeClr val="lt1"/>
+          </a:fontRef>
+        </p:style>
+        <p:txBody>
+          <a:bodyPr rtlCol="0" anchor="ctr"/>
+          <a:p>
+            <a:pPr algn="ctr"/>
             <a:endParaRPr lang="zh-CN" altLang="en-US">
               <a:latin typeface="Times New Roman" panose="02020603050405020304" charset="0"/>
               <a:cs typeface="Times New Roman" panose="02020603050405020304" charset="0"/>
@@ -6516,8 +8780,8 @@
         </p:nvSpPr>
         <p:spPr>
           <a:xfrm>
-            <a:off x="1617980" y="2262505"/>
-            <a:ext cx="7439025" cy="1235710"/>
+            <a:off x="1617980" y="1366520"/>
+            <a:ext cx="7439025" cy="2131695"/>
           </a:xfrm>
           <a:prstGeom prst="rect">
             <a:avLst/>
@@ -8123,27 +10387,20 @@
         </p:nvSpPr>
         <p:spPr>
           <a:xfrm>
-            <a:off x="1624965" y="2275840"/>
+            <a:off x="1431290" y="1196340"/>
             <a:ext cx="1211580" cy="539115"/>
           </a:xfrm>
           <a:prstGeom prst="rect">
             <a:avLst/>
           </a:prstGeom>
-          <a:noFill/>
+          <a:solidFill>
+            <a:srgbClr val="EAEAEA"/>
+          </a:solidFill>
           <a:ln>
             <a:solidFill>
               <a:schemeClr val="tx1"/>
             </a:solidFill>
           </a:ln>
-          <a:extLst>
-            <a:ext uri="{909E8E84-426E-40DD-AFC4-6F175D3DCCD1}">
-              <a14:hiddenFill xmlns:a14="http://schemas.microsoft.com/office/drawing/2010/main">
-                <a:solidFill>
-                  <a:schemeClr val="accent1"/>
-                </a:solidFill>
-              </a14:hiddenFill>
-            </a:ext>
-          </a:extLst>
         </p:spPr>
         <p:style>
           <a:lnRef idx="2">
@@ -8397,7 +10654,7 @@
 </p:sld>
 </file>
 
-<file path=ppt/slides/slide5.xml><?xml version="1.0" encoding="utf-8"?>
+<file path=ppt/slides/slide6.xml><?xml version="1.0" encoding="utf-8"?>
 <p:sld xmlns:a="http://schemas.openxmlformats.org/drawingml/2006/main" xmlns:r="http://schemas.openxmlformats.org/officeDocument/2006/relationships" xmlns:p="http://schemas.openxmlformats.org/presentationml/2006/main">
   <p:cSld>
     <p:spTree>
@@ -8590,7 +10847,7 @@
 </p:sld>
 </file>
 
-<file path=ppt/slides/slide6.xml><?xml version="1.0" encoding="utf-8"?>
+<file path=ppt/slides/slide7.xml><?xml version="1.0" encoding="utf-8"?>
 <p:sld xmlns:a="http://schemas.openxmlformats.org/drawingml/2006/main" xmlns:r="http://schemas.openxmlformats.org/officeDocument/2006/relationships" xmlns:p="http://schemas.openxmlformats.org/presentationml/2006/main">
   <p:cSld>
     <p:spTree>
@@ -9507,7 +11764,7 @@
 </p:sld>
 </file>
 
-<file path=ppt/slides/slide7.xml><?xml version="1.0" encoding="utf-8"?>
+<file path=ppt/slides/slide8.xml><?xml version="1.0" encoding="utf-8"?>
 <p:sld xmlns:a="http://schemas.openxmlformats.org/drawingml/2006/main" xmlns:r="http://schemas.openxmlformats.org/officeDocument/2006/relationships" xmlns:p="http://schemas.openxmlformats.org/presentationml/2006/main">
   <p:cSld>
     <p:spTree>
@@ -10245,7 +12502,7 @@
 </p:sld>
 </file>
 
-<file path=ppt/slides/slide8.xml><?xml version="1.0" encoding="utf-8"?>
+<file path=ppt/slides/slide9.xml><?xml version="1.0" encoding="utf-8"?>
 <p:sld xmlns:a="http://schemas.openxmlformats.org/drawingml/2006/main" xmlns:r="http://schemas.openxmlformats.org/officeDocument/2006/relationships" xmlns:p="http://schemas.openxmlformats.org/presentationml/2006/main">
   <p:cSld>
     <p:spTree>
@@ -11384,4 +13641,263 @@
     </a:ext>
   </a:extLst>
 </a:theme>
+</file>
+
+<file path=ppt/theme/theme2.xml><?xml version="1.0" encoding="utf-8"?>
+<a:theme xmlns:a="http://schemas.openxmlformats.org/drawingml/2006/main" name="Office 主题">
+  <a:themeElements>
+    <a:clrScheme name="Office">
+      <a:dk1>
+        <a:sysClr val="windowText" lastClr="000000"/>
+      </a:dk1>
+      <a:lt1>
+        <a:sysClr val="window" lastClr="FFFFFF"/>
+      </a:lt1>
+      <a:dk2>
+        <a:srgbClr val="44546A"/>
+      </a:dk2>
+      <a:lt2>
+        <a:srgbClr val="E7E6E6"/>
+      </a:lt2>
+      <a:accent1>
+        <a:srgbClr val="5B9BD5"/>
+      </a:accent1>
+      <a:accent2>
+        <a:srgbClr val="ED7D31"/>
+      </a:accent2>
+      <a:accent3>
+        <a:srgbClr val="A5A5A5"/>
+      </a:accent3>
+      <a:accent4>
+        <a:srgbClr val="FFC000"/>
+      </a:accent4>
+      <a:accent5>
+        <a:srgbClr val="4472C4"/>
+      </a:accent5>
+      <a:accent6>
+        <a:srgbClr val="70AD47"/>
+      </a:accent6>
+      <a:hlink>
+        <a:srgbClr val="0563C1"/>
+      </a:hlink>
+      <a:folHlink>
+        <a:srgbClr val="954F72"/>
+      </a:folHlink>
+    </a:clrScheme>
+    <a:fontScheme name="Office">
+      <a:majorFont>
+        <a:latin typeface="Calibri Light"/>
+        <a:ea typeface=""/>
+        <a:cs typeface=""/>
+        <a:font script="Jpan" typeface="ＭＳ Ｐゴシック"/>
+        <a:font script="Hang" typeface="맑은 고딕"/>
+        <a:font script="Hans" typeface="宋体"/>
+        <a:font script="Hant" typeface="新細明體"/>
+        <a:font script="Arab" typeface="Times New Roman"/>
+        <a:font script="Hebr" typeface="Times New Roman"/>
+        <a:font script="Thai" typeface="Angsana New"/>
+        <a:font script="Ethi" typeface="Nyala"/>
+        <a:font script="Beng" typeface="Vrinda"/>
+        <a:font script="Gujr" typeface="Shruti"/>
+        <a:font script="Khmr" typeface="MoolBoran"/>
+        <a:font script="Knda" typeface="Tunga"/>
+        <a:font script="Guru" typeface="Raavi"/>
+        <a:font script="Cans" typeface="Euphemia"/>
+        <a:font script="Cher" typeface="Plantagenet Cherokee"/>
+        <a:font script="Yiii" typeface="Microsoft Yi Baiti"/>
+        <a:font script="Tibt" typeface="Microsoft Himalaya"/>
+        <a:font script="Thaa" typeface="MV Boli"/>
+        <a:font script="Deva" typeface="Mangal"/>
+        <a:font script="Telu" typeface="Gautami"/>
+        <a:font script="Taml" typeface="Latha"/>
+        <a:font script="Syrc" typeface="Estrangelo Edessa"/>
+        <a:font script="Orya" typeface="Kalinga"/>
+        <a:font script="Mlym" typeface="Kartika"/>
+        <a:font script="Laoo" typeface="DokChampa"/>
+        <a:font script="Sinh" typeface="Iskoola Pota"/>
+        <a:font script="Mong" typeface="Mongolian Baiti"/>
+        <a:font script="Viet" typeface="Times New Roman"/>
+        <a:font script="Uigh" typeface="Microsoft Uighur"/>
+        <a:font script="Geor" typeface="Sylfaen"/>
+      </a:majorFont>
+      <a:minorFont>
+        <a:latin typeface="Calibri"/>
+        <a:ea typeface=""/>
+        <a:cs typeface=""/>
+        <a:font script="Jpan" typeface="ＭＳ Ｐゴシック"/>
+        <a:font script="Hang" typeface="맑은 고딕"/>
+        <a:font script="Hans" typeface="宋体"/>
+        <a:font script="Hant" typeface="新細明體"/>
+        <a:font script="Arab" typeface="Arial"/>
+        <a:font script="Hebr" typeface="Arial"/>
+        <a:font script="Thai" typeface="Cordia New"/>
+        <a:font script="Ethi" typeface="Nyala"/>
+        <a:font script="Beng" typeface="Vrinda"/>
+        <a:font script="Gujr" typeface="Shruti"/>
+        <a:font script="Khmr" typeface="DaunPenh"/>
+        <a:font script="Knda" typeface="Tunga"/>
+        <a:font script="Guru" typeface="Raavi"/>
+        <a:font script="Cans" typeface="Euphemia"/>
+        <a:font script="Cher" typeface="Plantagenet Cherokee"/>
+        <a:font script="Yiii" typeface="Microsoft Yi Baiti"/>
+        <a:font script="Tibt" typeface="Microsoft Himalaya"/>
+        <a:font script="Thaa" typeface="MV Boli"/>
+        <a:font script="Deva" typeface="Mangal"/>
+        <a:font script="Telu" typeface="Gautami"/>
+        <a:font script="Taml" typeface="Latha"/>
+        <a:font script="Syrc" typeface="Estrangelo Edessa"/>
+        <a:font script="Orya" typeface="Kalinga"/>
+        <a:font script="Mlym" typeface="Kartika"/>
+        <a:font script="Laoo" typeface="DokChampa"/>
+        <a:font script="Sinh" typeface="Iskoola Pota"/>
+        <a:font script="Mong" typeface="Mongolian Baiti"/>
+        <a:font script="Viet" typeface="Arial"/>
+        <a:font script="Uigh" typeface="Microsoft Uighur"/>
+        <a:font script="Geor" typeface="Sylfaen"/>
+      </a:minorFont>
+    </a:fontScheme>
+    <a:fmtScheme name="Office">
+      <a:fillStyleLst>
+        <a:solidFill>
+          <a:schemeClr val="phClr"/>
+        </a:solidFill>
+        <a:gradFill rotWithShape="1">
+          <a:gsLst>
+            <a:gs pos="0">
+              <a:schemeClr val="phClr">
+                <a:lumMod val="110000"/>
+                <a:satMod val="105000"/>
+                <a:tint val="67000"/>
+              </a:schemeClr>
+            </a:gs>
+            <a:gs pos="50000">
+              <a:schemeClr val="phClr">
+                <a:lumMod val="105000"/>
+                <a:satMod val="103000"/>
+                <a:tint val="73000"/>
+              </a:schemeClr>
+            </a:gs>
+            <a:gs pos="100000">
+              <a:schemeClr val="phClr">
+                <a:lumMod val="105000"/>
+                <a:satMod val="109000"/>
+                <a:tint val="81000"/>
+              </a:schemeClr>
+            </a:gs>
+          </a:gsLst>
+          <a:lin ang="5400000" scaled="0"/>
+        </a:gradFill>
+        <a:gradFill rotWithShape="1">
+          <a:gsLst>
+            <a:gs pos="0">
+              <a:schemeClr val="phClr">
+                <a:satMod val="103000"/>
+                <a:lumMod val="102000"/>
+                <a:tint val="94000"/>
+              </a:schemeClr>
+            </a:gs>
+            <a:gs pos="50000">
+              <a:schemeClr val="phClr">
+                <a:satMod val="110000"/>
+                <a:lumMod val="100000"/>
+                <a:shade val="100000"/>
+              </a:schemeClr>
+            </a:gs>
+            <a:gs pos="100000">
+              <a:schemeClr val="phClr">
+                <a:lumMod val="99000"/>
+                <a:satMod val="120000"/>
+                <a:shade val="78000"/>
+              </a:schemeClr>
+            </a:gs>
+          </a:gsLst>
+          <a:lin ang="5400000" scaled="0"/>
+        </a:gradFill>
+      </a:fillStyleLst>
+      <a:lnStyleLst>
+        <a:ln w="6350" cap="flat" cmpd="sng" algn="ctr">
+          <a:solidFill>
+            <a:schemeClr val="phClr"/>
+          </a:solidFill>
+          <a:prstDash val="solid"/>
+          <a:miter lim="800000"/>
+        </a:ln>
+        <a:ln w="12700" cap="flat" cmpd="sng" algn="ctr">
+          <a:solidFill>
+            <a:schemeClr val="phClr"/>
+          </a:solidFill>
+          <a:prstDash val="solid"/>
+          <a:miter lim="800000"/>
+        </a:ln>
+        <a:ln w="19050" cap="flat" cmpd="sng" algn="ctr">
+          <a:solidFill>
+            <a:schemeClr val="phClr"/>
+          </a:solidFill>
+          <a:prstDash val="solid"/>
+          <a:miter lim="800000"/>
+        </a:ln>
+      </a:lnStyleLst>
+      <a:effectStyleLst>
+        <a:effectStyle>
+          <a:effectLst/>
+        </a:effectStyle>
+        <a:effectStyle>
+          <a:effectLst/>
+        </a:effectStyle>
+        <a:effectStyle>
+          <a:effectLst>
+            <a:outerShdw blurRad="57150" dist="19050" dir="5400000" algn="ctr" rotWithShape="0">
+              <a:srgbClr val="000000">
+                <a:alpha val="63000"/>
+              </a:srgbClr>
+            </a:outerShdw>
+          </a:effectLst>
+        </a:effectStyle>
+      </a:effectStyleLst>
+      <a:bgFillStyleLst>
+        <a:solidFill>
+          <a:schemeClr val="phClr"/>
+        </a:solidFill>
+        <a:solidFill>
+          <a:schemeClr val="phClr">
+            <a:tint val="95000"/>
+            <a:satMod val="170000"/>
+          </a:schemeClr>
+        </a:solidFill>
+        <a:gradFill rotWithShape="1">
+          <a:gsLst>
+            <a:gs pos="0">
+              <a:schemeClr val="phClr">
+                <a:tint val="93000"/>
+                <a:satMod val="150000"/>
+                <a:shade val="98000"/>
+                <a:lumMod val="102000"/>
+              </a:schemeClr>
+            </a:gs>
+            <a:gs pos="50000">
+              <a:schemeClr val="phClr">
+                <a:tint val="98000"/>
+                <a:satMod val="130000"/>
+                <a:shade val="90000"/>
+                <a:lumMod val="103000"/>
+              </a:schemeClr>
+            </a:gs>
+            <a:gs pos="100000">
+              <a:schemeClr val="phClr">
+                <a:shade val="63000"/>
+                <a:satMod val="120000"/>
+              </a:schemeClr>
+            </a:gs>
+          </a:gsLst>
+          <a:lin ang="5400000" scaled="0"/>
+        </a:gradFill>
+      </a:bgFillStyleLst>
+    </a:fmtScheme>
+  </a:themeElements>
+  <a:extLst>
+    <a:ext uri="{05A4C25C-085E-4340-85A3-A5531E510DB2}">
+      <thm15:themeFamily xmlns:thm15="http://schemas.microsoft.com/office/thememl/2012/main" name="Office Theme" id="{62F939B6-93AF-4DB8-9C6B-D6C7DFDC589F}" vid="{4A3C46E8-61CC-4603-A589-7422A47A8E4A}"/>
+    </a:ext>
+  </a:extLst>
+</a:theme>
 </file>
--- a/img-source/images.pptx
+++ b/img-source/images.pptx
@@ -14,9 +14,10 @@
     <p:sldId id="264" r:id="rId6"/>
     <p:sldId id="261" r:id="rId8"/>
     <p:sldId id="262" r:id="rId9"/>
-    <p:sldId id="257" r:id="rId10"/>
-    <p:sldId id="258" r:id="rId11"/>
-    <p:sldId id="263" r:id="rId12"/>
+    <p:sldId id="265" r:id="rId10"/>
+    <p:sldId id="257" r:id="rId11"/>
+    <p:sldId id="258" r:id="rId12"/>
+    <p:sldId id="263" r:id="rId13"/>
   </p:sldIdLst>
   <p:sldSz cx="12192000" cy="6858000"/>
   <p:notesSz cx="6858000" cy="9144000"/>
@@ -4453,6 +4454,896 @@
 </p:sld>
 </file>
 
+<file path=ppt/slides/slide10.xml><?xml version="1.0" encoding="utf-8"?>
+<p:sld xmlns:a="http://schemas.openxmlformats.org/drawingml/2006/main" xmlns:r="http://schemas.openxmlformats.org/officeDocument/2006/relationships" xmlns:p="http://schemas.openxmlformats.org/presentationml/2006/main">
+  <p:cSld>
+    <p:spTree>
+      <p:nvGrpSpPr>
+        <p:cNvPr id="1" name=""/>
+        <p:cNvGrpSpPr/>
+        <p:nvPr/>
+      </p:nvGrpSpPr>
+      <p:grpSpPr>
+        <a:xfrm>
+          <a:off x="0" y="0"/>
+          <a:ext cx="0" cy="0"/>
+          <a:chOff x="0" y="0"/>
+          <a:chExt cx="0" cy="0"/>
+        </a:xfrm>
+      </p:grpSpPr>
+      <p:pic>
+        <p:nvPicPr>
+          <p:cNvPr id="5" name="图形 4"/>
+          <p:cNvPicPr>
+            <a:picLocks noChangeAspect="1"/>
+          </p:cNvPicPr>
+          <p:nvPr/>
+        </p:nvPicPr>
+        <p:blipFill>
+          <a:blip r:embed="rId1" cstate="print">
+            <a:extLst>
+              <a:ext uri="{28A0092B-C50C-407E-A947-70E740481C1C}">
+                <a14:useLocalDpi xmlns:a14="http://schemas.microsoft.com/office/drawing/2010/main" val="0"/>
+              </a:ext>
+              <a:ext uri="{96DAC541-7B7A-43D3-8B79-37D633B846F1}">
+                <asvg:svgBlip xmlns:asvg="http://schemas.microsoft.com/office/drawing/2016/SVG/main" r:embed="rId2"/>
+              </a:ext>
+            </a:extLst>
+          </a:blip>
+          <a:stretch>
+            <a:fillRect/>
+          </a:stretch>
+        </p:blipFill>
+        <p:spPr>
+          <a:xfrm>
+            <a:off x="2822362" y="2921709"/>
+            <a:ext cx="720000" cy="720000"/>
+          </a:xfrm>
+          <a:prstGeom prst="rect">
+            <a:avLst/>
+          </a:prstGeom>
+        </p:spPr>
+      </p:pic>
+      <p:pic>
+        <p:nvPicPr>
+          <p:cNvPr id="7" name="图形 6"/>
+          <p:cNvPicPr>
+            <a:picLocks noChangeAspect="1"/>
+          </p:cNvPicPr>
+          <p:nvPr/>
+        </p:nvPicPr>
+        <p:blipFill>
+          <a:blip r:embed="rId3" cstate="print">
+            <a:extLst>
+              <a:ext uri="{28A0092B-C50C-407E-A947-70E740481C1C}">
+                <a14:useLocalDpi xmlns:a14="http://schemas.microsoft.com/office/drawing/2010/main" val="0"/>
+              </a:ext>
+              <a:ext uri="{96DAC541-7B7A-43D3-8B79-37D633B846F1}">
+                <asvg:svgBlip xmlns:asvg="http://schemas.microsoft.com/office/drawing/2016/SVG/main" r:embed="rId4"/>
+              </a:ext>
+            </a:extLst>
+          </a:blip>
+          <a:stretch>
+            <a:fillRect/>
+          </a:stretch>
+        </p:blipFill>
+        <p:spPr>
+          <a:xfrm>
+            <a:off x="3560303" y="4177618"/>
+            <a:ext cx="720000" cy="720000"/>
+          </a:xfrm>
+          <a:prstGeom prst="rect">
+            <a:avLst/>
+          </a:prstGeom>
+        </p:spPr>
+      </p:pic>
+      <p:sp>
+        <p:nvSpPr>
+          <p:cNvPr id="10" name="矩形 9"/>
+          <p:cNvSpPr/>
+          <p:nvPr/>
+        </p:nvSpPr>
+        <p:spPr>
+          <a:xfrm>
+            <a:off x="4737642" y="3834233"/>
+            <a:ext cx="1149465" cy="1031082"/>
+          </a:xfrm>
+          <a:prstGeom prst="rect">
+            <a:avLst/>
+          </a:prstGeom>
+          <a:noFill/>
+          <a:ln w="19050">
+            <a:solidFill>
+              <a:schemeClr val="tx1"/>
+            </a:solidFill>
+            <a:prstDash val="dash"/>
+          </a:ln>
+        </p:spPr>
+        <p:style>
+          <a:lnRef idx="2">
+            <a:schemeClr val="accent1">
+              <a:shade val="50000"/>
+            </a:schemeClr>
+          </a:lnRef>
+          <a:fillRef idx="1">
+            <a:schemeClr val="accent1"/>
+          </a:fillRef>
+          <a:effectRef idx="0">
+            <a:schemeClr val="accent1"/>
+          </a:effectRef>
+          <a:fontRef idx="minor">
+            <a:schemeClr val="lt1"/>
+          </a:fontRef>
+        </p:style>
+        <p:txBody>
+          <a:bodyPr rtlCol="0" anchor="ctr"/>
+          <a:lstStyle/>
+          <a:p>
+            <a:pPr algn="ctr"/>
+            <a:endParaRPr lang="zh-CN" altLang="en-US"/>
+          </a:p>
+        </p:txBody>
+      </p:sp>
+      <p:pic>
+        <p:nvPicPr>
+          <p:cNvPr id="11" name="图形 10"/>
+          <p:cNvPicPr>
+            <a:picLocks noChangeAspect="1"/>
+          </p:cNvPicPr>
+          <p:nvPr/>
+        </p:nvPicPr>
+        <p:blipFill>
+          <a:blip r:embed="rId5" cstate="print">
+            <a:extLst>
+              <a:ext uri="{28A0092B-C50C-407E-A947-70E740481C1C}">
+                <a14:useLocalDpi xmlns:a14="http://schemas.microsoft.com/office/drawing/2010/main" val="0"/>
+              </a:ext>
+              <a:ext uri="{96DAC541-7B7A-43D3-8B79-37D633B846F1}">
+                <asvg:svgBlip xmlns:asvg="http://schemas.microsoft.com/office/drawing/2016/SVG/main" r:embed="rId6"/>
+              </a:ext>
+            </a:extLst>
+          </a:blip>
+          <a:stretch>
+            <a:fillRect/>
+          </a:stretch>
+        </p:blipFill>
+        <p:spPr>
+          <a:xfrm>
+            <a:off x="6586853" y="4004457"/>
+            <a:ext cx="720000" cy="720000"/>
+          </a:xfrm>
+          <a:prstGeom prst="rect">
+            <a:avLst/>
+          </a:prstGeom>
+        </p:spPr>
+      </p:pic>
+      <p:pic>
+        <p:nvPicPr>
+          <p:cNvPr id="12" name="图形 11"/>
+          <p:cNvPicPr>
+            <a:picLocks noChangeAspect="1"/>
+          </p:cNvPicPr>
+          <p:nvPr/>
+        </p:nvPicPr>
+        <p:blipFill>
+          <a:blip r:embed="rId7" cstate="print">
+            <a:extLst>
+              <a:ext uri="{28A0092B-C50C-407E-A947-70E740481C1C}">
+                <a14:useLocalDpi xmlns:a14="http://schemas.microsoft.com/office/drawing/2010/main" val="0"/>
+              </a:ext>
+              <a:ext uri="{96DAC541-7B7A-43D3-8B79-37D633B846F1}">
+                <asvg:svgBlip xmlns:asvg="http://schemas.microsoft.com/office/drawing/2016/SVG/main" r:embed="rId8"/>
+              </a:ext>
+            </a:extLst>
+          </a:blip>
+          <a:stretch>
+            <a:fillRect/>
+          </a:stretch>
+        </p:blipFill>
+        <p:spPr>
+          <a:xfrm>
+            <a:off x="4976873" y="3945870"/>
+            <a:ext cx="720000" cy="720000"/>
+          </a:xfrm>
+          <a:prstGeom prst="rect">
+            <a:avLst/>
+          </a:prstGeom>
+        </p:spPr>
+      </p:pic>
+      <p:pic>
+        <p:nvPicPr>
+          <p:cNvPr id="13" name="图形 12"/>
+          <p:cNvPicPr>
+            <a:picLocks noChangeAspect="1"/>
+          </p:cNvPicPr>
+          <p:nvPr/>
+        </p:nvPicPr>
+        <p:blipFill>
+          <a:blip r:embed="rId9" cstate="print">
+            <a:extLst>
+              <a:ext uri="{28A0092B-C50C-407E-A947-70E740481C1C}">
+                <a14:useLocalDpi xmlns:a14="http://schemas.microsoft.com/office/drawing/2010/main" val="0"/>
+              </a:ext>
+              <a:ext uri="{96DAC541-7B7A-43D3-8B79-37D633B846F1}">
+                <asvg:svgBlip xmlns:asvg="http://schemas.microsoft.com/office/drawing/2016/SVG/main" r:embed="rId10"/>
+              </a:ext>
+            </a:extLst>
+          </a:blip>
+          <a:stretch>
+            <a:fillRect/>
+          </a:stretch>
+        </p:blipFill>
+        <p:spPr>
+          <a:xfrm>
+            <a:off x="7537211" y="2805976"/>
+            <a:ext cx="720000" cy="720000"/>
+          </a:xfrm>
+          <a:prstGeom prst="rect">
+            <a:avLst/>
+          </a:prstGeom>
+        </p:spPr>
+      </p:pic>
+      <p:pic>
+        <p:nvPicPr>
+          <p:cNvPr id="14" name="图形 13"/>
+          <p:cNvPicPr>
+            <a:picLocks noChangeAspect="1"/>
+          </p:cNvPicPr>
+          <p:nvPr/>
+        </p:nvPicPr>
+        <p:blipFill>
+          <a:blip r:embed="rId11" cstate="print">
+            <a:extLst>
+              <a:ext uri="{28A0092B-C50C-407E-A947-70E740481C1C}">
+                <a14:useLocalDpi xmlns:a14="http://schemas.microsoft.com/office/drawing/2010/main" val="0"/>
+              </a:ext>
+              <a:ext uri="{96DAC541-7B7A-43D3-8B79-37D633B846F1}">
+                <asvg:svgBlip xmlns:asvg="http://schemas.microsoft.com/office/drawing/2016/SVG/main" r:embed="rId12"/>
+              </a:ext>
+            </a:extLst>
+          </a:blip>
+          <a:stretch>
+            <a:fillRect/>
+          </a:stretch>
+        </p:blipFill>
+        <p:spPr>
+          <a:xfrm>
+            <a:off x="8484895" y="2708360"/>
+            <a:ext cx="495891" cy="495891"/>
+          </a:xfrm>
+          <a:prstGeom prst="rect">
+            <a:avLst/>
+          </a:prstGeom>
+        </p:spPr>
+      </p:pic>
+      <p:pic>
+        <p:nvPicPr>
+          <p:cNvPr id="15" name="图形 14"/>
+          <p:cNvPicPr>
+            <a:picLocks noChangeAspect="1"/>
+          </p:cNvPicPr>
+          <p:nvPr/>
+        </p:nvPicPr>
+        <p:blipFill>
+          <a:blip r:embed="rId9" cstate="print">
+            <a:extLst>
+              <a:ext uri="{28A0092B-C50C-407E-A947-70E740481C1C}">
+                <a14:useLocalDpi xmlns:a14="http://schemas.microsoft.com/office/drawing/2010/main" val="0"/>
+              </a:ext>
+              <a:ext uri="{96DAC541-7B7A-43D3-8B79-37D633B846F1}">
+                <asvg:svgBlip xmlns:asvg="http://schemas.microsoft.com/office/drawing/2016/SVG/main" r:embed="rId10"/>
+              </a:ext>
+            </a:extLst>
+          </a:blip>
+          <a:stretch>
+            <a:fillRect/>
+          </a:stretch>
+        </p:blipFill>
+        <p:spPr>
+          <a:xfrm>
+            <a:off x="9258346" y="2769006"/>
+            <a:ext cx="720000" cy="720000"/>
+          </a:xfrm>
+          <a:prstGeom prst="rect">
+            <a:avLst/>
+          </a:prstGeom>
+        </p:spPr>
+      </p:pic>
+      <p:pic>
+        <p:nvPicPr>
+          <p:cNvPr id="16" name="图形 15"/>
+          <p:cNvPicPr>
+            <a:picLocks noChangeAspect="1"/>
+          </p:cNvPicPr>
+          <p:nvPr/>
+        </p:nvPicPr>
+        <p:blipFill>
+          <a:blip r:embed="rId13" cstate="print">
+            <a:extLst>
+              <a:ext uri="{28A0092B-C50C-407E-A947-70E740481C1C}">
+                <a14:useLocalDpi xmlns:a14="http://schemas.microsoft.com/office/drawing/2010/main" val="0"/>
+              </a:ext>
+              <a:ext uri="{96DAC541-7B7A-43D3-8B79-37D633B846F1}">
+                <asvg:svgBlip xmlns:asvg="http://schemas.microsoft.com/office/drawing/2016/SVG/main" r:embed="rId14"/>
+              </a:ext>
+            </a:extLst>
+          </a:blip>
+          <a:stretch>
+            <a:fillRect/>
+          </a:stretch>
+        </p:blipFill>
+        <p:spPr>
+          <a:xfrm>
+            <a:off x="6636830" y="1773544"/>
+            <a:ext cx="720000" cy="720000"/>
+          </a:xfrm>
+          <a:prstGeom prst="rect">
+            <a:avLst/>
+          </a:prstGeom>
+        </p:spPr>
+      </p:pic>
+      <p:cxnSp>
+        <p:nvCxnSpPr>
+          <p:cNvPr id="18" name="直接连接符 17"/>
+          <p:cNvCxnSpPr/>
+          <p:nvPr/>
+        </p:nvCxnSpPr>
+        <p:spPr>
+          <a:xfrm>
+            <a:off x="4265623" y="4414892"/>
+            <a:ext cx="516571" cy="0"/>
+          </a:xfrm>
+          <a:prstGeom prst="line">
+            <a:avLst/>
+          </a:prstGeom>
+          <a:ln w="19050">
+            <a:solidFill>
+              <a:schemeClr val="tx1"/>
+            </a:solidFill>
+            <a:prstDash val="dash"/>
+          </a:ln>
+        </p:spPr>
+        <p:style>
+          <a:lnRef idx="1">
+            <a:schemeClr val="accent1"/>
+          </a:lnRef>
+          <a:fillRef idx="0">
+            <a:schemeClr val="accent1"/>
+          </a:fillRef>
+          <a:effectRef idx="0">
+            <a:schemeClr val="accent1"/>
+          </a:effectRef>
+          <a:fontRef idx="minor">
+            <a:schemeClr val="tx1"/>
+          </a:fontRef>
+        </p:style>
+      </p:cxnSp>
+      <p:cxnSp>
+        <p:nvCxnSpPr>
+          <p:cNvPr id="21" name="直接连接符 20"/>
+          <p:cNvCxnSpPr/>
+          <p:nvPr/>
+        </p:nvCxnSpPr>
+        <p:spPr>
+          <a:xfrm>
+            <a:off x="5763907" y="2144911"/>
+            <a:ext cx="868026" cy="0"/>
+          </a:xfrm>
+          <a:prstGeom prst="line">
+            <a:avLst/>
+          </a:prstGeom>
+          <a:ln w="19050">
+            <a:solidFill>
+              <a:schemeClr val="tx1"/>
+            </a:solidFill>
+            <a:prstDash val="solid"/>
+          </a:ln>
+        </p:spPr>
+        <p:style>
+          <a:lnRef idx="1">
+            <a:schemeClr val="accent1"/>
+          </a:lnRef>
+          <a:fillRef idx="0">
+            <a:schemeClr val="accent1"/>
+          </a:fillRef>
+          <a:effectRef idx="0">
+            <a:schemeClr val="accent1"/>
+          </a:effectRef>
+          <a:fontRef idx="minor">
+            <a:schemeClr val="tx1"/>
+          </a:fontRef>
+        </p:style>
+      </p:cxnSp>
+      <p:sp>
+        <p:nvSpPr>
+          <p:cNvPr id="26" name="矩形 25"/>
+          <p:cNvSpPr/>
+          <p:nvPr/>
+        </p:nvSpPr>
+        <p:spPr>
+          <a:xfrm>
+            <a:off x="7493537" y="2623420"/>
+            <a:ext cx="2678316" cy="943831"/>
+          </a:xfrm>
+          <a:prstGeom prst="rect">
+            <a:avLst/>
+          </a:prstGeom>
+          <a:noFill/>
+          <a:ln w="19050">
+            <a:solidFill>
+              <a:schemeClr val="tx1"/>
+            </a:solidFill>
+            <a:prstDash val="dash"/>
+          </a:ln>
+        </p:spPr>
+        <p:style>
+          <a:lnRef idx="2">
+            <a:schemeClr val="accent1">
+              <a:shade val="50000"/>
+            </a:schemeClr>
+          </a:lnRef>
+          <a:fillRef idx="1">
+            <a:schemeClr val="accent1"/>
+          </a:fillRef>
+          <a:effectRef idx="0">
+            <a:schemeClr val="accent1"/>
+          </a:effectRef>
+          <a:fontRef idx="minor">
+            <a:schemeClr val="lt1"/>
+          </a:fontRef>
+        </p:style>
+        <p:txBody>
+          <a:bodyPr rtlCol="0" anchor="ctr"/>
+          <a:lstStyle/>
+          <a:p>
+            <a:pPr algn="ctr"/>
+            <a:endParaRPr lang="zh-CN" altLang="en-US"/>
+          </a:p>
+        </p:txBody>
+      </p:sp>
+      <p:cxnSp>
+        <p:nvCxnSpPr>
+          <p:cNvPr id="27" name="直接连接符 26"/>
+          <p:cNvCxnSpPr/>
+          <p:nvPr/>
+        </p:nvCxnSpPr>
+        <p:spPr>
+          <a:xfrm>
+            <a:off x="5741219" y="4381899"/>
+            <a:ext cx="801288" cy="0"/>
+          </a:xfrm>
+          <a:prstGeom prst="line">
+            <a:avLst/>
+          </a:prstGeom>
+          <a:ln w="19050">
+            <a:solidFill>
+              <a:schemeClr val="tx1"/>
+            </a:solidFill>
+            <a:prstDash val="solid"/>
+          </a:ln>
+        </p:spPr>
+        <p:style>
+          <a:lnRef idx="1">
+            <a:schemeClr val="accent1"/>
+          </a:lnRef>
+          <a:fillRef idx="0">
+            <a:schemeClr val="accent1"/>
+          </a:fillRef>
+          <a:effectRef idx="0">
+            <a:schemeClr val="accent1"/>
+          </a:effectRef>
+          <a:fontRef idx="minor">
+            <a:schemeClr val="tx1"/>
+          </a:fontRef>
+        </p:style>
+      </p:cxnSp>
+      <p:cxnSp>
+        <p:nvCxnSpPr>
+          <p:cNvPr id="28" name="直接连接符 27"/>
+          <p:cNvCxnSpPr/>
+          <p:nvPr/>
+        </p:nvCxnSpPr>
+        <p:spPr>
+          <a:xfrm flipV="1">
+            <a:off x="7180520" y="3758687"/>
+            <a:ext cx="490150" cy="342916"/>
+          </a:xfrm>
+          <a:prstGeom prst="line">
+            <a:avLst/>
+          </a:prstGeom>
+          <a:ln w="19050">
+            <a:solidFill>
+              <a:schemeClr val="tx1"/>
+            </a:solidFill>
+            <a:prstDash val="dash"/>
+          </a:ln>
+        </p:spPr>
+        <p:style>
+          <a:lnRef idx="1">
+            <a:schemeClr val="accent1"/>
+          </a:lnRef>
+          <a:fillRef idx="0">
+            <a:schemeClr val="accent1"/>
+          </a:fillRef>
+          <a:effectRef idx="0">
+            <a:schemeClr val="accent1"/>
+          </a:effectRef>
+          <a:fontRef idx="minor">
+            <a:schemeClr val="tx1"/>
+          </a:fontRef>
+        </p:style>
+      </p:cxnSp>
+      <p:cxnSp>
+        <p:nvCxnSpPr>
+          <p:cNvPr id="30" name="直接连接符 29"/>
+          <p:cNvCxnSpPr/>
+          <p:nvPr/>
+        </p:nvCxnSpPr>
+        <p:spPr>
+          <a:xfrm flipV="1">
+            <a:off x="3504353" y="2358586"/>
+            <a:ext cx="1407110" cy="782750"/>
+          </a:xfrm>
+          <a:prstGeom prst="line">
+            <a:avLst/>
+          </a:prstGeom>
+          <a:ln w="19050">
+            <a:solidFill>
+              <a:schemeClr val="tx1"/>
+            </a:solidFill>
+            <a:prstDash val="solid"/>
+            <a:tailEnd type="triangle"/>
+          </a:ln>
+        </p:spPr>
+        <p:style>
+          <a:lnRef idx="1">
+            <a:schemeClr val="accent1"/>
+          </a:lnRef>
+          <a:fillRef idx="0">
+            <a:schemeClr val="accent1"/>
+          </a:fillRef>
+          <a:effectRef idx="0">
+            <a:schemeClr val="accent1"/>
+          </a:effectRef>
+          <a:fontRef idx="minor">
+            <a:schemeClr val="tx1"/>
+          </a:fontRef>
+        </p:style>
+      </p:cxnSp>
+      <p:cxnSp>
+        <p:nvCxnSpPr>
+          <p:cNvPr id="32" name="直接连接符 31"/>
+          <p:cNvCxnSpPr/>
+          <p:nvPr/>
+        </p:nvCxnSpPr>
+        <p:spPr>
+          <a:xfrm>
+            <a:off x="3534687" y="3408157"/>
+            <a:ext cx="1345556" cy="741955"/>
+          </a:xfrm>
+          <a:prstGeom prst="line">
+            <a:avLst/>
+          </a:prstGeom>
+          <a:ln w="19050">
+            <a:solidFill>
+              <a:schemeClr val="tx1"/>
+            </a:solidFill>
+            <a:prstDash val="solid"/>
+          </a:ln>
+        </p:spPr>
+        <p:style>
+          <a:lnRef idx="1">
+            <a:schemeClr val="accent1"/>
+          </a:lnRef>
+          <a:fillRef idx="0">
+            <a:schemeClr val="accent1"/>
+          </a:fillRef>
+          <a:effectRef idx="0">
+            <a:schemeClr val="accent1"/>
+          </a:effectRef>
+          <a:fontRef idx="minor">
+            <a:schemeClr val="tx1"/>
+          </a:fontRef>
+        </p:style>
+      </p:cxnSp>
+      <p:cxnSp>
+        <p:nvCxnSpPr>
+          <p:cNvPr id="35" name="直接连接符 34"/>
+          <p:cNvCxnSpPr/>
+          <p:nvPr/>
+        </p:nvCxnSpPr>
+        <p:spPr>
+          <a:xfrm>
+            <a:off x="5189023" y="2530833"/>
+            <a:ext cx="0" cy="1399312"/>
+          </a:xfrm>
+          <a:prstGeom prst="line">
+            <a:avLst/>
+          </a:prstGeom>
+          <a:ln w="19050">
+            <a:solidFill>
+              <a:schemeClr val="tx1"/>
+            </a:solidFill>
+            <a:prstDash val="solid"/>
+          </a:ln>
+        </p:spPr>
+        <p:style>
+          <a:lnRef idx="1">
+            <a:schemeClr val="accent1"/>
+          </a:lnRef>
+          <a:fillRef idx="0">
+            <a:schemeClr val="accent1"/>
+          </a:fillRef>
+          <a:effectRef idx="0">
+            <a:schemeClr val="accent1"/>
+          </a:effectRef>
+          <a:fontRef idx="minor">
+            <a:schemeClr val="tx1"/>
+          </a:fontRef>
+        </p:style>
+      </p:cxnSp>
+      <p:cxnSp>
+        <p:nvCxnSpPr>
+          <p:cNvPr id="43" name="直接连接符 42"/>
+          <p:cNvCxnSpPr/>
+          <p:nvPr/>
+        </p:nvCxnSpPr>
+        <p:spPr>
+          <a:xfrm>
+            <a:off x="8241862" y="3285954"/>
+            <a:ext cx="990191" cy="0"/>
+          </a:xfrm>
+          <a:prstGeom prst="line">
+            <a:avLst/>
+          </a:prstGeom>
+          <a:ln w="19050">
+            <a:solidFill>
+              <a:schemeClr val="tx1"/>
+            </a:solidFill>
+            <a:prstDash val="solid"/>
+          </a:ln>
+        </p:spPr>
+        <p:style>
+          <a:lnRef idx="1">
+            <a:schemeClr val="accent1"/>
+          </a:lnRef>
+          <a:fillRef idx="0">
+            <a:schemeClr val="accent1"/>
+          </a:fillRef>
+          <a:effectRef idx="0">
+            <a:schemeClr val="accent1"/>
+          </a:effectRef>
+          <a:fontRef idx="minor">
+            <a:schemeClr val="tx1"/>
+          </a:fontRef>
+        </p:style>
+      </p:cxnSp>
+      <p:pic>
+        <p:nvPicPr>
+          <p:cNvPr id="22" name="图形 21"/>
+          <p:cNvPicPr>
+            <a:picLocks noChangeAspect="1"/>
+          </p:cNvPicPr>
+          <p:nvPr/>
+        </p:nvPicPr>
+        <p:blipFill>
+          <a:blip r:embed="rId15" cstate="print">
+            <a:extLst>
+              <a:ext uri="{28A0092B-C50C-407E-A947-70E740481C1C}">
+                <a14:useLocalDpi xmlns:a14="http://schemas.microsoft.com/office/drawing/2010/main" val="0"/>
+              </a:ext>
+              <a:ext uri="{96DAC541-7B7A-43D3-8B79-37D633B846F1}">
+                <asvg:svgBlip xmlns:asvg="http://schemas.microsoft.com/office/drawing/2016/SVG/main" r:embed="rId16"/>
+              </a:ext>
+            </a:extLst>
+          </a:blip>
+          <a:stretch>
+            <a:fillRect/>
+          </a:stretch>
+        </p:blipFill>
+        <p:spPr>
+          <a:xfrm>
+            <a:off x="3560303" y="1505176"/>
+            <a:ext cx="720000" cy="720000"/>
+          </a:xfrm>
+          <a:prstGeom prst="rect">
+            <a:avLst/>
+          </a:prstGeom>
+        </p:spPr>
+      </p:pic>
+      <p:pic>
+        <p:nvPicPr>
+          <p:cNvPr id="24" name="图形 23"/>
+          <p:cNvPicPr>
+            <a:picLocks noChangeAspect="1"/>
+          </p:cNvPicPr>
+          <p:nvPr/>
+        </p:nvPicPr>
+        <p:blipFill>
+          <a:blip r:embed="rId17">
+            <a:extLst>
+              <a:ext uri="{28A0092B-C50C-407E-A947-70E740481C1C}">
+                <a14:useLocalDpi xmlns:a14="http://schemas.microsoft.com/office/drawing/2010/main" val="0"/>
+              </a:ext>
+              <a:ext uri="{96DAC541-7B7A-43D3-8B79-37D633B846F1}">
+                <asvg:svgBlip xmlns:asvg="http://schemas.microsoft.com/office/drawing/2016/SVG/main" r:embed="rId18"/>
+              </a:ext>
+            </a:extLst>
+          </a:blip>
+          <a:stretch>
+            <a:fillRect/>
+          </a:stretch>
+        </p:blipFill>
+        <p:spPr>
+          <a:xfrm>
+            <a:off x="4946605" y="1741459"/>
+            <a:ext cx="742734" cy="742734"/>
+          </a:xfrm>
+          <a:prstGeom prst="rect">
+            <a:avLst/>
+          </a:prstGeom>
+        </p:spPr>
+      </p:pic>
+      <p:sp>
+        <p:nvSpPr>
+          <p:cNvPr id="29" name="矩形 28"/>
+          <p:cNvSpPr/>
+          <p:nvPr/>
+        </p:nvSpPr>
+        <p:spPr>
+          <a:xfrm>
+            <a:off x="4773518" y="1578133"/>
+            <a:ext cx="1149465" cy="1031082"/>
+          </a:xfrm>
+          <a:prstGeom prst="rect">
+            <a:avLst/>
+          </a:prstGeom>
+          <a:noFill/>
+          <a:ln w="19050">
+            <a:solidFill>
+              <a:schemeClr val="tx1"/>
+            </a:solidFill>
+            <a:prstDash val="dash"/>
+          </a:ln>
+        </p:spPr>
+        <p:style>
+          <a:lnRef idx="2">
+            <a:schemeClr val="accent1">
+              <a:shade val="50000"/>
+            </a:schemeClr>
+          </a:lnRef>
+          <a:fillRef idx="1">
+            <a:schemeClr val="accent1"/>
+          </a:fillRef>
+          <a:effectRef idx="0">
+            <a:schemeClr val="accent1"/>
+          </a:effectRef>
+          <a:fontRef idx="minor">
+            <a:schemeClr val="lt1"/>
+          </a:fontRef>
+        </p:style>
+        <p:txBody>
+          <a:bodyPr rtlCol="0" anchor="ctr"/>
+          <a:lstStyle/>
+          <a:p>
+            <a:pPr algn="ctr"/>
+            <a:endParaRPr lang="zh-CN" altLang="en-US"/>
+          </a:p>
+        </p:txBody>
+      </p:sp>
+      <p:cxnSp>
+        <p:nvCxnSpPr>
+          <p:cNvPr id="31" name="直接连接符 30"/>
+          <p:cNvCxnSpPr/>
+          <p:nvPr/>
+        </p:nvCxnSpPr>
+        <p:spPr>
+          <a:xfrm>
+            <a:off x="4347411" y="1810501"/>
+            <a:ext cx="433641" cy="0"/>
+          </a:xfrm>
+          <a:prstGeom prst="line">
+            <a:avLst/>
+          </a:prstGeom>
+          <a:ln w="19050">
+            <a:solidFill>
+              <a:schemeClr val="tx1"/>
+            </a:solidFill>
+            <a:prstDash val="dash"/>
+          </a:ln>
+        </p:spPr>
+        <p:style>
+          <a:lnRef idx="1">
+            <a:schemeClr val="accent1"/>
+          </a:lnRef>
+          <a:fillRef idx="0">
+            <a:schemeClr val="accent1"/>
+          </a:fillRef>
+          <a:effectRef idx="0">
+            <a:schemeClr val="accent1"/>
+          </a:effectRef>
+          <a:fontRef idx="minor">
+            <a:schemeClr val="tx1"/>
+          </a:fontRef>
+        </p:style>
+      </p:cxnSp>
+      <p:cxnSp>
+        <p:nvCxnSpPr>
+          <p:cNvPr id="36" name="直接连接符 35"/>
+          <p:cNvCxnSpPr/>
+          <p:nvPr/>
+        </p:nvCxnSpPr>
+        <p:spPr>
+          <a:xfrm>
+            <a:off x="6941120" y="2516278"/>
+            <a:ext cx="11466" cy="1317955"/>
+          </a:xfrm>
+          <a:prstGeom prst="line">
+            <a:avLst/>
+          </a:prstGeom>
+          <a:ln w="19050">
+            <a:solidFill>
+              <a:schemeClr val="tx1"/>
+            </a:solidFill>
+            <a:prstDash val="solid"/>
+          </a:ln>
+        </p:spPr>
+        <p:style>
+          <a:lnRef idx="1">
+            <a:schemeClr val="accent1"/>
+          </a:lnRef>
+          <a:fillRef idx="0">
+            <a:schemeClr val="accent1"/>
+          </a:fillRef>
+          <a:effectRef idx="0">
+            <a:schemeClr val="accent1"/>
+          </a:effectRef>
+          <a:fontRef idx="minor">
+            <a:schemeClr val="tx1"/>
+          </a:fontRef>
+        </p:style>
+      </p:cxnSp>
+      <p:pic>
+        <p:nvPicPr>
+          <p:cNvPr id="25" name="图形 24"/>
+          <p:cNvPicPr>
+            <a:picLocks noChangeAspect="1"/>
+          </p:cNvPicPr>
+          <p:nvPr/>
+        </p:nvPicPr>
+        <p:blipFill>
+          <a:blip r:embed="rId19" cstate="print">
+            <a:extLst>
+              <a:ext uri="{28A0092B-C50C-407E-A947-70E740481C1C}">
+                <a14:useLocalDpi xmlns:a14="http://schemas.microsoft.com/office/drawing/2010/main" val="0"/>
+              </a:ext>
+              <a:ext uri="{96DAC541-7B7A-43D3-8B79-37D633B846F1}">
+                <asvg:svgBlip xmlns:asvg="http://schemas.microsoft.com/office/drawing/2016/SVG/main" r:embed="rId20"/>
+              </a:ext>
+            </a:extLst>
+          </a:blip>
+          <a:stretch>
+            <a:fillRect/>
+          </a:stretch>
+        </p:blipFill>
+        <p:spPr>
+          <a:xfrm>
+            <a:off x="5182312" y="2988529"/>
+            <a:ext cx="507027" cy="507027"/>
+          </a:xfrm>
+          <a:prstGeom prst="rect">
+            <a:avLst/>
+          </a:prstGeom>
+        </p:spPr>
+      </p:pic>
+    </p:spTree>
+  </p:cSld>
+  <p:clrMapOvr>
+    <a:masterClrMapping/>
+  </p:clrMapOvr>
+</p:sld>
+</file>
+
 <file path=ppt/slides/slide2.xml><?xml version="1.0" encoding="utf-8"?>
 <p:sld xmlns:a="http://schemas.openxmlformats.org/drawingml/2006/main" xmlns:r="http://schemas.openxmlformats.org/officeDocument/2006/relationships" xmlns:p="http://schemas.openxmlformats.org/presentationml/2006/main">
   <p:cSld>
@@ -6909,7 +7800,7 @@
       <p:grpSpPr/>
       <p:grpSp>
         <p:nvGrpSpPr>
-          <p:cNvPr id="63" name="组合 62"/>
+          <p:cNvPr id="6" name="组合 5"/>
           <p:cNvGrpSpPr>
             <a:grpSpLocks noChangeAspect="1"/>
           </p:cNvGrpSpPr>
@@ -6928,7 +7819,7 @@
         </p:grpSpPr>
         <p:sp>
           <p:nvSpPr>
-            <p:cNvPr id="64" name="矩形: 圆角 63"/>
+            <p:cNvPr id="10" name="矩形: 圆角 63"/>
             <p:cNvSpPr/>
             <p:nvPr/>
           </p:nvSpPr>
@@ -6977,7 +7868,7 @@
         </p:sp>
         <p:sp>
           <p:nvSpPr>
-            <p:cNvPr id="65" name="矩形: 圆角 64"/>
+            <p:cNvPr id="14" name="矩形: 圆角 64"/>
             <p:cNvSpPr/>
             <p:nvPr/>
           </p:nvSpPr>
@@ -7026,7 +7917,7 @@
         </p:sp>
         <p:sp>
           <p:nvSpPr>
-            <p:cNvPr id="66" name="矩形: 圆角 65"/>
+            <p:cNvPr id="18" name="矩形: 圆角 65"/>
             <p:cNvSpPr/>
             <p:nvPr/>
           </p:nvSpPr>
@@ -7082,7 +7973,7 @@
         </p:sp>
         <p:sp>
           <p:nvSpPr>
-            <p:cNvPr id="67" name="矩形: 圆角 66"/>
+            <p:cNvPr id="20" name="矩形: 圆角 66"/>
             <p:cNvSpPr/>
             <p:nvPr/>
           </p:nvSpPr>
@@ -7132,7 +8023,7 @@
       </p:grpSp>
       <p:sp>
         <p:nvSpPr>
-          <p:cNvPr id="17" name="文本框 16"/>
+          <p:cNvPr id="21" name="文本框 20"/>
           <p:cNvSpPr txBox="1"/>
           <p:nvPr/>
         </p:nvSpPr>
@@ -7168,7 +8059,7 @@
       </p:sp>
       <p:pic>
         <p:nvPicPr>
-          <p:cNvPr id="33" name="图形 11"/>
+          <p:cNvPr id="25" name="图形 11"/>
           <p:cNvPicPr>
             <a:picLocks noChangeAspect="1"/>
           </p:cNvPicPr>
@@ -7201,7 +8092,7 @@
       </p:pic>
       <p:sp>
         <p:nvSpPr>
-          <p:cNvPr id="4" name="文本框 3"/>
+          <p:cNvPr id="28" name="文本框 27"/>
           <p:cNvSpPr txBox="1"/>
           <p:nvPr/>
         </p:nvSpPr>
@@ -7237,7 +8128,7 @@
       </p:sp>
       <p:sp>
         <p:nvSpPr>
-          <p:cNvPr id="5" name="矩形 4"/>
+          <p:cNvPr id="29" name="矩形 28"/>
           <p:cNvSpPr/>
           <p:nvPr/>
         </p:nvSpPr>
@@ -7287,7 +8178,7 @@
       </p:sp>
       <p:sp>
         <p:nvSpPr>
-          <p:cNvPr id="11" name="文本框 10"/>
+          <p:cNvPr id="30" name="文本框 29"/>
           <p:cNvSpPr txBox="1"/>
           <p:nvPr/>
         </p:nvSpPr>
@@ -7323,7 +8214,7 @@
       </p:sp>
       <p:cxnSp>
         <p:nvCxnSpPr>
-          <p:cNvPr id="12" name="直接箭头连接符 11"/>
+          <p:cNvPr id="32" name="直接箭头连接符 31"/>
           <p:cNvCxnSpPr/>
           <p:nvPr/>
         </p:nvCxnSpPr>
@@ -7359,7 +8250,7 @@
       </p:cxnSp>
       <p:cxnSp>
         <p:nvCxnSpPr>
-          <p:cNvPr id="15" name="直接箭头连接符 14"/>
+          <p:cNvPr id="34" name="直接箭头连接符 33"/>
           <p:cNvCxnSpPr/>
           <p:nvPr/>
         </p:nvCxnSpPr>
@@ -7396,7 +8287,7 @@
       </p:cxnSp>
       <p:cxnSp>
         <p:nvCxnSpPr>
-          <p:cNvPr id="26" name="直接箭头连接符 25"/>
+          <p:cNvPr id="36" name="直接箭头连接符 35"/>
           <p:cNvCxnSpPr/>
           <p:nvPr/>
         </p:nvCxnSpPr>
@@ -7432,7 +8323,7 @@
       </p:cxnSp>
       <p:sp>
         <p:nvSpPr>
-          <p:cNvPr id="2" name="文本框 1"/>
+          <p:cNvPr id="38" name="文本框 37"/>
           <p:cNvSpPr txBox="1"/>
           <p:nvPr/>
         </p:nvSpPr>
@@ -7484,7 +8375,7 @@
       </p:sp>
       <p:sp>
         <p:nvSpPr>
-          <p:cNvPr id="7" name="文本框 6"/>
+          <p:cNvPr id="39" name="文本框 38"/>
           <p:cNvSpPr txBox="1"/>
           <p:nvPr/>
         </p:nvSpPr>
@@ -7527,14 +8418,14 @@
       </p:sp>
       <p:cxnSp>
         <p:nvCxnSpPr>
-          <p:cNvPr id="16" name="直接箭头连接符 15"/>
+          <p:cNvPr id="40" name="直接箭头连接符 39"/>
           <p:cNvCxnSpPr/>
           <p:nvPr/>
         </p:nvCxnSpPr>
         <p:spPr>
           <a:xfrm flipV="1">
-            <a:off x="5919470" y="5005070"/>
-            <a:ext cx="2476800" cy="0"/>
+            <a:off x="5894070" y="5005070"/>
+            <a:ext cx="2523600" cy="0"/>
           </a:xfrm>
           <a:prstGeom prst="straightConnector1">
             <a:avLst/>
@@ -7563,7 +8454,7 @@
       </p:cxnSp>
       <p:sp>
         <p:nvSpPr>
-          <p:cNvPr id="19" name="文本框 18"/>
+          <p:cNvPr id="41" name="文本框 40"/>
           <p:cNvSpPr txBox="1"/>
           <p:nvPr/>
         </p:nvSpPr>
@@ -7606,7 +8497,7 @@
       </p:sp>
       <p:grpSp>
         <p:nvGrpSpPr>
-          <p:cNvPr id="3" name="组合 2"/>
+          <p:cNvPr id="43" name="组合 42"/>
           <p:cNvGrpSpPr>
             <a:grpSpLocks noChangeAspect="1"/>
           </p:cNvGrpSpPr>
@@ -7625,7 +8516,7 @@
         </p:grpSpPr>
         <p:sp>
           <p:nvSpPr>
-            <p:cNvPr id="8" name="矩形: 圆角 63"/>
+            <p:cNvPr id="44" name="矩形: 圆角 63"/>
             <p:cNvSpPr/>
             <p:nvPr/>
           </p:nvSpPr>
@@ -7683,7 +8574,7 @@
         </p:sp>
         <p:sp>
           <p:nvSpPr>
-            <p:cNvPr id="22" name="矩形: 圆角 64"/>
+            <p:cNvPr id="45" name="矩形: 圆角 64"/>
             <p:cNvSpPr/>
             <p:nvPr/>
           </p:nvSpPr>
@@ -7732,7 +8623,7 @@
         </p:sp>
         <p:sp>
           <p:nvSpPr>
-            <p:cNvPr id="23" name="矩形: 圆角 65"/>
+            <p:cNvPr id="46" name="矩形: 圆角 65"/>
             <p:cNvSpPr/>
             <p:nvPr/>
           </p:nvSpPr>
@@ -7788,7 +8679,7 @@
         </p:sp>
         <p:sp>
           <p:nvSpPr>
-            <p:cNvPr id="24" name="矩形: 圆角 66"/>
+            <p:cNvPr id="47" name="矩形: 圆角 66"/>
             <p:cNvSpPr/>
             <p:nvPr/>
           </p:nvSpPr>
@@ -7838,7 +8729,7 @@
       </p:grpSp>
       <p:pic>
         <p:nvPicPr>
-          <p:cNvPr id="27" name="图片 26" descr="恶魔"/>
+          <p:cNvPr id="48" name="图片 47" descr="恶魔"/>
           <p:cNvPicPr>
             <a:picLocks noChangeAspect="1"/>
           </p:cNvPicPr>
@@ -7868,7 +8759,7 @@
       </p:pic>
       <p:sp>
         <p:nvSpPr>
-          <p:cNvPr id="31" name="文本框 30"/>
+          <p:cNvPr id="49" name="文本框 48"/>
           <p:cNvSpPr txBox="1"/>
           <p:nvPr/>
         </p:nvSpPr>
@@ -7920,7 +8811,7 @@
       </p:sp>
       <p:pic>
         <p:nvPicPr>
-          <p:cNvPr id="9" name="图片 8" descr="错误"/>
+          <p:cNvPr id="50" name="图片 49" descr="错误"/>
           <p:cNvPicPr>
             <a:picLocks noChangeAspect="1"/>
           </p:cNvPicPr>
@@ -7950,7 +8841,7 @@
       </p:pic>
       <p:sp>
         <p:nvSpPr>
-          <p:cNvPr id="37" name="矩形 36"/>
+          <p:cNvPr id="51" name="矩形 50"/>
           <p:cNvSpPr/>
           <p:nvPr/>
         </p:nvSpPr>
@@ -8000,7 +8891,7 @@
       </p:sp>
       <p:pic>
         <p:nvPicPr>
-          <p:cNvPr id="42" name="图片 41" descr="对"/>
+          <p:cNvPr id="52" name="图片 51" descr="对"/>
           <p:cNvPicPr>
             <a:picLocks noChangeAspect="1"/>
           </p:cNvPicPr>
@@ -8030,14 +8921,14 @@
       </p:pic>
       <p:cxnSp>
         <p:nvCxnSpPr>
-          <p:cNvPr id="35" name="直接箭头连接符 34"/>
+          <p:cNvPr id="53" name="直接箭头连接符 52"/>
           <p:cNvCxnSpPr/>
           <p:nvPr/>
         </p:nvCxnSpPr>
         <p:spPr>
           <a:xfrm>
             <a:off x="5645785" y="2685600"/>
-            <a:ext cx="2754000" cy="0"/>
+            <a:ext cx="2772000" cy="0"/>
           </a:xfrm>
           <a:prstGeom prst="straightConnector1">
             <a:avLst/>
@@ -8067,7 +8958,7 @@
       </p:cxnSp>
       <p:pic>
         <p:nvPicPr>
-          <p:cNvPr id="68" name="图形 67"/>
+          <p:cNvPr id="54" name="图形 67"/>
           <p:cNvPicPr>
             <a:picLocks noChangeAspect="1"/>
           </p:cNvPicPr>
@@ -8100,7 +8991,7 @@
       </p:pic>
       <p:sp>
         <p:nvSpPr>
-          <p:cNvPr id="13" name="文本框 12"/>
+          <p:cNvPr id="55" name="文本框 54"/>
           <p:cNvSpPr txBox="1"/>
           <p:nvPr/>
         </p:nvSpPr>
@@ -8134,73 +9025,9 @@
           </a:p>
         </p:txBody>
       </p:sp>
-      <p:grpSp>
-        <p:nvGrpSpPr>
-          <p:cNvPr id="60" name="组合 59"/>
-          <p:cNvGrpSpPr/>
-          <p:nvPr/>
-        </p:nvGrpSpPr>
-        <p:grpSpPr>
-          <a:xfrm>
-            <a:off x="5053965" y="2298065"/>
-            <a:ext cx="1339200" cy="1123200"/>
-            <a:chOff x="920" y="310"/>
-            <a:chExt cx="7930" cy="7930"/>
-          </a:xfrm>
-        </p:grpSpPr>
-        <p:pic>
-          <p:nvPicPr>
-            <p:cNvPr id="61" name="图片 60" descr="ef56901b-e67b-48c3-91cc-2ffb6efbef1e"/>
-            <p:cNvPicPr>
-              <a:picLocks noChangeAspect="1"/>
-            </p:cNvPicPr>
-            <p:nvPr/>
-          </p:nvPicPr>
-          <p:blipFill>
-            <a:blip r:embed="rId11"/>
-            <a:stretch>
-              <a:fillRect/>
-            </a:stretch>
-          </p:blipFill>
-          <p:spPr>
-            <a:xfrm>
-              <a:off x="920" y="310"/>
-              <a:ext cx="7930" cy="7930"/>
-            </a:xfrm>
-            <a:prstGeom prst="rect">
-              <a:avLst/>
-            </a:prstGeom>
-          </p:spPr>
-        </p:pic>
-        <p:pic>
-          <p:nvPicPr>
-            <p:cNvPr id="62" name="图片 61"/>
-            <p:cNvPicPr>
-              <a:picLocks noChangeAspect="1"/>
-            </p:cNvPicPr>
-            <p:nvPr/>
-          </p:nvPicPr>
-          <p:blipFill>
-            <a:blip r:embed="rId12"/>
-            <a:srcRect l="-3754" t="-1049" r="-3228" b="-1375"/>
-            <a:stretch>
-              <a:fillRect/>
-            </a:stretch>
-          </p:blipFill>
-          <p:spPr>
-            <a:xfrm>
-              <a:off x="3440" y="1324"/>
-              <a:ext cx="2850" cy="5811"/>
-            </a:xfrm>
-            <a:prstGeom prst="roundRect">
-              <a:avLst/>
-            </a:prstGeom>
-          </p:spPr>
-        </p:pic>
-      </p:grpSp>
       <p:sp>
         <p:nvSpPr>
-          <p:cNvPr id="77" name="矩形 76"/>
+          <p:cNvPr id="56" name="矩形 55"/>
           <p:cNvSpPr/>
           <p:nvPr/>
         </p:nvSpPr>
@@ -8252,71 +9079,9 @@
           </a:p>
         </p:txBody>
       </p:sp>
-      <p:grpSp>
-        <p:nvGrpSpPr>
-          <p:cNvPr id="79" name="组合 78"/>
-          <p:cNvGrpSpPr/>
-          <p:nvPr/>
-        </p:nvGrpSpPr>
-        <p:grpSpPr>
-          <a:xfrm>
-            <a:off x="5050155" y="4237355"/>
-            <a:ext cx="1339200" cy="1123200"/>
-            <a:chOff x="2680" y="310"/>
-            <a:chExt cx="7930" cy="7930"/>
-          </a:xfrm>
-        </p:grpSpPr>
-        <p:pic>
-          <p:nvPicPr>
-            <p:cNvPr id="80" name="图片 79" descr="ef56901b-e67b-48c3-91cc-2ffb6efbef1e"/>
-            <p:cNvPicPr>
-              <a:picLocks noChangeAspect="1"/>
-            </p:cNvPicPr>
-            <p:nvPr/>
-          </p:nvPicPr>
-          <p:blipFill>
-            <a:blip r:embed="rId11"/>
-            <a:stretch>
-              <a:fillRect/>
-            </a:stretch>
-          </p:blipFill>
-          <p:spPr>
-            <a:xfrm>
-              <a:off x="2680" y="310"/>
-              <a:ext cx="7930" cy="7930"/>
-            </a:xfrm>
-            <a:prstGeom prst="rect">
-              <a:avLst/>
-            </a:prstGeom>
-          </p:spPr>
-        </p:pic>
-        <p:pic>
-          <p:nvPicPr>
-            <p:cNvPr id="81" name="图片 80"/>
-            <p:cNvPicPr/>
-            <p:nvPr/>
-          </p:nvPicPr>
-          <p:blipFill>
-            <a:blip r:embed="rId13"/>
-            <a:srcRect l="-2695" t="-3168" r="-2879" b="-945"/>
-            <a:stretch>
-              <a:fillRect/>
-            </a:stretch>
-          </p:blipFill>
-          <p:spPr>
-            <a:xfrm>
-              <a:off x="5205" y="1185"/>
-              <a:ext cx="2860" cy="5950"/>
-            </a:xfrm>
-            <a:prstGeom prst="roundRect">
-              <a:avLst/>
-            </a:prstGeom>
-          </p:spPr>
-        </p:pic>
-      </p:grpSp>
       <p:sp>
         <p:nvSpPr>
-          <p:cNvPr id="82" name="文本框 81"/>
+          <p:cNvPr id="57" name="文本框 56"/>
           <p:cNvSpPr txBox="1"/>
           <p:nvPr/>
         </p:nvSpPr>
@@ -8425,7 +9190,7 @@
       </p:sp>
       <p:sp>
         <p:nvSpPr>
-          <p:cNvPr id="83" name="文本框 82"/>
+          <p:cNvPr id="58" name="文本框 57"/>
           <p:cNvSpPr txBox="1"/>
           <p:nvPr/>
         </p:nvSpPr>
@@ -8528,73 +9293,9 @@
           </a:p>
         </p:txBody>
       </p:sp>
-      <p:grpSp>
-        <p:nvGrpSpPr>
-          <p:cNvPr id="88" name="组合 87"/>
-          <p:cNvGrpSpPr/>
-          <p:nvPr/>
-        </p:nvGrpSpPr>
-        <p:grpSpPr>
-          <a:xfrm>
-            <a:off x="7968615" y="4237200"/>
-            <a:ext cx="1339200" cy="1123200"/>
-            <a:chOff x="12523" y="1705"/>
-            <a:chExt cx="7930" cy="7930"/>
-          </a:xfrm>
-        </p:grpSpPr>
-        <p:pic>
-          <p:nvPicPr>
-            <p:cNvPr id="85" name="图片 84" descr="ef56901b-e67b-48c3-91cc-2ffb6efbef1e"/>
-            <p:cNvPicPr>
-              <a:picLocks noChangeAspect="1"/>
-            </p:cNvPicPr>
-            <p:nvPr/>
-          </p:nvPicPr>
-          <p:blipFill>
-            <a:blip r:embed="rId11"/>
-            <a:stretch>
-              <a:fillRect/>
-            </a:stretch>
-          </p:blipFill>
-          <p:spPr>
-            <a:xfrm>
-              <a:off x="12523" y="1705"/>
-              <a:ext cx="7930" cy="7930"/>
-            </a:xfrm>
-            <a:prstGeom prst="rect">
-              <a:avLst/>
-            </a:prstGeom>
-          </p:spPr>
-        </p:pic>
-        <p:pic>
-          <p:nvPicPr>
-            <p:cNvPr id="86" name="图片 85"/>
-            <p:cNvPicPr>
-              <a:picLocks noChangeAspect="1"/>
-            </p:cNvPicPr>
-            <p:nvPr/>
-          </p:nvPicPr>
-          <p:blipFill>
-            <a:blip r:embed="rId14"/>
-            <a:srcRect l="-3720" t="-1175" r="-2518" b="-684"/>
-            <a:stretch>
-              <a:fillRect/>
-            </a:stretch>
-          </p:blipFill>
-          <p:spPr>
-            <a:xfrm>
-              <a:off x="15054" y="2702"/>
-              <a:ext cx="2827" cy="5807"/>
-            </a:xfrm>
-            <a:prstGeom prst="roundRect">
-              <a:avLst/>
-            </a:prstGeom>
-          </p:spPr>
-        </p:pic>
-      </p:grpSp>
       <p:pic>
         <p:nvPicPr>
-          <p:cNvPr id="89" name="图片 88" descr="恶魔"/>
+          <p:cNvPr id="59" name="图片 58" descr="恶魔"/>
           <p:cNvPicPr>
             <a:picLocks noChangeAspect="1"/>
           </p:cNvPicPr>
@@ -8624,7 +9325,7 @@
       </p:pic>
       <p:sp>
         <p:nvSpPr>
-          <p:cNvPr id="90" name="任意多边形 89"/>
+          <p:cNvPr id="69" name="任意多边形 68"/>
           <p:cNvSpPr/>
           <p:nvPr/>
         </p:nvSpPr>
@@ -8706,6 +9407,639 @@
           </a:p>
         </p:txBody>
       </p:sp>
+      <p:grpSp>
+        <p:nvGrpSpPr>
+          <p:cNvPr id="70" name="组合 69"/>
+          <p:cNvGrpSpPr>
+            <a:grpSpLocks noChangeAspect="1"/>
+          </p:cNvGrpSpPr>
+          <p:nvPr/>
+        </p:nvGrpSpPr>
+        <p:grpSpPr>
+          <a:xfrm rot="0">
+            <a:off x="5471795" y="2349500"/>
+            <a:ext cx="457859" cy="900000"/>
+            <a:chOff x="6484937" y="882650"/>
+            <a:chExt cx="1979295" cy="3890645"/>
+          </a:xfrm>
+        </p:grpSpPr>
+        <p:pic>
+          <p:nvPicPr>
+            <p:cNvPr id="71" name="图片 70" descr="ef56901b-e67b-48c3-91cc-2ffb6efbef1e"/>
+            <p:cNvPicPr>
+              <a:picLocks noChangeAspect="1"/>
+            </p:cNvPicPr>
+            <p:nvPr/>
+          </p:nvPicPr>
+          <p:blipFill rotWithShape="1">
+            <a:blip r:embed="rId11"/>
+            <a:srcRect l="30132" t="10719" r="30559" b="12022"/>
+            <a:stretch>
+              <a:fillRect/>
+            </a:stretch>
+          </p:blipFill>
+          <p:spPr>
+            <a:xfrm>
+              <a:off x="6484937" y="882650"/>
+              <a:ext cx="1979295" cy="3890645"/>
+            </a:xfrm>
+            <a:prstGeom prst="rect">
+              <a:avLst/>
+            </a:prstGeom>
+          </p:spPr>
+        </p:pic>
+        <p:pic>
+          <p:nvPicPr>
+            <p:cNvPr id="72" name="图片 71"/>
+            <p:cNvPicPr>
+              <a:picLocks noChangeAspect="1"/>
+            </p:cNvPicPr>
+            <p:nvPr/>
+          </p:nvPicPr>
+          <p:blipFill rotWithShape="1">
+            <a:blip r:embed="rId12"/>
+            <a:srcRect l="117" t="-39" r="-220" b="-19"/>
+            <a:stretch>
+              <a:fillRect/>
+            </a:stretch>
+          </p:blipFill>
+          <p:spPr>
+            <a:xfrm>
+              <a:off x="6621567" y="1004697"/>
+              <a:ext cx="1715983" cy="3618321"/>
+            </a:xfrm>
+            <a:custGeom>
+              <a:avLst/>
+              <a:gdLst>
+                <a:gd name="connsiteX0" fmla="*/ 854765 w 1715983"/>
+                <a:gd name="connsiteY0" fmla="*/ 62102 h 3652899"/>
+                <a:gd name="connsiteX1" fmla="*/ 812696 w 1715983"/>
+                <a:gd name="connsiteY1" fmla="*/ 104171 h 3652899"/>
+                <a:gd name="connsiteX2" fmla="*/ 854765 w 1715983"/>
+                <a:gd name="connsiteY2" fmla="*/ 146240 h 3652899"/>
+                <a:gd name="connsiteX3" fmla="*/ 896834 w 1715983"/>
+                <a:gd name="connsiteY3" fmla="*/ 104171 h 3652899"/>
+                <a:gd name="connsiteX4" fmla="*/ 854765 w 1715983"/>
+                <a:gd name="connsiteY4" fmla="*/ 62102 h 3652899"/>
+                <a:gd name="connsiteX5" fmla="*/ 142873 w 1715983"/>
+                <a:gd name="connsiteY5" fmla="*/ 0 h 3652899"/>
+                <a:gd name="connsiteX6" fmla="*/ 1573110 w 1715983"/>
+                <a:gd name="connsiteY6" fmla="*/ 0 h 3652899"/>
+                <a:gd name="connsiteX7" fmla="*/ 1715983 w 1715983"/>
+                <a:gd name="connsiteY7" fmla="*/ 142873 h 3652899"/>
+                <a:gd name="connsiteX8" fmla="*/ 1715983 w 1715983"/>
+                <a:gd name="connsiteY8" fmla="*/ 3510026 h 3652899"/>
+                <a:gd name="connsiteX9" fmla="*/ 1573110 w 1715983"/>
+                <a:gd name="connsiteY9" fmla="*/ 3652899 h 3652899"/>
+                <a:gd name="connsiteX10" fmla="*/ 142873 w 1715983"/>
+                <a:gd name="connsiteY10" fmla="*/ 3652899 h 3652899"/>
+                <a:gd name="connsiteX11" fmla="*/ 0 w 1715983"/>
+                <a:gd name="connsiteY11" fmla="*/ 3510026 h 3652899"/>
+                <a:gd name="connsiteX12" fmla="*/ 0 w 1715983"/>
+                <a:gd name="connsiteY12" fmla="*/ 142873 h 3652899"/>
+                <a:gd name="connsiteX13" fmla="*/ 142873 w 1715983"/>
+                <a:gd name="connsiteY13" fmla="*/ 0 h 3652899"/>
+              </a:gdLst>
+              <a:ahLst/>
+              <a:cxnLst>
+                <a:cxn ang="0">
+                  <a:pos x="connsiteX0" y="connsiteY0"/>
+                </a:cxn>
+                <a:cxn ang="0">
+                  <a:pos x="connsiteX1" y="connsiteY1"/>
+                </a:cxn>
+                <a:cxn ang="0">
+                  <a:pos x="connsiteX2" y="connsiteY2"/>
+                </a:cxn>
+                <a:cxn ang="0">
+                  <a:pos x="connsiteX3" y="connsiteY3"/>
+                </a:cxn>
+                <a:cxn ang="0">
+                  <a:pos x="connsiteX4" y="connsiteY4"/>
+                </a:cxn>
+                <a:cxn ang="0">
+                  <a:pos x="connsiteX5" y="connsiteY5"/>
+                </a:cxn>
+                <a:cxn ang="0">
+                  <a:pos x="connsiteX6" y="connsiteY6"/>
+                </a:cxn>
+                <a:cxn ang="0">
+                  <a:pos x="connsiteX7" y="connsiteY7"/>
+                </a:cxn>
+                <a:cxn ang="0">
+                  <a:pos x="connsiteX8" y="connsiteY8"/>
+                </a:cxn>
+                <a:cxn ang="0">
+                  <a:pos x="connsiteX9" y="connsiteY9"/>
+                </a:cxn>
+                <a:cxn ang="0">
+                  <a:pos x="connsiteX10" y="connsiteY10"/>
+                </a:cxn>
+                <a:cxn ang="0">
+                  <a:pos x="connsiteX11" y="connsiteY11"/>
+                </a:cxn>
+                <a:cxn ang="0">
+                  <a:pos x="connsiteX12" y="connsiteY12"/>
+                </a:cxn>
+                <a:cxn ang="0">
+                  <a:pos x="connsiteX13" y="connsiteY13"/>
+                </a:cxn>
+              </a:cxnLst>
+              <a:rect l="l" t="t" r="r" b="b"/>
+              <a:pathLst>
+                <a:path w="1715983" h="3652899">
+                  <a:moveTo>
+                    <a:pt x="854765" y="62102"/>
+                  </a:moveTo>
+                  <a:cubicBezTo>
+                    <a:pt x="831531" y="62102"/>
+                    <a:pt x="812696" y="80937"/>
+                    <a:pt x="812696" y="104171"/>
+                  </a:cubicBezTo>
+                  <a:cubicBezTo>
+                    <a:pt x="812696" y="127405"/>
+                    <a:pt x="831531" y="146240"/>
+                    <a:pt x="854765" y="146240"/>
+                  </a:cubicBezTo>
+                  <a:cubicBezTo>
+                    <a:pt x="877999" y="146240"/>
+                    <a:pt x="896834" y="127405"/>
+                    <a:pt x="896834" y="104171"/>
+                  </a:cubicBezTo>
+                  <a:cubicBezTo>
+                    <a:pt x="896834" y="80937"/>
+                    <a:pt x="877999" y="62102"/>
+                    <a:pt x="854765" y="62102"/>
+                  </a:cubicBezTo>
+                  <a:close/>
+                  <a:moveTo>
+                    <a:pt x="142873" y="0"/>
+                  </a:moveTo>
+                  <a:lnTo>
+                    <a:pt x="1573110" y="0"/>
+                  </a:lnTo>
+                  <a:cubicBezTo>
+                    <a:pt x="1652017" y="0"/>
+                    <a:pt x="1715983" y="63966"/>
+                    <a:pt x="1715983" y="142873"/>
+                  </a:cubicBezTo>
+                  <a:lnTo>
+                    <a:pt x="1715983" y="3510026"/>
+                  </a:lnTo>
+                  <a:cubicBezTo>
+                    <a:pt x="1715983" y="3588933"/>
+                    <a:pt x="1652017" y="3652899"/>
+                    <a:pt x="1573110" y="3652899"/>
+                  </a:cubicBezTo>
+                  <a:lnTo>
+                    <a:pt x="142873" y="3652899"/>
+                  </a:lnTo>
+                  <a:cubicBezTo>
+                    <a:pt x="63966" y="3652899"/>
+                    <a:pt x="0" y="3588933"/>
+                    <a:pt x="0" y="3510026"/>
+                  </a:cubicBezTo>
+                  <a:lnTo>
+                    <a:pt x="0" y="142873"/>
+                  </a:lnTo>
+                  <a:cubicBezTo>
+                    <a:pt x="0" y="63966"/>
+                    <a:pt x="63966" y="0"/>
+                    <a:pt x="142873" y="0"/>
+                  </a:cubicBezTo>
+                  <a:close/>
+                </a:path>
+              </a:pathLst>
+            </a:custGeom>
+          </p:spPr>
+        </p:pic>
+      </p:grpSp>
+      <p:grpSp>
+        <p:nvGrpSpPr>
+          <p:cNvPr id="73" name="组合 72"/>
+          <p:cNvGrpSpPr>
+            <a:grpSpLocks noChangeAspect="1"/>
+          </p:cNvGrpSpPr>
+          <p:nvPr/>
+        </p:nvGrpSpPr>
+        <p:grpSpPr>
+          <a:xfrm>
+            <a:off x="8392914" y="4310369"/>
+            <a:ext cx="457859" cy="900000"/>
+            <a:chOff x="5209721" y="2071270"/>
+            <a:chExt cx="1979295" cy="3890645"/>
+          </a:xfrm>
+        </p:grpSpPr>
+        <p:pic>
+          <p:nvPicPr>
+            <p:cNvPr id="74" name="图片 73" descr="ef56901b-e67b-48c3-91cc-2ffb6efbef1e"/>
+            <p:cNvPicPr>
+              <a:picLocks noChangeAspect="1"/>
+            </p:cNvPicPr>
+            <p:nvPr/>
+          </p:nvPicPr>
+          <p:blipFill rotWithShape="1">
+            <a:blip r:embed="rId11"/>
+            <a:srcRect l="30132" t="10719" r="30559" b="12022"/>
+            <a:stretch>
+              <a:fillRect/>
+            </a:stretch>
+          </p:blipFill>
+          <p:spPr>
+            <a:xfrm>
+              <a:off x="5209721" y="2071270"/>
+              <a:ext cx="1979295" cy="3890645"/>
+            </a:xfrm>
+            <a:prstGeom prst="rect">
+              <a:avLst/>
+            </a:prstGeom>
+          </p:spPr>
+        </p:pic>
+        <p:pic>
+          <p:nvPicPr>
+            <p:cNvPr id="75" name="图片 74"/>
+            <p:cNvPicPr>
+              <a:picLocks noChangeAspect="1"/>
+            </p:cNvPicPr>
+            <p:nvPr/>
+          </p:nvPicPr>
+          <p:blipFill rotWithShape="1">
+            <a:blip r:embed="rId13">
+              <a:extLst>
+                <a:ext uri="{28A0092B-C50C-407E-A947-70E740481C1C}">
+                  <a14:useLocalDpi xmlns:a14="http://schemas.microsoft.com/office/drawing/2010/main" val="0"/>
+                </a:ext>
+              </a:extLst>
+            </a:blip>
+            <a:srcRect l="319" t="8" r="-319" b="4903"/>
+            <a:stretch>
+              <a:fillRect/>
+            </a:stretch>
+          </p:blipFill>
+          <p:spPr>
+            <a:xfrm>
+              <a:off x="5347408" y="2193608"/>
+              <a:ext cx="1714849" cy="3622830"/>
+            </a:xfrm>
+            <a:custGeom>
+              <a:avLst/>
+              <a:gdLst>
+                <a:gd name="connsiteX0" fmla="*/ 853548 w 1714849"/>
+                <a:gd name="connsiteY0" fmla="*/ 61524 h 3622830"/>
+                <a:gd name="connsiteX1" fmla="*/ 811479 w 1714849"/>
+                <a:gd name="connsiteY1" fmla="*/ 103593 h 3622830"/>
+                <a:gd name="connsiteX2" fmla="*/ 853548 w 1714849"/>
+                <a:gd name="connsiteY2" fmla="*/ 145662 h 3622830"/>
+                <a:gd name="connsiteX3" fmla="*/ 895617 w 1714849"/>
+                <a:gd name="connsiteY3" fmla="*/ 103593 h 3622830"/>
+                <a:gd name="connsiteX4" fmla="*/ 853548 w 1714849"/>
+                <a:gd name="connsiteY4" fmla="*/ 61524 h 3622830"/>
+                <a:gd name="connsiteX5" fmla="*/ 149912 w 1714849"/>
+                <a:gd name="connsiteY5" fmla="*/ 0 h 3622830"/>
+                <a:gd name="connsiteX6" fmla="*/ 1564937 w 1714849"/>
+                <a:gd name="connsiteY6" fmla="*/ 0 h 3622830"/>
+                <a:gd name="connsiteX7" fmla="*/ 1714849 w 1714849"/>
+                <a:gd name="connsiteY7" fmla="*/ 149912 h 3622830"/>
+                <a:gd name="connsiteX8" fmla="*/ 1714849 w 1714849"/>
+                <a:gd name="connsiteY8" fmla="*/ 3472918 h 3622830"/>
+                <a:gd name="connsiteX9" fmla="*/ 1564937 w 1714849"/>
+                <a:gd name="connsiteY9" fmla="*/ 3622830 h 3622830"/>
+                <a:gd name="connsiteX10" fmla="*/ 149912 w 1714849"/>
+                <a:gd name="connsiteY10" fmla="*/ 3622830 h 3622830"/>
+                <a:gd name="connsiteX11" fmla="*/ 0 w 1714849"/>
+                <a:gd name="connsiteY11" fmla="*/ 3472918 h 3622830"/>
+                <a:gd name="connsiteX12" fmla="*/ 0 w 1714849"/>
+                <a:gd name="connsiteY12" fmla="*/ 149912 h 3622830"/>
+                <a:gd name="connsiteX13" fmla="*/ 149912 w 1714849"/>
+                <a:gd name="connsiteY13" fmla="*/ 0 h 3622830"/>
+              </a:gdLst>
+              <a:ahLst/>
+              <a:cxnLst>
+                <a:cxn ang="0">
+                  <a:pos x="connsiteX0" y="connsiteY0"/>
+                </a:cxn>
+                <a:cxn ang="0">
+                  <a:pos x="connsiteX1" y="connsiteY1"/>
+                </a:cxn>
+                <a:cxn ang="0">
+                  <a:pos x="connsiteX2" y="connsiteY2"/>
+                </a:cxn>
+                <a:cxn ang="0">
+                  <a:pos x="connsiteX3" y="connsiteY3"/>
+                </a:cxn>
+                <a:cxn ang="0">
+                  <a:pos x="connsiteX4" y="connsiteY4"/>
+                </a:cxn>
+                <a:cxn ang="0">
+                  <a:pos x="connsiteX5" y="connsiteY5"/>
+                </a:cxn>
+                <a:cxn ang="0">
+                  <a:pos x="connsiteX6" y="connsiteY6"/>
+                </a:cxn>
+                <a:cxn ang="0">
+                  <a:pos x="connsiteX7" y="connsiteY7"/>
+                </a:cxn>
+                <a:cxn ang="0">
+                  <a:pos x="connsiteX8" y="connsiteY8"/>
+                </a:cxn>
+                <a:cxn ang="0">
+                  <a:pos x="connsiteX9" y="connsiteY9"/>
+                </a:cxn>
+                <a:cxn ang="0">
+                  <a:pos x="connsiteX10" y="connsiteY10"/>
+                </a:cxn>
+                <a:cxn ang="0">
+                  <a:pos x="connsiteX11" y="connsiteY11"/>
+                </a:cxn>
+                <a:cxn ang="0">
+                  <a:pos x="connsiteX12" y="connsiteY12"/>
+                </a:cxn>
+                <a:cxn ang="0">
+                  <a:pos x="connsiteX13" y="connsiteY13"/>
+                </a:cxn>
+              </a:cxnLst>
+              <a:rect l="l" t="t" r="r" b="b"/>
+              <a:pathLst>
+                <a:path w="1714849" h="3622830">
+                  <a:moveTo>
+                    <a:pt x="853548" y="61524"/>
+                  </a:moveTo>
+                  <a:cubicBezTo>
+                    <a:pt x="830314" y="61524"/>
+                    <a:pt x="811479" y="80359"/>
+                    <a:pt x="811479" y="103593"/>
+                  </a:cubicBezTo>
+                  <a:cubicBezTo>
+                    <a:pt x="811479" y="126827"/>
+                    <a:pt x="830314" y="145662"/>
+                    <a:pt x="853548" y="145662"/>
+                  </a:cubicBezTo>
+                  <a:cubicBezTo>
+                    <a:pt x="876782" y="145662"/>
+                    <a:pt x="895617" y="126827"/>
+                    <a:pt x="895617" y="103593"/>
+                  </a:cubicBezTo>
+                  <a:cubicBezTo>
+                    <a:pt x="895617" y="80359"/>
+                    <a:pt x="876782" y="61524"/>
+                    <a:pt x="853548" y="61524"/>
+                  </a:cubicBezTo>
+                  <a:close/>
+                  <a:moveTo>
+                    <a:pt x="149912" y="0"/>
+                  </a:moveTo>
+                  <a:lnTo>
+                    <a:pt x="1564937" y="0"/>
+                  </a:lnTo>
+                  <a:cubicBezTo>
+                    <a:pt x="1647731" y="0"/>
+                    <a:pt x="1714849" y="67118"/>
+                    <a:pt x="1714849" y="149912"/>
+                  </a:cubicBezTo>
+                  <a:lnTo>
+                    <a:pt x="1714849" y="3472918"/>
+                  </a:lnTo>
+                  <a:cubicBezTo>
+                    <a:pt x="1714849" y="3555712"/>
+                    <a:pt x="1647731" y="3622830"/>
+                    <a:pt x="1564937" y="3622830"/>
+                  </a:cubicBezTo>
+                  <a:lnTo>
+                    <a:pt x="149912" y="3622830"/>
+                  </a:lnTo>
+                  <a:cubicBezTo>
+                    <a:pt x="67118" y="3622830"/>
+                    <a:pt x="0" y="3555712"/>
+                    <a:pt x="0" y="3472918"/>
+                  </a:cubicBezTo>
+                  <a:lnTo>
+                    <a:pt x="0" y="149912"/>
+                  </a:lnTo>
+                  <a:cubicBezTo>
+                    <a:pt x="0" y="67118"/>
+                    <a:pt x="67118" y="0"/>
+                    <a:pt x="149912" y="0"/>
+                  </a:cubicBezTo>
+                  <a:close/>
+                </a:path>
+              </a:pathLst>
+            </a:custGeom>
+          </p:spPr>
+        </p:pic>
+      </p:grpSp>
+      <p:grpSp>
+        <p:nvGrpSpPr>
+          <p:cNvPr id="76" name="组合 75"/>
+          <p:cNvGrpSpPr>
+            <a:grpSpLocks noChangeAspect="1"/>
+          </p:cNvGrpSpPr>
+          <p:nvPr/>
+        </p:nvGrpSpPr>
+        <p:grpSpPr>
+          <a:xfrm>
+            <a:off x="5465021" y="4311004"/>
+            <a:ext cx="457859" cy="900000"/>
+            <a:chOff x="6484937" y="882650"/>
+            <a:chExt cx="1979295" cy="3890645"/>
+          </a:xfrm>
+        </p:grpSpPr>
+        <p:pic>
+          <p:nvPicPr>
+            <p:cNvPr id="78" name="图片 77" descr="ef56901b-e67b-48c3-91cc-2ffb6efbef1e"/>
+            <p:cNvPicPr>
+              <a:picLocks noChangeAspect="1"/>
+            </p:cNvPicPr>
+            <p:nvPr/>
+          </p:nvPicPr>
+          <p:blipFill rotWithShape="1">
+            <a:blip r:embed="rId11"/>
+            <a:srcRect l="30132" t="10719" r="30559" b="12022"/>
+            <a:stretch>
+              <a:fillRect/>
+            </a:stretch>
+          </p:blipFill>
+          <p:spPr>
+            <a:xfrm>
+              <a:off x="6484937" y="882650"/>
+              <a:ext cx="1979295" cy="3890645"/>
+            </a:xfrm>
+            <a:prstGeom prst="rect">
+              <a:avLst/>
+            </a:prstGeom>
+          </p:spPr>
+        </p:pic>
+        <p:pic>
+          <p:nvPicPr>
+            <p:cNvPr id="84" name="图片 83"/>
+            <p:cNvPicPr>
+              <a:picLocks noChangeAspect="1"/>
+            </p:cNvPicPr>
+            <p:nvPr/>
+          </p:nvPicPr>
+          <p:blipFill rotWithShape="1">
+            <a:blip r:embed="rId14">
+              <a:extLst>
+                <a:ext uri="{28A0092B-C50C-407E-A947-70E740481C1C}">
+                  <a14:useLocalDpi xmlns:a14="http://schemas.microsoft.com/office/drawing/2010/main" val="0"/>
+                </a:ext>
+              </a:extLst>
+            </a:blip>
+            <a:srcRect l="290" t="-8" r="-290" b="5122"/>
+            <a:stretch>
+              <a:fillRect/>
+            </a:stretch>
+          </p:blipFill>
+          <p:spPr>
+            <a:xfrm>
+              <a:off x="6621567" y="1004697"/>
+              <a:ext cx="1715983" cy="3618321"/>
+            </a:xfrm>
+            <a:custGeom>
+              <a:avLst/>
+              <a:gdLst>
+                <a:gd name="connsiteX0" fmla="*/ 854765 w 1715983"/>
+                <a:gd name="connsiteY0" fmla="*/ 62102 h 3652899"/>
+                <a:gd name="connsiteX1" fmla="*/ 812696 w 1715983"/>
+                <a:gd name="connsiteY1" fmla="*/ 104171 h 3652899"/>
+                <a:gd name="connsiteX2" fmla="*/ 854765 w 1715983"/>
+                <a:gd name="connsiteY2" fmla="*/ 146240 h 3652899"/>
+                <a:gd name="connsiteX3" fmla="*/ 896834 w 1715983"/>
+                <a:gd name="connsiteY3" fmla="*/ 104171 h 3652899"/>
+                <a:gd name="connsiteX4" fmla="*/ 854765 w 1715983"/>
+                <a:gd name="connsiteY4" fmla="*/ 62102 h 3652899"/>
+                <a:gd name="connsiteX5" fmla="*/ 142873 w 1715983"/>
+                <a:gd name="connsiteY5" fmla="*/ 0 h 3652899"/>
+                <a:gd name="connsiteX6" fmla="*/ 1573110 w 1715983"/>
+                <a:gd name="connsiteY6" fmla="*/ 0 h 3652899"/>
+                <a:gd name="connsiteX7" fmla="*/ 1715983 w 1715983"/>
+                <a:gd name="connsiteY7" fmla="*/ 142873 h 3652899"/>
+                <a:gd name="connsiteX8" fmla="*/ 1715983 w 1715983"/>
+                <a:gd name="connsiteY8" fmla="*/ 3510026 h 3652899"/>
+                <a:gd name="connsiteX9" fmla="*/ 1573110 w 1715983"/>
+                <a:gd name="connsiteY9" fmla="*/ 3652899 h 3652899"/>
+                <a:gd name="connsiteX10" fmla="*/ 142873 w 1715983"/>
+                <a:gd name="connsiteY10" fmla="*/ 3652899 h 3652899"/>
+                <a:gd name="connsiteX11" fmla="*/ 0 w 1715983"/>
+                <a:gd name="connsiteY11" fmla="*/ 3510026 h 3652899"/>
+                <a:gd name="connsiteX12" fmla="*/ 0 w 1715983"/>
+                <a:gd name="connsiteY12" fmla="*/ 142873 h 3652899"/>
+                <a:gd name="connsiteX13" fmla="*/ 142873 w 1715983"/>
+                <a:gd name="connsiteY13" fmla="*/ 0 h 3652899"/>
+              </a:gdLst>
+              <a:ahLst/>
+              <a:cxnLst>
+                <a:cxn ang="0">
+                  <a:pos x="connsiteX0" y="connsiteY0"/>
+                </a:cxn>
+                <a:cxn ang="0">
+                  <a:pos x="connsiteX1" y="connsiteY1"/>
+                </a:cxn>
+                <a:cxn ang="0">
+                  <a:pos x="connsiteX2" y="connsiteY2"/>
+                </a:cxn>
+                <a:cxn ang="0">
+                  <a:pos x="connsiteX3" y="connsiteY3"/>
+                </a:cxn>
+                <a:cxn ang="0">
+                  <a:pos x="connsiteX4" y="connsiteY4"/>
+                </a:cxn>
+                <a:cxn ang="0">
+                  <a:pos x="connsiteX5" y="connsiteY5"/>
+                </a:cxn>
+                <a:cxn ang="0">
+                  <a:pos x="connsiteX6" y="connsiteY6"/>
+                </a:cxn>
+                <a:cxn ang="0">
+                  <a:pos x="connsiteX7" y="connsiteY7"/>
+                </a:cxn>
+                <a:cxn ang="0">
+                  <a:pos x="connsiteX8" y="connsiteY8"/>
+                </a:cxn>
+                <a:cxn ang="0">
+                  <a:pos x="connsiteX9" y="connsiteY9"/>
+                </a:cxn>
+                <a:cxn ang="0">
+                  <a:pos x="connsiteX10" y="connsiteY10"/>
+                </a:cxn>
+                <a:cxn ang="0">
+                  <a:pos x="connsiteX11" y="connsiteY11"/>
+                </a:cxn>
+                <a:cxn ang="0">
+                  <a:pos x="connsiteX12" y="connsiteY12"/>
+                </a:cxn>
+                <a:cxn ang="0">
+                  <a:pos x="connsiteX13" y="connsiteY13"/>
+                </a:cxn>
+              </a:cxnLst>
+              <a:rect l="l" t="t" r="r" b="b"/>
+              <a:pathLst>
+                <a:path w="1715983" h="3652899">
+                  <a:moveTo>
+                    <a:pt x="854765" y="62102"/>
+                  </a:moveTo>
+                  <a:cubicBezTo>
+                    <a:pt x="831531" y="62102"/>
+                    <a:pt x="812696" y="80937"/>
+                    <a:pt x="812696" y="104171"/>
+                  </a:cubicBezTo>
+                  <a:cubicBezTo>
+                    <a:pt x="812696" y="127405"/>
+                    <a:pt x="831531" y="146240"/>
+                    <a:pt x="854765" y="146240"/>
+                  </a:cubicBezTo>
+                  <a:cubicBezTo>
+                    <a:pt x="877999" y="146240"/>
+                    <a:pt x="896834" y="127405"/>
+                    <a:pt x="896834" y="104171"/>
+                  </a:cubicBezTo>
+                  <a:cubicBezTo>
+                    <a:pt x="896834" y="80937"/>
+                    <a:pt x="877999" y="62102"/>
+                    <a:pt x="854765" y="62102"/>
+                  </a:cubicBezTo>
+                  <a:close/>
+                  <a:moveTo>
+                    <a:pt x="142873" y="0"/>
+                  </a:moveTo>
+                  <a:lnTo>
+                    <a:pt x="1573110" y="0"/>
+                  </a:lnTo>
+                  <a:cubicBezTo>
+                    <a:pt x="1652017" y="0"/>
+                    <a:pt x="1715983" y="63966"/>
+                    <a:pt x="1715983" y="142873"/>
+                  </a:cubicBezTo>
+                  <a:lnTo>
+                    <a:pt x="1715983" y="3510026"/>
+                  </a:lnTo>
+                  <a:cubicBezTo>
+                    <a:pt x="1715983" y="3588933"/>
+                    <a:pt x="1652017" y="3652899"/>
+                    <a:pt x="1573110" y="3652899"/>
+                  </a:cubicBezTo>
+                  <a:lnTo>
+                    <a:pt x="142873" y="3652899"/>
+                  </a:lnTo>
+                  <a:cubicBezTo>
+                    <a:pt x="63966" y="3652899"/>
+                    <a:pt x="0" y="3588933"/>
+                    <a:pt x="0" y="3510026"/>
+                  </a:cubicBezTo>
+                  <a:lnTo>
+                    <a:pt x="0" y="142873"/>
+                  </a:lnTo>
+                  <a:cubicBezTo>
+                    <a:pt x="0" y="63966"/>
+                    <a:pt x="63966" y="0"/>
+                    <a:pt x="142873" y="0"/>
+                  </a:cubicBezTo>
+                  <a:close/>
+                </a:path>
+              </a:pathLst>
+            </a:custGeom>
+          </p:spPr>
+        </p:pic>
+      </p:grpSp>
     </p:spTree>
   </p:cSld>
   <p:clrMapOvr>
@@ -10666,16 +12000,762 @@
       <p:grpSpPr/>
       <p:grpSp>
         <p:nvGrpSpPr>
-          <p:cNvPr id="14" name="组合 13"/>
+          <p:cNvPr id="7" name="组合 6"/>
           <p:cNvGrpSpPr/>
           <p:nvPr/>
         </p:nvGrpSpPr>
         <p:grpSpPr>
           <a:xfrm>
-            <a:off x="4953000" y="196850"/>
-            <a:ext cx="5035550" cy="5035550"/>
-            <a:chOff x="920" y="310"/>
-            <a:chExt cx="7930" cy="7930"/>
+            <a:off x="3488174" y="1342379"/>
+            <a:ext cx="5436304" cy="3890645"/>
+            <a:chOff x="3958074" y="1164579"/>
+            <a:chExt cx="5436304" cy="3890645"/>
+          </a:xfrm>
+        </p:grpSpPr>
+        <p:grpSp>
+          <p:nvGrpSpPr>
+            <p:cNvPr id="5" name="组合 4"/>
+            <p:cNvGrpSpPr/>
+            <p:nvPr/>
+          </p:nvGrpSpPr>
+          <p:grpSpPr>
+            <a:xfrm>
+              <a:off x="3958074" y="1164579"/>
+              <a:ext cx="2320902" cy="3890645"/>
+              <a:chOff x="3407229" y="1164579"/>
+              <a:chExt cx="2320902" cy="3890645"/>
+            </a:xfrm>
+          </p:grpSpPr>
+          <p:grpSp>
+            <p:nvGrpSpPr>
+              <p:cNvPr id="4" name="组合 3"/>
+              <p:cNvGrpSpPr/>
+              <p:nvPr/>
+            </p:nvGrpSpPr>
+            <p:grpSpPr>
+              <a:xfrm>
+                <a:off x="3407229" y="1164579"/>
+                <a:ext cx="1979295" cy="3890645"/>
+                <a:chOff x="5209721" y="2071270"/>
+                <a:chExt cx="1979295" cy="3890645"/>
+              </a:xfrm>
+            </p:grpSpPr>
+            <p:pic>
+              <p:nvPicPr>
+                <p:cNvPr id="19" name="图片 18" descr="ef56901b-e67b-48c3-91cc-2ffb6efbef1e"/>
+                <p:cNvPicPr>
+                  <a:picLocks noChangeAspect="1"/>
+                </p:cNvPicPr>
+                <p:nvPr/>
+              </p:nvPicPr>
+              <p:blipFill rotWithShape="1">
+                <a:blip r:embed="rId1"/>
+                <a:srcRect l="30132" t="10719" r="30559" b="12022"/>
+                <a:stretch>
+                  <a:fillRect/>
+                </a:stretch>
+              </p:blipFill>
+              <p:spPr>
+                <a:xfrm>
+                  <a:off x="5209721" y="2071270"/>
+                  <a:ext cx="1979295" cy="3890645"/>
+                </a:xfrm>
+                <a:prstGeom prst="rect">
+                  <a:avLst/>
+                </a:prstGeom>
+              </p:spPr>
+            </p:pic>
+            <p:pic>
+              <p:nvPicPr>
+                <p:cNvPr id="20" name="图片 19" descr="D:/实验研究/论文研究/支付协议/支付协议/支付模型ppt/2.jpg2"/>
+                <p:cNvPicPr>
+                  <a:picLocks noChangeAspect="1"/>
+                </p:cNvPicPr>
+                <p:nvPr/>
+              </p:nvPicPr>
+              <p:blipFill rotWithShape="1">
+                <a:blip r:embed="rId2"/>
+                <a:srcRect l="262" t="21" r="-17" b="31"/>
+                <a:stretch>
+                  <a:fillRect/>
+                </a:stretch>
+              </p:blipFill>
+              <p:spPr>
+                <a:xfrm>
+                  <a:off x="5347408" y="2193608"/>
+                  <a:ext cx="1714849" cy="3622830"/>
+                </a:xfrm>
+                <a:custGeom>
+                  <a:avLst/>
+                  <a:gdLst>
+                    <a:gd name="connsiteX0" fmla="*/ 853548 w 1714849"/>
+                    <a:gd name="connsiteY0" fmla="*/ 61524 h 3622830"/>
+                    <a:gd name="connsiteX1" fmla="*/ 811479 w 1714849"/>
+                    <a:gd name="connsiteY1" fmla="*/ 103593 h 3622830"/>
+                    <a:gd name="connsiteX2" fmla="*/ 853548 w 1714849"/>
+                    <a:gd name="connsiteY2" fmla="*/ 145662 h 3622830"/>
+                    <a:gd name="connsiteX3" fmla="*/ 895617 w 1714849"/>
+                    <a:gd name="connsiteY3" fmla="*/ 103593 h 3622830"/>
+                    <a:gd name="connsiteX4" fmla="*/ 853548 w 1714849"/>
+                    <a:gd name="connsiteY4" fmla="*/ 61524 h 3622830"/>
+                    <a:gd name="connsiteX5" fmla="*/ 149912 w 1714849"/>
+                    <a:gd name="connsiteY5" fmla="*/ 0 h 3622830"/>
+                    <a:gd name="connsiteX6" fmla="*/ 1564937 w 1714849"/>
+                    <a:gd name="connsiteY6" fmla="*/ 0 h 3622830"/>
+                    <a:gd name="connsiteX7" fmla="*/ 1714849 w 1714849"/>
+                    <a:gd name="connsiteY7" fmla="*/ 149912 h 3622830"/>
+                    <a:gd name="connsiteX8" fmla="*/ 1714849 w 1714849"/>
+                    <a:gd name="connsiteY8" fmla="*/ 3472918 h 3622830"/>
+                    <a:gd name="connsiteX9" fmla="*/ 1564937 w 1714849"/>
+                    <a:gd name="connsiteY9" fmla="*/ 3622830 h 3622830"/>
+                    <a:gd name="connsiteX10" fmla="*/ 149912 w 1714849"/>
+                    <a:gd name="connsiteY10" fmla="*/ 3622830 h 3622830"/>
+                    <a:gd name="connsiteX11" fmla="*/ 0 w 1714849"/>
+                    <a:gd name="connsiteY11" fmla="*/ 3472918 h 3622830"/>
+                    <a:gd name="connsiteX12" fmla="*/ 0 w 1714849"/>
+                    <a:gd name="connsiteY12" fmla="*/ 149912 h 3622830"/>
+                    <a:gd name="connsiteX13" fmla="*/ 149912 w 1714849"/>
+                    <a:gd name="connsiteY13" fmla="*/ 0 h 3622830"/>
+                  </a:gdLst>
+                  <a:ahLst/>
+                  <a:cxnLst>
+                    <a:cxn ang="0">
+                      <a:pos x="connsiteX0" y="connsiteY0"/>
+                    </a:cxn>
+                    <a:cxn ang="0">
+                      <a:pos x="connsiteX1" y="connsiteY1"/>
+                    </a:cxn>
+                    <a:cxn ang="0">
+                      <a:pos x="connsiteX2" y="connsiteY2"/>
+                    </a:cxn>
+                    <a:cxn ang="0">
+                      <a:pos x="connsiteX3" y="connsiteY3"/>
+                    </a:cxn>
+                    <a:cxn ang="0">
+                      <a:pos x="connsiteX4" y="connsiteY4"/>
+                    </a:cxn>
+                    <a:cxn ang="0">
+                      <a:pos x="connsiteX5" y="connsiteY5"/>
+                    </a:cxn>
+                    <a:cxn ang="0">
+                      <a:pos x="connsiteX6" y="connsiteY6"/>
+                    </a:cxn>
+                    <a:cxn ang="0">
+                      <a:pos x="connsiteX7" y="connsiteY7"/>
+                    </a:cxn>
+                    <a:cxn ang="0">
+                      <a:pos x="connsiteX8" y="connsiteY8"/>
+                    </a:cxn>
+                    <a:cxn ang="0">
+                      <a:pos x="connsiteX9" y="connsiteY9"/>
+                    </a:cxn>
+                    <a:cxn ang="0">
+                      <a:pos x="connsiteX10" y="connsiteY10"/>
+                    </a:cxn>
+                    <a:cxn ang="0">
+                      <a:pos x="connsiteX11" y="connsiteY11"/>
+                    </a:cxn>
+                    <a:cxn ang="0">
+                      <a:pos x="connsiteX12" y="connsiteY12"/>
+                    </a:cxn>
+                    <a:cxn ang="0">
+                      <a:pos x="connsiteX13" y="connsiteY13"/>
+                    </a:cxn>
+                  </a:cxnLst>
+                  <a:rect l="l" t="t" r="r" b="b"/>
+                  <a:pathLst>
+                    <a:path w="1714849" h="3622830">
+                      <a:moveTo>
+                        <a:pt x="853548" y="61524"/>
+                      </a:moveTo>
+                      <a:cubicBezTo>
+                        <a:pt x="830314" y="61524"/>
+                        <a:pt x="811479" y="80359"/>
+                        <a:pt x="811479" y="103593"/>
+                      </a:cubicBezTo>
+                      <a:cubicBezTo>
+                        <a:pt x="811479" y="126827"/>
+                        <a:pt x="830314" y="145662"/>
+                        <a:pt x="853548" y="145662"/>
+                      </a:cubicBezTo>
+                      <a:cubicBezTo>
+                        <a:pt x="876782" y="145662"/>
+                        <a:pt x="895617" y="126827"/>
+                        <a:pt x="895617" y="103593"/>
+                      </a:cubicBezTo>
+                      <a:cubicBezTo>
+                        <a:pt x="895617" y="80359"/>
+                        <a:pt x="876782" y="61524"/>
+                        <a:pt x="853548" y="61524"/>
+                      </a:cubicBezTo>
+                      <a:close/>
+                      <a:moveTo>
+                        <a:pt x="149912" y="0"/>
+                      </a:moveTo>
+                      <a:lnTo>
+                        <a:pt x="1564937" y="0"/>
+                      </a:lnTo>
+                      <a:cubicBezTo>
+                        <a:pt x="1647731" y="0"/>
+                        <a:pt x="1714849" y="67118"/>
+                        <a:pt x="1714849" y="149912"/>
+                      </a:cubicBezTo>
+                      <a:lnTo>
+                        <a:pt x="1714849" y="3472918"/>
+                      </a:lnTo>
+                      <a:cubicBezTo>
+                        <a:pt x="1714849" y="3555712"/>
+                        <a:pt x="1647731" y="3622830"/>
+                        <a:pt x="1564937" y="3622830"/>
+                      </a:cubicBezTo>
+                      <a:lnTo>
+                        <a:pt x="149912" y="3622830"/>
+                      </a:lnTo>
+                      <a:cubicBezTo>
+                        <a:pt x="67118" y="3622830"/>
+                        <a:pt x="0" y="3555712"/>
+                        <a:pt x="0" y="3472918"/>
+                      </a:cubicBezTo>
+                      <a:lnTo>
+                        <a:pt x="0" y="149912"/>
+                      </a:lnTo>
+                      <a:cubicBezTo>
+                        <a:pt x="0" y="67118"/>
+                        <a:pt x="67118" y="0"/>
+                        <a:pt x="149912" y="0"/>
+                      </a:cubicBezTo>
+                      <a:close/>
+                    </a:path>
+                  </a:pathLst>
+                </a:custGeom>
+              </p:spPr>
+            </p:pic>
+          </p:grpSp>
+          <p:pic>
+            <p:nvPicPr>
+              <p:cNvPr id="2" name="图片 1" descr="D:/实验研究/论文研究/支付协议/支付协议/支付模型ppt/序号1-01.svg序号1-01"/>
+              <p:cNvPicPr>
+                <a:picLocks noChangeAspect="1"/>
+              </p:cNvPicPr>
+              <p:nvPr/>
+            </p:nvPicPr>
+            <p:blipFill>
+              <a:blip r:embed="rId3">
+                <a:extLst>
+                  <a:ext uri="{96DAC541-7B7A-43D3-8B79-37D633B846F1}">
+                    <asvg:svgBlip xmlns:asvg="http://schemas.microsoft.com/office/drawing/2016/SVG/main" r:embed="rId4"/>
+                  </a:ext>
+                </a:extLst>
+              </a:blip>
+              <a:srcRect t="23" b="23"/>
+              <a:stretch>
+                <a:fillRect/>
+              </a:stretch>
+            </p:blipFill>
+            <p:spPr>
+              <a:xfrm>
+                <a:off x="5483701" y="1418355"/>
+                <a:ext cx="244430" cy="244430"/>
+              </a:xfrm>
+              <a:prstGeom prst="rect">
+                <a:avLst/>
+              </a:prstGeom>
+            </p:spPr>
+          </p:pic>
+        </p:grpSp>
+        <p:grpSp>
+          <p:nvGrpSpPr>
+            <p:cNvPr id="6" name="组合 5"/>
+            <p:cNvGrpSpPr/>
+            <p:nvPr/>
+          </p:nvGrpSpPr>
+          <p:grpSpPr>
+            <a:xfrm>
+              <a:off x="7073476" y="1164579"/>
+              <a:ext cx="2320902" cy="3890645"/>
+              <a:chOff x="7073476" y="1164579"/>
+              <a:chExt cx="2320902" cy="3890645"/>
+            </a:xfrm>
+          </p:grpSpPr>
+          <p:grpSp>
+            <p:nvGrpSpPr>
+              <p:cNvPr id="3" name="组合 2"/>
+              <p:cNvGrpSpPr/>
+              <p:nvPr/>
+            </p:nvGrpSpPr>
+            <p:grpSpPr>
+              <a:xfrm>
+                <a:off x="7073476" y="1164579"/>
+                <a:ext cx="1979295" cy="3890645"/>
+                <a:chOff x="6484937" y="882650"/>
+                <a:chExt cx="1979295" cy="3890645"/>
+              </a:xfrm>
+            </p:grpSpPr>
+            <p:pic>
+              <p:nvPicPr>
+                <p:cNvPr id="8" name="图片 7" descr="ef56901b-e67b-48c3-91cc-2ffb6efbef1e"/>
+                <p:cNvPicPr>
+                  <a:picLocks noChangeAspect="1"/>
+                </p:cNvPicPr>
+                <p:nvPr/>
+              </p:nvPicPr>
+              <p:blipFill rotWithShape="1">
+                <a:blip r:embed="rId1"/>
+                <a:srcRect l="30132" t="10719" r="30559" b="12022"/>
+                <a:stretch>
+                  <a:fillRect/>
+                </a:stretch>
+              </p:blipFill>
+              <p:spPr>
+                <a:xfrm>
+                  <a:off x="6484937" y="882650"/>
+                  <a:ext cx="1979295" cy="3890645"/>
+                </a:xfrm>
+                <a:prstGeom prst="rect">
+                  <a:avLst/>
+                </a:prstGeom>
+              </p:spPr>
+            </p:pic>
+            <p:pic>
+              <p:nvPicPr>
+                <p:cNvPr id="18" name="图片 17"/>
+                <p:cNvPicPr>
+                  <a:picLocks noChangeAspect="1"/>
+                </p:cNvPicPr>
+                <p:nvPr/>
+              </p:nvPicPr>
+              <p:blipFill rotWithShape="1">
+                <a:blip r:embed="rId5"/>
+                <a:srcRect l="117" t="-39" r="-220" b="-19"/>
+                <a:stretch>
+                  <a:fillRect/>
+                </a:stretch>
+              </p:blipFill>
+              <p:spPr>
+                <a:xfrm>
+                  <a:off x="6621567" y="1004697"/>
+                  <a:ext cx="1715983" cy="3618321"/>
+                </a:xfrm>
+                <a:custGeom>
+                  <a:avLst/>
+                  <a:gdLst>
+                    <a:gd name="connsiteX0" fmla="*/ 854765 w 1715983"/>
+                    <a:gd name="connsiteY0" fmla="*/ 62102 h 3652899"/>
+                    <a:gd name="connsiteX1" fmla="*/ 812696 w 1715983"/>
+                    <a:gd name="connsiteY1" fmla="*/ 104171 h 3652899"/>
+                    <a:gd name="connsiteX2" fmla="*/ 854765 w 1715983"/>
+                    <a:gd name="connsiteY2" fmla="*/ 146240 h 3652899"/>
+                    <a:gd name="connsiteX3" fmla="*/ 896834 w 1715983"/>
+                    <a:gd name="connsiteY3" fmla="*/ 104171 h 3652899"/>
+                    <a:gd name="connsiteX4" fmla="*/ 854765 w 1715983"/>
+                    <a:gd name="connsiteY4" fmla="*/ 62102 h 3652899"/>
+                    <a:gd name="connsiteX5" fmla="*/ 142873 w 1715983"/>
+                    <a:gd name="connsiteY5" fmla="*/ 0 h 3652899"/>
+                    <a:gd name="connsiteX6" fmla="*/ 1573110 w 1715983"/>
+                    <a:gd name="connsiteY6" fmla="*/ 0 h 3652899"/>
+                    <a:gd name="connsiteX7" fmla="*/ 1715983 w 1715983"/>
+                    <a:gd name="connsiteY7" fmla="*/ 142873 h 3652899"/>
+                    <a:gd name="connsiteX8" fmla="*/ 1715983 w 1715983"/>
+                    <a:gd name="connsiteY8" fmla="*/ 3510026 h 3652899"/>
+                    <a:gd name="connsiteX9" fmla="*/ 1573110 w 1715983"/>
+                    <a:gd name="connsiteY9" fmla="*/ 3652899 h 3652899"/>
+                    <a:gd name="connsiteX10" fmla="*/ 142873 w 1715983"/>
+                    <a:gd name="connsiteY10" fmla="*/ 3652899 h 3652899"/>
+                    <a:gd name="connsiteX11" fmla="*/ 0 w 1715983"/>
+                    <a:gd name="connsiteY11" fmla="*/ 3510026 h 3652899"/>
+                    <a:gd name="connsiteX12" fmla="*/ 0 w 1715983"/>
+                    <a:gd name="connsiteY12" fmla="*/ 142873 h 3652899"/>
+                    <a:gd name="connsiteX13" fmla="*/ 142873 w 1715983"/>
+                    <a:gd name="connsiteY13" fmla="*/ 0 h 3652899"/>
+                  </a:gdLst>
+                  <a:ahLst/>
+                  <a:cxnLst>
+                    <a:cxn ang="0">
+                      <a:pos x="connsiteX0" y="connsiteY0"/>
+                    </a:cxn>
+                    <a:cxn ang="0">
+                      <a:pos x="connsiteX1" y="connsiteY1"/>
+                    </a:cxn>
+                    <a:cxn ang="0">
+                      <a:pos x="connsiteX2" y="connsiteY2"/>
+                    </a:cxn>
+                    <a:cxn ang="0">
+                      <a:pos x="connsiteX3" y="connsiteY3"/>
+                    </a:cxn>
+                    <a:cxn ang="0">
+                      <a:pos x="connsiteX4" y="connsiteY4"/>
+                    </a:cxn>
+                    <a:cxn ang="0">
+                      <a:pos x="connsiteX5" y="connsiteY5"/>
+                    </a:cxn>
+                    <a:cxn ang="0">
+                      <a:pos x="connsiteX6" y="connsiteY6"/>
+                    </a:cxn>
+                    <a:cxn ang="0">
+                      <a:pos x="connsiteX7" y="connsiteY7"/>
+                    </a:cxn>
+                    <a:cxn ang="0">
+                      <a:pos x="connsiteX8" y="connsiteY8"/>
+                    </a:cxn>
+                    <a:cxn ang="0">
+                      <a:pos x="connsiteX9" y="connsiteY9"/>
+                    </a:cxn>
+                    <a:cxn ang="0">
+                      <a:pos x="connsiteX10" y="connsiteY10"/>
+                    </a:cxn>
+                    <a:cxn ang="0">
+                      <a:pos x="connsiteX11" y="connsiteY11"/>
+                    </a:cxn>
+                    <a:cxn ang="0">
+                      <a:pos x="connsiteX12" y="connsiteY12"/>
+                    </a:cxn>
+                    <a:cxn ang="0">
+                      <a:pos x="connsiteX13" y="connsiteY13"/>
+                    </a:cxn>
+                  </a:cxnLst>
+                  <a:rect l="l" t="t" r="r" b="b"/>
+                  <a:pathLst>
+                    <a:path w="1715983" h="3652899">
+                      <a:moveTo>
+                        <a:pt x="854765" y="62102"/>
+                      </a:moveTo>
+                      <a:cubicBezTo>
+                        <a:pt x="831531" y="62102"/>
+                        <a:pt x="812696" y="80937"/>
+                        <a:pt x="812696" y="104171"/>
+                      </a:cubicBezTo>
+                      <a:cubicBezTo>
+                        <a:pt x="812696" y="127405"/>
+                        <a:pt x="831531" y="146240"/>
+                        <a:pt x="854765" y="146240"/>
+                      </a:cubicBezTo>
+                      <a:cubicBezTo>
+                        <a:pt x="877999" y="146240"/>
+                        <a:pt x="896834" y="127405"/>
+                        <a:pt x="896834" y="104171"/>
+                      </a:cubicBezTo>
+                      <a:cubicBezTo>
+                        <a:pt x="896834" y="80937"/>
+                        <a:pt x="877999" y="62102"/>
+                        <a:pt x="854765" y="62102"/>
+                      </a:cubicBezTo>
+                      <a:close/>
+                      <a:moveTo>
+                        <a:pt x="142873" y="0"/>
+                      </a:moveTo>
+                      <a:lnTo>
+                        <a:pt x="1573110" y="0"/>
+                      </a:lnTo>
+                      <a:cubicBezTo>
+                        <a:pt x="1652017" y="0"/>
+                        <a:pt x="1715983" y="63966"/>
+                        <a:pt x="1715983" y="142873"/>
+                      </a:cubicBezTo>
+                      <a:lnTo>
+                        <a:pt x="1715983" y="3510026"/>
+                      </a:lnTo>
+                      <a:cubicBezTo>
+                        <a:pt x="1715983" y="3588933"/>
+                        <a:pt x="1652017" y="3652899"/>
+                        <a:pt x="1573110" y="3652899"/>
+                      </a:cubicBezTo>
+                      <a:lnTo>
+                        <a:pt x="142873" y="3652899"/>
+                      </a:lnTo>
+                      <a:cubicBezTo>
+                        <a:pt x="63966" y="3652899"/>
+                        <a:pt x="0" y="3588933"/>
+                        <a:pt x="0" y="3510026"/>
+                      </a:cubicBezTo>
+                      <a:lnTo>
+                        <a:pt x="0" y="142873"/>
+                      </a:lnTo>
+                      <a:cubicBezTo>
+                        <a:pt x="0" y="63966"/>
+                        <a:pt x="63966" y="0"/>
+                        <a:pt x="142873" y="0"/>
+                      </a:cubicBezTo>
+                      <a:close/>
+                    </a:path>
+                  </a:pathLst>
+                </a:custGeom>
+              </p:spPr>
+            </p:pic>
+          </p:grpSp>
+          <p:pic>
+            <p:nvPicPr>
+              <p:cNvPr id="11" name="图片 10" descr="D:/实验研究/论文研究/支付协议/支付协议/支付模型ppt/序号2-01.svg序号2-01"/>
+              <p:cNvPicPr>
+                <a:picLocks noChangeAspect="1"/>
+              </p:cNvPicPr>
+              <p:nvPr/>
+            </p:nvPicPr>
+            <p:blipFill>
+              <a:blip r:embed="rId6">
+                <a:extLst>
+                  <a:ext uri="{96DAC541-7B7A-43D3-8B79-37D633B846F1}">
+                    <asvg:svgBlip xmlns:asvg="http://schemas.microsoft.com/office/drawing/2016/SVG/main" r:embed="rId7"/>
+                  </a:ext>
+                </a:extLst>
+              </a:blip>
+              <a:srcRect t="23" b="23"/>
+              <a:stretch>
+                <a:fillRect/>
+              </a:stretch>
+            </p:blipFill>
+            <p:spPr>
+              <a:xfrm>
+                <a:off x="9149948" y="1418355"/>
+                <a:ext cx="244430" cy="244430"/>
+              </a:xfrm>
+              <a:prstGeom prst="rect">
+                <a:avLst/>
+              </a:prstGeom>
+            </p:spPr>
+          </p:pic>
+        </p:grpSp>
+      </p:grpSp>
+    </p:spTree>
+  </p:cSld>
+  <p:clrMapOvr>
+    <a:masterClrMapping/>
+  </p:clrMapOvr>
+</p:sld>
+</file>
+
+<file path=ppt/slides/slide7.xml><?xml version="1.0" encoding="utf-8"?>
+<p:sld xmlns:a="http://schemas.openxmlformats.org/drawingml/2006/main" xmlns:r="http://schemas.openxmlformats.org/officeDocument/2006/relationships" xmlns:p="http://schemas.openxmlformats.org/presentationml/2006/main">
+  <p:cSld>
+    <p:spTree>
+      <p:nvGrpSpPr>
+        <p:cNvPr id="1" name=""/>
+        <p:cNvGrpSpPr/>
+        <p:nvPr/>
+      </p:nvGrpSpPr>
+      <p:grpSpPr/>
+      <p:grpSp>
+        <p:nvGrpSpPr>
+          <p:cNvPr id="4" name="组合 3"/>
+          <p:cNvGrpSpPr/>
+          <p:nvPr/>
+        </p:nvGrpSpPr>
+        <p:grpSpPr>
+          <a:xfrm>
+            <a:off x="3488174" y="1342379"/>
+            <a:ext cx="1979295" cy="3890645"/>
+            <a:chOff x="5209721" y="2071270"/>
+            <a:chExt cx="1979295" cy="3890645"/>
+          </a:xfrm>
+        </p:grpSpPr>
+        <p:pic>
+          <p:nvPicPr>
+            <p:cNvPr id="19" name="图片 18" descr="ef56901b-e67b-48c3-91cc-2ffb6efbef1e"/>
+            <p:cNvPicPr>
+              <a:picLocks noChangeAspect="1"/>
+            </p:cNvPicPr>
+            <p:nvPr/>
+          </p:nvPicPr>
+          <p:blipFill rotWithShape="1">
+            <a:blip r:embed="rId1"/>
+            <a:srcRect l="30132" t="10719" r="30559" b="12022"/>
+            <a:stretch>
+              <a:fillRect/>
+            </a:stretch>
+          </p:blipFill>
+          <p:spPr>
+            <a:xfrm>
+              <a:off x="5209721" y="2071270"/>
+              <a:ext cx="1979295" cy="3890645"/>
+            </a:xfrm>
+            <a:prstGeom prst="rect">
+              <a:avLst/>
+            </a:prstGeom>
+          </p:spPr>
+        </p:pic>
+        <p:pic>
+          <p:nvPicPr>
+            <p:cNvPr id="20" name="图片 19"/>
+            <p:cNvPicPr>
+              <a:picLocks noChangeAspect="1"/>
+            </p:cNvPicPr>
+            <p:nvPr/>
+          </p:nvPicPr>
+          <p:blipFill rotWithShape="1">
+            <a:blip r:embed="rId2">
+              <a:extLst>
+                <a:ext uri="{28A0092B-C50C-407E-A947-70E740481C1C}">
+                  <a14:useLocalDpi xmlns:a14="http://schemas.microsoft.com/office/drawing/2010/main" val="0"/>
+                </a:ext>
+              </a:extLst>
+            </a:blip>
+            <a:srcRect l="319" t="8" r="-319" b="4903"/>
+            <a:stretch>
+              <a:fillRect/>
+            </a:stretch>
+          </p:blipFill>
+          <p:spPr>
+            <a:xfrm>
+              <a:off x="5347408" y="2193608"/>
+              <a:ext cx="1714849" cy="3622830"/>
+            </a:xfrm>
+            <a:custGeom>
+              <a:avLst/>
+              <a:gdLst>
+                <a:gd name="connsiteX0" fmla="*/ 853548 w 1714849"/>
+                <a:gd name="connsiteY0" fmla="*/ 61524 h 3622830"/>
+                <a:gd name="connsiteX1" fmla="*/ 811479 w 1714849"/>
+                <a:gd name="connsiteY1" fmla="*/ 103593 h 3622830"/>
+                <a:gd name="connsiteX2" fmla="*/ 853548 w 1714849"/>
+                <a:gd name="connsiteY2" fmla="*/ 145662 h 3622830"/>
+                <a:gd name="connsiteX3" fmla="*/ 895617 w 1714849"/>
+                <a:gd name="connsiteY3" fmla="*/ 103593 h 3622830"/>
+                <a:gd name="connsiteX4" fmla="*/ 853548 w 1714849"/>
+                <a:gd name="connsiteY4" fmla="*/ 61524 h 3622830"/>
+                <a:gd name="connsiteX5" fmla="*/ 149912 w 1714849"/>
+                <a:gd name="connsiteY5" fmla="*/ 0 h 3622830"/>
+                <a:gd name="connsiteX6" fmla="*/ 1564937 w 1714849"/>
+                <a:gd name="connsiteY6" fmla="*/ 0 h 3622830"/>
+                <a:gd name="connsiteX7" fmla="*/ 1714849 w 1714849"/>
+                <a:gd name="connsiteY7" fmla="*/ 149912 h 3622830"/>
+                <a:gd name="connsiteX8" fmla="*/ 1714849 w 1714849"/>
+                <a:gd name="connsiteY8" fmla="*/ 3472918 h 3622830"/>
+                <a:gd name="connsiteX9" fmla="*/ 1564937 w 1714849"/>
+                <a:gd name="connsiteY9" fmla="*/ 3622830 h 3622830"/>
+                <a:gd name="connsiteX10" fmla="*/ 149912 w 1714849"/>
+                <a:gd name="connsiteY10" fmla="*/ 3622830 h 3622830"/>
+                <a:gd name="connsiteX11" fmla="*/ 0 w 1714849"/>
+                <a:gd name="connsiteY11" fmla="*/ 3472918 h 3622830"/>
+                <a:gd name="connsiteX12" fmla="*/ 0 w 1714849"/>
+                <a:gd name="connsiteY12" fmla="*/ 149912 h 3622830"/>
+                <a:gd name="connsiteX13" fmla="*/ 149912 w 1714849"/>
+                <a:gd name="connsiteY13" fmla="*/ 0 h 3622830"/>
+              </a:gdLst>
+              <a:ahLst/>
+              <a:cxnLst>
+                <a:cxn ang="0">
+                  <a:pos x="connsiteX0" y="connsiteY0"/>
+                </a:cxn>
+                <a:cxn ang="0">
+                  <a:pos x="connsiteX1" y="connsiteY1"/>
+                </a:cxn>
+                <a:cxn ang="0">
+                  <a:pos x="connsiteX2" y="connsiteY2"/>
+                </a:cxn>
+                <a:cxn ang="0">
+                  <a:pos x="connsiteX3" y="connsiteY3"/>
+                </a:cxn>
+                <a:cxn ang="0">
+                  <a:pos x="connsiteX4" y="connsiteY4"/>
+                </a:cxn>
+                <a:cxn ang="0">
+                  <a:pos x="connsiteX5" y="connsiteY5"/>
+                </a:cxn>
+                <a:cxn ang="0">
+                  <a:pos x="connsiteX6" y="connsiteY6"/>
+                </a:cxn>
+                <a:cxn ang="0">
+                  <a:pos x="connsiteX7" y="connsiteY7"/>
+                </a:cxn>
+                <a:cxn ang="0">
+                  <a:pos x="connsiteX8" y="connsiteY8"/>
+                </a:cxn>
+                <a:cxn ang="0">
+                  <a:pos x="connsiteX9" y="connsiteY9"/>
+                </a:cxn>
+                <a:cxn ang="0">
+                  <a:pos x="connsiteX10" y="connsiteY10"/>
+                </a:cxn>
+                <a:cxn ang="0">
+                  <a:pos x="connsiteX11" y="connsiteY11"/>
+                </a:cxn>
+                <a:cxn ang="0">
+                  <a:pos x="connsiteX12" y="connsiteY12"/>
+                </a:cxn>
+                <a:cxn ang="0">
+                  <a:pos x="connsiteX13" y="connsiteY13"/>
+                </a:cxn>
+              </a:cxnLst>
+              <a:rect l="l" t="t" r="r" b="b"/>
+              <a:pathLst>
+                <a:path w="1714849" h="3622830">
+                  <a:moveTo>
+                    <a:pt x="853548" y="61524"/>
+                  </a:moveTo>
+                  <a:cubicBezTo>
+                    <a:pt x="830314" y="61524"/>
+                    <a:pt x="811479" y="80359"/>
+                    <a:pt x="811479" y="103593"/>
+                  </a:cubicBezTo>
+                  <a:cubicBezTo>
+                    <a:pt x="811479" y="126827"/>
+                    <a:pt x="830314" y="145662"/>
+                    <a:pt x="853548" y="145662"/>
+                  </a:cubicBezTo>
+                  <a:cubicBezTo>
+                    <a:pt x="876782" y="145662"/>
+                    <a:pt x="895617" y="126827"/>
+                    <a:pt x="895617" y="103593"/>
+                  </a:cubicBezTo>
+                  <a:cubicBezTo>
+                    <a:pt x="895617" y="80359"/>
+                    <a:pt x="876782" y="61524"/>
+                    <a:pt x="853548" y="61524"/>
+                  </a:cubicBezTo>
+                  <a:close/>
+                  <a:moveTo>
+                    <a:pt x="149912" y="0"/>
+                  </a:moveTo>
+                  <a:lnTo>
+                    <a:pt x="1564937" y="0"/>
+                  </a:lnTo>
+                  <a:cubicBezTo>
+                    <a:pt x="1647731" y="0"/>
+                    <a:pt x="1714849" y="67118"/>
+                    <a:pt x="1714849" y="149912"/>
+                  </a:cubicBezTo>
+                  <a:lnTo>
+                    <a:pt x="1714849" y="3472918"/>
+                  </a:lnTo>
+                  <a:cubicBezTo>
+                    <a:pt x="1714849" y="3555712"/>
+                    <a:pt x="1647731" y="3622830"/>
+                    <a:pt x="1564937" y="3622830"/>
+                  </a:cubicBezTo>
+                  <a:lnTo>
+                    <a:pt x="149912" y="3622830"/>
+                  </a:lnTo>
+                  <a:cubicBezTo>
+                    <a:pt x="67118" y="3622830"/>
+                    <a:pt x="0" y="3555712"/>
+                    <a:pt x="0" y="3472918"/>
+                  </a:cubicBezTo>
+                  <a:lnTo>
+                    <a:pt x="0" y="149912"/>
+                  </a:lnTo>
+                  <a:cubicBezTo>
+                    <a:pt x="0" y="67118"/>
+                    <a:pt x="67118" y="0"/>
+                    <a:pt x="149912" y="0"/>
+                  </a:cubicBezTo>
+                  <a:close/>
+                </a:path>
+              </a:pathLst>
+            </a:custGeom>
+          </p:spPr>
+        </p:pic>
+      </p:grpSp>
+      <p:grpSp>
+        <p:nvGrpSpPr>
+          <p:cNvPr id="5" name="组合 4"/>
+          <p:cNvGrpSpPr/>
+          <p:nvPr/>
+        </p:nvGrpSpPr>
+        <p:grpSpPr>
+          <a:xfrm>
+            <a:off x="6603576" y="1342379"/>
+            <a:ext cx="1979295" cy="3890645"/>
+            <a:chOff x="6484937" y="882650"/>
+            <a:chExt cx="1979295" cy="3890645"/>
           </a:xfrm>
         </p:grpSpPr>
         <p:pic>
@@ -10686,16 +12766,17 @@
             </p:cNvPicPr>
             <p:nvPr/>
           </p:nvPicPr>
-          <p:blipFill>
+          <p:blipFill rotWithShape="1">
             <a:blip r:embed="rId1"/>
+            <a:srcRect l="30132" t="10719" r="30559" b="12022"/>
             <a:stretch>
               <a:fillRect/>
             </a:stretch>
           </p:blipFill>
           <p:spPr>
             <a:xfrm>
-              <a:off x="920" y="310"/>
-              <a:ext cx="7930" cy="7930"/>
+              <a:off x="6484937" y="882650"/>
+              <a:ext cx="1979295" cy="3890645"/>
             </a:xfrm>
             <a:prstGeom prst="rect">
               <a:avLst/>
@@ -10704,141 +12785,176 @@
         </p:pic>
         <p:pic>
           <p:nvPicPr>
-            <p:cNvPr id="16" name="图片 15"/>
+            <p:cNvPr id="18" name="图片 17"/>
             <p:cNvPicPr>
               <a:picLocks noChangeAspect="1"/>
             </p:cNvPicPr>
             <p:nvPr/>
           </p:nvPicPr>
-          <p:blipFill>
-            <a:blip r:embed="rId2"/>
-            <a:srcRect l="-3754" t="-1049" r="-3228" b="-1375"/>
+          <p:blipFill rotWithShape="1">
+            <a:blip r:embed="rId3">
+              <a:extLst>
+                <a:ext uri="{28A0092B-C50C-407E-A947-70E740481C1C}">
+                  <a14:useLocalDpi xmlns:a14="http://schemas.microsoft.com/office/drawing/2010/main" val="0"/>
+                </a:ext>
+              </a:extLst>
+            </a:blip>
+            <a:srcRect l="290" t="-8" r="-290" b="5122"/>
             <a:stretch>
               <a:fillRect/>
             </a:stretch>
           </p:blipFill>
           <p:spPr>
             <a:xfrm>
-              <a:off x="3440" y="1324"/>
-              <a:ext cx="2850" cy="5811"/>
+              <a:off x="6621567" y="1004697"/>
+              <a:ext cx="1715983" cy="3618321"/>
             </a:xfrm>
-            <a:prstGeom prst="roundRect">
+            <a:custGeom>
               <a:avLst/>
-            </a:prstGeom>
+              <a:gdLst>
+                <a:gd name="connsiteX0" fmla="*/ 854765 w 1715983"/>
+                <a:gd name="connsiteY0" fmla="*/ 62102 h 3652899"/>
+                <a:gd name="connsiteX1" fmla="*/ 812696 w 1715983"/>
+                <a:gd name="connsiteY1" fmla="*/ 104171 h 3652899"/>
+                <a:gd name="connsiteX2" fmla="*/ 854765 w 1715983"/>
+                <a:gd name="connsiteY2" fmla="*/ 146240 h 3652899"/>
+                <a:gd name="connsiteX3" fmla="*/ 896834 w 1715983"/>
+                <a:gd name="connsiteY3" fmla="*/ 104171 h 3652899"/>
+                <a:gd name="connsiteX4" fmla="*/ 854765 w 1715983"/>
+                <a:gd name="connsiteY4" fmla="*/ 62102 h 3652899"/>
+                <a:gd name="connsiteX5" fmla="*/ 142873 w 1715983"/>
+                <a:gd name="connsiteY5" fmla="*/ 0 h 3652899"/>
+                <a:gd name="connsiteX6" fmla="*/ 1573110 w 1715983"/>
+                <a:gd name="connsiteY6" fmla="*/ 0 h 3652899"/>
+                <a:gd name="connsiteX7" fmla="*/ 1715983 w 1715983"/>
+                <a:gd name="connsiteY7" fmla="*/ 142873 h 3652899"/>
+                <a:gd name="connsiteX8" fmla="*/ 1715983 w 1715983"/>
+                <a:gd name="connsiteY8" fmla="*/ 3510026 h 3652899"/>
+                <a:gd name="connsiteX9" fmla="*/ 1573110 w 1715983"/>
+                <a:gd name="connsiteY9" fmla="*/ 3652899 h 3652899"/>
+                <a:gd name="connsiteX10" fmla="*/ 142873 w 1715983"/>
+                <a:gd name="connsiteY10" fmla="*/ 3652899 h 3652899"/>
+                <a:gd name="connsiteX11" fmla="*/ 0 w 1715983"/>
+                <a:gd name="connsiteY11" fmla="*/ 3510026 h 3652899"/>
+                <a:gd name="connsiteX12" fmla="*/ 0 w 1715983"/>
+                <a:gd name="connsiteY12" fmla="*/ 142873 h 3652899"/>
+                <a:gd name="connsiteX13" fmla="*/ 142873 w 1715983"/>
+                <a:gd name="connsiteY13" fmla="*/ 0 h 3652899"/>
+              </a:gdLst>
+              <a:ahLst/>
+              <a:cxnLst>
+                <a:cxn ang="0">
+                  <a:pos x="connsiteX0" y="connsiteY0"/>
+                </a:cxn>
+                <a:cxn ang="0">
+                  <a:pos x="connsiteX1" y="connsiteY1"/>
+                </a:cxn>
+                <a:cxn ang="0">
+                  <a:pos x="connsiteX2" y="connsiteY2"/>
+                </a:cxn>
+                <a:cxn ang="0">
+                  <a:pos x="connsiteX3" y="connsiteY3"/>
+                </a:cxn>
+                <a:cxn ang="0">
+                  <a:pos x="connsiteX4" y="connsiteY4"/>
+                </a:cxn>
+                <a:cxn ang="0">
+                  <a:pos x="connsiteX5" y="connsiteY5"/>
+                </a:cxn>
+                <a:cxn ang="0">
+                  <a:pos x="connsiteX6" y="connsiteY6"/>
+                </a:cxn>
+                <a:cxn ang="0">
+                  <a:pos x="connsiteX7" y="connsiteY7"/>
+                </a:cxn>
+                <a:cxn ang="0">
+                  <a:pos x="connsiteX8" y="connsiteY8"/>
+                </a:cxn>
+                <a:cxn ang="0">
+                  <a:pos x="connsiteX9" y="connsiteY9"/>
+                </a:cxn>
+                <a:cxn ang="0">
+                  <a:pos x="connsiteX10" y="connsiteY10"/>
+                </a:cxn>
+                <a:cxn ang="0">
+                  <a:pos x="connsiteX11" y="connsiteY11"/>
+                </a:cxn>
+                <a:cxn ang="0">
+                  <a:pos x="connsiteX12" y="connsiteY12"/>
+                </a:cxn>
+                <a:cxn ang="0">
+                  <a:pos x="connsiteX13" y="connsiteY13"/>
+                </a:cxn>
+              </a:cxnLst>
+              <a:rect l="l" t="t" r="r" b="b"/>
+              <a:pathLst>
+                <a:path w="1715983" h="3652899">
+                  <a:moveTo>
+                    <a:pt x="854765" y="62102"/>
+                  </a:moveTo>
+                  <a:cubicBezTo>
+                    <a:pt x="831531" y="62102"/>
+                    <a:pt x="812696" y="80937"/>
+                    <a:pt x="812696" y="104171"/>
+                  </a:cubicBezTo>
+                  <a:cubicBezTo>
+                    <a:pt x="812696" y="127405"/>
+                    <a:pt x="831531" y="146240"/>
+                    <a:pt x="854765" y="146240"/>
+                  </a:cubicBezTo>
+                  <a:cubicBezTo>
+                    <a:pt x="877999" y="146240"/>
+                    <a:pt x="896834" y="127405"/>
+                    <a:pt x="896834" y="104171"/>
+                  </a:cubicBezTo>
+                  <a:cubicBezTo>
+                    <a:pt x="896834" y="80937"/>
+                    <a:pt x="877999" y="62102"/>
+                    <a:pt x="854765" y="62102"/>
+                  </a:cubicBezTo>
+                  <a:close/>
+                  <a:moveTo>
+                    <a:pt x="142873" y="0"/>
+                  </a:moveTo>
+                  <a:lnTo>
+                    <a:pt x="1573110" y="0"/>
+                  </a:lnTo>
+                  <a:cubicBezTo>
+                    <a:pt x="1652017" y="0"/>
+                    <a:pt x="1715983" y="63966"/>
+                    <a:pt x="1715983" y="142873"/>
+                  </a:cubicBezTo>
+                  <a:lnTo>
+                    <a:pt x="1715983" y="3510026"/>
+                  </a:lnTo>
+                  <a:cubicBezTo>
+                    <a:pt x="1715983" y="3588933"/>
+                    <a:pt x="1652017" y="3652899"/>
+                    <a:pt x="1573110" y="3652899"/>
+                  </a:cubicBezTo>
+                  <a:lnTo>
+                    <a:pt x="142873" y="3652899"/>
+                  </a:lnTo>
+                  <a:cubicBezTo>
+                    <a:pt x="63966" y="3652899"/>
+                    <a:pt x="0" y="3588933"/>
+                    <a:pt x="0" y="3510026"/>
+                  </a:cubicBezTo>
+                  <a:lnTo>
+                    <a:pt x="0" y="142873"/>
+                  </a:lnTo>
+                  <a:cubicBezTo>
+                    <a:pt x="0" y="63966"/>
+                    <a:pt x="63966" y="0"/>
+                    <a:pt x="142873" y="0"/>
+                  </a:cubicBezTo>
+                  <a:close/>
+                </a:path>
+              </a:pathLst>
+            </a:custGeom>
           </p:spPr>
         </p:pic>
       </p:grpSp>
-      <p:pic>
-        <p:nvPicPr>
-          <p:cNvPr id="9" name="图片 8" descr="ef56901b-e67b-48c3-91cc-2ffb6efbef1e"/>
-          <p:cNvPicPr>
-            <a:picLocks noChangeAspect="1"/>
-          </p:cNvPicPr>
-          <p:nvPr/>
-        </p:nvPicPr>
-        <p:blipFill>
-          <a:blip r:embed="rId1"/>
-          <a:stretch>
-            <a:fillRect/>
-          </a:stretch>
-        </p:blipFill>
-        <p:spPr>
-          <a:xfrm>
-            <a:off x="1701800" y="196850"/>
-            <a:ext cx="5035550" cy="5035550"/>
-          </a:xfrm>
-          <a:prstGeom prst="rect">
-            <a:avLst/>
-          </a:prstGeom>
-        </p:spPr>
-      </p:pic>
-      <p:pic>
-        <p:nvPicPr>
-          <p:cNvPr id="10" name="图片 9" descr="D:/实验研究/论文研究/支付协议/支付协议/支付模型ppt/2.jpg2"/>
-          <p:cNvPicPr>
-            <a:picLocks noChangeAspect="1"/>
-          </p:cNvPicPr>
-          <p:nvPr/>
-        </p:nvPicPr>
-        <p:blipFill>
-          <a:blip r:embed="rId3"/>
-          <a:srcRect l="-2593" t="-2073" r="-2963" b="-1388"/>
-          <a:stretch>
-            <a:fillRect/>
-          </a:stretch>
-        </p:blipFill>
-        <p:spPr>
-          <a:xfrm>
-            <a:off x="3308350" y="790575"/>
-            <a:ext cx="1809750" cy="3740150"/>
-          </a:xfrm>
-          <a:prstGeom prst="roundRect">
-            <a:avLst/>
-          </a:prstGeom>
-        </p:spPr>
-      </p:pic>
-      <p:pic>
-        <p:nvPicPr>
-          <p:cNvPr id="39" name="图片 38" descr="D:/实验研究/论文研究/支付协议/支付协议/支付模型ppt/序号1-01.svg序号1-01"/>
-          <p:cNvPicPr>
-            <a:picLocks noChangeAspect="1"/>
-          </p:cNvPicPr>
-          <p:nvPr/>
-        </p:nvPicPr>
-        <p:blipFill>
-          <a:blip r:embed="rId4">
-            <a:extLst>
-              <a:ext uri="{96DAC541-7B7A-43D3-8B79-37D633B846F1}">
-                <asvg:svgBlip xmlns:asvg="http://schemas.microsoft.com/office/drawing/2016/SVG/main" r:embed="rId5"/>
-              </a:ext>
-            </a:extLst>
-          </a:blip>
-          <a:srcRect t="23" b="23"/>
-          <a:stretch>
-            <a:fillRect/>
-          </a:stretch>
-        </p:blipFill>
-        <p:spPr>
-          <a:xfrm>
-            <a:off x="5327650" y="1313815"/>
-            <a:ext cx="360000" cy="360000"/>
-          </a:xfrm>
-          <a:prstGeom prst="rect">
-            <a:avLst/>
-          </a:prstGeom>
-        </p:spPr>
-      </p:pic>
-      <p:pic>
-        <p:nvPicPr>
-          <p:cNvPr id="40" name="图片 39" descr="D:/实验研究/论文研究/支付协议/支付协议/支付模型ppt/序号2-01.svg序号2-01"/>
-          <p:cNvPicPr>
-            <a:picLocks noChangeAspect="1"/>
-          </p:cNvPicPr>
-          <p:nvPr/>
-        </p:nvPicPr>
-        <p:blipFill>
-          <a:blip r:embed="rId6">
-            <a:extLst>
-              <a:ext uri="{96DAC541-7B7A-43D3-8B79-37D633B846F1}">
-                <asvg:svgBlip xmlns:asvg="http://schemas.microsoft.com/office/drawing/2016/SVG/main" r:embed="rId7"/>
-              </a:ext>
-            </a:extLst>
-          </a:blip>
-          <a:srcRect t="23" b="23"/>
-          <a:stretch>
-            <a:fillRect/>
-          </a:stretch>
-        </p:blipFill>
-        <p:spPr>
-          <a:xfrm>
-            <a:off x="8724265" y="1313815"/>
-            <a:ext cx="360000" cy="360000"/>
-          </a:xfrm>
-          <a:prstGeom prst="rect">
-            <a:avLst/>
-          </a:prstGeom>
-        </p:spPr>
-      </p:pic>
     </p:spTree>
   </p:cSld>
   <p:clrMapOvr>
@@ -10847,7 +12963,7 @@
 </p:sld>
 </file>
 
-<file path=ppt/slides/slide7.xml><?xml version="1.0" encoding="utf-8"?>
+<file path=ppt/slides/slide8.xml><?xml version="1.0" encoding="utf-8"?>
 <p:sld xmlns:a="http://schemas.openxmlformats.org/drawingml/2006/main" xmlns:r="http://schemas.openxmlformats.org/officeDocument/2006/relationships" xmlns:p="http://schemas.openxmlformats.org/presentationml/2006/main">
   <p:cSld>
     <p:spTree>
@@ -11764,744 +13880,6 @@
 </p:sld>
 </file>
 
-<file path=ppt/slides/slide8.xml><?xml version="1.0" encoding="utf-8"?>
-<p:sld xmlns:a="http://schemas.openxmlformats.org/drawingml/2006/main" xmlns:r="http://schemas.openxmlformats.org/officeDocument/2006/relationships" xmlns:p="http://schemas.openxmlformats.org/presentationml/2006/main">
-  <p:cSld>
-    <p:spTree>
-      <p:nvGrpSpPr>
-        <p:cNvPr id="1" name=""/>
-        <p:cNvGrpSpPr/>
-        <p:nvPr/>
-      </p:nvGrpSpPr>
-      <p:grpSpPr>
-        <a:xfrm>
-          <a:off x="0" y="0"/>
-          <a:ext cx="0" cy="0"/>
-          <a:chOff x="0" y="0"/>
-          <a:chExt cx="0" cy="0"/>
-        </a:xfrm>
-      </p:grpSpPr>
-      <p:pic>
-        <p:nvPicPr>
-          <p:cNvPr id="5" name="图形 4"/>
-          <p:cNvPicPr>
-            <a:picLocks noChangeAspect="1"/>
-          </p:cNvPicPr>
-          <p:nvPr/>
-        </p:nvPicPr>
-        <p:blipFill>
-          <a:blip r:embed="rId1" cstate="print">
-            <a:extLst>
-              <a:ext uri="{28A0092B-C50C-407E-A947-70E740481C1C}">
-                <a14:useLocalDpi xmlns:a14="http://schemas.microsoft.com/office/drawing/2010/main" val="0"/>
-              </a:ext>
-              <a:ext uri="{96DAC541-7B7A-43D3-8B79-37D633B846F1}">
-                <asvg:svgBlip xmlns:asvg="http://schemas.microsoft.com/office/drawing/2016/SVG/main" r:embed="rId2"/>
-              </a:ext>
-            </a:extLst>
-          </a:blip>
-          <a:stretch>
-            <a:fillRect/>
-          </a:stretch>
-        </p:blipFill>
-        <p:spPr>
-          <a:xfrm>
-            <a:off x="871642" y="3209373"/>
-            <a:ext cx="720000" cy="720000"/>
-          </a:xfrm>
-          <a:prstGeom prst="rect">
-            <a:avLst/>
-          </a:prstGeom>
-        </p:spPr>
-      </p:pic>
-      <p:pic>
-        <p:nvPicPr>
-          <p:cNvPr id="7" name="图形 6"/>
-          <p:cNvPicPr>
-            <a:picLocks noChangeAspect="1"/>
-          </p:cNvPicPr>
-          <p:nvPr/>
-        </p:nvPicPr>
-        <p:blipFill>
-          <a:blip r:embed="rId3" cstate="print">
-            <a:extLst>
-              <a:ext uri="{28A0092B-C50C-407E-A947-70E740481C1C}">
-                <a14:useLocalDpi xmlns:a14="http://schemas.microsoft.com/office/drawing/2010/main" val="0"/>
-              </a:ext>
-              <a:ext uri="{96DAC541-7B7A-43D3-8B79-37D633B846F1}">
-                <asvg:svgBlip xmlns:asvg="http://schemas.microsoft.com/office/drawing/2016/SVG/main" r:embed="rId4"/>
-              </a:ext>
-            </a:extLst>
-          </a:blip>
-          <a:stretch>
-            <a:fillRect/>
-          </a:stretch>
-        </p:blipFill>
-        <p:spPr>
-          <a:xfrm>
-            <a:off x="1016215" y="1907232"/>
-            <a:ext cx="720000" cy="720000"/>
-          </a:xfrm>
-          <a:prstGeom prst="rect">
-            <a:avLst/>
-          </a:prstGeom>
-        </p:spPr>
-      </p:pic>
-      <p:sp>
-        <p:nvSpPr>
-          <p:cNvPr id="10" name="矩形 9"/>
-          <p:cNvSpPr/>
-          <p:nvPr/>
-        </p:nvSpPr>
-        <p:spPr>
-          <a:xfrm>
-            <a:off x="2743600" y="2056451"/>
-            <a:ext cx="1236110" cy="2325262"/>
-          </a:xfrm>
-          <a:prstGeom prst="rect">
-            <a:avLst/>
-          </a:prstGeom>
-          <a:noFill/>
-          <a:ln w="19050">
-            <a:solidFill>
-              <a:schemeClr val="tx1"/>
-            </a:solidFill>
-            <a:prstDash val="dash"/>
-          </a:ln>
-        </p:spPr>
-        <p:style>
-          <a:lnRef idx="2">
-            <a:schemeClr val="accent1">
-              <a:shade val="50000"/>
-            </a:schemeClr>
-          </a:lnRef>
-          <a:fillRef idx="1">
-            <a:schemeClr val="accent1"/>
-          </a:fillRef>
-          <a:effectRef idx="0">
-            <a:schemeClr val="accent1"/>
-          </a:effectRef>
-          <a:fontRef idx="minor">
-            <a:schemeClr val="lt1"/>
-          </a:fontRef>
-        </p:style>
-        <p:txBody>
-          <a:bodyPr rtlCol="0" anchor="ctr"/>
-          <a:lstStyle/>
-          <a:p>
-            <a:pPr algn="ctr"/>
-            <a:endParaRPr lang="zh-CN" altLang="en-US"/>
-          </a:p>
-        </p:txBody>
-      </p:sp>
-      <p:pic>
-        <p:nvPicPr>
-          <p:cNvPr id="11" name="图形 10"/>
-          <p:cNvPicPr>
-            <a:picLocks noChangeAspect="1"/>
-          </p:cNvPicPr>
-          <p:nvPr/>
-        </p:nvPicPr>
-        <p:blipFill>
-          <a:blip r:embed="rId5" cstate="print">
-            <a:extLst>
-              <a:ext uri="{28A0092B-C50C-407E-A947-70E740481C1C}">
-                <a14:useLocalDpi xmlns:a14="http://schemas.microsoft.com/office/drawing/2010/main" val="0"/>
-              </a:ext>
-              <a:ext uri="{96DAC541-7B7A-43D3-8B79-37D633B846F1}">
-                <asvg:svgBlip xmlns:asvg="http://schemas.microsoft.com/office/drawing/2016/SVG/main" r:embed="rId6"/>
-              </a:ext>
-            </a:extLst>
-          </a:blip>
-          <a:stretch>
-            <a:fillRect/>
-          </a:stretch>
-        </p:blipFill>
-        <p:spPr>
-          <a:xfrm>
-            <a:off x="5055097" y="3495076"/>
-            <a:ext cx="720000" cy="720000"/>
-          </a:xfrm>
-          <a:prstGeom prst="rect">
-            <a:avLst/>
-          </a:prstGeom>
-        </p:spPr>
-      </p:pic>
-      <p:pic>
-        <p:nvPicPr>
-          <p:cNvPr id="12" name="图形 11"/>
-          <p:cNvPicPr>
-            <a:picLocks noChangeAspect="1"/>
-          </p:cNvPicPr>
-          <p:nvPr/>
-        </p:nvPicPr>
-        <p:blipFill>
-          <a:blip r:embed="rId7" cstate="print">
-            <a:extLst>
-              <a:ext uri="{28A0092B-C50C-407E-A947-70E740481C1C}">
-                <a14:useLocalDpi xmlns:a14="http://schemas.microsoft.com/office/drawing/2010/main" val="0"/>
-              </a:ext>
-              <a:ext uri="{96DAC541-7B7A-43D3-8B79-37D633B846F1}">
-                <asvg:svgBlip xmlns:asvg="http://schemas.microsoft.com/office/drawing/2016/SVG/main" r:embed="rId8"/>
-              </a:ext>
-            </a:extLst>
-          </a:blip>
-          <a:stretch>
-            <a:fillRect/>
-          </a:stretch>
-        </p:blipFill>
-        <p:spPr>
-          <a:xfrm>
-            <a:off x="3041465" y="3495076"/>
-            <a:ext cx="720000" cy="720000"/>
-          </a:xfrm>
-          <a:prstGeom prst="rect">
-            <a:avLst/>
-          </a:prstGeom>
-        </p:spPr>
-      </p:pic>
-      <p:pic>
-        <p:nvPicPr>
-          <p:cNvPr id="13" name="图形 12"/>
-          <p:cNvPicPr>
-            <a:picLocks noChangeAspect="1"/>
-          </p:cNvPicPr>
-          <p:nvPr/>
-        </p:nvPicPr>
-        <p:blipFill>
-          <a:blip r:embed="rId9" cstate="print">
-            <a:extLst>
-              <a:ext uri="{28A0092B-C50C-407E-A947-70E740481C1C}">
-                <a14:useLocalDpi xmlns:a14="http://schemas.microsoft.com/office/drawing/2010/main" val="0"/>
-              </a:ext>
-              <a:ext uri="{96DAC541-7B7A-43D3-8B79-37D633B846F1}">
-                <asvg:svgBlip xmlns:asvg="http://schemas.microsoft.com/office/drawing/2016/SVG/main" r:embed="rId10"/>
-              </a:ext>
-            </a:extLst>
-          </a:blip>
-          <a:stretch>
-            <a:fillRect/>
-          </a:stretch>
-        </p:blipFill>
-        <p:spPr>
-          <a:xfrm>
-            <a:off x="6373891" y="2955389"/>
-            <a:ext cx="720000" cy="720000"/>
-          </a:xfrm>
-          <a:prstGeom prst="rect">
-            <a:avLst/>
-          </a:prstGeom>
-        </p:spPr>
-      </p:pic>
-      <p:pic>
-        <p:nvPicPr>
-          <p:cNvPr id="14" name="图形 13"/>
-          <p:cNvPicPr>
-            <a:picLocks noChangeAspect="1"/>
-          </p:cNvPicPr>
-          <p:nvPr/>
-        </p:nvPicPr>
-        <p:blipFill>
-          <a:blip r:embed="rId11" cstate="print">
-            <a:extLst>
-              <a:ext uri="{28A0092B-C50C-407E-A947-70E740481C1C}">
-                <a14:useLocalDpi xmlns:a14="http://schemas.microsoft.com/office/drawing/2010/main" val="0"/>
-              </a:ext>
-              <a:ext uri="{96DAC541-7B7A-43D3-8B79-37D633B846F1}">
-                <asvg:svgBlip xmlns:asvg="http://schemas.microsoft.com/office/drawing/2016/SVG/main" r:embed="rId12"/>
-              </a:ext>
-            </a:extLst>
-          </a:blip>
-          <a:stretch>
-            <a:fillRect/>
-          </a:stretch>
-        </p:blipFill>
-        <p:spPr>
-          <a:xfrm>
-            <a:off x="7321575" y="2857773"/>
-            <a:ext cx="495891" cy="495891"/>
-          </a:xfrm>
-          <a:prstGeom prst="rect">
-            <a:avLst/>
-          </a:prstGeom>
-        </p:spPr>
-      </p:pic>
-      <p:pic>
-        <p:nvPicPr>
-          <p:cNvPr id="15" name="图形 14"/>
-          <p:cNvPicPr>
-            <a:picLocks noChangeAspect="1"/>
-          </p:cNvPicPr>
-          <p:nvPr/>
-        </p:nvPicPr>
-        <p:blipFill>
-          <a:blip r:embed="rId9" cstate="print">
-            <a:extLst>
-              <a:ext uri="{28A0092B-C50C-407E-A947-70E740481C1C}">
-                <a14:useLocalDpi xmlns:a14="http://schemas.microsoft.com/office/drawing/2010/main" val="0"/>
-              </a:ext>
-              <a:ext uri="{96DAC541-7B7A-43D3-8B79-37D633B846F1}">
-                <asvg:svgBlip xmlns:asvg="http://schemas.microsoft.com/office/drawing/2016/SVG/main" r:embed="rId10"/>
-              </a:ext>
-            </a:extLst>
-          </a:blip>
-          <a:stretch>
-            <a:fillRect/>
-          </a:stretch>
-        </p:blipFill>
-        <p:spPr>
-          <a:xfrm>
-            <a:off x="8095026" y="2918419"/>
-            <a:ext cx="720000" cy="720000"/>
-          </a:xfrm>
-          <a:prstGeom prst="rect">
-            <a:avLst/>
-          </a:prstGeom>
-        </p:spPr>
-      </p:pic>
-      <p:pic>
-        <p:nvPicPr>
-          <p:cNvPr id="16" name="图形 15"/>
-          <p:cNvPicPr>
-            <a:picLocks noChangeAspect="1"/>
-          </p:cNvPicPr>
-          <p:nvPr/>
-        </p:nvPicPr>
-        <p:blipFill>
-          <a:blip r:embed="rId13" cstate="print">
-            <a:extLst>
-              <a:ext uri="{28A0092B-C50C-407E-A947-70E740481C1C}">
-                <a14:useLocalDpi xmlns:a14="http://schemas.microsoft.com/office/drawing/2010/main" val="0"/>
-              </a:ext>
-              <a:ext uri="{96DAC541-7B7A-43D3-8B79-37D633B846F1}">
-                <asvg:svgBlip xmlns:asvg="http://schemas.microsoft.com/office/drawing/2016/SVG/main" r:embed="rId14"/>
-              </a:ext>
-            </a:extLst>
-          </a:blip>
-          <a:stretch>
-            <a:fillRect/>
-          </a:stretch>
-        </p:blipFill>
-        <p:spPr>
-          <a:xfrm>
-            <a:off x="5055097" y="2128784"/>
-            <a:ext cx="720000" cy="720000"/>
-          </a:xfrm>
-          <a:prstGeom prst="rect">
-            <a:avLst/>
-          </a:prstGeom>
-        </p:spPr>
-      </p:pic>
-      <p:cxnSp>
-        <p:nvCxnSpPr>
-          <p:cNvPr id="18" name="直接连接符 17"/>
-          <p:cNvCxnSpPr/>
-          <p:nvPr/>
-        </p:nvCxnSpPr>
-        <p:spPr>
-          <a:xfrm>
-            <a:off x="1794895" y="2291226"/>
-            <a:ext cx="936438" cy="0"/>
-          </a:xfrm>
-          <a:prstGeom prst="line">
-            <a:avLst/>
-          </a:prstGeom>
-          <a:ln w="19050">
-            <a:solidFill>
-              <a:schemeClr val="tx1"/>
-            </a:solidFill>
-            <a:prstDash val="dash"/>
-          </a:ln>
-        </p:spPr>
-        <p:style>
-          <a:lnRef idx="1">
-            <a:schemeClr val="accent1"/>
-          </a:lnRef>
-          <a:fillRef idx="0">
-            <a:schemeClr val="accent1"/>
-          </a:fillRef>
-          <a:effectRef idx="0">
-            <a:schemeClr val="accent1"/>
-          </a:effectRef>
-          <a:fontRef idx="minor">
-            <a:schemeClr val="tx1"/>
-          </a:fontRef>
-        </p:style>
-      </p:cxnSp>
-      <p:cxnSp>
-        <p:nvCxnSpPr>
-          <p:cNvPr id="21" name="直接连接符 20"/>
-          <p:cNvCxnSpPr/>
-          <p:nvPr/>
-        </p:nvCxnSpPr>
-        <p:spPr>
-          <a:xfrm>
-            <a:off x="4041644" y="2454030"/>
-            <a:ext cx="868026" cy="0"/>
-          </a:xfrm>
-          <a:prstGeom prst="line">
-            <a:avLst/>
-          </a:prstGeom>
-          <a:ln w="19050">
-            <a:solidFill>
-              <a:schemeClr val="tx1"/>
-            </a:solidFill>
-            <a:prstDash val="solid"/>
-          </a:ln>
-        </p:spPr>
-        <p:style>
-          <a:lnRef idx="1">
-            <a:schemeClr val="accent1"/>
-          </a:lnRef>
-          <a:fillRef idx="0">
-            <a:schemeClr val="accent1"/>
-          </a:fillRef>
-          <a:effectRef idx="0">
-            <a:schemeClr val="accent1"/>
-          </a:effectRef>
-          <a:fontRef idx="minor">
-            <a:schemeClr val="tx1"/>
-          </a:fontRef>
-        </p:style>
-      </p:cxnSp>
-      <p:sp>
-        <p:nvSpPr>
-          <p:cNvPr id="26" name="矩形 25"/>
-          <p:cNvSpPr/>
-          <p:nvPr/>
-        </p:nvSpPr>
-        <p:spPr>
-          <a:xfrm>
-            <a:off x="6330217" y="2772833"/>
-            <a:ext cx="2678316" cy="943831"/>
-          </a:xfrm>
-          <a:prstGeom prst="rect">
-            <a:avLst/>
-          </a:prstGeom>
-          <a:noFill/>
-          <a:ln w="19050">
-            <a:solidFill>
-              <a:schemeClr val="tx1"/>
-            </a:solidFill>
-            <a:prstDash val="dash"/>
-          </a:ln>
-        </p:spPr>
-        <p:style>
-          <a:lnRef idx="2">
-            <a:schemeClr val="accent1">
-              <a:shade val="50000"/>
-            </a:schemeClr>
-          </a:lnRef>
-          <a:fillRef idx="1">
-            <a:schemeClr val="accent1"/>
-          </a:fillRef>
-          <a:effectRef idx="0">
-            <a:schemeClr val="accent1"/>
-          </a:effectRef>
-          <a:fontRef idx="minor">
-            <a:schemeClr val="lt1"/>
-          </a:fontRef>
-        </p:style>
-        <p:txBody>
-          <a:bodyPr rtlCol="0" anchor="ctr"/>
-          <a:lstStyle/>
-          <a:p>
-            <a:pPr algn="ctr"/>
-            <a:endParaRPr lang="zh-CN" altLang="en-US"/>
-          </a:p>
-        </p:txBody>
-      </p:sp>
-      <p:cxnSp>
-        <p:nvCxnSpPr>
-          <p:cNvPr id="27" name="直接连接符 26"/>
-          <p:cNvCxnSpPr/>
-          <p:nvPr/>
-        </p:nvCxnSpPr>
-        <p:spPr>
-          <a:xfrm>
-            <a:off x="4108382" y="3945051"/>
-            <a:ext cx="801288" cy="0"/>
-          </a:xfrm>
-          <a:prstGeom prst="line">
-            <a:avLst/>
-          </a:prstGeom>
-          <a:ln w="19050">
-            <a:solidFill>
-              <a:schemeClr val="tx1"/>
-            </a:solidFill>
-            <a:prstDash val="solid"/>
-          </a:ln>
-        </p:spPr>
-        <p:style>
-          <a:lnRef idx="1">
-            <a:schemeClr val="accent1"/>
-          </a:lnRef>
-          <a:fillRef idx="0">
-            <a:schemeClr val="accent1"/>
-          </a:fillRef>
-          <a:effectRef idx="0">
-            <a:schemeClr val="accent1"/>
-          </a:effectRef>
-          <a:fontRef idx="minor">
-            <a:schemeClr val="tx1"/>
-          </a:fontRef>
-        </p:style>
-      </p:cxnSp>
-      <p:cxnSp>
-        <p:nvCxnSpPr>
-          <p:cNvPr id="28" name="直接连接符 27"/>
-          <p:cNvCxnSpPr/>
-          <p:nvPr/>
-        </p:nvCxnSpPr>
-        <p:spPr>
-          <a:xfrm flipV="1">
-            <a:off x="5758195" y="3429000"/>
-            <a:ext cx="599354" cy="287664"/>
-          </a:xfrm>
-          <a:prstGeom prst="line">
-            <a:avLst/>
-          </a:prstGeom>
-          <a:ln w="19050">
-            <a:solidFill>
-              <a:schemeClr val="tx1"/>
-            </a:solidFill>
-            <a:prstDash val="dash"/>
-          </a:ln>
-        </p:spPr>
-        <p:style>
-          <a:lnRef idx="1">
-            <a:schemeClr val="accent1"/>
-          </a:lnRef>
-          <a:fillRef idx="0">
-            <a:schemeClr val="accent1"/>
-          </a:fillRef>
-          <a:effectRef idx="0">
-            <a:schemeClr val="accent1"/>
-          </a:effectRef>
-          <a:fontRef idx="minor">
-            <a:schemeClr val="tx1"/>
-          </a:fontRef>
-        </p:style>
-      </p:cxnSp>
-      <p:cxnSp>
-        <p:nvCxnSpPr>
-          <p:cNvPr id="30" name="直接连接符 29"/>
-          <p:cNvCxnSpPr/>
-          <p:nvPr/>
-        </p:nvCxnSpPr>
-        <p:spPr>
-          <a:xfrm flipV="1">
-            <a:off x="1553633" y="2646250"/>
-            <a:ext cx="1407110" cy="782750"/>
-          </a:xfrm>
-          <a:prstGeom prst="line">
-            <a:avLst/>
-          </a:prstGeom>
-          <a:ln w="19050">
-            <a:solidFill>
-              <a:schemeClr val="tx1"/>
-            </a:solidFill>
-            <a:prstDash val="solid"/>
-            <a:tailEnd type="triangle"/>
-          </a:ln>
-        </p:spPr>
-        <p:style>
-          <a:lnRef idx="1">
-            <a:schemeClr val="accent1"/>
-          </a:lnRef>
-          <a:fillRef idx="0">
-            <a:schemeClr val="accent1"/>
-          </a:fillRef>
-          <a:effectRef idx="0">
-            <a:schemeClr val="accent1"/>
-          </a:effectRef>
-          <a:fontRef idx="minor">
-            <a:schemeClr val="tx1"/>
-          </a:fontRef>
-        </p:style>
-      </p:cxnSp>
-      <p:cxnSp>
-        <p:nvCxnSpPr>
-          <p:cNvPr id="32" name="直接连接符 31"/>
-          <p:cNvCxnSpPr/>
-          <p:nvPr/>
-        </p:nvCxnSpPr>
-        <p:spPr>
-          <a:xfrm>
-            <a:off x="1583967" y="3695821"/>
-            <a:ext cx="1296992" cy="159255"/>
-          </a:xfrm>
-          <a:prstGeom prst="line">
-            <a:avLst/>
-          </a:prstGeom>
-          <a:ln w="19050">
-            <a:solidFill>
-              <a:schemeClr val="tx1"/>
-            </a:solidFill>
-            <a:prstDash val="solid"/>
-          </a:ln>
-        </p:spPr>
-        <p:style>
-          <a:lnRef idx="1">
-            <a:schemeClr val="accent1"/>
-          </a:lnRef>
-          <a:fillRef idx="0">
-            <a:schemeClr val="accent1"/>
-          </a:fillRef>
-          <a:effectRef idx="0">
-            <a:schemeClr val="accent1"/>
-          </a:effectRef>
-          <a:fontRef idx="minor">
-            <a:schemeClr val="tx1"/>
-          </a:fontRef>
-        </p:style>
-      </p:cxnSp>
-      <p:cxnSp>
-        <p:nvCxnSpPr>
-          <p:cNvPr id="35" name="直接连接符 34"/>
-          <p:cNvCxnSpPr/>
-          <p:nvPr/>
-        </p:nvCxnSpPr>
-        <p:spPr>
-          <a:xfrm>
-            <a:off x="3361655" y="2937352"/>
-            <a:ext cx="0" cy="491648"/>
-          </a:xfrm>
-          <a:prstGeom prst="line">
-            <a:avLst/>
-          </a:prstGeom>
-          <a:ln w="19050">
-            <a:solidFill>
-              <a:schemeClr val="tx1"/>
-            </a:solidFill>
-            <a:prstDash val="solid"/>
-          </a:ln>
-        </p:spPr>
-        <p:style>
-          <a:lnRef idx="1">
-            <a:schemeClr val="accent1"/>
-          </a:lnRef>
-          <a:fillRef idx="0">
-            <a:schemeClr val="accent1"/>
-          </a:fillRef>
-          <a:effectRef idx="0">
-            <a:schemeClr val="accent1"/>
-          </a:effectRef>
-          <a:fontRef idx="minor">
-            <a:schemeClr val="tx1"/>
-          </a:fontRef>
-        </p:style>
-      </p:cxnSp>
-      <p:cxnSp>
-        <p:nvCxnSpPr>
-          <p:cNvPr id="43" name="直接连接符 42"/>
-          <p:cNvCxnSpPr/>
-          <p:nvPr/>
-        </p:nvCxnSpPr>
-        <p:spPr>
-          <a:xfrm>
-            <a:off x="7078542" y="3435367"/>
-            <a:ext cx="990191" cy="0"/>
-          </a:xfrm>
-          <a:prstGeom prst="line">
-            <a:avLst/>
-          </a:prstGeom>
-          <a:ln w="19050">
-            <a:solidFill>
-              <a:schemeClr val="tx1"/>
-            </a:solidFill>
-            <a:prstDash val="solid"/>
-          </a:ln>
-        </p:spPr>
-        <p:style>
-          <a:lnRef idx="1">
-            <a:schemeClr val="accent1"/>
-          </a:lnRef>
-          <a:fillRef idx="0">
-            <a:schemeClr val="accent1"/>
-          </a:fillRef>
-          <a:effectRef idx="0">
-            <a:schemeClr val="accent1"/>
-          </a:effectRef>
-          <a:fontRef idx="minor">
-            <a:schemeClr val="tx1"/>
-          </a:fontRef>
-        </p:style>
-      </p:cxnSp>
-      <p:pic>
-        <p:nvPicPr>
-          <p:cNvPr id="25" name="图片 27" descr="浏览器"/>
-          <p:cNvPicPr>
-            <a:picLocks noChangeAspect="1"/>
-          </p:cNvPicPr>
-          <p:nvPr/>
-        </p:nvPicPr>
-        <p:blipFill>
-          <a:blip r:embed="rId15">
-            <a:extLst>
-              <a:ext uri="{96DAC541-7B7A-43D3-8B79-37D633B846F1}">
-                <asvg:svgBlip xmlns:asvg="http://schemas.microsoft.com/office/drawing/2016/SVG/main" r:embed="rId16"/>
-              </a:ext>
-            </a:extLst>
-          </a:blip>
-          <a:stretch>
-            <a:fillRect/>
-          </a:stretch>
-        </p:blipFill>
-        <p:spPr>
-          <a:xfrm>
-            <a:off x="2920086" y="2044223"/>
-            <a:ext cx="860091" cy="860091"/>
-          </a:xfrm>
-          <a:prstGeom prst="rect">
-            <a:avLst/>
-          </a:prstGeom>
-        </p:spPr>
-      </p:pic>
-      <p:cxnSp>
-        <p:nvCxnSpPr>
-          <p:cNvPr id="31" name="直接连接符 30"/>
-          <p:cNvCxnSpPr/>
-          <p:nvPr/>
-        </p:nvCxnSpPr>
-        <p:spPr>
-          <a:xfrm>
-            <a:off x="5393655" y="2937352"/>
-            <a:ext cx="0" cy="491648"/>
-          </a:xfrm>
-          <a:prstGeom prst="line">
-            <a:avLst/>
-          </a:prstGeom>
-          <a:ln w="19050">
-            <a:solidFill>
-              <a:schemeClr val="tx1"/>
-            </a:solidFill>
-            <a:prstDash val="solid"/>
-          </a:ln>
-        </p:spPr>
-        <p:style>
-          <a:lnRef idx="1">
-            <a:schemeClr val="accent1"/>
-          </a:lnRef>
-          <a:fillRef idx="0">
-            <a:schemeClr val="accent1"/>
-          </a:fillRef>
-          <a:effectRef idx="0">
-            <a:schemeClr val="accent1"/>
-          </a:effectRef>
-          <a:fontRef idx="minor">
-            <a:schemeClr val="tx1"/>
-          </a:fontRef>
-        </p:style>
-      </p:cxnSp>
-    </p:spTree>
-  </p:cSld>
-  <p:clrMapOvr>
-    <a:masterClrMapping/>
-  </p:clrMapOvr>
-</p:sld>
-</file>
-
 <file path=ppt/slides/slide9.xml><?xml version="1.0" encoding="utf-8"?>
 <p:sld xmlns:a="http://schemas.openxmlformats.org/drawingml/2006/main" xmlns:r="http://schemas.openxmlformats.org/officeDocument/2006/relationships" xmlns:p="http://schemas.openxmlformats.org/presentationml/2006/main">
   <p:cSld>
@@ -12544,7 +13922,7 @@
         </p:blipFill>
         <p:spPr>
           <a:xfrm>
-            <a:off x="2822362" y="2921709"/>
+            <a:off x="871642" y="3209373"/>
             <a:ext cx="720000" cy="720000"/>
           </a:xfrm>
           <a:prstGeom prst="rect">
@@ -12577,7 +13955,7 @@
         </p:blipFill>
         <p:spPr>
           <a:xfrm>
-            <a:off x="3560303" y="4177618"/>
+            <a:off x="1016215" y="1907232"/>
             <a:ext cx="720000" cy="720000"/>
           </a:xfrm>
           <a:prstGeom prst="rect">
@@ -12593,8 +13971,8 @@
         </p:nvSpPr>
         <p:spPr>
           <a:xfrm>
-            <a:off x="4737642" y="3834233"/>
-            <a:ext cx="1149465" cy="1031082"/>
+            <a:off x="2743600" y="2056451"/>
+            <a:ext cx="1236110" cy="2325262"/>
           </a:xfrm>
           <a:prstGeom prst="rect">
             <a:avLst/>
@@ -12657,7 +14035,7 @@
         </p:blipFill>
         <p:spPr>
           <a:xfrm>
-            <a:off x="6586853" y="4004457"/>
+            <a:off x="5055097" y="3495076"/>
             <a:ext cx="720000" cy="720000"/>
           </a:xfrm>
           <a:prstGeom prst="rect">
@@ -12690,7 +14068,7 @@
         </p:blipFill>
         <p:spPr>
           <a:xfrm>
-            <a:off x="4976873" y="3945870"/>
+            <a:off x="3041465" y="3495076"/>
             <a:ext cx="720000" cy="720000"/>
           </a:xfrm>
           <a:prstGeom prst="rect">
@@ -12723,7 +14101,7 @@
         </p:blipFill>
         <p:spPr>
           <a:xfrm>
-            <a:off x="7537211" y="2805976"/>
+            <a:off x="6373891" y="2955389"/>
             <a:ext cx="720000" cy="720000"/>
           </a:xfrm>
           <a:prstGeom prst="rect">
@@ -12756,7 +14134,7 @@
         </p:blipFill>
         <p:spPr>
           <a:xfrm>
-            <a:off x="8484895" y="2708360"/>
+            <a:off x="7321575" y="2857773"/>
             <a:ext cx="495891" cy="495891"/>
           </a:xfrm>
           <a:prstGeom prst="rect">
@@ -12789,7 +14167,7 @@
         </p:blipFill>
         <p:spPr>
           <a:xfrm>
-            <a:off x="9258346" y="2769006"/>
+            <a:off x="8095026" y="2918419"/>
             <a:ext cx="720000" cy="720000"/>
           </a:xfrm>
           <a:prstGeom prst="rect">
@@ -12822,7 +14200,7 @@
         </p:blipFill>
         <p:spPr>
           <a:xfrm>
-            <a:off x="6636830" y="1773544"/>
+            <a:off x="5055097" y="2128784"/>
             <a:ext cx="720000" cy="720000"/>
           </a:xfrm>
           <a:prstGeom prst="rect">
@@ -12838,8 +14216,8 @@
         </p:nvCxnSpPr>
         <p:spPr>
           <a:xfrm>
-            <a:off x="4265623" y="4414892"/>
-            <a:ext cx="516571" cy="0"/>
+            <a:off x="1794895" y="2291226"/>
+            <a:ext cx="936438" cy="0"/>
           </a:xfrm>
           <a:prstGeom prst="line">
             <a:avLst/>
@@ -12874,7 +14252,7 @@
         </p:nvCxnSpPr>
         <p:spPr>
           <a:xfrm>
-            <a:off x="5763907" y="2144911"/>
+            <a:off x="4041644" y="2454030"/>
             <a:ext cx="868026" cy="0"/>
           </a:xfrm>
           <a:prstGeom prst="line">
@@ -12910,7 +14288,7 @@
         </p:nvSpPr>
         <p:spPr>
           <a:xfrm>
-            <a:off x="7493537" y="2623420"/>
+            <a:off x="6330217" y="2772833"/>
             <a:ext cx="2678316" cy="943831"/>
           </a:xfrm>
           <a:prstGeom prst="rect">
@@ -12957,7 +14335,7 @@
         </p:nvCxnSpPr>
         <p:spPr>
           <a:xfrm>
-            <a:off x="5741219" y="4381899"/>
+            <a:off x="4108382" y="3945051"/>
             <a:ext cx="801288" cy="0"/>
           </a:xfrm>
           <a:prstGeom prst="line">
@@ -12993,8 +14371,8 @@
         </p:nvCxnSpPr>
         <p:spPr>
           <a:xfrm flipV="1">
-            <a:off x="7180520" y="3758687"/>
-            <a:ext cx="490150" cy="342916"/>
+            <a:off x="5758195" y="3429000"/>
+            <a:ext cx="599354" cy="287664"/>
           </a:xfrm>
           <a:prstGeom prst="line">
             <a:avLst/>
@@ -13029,7 +14407,7 @@
         </p:nvCxnSpPr>
         <p:spPr>
           <a:xfrm flipV="1">
-            <a:off x="3504353" y="2358586"/>
+            <a:off x="1553633" y="2646250"/>
             <a:ext cx="1407110" cy="782750"/>
           </a:xfrm>
           <a:prstGeom prst="line">
@@ -13066,8 +14444,8 @@
         </p:nvCxnSpPr>
         <p:spPr>
           <a:xfrm>
-            <a:off x="3534687" y="3408157"/>
-            <a:ext cx="1345556" cy="741955"/>
+            <a:off x="1583967" y="3695821"/>
+            <a:ext cx="1296992" cy="159255"/>
           </a:xfrm>
           <a:prstGeom prst="line">
             <a:avLst/>
@@ -13102,8 +14480,8 @@
         </p:nvCxnSpPr>
         <p:spPr>
           <a:xfrm>
-            <a:off x="5189023" y="2530833"/>
-            <a:ext cx="0" cy="1399312"/>
+            <a:off x="3361655" y="2937352"/>
+            <a:ext cx="0" cy="491648"/>
           </a:xfrm>
           <a:prstGeom prst="line">
             <a:avLst/>
@@ -13138,7 +14516,7 @@
         </p:nvCxnSpPr>
         <p:spPr>
           <a:xfrm>
-            <a:off x="8241862" y="3285954"/>
+            <a:off x="7078542" y="3435367"/>
             <a:ext cx="990191" cy="0"/>
           </a:xfrm>
           <a:prstGeom prst="line">
@@ -13168,18 +14546,15 @@
       </p:cxnSp>
       <p:pic>
         <p:nvPicPr>
-          <p:cNvPr id="22" name="图形 21"/>
+          <p:cNvPr id="25" name="图片 27" descr="浏览器"/>
           <p:cNvPicPr>
             <a:picLocks noChangeAspect="1"/>
           </p:cNvPicPr>
           <p:nvPr/>
         </p:nvPicPr>
         <p:blipFill>
-          <a:blip r:embed="rId15" cstate="print">
+          <a:blip r:embed="rId15">
             <a:extLst>
-              <a:ext uri="{28A0092B-C50C-407E-A947-70E740481C1C}">
-                <a14:useLocalDpi xmlns:a14="http://schemas.microsoft.com/office/drawing/2010/main" val="0"/>
-              </a:ext>
               <a:ext uri="{96DAC541-7B7A-43D3-8B79-37D633B846F1}">
                 <asvg:svgBlip xmlns:asvg="http://schemas.microsoft.com/office/drawing/2016/SVG/main" r:embed="rId16"/>
               </a:ext>
@@ -13191,113 +14566,33 @@
         </p:blipFill>
         <p:spPr>
           <a:xfrm>
-            <a:off x="3560303" y="1505176"/>
-            <a:ext cx="720000" cy="720000"/>
+            <a:off x="2920086" y="2044223"/>
+            <a:ext cx="860091" cy="860091"/>
           </a:xfrm>
           <a:prstGeom prst="rect">
             <a:avLst/>
           </a:prstGeom>
         </p:spPr>
       </p:pic>
-      <p:pic>
-        <p:nvPicPr>
-          <p:cNvPr id="24" name="图形 23"/>
-          <p:cNvPicPr>
-            <a:picLocks noChangeAspect="1"/>
-          </p:cNvPicPr>
-          <p:nvPr/>
-        </p:nvPicPr>
-        <p:blipFill>
-          <a:blip r:embed="rId17">
-            <a:extLst>
-              <a:ext uri="{28A0092B-C50C-407E-A947-70E740481C1C}">
-                <a14:useLocalDpi xmlns:a14="http://schemas.microsoft.com/office/drawing/2010/main" val="0"/>
-              </a:ext>
-              <a:ext uri="{96DAC541-7B7A-43D3-8B79-37D633B846F1}">
-                <asvg:svgBlip xmlns:asvg="http://schemas.microsoft.com/office/drawing/2016/SVG/main" r:embed="rId18"/>
-              </a:ext>
-            </a:extLst>
-          </a:blip>
-          <a:stretch>
-            <a:fillRect/>
-          </a:stretch>
-        </p:blipFill>
-        <p:spPr>
-          <a:xfrm>
-            <a:off x="4946605" y="1741459"/>
-            <a:ext cx="742734" cy="742734"/>
-          </a:xfrm>
-          <a:prstGeom prst="rect">
-            <a:avLst/>
-          </a:prstGeom>
-        </p:spPr>
-      </p:pic>
-      <p:sp>
-        <p:nvSpPr>
-          <p:cNvPr id="29" name="矩形 28"/>
-          <p:cNvSpPr/>
-          <p:nvPr/>
-        </p:nvSpPr>
-        <p:spPr>
-          <a:xfrm>
-            <a:off x="4773518" y="1578133"/>
-            <a:ext cx="1149465" cy="1031082"/>
-          </a:xfrm>
-          <a:prstGeom prst="rect">
-            <a:avLst/>
-          </a:prstGeom>
-          <a:noFill/>
+      <p:cxnSp>
+        <p:nvCxnSpPr>
+          <p:cNvPr id="31" name="直接连接符 30"/>
+          <p:cNvCxnSpPr/>
+          <p:nvPr/>
+        </p:nvCxnSpPr>
+        <p:spPr>
+          <a:xfrm>
+            <a:off x="5393655" y="2937352"/>
+            <a:ext cx="0" cy="491648"/>
+          </a:xfrm>
+          <a:prstGeom prst="line">
+            <a:avLst/>
+          </a:prstGeom>
           <a:ln w="19050">
             <a:solidFill>
               <a:schemeClr val="tx1"/>
             </a:solidFill>
-            <a:prstDash val="dash"/>
-          </a:ln>
-        </p:spPr>
-        <p:style>
-          <a:lnRef idx="2">
-            <a:schemeClr val="accent1">
-              <a:shade val="50000"/>
-            </a:schemeClr>
-          </a:lnRef>
-          <a:fillRef idx="1">
-            <a:schemeClr val="accent1"/>
-          </a:fillRef>
-          <a:effectRef idx="0">
-            <a:schemeClr val="accent1"/>
-          </a:effectRef>
-          <a:fontRef idx="minor">
-            <a:schemeClr val="lt1"/>
-          </a:fontRef>
-        </p:style>
-        <p:txBody>
-          <a:bodyPr rtlCol="0" anchor="ctr"/>
-          <a:lstStyle/>
-          <a:p>
-            <a:pPr algn="ctr"/>
-            <a:endParaRPr lang="zh-CN" altLang="en-US"/>
-          </a:p>
-        </p:txBody>
-      </p:sp>
-      <p:cxnSp>
-        <p:nvCxnSpPr>
-          <p:cNvPr id="31" name="直接连接符 30"/>
-          <p:cNvCxnSpPr/>
-          <p:nvPr/>
-        </p:nvCxnSpPr>
-        <p:spPr>
-          <a:xfrm>
-            <a:off x="4347411" y="1810501"/>
-            <a:ext cx="433641" cy="0"/>
-          </a:xfrm>
-          <a:prstGeom prst="line">
-            <a:avLst/>
-          </a:prstGeom>
-          <a:ln w="19050">
-            <a:solidFill>
-              <a:schemeClr val="tx1"/>
-            </a:solidFill>
-            <a:prstDash val="dash"/>
+            <a:prstDash val="solid"/>
           </a:ln>
         </p:spPr>
         <p:style>
@@ -13315,75 +14610,6 @@
           </a:fontRef>
         </p:style>
       </p:cxnSp>
-      <p:cxnSp>
-        <p:nvCxnSpPr>
-          <p:cNvPr id="36" name="直接连接符 35"/>
-          <p:cNvCxnSpPr/>
-          <p:nvPr/>
-        </p:nvCxnSpPr>
-        <p:spPr>
-          <a:xfrm>
-            <a:off x="6941120" y="2516278"/>
-            <a:ext cx="11466" cy="1317955"/>
-          </a:xfrm>
-          <a:prstGeom prst="line">
-            <a:avLst/>
-          </a:prstGeom>
-          <a:ln w="19050">
-            <a:solidFill>
-              <a:schemeClr val="tx1"/>
-            </a:solidFill>
-            <a:prstDash val="solid"/>
-          </a:ln>
-        </p:spPr>
-        <p:style>
-          <a:lnRef idx="1">
-            <a:schemeClr val="accent1"/>
-          </a:lnRef>
-          <a:fillRef idx="0">
-            <a:schemeClr val="accent1"/>
-          </a:fillRef>
-          <a:effectRef idx="0">
-            <a:schemeClr val="accent1"/>
-          </a:effectRef>
-          <a:fontRef idx="minor">
-            <a:schemeClr val="tx1"/>
-          </a:fontRef>
-        </p:style>
-      </p:cxnSp>
-      <p:pic>
-        <p:nvPicPr>
-          <p:cNvPr id="25" name="图形 24"/>
-          <p:cNvPicPr>
-            <a:picLocks noChangeAspect="1"/>
-          </p:cNvPicPr>
-          <p:nvPr/>
-        </p:nvPicPr>
-        <p:blipFill>
-          <a:blip r:embed="rId19" cstate="print">
-            <a:extLst>
-              <a:ext uri="{28A0092B-C50C-407E-A947-70E740481C1C}">
-                <a14:useLocalDpi xmlns:a14="http://schemas.microsoft.com/office/drawing/2010/main" val="0"/>
-              </a:ext>
-              <a:ext uri="{96DAC541-7B7A-43D3-8B79-37D633B846F1}">
-                <asvg:svgBlip xmlns:asvg="http://schemas.microsoft.com/office/drawing/2016/SVG/main" r:embed="rId20"/>
-              </a:ext>
-            </a:extLst>
-          </a:blip>
-          <a:stretch>
-            <a:fillRect/>
-          </a:stretch>
-        </p:blipFill>
-        <p:spPr>
-          <a:xfrm>
-            <a:off x="5182312" y="2988529"/>
-            <a:ext cx="507027" cy="507027"/>
-          </a:xfrm>
-          <a:prstGeom prst="rect">
-            <a:avLst/>
-          </a:prstGeom>
-        </p:spPr>
-      </p:pic>
     </p:spTree>
   </p:cSld>
   <p:clrMapOvr>

--- a/img-source/images.pptx
+++ b/img-source/images.pptx
@@ -5,19 +5,19 @@
     <p:sldMasterId id="2147483648" r:id="rId1"/>
   </p:sldMasterIdLst>
   <p:notesMasterIdLst>
-    <p:notesMasterId r:id="rId7"/>
+    <p:notesMasterId r:id="rId12"/>
   </p:notesMasterIdLst>
   <p:sldIdLst>
-    <p:sldId id="256" r:id="rId3"/>
-    <p:sldId id="260" r:id="rId4"/>
-    <p:sldId id="259" r:id="rId5"/>
-    <p:sldId id="264" r:id="rId6"/>
-    <p:sldId id="261" r:id="rId8"/>
-    <p:sldId id="262" r:id="rId9"/>
-    <p:sldId id="265" r:id="rId10"/>
-    <p:sldId id="257" r:id="rId11"/>
-    <p:sldId id="258" r:id="rId12"/>
-    <p:sldId id="263" r:id="rId13"/>
+    <p:sldId id="256" r:id="rId2"/>
+    <p:sldId id="260" r:id="rId3"/>
+    <p:sldId id="259" r:id="rId4"/>
+    <p:sldId id="264" r:id="rId5"/>
+    <p:sldId id="261" r:id="rId6"/>
+    <p:sldId id="262" r:id="rId7"/>
+    <p:sldId id="265" r:id="rId8"/>
+    <p:sldId id="257" r:id="rId9"/>
+    <p:sldId id="258" r:id="rId10"/>
+    <p:sldId id="263" r:id="rId11"/>
   </p:sldIdLst>
   <p:sldSz cx="12192000" cy="6858000"/>
   <p:notesSz cx="6858000" cy="9144000"/>
@@ -227,6 +227,7 @@
           <a:p>
             <a:fld id="{D2A48B96-639E-45A3-A0BA-2464DFDB1FAA}" type="datetimeFigureOut">
               <a:rPr lang="zh-CN" altLang="en-US" smtClean="0"/>
+              <a:t>2026/1/23</a:t>
             </a:fld>
             <a:endParaRPr lang="zh-CN" altLang="en-US"/>
           </a:p>
@@ -290,42 +291,37 @@
           <a:p>
             <a:pPr lvl="0"/>
             <a:r>
-              <a:rPr lang="zh-CN" altLang="en-US" smtClean="0"/>
+              <a:rPr lang="zh-CN" altLang="en-US"/>
               <a:t>单击此处编辑母版文本样式</a:t>
             </a:r>
-            <a:endParaRPr lang="zh-CN" altLang="en-US" smtClean="0"/>
           </a:p>
           <a:p>
             <a:pPr lvl="1"/>
             <a:r>
-              <a:rPr lang="zh-CN" altLang="en-US" smtClean="0"/>
+              <a:rPr lang="zh-CN" altLang="en-US"/>
               <a:t>第二级</a:t>
             </a:r>
-            <a:endParaRPr lang="zh-CN" altLang="en-US" smtClean="0"/>
           </a:p>
           <a:p>
             <a:pPr lvl="2"/>
             <a:r>
-              <a:rPr lang="zh-CN" altLang="en-US" smtClean="0"/>
+              <a:rPr lang="zh-CN" altLang="en-US"/>
               <a:t>第三级</a:t>
             </a:r>
-            <a:endParaRPr lang="zh-CN" altLang="en-US" smtClean="0"/>
           </a:p>
           <a:p>
             <a:pPr lvl="3"/>
             <a:r>
-              <a:rPr lang="zh-CN" altLang="en-US" smtClean="0"/>
+              <a:rPr lang="zh-CN" altLang="en-US"/>
               <a:t>第四级</a:t>
             </a:r>
-            <a:endParaRPr lang="zh-CN" altLang="en-US" smtClean="0"/>
           </a:p>
           <a:p>
             <a:pPr lvl="4"/>
             <a:r>
-              <a:rPr lang="zh-CN" altLang="en-US" smtClean="0"/>
+              <a:rPr lang="zh-CN" altLang="en-US"/>
               <a:t>第五级</a:t>
             </a:r>
-            <a:endParaRPr lang="zh-CN" altLang="en-US"/>
           </a:p>
         </p:txBody>
       </p:sp>
@@ -389,6 +385,7 @@
           <a:p>
             <a:fld id="{A6837353-30EB-4A48-80EB-173D804AEFBD}" type="slidenum">
               <a:rPr lang="zh-CN" altLang="en-US" smtClean="0"/>
+              <a:t>‹#›</a:t>
             </a:fld>
             <a:endParaRPr lang="zh-CN" altLang="en-US"/>
           </a:p>
@@ -501,12 +498,19 @@
         <p:cNvGrpSpPr/>
         <p:nvPr/>
       </p:nvGrpSpPr>
-      <p:grpSpPr/>
+      <p:grpSpPr>
+        <a:xfrm>
+          <a:off x="0" y="0"/>
+          <a:ext cx="0" cy="0"/>
+          <a:chOff x="0" y="0"/>
+          <a:chExt cx="0" cy="0"/>
+        </a:xfrm>
+      </p:grpSpPr>
       <p:sp>
         <p:nvSpPr>
           <p:cNvPr id="2" name="幻灯片图像占位符 1"/>
           <p:cNvSpPr>
-            <a:spLocks noGrp="1"/>
+            <a:spLocks noGrp="1" noRot="1" noChangeAspect="1"/>
           </p:cNvSpPr>
           <p:nvPr>
             <p:ph type="sldImg" idx="2"/>
@@ -527,6 +531,7 @@
         <p:spPr/>
         <p:txBody>
           <a:bodyPr/>
+          <a:lstStyle/>
           <a:p>
             <a:endParaRPr lang="zh-CN" altLang="en-US"/>
           </a:p>
@@ -549,12 +554,19 @@
         <p:cNvGrpSpPr/>
         <p:nvPr/>
       </p:nvGrpSpPr>
-      <p:grpSpPr/>
+      <p:grpSpPr>
+        <a:xfrm>
+          <a:off x="0" y="0"/>
+          <a:ext cx="0" cy="0"/>
+          <a:chOff x="0" y="0"/>
+          <a:chExt cx="0" cy="0"/>
+        </a:xfrm>
+      </p:grpSpPr>
       <p:sp>
         <p:nvSpPr>
           <p:cNvPr id="2" name="幻灯片图像占位符 1"/>
           <p:cNvSpPr>
-            <a:spLocks noGrp="1"/>
+            <a:spLocks noGrp="1" noRot="1" noChangeAspect="1"/>
           </p:cNvSpPr>
           <p:nvPr>
             <p:ph type="sldImg" idx="2"/>
@@ -575,6 +587,7 @@
         <p:spPr/>
         <p:txBody>
           <a:bodyPr/>
+          <a:lstStyle/>
           <a:p>
             <a:endParaRPr lang="zh-CN" altLang="en-US"/>
           </a:p>
@@ -633,7 +646,6 @@
               <a:rPr lang="zh-CN" altLang="en-US"/>
               <a:t>单击此处编辑母版标题样式</a:t>
             </a:r>
-            <a:endParaRPr lang="zh-CN" altLang="en-US"/>
           </a:p>
         </p:txBody>
       </p:sp>
@@ -698,7 +710,6 @@
               <a:rPr lang="zh-CN" altLang="en-US"/>
               <a:t>单击此处编辑母版副标题样式</a:t>
             </a:r>
-            <a:endParaRPr lang="zh-CN" altLang="en-US"/>
           </a:p>
         </p:txBody>
       </p:sp>
@@ -719,6 +730,7 @@
           <a:p>
             <a:fld id="{D997B5FA-0921-464F-AAE1-844C04324D75}" type="datetimeFigureOut">
               <a:rPr lang="zh-CN" altLang="en-US" smtClean="0"/>
+              <a:t>2026/1/23</a:t>
             </a:fld>
             <a:endParaRPr lang="zh-CN" altLang="en-US"/>
           </a:p>
@@ -760,6 +772,7 @@
           <a:p>
             <a:fld id="{565CE74E-AB26-4998-AD42-012C4C1AD076}" type="slidenum">
               <a:rPr lang="zh-CN" altLang="en-US" smtClean="0"/>
+              <a:t>‹#›</a:t>
             </a:fld>
             <a:endParaRPr lang="zh-CN" altLang="en-US"/>
           </a:p>
@@ -809,7 +822,6 @@
               <a:rPr lang="zh-CN" altLang="en-US"/>
               <a:t>单击此处编辑母版标题样式</a:t>
             </a:r>
-            <a:endParaRPr lang="zh-CN" altLang="en-US"/>
           </a:p>
         </p:txBody>
       </p:sp>
@@ -833,7 +845,6 @@
               <a:rPr lang="zh-CN" altLang="en-US"/>
               <a:t>单击此处编辑母版文本样式</a:t>
             </a:r>
-            <a:endParaRPr lang="zh-CN" altLang="en-US"/>
           </a:p>
           <a:p>
             <a:pPr lvl="1"/>
@@ -841,7 +852,6 @@
               <a:rPr lang="zh-CN" altLang="en-US"/>
               <a:t>第二级</a:t>
             </a:r>
-            <a:endParaRPr lang="zh-CN" altLang="en-US"/>
           </a:p>
           <a:p>
             <a:pPr lvl="2"/>
@@ -849,7 +859,6 @@
               <a:rPr lang="zh-CN" altLang="en-US"/>
               <a:t>第三级</a:t>
             </a:r>
-            <a:endParaRPr lang="zh-CN" altLang="en-US"/>
           </a:p>
           <a:p>
             <a:pPr lvl="3"/>
@@ -857,7 +866,6 @@
               <a:rPr lang="zh-CN" altLang="en-US"/>
               <a:t>第四级</a:t>
             </a:r>
-            <a:endParaRPr lang="zh-CN" altLang="en-US"/>
           </a:p>
           <a:p>
             <a:pPr lvl="4"/>
@@ -865,7 +873,6 @@
               <a:rPr lang="zh-CN" altLang="en-US"/>
               <a:t>第五级</a:t>
             </a:r>
-            <a:endParaRPr lang="zh-CN" altLang="en-US"/>
           </a:p>
         </p:txBody>
       </p:sp>
@@ -886,6 +893,7 @@
           <a:p>
             <a:fld id="{D997B5FA-0921-464F-AAE1-844C04324D75}" type="datetimeFigureOut">
               <a:rPr lang="zh-CN" altLang="en-US" smtClean="0"/>
+              <a:t>2026/1/23</a:t>
             </a:fld>
             <a:endParaRPr lang="zh-CN" altLang="en-US"/>
           </a:p>
@@ -927,6 +935,7 @@
           <a:p>
             <a:fld id="{565CE74E-AB26-4998-AD42-012C4C1AD076}" type="slidenum">
               <a:rPr lang="zh-CN" altLang="en-US" smtClean="0"/>
+              <a:t>‹#›</a:t>
             </a:fld>
             <a:endParaRPr lang="zh-CN" altLang="en-US"/>
           </a:p>
@@ -981,7 +990,6 @@
               <a:rPr lang="zh-CN" altLang="en-US"/>
               <a:t>单击此处编辑母版标题样式</a:t>
             </a:r>
-            <a:endParaRPr lang="zh-CN" altLang="en-US"/>
           </a:p>
         </p:txBody>
       </p:sp>
@@ -1010,7 +1018,6 @@
               <a:rPr lang="zh-CN" altLang="en-US"/>
               <a:t>单击此处编辑母版文本样式</a:t>
             </a:r>
-            <a:endParaRPr lang="zh-CN" altLang="en-US"/>
           </a:p>
           <a:p>
             <a:pPr lvl="1"/>
@@ -1018,7 +1025,6 @@
               <a:rPr lang="zh-CN" altLang="en-US"/>
               <a:t>第二级</a:t>
             </a:r>
-            <a:endParaRPr lang="zh-CN" altLang="en-US"/>
           </a:p>
           <a:p>
             <a:pPr lvl="2"/>
@@ -1026,7 +1032,6 @@
               <a:rPr lang="zh-CN" altLang="en-US"/>
               <a:t>第三级</a:t>
             </a:r>
-            <a:endParaRPr lang="zh-CN" altLang="en-US"/>
           </a:p>
           <a:p>
             <a:pPr lvl="3"/>
@@ -1034,7 +1039,6 @@
               <a:rPr lang="zh-CN" altLang="en-US"/>
               <a:t>第四级</a:t>
             </a:r>
-            <a:endParaRPr lang="zh-CN" altLang="en-US"/>
           </a:p>
           <a:p>
             <a:pPr lvl="4"/>
@@ -1042,7 +1046,6 @@
               <a:rPr lang="zh-CN" altLang="en-US"/>
               <a:t>第五级</a:t>
             </a:r>
-            <a:endParaRPr lang="zh-CN" altLang="en-US"/>
           </a:p>
         </p:txBody>
       </p:sp>
@@ -1063,6 +1066,7 @@
           <a:p>
             <a:fld id="{D997B5FA-0921-464F-AAE1-844C04324D75}" type="datetimeFigureOut">
               <a:rPr lang="zh-CN" altLang="en-US" smtClean="0"/>
+              <a:t>2026/1/23</a:t>
             </a:fld>
             <a:endParaRPr lang="zh-CN" altLang="en-US"/>
           </a:p>
@@ -1104,6 +1108,7 @@
           <a:p>
             <a:fld id="{565CE74E-AB26-4998-AD42-012C4C1AD076}" type="slidenum">
               <a:rPr lang="zh-CN" altLang="en-US" smtClean="0"/>
+              <a:t>‹#›</a:t>
             </a:fld>
             <a:endParaRPr lang="zh-CN" altLang="en-US"/>
           </a:p>
@@ -1153,7 +1158,6 @@
               <a:rPr lang="zh-CN" altLang="en-US"/>
               <a:t>单击此处编辑母版标题样式</a:t>
             </a:r>
-            <a:endParaRPr lang="zh-CN" altLang="en-US"/>
           </a:p>
         </p:txBody>
       </p:sp>
@@ -1177,7 +1181,6 @@
               <a:rPr lang="zh-CN" altLang="en-US"/>
               <a:t>单击此处编辑母版文本样式</a:t>
             </a:r>
-            <a:endParaRPr lang="zh-CN" altLang="en-US"/>
           </a:p>
           <a:p>
             <a:pPr lvl="1"/>
@@ -1185,7 +1188,6 @@
               <a:rPr lang="zh-CN" altLang="en-US"/>
               <a:t>第二级</a:t>
             </a:r>
-            <a:endParaRPr lang="zh-CN" altLang="en-US"/>
           </a:p>
           <a:p>
             <a:pPr lvl="2"/>
@@ -1193,7 +1195,6 @@
               <a:rPr lang="zh-CN" altLang="en-US"/>
               <a:t>第三级</a:t>
             </a:r>
-            <a:endParaRPr lang="zh-CN" altLang="en-US"/>
           </a:p>
           <a:p>
             <a:pPr lvl="3"/>
@@ -1201,7 +1202,6 @@
               <a:rPr lang="zh-CN" altLang="en-US"/>
               <a:t>第四级</a:t>
             </a:r>
-            <a:endParaRPr lang="zh-CN" altLang="en-US"/>
           </a:p>
           <a:p>
             <a:pPr lvl="4"/>
@@ -1209,7 +1209,6 @@
               <a:rPr lang="zh-CN" altLang="en-US"/>
               <a:t>第五级</a:t>
             </a:r>
-            <a:endParaRPr lang="zh-CN" altLang="en-US"/>
           </a:p>
         </p:txBody>
       </p:sp>
@@ -1230,6 +1229,7 @@
           <a:p>
             <a:fld id="{D997B5FA-0921-464F-AAE1-844C04324D75}" type="datetimeFigureOut">
               <a:rPr lang="zh-CN" altLang="en-US" smtClean="0"/>
+              <a:t>2026/1/23</a:t>
             </a:fld>
             <a:endParaRPr lang="zh-CN" altLang="en-US"/>
           </a:p>
@@ -1271,6 +1271,7 @@
           <a:p>
             <a:fld id="{565CE74E-AB26-4998-AD42-012C4C1AD076}" type="slidenum">
               <a:rPr lang="zh-CN" altLang="en-US" smtClean="0"/>
+              <a:t>‹#›</a:t>
             </a:fld>
             <a:endParaRPr lang="zh-CN" altLang="en-US"/>
           </a:p>
@@ -1329,7 +1330,6 @@
               <a:rPr lang="zh-CN" altLang="en-US"/>
               <a:t>单击此处编辑母版标题样式</a:t>
             </a:r>
-            <a:endParaRPr lang="zh-CN" altLang="en-US"/>
           </a:p>
         </p:txBody>
       </p:sp>
@@ -1449,7 +1449,6 @@
               <a:rPr lang="zh-CN" altLang="en-US"/>
               <a:t>单击此处编辑母版文本样式</a:t>
             </a:r>
-            <a:endParaRPr lang="zh-CN" altLang="en-US"/>
           </a:p>
         </p:txBody>
       </p:sp>
@@ -1470,6 +1469,7 @@
           <a:p>
             <a:fld id="{D997B5FA-0921-464F-AAE1-844C04324D75}" type="datetimeFigureOut">
               <a:rPr lang="zh-CN" altLang="en-US" smtClean="0"/>
+              <a:t>2026/1/23</a:t>
             </a:fld>
             <a:endParaRPr lang="zh-CN" altLang="en-US"/>
           </a:p>
@@ -1511,6 +1511,7 @@
           <a:p>
             <a:fld id="{565CE74E-AB26-4998-AD42-012C4C1AD076}" type="slidenum">
               <a:rPr lang="zh-CN" altLang="en-US" smtClean="0"/>
+              <a:t>‹#›</a:t>
             </a:fld>
             <a:endParaRPr lang="zh-CN" altLang="en-US"/>
           </a:p>
@@ -1560,7 +1561,6 @@
               <a:rPr lang="zh-CN" altLang="en-US"/>
               <a:t>单击此处编辑母版标题样式</a:t>
             </a:r>
-            <a:endParaRPr lang="zh-CN" altLang="en-US"/>
           </a:p>
         </p:txBody>
       </p:sp>
@@ -1589,7 +1589,6 @@
               <a:rPr lang="zh-CN" altLang="en-US"/>
               <a:t>单击此处编辑母版文本样式</a:t>
             </a:r>
-            <a:endParaRPr lang="zh-CN" altLang="en-US"/>
           </a:p>
           <a:p>
             <a:pPr lvl="1"/>
@@ -1597,7 +1596,6 @@
               <a:rPr lang="zh-CN" altLang="en-US"/>
               <a:t>第二级</a:t>
             </a:r>
-            <a:endParaRPr lang="zh-CN" altLang="en-US"/>
           </a:p>
           <a:p>
             <a:pPr lvl="2"/>
@@ -1605,7 +1603,6 @@
               <a:rPr lang="zh-CN" altLang="en-US"/>
               <a:t>第三级</a:t>
             </a:r>
-            <a:endParaRPr lang="zh-CN" altLang="en-US"/>
           </a:p>
           <a:p>
             <a:pPr lvl="3"/>
@@ -1613,7 +1610,6 @@
               <a:rPr lang="zh-CN" altLang="en-US"/>
               <a:t>第四级</a:t>
             </a:r>
-            <a:endParaRPr lang="zh-CN" altLang="en-US"/>
           </a:p>
           <a:p>
             <a:pPr lvl="4"/>
@@ -1621,7 +1617,6 @@
               <a:rPr lang="zh-CN" altLang="en-US"/>
               <a:t>第五级</a:t>
             </a:r>
-            <a:endParaRPr lang="zh-CN" altLang="en-US"/>
           </a:p>
         </p:txBody>
       </p:sp>
@@ -1650,7 +1645,6 @@
               <a:rPr lang="zh-CN" altLang="en-US"/>
               <a:t>单击此处编辑母版文本样式</a:t>
             </a:r>
-            <a:endParaRPr lang="zh-CN" altLang="en-US"/>
           </a:p>
           <a:p>
             <a:pPr lvl="1"/>
@@ -1658,7 +1652,6 @@
               <a:rPr lang="zh-CN" altLang="en-US"/>
               <a:t>第二级</a:t>
             </a:r>
-            <a:endParaRPr lang="zh-CN" altLang="en-US"/>
           </a:p>
           <a:p>
             <a:pPr lvl="2"/>
@@ -1666,7 +1659,6 @@
               <a:rPr lang="zh-CN" altLang="en-US"/>
               <a:t>第三级</a:t>
             </a:r>
-            <a:endParaRPr lang="zh-CN" altLang="en-US"/>
           </a:p>
           <a:p>
             <a:pPr lvl="3"/>
@@ -1674,7 +1666,6 @@
               <a:rPr lang="zh-CN" altLang="en-US"/>
               <a:t>第四级</a:t>
             </a:r>
-            <a:endParaRPr lang="zh-CN" altLang="en-US"/>
           </a:p>
           <a:p>
             <a:pPr lvl="4"/>
@@ -1682,7 +1673,6 @@
               <a:rPr lang="zh-CN" altLang="en-US"/>
               <a:t>第五级</a:t>
             </a:r>
-            <a:endParaRPr lang="zh-CN" altLang="en-US"/>
           </a:p>
         </p:txBody>
       </p:sp>
@@ -1703,6 +1693,7 @@
           <a:p>
             <a:fld id="{D997B5FA-0921-464F-AAE1-844C04324D75}" type="datetimeFigureOut">
               <a:rPr lang="zh-CN" altLang="en-US" smtClean="0"/>
+              <a:t>2026/1/23</a:t>
             </a:fld>
             <a:endParaRPr lang="zh-CN" altLang="en-US"/>
           </a:p>
@@ -1744,6 +1735,7 @@
           <a:p>
             <a:fld id="{565CE74E-AB26-4998-AD42-012C4C1AD076}" type="slidenum">
               <a:rPr lang="zh-CN" altLang="en-US" smtClean="0"/>
+              <a:t>‹#›</a:t>
             </a:fld>
             <a:endParaRPr lang="zh-CN" altLang="en-US"/>
           </a:p>
@@ -1798,7 +1790,6 @@
               <a:rPr lang="zh-CN" altLang="en-US"/>
               <a:t>单击此处编辑母版标题样式</a:t>
             </a:r>
-            <a:endParaRPr lang="zh-CN" altLang="en-US"/>
           </a:p>
         </p:txBody>
       </p:sp>
@@ -1864,7 +1855,6 @@
               <a:rPr lang="zh-CN" altLang="en-US"/>
               <a:t>单击此处编辑母版文本样式</a:t>
             </a:r>
-            <a:endParaRPr lang="zh-CN" altLang="en-US"/>
           </a:p>
         </p:txBody>
       </p:sp>
@@ -1893,7 +1883,6 @@
               <a:rPr lang="zh-CN" altLang="en-US"/>
               <a:t>单击此处编辑母版文本样式</a:t>
             </a:r>
-            <a:endParaRPr lang="zh-CN" altLang="en-US"/>
           </a:p>
           <a:p>
             <a:pPr lvl="1"/>
@@ -1901,7 +1890,6 @@
               <a:rPr lang="zh-CN" altLang="en-US"/>
               <a:t>第二级</a:t>
             </a:r>
-            <a:endParaRPr lang="zh-CN" altLang="en-US"/>
           </a:p>
           <a:p>
             <a:pPr lvl="2"/>
@@ -1909,7 +1897,6 @@
               <a:rPr lang="zh-CN" altLang="en-US"/>
               <a:t>第三级</a:t>
             </a:r>
-            <a:endParaRPr lang="zh-CN" altLang="en-US"/>
           </a:p>
           <a:p>
             <a:pPr lvl="3"/>
@@ -1917,7 +1904,6 @@
               <a:rPr lang="zh-CN" altLang="en-US"/>
               <a:t>第四级</a:t>
             </a:r>
-            <a:endParaRPr lang="zh-CN" altLang="en-US"/>
           </a:p>
           <a:p>
             <a:pPr lvl="4"/>
@@ -1925,7 +1911,6 @@
               <a:rPr lang="zh-CN" altLang="en-US"/>
               <a:t>第五级</a:t>
             </a:r>
-            <a:endParaRPr lang="zh-CN" altLang="en-US"/>
           </a:p>
         </p:txBody>
       </p:sp>
@@ -1991,7 +1976,6 @@
               <a:rPr lang="zh-CN" altLang="en-US"/>
               <a:t>单击此处编辑母版文本样式</a:t>
             </a:r>
-            <a:endParaRPr lang="zh-CN" altLang="en-US"/>
           </a:p>
         </p:txBody>
       </p:sp>
@@ -2020,7 +2004,6 @@
               <a:rPr lang="zh-CN" altLang="en-US"/>
               <a:t>单击此处编辑母版文本样式</a:t>
             </a:r>
-            <a:endParaRPr lang="zh-CN" altLang="en-US"/>
           </a:p>
           <a:p>
             <a:pPr lvl="1"/>
@@ -2028,7 +2011,6 @@
               <a:rPr lang="zh-CN" altLang="en-US"/>
               <a:t>第二级</a:t>
             </a:r>
-            <a:endParaRPr lang="zh-CN" altLang="en-US"/>
           </a:p>
           <a:p>
             <a:pPr lvl="2"/>
@@ -2036,7 +2018,6 @@
               <a:rPr lang="zh-CN" altLang="en-US"/>
               <a:t>第三级</a:t>
             </a:r>
-            <a:endParaRPr lang="zh-CN" altLang="en-US"/>
           </a:p>
           <a:p>
             <a:pPr lvl="3"/>
@@ -2044,7 +2025,6 @@
               <a:rPr lang="zh-CN" altLang="en-US"/>
               <a:t>第四级</a:t>
             </a:r>
-            <a:endParaRPr lang="zh-CN" altLang="en-US"/>
           </a:p>
           <a:p>
             <a:pPr lvl="4"/>
@@ -2052,7 +2032,6 @@
               <a:rPr lang="zh-CN" altLang="en-US"/>
               <a:t>第五级</a:t>
             </a:r>
-            <a:endParaRPr lang="zh-CN" altLang="en-US"/>
           </a:p>
         </p:txBody>
       </p:sp>
@@ -2073,6 +2052,7 @@
           <a:p>
             <a:fld id="{D997B5FA-0921-464F-AAE1-844C04324D75}" type="datetimeFigureOut">
               <a:rPr lang="zh-CN" altLang="en-US" smtClean="0"/>
+              <a:t>2026/1/23</a:t>
             </a:fld>
             <a:endParaRPr lang="zh-CN" altLang="en-US"/>
           </a:p>
@@ -2114,6 +2094,7 @@
           <a:p>
             <a:fld id="{565CE74E-AB26-4998-AD42-012C4C1AD076}" type="slidenum">
               <a:rPr lang="zh-CN" altLang="en-US" smtClean="0"/>
+              <a:t>‹#›</a:t>
             </a:fld>
             <a:endParaRPr lang="zh-CN" altLang="en-US"/>
           </a:p>
@@ -2163,7 +2144,6 @@
               <a:rPr lang="zh-CN" altLang="en-US"/>
               <a:t>单击此处编辑母版标题样式</a:t>
             </a:r>
-            <a:endParaRPr lang="zh-CN" altLang="en-US"/>
           </a:p>
         </p:txBody>
       </p:sp>
@@ -2184,6 +2164,7 @@
           <a:p>
             <a:fld id="{D997B5FA-0921-464F-AAE1-844C04324D75}" type="datetimeFigureOut">
               <a:rPr lang="zh-CN" altLang="en-US" smtClean="0"/>
+              <a:t>2026/1/23</a:t>
             </a:fld>
             <a:endParaRPr lang="zh-CN" altLang="en-US"/>
           </a:p>
@@ -2225,6 +2206,7 @@
           <a:p>
             <a:fld id="{565CE74E-AB26-4998-AD42-012C4C1AD076}" type="slidenum">
               <a:rPr lang="zh-CN" altLang="en-US" smtClean="0"/>
+              <a:t>‹#›</a:t>
             </a:fld>
             <a:endParaRPr lang="zh-CN" altLang="en-US"/>
           </a:p>
@@ -2272,6 +2254,7 @@
           <a:p>
             <a:fld id="{D997B5FA-0921-464F-AAE1-844C04324D75}" type="datetimeFigureOut">
               <a:rPr lang="zh-CN" altLang="en-US" smtClean="0"/>
+              <a:t>2026/1/23</a:t>
             </a:fld>
             <a:endParaRPr lang="zh-CN" altLang="en-US"/>
           </a:p>
@@ -2313,6 +2296,7 @@
           <a:p>
             <a:fld id="{565CE74E-AB26-4998-AD42-012C4C1AD076}" type="slidenum">
               <a:rPr lang="zh-CN" altLang="en-US" smtClean="0"/>
+              <a:t>‹#›</a:t>
             </a:fld>
             <a:endParaRPr lang="zh-CN" altLang="en-US"/>
           </a:p>
@@ -2371,7 +2355,6 @@
               <a:rPr lang="zh-CN" altLang="en-US"/>
               <a:t>单击此处编辑母版标题样式</a:t>
             </a:r>
-            <a:endParaRPr lang="zh-CN" altLang="en-US"/>
           </a:p>
         </p:txBody>
       </p:sp>
@@ -2428,7 +2411,6 @@
               <a:rPr lang="zh-CN" altLang="en-US"/>
               <a:t>单击此处编辑母版文本样式</a:t>
             </a:r>
-            <a:endParaRPr lang="zh-CN" altLang="en-US"/>
           </a:p>
           <a:p>
             <a:pPr lvl="1"/>
@@ -2436,7 +2418,6 @@
               <a:rPr lang="zh-CN" altLang="en-US"/>
               <a:t>第二级</a:t>
             </a:r>
-            <a:endParaRPr lang="zh-CN" altLang="en-US"/>
           </a:p>
           <a:p>
             <a:pPr lvl="2"/>
@@ -2444,7 +2425,6 @@
               <a:rPr lang="zh-CN" altLang="en-US"/>
               <a:t>第三级</a:t>
             </a:r>
-            <a:endParaRPr lang="zh-CN" altLang="en-US"/>
           </a:p>
           <a:p>
             <a:pPr lvl="3"/>
@@ -2452,7 +2432,6 @@
               <a:rPr lang="zh-CN" altLang="en-US"/>
               <a:t>第四级</a:t>
             </a:r>
-            <a:endParaRPr lang="zh-CN" altLang="en-US"/>
           </a:p>
           <a:p>
             <a:pPr lvl="4"/>
@@ -2460,7 +2439,6 @@
               <a:rPr lang="zh-CN" altLang="en-US"/>
               <a:t>第五级</a:t>
             </a:r>
-            <a:endParaRPr lang="zh-CN" altLang="en-US"/>
           </a:p>
         </p:txBody>
       </p:sp>
@@ -2526,7 +2504,6 @@
               <a:rPr lang="zh-CN" altLang="en-US"/>
               <a:t>单击此处编辑母版文本样式</a:t>
             </a:r>
-            <a:endParaRPr lang="zh-CN" altLang="en-US"/>
           </a:p>
         </p:txBody>
       </p:sp>
@@ -2547,6 +2524,7 @@
           <a:p>
             <a:fld id="{D997B5FA-0921-464F-AAE1-844C04324D75}" type="datetimeFigureOut">
               <a:rPr lang="zh-CN" altLang="en-US" smtClean="0"/>
+              <a:t>2026/1/23</a:t>
             </a:fld>
             <a:endParaRPr lang="zh-CN" altLang="en-US"/>
           </a:p>
@@ -2588,6 +2566,7 @@
           <a:p>
             <a:fld id="{565CE74E-AB26-4998-AD42-012C4C1AD076}" type="slidenum">
               <a:rPr lang="zh-CN" altLang="en-US" smtClean="0"/>
+              <a:t>‹#›</a:t>
             </a:fld>
             <a:endParaRPr lang="zh-CN" altLang="en-US"/>
           </a:p>
@@ -2646,7 +2625,6 @@
               <a:rPr lang="zh-CN" altLang="en-US"/>
               <a:t>单击此处编辑母版标题样式</a:t>
             </a:r>
-            <a:endParaRPr lang="zh-CN" altLang="en-US"/>
           </a:p>
         </p:txBody>
       </p:sp>
@@ -2773,7 +2751,6 @@
               <a:rPr lang="zh-CN" altLang="en-US"/>
               <a:t>单击此处编辑母版文本样式</a:t>
             </a:r>
-            <a:endParaRPr lang="zh-CN" altLang="en-US"/>
           </a:p>
         </p:txBody>
       </p:sp>
@@ -2794,6 +2771,7 @@
           <a:p>
             <a:fld id="{D997B5FA-0921-464F-AAE1-844C04324D75}" type="datetimeFigureOut">
               <a:rPr lang="zh-CN" altLang="en-US" smtClean="0"/>
+              <a:t>2026/1/23</a:t>
             </a:fld>
             <a:endParaRPr lang="zh-CN" altLang="en-US"/>
           </a:p>
@@ -2835,6 +2813,7 @@
           <a:p>
             <a:fld id="{565CE74E-AB26-4998-AD42-012C4C1AD076}" type="slidenum">
               <a:rPr lang="zh-CN" altLang="en-US" smtClean="0"/>
+              <a:t>‹#›</a:t>
             </a:fld>
             <a:endParaRPr lang="zh-CN" altLang="en-US"/>
           </a:p>
@@ -2899,7 +2878,6 @@
               <a:rPr lang="zh-CN" altLang="en-US"/>
               <a:t>单击此处编辑母版标题样式</a:t>
             </a:r>
-            <a:endParaRPr lang="zh-CN" altLang="en-US"/>
           </a:p>
         </p:txBody>
       </p:sp>
@@ -2933,7 +2911,6 @@
               <a:rPr lang="zh-CN" altLang="en-US"/>
               <a:t>单击此处编辑母版文本样式</a:t>
             </a:r>
-            <a:endParaRPr lang="zh-CN" altLang="en-US"/>
           </a:p>
           <a:p>
             <a:pPr lvl="1"/>
@@ -2941,7 +2918,6 @@
               <a:rPr lang="zh-CN" altLang="en-US"/>
               <a:t>第二级</a:t>
             </a:r>
-            <a:endParaRPr lang="zh-CN" altLang="en-US"/>
           </a:p>
           <a:p>
             <a:pPr lvl="2"/>
@@ -2949,7 +2925,6 @@
               <a:rPr lang="zh-CN" altLang="en-US"/>
               <a:t>第三级</a:t>
             </a:r>
-            <a:endParaRPr lang="zh-CN" altLang="en-US"/>
           </a:p>
           <a:p>
             <a:pPr lvl="3"/>
@@ -2957,7 +2932,6 @@
               <a:rPr lang="zh-CN" altLang="en-US"/>
               <a:t>第四级</a:t>
             </a:r>
-            <a:endParaRPr lang="zh-CN" altLang="en-US"/>
           </a:p>
           <a:p>
             <a:pPr lvl="4"/>
@@ -2965,7 +2939,6 @@
               <a:rPr lang="zh-CN" altLang="en-US"/>
               <a:t>第五级</a:t>
             </a:r>
-            <a:endParaRPr lang="zh-CN" altLang="en-US"/>
           </a:p>
         </p:txBody>
       </p:sp>
@@ -3004,6 +2977,7 @@
           <a:p>
             <a:fld id="{D997B5FA-0921-464F-AAE1-844C04324D75}" type="datetimeFigureOut">
               <a:rPr lang="zh-CN" altLang="en-US" smtClean="0"/>
+              <a:t>2026/1/23</a:t>
             </a:fld>
             <a:endParaRPr lang="zh-CN" altLang="en-US"/>
           </a:p>
@@ -3081,6 +3055,7 @@
           <a:p>
             <a:fld id="{565CE74E-AB26-4998-AD42-012C4C1AD076}" type="slidenum">
               <a:rPr lang="zh-CN" altLang="en-US" smtClean="0"/>
+              <a:t>‹#›</a:t>
             </a:fld>
             <a:endParaRPr lang="zh-CN" altLang="en-US"/>
           </a:p>
@@ -3550,13 +3525,13 @@
           <p:nvPr/>
         </p:nvPicPr>
         <p:blipFill>
-          <a:blip r:embed="rId1" cstate="print">
+          <a:blip r:embed="rId2" cstate="print">
             <a:extLst>
               <a:ext uri="{28A0092B-C50C-407E-A947-70E740481C1C}">
                 <a14:useLocalDpi xmlns:a14="http://schemas.microsoft.com/office/drawing/2010/main" val="0"/>
               </a:ext>
               <a:ext uri="{96DAC541-7B7A-43D3-8B79-37D633B846F1}">
-                <asvg:svgBlip xmlns:asvg="http://schemas.microsoft.com/office/drawing/2016/SVG/main" r:embed="rId2"/>
+                <asvg:svgBlip xmlns:asvg="http://schemas.microsoft.com/office/drawing/2016/SVG/main" r:embed="rId3"/>
               </a:ext>
             </a:extLst>
           </a:blip>
@@ -3583,13 +3558,13 @@
           <p:nvPr/>
         </p:nvPicPr>
         <p:blipFill>
-          <a:blip r:embed="rId3" cstate="print">
+          <a:blip r:embed="rId4" cstate="print">
             <a:extLst>
               <a:ext uri="{28A0092B-C50C-407E-A947-70E740481C1C}">
                 <a14:useLocalDpi xmlns:a14="http://schemas.microsoft.com/office/drawing/2010/main" val="0"/>
               </a:ext>
               <a:ext uri="{96DAC541-7B7A-43D3-8B79-37D633B846F1}">
-                <asvg:svgBlip xmlns:asvg="http://schemas.microsoft.com/office/drawing/2016/SVG/main" r:embed="rId4"/>
+                <asvg:svgBlip xmlns:asvg="http://schemas.microsoft.com/office/drawing/2016/SVG/main" r:embed="rId5"/>
               </a:ext>
             </a:extLst>
           </a:blip>
@@ -3616,13 +3591,13 @@
           <p:nvPr/>
         </p:nvPicPr>
         <p:blipFill>
-          <a:blip r:embed="rId5" cstate="print">
+          <a:blip r:embed="rId6" cstate="print">
             <a:extLst>
               <a:ext uri="{28A0092B-C50C-407E-A947-70E740481C1C}">
                 <a14:useLocalDpi xmlns:a14="http://schemas.microsoft.com/office/drawing/2010/main" val="0"/>
               </a:ext>
               <a:ext uri="{96DAC541-7B7A-43D3-8B79-37D633B846F1}">
-                <asvg:svgBlip xmlns:asvg="http://schemas.microsoft.com/office/drawing/2016/SVG/main" r:embed="rId6"/>
+                <asvg:svgBlip xmlns:asvg="http://schemas.microsoft.com/office/drawing/2016/SVG/main" r:embed="rId7"/>
               </a:ext>
             </a:extLst>
           </a:blip>
@@ -3649,13 +3624,13 @@
           <p:nvPr/>
         </p:nvPicPr>
         <p:blipFill>
-          <a:blip r:embed="rId7" cstate="print">
+          <a:blip r:embed="rId8" cstate="print">
             <a:extLst>
               <a:ext uri="{28A0092B-C50C-407E-A947-70E740481C1C}">
                 <a14:useLocalDpi xmlns:a14="http://schemas.microsoft.com/office/drawing/2010/main" val="0"/>
               </a:ext>
               <a:ext uri="{96DAC541-7B7A-43D3-8B79-37D633B846F1}">
-                <asvg:svgBlip xmlns:asvg="http://schemas.microsoft.com/office/drawing/2016/SVG/main" r:embed="rId8"/>
+                <asvg:svgBlip xmlns:asvg="http://schemas.microsoft.com/office/drawing/2016/SVG/main" r:embed="rId9"/>
               </a:ext>
             </a:extLst>
           </a:blip>
@@ -3682,13 +3657,13 @@
           <p:nvPr/>
         </p:nvPicPr>
         <p:blipFill>
-          <a:blip r:embed="rId9" cstate="print">
+          <a:blip r:embed="rId10" cstate="print">
             <a:extLst>
               <a:ext uri="{28A0092B-C50C-407E-A947-70E740481C1C}">
                 <a14:useLocalDpi xmlns:a14="http://schemas.microsoft.com/office/drawing/2010/main" val="0"/>
               </a:ext>
               <a:ext uri="{96DAC541-7B7A-43D3-8B79-37D633B846F1}">
-                <asvg:svgBlip xmlns:asvg="http://schemas.microsoft.com/office/drawing/2016/SVG/main" r:embed="rId10"/>
+                <asvg:svgBlip xmlns:asvg="http://schemas.microsoft.com/office/drawing/2016/SVG/main" r:embed="rId11"/>
               </a:ext>
             </a:extLst>
           </a:blip>
@@ -3715,13 +3690,13 @@
           <p:nvPr/>
         </p:nvPicPr>
         <p:blipFill>
-          <a:blip r:embed="rId11" cstate="print">
+          <a:blip r:embed="rId12" cstate="print">
             <a:extLst>
               <a:ext uri="{28A0092B-C50C-407E-A947-70E740481C1C}">
                 <a14:useLocalDpi xmlns:a14="http://schemas.microsoft.com/office/drawing/2010/main" val="0"/>
               </a:ext>
               <a:ext uri="{96DAC541-7B7A-43D3-8B79-37D633B846F1}">
-                <asvg:svgBlip xmlns:asvg="http://schemas.microsoft.com/office/drawing/2016/SVG/main" r:embed="rId12"/>
+                <asvg:svgBlip xmlns:asvg="http://schemas.microsoft.com/office/drawing/2016/SVG/main" r:embed="rId13"/>
               </a:ext>
             </a:extLst>
           </a:blip>
@@ -3748,13 +3723,13 @@
           <p:nvPr/>
         </p:nvPicPr>
         <p:blipFill>
-          <a:blip r:embed="rId13" cstate="print">
+          <a:blip r:embed="rId14" cstate="print">
             <a:extLst>
               <a:ext uri="{28A0092B-C50C-407E-A947-70E740481C1C}">
                 <a14:useLocalDpi xmlns:a14="http://schemas.microsoft.com/office/drawing/2010/main" val="0"/>
               </a:ext>
               <a:ext uri="{96DAC541-7B7A-43D3-8B79-37D633B846F1}">
-                <asvg:svgBlip xmlns:asvg="http://schemas.microsoft.com/office/drawing/2016/SVG/main" r:embed="rId14"/>
+                <asvg:svgBlip xmlns:asvg="http://schemas.microsoft.com/office/drawing/2016/SVG/main" r:embed="rId15"/>
               </a:ext>
             </a:extLst>
           </a:blip>
@@ -3781,13 +3756,13 @@
           <p:nvPr/>
         </p:nvPicPr>
         <p:blipFill>
-          <a:blip r:embed="rId15" cstate="print">
+          <a:blip r:embed="rId16" cstate="print">
             <a:extLst>
               <a:ext uri="{28A0092B-C50C-407E-A947-70E740481C1C}">
                 <a14:useLocalDpi xmlns:a14="http://schemas.microsoft.com/office/drawing/2010/main" val="0"/>
               </a:ext>
               <a:ext uri="{96DAC541-7B7A-43D3-8B79-37D633B846F1}">
-                <asvg:svgBlip xmlns:asvg="http://schemas.microsoft.com/office/drawing/2016/SVG/main" r:embed="rId16"/>
+                <asvg:svgBlip xmlns:asvg="http://schemas.microsoft.com/office/drawing/2016/SVG/main" r:embed="rId17"/>
               </a:ext>
             </a:extLst>
           </a:blip>
@@ -3814,13 +3789,13 @@
           <p:nvPr/>
         </p:nvPicPr>
         <p:blipFill>
-          <a:blip r:embed="rId17" cstate="print">
+          <a:blip r:embed="rId18" cstate="print">
             <a:extLst>
               <a:ext uri="{28A0092B-C50C-407E-A947-70E740481C1C}">
                 <a14:useLocalDpi xmlns:a14="http://schemas.microsoft.com/office/drawing/2010/main" val="0"/>
               </a:ext>
               <a:ext uri="{96DAC541-7B7A-43D3-8B79-37D633B846F1}">
-                <asvg:svgBlip xmlns:asvg="http://schemas.microsoft.com/office/drawing/2016/SVG/main" r:embed="rId18"/>
+                <asvg:svgBlip xmlns:asvg="http://schemas.microsoft.com/office/drawing/2016/SVG/main" r:embed="rId19"/>
               </a:ext>
             </a:extLst>
           </a:blip>
@@ -3847,13 +3822,13 @@
           <p:nvPr/>
         </p:nvPicPr>
         <p:blipFill>
-          <a:blip r:embed="rId19" cstate="print">
+          <a:blip r:embed="rId20" cstate="print">
             <a:extLst>
               <a:ext uri="{28A0092B-C50C-407E-A947-70E740481C1C}">
                 <a14:useLocalDpi xmlns:a14="http://schemas.microsoft.com/office/drawing/2010/main" val="0"/>
               </a:ext>
               <a:ext uri="{96DAC541-7B7A-43D3-8B79-37D633B846F1}">
-                <asvg:svgBlip xmlns:asvg="http://schemas.microsoft.com/office/drawing/2016/SVG/main" r:embed="rId20"/>
+                <asvg:svgBlip xmlns:asvg="http://schemas.microsoft.com/office/drawing/2016/SVG/main" r:embed="rId21"/>
               </a:ext>
             </a:extLst>
           </a:blip>
@@ -3880,13 +3855,13 @@
           <p:nvPr/>
         </p:nvPicPr>
         <p:blipFill>
-          <a:blip r:embed="rId21" cstate="print">
+          <a:blip r:embed="rId22" cstate="print">
             <a:extLst>
               <a:ext uri="{28A0092B-C50C-407E-A947-70E740481C1C}">
                 <a14:useLocalDpi xmlns:a14="http://schemas.microsoft.com/office/drawing/2010/main" val="0"/>
               </a:ext>
               <a:ext uri="{96DAC541-7B7A-43D3-8B79-37D633B846F1}">
-                <asvg:svgBlip xmlns:asvg="http://schemas.microsoft.com/office/drawing/2016/SVG/main" r:embed="rId22"/>
+                <asvg:svgBlip xmlns:asvg="http://schemas.microsoft.com/office/drawing/2016/SVG/main" r:embed="rId23"/>
               </a:ext>
             </a:extLst>
           </a:blip>
@@ -3913,13 +3888,13 @@
           <p:nvPr/>
         </p:nvPicPr>
         <p:blipFill>
-          <a:blip r:embed="rId23" cstate="print">
+          <a:blip r:embed="rId24" cstate="print">
             <a:extLst>
               <a:ext uri="{28A0092B-C50C-407E-A947-70E740481C1C}">
                 <a14:useLocalDpi xmlns:a14="http://schemas.microsoft.com/office/drawing/2010/main" val="0"/>
               </a:ext>
               <a:ext uri="{96DAC541-7B7A-43D3-8B79-37D633B846F1}">
-                <asvg:svgBlip xmlns:asvg="http://schemas.microsoft.com/office/drawing/2016/SVG/main" r:embed="rId24"/>
+                <asvg:svgBlip xmlns:asvg="http://schemas.microsoft.com/office/drawing/2016/SVG/main" r:embed="rId25"/>
               </a:ext>
             </a:extLst>
           </a:blip>
@@ -3946,13 +3921,13 @@
           <p:nvPr/>
         </p:nvPicPr>
         <p:blipFill>
-          <a:blip r:embed="rId25" cstate="print">
+          <a:blip r:embed="rId26" cstate="print">
             <a:extLst>
               <a:ext uri="{28A0092B-C50C-407E-A947-70E740481C1C}">
                 <a14:useLocalDpi xmlns:a14="http://schemas.microsoft.com/office/drawing/2010/main" val="0"/>
               </a:ext>
               <a:ext uri="{96DAC541-7B7A-43D3-8B79-37D633B846F1}">
-                <asvg:svgBlip xmlns:asvg="http://schemas.microsoft.com/office/drawing/2016/SVG/main" r:embed="rId26"/>
+                <asvg:svgBlip xmlns:asvg="http://schemas.microsoft.com/office/drawing/2016/SVG/main" r:embed="rId27"/>
               </a:ext>
             </a:extLst>
           </a:blip>
@@ -3979,13 +3954,13 @@
           <p:nvPr/>
         </p:nvPicPr>
         <p:blipFill>
-          <a:blip r:embed="rId27" cstate="print">
+          <a:blip r:embed="rId28" cstate="print">
             <a:extLst>
               <a:ext uri="{28A0092B-C50C-407E-A947-70E740481C1C}">
                 <a14:useLocalDpi xmlns:a14="http://schemas.microsoft.com/office/drawing/2010/main" val="0"/>
               </a:ext>
               <a:ext uri="{96DAC541-7B7A-43D3-8B79-37D633B846F1}">
-                <asvg:svgBlip xmlns:asvg="http://schemas.microsoft.com/office/drawing/2016/SVG/main" r:embed="rId28"/>
+                <asvg:svgBlip xmlns:asvg="http://schemas.microsoft.com/office/drawing/2016/SVG/main" r:embed="rId29"/>
               </a:ext>
             </a:extLst>
           </a:blip>
@@ -4012,13 +3987,13 @@
           <p:nvPr/>
         </p:nvPicPr>
         <p:blipFill>
-          <a:blip r:embed="rId29" cstate="print">
+          <a:blip r:embed="rId30" cstate="print">
             <a:extLst>
               <a:ext uri="{28A0092B-C50C-407E-A947-70E740481C1C}">
                 <a14:useLocalDpi xmlns:a14="http://schemas.microsoft.com/office/drawing/2010/main" val="0"/>
               </a:ext>
               <a:ext uri="{96DAC541-7B7A-43D3-8B79-37D633B846F1}">
-                <asvg:svgBlip xmlns:asvg="http://schemas.microsoft.com/office/drawing/2016/SVG/main" r:embed="rId30"/>
+                <asvg:svgBlip xmlns:asvg="http://schemas.microsoft.com/office/drawing/2016/SVG/main" r:embed="rId31"/>
               </a:ext>
             </a:extLst>
           </a:blip>
@@ -4326,13 +4301,13 @@
           <p:nvPr/>
         </p:nvPicPr>
         <p:blipFill>
-          <a:blip r:embed="rId31" cstate="print">
+          <a:blip r:embed="rId32" cstate="print">
             <a:extLst>
               <a:ext uri="{28A0092B-C50C-407E-A947-70E740481C1C}">
                 <a14:useLocalDpi xmlns:a14="http://schemas.microsoft.com/office/drawing/2010/main" val="0"/>
               </a:ext>
               <a:ext uri="{96DAC541-7B7A-43D3-8B79-37D633B846F1}">
-                <asvg:svgBlip xmlns:asvg="http://schemas.microsoft.com/office/drawing/2016/SVG/main" r:embed="rId32"/>
+                <asvg:svgBlip xmlns:asvg="http://schemas.microsoft.com/office/drawing/2016/SVG/main" r:embed="rId33"/>
               </a:ext>
             </a:extLst>
           </a:blip>
@@ -4359,13 +4334,13 @@
           <p:nvPr/>
         </p:nvPicPr>
         <p:blipFill>
-          <a:blip r:embed="rId33" cstate="print">
+          <a:blip r:embed="rId34" cstate="print">
             <a:extLst>
               <a:ext uri="{28A0092B-C50C-407E-A947-70E740481C1C}">
                 <a14:useLocalDpi xmlns:a14="http://schemas.microsoft.com/office/drawing/2010/main" val="0"/>
               </a:ext>
               <a:ext uri="{96DAC541-7B7A-43D3-8B79-37D633B846F1}">
-                <asvg:svgBlip xmlns:asvg="http://schemas.microsoft.com/office/drawing/2016/SVG/main" r:embed="rId34"/>
+                <asvg:svgBlip xmlns:asvg="http://schemas.microsoft.com/office/drawing/2016/SVG/main" r:embed="rId35"/>
               </a:ext>
             </a:extLst>
           </a:blip>
@@ -4392,10 +4367,10 @@
           <p:nvPr/>
         </p:nvPicPr>
         <p:blipFill>
-          <a:blip r:embed="rId35">
+          <a:blip r:embed="rId36">
             <a:extLst>
               <a:ext uri="{96DAC541-7B7A-43D3-8B79-37D633B846F1}">
-                <asvg:svgBlip xmlns:asvg="http://schemas.microsoft.com/office/drawing/2016/SVG/main" r:embed="rId36"/>
+                <asvg:svgBlip xmlns:asvg="http://schemas.microsoft.com/office/drawing/2016/SVG/main" r:embed="rId37"/>
               </a:ext>
             </a:extLst>
           </a:blip>
@@ -4422,13 +4397,13 @@
           <p:nvPr/>
         </p:nvPicPr>
         <p:blipFill>
-          <a:blip r:embed="rId37">
+          <a:blip r:embed="rId38">
             <a:extLst>
               <a:ext uri="{28A0092B-C50C-407E-A947-70E740481C1C}">
                 <a14:useLocalDpi xmlns:a14="http://schemas.microsoft.com/office/drawing/2010/main" val="0"/>
               </a:ext>
               <a:ext uri="{96DAC541-7B7A-43D3-8B79-37D633B846F1}">
-                <asvg:svgBlip xmlns:asvg="http://schemas.microsoft.com/office/drawing/2016/SVG/main" r:embed="rId38"/>
+                <asvg:svgBlip xmlns:asvg="http://schemas.microsoft.com/office/drawing/2016/SVG/main" r:embed="rId39"/>
               </a:ext>
             </a:extLst>
           </a:blip>
@@ -4480,13 +4455,13 @@
           <p:nvPr/>
         </p:nvPicPr>
         <p:blipFill>
-          <a:blip r:embed="rId1" cstate="print">
+          <a:blip r:embed="rId2" cstate="print">
             <a:extLst>
               <a:ext uri="{28A0092B-C50C-407E-A947-70E740481C1C}">
                 <a14:useLocalDpi xmlns:a14="http://schemas.microsoft.com/office/drawing/2010/main" val="0"/>
               </a:ext>
               <a:ext uri="{96DAC541-7B7A-43D3-8B79-37D633B846F1}">
-                <asvg:svgBlip xmlns:asvg="http://schemas.microsoft.com/office/drawing/2016/SVG/main" r:embed="rId2"/>
+                <asvg:svgBlip xmlns:asvg="http://schemas.microsoft.com/office/drawing/2016/SVG/main" r:embed="rId3"/>
               </a:ext>
             </a:extLst>
           </a:blip>
@@ -4513,13 +4488,13 @@
           <p:nvPr/>
         </p:nvPicPr>
         <p:blipFill>
-          <a:blip r:embed="rId3" cstate="print">
+          <a:blip r:embed="rId4" cstate="print">
             <a:extLst>
               <a:ext uri="{28A0092B-C50C-407E-A947-70E740481C1C}">
                 <a14:useLocalDpi xmlns:a14="http://schemas.microsoft.com/office/drawing/2010/main" val="0"/>
               </a:ext>
               <a:ext uri="{96DAC541-7B7A-43D3-8B79-37D633B846F1}">
-                <asvg:svgBlip xmlns:asvg="http://schemas.microsoft.com/office/drawing/2016/SVG/main" r:embed="rId4"/>
+                <asvg:svgBlip xmlns:asvg="http://schemas.microsoft.com/office/drawing/2016/SVG/main" r:embed="rId5"/>
               </a:ext>
             </a:extLst>
           </a:blip>
@@ -4593,13 +4568,13 @@
           <p:nvPr/>
         </p:nvPicPr>
         <p:blipFill>
-          <a:blip r:embed="rId5" cstate="print">
+          <a:blip r:embed="rId6" cstate="print">
             <a:extLst>
               <a:ext uri="{28A0092B-C50C-407E-A947-70E740481C1C}">
                 <a14:useLocalDpi xmlns:a14="http://schemas.microsoft.com/office/drawing/2010/main" val="0"/>
               </a:ext>
               <a:ext uri="{96DAC541-7B7A-43D3-8B79-37D633B846F1}">
-                <asvg:svgBlip xmlns:asvg="http://schemas.microsoft.com/office/drawing/2016/SVG/main" r:embed="rId6"/>
+                <asvg:svgBlip xmlns:asvg="http://schemas.microsoft.com/office/drawing/2016/SVG/main" r:embed="rId7"/>
               </a:ext>
             </a:extLst>
           </a:blip>
@@ -4626,13 +4601,13 @@
           <p:nvPr/>
         </p:nvPicPr>
         <p:blipFill>
-          <a:blip r:embed="rId7" cstate="print">
+          <a:blip r:embed="rId8" cstate="print">
             <a:extLst>
               <a:ext uri="{28A0092B-C50C-407E-A947-70E740481C1C}">
                 <a14:useLocalDpi xmlns:a14="http://schemas.microsoft.com/office/drawing/2010/main" val="0"/>
               </a:ext>
               <a:ext uri="{96DAC541-7B7A-43D3-8B79-37D633B846F1}">
-                <asvg:svgBlip xmlns:asvg="http://schemas.microsoft.com/office/drawing/2016/SVG/main" r:embed="rId8"/>
+                <asvg:svgBlip xmlns:asvg="http://schemas.microsoft.com/office/drawing/2016/SVG/main" r:embed="rId9"/>
               </a:ext>
             </a:extLst>
           </a:blip>
@@ -4659,13 +4634,13 @@
           <p:nvPr/>
         </p:nvPicPr>
         <p:blipFill>
-          <a:blip r:embed="rId9" cstate="print">
+          <a:blip r:embed="rId10" cstate="print">
             <a:extLst>
               <a:ext uri="{28A0092B-C50C-407E-A947-70E740481C1C}">
                 <a14:useLocalDpi xmlns:a14="http://schemas.microsoft.com/office/drawing/2010/main" val="0"/>
               </a:ext>
               <a:ext uri="{96DAC541-7B7A-43D3-8B79-37D633B846F1}">
-                <asvg:svgBlip xmlns:asvg="http://schemas.microsoft.com/office/drawing/2016/SVG/main" r:embed="rId10"/>
+                <asvg:svgBlip xmlns:asvg="http://schemas.microsoft.com/office/drawing/2016/SVG/main" r:embed="rId11"/>
               </a:ext>
             </a:extLst>
           </a:blip>
@@ -4692,13 +4667,13 @@
           <p:nvPr/>
         </p:nvPicPr>
         <p:blipFill>
-          <a:blip r:embed="rId11" cstate="print">
+          <a:blip r:embed="rId12" cstate="print">
             <a:extLst>
               <a:ext uri="{28A0092B-C50C-407E-A947-70E740481C1C}">
                 <a14:useLocalDpi xmlns:a14="http://schemas.microsoft.com/office/drawing/2010/main" val="0"/>
               </a:ext>
               <a:ext uri="{96DAC541-7B7A-43D3-8B79-37D633B846F1}">
-                <asvg:svgBlip xmlns:asvg="http://schemas.microsoft.com/office/drawing/2016/SVG/main" r:embed="rId12"/>
+                <asvg:svgBlip xmlns:asvg="http://schemas.microsoft.com/office/drawing/2016/SVG/main" r:embed="rId13"/>
               </a:ext>
             </a:extLst>
           </a:blip>
@@ -4725,13 +4700,13 @@
           <p:nvPr/>
         </p:nvPicPr>
         <p:blipFill>
-          <a:blip r:embed="rId9" cstate="print">
+          <a:blip r:embed="rId10" cstate="print">
             <a:extLst>
               <a:ext uri="{28A0092B-C50C-407E-A947-70E740481C1C}">
                 <a14:useLocalDpi xmlns:a14="http://schemas.microsoft.com/office/drawing/2010/main" val="0"/>
               </a:ext>
               <a:ext uri="{96DAC541-7B7A-43D3-8B79-37D633B846F1}">
-                <asvg:svgBlip xmlns:asvg="http://schemas.microsoft.com/office/drawing/2016/SVG/main" r:embed="rId10"/>
+                <asvg:svgBlip xmlns:asvg="http://schemas.microsoft.com/office/drawing/2016/SVG/main" r:embed="rId11"/>
               </a:ext>
             </a:extLst>
           </a:blip>
@@ -4758,13 +4733,13 @@
           <p:nvPr/>
         </p:nvPicPr>
         <p:blipFill>
-          <a:blip r:embed="rId13" cstate="print">
+          <a:blip r:embed="rId14" cstate="print">
             <a:extLst>
               <a:ext uri="{28A0092B-C50C-407E-A947-70E740481C1C}">
                 <a14:useLocalDpi xmlns:a14="http://schemas.microsoft.com/office/drawing/2010/main" val="0"/>
               </a:ext>
               <a:ext uri="{96DAC541-7B7A-43D3-8B79-37D633B846F1}">
-                <asvg:svgBlip xmlns:asvg="http://schemas.microsoft.com/office/drawing/2016/SVG/main" r:embed="rId14"/>
+                <asvg:svgBlip xmlns:asvg="http://schemas.microsoft.com/office/drawing/2016/SVG/main" r:embed="rId15"/>
               </a:ext>
             </a:extLst>
           </a:blip>
@@ -5127,13 +5102,13 @@
           <p:nvPr/>
         </p:nvPicPr>
         <p:blipFill>
-          <a:blip r:embed="rId15" cstate="print">
+          <a:blip r:embed="rId16" cstate="print">
             <a:extLst>
               <a:ext uri="{28A0092B-C50C-407E-A947-70E740481C1C}">
                 <a14:useLocalDpi xmlns:a14="http://schemas.microsoft.com/office/drawing/2010/main" val="0"/>
               </a:ext>
               <a:ext uri="{96DAC541-7B7A-43D3-8B79-37D633B846F1}">
-                <asvg:svgBlip xmlns:asvg="http://schemas.microsoft.com/office/drawing/2016/SVG/main" r:embed="rId16"/>
+                <asvg:svgBlip xmlns:asvg="http://schemas.microsoft.com/office/drawing/2016/SVG/main" r:embed="rId17"/>
               </a:ext>
             </a:extLst>
           </a:blip>
@@ -5160,13 +5135,13 @@
           <p:nvPr/>
         </p:nvPicPr>
         <p:blipFill>
-          <a:blip r:embed="rId17">
+          <a:blip r:embed="rId18">
             <a:extLst>
               <a:ext uri="{28A0092B-C50C-407E-A947-70E740481C1C}">
                 <a14:useLocalDpi xmlns:a14="http://schemas.microsoft.com/office/drawing/2010/main" val="0"/>
               </a:ext>
               <a:ext uri="{96DAC541-7B7A-43D3-8B79-37D633B846F1}">
-                <asvg:svgBlip xmlns:asvg="http://schemas.microsoft.com/office/drawing/2016/SVG/main" r:embed="rId18"/>
+                <asvg:svgBlip xmlns:asvg="http://schemas.microsoft.com/office/drawing/2016/SVG/main" r:embed="rId19"/>
               </a:ext>
             </a:extLst>
           </a:blip>
@@ -5312,13 +5287,13 @@
           <p:nvPr/>
         </p:nvPicPr>
         <p:blipFill>
-          <a:blip r:embed="rId19" cstate="print">
+          <a:blip r:embed="rId20" cstate="print">
             <a:extLst>
               <a:ext uri="{28A0092B-C50C-407E-A947-70E740481C1C}">
                 <a14:useLocalDpi xmlns:a14="http://schemas.microsoft.com/office/drawing/2010/main" val="0"/>
               </a:ext>
               <a:ext uri="{96DAC541-7B7A-43D3-8B79-37D633B846F1}">
-                <asvg:svgBlip xmlns:asvg="http://schemas.microsoft.com/office/drawing/2016/SVG/main" r:embed="rId20"/>
+                <asvg:svgBlip xmlns:asvg="http://schemas.microsoft.com/office/drawing/2016/SVG/main" r:embed="rId21"/>
               </a:ext>
             </a:extLst>
           </a:blip>
@@ -5431,6 +5406,7 @@
           <a:bodyPr wrap="square" rtlCol="0">
             <a:noAutofit/>
           </a:bodyPr>
+          <a:lstStyle/>
           <a:p>
             <a:pPr algn="ctr"/>
             <a:r>
@@ -5440,10 +5416,6 @@
               </a:rPr>
               <a:t>Merchant Frontend</a:t>
             </a:r>
-            <a:endParaRPr lang="en-US" altLang="zh-CN" sz="1600">
-              <a:latin typeface="Times New Roman" panose="02020603050405020304" charset="0"/>
-              <a:cs typeface="Times New Roman" panose="02020603050405020304" charset="0"/>
-            </a:endParaRPr>
           </a:p>
         </p:txBody>
       </p:sp>
@@ -5467,6 +5439,7 @@
           <a:bodyPr wrap="square" rtlCol="0">
             <a:spAutoFit/>
           </a:bodyPr>
+          <a:lstStyle/>
           <a:p>
             <a:pPr algn="ctr"/>
             <a:r>
@@ -5476,10 +5449,6 @@
               </a:rPr>
               <a:t>PS-App</a:t>
             </a:r>
-            <a:endParaRPr lang="en-US" altLang="zh-CN" sz="1600">
-              <a:latin typeface="Times New Roman" panose="02020603050405020304" charset="0"/>
-              <a:cs typeface="Times New Roman" panose="02020603050405020304" charset="0"/>
-            </a:endParaRPr>
           </a:p>
         </p:txBody>
       </p:sp>
@@ -5503,6 +5472,7 @@
           <a:bodyPr wrap="square" rtlCol="0">
             <a:spAutoFit/>
           </a:bodyPr>
+          <a:lstStyle/>
           <a:p>
             <a:pPr algn="ctr"/>
             <a:r>
@@ -5512,10 +5482,6 @@
               </a:rPr>
               <a:t>User</a:t>
             </a:r>
-            <a:endParaRPr lang="en-US" altLang="zh-CN" sz="1600">
-              <a:latin typeface="Times New Roman" panose="02020603050405020304" charset="0"/>
-              <a:cs typeface="Times New Roman" panose="02020603050405020304" charset="0"/>
-            </a:endParaRPr>
           </a:p>
         </p:txBody>
       </p:sp>
@@ -5539,6 +5505,7 @@
           <a:bodyPr wrap="square" rtlCol="0">
             <a:noAutofit/>
           </a:bodyPr>
+          <a:lstStyle/>
           <a:p>
             <a:pPr algn="ctr"/>
             <a:r>
@@ -5548,10 +5515,6 @@
               </a:rPr>
               <a:t> Device</a:t>
             </a:r>
-            <a:endParaRPr lang="en-US" altLang="zh-CN" sz="1600">
-              <a:latin typeface="Times New Roman" panose="02020603050405020304" charset="0"/>
-              <a:cs typeface="Times New Roman" panose="02020603050405020304" charset="0"/>
-            </a:endParaRPr>
           </a:p>
         </p:txBody>
       </p:sp>
@@ -5648,6 +5611,7 @@
           <a:bodyPr wrap="square" rtlCol="0">
             <a:noAutofit/>
           </a:bodyPr>
+          <a:lstStyle/>
           <a:p>
             <a:pPr algn="ctr"/>
             <a:r>
@@ -5657,10 +5621,6 @@
               </a:rPr>
               <a:t>Shop</a:t>
             </a:r>
-            <a:endParaRPr lang="en-US" altLang="zh-CN" sz="1600">
-              <a:latin typeface="Times New Roman" panose="02020603050405020304" charset="0"/>
-              <a:cs typeface="Times New Roman" panose="02020603050405020304" charset="0"/>
-            </a:endParaRPr>
           </a:p>
         </p:txBody>
       </p:sp>
@@ -5758,6 +5718,7 @@
           <a:bodyPr wrap="square" rtlCol="0">
             <a:noAutofit/>
           </a:bodyPr>
+          <a:lstStyle/>
           <a:p>
             <a:pPr algn="ctr"/>
             <a:r>
@@ -5765,19 +5726,8 @@
                 <a:latin typeface="Times New Roman" panose="02020603050405020304" charset="0"/>
                 <a:cs typeface="Times New Roman" panose="02020603050405020304" charset="0"/>
               </a:rPr>
-              <a:t>Merchant S</a:t>
+              <a:t>Merchant Server</a:t>
             </a:r>
-            <a:r>
-              <a:rPr lang="en-US" altLang="zh-CN" sz="1600">
-                <a:latin typeface="Times New Roman" panose="02020603050405020304" charset="0"/>
-                <a:cs typeface="Times New Roman" panose="02020603050405020304" charset="0"/>
-              </a:rPr>
-              <a:t>erver</a:t>
-            </a:r>
-            <a:endParaRPr lang="en-US" altLang="zh-CN" sz="1600">
-              <a:latin typeface="Times New Roman" panose="02020603050405020304" charset="0"/>
-              <a:cs typeface="Times New Roman" panose="02020603050405020304" charset="0"/>
-            </a:endParaRPr>
           </a:p>
         </p:txBody>
       </p:sp>
@@ -5877,6 +5827,7 @@
           <a:bodyPr wrap="square" rtlCol="0">
             <a:spAutoFit/>
           </a:bodyPr>
+          <a:lstStyle/>
           <a:p>
             <a:pPr algn="ctr"/>
             <a:r>
@@ -5884,19 +5835,8 @@
                 <a:latin typeface="Times New Roman" panose="02020603050405020304" charset="0"/>
                 <a:cs typeface="Times New Roman" panose="02020603050405020304" charset="0"/>
               </a:rPr>
-              <a:t>PS-S</a:t>
+              <a:t>PS-Server</a:t>
             </a:r>
-            <a:r>
-              <a:rPr lang="en-US" altLang="zh-CN" sz="1600">
-                <a:latin typeface="Times New Roman" panose="02020603050405020304" charset="0"/>
-                <a:cs typeface="Times New Roman" panose="02020603050405020304" charset="0"/>
-              </a:rPr>
-              <a:t>erver</a:t>
-            </a:r>
-            <a:endParaRPr lang="en-US" altLang="zh-CN" sz="1600">
-              <a:latin typeface="Times New Roman" panose="02020603050405020304" charset="0"/>
-              <a:cs typeface="Times New Roman" panose="02020603050405020304" charset="0"/>
-            </a:endParaRPr>
           </a:p>
         </p:txBody>
       </p:sp>
@@ -5993,6 +5933,7 @@
           <a:bodyPr wrap="square" rtlCol="0">
             <a:spAutoFit/>
           </a:bodyPr>
+          <a:lstStyle/>
           <a:p>
             <a:pPr algn="ctr"/>
             <a:r>
@@ -6002,10 +5943,6 @@
               </a:rPr>
               <a:t>Funds transfer</a:t>
             </a:r>
-            <a:endParaRPr lang="en-US" altLang="zh-CN" sz="1600">
-              <a:latin typeface="Times New Roman" panose="02020603050405020304" charset="0"/>
-              <a:cs typeface="Times New Roman" panose="02020603050405020304" charset="0"/>
-            </a:endParaRPr>
           </a:p>
         </p:txBody>
       </p:sp>
@@ -6079,6 +6016,7 @@
           <a:bodyPr wrap="square" rtlCol="0">
             <a:noAutofit/>
           </a:bodyPr>
+          <a:lstStyle/>
           <a:p>
             <a:pPr algn="ctr"/>
             <a:r>
@@ -6088,10 +6026,6 @@
               </a:rPr>
               <a:t>SDK</a:t>
             </a:r>
-            <a:endParaRPr lang="en-US" altLang="zh-CN" sz="1600">
-              <a:latin typeface="Times New Roman" panose="02020603050405020304" charset="0"/>
-              <a:cs typeface="Times New Roman" panose="02020603050405020304" charset="0"/>
-            </a:endParaRPr>
           </a:p>
         </p:txBody>
       </p:sp>
@@ -6142,13 +6076,13 @@
           <p:nvPr/>
         </p:nvPicPr>
         <p:blipFill>
-          <a:blip r:embed="rId1" cstate="print">
+          <a:blip r:embed="rId2" cstate="print">
             <a:extLst>
               <a:ext uri="{28A0092B-C50C-407E-A947-70E740481C1C}">
                 <a14:useLocalDpi xmlns:a14="http://schemas.microsoft.com/office/drawing/2010/main" val="0"/>
               </a:ext>
               <a:ext uri="{96DAC541-7B7A-43D3-8B79-37D633B846F1}">
-                <asvg:svgBlip xmlns:asvg="http://schemas.microsoft.com/office/drawing/2016/SVG/main" r:embed="rId2"/>
+                <asvg:svgBlip xmlns:asvg="http://schemas.microsoft.com/office/drawing/2016/SVG/main" r:embed="rId3"/>
               </a:ext>
             </a:extLst>
           </a:blip>
@@ -6175,13 +6109,13 @@
           <p:nvPr/>
         </p:nvPicPr>
         <p:blipFill>
-          <a:blip r:embed="rId3" cstate="print">
+          <a:blip r:embed="rId4" cstate="print">
             <a:extLst>
               <a:ext uri="{28A0092B-C50C-407E-A947-70E740481C1C}">
                 <a14:useLocalDpi xmlns:a14="http://schemas.microsoft.com/office/drawing/2010/main" val="0"/>
               </a:ext>
               <a:ext uri="{96DAC541-7B7A-43D3-8B79-37D633B846F1}">
-                <asvg:svgBlip xmlns:asvg="http://schemas.microsoft.com/office/drawing/2016/SVG/main" r:embed="rId4"/>
+                <asvg:svgBlip xmlns:asvg="http://schemas.microsoft.com/office/drawing/2016/SVG/main" r:embed="rId5"/>
               </a:ext>
             </a:extLst>
           </a:blip>
@@ -6412,13 +6346,13 @@
           <p:nvPr/>
         </p:nvPicPr>
         <p:blipFill>
-          <a:blip r:embed="rId5" cstate="print">
+          <a:blip r:embed="rId6" cstate="print">
             <a:extLst>
               <a:ext uri="{28A0092B-C50C-407E-A947-70E740481C1C}">
                 <a14:useLocalDpi xmlns:a14="http://schemas.microsoft.com/office/drawing/2010/main" val="0"/>
               </a:ext>
               <a:ext uri="{96DAC541-7B7A-43D3-8B79-37D633B846F1}">
-                <asvg:svgBlip xmlns:asvg="http://schemas.microsoft.com/office/drawing/2016/SVG/main" r:embed="rId6"/>
+                <asvg:svgBlip xmlns:asvg="http://schemas.microsoft.com/office/drawing/2016/SVG/main" r:embed="rId7"/>
               </a:ext>
             </a:extLst>
           </a:blip>
@@ -6445,13 +6379,13 @@
           <p:nvPr/>
         </p:nvPicPr>
         <p:blipFill>
-          <a:blip r:embed="rId7" cstate="print">
+          <a:blip r:embed="rId8" cstate="print">
             <a:extLst>
               <a:ext uri="{28A0092B-C50C-407E-A947-70E740481C1C}">
                 <a14:useLocalDpi xmlns:a14="http://schemas.microsoft.com/office/drawing/2010/main" val="0"/>
               </a:ext>
               <a:ext uri="{96DAC541-7B7A-43D3-8B79-37D633B846F1}">
-                <asvg:svgBlip xmlns:asvg="http://schemas.microsoft.com/office/drawing/2016/SVG/main" r:embed="rId8"/>
+                <asvg:svgBlip xmlns:asvg="http://schemas.microsoft.com/office/drawing/2016/SVG/main" r:embed="rId9"/>
               </a:ext>
             </a:extLst>
           </a:blip>
@@ -6478,13 +6412,13 @@
           <p:nvPr/>
         </p:nvPicPr>
         <p:blipFill>
-          <a:blip r:embed="rId9" cstate="print">
+          <a:blip r:embed="rId10" cstate="print">
             <a:extLst>
               <a:ext uri="{28A0092B-C50C-407E-A947-70E740481C1C}">
                 <a14:useLocalDpi xmlns:a14="http://schemas.microsoft.com/office/drawing/2010/main" val="0"/>
               </a:ext>
               <a:ext uri="{96DAC541-7B7A-43D3-8B79-37D633B846F1}">
-                <asvg:svgBlip xmlns:asvg="http://schemas.microsoft.com/office/drawing/2016/SVG/main" r:embed="rId10"/>
+                <asvg:svgBlip xmlns:asvg="http://schemas.microsoft.com/office/drawing/2016/SVG/main" r:embed="rId11"/>
               </a:ext>
             </a:extLst>
           </a:blip>
@@ -6511,13 +6445,13 @@
           <p:nvPr/>
         </p:nvPicPr>
         <p:blipFill>
-          <a:blip r:embed="rId11" cstate="print">
+          <a:blip r:embed="rId12" cstate="print">
             <a:extLst>
               <a:ext uri="{28A0092B-C50C-407E-A947-70E740481C1C}">
                 <a14:useLocalDpi xmlns:a14="http://schemas.microsoft.com/office/drawing/2010/main" val="0"/>
               </a:ext>
               <a:ext uri="{96DAC541-7B7A-43D3-8B79-37D633B846F1}">
-                <asvg:svgBlip xmlns:asvg="http://schemas.microsoft.com/office/drawing/2016/SVG/main" r:embed="rId12"/>
+                <asvg:svgBlip xmlns:asvg="http://schemas.microsoft.com/office/drawing/2016/SVG/main" r:embed="rId13"/>
               </a:ext>
             </a:extLst>
           </a:blip>
@@ -6544,13 +6478,13 @@
           <p:nvPr/>
         </p:nvPicPr>
         <p:blipFill>
-          <a:blip r:embed="rId11" cstate="print">
+          <a:blip r:embed="rId12" cstate="print">
             <a:extLst>
               <a:ext uri="{28A0092B-C50C-407E-A947-70E740481C1C}">
                 <a14:useLocalDpi xmlns:a14="http://schemas.microsoft.com/office/drawing/2010/main" val="0"/>
               </a:ext>
               <a:ext uri="{96DAC541-7B7A-43D3-8B79-37D633B846F1}">
-                <asvg:svgBlip xmlns:asvg="http://schemas.microsoft.com/office/drawing/2016/SVG/main" r:embed="rId13"/>
+                <asvg:svgBlip xmlns:asvg="http://schemas.microsoft.com/office/drawing/2016/SVG/main" r:embed="rId14"/>
               </a:ext>
             </a:extLst>
           </a:blip>
@@ -6577,10 +6511,10 @@
           <p:nvPr/>
         </p:nvPicPr>
         <p:blipFill>
-          <a:blip r:embed="rId14">
+          <a:blip r:embed="rId15">
             <a:extLst>
               <a:ext uri="{96DAC541-7B7A-43D3-8B79-37D633B846F1}">
-                <asvg:svgBlip xmlns:asvg="http://schemas.microsoft.com/office/drawing/2016/SVG/main" r:embed="rId15"/>
+                <asvg:svgBlip xmlns:asvg="http://schemas.microsoft.com/office/drawing/2016/SVG/main" r:embed="rId16"/>
               </a:ext>
             </a:extLst>
           </a:blip>
@@ -6607,10 +6541,10 @@
           <p:nvPr/>
         </p:nvPicPr>
         <p:blipFill>
-          <a:blip r:embed="rId16">
+          <a:blip r:embed="rId17">
             <a:extLst>
               <a:ext uri="{96DAC541-7B7A-43D3-8B79-37D633B846F1}">
-                <asvg:svgBlip xmlns:asvg="http://schemas.microsoft.com/office/drawing/2016/SVG/main" r:embed="rId17"/>
+                <asvg:svgBlip xmlns:asvg="http://schemas.microsoft.com/office/drawing/2016/SVG/main" r:embed="rId18"/>
               </a:ext>
             </a:extLst>
           </a:blip>
@@ -6637,10 +6571,10 @@
           <p:nvPr/>
         </p:nvPicPr>
         <p:blipFill>
-          <a:blip r:embed="rId18">
+          <a:blip r:embed="rId19">
             <a:extLst>
               <a:ext uri="{96DAC541-7B7A-43D3-8B79-37D633B846F1}">
-                <asvg:svgBlip xmlns:asvg="http://schemas.microsoft.com/office/drawing/2016/SVG/main" r:embed="rId19"/>
+                <asvg:svgBlip xmlns:asvg="http://schemas.microsoft.com/office/drawing/2016/SVG/main" r:embed="rId20"/>
               </a:ext>
             </a:extLst>
           </a:blip>
@@ -6687,6 +6621,7 @@
           <a:bodyPr wrap="square" rtlCol="0">
             <a:noAutofit/>
           </a:bodyPr>
+          <a:lstStyle/>
           <a:p>
             <a:pPr algn="ctr"/>
             <a:r>
@@ -6696,10 +6631,6 @@
               </a:rPr>
               <a:t>Password</a:t>
             </a:r>
-            <a:endParaRPr lang="en-US" altLang="zh-CN" sz="1600">
-              <a:latin typeface="Times New Roman" panose="02020603050405020304" charset="0"/>
-              <a:cs typeface="Times New Roman" panose="02020603050405020304" charset="0"/>
-            </a:endParaRPr>
           </a:p>
         </p:txBody>
       </p:sp>
@@ -6712,10 +6643,10 @@
           <p:nvPr/>
         </p:nvPicPr>
         <p:blipFill>
-          <a:blip r:embed="rId20">
+          <a:blip r:embed="rId21">
             <a:extLst>
               <a:ext uri="{96DAC541-7B7A-43D3-8B79-37D633B846F1}">
-                <asvg:svgBlip xmlns:asvg="http://schemas.microsoft.com/office/drawing/2016/SVG/main" r:embed="rId21"/>
+                <asvg:svgBlip xmlns:asvg="http://schemas.microsoft.com/office/drawing/2016/SVG/main" r:embed="rId22"/>
               </a:ext>
             </a:extLst>
           </a:blip>
@@ -6742,10 +6673,10 @@
           <p:nvPr/>
         </p:nvPicPr>
         <p:blipFill>
-          <a:blip r:embed="rId22">
+          <a:blip r:embed="rId23">
             <a:extLst>
               <a:ext uri="{96DAC541-7B7A-43D3-8B79-37D633B846F1}">
-                <asvg:svgBlip xmlns:asvg="http://schemas.microsoft.com/office/drawing/2016/SVG/main" r:embed="rId23"/>
+                <asvg:svgBlip xmlns:asvg="http://schemas.microsoft.com/office/drawing/2016/SVG/main" r:embed="rId24"/>
               </a:ext>
             </a:extLst>
           </a:blip>
@@ -6772,10 +6703,10 @@
           <p:nvPr/>
         </p:nvPicPr>
         <p:blipFill>
-          <a:blip r:embed="rId24">
+          <a:blip r:embed="rId25">
             <a:extLst>
               <a:ext uri="{96DAC541-7B7A-43D3-8B79-37D633B846F1}">
-                <asvg:svgBlip xmlns:asvg="http://schemas.microsoft.com/office/drawing/2016/SVG/main" r:embed="rId25"/>
+                <asvg:svgBlip xmlns:asvg="http://schemas.microsoft.com/office/drawing/2016/SVG/main" r:embed="rId26"/>
               </a:ext>
             </a:extLst>
           </a:blip>
@@ -6802,10 +6733,10 @@
           <p:nvPr/>
         </p:nvPicPr>
         <p:blipFill>
-          <a:blip r:embed="rId26">
+          <a:blip r:embed="rId27">
             <a:extLst>
               <a:ext uri="{96DAC541-7B7A-43D3-8B79-37D633B846F1}">
-                <asvg:svgBlip xmlns:asvg="http://schemas.microsoft.com/office/drawing/2016/SVG/main" r:embed="rId27"/>
+                <asvg:svgBlip xmlns:asvg="http://schemas.microsoft.com/office/drawing/2016/SVG/main" r:embed="rId28"/>
               </a:ext>
             </a:extLst>
           </a:blip>
@@ -6832,10 +6763,10 @@
           <p:nvPr/>
         </p:nvPicPr>
         <p:blipFill>
-          <a:blip r:embed="rId28">
+          <a:blip r:embed="rId29">
             <a:extLst>
               <a:ext uri="{96DAC541-7B7A-43D3-8B79-37D633B846F1}">
-                <asvg:svgBlip xmlns:asvg="http://schemas.microsoft.com/office/drawing/2016/SVG/main" r:embed="rId29"/>
+                <asvg:svgBlip xmlns:asvg="http://schemas.microsoft.com/office/drawing/2016/SVG/main" r:embed="rId30"/>
               </a:ext>
             </a:extLst>
           </a:blip>
@@ -6924,13 +6855,13 @@
           <p:nvPr/>
         </p:nvPicPr>
         <p:blipFill>
-          <a:blip r:embed="rId1" cstate="print">
+          <a:blip r:embed="rId2" cstate="print">
             <a:extLst>
               <a:ext uri="{28A0092B-C50C-407E-A947-70E740481C1C}">
                 <a14:useLocalDpi xmlns:a14="http://schemas.microsoft.com/office/drawing/2010/main" val="0"/>
               </a:ext>
               <a:ext uri="{96DAC541-7B7A-43D3-8B79-37D633B846F1}">
-                <asvg:svgBlip xmlns:asvg="http://schemas.microsoft.com/office/drawing/2016/SVG/main" r:embed="rId2"/>
+                <asvg:svgBlip xmlns:asvg="http://schemas.microsoft.com/office/drawing/2016/SVG/main" r:embed="rId3"/>
               </a:ext>
             </a:extLst>
           </a:blip>
@@ -6957,13 +6888,13 @@
           <p:nvPr/>
         </p:nvPicPr>
         <p:blipFill>
-          <a:blip r:embed="rId3" cstate="print">
+          <a:blip r:embed="rId4" cstate="print">
             <a:extLst>
               <a:ext uri="{28A0092B-C50C-407E-A947-70E740481C1C}">
                 <a14:useLocalDpi xmlns:a14="http://schemas.microsoft.com/office/drawing/2010/main" val="0"/>
               </a:ext>
               <a:ext uri="{96DAC541-7B7A-43D3-8B79-37D633B846F1}">
-                <asvg:svgBlip xmlns:asvg="http://schemas.microsoft.com/office/drawing/2016/SVG/main" r:embed="rId4"/>
+                <asvg:svgBlip xmlns:asvg="http://schemas.microsoft.com/office/drawing/2016/SVG/main" r:embed="rId5"/>
               </a:ext>
             </a:extLst>
           </a:blip>
@@ -7037,13 +6968,13 @@
           <p:nvPr/>
         </p:nvPicPr>
         <p:blipFill>
-          <a:blip r:embed="rId5" cstate="print">
+          <a:blip r:embed="rId6" cstate="print">
             <a:extLst>
               <a:ext uri="{28A0092B-C50C-407E-A947-70E740481C1C}">
                 <a14:useLocalDpi xmlns:a14="http://schemas.microsoft.com/office/drawing/2010/main" val="0"/>
               </a:ext>
               <a:ext uri="{96DAC541-7B7A-43D3-8B79-37D633B846F1}">
-                <asvg:svgBlip xmlns:asvg="http://schemas.microsoft.com/office/drawing/2016/SVG/main" r:embed="rId6"/>
+                <asvg:svgBlip xmlns:asvg="http://schemas.microsoft.com/office/drawing/2016/SVG/main" r:embed="rId7"/>
               </a:ext>
             </a:extLst>
           </a:blip>
@@ -7070,13 +7001,13 @@
           <p:nvPr/>
         </p:nvPicPr>
         <p:blipFill>
-          <a:blip r:embed="rId7" cstate="print">
+          <a:blip r:embed="rId8" cstate="print">
             <a:extLst>
               <a:ext uri="{28A0092B-C50C-407E-A947-70E740481C1C}">
                 <a14:useLocalDpi xmlns:a14="http://schemas.microsoft.com/office/drawing/2010/main" val="0"/>
               </a:ext>
               <a:ext uri="{96DAC541-7B7A-43D3-8B79-37D633B846F1}">
-                <asvg:svgBlip xmlns:asvg="http://schemas.microsoft.com/office/drawing/2016/SVG/main" r:embed="rId8"/>
+                <asvg:svgBlip xmlns:asvg="http://schemas.microsoft.com/office/drawing/2016/SVG/main" r:embed="rId9"/>
               </a:ext>
             </a:extLst>
           </a:blip>
@@ -7103,13 +7034,13 @@
           <p:nvPr/>
         </p:nvPicPr>
         <p:blipFill>
-          <a:blip r:embed="rId9" cstate="print">
+          <a:blip r:embed="rId10" cstate="print">
             <a:extLst>
               <a:ext uri="{28A0092B-C50C-407E-A947-70E740481C1C}">
                 <a14:useLocalDpi xmlns:a14="http://schemas.microsoft.com/office/drawing/2010/main" val="0"/>
               </a:ext>
               <a:ext uri="{96DAC541-7B7A-43D3-8B79-37D633B846F1}">
-                <asvg:svgBlip xmlns:asvg="http://schemas.microsoft.com/office/drawing/2016/SVG/main" r:embed="rId10"/>
+                <asvg:svgBlip xmlns:asvg="http://schemas.microsoft.com/office/drawing/2016/SVG/main" r:embed="rId11"/>
               </a:ext>
             </a:extLst>
           </a:blip>
@@ -7136,13 +7067,13 @@
           <p:nvPr/>
         </p:nvPicPr>
         <p:blipFill>
-          <a:blip r:embed="rId11" cstate="print">
+          <a:blip r:embed="rId12" cstate="print">
             <a:extLst>
               <a:ext uri="{28A0092B-C50C-407E-A947-70E740481C1C}">
                 <a14:useLocalDpi xmlns:a14="http://schemas.microsoft.com/office/drawing/2010/main" val="0"/>
               </a:ext>
               <a:ext uri="{96DAC541-7B7A-43D3-8B79-37D633B846F1}">
-                <asvg:svgBlip xmlns:asvg="http://schemas.microsoft.com/office/drawing/2016/SVG/main" r:embed="rId12"/>
+                <asvg:svgBlip xmlns:asvg="http://schemas.microsoft.com/office/drawing/2016/SVG/main" r:embed="rId13"/>
               </a:ext>
             </a:extLst>
           </a:blip>
@@ -7169,13 +7100,13 @@
           <p:nvPr/>
         </p:nvPicPr>
         <p:blipFill>
-          <a:blip r:embed="rId9" cstate="print">
+          <a:blip r:embed="rId10" cstate="print">
             <a:extLst>
               <a:ext uri="{28A0092B-C50C-407E-A947-70E740481C1C}">
                 <a14:useLocalDpi xmlns:a14="http://schemas.microsoft.com/office/drawing/2010/main" val="0"/>
               </a:ext>
               <a:ext uri="{96DAC541-7B7A-43D3-8B79-37D633B846F1}">
-                <asvg:svgBlip xmlns:asvg="http://schemas.microsoft.com/office/drawing/2016/SVG/main" r:embed="rId10"/>
+                <asvg:svgBlip xmlns:asvg="http://schemas.microsoft.com/office/drawing/2016/SVG/main" r:embed="rId11"/>
               </a:ext>
             </a:extLst>
           </a:blip>
@@ -7202,13 +7133,13 @@
           <p:nvPr/>
         </p:nvPicPr>
         <p:blipFill>
-          <a:blip r:embed="rId13" cstate="print">
+          <a:blip r:embed="rId14" cstate="print">
             <a:extLst>
               <a:ext uri="{28A0092B-C50C-407E-A947-70E740481C1C}">
                 <a14:useLocalDpi xmlns:a14="http://schemas.microsoft.com/office/drawing/2010/main" val="0"/>
               </a:ext>
               <a:ext uri="{96DAC541-7B7A-43D3-8B79-37D633B846F1}">
-                <asvg:svgBlip xmlns:asvg="http://schemas.microsoft.com/office/drawing/2016/SVG/main" r:embed="rId14"/>
+                <asvg:svgBlip xmlns:asvg="http://schemas.microsoft.com/office/drawing/2016/SVG/main" r:embed="rId15"/>
               </a:ext>
             </a:extLst>
           </a:blip>
@@ -7571,13 +7502,13 @@
           <p:nvPr/>
         </p:nvPicPr>
         <p:blipFill>
-          <a:blip r:embed="rId15" cstate="print">
+          <a:blip r:embed="rId16" cstate="print">
             <a:extLst>
               <a:ext uri="{28A0092B-C50C-407E-A947-70E740481C1C}">
                 <a14:useLocalDpi xmlns:a14="http://schemas.microsoft.com/office/drawing/2010/main" val="0"/>
               </a:ext>
               <a:ext uri="{96DAC541-7B7A-43D3-8B79-37D633B846F1}">
-                <asvg:svgBlip xmlns:asvg="http://schemas.microsoft.com/office/drawing/2016/SVG/main" r:embed="rId16"/>
+                <asvg:svgBlip xmlns:asvg="http://schemas.microsoft.com/office/drawing/2016/SVG/main" r:embed="rId17"/>
               </a:ext>
             </a:extLst>
           </a:blip>
@@ -7604,13 +7535,13 @@
           <p:nvPr/>
         </p:nvPicPr>
         <p:blipFill>
-          <a:blip r:embed="rId17">
+          <a:blip r:embed="rId18">
             <a:extLst>
               <a:ext uri="{28A0092B-C50C-407E-A947-70E740481C1C}">
                 <a14:useLocalDpi xmlns:a14="http://schemas.microsoft.com/office/drawing/2010/main" val="0"/>
               </a:ext>
               <a:ext uri="{96DAC541-7B7A-43D3-8B79-37D633B846F1}">
-                <asvg:svgBlip xmlns:asvg="http://schemas.microsoft.com/office/drawing/2016/SVG/main" r:embed="rId18"/>
+                <asvg:svgBlip xmlns:asvg="http://schemas.microsoft.com/office/drawing/2016/SVG/main" r:embed="rId19"/>
               </a:ext>
             </a:extLst>
           </a:blip>
@@ -7756,13 +7687,13 @@
           <p:nvPr/>
         </p:nvPicPr>
         <p:blipFill>
-          <a:blip r:embed="rId19" cstate="print">
+          <a:blip r:embed="rId20" cstate="print">
             <a:extLst>
               <a:ext uri="{28A0092B-C50C-407E-A947-70E740481C1C}">
                 <a14:useLocalDpi xmlns:a14="http://schemas.microsoft.com/office/drawing/2010/main" val="0"/>
               </a:ext>
               <a:ext uri="{96DAC541-7B7A-43D3-8B79-37D633B846F1}">
-                <asvg:svgBlip xmlns:asvg="http://schemas.microsoft.com/office/drawing/2016/SVG/main" r:embed="rId20"/>
+                <asvg:svgBlip xmlns:asvg="http://schemas.microsoft.com/office/drawing/2016/SVG/main" r:embed="rId21"/>
               </a:ext>
             </a:extLst>
           </a:blip>
@@ -7797,431 +7728,303 @@
         <p:cNvGrpSpPr/>
         <p:nvPr/>
       </p:nvGrpSpPr>
-      <p:grpSpPr/>
+      <p:grpSpPr>
+        <a:xfrm>
+          <a:off x="0" y="0"/>
+          <a:ext cx="0" cy="0"/>
+          <a:chOff x="0" y="0"/>
+          <a:chExt cx="0" cy="0"/>
+        </a:xfrm>
+      </p:grpSpPr>
       <p:grpSp>
         <p:nvGrpSpPr>
-          <p:cNvPr id="6" name="组合 5"/>
-          <p:cNvGrpSpPr>
-            <a:grpSpLocks noChangeAspect="1"/>
-          </p:cNvGrpSpPr>
+          <p:cNvPr id="13" name="组合 12">
+            <a:extLst>
+              <a:ext uri="{FF2B5EF4-FFF2-40B4-BE49-F238E27FC236}">
+                <a16:creationId xmlns:a16="http://schemas.microsoft.com/office/drawing/2014/main" id="{E42B5694-AC4E-4F24-BF67-CF2A17FEB855}"/>
+              </a:ext>
+            </a:extLst>
+          </p:cNvPr>
+          <p:cNvGrpSpPr/>
           <p:nvPr/>
         </p:nvGrpSpPr>
         <p:grpSpPr>
           <a:xfrm>
-            <a:off x="2790190" y="1517015"/>
-            <a:ext cx="475615" cy="470535"/>
-            <a:chOff x="4445000" y="739632"/>
-            <a:chExt cx="375710" cy="371203"/>
-          </a:xfrm>
-          <a:solidFill>
-            <a:srgbClr val="4A5F7E"/>
-          </a:solidFill>
+            <a:off x="1689782" y="1474779"/>
+            <a:ext cx="2471420" cy="877457"/>
+            <a:chOff x="1689782" y="1474779"/>
+            <a:chExt cx="2471420" cy="877457"/>
+          </a:xfrm>
         </p:grpSpPr>
+        <p:grpSp>
+          <p:nvGrpSpPr>
+            <p:cNvPr id="6" name="组合 5"/>
+            <p:cNvGrpSpPr>
+              <a:grpSpLocks noChangeAspect="1"/>
+            </p:cNvGrpSpPr>
+            <p:nvPr/>
+          </p:nvGrpSpPr>
+          <p:grpSpPr>
+            <a:xfrm>
+              <a:off x="2682287" y="1474779"/>
+              <a:ext cx="475615" cy="470535"/>
+              <a:chOff x="4445000" y="739632"/>
+              <a:chExt cx="375710" cy="371203"/>
+            </a:xfrm>
+            <a:solidFill>
+              <a:srgbClr val="4A5F7E"/>
+            </a:solidFill>
+          </p:grpSpPr>
+          <p:sp>
+            <p:nvSpPr>
+              <p:cNvPr id="10" name="矩形: 圆角 63"/>
+              <p:cNvSpPr/>
+              <p:nvPr/>
+            </p:nvSpPr>
+            <p:spPr>
+              <a:xfrm>
+                <a:off x="4445000" y="740833"/>
+                <a:ext cx="156634" cy="156634"/>
+              </a:xfrm>
+              <a:prstGeom prst="roundRect">
+                <a:avLst/>
+              </a:prstGeom>
+              <a:grpFill/>
+              <a:ln w="38100">
+                <a:solidFill>
+                  <a:srgbClr val="4A5F7E"/>
+                </a:solidFill>
+              </a:ln>
+            </p:spPr>
+            <p:style>
+              <a:lnRef idx="2">
+                <a:schemeClr val="accent1">
+                  <a:shade val="50000"/>
+                </a:schemeClr>
+              </a:lnRef>
+              <a:fillRef idx="1">
+                <a:schemeClr val="accent1"/>
+              </a:fillRef>
+              <a:effectRef idx="0">
+                <a:schemeClr val="accent1"/>
+              </a:effectRef>
+              <a:fontRef idx="minor">
+                <a:schemeClr val="lt1"/>
+              </a:fontRef>
+            </p:style>
+            <p:txBody>
+              <a:bodyPr rtlCol="0" anchor="ctr"/>
+              <a:lstStyle/>
+              <a:p>
+                <a:pPr algn="ctr"/>
+                <a:endParaRPr lang="zh-CN" altLang="en-US">
+                  <a:latin typeface="Times New Roman" panose="02020603050405020304" pitchFamily="18" charset="0"/>
+                  <a:cs typeface="Times New Roman" panose="02020603050405020304" pitchFamily="18" charset="0"/>
+                </a:endParaRPr>
+              </a:p>
+            </p:txBody>
+          </p:sp>
+          <p:sp>
+            <p:nvSpPr>
+              <p:cNvPr id="14" name="矩形: 圆角 64"/>
+              <p:cNvSpPr/>
+              <p:nvPr/>
+            </p:nvSpPr>
+            <p:spPr>
+              <a:xfrm>
+                <a:off x="4445000" y="954201"/>
+                <a:ext cx="156634" cy="156634"/>
+              </a:xfrm>
+              <a:prstGeom prst="roundRect">
+                <a:avLst/>
+              </a:prstGeom>
+              <a:grpFill/>
+              <a:ln w="38100">
+                <a:solidFill>
+                  <a:srgbClr val="4A5F7E"/>
+                </a:solidFill>
+              </a:ln>
+            </p:spPr>
+            <p:style>
+              <a:lnRef idx="2">
+                <a:schemeClr val="accent1">
+                  <a:shade val="50000"/>
+                </a:schemeClr>
+              </a:lnRef>
+              <a:fillRef idx="1">
+                <a:schemeClr val="accent1"/>
+              </a:fillRef>
+              <a:effectRef idx="0">
+                <a:schemeClr val="accent1"/>
+              </a:effectRef>
+              <a:fontRef idx="minor">
+                <a:schemeClr val="lt1"/>
+              </a:fontRef>
+            </p:style>
+            <p:txBody>
+              <a:bodyPr rtlCol="0" anchor="ctr"/>
+              <a:lstStyle/>
+              <a:p>
+                <a:pPr algn="ctr"/>
+                <a:endParaRPr lang="zh-CN" altLang="en-US">
+                  <a:latin typeface="Times New Roman" panose="02020603050405020304" pitchFamily="18" charset="0"/>
+                  <a:cs typeface="Times New Roman" panose="02020603050405020304" pitchFamily="18" charset="0"/>
+                </a:endParaRPr>
+              </a:p>
+            </p:txBody>
+          </p:sp>
+          <p:sp>
+            <p:nvSpPr>
+              <p:cNvPr id="18" name="矩形: 圆角 65"/>
+              <p:cNvSpPr/>
+              <p:nvPr/>
+            </p:nvSpPr>
+            <p:spPr>
+              <a:xfrm rot="1800000">
+                <a:off x="4672028" y="739632"/>
+                <a:ext cx="145198" cy="138592"/>
+              </a:xfrm>
+              <a:prstGeom prst="roundRect">
+                <a:avLst/>
+              </a:prstGeom>
+              <a:noFill/>
+              <a:ln w="57150">
+                <a:solidFill>
+                  <a:srgbClr val="4A5F7E"/>
+                </a:solidFill>
+              </a:ln>
+              <a:extLst>
+                <a:ext uri="{909E8E84-426E-40DD-AFC4-6F175D3DCCD1}">
+                  <a14:hiddenFill xmlns:a14="http://schemas.microsoft.com/office/drawing/2010/main">
+                    <a:grpFill/>
+                  </a14:hiddenFill>
+                </a:ext>
+              </a:extLst>
+            </p:spPr>
+            <p:style>
+              <a:lnRef idx="2">
+                <a:schemeClr val="accent1">
+                  <a:shade val="50000"/>
+                </a:schemeClr>
+              </a:lnRef>
+              <a:fillRef idx="1">
+                <a:schemeClr val="accent1"/>
+              </a:fillRef>
+              <a:effectRef idx="0">
+                <a:schemeClr val="accent1"/>
+              </a:effectRef>
+              <a:fontRef idx="minor">
+                <a:schemeClr val="lt1"/>
+              </a:fontRef>
+            </p:style>
+            <p:txBody>
+              <a:bodyPr rtlCol="0" anchor="ctr"/>
+              <a:lstStyle/>
+              <a:p>
+                <a:pPr algn="ctr"/>
+                <a:endParaRPr lang="zh-CN" altLang="en-US">
+                  <a:latin typeface="Times New Roman" panose="02020603050405020304" pitchFamily="18" charset="0"/>
+                  <a:cs typeface="Times New Roman" panose="02020603050405020304" pitchFamily="18" charset="0"/>
+                </a:endParaRPr>
+              </a:p>
+            </p:txBody>
+          </p:sp>
+          <p:sp>
+            <p:nvSpPr>
+              <p:cNvPr id="20" name="矩形: 圆角 66"/>
+              <p:cNvSpPr/>
+              <p:nvPr/>
+            </p:nvSpPr>
+            <p:spPr>
+              <a:xfrm>
+                <a:off x="4664075" y="954201"/>
+                <a:ext cx="156635" cy="156634"/>
+              </a:xfrm>
+              <a:prstGeom prst="roundRect">
+                <a:avLst/>
+              </a:prstGeom>
+              <a:grpFill/>
+              <a:ln w="38100">
+                <a:solidFill>
+                  <a:srgbClr val="4A5F7E"/>
+                </a:solidFill>
+              </a:ln>
+            </p:spPr>
+            <p:style>
+              <a:lnRef idx="2">
+                <a:schemeClr val="accent1">
+                  <a:shade val="50000"/>
+                </a:schemeClr>
+              </a:lnRef>
+              <a:fillRef idx="1">
+                <a:schemeClr val="accent1"/>
+              </a:fillRef>
+              <a:effectRef idx="0">
+                <a:schemeClr val="accent1"/>
+              </a:effectRef>
+              <a:fontRef idx="minor">
+                <a:schemeClr val="lt1"/>
+              </a:fontRef>
+            </p:style>
+            <p:txBody>
+              <a:bodyPr rtlCol="0" anchor="ctr"/>
+              <a:lstStyle/>
+              <a:p>
+                <a:pPr algn="ctr"/>
+                <a:endParaRPr lang="zh-CN" altLang="en-US">
+                  <a:latin typeface="Times New Roman" panose="02020603050405020304" pitchFamily="18" charset="0"/>
+                  <a:cs typeface="Times New Roman" panose="02020603050405020304" pitchFamily="18" charset="0"/>
+                </a:endParaRPr>
+              </a:p>
+            </p:txBody>
+          </p:sp>
+        </p:grpSp>
         <p:sp>
           <p:nvSpPr>
-            <p:cNvPr id="10" name="矩形: 圆角 63"/>
-            <p:cNvSpPr/>
+            <p:cNvPr id="21" name="文本框 20"/>
+            <p:cNvSpPr txBox="1"/>
             <p:nvPr/>
           </p:nvSpPr>
           <p:spPr>
             <a:xfrm>
-              <a:off x="4445000" y="740833"/>
-              <a:ext cx="156634" cy="156634"/>
+              <a:off x="1689782" y="1979491"/>
+              <a:ext cx="2471420" cy="372745"/>
             </a:xfrm>
-            <a:prstGeom prst="roundRect">
+            <a:prstGeom prst="rect">
               <a:avLst/>
             </a:prstGeom>
-            <a:grpFill/>
-            <a:ln w="38100">
-              <a:solidFill>
-                <a:srgbClr val="4A5F7E"/>
-              </a:solidFill>
-            </a:ln>
+            <a:noFill/>
           </p:spPr>
-          <p:style>
-            <a:lnRef idx="2">
-              <a:schemeClr val="accent1">
-                <a:shade val="50000"/>
-              </a:schemeClr>
-            </a:lnRef>
-            <a:fillRef idx="1">
-              <a:schemeClr val="accent1"/>
-            </a:fillRef>
-            <a:effectRef idx="0">
-              <a:schemeClr val="accent1"/>
-            </a:effectRef>
-            <a:fontRef idx="minor">
-              <a:schemeClr val="lt1"/>
-            </a:fontRef>
-          </p:style>
           <p:txBody>
-            <a:bodyPr rtlCol="0" anchor="ctr"/>
+            <a:bodyPr wrap="square" rtlCol="0">
+              <a:noAutofit/>
+            </a:bodyPr>
             <a:lstStyle/>
             <a:p>
               <a:pPr algn="ctr"/>
-              <a:endParaRPr lang="zh-CN" altLang="en-US" sz="1200">
-                <a:latin typeface="Times New Roman" panose="02020603050405020304" charset="0"/>
-                <a:cs typeface="Times New Roman" panose="02020603050405020304" charset="0"/>
-              </a:endParaRPr>
-            </a:p>
-          </p:txBody>
-        </p:sp>
-        <p:sp>
-          <p:nvSpPr>
-            <p:cNvPr id="14" name="矩形: 圆角 64"/>
-            <p:cNvSpPr/>
-            <p:nvPr/>
-          </p:nvSpPr>
-          <p:spPr>
-            <a:xfrm>
-              <a:off x="4445000" y="954201"/>
-              <a:ext cx="156634" cy="156634"/>
-            </a:xfrm>
-            <a:prstGeom prst="roundRect">
-              <a:avLst/>
-            </a:prstGeom>
-            <a:grpFill/>
-            <a:ln w="38100">
-              <a:solidFill>
-                <a:srgbClr val="4A5F7E"/>
-              </a:solidFill>
-            </a:ln>
-          </p:spPr>
-          <p:style>
-            <a:lnRef idx="2">
-              <a:schemeClr val="accent1">
-                <a:shade val="50000"/>
-              </a:schemeClr>
-            </a:lnRef>
-            <a:fillRef idx="1">
-              <a:schemeClr val="accent1"/>
-            </a:fillRef>
-            <a:effectRef idx="0">
-              <a:schemeClr val="accent1"/>
-            </a:effectRef>
-            <a:fontRef idx="minor">
-              <a:schemeClr val="lt1"/>
-            </a:fontRef>
-          </p:style>
-          <p:txBody>
-            <a:bodyPr rtlCol="0" anchor="ctr"/>
-            <a:lstStyle/>
-            <a:p>
-              <a:pPr algn="ctr"/>
-              <a:endParaRPr lang="zh-CN" altLang="en-US" sz="1200">
-                <a:latin typeface="Times New Roman" panose="02020603050405020304" charset="0"/>
-                <a:cs typeface="Times New Roman" panose="02020603050405020304" charset="0"/>
-              </a:endParaRPr>
-            </a:p>
-          </p:txBody>
-        </p:sp>
-        <p:sp>
-          <p:nvSpPr>
-            <p:cNvPr id="18" name="矩形: 圆角 65"/>
-            <p:cNvSpPr/>
-            <p:nvPr/>
-          </p:nvSpPr>
-          <p:spPr>
-            <a:xfrm rot="1800000">
-              <a:off x="4672028" y="739632"/>
-              <a:ext cx="145198" cy="138592"/>
-            </a:xfrm>
-            <a:prstGeom prst="roundRect">
-              <a:avLst/>
-            </a:prstGeom>
-            <a:noFill/>
-            <a:ln w="57150">
-              <a:solidFill>
-                <a:srgbClr val="4A5F7E"/>
-              </a:solidFill>
-            </a:ln>
-            <a:extLst>
-              <a:ext uri="{909E8E84-426E-40DD-AFC4-6F175D3DCCD1}">
-                <a14:hiddenFill xmlns:a14="http://schemas.microsoft.com/office/drawing/2010/main">
-                  <a:grpFill/>
-                </a14:hiddenFill>
-              </a:ext>
-            </a:extLst>
-          </p:spPr>
-          <p:style>
-            <a:lnRef idx="2">
-              <a:schemeClr val="accent1">
-                <a:shade val="50000"/>
-              </a:schemeClr>
-            </a:lnRef>
-            <a:fillRef idx="1">
-              <a:schemeClr val="accent1"/>
-            </a:fillRef>
-            <a:effectRef idx="0">
-              <a:schemeClr val="accent1"/>
-            </a:effectRef>
-            <a:fontRef idx="minor">
-              <a:schemeClr val="lt1"/>
-            </a:fontRef>
-          </p:style>
-          <p:txBody>
-            <a:bodyPr rtlCol="0" anchor="ctr"/>
-            <a:lstStyle/>
-            <a:p>
-              <a:pPr algn="ctr"/>
-              <a:endParaRPr lang="zh-CN" altLang="en-US" sz="1200">
-                <a:latin typeface="Times New Roman" panose="02020603050405020304" charset="0"/>
-                <a:cs typeface="Times New Roman" panose="02020603050405020304" charset="0"/>
-              </a:endParaRPr>
-            </a:p>
-          </p:txBody>
-        </p:sp>
-        <p:sp>
-          <p:nvSpPr>
-            <p:cNvPr id="20" name="矩形: 圆角 66"/>
-            <p:cNvSpPr/>
-            <p:nvPr/>
-          </p:nvSpPr>
-          <p:spPr>
-            <a:xfrm>
-              <a:off x="4664075" y="954201"/>
-              <a:ext cx="156635" cy="156634"/>
-            </a:xfrm>
-            <a:prstGeom prst="roundRect">
-              <a:avLst/>
-            </a:prstGeom>
-            <a:grpFill/>
-            <a:ln w="38100">
-              <a:solidFill>
-                <a:srgbClr val="4A5F7E"/>
-              </a:solidFill>
-            </a:ln>
-          </p:spPr>
-          <p:style>
-            <a:lnRef idx="2">
-              <a:schemeClr val="accent1">
-                <a:shade val="50000"/>
-              </a:schemeClr>
-            </a:lnRef>
-            <a:fillRef idx="1">
-              <a:schemeClr val="accent1"/>
-            </a:fillRef>
-            <a:effectRef idx="0">
-              <a:schemeClr val="accent1"/>
-            </a:effectRef>
-            <a:fontRef idx="minor">
-              <a:schemeClr val="lt1"/>
-            </a:fontRef>
-          </p:style>
-          <p:txBody>
-            <a:bodyPr rtlCol="0" anchor="ctr"/>
-            <a:lstStyle/>
-            <a:p>
-              <a:pPr algn="ctr"/>
-              <a:endParaRPr lang="zh-CN" altLang="en-US" sz="1200">
-                <a:latin typeface="Times New Roman" panose="02020603050405020304" charset="0"/>
-                <a:cs typeface="Times New Roman" panose="02020603050405020304" charset="0"/>
-              </a:endParaRPr>
+              <a:r>
+                <a:rPr lang="en-US" altLang="zh-CN" dirty="0">
+                  <a:latin typeface="Times New Roman" panose="02020603050405020304" pitchFamily="18" charset="0"/>
+                  <a:cs typeface="Times New Roman" panose="02020603050405020304" pitchFamily="18" charset="0"/>
+                </a:rPr>
+                <a:t>Merchant Application</a:t>
+              </a:r>
             </a:p>
           </p:txBody>
         </p:sp>
       </p:grpSp>
-      <p:sp>
-        <p:nvSpPr>
-          <p:cNvPr id="21" name="文本框 20"/>
-          <p:cNvSpPr txBox="1"/>
-          <p:nvPr/>
-        </p:nvSpPr>
-        <p:spPr>
-          <a:xfrm>
-            <a:off x="1797685" y="1998980"/>
-            <a:ext cx="2471420" cy="372745"/>
-          </a:xfrm>
-          <a:prstGeom prst="rect">
-            <a:avLst/>
-          </a:prstGeom>
-          <a:noFill/>
-        </p:spPr>
-        <p:txBody>
-          <a:bodyPr wrap="square" rtlCol="0">
-            <a:noAutofit/>
-          </a:bodyPr>
-          <a:p>
-            <a:pPr algn="ctr"/>
-            <a:r>
-              <a:rPr lang="en-US" altLang="zh-CN" sz="1200">
-                <a:latin typeface="Times New Roman" panose="02020603050405020304" charset="0"/>
-                <a:cs typeface="Times New Roman" panose="02020603050405020304" charset="0"/>
-              </a:rPr>
-              <a:t>Merchant Application</a:t>
-            </a:r>
-            <a:endParaRPr lang="en-US" altLang="zh-CN" sz="1200">
-              <a:latin typeface="Times New Roman" panose="02020603050405020304" charset="0"/>
-              <a:cs typeface="Times New Roman" panose="02020603050405020304" charset="0"/>
-            </a:endParaRPr>
-          </a:p>
-        </p:txBody>
-      </p:sp>
-      <p:pic>
-        <p:nvPicPr>
-          <p:cNvPr id="25" name="图形 11"/>
-          <p:cNvPicPr>
-            <a:picLocks noChangeAspect="1"/>
-          </p:cNvPicPr>
-          <p:nvPr/>
-        </p:nvPicPr>
-        <p:blipFill>
-          <a:blip r:embed="rId1" cstate="print">
-            <a:extLst>
-              <a:ext uri="{28A0092B-C50C-407E-A947-70E740481C1C}">
-                <a14:useLocalDpi xmlns:a14="http://schemas.microsoft.com/office/drawing/2010/main" val="0"/>
-              </a:ext>
-              <a:ext uri="{96DAC541-7B7A-43D3-8B79-37D633B846F1}">
-                <asvg:svgBlip xmlns:asvg="http://schemas.microsoft.com/office/drawing/2016/SVG/main" r:embed="rId2"/>
-              </a:ext>
-            </a:extLst>
-          </a:blip>
-          <a:stretch>
-            <a:fillRect/>
-          </a:stretch>
-        </p:blipFill>
-        <p:spPr>
-          <a:xfrm>
-            <a:off x="8262435" y="1413546"/>
-            <a:ext cx="720000" cy="720000"/>
-          </a:xfrm>
-          <a:prstGeom prst="rect">
-            <a:avLst/>
-          </a:prstGeom>
-        </p:spPr>
-      </p:pic>
-      <p:sp>
-        <p:nvSpPr>
-          <p:cNvPr id="28" name="文本框 27"/>
-          <p:cNvSpPr txBox="1"/>
-          <p:nvPr/>
-        </p:nvSpPr>
-        <p:spPr>
-          <a:xfrm>
-            <a:off x="7382510" y="1993265"/>
-            <a:ext cx="2471420" cy="380365"/>
-          </a:xfrm>
-          <a:prstGeom prst="rect">
-            <a:avLst/>
-          </a:prstGeom>
-          <a:noFill/>
-        </p:spPr>
-        <p:txBody>
-          <a:bodyPr wrap="square" rtlCol="0">
-            <a:noAutofit/>
-          </a:bodyPr>
-          <a:p>
-            <a:pPr algn="ctr"/>
-            <a:r>
-              <a:rPr lang="en-US" altLang="zh-CN" sz="1200">
-                <a:latin typeface="Times New Roman" panose="02020603050405020304" charset="0"/>
-                <a:cs typeface="Times New Roman" panose="02020603050405020304" charset="0"/>
-              </a:rPr>
-              <a:t>Payment Application</a:t>
-            </a:r>
-            <a:endParaRPr lang="en-US" altLang="zh-CN" sz="1200">
-              <a:latin typeface="Times New Roman" panose="02020603050405020304" charset="0"/>
-              <a:cs typeface="Times New Roman" panose="02020603050405020304" charset="0"/>
-            </a:endParaRPr>
-          </a:p>
-        </p:txBody>
-      </p:sp>
-      <p:sp>
-        <p:nvSpPr>
-          <p:cNvPr id="29" name="矩形 28"/>
-          <p:cNvSpPr/>
-          <p:nvPr/>
-        </p:nvSpPr>
-        <p:spPr>
-          <a:xfrm>
-            <a:off x="2943225" y="2381250"/>
-            <a:ext cx="179705" cy="961200"/>
-          </a:xfrm>
-          <a:prstGeom prst="rect">
-            <a:avLst/>
-          </a:prstGeom>
-          <a:solidFill>
-            <a:srgbClr val="4A5F7E"/>
-          </a:solidFill>
-          <a:ln>
-            <a:solidFill>
-              <a:srgbClr val="4A5F7E"/>
-            </a:solidFill>
-          </a:ln>
-        </p:spPr>
-        <p:style>
-          <a:lnRef idx="2">
-            <a:schemeClr val="accent1">
-              <a:lumMod val="75000"/>
-            </a:schemeClr>
-          </a:lnRef>
-          <a:fillRef idx="1">
-            <a:schemeClr val="accent1"/>
-          </a:fillRef>
-          <a:effectRef idx="0">
-            <a:srgbClr val="FFFFFF"/>
-          </a:effectRef>
-          <a:fontRef idx="minor">
-            <a:schemeClr val="lt1"/>
-          </a:fontRef>
-        </p:style>
-        <p:txBody>
-          <a:bodyPr rtlCol="0" anchor="ctr"/>
-          <a:p>
-            <a:pPr algn="ctr"/>
-            <a:endParaRPr lang="zh-CN" altLang="en-US" sz="1200">
-              <a:latin typeface="Times New Roman" panose="02020603050405020304" charset="0"/>
-              <a:cs typeface="Times New Roman" panose="02020603050405020304" charset="0"/>
-            </a:endParaRPr>
-          </a:p>
-        </p:txBody>
-      </p:sp>
-      <p:sp>
-        <p:nvSpPr>
-          <p:cNvPr id="30" name="文本框 29"/>
-          <p:cNvSpPr txBox="1"/>
-          <p:nvPr/>
-        </p:nvSpPr>
-        <p:spPr>
-          <a:xfrm>
-            <a:off x="4470400" y="2016125"/>
-            <a:ext cx="2471420" cy="250825"/>
-          </a:xfrm>
-          <a:prstGeom prst="rect">
-            <a:avLst/>
-          </a:prstGeom>
-          <a:noFill/>
-        </p:spPr>
-        <p:txBody>
-          <a:bodyPr wrap="square" rtlCol="0">
-            <a:noAutofit/>
-          </a:bodyPr>
-          <a:p>
-            <a:pPr algn="ctr"/>
-            <a:r>
-              <a:rPr lang="en-US" altLang="zh-CN" sz="1200">
-                <a:latin typeface="Times New Roman" panose="02020603050405020304" charset="0"/>
-                <a:cs typeface="Times New Roman" panose="02020603050405020304" charset="0"/>
-              </a:rPr>
-              <a:t>Malicious Application </a:t>
-            </a:r>
-            <a:endParaRPr lang="en-US" altLang="zh-CN" sz="1200">
-              <a:latin typeface="Times New Roman" panose="02020603050405020304" charset="0"/>
-              <a:cs typeface="Times New Roman" panose="02020603050405020304" charset="0"/>
-            </a:endParaRPr>
-          </a:p>
-        </p:txBody>
-      </p:sp>
       <p:cxnSp>
         <p:nvCxnSpPr>
           <p:cNvPr id="32" name="直接箭头连接符 31"/>
-          <p:cNvCxnSpPr/>
+          <p:cNvCxnSpPr>
+            <a:cxnSpLocks/>
+          </p:cNvCxnSpPr>
           <p:nvPr/>
         </p:nvCxnSpPr>
         <p:spPr>
           <a:xfrm>
-            <a:off x="3124835" y="2684780"/>
-            <a:ext cx="2494800" cy="0"/>
+            <a:off x="3019431" y="2833368"/>
+            <a:ext cx="2768741" cy="0"/>
           </a:xfrm>
           <a:prstGeom prst="straightConnector1">
             <a:avLst/>
@@ -8248,79 +8051,104 @@
           </a:fontRef>
         </p:style>
       </p:cxnSp>
-      <p:cxnSp>
-        <p:nvCxnSpPr>
-          <p:cNvPr id="34" name="直接箭头连接符 33"/>
-          <p:cNvCxnSpPr/>
-          <p:nvPr/>
-        </p:nvCxnSpPr>
-        <p:spPr>
-          <a:xfrm flipV="1">
-            <a:off x="3124835" y="4549775"/>
-            <a:ext cx="2358390" cy="0"/>
-          </a:xfrm>
-          <a:prstGeom prst="straightConnector1">
-            <a:avLst/>
-          </a:prstGeom>
-          <a:ln w="38100">
-            <a:solidFill>
+      <p:grpSp>
+        <p:nvGrpSpPr>
+          <p:cNvPr id="5" name="组合 4">
+            <a:extLst>
+              <a:ext uri="{FF2B5EF4-FFF2-40B4-BE49-F238E27FC236}">
+                <a16:creationId xmlns:a16="http://schemas.microsoft.com/office/drawing/2014/main" id="{41B01B08-88FD-4404-9085-7776476DC072}"/>
+              </a:ext>
+            </a:extLst>
+          </p:cNvPr>
+          <p:cNvGrpSpPr/>
+          <p:nvPr/>
+        </p:nvGrpSpPr>
+        <p:grpSpPr>
+          <a:xfrm>
+            <a:off x="3016931" y="4776260"/>
+            <a:ext cx="2651800" cy="106874"/>
+            <a:chOff x="3016932" y="4674660"/>
+            <a:chExt cx="2366890" cy="102445"/>
+          </a:xfrm>
+        </p:grpSpPr>
+        <p:cxnSp>
+          <p:nvCxnSpPr>
+            <p:cNvPr id="34" name="直接箭头连接符 33"/>
+            <p:cNvCxnSpPr>
+              <a:cxnSpLocks/>
+            </p:cNvCxnSpPr>
+            <p:nvPr/>
+          </p:nvCxnSpPr>
+          <p:spPr>
+            <a:xfrm flipV="1">
+              <a:off x="3016932" y="4674660"/>
+              <a:ext cx="2358390" cy="0"/>
+            </a:xfrm>
+            <a:prstGeom prst="straightConnector1">
+              <a:avLst/>
+            </a:prstGeom>
+            <a:ln w="38100">
+              <a:solidFill>
+                <a:schemeClr val="tx1"/>
+              </a:solidFill>
+              <a:headEnd type="triangle"/>
+              <a:tailEnd type="none"/>
+            </a:ln>
+          </p:spPr>
+          <p:style>
+            <a:lnRef idx="2">
+              <a:schemeClr val="accent1"/>
+            </a:lnRef>
+            <a:fillRef idx="0">
+              <a:srgbClr val="FFFFFF"/>
+            </a:fillRef>
+            <a:effectRef idx="0">
+              <a:srgbClr val="FFFFFF"/>
+            </a:effectRef>
+            <a:fontRef idx="minor">
               <a:schemeClr val="tx1"/>
-            </a:solidFill>
-            <a:headEnd type="triangle"/>
-            <a:tailEnd type="none"/>
-          </a:ln>
-        </p:spPr>
-        <p:style>
-          <a:lnRef idx="2">
-            <a:schemeClr val="accent1"/>
-          </a:lnRef>
-          <a:fillRef idx="0">
-            <a:srgbClr val="FFFFFF"/>
-          </a:fillRef>
-          <a:effectRef idx="0">
-            <a:srgbClr val="FFFFFF"/>
-          </a:effectRef>
-          <a:fontRef idx="minor">
-            <a:schemeClr val="tx1"/>
-          </a:fontRef>
-        </p:style>
-      </p:cxnSp>
-      <p:cxnSp>
-        <p:nvCxnSpPr>
-          <p:cNvPr id="36" name="直接箭头连接符 35"/>
-          <p:cNvCxnSpPr/>
-          <p:nvPr/>
-        </p:nvCxnSpPr>
-        <p:spPr>
-          <a:xfrm>
-            <a:off x="3133725" y="4777105"/>
-            <a:ext cx="2358000" cy="0"/>
-          </a:xfrm>
-          <a:prstGeom prst="straightConnector1">
-            <a:avLst/>
-          </a:prstGeom>
-          <a:ln w="38100">
-            <a:solidFill>
+            </a:fontRef>
+          </p:style>
+        </p:cxnSp>
+        <p:cxnSp>
+          <p:nvCxnSpPr>
+            <p:cNvPr id="36" name="直接箭头连接符 35"/>
+            <p:cNvCxnSpPr>
+              <a:cxnSpLocks/>
+            </p:cNvCxnSpPr>
+            <p:nvPr/>
+          </p:nvCxnSpPr>
+          <p:spPr>
+            <a:xfrm>
+              <a:off x="3025822" y="4777105"/>
+              <a:ext cx="2358000" cy="0"/>
+            </a:xfrm>
+            <a:prstGeom prst="straightConnector1">
+              <a:avLst/>
+            </a:prstGeom>
+            <a:ln w="38100">
+              <a:solidFill>
+                <a:schemeClr val="tx1"/>
+              </a:solidFill>
+              <a:tailEnd type="triangle"/>
+            </a:ln>
+          </p:spPr>
+          <p:style>
+            <a:lnRef idx="2">
+              <a:schemeClr val="accent1"/>
+            </a:lnRef>
+            <a:fillRef idx="0">
+              <a:srgbClr val="FFFFFF"/>
+            </a:fillRef>
+            <a:effectRef idx="0">
+              <a:srgbClr val="FFFFFF"/>
+            </a:effectRef>
+            <a:fontRef idx="minor">
               <a:schemeClr val="tx1"/>
-            </a:solidFill>
-            <a:tailEnd type="triangle"/>
-          </a:ln>
-        </p:spPr>
-        <p:style>
-          <a:lnRef idx="2">
-            <a:schemeClr val="accent1"/>
-          </a:lnRef>
-          <a:fillRef idx="0">
-            <a:srgbClr val="FFFFFF"/>
-          </a:fillRef>
-          <a:effectRef idx="0">
-            <a:srgbClr val="FFFFFF"/>
-          </a:effectRef>
-          <a:fontRef idx="minor">
-            <a:schemeClr val="tx1"/>
-          </a:fontRef>
-        </p:style>
-      </p:cxnSp>
+            </a:fontRef>
+          </p:style>
+        </p:cxnSp>
+      </p:grpSp>
       <p:sp>
         <p:nvSpPr>
           <p:cNvPr id="38" name="文本框 37"/>
@@ -8329,8 +8157,8 @@
         </p:nvSpPr>
         <p:spPr>
           <a:xfrm>
-            <a:off x="2827655" y="2395855"/>
-            <a:ext cx="2459990" cy="272415"/>
+            <a:off x="2923488" y="2487293"/>
+            <a:ext cx="2772000" cy="272415"/>
           </a:xfrm>
           <a:prstGeom prst="rect">
             <a:avLst/>
@@ -8341,35 +8169,29 @@
           <a:bodyPr wrap="square" rtlCol="0">
             <a:noAutofit/>
           </a:bodyPr>
+          <a:lstStyle/>
           <a:p>
             <a:pPr algn="ctr"/>
             <a:r>
-              <a:rPr lang="en-US" altLang="zh-CN" sz="1200" b="1">
+              <a:rPr lang="en-US" altLang="zh-CN" sz="1600" b="1" dirty="0">
                 <a:solidFill>
                   <a:schemeClr val="tx1"/>
                 </a:solidFill>
-                <a:latin typeface="Times New Roman" panose="02020603050405020304" charset="0"/>
-                <a:cs typeface="Times New Roman" panose="02020603050405020304" charset="0"/>
+                <a:latin typeface="Times New Roman" panose="02020603050405020304" pitchFamily="18" charset="0"/>
+                <a:cs typeface="Times New Roman" panose="02020603050405020304" pitchFamily="18" charset="0"/>
               </a:rPr>
               <a:t>Step1. </a:t>
             </a:r>
             <a:r>
-              <a:rPr lang="en-US" altLang="zh-CN" sz="1200">
+              <a:rPr lang="en-US" altLang="zh-CN" sz="1600" dirty="0">
                 <a:solidFill>
                   <a:schemeClr val="tx1"/>
                 </a:solidFill>
-                <a:latin typeface="Times New Roman" panose="02020603050405020304" charset="0"/>
-                <a:cs typeface="Times New Roman" panose="02020603050405020304" charset="0"/>
+                <a:latin typeface="Times New Roman" panose="02020603050405020304" pitchFamily="18" charset="0"/>
+                <a:cs typeface="Times New Roman" panose="02020603050405020304" pitchFamily="18" charset="0"/>
               </a:rPr>
-              <a:t>Send payment intent</a:t>
+              <a:t>Send payment Intent</a:t>
             </a:r>
-            <a:endParaRPr lang="en-US" altLang="zh-CN" sz="1200">
-              <a:solidFill>
-                <a:schemeClr val="tx1"/>
-              </a:solidFill>
-              <a:latin typeface="Times New Roman" panose="02020603050405020304" charset="0"/>
-              <a:cs typeface="Times New Roman" panose="02020603050405020304" charset="0"/>
-            </a:endParaRPr>
           </a:p>
         </p:txBody>
       </p:sp>
@@ -8381,8 +8203,8 @@
         </p:nvSpPr>
         <p:spPr>
           <a:xfrm>
-            <a:off x="3053080" y="4262755"/>
-            <a:ext cx="2170430" cy="269240"/>
+            <a:off x="3024551" y="4422205"/>
+            <a:ext cx="2693623" cy="269240"/>
           </a:xfrm>
           <a:prstGeom prst="rect">
             <a:avLst/>
@@ -8393,26 +8215,23 @@
           <a:bodyPr wrap="square" rtlCol="0">
             <a:noAutofit/>
           </a:bodyPr>
+          <a:lstStyle/>
           <a:p>
             <a:pPr algn="ctr"/>
             <a:r>
-              <a:rPr lang="en-US" altLang="zh-CN" sz="1200" b="1">
-                <a:latin typeface="Times New Roman" panose="02020603050405020304" charset="0"/>
-                <a:cs typeface="Times New Roman" panose="02020603050405020304" charset="0"/>
+              <a:rPr lang="en-US" altLang="zh-CN" sz="1600" b="1" dirty="0">
+                <a:latin typeface="Times New Roman" panose="02020603050405020304" pitchFamily="18" charset="0"/>
+                <a:cs typeface="Times New Roman" panose="02020603050405020304" pitchFamily="18" charset="0"/>
               </a:rPr>
               <a:t>Step3. </a:t>
             </a:r>
             <a:r>
-              <a:rPr lang="en-US" altLang="zh-CN" sz="1200">
-                <a:latin typeface="Times New Roman" panose="02020603050405020304" charset="0"/>
-                <a:cs typeface="Times New Roman" panose="02020603050405020304" charset="0"/>
+              <a:rPr lang="en-US" altLang="zh-CN" sz="1600" dirty="0">
+                <a:latin typeface="Times New Roman" panose="02020603050405020304" pitchFamily="18" charset="0"/>
+                <a:cs typeface="Times New Roman" panose="02020603050405020304" pitchFamily="18" charset="0"/>
               </a:rPr>
               <a:t>Construct order request</a:t>
             </a:r>
-            <a:endParaRPr lang="en-US" altLang="zh-CN" sz="1200">
-              <a:latin typeface="Times New Roman" panose="02020603050405020304" charset="0"/>
-              <a:cs typeface="Times New Roman" panose="02020603050405020304" charset="0"/>
-            </a:endParaRPr>
           </a:p>
         </p:txBody>
       </p:sp>
@@ -8424,7 +8243,7 @@
         </p:nvCxnSpPr>
         <p:spPr>
           <a:xfrm flipV="1">
-            <a:off x="5894070" y="5005070"/>
+            <a:off x="5894070" y="4817745"/>
             <a:ext cx="2523600" cy="0"/>
           </a:xfrm>
           <a:prstGeom prst="straightConnector1">
@@ -8460,8 +8279,8 @@
         </p:nvSpPr>
         <p:spPr>
           <a:xfrm>
-            <a:off x="6167755" y="4714875"/>
-            <a:ext cx="2203450" cy="270000"/>
+            <a:off x="6476485" y="4221175"/>
+            <a:ext cx="1643019" cy="542349"/>
           </a:xfrm>
           <a:prstGeom prst="rect">
             <a:avLst/>
@@ -8472,261 +8291,36 @@
           <a:bodyPr wrap="square" rtlCol="0">
             <a:noAutofit/>
           </a:bodyPr>
+          <a:lstStyle/>
           <a:p>
             <a:pPr algn="ctr"/>
             <a:r>
-              <a:rPr lang="en-US" altLang="zh-CN" sz="1200" b="1">
-                <a:latin typeface="Times New Roman" panose="02020603050405020304" charset="0"/>
-                <a:cs typeface="Times New Roman" panose="02020603050405020304" charset="0"/>
+              <a:rPr lang="en-US" altLang="zh-CN" sz="1600" b="1" dirty="0">
+                <a:latin typeface="Times New Roman" panose="02020603050405020304" pitchFamily="18" charset="0"/>
+                <a:cs typeface="Times New Roman" panose="02020603050405020304" pitchFamily="18" charset="0"/>
               </a:rPr>
               <a:t>Step4. </a:t>
             </a:r>
             <a:r>
-              <a:rPr lang="en-US" altLang="zh-CN" sz="1200">
-                <a:latin typeface="Times New Roman" panose="02020603050405020304" charset="0"/>
-                <a:cs typeface="Times New Roman" panose="02020603050405020304" charset="0"/>
+              <a:rPr lang="en-US" altLang="zh-CN" sz="1600" dirty="0">
+                <a:latin typeface="Times New Roman" panose="02020603050405020304" pitchFamily="18" charset="0"/>
+                <a:cs typeface="Times New Roman" panose="02020603050405020304" pitchFamily="18" charset="0"/>
               </a:rPr>
-              <a:t>Relay tampered request</a:t>
+              <a:t>Relay </a:t>
             </a:r>
-            <a:endParaRPr lang="en-US" altLang="zh-CN" sz="1200">
-              <a:latin typeface="Times New Roman" panose="02020603050405020304" charset="0"/>
-              <a:cs typeface="Times New Roman" panose="02020603050405020304" charset="0"/>
-            </a:endParaRPr>
+          </a:p>
+          <a:p>
+            <a:pPr algn="ctr"/>
+            <a:r>
+              <a:rPr lang="en-US" altLang="zh-CN" sz="1600" dirty="0">
+                <a:latin typeface="Times New Roman" panose="02020603050405020304" pitchFamily="18" charset="0"/>
+                <a:cs typeface="Times New Roman" panose="02020603050405020304" pitchFamily="18" charset="0"/>
+              </a:rPr>
+              <a:t>tampered request</a:t>
+            </a:r>
           </a:p>
         </p:txBody>
       </p:sp>
-      <p:grpSp>
-        <p:nvGrpSpPr>
-          <p:cNvPr id="43" name="组合 42"/>
-          <p:cNvGrpSpPr>
-            <a:grpSpLocks noChangeAspect="1"/>
-          </p:cNvGrpSpPr>
-          <p:nvPr/>
-        </p:nvGrpSpPr>
-        <p:grpSpPr>
-          <a:xfrm>
-            <a:off x="5476240" y="1515600"/>
-            <a:ext cx="475615" cy="470535"/>
-            <a:chOff x="4445000" y="739632"/>
-            <a:chExt cx="375710" cy="371203"/>
-          </a:xfrm>
-          <a:solidFill>
-            <a:srgbClr val="AC1F18"/>
-          </a:solidFill>
-        </p:grpSpPr>
-        <p:sp>
-          <p:nvSpPr>
-            <p:cNvPr id="44" name="矩形: 圆角 63"/>
-            <p:cNvSpPr/>
-            <p:nvPr/>
-          </p:nvSpPr>
-          <p:spPr>
-            <a:xfrm>
-              <a:off x="4445000" y="740833"/>
-              <a:ext cx="156634" cy="156634"/>
-            </a:xfrm>
-            <a:prstGeom prst="roundRect">
-              <a:avLst/>
-            </a:prstGeom>
-            <a:grpFill/>
-            <a:ln w="38100">
-              <a:solidFill>
-                <a:srgbClr val="AC1F18"/>
-              </a:solidFill>
-            </a:ln>
-            <a:extLst>
-              <a:ext uri="{909E8E84-426E-40DD-AFC4-6F175D3DCCD1}">
-                <a14:hiddenFill xmlns:a14="http://schemas.microsoft.com/office/drawing/2010/main">
-                  <a:solidFill>
-                    <a:srgbClr val="AC1F18"/>
-                  </a:solidFill>
-                </a14:hiddenFill>
-              </a:ext>
-            </a:extLst>
-          </p:spPr>
-          <p:style>
-            <a:lnRef idx="2">
-              <a:schemeClr val="accent1">
-                <a:shade val="50000"/>
-              </a:schemeClr>
-            </a:lnRef>
-            <a:fillRef idx="1">
-              <a:schemeClr val="accent1"/>
-            </a:fillRef>
-            <a:effectRef idx="0">
-              <a:schemeClr val="accent1"/>
-            </a:effectRef>
-            <a:fontRef idx="minor">
-              <a:schemeClr val="lt1"/>
-            </a:fontRef>
-          </p:style>
-          <p:txBody>
-            <a:bodyPr rtlCol="0" anchor="ctr"/>
-            <a:lstStyle/>
-            <a:p>
-              <a:pPr algn="ctr"/>
-              <a:endParaRPr lang="zh-CN" altLang="en-US" sz="1200">
-                <a:latin typeface="Times New Roman" panose="02020603050405020304" charset="0"/>
-                <a:cs typeface="Times New Roman" panose="02020603050405020304" charset="0"/>
-              </a:endParaRPr>
-            </a:p>
-          </p:txBody>
-        </p:sp>
-        <p:sp>
-          <p:nvSpPr>
-            <p:cNvPr id="45" name="矩形: 圆角 64"/>
-            <p:cNvSpPr/>
-            <p:nvPr/>
-          </p:nvSpPr>
-          <p:spPr>
-            <a:xfrm>
-              <a:off x="4445000" y="954201"/>
-              <a:ext cx="156634" cy="156634"/>
-            </a:xfrm>
-            <a:prstGeom prst="roundRect">
-              <a:avLst/>
-            </a:prstGeom>
-            <a:grpFill/>
-            <a:ln w="38100">
-              <a:solidFill>
-                <a:srgbClr val="AC1F18"/>
-              </a:solidFill>
-            </a:ln>
-          </p:spPr>
-          <p:style>
-            <a:lnRef idx="2">
-              <a:schemeClr val="accent1">
-                <a:shade val="50000"/>
-              </a:schemeClr>
-            </a:lnRef>
-            <a:fillRef idx="1">
-              <a:schemeClr val="accent1"/>
-            </a:fillRef>
-            <a:effectRef idx="0">
-              <a:schemeClr val="accent1"/>
-            </a:effectRef>
-            <a:fontRef idx="minor">
-              <a:schemeClr val="lt1"/>
-            </a:fontRef>
-          </p:style>
-          <p:txBody>
-            <a:bodyPr rtlCol="0" anchor="ctr"/>
-            <a:lstStyle/>
-            <a:p>
-              <a:pPr algn="ctr"/>
-              <a:endParaRPr lang="zh-CN" altLang="en-US" sz="1200">
-                <a:latin typeface="Times New Roman" panose="02020603050405020304" charset="0"/>
-                <a:cs typeface="Times New Roman" panose="02020603050405020304" charset="0"/>
-              </a:endParaRPr>
-            </a:p>
-          </p:txBody>
-        </p:sp>
-        <p:sp>
-          <p:nvSpPr>
-            <p:cNvPr id="46" name="矩形: 圆角 65"/>
-            <p:cNvSpPr/>
-            <p:nvPr/>
-          </p:nvSpPr>
-          <p:spPr>
-            <a:xfrm rot="1800000">
-              <a:off x="4672028" y="739632"/>
-              <a:ext cx="145198" cy="138592"/>
-            </a:xfrm>
-            <a:prstGeom prst="roundRect">
-              <a:avLst/>
-            </a:prstGeom>
-            <a:noFill/>
-            <a:ln w="57150">
-              <a:solidFill>
-                <a:srgbClr val="AC1F18"/>
-              </a:solidFill>
-            </a:ln>
-            <a:extLst>
-              <a:ext uri="{909E8E84-426E-40DD-AFC4-6F175D3DCCD1}">
-                <a14:hiddenFill xmlns:a14="http://schemas.microsoft.com/office/drawing/2010/main">
-                  <a:grpFill/>
-                </a14:hiddenFill>
-              </a:ext>
-            </a:extLst>
-          </p:spPr>
-          <p:style>
-            <a:lnRef idx="2">
-              <a:schemeClr val="accent1">
-                <a:shade val="50000"/>
-              </a:schemeClr>
-            </a:lnRef>
-            <a:fillRef idx="1">
-              <a:schemeClr val="accent1"/>
-            </a:fillRef>
-            <a:effectRef idx="0">
-              <a:schemeClr val="accent1"/>
-            </a:effectRef>
-            <a:fontRef idx="minor">
-              <a:schemeClr val="lt1"/>
-            </a:fontRef>
-          </p:style>
-          <p:txBody>
-            <a:bodyPr rtlCol="0" anchor="ctr"/>
-            <a:lstStyle/>
-            <a:p>
-              <a:pPr algn="ctr"/>
-              <a:endParaRPr lang="zh-CN" altLang="en-US" sz="1200">
-                <a:latin typeface="Times New Roman" panose="02020603050405020304" charset="0"/>
-                <a:cs typeface="Times New Roman" panose="02020603050405020304" charset="0"/>
-              </a:endParaRPr>
-            </a:p>
-          </p:txBody>
-        </p:sp>
-        <p:sp>
-          <p:nvSpPr>
-            <p:cNvPr id="47" name="矩形: 圆角 66"/>
-            <p:cNvSpPr/>
-            <p:nvPr/>
-          </p:nvSpPr>
-          <p:spPr>
-            <a:xfrm>
-              <a:off x="4664075" y="954201"/>
-              <a:ext cx="156635" cy="156634"/>
-            </a:xfrm>
-            <a:prstGeom prst="roundRect">
-              <a:avLst/>
-            </a:prstGeom>
-            <a:grpFill/>
-            <a:ln w="38100">
-              <a:solidFill>
-                <a:srgbClr val="AC1F18"/>
-              </a:solidFill>
-            </a:ln>
-          </p:spPr>
-          <p:style>
-            <a:lnRef idx="2">
-              <a:schemeClr val="accent1">
-                <a:shade val="50000"/>
-              </a:schemeClr>
-            </a:lnRef>
-            <a:fillRef idx="1">
-              <a:schemeClr val="accent1"/>
-            </a:fillRef>
-            <a:effectRef idx="0">
-              <a:schemeClr val="accent1"/>
-            </a:effectRef>
-            <a:fontRef idx="minor">
-              <a:schemeClr val="lt1"/>
-            </a:fontRef>
-          </p:style>
-          <p:txBody>
-            <a:bodyPr rtlCol="0" anchor="ctr"/>
-            <a:lstStyle/>
-            <a:p>
-              <a:pPr algn="ctr"/>
-              <a:endParaRPr lang="zh-CN" altLang="en-US" sz="1200">
-                <a:latin typeface="Times New Roman" panose="02020603050405020304" charset="0"/>
-                <a:cs typeface="Times New Roman" panose="02020603050405020304" charset="0"/>
-              </a:endParaRPr>
-            </a:p>
-          </p:txBody>
-        </p:sp>
-      </p:grpSp>
       <p:pic>
         <p:nvPicPr>
           <p:cNvPr id="48" name="图片 47" descr="恶魔"/>
@@ -8749,7 +8343,7 @@
         </p:blipFill>
         <p:spPr>
           <a:xfrm>
-            <a:off x="5189855" y="4029075"/>
+            <a:off x="5355077" y="4052265"/>
             <a:ext cx="337820" cy="337820"/>
           </a:xfrm>
           <a:prstGeom prst="rect">
@@ -8765,8 +8359,8 @@
         </p:nvSpPr>
         <p:spPr>
           <a:xfrm>
-            <a:off x="6272530" y="3552825"/>
-            <a:ext cx="2223770" cy="272415"/>
+            <a:off x="6133216" y="3210540"/>
+            <a:ext cx="2097625" cy="597793"/>
           </a:xfrm>
           <a:prstGeom prst="rect">
             <a:avLst/>
@@ -8777,68 +8371,45 @@
           <a:bodyPr wrap="square" rtlCol="0">
             <a:noAutofit/>
           </a:bodyPr>
+          <a:lstStyle/>
           <a:p>
             <a:pPr algn="ctr"/>
             <a:r>
-              <a:rPr lang="en-US" altLang="zh-CN" sz="1200" b="1">
+              <a:rPr lang="en-US" altLang="zh-CN" sz="1600" b="1" dirty="0">
                 <a:solidFill>
                   <a:schemeClr val="tx1"/>
                 </a:solidFill>
-                <a:latin typeface="Times New Roman" panose="02020603050405020304" charset="0"/>
-                <a:cs typeface="Times New Roman" panose="02020603050405020304" charset="0"/>
+                <a:latin typeface="Times New Roman" panose="02020603050405020304" pitchFamily="18" charset="0"/>
+                <a:cs typeface="Times New Roman" panose="02020603050405020304" pitchFamily="18" charset="0"/>
               </a:rPr>
               <a:t>Step2.</a:t>
             </a:r>
             <a:r>
-              <a:rPr lang="en-US" altLang="zh-CN" sz="1200">
+              <a:rPr lang="en-US" altLang="zh-CN" sz="1600" dirty="0">
                 <a:solidFill>
                   <a:schemeClr val="tx1"/>
                 </a:solidFill>
-                <a:latin typeface="Times New Roman" panose="02020603050405020304" charset="0"/>
-                <a:cs typeface="Times New Roman" panose="02020603050405020304" charset="0"/>
+                <a:latin typeface="Times New Roman" panose="02020603050405020304" pitchFamily="18" charset="0"/>
+                <a:cs typeface="Times New Roman" panose="02020603050405020304" pitchFamily="18" charset="0"/>
               </a:rPr>
-              <a:t> Hijack intent Resolution</a:t>
+              <a:t> Hijack Intent </a:t>
             </a:r>
-            <a:endParaRPr lang="en-US" altLang="zh-CN" sz="1200">
-              <a:solidFill>
-                <a:schemeClr val="tx1"/>
-              </a:solidFill>
-              <a:latin typeface="Times New Roman" panose="02020603050405020304" charset="0"/>
-              <a:cs typeface="Times New Roman" panose="02020603050405020304" charset="0"/>
-            </a:endParaRPr>
+          </a:p>
+          <a:p>
+            <a:pPr algn="ctr"/>
+            <a:r>
+              <a:rPr lang="en-US" altLang="zh-CN" sz="1600" dirty="0">
+                <a:solidFill>
+                  <a:schemeClr val="tx1"/>
+                </a:solidFill>
+                <a:latin typeface="Times New Roman" panose="02020603050405020304" pitchFamily="18" charset="0"/>
+                <a:cs typeface="Times New Roman" panose="02020603050405020304" pitchFamily="18" charset="0"/>
+              </a:rPr>
+              <a:t>Resolution</a:t>
+            </a:r>
           </a:p>
         </p:txBody>
       </p:sp>
-      <p:pic>
-        <p:nvPicPr>
-          <p:cNvPr id="50" name="图片 49" descr="错误"/>
-          <p:cNvPicPr>
-            <a:picLocks noChangeAspect="1"/>
-          </p:cNvPicPr>
-          <p:nvPr/>
-        </p:nvPicPr>
-        <p:blipFill>
-          <a:blip r:embed="rId5">
-            <a:extLst>
-              <a:ext uri="{96DAC541-7B7A-43D3-8B79-37D633B846F1}">
-                <asvg:svgBlip xmlns:asvg="http://schemas.microsoft.com/office/drawing/2016/SVG/main" r:embed="rId6"/>
-              </a:ext>
-            </a:extLst>
-          </a:blip>
-          <a:stretch>
-            <a:fillRect/>
-          </a:stretch>
-        </p:blipFill>
-        <p:spPr>
-          <a:xfrm>
-            <a:off x="5978525" y="2562225"/>
-            <a:ext cx="259715" cy="259715"/>
-          </a:xfrm>
-          <a:prstGeom prst="rect">
-            <a:avLst/>
-          </a:prstGeom>
-        </p:spPr>
-      </p:pic>
       <p:sp>
         <p:nvSpPr>
           <p:cNvPr id="51" name="矩形 50"/>
@@ -8847,7 +8418,7 @@
         </p:nvSpPr>
         <p:spPr>
           <a:xfrm>
-            <a:off x="2950210" y="4335780"/>
+            <a:off x="2842307" y="4335780"/>
             <a:ext cx="179705" cy="1010920"/>
           </a:xfrm>
           <a:prstGeom prst="rect">
@@ -8858,7 +8429,7 @@
           </a:solidFill>
           <a:ln>
             <a:solidFill>
-              <a:srgbClr val="4A5F7E"/>
+              <a:srgbClr val="668BAB"/>
             </a:solidFill>
           </a:ln>
         </p:spPr>
@@ -8880,11 +8451,12 @@
         </p:style>
         <p:txBody>
           <a:bodyPr rtlCol="0" anchor="ctr"/>
+          <a:lstStyle/>
           <a:p>
             <a:pPr algn="ctr"/>
-            <a:endParaRPr lang="zh-CN" altLang="en-US" sz="1200">
-              <a:latin typeface="Times New Roman" panose="02020603050405020304" charset="0"/>
-              <a:cs typeface="Times New Roman" panose="02020603050405020304" charset="0"/>
+            <a:endParaRPr lang="zh-CN" altLang="en-US">
+              <a:latin typeface="Times New Roman" panose="02020603050405020304" pitchFamily="18" charset="0"/>
+              <a:cs typeface="Times New Roman" panose="02020603050405020304" pitchFamily="18" charset="0"/>
             </a:endParaRPr>
           </a:p>
         </p:txBody>
@@ -8898,10 +8470,10 @@
           <p:nvPr/>
         </p:nvPicPr>
         <p:blipFill>
-          <a:blip r:embed="rId7">
+          <a:blip r:embed="rId5">
             <a:extLst>
               <a:ext uri="{96DAC541-7B7A-43D3-8B79-37D633B846F1}">
-                <asvg:svgBlip xmlns:asvg="http://schemas.microsoft.com/office/drawing/2016/SVG/main" r:embed="rId8"/>
+                <asvg:svgBlip xmlns:asvg="http://schemas.microsoft.com/office/drawing/2016/SVG/main" r:embed="rId6"/>
               </a:ext>
             </a:extLst>
           </a:blip>
@@ -8911,7 +8483,7 @@
         </p:blipFill>
         <p:spPr>
           <a:xfrm>
-            <a:off x="5954395" y="4717415"/>
+            <a:off x="6096000" y="4576051"/>
             <a:ext cx="353060" cy="353060"/>
           </a:xfrm>
           <a:prstGeom prst="rect">
@@ -8922,13 +8494,15 @@
       <p:cxnSp>
         <p:nvCxnSpPr>
           <p:cNvPr id="53" name="直接箭头连接符 52"/>
-          <p:cNvCxnSpPr/>
+          <p:cNvCxnSpPr>
+            <a:cxnSpLocks/>
+          </p:cNvCxnSpPr>
           <p:nvPr/>
         </p:nvCxnSpPr>
         <p:spPr>
           <a:xfrm>
-            <a:off x="5645785" y="2685600"/>
-            <a:ext cx="2772000" cy="0"/>
+            <a:off x="5894070" y="2834188"/>
+            <a:ext cx="2494505" cy="0"/>
           </a:xfrm>
           <a:prstGeom prst="straightConnector1">
             <a:avLst/>
@@ -8965,13 +8539,13 @@
           <p:nvPr/>
         </p:nvPicPr>
         <p:blipFill>
-          <a:blip r:embed="rId9" cstate="print">
+          <a:blip r:embed="rId7" cstate="print">
             <a:extLst>
               <a:ext uri="{28A0092B-C50C-407E-A947-70E740481C1C}">
                 <a14:useLocalDpi xmlns:a14="http://schemas.microsoft.com/office/drawing/2010/main" val="0"/>
               </a:ext>
               <a:ext uri="{96DAC541-7B7A-43D3-8B79-37D633B846F1}">
-                <asvg:svgBlip xmlns:asvg="http://schemas.microsoft.com/office/drawing/2016/SVG/main" r:embed="rId10"/>
+                <asvg:svgBlip xmlns:asvg="http://schemas.microsoft.com/office/drawing/2016/SVG/main" r:embed="rId8"/>
               </a:ext>
             </a:extLst>
           </a:blip>
@@ -8981,7 +8555,7 @@
         </p:blipFill>
         <p:spPr>
           <a:xfrm>
-            <a:off x="2670549" y="3411088"/>
+            <a:off x="2562646" y="3411088"/>
             <a:ext cx="720000" cy="720000"/>
           </a:xfrm>
           <a:prstGeom prst="rect">
@@ -8997,7 +8571,7 @@
         </p:nvSpPr>
         <p:spPr>
           <a:xfrm>
-            <a:off x="1801495" y="4013200"/>
+            <a:off x="1693592" y="4013200"/>
             <a:ext cx="2471420" cy="372745"/>
           </a:xfrm>
           <a:prstGeom prst="rect">
@@ -9009,19 +8583,16 @@
           <a:bodyPr wrap="square" rtlCol="0">
             <a:noAutofit/>
           </a:bodyPr>
+          <a:lstStyle/>
           <a:p>
             <a:pPr algn="ctr"/>
             <a:r>
-              <a:rPr lang="en-US" altLang="zh-CN" sz="1200">
-                <a:latin typeface="Times New Roman" panose="02020603050405020304" charset="0"/>
-                <a:cs typeface="Times New Roman" panose="02020603050405020304" charset="0"/>
+              <a:rPr lang="en-US" altLang="zh-CN">
+                <a:latin typeface="Times New Roman" panose="02020603050405020304" pitchFamily="18" charset="0"/>
+                <a:cs typeface="Times New Roman" panose="02020603050405020304" pitchFamily="18" charset="0"/>
               </a:rPr>
               <a:t>Merchant Platform</a:t>
             </a:r>
-            <a:endParaRPr lang="en-US" altLang="zh-CN" sz="1200">
-              <a:latin typeface="Times New Roman" panose="02020603050405020304" charset="0"/>
-              <a:cs typeface="Times New Roman" panose="02020603050405020304" charset="0"/>
-            </a:endParaRPr>
           </a:p>
         </p:txBody>
       </p:sp>
@@ -9046,9 +8617,7 @@
           </a:solidFill>
           <a:ln>
             <a:solidFill>
-              <a:schemeClr val="accent1">
-                <a:lumMod val="75000"/>
-              </a:schemeClr>
+              <a:srgbClr val="2E54A1"/>
             </a:solidFill>
           </a:ln>
         </p:spPr>
@@ -9070,120 +8639,12 @@
         </p:style>
         <p:txBody>
           <a:bodyPr rtlCol="0" anchor="ctr"/>
+          <a:lstStyle/>
           <a:p>
             <a:pPr algn="ctr"/>
-            <a:endParaRPr lang="zh-CN" altLang="en-US" sz="1200">
-              <a:latin typeface="Times New Roman" panose="02020603050405020304" charset="0"/>
-              <a:cs typeface="Times New Roman" panose="02020603050405020304" charset="0"/>
-            </a:endParaRPr>
-          </a:p>
-        </p:txBody>
-      </p:sp>
-      <p:sp>
-        <p:nvSpPr>
-          <p:cNvPr id="57" name="文本框 56"/>
-          <p:cNvSpPr txBox="1"/>
-          <p:nvPr/>
-        </p:nvSpPr>
-        <p:spPr>
-          <a:xfrm>
-            <a:off x="3202940" y="4794885"/>
-            <a:ext cx="2298065" cy="272415"/>
-          </a:xfrm>
-          <a:prstGeom prst="rect">
-            <a:avLst/>
-          </a:prstGeom>
-          <a:noFill/>
-        </p:spPr>
-        <p:txBody>
-          <a:bodyPr wrap="square" rtlCol="0">
-            <a:noAutofit/>
-          </a:bodyPr>
-          <a:p>
-            <a:pPr algn="ctr"/>
-            <a:r>
-              <a:rPr lang="en-US" altLang="zh-CN" sz="1200">
-                <a:latin typeface="Times New Roman" panose="02020603050405020304" charset="0"/>
-                <a:cs typeface="Times New Roman" panose="02020603050405020304" charset="0"/>
-                <a:sym typeface="+mn-ea"/>
-              </a:rPr>
-              <a:t>amount=</a:t>
-            </a:r>
-            <a:r>
-              <a:rPr lang="en-US" altLang="zh-CN" sz="1200">
-                <a:solidFill>
-                  <a:srgbClr val="0070C0"/>
-                </a:solidFill>
-                <a:latin typeface="Times New Roman" panose="02020603050405020304" charset="0"/>
-                <a:cs typeface="Times New Roman" panose="02020603050405020304" charset="0"/>
-                <a:sym typeface="+mn-ea"/>
-              </a:rPr>
-              <a:t>aaaa</a:t>
-            </a:r>
-            <a:r>
-              <a:rPr lang="en-US" altLang="zh-CN" sz="1200">
-                <a:latin typeface="Times New Roman" panose="02020603050405020304" charset="0"/>
-                <a:cs typeface="Times New Roman" panose="02020603050405020304" charset="0"/>
-                <a:sym typeface="+mn-ea"/>
-              </a:rPr>
-              <a:t>&amp;description=</a:t>
-            </a:r>
-            <a:r>
-              <a:rPr lang="en-US" altLang="zh-CN" sz="1200">
-                <a:solidFill>
-                  <a:srgbClr val="0070C0"/>
-                </a:solidFill>
-                <a:latin typeface="Times New Roman" panose="02020603050405020304" charset="0"/>
-                <a:cs typeface="Times New Roman" panose="02020603050405020304" charset="0"/>
-                <a:sym typeface="+mn-ea"/>
-              </a:rPr>
-              <a:t>bbbb</a:t>
-            </a:r>
-            <a:r>
-              <a:rPr lang="en-US" altLang="zh-CN" sz="1200">
-                <a:latin typeface="Times New Roman" panose="02020603050405020304" charset="0"/>
-                <a:cs typeface="Times New Roman" panose="02020603050405020304" charset="0"/>
-                <a:sym typeface="+mn-ea"/>
-              </a:rPr>
-              <a:t>&amp;order_id=</a:t>
-            </a:r>
-            <a:r>
-              <a:rPr lang="en-US" altLang="zh-CN" sz="1200">
-                <a:solidFill>
-                  <a:srgbClr val="C00000"/>
-                </a:solidFill>
-                <a:latin typeface="Times New Roman" panose="02020603050405020304" charset="0"/>
-                <a:cs typeface="Times New Roman" panose="02020603050405020304" charset="0"/>
-                <a:sym typeface="+mn-ea"/>
-              </a:rPr>
-              <a:t>xxxx</a:t>
-            </a:r>
-            <a:r>
-              <a:rPr lang="en-US" altLang="zh-CN" sz="1200">
-                <a:latin typeface="Times New Roman" panose="02020603050405020304" charset="0"/>
-                <a:cs typeface="Times New Roman" panose="02020603050405020304" charset="0"/>
-                <a:sym typeface="+mn-ea"/>
-              </a:rPr>
-              <a:t>&amp;sign=</a:t>
-            </a:r>
-            <a:r>
-              <a:rPr lang="en-US" altLang="zh-CN" sz="1200">
-                <a:solidFill>
-                  <a:srgbClr val="C00000"/>
-                </a:solidFill>
-                <a:latin typeface="Times New Roman" panose="02020603050405020304" charset="0"/>
-                <a:cs typeface="Times New Roman" panose="02020603050405020304" charset="0"/>
-                <a:sym typeface="+mn-ea"/>
-              </a:rPr>
-              <a:t>……</a:t>
-            </a:r>
-            <a:endParaRPr lang="en-US" altLang="zh-CN" sz="1200">
-              <a:solidFill>
-                <a:srgbClr val="C00000"/>
-              </a:solidFill>
-              <a:latin typeface="Times New Roman" panose="02020603050405020304" charset="0"/>
-              <a:cs typeface="Times New Roman" panose="02020603050405020304" charset="0"/>
-              <a:sym typeface="+mn-ea"/>
+            <a:endParaRPr lang="zh-CN" altLang="en-US">
+              <a:latin typeface="Times New Roman" panose="02020603050405020304" pitchFamily="18" charset="0"/>
+              <a:cs typeface="Times New Roman" panose="02020603050405020304" pitchFamily="18" charset="0"/>
             </a:endParaRPr>
           </a:p>
         </p:txBody>
@@ -9196,8 +8657,8 @@
         </p:nvSpPr>
         <p:spPr>
           <a:xfrm>
-            <a:off x="3171190" y="2698750"/>
-            <a:ext cx="2298065" cy="272415"/>
+            <a:off x="2955113" y="2847338"/>
+            <a:ext cx="2663748" cy="504637"/>
           </a:xfrm>
           <a:prstGeom prst="rect">
             <a:avLst/>
@@ -9208,121 +8669,108 @@
           <a:bodyPr wrap="square" rtlCol="0">
             <a:noAutofit/>
           </a:bodyPr>
+          <a:lstStyle/>
           <a:p>
             <a:pPr algn="ctr"/>
             <a:r>
-              <a:rPr lang="en-US" altLang="zh-CN" sz="1200">
-                <a:latin typeface="Times New Roman" panose="02020603050405020304" charset="0"/>
-                <a:cs typeface="Times New Roman" panose="02020603050405020304" charset="0"/>
+              <a:rPr lang="en-US" altLang="zh-CN" sz="1400" dirty="0">
+                <a:latin typeface="Times New Roman" panose="02020603050405020304" pitchFamily="18" charset="0"/>
+                <a:cs typeface="Times New Roman" panose="02020603050405020304" pitchFamily="18" charset="0"/>
               </a:rPr>
               <a:t>amount=</a:t>
             </a:r>
             <a:r>
-              <a:rPr lang="en-US" altLang="zh-CN" sz="1200">
+              <a:rPr lang="en-US" altLang="zh-CN" sz="1400" dirty="0" err="1">
                 <a:solidFill>
                   <a:srgbClr val="0070C0"/>
                 </a:solidFill>
-                <a:latin typeface="Times New Roman" panose="02020603050405020304" charset="0"/>
-                <a:cs typeface="Times New Roman" panose="02020603050405020304" charset="0"/>
+                <a:latin typeface="Times New Roman" panose="02020603050405020304" pitchFamily="18" charset="0"/>
+                <a:cs typeface="Times New Roman" panose="02020603050405020304" pitchFamily="18" charset="0"/>
               </a:rPr>
               <a:t>aaaa</a:t>
             </a:r>
             <a:r>
-              <a:rPr lang="en-US" altLang="zh-CN" sz="1200">
-                <a:latin typeface="Times New Roman" panose="02020603050405020304" charset="0"/>
-                <a:cs typeface="Times New Roman" panose="02020603050405020304" charset="0"/>
+              <a:rPr lang="en-US" altLang="zh-CN" sz="1400" dirty="0" err="1">
+                <a:latin typeface="Times New Roman" panose="02020603050405020304" pitchFamily="18" charset="0"/>
+                <a:cs typeface="Times New Roman" panose="02020603050405020304" pitchFamily="18" charset="0"/>
               </a:rPr>
-              <a:t>&amp;description=</a:t>
+              <a:t>&amp;description</a:t>
             </a:r>
             <a:r>
-              <a:rPr lang="en-US" altLang="zh-CN" sz="1200">
+              <a:rPr lang="en-US" altLang="zh-CN" sz="1400" dirty="0">
+                <a:latin typeface="Times New Roman" panose="02020603050405020304" pitchFamily="18" charset="0"/>
+                <a:cs typeface="Times New Roman" panose="02020603050405020304" pitchFamily="18" charset="0"/>
+              </a:rPr>
+              <a:t>=</a:t>
+            </a:r>
+            <a:r>
+              <a:rPr lang="en-US" altLang="zh-CN" sz="1400" dirty="0" err="1">
                 <a:solidFill>
                   <a:srgbClr val="0070C0"/>
                 </a:solidFill>
-                <a:latin typeface="Times New Roman" panose="02020603050405020304" charset="0"/>
-                <a:cs typeface="Times New Roman" panose="02020603050405020304" charset="0"/>
+                <a:latin typeface="Times New Roman" panose="02020603050405020304" pitchFamily="18" charset="0"/>
+                <a:cs typeface="Times New Roman" panose="02020603050405020304" pitchFamily="18" charset="0"/>
               </a:rPr>
               <a:t>bbbb</a:t>
             </a:r>
             <a:r>
-              <a:rPr lang="en-US" altLang="zh-CN" sz="1200">
-                <a:latin typeface="Times New Roman" panose="02020603050405020304" charset="0"/>
-                <a:cs typeface="Times New Roman" panose="02020603050405020304" charset="0"/>
+              <a:rPr lang="en-US" altLang="zh-CN" sz="1400" dirty="0" err="1">
+                <a:latin typeface="Times New Roman" panose="02020603050405020304" pitchFamily="18" charset="0"/>
+                <a:cs typeface="Times New Roman" panose="02020603050405020304" pitchFamily="18" charset="0"/>
               </a:rPr>
-              <a:t>&amp;order_id=</a:t>
+              <a:t>&amp;order_id</a:t>
             </a:r>
             <a:r>
-              <a:rPr lang="en-US" altLang="zh-CN" sz="1200">
+              <a:rPr lang="en-US" altLang="zh-CN" sz="1400" dirty="0">
+                <a:latin typeface="Times New Roman" panose="02020603050405020304" pitchFamily="18" charset="0"/>
+                <a:cs typeface="Times New Roman" panose="02020603050405020304" pitchFamily="18" charset="0"/>
+              </a:rPr>
+              <a:t>=</a:t>
+            </a:r>
+            <a:r>
+              <a:rPr lang="en-US" altLang="zh-CN" sz="1400" dirty="0" err="1">
                 <a:solidFill>
                   <a:srgbClr val="0070C0"/>
                 </a:solidFill>
-                <a:latin typeface="Times New Roman" panose="02020603050405020304" charset="0"/>
-                <a:cs typeface="Times New Roman" panose="02020603050405020304" charset="0"/>
+                <a:latin typeface="Times New Roman" panose="02020603050405020304" pitchFamily="18" charset="0"/>
+                <a:cs typeface="Times New Roman" panose="02020603050405020304" pitchFamily="18" charset="0"/>
               </a:rPr>
               <a:t>cccc</a:t>
             </a:r>
             <a:r>
-              <a:rPr lang="en-US" altLang="zh-CN" sz="1200">
+              <a:rPr lang="en-US" altLang="zh-CN" sz="1400" dirty="0" err="1">
                 <a:solidFill>
                   <a:schemeClr val="tx1"/>
                 </a:solidFill>
-                <a:latin typeface="Times New Roman" panose="02020603050405020304" charset="0"/>
-                <a:cs typeface="Times New Roman" panose="02020603050405020304" charset="0"/>
+                <a:latin typeface="Times New Roman" panose="02020603050405020304" pitchFamily="18" charset="0"/>
+                <a:cs typeface="Times New Roman" panose="02020603050405020304" pitchFamily="18" charset="0"/>
               </a:rPr>
-              <a:t>&amp;sign=</a:t>
+              <a:t>&amp;sign</a:t>
             </a:r>
             <a:r>
-              <a:rPr lang="en-US" altLang="zh-CN" sz="1200">
+              <a:rPr lang="en-US" altLang="zh-CN" sz="1400" dirty="0">
+                <a:solidFill>
+                  <a:schemeClr val="tx1"/>
+                </a:solidFill>
+                <a:latin typeface="Times New Roman" panose="02020603050405020304" pitchFamily="18" charset="0"/>
+                <a:cs typeface="Times New Roman" panose="02020603050405020304" pitchFamily="18" charset="0"/>
+              </a:rPr>
+              <a:t>=</a:t>
+            </a:r>
+            <a:r>
+              <a:rPr lang="en-US" altLang="zh-CN" sz="1400" dirty="0">
                 <a:solidFill>
                   <a:srgbClr val="0070C0"/>
                 </a:solidFill>
-                <a:latin typeface="Times New Roman" panose="02020603050405020304" charset="0"/>
-                <a:cs typeface="Times New Roman" panose="02020603050405020304" charset="0"/>
+                <a:latin typeface="Times New Roman" panose="02020603050405020304" pitchFamily="18" charset="0"/>
+                <a:cs typeface="Times New Roman" panose="02020603050405020304" pitchFamily="18" charset="0"/>
                 <a:sym typeface="+mn-ea"/>
               </a:rPr>
               <a:t>……</a:t>
             </a:r>
-            <a:endParaRPr lang="en-US" altLang="zh-CN" sz="1200">
-              <a:solidFill>
-                <a:srgbClr val="0070C0"/>
-              </a:solidFill>
-              <a:latin typeface="Times New Roman" panose="02020603050405020304" charset="0"/>
-              <a:cs typeface="Times New Roman" panose="02020603050405020304" charset="0"/>
-              <a:sym typeface="+mn-ea"/>
-            </a:endParaRPr>
           </a:p>
         </p:txBody>
       </p:sp>
-      <p:pic>
-        <p:nvPicPr>
-          <p:cNvPr id="59" name="图片 58" descr="恶魔"/>
-          <p:cNvPicPr>
-            <a:picLocks noChangeAspect="1"/>
-          </p:cNvPicPr>
-          <p:nvPr/>
-        </p:nvPicPr>
-        <p:blipFill>
-          <a:blip r:embed="rId3">
-            <a:extLst>
-              <a:ext uri="{96DAC541-7B7A-43D3-8B79-37D633B846F1}">
-                <asvg:svgBlip xmlns:asvg="http://schemas.microsoft.com/office/drawing/2016/SVG/main" r:embed="rId4"/>
-              </a:ext>
-            </a:extLst>
-          </a:blip>
-          <a:stretch>
-            <a:fillRect/>
-          </a:stretch>
-        </p:blipFill>
-        <p:spPr>
-          <a:xfrm>
-            <a:off x="5979160" y="1665605"/>
-            <a:ext cx="337820" cy="337820"/>
-          </a:xfrm>
-          <a:prstGeom prst="rect">
-            <a:avLst/>
-          </a:prstGeom>
-        </p:spPr>
-      </p:pic>
       <p:sp>
         <p:nvSpPr>
           <p:cNvPr id="69" name="任意多边形 68"/>
@@ -9331,8 +8779,8 @@
         </p:nvSpPr>
         <p:spPr>
           <a:xfrm>
-            <a:off x="5986780" y="3003550"/>
-            <a:ext cx="361950" cy="1435100"/>
+            <a:off x="6077560" y="3119955"/>
+            <a:ext cx="289480" cy="1376757"/>
           </a:xfrm>
           <a:custGeom>
             <a:avLst/>
@@ -9401,9 +8849,13 @@
         </p:style>
         <p:txBody>
           <a:bodyPr rtlCol="0" anchor="ctr"/>
+          <a:lstStyle/>
           <a:p>
             <a:pPr algn="ctr"/>
-            <a:endParaRPr lang="zh-CN" altLang="en-US"/>
+            <a:endParaRPr lang="zh-CN" altLang="en-US">
+              <a:latin typeface="Times New Roman" panose="02020603050405020304" pitchFamily="18" charset="0"/>
+              <a:cs typeface="Times New Roman" panose="02020603050405020304" pitchFamily="18" charset="0"/>
+            </a:endParaRPr>
           </a:p>
         </p:txBody>
       </p:sp>
@@ -9416,8 +8868,8 @@
           <p:nvPr/>
         </p:nvGrpSpPr>
         <p:grpSpPr>
-          <a:xfrm rot="0">
-            <a:off x="5471795" y="2349500"/>
+          <a:xfrm>
+            <a:off x="5646053" y="2487293"/>
             <a:ext cx="457859" cy="900000"/>
             <a:chOff x="6484937" y="882650"/>
             <a:chExt cx="1979295" cy="3890645"/>
@@ -9432,7 +8884,7 @@
             <p:nvPr/>
           </p:nvPicPr>
           <p:blipFill rotWithShape="1">
-            <a:blip r:embed="rId11"/>
+            <a:blip r:embed="rId9"/>
             <a:srcRect l="30132" t="10719" r="30559" b="12022"/>
             <a:stretch>
               <a:fillRect/>
@@ -9457,7 +8909,7 @@
             <p:nvPr/>
           </p:nvPicPr>
           <p:blipFill rotWithShape="1">
-            <a:blip r:embed="rId12"/>
+            <a:blip r:embed="rId10"/>
             <a:srcRect l="117" t="-39" r="-220" b="-19"/>
             <a:stretch>
               <a:fillRect/>
@@ -9624,7 +9076,7 @@
         </p:nvGrpSpPr>
         <p:grpSpPr>
           <a:xfrm>
-            <a:off x="8392914" y="4310369"/>
+            <a:off x="8392914" y="4314510"/>
             <a:ext cx="457859" cy="900000"/>
             <a:chOff x="5209721" y="2071270"/>
             <a:chExt cx="1979295" cy="3890645"/>
@@ -9639,7 +9091,7 @@
             <p:nvPr/>
           </p:nvPicPr>
           <p:blipFill rotWithShape="1">
-            <a:blip r:embed="rId11"/>
+            <a:blip r:embed="rId9"/>
             <a:srcRect l="30132" t="10719" r="30559" b="12022"/>
             <a:stretch>
               <a:fillRect/>
@@ -9664,7 +9116,7 @@
             <p:nvPr/>
           </p:nvPicPr>
           <p:blipFill rotWithShape="1">
-            <a:blip r:embed="rId13">
+            <a:blip r:embed="rId11" cstate="print">
               <a:extLst>
                 <a:ext uri="{28A0092B-C50C-407E-A947-70E740481C1C}">
                   <a14:useLocalDpi xmlns:a14="http://schemas.microsoft.com/office/drawing/2010/main" val="0"/>
@@ -9837,7 +9289,7 @@
         </p:nvGrpSpPr>
         <p:grpSpPr>
           <a:xfrm>
-            <a:off x="5465021" y="4311004"/>
+            <a:off x="5646053" y="4314510"/>
             <a:ext cx="457859" cy="900000"/>
             <a:chOff x="6484937" y="882650"/>
             <a:chExt cx="1979295" cy="3890645"/>
@@ -9852,7 +9304,7 @@
             <p:nvPr/>
           </p:nvPicPr>
           <p:blipFill rotWithShape="1">
-            <a:blip r:embed="rId11"/>
+            <a:blip r:embed="rId9"/>
             <a:srcRect l="30132" t="10719" r="30559" b="12022"/>
             <a:stretch>
               <a:fillRect/>
@@ -9877,7 +9329,7 @@
             <p:nvPr/>
           </p:nvPicPr>
           <p:blipFill rotWithShape="1">
-            <a:blip r:embed="rId14">
+            <a:blip r:embed="rId12" cstate="print">
               <a:extLst>
                 <a:ext uri="{28A0092B-C50C-407E-A947-70E740481C1C}">
                   <a14:useLocalDpi xmlns:a14="http://schemas.microsoft.com/office/drawing/2010/main" val="0"/>
@@ -10040,6 +9492,645 @@
           </p:spPr>
         </p:pic>
       </p:grpSp>
+      <p:pic>
+        <p:nvPicPr>
+          <p:cNvPr id="50" name="图片 49" descr="错误"/>
+          <p:cNvPicPr>
+            <a:picLocks noChangeAspect="1"/>
+          </p:cNvPicPr>
+          <p:nvPr/>
+        </p:nvPicPr>
+        <p:blipFill>
+          <a:blip r:embed="rId13">
+            <a:extLst>
+              <a:ext uri="{96DAC541-7B7A-43D3-8B79-37D633B846F1}">
+                <asvg:svgBlip xmlns:asvg="http://schemas.microsoft.com/office/drawing/2016/SVG/main" r:embed="rId14"/>
+              </a:ext>
+            </a:extLst>
+          </a:blip>
+          <a:stretch>
+            <a:fillRect/>
+          </a:stretch>
+        </p:blipFill>
+        <p:spPr>
+          <a:xfrm>
+            <a:off x="6128706" y="2714941"/>
+            <a:ext cx="259715" cy="259715"/>
+          </a:xfrm>
+          <a:prstGeom prst="rect">
+            <a:avLst/>
+          </a:prstGeom>
+        </p:spPr>
+      </p:pic>
+      <p:sp>
+        <p:nvSpPr>
+          <p:cNvPr id="29" name="矩形 28"/>
+          <p:cNvSpPr/>
+          <p:nvPr/>
+        </p:nvSpPr>
+        <p:spPr>
+          <a:xfrm>
+            <a:off x="2835322" y="2381250"/>
+            <a:ext cx="179705" cy="961200"/>
+          </a:xfrm>
+          <a:prstGeom prst="rect">
+            <a:avLst/>
+          </a:prstGeom>
+          <a:solidFill>
+            <a:srgbClr val="4A5F7E"/>
+          </a:solidFill>
+          <a:ln>
+            <a:solidFill>
+              <a:srgbClr val="4A5F7E"/>
+            </a:solidFill>
+          </a:ln>
+        </p:spPr>
+        <p:style>
+          <a:lnRef idx="2">
+            <a:schemeClr val="accent1">
+              <a:lumMod val="75000"/>
+            </a:schemeClr>
+          </a:lnRef>
+          <a:fillRef idx="1">
+            <a:schemeClr val="accent1"/>
+          </a:fillRef>
+          <a:effectRef idx="0">
+            <a:srgbClr val="FFFFFF"/>
+          </a:effectRef>
+          <a:fontRef idx="minor">
+            <a:schemeClr val="lt1"/>
+          </a:fontRef>
+        </p:style>
+        <p:txBody>
+          <a:bodyPr rtlCol="0" anchor="ctr"/>
+          <a:lstStyle/>
+          <a:p>
+            <a:pPr algn="ctr"/>
+            <a:endParaRPr lang="zh-CN" altLang="en-US">
+              <a:latin typeface="Times New Roman" panose="02020603050405020304" pitchFamily="18" charset="0"/>
+              <a:cs typeface="Times New Roman" panose="02020603050405020304" pitchFamily="18" charset="0"/>
+            </a:endParaRPr>
+          </a:p>
+        </p:txBody>
+      </p:sp>
+      <p:sp>
+        <p:nvSpPr>
+          <p:cNvPr id="60" name="文本框 59">
+            <a:extLst>
+              <a:ext uri="{FF2B5EF4-FFF2-40B4-BE49-F238E27FC236}">
+                <a16:creationId xmlns:a16="http://schemas.microsoft.com/office/drawing/2014/main" id="{2F5B0E35-3D2D-4291-BBB4-3C1785C0291B}"/>
+              </a:ext>
+            </a:extLst>
+          </p:cNvPr>
+          <p:cNvSpPr txBox="1"/>
+          <p:nvPr/>
+        </p:nvSpPr>
+        <p:spPr>
+          <a:xfrm>
+            <a:off x="2973377" y="4883134"/>
+            <a:ext cx="2663748" cy="491489"/>
+          </a:xfrm>
+          <a:prstGeom prst="rect">
+            <a:avLst/>
+          </a:prstGeom>
+          <a:noFill/>
+        </p:spPr>
+        <p:txBody>
+          <a:bodyPr wrap="square" rtlCol="0">
+            <a:noAutofit/>
+          </a:bodyPr>
+          <a:lstStyle/>
+          <a:p>
+            <a:pPr algn="ctr"/>
+            <a:r>
+              <a:rPr lang="en-US" altLang="zh-CN" sz="1400" dirty="0">
+                <a:latin typeface="Times New Roman" panose="02020603050405020304" pitchFamily="18" charset="0"/>
+                <a:cs typeface="Times New Roman" panose="02020603050405020304" pitchFamily="18" charset="0"/>
+                <a:sym typeface="+mn-ea"/>
+              </a:rPr>
+              <a:t>amount=</a:t>
+            </a:r>
+            <a:r>
+              <a:rPr lang="en-US" altLang="zh-CN" sz="1400" dirty="0" err="1">
+                <a:solidFill>
+                  <a:srgbClr val="0070C0"/>
+                </a:solidFill>
+                <a:latin typeface="Times New Roman" panose="02020603050405020304" pitchFamily="18" charset="0"/>
+                <a:cs typeface="Times New Roman" panose="02020603050405020304" pitchFamily="18" charset="0"/>
+                <a:sym typeface="+mn-ea"/>
+              </a:rPr>
+              <a:t>aaaa</a:t>
+            </a:r>
+            <a:r>
+              <a:rPr lang="en-US" altLang="zh-CN" sz="1400" dirty="0" err="1">
+                <a:latin typeface="Times New Roman" panose="02020603050405020304" pitchFamily="18" charset="0"/>
+                <a:cs typeface="Times New Roman" panose="02020603050405020304" pitchFamily="18" charset="0"/>
+                <a:sym typeface="+mn-ea"/>
+              </a:rPr>
+              <a:t>&amp;description</a:t>
+            </a:r>
+            <a:r>
+              <a:rPr lang="en-US" altLang="zh-CN" sz="1400" dirty="0">
+                <a:latin typeface="Times New Roman" panose="02020603050405020304" pitchFamily="18" charset="0"/>
+                <a:cs typeface="Times New Roman" panose="02020603050405020304" pitchFamily="18" charset="0"/>
+                <a:sym typeface="+mn-ea"/>
+              </a:rPr>
+              <a:t>=</a:t>
+            </a:r>
+            <a:r>
+              <a:rPr lang="en-US" altLang="zh-CN" sz="1400" dirty="0" err="1">
+                <a:solidFill>
+                  <a:srgbClr val="0070C0"/>
+                </a:solidFill>
+                <a:latin typeface="Times New Roman" panose="02020603050405020304" pitchFamily="18" charset="0"/>
+                <a:cs typeface="Times New Roman" panose="02020603050405020304" pitchFamily="18" charset="0"/>
+                <a:sym typeface="+mn-ea"/>
+              </a:rPr>
+              <a:t>bbbb</a:t>
+            </a:r>
+            <a:r>
+              <a:rPr lang="en-US" altLang="zh-CN" sz="1400" dirty="0" err="1">
+                <a:latin typeface="Times New Roman" panose="02020603050405020304" pitchFamily="18" charset="0"/>
+                <a:cs typeface="Times New Roman" panose="02020603050405020304" pitchFamily="18" charset="0"/>
+                <a:sym typeface="+mn-ea"/>
+              </a:rPr>
+              <a:t>&amp;order_id</a:t>
+            </a:r>
+            <a:r>
+              <a:rPr lang="en-US" altLang="zh-CN" sz="1400" dirty="0">
+                <a:latin typeface="Times New Roman" panose="02020603050405020304" pitchFamily="18" charset="0"/>
+                <a:cs typeface="Times New Roman" panose="02020603050405020304" pitchFamily="18" charset="0"/>
+                <a:sym typeface="+mn-ea"/>
+              </a:rPr>
+              <a:t>=</a:t>
+            </a:r>
+            <a:r>
+              <a:rPr lang="en-US" altLang="zh-CN" sz="1400" dirty="0" err="1">
+                <a:solidFill>
+                  <a:srgbClr val="C00000"/>
+                </a:solidFill>
+                <a:latin typeface="Times New Roman" panose="02020603050405020304" pitchFamily="18" charset="0"/>
+                <a:cs typeface="Times New Roman" panose="02020603050405020304" pitchFamily="18" charset="0"/>
+                <a:sym typeface="+mn-ea"/>
+              </a:rPr>
+              <a:t>xxxx</a:t>
+            </a:r>
+            <a:r>
+              <a:rPr lang="en-US" altLang="zh-CN" sz="1400" dirty="0" err="1">
+                <a:latin typeface="Times New Roman" panose="02020603050405020304" pitchFamily="18" charset="0"/>
+                <a:cs typeface="Times New Roman" panose="02020603050405020304" pitchFamily="18" charset="0"/>
+                <a:sym typeface="+mn-ea"/>
+              </a:rPr>
+              <a:t>&amp;sign</a:t>
+            </a:r>
+            <a:r>
+              <a:rPr lang="en-US" altLang="zh-CN" sz="1400" dirty="0">
+                <a:latin typeface="Times New Roman" panose="02020603050405020304" pitchFamily="18" charset="0"/>
+                <a:cs typeface="Times New Roman" panose="02020603050405020304" pitchFamily="18" charset="0"/>
+                <a:sym typeface="+mn-ea"/>
+              </a:rPr>
+              <a:t>=</a:t>
+            </a:r>
+            <a:r>
+              <a:rPr lang="en-US" altLang="zh-CN" sz="1400" dirty="0">
+                <a:solidFill>
+                  <a:srgbClr val="C00000"/>
+                </a:solidFill>
+                <a:latin typeface="Times New Roman" panose="02020603050405020304" pitchFamily="18" charset="0"/>
+                <a:cs typeface="Times New Roman" panose="02020603050405020304" pitchFamily="18" charset="0"/>
+                <a:sym typeface="+mn-ea"/>
+              </a:rPr>
+              <a:t>……</a:t>
+            </a:r>
+          </a:p>
+        </p:txBody>
+      </p:sp>
+      <p:grpSp>
+        <p:nvGrpSpPr>
+          <p:cNvPr id="15" name="组合 14">
+            <a:extLst>
+              <a:ext uri="{FF2B5EF4-FFF2-40B4-BE49-F238E27FC236}">
+                <a16:creationId xmlns:a16="http://schemas.microsoft.com/office/drawing/2014/main" id="{B49626E9-A170-483A-8192-A438A64DC0B5}"/>
+              </a:ext>
+            </a:extLst>
+          </p:cNvPr>
+          <p:cNvGrpSpPr/>
+          <p:nvPr/>
+        </p:nvGrpSpPr>
+        <p:grpSpPr>
+          <a:xfrm>
+            <a:off x="4727551" y="1466134"/>
+            <a:ext cx="2471420" cy="886102"/>
+            <a:chOff x="4727551" y="1466134"/>
+            <a:chExt cx="2471420" cy="886102"/>
+          </a:xfrm>
+        </p:grpSpPr>
+        <p:grpSp>
+          <p:nvGrpSpPr>
+            <p:cNvPr id="12" name="组合 11">
+              <a:extLst>
+                <a:ext uri="{FF2B5EF4-FFF2-40B4-BE49-F238E27FC236}">
+                  <a16:creationId xmlns:a16="http://schemas.microsoft.com/office/drawing/2014/main" id="{C6DEC1F2-B4D7-4BCD-A1A3-2C921BDE1484}"/>
+                </a:ext>
+              </a:extLst>
+            </p:cNvPr>
+            <p:cNvGrpSpPr/>
+            <p:nvPr/>
+          </p:nvGrpSpPr>
+          <p:grpSpPr>
+            <a:xfrm>
+              <a:off x="5558302" y="1466134"/>
+              <a:ext cx="840740" cy="487825"/>
+              <a:chOff x="5558302" y="1501789"/>
+              <a:chExt cx="840740" cy="487825"/>
+            </a:xfrm>
+          </p:grpSpPr>
+          <p:grpSp>
+            <p:nvGrpSpPr>
+              <p:cNvPr id="43" name="组合 42"/>
+              <p:cNvGrpSpPr>
+                <a:grpSpLocks noChangeAspect="1"/>
+              </p:cNvGrpSpPr>
+              <p:nvPr/>
+            </p:nvGrpSpPr>
+            <p:grpSpPr>
+              <a:xfrm>
+                <a:off x="5558302" y="1501789"/>
+                <a:ext cx="475615" cy="470535"/>
+                <a:chOff x="4445000" y="739632"/>
+                <a:chExt cx="375710" cy="371203"/>
+              </a:xfrm>
+              <a:solidFill>
+                <a:srgbClr val="AC1F18"/>
+              </a:solidFill>
+            </p:grpSpPr>
+            <p:sp>
+              <p:nvSpPr>
+                <p:cNvPr id="44" name="矩形: 圆角 63"/>
+                <p:cNvSpPr/>
+                <p:nvPr/>
+              </p:nvSpPr>
+              <p:spPr>
+                <a:xfrm>
+                  <a:off x="4445000" y="740833"/>
+                  <a:ext cx="156634" cy="156634"/>
+                </a:xfrm>
+                <a:prstGeom prst="roundRect">
+                  <a:avLst/>
+                </a:prstGeom>
+                <a:grpFill/>
+                <a:ln w="38100">
+                  <a:solidFill>
+                    <a:srgbClr val="AC1F18"/>
+                  </a:solidFill>
+                </a:ln>
+              </p:spPr>
+              <p:style>
+                <a:lnRef idx="2">
+                  <a:schemeClr val="accent1">
+                    <a:shade val="50000"/>
+                  </a:schemeClr>
+                </a:lnRef>
+                <a:fillRef idx="1">
+                  <a:schemeClr val="accent1"/>
+                </a:fillRef>
+                <a:effectRef idx="0">
+                  <a:schemeClr val="accent1"/>
+                </a:effectRef>
+                <a:fontRef idx="minor">
+                  <a:schemeClr val="lt1"/>
+                </a:fontRef>
+              </p:style>
+              <p:txBody>
+                <a:bodyPr rtlCol="0" anchor="ctr"/>
+                <a:lstStyle/>
+                <a:p>
+                  <a:pPr algn="ctr"/>
+                  <a:endParaRPr lang="zh-CN" altLang="en-US">
+                    <a:latin typeface="Times New Roman" panose="02020603050405020304" pitchFamily="18" charset="0"/>
+                    <a:cs typeface="Times New Roman" panose="02020603050405020304" pitchFamily="18" charset="0"/>
+                  </a:endParaRPr>
+                </a:p>
+              </p:txBody>
+            </p:sp>
+            <p:sp>
+              <p:nvSpPr>
+                <p:cNvPr id="45" name="矩形: 圆角 64"/>
+                <p:cNvSpPr/>
+                <p:nvPr/>
+              </p:nvSpPr>
+              <p:spPr>
+                <a:xfrm>
+                  <a:off x="4445000" y="954201"/>
+                  <a:ext cx="156634" cy="156634"/>
+                </a:xfrm>
+                <a:prstGeom prst="roundRect">
+                  <a:avLst/>
+                </a:prstGeom>
+                <a:grpFill/>
+                <a:ln w="38100">
+                  <a:solidFill>
+                    <a:srgbClr val="AC1F18"/>
+                  </a:solidFill>
+                </a:ln>
+              </p:spPr>
+              <p:style>
+                <a:lnRef idx="2">
+                  <a:schemeClr val="accent1">
+                    <a:shade val="50000"/>
+                  </a:schemeClr>
+                </a:lnRef>
+                <a:fillRef idx="1">
+                  <a:schemeClr val="accent1"/>
+                </a:fillRef>
+                <a:effectRef idx="0">
+                  <a:schemeClr val="accent1"/>
+                </a:effectRef>
+                <a:fontRef idx="minor">
+                  <a:schemeClr val="lt1"/>
+                </a:fontRef>
+              </p:style>
+              <p:txBody>
+                <a:bodyPr rtlCol="0" anchor="ctr"/>
+                <a:lstStyle/>
+                <a:p>
+                  <a:pPr algn="ctr"/>
+                  <a:endParaRPr lang="zh-CN" altLang="en-US">
+                    <a:latin typeface="Times New Roman" panose="02020603050405020304" pitchFamily="18" charset="0"/>
+                    <a:cs typeface="Times New Roman" panose="02020603050405020304" pitchFamily="18" charset="0"/>
+                  </a:endParaRPr>
+                </a:p>
+              </p:txBody>
+            </p:sp>
+            <p:sp>
+              <p:nvSpPr>
+                <p:cNvPr id="46" name="矩形: 圆角 65"/>
+                <p:cNvSpPr/>
+                <p:nvPr/>
+              </p:nvSpPr>
+              <p:spPr>
+                <a:xfrm rot="1800000">
+                  <a:off x="4672028" y="739632"/>
+                  <a:ext cx="145198" cy="138592"/>
+                </a:xfrm>
+                <a:prstGeom prst="roundRect">
+                  <a:avLst/>
+                </a:prstGeom>
+                <a:noFill/>
+                <a:ln w="57150">
+                  <a:solidFill>
+                    <a:srgbClr val="AC1F18"/>
+                  </a:solidFill>
+                </a:ln>
+                <a:extLst>
+                  <a:ext uri="{909E8E84-426E-40DD-AFC4-6F175D3DCCD1}">
+                    <a14:hiddenFill xmlns:a14="http://schemas.microsoft.com/office/drawing/2010/main">
+                      <a:grpFill/>
+                    </a14:hiddenFill>
+                  </a:ext>
+                </a:extLst>
+              </p:spPr>
+              <p:style>
+                <a:lnRef idx="2">
+                  <a:schemeClr val="accent1">
+                    <a:shade val="50000"/>
+                  </a:schemeClr>
+                </a:lnRef>
+                <a:fillRef idx="1">
+                  <a:schemeClr val="accent1"/>
+                </a:fillRef>
+                <a:effectRef idx="0">
+                  <a:schemeClr val="accent1"/>
+                </a:effectRef>
+                <a:fontRef idx="minor">
+                  <a:schemeClr val="lt1"/>
+                </a:fontRef>
+              </p:style>
+              <p:txBody>
+                <a:bodyPr rtlCol="0" anchor="ctr"/>
+                <a:lstStyle/>
+                <a:p>
+                  <a:pPr algn="ctr"/>
+                  <a:endParaRPr lang="zh-CN" altLang="en-US">
+                    <a:latin typeface="Times New Roman" panose="02020603050405020304" pitchFamily="18" charset="0"/>
+                    <a:cs typeface="Times New Roman" panose="02020603050405020304" pitchFamily="18" charset="0"/>
+                  </a:endParaRPr>
+                </a:p>
+              </p:txBody>
+            </p:sp>
+            <p:sp>
+              <p:nvSpPr>
+                <p:cNvPr id="47" name="矩形: 圆角 66"/>
+                <p:cNvSpPr/>
+                <p:nvPr/>
+              </p:nvSpPr>
+              <p:spPr>
+                <a:xfrm>
+                  <a:off x="4664075" y="954201"/>
+                  <a:ext cx="156635" cy="156634"/>
+                </a:xfrm>
+                <a:prstGeom prst="roundRect">
+                  <a:avLst/>
+                </a:prstGeom>
+                <a:grpFill/>
+                <a:ln w="38100">
+                  <a:solidFill>
+                    <a:srgbClr val="AC1F18"/>
+                  </a:solidFill>
+                </a:ln>
+              </p:spPr>
+              <p:style>
+                <a:lnRef idx="2">
+                  <a:schemeClr val="accent1">
+                    <a:shade val="50000"/>
+                  </a:schemeClr>
+                </a:lnRef>
+                <a:fillRef idx="1">
+                  <a:schemeClr val="accent1"/>
+                </a:fillRef>
+                <a:effectRef idx="0">
+                  <a:schemeClr val="accent1"/>
+                </a:effectRef>
+                <a:fontRef idx="minor">
+                  <a:schemeClr val="lt1"/>
+                </a:fontRef>
+              </p:style>
+              <p:txBody>
+                <a:bodyPr rtlCol="0" anchor="ctr"/>
+                <a:lstStyle/>
+                <a:p>
+                  <a:pPr algn="ctr"/>
+                  <a:endParaRPr lang="zh-CN" altLang="en-US">
+                    <a:latin typeface="Times New Roman" panose="02020603050405020304" pitchFamily="18" charset="0"/>
+                    <a:cs typeface="Times New Roman" panose="02020603050405020304" pitchFamily="18" charset="0"/>
+                  </a:endParaRPr>
+                </a:p>
+              </p:txBody>
+            </p:sp>
+          </p:grpSp>
+          <p:pic>
+            <p:nvPicPr>
+              <p:cNvPr id="59" name="图片 58" descr="恶魔"/>
+              <p:cNvPicPr>
+                <a:picLocks noChangeAspect="1"/>
+              </p:cNvPicPr>
+              <p:nvPr/>
+            </p:nvPicPr>
+            <p:blipFill>
+              <a:blip r:embed="rId3">
+                <a:extLst>
+                  <a:ext uri="{96DAC541-7B7A-43D3-8B79-37D633B846F1}">
+                    <asvg:svgBlip xmlns:asvg="http://schemas.microsoft.com/office/drawing/2016/SVG/main" r:embed="rId4"/>
+                  </a:ext>
+                </a:extLst>
+              </a:blip>
+              <a:stretch>
+                <a:fillRect/>
+              </a:stretch>
+            </p:blipFill>
+            <p:spPr>
+              <a:xfrm>
+                <a:off x="6061222" y="1651794"/>
+                <a:ext cx="337820" cy="337820"/>
+              </a:xfrm>
+              <a:prstGeom prst="rect">
+                <a:avLst/>
+              </a:prstGeom>
+            </p:spPr>
+          </p:pic>
+        </p:grpSp>
+        <p:sp>
+          <p:nvSpPr>
+            <p:cNvPr id="61" name="文本框 60">
+              <a:extLst>
+                <a:ext uri="{FF2B5EF4-FFF2-40B4-BE49-F238E27FC236}">
+                  <a16:creationId xmlns:a16="http://schemas.microsoft.com/office/drawing/2014/main" id="{5A3AEE4D-456A-4A6E-A378-A0288134920C}"/>
+                </a:ext>
+              </a:extLst>
+            </p:cNvPr>
+            <p:cNvSpPr txBox="1"/>
+            <p:nvPr/>
+          </p:nvSpPr>
+          <p:spPr>
+            <a:xfrm>
+              <a:off x="4727551" y="1979491"/>
+              <a:ext cx="2471420" cy="372745"/>
+            </a:xfrm>
+            <a:prstGeom prst="rect">
+              <a:avLst/>
+            </a:prstGeom>
+            <a:noFill/>
+          </p:spPr>
+          <p:txBody>
+            <a:bodyPr wrap="square" rtlCol="0">
+              <a:noAutofit/>
+            </a:bodyPr>
+            <a:lstStyle/>
+            <a:p>
+              <a:r>
+                <a:rPr lang="en-US" altLang="zh-CN" dirty="0">
+                  <a:latin typeface="Times New Roman" panose="02020603050405020304" pitchFamily="18" charset="0"/>
+                  <a:cs typeface="Times New Roman" panose="02020603050405020304" pitchFamily="18" charset="0"/>
+                </a:rPr>
+                <a:t>Malicious Application </a:t>
+              </a:r>
+            </a:p>
+          </p:txBody>
+        </p:sp>
+      </p:grpSp>
+      <p:grpSp>
+        <p:nvGrpSpPr>
+          <p:cNvPr id="16" name="组合 15">
+            <a:extLst>
+              <a:ext uri="{FF2B5EF4-FFF2-40B4-BE49-F238E27FC236}">
+                <a16:creationId xmlns:a16="http://schemas.microsoft.com/office/drawing/2014/main" id="{0C2D48F0-2C7A-4DBD-B316-585EB4A09EA7}"/>
+              </a:ext>
+            </a:extLst>
+          </p:cNvPr>
+          <p:cNvGrpSpPr/>
+          <p:nvPr/>
+        </p:nvGrpSpPr>
+        <p:grpSpPr>
+          <a:xfrm>
+            <a:off x="7503606" y="1350046"/>
+            <a:ext cx="2471420" cy="1002190"/>
+            <a:chOff x="7503606" y="1350046"/>
+            <a:chExt cx="2471420" cy="1002190"/>
+          </a:xfrm>
+        </p:grpSpPr>
+        <p:pic>
+          <p:nvPicPr>
+            <p:cNvPr id="25" name="图形 11"/>
+            <p:cNvPicPr>
+              <a:picLocks noChangeAspect="1"/>
+            </p:cNvPicPr>
+            <p:nvPr/>
+          </p:nvPicPr>
+          <p:blipFill>
+            <a:blip r:embed="rId15" cstate="print">
+              <a:extLst>
+                <a:ext uri="{28A0092B-C50C-407E-A947-70E740481C1C}">
+                  <a14:useLocalDpi xmlns:a14="http://schemas.microsoft.com/office/drawing/2010/main" val="0"/>
+                </a:ext>
+                <a:ext uri="{96DAC541-7B7A-43D3-8B79-37D633B846F1}">
+                  <asvg:svgBlip xmlns:asvg="http://schemas.microsoft.com/office/drawing/2016/SVG/main" r:embed="rId16"/>
+                </a:ext>
+              </a:extLst>
+            </a:blip>
+            <a:stretch>
+              <a:fillRect/>
+            </a:stretch>
+          </p:blipFill>
+          <p:spPr>
+            <a:xfrm>
+              <a:off x="8262435" y="1350046"/>
+              <a:ext cx="720000" cy="720000"/>
+            </a:xfrm>
+            <a:prstGeom prst="rect">
+              <a:avLst/>
+            </a:prstGeom>
+          </p:spPr>
+        </p:pic>
+        <p:sp>
+          <p:nvSpPr>
+            <p:cNvPr id="64" name="文本框 63">
+              <a:extLst>
+                <a:ext uri="{FF2B5EF4-FFF2-40B4-BE49-F238E27FC236}">
+                  <a16:creationId xmlns:a16="http://schemas.microsoft.com/office/drawing/2014/main" id="{3907E2C6-18F4-4350-8443-C4E84657C15A}"/>
+                </a:ext>
+              </a:extLst>
+            </p:cNvPr>
+            <p:cNvSpPr txBox="1"/>
+            <p:nvPr/>
+          </p:nvSpPr>
+          <p:spPr>
+            <a:xfrm>
+              <a:off x="7503606" y="1979491"/>
+              <a:ext cx="2471420" cy="372745"/>
+            </a:xfrm>
+            <a:prstGeom prst="rect">
+              <a:avLst/>
+            </a:prstGeom>
+            <a:noFill/>
+          </p:spPr>
+          <p:txBody>
+            <a:bodyPr wrap="square" rtlCol="0">
+              <a:noAutofit/>
+            </a:bodyPr>
+            <a:lstStyle/>
+            <a:p>
+              <a:pPr algn="ctr"/>
+              <a:r>
+                <a:rPr lang="en-US" altLang="zh-CN" dirty="0">
+                  <a:latin typeface="Times New Roman" panose="02020603050405020304" pitchFamily="18" charset="0"/>
+                  <a:cs typeface="Times New Roman" panose="02020603050405020304" pitchFamily="18" charset="0"/>
+                </a:rPr>
+                <a:t>Payment Application</a:t>
+              </a:r>
+            </a:p>
+          </p:txBody>
+        </p:sp>
+      </p:grpSp>
     </p:spTree>
   </p:cSld>
   <p:clrMapOvr>
@@ -10057,7 +10148,14 @@
         <p:cNvGrpSpPr/>
         <p:nvPr/>
       </p:nvGrpSpPr>
-      <p:grpSpPr/>
+      <p:grpSpPr>
+        <a:xfrm>
+          <a:off x="0" y="0"/>
+          <a:ext cx="0" cy="0"/>
+          <a:chOff x="0" y="0"/>
+          <a:chExt cx="0" cy="0"/>
+        </a:xfrm>
+      </p:grpSpPr>
       <p:sp>
         <p:nvSpPr>
           <p:cNvPr id="38" name="矩形 37"/>
@@ -10097,6 +10195,7 @@
         </p:style>
         <p:txBody>
           <a:bodyPr rtlCol="0" anchor="ctr"/>
+          <a:lstStyle/>
           <a:p>
             <a:pPr algn="ctr"/>
             <a:endParaRPr lang="zh-CN" altLang="en-US">
@@ -10147,6 +10246,7 @@
         </p:style>
         <p:txBody>
           <a:bodyPr rtlCol="0" anchor="ctr"/>
+          <a:lstStyle/>
           <a:p>
             <a:pPr algn="ctr"/>
             <a:endParaRPr lang="zh-CN" altLang="en-US">
@@ -10235,6 +10335,7 @@
         </p:style>
         <p:txBody>
           <a:bodyPr rtlCol="0" anchor="ctr"/>
+          <a:lstStyle/>
           <a:p>
             <a:pPr algn="ctr"/>
             <a:endParaRPr lang="zh-CN" altLang="en-US">
@@ -10487,6 +10588,7 @@
           <a:bodyPr wrap="square" rtlCol="0">
             <a:noAutofit/>
           </a:bodyPr>
+          <a:lstStyle/>
           <a:p>
             <a:pPr algn="ctr"/>
             <a:r>
@@ -10496,10 +10598,6 @@
               </a:rPr>
               <a:t>Merchant Application</a:t>
             </a:r>
-            <a:endParaRPr lang="en-US" altLang="zh-CN" sz="1200">
-              <a:latin typeface="Times New Roman" panose="02020603050405020304" charset="0"/>
-              <a:cs typeface="Times New Roman" panose="02020603050405020304" charset="0"/>
-            </a:endParaRPr>
           </a:p>
         </p:txBody>
       </p:sp>
@@ -10512,13 +10610,13 @@
           <p:nvPr/>
         </p:nvPicPr>
         <p:blipFill>
-          <a:blip r:embed="rId1" cstate="print">
+          <a:blip r:embed="rId3" cstate="print">
             <a:extLst>
               <a:ext uri="{28A0092B-C50C-407E-A947-70E740481C1C}">
                 <a14:useLocalDpi xmlns:a14="http://schemas.microsoft.com/office/drawing/2010/main" val="0"/>
               </a:ext>
               <a:ext uri="{96DAC541-7B7A-43D3-8B79-37D633B846F1}">
-                <asvg:svgBlip xmlns:asvg="http://schemas.microsoft.com/office/drawing/2016/SVG/main" r:embed="rId2"/>
+                <asvg:svgBlip xmlns:asvg="http://schemas.microsoft.com/office/drawing/2016/SVG/main" r:embed="rId4"/>
               </a:ext>
             </a:extLst>
           </a:blip>
@@ -10556,6 +10654,7 @@
           <a:bodyPr wrap="square" rtlCol="0">
             <a:noAutofit/>
           </a:bodyPr>
+          <a:lstStyle/>
           <a:p>
             <a:pPr algn="ctr"/>
             <a:r>
@@ -10565,10 +10664,6 @@
               </a:rPr>
               <a:t>Payment Application</a:t>
             </a:r>
-            <a:endParaRPr lang="en-US" altLang="zh-CN" sz="1200">
-              <a:latin typeface="Times New Roman" panose="02020603050405020304" charset="0"/>
-              <a:cs typeface="Times New Roman" panose="02020603050405020304" charset="0"/>
-            </a:endParaRPr>
           </a:p>
         </p:txBody>
       </p:sp>
@@ -10613,6 +10708,7 @@
         </p:style>
         <p:txBody>
           <a:bodyPr rtlCol="0" anchor="ctr"/>
+          <a:lstStyle/>
           <a:p>
             <a:pPr algn="ctr"/>
             <a:endParaRPr lang="zh-CN" altLang="en-US">
@@ -10667,6 +10763,7 @@
         </p:style>
         <p:txBody>
           <a:bodyPr rtlCol="0" anchor="ctr"/>
+          <a:lstStyle/>
           <a:p>
             <a:pPr algn="ctr"/>
             <a:endParaRPr lang="zh-CN" altLang="en-US">
@@ -10717,6 +10814,7 @@
         </p:style>
         <p:txBody>
           <a:bodyPr rtlCol="0" anchor="ctr"/>
+          <a:lstStyle/>
           <a:p>
             <a:pPr algn="ctr"/>
             <a:endParaRPr lang="zh-CN" altLang="en-US">
@@ -10746,6 +10844,7 @@
           <a:bodyPr wrap="square" rtlCol="0">
             <a:noAutofit/>
           </a:bodyPr>
+          <a:lstStyle/>
           <a:p>
             <a:pPr algn="ctr"/>
             <a:r>
@@ -10755,10 +10854,6 @@
               </a:rPr>
               <a:t>Malicious Application </a:t>
             </a:r>
-            <a:endParaRPr lang="en-US" altLang="zh-CN" sz="1200">
-              <a:latin typeface="Times New Roman" panose="02020603050405020304" charset="0"/>
-              <a:cs typeface="Times New Roman" panose="02020603050405020304" charset="0"/>
-            </a:endParaRPr>
           </a:p>
         </p:txBody>
       </p:sp>
@@ -10818,6 +10913,7 @@
           <a:bodyPr wrap="square" rtlCol="0">
             <a:noAutofit/>
           </a:bodyPr>
+          <a:lstStyle/>
           <a:p>
             <a:r>
               <a:rPr lang="en-US" altLang="zh-CN">
@@ -10826,10 +10922,6 @@
               </a:rPr>
               <a:t>S1</a:t>
             </a:r>
-            <a:endParaRPr lang="en-US" altLang="zh-CN">
-              <a:latin typeface="Times New Roman" panose="02020603050405020304" charset="0"/>
-              <a:cs typeface="Times New Roman" panose="02020603050405020304" charset="0"/>
-            </a:endParaRPr>
           </a:p>
         </p:txBody>
       </p:sp>
@@ -10853,6 +10945,7 @@
           <a:bodyPr wrap="square" rtlCol="0">
             <a:noAutofit/>
           </a:bodyPr>
+          <a:lstStyle/>
           <a:p>
             <a:pPr algn="ctr"/>
             <a:r>
@@ -11016,6 +11109,7 @@
           <a:bodyPr wrap="square" rtlCol="0">
             <a:spAutoFit/>
           </a:bodyPr>
+          <a:lstStyle/>
           <a:p>
             <a:r>
               <a:rPr lang="en-US" altLang="zh-CN">
@@ -11024,10 +11118,6 @@
               </a:rPr>
               <a:t>S2</a:t>
             </a:r>
-            <a:endParaRPr lang="en-US" altLang="zh-CN">
-              <a:latin typeface="Times New Roman" panose="02020603050405020304" charset="0"/>
-              <a:cs typeface="Times New Roman" panose="02020603050405020304" charset="0"/>
-            </a:endParaRPr>
           </a:p>
         </p:txBody>
       </p:sp>
@@ -11051,6 +11141,7 @@
           <a:bodyPr wrap="square" rtlCol="0">
             <a:noAutofit/>
           </a:bodyPr>
+          <a:lstStyle/>
           <a:p>
             <a:r>
               <a:rPr lang="en-US" altLang="zh-CN">
@@ -11059,10 +11150,6 @@
               </a:rPr>
               <a:t>S3</a:t>
             </a:r>
-            <a:endParaRPr lang="en-US" altLang="zh-CN">
-              <a:latin typeface="Times New Roman" panose="02020603050405020304" charset="0"/>
-              <a:cs typeface="Times New Roman" panose="02020603050405020304" charset="0"/>
-            </a:endParaRPr>
           </a:p>
         </p:txBody>
       </p:sp>
@@ -11086,6 +11173,7 @@
           <a:bodyPr wrap="square" rtlCol="0">
             <a:noAutofit/>
           </a:bodyPr>
+          <a:lstStyle/>
           <a:p>
             <a:pPr algn="ctr"/>
             <a:r>
@@ -11098,13 +11186,6 @@
               </a:rPr>
               <a:t>Send payment request</a:t>
             </a:r>
-            <a:endParaRPr lang="en-US" altLang="zh-CN" sz="1400" b="1">
-              <a:solidFill>
-                <a:schemeClr val="tx1"/>
-              </a:solidFill>
-              <a:latin typeface="Times New Roman" panose="02020603050405020304" charset="0"/>
-              <a:cs typeface="Times New Roman" panose="02020603050405020304" charset="0"/>
-            </a:endParaRPr>
           </a:p>
         </p:txBody>
       </p:sp>
@@ -11128,6 +11209,7 @@
           <a:bodyPr wrap="square" rtlCol="0">
             <a:noAutofit/>
           </a:bodyPr>
+          <a:lstStyle/>
           <a:p>
             <a:pPr algn="ctr"/>
             <a:r>
@@ -11137,10 +11219,6 @@
               </a:rPr>
               <a:t>Order parameters</a:t>
             </a:r>
-            <a:endParaRPr lang="en-US" altLang="zh-CN" sz="1400" b="1">
-              <a:latin typeface="Times New Roman" panose="02020603050405020304" charset="0"/>
-              <a:cs typeface="Times New Roman" panose="02020603050405020304" charset="0"/>
-            </a:endParaRPr>
           </a:p>
         </p:txBody>
       </p:sp>
@@ -11200,6 +11278,7 @@
           <a:bodyPr wrap="square" rtlCol="0">
             <a:noAutofit/>
           </a:bodyPr>
+          <a:lstStyle/>
           <a:p>
             <a:r>
               <a:rPr lang="en-US" altLang="zh-CN">
@@ -11208,10 +11287,6 @@
               </a:rPr>
               <a:t>S4</a:t>
             </a:r>
-            <a:endParaRPr lang="en-US" altLang="zh-CN">
-              <a:latin typeface="Times New Roman" panose="02020603050405020304" charset="0"/>
-              <a:cs typeface="Times New Roman" panose="02020603050405020304" charset="0"/>
-            </a:endParaRPr>
           </a:p>
         </p:txBody>
       </p:sp>
@@ -11235,6 +11310,7 @@
           <a:bodyPr wrap="square" rtlCol="0">
             <a:noAutofit/>
           </a:bodyPr>
+          <a:lstStyle/>
           <a:p>
             <a:pPr algn="ctr"/>
             <a:r>
@@ -11244,10 +11320,6 @@
               </a:rPr>
               <a:t>Tampered request</a:t>
             </a:r>
-            <a:endParaRPr lang="en-US" altLang="zh-CN" sz="1400" b="1">
-              <a:latin typeface="Times New Roman" panose="02020603050405020304" charset="0"/>
-              <a:cs typeface="Times New Roman" panose="02020603050405020304" charset="0"/>
-            </a:endParaRPr>
           </a:p>
         </p:txBody>
       </p:sp>
@@ -11290,15 +11362,6 @@
                 <a:srgbClr val="AC1F18"/>
               </a:solidFill>
             </a:ln>
-            <a:extLst>
-              <a:ext uri="{909E8E84-426E-40DD-AFC4-6F175D3DCCD1}">
-                <a14:hiddenFill xmlns:a14="http://schemas.microsoft.com/office/drawing/2010/main">
-                  <a:solidFill>
-                    <a:srgbClr val="AC1F18"/>
-                  </a:solidFill>
-                </a14:hiddenFill>
-              </a:ext>
-            </a:extLst>
           </p:spPr>
           <p:style>
             <a:lnRef idx="2">
@@ -11492,10 +11555,10 @@
           <p:nvPr/>
         </p:nvPicPr>
         <p:blipFill>
-          <a:blip r:embed="rId3">
+          <a:blip r:embed="rId5">
             <a:extLst>
               <a:ext uri="{96DAC541-7B7A-43D3-8B79-37D633B846F1}">
-                <asvg:svgBlip xmlns:asvg="http://schemas.microsoft.com/office/drawing/2016/SVG/main" r:embed="rId4"/>
+                <asvg:svgBlip xmlns:asvg="http://schemas.microsoft.com/office/drawing/2016/SVG/main" r:embed="rId6"/>
               </a:ext>
             </a:extLst>
           </a:blip>
@@ -11533,6 +11596,7 @@
           <a:bodyPr wrap="square" rtlCol="0">
             <a:noAutofit/>
           </a:bodyPr>
+          <a:lstStyle/>
           <a:p>
             <a:pPr algn="ctr"/>
             <a:r>
@@ -11545,13 +11609,6 @@
               </a:rPr>
               <a:t>Hijack Request</a:t>
             </a:r>
-            <a:endParaRPr lang="en-US" altLang="zh-CN" sz="1400" b="1">
-              <a:solidFill>
-                <a:schemeClr val="tx1"/>
-              </a:solidFill>
-              <a:latin typeface="Times New Roman" panose="02020603050405020304" charset="0"/>
-              <a:cs typeface="Times New Roman" panose="02020603050405020304" charset="0"/>
-            </a:endParaRPr>
           </a:p>
         </p:txBody>
       </p:sp>
@@ -11575,6 +11632,7 @@
           <a:bodyPr wrap="square" rtlCol="0">
             <a:noAutofit/>
           </a:bodyPr>
+          <a:lstStyle/>
           <a:p>
             <a:pPr algn="ctr"/>
             <a:r>
@@ -11692,10 +11750,10 @@
           <p:nvPr/>
         </p:nvPicPr>
         <p:blipFill>
-          <a:blip r:embed="rId5">
+          <a:blip r:embed="rId7">
             <a:extLst>
               <a:ext uri="{96DAC541-7B7A-43D3-8B79-37D633B846F1}">
-                <asvg:svgBlip xmlns:asvg="http://schemas.microsoft.com/office/drawing/2016/SVG/main" r:embed="rId6"/>
+                <asvg:svgBlip xmlns:asvg="http://schemas.microsoft.com/office/drawing/2016/SVG/main" r:embed="rId8"/>
               </a:ext>
             </a:extLst>
           </a:blip>
@@ -11754,6 +11812,7 @@
         </p:style>
         <p:txBody>
           <a:bodyPr rtlCol="0" anchor="ctr"/>
+          <a:lstStyle/>
           <a:p>
             <a:pPr algn="ctr"/>
             <a:r>
@@ -11766,13 +11825,6 @@
               </a:rPr>
               <a:t>Victim’s device</a:t>
             </a:r>
-            <a:endParaRPr lang="en-US" altLang="zh-CN" b="1">
-              <a:solidFill>
-                <a:schemeClr val="tx1"/>
-              </a:solidFill>
-              <a:latin typeface="Times New Roman" panose="02020603050405020304" charset="0"/>
-              <a:cs typeface="Times New Roman" panose="02020603050405020304" charset="0"/>
-            </a:endParaRPr>
           </a:p>
         </p:txBody>
       </p:sp>
@@ -11817,6 +11869,7 @@
         </p:style>
         <p:txBody>
           <a:bodyPr rtlCol="0" anchor="ctr"/>
+          <a:lstStyle/>
           <a:p>
             <a:pPr algn="ctr"/>
             <a:endParaRPr lang="zh-CN" altLang="en-US">
@@ -11874,6 +11927,7 @@
         </p:style>
         <p:txBody>
           <a:bodyPr rtlCol="0" anchor="ctr"/>
+          <a:lstStyle/>
           <a:p>
             <a:pPr algn="ctr"/>
             <a:r>
@@ -11886,13 +11940,6 @@
               </a:rPr>
               <a:t>Attacker’s device</a:t>
             </a:r>
-            <a:endParaRPr lang="en-US" altLang="zh-CN" b="1">
-              <a:solidFill>
-                <a:schemeClr val="tx1"/>
-              </a:solidFill>
-              <a:latin typeface="Times New Roman" panose="02020603050405020304" charset="0"/>
-              <a:cs typeface="Times New Roman" panose="02020603050405020304" charset="0"/>
-            </a:endParaRPr>
           </a:p>
         </p:txBody>
       </p:sp>
@@ -11941,6 +11988,7 @@
         </p:style>
         <p:txBody>
           <a:bodyPr rtlCol="0" anchor="ctr"/>
+          <a:lstStyle/>
           <a:p>
             <a:pPr algn="ctr"/>
             <a:endParaRPr lang="zh-CN" altLang="en-US">
@@ -11959,10 +12007,10 @@
           <p:nvPr/>
         </p:nvPicPr>
         <p:blipFill>
-          <a:blip r:embed="rId7">
+          <a:blip r:embed="rId9">
             <a:extLst>
               <a:ext uri="{96DAC541-7B7A-43D3-8B79-37D633B846F1}">
-                <asvg:svgBlip xmlns:asvg="http://schemas.microsoft.com/office/drawing/2016/SVG/main" r:embed="rId8"/>
+                <asvg:svgBlip xmlns:asvg="http://schemas.microsoft.com/office/drawing/2016/SVG/main" r:embed="rId10"/>
               </a:ext>
             </a:extLst>
           </a:blip>
@@ -11997,7 +12045,14 @@
         <p:cNvGrpSpPr/>
         <p:nvPr/>
       </p:nvGrpSpPr>
-      <p:grpSpPr/>
+      <p:grpSpPr>
+        <a:xfrm>
+          <a:off x="0" y="0"/>
+          <a:ext cx="0" cy="0"/>
+          <a:chOff x="0" y="0"/>
+          <a:chExt cx="0" cy="0"/>
+        </a:xfrm>
+      </p:grpSpPr>
       <p:grpSp>
         <p:nvGrpSpPr>
           <p:cNvPr id="7" name="组合 6"/>
@@ -12049,7 +12104,7 @@
                 <p:nvPr/>
               </p:nvPicPr>
               <p:blipFill rotWithShape="1">
-                <a:blip r:embed="rId1"/>
+                <a:blip r:embed="rId2"/>
                 <a:srcRect l="30132" t="10719" r="30559" b="12022"/>
                 <a:stretch>
                   <a:fillRect/>
@@ -12074,7 +12129,7 @@
                 <p:nvPr/>
               </p:nvPicPr>
               <p:blipFill rotWithShape="1">
-                <a:blip r:embed="rId2"/>
+                <a:blip r:embed="rId3"/>
                 <a:srcRect l="262" t="21" r="-17" b="31"/>
                 <a:stretch>
                   <a:fillRect/>
@@ -12240,10 +12295,10 @@
               <p:nvPr/>
             </p:nvPicPr>
             <p:blipFill>
-              <a:blip r:embed="rId3">
+              <a:blip r:embed="rId4">
                 <a:extLst>
                   <a:ext uri="{96DAC541-7B7A-43D3-8B79-37D633B846F1}">
-                    <asvg:svgBlip xmlns:asvg="http://schemas.microsoft.com/office/drawing/2016/SVG/main" r:embed="rId4"/>
+                    <asvg:svgBlip xmlns:asvg="http://schemas.microsoft.com/office/drawing/2016/SVG/main" r:embed="rId5"/>
                   </a:ext>
                 </a:extLst>
               </a:blip>
@@ -12300,7 +12355,7 @@
                 <p:nvPr/>
               </p:nvPicPr>
               <p:blipFill rotWithShape="1">
-                <a:blip r:embed="rId1"/>
+                <a:blip r:embed="rId2"/>
                 <a:srcRect l="30132" t="10719" r="30559" b="12022"/>
                 <a:stretch>
                   <a:fillRect/>
@@ -12325,7 +12380,7 @@
                 <p:nvPr/>
               </p:nvPicPr>
               <p:blipFill rotWithShape="1">
-                <a:blip r:embed="rId5"/>
+                <a:blip r:embed="rId6"/>
                 <a:srcRect l="117" t="-39" r="-220" b="-19"/>
                 <a:stretch>
                   <a:fillRect/>
@@ -12491,10 +12546,10 @@
               <p:nvPr/>
             </p:nvPicPr>
             <p:blipFill>
-              <a:blip r:embed="rId6">
+              <a:blip r:embed="rId7">
                 <a:extLst>
                   <a:ext uri="{96DAC541-7B7A-43D3-8B79-37D633B846F1}">
-                    <asvg:svgBlip xmlns:asvg="http://schemas.microsoft.com/office/drawing/2016/SVG/main" r:embed="rId7"/>
+                    <asvg:svgBlip xmlns:asvg="http://schemas.microsoft.com/office/drawing/2016/SVG/main" r:embed="rId8"/>
                   </a:ext>
                 </a:extLst>
               </a:blip>
@@ -12532,7 +12587,14 @@
         <p:cNvGrpSpPr/>
         <p:nvPr/>
       </p:nvGrpSpPr>
-      <p:grpSpPr/>
+      <p:grpSpPr>
+        <a:xfrm>
+          <a:off x="0" y="0"/>
+          <a:ext cx="0" cy="0"/>
+          <a:chOff x="0" y="0"/>
+          <a:chExt cx="0" cy="0"/>
+        </a:xfrm>
+      </p:grpSpPr>
       <p:grpSp>
         <p:nvGrpSpPr>
           <p:cNvPr id="4" name="组合 3"/>
@@ -12556,7 +12618,7 @@
             <p:nvPr/>
           </p:nvPicPr>
           <p:blipFill rotWithShape="1">
-            <a:blip r:embed="rId1"/>
+            <a:blip r:embed="rId2"/>
             <a:srcRect l="30132" t="10719" r="30559" b="12022"/>
             <a:stretch>
               <a:fillRect/>
@@ -12581,7 +12643,7 @@
             <p:nvPr/>
           </p:nvPicPr>
           <p:blipFill rotWithShape="1">
-            <a:blip r:embed="rId2">
+            <a:blip r:embed="rId3" cstate="print">
               <a:extLst>
                 <a:ext uri="{28A0092B-C50C-407E-A947-70E740481C1C}">
                   <a14:useLocalDpi xmlns:a14="http://schemas.microsoft.com/office/drawing/2010/main" val="0"/>
@@ -12767,7 +12829,7 @@
             <p:nvPr/>
           </p:nvPicPr>
           <p:blipFill rotWithShape="1">
-            <a:blip r:embed="rId1"/>
+            <a:blip r:embed="rId2"/>
             <a:srcRect l="30132" t="10719" r="30559" b="12022"/>
             <a:stretch>
               <a:fillRect/>
@@ -12792,7 +12854,7 @@
             <p:nvPr/>
           </p:nvPicPr>
           <p:blipFill rotWithShape="1">
-            <a:blip r:embed="rId3">
+            <a:blip r:embed="rId4">
               <a:extLst>
                 <a:ext uri="{28A0092B-C50C-407E-A947-70E740481C1C}">
                   <a14:useLocalDpi xmlns:a14="http://schemas.microsoft.com/office/drawing/2010/main" val="0"/>
@@ -12989,13 +13051,13 @@
           <p:nvPr/>
         </p:nvPicPr>
         <p:blipFill>
-          <a:blip r:embed="rId1" cstate="print">
+          <a:blip r:embed="rId2" cstate="print">
             <a:extLst>
               <a:ext uri="{28A0092B-C50C-407E-A947-70E740481C1C}">
                 <a14:useLocalDpi xmlns:a14="http://schemas.microsoft.com/office/drawing/2010/main" val="0"/>
               </a:ext>
               <a:ext uri="{96DAC541-7B7A-43D3-8B79-37D633B846F1}">
-                <asvg:svgBlip xmlns:asvg="http://schemas.microsoft.com/office/drawing/2016/SVG/main" r:embed="rId2"/>
+                <asvg:svgBlip xmlns:asvg="http://schemas.microsoft.com/office/drawing/2016/SVG/main" r:embed="rId3"/>
               </a:ext>
             </a:extLst>
           </a:blip>
@@ -13022,13 +13084,13 @@
           <p:nvPr/>
         </p:nvPicPr>
         <p:blipFill>
-          <a:blip r:embed="rId3" cstate="print">
+          <a:blip r:embed="rId4" cstate="print">
             <a:extLst>
               <a:ext uri="{28A0092B-C50C-407E-A947-70E740481C1C}">
                 <a14:useLocalDpi xmlns:a14="http://schemas.microsoft.com/office/drawing/2010/main" val="0"/>
               </a:ext>
               <a:ext uri="{96DAC541-7B7A-43D3-8B79-37D633B846F1}">
-                <asvg:svgBlip xmlns:asvg="http://schemas.microsoft.com/office/drawing/2016/SVG/main" r:embed="rId4"/>
+                <asvg:svgBlip xmlns:asvg="http://schemas.microsoft.com/office/drawing/2016/SVG/main" r:embed="rId5"/>
               </a:ext>
             </a:extLst>
           </a:blip>
@@ -13102,13 +13164,13 @@
           <p:nvPr/>
         </p:nvPicPr>
         <p:blipFill>
-          <a:blip r:embed="rId5" cstate="print">
+          <a:blip r:embed="rId6" cstate="print">
             <a:extLst>
               <a:ext uri="{28A0092B-C50C-407E-A947-70E740481C1C}">
                 <a14:useLocalDpi xmlns:a14="http://schemas.microsoft.com/office/drawing/2010/main" val="0"/>
               </a:ext>
               <a:ext uri="{96DAC541-7B7A-43D3-8B79-37D633B846F1}">
-                <asvg:svgBlip xmlns:asvg="http://schemas.microsoft.com/office/drawing/2016/SVG/main" r:embed="rId6"/>
+                <asvg:svgBlip xmlns:asvg="http://schemas.microsoft.com/office/drawing/2016/SVG/main" r:embed="rId7"/>
               </a:ext>
             </a:extLst>
           </a:blip>
@@ -13135,13 +13197,13 @@
           <p:nvPr/>
         </p:nvPicPr>
         <p:blipFill>
-          <a:blip r:embed="rId7" cstate="print">
+          <a:blip r:embed="rId8" cstate="print">
             <a:extLst>
               <a:ext uri="{28A0092B-C50C-407E-A947-70E740481C1C}">
                 <a14:useLocalDpi xmlns:a14="http://schemas.microsoft.com/office/drawing/2010/main" val="0"/>
               </a:ext>
               <a:ext uri="{96DAC541-7B7A-43D3-8B79-37D633B846F1}">
-                <asvg:svgBlip xmlns:asvg="http://schemas.microsoft.com/office/drawing/2016/SVG/main" r:embed="rId8"/>
+                <asvg:svgBlip xmlns:asvg="http://schemas.microsoft.com/office/drawing/2016/SVG/main" r:embed="rId9"/>
               </a:ext>
             </a:extLst>
           </a:blip>
@@ -13168,13 +13230,13 @@
           <p:nvPr/>
         </p:nvPicPr>
         <p:blipFill>
-          <a:blip r:embed="rId9" cstate="print">
+          <a:blip r:embed="rId10" cstate="print">
             <a:extLst>
               <a:ext uri="{28A0092B-C50C-407E-A947-70E740481C1C}">
                 <a14:useLocalDpi xmlns:a14="http://schemas.microsoft.com/office/drawing/2010/main" val="0"/>
               </a:ext>
               <a:ext uri="{96DAC541-7B7A-43D3-8B79-37D633B846F1}">
-                <asvg:svgBlip xmlns:asvg="http://schemas.microsoft.com/office/drawing/2016/SVG/main" r:embed="rId10"/>
+                <asvg:svgBlip xmlns:asvg="http://schemas.microsoft.com/office/drawing/2016/SVG/main" r:embed="rId11"/>
               </a:ext>
             </a:extLst>
           </a:blip>
@@ -13201,13 +13263,13 @@
           <p:nvPr/>
         </p:nvPicPr>
         <p:blipFill>
-          <a:blip r:embed="rId11" cstate="print">
+          <a:blip r:embed="rId12" cstate="print">
             <a:extLst>
               <a:ext uri="{28A0092B-C50C-407E-A947-70E740481C1C}">
                 <a14:useLocalDpi xmlns:a14="http://schemas.microsoft.com/office/drawing/2010/main" val="0"/>
               </a:ext>
               <a:ext uri="{96DAC541-7B7A-43D3-8B79-37D633B846F1}">
-                <asvg:svgBlip xmlns:asvg="http://schemas.microsoft.com/office/drawing/2016/SVG/main" r:embed="rId12"/>
+                <asvg:svgBlip xmlns:asvg="http://schemas.microsoft.com/office/drawing/2016/SVG/main" r:embed="rId13"/>
               </a:ext>
             </a:extLst>
           </a:blip>
@@ -13234,13 +13296,13 @@
           <p:nvPr/>
         </p:nvPicPr>
         <p:blipFill>
-          <a:blip r:embed="rId9" cstate="print">
+          <a:blip r:embed="rId10" cstate="print">
             <a:extLst>
               <a:ext uri="{28A0092B-C50C-407E-A947-70E740481C1C}">
                 <a14:useLocalDpi xmlns:a14="http://schemas.microsoft.com/office/drawing/2010/main" val="0"/>
               </a:ext>
               <a:ext uri="{96DAC541-7B7A-43D3-8B79-37D633B846F1}">
-                <asvg:svgBlip xmlns:asvg="http://schemas.microsoft.com/office/drawing/2016/SVG/main" r:embed="rId10"/>
+                <asvg:svgBlip xmlns:asvg="http://schemas.microsoft.com/office/drawing/2016/SVG/main" r:embed="rId11"/>
               </a:ext>
             </a:extLst>
           </a:blip>
@@ -13267,13 +13329,13 @@
           <p:nvPr/>
         </p:nvPicPr>
         <p:blipFill>
-          <a:blip r:embed="rId13" cstate="print">
+          <a:blip r:embed="rId14" cstate="print">
             <a:extLst>
               <a:ext uri="{28A0092B-C50C-407E-A947-70E740481C1C}">
                 <a14:useLocalDpi xmlns:a14="http://schemas.microsoft.com/office/drawing/2010/main" val="0"/>
               </a:ext>
               <a:ext uri="{96DAC541-7B7A-43D3-8B79-37D633B846F1}">
-                <asvg:svgBlip xmlns:asvg="http://schemas.microsoft.com/office/drawing/2016/SVG/main" r:embed="rId14"/>
+                <asvg:svgBlip xmlns:asvg="http://schemas.microsoft.com/office/drawing/2016/SVG/main" r:embed="rId15"/>
               </a:ext>
             </a:extLst>
           </a:blip>
@@ -13906,13 +13968,13 @@
           <p:nvPr/>
         </p:nvPicPr>
         <p:blipFill>
-          <a:blip r:embed="rId1" cstate="print">
+          <a:blip r:embed="rId2" cstate="print">
             <a:extLst>
               <a:ext uri="{28A0092B-C50C-407E-A947-70E740481C1C}">
                 <a14:useLocalDpi xmlns:a14="http://schemas.microsoft.com/office/drawing/2010/main" val="0"/>
               </a:ext>
               <a:ext uri="{96DAC541-7B7A-43D3-8B79-37D633B846F1}">
-                <asvg:svgBlip xmlns:asvg="http://schemas.microsoft.com/office/drawing/2016/SVG/main" r:embed="rId2"/>
+                <asvg:svgBlip xmlns:asvg="http://schemas.microsoft.com/office/drawing/2016/SVG/main" r:embed="rId3"/>
               </a:ext>
             </a:extLst>
           </a:blip>
@@ -13939,13 +14001,13 @@
           <p:nvPr/>
         </p:nvPicPr>
         <p:blipFill>
-          <a:blip r:embed="rId3" cstate="print">
+          <a:blip r:embed="rId4" cstate="print">
             <a:extLst>
               <a:ext uri="{28A0092B-C50C-407E-A947-70E740481C1C}">
                 <a14:useLocalDpi xmlns:a14="http://schemas.microsoft.com/office/drawing/2010/main" val="0"/>
               </a:ext>
               <a:ext uri="{96DAC541-7B7A-43D3-8B79-37D633B846F1}">
-                <asvg:svgBlip xmlns:asvg="http://schemas.microsoft.com/office/drawing/2016/SVG/main" r:embed="rId4"/>
+                <asvg:svgBlip xmlns:asvg="http://schemas.microsoft.com/office/drawing/2016/SVG/main" r:embed="rId5"/>
               </a:ext>
             </a:extLst>
           </a:blip>
@@ -14019,13 +14081,13 @@
           <p:nvPr/>
         </p:nvPicPr>
         <p:blipFill>
-          <a:blip r:embed="rId5" cstate="print">
+          <a:blip r:embed="rId6" cstate="print">
             <a:extLst>
               <a:ext uri="{28A0092B-C50C-407E-A947-70E740481C1C}">
                 <a14:useLocalDpi xmlns:a14="http://schemas.microsoft.com/office/drawing/2010/main" val="0"/>
               </a:ext>
               <a:ext uri="{96DAC541-7B7A-43D3-8B79-37D633B846F1}">
-                <asvg:svgBlip xmlns:asvg="http://schemas.microsoft.com/office/drawing/2016/SVG/main" r:embed="rId6"/>
+                <asvg:svgBlip xmlns:asvg="http://schemas.microsoft.com/office/drawing/2016/SVG/main" r:embed="rId7"/>
               </a:ext>
             </a:extLst>
           </a:blip>
@@ -14052,13 +14114,13 @@
           <p:nvPr/>
         </p:nvPicPr>
         <p:blipFill>
-          <a:blip r:embed="rId7" cstate="print">
+          <a:blip r:embed="rId8" cstate="print">
             <a:extLst>
               <a:ext uri="{28A0092B-C50C-407E-A947-70E740481C1C}">
                 <a14:useLocalDpi xmlns:a14="http://schemas.microsoft.com/office/drawing/2010/main" val="0"/>
               </a:ext>
               <a:ext uri="{96DAC541-7B7A-43D3-8B79-37D633B846F1}">
-                <asvg:svgBlip xmlns:asvg="http://schemas.microsoft.com/office/drawing/2016/SVG/main" r:embed="rId8"/>
+                <asvg:svgBlip xmlns:asvg="http://schemas.microsoft.com/office/drawing/2016/SVG/main" r:embed="rId9"/>
               </a:ext>
             </a:extLst>
           </a:blip>
@@ -14085,13 +14147,13 @@
           <p:nvPr/>
         </p:nvPicPr>
         <p:blipFill>
-          <a:blip r:embed="rId9" cstate="print">
+          <a:blip r:embed="rId10" cstate="print">
             <a:extLst>
               <a:ext uri="{28A0092B-C50C-407E-A947-70E740481C1C}">
                 <a14:useLocalDpi xmlns:a14="http://schemas.microsoft.com/office/drawing/2010/main" val="0"/>
               </a:ext>
               <a:ext uri="{96DAC541-7B7A-43D3-8B79-37D633B846F1}">
-                <asvg:svgBlip xmlns:asvg="http://schemas.microsoft.com/office/drawing/2016/SVG/main" r:embed="rId10"/>
+                <asvg:svgBlip xmlns:asvg="http://schemas.microsoft.com/office/drawing/2016/SVG/main" r:embed="rId11"/>
               </a:ext>
             </a:extLst>
           </a:blip>
@@ -14118,13 +14180,13 @@
           <p:nvPr/>
         </p:nvPicPr>
         <p:blipFill>
-          <a:blip r:embed="rId11" cstate="print">
+          <a:blip r:embed="rId12" cstate="print">
             <a:extLst>
               <a:ext uri="{28A0092B-C50C-407E-A947-70E740481C1C}">
                 <a14:useLocalDpi xmlns:a14="http://schemas.microsoft.com/office/drawing/2010/main" val="0"/>
               </a:ext>
               <a:ext uri="{96DAC541-7B7A-43D3-8B79-37D633B846F1}">
-                <asvg:svgBlip xmlns:asvg="http://schemas.microsoft.com/office/drawing/2016/SVG/main" r:embed="rId12"/>
+                <asvg:svgBlip xmlns:asvg="http://schemas.microsoft.com/office/drawing/2016/SVG/main" r:embed="rId13"/>
               </a:ext>
             </a:extLst>
           </a:blip>
@@ -14151,13 +14213,13 @@
           <p:nvPr/>
         </p:nvPicPr>
         <p:blipFill>
-          <a:blip r:embed="rId9" cstate="print">
+          <a:blip r:embed="rId10" cstate="print">
             <a:extLst>
               <a:ext uri="{28A0092B-C50C-407E-A947-70E740481C1C}">
                 <a14:useLocalDpi xmlns:a14="http://schemas.microsoft.com/office/drawing/2010/main" val="0"/>
               </a:ext>
               <a:ext uri="{96DAC541-7B7A-43D3-8B79-37D633B846F1}">
-                <asvg:svgBlip xmlns:asvg="http://schemas.microsoft.com/office/drawing/2016/SVG/main" r:embed="rId10"/>
+                <asvg:svgBlip xmlns:asvg="http://schemas.microsoft.com/office/drawing/2016/SVG/main" r:embed="rId11"/>
               </a:ext>
             </a:extLst>
           </a:blip>
@@ -14184,13 +14246,13 @@
           <p:nvPr/>
         </p:nvPicPr>
         <p:blipFill>
-          <a:blip r:embed="rId13" cstate="print">
+          <a:blip r:embed="rId14" cstate="print">
             <a:extLst>
               <a:ext uri="{28A0092B-C50C-407E-A947-70E740481C1C}">
                 <a14:useLocalDpi xmlns:a14="http://schemas.microsoft.com/office/drawing/2010/main" val="0"/>
               </a:ext>
               <a:ext uri="{96DAC541-7B7A-43D3-8B79-37D633B846F1}">
-                <asvg:svgBlip xmlns:asvg="http://schemas.microsoft.com/office/drawing/2016/SVG/main" r:embed="rId14"/>
+                <asvg:svgBlip xmlns:asvg="http://schemas.microsoft.com/office/drawing/2016/SVG/main" r:embed="rId15"/>
               </a:ext>
             </a:extLst>
           </a:blip>
@@ -14553,10 +14615,10 @@
           <p:nvPr/>
         </p:nvPicPr>
         <p:blipFill>
-          <a:blip r:embed="rId15">
+          <a:blip r:embed="rId16">
             <a:extLst>
               <a:ext uri="{96DAC541-7B7A-43D3-8B79-37D633B846F1}">
-                <asvg:svgBlip xmlns:asvg="http://schemas.microsoft.com/office/drawing/2016/SVG/main" r:embed="rId16"/>
+                <asvg:svgBlip xmlns:asvg="http://schemas.microsoft.com/office/drawing/2016/SVG/main" r:embed="rId17"/>
               </a:ext>
             </a:extLst>
           </a:blip>
@@ -14861,6 +14923,8 @@
       </a:bgFillStyleLst>
     </a:fmtScheme>
   </a:themeElements>
+  <a:objectDefaults/>
+  <a:extraClrSchemeLst/>
   <a:extLst>
     <a:ext uri="{05A4C25C-085E-4340-85A3-A5531E510DB2}">
       <thm15:themeFamily xmlns:thm15="http://schemas.microsoft.com/office/thememl/2012/main" name="Office Theme" id="{62F939B6-93AF-4DB8-9C6B-D6C7DFDC589F}" vid="{4A3C46E8-61CC-4603-A589-7422A47A8E4A}"/>
@@ -15120,6 +15184,8 @@
       </a:bgFillStyleLst>
     </a:fmtScheme>
   </a:themeElements>
+  <a:objectDefaults/>
+  <a:extraClrSchemeLst/>
   <a:extLst>
     <a:ext uri="{05A4C25C-085E-4340-85A3-A5531E510DB2}">
       <thm15:themeFamily xmlns:thm15="http://schemas.microsoft.com/office/thememl/2012/main" name="Office Theme" id="{62F939B6-93AF-4DB8-9C6B-D6C7DFDC589F}" vid="{4A3C46E8-61CC-4603-A589-7422A47A8E4A}"/>

--- a/img-source/images.pptx
+++ b/img-source/images.pptx
@@ -5,22 +5,22 @@
     <p:sldMasterId id="2147483648" r:id="rId1"/>
   </p:sldMasterIdLst>
   <p:notesMasterIdLst>
-    <p:notesMasterId r:id="rId10"/>
+    <p:notesMasterId r:id="rId15"/>
   </p:notesMasterIdLst>
   <p:sldIdLst>
-    <p:sldId id="256" r:id="rId3"/>
-    <p:sldId id="260" r:id="rId4"/>
-    <p:sldId id="266" r:id="rId5"/>
-    <p:sldId id="270" r:id="rId6"/>
-    <p:sldId id="268" r:id="rId7"/>
-    <p:sldId id="259" r:id="rId8"/>
-    <p:sldId id="264" r:id="rId9"/>
-    <p:sldId id="261" r:id="rId11"/>
-    <p:sldId id="262" r:id="rId12"/>
-    <p:sldId id="265" r:id="rId13"/>
-    <p:sldId id="257" r:id="rId14"/>
-    <p:sldId id="258" r:id="rId15"/>
-    <p:sldId id="263" r:id="rId16"/>
+    <p:sldId id="256" r:id="rId2"/>
+    <p:sldId id="260" r:id="rId3"/>
+    <p:sldId id="266" r:id="rId4"/>
+    <p:sldId id="270" r:id="rId5"/>
+    <p:sldId id="268" r:id="rId6"/>
+    <p:sldId id="259" r:id="rId7"/>
+    <p:sldId id="264" r:id="rId8"/>
+    <p:sldId id="261" r:id="rId9"/>
+    <p:sldId id="262" r:id="rId10"/>
+    <p:sldId id="265" r:id="rId11"/>
+    <p:sldId id="257" r:id="rId12"/>
+    <p:sldId id="258" r:id="rId13"/>
+    <p:sldId id="263" r:id="rId14"/>
   </p:sldIdLst>
   <p:sldSz cx="12192000" cy="6858000"/>
   <p:notesSz cx="6858000" cy="9144000"/>
@@ -230,6 +230,7 @@
           <a:p>
             <a:fld id="{D2A48B96-639E-45A3-A0BA-2464DFDB1FAA}" type="datetimeFigureOut">
               <a:rPr lang="zh-CN" altLang="en-US" smtClean="0"/>
+              <a:t>2026/1/27</a:t>
             </a:fld>
             <a:endParaRPr lang="zh-CN" altLang="en-US"/>
           </a:p>
@@ -296,7 +297,6 @@
               <a:rPr lang="zh-CN" altLang="en-US"/>
               <a:t>单击此处编辑母版文本样式</a:t>
             </a:r>
-            <a:endParaRPr lang="zh-CN" altLang="en-US"/>
           </a:p>
           <a:p>
             <a:pPr lvl="1"/>
@@ -304,7 +304,6 @@
               <a:rPr lang="zh-CN" altLang="en-US"/>
               <a:t>第二级</a:t>
             </a:r>
-            <a:endParaRPr lang="zh-CN" altLang="en-US"/>
           </a:p>
           <a:p>
             <a:pPr lvl="2"/>
@@ -312,7 +311,6 @@
               <a:rPr lang="zh-CN" altLang="en-US"/>
               <a:t>第三级</a:t>
             </a:r>
-            <a:endParaRPr lang="zh-CN" altLang="en-US"/>
           </a:p>
           <a:p>
             <a:pPr lvl="3"/>
@@ -320,7 +318,6 @@
               <a:rPr lang="zh-CN" altLang="en-US"/>
               <a:t>第四级</a:t>
             </a:r>
-            <a:endParaRPr lang="zh-CN" altLang="en-US"/>
           </a:p>
           <a:p>
             <a:pPr lvl="4"/>
@@ -328,7 +325,6 @@
               <a:rPr lang="zh-CN" altLang="en-US"/>
               <a:t>第五级</a:t>
             </a:r>
-            <a:endParaRPr lang="zh-CN" altLang="en-US"/>
           </a:p>
         </p:txBody>
       </p:sp>
@@ -392,6 +388,7 @@
           <a:p>
             <a:fld id="{A6837353-30EB-4A48-80EB-173D804AEFBD}" type="slidenum">
               <a:rPr lang="zh-CN" altLang="en-US" smtClean="0"/>
+              <a:t>‹#›</a:t>
             </a:fld>
             <a:endParaRPr lang="zh-CN" altLang="en-US"/>
           </a:p>
@@ -652,7 +649,6 @@
               <a:rPr lang="zh-CN" altLang="en-US"/>
               <a:t>单击此处编辑母版标题样式</a:t>
             </a:r>
-            <a:endParaRPr lang="zh-CN" altLang="en-US"/>
           </a:p>
         </p:txBody>
       </p:sp>
@@ -717,7 +713,6 @@
               <a:rPr lang="zh-CN" altLang="en-US"/>
               <a:t>单击此处编辑母版副标题样式</a:t>
             </a:r>
-            <a:endParaRPr lang="zh-CN" altLang="en-US"/>
           </a:p>
         </p:txBody>
       </p:sp>
@@ -738,6 +733,7 @@
           <a:p>
             <a:fld id="{D997B5FA-0921-464F-AAE1-844C04324D75}" type="datetimeFigureOut">
               <a:rPr lang="zh-CN" altLang="en-US" smtClean="0"/>
+              <a:t>2026/1/27</a:t>
             </a:fld>
             <a:endParaRPr lang="zh-CN" altLang="en-US"/>
           </a:p>
@@ -779,6 +775,7 @@
           <a:p>
             <a:fld id="{565CE74E-AB26-4998-AD42-012C4C1AD076}" type="slidenum">
               <a:rPr lang="zh-CN" altLang="en-US" smtClean="0"/>
+              <a:t>‹#›</a:t>
             </a:fld>
             <a:endParaRPr lang="zh-CN" altLang="en-US"/>
           </a:p>
@@ -828,7 +825,6 @@
               <a:rPr lang="zh-CN" altLang="en-US"/>
               <a:t>单击此处编辑母版标题样式</a:t>
             </a:r>
-            <a:endParaRPr lang="zh-CN" altLang="en-US"/>
           </a:p>
         </p:txBody>
       </p:sp>
@@ -852,7 +848,6 @@
               <a:rPr lang="zh-CN" altLang="en-US"/>
               <a:t>单击此处编辑母版文本样式</a:t>
             </a:r>
-            <a:endParaRPr lang="zh-CN" altLang="en-US"/>
           </a:p>
           <a:p>
             <a:pPr lvl="1"/>
@@ -860,7 +855,6 @@
               <a:rPr lang="zh-CN" altLang="en-US"/>
               <a:t>第二级</a:t>
             </a:r>
-            <a:endParaRPr lang="zh-CN" altLang="en-US"/>
           </a:p>
           <a:p>
             <a:pPr lvl="2"/>
@@ -868,7 +862,6 @@
               <a:rPr lang="zh-CN" altLang="en-US"/>
               <a:t>第三级</a:t>
             </a:r>
-            <a:endParaRPr lang="zh-CN" altLang="en-US"/>
           </a:p>
           <a:p>
             <a:pPr lvl="3"/>
@@ -876,7 +869,6 @@
               <a:rPr lang="zh-CN" altLang="en-US"/>
               <a:t>第四级</a:t>
             </a:r>
-            <a:endParaRPr lang="zh-CN" altLang="en-US"/>
           </a:p>
           <a:p>
             <a:pPr lvl="4"/>
@@ -884,7 +876,6 @@
               <a:rPr lang="zh-CN" altLang="en-US"/>
               <a:t>第五级</a:t>
             </a:r>
-            <a:endParaRPr lang="zh-CN" altLang="en-US"/>
           </a:p>
         </p:txBody>
       </p:sp>
@@ -905,6 +896,7 @@
           <a:p>
             <a:fld id="{D997B5FA-0921-464F-AAE1-844C04324D75}" type="datetimeFigureOut">
               <a:rPr lang="zh-CN" altLang="en-US" smtClean="0"/>
+              <a:t>2026/1/27</a:t>
             </a:fld>
             <a:endParaRPr lang="zh-CN" altLang="en-US"/>
           </a:p>
@@ -946,6 +938,7 @@
           <a:p>
             <a:fld id="{565CE74E-AB26-4998-AD42-012C4C1AD076}" type="slidenum">
               <a:rPr lang="zh-CN" altLang="en-US" smtClean="0"/>
+              <a:t>‹#›</a:t>
             </a:fld>
             <a:endParaRPr lang="zh-CN" altLang="en-US"/>
           </a:p>
@@ -1000,7 +993,6 @@
               <a:rPr lang="zh-CN" altLang="en-US"/>
               <a:t>单击此处编辑母版标题样式</a:t>
             </a:r>
-            <a:endParaRPr lang="zh-CN" altLang="en-US"/>
           </a:p>
         </p:txBody>
       </p:sp>
@@ -1029,7 +1021,6 @@
               <a:rPr lang="zh-CN" altLang="en-US"/>
               <a:t>单击此处编辑母版文本样式</a:t>
             </a:r>
-            <a:endParaRPr lang="zh-CN" altLang="en-US"/>
           </a:p>
           <a:p>
             <a:pPr lvl="1"/>
@@ -1037,7 +1028,6 @@
               <a:rPr lang="zh-CN" altLang="en-US"/>
               <a:t>第二级</a:t>
             </a:r>
-            <a:endParaRPr lang="zh-CN" altLang="en-US"/>
           </a:p>
           <a:p>
             <a:pPr lvl="2"/>
@@ -1045,7 +1035,6 @@
               <a:rPr lang="zh-CN" altLang="en-US"/>
               <a:t>第三级</a:t>
             </a:r>
-            <a:endParaRPr lang="zh-CN" altLang="en-US"/>
           </a:p>
           <a:p>
             <a:pPr lvl="3"/>
@@ -1053,7 +1042,6 @@
               <a:rPr lang="zh-CN" altLang="en-US"/>
               <a:t>第四级</a:t>
             </a:r>
-            <a:endParaRPr lang="zh-CN" altLang="en-US"/>
           </a:p>
           <a:p>
             <a:pPr lvl="4"/>
@@ -1061,7 +1049,6 @@
               <a:rPr lang="zh-CN" altLang="en-US"/>
               <a:t>第五级</a:t>
             </a:r>
-            <a:endParaRPr lang="zh-CN" altLang="en-US"/>
           </a:p>
         </p:txBody>
       </p:sp>
@@ -1082,6 +1069,7 @@
           <a:p>
             <a:fld id="{D997B5FA-0921-464F-AAE1-844C04324D75}" type="datetimeFigureOut">
               <a:rPr lang="zh-CN" altLang="en-US" smtClean="0"/>
+              <a:t>2026/1/27</a:t>
             </a:fld>
             <a:endParaRPr lang="zh-CN" altLang="en-US"/>
           </a:p>
@@ -1123,6 +1111,7 @@
           <a:p>
             <a:fld id="{565CE74E-AB26-4998-AD42-012C4C1AD076}" type="slidenum">
               <a:rPr lang="zh-CN" altLang="en-US" smtClean="0"/>
+              <a:t>‹#›</a:t>
             </a:fld>
             <a:endParaRPr lang="zh-CN" altLang="en-US"/>
           </a:p>
@@ -1172,7 +1161,6 @@
               <a:rPr lang="zh-CN" altLang="en-US"/>
               <a:t>单击此处编辑母版标题样式</a:t>
             </a:r>
-            <a:endParaRPr lang="zh-CN" altLang="en-US"/>
           </a:p>
         </p:txBody>
       </p:sp>
@@ -1196,7 +1184,6 @@
               <a:rPr lang="zh-CN" altLang="en-US"/>
               <a:t>单击此处编辑母版文本样式</a:t>
             </a:r>
-            <a:endParaRPr lang="zh-CN" altLang="en-US"/>
           </a:p>
           <a:p>
             <a:pPr lvl="1"/>
@@ -1204,7 +1191,6 @@
               <a:rPr lang="zh-CN" altLang="en-US"/>
               <a:t>第二级</a:t>
             </a:r>
-            <a:endParaRPr lang="zh-CN" altLang="en-US"/>
           </a:p>
           <a:p>
             <a:pPr lvl="2"/>
@@ -1212,7 +1198,6 @@
               <a:rPr lang="zh-CN" altLang="en-US"/>
               <a:t>第三级</a:t>
             </a:r>
-            <a:endParaRPr lang="zh-CN" altLang="en-US"/>
           </a:p>
           <a:p>
             <a:pPr lvl="3"/>
@@ -1220,7 +1205,6 @@
               <a:rPr lang="zh-CN" altLang="en-US"/>
               <a:t>第四级</a:t>
             </a:r>
-            <a:endParaRPr lang="zh-CN" altLang="en-US"/>
           </a:p>
           <a:p>
             <a:pPr lvl="4"/>
@@ -1228,7 +1212,6 @@
               <a:rPr lang="zh-CN" altLang="en-US"/>
               <a:t>第五级</a:t>
             </a:r>
-            <a:endParaRPr lang="zh-CN" altLang="en-US"/>
           </a:p>
         </p:txBody>
       </p:sp>
@@ -1249,6 +1232,7 @@
           <a:p>
             <a:fld id="{D997B5FA-0921-464F-AAE1-844C04324D75}" type="datetimeFigureOut">
               <a:rPr lang="zh-CN" altLang="en-US" smtClean="0"/>
+              <a:t>2026/1/27</a:t>
             </a:fld>
             <a:endParaRPr lang="zh-CN" altLang="en-US"/>
           </a:p>
@@ -1290,6 +1274,7 @@
           <a:p>
             <a:fld id="{565CE74E-AB26-4998-AD42-012C4C1AD076}" type="slidenum">
               <a:rPr lang="zh-CN" altLang="en-US" smtClean="0"/>
+              <a:t>‹#›</a:t>
             </a:fld>
             <a:endParaRPr lang="zh-CN" altLang="en-US"/>
           </a:p>
@@ -1348,7 +1333,6 @@
               <a:rPr lang="zh-CN" altLang="en-US"/>
               <a:t>单击此处编辑母版标题样式</a:t>
             </a:r>
-            <a:endParaRPr lang="zh-CN" altLang="en-US"/>
           </a:p>
         </p:txBody>
       </p:sp>
@@ -1468,7 +1452,6 @@
               <a:rPr lang="zh-CN" altLang="en-US"/>
               <a:t>单击此处编辑母版文本样式</a:t>
             </a:r>
-            <a:endParaRPr lang="zh-CN" altLang="en-US"/>
           </a:p>
         </p:txBody>
       </p:sp>
@@ -1489,6 +1472,7 @@
           <a:p>
             <a:fld id="{D997B5FA-0921-464F-AAE1-844C04324D75}" type="datetimeFigureOut">
               <a:rPr lang="zh-CN" altLang="en-US" smtClean="0"/>
+              <a:t>2026/1/27</a:t>
             </a:fld>
             <a:endParaRPr lang="zh-CN" altLang="en-US"/>
           </a:p>
@@ -1530,6 +1514,7 @@
           <a:p>
             <a:fld id="{565CE74E-AB26-4998-AD42-012C4C1AD076}" type="slidenum">
               <a:rPr lang="zh-CN" altLang="en-US" smtClean="0"/>
+              <a:t>‹#›</a:t>
             </a:fld>
             <a:endParaRPr lang="zh-CN" altLang="en-US"/>
           </a:p>
@@ -1579,7 +1564,6 @@
               <a:rPr lang="zh-CN" altLang="en-US"/>
               <a:t>单击此处编辑母版标题样式</a:t>
             </a:r>
-            <a:endParaRPr lang="zh-CN" altLang="en-US"/>
           </a:p>
         </p:txBody>
       </p:sp>
@@ -1608,7 +1592,6 @@
               <a:rPr lang="zh-CN" altLang="en-US"/>
               <a:t>单击此处编辑母版文本样式</a:t>
             </a:r>
-            <a:endParaRPr lang="zh-CN" altLang="en-US"/>
           </a:p>
           <a:p>
             <a:pPr lvl="1"/>
@@ -1616,7 +1599,6 @@
               <a:rPr lang="zh-CN" altLang="en-US"/>
               <a:t>第二级</a:t>
             </a:r>
-            <a:endParaRPr lang="zh-CN" altLang="en-US"/>
           </a:p>
           <a:p>
             <a:pPr lvl="2"/>
@@ -1624,7 +1606,6 @@
               <a:rPr lang="zh-CN" altLang="en-US"/>
               <a:t>第三级</a:t>
             </a:r>
-            <a:endParaRPr lang="zh-CN" altLang="en-US"/>
           </a:p>
           <a:p>
             <a:pPr lvl="3"/>
@@ -1632,7 +1613,6 @@
               <a:rPr lang="zh-CN" altLang="en-US"/>
               <a:t>第四级</a:t>
             </a:r>
-            <a:endParaRPr lang="zh-CN" altLang="en-US"/>
           </a:p>
           <a:p>
             <a:pPr lvl="4"/>
@@ -1640,7 +1620,6 @@
               <a:rPr lang="zh-CN" altLang="en-US"/>
               <a:t>第五级</a:t>
             </a:r>
-            <a:endParaRPr lang="zh-CN" altLang="en-US"/>
           </a:p>
         </p:txBody>
       </p:sp>
@@ -1669,7 +1648,6 @@
               <a:rPr lang="zh-CN" altLang="en-US"/>
               <a:t>单击此处编辑母版文本样式</a:t>
             </a:r>
-            <a:endParaRPr lang="zh-CN" altLang="en-US"/>
           </a:p>
           <a:p>
             <a:pPr lvl="1"/>
@@ -1677,7 +1655,6 @@
               <a:rPr lang="zh-CN" altLang="en-US"/>
               <a:t>第二级</a:t>
             </a:r>
-            <a:endParaRPr lang="zh-CN" altLang="en-US"/>
           </a:p>
           <a:p>
             <a:pPr lvl="2"/>
@@ -1685,7 +1662,6 @@
               <a:rPr lang="zh-CN" altLang="en-US"/>
               <a:t>第三级</a:t>
             </a:r>
-            <a:endParaRPr lang="zh-CN" altLang="en-US"/>
           </a:p>
           <a:p>
             <a:pPr lvl="3"/>
@@ -1693,7 +1669,6 @@
               <a:rPr lang="zh-CN" altLang="en-US"/>
               <a:t>第四级</a:t>
             </a:r>
-            <a:endParaRPr lang="zh-CN" altLang="en-US"/>
           </a:p>
           <a:p>
             <a:pPr lvl="4"/>
@@ -1701,7 +1676,6 @@
               <a:rPr lang="zh-CN" altLang="en-US"/>
               <a:t>第五级</a:t>
             </a:r>
-            <a:endParaRPr lang="zh-CN" altLang="en-US"/>
           </a:p>
         </p:txBody>
       </p:sp>
@@ -1722,6 +1696,7 @@
           <a:p>
             <a:fld id="{D997B5FA-0921-464F-AAE1-844C04324D75}" type="datetimeFigureOut">
               <a:rPr lang="zh-CN" altLang="en-US" smtClean="0"/>
+              <a:t>2026/1/27</a:t>
             </a:fld>
             <a:endParaRPr lang="zh-CN" altLang="en-US"/>
           </a:p>
@@ -1763,6 +1738,7 @@
           <a:p>
             <a:fld id="{565CE74E-AB26-4998-AD42-012C4C1AD076}" type="slidenum">
               <a:rPr lang="zh-CN" altLang="en-US" smtClean="0"/>
+              <a:t>‹#›</a:t>
             </a:fld>
             <a:endParaRPr lang="zh-CN" altLang="en-US"/>
           </a:p>
@@ -1817,7 +1793,6 @@
               <a:rPr lang="zh-CN" altLang="en-US"/>
               <a:t>单击此处编辑母版标题样式</a:t>
             </a:r>
-            <a:endParaRPr lang="zh-CN" altLang="en-US"/>
           </a:p>
         </p:txBody>
       </p:sp>
@@ -1883,7 +1858,6 @@
               <a:rPr lang="zh-CN" altLang="en-US"/>
               <a:t>单击此处编辑母版文本样式</a:t>
             </a:r>
-            <a:endParaRPr lang="zh-CN" altLang="en-US"/>
           </a:p>
         </p:txBody>
       </p:sp>
@@ -1912,7 +1886,6 @@
               <a:rPr lang="zh-CN" altLang="en-US"/>
               <a:t>单击此处编辑母版文本样式</a:t>
             </a:r>
-            <a:endParaRPr lang="zh-CN" altLang="en-US"/>
           </a:p>
           <a:p>
             <a:pPr lvl="1"/>
@@ -1920,7 +1893,6 @@
               <a:rPr lang="zh-CN" altLang="en-US"/>
               <a:t>第二级</a:t>
             </a:r>
-            <a:endParaRPr lang="zh-CN" altLang="en-US"/>
           </a:p>
           <a:p>
             <a:pPr lvl="2"/>
@@ -1928,7 +1900,6 @@
               <a:rPr lang="zh-CN" altLang="en-US"/>
               <a:t>第三级</a:t>
             </a:r>
-            <a:endParaRPr lang="zh-CN" altLang="en-US"/>
           </a:p>
           <a:p>
             <a:pPr lvl="3"/>
@@ -1936,7 +1907,6 @@
               <a:rPr lang="zh-CN" altLang="en-US"/>
               <a:t>第四级</a:t>
             </a:r>
-            <a:endParaRPr lang="zh-CN" altLang="en-US"/>
           </a:p>
           <a:p>
             <a:pPr lvl="4"/>
@@ -1944,7 +1914,6 @@
               <a:rPr lang="zh-CN" altLang="en-US"/>
               <a:t>第五级</a:t>
             </a:r>
-            <a:endParaRPr lang="zh-CN" altLang="en-US"/>
           </a:p>
         </p:txBody>
       </p:sp>
@@ -2010,7 +1979,6 @@
               <a:rPr lang="zh-CN" altLang="en-US"/>
               <a:t>单击此处编辑母版文本样式</a:t>
             </a:r>
-            <a:endParaRPr lang="zh-CN" altLang="en-US"/>
           </a:p>
         </p:txBody>
       </p:sp>
@@ -2039,7 +2007,6 @@
               <a:rPr lang="zh-CN" altLang="en-US"/>
               <a:t>单击此处编辑母版文本样式</a:t>
             </a:r>
-            <a:endParaRPr lang="zh-CN" altLang="en-US"/>
           </a:p>
           <a:p>
             <a:pPr lvl="1"/>
@@ -2047,7 +2014,6 @@
               <a:rPr lang="zh-CN" altLang="en-US"/>
               <a:t>第二级</a:t>
             </a:r>
-            <a:endParaRPr lang="zh-CN" altLang="en-US"/>
           </a:p>
           <a:p>
             <a:pPr lvl="2"/>
@@ -2055,7 +2021,6 @@
               <a:rPr lang="zh-CN" altLang="en-US"/>
               <a:t>第三级</a:t>
             </a:r>
-            <a:endParaRPr lang="zh-CN" altLang="en-US"/>
           </a:p>
           <a:p>
             <a:pPr lvl="3"/>
@@ -2063,7 +2028,6 @@
               <a:rPr lang="zh-CN" altLang="en-US"/>
               <a:t>第四级</a:t>
             </a:r>
-            <a:endParaRPr lang="zh-CN" altLang="en-US"/>
           </a:p>
           <a:p>
             <a:pPr lvl="4"/>
@@ -2071,7 +2035,6 @@
               <a:rPr lang="zh-CN" altLang="en-US"/>
               <a:t>第五级</a:t>
             </a:r>
-            <a:endParaRPr lang="zh-CN" altLang="en-US"/>
           </a:p>
         </p:txBody>
       </p:sp>
@@ -2092,6 +2055,7 @@
           <a:p>
             <a:fld id="{D997B5FA-0921-464F-AAE1-844C04324D75}" type="datetimeFigureOut">
               <a:rPr lang="zh-CN" altLang="en-US" smtClean="0"/>
+              <a:t>2026/1/27</a:t>
             </a:fld>
             <a:endParaRPr lang="zh-CN" altLang="en-US"/>
           </a:p>
@@ -2133,6 +2097,7 @@
           <a:p>
             <a:fld id="{565CE74E-AB26-4998-AD42-012C4C1AD076}" type="slidenum">
               <a:rPr lang="zh-CN" altLang="en-US" smtClean="0"/>
+              <a:t>‹#›</a:t>
             </a:fld>
             <a:endParaRPr lang="zh-CN" altLang="en-US"/>
           </a:p>
@@ -2182,7 +2147,6 @@
               <a:rPr lang="zh-CN" altLang="en-US"/>
               <a:t>单击此处编辑母版标题样式</a:t>
             </a:r>
-            <a:endParaRPr lang="zh-CN" altLang="en-US"/>
           </a:p>
         </p:txBody>
       </p:sp>
@@ -2203,6 +2167,7 @@
           <a:p>
             <a:fld id="{D997B5FA-0921-464F-AAE1-844C04324D75}" type="datetimeFigureOut">
               <a:rPr lang="zh-CN" altLang="en-US" smtClean="0"/>
+              <a:t>2026/1/27</a:t>
             </a:fld>
             <a:endParaRPr lang="zh-CN" altLang="en-US"/>
           </a:p>
@@ -2244,6 +2209,7 @@
           <a:p>
             <a:fld id="{565CE74E-AB26-4998-AD42-012C4C1AD076}" type="slidenum">
               <a:rPr lang="zh-CN" altLang="en-US" smtClean="0"/>
+              <a:t>‹#›</a:t>
             </a:fld>
             <a:endParaRPr lang="zh-CN" altLang="en-US"/>
           </a:p>
@@ -2291,6 +2257,7 @@
           <a:p>
             <a:fld id="{D997B5FA-0921-464F-AAE1-844C04324D75}" type="datetimeFigureOut">
               <a:rPr lang="zh-CN" altLang="en-US" smtClean="0"/>
+              <a:t>2026/1/27</a:t>
             </a:fld>
             <a:endParaRPr lang="zh-CN" altLang="en-US"/>
           </a:p>
@@ -2332,6 +2299,7 @@
           <a:p>
             <a:fld id="{565CE74E-AB26-4998-AD42-012C4C1AD076}" type="slidenum">
               <a:rPr lang="zh-CN" altLang="en-US" smtClean="0"/>
+              <a:t>‹#›</a:t>
             </a:fld>
             <a:endParaRPr lang="zh-CN" altLang="en-US"/>
           </a:p>
@@ -2390,7 +2358,6 @@
               <a:rPr lang="zh-CN" altLang="en-US"/>
               <a:t>单击此处编辑母版标题样式</a:t>
             </a:r>
-            <a:endParaRPr lang="zh-CN" altLang="en-US"/>
           </a:p>
         </p:txBody>
       </p:sp>
@@ -2447,7 +2414,6 @@
               <a:rPr lang="zh-CN" altLang="en-US"/>
               <a:t>单击此处编辑母版文本样式</a:t>
             </a:r>
-            <a:endParaRPr lang="zh-CN" altLang="en-US"/>
           </a:p>
           <a:p>
             <a:pPr lvl="1"/>
@@ -2455,7 +2421,6 @@
               <a:rPr lang="zh-CN" altLang="en-US"/>
               <a:t>第二级</a:t>
             </a:r>
-            <a:endParaRPr lang="zh-CN" altLang="en-US"/>
           </a:p>
           <a:p>
             <a:pPr lvl="2"/>
@@ -2463,7 +2428,6 @@
               <a:rPr lang="zh-CN" altLang="en-US"/>
               <a:t>第三级</a:t>
             </a:r>
-            <a:endParaRPr lang="zh-CN" altLang="en-US"/>
           </a:p>
           <a:p>
             <a:pPr lvl="3"/>
@@ -2471,7 +2435,6 @@
               <a:rPr lang="zh-CN" altLang="en-US"/>
               <a:t>第四级</a:t>
             </a:r>
-            <a:endParaRPr lang="zh-CN" altLang="en-US"/>
           </a:p>
           <a:p>
             <a:pPr lvl="4"/>
@@ -2479,7 +2442,6 @@
               <a:rPr lang="zh-CN" altLang="en-US"/>
               <a:t>第五级</a:t>
             </a:r>
-            <a:endParaRPr lang="zh-CN" altLang="en-US"/>
           </a:p>
         </p:txBody>
       </p:sp>
@@ -2545,7 +2507,6 @@
               <a:rPr lang="zh-CN" altLang="en-US"/>
               <a:t>单击此处编辑母版文本样式</a:t>
             </a:r>
-            <a:endParaRPr lang="zh-CN" altLang="en-US"/>
           </a:p>
         </p:txBody>
       </p:sp>
@@ -2566,6 +2527,7 @@
           <a:p>
             <a:fld id="{D997B5FA-0921-464F-AAE1-844C04324D75}" type="datetimeFigureOut">
               <a:rPr lang="zh-CN" altLang="en-US" smtClean="0"/>
+              <a:t>2026/1/27</a:t>
             </a:fld>
             <a:endParaRPr lang="zh-CN" altLang="en-US"/>
           </a:p>
@@ -2607,6 +2569,7 @@
           <a:p>
             <a:fld id="{565CE74E-AB26-4998-AD42-012C4C1AD076}" type="slidenum">
               <a:rPr lang="zh-CN" altLang="en-US" smtClean="0"/>
+              <a:t>‹#›</a:t>
             </a:fld>
             <a:endParaRPr lang="zh-CN" altLang="en-US"/>
           </a:p>
@@ -2665,7 +2628,6 @@
               <a:rPr lang="zh-CN" altLang="en-US"/>
               <a:t>单击此处编辑母版标题样式</a:t>
             </a:r>
-            <a:endParaRPr lang="zh-CN" altLang="en-US"/>
           </a:p>
         </p:txBody>
       </p:sp>
@@ -2792,7 +2754,6 @@
               <a:rPr lang="zh-CN" altLang="en-US"/>
               <a:t>单击此处编辑母版文本样式</a:t>
             </a:r>
-            <a:endParaRPr lang="zh-CN" altLang="en-US"/>
           </a:p>
         </p:txBody>
       </p:sp>
@@ -2813,6 +2774,7 @@
           <a:p>
             <a:fld id="{D997B5FA-0921-464F-AAE1-844C04324D75}" type="datetimeFigureOut">
               <a:rPr lang="zh-CN" altLang="en-US" smtClean="0"/>
+              <a:t>2026/1/27</a:t>
             </a:fld>
             <a:endParaRPr lang="zh-CN" altLang="en-US"/>
           </a:p>
@@ -2854,6 +2816,7 @@
           <a:p>
             <a:fld id="{565CE74E-AB26-4998-AD42-012C4C1AD076}" type="slidenum">
               <a:rPr lang="zh-CN" altLang="en-US" smtClean="0"/>
+              <a:t>‹#›</a:t>
             </a:fld>
             <a:endParaRPr lang="zh-CN" altLang="en-US"/>
           </a:p>
@@ -2918,7 +2881,6 @@
               <a:rPr lang="zh-CN" altLang="en-US"/>
               <a:t>单击此处编辑母版标题样式</a:t>
             </a:r>
-            <a:endParaRPr lang="zh-CN" altLang="en-US"/>
           </a:p>
         </p:txBody>
       </p:sp>
@@ -2952,7 +2914,6 @@
               <a:rPr lang="zh-CN" altLang="en-US"/>
               <a:t>单击此处编辑母版文本样式</a:t>
             </a:r>
-            <a:endParaRPr lang="zh-CN" altLang="en-US"/>
           </a:p>
           <a:p>
             <a:pPr lvl="1"/>
@@ -2960,7 +2921,6 @@
               <a:rPr lang="zh-CN" altLang="en-US"/>
               <a:t>第二级</a:t>
             </a:r>
-            <a:endParaRPr lang="zh-CN" altLang="en-US"/>
           </a:p>
           <a:p>
             <a:pPr lvl="2"/>
@@ -2968,7 +2928,6 @@
               <a:rPr lang="zh-CN" altLang="en-US"/>
               <a:t>第三级</a:t>
             </a:r>
-            <a:endParaRPr lang="zh-CN" altLang="en-US"/>
           </a:p>
           <a:p>
             <a:pPr lvl="3"/>
@@ -2976,7 +2935,6 @@
               <a:rPr lang="zh-CN" altLang="en-US"/>
               <a:t>第四级</a:t>
             </a:r>
-            <a:endParaRPr lang="zh-CN" altLang="en-US"/>
           </a:p>
           <a:p>
             <a:pPr lvl="4"/>
@@ -2984,7 +2942,6 @@
               <a:rPr lang="zh-CN" altLang="en-US"/>
               <a:t>第五级</a:t>
             </a:r>
-            <a:endParaRPr lang="zh-CN" altLang="en-US"/>
           </a:p>
         </p:txBody>
       </p:sp>
@@ -3023,6 +2980,7 @@
           <a:p>
             <a:fld id="{D997B5FA-0921-464F-AAE1-844C04324D75}" type="datetimeFigureOut">
               <a:rPr lang="zh-CN" altLang="en-US" smtClean="0"/>
+              <a:t>2026/1/27</a:t>
             </a:fld>
             <a:endParaRPr lang="zh-CN" altLang="en-US"/>
           </a:p>
@@ -3100,6 +3058,7 @@
           <a:p>
             <a:fld id="{565CE74E-AB26-4998-AD42-012C4C1AD076}" type="slidenum">
               <a:rPr lang="zh-CN" altLang="en-US" smtClean="0"/>
+              <a:t>‹#›</a:t>
             </a:fld>
             <a:endParaRPr lang="zh-CN" altLang="en-US"/>
           </a:p>
@@ -3569,13 +3528,13 @@
           <p:nvPr/>
         </p:nvPicPr>
         <p:blipFill>
-          <a:blip r:embed="rId1" cstate="print">
+          <a:blip r:embed="rId2" cstate="print">
             <a:extLst>
               <a:ext uri="{28A0092B-C50C-407E-A947-70E740481C1C}">
                 <a14:useLocalDpi xmlns:a14="http://schemas.microsoft.com/office/drawing/2010/main" val="0"/>
               </a:ext>
               <a:ext uri="{96DAC541-7B7A-43D3-8B79-37D633B846F1}">
-                <asvg:svgBlip xmlns:asvg="http://schemas.microsoft.com/office/drawing/2016/SVG/main" r:embed="rId2"/>
+                <asvg:svgBlip xmlns:asvg="http://schemas.microsoft.com/office/drawing/2016/SVG/main" r:embed="rId3"/>
               </a:ext>
             </a:extLst>
           </a:blip>
@@ -3602,13 +3561,13 @@
           <p:nvPr/>
         </p:nvPicPr>
         <p:blipFill>
-          <a:blip r:embed="rId3" cstate="print">
+          <a:blip r:embed="rId4" cstate="print">
             <a:extLst>
               <a:ext uri="{28A0092B-C50C-407E-A947-70E740481C1C}">
                 <a14:useLocalDpi xmlns:a14="http://schemas.microsoft.com/office/drawing/2010/main" val="0"/>
               </a:ext>
               <a:ext uri="{96DAC541-7B7A-43D3-8B79-37D633B846F1}">
-                <asvg:svgBlip xmlns:asvg="http://schemas.microsoft.com/office/drawing/2016/SVG/main" r:embed="rId4"/>
+                <asvg:svgBlip xmlns:asvg="http://schemas.microsoft.com/office/drawing/2016/SVG/main" r:embed="rId5"/>
               </a:ext>
             </a:extLst>
           </a:blip>
@@ -3635,13 +3594,13 @@
           <p:nvPr/>
         </p:nvPicPr>
         <p:blipFill>
-          <a:blip r:embed="rId5" cstate="print">
+          <a:blip r:embed="rId6" cstate="print">
             <a:extLst>
               <a:ext uri="{28A0092B-C50C-407E-A947-70E740481C1C}">
                 <a14:useLocalDpi xmlns:a14="http://schemas.microsoft.com/office/drawing/2010/main" val="0"/>
               </a:ext>
               <a:ext uri="{96DAC541-7B7A-43D3-8B79-37D633B846F1}">
-                <asvg:svgBlip xmlns:asvg="http://schemas.microsoft.com/office/drawing/2016/SVG/main" r:embed="rId6"/>
+                <asvg:svgBlip xmlns:asvg="http://schemas.microsoft.com/office/drawing/2016/SVG/main" r:embed="rId7"/>
               </a:ext>
             </a:extLst>
           </a:blip>
@@ -3668,13 +3627,13 @@
           <p:nvPr/>
         </p:nvPicPr>
         <p:blipFill>
-          <a:blip r:embed="rId7" cstate="print">
+          <a:blip r:embed="rId8" cstate="print">
             <a:extLst>
               <a:ext uri="{28A0092B-C50C-407E-A947-70E740481C1C}">
                 <a14:useLocalDpi xmlns:a14="http://schemas.microsoft.com/office/drawing/2010/main" val="0"/>
               </a:ext>
               <a:ext uri="{96DAC541-7B7A-43D3-8B79-37D633B846F1}">
-                <asvg:svgBlip xmlns:asvg="http://schemas.microsoft.com/office/drawing/2016/SVG/main" r:embed="rId8"/>
+                <asvg:svgBlip xmlns:asvg="http://schemas.microsoft.com/office/drawing/2016/SVG/main" r:embed="rId9"/>
               </a:ext>
             </a:extLst>
           </a:blip>
@@ -3701,13 +3660,13 @@
           <p:nvPr/>
         </p:nvPicPr>
         <p:blipFill>
-          <a:blip r:embed="rId9" cstate="print">
+          <a:blip r:embed="rId10" cstate="print">
             <a:extLst>
               <a:ext uri="{28A0092B-C50C-407E-A947-70E740481C1C}">
                 <a14:useLocalDpi xmlns:a14="http://schemas.microsoft.com/office/drawing/2010/main" val="0"/>
               </a:ext>
               <a:ext uri="{96DAC541-7B7A-43D3-8B79-37D633B846F1}">
-                <asvg:svgBlip xmlns:asvg="http://schemas.microsoft.com/office/drawing/2016/SVG/main" r:embed="rId10"/>
+                <asvg:svgBlip xmlns:asvg="http://schemas.microsoft.com/office/drawing/2016/SVG/main" r:embed="rId11"/>
               </a:ext>
             </a:extLst>
           </a:blip>
@@ -3734,13 +3693,13 @@
           <p:nvPr/>
         </p:nvPicPr>
         <p:blipFill>
-          <a:blip r:embed="rId11" cstate="print">
+          <a:blip r:embed="rId12" cstate="print">
             <a:extLst>
               <a:ext uri="{28A0092B-C50C-407E-A947-70E740481C1C}">
                 <a14:useLocalDpi xmlns:a14="http://schemas.microsoft.com/office/drawing/2010/main" val="0"/>
               </a:ext>
               <a:ext uri="{96DAC541-7B7A-43D3-8B79-37D633B846F1}">
-                <asvg:svgBlip xmlns:asvg="http://schemas.microsoft.com/office/drawing/2016/SVG/main" r:embed="rId12"/>
+                <asvg:svgBlip xmlns:asvg="http://schemas.microsoft.com/office/drawing/2016/SVG/main" r:embed="rId13"/>
               </a:ext>
             </a:extLst>
           </a:blip>
@@ -3767,13 +3726,13 @@
           <p:nvPr/>
         </p:nvPicPr>
         <p:blipFill>
-          <a:blip r:embed="rId13" cstate="print">
+          <a:blip r:embed="rId14" cstate="print">
             <a:extLst>
               <a:ext uri="{28A0092B-C50C-407E-A947-70E740481C1C}">
                 <a14:useLocalDpi xmlns:a14="http://schemas.microsoft.com/office/drawing/2010/main" val="0"/>
               </a:ext>
               <a:ext uri="{96DAC541-7B7A-43D3-8B79-37D633B846F1}">
-                <asvg:svgBlip xmlns:asvg="http://schemas.microsoft.com/office/drawing/2016/SVG/main" r:embed="rId14"/>
+                <asvg:svgBlip xmlns:asvg="http://schemas.microsoft.com/office/drawing/2016/SVG/main" r:embed="rId15"/>
               </a:ext>
             </a:extLst>
           </a:blip>
@@ -3800,13 +3759,13 @@
           <p:nvPr/>
         </p:nvPicPr>
         <p:blipFill>
-          <a:blip r:embed="rId15" cstate="print">
+          <a:blip r:embed="rId16" cstate="print">
             <a:extLst>
               <a:ext uri="{28A0092B-C50C-407E-A947-70E740481C1C}">
                 <a14:useLocalDpi xmlns:a14="http://schemas.microsoft.com/office/drawing/2010/main" val="0"/>
               </a:ext>
               <a:ext uri="{96DAC541-7B7A-43D3-8B79-37D633B846F1}">
-                <asvg:svgBlip xmlns:asvg="http://schemas.microsoft.com/office/drawing/2016/SVG/main" r:embed="rId16"/>
+                <asvg:svgBlip xmlns:asvg="http://schemas.microsoft.com/office/drawing/2016/SVG/main" r:embed="rId17"/>
               </a:ext>
             </a:extLst>
           </a:blip>
@@ -3833,13 +3792,13 @@
           <p:nvPr/>
         </p:nvPicPr>
         <p:blipFill>
-          <a:blip r:embed="rId17" cstate="print">
+          <a:blip r:embed="rId18" cstate="print">
             <a:extLst>
               <a:ext uri="{28A0092B-C50C-407E-A947-70E740481C1C}">
                 <a14:useLocalDpi xmlns:a14="http://schemas.microsoft.com/office/drawing/2010/main" val="0"/>
               </a:ext>
               <a:ext uri="{96DAC541-7B7A-43D3-8B79-37D633B846F1}">
-                <asvg:svgBlip xmlns:asvg="http://schemas.microsoft.com/office/drawing/2016/SVG/main" r:embed="rId18"/>
+                <asvg:svgBlip xmlns:asvg="http://schemas.microsoft.com/office/drawing/2016/SVG/main" r:embed="rId19"/>
               </a:ext>
             </a:extLst>
           </a:blip>
@@ -3866,13 +3825,13 @@
           <p:nvPr/>
         </p:nvPicPr>
         <p:blipFill>
-          <a:blip r:embed="rId19" cstate="print">
+          <a:blip r:embed="rId20" cstate="print">
             <a:extLst>
               <a:ext uri="{28A0092B-C50C-407E-A947-70E740481C1C}">
                 <a14:useLocalDpi xmlns:a14="http://schemas.microsoft.com/office/drawing/2010/main" val="0"/>
               </a:ext>
               <a:ext uri="{96DAC541-7B7A-43D3-8B79-37D633B846F1}">
-                <asvg:svgBlip xmlns:asvg="http://schemas.microsoft.com/office/drawing/2016/SVG/main" r:embed="rId20"/>
+                <asvg:svgBlip xmlns:asvg="http://schemas.microsoft.com/office/drawing/2016/SVG/main" r:embed="rId21"/>
               </a:ext>
             </a:extLst>
           </a:blip>
@@ -3899,13 +3858,13 @@
           <p:nvPr/>
         </p:nvPicPr>
         <p:blipFill>
-          <a:blip r:embed="rId21" cstate="print">
+          <a:blip r:embed="rId22" cstate="print">
             <a:extLst>
               <a:ext uri="{28A0092B-C50C-407E-A947-70E740481C1C}">
                 <a14:useLocalDpi xmlns:a14="http://schemas.microsoft.com/office/drawing/2010/main" val="0"/>
               </a:ext>
               <a:ext uri="{96DAC541-7B7A-43D3-8B79-37D633B846F1}">
-                <asvg:svgBlip xmlns:asvg="http://schemas.microsoft.com/office/drawing/2016/SVG/main" r:embed="rId22"/>
+                <asvg:svgBlip xmlns:asvg="http://schemas.microsoft.com/office/drawing/2016/SVG/main" r:embed="rId23"/>
               </a:ext>
             </a:extLst>
           </a:blip>
@@ -3932,13 +3891,13 @@
           <p:nvPr/>
         </p:nvPicPr>
         <p:blipFill>
-          <a:blip r:embed="rId23" cstate="print">
+          <a:blip r:embed="rId24" cstate="print">
             <a:extLst>
               <a:ext uri="{28A0092B-C50C-407E-A947-70E740481C1C}">
                 <a14:useLocalDpi xmlns:a14="http://schemas.microsoft.com/office/drawing/2010/main" val="0"/>
               </a:ext>
               <a:ext uri="{96DAC541-7B7A-43D3-8B79-37D633B846F1}">
-                <asvg:svgBlip xmlns:asvg="http://schemas.microsoft.com/office/drawing/2016/SVG/main" r:embed="rId24"/>
+                <asvg:svgBlip xmlns:asvg="http://schemas.microsoft.com/office/drawing/2016/SVG/main" r:embed="rId25"/>
               </a:ext>
             </a:extLst>
           </a:blip>
@@ -3965,13 +3924,13 @@
           <p:nvPr/>
         </p:nvPicPr>
         <p:blipFill>
-          <a:blip r:embed="rId25" cstate="print">
+          <a:blip r:embed="rId26" cstate="print">
             <a:extLst>
               <a:ext uri="{28A0092B-C50C-407E-A947-70E740481C1C}">
                 <a14:useLocalDpi xmlns:a14="http://schemas.microsoft.com/office/drawing/2010/main" val="0"/>
               </a:ext>
               <a:ext uri="{96DAC541-7B7A-43D3-8B79-37D633B846F1}">
-                <asvg:svgBlip xmlns:asvg="http://schemas.microsoft.com/office/drawing/2016/SVG/main" r:embed="rId26"/>
+                <asvg:svgBlip xmlns:asvg="http://schemas.microsoft.com/office/drawing/2016/SVG/main" r:embed="rId27"/>
               </a:ext>
             </a:extLst>
           </a:blip>
@@ -3998,13 +3957,13 @@
           <p:nvPr/>
         </p:nvPicPr>
         <p:blipFill>
-          <a:blip r:embed="rId27" cstate="print">
+          <a:blip r:embed="rId28" cstate="print">
             <a:extLst>
               <a:ext uri="{28A0092B-C50C-407E-A947-70E740481C1C}">
                 <a14:useLocalDpi xmlns:a14="http://schemas.microsoft.com/office/drawing/2010/main" val="0"/>
               </a:ext>
               <a:ext uri="{96DAC541-7B7A-43D3-8B79-37D633B846F1}">
-                <asvg:svgBlip xmlns:asvg="http://schemas.microsoft.com/office/drawing/2016/SVG/main" r:embed="rId28"/>
+                <asvg:svgBlip xmlns:asvg="http://schemas.microsoft.com/office/drawing/2016/SVG/main" r:embed="rId29"/>
               </a:ext>
             </a:extLst>
           </a:blip>
@@ -4031,13 +3990,13 @@
           <p:nvPr/>
         </p:nvPicPr>
         <p:blipFill>
-          <a:blip r:embed="rId29" cstate="print">
+          <a:blip r:embed="rId30" cstate="print">
             <a:extLst>
               <a:ext uri="{28A0092B-C50C-407E-A947-70E740481C1C}">
                 <a14:useLocalDpi xmlns:a14="http://schemas.microsoft.com/office/drawing/2010/main" val="0"/>
               </a:ext>
               <a:ext uri="{96DAC541-7B7A-43D3-8B79-37D633B846F1}">
-                <asvg:svgBlip xmlns:asvg="http://schemas.microsoft.com/office/drawing/2016/SVG/main" r:embed="rId30"/>
+                <asvg:svgBlip xmlns:asvg="http://schemas.microsoft.com/office/drawing/2016/SVG/main" r:embed="rId31"/>
               </a:ext>
             </a:extLst>
           </a:blip>
@@ -4345,13 +4304,13 @@
           <p:nvPr/>
         </p:nvPicPr>
         <p:blipFill>
-          <a:blip r:embed="rId31" cstate="print">
+          <a:blip r:embed="rId32" cstate="print">
             <a:extLst>
               <a:ext uri="{28A0092B-C50C-407E-A947-70E740481C1C}">
                 <a14:useLocalDpi xmlns:a14="http://schemas.microsoft.com/office/drawing/2010/main" val="0"/>
               </a:ext>
               <a:ext uri="{96DAC541-7B7A-43D3-8B79-37D633B846F1}">
-                <asvg:svgBlip xmlns:asvg="http://schemas.microsoft.com/office/drawing/2016/SVG/main" r:embed="rId32"/>
+                <asvg:svgBlip xmlns:asvg="http://schemas.microsoft.com/office/drawing/2016/SVG/main" r:embed="rId33"/>
               </a:ext>
             </a:extLst>
           </a:blip>
@@ -4378,13 +4337,13 @@
           <p:nvPr/>
         </p:nvPicPr>
         <p:blipFill>
-          <a:blip r:embed="rId33" cstate="print">
+          <a:blip r:embed="rId34" cstate="print">
             <a:extLst>
               <a:ext uri="{28A0092B-C50C-407E-A947-70E740481C1C}">
                 <a14:useLocalDpi xmlns:a14="http://schemas.microsoft.com/office/drawing/2010/main" val="0"/>
               </a:ext>
               <a:ext uri="{96DAC541-7B7A-43D3-8B79-37D633B846F1}">
-                <asvg:svgBlip xmlns:asvg="http://schemas.microsoft.com/office/drawing/2016/SVG/main" r:embed="rId34"/>
+                <asvg:svgBlip xmlns:asvg="http://schemas.microsoft.com/office/drawing/2016/SVG/main" r:embed="rId35"/>
               </a:ext>
             </a:extLst>
           </a:blip>
@@ -4411,10 +4370,10 @@
           <p:nvPr/>
         </p:nvPicPr>
         <p:blipFill>
-          <a:blip r:embed="rId35">
+          <a:blip r:embed="rId36">
             <a:extLst>
               <a:ext uri="{96DAC541-7B7A-43D3-8B79-37D633B846F1}">
-                <asvg:svgBlip xmlns:asvg="http://schemas.microsoft.com/office/drawing/2016/SVG/main" r:embed="rId36"/>
+                <asvg:svgBlip xmlns:asvg="http://schemas.microsoft.com/office/drawing/2016/SVG/main" r:embed="rId37"/>
               </a:ext>
             </a:extLst>
           </a:blip>
@@ -4441,13 +4400,13 @@
           <p:nvPr/>
         </p:nvPicPr>
         <p:blipFill>
-          <a:blip r:embed="rId37">
+          <a:blip r:embed="rId38">
             <a:extLst>
               <a:ext uri="{28A0092B-C50C-407E-A947-70E740481C1C}">
                 <a14:useLocalDpi xmlns:a14="http://schemas.microsoft.com/office/drawing/2010/main" val="0"/>
               </a:ext>
               <a:ext uri="{96DAC541-7B7A-43D3-8B79-37D633B846F1}">
-                <asvg:svgBlip xmlns:asvg="http://schemas.microsoft.com/office/drawing/2016/SVG/main" r:embed="rId38"/>
+                <asvg:svgBlip xmlns:asvg="http://schemas.microsoft.com/office/drawing/2016/SVG/main" r:embed="rId39"/>
               </a:ext>
             </a:extLst>
           </a:blip>
@@ -4513,7 +4472,7 @@
             <p:nvPr/>
           </p:nvPicPr>
           <p:blipFill rotWithShape="1">
-            <a:blip r:embed="rId1"/>
+            <a:blip r:embed="rId2"/>
             <a:srcRect l="30132" t="10719" r="30559" b="12022"/>
             <a:stretch>
               <a:fillRect/>
@@ -4538,7 +4497,7 @@
             <p:nvPr/>
           </p:nvPicPr>
           <p:blipFill rotWithShape="1">
-            <a:blip r:embed="rId2" cstate="print">
+            <a:blip r:embed="rId3" cstate="print">
               <a:extLst>
                 <a:ext uri="{28A0092B-C50C-407E-A947-70E740481C1C}">
                   <a14:useLocalDpi xmlns:a14="http://schemas.microsoft.com/office/drawing/2010/main" val="0"/>
@@ -4724,7 +4683,7 @@
             <p:nvPr/>
           </p:nvPicPr>
           <p:blipFill rotWithShape="1">
-            <a:blip r:embed="rId1"/>
+            <a:blip r:embed="rId2"/>
             <a:srcRect l="30132" t="10719" r="30559" b="12022"/>
             <a:stretch>
               <a:fillRect/>
@@ -4749,7 +4708,7 @@
             <p:nvPr/>
           </p:nvPicPr>
           <p:blipFill rotWithShape="1">
-            <a:blip r:embed="rId3">
+            <a:blip r:embed="rId4">
               <a:extLst>
                 <a:ext uri="{28A0092B-C50C-407E-A947-70E740481C1C}">
                   <a14:useLocalDpi xmlns:a14="http://schemas.microsoft.com/office/drawing/2010/main" val="0"/>
@@ -4946,13 +4905,13 @@
           <p:nvPr/>
         </p:nvPicPr>
         <p:blipFill>
-          <a:blip r:embed="rId1" cstate="print">
+          <a:blip r:embed="rId2" cstate="print">
             <a:extLst>
               <a:ext uri="{28A0092B-C50C-407E-A947-70E740481C1C}">
                 <a14:useLocalDpi xmlns:a14="http://schemas.microsoft.com/office/drawing/2010/main" val="0"/>
               </a:ext>
               <a:ext uri="{96DAC541-7B7A-43D3-8B79-37D633B846F1}">
-                <asvg:svgBlip xmlns:asvg="http://schemas.microsoft.com/office/drawing/2016/SVG/main" r:embed="rId2"/>
+                <asvg:svgBlip xmlns:asvg="http://schemas.microsoft.com/office/drawing/2016/SVG/main" r:embed="rId3"/>
               </a:ext>
             </a:extLst>
           </a:blip>
@@ -4979,13 +4938,13 @@
           <p:nvPr/>
         </p:nvPicPr>
         <p:blipFill>
-          <a:blip r:embed="rId3" cstate="print">
+          <a:blip r:embed="rId4" cstate="print">
             <a:extLst>
               <a:ext uri="{28A0092B-C50C-407E-A947-70E740481C1C}">
                 <a14:useLocalDpi xmlns:a14="http://schemas.microsoft.com/office/drawing/2010/main" val="0"/>
               </a:ext>
               <a:ext uri="{96DAC541-7B7A-43D3-8B79-37D633B846F1}">
-                <asvg:svgBlip xmlns:asvg="http://schemas.microsoft.com/office/drawing/2016/SVG/main" r:embed="rId4"/>
+                <asvg:svgBlip xmlns:asvg="http://schemas.microsoft.com/office/drawing/2016/SVG/main" r:embed="rId5"/>
               </a:ext>
             </a:extLst>
           </a:blip>
@@ -5059,13 +5018,13 @@
           <p:nvPr/>
         </p:nvPicPr>
         <p:blipFill>
-          <a:blip r:embed="rId5" cstate="print">
+          <a:blip r:embed="rId6" cstate="print">
             <a:extLst>
               <a:ext uri="{28A0092B-C50C-407E-A947-70E740481C1C}">
                 <a14:useLocalDpi xmlns:a14="http://schemas.microsoft.com/office/drawing/2010/main" val="0"/>
               </a:ext>
               <a:ext uri="{96DAC541-7B7A-43D3-8B79-37D633B846F1}">
-                <asvg:svgBlip xmlns:asvg="http://schemas.microsoft.com/office/drawing/2016/SVG/main" r:embed="rId6"/>
+                <asvg:svgBlip xmlns:asvg="http://schemas.microsoft.com/office/drawing/2016/SVG/main" r:embed="rId7"/>
               </a:ext>
             </a:extLst>
           </a:blip>
@@ -5092,13 +5051,13 @@
           <p:nvPr/>
         </p:nvPicPr>
         <p:blipFill>
-          <a:blip r:embed="rId7" cstate="print">
+          <a:blip r:embed="rId8" cstate="print">
             <a:extLst>
               <a:ext uri="{28A0092B-C50C-407E-A947-70E740481C1C}">
                 <a14:useLocalDpi xmlns:a14="http://schemas.microsoft.com/office/drawing/2010/main" val="0"/>
               </a:ext>
               <a:ext uri="{96DAC541-7B7A-43D3-8B79-37D633B846F1}">
-                <asvg:svgBlip xmlns:asvg="http://schemas.microsoft.com/office/drawing/2016/SVG/main" r:embed="rId8"/>
+                <asvg:svgBlip xmlns:asvg="http://schemas.microsoft.com/office/drawing/2016/SVG/main" r:embed="rId9"/>
               </a:ext>
             </a:extLst>
           </a:blip>
@@ -5125,13 +5084,13 @@
           <p:nvPr/>
         </p:nvPicPr>
         <p:blipFill>
-          <a:blip r:embed="rId9" cstate="print">
+          <a:blip r:embed="rId10" cstate="print">
             <a:extLst>
               <a:ext uri="{28A0092B-C50C-407E-A947-70E740481C1C}">
                 <a14:useLocalDpi xmlns:a14="http://schemas.microsoft.com/office/drawing/2010/main" val="0"/>
               </a:ext>
               <a:ext uri="{96DAC541-7B7A-43D3-8B79-37D633B846F1}">
-                <asvg:svgBlip xmlns:asvg="http://schemas.microsoft.com/office/drawing/2016/SVG/main" r:embed="rId10"/>
+                <asvg:svgBlip xmlns:asvg="http://schemas.microsoft.com/office/drawing/2016/SVG/main" r:embed="rId11"/>
               </a:ext>
             </a:extLst>
           </a:blip>
@@ -5158,13 +5117,13 @@
           <p:nvPr/>
         </p:nvPicPr>
         <p:blipFill>
-          <a:blip r:embed="rId11" cstate="print">
+          <a:blip r:embed="rId12" cstate="print">
             <a:extLst>
               <a:ext uri="{28A0092B-C50C-407E-A947-70E740481C1C}">
                 <a14:useLocalDpi xmlns:a14="http://schemas.microsoft.com/office/drawing/2010/main" val="0"/>
               </a:ext>
               <a:ext uri="{96DAC541-7B7A-43D3-8B79-37D633B846F1}">
-                <asvg:svgBlip xmlns:asvg="http://schemas.microsoft.com/office/drawing/2016/SVG/main" r:embed="rId12"/>
+                <asvg:svgBlip xmlns:asvg="http://schemas.microsoft.com/office/drawing/2016/SVG/main" r:embed="rId13"/>
               </a:ext>
             </a:extLst>
           </a:blip>
@@ -5191,13 +5150,13 @@
           <p:nvPr/>
         </p:nvPicPr>
         <p:blipFill>
-          <a:blip r:embed="rId9" cstate="print">
+          <a:blip r:embed="rId10" cstate="print">
             <a:extLst>
               <a:ext uri="{28A0092B-C50C-407E-A947-70E740481C1C}">
                 <a14:useLocalDpi xmlns:a14="http://schemas.microsoft.com/office/drawing/2010/main" val="0"/>
               </a:ext>
               <a:ext uri="{96DAC541-7B7A-43D3-8B79-37D633B846F1}">
-                <asvg:svgBlip xmlns:asvg="http://schemas.microsoft.com/office/drawing/2016/SVG/main" r:embed="rId10"/>
+                <asvg:svgBlip xmlns:asvg="http://schemas.microsoft.com/office/drawing/2016/SVG/main" r:embed="rId11"/>
               </a:ext>
             </a:extLst>
           </a:blip>
@@ -5224,13 +5183,13 @@
           <p:nvPr/>
         </p:nvPicPr>
         <p:blipFill>
-          <a:blip r:embed="rId13" cstate="print">
+          <a:blip r:embed="rId14" cstate="print">
             <a:extLst>
               <a:ext uri="{28A0092B-C50C-407E-A947-70E740481C1C}">
                 <a14:useLocalDpi xmlns:a14="http://schemas.microsoft.com/office/drawing/2010/main" val="0"/>
               </a:ext>
               <a:ext uri="{96DAC541-7B7A-43D3-8B79-37D633B846F1}">
-                <asvg:svgBlip xmlns:asvg="http://schemas.microsoft.com/office/drawing/2016/SVG/main" r:embed="rId14"/>
+                <asvg:svgBlip xmlns:asvg="http://schemas.microsoft.com/office/drawing/2016/SVG/main" r:embed="rId15"/>
               </a:ext>
             </a:extLst>
           </a:blip>
@@ -5863,13 +5822,13 @@
           <p:nvPr/>
         </p:nvPicPr>
         <p:blipFill>
-          <a:blip r:embed="rId1" cstate="print">
+          <a:blip r:embed="rId2" cstate="print">
             <a:extLst>
               <a:ext uri="{28A0092B-C50C-407E-A947-70E740481C1C}">
                 <a14:useLocalDpi xmlns:a14="http://schemas.microsoft.com/office/drawing/2010/main" val="0"/>
               </a:ext>
               <a:ext uri="{96DAC541-7B7A-43D3-8B79-37D633B846F1}">
-                <asvg:svgBlip xmlns:asvg="http://schemas.microsoft.com/office/drawing/2016/SVG/main" r:embed="rId2"/>
+                <asvg:svgBlip xmlns:asvg="http://schemas.microsoft.com/office/drawing/2016/SVG/main" r:embed="rId3"/>
               </a:ext>
             </a:extLst>
           </a:blip>
@@ -5896,13 +5855,13 @@
           <p:nvPr/>
         </p:nvPicPr>
         <p:blipFill>
-          <a:blip r:embed="rId3" cstate="print">
+          <a:blip r:embed="rId4" cstate="print">
             <a:extLst>
               <a:ext uri="{28A0092B-C50C-407E-A947-70E740481C1C}">
                 <a14:useLocalDpi xmlns:a14="http://schemas.microsoft.com/office/drawing/2010/main" val="0"/>
               </a:ext>
               <a:ext uri="{96DAC541-7B7A-43D3-8B79-37D633B846F1}">
-                <asvg:svgBlip xmlns:asvg="http://schemas.microsoft.com/office/drawing/2016/SVG/main" r:embed="rId4"/>
+                <asvg:svgBlip xmlns:asvg="http://schemas.microsoft.com/office/drawing/2016/SVG/main" r:embed="rId5"/>
               </a:ext>
             </a:extLst>
           </a:blip>
@@ -5976,13 +5935,13 @@
           <p:nvPr/>
         </p:nvPicPr>
         <p:blipFill>
-          <a:blip r:embed="rId5" cstate="print">
+          <a:blip r:embed="rId6" cstate="print">
             <a:extLst>
               <a:ext uri="{28A0092B-C50C-407E-A947-70E740481C1C}">
                 <a14:useLocalDpi xmlns:a14="http://schemas.microsoft.com/office/drawing/2010/main" val="0"/>
               </a:ext>
               <a:ext uri="{96DAC541-7B7A-43D3-8B79-37D633B846F1}">
-                <asvg:svgBlip xmlns:asvg="http://schemas.microsoft.com/office/drawing/2016/SVG/main" r:embed="rId6"/>
+                <asvg:svgBlip xmlns:asvg="http://schemas.microsoft.com/office/drawing/2016/SVG/main" r:embed="rId7"/>
               </a:ext>
             </a:extLst>
           </a:blip>
@@ -6009,13 +5968,13 @@
           <p:nvPr/>
         </p:nvPicPr>
         <p:blipFill>
-          <a:blip r:embed="rId7" cstate="print">
+          <a:blip r:embed="rId8" cstate="print">
             <a:extLst>
               <a:ext uri="{28A0092B-C50C-407E-A947-70E740481C1C}">
                 <a14:useLocalDpi xmlns:a14="http://schemas.microsoft.com/office/drawing/2010/main" val="0"/>
               </a:ext>
               <a:ext uri="{96DAC541-7B7A-43D3-8B79-37D633B846F1}">
-                <asvg:svgBlip xmlns:asvg="http://schemas.microsoft.com/office/drawing/2016/SVG/main" r:embed="rId8"/>
+                <asvg:svgBlip xmlns:asvg="http://schemas.microsoft.com/office/drawing/2016/SVG/main" r:embed="rId9"/>
               </a:ext>
             </a:extLst>
           </a:blip>
@@ -6042,13 +6001,13 @@
           <p:nvPr/>
         </p:nvPicPr>
         <p:blipFill>
-          <a:blip r:embed="rId9" cstate="print">
+          <a:blip r:embed="rId10" cstate="print">
             <a:extLst>
               <a:ext uri="{28A0092B-C50C-407E-A947-70E740481C1C}">
                 <a14:useLocalDpi xmlns:a14="http://schemas.microsoft.com/office/drawing/2010/main" val="0"/>
               </a:ext>
               <a:ext uri="{96DAC541-7B7A-43D3-8B79-37D633B846F1}">
-                <asvg:svgBlip xmlns:asvg="http://schemas.microsoft.com/office/drawing/2016/SVG/main" r:embed="rId10"/>
+                <asvg:svgBlip xmlns:asvg="http://schemas.microsoft.com/office/drawing/2016/SVG/main" r:embed="rId11"/>
               </a:ext>
             </a:extLst>
           </a:blip>
@@ -6075,13 +6034,13 @@
           <p:nvPr/>
         </p:nvPicPr>
         <p:blipFill>
-          <a:blip r:embed="rId11" cstate="print">
+          <a:blip r:embed="rId12" cstate="print">
             <a:extLst>
               <a:ext uri="{28A0092B-C50C-407E-A947-70E740481C1C}">
                 <a14:useLocalDpi xmlns:a14="http://schemas.microsoft.com/office/drawing/2010/main" val="0"/>
               </a:ext>
               <a:ext uri="{96DAC541-7B7A-43D3-8B79-37D633B846F1}">
-                <asvg:svgBlip xmlns:asvg="http://schemas.microsoft.com/office/drawing/2016/SVG/main" r:embed="rId12"/>
+                <asvg:svgBlip xmlns:asvg="http://schemas.microsoft.com/office/drawing/2016/SVG/main" r:embed="rId13"/>
               </a:ext>
             </a:extLst>
           </a:blip>
@@ -6108,13 +6067,13 @@
           <p:nvPr/>
         </p:nvPicPr>
         <p:blipFill>
-          <a:blip r:embed="rId9" cstate="print">
+          <a:blip r:embed="rId10" cstate="print">
             <a:extLst>
               <a:ext uri="{28A0092B-C50C-407E-A947-70E740481C1C}">
                 <a14:useLocalDpi xmlns:a14="http://schemas.microsoft.com/office/drawing/2010/main" val="0"/>
               </a:ext>
               <a:ext uri="{96DAC541-7B7A-43D3-8B79-37D633B846F1}">
-                <asvg:svgBlip xmlns:asvg="http://schemas.microsoft.com/office/drawing/2016/SVG/main" r:embed="rId10"/>
+                <asvg:svgBlip xmlns:asvg="http://schemas.microsoft.com/office/drawing/2016/SVG/main" r:embed="rId11"/>
               </a:ext>
             </a:extLst>
           </a:blip>
@@ -6141,13 +6100,13 @@
           <p:nvPr/>
         </p:nvPicPr>
         <p:blipFill>
-          <a:blip r:embed="rId13" cstate="print">
+          <a:blip r:embed="rId14" cstate="print">
             <a:extLst>
               <a:ext uri="{28A0092B-C50C-407E-A947-70E740481C1C}">
                 <a14:useLocalDpi xmlns:a14="http://schemas.microsoft.com/office/drawing/2010/main" val="0"/>
               </a:ext>
               <a:ext uri="{96DAC541-7B7A-43D3-8B79-37D633B846F1}">
-                <asvg:svgBlip xmlns:asvg="http://schemas.microsoft.com/office/drawing/2016/SVG/main" r:embed="rId14"/>
+                <asvg:svgBlip xmlns:asvg="http://schemas.microsoft.com/office/drawing/2016/SVG/main" r:embed="rId15"/>
               </a:ext>
             </a:extLst>
           </a:blip>
@@ -6510,10 +6469,10 @@
           <p:nvPr/>
         </p:nvPicPr>
         <p:blipFill>
-          <a:blip r:embed="rId15">
+          <a:blip r:embed="rId16">
             <a:extLst>
               <a:ext uri="{96DAC541-7B7A-43D3-8B79-37D633B846F1}">
-                <asvg:svgBlip xmlns:asvg="http://schemas.microsoft.com/office/drawing/2016/SVG/main" r:embed="rId16"/>
+                <asvg:svgBlip xmlns:asvg="http://schemas.microsoft.com/office/drawing/2016/SVG/main" r:embed="rId17"/>
               </a:ext>
             </a:extLst>
           </a:blip>
@@ -6601,13 +6560,13 @@
           <p:nvPr/>
         </p:nvPicPr>
         <p:blipFill>
-          <a:blip r:embed="rId1" cstate="print">
+          <a:blip r:embed="rId2" cstate="print">
             <a:extLst>
               <a:ext uri="{28A0092B-C50C-407E-A947-70E740481C1C}">
                 <a14:useLocalDpi xmlns:a14="http://schemas.microsoft.com/office/drawing/2010/main" val="0"/>
               </a:ext>
               <a:ext uri="{96DAC541-7B7A-43D3-8B79-37D633B846F1}">
-                <asvg:svgBlip xmlns:asvg="http://schemas.microsoft.com/office/drawing/2016/SVG/main" r:embed="rId2"/>
+                <asvg:svgBlip xmlns:asvg="http://schemas.microsoft.com/office/drawing/2016/SVG/main" r:embed="rId3"/>
               </a:ext>
             </a:extLst>
           </a:blip>
@@ -6634,13 +6593,13 @@
           <p:nvPr/>
         </p:nvPicPr>
         <p:blipFill>
-          <a:blip r:embed="rId3" cstate="print">
+          <a:blip r:embed="rId4" cstate="print">
             <a:extLst>
               <a:ext uri="{28A0092B-C50C-407E-A947-70E740481C1C}">
                 <a14:useLocalDpi xmlns:a14="http://schemas.microsoft.com/office/drawing/2010/main" val="0"/>
               </a:ext>
               <a:ext uri="{96DAC541-7B7A-43D3-8B79-37D633B846F1}">
-                <asvg:svgBlip xmlns:asvg="http://schemas.microsoft.com/office/drawing/2016/SVG/main" r:embed="rId4"/>
+                <asvg:svgBlip xmlns:asvg="http://schemas.microsoft.com/office/drawing/2016/SVG/main" r:embed="rId5"/>
               </a:ext>
             </a:extLst>
           </a:blip>
@@ -6714,13 +6673,13 @@
           <p:nvPr/>
         </p:nvPicPr>
         <p:blipFill>
-          <a:blip r:embed="rId5" cstate="print">
+          <a:blip r:embed="rId6" cstate="print">
             <a:extLst>
               <a:ext uri="{28A0092B-C50C-407E-A947-70E740481C1C}">
                 <a14:useLocalDpi xmlns:a14="http://schemas.microsoft.com/office/drawing/2010/main" val="0"/>
               </a:ext>
               <a:ext uri="{96DAC541-7B7A-43D3-8B79-37D633B846F1}">
-                <asvg:svgBlip xmlns:asvg="http://schemas.microsoft.com/office/drawing/2016/SVG/main" r:embed="rId6"/>
+                <asvg:svgBlip xmlns:asvg="http://schemas.microsoft.com/office/drawing/2016/SVG/main" r:embed="rId7"/>
               </a:ext>
             </a:extLst>
           </a:blip>
@@ -6747,13 +6706,13 @@
           <p:nvPr/>
         </p:nvPicPr>
         <p:blipFill>
-          <a:blip r:embed="rId7" cstate="print">
+          <a:blip r:embed="rId8" cstate="print">
             <a:extLst>
               <a:ext uri="{28A0092B-C50C-407E-A947-70E740481C1C}">
                 <a14:useLocalDpi xmlns:a14="http://schemas.microsoft.com/office/drawing/2010/main" val="0"/>
               </a:ext>
               <a:ext uri="{96DAC541-7B7A-43D3-8B79-37D633B846F1}">
-                <asvg:svgBlip xmlns:asvg="http://schemas.microsoft.com/office/drawing/2016/SVG/main" r:embed="rId8"/>
+                <asvg:svgBlip xmlns:asvg="http://schemas.microsoft.com/office/drawing/2016/SVG/main" r:embed="rId9"/>
               </a:ext>
             </a:extLst>
           </a:blip>
@@ -6780,13 +6739,13 @@
           <p:nvPr/>
         </p:nvPicPr>
         <p:blipFill>
-          <a:blip r:embed="rId9" cstate="print">
+          <a:blip r:embed="rId10" cstate="print">
             <a:extLst>
               <a:ext uri="{28A0092B-C50C-407E-A947-70E740481C1C}">
                 <a14:useLocalDpi xmlns:a14="http://schemas.microsoft.com/office/drawing/2010/main" val="0"/>
               </a:ext>
               <a:ext uri="{96DAC541-7B7A-43D3-8B79-37D633B846F1}">
-                <asvg:svgBlip xmlns:asvg="http://schemas.microsoft.com/office/drawing/2016/SVG/main" r:embed="rId10"/>
+                <asvg:svgBlip xmlns:asvg="http://schemas.microsoft.com/office/drawing/2016/SVG/main" r:embed="rId11"/>
               </a:ext>
             </a:extLst>
           </a:blip>
@@ -6813,13 +6772,13 @@
           <p:nvPr/>
         </p:nvPicPr>
         <p:blipFill>
-          <a:blip r:embed="rId11" cstate="print">
+          <a:blip r:embed="rId12" cstate="print">
             <a:extLst>
               <a:ext uri="{28A0092B-C50C-407E-A947-70E740481C1C}">
                 <a14:useLocalDpi xmlns:a14="http://schemas.microsoft.com/office/drawing/2010/main" val="0"/>
               </a:ext>
               <a:ext uri="{96DAC541-7B7A-43D3-8B79-37D633B846F1}">
-                <asvg:svgBlip xmlns:asvg="http://schemas.microsoft.com/office/drawing/2016/SVG/main" r:embed="rId12"/>
+                <asvg:svgBlip xmlns:asvg="http://schemas.microsoft.com/office/drawing/2016/SVG/main" r:embed="rId13"/>
               </a:ext>
             </a:extLst>
           </a:blip>
@@ -6846,13 +6805,13 @@
           <p:nvPr/>
         </p:nvPicPr>
         <p:blipFill>
-          <a:blip r:embed="rId9" cstate="print">
+          <a:blip r:embed="rId10" cstate="print">
             <a:extLst>
               <a:ext uri="{28A0092B-C50C-407E-A947-70E740481C1C}">
                 <a14:useLocalDpi xmlns:a14="http://schemas.microsoft.com/office/drawing/2010/main" val="0"/>
               </a:ext>
               <a:ext uri="{96DAC541-7B7A-43D3-8B79-37D633B846F1}">
-                <asvg:svgBlip xmlns:asvg="http://schemas.microsoft.com/office/drawing/2016/SVG/main" r:embed="rId10"/>
+                <asvg:svgBlip xmlns:asvg="http://schemas.microsoft.com/office/drawing/2016/SVG/main" r:embed="rId11"/>
               </a:ext>
             </a:extLst>
           </a:blip>
@@ -6879,13 +6838,13 @@
           <p:nvPr/>
         </p:nvPicPr>
         <p:blipFill>
-          <a:blip r:embed="rId13" cstate="print">
+          <a:blip r:embed="rId14" cstate="print">
             <a:extLst>
               <a:ext uri="{28A0092B-C50C-407E-A947-70E740481C1C}">
                 <a14:useLocalDpi xmlns:a14="http://schemas.microsoft.com/office/drawing/2010/main" val="0"/>
               </a:ext>
               <a:ext uri="{96DAC541-7B7A-43D3-8B79-37D633B846F1}">
-                <asvg:svgBlip xmlns:asvg="http://schemas.microsoft.com/office/drawing/2016/SVG/main" r:embed="rId14"/>
+                <asvg:svgBlip xmlns:asvg="http://schemas.microsoft.com/office/drawing/2016/SVG/main" r:embed="rId15"/>
               </a:ext>
             </a:extLst>
           </a:blip>
@@ -7248,13 +7207,13 @@
           <p:nvPr/>
         </p:nvPicPr>
         <p:blipFill>
-          <a:blip r:embed="rId15" cstate="print">
+          <a:blip r:embed="rId16" cstate="print">
             <a:extLst>
               <a:ext uri="{28A0092B-C50C-407E-A947-70E740481C1C}">
                 <a14:useLocalDpi xmlns:a14="http://schemas.microsoft.com/office/drawing/2010/main" val="0"/>
               </a:ext>
               <a:ext uri="{96DAC541-7B7A-43D3-8B79-37D633B846F1}">
-                <asvg:svgBlip xmlns:asvg="http://schemas.microsoft.com/office/drawing/2016/SVG/main" r:embed="rId16"/>
+                <asvg:svgBlip xmlns:asvg="http://schemas.microsoft.com/office/drawing/2016/SVG/main" r:embed="rId17"/>
               </a:ext>
             </a:extLst>
           </a:blip>
@@ -7281,13 +7240,13 @@
           <p:nvPr/>
         </p:nvPicPr>
         <p:blipFill>
-          <a:blip r:embed="rId17">
+          <a:blip r:embed="rId18">
             <a:extLst>
               <a:ext uri="{28A0092B-C50C-407E-A947-70E740481C1C}">
                 <a14:useLocalDpi xmlns:a14="http://schemas.microsoft.com/office/drawing/2010/main" val="0"/>
               </a:ext>
               <a:ext uri="{96DAC541-7B7A-43D3-8B79-37D633B846F1}">
-                <asvg:svgBlip xmlns:asvg="http://schemas.microsoft.com/office/drawing/2016/SVG/main" r:embed="rId18"/>
+                <asvg:svgBlip xmlns:asvg="http://schemas.microsoft.com/office/drawing/2016/SVG/main" r:embed="rId19"/>
               </a:ext>
             </a:extLst>
           </a:blip>
@@ -7433,13 +7392,13 @@
           <p:nvPr/>
         </p:nvPicPr>
         <p:blipFill>
-          <a:blip r:embed="rId19" cstate="print">
+          <a:blip r:embed="rId20" cstate="print">
             <a:extLst>
               <a:ext uri="{28A0092B-C50C-407E-A947-70E740481C1C}">
                 <a14:useLocalDpi xmlns:a14="http://schemas.microsoft.com/office/drawing/2010/main" val="0"/>
               </a:ext>
               <a:ext uri="{96DAC541-7B7A-43D3-8B79-37D633B846F1}">
-                <asvg:svgBlip xmlns:asvg="http://schemas.microsoft.com/office/drawing/2016/SVG/main" r:embed="rId20"/>
+                <asvg:svgBlip xmlns:asvg="http://schemas.microsoft.com/office/drawing/2016/SVG/main" r:embed="rId21"/>
               </a:ext>
             </a:extLst>
           </a:blip>
@@ -7562,10 +7521,6 @@
               </a:rPr>
               <a:t>Merchant Frontend</a:t>
             </a:r>
-            <a:endParaRPr lang="en-US" altLang="zh-CN" sz="1600">
-              <a:latin typeface="Times New Roman" panose="02020603050405020304" charset="0"/>
-              <a:cs typeface="Times New Roman" panose="02020603050405020304" charset="0"/>
-            </a:endParaRPr>
           </a:p>
         </p:txBody>
       </p:sp>
@@ -7599,10 +7554,6 @@
               </a:rPr>
               <a:t>PS-App</a:t>
             </a:r>
-            <a:endParaRPr lang="en-US" altLang="zh-CN" sz="1600">
-              <a:latin typeface="Times New Roman" panose="02020603050405020304" charset="0"/>
-              <a:cs typeface="Times New Roman" panose="02020603050405020304" charset="0"/>
-            </a:endParaRPr>
           </a:p>
         </p:txBody>
       </p:sp>
@@ -7636,10 +7587,6 @@
               </a:rPr>
               <a:t>User</a:t>
             </a:r>
-            <a:endParaRPr lang="en-US" altLang="zh-CN" sz="1600">
-              <a:latin typeface="Times New Roman" panose="02020603050405020304" charset="0"/>
-              <a:cs typeface="Times New Roman" panose="02020603050405020304" charset="0"/>
-            </a:endParaRPr>
           </a:p>
         </p:txBody>
       </p:sp>
@@ -7673,10 +7620,6 @@
               </a:rPr>
               <a:t> Device</a:t>
             </a:r>
-            <a:endParaRPr lang="en-US" altLang="zh-CN" sz="1600">
-              <a:latin typeface="Times New Roman" panose="02020603050405020304" charset="0"/>
-              <a:cs typeface="Times New Roman" panose="02020603050405020304" charset="0"/>
-            </a:endParaRPr>
           </a:p>
         </p:txBody>
       </p:sp>
@@ -7783,10 +7726,6 @@
               </a:rPr>
               <a:t>Shop</a:t>
             </a:r>
-            <a:endParaRPr lang="en-US" altLang="zh-CN" sz="1600">
-              <a:latin typeface="Times New Roman" panose="02020603050405020304" charset="0"/>
-              <a:cs typeface="Times New Roman" panose="02020603050405020304" charset="0"/>
-            </a:endParaRPr>
           </a:p>
         </p:txBody>
       </p:sp>
@@ -7894,10 +7833,6 @@
               </a:rPr>
               <a:t>Merchant Server</a:t>
             </a:r>
-            <a:endParaRPr lang="en-US" altLang="zh-CN" sz="1600">
-              <a:latin typeface="Times New Roman" panose="02020603050405020304" charset="0"/>
-              <a:cs typeface="Times New Roman" panose="02020603050405020304" charset="0"/>
-            </a:endParaRPr>
           </a:p>
         </p:txBody>
       </p:sp>
@@ -8007,10 +7942,6 @@
               </a:rPr>
               <a:t>PS-Server</a:t>
             </a:r>
-            <a:endParaRPr lang="en-US" altLang="zh-CN" sz="1600">
-              <a:latin typeface="Times New Roman" panose="02020603050405020304" charset="0"/>
-              <a:cs typeface="Times New Roman" panose="02020603050405020304" charset="0"/>
-            </a:endParaRPr>
           </a:p>
         </p:txBody>
       </p:sp>
@@ -8117,10 +8048,6 @@
               </a:rPr>
               <a:t>Funds transfer</a:t>
             </a:r>
-            <a:endParaRPr lang="en-US" altLang="zh-CN" sz="1600">
-              <a:latin typeface="Times New Roman" panose="02020603050405020304" charset="0"/>
-              <a:cs typeface="Times New Roman" panose="02020603050405020304" charset="0"/>
-            </a:endParaRPr>
           </a:p>
         </p:txBody>
       </p:sp>
@@ -8204,10 +8131,6 @@
               </a:rPr>
               <a:t>SDK</a:t>
             </a:r>
-            <a:endParaRPr lang="en-US" altLang="zh-CN" sz="1600">
-              <a:latin typeface="Times New Roman" panose="02020603050405020304" charset="0"/>
-              <a:cs typeface="Times New Roman" panose="02020603050405020304" charset="0"/>
-            </a:endParaRPr>
           </a:p>
         </p:txBody>
       </p:sp>
@@ -8258,13 +8181,13 @@
           <p:nvPr/>
         </p:nvPicPr>
         <p:blipFill>
-          <a:blip r:embed="rId1" cstate="print">
+          <a:blip r:embed="rId2" cstate="print">
             <a:extLst>
               <a:ext uri="{28A0092B-C50C-407E-A947-70E740481C1C}">
                 <a14:useLocalDpi xmlns:a14="http://schemas.microsoft.com/office/drawing/2010/main" val="0"/>
               </a:ext>
               <a:ext uri="{96DAC541-7B7A-43D3-8B79-37D633B846F1}">
-                <asvg:svgBlip xmlns:asvg="http://schemas.microsoft.com/office/drawing/2016/SVG/main" r:embed="rId2"/>
+                <asvg:svgBlip xmlns:asvg="http://schemas.microsoft.com/office/drawing/2016/SVG/main" r:embed="rId3"/>
               </a:ext>
             </a:extLst>
           </a:blip>
@@ -8291,13 +8214,13 @@
           <p:nvPr/>
         </p:nvPicPr>
         <p:blipFill>
-          <a:blip r:embed="rId3" cstate="print">
+          <a:blip r:embed="rId4" cstate="print">
             <a:extLst>
               <a:ext uri="{28A0092B-C50C-407E-A947-70E740481C1C}">
                 <a14:useLocalDpi xmlns:a14="http://schemas.microsoft.com/office/drawing/2010/main" val="0"/>
               </a:ext>
               <a:ext uri="{96DAC541-7B7A-43D3-8B79-37D633B846F1}">
-                <asvg:svgBlip xmlns:asvg="http://schemas.microsoft.com/office/drawing/2016/SVG/main" r:embed="rId4"/>
+                <asvg:svgBlip xmlns:asvg="http://schemas.microsoft.com/office/drawing/2016/SVG/main" r:embed="rId5"/>
               </a:ext>
             </a:extLst>
           </a:blip>
@@ -8528,13 +8451,13 @@
           <p:nvPr/>
         </p:nvPicPr>
         <p:blipFill>
-          <a:blip r:embed="rId5" cstate="print">
+          <a:blip r:embed="rId6" cstate="print">
             <a:extLst>
               <a:ext uri="{28A0092B-C50C-407E-A947-70E740481C1C}">
                 <a14:useLocalDpi xmlns:a14="http://schemas.microsoft.com/office/drawing/2010/main" val="0"/>
               </a:ext>
               <a:ext uri="{96DAC541-7B7A-43D3-8B79-37D633B846F1}">
-                <asvg:svgBlip xmlns:asvg="http://schemas.microsoft.com/office/drawing/2016/SVG/main" r:embed="rId6"/>
+                <asvg:svgBlip xmlns:asvg="http://schemas.microsoft.com/office/drawing/2016/SVG/main" r:embed="rId7"/>
               </a:ext>
             </a:extLst>
           </a:blip>
@@ -8561,13 +8484,13 @@
           <p:nvPr/>
         </p:nvPicPr>
         <p:blipFill>
-          <a:blip r:embed="rId7" cstate="print">
+          <a:blip r:embed="rId8" cstate="print">
             <a:extLst>
               <a:ext uri="{28A0092B-C50C-407E-A947-70E740481C1C}">
                 <a14:useLocalDpi xmlns:a14="http://schemas.microsoft.com/office/drawing/2010/main" val="0"/>
               </a:ext>
               <a:ext uri="{96DAC541-7B7A-43D3-8B79-37D633B846F1}">
-                <asvg:svgBlip xmlns:asvg="http://schemas.microsoft.com/office/drawing/2016/SVG/main" r:embed="rId8"/>
+                <asvg:svgBlip xmlns:asvg="http://schemas.microsoft.com/office/drawing/2016/SVG/main" r:embed="rId9"/>
               </a:ext>
             </a:extLst>
           </a:blip>
@@ -8594,13 +8517,13 @@
           <p:nvPr/>
         </p:nvPicPr>
         <p:blipFill>
-          <a:blip r:embed="rId9" cstate="print">
+          <a:blip r:embed="rId10" cstate="print">
             <a:extLst>
               <a:ext uri="{28A0092B-C50C-407E-A947-70E740481C1C}">
                 <a14:useLocalDpi xmlns:a14="http://schemas.microsoft.com/office/drawing/2010/main" val="0"/>
               </a:ext>
               <a:ext uri="{96DAC541-7B7A-43D3-8B79-37D633B846F1}">
-                <asvg:svgBlip xmlns:asvg="http://schemas.microsoft.com/office/drawing/2016/SVG/main" r:embed="rId10"/>
+                <asvg:svgBlip xmlns:asvg="http://schemas.microsoft.com/office/drawing/2016/SVG/main" r:embed="rId11"/>
               </a:ext>
             </a:extLst>
           </a:blip>
@@ -8627,13 +8550,13 @@
           <p:nvPr/>
         </p:nvPicPr>
         <p:blipFill>
-          <a:blip r:embed="rId11" cstate="print">
+          <a:blip r:embed="rId12" cstate="print">
             <a:extLst>
               <a:ext uri="{28A0092B-C50C-407E-A947-70E740481C1C}">
                 <a14:useLocalDpi xmlns:a14="http://schemas.microsoft.com/office/drawing/2010/main" val="0"/>
               </a:ext>
               <a:ext uri="{96DAC541-7B7A-43D3-8B79-37D633B846F1}">
-                <asvg:svgBlip xmlns:asvg="http://schemas.microsoft.com/office/drawing/2016/SVG/main" r:embed="rId12"/>
+                <asvg:svgBlip xmlns:asvg="http://schemas.microsoft.com/office/drawing/2016/SVG/main" r:embed="rId13"/>
               </a:ext>
             </a:extLst>
           </a:blip>
@@ -8660,13 +8583,13 @@
           <p:nvPr/>
         </p:nvPicPr>
         <p:blipFill>
-          <a:blip r:embed="rId11" cstate="print">
+          <a:blip r:embed="rId12" cstate="print">
             <a:extLst>
               <a:ext uri="{28A0092B-C50C-407E-A947-70E740481C1C}">
                 <a14:useLocalDpi xmlns:a14="http://schemas.microsoft.com/office/drawing/2010/main" val="0"/>
               </a:ext>
               <a:ext uri="{96DAC541-7B7A-43D3-8B79-37D633B846F1}">
-                <asvg:svgBlip xmlns:asvg="http://schemas.microsoft.com/office/drawing/2016/SVG/main" r:embed="rId13"/>
+                <asvg:svgBlip xmlns:asvg="http://schemas.microsoft.com/office/drawing/2016/SVG/main" r:embed="rId14"/>
               </a:ext>
             </a:extLst>
           </a:blip>
@@ -8693,10 +8616,10 @@
           <p:nvPr/>
         </p:nvPicPr>
         <p:blipFill>
-          <a:blip r:embed="rId14">
+          <a:blip r:embed="rId15">
             <a:extLst>
               <a:ext uri="{96DAC541-7B7A-43D3-8B79-37D633B846F1}">
-                <asvg:svgBlip xmlns:asvg="http://schemas.microsoft.com/office/drawing/2016/SVG/main" r:embed="rId15"/>
+                <asvg:svgBlip xmlns:asvg="http://schemas.microsoft.com/office/drawing/2016/SVG/main" r:embed="rId16"/>
               </a:ext>
             </a:extLst>
           </a:blip>
@@ -8723,10 +8646,10 @@
           <p:nvPr/>
         </p:nvPicPr>
         <p:blipFill>
-          <a:blip r:embed="rId16">
+          <a:blip r:embed="rId17">
             <a:extLst>
               <a:ext uri="{96DAC541-7B7A-43D3-8B79-37D633B846F1}">
-                <asvg:svgBlip xmlns:asvg="http://schemas.microsoft.com/office/drawing/2016/SVG/main" r:embed="rId17"/>
+                <asvg:svgBlip xmlns:asvg="http://schemas.microsoft.com/office/drawing/2016/SVG/main" r:embed="rId18"/>
               </a:ext>
             </a:extLst>
           </a:blip>
@@ -8753,10 +8676,10 @@
           <p:nvPr/>
         </p:nvPicPr>
         <p:blipFill>
-          <a:blip r:embed="rId18">
+          <a:blip r:embed="rId19">
             <a:extLst>
               <a:ext uri="{96DAC541-7B7A-43D3-8B79-37D633B846F1}">
-                <asvg:svgBlip xmlns:asvg="http://schemas.microsoft.com/office/drawing/2016/SVG/main" r:embed="rId19"/>
+                <asvg:svgBlip xmlns:asvg="http://schemas.microsoft.com/office/drawing/2016/SVG/main" r:embed="rId20"/>
               </a:ext>
             </a:extLst>
           </a:blip>
@@ -8813,10 +8736,6 @@
               </a:rPr>
               <a:t>Password</a:t>
             </a:r>
-            <a:endParaRPr lang="en-US" altLang="zh-CN" sz="1600">
-              <a:latin typeface="Times New Roman" panose="02020603050405020304" charset="0"/>
-              <a:cs typeface="Times New Roman" panose="02020603050405020304" charset="0"/>
-            </a:endParaRPr>
           </a:p>
         </p:txBody>
       </p:sp>
@@ -8829,10 +8748,10 @@
           <p:nvPr/>
         </p:nvPicPr>
         <p:blipFill>
-          <a:blip r:embed="rId20">
+          <a:blip r:embed="rId21">
             <a:extLst>
               <a:ext uri="{96DAC541-7B7A-43D3-8B79-37D633B846F1}">
-                <asvg:svgBlip xmlns:asvg="http://schemas.microsoft.com/office/drawing/2016/SVG/main" r:embed="rId21"/>
+                <asvg:svgBlip xmlns:asvg="http://schemas.microsoft.com/office/drawing/2016/SVG/main" r:embed="rId22"/>
               </a:ext>
             </a:extLst>
           </a:blip>
@@ -8859,10 +8778,10 @@
           <p:nvPr/>
         </p:nvPicPr>
         <p:blipFill>
-          <a:blip r:embed="rId22">
+          <a:blip r:embed="rId23">
             <a:extLst>
               <a:ext uri="{96DAC541-7B7A-43D3-8B79-37D633B846F1}">
-                <asvg:svgBlip xmlns:asvg="http://schemas.microsoft.com/office/drawing/2016/SVG/main" r:embed="rId23"/>
+                <asvg:svgBlip xmlns:asvg="http://schemas.microsoft.com/office/drawing/2016/SVG/main" r:embed="rId24"/>
               </a:ext>
             </a:extLst>
           </a:blip>
@@ -8889,10 +8808,10 @@
           <p:nvPr/>
         </p:nvPicPr>
         <p:blipFill>
-          <a:blip r:embed="rId24">
+          <a:blip r:embed="rId25">
             <a:extLst>
               <a:ext uri="{96DAC541-7B7A-43D3-8B79-37D633B846F1}">
-                <asvg:svgBlip xmlns:asvg="http://schemas.microsoft.com/office/drawing/2016/SVG/main" r:embed="rId25"/>
+                <asvg:svgBlip xmlns:asvg="http://schemas.microsoft.com/office/drawing/2016/SVG/main" r:embed="rId26"/>
               </a:ext>
             </a:extLst>
           </a:blip>
@@ -8919,10 +8838,10 @@
           <p:nvPr/>
         </p:nvPicPr>
         <p:blipFill>
-          <a:blip r:embed="rId26">
+          <a:blip r:embed="rId27">
             <a:extLst>
               <a:ext uri="{96DAC541-7B7A-43D3-8B79-37D633B846F1}">
-                <asvg:svgBlip xmlns:asvg="http://schemas.microsoft.com/office/drawing/2016/SVG/main" r:embed="rId27"/>
+                <asvg:svgBlip xmlns:asvg="http://schemas.microsoft.com/office/drawing/2016/SVG/main" r:embed="rId28"/>
               </a:ext>
             </a:extLst>
           </a:blip>
@@ -8949,10 +8868,10 @@
           <p:nvPr/>
         </p:nvPicPr>
         <p:blipFill>
-          <a:blip r:embed="rId28">
+          <a:blip r:embed="rId29">
             <a:extLst>
               <a:ext uri="{96DAC541-7B7A-43D3-8B79-37D633B846F1}">
-                <asvg:svgBlip xmlns:asvg="http://schemas.microsoft.com/office/drawing/2016/SVG/main" r:embed="rId29"/>
+                <asvg:svgBlip xmlns:asvg="http://schemas.microsoft.com/office/drawing/2016/SVG/main" r:embed="rId30"/>
               </a:ext>
             </a:extLst>
           </a:blip>
@@ -9102,6 +9021,7 @@
           <a:bodyPr wrap="square" rtlCol="0">
             <a:noAutofit/>
           </a:bodyPr>
+          <a:lstStyle/>
           <a:p>
             <a:pPr algn="ctr"/>
             <a:r>
@@ -9111,10 +9031,6 @@
               </a:rPr>
               <a:t>Merchant Frontend</a:t>
             </a:r>
-            <a:endParaRPr lang="en-US" altLang="zh-CN" sz="1600">
-              <a:latin typeface="Times New Roman" panose="02020603050405020304" charset="0"/>
-              <a:cs typeface="Times New Roman" panose="02020603050405020304" charset="0"/>
-            </a:endParaRPr>
           </a:p>
         </p:txBody>
       </p:sp>
@@ -9138,6 +9054,7 @@
           <a:bodyPr wrap="square" rtlCol="0">
             <a:spAutoFit/>
           </a:bodyPr>
+          <a:lstStyle/>
           <a:p>
             <a:pPr algn="ctr"/>
             <a:r>
@@ -9147,10 +9064,6 @@
               </a:rPr>
               <a:t>PS-App</a:t>
             </a:r>
-            <a:endParaRPr lang="en-US" altLang="zh-CN" sz="1600">
-              <a:latin typeface="Times New Roman" panose="02020603050405020304" charset="0"/>
-              <a:cs typeface="Times New Roman" panose="02020603050405020304" charset="0"/>
-            </a:endParaRPr>
           </a:p>
         </p:txBody>
       </p:sp>
@@ -9174,6 +9087,7 @@
           <a:bodyPr wrap="square" rtlCol="0">
             <a:spAutoFit/>
           </a:bodyPr>
+          <a:lstStyle/>
           <a:p>
             <a:pPr algn="ctr"/>
             <a:r>
@@ -9183,10 +9097,6 @@
               </a:rPr>
               <a:t>User</a:t>
             </a:r>
-            <a:endParaRPr lang="en-US" altLang="zh-CN" sz="1600">
-              <a:latin typeface="Times New Roman" panose="02020603050405020304" charset="0"/>
-              <a:cs typeface="Times New Roman" panose="02020603050405020304" charset="0"/>
-            </a:endParaRPr>
           </a:p>
         </p:txBody>
       </p:sp>
@@ -9210,6 +9120,7 @@
           <a:bodyPr wrap="square" rtlCol="0">
             <a:noAutofit/>
           </a:bodyPr>
+          <a:lstStyle/>
           <a:p>
             <a:pPr algn="ctr"/>
             <a:r>
@@ -9219,10 +9130,6 @@
               </a:rPr>
               <a:t> Device</a:t>
             </a:r>
-            <a:endParaRPr lang="en-US" altLang="zh-CN" sz="1600">
-              <a:latin typeface="Times New Roman" panose="02020603050405020304" charset="0"/>
-              <a:cs typeface="Times New Roman" panose="02020603050405020304" charset="0"/>
-            </a:endParaRPr>
           </a:p>
         </p:txBody>
       </p:sp>
@@ -9319,6 +9226,7 @@
           <a:bodyPr wrap="square" rtlCol="0">
             <a:noAutofit/>
           </a:bodyPr>
+          <a:lstStyle/>
           <a:p>
             <a:pPr algn="ctr"/>
             <a:r>
@@ -9328,10 +9236,6 @@
               </a:rPr>
               <a:t>Shop</a:t>
             </a:r>
-            <a:endParaRPr lang="en-US" altLang="zh-CN" sz="1600">
-              <a:latin typeface="Times New Roman" panose="02020603050405020304" charset="0"/>
-              <a:cs typeface="Times New Roman" panose="02020603050405020304" charset="0"/>
-            </a:endParaRPr>
           </a:p>
         </p:txBody>
       </p:sp>
@@ -9429,6 +9333,7 @@
           <a:bodyPr wrap="square" rtlCol="0">
             <a:noAutofit/>
           </a:bodyPr>
+          <a:lstStyle/>
           <a:p>
             <a:pPr algn="ctr"/>
             <a:r>
@@ -9436,19 +9341,8 @@
                 <a:latin typeface="Times New Roman" panose="02020603050405020304" charset="0"/>
                 <a:cs typeface="Times New Roman" panose="02020603050405020304" charset="0"/>
               </a:rPr>
-              <a:t>Merchant S</a:t>
+              <a:t>Merchant Server</a:t>
             </a:r>
-            <a:r>
-              <a:rPr lang="en-US" altLang="zh-CN" sz="1600">
-                <a:latin typeface="Times New Roman" panose="02020603050405020304" charset="0"/>
-                <a:cs typeface="Times New Roman" panose="02020603050405020304" charset="0"/>
-              </a:rPr>
-              <a:t>erver</a:t>
-            </a:r>
-            <a:endParaRPr lang="en-US" altLang="zh-CN" sz="1600">
-              <a:latin typeface="Times New Roman" panose="02020603050405020304" charset="0"/>
-              <a:cs typeface="Times New Roman" panose="02020603050405020304" charset="0"/>
-            </a:endParaRPr>
           </a:p>
         </p:txBody>
       </p:sp>
@@ -9548,6 +9442,7 @@
           <a:bodyPr wrap="square" rtlCol="0">
             <a:spAutoFit/>
           </a:bodyPr>
+          <a:lstStyle/>
           <a:p>
             <a:pPr algn="ctr"/>
             <a:r>
@@ -9555,19 +9450,8 @@
                 <a:latin typeface="Times New Roman" panose="02020603050405020304" charset="0"/>
                 <a:cs typeface="Times New Roman" panose="02020603050405020304" charset="0"/>
               </a:rPr>
-              <a:t>PS-S</a:t>
+              <a:t>PS-Server</a:t>
             </a:r>
-            <a:r>
-              <a:rPr lang="en-US" altLang="zh-CN" sz="1600">
-                <a:latin typeface="Times New Roman" panose="02020603050405020304" charset="0"/>
-                <a:cs typeface="Times New Roman" panose="02020603050405020304" charset="0"/>
-              </a:rPr>
-              <a:t>erver</a:t>
-            </a:r>
-            <a:endParaRPr lang="en-US" altLang="zh-CN" sz="1600">
-              <a:latin typeface="Times New Roman" panose="02020603050405020304" charset="0"/>
-              <a:cs typeface="Times New Roman" panose="02020603050405020304" charset="0"/>
-            </a:endParaRPr>
           </a:p>
         </p:txBody>
       </p:sp>
@@ -9664,6 +9548,7 @@
           <a:bodyPr wrap="square" rtlCol="0">
             <a:spAutoFit/>
           </a:bodyPr>
+          <a:lstStyle/>
           <a:p>
             <a:pPr algn="ctr"/>
             <a:r>
@@ -9673,10 +9558,6 @@
               </a:rPr>
               <a:t>Funds transfer</a:t>
             </a:r>
-            <a:endParaRPr lang="en-US" altLang="zh-CN" sz="1600">
-              <a:latin typeface="Times New Roman" panose="02020603050405020304" charset="0"/>
-              <a:cs typeface="Times New Roman" panose="02020603050405020304" charset="0"/>
-            </a:endParaRPr>
           </a:p>
         </p:txBody>
       </p:sp>
@@ -9750,6 +9631,7 @@
           <a:bodyPr wrap="square" rtlCol="0">
             <a:noAutofit/>
           </a:bodyPr>
+          <a:lstStyle/>
           <a:p>
             <a:pPr algn="ctr"/>
             <a:r>
@@ -9759,10 +9641,6 @@
               </a:rPr>
               <a:t>SDK</a:t>
             </a:r>
-            <a:endParaRPr lang="en-US" altLang="zh-CN" sz="1600">
-              <a:latin typeface="Times New Roman" panose="02020603050405020304" charset="0"/>
-              <a:cs typeface="Times New Roman" panose="02020603050405020304" charset="0"/>
-            </a:endParaRPr>
           </a:p>
         </p:txBody>
       </p:sp>
@@ -9813,13 +9691,13 @@
           <p:nvPr/>
         </p:nvPicPr>
         <p:blipFill>
-          <a:blip r:embed="rId1" cstate="print">
+          <a:blip r:embed="rId2" cstate="print">
             <a:extLst>
               <a:ext uri="{28A0092B-C50C-407E-A947-70E740481C1C}">
                 <a14:useLocalDpi xmlns:a14="http://schemas.microsoft.com/office/drawing/2010/main" val="0"/>
               </a:ext>
               <a:ext uri="{96DAC541-7B7A-43D3-8B79-37D633B846F1}">
-                <asvg:svgBlip xmlns:asvg="http://schemas.microsoft.com/office/drawing/2016/SVG/main" r:embed="rId2"/>
+                <asvg:svgBlip xmlns:asvg="http://schemas.microsoft.com/office/drawing/2016/SVG/main" r:embed="rId3"/>
               </a:ext>
             </a:extLst>
           </a:blip>
@@ -9846,13 +9724,13 @@
           <p:nvPr/>
         </p:nvPicPr>
         <p:blipFill>
-          <a:blip r:embed="rId3" cstate="print">
+          <a:blip r:embed="rId4" cstate="print">
             <a:extLst>
               <a:ext uri="{28A0092B-C50C-407E-A947-70E740481C1C}">
                 <a14:useLocalDpi xmlns:a14="http://schemas.microsoft.com/office/drawing/2010/main" val="0"/>
               </a:ext>
               <a:ext uri="{96DAC541-7B7A-43D3-8B79-37D633B846F1}">
-                <asvg:svgBlip xmlns:asvg="http://schemas.microsoft.com/office/drawing/2016/SVG/main" r:embed="rId4"/>
+                <asvg:svgBlip xmlns:asvg="http://schemas.microsoft.com/office/drawing/2016/SVG/main" r:embed="rId5"/>
               </a:ext>
             </a:extLst>
           </a:blip>
@@ -10083,13 +9961,13 @@
           <p:nvPr/>
         </p:nvPicPr>
         <p:blipFill>
-          <a:blip r:embed="rId5" cstate="print">
+          <a:blip r:embed="rId6" cstate="print">
             <a:extLst>
               <a:ext uri="{28A0092B-C50C-407E-A947-70E740481C1C}">
                 <a14:useLocalDpi xmlns:a14="http://schemas.microsoft.com/office/drawing/2010/main" val="0"/>
               </a:ext>
               <a:ext uri="{96DAC541-7B7A-43D3-8B79-37D633B846F1}">
-                <asvg:svgBlip xmlns:asvg="http://schemas.microsoft.com/office/drawing/2016/SVG/main" r:embed="rId6"/>
+                <asvg:svgBlip xmlns:asvg="http://schemas.microsoft.com/office/drawing/2016/SVG/main" r:embed="rId7"/>
               </a:ext>
             </a:extLst>
           </a:blip>
@@ -10116,13 +9994,13 @@
           <p:nvPr/>
         </p:nvPicPr>
         <p:blipFill>
-          <a:blip r:embed="rId7" cstate="print">
+          <a:blip r:embed="rId8" cstate="print">
             <a:extLst>
               <a:ext uri="{28A0092B-C50C-407E-A947-70E740481C1C}">
                 <a14:useLocalDpi xmlns:a14="http://schemas.microsoft.com/office/drawing/2010/main" val="0"/>
               </a:ext>
               <a:ext uri="{96DAC541-7B7A-43D3-8B79-37D633B846F1}">
-                <asvg:svgBlip xmlns:asvg="http://schemas.microsoft.com/office/drawing/2016/SVG/main" r:embed="rId8"/>
+                <asvg:svgBlip xmlns:asvg="http://schemas.microsoft.com/office/drawing/2016/SVG/main" r:embed="rId9"/>
               </a:ext>
             </a:extLst>
           </a:blip>
@@ -10149,13 +10027,13 @@
           <p:nvPr/>
         </p:nvPicPr>
         <p:blipFill>
-          <a:blip r:embed="rId9" cstate="print">
+          <a:blip r:embed="rId10" cstate="print">
             <a:extLst>
               <a:ext uri="{28A0092B-C50C-407E-A947-70E740481C1C}">
                 <a14:useLocalDpi xmlns:a14="http://schemas.microsoft.com/office/drawing/2010/main" val="0"/>
               </a:ext>
               <a:ext uri="{96DAC541-7B7A-43D3-8B79-37D633B846F1}">
-                <asvg:svgBlip xmlns:asvg="http://schemas.microsoft.com/office/drawing/2016/SVG/main" r:embed="rId10"/>
+                <asvg:svgBlip xmlns:asvg="http://schemas.microsoft.com/office/drawing/2016/SVG/main" r:embed="rId11"/>
               </a:ext>
             </a:extLst>
           </a:blip>
@@ -10182,13 +10060,13 @@
           <p:nvPr/>
         </p:nvPicPr>
         <p:blipFill>
-          <a:blip r:embed="rId11" cstate="print">
+          <a:blip r:embed="rId12" cstate="print">
             <a:extLst>
               <a:ext uri="{28A0092B-C50C-407E-A947-70E740481C1C}">
                 <a14:useLocalDpi xmlns:a14="http://schemas.microsoft.com/office/drawing/2010/main" val="0"/>
               </a:ext>
               <a:ext uri="{96DAC541-7B7A-43D3-8B79-37D633B846F1}">
-                <asvg:svgBlip xmlns:asvg="http://schemas.microsoft.com/office/drawing/2016/SVG/main" r:embed="rId12"/>
+                <asvg:svgBlip xmlns:asvg="http://schemas.microsoft.com/office/drawing/2016/SVG/main" r:embed="rId13"/>
               </a:ext>
             </a:extLst>
           </a:blip>
@@ -10215,13 +10093,13 @@
           <p:nvPr/>
         </p:nvPicPr>
         <p:blipFill>
-          <a:blip r:embed="rId11" cstate="print">
+          <a:blip r:embed="rId12" cstate="print">
             <a:extLst>
               <a:ext uri="{28A0092B-C50C-407E-A947-70E740481C1C}">
                 <a14:useLocalDpi xmlns:a14="http://schemas.microsoft.com/office/drawing/2010/main" val="0"/>
               </a:ext>
               <a:ext uri="{96DAC541-7B7A-43D3-8B79-37D633B846F1}">
-                <asvg:svgBlip xmlns:asvg="http://schemas.microsoft.com/office/drawing/2016/SVG/main" r:embed="rId13"/>
+                <asvg:svgBlip xmlns:asvg="http://schemas.microsoft.com/office/drawing/2016/SVG/main" r:embed="rId14"/>
               </a:ext>
             </a:extLst>
           </a:blip>
@@ -10248,10 +10126,10 @@
           <p:nvPr/>
         </p:nvPicPr>
         <p:blipFill>
-          <a:blip r:embed="rId14">
+          <a:blip r:embed="rId15">
             <a:extLst>
               <a:ext uri="{96DAC541-7B7A-43D3-8B79-37D633B846F1}">
-                <asvg:svgBlip xmlns:asvg="http://schemas.microsoft.com/office/drawing/2016/SVG/main" r:embed="rId15"/>
+                <asvg:svgBlip xmlns:asvg="http://schemas.microsoft.com/office/drawing/2016/SVG/main" r:embed="rId16"/>
               </a:ext>
             </a:extLst>
           </a:blip>
@@ -10278,10 +10156,10 @@
           <p:nvPr/>
         </p:nvPicPr>
         <p:blipFill>
-          <a:blip r:embed="rId16">
+          <a:blip r:embed="rId17">
             <a:extLst>
               <a:ext uri="{96DAC541-7B7A-43D3-8B79-37D633B846F1}">
-                <asvg:svgBlip xmlns:asvg="http://schemas.microsoft.com/office/drawing/2016/SVG/main" r:embed="rId17"/>
+                <asvg:svgBlip xmlns:asvg="http://schemas.microsoft.com/office/drawing/2016/SVG/main" r:embed="rId18"/>
               </a:ext>
             </a:extLst>
           </a:blip>
@@ -10308,10 +10186,10 @@
           <p:nvPr/>
         </p:nvPicPr>
         <p:blipFill>
-          <a:blip r:embed="rId18">
+          <a:blip r:embed="rId19">
             <a:extLst>
               <a:ext uri="{96DAC541-7B7A-43D3-8B79-37D633B846F1}">
-                <asvg:svgBlip xmlns:asvg="http://schemas.microsoft.com/office/drawing/2016/SVG/main" r:embed="rId19"/>
+                <asvg:svgBlip xmlns:asvg="http://schemas.microsoft.com/office/drawing/2016/SVG/main" r:embed="rId20"/>
               </a:ext>
             </a:extLst>
           </a:blip>
@@ -10358,6 +10236,7 @@
           <a:bodyPr wrap="square" rtlCol="0">
             <a:noAutofit/>
           </a:bodyPr>
+          <a:lstStyle/>
           <a:p>
             <a:pPr algn="ctr"/>
             <a:r>
@@ -10367,10 +10246,6 @@
               </a:rPr>
               <a:t>Password</a:t>
             </a:r>
-            <a:endParaRPr lang="en-US" altLang="zh-CN" sz="1600">
-              <a:latin typeface="Times New Roman" panose="02020603050405020304" charset="0"/>
-              <a:cs typeface="Times New Roman" panose="02020603050405020304" charset="0"/>
-            </a:endParaRPr>
           </a:p>
         </p:txBody>
       </p:sp>
@@ -10383,10 +10258,10 @@
           <p:nvPr/>
         </p:nvPicPr>
         <p:blipFill>
-          <a:blip r:embed="rId20">
+          <a:blip r:embed="rId21">
             <a:extLst>
               <a:ext uri="{96DAC541-7B7A-43D3-8B79-37D633B846F1}">
-                <asvg:svgBlip xmlns:asvg="http://schemas.microsoft.com/office/drawing/2016/SVG/main" r:embed="rId21"/>
+                <asvg:svgBlip xmlns:asvg="http://schemas.microsoft.com/office/drawing/2016/SVG/main" r:embed="rId22"/>
               </a:ext>
             </a:extLst>
           </a:blip>
@@ -10413,10 +10288,10 @@
           <p:nvPr/>
         </p:nvPicPr>
         <p:blipFill>
-          <a:blip r:embed="rId22">
+          <a:blip r:embed="rId23">
             <a:extLst>
               <a:ext uri="{96DAC541-7B7A-43D3-8B79-37D633B846F1}">
-                <asvg:svgBlip xmlns:asvg="http://schemas.microsoft.com/office/drawing/2016/SVG/main" r:embed="rId23"/>
+                <asvg:svgBlip xmlns:asvg="http://schemas.microsoft.com/office/drawing/2016/SVG/main" r:embed="rId24"/>
               </a:ext>
             </a:extLst>
           </a:blip>
@@ -10443,10 +10318,10 @@
           <p:nvPr/>
         </p:nvPicPr>
         <p:blipFill>
-          <a:blip r:embed="rId24">
+          <a:blip r:embed="rId25">
             <a:extLst>
               <a:ext uri="{96DAC541-7B7A-43D3-8B79-37D633B846F1}">
-                <asvg:svgBlip xmlns:asvg="http://schemas.microsoft.com/office/drawing/2016/SVG/main" r:embed="rId25"/>
+                <asvg:svgBlip xmlns:asvg="http://schemas.microsoft.com/office/drawing/2016/SVG/main" r:embed="rId26"/>
               </a:ext>
             </a:extLst>
           </a:blip>
@@ -10473,10 +10348,10 @@
           <p:nvPr/>
         </p:nvPicPr>
         <p:blipFill>
-          <a:blip r:embed="rId26">
+          <a:blip r:embed="rId27">
             <a:extLst>
               <a:ext uri="{96DAC541-7B7A-43D3-8B79-37D633B846F1}">
-                <asvg:svgBlip xmlns:asvg="http://schemas.microsoft.com/office/drawing/2016/SVG/main" r:embed="rId27"/>
+                <asvg:svgBlip xmlns:asvg="http://schemas.microsoft.com/office/drawing/2016/SVG/main" r:embed="rId28"/>
               </a:ext>
             </a:extLst>
           </a:blip>
@@ -10589,6 +10464,7 @@
           <a:bodyPr wrap="square" rtlCol="0">
             <a:noAutofit/>
           </a:bodyPr>
+          <a:lstStyle/>
           <a:p>
             <a:pPr algn="ctr"/>
             <a:r>
@@ -10598,10 +10474,6 @@
               </a:rPr>
               <a:t>Merchant Frontend</a:t>
             </a:r>
-            <a:endParaRPr lang="en-US" altLang="zh-CN" sz="1600">
-              <a:latin typeface="Times New Roman" panose="02020603050405020304" charset="0"/>
-              <a:cs typeface="Times New Roman" panose="02020603050405020304" charset="0"/>
-            </a:endParaRPr>
           </a:p>
         </p:txBody>
       </p:sp>
@@ -10625,6 +10497,7 @@
           <a:bodyPr wrap="square" rtlCol="0">
             <a:spAutoFit/>
           </a:bodyPr>
+          <a:lstStyle/>
           <a:p>
             <a:pPr algn="ctr"/>
             <a:r>
@@ -10634,10 +10507,6 @@
               </a:rPr>
               <a:t>PS-App</a:t>
             </a:r>
-            <a:endParaRPr lang="en-US" altLang="zh-CN" sz="1600">
-              <a:latin typeface="Times New Roman" panose="02020603050405020304" charset="0"/>
-              <a:cs typeface="Times New Roman" panose="02020603050405020304" charset="0"/>
-            </a:endParaRPr>
           </a:p>
         </p:txBody>
       </p:sp>
@@ -10661,6 +10530,7 @@
           <a:bodyPr wrap="square" rtlCol="0">
             <a:spAutoFit/>
           </a:bodyPr>
+          <a:lstStyle/>
           <a:p>
             <a:pPr algn="ctr"/>
             <a:r>
@@ -10670,10 +10540,6 @@
               </a:rPr>
               <a:t>User</a:t>
             </a:r>
-            <a:endParaRPr lang="en-US" altLang="zh-CN" sz="1600">
-              <a:latin typeface="Times New Roman" panose="02020603050405020304" charset="0"/>
-              <a:cs typeface="Times New Roman" panose="02020603050405020304" charset="0"/>
-            </a:endParaRPr>
           </a:p>
         </p:txBody>
       </p:sp>
@@ -10697,6 +10563,7 @@
           <a:bodyPr wrap="square" rtlCol="0">
             <a:noAutofit/>
           </a:bodyPr>
+          <a:lstStyle/>
           <a:p>
             <a:pPr algn="ctr"/>
             <a:r>
@@ -10706,10 +10573,6 @@
               </a:rPr>
               <a:t> Device</a:t>
             </a:r>
-            <a:endParaRPr lang="en-US" altLang="zh-CN" sz="1600">
-              <a:latin typeface="Times New Roman" panose="02020603050405020304" charset="0"/>
-              <a:cs typeface="Times New Roman" panose="02020603050405020304" charset="0"/>
-            </a:endParaRPr>
           </a:p>
         </p:txBody>
       </p:sp>
@@ -10806,6 +10669,7 @@
           <a:bodyPr wrap="square" rtlCol="0">
             <a:noAutofit/>
           </a:bodyPr>
+          <a:lstStyle/>
           <a:p>
             <a:pPr algn="ctr"/>
             <a:r>
@@ -10815,10 +10679,6 @@
               </a:rPr>
               <a:t>Shop</a:t>
             </a:r>
-            <a:endParaRPr lang="en-US" altLang="zh-CN" sz="1600">
-              <a:latin typeface="Times New Roman" panose="02020603050405020304" charset="0"/>
-              <a:cs typeface="Times New Roman" panose="02020603050405020304" charset="0"/>
-            </a:endParaRPr>
           </a:p>
         </p:txBody>
       </p:sp>
@@ -10916,6 +10776,7 @@
           <a:bodyPr wrap="square" rtlCol="0">
             <a:noAutofit/>
           </a:bodyPr>
+          <a:lstStyle/>
           <a:p>
             <a:pPr algn="ctr"/>
             <a:r>
@@ -10923,19 +10784,8 @@
                 <a:latin typeface="Times New Roman" panose="02020603050405020304" charset="0"/>
                 <a:cs typeface="Times New Roman" panose="02020603050405020304" charset="0"/>
               </a:rPr>
-              <a:t>Merchant S</a:t>
+              <a:t>Merchant Server</a:t>
             </a:r>
-            <a:r>
-              <a:rPr lang="en-US" altLang="zh-CN" sz="1600">
-                <a:latin typeface="Times New Roman" panose="02020603050405020304" charset="0"/>
-                <a:cs typeface="Times New Roman" panose="02020603050405020304" charset="0"/>
-              </a:rPr>
-              <a:t>erver</a:t>
-            </a:r>
-            <a:endParaRPr lang="en-US" altLang="zh-CN" sz="1600">
-              <a:latin typeface="Times New Roman" panose="02020603050405020304" charset="0"/>
-              <a:cs typeface="Times New Roman" panose="02020603050405020304" charset="0"/>
-            </a:endParaRPr>
           </a:p>
         </p:txBody>
       </p:sp>
@@ -11035,6 +10885,7 @@
           <a:bodyPr wrap="square" rtlCol="0">
             <a:spAutoFit/>
           </a:bodyPr>
+          <a:lstStyle/>
           <a:p>
             <a:pPr algn="ctr"/>
             <a:r>
@@ -11042,19 +10893,8 @@
                 <a:latin typeface="Times New Roman" panose="02020603050405020304" charset="0"/>
                 <a:cs typeface="Times New Roman" panose="02020603050405020304" charset="0"/>
               </a:rPr>
-              <a:t>PS-S</a:t>
+              <a:t>PS-Server</a:t>
             </a:r>
-            <a:r>
-              <a:rPr lang="en-US" altLang="zh-CN" sz="1600">
-                <a:latin typeface="Times New Roman" panose="02020603050405020304" charset="0"/>
-                <a:cs typeface="Times New Roman" panose="02020603050405020304" charset="0"/>
-              </a:rPr>
-              <a:t>erver</a:t>
-            </a:r>
-            <a:endParaRPr lang="en-US" altLang="zh-CN" sz="1600">
-              <a:latin typeface="Times New Roman" panose="02020603050405020304" charset="0"/>
-              <a:cs typeface="Times New Roman" panose="02020603050405020304" charset="0"/>
-            </a:endParaRPr>
           </a:p>
         </p:txBody>
       </p:sp>
@@ -11151,6 +10991,7 @@
           <a:bodyPr wrap="square" rtlCol="0">
             <a:spAutoFit/>
           </a:bodyPr>
+          <a:lstStyle/>
           <a:p>
             <a:pPr algn="ctr"/>
             <a:r>
@@ -11160,10 +11001,6 @@
               </a:rPr>
               <a:t>Funds transfer</a:t>
             </a:r>
-            <a:endParaRPr lang="en-US" altLang="zh-CN" sz="1600">
-              <a:latin typeface="Times New Roman" panose="02020603050405020304" charset="0"/>
-              <a:cs typeface="Times New Roman" panose="02020603050405020304" charset="0"/>
-            </a:endParaRPr>
           </a:p>
         </p:txBody>
       </p:sp>
@@ -11237,6 +11074,7 @@
           <a:bodyPr wrap="square" rtlCol="0">
             <a:noAutofit/>
           </a:bodyPr>
+          <a:lstStyle/>
           <a:p>
             <a:pPr algn="ctr"/>
             <a:r>
@@ -11246,10 +11084,6 @@
               </a:rPr>
               <a:t>SDK</a:t>
             </a:r>
-            <a:endParaRPr lang="en-US" altLang="zh-CN" sz="1600">
-              <a:latin typeface="Times New Roman" panose="02020603050405020304" charset="0"/>
-              <a:cs typeface="Times New Roman" panose="02020603050405020304" charset="0"/>
-            </a:endParaRPr>
           </a:p>
         </p:txBody>
       </p:sp>
@@ -11300,13 +11134,13 @@
           <p:nvPr/>
         </p:nvPicPr>
         <p:blipFill>
-          <a:blip r:embed="rId1" cstate="print">
+          <a:blip r:embed="rId2" cstate="print">
             <a:extLst>
               <a:ext uri="{28A0092B-C50C-407E-A947-70E740481C1C}">
                 <a14:useLocalDpi xmlns:a14="http://schemas.microsoft.com/office/drawing/2010/main" val="0"/>
               </a:ext>
               <a:ext uri="{96DAC541-7B7A-43D3-8B79-37D633B846F1}">
-                <asvg:svgBlip xmlns:asvg="http://schemas.microsoft.com/office/drawing/2016/SVG/main" r:embed="rId2"/>
+                <asvg:svgBlip xmlns:asvg="http://schemas.microsoft.com/office/drawing/2016/SVG/main" r:embed="rId3"/>
               </a:ext>
             </a:extLst>
           </a:blip>
@@ -11333,13 +11167,13 @@
           <p:nvPr/>
         </p:nvPicPr>
         <p:blipFill>
-          <a:blip r:embed="rId3" cstate="print">
+          <a:blip r:embed="rId4" cstate="print">
             <a:extLst>
               <a:ext uri="{28A0092B-C50C-407E-A947-70E740481C1C}">
                 <a14:useLocalDpi xmlns:a14="http://schemas.microsoft.com/office/drawing/2010/main" val="0"/>
               </a:ext>
               <a:ext uri="{96DAC541-7B7A-43D3-8B79-37D633B846F1}">
-                <asvg:svgBlip xmlns:asvg="http://schemas.microsoft.com/office/drawing/2016/SVG/main" r:embed="rId4"/>
+                <asvg:svgBlip xmlns:asvg="http://schemas.microsoft.com/office/drawing/2016/SVG/main" r:embed="rId5"/>
               </a:ext>
             </a:extLst>
           </a:blip>
@@ -11366,13 +11200,13 @@
           <p:nvPr/>
         </p:nvPicPr>
         <p:blipFill>
-          <a:blip r:embed="rId5" cstate="print">
+          <a:blip r:embed="rId6" cstate="print">
             <a:extLst>
               <a:ext uri="{28A0092B-C50C-407E-A947-70E740481C1C}">
                 <a14:useLocalDpi xmlns:a14="http://schemas.microsoft.com/office/drawing/2010/main" val="0"/>
               </a:ext>
               <a:ext uri="{96DAC541-7B7A-43D3-8B79-37D633B846F1}">
-                <asvg:svgBlip xmlns:asvg="http://schemas.microsoft.com/office/drawing/2016/SVG/main" r:embed="rId6"/>
+                <asvg:svgBlip xmlns:asvg="http://schemas.microsoft.com/office/drawing/2016/SVG/main" r:embed="rId7"/>
               </a:ext>
             </a:extLst>
           </a:blip>
@@ -11399,13 +11233,13 @@
           <p:nvPr/>
         </p:nvPicPr>
         <p:blipFill>
-          <a:blip r:embed="rId7" cstate="print">
+          <a:blip r:embed="rId8" cstate="print">
             <a:extLst>
               <a:ext uri="{28A0092B-C50C-407E-A947-70E740481C1C}">
                 <a14:useLocalDpi xmlns:a14="http://schemas.microsoft.com/office/drawing/2010/main" val="0"/>
               </a:ext>
               <a:ext uri="{96DAC541-7B7A-43D3-8B79-37D633B846F1}">
-                <asvg:svgBlip xmlns:asvg="http://schemas.microsoft.com/office/drawing/2016/SVG/main" r:embed="rId8"/>
+                <asvg:svgBlip xmlns:asvg="http://schemas.microsoft.com/office/drawing/2016/SVG/main" r:embed="rId9"/>
               </a:ext>
             </a:extLst>
           </a:blip>
@@ -11432,13 +11266,13 @@
           <p:nvPr/>
         </p:nvPicPr>
         <p:blipFill>
-          <a:blip r:embed="rId9" cstate="print">
+          <a:blip r:embed="rId10" cstate="print">
             <a:extLst>
               <a:ext uri="{28A0092B-C50C-407E-A947-70E740481C1C}">
                 <a14:useLocalDpi xmlns:a14="http://schemas.microsoft.com/office/drawing/2010/main" val="0"/>
               </a:ext>
               <a:ext uri="{96DAC541-7B7A-43D3-8B79-37D633B846F1}">
-                <asvg:svgBlip xmlns:asvg="http://schemas.microsoft.com/office/drawing/2016/SVG/main" r:embed="rId10"/>
+                <asvg:svgBlip xmlns:asvg="http://schemas.microsoft.com/office/drawing/2016/SVG/main" r:embed="rId11"/>
               </a:ext>
             </a:extLst>
           </a:blip>
@@ -11465,13 +11299,13 @@
           <p:nvPr/>
         </p:nvPicPr>
         <p:blipFill>
-          <a:blip r:embed="rId11" cstate="print">
+          <a:blip r:embed="rId12" cstate="print">
             <a:extLst>
               <a:ext uri="{28A0092B-C50C-407E-A947-70E740481C1C}">
                 <a14:useLocalDpi xmlns:a14="http://schemas.microsoft.com/office/drawing/2010/main" val="0"/>
               </a:ext>
               <a:ext uri="{96DAC541-7B7A-43D3-8B79-37D633B846F1}">
-                <asvg:svgBlip xmlns:asvg="http://schemas.microsoft.com/office/drawing/2016/SVG/main" r:embed="rId12"/>
+                <asvg:svgBlip xmlns:asvg="http://schemas.microsoft.com/office/drawing/2016/SVG/main" r:embed="rId13"/>
               </a:ext>
             </a:extLst>
           </a:blip>
@@ -11498,13 +11332,13 @@
           <p:nvPr/>
         </p:nvPicPr>
         <p:blipFill>
-          <a:blip r:embed="rId11" cstate="print">
+          <a:blip r:embed="rId12" cstate="print">
             <a:extLst>
               <a:ext uri="{28A0092B-C50C-407E-A947-70E740481C1C}">
                 <a14:useLocalDpi xmlns:a14="http://schemas.microsoft.com/office/drawing/2010/main" val="0"/>
               </a:ext>
               <a:ext uri="{96DAC541-7B7A-43D3-8B79-37D633B846F1}">
-                <asvg:svgBlip xmlns:asvg="http://schemas.microsoft.com/office/drawing/2016/SVG/main" r:embed="rId13"/>
+                <asvg:svgBlip xmlns:asvg="http://schemas.microsoft.com/office/drawing/2016/SVG/main" r:embed="rId14"/>
               </a:ext>
             </a:extLst>
           </a:blip>
@@ -11531,10 +11365,10 @@
           <p:nvPr/>
         </p:nvPicPr>
         <p:blipFill>
-          <a:blip r:embed="rId14">
+          <a:blip r:embed="rId15">
             <a:extLst>
               <a:ext uri="{96DAC541-7B7A-43D3-8B79-37D633B846F1}">
-                <asvg:svgBlip xmlns:asvg="http://schemas.microsoft.com/office/drawing/2016/SVG/main" r:embed="rId15"/>
+                <asvg:svgBlip xmlns:asvg="http://schemas.microsoft.com/office/drawing/2016/SVG/main" r:embed="rId16"/>
               </a:ext>
             </a:extLst>
           </a:blip>
@@ -11561,10 +11395,10 @@
           <p:nvPr/>
         </p:nvPicPr>
         <p:blipFill>
-          <a:blip r:embed="rId16">
+          <a:blip r:embed="rId17">
             <a:extLst>
               <a:ext uri="{96DAC541-7B7A-43D3-8B79-37D633B846F1}">
-                <asvg:svgBlip xmlns:asvg="http://schemas.microsoft.com/office/drawing/2016/SVG/main" r:embed="rId17"/>
+                <asvg:svgBlip xmlns:asvg="http://schemas.microsoft.com/office/drawing/2016/SVG/main" r:embed="rId18"/>
               </a:ext>
             </a:extLst>
           </a:blip>
@@ -11591,10 +11425,10 @@
           <p:nvPr/>
         </p:nvPicPr>
         <p:blipFill>
-          <a:blip r:embed="rId18">
+          <a:blip r:embed="rId19">
             <a:extLst>
               <a:ext uri="{96DAC541-7B7A-43D3-8B79-37D633B846F1}">
-                <asvg:svgBlip xmlns:asvg="http://schemas.microsoft.com/office/drawing/2016/SVG/main" r:embed="rId19"/>
+                <asvg:svgBlip xmlns:asvg="http://schemas.microsoft.com/office/drawing/2016/SVG/main" r:embed="rId20"/>
               </a:ext>
             </a:extLst>
           </a:blip>
@@ -11641,6 +11475,7 @@
           <a:bodyPr wrap="square" rtlCol="0">
             <a:noAutofit/>
           </a:bodyPr>
+          <a:lstStyle/>
           <a:p>
             <a:pPr algn="ctr"/>
             <a:r>
@@ -11650,10 +11485,6 @@
               </a:rPr>
               <a:t>Password</a:t>
             </a:r>
-            <a:endParaRPr lang="en-US" altLang="zh-CN" sz="1600">
-              <a:latin typeface="Times New Roman" panose="02020603050405020304" charset="0"/>
-              <a:cs typeface="Times New Roman" panose="02020603050405020304" charset="0"/>
-            </a:endParaRPr>
           </a:p>
         </p:txBody>
       </p:sp>
@@ -11666,10 +11497,10 @@
           <p:nvPr/>
         </p:nvPicPr>
         <p:blipFill>
-          <a:blip r:embed="rId20">
+          <a:blip r:embed="rId21">
             <a:extLst>
               <a:ext uri="{96DAC541-7B7A-43D3-8B79-37D633B846F1}">
-                <asvg:svgBlip xmlns:asvg="http://schemas.microsoft.com/office/drawing/2016/SVG/main" r:embed="rId21"/>
+                <asvg:svgBlip xmlns:asvg="http://schemas.microsoft.com/office/drawing/2016/SVG/main" r:embed="rId22"/>
               </a:ext>
             </a:extLst>
           </a:blip>
@@ -11696,10 +11527,10 @@
           <p:nvPr/>
         </p:nvPicPr>
         <p:blipFill>
-          <a:blip r:embed="rId22">
+          <a:blip r:embed="rId23">
             <a:extLst>
               <a:ext uri="{96DAC541-7B7A-43D3-8B79-37D633B846F1}">
-                <asvg:svgBlip xmlns:asvg="http://schemas.microsoft.com/office/drawing/2016/SVG/main" r:embed="rId23"/>
+                <asvg:svgBlip xmlns:asvg="http://schemas.microsoft.com/office/drawing/2016/SVG/main" r:embed="rId24"/>
               </a:ext>
             </a:extLst>
           </a:blip>
@@ -11726,10 +11557,10 @@
           <p:nvPr/>
         </p:nvPicPr>
         <p:blipFill>
-          <a:blip r:embed="rId24">
+          <a:blip r:embed="rId25">
             <a:extLst>
               <a:ext uri="{96DAC541-7B7A-43D3-8B79-37D633B846F1}">
-                <asvg:svgBlip xmlns:asvg="http://schemas.microsoft.com/office/drawing/2016/SVG/main" r:embed="rId25"/>
+                <asvg:svgBlip xmlns:asvg="http://schemas.microsoft.com/office/drawing/2016/SVG/main" r:embed="rId26"/>
               </a:ext>
             </a:extLst>
           </a:blip>
@@ -11756,10 +11587,10 @@
           <p:nvPr/>
         </p:nvPicPr>
         <p:blipFill>
-          <a:blip r:embed="rId26">
+          <a:blip r:embed="rId27">
             <a:extLst>
               <a:ext uri="{96DAC541-7B7A-43D3-8B79-37D633B846F1}">
-                <asvg:svgBlip xmlns:asvg="http://schemas.microsoft.com/office/drawing/2016/SVG/main" r:embed="rId27"/>
+                <asvg:svgBlip xmlns:asvg="http://schemas.microsoft.com/office/drawing/2016/SVG/main" r:embed="rId28"/>
               </a:ext>
             </a:extLst>
           </a:blip>
@@ -11786,10 +11617,10 @@
           <p:nvPr/>
         </p:nvPicPr>
         <p:blipFill>
-          <a:blip r:embed="rId28">
+          <a:blip r:embed="rId29">
             <a:extLst>
               <a:ext uri="{96DAC541-7B7A-43D3-8B79-37D633B846F1}">
-                <asvg:svgBlip xmlns:asvg="http://schemas.microsoft.com/office/drawing/2016/SVG/main" r:embed="rId29"/>
+                <asvg:svgBlip xmlns:asvg="http://schemas.microsoft.com/office/drawing/2016/SVG/main" r:embed="rId30"/>
               </a:ext>
             </a:extLst>
           </a:blip>
@@ -11841,13 +11672,13 @@
           <p:nvPr/>
         </p:nvPicPr>
         <p:blipFill>
-          <a:blip r:embed="rId1" cstate="print">
+          <a:blip r:embed="rId2" cstate="print">
             <a:extLst>
               <a:ext uri="{28A0092B-C50C-407E-A947-70E740481C1C}">
                 <a14:useLocalDpi xmlns:a14="http://schemas.microsoft.com/office/drawing/2010/main" val="0"/>
               </a:ext>
               <a:ext uri="{96DAC541-7B7A-43D3-8B79-37D633B846F1}">
-                <asvg:svgBlip xmlns:asvg="http://schemas.microsoft.com/office/drawing/2016/SVG/main" r:embed="rId2"/>
+                <asvg:svgBlip xmlns:asvg="http://schemas.microsoft.com/office/drawing/2016/SVG/main" r:embed="rId3"/>
               </a:ext>
             </a:extLst>
           </a:blip>
@@ -11874,13 +11705,13 @@
           <p:nvPr/>
         </p:nvPicPr>
         <p:blipFill>
-          <a:blip r:embed="rId3" cstate="print">
+          <a:blip r:embed="rId4" cstate="print">
             <a:extLst>
               <a:ext uri="{28A0092B-C50C-407E-A947-70E740481C1C}">
                 <a14:useLocalDpi xmlns:a14="http://schemas.microsoft.com/office/drawing/2010/main" val="0"/>
               </a:ext>
               <a:ext uri="{96DAC541-7B7A-43D3-8B79-37D633B846F1}">
-                <asvg:svgBlip xmlns:asvg="http://schemas.microsoft.com/office/drawing/2016/SVG/main" r:embed="rId4"/>
+                <asvg:svgBlip xmlns:asvg="http://schemas.microsoft.com/office/drawing/2016/SVG/main" r:embed="rId5"/>
               </a:ext>
             </a:extLst>
           </a:blip>
@@ -11954,13 +11785,13 @@
           <p:nvPr/>
         </p:nvPicPr>
         <p:blipFill>
-          <a:blip r:embed="rId5" cstate="print">
+          <a:blip r:embed="rId6" cstate="print">
             <a:extLst>
               <a:ext uri="{28A0092B-C50C-407E-A947-70E740481C1C}">
                 <a14:useLocalDpi xmlns:a14="http://schemas.microsoft.com/office/drawing/2010/main" val="0"/>
               </a:ext>
               <a:ext uri="{96DAC541-7B7A-43D3-8B79-37D633B846F1}">
-                <asvg:svgBlip xmlns:asvg="http://schemas.microsoft.com/office/drawing/2016/SVG/main" r:embed="rId6"/>
+                <asvg:svgBlip xmlns:asvg="http://schemas.microsoft.com/office/drawing/2016/SVG/main" r:embed="rId7"/>
               </a:ext>
             </a:extLst>
           </a:blip>
@@ -11987,13 +11818,13 @@
           <p:nvPr/>
         </p:nvPicPr>
         <p:blipFill>
-          <a:blip r:embed="rId7" cstate="print">
+          <a:blip r:embed="rId8" cstate="print">
             <a:extLst>
               <a:ext uri="{28A0092B-C50C-407E-A947-70E740481C1C}">
                 <a14:useLocalDpi xmlns:a14="http://schemas.microsoft.com/office/drawing/2010/main" val="0"/>
               </a:ext>
               <a:ext uri="{96DAC541-7B7A-43D3-8B79-37D633B846F1}">
-                <asvg:svgBlip xmlns:asvg="http://schemas.microsoft.com/office/drawing/2016/SVG/main" r:embed="rId8"/>
+                <asvg:svgBlip xmlns:asvg="http://schemas.microsoft.com/office/drawing/2016/SVG/main" r:embed="rId9"/>
               </a:ext>
             </a:extLst>
           </a:blip>
@@ -12020,13 +11851,13 @@
           <p:nvPr/>
         </p:nvPicPr>
         <p:blipFill>
-          <a:blip r:embed="rId9" cstate="print">
+          <a:blip r:embed="rId10" cstate="print">
             <a:extLst>
               <a:ext uri="{28A0092B-C50C-407E-A947-70E740481C1C}">
                 <a14:useLocalDpi xmlns:a14="http://schemas.microsoft.com/office/drawing/2010/main" val="0"/>
               </a:ext>
               <a:ext uri="{96DAC541-7B7A-43D3-8B79-37D633B846F1}">
-                <asvg:svgBlip xmlns:asvg="http://schemas.microsoft.com/office/drawing/2016/SVG/main" r:embed="rId10"/>
+                <asvg:svgBlip xmlns:asvg="http://schemas.microsoft.com/office/drawing/2016/SVG/main" r:embed="rId11"/>
               </a:ext>
             </a:extLst>
           </a:blip>
@@ -12053,13 +11884,13 @@
           <p:nvPr/>
         </p:nvPicPr>
         <p:blipFill>
-          <a:blip r:embed="rId9" cstate="print">
+          <a:blip r:embed="rId10" cstate="print">
             <a:extLst>
               <a:ext uri="{28A0092B-C50C-407E-A947-70E740481C1C}">
                 <a14:useLocalDpi xmlns:a14="http://schemas.microsoft.com/office/drawing/2010/main" val="0"/>
               </a:ext>
               <a:ext uri="{96DAC541-7B7A-43D3-8B79-37D633B846F1}">
-                <asvg:svgBlip xmlns:asvg="http://schemas.microsoft.com/office/drawing/2016/SVG/main" r:embed="rId10"/>
+                <asvg:svgBlip xmlns:asvg="http://schemas.microsoft.com/office/drawing/2016/SVG/main" r:embed="rId11"/>
               </a:ext>
             </a:extLst>
           </a:blip>
@@ -12086,13 +11917,13 @@
           <p:nvPr/>
         </p:nvPicPr>
         <p:blipFill>
-          <a:blip r:embed="rId11" cstate="print">
+          <a:blip r:embed="rId12" cstate="print">
             <a:extLst>
               <a:ext uri="{28A0092B-C50C-407E-A947-70E740481C1C}">
                 <a14:useLocalDpi xmlns:a14="http://schemas.microsoft.com/office/drawing/2010/main" val="0"/>
               </a:ext>
               <a:ext uri="{96DAC541-7B7A-43D3-8B79-37D633B846F1}">
-                <asvg:svgBlip xmlns:asvg="http://schemas.microsoft.com/office/drawing/2016/SVG/main" r:embed="rId12"/>
+                <asvg:svgBlip xmlns:asvg="http://schemas.microsoft.com/office/drawing/2016/SVG/main" r:embed="rId13"/>
               </a:ext>
             </a:extLst>
           </a:blip>
@@ -12424,13 +12255,13 @@
           <p:nvPr/>
         </p:nvPicPr>
         <p:blipFill>
-          <a:blip r:embed="rId13" cstate="print">
+          <a:blip r:embed="rId14" cstate="print">
             <a:extLst>
               <a:ext uri="{28A0092B-C50C-407E-A947-70E740481C1C}">
                 <a14:useLocalDpi xmlns:a14="http://schemas.microsoft.com/office/drawing/2010/main" val="0"/>
               </a:ext>
               <a:ext uri="{96DAC541-7B7A-43D3-8B79-37D633B846F1}">
-                <asvg:svgBlip xmlns:asvg="http://schemas.microsoft.com/office/drawing/2016/SVG/main" r:embed="rId14"/>
+                <asvg:svgBlip xmlns:asvg="http://schemas.microsoft.com/office/drawing/2016/SVG/main" r:embed="rId15"/>
               </a:ext>
             </a:extLst>
           </a:blip>
@@ -12457,13 +12288,13 @@
           <p:nvPr/>
         </p:nvPicPr>
         <p:blipFill>
-          <a:blip r:embed="rId15">
+          <a:blip r:embed="rId16">
             <a:extLst>
               <a:ext uri="{28A0092B-C50C-407E-A947-70E740481C1C}">
                 <a14:useLocalDpi xmlns:a14="http://schemas.microsoft.com/office/drawing/2010/main" val="0"/>
               </a:ext>
               <a:ext uri="{96DAC541-7B7A-43D3-8B79-37D633B846F1}">
-                <asvg:svgBlip xmlns:asvg="http://schemas.microsoft.com/office/drawing/2016/SVG/main" r:embed="rId16"/>
+                <asvg:svgBlip xmlns:asvg="http://schemas.microsoft.com/office/drawing/2016/SVG/main" r:embed="rId17"/>
               </a:ext>
             </a:extLst>
           </a:blip>
@@ -12611,13 +12442,13 @@
           <p:nvPr/>
         </p:nvPicPr>
         <p:blipFill>
-          <a:blip r:embed="rId17" cstate="print">
+          <a:blip r:embed="rId18" cstate="print">
             <a:extLst>
               <a:ext uri="{28A0092B-C50C-407E-A947-70E740481C1C}">
                 <a14:useLocalDpi xmlns:a14="http://schemas.microsoft.com/office/drawing/2010/main" val="0"/>
               </a:ext>
               <a:ext uri="{96DAC541-7B7A-43D3-8B79-37D633B846F1}">
-                <asvg:svgBlip xmlns:asvg="http://schemas.microsoft.com/office/drawing/2016/SVG/main" r:embed="rId18"/>
+                <asvg:svgBlip xmlns:asvg="http://schemas.microsoft.com/office/drawing/2016/SVG/main" r:embed="rId19"/>
               </a:ext>
             </a:extLst>
           </a:blip>
@@ -12655,6 +12486,7 @@
           <a:bodyPr wrap="square" rtlCol="0">
             <a:spAutoFit/>
           </a:bodyPr>
+          <a:lstStyle/>
           <a:p>
             <a:pPr algn="ctr"/>
             <a:r>
@@ -12664,10 +12496,6 @@
               </a:rPr>
               <a:t>User</a:t>
             </a:r>
-            <a:endParaRPr lang="en-US" altLang="zh-CN" sz="1600">
-              <a:latin typeface="Times New Roman" panose="02020603050405020304" charset="0"/>
-              <a:cs typeface="Times New Roman" panose="02020603050405020304" charset="0"/>
-            </a:endParaRPr>
           </a:p>
         </p:txBody>
       </p:sp>
@@ -12691,6 +12519,7 @@
           <a:bodyPr wrap="square" rtlCol="0">
             <a:spAutoFit/>
           </a:bodyPr>
+          <a:lstStyle/>
           <a:p>
             <a:pPr algn="ctr"/>
             <a:r>
@@ -12700,10 +12529,6 @@
               </a:rPr>
               <a:t>Mobile device</a:t>
             </a:r>
-            <a:endParaRPr lang="en-US" altLang="zh-CN" sz="1600">
-              <a:latin typeface="Times New Roman" panose="02020603050405020304" charset="0"/>
-              <a:cs typeface="Times New Roman" panose="02020603050405020304" charset="0"/>
-            </a:endParaRPr>
           </a:p>
         </p:txBody>
       </p:sp>
@@ -12727,6 +12552,7 @@
           <a:bodyPr wrap="square" rtlCol="0">
             <a:spAutoFit/>
           </a:bodyPr>
+          <a:lstStyle/>
           <a:p>
             <a:pPr algn="ctr"/>
             <a:r>
@@ -12736,10 +12562,6 @@
               </a:rPr>
               <a:t>Computer</a:t>
             </a:r>
-            <a:endParaRPr lang="en-US" altLang="zh-CN" sz="1600">
-              <a:latin typeface="Times New Roman" panose="02020603050405020304" charset="0"/>
-              <a:cs typeface="Times New Roman" panose="02020603050405020304" charset="0"/>
-            </a:endParaRPr>
           </a:p>
         </p:txBody>
       </p:sp>
@@ -12763,6 +12585,7 @@
           <a:bodyPr wrap="square" rtlCol="0">
             <a:spAutoFit/>
           </a:bodyPr>
+          <a:lstStyle/>
           <a:p>
             <a:pPr algn="ctr"/>
             <a:r>
@@ -12772,10 +12595,6 @@
               </a:rPr>
               <a:t>PS-App</a:t>
             </a:r>
-            <a:endParaRPr lang="en-US" altLang="zh-CN" sz="1600">
-              <a:latin typeface="Times New Roman" panose="02020603050405020304" charset="0"/>
-              <a:cs typeface="Times New Roman" panose="02020603050405020304" charset="0"/>
-            </a:endParaRPr>
           </a:p>
         </p:txBody>
       </p:sp>
@@ -12799,6 +12618,7 @@
           <a:bodyPr wrap="square" rtlCol="0">
             <a:spAutoFit/>
           </a:bodyPr>
+          <a:lstStyle/>
           <a:p>
             <a:pPr algn="ctr"/>
             <a:r>
@@ -12808,10 +12628,6 @@
               </a:rPr>
               <a:t>Webpage</a:t>
             </a:r>
-            <a:endParaRPr lang="en-US" altLang="zh-CN" sz="1600">
-              <a:latin typeface="Times New Roman" panose="02020603050405020304" charset="0"/>
-              <a:cs typeface="Times New Roman" panose="02020603050405020304" charset="0"/>
-            </a:endParaRPr>
           </a:p>
         </p:txBody>
       </p:sp>
@@ -12872,6 +12688,7 @@
           <a:bodyPr wrap="square" rtlCol="0">
             <a:noAutofit/>
           </a:bodyPr>
+          <a:lstStyle/>
           <a:p>
             <a:pPr algn="ctr"/>
             <a:r>
@@ -12881,10 +12698,6 @@
               </a:rPr>
               <a:t>Shop</a:t>
             </a:r>
-            <a:endParaRPr lang="en-US" altLang="zh-CN" sz="1600">
-              <a:latin typeface="Times New Roman" panose="02020603050405020304" charset="0"/>
-              <a:cs typeface="Times New Roman" panose="02020603050405020304" charset="0"/>
-            </a:endParaRPr>
           </a:p>
         </p:txBody>
       </p:sp>
@@ -12897,10 +12710,10 @@
           <p:nvPr/>
         </p:nvPicPr>
         <p:blipFill>
-          <a:blip r:embed="rId19">
+          <a:blip r:embed="rId20">
             <a:extLst>
               <a:ext uri="{96DAC541-7B7A-43D3-8B79-37D633B846F1}">
-                <asvg:svgBlip xmlns:asvg="http://schemas.microsoft.com/office/drawing/2016/SVG/main" r:embed="rId20"/>
+                <asvg:svgBlip xmlns:asvg="http://schemas.microsoft.com/office/drawing/2016/SVG/main" r:embed="rId21"/>
               </a:ext>
             </a:extLst>
           </a:blip>
@@ -12947,6 +12760,7 @@
           <a:bodyPr wrap="square" rtlCol="0">
             <a:noAutofit/>
           </a:bodyPr>
+          <a:lstStyle/>
           <a:p>
             <a:pPr algn="ctr"/>
             <a:r>
@@ -12956,10 +12770,6 @@
               </a:rPr>
               <a:t>Password</a:t>
             </a:r>
-            <a:endParaRPr lang="en-US" altLang="zh-CN" sz="1600">
-              <a:latin typeface="Times New Roman" panose="02020603050405020304" charset="0"/>
-              <a:cs typeface="Times New Roman" panose="02020603050405020304" charset="0"/>
-            </a:endParaRPr>
           </a:p>
         </p:txBody>
       </p:sp>
@@ -12972,10 +12782,10 @@
           <p:nvPr/>
         </p:nvPicPr>
         <p:blipFill>
-          <a:blip r:embed="rId21">
+          <a:blip r:embed="rId22">
             <a:extLst>
               <a:ext uri="{96DAC541-7B7A-43D3-8B79-37D633B846F1}">
-                <asvg:svgBlip xmlns:asvg="http://schemas.microsoft.com/office/drawing/2016/SVG/main" r:embed="rId22"/>
+                <asvg:svgBlip xmlns:asvg="http://schemas.microsoft.com/office/drawing/2016/SVG/main" r:embed="rId23"/>
               </a:ext>
             </a:extLst>
           </a:blip>
@@ -13013,6 +12823,7 @@
           <a:bodyPr wrap="square" rtlCol="0">
             <a:spAutoFit/>
           </a:bodyPr>
+          <a:lstStyle/>
           <a:p>
             <a:pPr algn="ctr"/>
             <a:r>
@@ -13020,19 +12831,8 @@
                 <a:latin typeface="Times New Roman" panose="02020603050405020304" charset="0"/>
                 <a:cs typeface="Times New Roman" panose="02020603050405020304" charset="0"/>
               </a:rPr>
-              <a:t>S</a:t>
+              <a:t>Scan the </a:t>
             </a:r>
-            <a:r>
-              <a:rPr lang="en-US" altLang="zh-CN" sz="1600">
-                <a:latin typeface="Times New Roman" panose="02020603050405020304" charset="0"/>
-                <a:cs typeface="Times New Roman" panose="02020603050405020304" charset="0"/>
-              </a:rPr>
-              <a:t>can the </a:t>
-            </a:r>
-            <a:endParaRPr lang="en-US" altLang="zh-CN" sz="1600">
-              <a:latin typeface="Times New Roman" panose="02020603050405020304" charset="0"/>
-              <a:cs typeface="Times New Roman" panose="02020603050405020304" charset="0"/>
-            </a:endParaRPr>
           </a:p>
           <a:p>
             <a:pPr algn="ctr"/>
@@ -13043,10 +12843,6 @@
               </a:rPr>
               <a:t>QR code</a:t>
             </a:r>
-            <a:endParaRPr lang="en-US" altLang="zh-CN" sz="1600">
-              <a:latin typeface="Times New Roman" panose="02020603050405020304" charset="0"/>
-              <a:cs typeface="Times New Roman" panose="02020603050405020304" charset="0"/>
-            </a:endParaRPr>
           </a:p>
         </p:txBody>
       </p:sp>
@@ -13059,10 +12855,10 @@
           <p:nvPr/>
         </p:nvPicPr>
         <p:blipFill>
-          <a:blip r:embed="rId23">
+          <a:blip r:embed="rId24">
             <a:extLst>
               <a:ext uri="{96DAC541-7B7A-43D3-8B79-37D633B846F1}">
-                <asvg:svgBlip xmlns:asvg="http://schemas.microsoft.com/office/drawing/2016/SVG/main" r:embed="rId24"/>
+                <asvg:svgBlip xmlns:asvg="http://schemas.microsoft.com/office/drawing/2016/SVG/main" r:embed="rId25"/>
               </a:ext>
             </a:extLst>
           </a:blip>
@@ -13100,6 +12896,7 @@
           <a:bodyPr wrap="square" rtlCol="0">
             <a:noAutofit/>
           </a:bodyPr>
+          <a:lstStyle/>
           <a:p>
             <a:pPr algn="ctr"/>
             <a:r>
@@ -13107,19 +12904,8 @@
                 <a:latin typeface="Times New Roman" panose="02020603050405020304" charset="0"/>
                 <a:cs typeface="Times New Roman" panose="02020603050405020304" charset="0"/>
               </a:rPr>
-              <a:t>Merchant S</a:t>
+              <a:t>Merchant Server</a:t>
             </a:r>
-            <a:r>
-              <a:rPr lang="en-US" altLang="zh-CN" sz="1600">
-                <a:latin typeface="Times New Roman" panose="02020603050405020304" charset="0"/>
-                <a:cs typeface="Times New Roman" panose="02020603050405020304" charset="0"/>
-              </a:rPr>
-              <a:t>erver</a:t>
-            </a:r>
-            <a:endParaRPr lang="en-US" altLang="zh-CN" sz="1600">
-              <a:latin typeface="Times New Roman" panose="02020603050405020304" charset="0"/>
-              <a:cs typeface="Times New Roman" panose="02020603050405020304" charset="0"/>
-            </a:endParaRPr>
           </a:p>
         </p:txBody>
       </p:sp>
@@ -13132,10 +12918,10 @@
           <p:nvPr/>
         </p:nvPicPr>
         <p:blipFill>
-          <a:blip r:embed="rId25">
+          <a:blip r:embed="rId26">
             <a:extLst>
               <a:ext uri="{96DAC541-7B7A-43D3-8B79-37D633B846F1}">
-                <asvg:svgBlip xmlns:asvg="http://schemas.microsoft.com/office/drawing/2016/SVG/main" r:embed="rId26"/>
+                <asvg:svgBlip xmlns:asvg="http://schemas.microsoft.com/office/drawing/2016/SVG/main" r:embed="rId27"/>
               </a:ext>
             </a:extLst>
           </a:blip>
@@ -13162,10 +12948,10 @@
           <p:nvPr/>
         </p:nvPicPr>
         <p:blipFill>
-          <a:blip r:embed="rId27">
+          <a:blip r:embed="rId28">
             <a:extLst>
               <a:ext uri="{96DAC541-7B7A-43D3-8B79-37D633B846F1}">
-                <asvg:svgBlip xmlns:asvg="http://schemas.microsoft.com/office/drawing/2016/SVG/main" r:embed="rId28"/>
+                <asvg:svgBlip xmlns:asvg="http://schemas.microsoft.com/office/drawing/2016/SVG/main" r:embed="rId29"/>
               </a:ext>
             </a:extLst>
           </a:blip>
@@ -13192,10 +12978,10 @@
           <p:nvPr/>
         </p:nvPicPr>
         <p:blipFill>
-          <a:blip r:embed="rId29">
+          <a:blip r:embed="rId30">
             <a:extLst>
               <a:ext uri="{96DAC541-7B7A-43D3-8B79-37D633B846F1}">
-                <asvg:svgBlip xmlns:asvg="http://schemas.microsoft.com/office/drawing/2016/SVG/main" r:embed="rId30"/>
+                <asvg:svgBlip xmlns:asvg="http://schemas.microsoft.com/office/drawing/2016/SVG/main" r:embed="rId31"/>
               </a:ext>
             </a:extLst>
           </a:blip>
@@ -13233,6 +13019,7 @@
           <a:bodyPr wrap="square" rtlCol="0">
             <a:spAutoFit/>
           </a:bodyPr>
+          <a:lstStyle/>
           <a:p>
             <a:pPr algn="ctr"/>
             <a:r>
@@ -13242,10 +13029,6 @@
               </a:rPr>
               <a:t>Funds transfer</a:t>
             </a:r>
-            <a:endParaRPr lang="en-US" altLang="zh-CN" sz="1600">
-              <a:latin typeface="Times New Roman" panose="02020603050405020304" charset="0"/>
-              <a:cs typeface="Times New Roman" panose="02020603050405020304" charset="0"/>
-            </a:endParaRPr>
           </a:p>
         </p:txBody>
       </p:sp>
@@ -13258,10 +13041,10 @@
           <p:nvPr/>
         </p:nvPicPr>
         <p:blipFill>
-          <a:blip r:embed="rId31">
+          <a:blip r:embed="rId32">
             <a:extLst>
               <a:ext uri="{96DAC541-7B7A-43D3-8B79-37D633B846F1}">
-                <asvg:svgBlip xmlns:asvg="http://schemas.microsoft.com/office/drawing/2016/SVG/main" r:embed="rId32"/>
+                <asvg:svgBlip xmlns:asvg="http://schemas.microsoft.com/office/drawing/2016/SVG/main" r:embed="rId33"/>
               </a:ext>
             </a:extLst>
           </a:blip>
@@ -13313,13 +13096,13 @@
           <p:nvPr/>
         </p:nvPicPr>
         <p:blipFill>
-          <a:blip r:embed="rId1" cstate="print">
+          <a:blip r:embed="rId2" cstate="print">
             <a:extLst>
               <a:ext uri="{28A0092B-C50C-407E-A947-70E740481C1C}">
                 <a14:useLocalDpi xmlns:a14="http://schemas.microsoft.com/office/drawing/2010/main" val="0"/>
               </a:ext>
               <a:ext uri="{96DAC541-7B7A-43D3-8B79-37D633B846F1}">
-                <asvg:svgBlip xmlns:asvg="http://schemas.microsoft.com/office/drawing/2016/SVG/main" r:embed="rId2"/>
+                <asvg:svgBlip xmlns:asvg="http://schemas.microsoft.com/office/drawing/2016/SVG/main" r:embed="rId3"/>
               </a:ext>
             </a:extLst>
           </a:blip>
@@ -13346,13 +13129,13 @@
           <p:nvPr/>
         </p:nvPicPr>
         <p:blipFill>
-          <a:blip r:embed="rId3" cstate="print">
+          <a:blip r:embed="rId4" cstate="print">
             <a:extLst>
               <a:ext uri="{28A0092B-C50C-407E-A947-70E740481C1C}">
                 <a14:useLocalDpi xmlns:a14="http://schemas.microsoft.com/office/drawing/2010/main" val="0"/>
               </a:ext>
               <a:ext uri="{96DAC541-7B7A-43D3-8B79-37D633B846F1}">
-                <asvg:svgBlip xmlns:asvg="http://schemas.microsoft.com/office/drawing/2016/SVG/main" r:embed="rId4"/>
+                <asvg:svgBlip xmlns:asvg="http://schemas.microsoft.com/office/drawing/2016/SVG/main" r:embed="rId5"/>
               </a:ext>
             </a:extLst>
           </a:blip>
@@ -13426,13 +13209,13 @@
           <p:nvPr/>
         </p:nvPicPr>
         <p:blipFill>
-          <a:blip r:embed="rId5" cstate="print">
+          <a:blip r:embed="rId6" cstate="print">
             <a:extLst>
               <a:ext uri="{28A0092B-C50C-407E-A947-70E740481C1C}">
                 <a14:useLocalDpi xmlns:a14="http://schemas.microsoft.com/office/drawing/2010/main" val="0"/>
               </a:ext>
               <a:ext uri="{96DAC541-7B7A-43D3-8B79-37D633B846F1}">
-                <asvg:svgBlip xmlns:asvg="http://schemas.microsoft.com/office/drawing/2016/SVG/main" r:embed="rId6"/>
+                <asvg:svgBlip xmlns:asvg="http://schemas.microsoft.com/office/drawing/2016/SVG/main" r:embed="rId7"/>
               </a:ext>
             </a:extLst>
           </a:blip>
@@ -13459,13 +13242,13 @@
           <p:nvPr/>
         </p:nvPicPr>
         <p:blipFill>
-          <a:blip r:embed="rId7" cstate="print">
+          <a:blip r:embed="rId8" cstate="print">
             <a:extLst>
               <a:ext uri="{28A0092B-C50C-407E-A947-70E740481C1C}">
                 <a14:useLocalDpi xmlns:a14="http://schemas.microsoft.com/office/drawing/2010/main" val="0"/>
               </a:ext>
               <a:ext uri="{96DAC541-7B7A-43D3-8B79-37D633B846F1}">
-                <asvg:svgBlip xmlns:asvg="http://schemas.microsoft.com/office/drawing/2016/SVG/main" r:embed="rId8"/>
+                <asvg:svgBlip xmlns:asvg="http://schemas.microsoft.com/office/drawing/2016/SVG/main" r:embed="rId9"/>
               </a:ext>
             </a:extLst>
           </a:blip>
@@ -13492,13 +13275,13 @@
           <p:nvPr/>
         </p:nvPicPr>
         <p:blipFill>
-          <a:blip r:embed="rId9" cstate="print">
+          <a:blip r:embed="rId10" cstate="print">
             <a:extLst>
               <a:ext uri="{28A0092B-C50C-407E-A947-70E740481C1C}">
                 <a14:useLocalDpi xmlns:a14="http://schemas.microsoft.com/office/drawing/2010/main" val="0"/>
               </a:ext>
               <a:ext uri="{96DAC541-7B7A-43D3-8B79-37D633B846F1}">
-                <asvg:svgBlip xmlns:asvg="http://schemas.microsoft.com/office/drawing/2016/SVG/main" r:embed="rId10"/>
+                <asvg:svgBlip xmlns:asvg="http://schemas.microsoft.com/office/drawing/2016/SVG/main" r:embed="rId11"/>
               </a:ext>
             </a:extLst>
           </a:blip>
@@ -13525,13 +13308,13 @@
           <p:nvPr/>
         </p:nvPicPr>
         <p:blipFill>
-          <a:blip r:embed="rId11" cstate="print">
+          <a:blip r:embed="rId12" cstate="print">
             <a:extLst>
               <a:ext uri="{28A0092B-C50C-407E-A947-70E740481C1C}">
                 <a14:useLocalDpi xmlns:a14="http://schemas.microsoft.com/office/drawing/2010/main" val="0"/>
               </a:ext>
               <a:ext uri="{96DAC541-7B7A-43D3-8B79-37D633B846F1}">
-                <asvg:svgBlip xmlns:asvg="http://schemas.microsoft.com/office/drawing/2016/SVG/main" r:embed="rId12"/>
+                <asvg:svgBlip xmlns:asvg="http://schemas.microsoft.com/office/drawing/2016/SVG/main" r:embed="rId13"/>
               </a:ext>
             </a:extLst>
           </a:blip>
@@ -13558,13 +13341,13 @@
           <p:nvPr/>
         </p:nvPicPr>
         <p:blipFill>
-          <a:blip r:embed="rId9" cstate="print">
+          <a:blip r:embed="rId10" cstate="print">
             <a:extLst>
               <a:ext uri="{28A0092B-C50C-407E-A947-70E740481C1C}">
                 <a14:useLocalDpi xmlns:a14="http://schemas.microsoft.com/office/drawing/2010/main" val="0"/>
               </a:ext>
               <a:ext uri="{96DAC541-7B7A-43D3-8B79-37D633B846F1}">
-                <asvg:svgBlip xmlns:asvg="http://schemas.microsoft.com/office/drawing/2016/SVG/main" r:embed="rId10"/>
+                <asvg:svgBlip xmlns:asvg="http://schemas.microsoft.com/office/drawing/2016/SVG/main" r:embed="rId11"/>
               </a:ext>
             </a:extLst>
           </a:blip>
@@ -13591,13 +13374,13 @@
           <p:nvPr/>
         </p:nvPicPr>
         <p:blipFill>
-          <a:blip r:embed="rId13" cstate="print">
+          <a:blip r:embed="rId14" cstate="print">
             <a:extLst>
               <a:ext uri="{28A0092B-C50C-407E-A947-70E740481C1C}">
                 <a14:useLocalDpi xmlns:a14="http://schemas.microsoft.com/office/drawing/2010/main" val="0"/>
               </a:ext>
               <a:ext uri="{96DAC541-7B7A-43D3-8B79-37D633B846F1}">
-                <asvg:svgBlip xmlns:asvg="http://schemas.microsoft.com/office/drawing/2016/SVG/main" r:embed="rId14"/>
+                <asvg:svgBlip xmlns:asvg="http://schemas.microsoft.com/office/drawing/2016/SVG/main" r:embed="rId15"/>
               </a:ext>
             </a:extLst>
           </a:blip>
@@ -13960,13 +13743,13 @@
           <p:nvPr/>
         </p:nvPicPr>
         <p:blipFill>
-          <a:blip r:embed="rId15" cstate="print">
+          <a:blip r:embed="rId16" cstate="print">
             <a:extLst>
               <a:ext uri="{28A0092B-C50C-407E-A947-70E740481C1C}">
                 <a14:useLocalDpi xmlns:a14="http://schemas.microsoft.com/office/drawing/2010/main" val="0"/>
               </a:ext>
               <a:ext uri="{96DAC541-7B7A-43D3-8B79-37D633B846F1}">
-                <asvg:svgBlip xmlns:asvg="http://schemas.microsoft.com/office/drawing/2016/SVG/main" r:embed="rId16"/>
+                <asvg:svgBlip xmlns:asvg="http://schemas.microsoft.com/office/drawing/2016/SVG/main" r:embed="rId17"/>
               </a:ext>
             </a:extLst>
           </a:blip>
@@ -13993,13 +13776,13 @@
           <p:nvPr/>
         </p:nvPicPr>
         <p:blipFill>
-          <a:blip r:embed="rId17">
+          <a:blip r:embed="rId18">
             <a:extLst>
               <a:ext uri="{28A0092B-C50C-407E-A947-70E740481C1C}">
                 <a14:useLocalDpi xmlns:a14="http://schemas.microsoft.com/office/drawing/2010/main" val="0"/>
               </a:ext>
               <a:ext uri="{96DAC541-7B7A-43D3-8B79-37D633B846F1}">
-                <asvg:svgBlip xmlns:asvg="http://schemas.microsoft.com/office/drawing/2016/SVG/main" r:embed="rId18"/>
+                <asvg:svgBlip xmlns:asvg="http://schemas.microsoft.com/office/drawing/2016/SVG/main" r:embed="rId19"/>
               </a:ext>
             </a:extLst>
           </a:blip>
@@ -14145,13 +13928,13 @@
           <p:nvPr/>
         </p:nvPicPr>
         <p:blipFill>
-          <a:blip r:embed="rId19" cstate="print">
+          <a:blip r:embed="rId20" cstate="print">
             <a:extLst>
               <a:ext uri="{28A0092B-C50C-407E-A947-70E740481C1C}">
                 <a14:useLocalDpi xmlns:a14="http://schemas.microsoft.com/office/drawing/2010/main" val="0"/>
               </a:ext>
               <a:ext uri="{96DAC541-7B7A-43D3-8B79-37D633B846F1}">
-                <asvg:svgBlip xmlns:asvg="http://schemas.microsoft.com/office/drawing/2016/SVG/main" r:embed="rId20"/>
+                <asvg:svgBlip xmlns:asvg="http://schemas.microsoft.com/office/drawing/2016/SVG/main" r:embed="rId21"/>
               </a:ext>
             </a:extLst>
           </a:blip>
@@ -14202,10 +13985,10 @@
         </p:nvGrpSpPr>
         <p:grpSpPr>
           <a:xfrm>
-            <a:off x="1689782" y="1474779"/>
-            <a:ext cx="2471420" cy="877457"/>
-            <a:chOff x="1689782" y="1474779"/>
-            <a:chExt cx="2471420" cy="877457"/>
+            <a:off x="2609850" y="1474779"/>
+            <a:ext cx="630602" cy="877457"/>
+            <a:chOff x="2603500" y="1474779"/>
+            <a:chExt cx="630602" cy="877457"/>
           </a:xfrm>
         </p:grpSpPr>
         <p:grpSp>
@@ -14439,8 +14222,8 @@
           </p:nvSpPr>
           <p:spPr>
             <a:xfrm>
-              <a:off x="1689782" y="1979491"/>
-              <a:ext cx="2471420" cy="372745"/>
+              <a:off x="2603500" y="1979491"/>
+              <a:ext cx="630602" cy="372745"/>
             </a:xfrm>
             <a:prstGeom prst="rect">
               <a:avLst/>
@@ -14459,12 +14242,8 @@
                   <a:latin typeface="Times New Roman" panose="02020603050405020304" charset="0"/>
                   <a:cs typeface="Times New Roman" panose="02020603050405020304" charset="0"/>
                 </a:rPr>
-                <a:t>Merchant Application</a:t>
+                <a:t>MA</a:t>
               </a:r>
-              <a:endParaRPr lang="en-US" altLang="zh-CN" dirty="0">
-                <a:latin typeface="Times New Roman" panose="02020603050405020304" charset="0"/>
-                <a:cs typeface="Times New Roman" panose="02020603050405020304" charset="0"/>
-              </a:endParaRPr>
             </a:p>
           </p:txBody>
         </p:sp>
@@ -14513,7 +14292,7 @@
         </p:nvGrpSpPr>
         <p:grpSpPr>
           <a:xfrm>
-            <a:off x="3016931" y="4776260"/>
+            <a:off x="3016931" y="4842935"/>
             <a:ext cx="2651800" cy="106874"/>
             <a:chOff x="3016932" y="4674660"/>
             <a:chExt cx="2366890" cy="102445"/>
@@ -14636,13 +14415,6 @@
               </a:rPr>
               <a:t>Send payment Intent</a:t>
             </a:r>
-            <a:endParaRPr lang="en-US" altLang="zh-CN" sz="1600" dirty="0">
-              <a:solidFill>
-                <a:schemeClr val="tx1"/>
-              </a:solidFill>
-              <a:latin typeface="Times New Roman" panose="02020603050405020304" charset="0"/>
-              <a:cs typeface="Times New Roman" panose="02020603050405020304" charset="0"/>
-            </a:endParaRPr>
           </a:p>
         </p:txBody>
       </p:sp>
@@ -14654,7 +14426,7 @@
         </p:nvSpPr>
         <p:spPr>
           <a:xfrm>
-            <a:off x="3024551" y="4422205"/>
+            <a:off x="3024551" y="4488880"/>
             <a:ext cx="2693623" cy="269240"/>
           </a:xfrm>
           <a:prstGeom prst="rect">
@@ -14683,23 +14455,21 @@
               </a:rPr>
               <a:t>Construct order request</a:t>
             </a:r>
-            <a:endParaRPr lang="en-US" altLang="zh-CN" sz="1600" dirty="0">
-              <a:latin typeface="Times New Roman" panose="02020603050405020304" charset="0"/>
-              <a:cs typeface="Times New Roman" panose="02020603050405020304" charset="0"/>
-            </a:endParaRPr>
           </a:p>
         </p:txBody>
       </p:sp>
       <p:cxnSp>
         <p:nvCxnSpPr>
           <p:cNvPr id="40" name="直接箭头连接符 39"/>
-          <p:cNvCxnSpPr/>
+          <p:cNvCxnSpPr>
+            <a:cxnSpLocks/>
+          </p:cNvCxnSpPr>
           <p:nvPr/>
         </p:nvCxnSpPr>
         <p:spPr>
-          <a:xfrm flipV="1">
-            <a:off x="5894070" y="4817745"/>
-            <a:ext cx="2523600" cy="0"/>
+          <a:xfrm>
+            <a:off x="5894070" y="4884420"/>
+            <a:ext cx="2477362" cy="0"/>
           </a:xfrm>
           <a:prstGeom prst="straightConnector1">
             <a:avLst/>
@@ -14734,7 +14504,7 @@
         </p:nvSpPr>
         <p:spPr>
           <a:xfrm>
-            <a:off x="6476485" y="4221175"/>
+            <a:off x="6476485" y="4300550"/>
             <a:ext cx="1643019" cy="542349"/>
           </a:xfrm>
           <a:prstGeom prst="rect">
@@ -14763,10 +14533,6 @@
               </a:rPr>
               <a:t>Relay </a:t>
             </a:r>
-            <a:endParaRPr lang="en-US" altLang="zh-CN" sz="1600" dirty="0">
-              <a:latin typeface="Times New Roman" panose="02020603050405020304" charset="0"/>
-              <a:cs typeface="Times New Roman" panose="02020603050405020304" charset="0"/>
-            </a:endParaRPr>
           </a:p>
           <a:p>
             <a:pPr algn="ctr"/>
@@ -14777,10 +14543,6 @@
               </a:rPr>
               <a:t>tampered request</a:t>
             </a:r>
-            <a:endParaRPr lang="en-US" altLang="zh-CN" sz="1600" dirty="0">
-              <a:latin typeface="Times New Roman" panose="02020603050405020304" charset="0"/>
-              <a:cs typeface="Times New Roman" panose="02020603050405020304" charset="0"/>
-            </a:endParaRPr>
           </a:p>
         </p:txBody>
       </p:sp>
@@ -14793,10 +14555,10 @@
           <p:nvPr/>
         </p:nvPicPr>
         <p:blipFill>
-          <a:blip r:embed="rId1">
+          <a:blip r:embed="rId3">
             <a:extLst>
               <a:ext uri="{96DAC541-7B7A-43D3-8B79-37D633B846F1}">
-                <asvg:svgBlip xmlns:asvg="http://schemas.microsoft.com/office/drawing/2016/SVG/main" r:embed="rId2"/>
+                <asvg:svgBlip xmlns:asvg="http://schemas.microsoft.com/office/drawing/2016/SVG/main" r:embed="rId4"/>
               </a:ext>
             </a:extLst>
           </a:blip>
@@ -14806,7 +14568,7 @@
         </p:blipFill>
         <p:spPr>
           <a:xfrm>
-            <a:off x="5355077" y="4052265"/>
+            <a:off x="5355077" y="4118940"/>
             <a:ext cx="337820" cy="337820"/>
           </a:xfrm>
           <a:prstGeom prst="rect">
@@ -14822,7 +14584,7 @@
         </p:nvSpPr>
         <p:spPr>
           <a:xfrm>
-            <a:off x="6133216" y="3210540"/>
+            <a:off x="6219802" y="3220295"/>
             <a:ext cx="2097625" cy="597793"/>
           </a:xfrm>
           <a:prstGeom prst="rect">
@@ -14857,13 +14619,6 @@
               </a:rPr>
               <a:t> Hijack Intent </a:t>
             </a:r>
-            <a:endParaRPr lang="en-US" altLang="zh-CN" sz="1600" dirty="0">
-              <a:solidFill>
-                <a:schemeClr val="tx1"/>
-              </a:solidFill>
-              <a:latin typeface="Times New Roman" panose="02020603050405020304" charset="0"/>
-              <a:cs typeface="Times New Roman" panose="02020603050405020304" charset="0"/>
-            </a:endParaRPr>
           </a:p>
           <a:p>
             <a:pPr algn="ctr"/>
@@ -14877,13 +14632,6 @@
               </a:rPr>
               <a:t>Resolution</a:t>
             </a:r>
-            <a:endParaRPr lang="en-US" altLang="zh-CN" sz="1600" dirty="0">
-              <a:solidFill>
-                <a:schemeClr val="tx1"/>
-              </a:solidFill>
-              <a:latin typeface="Times New Roman" panose="02020603050405020304" charset="0"/>
-              <a:cs typeface="Times New Roman" panose="02020603050405020304" charset="0"/>
-            </a:endParaRPr>
           </a:p>
         </p:txBody>
       </p:sp>
@@ -14895,7 +14643,7 @@
         </p:nvSpPr>
         <p:spPr>
           <a:xfrm>
-            <a:off x="2842307" y="4335780"/>
+            <a:off x="2842307" y="4402455"/>
             <a:ext cx="179705" cy="1010920"/>
           </a:xfrm>
           <a:prstGeom prst="rect">
@@ -14947,10 +14695,10 @@
           <p:nvPr/>
         </p:nvPicPr>
         <p:blipFill>
-          <a:blip r:embed="rId3">
+          <a:blip r:embed="rId5">
             <a:extLst>
               <a:ext uri="{96DAC541-7B7A-43D3-8B79-37D633B846F1}">
-                <asvg:svgBlip xmlns:asvg="http://schemas.microsoft.com/office/drawing/2016/SVG/main" r:embed="rId4"/>
+                <asvg:svgBlip xmlns:asvg="http://schemas.microsoft.com/office/drawing/2016/SVG/main" r:embed="rId6"/>
               </a:ext>
             </a:extLst>
           </a:blip>
@@ -14960,7 +14708,7 @@
         </p:blipFill>
         <p:spPr>
           <a:xfrm>
-            <a:off x="6096000" y="4576051"/>
+            <a:off x="6197600" y="4642726"/>
             <a:ext cx="353060" cy="353060"/>
           </a:xfrm>
           <a:prstGeom prst="rect">
@@ -15005,76 +14753,93 @@
           </a:fontRef>
         </p:style>
       </p:cxnSp>
-      <p:pic>
-        <p:nvPicPr>
-          <p:cNvPr id="54" name="图形 67"/>
-          <p:cNvPicPr>
-            <a:picLocks noChangeAspect="1"/>
-          </p:cNvPicPr>
-          <p:nvPr/>
-        </p:nvPicPr>
-        <p:blipFill>
-          <a:blip r:embed="rId5" cstate="print">
+      <p:grpSp>
+        <p:nvGrpSpPr>
+          <p:cNvPr id="2" name="组合 1">
             <a:extLst>
-              <a:ext uri="{28A0092B-C50C-407E-A947-70E740481C1C}">
-                <a14:useLocalDpi xmlns:a14="http://schemas.microsoft.com/office/drawing/2010/main" val="0"/>
-              </a:ext>
-              <a:ext uri="{96DAC541-7B7A-43D3-8B79-37D633B846F1}">
-                <asvg:svgBlip xmlns:asvg="http://schemas.microsoft.com/office/drawing/2016/SVG/main" r:embed="rId6"/>
+              <a:ext uri="{FF2B5EF4-FFF2-40B4-BE49-F238E27FC236}">
+                <a16:creationId xmlns:a16="http://schemas.microsoft.com/office/drawing/2014/main" id="{E7316877-59A5-4D91-B5A5-EBB5BF2F71F0}"/>
               </a:ext>
             </a:extLst>
-          </a:blip>
-          <a:stretch>
-            <a:fillRect/>
-          </a:stretch>
-        </p:blipFill>
-        <p:spPr>
-          <a:xfrm>
-            <a:off x="2562646" y="3411088"/>
-            <a:ext cx="720000" cy="720000"/>
-          </a:xfrm>
-          <a:prstGeom prst="rect">
-            <a:avLst/>
-          </a:prstGeom>
-        </p:spPr>
-      </p:pic>
-      <p:sp>
-        <p:nvSpPr>
-          <p:cNvPr id="55" name="文本框 54"/>
-          <p:cNvSpPr txBox="1"/>
-          <p:nvPr/>
-        </p:nvSpPr>
-        <p:spPr>
-          <a:xfrm>
-            <a:off x="1693592" y="4013200"/>
-            <a:ext cx="2471420" cy="372745"/>
-          </a:xfrm>
-          <a:prstGeom prst="rect">
-            <a:avLst/>
-          </a:prstGeom>
-          <a:noFill/>
-        </p:spPr>
-        <p:txBody>
-          <a:bodyPr wrap="square" rtlCol="0">
-            <a:noAutofit/>
-          </a:bodyPr>
-          <a:lstStyle/>
-          <a:p>
-            <a:pPr algn="ctr"/>
-            <a:r>
-              <a:rPr lang="en-US" altLang="zh-CN">
-                <a:latin typeface="Times New Roman" panose="02020603050405020304" charset="0"/>
-                <a:cs typeface="Times New Roman" panose="02020603050405020304" charset="0"/>
-              </a:rPr>
-              <a:t>Merchant Platform</a:t>
-            </a:r>
-            <a:endParaRPr lang="en-US" altLang="zh-CN">
-              <a:latin typeface="Times New Roman" panose="02020603050405020304" charset="0"/>
-              <a:cs typeface="Times New Roman" panose="02020603050405020304" charset="0"/>
-            </a:endParaRPr>
-          </a:p>
-        </p:txBody>
-      </p:sp>
+          </p:cNvPr>
+          <p:cNvGrpSpPr/>
+          <p:nvPr/>
+        </p:nvGrpSpPr>
+        <p:grpSpPr>
+          <a:xfrm>
+            <a:off x="2568996" y="3442838"/>
+            <a:ext cx="720000" cy="974857"/>
+            <a:chOff x="2562646" y="3411088"/>
+            <a:chExt cx="720000" cy="974857"/>
+          </a:xfrm>
+        </p:grpSpPr>
+        <p:pic>
+          <p:nvPicPr>
+            <p:cNvPr id="54" name="图形 67"/>
+            <p:cNvPicPr>
+              <a:picLocks noChangeAspect="1"/>
+            </p:cNvPicPr>
+            <p:nvPr/>
+          </p:nvPicPr>
+          <p:blipFill>
+            <a:blip r:embed="rId7" cstate="print">
+              <a:extLst>
+                <a:ext uri="{28A0092B-C50C-407E-A947-70E740481C1C}">
+                  <a14:useLocalDpi xmlns:a14="http://schemas.microsoft.com/office/drawing/2010/main" val="0"/>
+                </a:ext>
+                <a:ext uri="{96DAC541-7B7A-43D3-8B79-37D633B846F1}">
+                  <asvg:svgBlip xmlns:asvg="http://schemas.microsoft.com/office/drawing/2016/SVG/main" r:embed="rId8"/>
+                </a:ext>
+              </a:extLst>
+            </a:blip>
+            <a:stretch>
+              <a:fillRect/>
+            </a:stretch>
+          </p:blipFill>
+          <p:spPr>
+            <a:xfrm>
+              <a:off x="2562646" y="3411088"/>
+              <a:ext cx="720000" cy="720000"/>
+            </a:xfrm>
+            <a:prstGeom prst="rect">
+              <a:avLst/>
+            </a:prstGeom>
+          </p:spPr>
+        </p:pic>
+        <p:sp>
+          <p:nvSpPr>
+            <p:cNvPr id="55" name="文本框 54"/>
+            <p:cNvSpPr txBox="1"/>
+            <p:nvPr/>
+          </p:nvSpPr>
+          <p:spPr>
+            <a:xfrm>
+              <a:off x="2647950" y="4013200"/>
+              <a:ext cx="551862" cy="372745"/>
+            </a:xfrm>
+            <a:prstGeom prst="rect">
+              <a:avLst/>
+            </a:prstGeom>
+            <a:noFill/>
+          </p:spPr>
+          <p:txBody>
+            <a:bodyPr wrap="square" rtlCol="0">
+              <a:noAutofit/>
+            </a:bodyPr>
+            <a:lstStyle/>
+            <a:p>
+              <a:pPr algn="ctr"/>
+              <a:r>
+                <a:rPr lang="en-US" altLang="zh-CN" dirty="0">
+                  <a:latin typeface="Times New Roman" panose="02020603050405020304" charset="0"/>
+                  <a:cs typeface="Times New Roman" panose="02020603050405020304" charset="0"/>
+                </a:rPr>
+                <a:t>MS</a:t>
+              </a:r>
+            </a:p>
+          </p:txBody>
+        </p:sp>
+      </p:grpSp>
       <p:sp>
         <p:nvSpPr>
           <p:cNvPr id="56" name="矩形 55"/>
@@ -15083,8 +14848,8 @@
         </p:nvSpPr>
         <p:spPr>
           <a:xfrm>
-            <a:off x="8515350" y="2379345"/>
-            <a:ext cx="179705" cy="1831975"/>
+            <a:off x="8515350" y="2379346"/>
+            <a:ext cx="179705" cy="1868804"/>
           </a:xfrm>
           <a:prstGeom prst="rect">
             <a:avLst/>
@@ -15247,14 +15012,6 @@
               </a:rPr>
               <a:t>……</a:t>
             </a:r>
-            <a:endParaRPr lang="en-US" altLang="zh-CN" sz="1400" dirty="0">
-              <a:solidFill>
-                <a:srgbClr val="0070C0"/>
-              </a:solidFill>
-              <a:latin typeface="Times New Roman" panose="02020603050405020304" charset="0"/>
-              <a:cs typeface="Times New Roman" panose="02020603050405020304" charset="0"/>
-              <a:sym typeface="+mn-ea"/>
-            </a:endParaRPr>
           </a:p>
         </p:txBody>
       </p:sp>
@@ -15265,9 +15022,9 @@
           <p:nvPr/>
         </p:nvSpPr>
         <p:spPr>
-          <a:xfrm>
-            <a:off x="6077560" y="3119955"/>
-            <a:ext cx="289480" cy="1376757"/>
+          <a:xfrm rot="120000">
+            <a:off x="6158135" y="3172675"/>
+            <a:ext cx="282672" cy="1290826"/>
           </a:xfrm>
           <a:custGeom>
             <a:avLst/>
@@ -15356,8 +15113,8 @@
         </p:nvGrpSpPr>
         <p:grpSpPr>
           <a:xfrm>
-            <a:off x="5646053" y="2487293"/>
-            <a:ext cx="457859" cy="900000"/>
+            <a:off x="5631285" y="2382517"/>
+            <a:ext cx="542478" cy="1066333"/>
             <a:chOff x="6484937" y="882650"/>
             <a:chExt cx="1979295" cy="3890645"/>
           </a:xfrm>
@@ -15371,7 +15128,7 @@
             <p:nvPr/>
           </p:nvPicPr>
           <p:blipFill rotWithShape="1">
-            <a:blip r:embed="rId7"/>
+            <a:blip r:embed="rId9"/>
             <a:srcRect l="30132" t="10719" r="30559" b="12022"/>
             <a:stretch>
               <a:fillRect/>
@@ -15396,7 +15153,7 @@
             <p:nvPr/>
           </p:nvPicPr>
           <p:blipFill rotWithShape="1">
-            <a:blip r:embed="rId8"/>
+            <a:blip r:embed="rId10"/>
             <a:srcRect l="117" t="-39" r="-220" b="-19"/>
             <a:stretch>
               <a:fillRect/>
@@ -15404,8 +15161,8 @@
           </p:blipFill>
           <p:spPr>
             <a:xfrm>
-              <a:off x="6621567" y="1004697"/>
-              <a:ext cx="1715983" cy="3618321"/>
+              <a:off x="6621568" y="1004695"/>
+              <a:ext cx="1715985" cy="3618322"/>
             </a:xfrm>
             <a:custGeom>
               <a:avLst/>
@@ -15563,8 +15320,8 @@
         </p:nvGrpSpPr>
         <p:grpSpPr>
           <a:xfrm>
-            <a:off x="8392914" y="4314510"/>
-            <a:ext cx="457859" cy="900000"/>
+            <a:off x="8333696" y="4301809"/>
+            <a:ext cx="542478" cy="1066333"/>
             <a:chOff x="5209721" y="2071270"/>
             <a:chExt cx="1979295" cy="3890645"/>
           </a:xfrm>
@@ -15578,7 +15335,7 @@
             <p:nvPr/>
           </p:nvPicPr>
           <p:blipFill rotWithShape="1">
-            <a:blip r:embed="rId7"/>
+            <a:blip r:embed="rId9"/>
             <a:srcRect l="30132" t="10719" r="30559" b="12022"/>
             <a:stretch>
               <a:fillRect/>
@@ -15603,7 +15360,7 @@
             <p:nvPr/>
           </p:nvPicPr>
           <p:blipFill rotWithShape="1">
-            <a:blip r:embed="rId9" cstate="print">
+            <a:blip r:embed="rId11" cstate="print">
               <a:extLst>
                 <a:ext uri="{28A0092B-C50C-407E-A947-70E740481C1C}">
                   <a14:useLocalDpi xmlns:a14="http://schemas.microsoft.com/office/drawing/2010/main" val="0"/>
@@ -15617,8 +15374,8 @@
           </p:blipFill>
           <p:spPr>
             <a:xfrm>
-              <a:off x="5347408" y="2193608"/>
-              <a:ext cx="1714849" cy="3622830"/>
+              <a:off x="5347406" y="2193609"/>
+              <a:ext cx="1714848" cy="3622830"/>
             </a:xfrm>
             <a:custGeom>
               <a:avLst/>
@@ -15776,8 +15533,8 @@
         </p:nvGrpSpPr>
         <p:grpSpPr>
           <a:xfrm>
-            <a:off x="5646053" y="4314510"/>
-            <a:ext cx="457859" cy="900000"/>
+            <a:off x="5631285" y="4301809"/>
+            <a:ext cx="542478" cy="1066333"/>
             <a:chOff x="6484937" y="882650"/>
             <a:chExt cx="1979295" cy="3890645"/>
           </a:xfrm>
@@ -15791,7 +15548,7 @@
             <p:nvPr/>
           </p:nvPicPr>
           <p:blipFill rotWithShape="1">
-            <a:blip r:embed="rId7"/>
+            <a:blip r:embed="rId9"/>
             <a:srcRect l="30132" t="10719" r="30559" b="12022"/>
             <a:stretch>
               <a:fillRect/>
@@ -15816,7 +15573,7 @@
             <p:nvPr/>
           </p:nvPicPr>
           <p:blipFill rotWithShape="1">
-            <a:blip r:embed="rId10" cstate="print">
+            <a:blip r:embed="rId12" cstate="print">
               <a:extLst>
                 <a:ext uri="{28A0092B-C50C-407E-A947-70E740481C1C}">
                   <a14:useLocalDpi xmlns:a14="http://schemas.microsoft.com/office/drawing/2010/main" val="0"/>
@@ -15830,8 +15587,8 @@
           </p:blipFill>
           <p:spPr>
             <a:xfrm>
-              <a:off x="6621567" y="1004697"/>
-              <a:ext cx="1715983" cy="3618321"/>
+              <a:off x="6621568" y="1004695"/>
+              <a:ext cx="1715985" cy="3618322"/>
             </a:xfrm>
             <a:custGeom>
               <a:avLst/>
@@ -15988,10 +15745,10 @@
           <p:nvPr/>
         </p:nvPicPr>
         <p:blipFill>
-          <a:blip r:embed="rId11">
+          <a:blip r:embed="rId13">
             <a:extLst>
               <a:ext uri="{96DAC541-7B7A-43D3-8B79-37D633B846F1}">
-                <asvg:svgBlip xmlns:asvg="http://schemas.microsoft.com/office/drawing/2016/SVG/main" r:embed="rId12"/>
+                <asvg:svgBlip xmlns:asvg="http://schemas.microsoft.com/office/drawing/2016/SVG/main" r:embed="rId14"/>
               </a:ext>
             </a:extLst>
           </a:blip>
@@ -16001,7 +15758,7 @@
         </p:blipFill>
         <p:spPr>
           <a:xfrm>
-            <a:off x="6128706" y="2714941"/>
+            <a:off x="6230306" y="2714941"/>
             <a:ext cx="259715" cy="259715"/>
           </a:xfrm>
           <a:prstGeom prst="rect">
@@ -16068,7 +15825,7 @@
         </p:nvSpPr>
         <p:spPr>
           <a:xfrm>
-            <a:off x="2973377" y="4883134"/>
+            <a:off x="2973377" y="4949809"/>
             <a:ext cx="2663748" cy="491489"/>
           </a:xfrm>
           <a:prstGeom prst="rect">
@@ -16183,14 +15940,6 @@
               </a:rPr>
               <a:t>……</a:t>
             </a:r>
-            <a:endParaRPr lang="en-US" altLang="zh-CN" sz="1400" dirty="0">
-              <a:solidFill>
-                <a:srgbClr val="C00000"/>
-              </a:solidFill>
-              <a:latin typeface="Times New Roman" panose="02020603050405020304" charset="0"/>
-              <a:cs typeface="Times New Roman" panose="02020603050405020304" charset="0"/>
-              <a:sym typeface="+mn-ea"/>
-            </a:endParaRPr>
           </a:p>
         </p:txBody>
       </p:sp>
@@ -16202,10 +15951,10 @@
         </p:nvGrpSpPr>
         <p:grpSpPr>
           <a:xfrm>
-            <a:off x="4727551" y="1466134"/>
-            <a:ext cx="2471420" cy="886102"/>
-            <a:chOff x="4727551" y="1466134"/>
-            <a:chExt cx="2471420" cy="886102"/>
+            <a:off x="4605707" y="1466134"/>
+            <a:ext cx="2471420" cy="886101"/>
+            <a:chOff x="4504107" y="1466134"/>
+            <a:chExt cx="2471420" cy="886101"/>
           </a:xfrm>
         </p:grpSpPr>
         <p:grpSp>
@@ -16454,10 +16203,10 @@
               <p:nvPr/>
             </p:nvPicPr>
             <p:blipFill>
-              <a:blip r:embed="rId1">
+              <a:blip r:embed="rId3">
                 <a:extLst>
                   <a:ext uri="{96DAC541-7B7A-43D3-8B79-37D633B846F1}">
-                    <asvg:svgBlip xmlns:asvg="http://schemas.microsoft.com/office/drawing/2016/SVG/main" r:embed="rId2"/>
+                    <asvg:svgBlip xmlns:asvg="http://schemas.microsoft.com/office/drawing/2016/SVG/main" r:embed="rId4"/>
                   </a:ext>
                 </a:extLst>
               </a:blip>
@@ -16484,7 +16233,7 @@
           </p:nvSpPr>
           <p:spPr>
             <a:xfrm>
-              <a:off x="4727551" y="1979491"/>
+              <a:off x="4504107" y="1979490"/>
               <a:ext cx="2471420" cy="372745"/>
             </a:xfrm>
             <a:prstGeom prst="rect">
@@ -16498,17 +16247,14 @@
             </a:bodyPr>
             <a:lstStyle/>
             <a:p>
+              <a:pPr algn="ctr"/>
               <a:r>
                 <a:rPr lang="en-US" altLang="zh-CN" dirty="0">
                   <a:latin typeface="Times New Roman" panose="02020603050405020304" charset="0"/>
                   <a:cs typeface="Times New Roman" panose="02020603050405020304" charset="0"/>
                 </a:rPr>
-                <a:t>Malicious Application </a:t>
+                <a:t>Malicious App</a:t>
               </a:r>
-              <a:endParaRPr lang="en-US" altLang="zh-CN" dirty="0">
-                <a:latin typeface="Times New Roman" panose="02020603050405020304" charset="0"/>
-                <a:cs typeface="Times New Roman" panose="02020603050405020304" charset="0"/>
-              </a:endParaRPr>
             </a:p>
           </p:txBody>
         </p:sp>
@@ -16521,10 +16267,10 @@
         </p:nvGrpSpPr>
         <p:grpSpPr>
           <a:xfrm>
-            <a:off x="7503606" y="1350046"/>
-            <a:ext cx="2471420" cy="1002190"/>
-            <a:chOff x="7503606" y="1350046"/>
-            <a:chExt cx="2471420" cy="1002190"/>
+            <a:off x="8240212" y="1350046"/>
+            <a:ext cx="720000" cy="1002190"/>
+            <a:chOff x="8262435" y="1350046"/>
+            <a:chExt cx="720000" cy="1002190"/>
           </a:xfrm>
         </p:grpSpPr>
         <p:pic>
@@ -16536,13 +16282,13 @@
             <p:nvPr/>
           </p:nvPicPr>
           <p:blipFill>
-            <a:blip r:embed="rId13" cstate="print">
+            <a:blip r:embed="rId15" cstate="print">
               <a:extLst>
                 <a:ext uri="{28A0092B-C50C-407E-A947-70E740481C1C}">
                   <a14:useLocalDpi xmlns:a14="http://schemas.microsoft.com/office/drawing/2010/main" val="0"/>
                 </a:ext>
                 <a:ext uri="{96DAC541-7B7A-43D3-8B79-37D633B846F1}">
-                  <asvg:svgBlip xmlns:asvg="http://schemas.microsoft.com/office/drawing/2016/SVG/main" r:embed="rId14"/>
+                  <asvg:svgBlip xmlns:asvg="http://schemas.microsoft.com/office/drawing/2016/SVG/main" r:embed="rId16"/>
                 </a:ext>
               </a:extLst>
             </a:blip>
@@ -16568,8 +16314,8 @@
           </p:nvSpPr>
           <p:spPr>
             <a:xfrm>
-              <a:off x="7503606" y="1979491"/>
-              <a:ext cx="2471420" cy="372745"/>
+              <a:off x="8357046" y="1979491"/>
+              <a:ext cx="542479" cy="372745"/>
             </a:xfrm>
             <a:prstGeom prst="rect">
               <a:avLst/>
@@ -16588,12 +16334,8 @@
                   <a:latin typeface="Times New Roman" panose="02020603050405020304" charset="0"/>
                   <a:cs typeface="Times New Roman" panose="02020603050405020304" charset="0"/>
                 </a:rPr>
-                <a:t>Payment Application</a:t>
+                <a:t>PA</a:t>
               </a:r>
-              <a:endParaRPr lang="en-US" altLang="zh-CN" dirty="0">
-                <a:latin typeface="Times New Roman" panose="02020603050405020304" charset="0"/>
-                <a:cs typeface="Times New Roman" panose="02020603050405020304" charset="0"/>
-              </a:endParaRPr>
             </a:p>
           </p:txBody>
         </p:sp>
@@ -17065,10 +16807,6 @@
               </a:rPr>
               <a:t>Merchant Application</a:t>
             </a:r>
-            <a:endParaRPr lang="en-US" altLang="zh-CN" sz="1200">
-              <a:latin typeface="Times New Roman" panose="02020603050405020304" charset="0"/>
-              <a:cs typeface="Times New Roman" panose="02020603050405020304" charset="0"/>
-            </a:endParaRPr>
           </a:p>
         </p:txBody>
       </p:sp>
@@ -17081,13 +16819,13 @@
           <p:nvPr/>
         </p:nvPicPr>
         <p:blipFill>
-          <a:blip r:embed="rId1" cstate="print">
+          <a:blip r:embed="rId3" cstate="print">
             <a:extLst>
               <a:ext uri="{28A0092B-C50C-407E-A947-70E740481C1C}">
                 <a14:useLocalDpi xmlns:a14="http://schemas.microsoft.com/office/drawing/2010/main" val="0"/>
               </a:ext>
               <a:ext uri="{96DAC541-7B7A-43D3-8B79-37D633B846F1}">
-                <asvg:svgBlip xmlns:asvg="http://schemas.microsoft.com/office/drawing/2016/SVG/main" r:embed="rId2"/>
+                <asvg:svgBlip xmlns:asvg="http://schemas.microsoft.com/office/drawing/2016/SVG/main" r:embed="rId4"/>
               </a:ext>
             </a:extLst>
           </a:blip>
@@ -17135,10 +16873,6 @@
               </a:rPr>
               <a:t>Payment Application</a:t>
             </a:r>
-            <a:endParaRPr lang="en-US" altLang="zh-CN" sz="1200">
-              <a:latin typeface="Times New Roman" panose="02020603050405020304" charset="0"/>
-              <a:cs typeface="Times New Roman" panose="02020603050405020304" charset="0"/>
-            </a:endParaRPr>
           </a:p>
         </p:txBody>
       </p:sp>
@@ -17329,10 +17063,6 @@
               </a:rPr>
               <a:t>Malicious Application </a:t>
             </a:r>
-            <a:endParaRPr lang="en-US" altLang="zh-CN" sz="1200">
-              <a:latin typeface="Times New Roman" panose="02020603050405020304" charset="0"/>
-              <a:cs typeface="Times New Roman" panose="02020603050405020304" charset="0"/>
-            </a:endParaRPr>
           </a:p>
         </p:txBody>
       </p:sp>
@@ -17401,10 +17131,6 @@
               </a:rPr>
               <a:t>S1</a:t>
             </a:r>
-            <a:endParaRPr lang="en-US" altLang="zh-CN">
-              <a:latin typeface="Times New Roman" panose="02020603050405020304" charset="0"/>
-              <a:cs typeface="Times New Roman" panose="02020603050405020304" charset="0"/>
-            </a:endParaRPr>
           </a:p>
         </p:txBody>
       </p:sp>
@@ -17601,10 +17327,6 @@
               </a:rPr>
               <a:t>S2</a:t>
             </a:r>
-            <a:endParaRPr lang="en-US" altLang="zh-CN">
-              <a:latin typeface="Times New Roman" panose="02020603050405020304" charset="0"/>
-              <a:cs typeface="Times New Roman" panose="02020603050405020304" charset="0"/>
-            </a:endParaRPr>
           </a:p>
         </p:txBody>
       </p:sp>
@@ -17637,10 +17359,6 @@
               </a:rPr>
               <a:t>S3</a:t>
             </a:r>
-            <a:endParaRPr lang="en-US" altLang="zh-CN">
-              <a:latin typeface="Times New Roman" panose="02020603050405020304" charset="0"/>
-              <a:cs typeface="Times New Roman" panose="02020603050405020304" charset="0"/>
-            </a:endParaRPr>
           </a:p>
         </p:txBody>
       </p:sp>
@@ -17677,13 +17395,6 @@
               </a:rPr>
               <a:t>Send payment request</a:t>
             </a:r>
-            <a:endParaRPr lang="en-US" altLang="zh-CN" sz="1400" b="1">
-              <a:solidFill>
-                <a:schemeClr val="tx1"/>
-              </a:solidFill>
-              <a:latin typeface="Times New Roman" panose="02020603050405020304" charset="0"/>
-              <a:cs typeface="Times New Roman" panose="02020603050405020304" charset="0"/>
-            </a:endParaRPr>
           </a:p>
         </p:txBody>
       </p:sp>
@@ -17717,10 +17428,6 @@
               </a:rPr>
               <a:t>Order parameters</a:t>
             </a:r>
-            <a:endParaRPr lang="en-US" altLang="zh-CN" sz="1400" b="1">
-              <a:latin typeface="Times New Roman" panose="02020603050405020304" charset="0"/>
-              <a:cs typeface="Times New Roman" panose="02020603050405020304" charset="0"/>
-            </a:endParaRPr>
           </a:p>
         </p:txBody>
       </p:sp>
@@ -17789,10 +17496,6 @@
               </a:rPr>
               <a:t>S4</a:t>
             </a:r>
-            <a:endParaRPr lang="en-US" altLang="zh-CN">
-              <a:latin typeface="Times New Roman" panose="02020603050405020304" charset="0"/>
-              <a:cs typeface="Times New Roman" panose="02020603050405020304" charset="0"/>
-            </a:endParaRPr>
           </a:p>
         </p:txBody>
       </p:sp>
@@ -17826,10 +17529,6 @@
               </a:rPr>
               <a:t>Tampered request</a:t>
             </a:r>
-            <a:endParaRPr lang="en-US" altLang="zh-CN" sz="1400" b="1">
-              <a:latin typeface="Times New Roman" panose="02020603050405020304" charset="0"/>
-              <a:cs typeface="Times New Roman" panose="02020603050405020304" charset="0"/>
-            </a:endParaRPr>
           </a:p>
         </p:txBody>
       </p:sp>
@@ -18065,10 +17764,10 @@
           <p:nvPr/>
         </p:nvPicPr>
         <p:blipFill>
-          <a:blip r:embed="rId3">
+          <a:blip r:embed="rId5">
             <a:extLst>
               <a:ext uri="{96DAC541-7B7A-43D3-8B79-37D633B846F1}">
-                <asvg:svgBlip xmlns:asvg="http://schemas.microsoft.com/office/drawing/2016/SVG/main" r:embed="rId4"/>
+                <asvg:svgBlip xmlns:asvg="http://schemas.microsoft.com/office/drawing/2016/SVG/main" r:embed="rId6"/>
               </a:ext>
             </a:extLst>
           </a:blip>
@@ -18119,13 +17818,6 @@
               </a:rPr>
               <a:t>Hijack Request</a:t>
             </a:r>
-            <a:endParaRPr lang="en-US" altLang="zh-CN" sz="1400" b="1">
-              <a:solidFill>
-                <a:schemeClr val="tx1"/>
-              </a:solidFill>
-              <a:latin typeface="Times New Roman" panose="02020603050405020304" charset="0"/>
-              <a:cs typeface="Times New Roman" panose="02020603050405020304" charset="0"/>
-            </a:endParaRPr>
           </a:p>
         </p:txBody>
       </p:sp>
@@ -18267,10 +17959,10 @@
           <p:nvPr/>
         </p:nvPicPr>
         <p:blipFill>
-          <a:blip r:embed="rId5">
+          <a:blip r:embed="rId7">
             <a:extLst>
               <a:ext uri="{96DAC541-7B7A-43D3-8B79-37D633B846F1}">
-                <asvg:svgBlip xmlns:asvg="http://schemas.microsoft.com/office/drawing/2016/SVG/main" r:embed="rId6"/>
+                <asvg:svgBlip xmlns:asvg="http://schemas.microsoft.com/office/drawing/2016/SVG/main" r:embed="rId8"/>
               </a:ext>
             </a:extLst>
           </a:blip>
@@ -18342,13 +18034,6 @@
               </a:rPr>
               <a:t>Victim’s device</a:t>
             </a:r>
-            <a:endParaRPr lang="en-US" altLang="zh-CN" b="1">
-              <a:solidFill>
-                <a:schemeClr val="tx1"/>
-              </a:solidFill>
-              <a:latin typeface="Times New Roman" panose="02020603050405020304" charset="0"/>
-              <a:cs typeface="Times New Roman" panose="02020603050405020304" charset="0"/>
-            </a:endParaRPr>
           </a:p>
         </p:txBody>
       </p:sp>
@@ -18464,13 +18149,6 @@
               </a:rPr>
               <a:t>Attacker’s device</a:t>
             </a:r>
-            <a:endParaRPr lang="en-US" altLang="zh-CN" b="1">
-              <a:solidFill>
-                <a:schemeClr val="tx1"/>
-              </a:solidFill>
-              <a:latin typeface="Times New Roman" panose="02020603050405020304" charset="0"/>
-              <a:cs typeface="Times New Roman" panose="02020603050405020304" charset="0"/>
-            </a:endParaRPr>
           </a:p>
         </p:txBody>
       </p:sp>
@@ -18538,10 +18216,10 @@
           <p:nvPr/>
         </p:nvPicPr>
         <p:blipFill>
-          <a:blip r:embed="rId7">
+          <a:blip r:embed="rId9">
             <a:extLst>
               <a:ext uri="{96DAC541-7B7A-43D3-8B79-37D633B846F1}">
-                <asvg:svgBlip xmlns:asvg="http://schemas.microsoft.com/office/drawing/2016/SVG/main" r:embed="rId8"/>
+                <asvg:svgBlip xmlns:asvg="http://schemas.microsoft.com/office/drawing/2016/SVG/main" r:embed="rId10"/>
               </a:ext>
             </a:extLst>
           </a:blip>
@@ -18635,7 +18313,7 @@
                 <p:nvPr/>
               </p:nvPicPr>
               <p:blipFill rotWithShape="1">
-                <a:blip r:embed="rId1"/>
+                <a:blip r:embed="rId2"/>
                 <a:srcRect l="30132" t="10719" r="30559" b="12022"/>
                 <a:stretch>
                   <a:fillRect/>
@@ -18660,7 +18338,7 @@
                 <p:nvPr/>
               </p:nvPicPr>
               <p:blipFill rotWithShape="1">
-                <a:blip r:embed="rId2"/>
+                <a:blip r:embed="rId3"/>
                 <a:srcRect l="262" t="21" r="-17" b="31"/>
                 <a:stretch>
                   <a:fillRect/>
@@ -18826,10 +18504,10 @@
               <p:nvPr/>
             </p:nvPicPr>
             <p:blipFill>
-              <a:blip r:embed="rId3">
+              <a:blip r:embed="rId4">
                 <a:extLst>
                   <a:ext uri="{96DAC541-7B7A-43D3-8B79-37D633B846F1}">
-                    <asvg:svgBlip xmlns:asvg="http://schemas.microsoft.com/office/drawing/2016/SVG/main" r:embed="rId4"/>
+                    <asvg:svgBlip xmlns:asvg="http://schemas.microsoft.com/office/drawing/2016/SVG/main" r:embed="rId5"/>
                   </a:ext>
                 </a:extLst>
               </a:blip>
@@ -18886,7 +18564,7 @@
                 <p:nvPr/>
               </p:nvPicPr>
               <p:blipFill rotWithShape="1">
-                <a:blip r:embed="rId1"/>
+                <a:blip r:embed="rId2"/>
                 <a:srcRect l="30132" t="10719" r="30559" b="12022"/>
                 <a:stretch>
                   <a:fillRect/>
@@ -18911,7 +18589,7 @@
                 <p:nvPr/>
               </p:nvPicPr>
               <p:blipFill rotWithShape="1">
-                <a:blip r:embed="rId5"/>
+                <a:blip r:embed="rId6"/>
                 <a:srcRect l="117" t="-39" r="-220" b="-19"/>
                 <a:stretch>
                   <a:fillRect/>
@@ -19077,10 +18755,10 @@
               <p:nvPr/>
             </p:nvPicPr>
             <p:blipFill>
-              <a:blip r:embed="rId6">
+              <a:blip r:embed="rId7">
                 <a:extLst>
                   <a:ext uri="{96DAC541-7B7A-43D3-8B79-37D633B846F1}">
-                    <asvg:svgBlip xmlns:asvg="http://schemas.microsoft.com/office/drawing/2016/SVG/main" r:embed="rId7"/>
+                    <asvg:svgBlip xmlns:asvg="http://schemas.microsoft.com/office/drawing/2016/SVG/main" r:embed="rId8"/>
                   </a:ext>
                 </a:extLst>
               </a:blip>
@@ -19352,6 +19030,8 @@
       </a:bgFillStyleLst>
     </a:fmtScheme>
   </a:themeElements>
+  <a:objectDefaults/>
+  <a:extraClrSchemeLst/>
   <a:extLst>
     <a:ext uri="{05A4C25C-085E-4340-85A3-A5531E510DB2}">
       <thm15:themeFamily xmlns:thm15="http://schemas.microsoft.com/office/thememl/2012/main" name="Office Theme" id="{62F939B6-93AF-4DB8-9C6B-D6C7DFDC589F}" vid="{4A3C46E8-61CC-4603-A589-7422A47A8E4A}"/>
@@ -19611,6 +19291,8 @@
       </a:bgFillStyleLst>
     </a:fmtScheme>
   </a:themeElements>
+  <a:objectDefaults/>
+  <a:extraClrSchemeLst/>
   <a:extLst>
     <a:ext uri="{05A4C25C-085E-4340-85A3-A5531E510DB2}">
       <thm15:themeFamily xmlns:thm15="http://schemas.microsoft.com/office/thememl/2012/main" name="Office Theme" id="{62F939B6-93AF-4DB8-9C6B-D6C7DFDC589F}" vid="{4A3C46E8-61CC-4603-A589-7422A47A8E4A}"/>

--- a/img-source/images.pptx
+++ b/img-source/images.pptx
@@ -7443,56 +7443,6 @@
       </p:grpSpPr>
       <p:sp>
         <p:nvSpPr>
-          <p:cNvPr id="9" name="矩形 8"/>
-          <p:cNvSpPr/>
-          <p:nvPr/>
-        </p:nvSpPr>
-        <p:spPr>
-          <a:xfrm>
-            <a:off x="3496945" y="1630045"/>
-            <a:ext cx="1927225" cy="3115310"/>
-          </a:xfrm>
-          <a:prstGeom prst="rect">
-            <a:avLst/>
-          </a:prstGeom>
-          <a:noFill/>
-          <a:ln w="38100">
-            <a:solidFill>
-              <a:srgbClr val="719AAC"/>
-            </a:solidFill>
-            <a:prstDash val="dash"/>
-          </a:ln>
-        </p:spPr>
-        <p:style>
-          <a:lnRef idx="2">
-            <a:schemeClr val="accent1">
-              <a:shade val="50000"/>
-            </a:schemeClr>
-          </a:lnRef>
-          <a:fillRef idx="1">
-            <a:schemeClr val="accent1"/>
-          </a:fillRef>
-          <a:effectRef idx="0">
-            <a:schemeClr val="accent1"/>
-          </a:effectRef>
-          <a:fontRef idx="minor">
-            <a:schemeClr val="lt1"/>
-          </a:fontRef>
-        </p:style>
-        <p:txBody>
-          <a:bodyPr rtlCol="0" anchor="ctr"/>
-          <a:lstStyle/>
-          <a:p>
-            <a:pPr algn="ctr"/>
-            <a:endParaRPr lang="zh-CN" altLang="en-US" sz="1600">
-              <a:latin typeface="Times New Roman" panose="02020603050405020304" charset="0"/>
-              <a:cs typeface="Times New Roman" panose="02020603050405020304" charset="0"/>
-            </a:endParaRPr>
-          </a:p>
-        </p:txBody>
-      </p:sp>
-      <p:sp>
-        <p:nvSpPr>
           <p:cNvPr id="17" name="文本框 16"/>
           <p:cNvSpPr txBox="1"/>
           <p:nvPr/>
@@ -8926,6 +8876,56 @@
           </a:fontRef>
         </p:style>
       </p:cxnSp>
+      <p:sp>
+        <p:nvSpPr>
+          <p:cNvPr id="9" name="矩形 8"/>
+          <p:cNvSpPr/>
+          <p:nvPr/>
+        </p:nvSpPr>
+        <p:spPr>
+          <a:xfrm>
+            <a:off x="3496945" y="1630045"/>
+            <a:ext cx="1927225" cy="3115310"/>
+          </a:xfrm>
+          <a:prstGeom prst="rect">
+            <a:avLst/>
+          </a:prstGeom>
+          <a:noFill/>
+          <a:ln w="38100">
+            <a:solidFill>
+              <a:srgbClr val="719AAC"/>
+            </a:solidFill>
+            <a:prstDash val="dash"/>
+          </a:ln>
+        </p:spPr>
+        <p:style>
+          <a:lnRef idx="2">
+            <a:schemeClr val="accent1">
+              <a:shade val="50000"/>
+            </a:schemeClr>
+          </a:lnRef>
+          <a:fillRef idx="1">
+            <a:schemeClr val="accent1"/>
+          </a:fillRef>
+          <a:effectRef idx="0">
+            <a:schemeClr val="accent1"/>
+          </a:effectRef>
+          <a:fontRef idx="minor">
+            <a:schemeClr val="lt1"/>
+          </a:fontRef>
+        </p:style>
+        <p:txBody>
+          <a:bodyPr rtlCol="0" anchor="ctr"/>
+          <a:lstStyle/>
+          <a:p>
+            <a:pPr algn="ctr"/>
+            <a:endParaRPr lang="zh-CN" altLang="en-US" sz="1600">
+              <a:latin typeface="Times New Roman" panose="02020603050405020304" charset="0"/>
+              <a:cs typeface="Times New Roman" panose="02020603050405020304" charset="0"/>
+            </a:endParaRPr>
+          </a:p>
+        </p:txBody>
+      </p:sp>
     </p:spTree>
   </p:cSld>
   <p:clrMapOvr>
@@ -8953,63 +8953,13 @@
       </p:grpSpPr>
       <p:sp>
         <p:nvSpPr>
-          <p:cNvPr id="9" name="矩形 8"/>
-          <p:cNvSpPr/>
-          <p:nvPr/>
-        </p:nvSpPr>
-        <p:spPr>
-          <a:xfrm>
-            <a:off x="3496945" y="1630045"/>
-            <a:ext cx="1771015" cy="3115310"/>
-          </a:xfrm>
-          <a:prstGeom prst="rect">
-            <a:avLst/>
-          </a:prstGeom>
-          <a:noFill/>
-          <a:ln w="38100">
-            <a:solidFill>
-              <a:srgbClr val="719AAC"/>
-            </a:solidFill>
-            <a:prstDash val="dash"/>
-          </a:ln>
-        </p:spPr>
-        <p:style>
-          <a:lnRef idx="2">
-            <a:schemeClr val="accent1">
-              <a:shade val="50000"/>
-            </a:schemeClr>
-          </a:lnRef>
-          <a:fillRef idx="1">
-            <a:schemeClr val="accent1"/>
-          </a:fillRef>
-          <a:effectRef idx="0">
-            <a:schemeClr val="accent1"/>
-          </a:effectRef>
-          <a:fontRef idx="minor">
-            <a:schemeClr val="lt1"/>
-          </a:fontRef>
-        </p:style>
-        <p:txBody>
-          <a:bodyPr rtlCol="0" anchor="ctr"/>
-          <a:lstStyle/>
-          <a:p>
-            <a:pPr algn="ctr"/>
-            <a:endParaRPr lang="zh-CN" altLang="en-US" sz="1600">
-              <a:latin typeface="Times New Roman" panose="02020603050405020304" charset="0"/>
-              <a:cs typeface="Times New Roman" panose="02020603050405020304" charset="0"/>
-            </a:endParaRPr>
-          </a:p>
-        </p:txBody>
-      </p:sp>
-      <p:sp>
-        <p:nvSpPr>
           <p:cNvPr id="17" name="文本框 16"/>
           <p:cNvSpPr txBox="1"/>
           <p:nvPr/>
         </p:nvSpPr>
         <p:spPr>
           <a:xfrm>
-            <a:off x="3158490" y="2607310"/>
+            <a:off x="2991674" y="2607310"/>
             <a:ext cx="2471420" cy="380365"/>
           </a:xfrm>
           <a:prstGeom prst="rect">
@@ -9025,11 +8975,11 @@
           <a:p>
             <a:pPr algn="ctr"/>
             <a:r>
-              <a:rPr lang="en-US" altLang="zh-CN" sz="1600">
+              <a:rPr lang="en-US" altLang="zh-CN" sz="1600" dirty="0">
                 <a:latin typeface="Times New Roman" panose="02020603050405020304" charset="0"/>
                 <a:cs typeface="Times New Roman" panose="02020603050405020304" charset="0"/>
               </a:rPr>
-              <a:t>Merchant Frontend</a:t>
+              <a:t>Merchant App</a:t>
             </a:r>
           </a:p>
         </p:txBody>
@@ -9042,7 +8992,7 @@
         </p:nvSpPr>
         <p:spPr>
           <a:xfrm>
-            <a:off x="3628390" y="4304030"/>
+            <a:off x="3461574" y="4304030"/>
             <a:ext cx="1532890" cy="337185"/>
           </a:xfrm>
           <a:prstGeom prst="rect">
@@ -9172,13 +9122,15 @@
       <p:cxnSp>
         <p:nvCxnSpPr>
           <p:cNvPr id="24" name="直接连接符 23"/>
-          <p:cNvCxnSpPr/>
+          <p:cNvCxnSpPr>
+            <a:cxnSpLocks/>
+          </p:cNvCxnSpPr>
           <p:nvPr/>
         </p:nvCxnSpPr>
         <p:spPr>
           <a:xfrm flipV="1">
-            <a:off x="2212090" y="2448706"/>
-            <a:ext cx="1416050" cy="828040"/>
+            <a:off x="2212090" y="2443480"/>
+            <a:ext cx="1489579" cy="833266"/>
           </a:xfrm>
           <a:prstGeom prst="line">
             <a:avLst/>
@@ -9242,13 +9194,15 @@
       <p:cxnSp>
         <p:nvCxnSpPr>
           <p:cNvPr id="7" name="直接连接符 6"/>
-          <p:cNvCxnSpPr/>
+          <p:cNvCxnSpPr>
+            <a:cxnSpLocks/>
+          </p:cNvCxnSpPr>
           <p:nvPr/>
         </p:nvCxnSpPr>
         <p:spPr>
           <a:xfrm>
             <a:off x="2207645" y="3725056"/>
-            <a:ext cx="1414145" cy="307340"/>
+            <a:ext cx="1512889" cy="337185"/>
           </a:xfrm>
           <a:prstGeom prst="line">
             <a:avLst/>
@@ -9284,7 +9238,7 @@
         </p:nvCxnSpPr>
         <p:spPr>
           <a:xfrm>
-            <a:off x="4387815" y="2976087"/>
+            <a:off x="4220999" y="2976087"/>
             <a:ext cx="0" cy="720000"/>
           </a:xfrm>
           <a:prstGeom prst="line">
@@ -9321,7 +9275,7 @@
         </p:nvSpPr>
         <p:spPr>
           <a:xfrm>
-            <a:off x="5791200" y="2443480"/>
+            <a:off x="5179544" y="2443480"/>
             <a:ext cx="1985010" cy="377825"/>
           </a:xfrm>
           <a:prstGeom prst="rect">
@@ -9354,7 +9308,7 @@
         </p:nvCxnSpPr>
         <p:spPr>
           <a:xfrm>
-            <a:off x="5431659" y="2171455"/>
+            <a:off x="4820003" y="2171455"/>
             <a:ext cx="868026" cy="0"/>
           </a:xfrm>
           <a:prstGeom prst="line">
@@ -9392,7 +9346,7 @@
         </p:nvCxnSpPr>
         <p:spPr>
           <a:xfrm>
-            <a:off x="5425309" y="4110745"/>
+            <a:off x="4813653" y="4110745"/>
             <a:ext cx="868026" cy="0"/>
           </a:xfrm>
           <a:prstGeom prst="line">
@@ -9430,7 +9384,7 @@
         </p:nvSpPr>
         <p:spPr>
           <a:xfrm>
-            <a:off x="5930265" y="4406800"/>
+            <a:off x="5318609" y="4406800"/>
             <a:ext cx="1532890" cy="337185"/>
           </a:xfrm>
           <a:prstGeom prst="rect">
@@ -9463,7 +9417,7 @@
         </p:nvCxnSpPr>
         <p:spPr>
           <a:xfrm flipV="1">
-            <a:off x="7098534" y="3318900"/>
+            <a:off x="6486878" y="3318900"/>
             <a:ext cx="778510" cy="791845"/>
           </a:xfrm>
           <a:prstGeom prst="line">
@@ -9499,7 +9453,7 @@
         </p:nvCxnSpPr>
         <p:spPr>
           <a:xfrm>
-            <a:off x="8636504" y="3254765"/>
+            <a:off x="8024848" y="3254765"/>
             <a:ext cx="1368000" cy="0"/>
           </a:xfrm>
           <a:prstGeom prst="line">
@@ -9536,7 +9490,7 @@
         </p:nvSpPr>
         <p:spPr>
           <a:xfrm>
-            <a:off x="8549640" y="3255010"/>
+            <a:off x="7937984" y="3255010"/>
             <a:ext cx="1532890" cy="337185"/>
           </a:xfrm>
           <a:prstGeom prst="rect">
@@ -9569,7 +9523,7 @@
         </p:nvSpPr>
         <p:spPr>
           <a:xfrm>
-            <a:off x="7877175" y="2764790"/>
+            <a:off x="7265519" y="2764790"/>
             <a:ext cx="2907030" cy="1089660"/>
           </a:xfrm>
           <a:prstGeom prst="rect">
@@ -9619,7 +9573,7 @@
         </p:nvSpPr>
         <p:spPr>
           <a:xfrm>
-            <a:off x="4389755" y="3107690"/>
+            <a:off x="4222939" y="3107690"/>
             <a:ext cx="709930" cy="346710"/>
           </a:xfrm>
           <a:prstGeom prst="rect">
@@ -9652,7 +9606,7 @@
         </p:nvCxnSpPr>
         <p:spPr>
           <a:xfrm>
-            <a:off x="6694770" y="2970450"/>
+            <a:off x="6083114" y="2970450"/>
             <a:ext cx="0" cy="720000"/>
           </a:xfrm>
           <a:prstGeom prst="line">
@@ -9758,7 +9712,7 @@
         </p:nvGrpSpPr>
         <p:grpSpPr>
           <a:xfrm>
-            <a:off x="4061460" y="1840230"/>
+            <a:off x="3894644" y="1840230"/>
             <a:ext cx="654050" cy="647065"/>
             <a:chOff x="4445000" y="739632"/>
             <a:chExt cx="375710" cy="371203"/>
@@ -9977,7 +9931,7 @@
         </p:blipFill>
         <p:spPr>
           <a:xfrm>
-            <a:off x="4023810" y="3724946"/>
+            <a:off x="3856994" y="3724946"/>
             <a:ext cx="720000" cy="720000"/>
           </a:xfrm>
           <a:prstGeom prst="rect">
@@ -10010,7 +9964,7 @@
         </p:blipFill>
         <p:spPr>
           <a:xfrm>
-            <a:off x="6336527" y="3763681"/>
+            <a:off x="5724871" y="3763681"/>
             <a:ext cx="720000" cy="720000"/>
           </a:xfrm>
           <a:prstGeom prst="rect">
@@ -10043,7 +9997,7 @@
         </p:blipFill>
         <p:spPr>
           <a:xfrm>
-            <a:off x="6334622" y="1830334"/>
+            <a:off x="5722966" y="1830334"/>
             <a:ext cx="720000" cy="720000"/>
           </a:xfrm>
           <a:prstGeom prst="rect">
@@ -10076,7 +10030,7 @@
         </p:blipFill>
         <p:spPr>
           <a:xfrm>
-            <a:off x="7998856" y="2901414"/>
+            <a:off x="7387200" y="2901414"/>
             <a:ext cx="720000" cy="720000"/>
           </a:xfrm>
           <a:prstGeom prst="rect">
@@ -10109,7 +10063,7 @@
         </p:blipFill>
         <p:spPr>
           <a:xfrm>
-            <a:off x="9919731" y="2901414"/>
+            <a:off x="9308075" y="2901414"/>
             <a:ext cx="720000" cy="720000"/>
           </a:xfrm>
           <a:prstGeom prst="rect">
@@ -10169,7 +10123,7 @@
         </p:blipFill>
         <p:spPr>
           <a:xfrm>
-            <a:off x="5744210" y="1867535"/>
+            <a:off x="5132554" y="1867535"/>
             <a:ext cx="259200" cy="259200"/>
           </a:xfrm>
           <a:prstGeom prst="rect">
@@ -10199,7 +10153,7 @@
         </p:blipFill>
         <p:spPr>
           <a:xfrm>
-            <a:off x="4058285" y="3162300"/>
+            <a:off x="3891469" y="3162300"/>
             <a:ext cx="259200" cy="259200"/>
           </a:xfrm>
           <a:prstGeom prst="rect">
@@ -10301,7 +10255,7 @@
         </p:blipFill>
         <p:spPr>
           <a:xfrm>
-            <a:off x="5737860" y="3788410"/>
+            <a:off x="5126204" y="3788410"/>
             <a:ext cx="259200" cy="259200"/>
           </a:xfrm>
           <a:prstGeom prst="rect">
@@ -10331,7 +10285,7 @@
         </p:blipFill>
         <p:spPr>
           <a:xfrm>
-            <a:off x="9177020" y="2944495"/>
+            <a:off x="8565364" y="2944495"/>
             <a:ext cx="259200" cy="259200"/>
           </a:xfrm>
           <a:prstGeom prst="rect">
@@ -10361,7 +10315,7 @@
         </p:blipFill>
         <p:spPr>
           <a:xfrm>
-            <a:off x="6330950" y="3152775"/>
+            <a:off x="5719294" y="3152775"/>
             <a:ext cx="259200" cy="259200"/>
           </a:xfrm>
           <a:prstGeom prst="rect">
@@ -10369,6 +10323,56 @@
           </a:prstGeom>
         </p:spPr>
       </p:pic>
+      <p:sp>
+        <p:nvSpPr>
+          <p:cNvPr id="9" name="矩形 8"/>
+          <p:cNvSpPr/>
+          <p:nvPr/>
+        </p:nvSpPr>
+        <p:spPr>
+          <a:xfrm>
+            <a:off x="3496946" y="1630045"/>
+            <a:ext cx="1492798" cy="3115310"/>
+          </a:xfrm>
+          <a:prstGeom prst="rect">
+            <a:avLst/>
+          </a:prstGeom>
+          <a:noFill/>
+          <a:ln w="38100">
+            <a:solidFill>
+              <a:srgbClr val="719AAC"/>
+            </a:solidFill>
+            <a:prstDash val="dash"/>
+          </a:ln>
+        </p:spPr>
+        <p:style>
+          <a:lnRef idx="2">
+            <a:schemeClr val="accent1">
+              <a:shade val="50000"/>
+            </a:schemeClr>
+          </a:lnRef>
+          <a:fillRef idx="1">
+            <a:schemeClr val="accent1"/>
+          </a:fillRef>
+          <a:effectRef idx="0">
+            <a:schemeClr val="accent1"/>
+          </a:effectRef>
+          <a:fontRef idx="minor">
+            <a:schemeClr val="lt1"/>
+          </a:fontRef>
+        </p:style>
+        <p:txBody>
+          <a:bodyPr rtlCol="0" anchor="ctr"/>
+          <a:lstStyle/>
+          <a:p>
+            <a:pPr algn="ctr"/>
+            <a:endParaRPr lang="zh-CN" altLang="en-US" sz="1600">
+              <a:latin typeface="Times New Roman" panose="02020603050405020304" charset="0"/>
+              <a:cs typeface="Times New Roman" panose="02020603050405020304" charset="0"/>
+            </a:endParaRPr>
+          </a:p>
+        </p:txBody>
+      </p:sp>
     </p:spTree>
   </p:cSld>
   <p:clrMapOvr>
@@ -10396,63 +10400,13 @@
       </p:grpSpPr>
       <p:sp>
         <p:nvSpPr>
-          <p:cNvPr id="9" name="矩形 8"/>
-          <p:cNvSpPr/>
-          <p:nvPr/>
-        </p:nvSpPr>
-        <p:spPr>
-          <a:xfrm>
-            <a:off x="3496945" y="1630045"/>
-            <a:ext cx="1771015" cy="3115310"/>
-          </a:xfrm>
-          <a:prstGeom prst="rect">
-            <a:avLst/>
-          </a:prstGeom>
-          <a:noFill/>
-          <a:ln w="38100">
-            <a:solidFill>
-              <a:srgbClr val="719AAC"/>
-            </a:solidFill>
-            <a:prstDash val="dash"/>
-          </a:ln>
-        </p:spPr>
-        <p:style>
-          <a:lnRef idx="2">
-            <a:schemeClr val="accent1">
-              <a:shade val="50000"/>
-            </a:schemeClr>
-          </a:lnRef>
-          <a:fillRef idx="1">
-            <a:schemeClr val="accent1"/>
-          </a:fillRef>
-          <a:effectRef idx="0">
-            <a:schemeClr val="accent1"/>
-          </a:effectRef>
-          <a:fontRef idx="minor">
-            <a:schemeClr val="lt1"/>
-          </a:fontRef>
-        </p:style>
-        <p:txBody>
-          <a:bodyPr rtlCol="0" anchor="ctr"/>
-          <a:lstStyle/>
-          <a:p>
-            <a:pPr algn="ctr"/>
-            <a:endParaRPr lang="zh-CN" altLang="en-US" sz="1600">
-              <a:latin typeface="Times New Roman" panose="02020603050405020304" charset="0"/>
-              <a:cs typeface="Times New Roman" panose="02020603050405020304" charset="0"/>
-            </a:endParaRPr>
-          </a:p>
-        </p:txBody>
-      </p:sp>
-      <p:sp>
-        <p:nvSpPr>
           <p:cNvPr id="17" name="文本框 16"/>
           <p:cNvSpPr txBox="1"/>
           <p:nvPr/>
         </p:nvSpPr>
         <p:spPr>
           <a:xfrm>
-            <a:off x="3158490" y="2607310"/>
+            <a:off x="2933942" y="2563899"/>
             <a:ext cx="2471420" cy="380365"/>
           </a:xfrm>
           <a:prstGeom prst="rect">
@@ -10468,11 +10422,11 @@
           <a:p>
             <a:pPr algn="ctr"/>
             <a:r>
-              <a:rPr lang="en-US" altLang="zh-CN" sz="1600">
+              <a:rPr lang="en-US" altLang="zh-CN" sz="1600" dirty="0">
                 <a:latin typeface="Times New Roman" panose="02020603050405020304" charset="0"/>
                 <a:cs typeface="Times New Roman" panose="02020603050405020304" charset="0"/>
               </a:rPr>
-              <a:t>Merchant Frontend</a:t>
+              <a:t>Mobile Web</a:t>
             </a:r>
           </a:p>
         </p:txBody>
@@ -10485,7 +10439,7 @@
         </p:nvSpPr>
         <p:spPr>
           <a:xfrm>
-            <a:off x="3628390" y="4304030"/>
+            <a:off x="3379470" y="4304030"/>
             <a:ext cx="1532890" cy="337185"/>
           </a:xfrm>
           <a:prstGeom prst="rect">
@@ -10579,13 +10533,15 @@
       <p:cxnSp>
         <p:nvCxnSpPr>
           <p:cNvPr id="23" name="直接连接符 22"/>
-          <p:cNvCxnSpPr/>
+          <p:cNvCxnSpPr>
+            <a:cxnSpLocks/>
+          </p:cNvCxnSpPr>
           <p:nvPr/>
         </p:nvCxnSpPr>
         <p:spPr>
-          <a:xfrm flipV="1">
+          <a:xfrm>
             <a:off x="2298450" y="2168036"/>
-            <a:ext cx="1192530" cy="0"/>
+            <a:ext cx="1076575" cy="0"/>
           </a:xfrm>
           <a:prstGeom prst="line">
             <a:avLst/>
@@ -10727,7 +10683,7 @@
         </p:nvCxnSpPr>
         <p:spPr>
           <a:xfrm>
-            <a:off x="4387815" y="2976087"/>
+            <a:off x="4037295" y="2976087"/>
             <a:ext cx="0" cy="720000"/>
           </a:xfrm>
           <a:prstGeom prst="line">
@@ -10764,7 +10720,7 @@
         </p:nvSpPr>
         <p:spPr>
           <a:xfrm>
-            <a:off x="5791200" y="2443480"/>
+            <a:off x="5090160" y="2443480"/>
             <a:ext cx="1985010" cy="377825"/>
           </a:xfrm>
           <a:prstGeom prst="rect">
@@ -10797,7 +10753,7 @@
         </p:nvCxnSpPr>
         <p:spPr>
           <a:xfrm>
-            <a:off x="5431659" y="2171455"/>
+            <a:off x="4730619" y="2171455"/>
             <a:ext cx="868026" cy="0"/>
           </a:xfrm>
           <a:prstGeom prst="line">
@@ -10835,7 +10791,7 @@
         </p:nvCxnSpPr>
         <p:spPr>
           <a:xfrm>
-            <a:off x="5425309" y="4110745"/>
+            <a:off x="4724269" y="4110745"/>
             <a:ext cx="868026" cy="0"/>
           </a:xfrm>
           <a:prstGeom prst="line">
@@ -10873,7 +10829,7 @@
         </p:nvSpPr>
         <p:spPr>
           <a:xfrm>
-            <a:off x="5930265" y="4406800"/>
+            <a:off x="5229225" y="4406800"/>
             <a:ext cx="1532890" cy="337185"/>
           </a:xfrm>
           <a:prstGeom prst="rect">
@@ -10906,7 +10862,7 @@
         </p:nvCxnSpPr>
         <p:spPr>
           <a:xfrm flipV="1">
-            <a:off x="7098534" y="3318900"/>
+            <a:off x="6397494" y="3318900"/>
             <a:ext cx="778510" cy="791845"/>
           </a:xfrm>
           <a:prstGeom prst="line">
@@ -10942,7 +10898,7 @@
         </p:nvCxnSpPr>
         <p:spPr>
           <a:xfrm>
-            <a:off x="8636504" y="3254765"/>
+            <a:off x="7935464" y="3254765"/>
             <a:ext cx="1368000" cy="0"/>
           </a:xfrm>
           <a:prstGeom prst="line">
@@ -10979,7 +10935,7 @@
         </p:nvSpPr>
         <p:spPr>
           <a:xfrm>
-            <a:off x="8549640" y="3255010"/>
+            <a:off x="7848600" y="3255010"/>
             <a:ext cx="1532890" cy="337185"/>
           </a:xfrm>
           <a:prstGeom prst="rect">
@@ -11012,7 +10968,7 @@
         </p:nvSpPr>
         <p:spPr>
           <a:xfrm>
-            <a:off x="7877175" y="2764790"/>
+            <a:off x="7176135" y="2764790"/>
             <a:ext cx="2907030" cy="1089660"/>
           </a:xfrm>
           <a:prstGeom prst="rect">
@@ -11062,8 +11018,8 @@
         </p:nvSpPr>
         <p:spPr>
           <a:xfrm>
-            <a:off x="4389755" y="3107690"/>
-            <a:ext cx="709930" cy="346710"/>
+            <a:off x="4024444" y="2986406"/>
+            <a:ext cx="1022763" cy="346710"/>
           </a:xfrm>
           <a:prstGeom prst="rect">
             <a:avLst/>
@@ -11076,13 +11032,12 @@
           </a:bodyPr>
           <a:lstStyle/>
           <a:p>
-            <a:pPr algn="ctr"/>
             <a:r>
-              <a:rPr lang="en-US" altLang="zh-CN" sz="1600">
+              <a:rPr lang="en-US" altLang="zh-CN" sz="1600" dirty="0">
                 <a:latin typeface="Times New Roman" panose="02020603050405020304" charset="0"/>
                 <a:cs typeface="Times New Roman" panose="02020603050405020304" charset="0"/>
               </a:rPr>
-              <a:t>SDK</a:t>
+              <a:t>URL Scheme</a:t>
             </a:r>
           </a:p>
         </p:txBody>
@@ -11095,7 +11050,7 @@
         </p:nvCxnSpPr>
         <p:spPr>
           <a:xfrm>
-            <a:off x="6694770" y="2970450"/>
+            <a:off x="5993730" y="2970450"/>
             <a:ext cx="0" cy="720000"/>
           </a:xfrm>
           <a:prstGeom prst="line">
@@ -11216,7 +11171,7 @@
         </p:blipFill>
         <p:spPr>
           <a:xfrm>
-            <a:off x="4023810" y="3724946"/>
+            <a:off x="3790130" y="3724946"/>
             <a:ext cx="720000" cy="720000"/>
           </a:xfrm>
           <a:prstGeom prst="rect">
@@ -11249,7 +11204,7 @@
         </p:blipFill>
         <p:spPr>
           <a:xfrm>
-            <a:off x="6336527" y="3763681"/>
+            <a:off x="5635487" y="3763681"/>
             <a:ext cx="720000" cy="720000"/>
           </a:xfrm>
           <a:prstGeom prst="rect">
@@ -11282,7 +11237,7 @@
         </p:blipFill>
         <p:spPr>
           <a:xfrm>
-            <a:off x="6334622" y="1830334"/>
+            <a:off x="5633582" y="1830334"/>
             <a:ext cx="720000" cy="720000"/>
           </a:xfrm>
           <a:prstGeom prst="rect">
@@ -11315,7 +11270,7 @@
         </p:blipFill>
         <p:spPr>
           <a:xfrm>
-            <a:off x="7998856" y="2901414"/>
+            <a:off x="7297816" y="2901414"/>
             <a:ext cx="720000" cy="720000"/>
           </a:xfrm>
           <a:prstGeom prst="rect">
@@ -11348,7 +11303,7 @@
         </p:blipFill>
         <p:spPr>
           <a:xfrm>
-            <a:off x="9919731" y="2901414"/>
+            <a:off x="9218691" y="2901414"/>
             <a:ext cx="720000" cy="720000"/>
           </a:xfrm>
           <a:prstGeom prst="rect">
@@ -11408,7 +11363,7 @@
         </p:blipFill>
         <p:spPr>
           <a:xfrm>
-            <a:off x="5744210" y="1867535"/>
+            <a:off x="5043170" y="1867535"/>
             <a:ext cx="259200" cy="259200"/>
           </a:xfrm>
           <a:prstGeom prst="rect">
@@ -11438,7 +11393,7 @@
         </p:blipFill>
         <p:spPr>
           <a:xfrm>
-            <a:off x="4058285" y="3162300"/>
+            <a:off x="3707765" y="3162300"/>
             <a:ext cx="259200" cy="259200"/>
           </a:xfrm>
           <a:prstGeom prst="rect">
@@ -11540,7 +11495,7 @@
         </p:blipFill>
         <p:spPr>
           <a:xfrm>
-            <a:off x="5737860" y="3788410"/>
+            <a:off x="5036820" y="3788410"/>
             <a:ext cx="259200" cy="259200"/>
           </a:xfrm>
           <a:prstGeom prst="rect">
@@ -11570,7 +11525,7 @@
         </p:blipFill>
         <p:spPr>
           <a:xfrm>
-            <a:off x="9177020" y="2944495"/>
+            <a:off x="8475980" y="2944495"/>
             <a:ext cx="259200" cy="259200"/>
           </a:xfrm>
           <a:prstGeom prst="rect">
@@ -11600,7 +11555,7 @@
         </p:blipFill>
         <p:spPr>
           <a:xfrm>
-            <a:off x="6330950" y="3152775"/>
+            <a:off x="5629910" y="3152775"/>
             <a:ext cx="259200" cy="259200"/>
           </a:xfrm>
           <a:prstGeom prst="rect">
@@ -11630,7 +11585,7 @@
         </p:blipFill>
         <p:spPr>
           <a:xfrm>
-            <a:off x="3866515" y="1651000"/>
+            <a:off x="3632835" y="1651000"/>
             <a:ext cx="1035685" cy="1035685"/>
           </a:xfrm>
           <a:prstGeom prst="rect">
@@ -11638,6 +11593,56 @@
           </a:prstGeom>
         </p:spPr>
       </p:pic>
+      <p:sp>
+        <p:nvSpPr>
+          <p:cNvPr id="9" name="矩形 8"/>
+          <p:cNvSpPr/>
+          <p:nvPr/>
+        </p:nvSpPr>
+        <p:spPr>
+          <a:xfrm>
+            <a:off x="3375025" y="1630045"/>
+            <a:ext cx="1523671" cy="3115310"/>
+          </a:xfrm>
+          <a:prstGeom prst="rect">
+            <a:avLst/>
+          </a:prstGeom>
+          <a:noFill/>
+          <a:ln w="38100">
+            <a:solidFill>
+              <a:srgbClr val="719AAC"/>
+            </a:solidFill>
+            <a:prstDash val="dash"/>
+          </a:ln>
+        </p:spPr>
+        <p:style>
+          <a:lnRef idx="2">
+            <a:schemeClr val="accent1">
+              <a:shade val="50000"/>
+            </a:schemeClr>
+          </a:lnRef>
+          <a:fillRef idx="1">
+            <a:schemeClr val="accent1"/>
+          </a:fillRef>
+          <a:effectRef idx="0">
+            <a:schemeClr val="accent1"/>
+          </a:effectRef>
+          <a:fontRef idx="minor">
+            <a:schemeClr val="lt1"/>
+          </a:fontRef>
+        </p:style>
+        <p:txBody>
+          <a:bodyPr rtlCol="0" anchor="ctr"/>
+          <a:lstStyle/>
+          <a:p>
+            <a:pPr algn="ctr"/>
+            <a:endParaRPr lang="zh-CN" altLang="en-US" sz="1600">
+              <a:latin typeface="Times New Roman" panose="02020603050405020304" charset="0"/>
+              <a:cs typeface="Times New Roman" panose="02020603050405020304" charset="0"/>
+            </a:endParaRPr>
+          </a:p>
+        </p:txBody>
+      </p:sp>
     </p:spTree>
   </p:cSld>
   <p:clrMapOvr>
@@ -12556,11 +12561,11 @@
           <a:p>
             <a:pPr algn="ctr"/>
             <a:r>
-              <a:rPr lang="en-US" altLang="zh-CN" sz="1600">
+              <a:rPr lang="en-US" altLang="zh-CN" sz="1600" dirty="0">
                 <a:latin typeface="Times New Roman" panose="02020603050405020304" charset="0"/>
                 <a:cs typeface="Times New Roman" panose="02020603050405020304" charset="0"/>
               </a:rPr>
-              <a:t>Computer</a:t>
+              <a:t>Desktop</a:t>
             </a:r>
           </a:p>
         </p:txBody>
@@ -18264,521 +18269,516 @@
       </p:grpSpPr>
       <p:grpSp>
         <p:nvGrpSpPr>
-          <p:cNvPr id="7" name="组合 6"/>
+          <p:cNvPr id="4" name="组合 3"/>
           <p:cNvGrpSpPr/>
           <p:nvPr/>
         </p:nvGrpSpPr>
         <p:grpSpPr>
           <a:xfrm>
             <a:off x="3488174" y="1342379"/>
-            <a:ext cx="5436304" cy="3890645"/>
-            <a:chOff x="3958074" y="1164579"/>
-            <a:chExt cx="5436304" cy="3890645"/>
+            <a:ext cx="1979295" cy="3890645"/>
+            <a:chOff x="5209721" y="2071270"/>
+            <a:chExt cx="1979295" cy="3890645"/>
           </a:xfrm>
         </p:grpSpPr>
-        <p:grpSp>
-          <p:nvGrpSpPr>
-            <p:cNvPr id="5" name="组合 4"/>
-            <p:cNvGrpSpPr/>
+        <p:pic>
+          <p:nvPicPr>
+            <p:cNvPr id="19" name="图片 18" descr="ef56901b-e67b-48c3-91cc-2ffb6efbef1e"/>
+            <p:cNvPicPr>
+              <a:picLocks noChangeAspect="1"/>
+            </p:cNvPicPr>
             <p:nvPr/>
-          </p:nvGrpSpPr>
-          <p:grpSpPr>
+          </p:nvPicPr>
+          <p:blipFill rotWithShape="1">
+            <a:blip r:embed="rId2"/>
+            <a:srcRect l="30132" t="10719" r="30559" b="12022"/>
+            <a:stretch>
+              <a:fillRect/>
+            </a:stretch>
+          </p:blipFill>
+          <p:spPr>
             <a:xfrm>
-              <a:off x="3958074" y="1164579"/>
-              <a:ext cx="2320902" cy="3890645"/>
-              <a:chOff x="3407229" y="1164579"/>
-              <a:chExt cx="2320902" cy="3890645"/>
+              <a:off x="5209721" y="2071270"/>
+              <a:ext cx="1979295" cy="3890645"/>
             </a:xfrm>
-          </p:grpSpPr>
-          <p:grpSp>
-            <p:nvGrpSpPr>
-              <p:cNvPr id="4" name="组合 3"/>
-              <p:cNvGrpSpPr/>
-              <p:nvPr/>
-            </p:nvGrpSpPr>
-            <p:grpSpPr>
-              <a:xfrm>
-                <a:off x="3407229" y="1164579"/>
-                <a:ext cx="1979295" cy="3890645"/>
-                <a:chOff x="5209721" y="2071270"/>
-                <a:chExt cx="1979295" cy="3890645"/>
-              </a:xfrm>
-            </p:grpSpPr>
-            <p:pic>
-              <p:nvPicPr>
-                <p:cNvPr id="19" name="图片 18" descr="ef56901b-e67b-48c3-91cc-2ffb6efbef1e"/>
-                <p:cNvPicPr>
-                  <a:picLocks noChangeAspect="1"/>
-                </p:cNvPicPr>
-                <p:nvPr/>
-              </p:nvPicPr>
-              <p:blipFill rotWithShape="1">
-                <a:blip r:embed="rId2"/>
-                <a:srcRect l="30132" t="10719" r="30559" b="12022"/>
-                <a:stretch>
-                  <a:fillRect/>
-                </a:stretch>
-              </p:blipFill>
-              <p:spPr>
-                <a:xfrm>
-                  <a:off x="5209721" y="2071270"/>
-                  <a:ext cx="1979295" cy="3890645"/>
-                </a:xfrm>
-                <a:prstGeom prst="rect">
-                  <a:avLst/>
-                </a:prstGeom>
-              </p:spPr>
-            </p:pic>
-            <p:pic>
-              <p:nvPicPr>
-                <p:cNvPr id="20" name="图片 19" descr="D:/实验研究/论文研究/支付协议/支付协议/支付模型ppt/2.jpg2"/>
-                <p:cNvPicPr>
-                  <a:picLocks noChangeAspect="1"/>
-                </p:cNvPicPr>
-                <p:nvPr/>
-              </p:nvPicPr>
-              <p:blipFill rotWithShape="1">
-                <a:blip r:embed="rId3"/>
-                <a:srcRect l="262" t="21" r="-17" b="31"/>
-                <a:stretch>
-                  <a:fillRect/>
-                </a:stretch>
-              </p:blipFill>
-              <p:spPr>
-                <a:xfrm>
-                  <a:off x="5347408" y="2193608"/>
-                  <a:ext cx="1714849" cy="3622830"/>
-                </a:xfrm>
-                <a:custGeom>
-                  <a:avLst/>
-                  <a:gdLst>
-                    <a:gd name="connsiteX0" fmla="*/ 853548 w 1714849"/>
-                    <a:gd name="connsiteY0" fmla="*/ 61524 h 3622830"/>
-                    <a:gd name="connsiteX1" fmla="*/ 811479 w 1714849"/>
-                    <a:gd name="connsiteY1" fmla="*/ 103593 h 3622830"/>
-                    <a:gd name="connsiteX2" fmla="*/ 853548 w 1714849"/>
-                    <a:gd name="connsiteY2" fmla="*/ 145662 h 3622830"/>
-                    <a:gd name="connsiteX3" fmla="*/ 895617 w 1714849"/>
-                    <a:gd name="connsiteY3" fmla="*/ 103593 h 3622830"/>
-                    <a:gd name="connsiteX4" fmla="*/ 853548 w 1714849"/>
-                    <a:gd name="connsiteY4" fmla="*/ 61524 h 3622830"/>
-                    <a:gd name="connsiteX5" fmla="*/ 149912 w 1714849"/>
-                    <a:gd name="connsiteY5" fmla="*/ 0 h 3622830"/>
-                    <a:gd name="connsiteX6" fmla="*/ 1564937 w 1714849"/>
-                    <a:gd name="connsiteY6" fmla="*/ 0 h 3622830"/>
-                    <a:gd name="connsiteX7" fmla="*/ 1714849 w 1714849"/>
-                    <a:gd name="connsiteY7" fmla="*/ 149912 h 3622830"/>
-                    <a:gd name="connsiteX8" fmla="*/ 1714849 w 1714849"/>
-                    <a:gd name="connsiteY8" fmla="*/ 3472918 h 3622830"/>
-                    <a:gd name="connsiteX9" fmla="*/ 1564937 w 1714849"/>
-                    <a:gd name="connsiteY9" fmla="*/ 3622830 h 3622830"/>
-                    <a:gd name="connsiteX10" fmla="*/ 149912 w 1714849"/>
-                    <a:gd name="connsiteY10" fmla="*/ 3622830 h 3622830"/>
-                    <a:gd name="connsiteX11" fmla="*/ 0 w 1714849"/>
-                    <a:gd name="connsiteY11" fmla="*/ 3472918 h 3622830"/>
-                    <a:gd name="connsiteX12" fmla="*/ 0 w 1714849"/>
-                    <a:gd name="connsiteY12" fmla="*/ 149912 h 3622830"/>
-                    <a:gd name="connsiteX13" fmla="*/ 149912 w 1714849"/>
-                    <a:gd name="connsiteY13" fmla="*/ 0 h 3622830"/>
-                  </a:gdLst>
-                  <a:ahLst/>
-                  <a:cxnLst>
-                    <a:cxn ang="0">
-                      <a:pos x="connsiteX0" y="connsiteY0"/>
-                    </a:cxn>
-                    <a:cxn ang="0">
-                      <a:pos x="connsiteX1" y="connsiteY1"/>
-                    </a:cxn>
-                    <a:cxn ang="0">
-                      <a:pos x="connsiteX2" y="connsiteY2"/>
-                    </a:cxn>
-                    <a:cxn ang="0">
-                      <a:pos x="connsiteX3" y="connsiteY3"/>
-                    </a:cxn>
-                    <a:cxn ang="0">
-                      <a:pos x="connsiteX4" y="connsiteY4"/>
-                    </a:cxn>
-                    <a:cxn ang="0">
-                      <a:pos x="connsiteX5" y="connsiteY5"/>
-                    </a:cxn>
-                    <a:cxn ang="0">
-                      <a:pos x="connsiteX6" y="connsiteY6"/>
-                    </a:cxn>
-                    <a:cxn ang="0">
-                      <a:pos x="connsiteX7" y="connsiteY7"/>
-                    </a:cxn>
-                    <a:cxn ang="0">
-                      <a:pos x="connsiteX8" y="connsiteY8"/>
-                    </a:cxn>
-                    <a:cxn ang="0">
-                      <a:pos x="connsiteX9" y="connsiteY9"/>
-                    </a:cxn>
-                    <a:cxn ang="0">
-                      <a:pos x="connsiteX10" y="connsiteY10"/>
-                    </a:cxn>
-                    <a:cxn ang="0">
-                      <a:pos x="connsiteX11" y="connsiteY11"/>
-                    </a:cxn>
-                    <a:cxn ang="0">
-                      <a:pos x="connsiteX12" y="connsiteY12"/>
-                    </a:cxn>
-                    <a:cxn ang="0">
-                      <a:pos x="connsiteX13" y="connsiteY13"/>
-                    </a:cxn>
-                  </a:cxnLst>
-                  <a:rect l="l" t="t" r="r" b="b"/>
-                  <a:pathLst>
-                    <a:path w="1714849" h="3622830">
-                      <a:moveTo>
-                        <a:pt x="853548" y="61524"/>
-                      </a:moveTo>
-                      <a:cubicBezTo>
-                        <a:pt x="830314" y="61524"/>
-                        <a:pt x="811479" y="80359"/>
-                        <a:pt x="811479" y="103593"/>
-                      </a:cubicBezTo>
-                      <a:cubicBezTo>
-                        <a:pt x="811479" y="126827"/>
-                        <a:pt x="830314" y="145662"/>
-                        <a:pt x="853548" y="145662"/>
-                      </a:cubicBezTo>
-                      <a:cubicBezTo>
-                        <a:pt x="876782" y="145662"/>
-                        <a:pt x="895617" y="126827"/>
-                        <a:pt x="895617" y="103593"/>
-                      </a:cubicBezTo>
-                      <a:cubicBezTo>
-                        <a:pt x="895617" y="80359"/>
-                        <a:pt x="876782" y="61524"/>
-                        <a:pt x="853548" y="61524"/>
-                      </a:cubicBezTo>
-                      <a:close/>
-                      <a:moveTo>
-                        <a:pt x="149912" y="0"/>
-                      </a:moveTo>
-                      <a:lnTo>
-                        <a:pt x="1564937" y="0"/>
-                      </a:lnTo>
-                      <a:cubicBezTo>
-                        <a:pt x="1647731" y="0"/>
-                        <a:pt x="1714849" y="67118"/>
-                        <a:pt x="1714849" y="149912"/>
-                      </a:cubicBezTo>
-                      <a:lnTo>
-                        <a:pt x="1714849" y="3472918"/>
-                      </a:lnTo>
-                      <a:cubicBezTo>
-                        <a:pt x="1714849" y="3555712"/>
-                        <a:pt x="1647731" y="3622830"/>
-                        <a:pt x="1564937" y="3622830"/>
-                      </a:cubicBezTo>
-                      <a:lnTo>
-                        <a:pt x="149912" y="3622830"/>
-                      </a:lnTo>
-                      <a:cubicBezTo>
-                        <a:pt x="67118" y="3622830"/>
-                        <a:pt x="0" y="3555712"/>
-                        <a:pt x="0" y="3472918"/>
-                      </a:cubicBezTo>
-                      <a:lnTo>
-                        <a:pt x="0" y="149912"/>
-                      </a:lnTo>
-                      <a:cubicBezTo>
-                        <a:pt x="0" y="67118"/>
-                        <a:pt x="67118" y="0"/>
-                        <a:pt x="149912" y="0"/>
-                      </a:cubicBezTo>
-                      <a:close/>
-                    </a:path>
-                  </a:pathLst>
-                </a:custGeom>
-              </p:spPr>
-            </p:pic>
-          </p:grpSp>
-          <p:pic>
-            <p:nvPicPr>
-              <p:cNvPr id="2" name="图片 1" descr="D:/实验研究/论文研究/支付协议/支付协议/支付模型ppt/序号1-01.svg序号1-01"/>
-              <p:cNvPicPr>
-                <a:picLocks noChangeAspect="1"/>
-              </p:cNvPicPr>
-              <p:nvPr/>
-            </p:nvPicPr>
-            <p:blipFill>
-              <a:blip r:embed="rId4">
-                <a:extLst>
-                  <a:ext uri="{96DAC541-7B7A-43D3-8B79-37D633B846F1}">
-                    <asvg:svgBlip xmlns:asvg="http://schemas.microsoft.com/office/drawing/2016/SVG/main" r:embed="rId5"/>
-                  </a:ext>
-                </a:extLst>
-              </a:blip>
-              <a:srcRect t="23" b="23"/>
-              <a:stretch>
-                <a:fillRect/>
-              </a:stretch>
-            </p:blipFill>
-            <p:spPr>
-              <a:xfrm>
-                <a:off x="5483701" y="1418355"/>
-                <a:ext cx="244430" cy="244430"/>
-              </a:xfrm>
-              <a:prstGeom prst="rect">
-                <a:avLst/>
-              </a:prstGeom>
-            </p:spPr>
-          </p:pic>
-        </p:grpSp>
-        <p:grpSp>
-          <p:nvGrpSpPr>
-            <p:cNvPr id="6" name="组合 5"/>
-            <p:cNvGrpSpPr/>
+            <a:prstGeom prst="rect">
+              <a:avLst/>
+            </a:prstGeom>
+          </p:spPr>
+        </p:pic>
+        <p:pic>
+          <p:nvPicPr>
+            <p:cNvPr id="20" name="图片 19" descr="D:/实验研究/论文研究/支付协议/支付协议/支付模型ppt/2.jpg2"/>
+            <p:cNvPicPr>
+              <a:picLocks noChangeAspect="1"/>
+            </p:cNvPicPr>
             <p:nvPr/>
-          </p:nvGrpSpPr>
-          <p:grpSpPr>
+          </p:nvPicPr>
+          <p:blipFill rotWithShape="1">
+            <a:blip r:embed="rId3"/>
+            <a:srcRect l="262" t="21" r="-17" b="31"/>
+            <a:stretch>
+              <a:fillRect/>
+            </a:stretch>
+          </p:blipFill>
+          <p:spPr>
             <a:xfrm>
-              <a:off x="7073476" y="1164579"/>
-              <a:ext cx="2320902" cy="3890645"/>
-              <a:chOff x="7073476" y="1164579"/>
-              <a:chExt cx="2320902" cy="3890645"/>
+              <a:off x="5347408" y="2193608"/>
+              <a:ext cx="1714849" cy="3622830"/>
             </a:xfrm>
-          </p:grpSpPr>
-          <p:grpSp>
-            <p:nvGrpSpPr>
-              <p:cNvPr id="3" name="组合 2"/>
-              <p:cNvGrpSpPr/>
-              <p:nvPr/>
-            </p:nvGrpSpPr>
-            <p:grpSpPr>
-              <a:xfrm>
-                <a:off x="7073476" y="1164579"/>
-                <a:ext cx="1979295" cy="3890645"/>
-                <a:chOff x="6484937" y="882650"/>
-                <a:chExt cx="1979295" cy="3890645"/>
-              </a:xfrm>
-            </p:grpSpPr>
-            <p:pic>
-              <p:nvPicPr>
-                <p:cNvPr id="8" name="图片 7" descr="ef56901b-e67b-48c3-91cc-2ffb6efbef1e"/>
-                <p:cNvPicPr>
-                  <a:picLocks noChangeAspect="1"/>
-                </p:cNvPicPr>
-                <p:nvPr/>
-              </p:nvPicPr>
-              <p:blipFill rotWithShape="1">
-                <a:blip r:embed="rId2"/>
-                <a:srcRect l="30132" t="10719" r="30559" b="12022"/>
-                <a:stretch>
-                  <a:fillRect/>
-                </a:stretch>
-              </p:blipFill>
-              <p:spPr>
-                <a:xfrm>
-                  <a:off x="6484937" y="882650"/>
-                  <a:ext cx="1979295" cy="3890645"/>
-                </a:xfrm>
-                <a:prstGeom prst="rect">
-                  <a:avLst/>
-                </a:prstGeom>
-              </p:spPr>
-            </p:pic>
-            <p:pic>
-              <p:nvPicPr>
-                <p:cNvPr id="18" name="图片 17"/>
-                <p:cNvPicPr>
-                  <a:picLocks noChangeAspect="1"/>
-                </p:cNvPicPr>
-                <p:nvPr/>
-              </p:nvPicPr>
-              <p:blipFill rotWithShape="1">
-                <a:blip r:embed="rId6"/>
-                <a:srcRect l="117" t="-39" r="-220" b="-19"/>
-                <a:stretch>
-                  <a:fillRect/>
-                </a:stretch>
-              </p:blipFill>
-              <p:spPr>
-                <a:xfrm>
-                  <a:off x="6621567" y="1004697"/>
-                  <a:ext cx="1715983" cy="3618321"/>
-                </a:xfrm>
-                <a:custGeom>
-                  <a:avLst/>
-                  <a:gdLst>
-                    <a:gd name="connsiteX0" fmla="*/ 854765 w 1715983"/>
-                    <a:gd name="connsiteY0" fmla="*/ 62102 h 3652899"/>
-                    <a:gd name="connsiteX1" fmla="*/ 812696 w 1715983"/>
-                    <a:gd name="connsiteY1" fmla="*/ 104171 h 3652899"/>
-                    <a:gd name="connsiteX2" fmla="*/ 854765 w 1715983"/>
-                    <a:gd name="connsiteY2" fmla="*/ 146240 h 3652899"/>
-                    <a:gd name="connsiteX3" fmla="*/ 896834 w 1715983"/>
-                    <a:gd name="connsiteY3" fmla="*/ 104171 h 3652899"/>
-                    <a:gd name="connsiteX4" fmla="*/ 854765 w 1715983"/>
-                    <a:gd name="connsiteY4" fmla="*/ 62102 h 3652899"/>
-                    <a:gd name="connsiteX5" fmla="*/ 142873 w 1715983"/>
-                    <a:gd name="connsiteY5" fmla="*/ 0 h 3652899"/>
-                    <a:gd name="connsiteX6" fmla="*/ 1573110 w 1715983"/>
-                    <a:gd name="connsiteY6" fmla="*/ 0 h 3652899"/>
-                    <a:gd name="connsiteX7" fmla="*/ 1715983 w 1715983"/>
-                    <a:gd name="connsiteY7" fmla="*/ 142873 h 3652899"/>
-                    <a:gd name="connsiteX8" fmla="*/ 1715983 w 1715983"/>
-                    <a:gd name="connsiteY8" fmla="*/ 3510026 h 3652899"/>
-                    <a:gd name="connsiteX9" fmla="*/ 1573110 w 1715983"/>
-                    <a:gd name="connsiteY9" fmla="*/ 3652899 h 3652899"/>
-                    <a:gd name="connsiteX10" fmla="*/ 142873 w 1715983"/>
-                    <a:gd name="connsiteY10" fmla="*/ 3652899 h 3652899"/>
-                    <a:gd name="connsiteX11" fmla="*/ 0 w 1715983"/>
-                    <a:gd name="connsiteY11" fmla="*/ 3510026 h 3652899"/>
-                    <a:gd name="connsiteX12" fmla="*/ 0 w 1715983"/>
-                    <a:gd name="connsiteY12" fmla="*/ 142873 h 3652899"/>
-                    <a:gd name="connsiteX13" fmla="*/ 142873 w 1715983"/>
-                    <a:gd name="connsiteY13" fmla="*/ 0 h 3652899"/>
-                  </a:gdLst>
-                  <a:ahLst/>
-                  <a:cxnLst>
-                    <a:cxn ang="0">
-                      <a:pos x="connsiteX0" y="connsiteY0"/>
-                    </a:cxn>
-                    <a:cxn ang="0">
-                      <a:pos x="connsiteX1" y="connsiteY1"/>
-                    </a:cxn>
-                    <a:cxn ang="0">
-                      <a:pos x="connsiteX2" y="connsiteY2"/>
-                    </a:cxn>
-                    <a:cxn ang="0">
-                      <a:pos x="connsiteX3" y="connsiteY3"/>
-                    </a:cxn>
-                    <a:cxn ang="0">
-                      <a:pos x="connsiteX4" y="connsiteY4"/>
-                    </a:cxn>
-                    <a:cxn ang="0">
-                      <a:pos x="connsiteX5" y="connsiteY5"/>
-                    </a:cxn>
-                    <a:cxn ang="0">
-                      <a:pos x="connsiteX6" y="connsiteY6"/>
-                    </a:cxn>
-                    <a:cxn ang="0">
-                      <a:pos x="connsiteX7" y="connsiteY7"/>
-                    </a:cxn>
-                    <a:cxn ang="0">
-                      <a:pos x="connsiteX8" y="connsiteY8"/>
-                    </a:cxn>
-                    <a:cxn ang="0">
-                      <a:pos x="connsiteX9" y="connsiteY9"/>
-                    </a:cxn>
-                    <a:cxn ang="0">
-                      <a:pos x="connsiteX10" y="connsiteY10"/>
-                    </a:cxn>
-                    <a:cxn ang="0">
-                      <a:pos x="connsiteX11" y="connsiteY11"/>
-                    </a:cxn>
-                    <a:cxn ang="0">
-                      <a:pos x="connsiteX12" y="connsiteY12"/>
-                    </a:cxn>
-                    <a:cxn ang="0">
-                      <a:pos x="connsiteX13" y="connsiteY13"/>
-                    </a:cxn>
-                  </a:cxnLst>
-                  <a:rect l="l" t="t" r="r" b="b"/>
-                  <a:pathLst>
-                    <a:path w="1715983" h="3652899">
-                      <a:moveTo>
-                        <a:pt x="854765" y="62102"/>
-                      </a:moveTo>
-                      <a:cubicBezTo>
-                        <a:pt x="831531" y="62102"/>
-                        <a:pt x="812696" y="80937"/>
-                        <a:pt x="812696" y="104171"/>
-                      </a:cubicBezTo>
-                      <a:cubicBezTo>
-                        <a:pt x="812696" y="127405"/>
-                        <a:pt x="831531" y="146240"/>
-                        <a:pt x="854765" y="146240"/>
-                      </a:cubicBezTo>
-                      <a:cubicBezTo>
-                        <a:pt x="877999" y="146240"/>
-                        <a:pt x="896834" y="127405"/>
-                        <a:pt x="896834" y="104171"/>
-                      </a:cubicBezTo>
-                      <a:cubicBezTo>
-                        <a:pt x="896834" y="80937"/>
-                        <a:pt x="877999" y="62102"/>
-                        <a:pt x="854765" y="62102"/>
-                      </a:cubicBezTo>
-                      <a:close/>
-                      <a:moveTo>
-                        <a:pt x="142873" y="0"/>
-                      </a:moveTo>
-                      <a:lnTo>
-                        <a:pt x="1573110" y="0"/>
-                      </a:lnTo>
-                      <a:cubicBezTo>
-                        <a:pt x="1652017" y="0"/>
-                        <a:pt x="1715983" y="63966"/>
-                        <a:pt x="1715983" y="142873"/>
-                      </a:cubicBezTo>
-                      <a:lnTo>
-                        <a:pt x="1715983" y="3510026"/>
-                      </a:lnTo>
-                      <a:cubicBezTo>
-                        <a:pt x="1715983" y="3588933"/>
-                        <a:pt x="1652017" y="3652899"/>
-                        <a:pt x="1573110" y="3652899"/>
-                      </a:cubicBezTo>
-                      <a:lnTo>
-                        <a:pt x="142873" y="3652899"/>
-                      </a:lnTo>
-                      <a:cubicBezTo>
-                        <a:pt x="63966" y="3652899"/>
-                        <a:pt x="0" y="3588933"/>
-                        <a:pt x="0" y="3510026"/>
-                      </a:cubicBezTo>
-                      <a:lnTo>
-                        <a:pt x="0" y="142873"/>
-                      </a:lnTo>
-                      <a:cubicBezTo>
-                        <a:pt x="0" y="63966"/>
-                        <a:pt x="63966" y="0"/>
-                        <a:pt x="142873" y="0"/>
-                      </a:cubicBezTo>
-                      <a:close/>
-                    </a:path>
-                  </a:pathLst>
-                </a:custGeom>
-              </p:spPr>
-            </p:pic>
-          </p:grpSp>
-          <p:pic>
-            <p:nvPicPr>
-              <p:cNvPr id="11" name="图片 10" descr="D:/实验研究/论文研究/支付协议/支付协议/支付模型ppt/序号2-01.svg序号2-01"/>
-              <p:cNvPicPr>
-                <a:picLocks noChangeAspect="1"/>
-              </p:cNvPicPr>
-              <p:nvPr/>
-            </p:nvPicPr>
-            <p:blipFill>
-              <a:blip r:embed="rId7">
-                <a:extLst>
-                  <a:ext uri="{96DAC541-7B7A-43D3-8B79-37D633B846F1}">
-                    <asvg:svgBlip xmlns:asvg="http://schemas.microsoft.com/office/drawing/2016/SVG/main" r:embed="rId8"/>
-                  </a:ext>
-                </a:extLst>
-              </a:blip>
-              <a:srcRect t="23" b="23"/>
-              <a:stretch>
-                <a:fillRect/>
-              </a:stretch>
-            </p:blipFill>
-            <p:spPr>
-              <a:xfrm>
-                <a:off x="9149948" y="1418355"/>
-                <a:ext cx="244430" cy="244430"/>
-              </a:xfrm>
-              <a:prstGeom prst="rect">
-                <a:avLst/>
-              </a:prstGeom>
-            </p:spPr>
-          </p:pic>
-        </p:grpSp>
+            <a:custGeom>
+              <a:avLst/>
+              <a:gdLst>
+                <a:gd name="connsiteX0" fmla="*/ 853548 w 1714849"/>
+                <a:gd name="connsiteY0" fmla="*/ 61524 h 3622830"/>
+                <a:gd name="connsiteX1" fmla="*/ 811479 w 1714849"/>
+                <a:gd name="connsiteY1" fmla="*/ 103593 h 3622830"/>
+                <a:gd name="connsiteX2" fmla="*/ 853548 w 1714849"/>
+                <a:gd name="connsiteY2" fmla="*/ 145662 h 3622830"/>
+                <a:gd name="connsiteX3" fmla="*/ 895617 w 1714849"/>
+                <a:gd name="connsiteY3" fmla="*/ 103593 h 3622830"/>
+                <a:gd name="connsiteX4" fmla="*/ 853548 w 1714849"/>
+                <a:gd name="connsiteY4" fmla="*/ 61524 h 3622830"/>
+                <a:gd name="connsiteX5" fmla="*/ 149912 w 1714849"/>
+                <a:gd name="connsiteY5" fmla="*/ 0 h 3622830"/>
+                <a:gd name="connsiteX6" fmla="*/ 1564937 w 1714849"/>
+                <a:gd name="connsiteY6" fmla="*/ 0 h 3622830"/>
+                <a:gd name="connsiteX7" fmla="*/ 1714849 w 1714849"/>
+                <a:gd name="connsiteY7" fmla="*/ 149912 h 3622830"/>
+                <a:gd name="connsiteX8" fmla="*/ 1714849 w 1714849"/>
+                <a:gd name="connsiteY8" fmla="*/ 3472918 h 3622830"/>
+                <a:gd name="connsiteX9" fmla="*/ 1564937 w 1714849"/>
+                <a:gd name="connsiteY9" fmla="*/ 3622830 h 3622830"/>
+                <a:gd name="connsiteX10" fmla="*/ 149912 w 1714849"/>
+                <a:gd name="connsiteY10" fmla="*/ 3622830 h 3622830"/>
+                <a:gd name="connsiteX11" fmla="*/ 0 w 1714849"/>
+                <a:gd name="connsiteY11" fmla="*/ 3472918 h 3622830"/>
+                <a:gd name="connsiteX12" fmla="*/ 0 w 1714849"/>
+                <a:gd name="connsiteY12" fmla="*/ 149912 h 3622830"/>
+                <a:gd name="connsiteX13" fmla="*/ 149912 w 1714849"/>
+                <a:gd name="connsiteY13" fmla="*/ 0 h 3622830"/>
+              </a:gdLst>
+              <a:ahLst/>
+              <a:cxnLst>
+                <a:cxn ang="0">
+                  <a:pos x="connsiteX0" y="connsiteY0"/>
+                </a:cxn>
+                <a:cxn ang="0">
+                  <a:pos x="connsiteX1" y="connsiteY1"/>
+                </a:cxn>
+                <a:cxn ang="0">
+                  <a:pos x="connsiteX2" y="connsiteY2"/>
+                </a:cxn>
+                <a:cxn ang="0">
+                  <a:pos x="connsiteX3" y="connsiteY3"/>
+                </a:cxn>
+                <a:cxn ang="0">
+                  <a:pos x="connsiteX4" y="connsiteY4"/>
+                </a:cxn>
+                <a:cxn ang="0">
+                  <a:pos x="connsiteX5" y="connsiteY5"/>
+                </a:cxn>
+                <a:cxn ang="0">
+                  <a:pos x="connsiteX6" y="connsiteY6"/>
+                </a:cxn>
+                <a:cxn ang="0">
+                  <a:pos x="connsiteX7" y="connsiteY7"/>
+                </a:cxn>
+                <a:cxn ang="0">
+                  <a:pos x="connsiteX8" y="connsiteY8"/>
+                </a:cxn>
+                <a:cxn ang="0">
+                  <a:pos x="connsiteX9" y="connsiteY9"/>
+                </a:cxn>
+                <a:cxn ang="0">
+                  <a:pos x="connsiteX10" y="connsiteY10"/>
+                </a:cxn>
+                <a:cxn ang="0">
+                  <a:pos x="connsiteX11" y="connsiteY11"/>
+                </a:cxn>
+                <a:cxn ang="0">
+                  <a:pos x="connsiteX12" y="connsiteY12"/>
+                </a:cxn>
+                <a:cxn ang="0">
+                  <a:pos x="connsiteX13" y="connsiteY13"/>
+                </a:cxn>
+              </a:cxnLst>
+              <a:rect l="l" t="t" r="r" b="b"/>
+              <a:pathLst>
+                <a:path w="1714849" h="3622830">
+                  <a:moveTo>
+                    <a:pt x="853548" y="61524"/>
+                  </a:moveTo>
+                  <a:cubicBezTo>
+                    <a:pt x="830314" y="61524"/>
+                    <a:pt x="811479" y="80359"/>
+                    <a:pt x="811479" y="103593"/>
+                  </a:cubicBezTo>
+                  <a:cubicBezTo>
+                    <a:pt x="811479" y="126827"/>
+                    <a:pt x="830314" y="145662"/>
+                    <a:pt x="853548" y="145662"/>
+                  </a:cubicBezTo>
+                  <a:cubicBezTo>
+                    <a:pt x="876782" y="145662"/>
+                    <a:pt x="895617" y="126827"/>
+                    <a:pt x="895617" y="103593"/>
+                  </a:cubicBezTo>
+                  <a:cubicBezTo>
+                    <a:pt x="895617" y="80359"/>
+                    <a:pt x="876782" y="61524"/>
+                    <a:pt x="853548" y="61524"/>
+                  </a:cubicBezTo>
+                  <a:close/>
+                  <a:moveTo>
+                    <a:pt x="149912" y="0"/>
+                  </a:moveTo>
+                  <a:lnTo>
+                    <a:pt x="1564937" y="0"/>
+                  </a:lnTo>
+                  <a:cubicBezTo>
+                    <a:pt x="1647731" y="0"/>
+                    <a:pt x="1714849" y="67118"/>
+                    <a:pt x="1714849" y="149912"/>
+                  </a:cubicBezTo>
+                  <a:lnTo>
+                    <a:pt x="1714849" y="3472918"/>
+                  </a:lnTo>
+                  <a:cubicBezTo>
+                    <a:pt x="1714849" y="3555712"/>
+                    <a:pt x="1647731" y="3622830"/>
+                    <a:pt x="1564937" y="3622830"/>
+                  </a:cubicBezTo>
+                  <a:lnTo>
+                    <a:pt x="149912" y="3622830"/>
+                  </a:lnTo>
+                  <a:cubicBezTo>
+                    <a:pt x="67118" y="3622830"/>
+                    <a:pt x="0" y="3555712"/>
+                    <a:pt x="0" y="3472918"/>
+                  </a:cubicBezTo>
+                  <a:lnTo>
+                    <a:pt x="0" y="149912"/>
+                  </a:lnTo>
+                  <a:cubicBezTo>
+                    <a:pt x="0" y="67118"/>
+                    <a:pt x="67118" y="0"/>
+                    <a:pt x="149912" y="0"/>
+                  </a:cubicBezTo>
+                  <a:close/>
+                </a:path>
+              </a:pathLst>
+            </a:custGeom>
+          </p:spPr>
+        </p:pic>
       </p:grpSp>
+      <p:pic>
+        <p:nvPicPr>
+          <p:cNvPr id="2" name="图片 1" descr="D:/实验研究/论文研究/支付协议/支付协议/支付模型ppt/序号1-01.svg序号1-01"/>
+          <p:cNvPicPr>
+            <a:picLocks noChangeAspect="1"/>
+          </p:cNvPicPr>
+          <p:nvPr/>
+        </p:nvPicPr>
+        <p:blipFill>
+          <a:blip r:embed="rId4">
+            <a:extLst>
+              <a:ext uri="{96DAC541-7B7A-43D3-8B79-37D633B846F1}">
+                <asvg:svgBlip xmlns:asvg="http://schemas.microsoft.com/office/drawing/2016/SVG/main" r:embed="rId5"/>
+              </a:ext>
+            </a:extLst>
+          </a:blip>
+          <a:srcRect t="23" b="23"/>
+          <a:stretch>
+            <a:fillRect/>
+          </a:stretch>
+        </p:blipFill>
+        <p:spPr>
+          <a:xfrm>
+            <a:off x="5564646" y="1596155"/>
+            <a:ext cx="244430" cy="244430"/>
+          </a:xfrm>
+          <a:prstGeom prst="rect">
+            <a:avLst/>
+          </a:prstGeom>
+        </p:spPr>
+      </p:pic>
+      <p:grpSp>
+        <p:nvGrpSpPr>
+          <p:cNvPr id="3" name="组合 2"/>
+          <p:cNvGrpSpPr/>
+          <p:nvPr/>
+        </p:nvGrpSpPr>
+        <p:grpSpPr>
+          <a:xfrm>
+            <a:off x="6603576" y="1342379"/>
+            <a:ext cx="1979295" cy="3890645"/>
+            <a:chOff x="6484937" y="882650"/>
+            <a:chExt cx="1979295" cy="3890645"/>
+          </a:xfrm>
+        </p:grpSpPr>
+        <p:pic>
+          <p:nvPicPr>
+            <p:cNvPr id="8" name="图片 7" descr="ef56901b-e67b-48c3-91cc-2ffb6efbef1e"/>
+            <p:cNvPicPr>
+              <a:picLocks noChangeAspect="1"/>
+            </p:cNvPicPr>
+            <p:nvPr/>
+          </p:nvPicPr>
+          <p:blipFill rotWithShape="1">
+            <a:blip r:embed="rId2"/>
+            <a:srcRect l="30132" t="10719" r="30559" b="12022"/>
+            <a:stretch>
+              <a:fillRect/>
+            </a:stretch>
+          </p:blipFill>
+          <p:spPr>
+            <a:xfrm>
+              <a:off x="6484937" y="882650"/>
+              <a:ext cx="1979295" cy="3890645"/>
+            </a:xfrm>
+            <a:prstGeom prst="rect">
+              <a:avLst/>
+            </a:prstGeom>
+          </p:spPr>
+        </p:pic>
+        <p:pic>
+          <p:nvPicPr>
+            <p:cNvPr id="18" name="图片 17"/>
+            <p:cNvPicPr>
+              <a:picLocks noChangeAspect="1"/>
+            </p:cNvPicPr>
+            <p:nvPr/>
+          </p:nvPicPr>
+          <p:blipFill rotWithShape="1">
+            <a:blip r:embed="rId6"/>
+            <a:srcRect l="117" t="-39" r="-220" b="-19"/>
+            <a:stretch>
+              <a:fillRect/>
+            </a:stretch>
+          </p:blipFill>
+          <p:spPr>
+            <a:xfrm>
+              <a:off x="6621567" y="1004697"/>
+              <a:ext cx="1715983" cy="3618321"/>
+            </a:xfrm>
+            <a:custGeom>
+              <a:avLst/>
+              <a:gdLst>
+                <a:gd name="connsiteX0" fmla="*/ 854765 w 1715983"/>
+                <a:gd name="connsiteY0" fmla="*/ 62102 h 3652899"/>
+                <a:gd name="connsiteX1" fmla="*/ 812696 w 1715983"/>
+                <a:gd name="connsiteY1" fmla="*/ 104171 h 3652899"/>
+                <a:gd name="connsiteX2" fmla="*/ 854765 w 1715983"/>
+                <a:gd name="connsiteY2" fmla="*/ 146240 h 3652899"/>
+                <a:gd name="connsiteX3" fmla="*/ 896834 w 1715983"/>
+                <a:gd name="connsiteY3" fmla="*/ 104171 h 3652899"/>
+                <a:gd name="connsiteX4" fmla="*/ 854765 w 1715983"/>
+                <a:gd name="connsiteY4" fmla="*/ 62102 h 3652899"/>
+                <a:gd name="connsiteX5" fmla="*/ 142873 w 1715983"/>
+                <a:gd name="connsiteY5" fmla="*/ 0 h 3652899"/>
+                <a:gd name="connsiteX6" fmla="*/ 1573110 w 1715983"/>
+                <a:gd name="connsiteY6" fmla="*/ 0 h 3652899"/>
+                <a:gd name="connsiteX7" fmla="*/ 1715983 w 1715983"/>
+                <a:gd name="connsiteY7" fmla="*/ 142873 h 3652899"/>
+                <a:gd name="connsiteX8" fmla="*/ 1715983 w 1715983"/>
+                <a:gd name="connsiteY8" fmla="*/ 3510026 h 3652899"/>
+                <a:gd name="connsiteX9" fmla="*/ 1573110 w 1715983"/>
+                <a:gd name="connsiteY9" fmla="*/ 3652899 h 3652899"/>
+                <a:gd name="connsiteX10" fmla="*/ 142873 w 1715983"/>
+                <a:gd name="connsiteY10" fmla="*/ 3652899 h 3652899"/>
+                <a:gd name="connsiteX11" fmla="*/ 0 w 1715983"/>
+                <a:gd name="connsiteY11" fmla="*/ 3510026 h 3652899"/>
+                <a:gd name="connsiteX12" fmla="*/ 0 w 1715983"/>
+                <a:gd name="connsiteY12" fmla="*/ 142873 h 3652899"/>
+                <a:gd name="connsiteX13" fmla="*/ 142873 w 1715983"/>
+                <a:gd name="connsiteY13" fmla="*/ 0 h 3652899"/>
+              </a:gdLst>
+              <a:ahLst/>
+              <a:cxnLst>
+                <a:cxn ang="0">
+                  <a:pos x="connsiteX0" y="connsiteY0"/>
+                </a:cxn>
+                <a:cxn ang="0">
+                  <a:pos x="connsiteX1" y="connsiteY1"/>
+                </a:cxn>
+                <a:cxn ang="0">
+                  <a:pos x="connsiteX2" y="connsiteY2"/>
+                </a:cxn>
+                <a:cxn ang="0">
+                  <a:pos x="connsiteX3" y="connsiteY3"/>
+                </a:cxn>
+                <a:cxn ang="0">
+                  <a:pos x="connsiteX4" y="connsiteY4"/>
+                </a:cxn>
+                <a:cxn ang="0">
+                  <a:pos x="connsiteX5" y="connsiteY5"/>
+                </a:cxn>
+                <a:cxn ang="0">
+                  <a:pos x="connsiteX6" y="connsiteY6"/>
+                </a:cxn>
+                <a:cxn ang="0">
+                  <a:pos x="connsiteX7" y="connsiteY7"/>
+                </a:cxn>
+                <a:cxn ang="0">
+                  <a:pos x="connsiteX8" y="connsiteY8"/>
+                </a:cxn>
+                <a:cxn ang="0">
+                  <a:pos x="connsiteX9" y="connsiteY9"/>
+                </a:cxn>
+                <a:cxn ang="0">
+                  <a:pos x="connsiteX10" y="connsiteY10"/>
+                </a:cxn>
+                <a:cxn ang="0">
+                  <a:pos x="connsiteX11" y="connsiteY11"/>
+                </a:cxn>
+                <a:cxn ang="0">
+                  <a:pos x="connsiteX12" y="connsiteY12"/>
+                </a:cxn>
+                <a:cxn ang="0">
+                  <a:pos x="connsiteX13" y="connsiteY13"/>
+                </a:cxn>
+              </a:cxnLst>
+              <a:rect l="l" t="t" r="r" b="b"/>
+              <a:pathLst>
+                <a:path w="1715983" h="3652899">
+                  <a:moveTo>
+                    <a:pt x="854765" y="62102"/>
+                  </a:moveTo>
+                  <a:cubicBezTo>
+                    <a:pt x="831531" y="62102"/>
+                    <a:pt x="812696" y="80937"/>
+                    <a:pt x="812696" y="104171"/>
+                  </a:cubicBezTo>
+                  <a:cubicBezTo>
+                    <a:pt x="812696" y="127405"/>
+                    <a:pt x="831531" y="146240"/>
+                    <a:pt x="854765" y="146240"/>
+                  </a:cubicBezTo>
+                  <a:cubicBezTo>
+                    <a:pt x="877999" y="146240"/>
+                    <a:pt x="896834" y="127405"/>
+                    <a:pt x="896834" y="104171"/>
+                  </a:cubicBezTo>
+                  <a:cubicBezTo>
+                    <a:pt x="896834" y="80937"/>
+                    <a:pt x="877999" y="62102"/>
+                    <a:pt x="854765" y="62102"/>
+                  </a:cubicBezTo>
+                  <a:close/>
+                  <a:moveTo>
+                    <a:pt x="142873" y="0"/>
+                  </a:moveTo>
+                  <a:lnTo>
+                    <a:pt x="1573110" y="0"/>
+                  </a:lnTo>
+                  <a:cubicBezTo>
+                    <a:pt x="1652017" y="0"/>
+                    <a:pt x="1715983" y="63966"/>
+                    <a:pt x="1715983" y="142873"/>
+                  </a:cubicBezTo>
+                  <a:lnTo>
+                    <a:pt x="1715983" y="3510026"/>
+                  </a:lnTo>
+                  <a:cubicBezTo>
+                    <a:pt x="1715983" y="3588933"/>
+                    <a:pt x="1652017" y="3652899"/>
+                    <a:pt x="1573110" y="3652899"/>
+                  </a:cubicBezTo>
+                  <a:lnTo>
+                    <a:pt x="142873" y="3652899"/>
+                  </a:lnTo>
+                  <a:cubicBezTo>
+                    <a:pt x="63966" y="3652899"/>
+                    <a:pt x="0" y="3588933"/>
+                    <a:pt x="0" y="3510026"/>
+                  </a:cubicBezTo>
+                  <a:lnTo>
+                    <a:pt x="0" y="142873"/>
+                  </a:lnTo>
+                  <a:cubicBezTo>
+                    <a:pt x="0" y="63966"/>
+                    <a:pt x="63966" y="0"/>
+                    <a:pt x="142873" y="0"/>
+                  </a:cubicBezTo>
+                  <a:close/>
+                </a:path>
+              </a:pathLst>
+            </a:custGeom>
+          </p:spPr>
+        </p:pic>
+      </p:grpSp>
+      <p:pic>
+        <p:nvPicPr>
+          <p:cNvPr id="11" name="图片 10" descr="D:/实验研究/论文研究/支付协议/支付协议/支付模型ppt/序号2-01.svg序号2-01"/>
+          <p:cNvPicPr>
+            <a:picLocks noChangeAspect="1"/>
+          </p:cNvPicPr>
+          <p:nvPr/>
+        </p:nvPicPr>
+        <p:blipFill>
+          <a:blip r:embed="rId7">
+            <a:extLst>
+              <a:ext uri="{96DAC541-7B7A-43D3-8B79-37D633B846F1}">
+                <asvg:svgBlip xmlns:asvg="http://schemas.microsoft.com/office/drawing/2016/SVG/main" r:embed="rId8"/>
+              </a:ext>
+            </a:extLst>
+          </a:blip>
+          <a:srcRect t="23" b="23"/>
+          <a:stretch>
+            <a:fillRect/>
+          </a:stretch>
+        </p:blipFill>
+        <p:spPr>
+          <a:xfrm>
+            <a:off x="8680048" y="1596155"/>
+            <a:ext cx="244430" cy="244430"/>
+          </a:xfrm>
+          <a:prstGeom prst="rect">
+            <a:avLst/>
+          </a:prstGeom>
+        </p:spPr>
+      </p:pic>
+      <p:sp>
+        <p:nvSpPr>
+          <p:cNvPr id="14" name="文本框 13">
+            <a:extLst>
+              <a:ext uri="{FF2B5EF4-FFF2-40B4-BE49-F238E27FC236}">
+                <a16:creationId xmlns:a16="http://schemas.microsoft.com/office/drawing/2014/main" id="{29314145-5D79-4CB0-A969-2CEAA71617CC}"/>
+              </a:ext>
+            </a:extLst>
+          </p:cNvPr>
+          <p:cNvSpPr txBox="1"/>
+          <p:nvPr/>
+        </p:nvSpPr>
+        <p:spPr>
+          <a:xfrm>
+            <a:off x="3047485" y="3244334"/>
+            <a:ext cx="451617" cy="369332"/>
+          </a:xfrm>
+          <a:prstGeom prst="rect">
+            <a:avLst/>
+          </a:prstGeom>
+          <a:noFill/>
+        </p:spPr>
+        <p:txBody>
+          <a:bodyPr wrap="square">
+            <a:spAutoFit/>
+          </a:bodyPr>
+          <a:lstStyle/>
+          <a:p>
+            <a:r>
+              <a:rPr lang="zh-CN" altLang="en-US" dirty="0">
+                <a:effectLst/>
+                <a:latin typeface="Times New Roman" panose="02020603050405020304" pitchFamily="18" charset="0"/>
+                <a:ea typeface="Microsoft JhengHei UI Light" panose="020B0304030504040204" pitchFamily="34" charset="-120"/>
+                <a:cs typeface="Times New Roman" panose="02020603050405020304" pitchFamily="18" charset="0"/>
+              </a:rPr>
+              <a:t>➀</a:t>
+            </a:r>
+          </a:p>
+        </p:txBody>
+      </p:sp>
     </p:spTree>
   </p:cSld>
   <p:clrMapOvr>
